--- a/extras/usd/examples/usdGeospatialBuild/delivery/geospatial-build.pptx
+++ b/extras/usd/examples/usdGeospatialBuild/delivery/geospatial-build.pptx
@@ -2,19 +2,20 @@
 <file path=ppt/presentation.xml><?xml version="1.0" encoding="utf-8"?>
 <p:presentation xmlns:p="http://schemas.openxmlformats.org/presentationml/2006/main">
   <p:sldMasterIdLst>
-    <p:sldMasterId xmlns:r="http://schemas.openxmlformats.org/officeDocument/2006/relationships" id="2147483648" r:id="R374a686ab3f6484f"/>
+    <p:sldMasterId xmlns:r="http://schemas.openxmlformats.org/officeDocument/2006/relationships" id="2147483648" r:id="R1dd0eece0c7846f5"/>
   </p:sldMasterIdLst>
   <p:notesMasterIdLst>
-    <p:notesMasterId xmlns:r="http://schemas.openxmlformats.org/officeDocument/2006/relationships" r:id="R3c6f9a83280b4010"/>
+    <p:notesMasterId xmlns:r="http://schemas.openxmlformats.org/officeDocument/2006/relationships" r:id="Rd0787b643d004cc3"/>
   </p:notesMasterIdLst>
   <p:sldIdLst>
-    <p:sldId xmlns:r="http://schemas.openxmlformats.org/officeDocument/2006/relationships" id="256" r:id="Re1c6b91bfb8d42f8"/>
-    <p:sldId xmlns:r="http://schemas.openxmlformats.org/officeDocument/2006/relationships" id="257" r:id="Ra90f0a9776e04aff"/>
-    <p:sldId xmlns:r="http://schemas.openxmlformats.org/officeDocument/2006/relationships" id="258" r:id="R9fa60c1bfca74975"/>
-    <p:sldId xmlns:r="http://schemas.openxmlformats.org/officeDocument/2006/relationships" id="259" r:id="R215546a52d794851"/>
-    <p:sldId xmlns:r="http://schemas.openxmlformats.org/officeDocument/2006/relationships" id="260" r:id="R93948567140a4148"/>
-    <p:sldId xmlns:r="http://schemas.openxmlformats.org/officeDocument/2006/relationships" id="261" r:id="R483b6ec18ff14184"/>
-    <p:sldId xmlns:r="http://schemas.openxmlformats.org/officeDocument/2006/relationships" id="262" r:id="R0ff847ac94234e1c"/>
+    <p:sldId xmlns:r="http://schemas.openxmlformats.org/officeDocument/2006/relationships" id="256" r:id="Rc6f66e6d36054b89"/>
+    <p:sldId xmlns:r="http://schemas.openxmlformats.org/officeDocument/2006/relationships" id="257" r:id="R22c475efa875491e"/>
+    <p:sldId xmlns:r="http://schemas.openxmlformats.org/officeDocument/2006/relationships" id="258" r:id="Rd7ec1ece282f4808"/>
+    <p:sldId xmlns:r="http://schemas.openxmlformats.org/officeDocument/2006/relationships" id="259" r:id="R8cd7d225c56e4713"/>
+    <p:sldId xmlns:r="http://schemas.openxmlformats.org/officeDocument/2006/relationships" id="260" r:id="R39f2e07d80964dea"/>
+    <p:sldId xmlns:r="http://schemas.openxmlformats.org/officeDocument/2006/relationships" id="261" r:id="R86354ad13d81458d"/>
+    <p:sldId xmlns:r="http://schemas.openxmlformats.org/officeDocument/2006/relationships" id="262" r:id="Rc1e0844b6d9747e1"/>
+    <p:sldId xmlns:r="http://schemas.openxmlformats.org/officeDocument/2006/relationships" id="263" r:id="R38a2cf3ef80c4f43"/>
   </p:sldIdLst>
   <p:sldSz cx="12192000" cy="6858000"/>
   <p:notesSz cx="6858000" cy="9144000"/>
@@ -448,22 +449,22 @@
           <a:lstStyle xmlns:a="http://schemas.openxmlformats.org/drawingml/2006/main"/>
           <a:p xmlns:a="http://schemas.openxmlformats.org/drawingml/2006/main">
             <a:r>
-              <a:t>Derived from README.md section: Opening</a:t>
-            </a:r>
-          </a:p>
-          <a:p xmlns:a="http://schemas.openxmlformats.org/drawingml/2006/main">
-            <a:r>
-              <a:t>README SHA-256: 8f0794252dfaf20987e91d9105eea3c27c08d53a39966ee10e3e6661351c9104</a:t>
-            </a:r>
-          </a:p>
-          <a:p xmlns:a="http://schemas.openxmlformats.org/drawingml/2006/main">
-            <a:r>
-              <a:t>Execution receipt SHA-256: 3c05a1c04f708c147e0167cb7cc1f5ddfbf7eced6d0ceaaa6fef82d670dacbc7</a:t>
-            </a:r>
-          </a:p>
-          <a:p xmlns:a="http://schemas.openxmlformats.org/drawingml/2006/main">
-            <a:r>
-              <a:t>Executed source commit: d1746ce725999e2a472df6c6dee13a804ff732e2</a:t>
+              <a:t>README section: Opening</a:t>
+            </a:r>
+          </a:p>
+          <a:p xmlns:a="http://schemas.openxmlformats.org/drawingml/2006/main">
+            <a:r>
+              <a:t>README SHA-256: a6550b6c7f648584c331248ac1f10e122034e919e9e160ea2c58fc571e2ae9b5</a:t>
+            </a:r>
+          </a:p>
+          <a:p xmlns:a="http://schemas.openxmlformats.org/drawingml/2006/main">
+            <a:r>
+              <a:t>Execution receipt SHA-256: 0bd771677c2dccde1727cb9e53d93fcbb3e4b8b0cd3a99fc963f40e2b32dea7a</a:t>
+            </a:r>
+          </a:p>
+          <a:p xmlns:a="http://schemas.openxmlformats.org/drawingml/2006/main">
+            <a:r>
+              <a:t>Executed source: 6d8323764ad44953887cac9781375b7c7176e928</a:t>
             </a:r>
           </a:p>
           <a:p xmlns:a="http://schemas.openxmlformats.org/drawingml/2006/main">
@@ -473,7 +474,7 @@
           </a:p>
           <a:p xmlns:a="http://schemas.openxmlformats.org/drawingml/2006/main">
             <a:r>
-              <a:t>The current shared proposal still needs exact authored definitions before a full placement build can follow it without guessing. This run stops dependent placement and executes the defined CRS discovery and composition behavior in three independent readers.</a:t>
+              <a:t>Four contracts still block complete model placement. The local candidate supplies concrete answers for five former gaps.</a:t>
             </a:r>
           </a:p>
           <a:p xmlns:a="http://schemas.openxmlformats.org/drawingml/2006/main">
@@ -483,7 +484,7 @@
           </a:p>
           <a:p xmlns:a="http://schemas.openxmlformats.org/drawingml/2006/main">
             <a:r>
-              <a:t>The editorial revision closes obsolete interface and transform-authoring contradictions. The remaining audit identifies eight narrower missing contracts and one existing 3D-versus-2D example inconsistency. It does not reopen agreed functional outcomes or treat internal implementation methods as standardized data.</a:t>
+              <a:t>64 tests passed. 37 cases and 168 queries per reader, with source data unchanged.</a:t>
             </a:r>
           </a:p>
           <a:p xmlns:a="http://schemas.openxmlformats.org/drawingml/2006/main">
@@ -493,7 +494,17 @@
           </a:p>
           <a:p xmlns:a="http://schemas.openxmlformats.org/drawingml/2006/main">
             <a:r>
-              <a:t>Fresh evidence: 15 tests passed. Each reader passed 12 cases and 19 queries, giving 57 reader/query checks. Source layers and fixture bytes remained unchanged. This run executed zero projection or placement jobs and produced no resolved export.</a:t>
+              <a:t>Headless OpenUSD, native OpenUSD and live OV resolve direct anchor origins. Full model placement remains stopped.</a:t>
+            </a:r>
+          </a:p>
+          <a:p xmlns:a="http://schemas.openxmlformats.org/drawingml/2006/main">
+            <a:r>
+              <a:t/>
+            </a:r>
+          </a:p>
+          <a:p xmlns:a="http://schemas.openxmlformats.org/drawingml/2006/main">
+            <a:r>
+              <a:t>Candidate choices are under review. Partial controls do not certify full placement or geodetic accuracy.</a:t>
             </a:r>
           </a:p>
         </p:txBody>
@@ -563,22 +574,22 @@
           <a:lstStyle xmlns:a="http://schemas.openxmlformats.org/drawingml/2006/main"/>
           <a:p xmlns:a="http://schemas.openxmlformats.org/drawingml/2006/main">
             <a:r>
-              <a:t>Derived from README.md section: What is already settled</a:t>
-            </a:r>
-          </a:p>
-          <a:p xmlns:a="http://schemas.openxmlformats.org/drawingml/2006/main">
-            <a:r>
-              <a:t>README SHA-256: 8f0794252dfaf20987e91d9105eea3c27c08d53a39966ee10e3e6661351c9104</a:t>
-            </a:r>
-          </a:p>
-          <a:p xmlns:a="http://schemas.openxmlformats.org/drawingml/2006/main">
-            <a:r>
-              <a:t>Execution receipt SHA-256: 3c05a1c04f708c147e0167cb7cc1f5ddfbf7eced6d0ceaaa6fef82d670dacbc7</a:t>
-            </a:r>
-          </a:p>
-          <a:p xmlns:a="http://schemas.openxmlformats.org/drawingml/2006/main">
-            <a:r>
-              <a:t>Executed source commit: d1746ce725999e2a472df6c6dee13a804ff732e2</a:t>
+              <a:t>README section: Concrete candidate answers</a:t>
+            </a:r>
+          </a:p>
+          <a:p xmlns:a="http://schemas.openxmlformats.org/drawingml/2006/main">
+            <a:r>
+              <a:t>README SHA-256: a6550b6c7f648584c331248ac1f10e122034e919e9e160ea2c58fc571e2ae9b5</a:t>
+            </a:r>
+          </a:p>
+          <a:p xmlns:a="http://schemas.openxmlformats.org/drawingml/2006/main">
+            <a:r>
+              <a:t>Execution receipt SHA-256: 0bd771677c2dccde1727cb9e53d93fcbb3e4b8b0cd3a99fc963f40e2b32dea7a</a:t>
+            </a:r>
+          </a:p>
+          <a:p xmlns:a="http://schemas.openxmlformats.org/drawingml/2006/main">
+            <a:r>
+              <a:t>Executed source: 6d8323764ad44953887cac9781375b7c7176e928</a:t>
             </a:r>
           </a:p>
           <a:p xmlns:a="http://schemas.openxmlformats.org/drawingml/2006/main">
@@ -588,7 +599,17 @@
           </a:p>
           <a:p xmlns:a="http://schemas.openxmlformats.org/drawingml/2006/main">
             <a:r>
-              <a:t>Geographic source positions and geographic coordinate queries are supported. Site calibration lives in a derived CRS definition. Engines select applicable operations, manage resources and report operation accuracy or visible failure. Explicit export preserves values, associations and sampling meaning. Coordinate epochs remain roadmap work.</a:t>
+              <a:t>Reference-based binding, ordinary transforms after CRS placement, source preservation and writer-authored unit/up-axis conformance retain their existing direction. Coordinate epochs remain roadmap work. No private epoch, coordinate-role relationship or dependency flag is introduced.</a:t>
+            </a:r>
+          </a:p>
+          <a:p xmlns:a="http://schemas.openxmlformats.org/drawingml/2006/main">
+            <a:r>
+              <a:t/>
+            </a:r>
+          </a:p>
+          <a:p xmlns:a="http://schemas.openxmlformats.org/drawingml/2006/main">
+            <a:r>
+              <a:t>Candidate choices are under review. Partial controls do not certify full placement or geodetic accuracy.</a:t>
             </a:r>
           </a:p>
         </p:txBody>
@@ -658,22 +679,22 @@
           <a:lstStyle xmlns:a="http://schemas.openxmlformats.org/drawingml/2006/main"/>
           <a:p xmlns:a="http://schemas.openxmlformats.org/drawingml/2006/main">
             <a:r>
-              <a:t>Derived from README.md section: Missing authored representation</a:t>
-            </a:r>
-          </a:p>
-          <a:p xmlns:a="http://schemas.openxmlformats.org/drawingml/2006/main">
-            <a:r>
-              <a:t>README SHA-256: 8f0794252dfaf20987e91d9105eea3c27c08d53a39966ee10e3e6661351c9104</a:t>
-            </a:r>
-          </a:p>
-          <a:p xmlns:a="http://schemas.openxmlformats.org/drawingml/2006/main">
-            <a:r>
-              <a:t>Execution receipt SHA-256: 3c05a1c04f708c147e0167cb7cc1f5ddfbf7eced6d0ceaaa6fef82d670dacbc7</a:t>
-            </a:r>
-          </a:p>
-          <a:p xmlns:a="http://schemas.openxmlformats.org/drawingml/2006/main">
-            <a:r>
-              <a:t>Executed source commit: d1746ce725999e2a472df6c6dee13a804ff732e2</a:t>
+              <a:t>README section: Four contracts still required</a:t>
+            </a:r>
+          </a:p>
+          <a:p xmlns:a="http://schemas.openxmlformats.org/drawingml/2006/main">
+            <a:r>
+              <a:t>README SHA-256: a6550b6c7f648584c331248ac1f10e122034e919e9e160ea2c58fc571e2ae9b5</a:t>
+            </a:r>
+          </a:p>
+          <a:p xmlns:a="http://schemas.openxmlformats.org/drawingml/2006/main">
+            <a:r>
+              <a:t>Execution receipt SHA-256: 0bd771677c2dccde1727cb9e53d93fcbb3e4b8b0cd3a99fc963f40e2b32dea7a</a:t>
+            </a:r>
+          </a:p>
+          <a:p xmlns:a="http://schemas.openxmlformats.org/drawingml/2006/main">
+            <a:r>
+              <a:t>Executed source: 6d8323764ad44953887cac9781375b7c7176e928</a:t>
             </a:r>
           </a:p>
           <a:p xmlns:a="http://schemas.openxmlformats.org/drawingml/2006/main">
@@ -683,7 +704,17 @@
           </a:p>
           <a:p xmlns:a="http://schemas.openxmlformats.org/drawingml/2006/main">
             <a:r>
-              <a:t>Questions 2, 10, 11, 12 and 14 retain the specific representation work. The dimensionality inconsistency is existing proposal text, not a new restriction invented by this run. The fixtures use complete 3D definitions copied unchanged from the proposal.</a:t>
+              <a:t>Question 9 separately concerns geographic scene geometry, frames and bounds. Geographic coordinate queries already belong to initial scope. The candidate closes former field-definition, lexical-normalization, result-comparison, sampling-record and 2D-illustration gaps for this derivation. Adoption review is separate from derivability.</a:t>
+            </a:r>
+          </a:p>
+          <a:p xmlns:a="http://schemas.openxmlformats.org/drawingml/2006/main">
+            <a:r>
+              <a:t/>
+            </a:r>
+          </a:p>
+          <a:p xmlns:a="http://schemas.openxmlformats.org/drawingml/2006/main">
+            <a:r>
+              <a:t>Candidate choices are under review. Partial controls do not certify full placement or geodetic accuracy.</a:t>
             </a:r>
           </a:p>
         </p:txBody>
@@ -753,22 +784,22 @@
           <a:lstStyle xmlns:a="http://schemas.openxmlformats.org/drawingml/2006/main"/>
           <a:p xmlns:a="http://schemas.openxmlformats.org/drawingml/2006/main">
             <a:r>
-              <a:t>Derived from README.md section: Missing observable definitions</a:t>
-            </a:r>
-          </a:p>
-          <a:p xmlns:a="http://schemas.openxmlformats.org/drawingml/2006/main">
-            <a:r>
-              <a:t>README SHA-256: 8f0794252dfaf20987e91d9105eea3c27c08d53a39966ee10e3e6661351c9104</a:t>
-            </a:r>
-          </a:p>
-          <a:p xmlns:a="http://schemas.openxmlformats.org/drawingml/2006/main">
-            <a:r>
-              <a:t>Execution receipt SHA-256: 3c05a1c04f708c147e0167cb7cc1f5ddfbf7eced6d0ceaaa6fef82d670dacbc7</a:t>
-            </a:r>
-          </a:p>
-          <a:p xmlns:a="http://schemas.openxmlformats.org/drawingml/2006/main">
-            <a:r>
-              <a:t>Executed source commit: d1746ce725999e2a472df6c6dee13a804ff732e2</a:t>
+              <a:t>README section: WKT string normalization evidence</a:t>
+            </a:r>
+          </a:p>
+          <a:p xmlns:a="http://schemas.openxmlformats.org/drawingml/2006/main">
+            <a:r>
+              <a:t>README SHA-256: a6550b6c7f648584c331248ac1f10e122034e919e9e160ea2c58fc571e2ae9b5</a:t>
+            </a:r>
+          </a:p>
+          <a:p xmlns:a="http://schemas.openxmlformats.org/drawingml/2006/main">
+            <a:r>
+              <a:t>Execution receipt SHA-256: 0bd771677c2dccde1727cb9e53d93fcbb3e4b8b0cd3a99fc963f40e2b32dea7a</a:t>
+            </a:r>
+          </a:p>
+          <a:p xmlns:a="http://schemas.openxmlformats.org/drawingml/2006/main">
+            <a:r>
+              <a:t>Executed source: 6d8323764ad44953887cac9781375b7c7176e928</a:t>
             </a:r>
           </a:p>
           <a:p xmlns:a="http://schemas.openxmlformats.org/drawingml/2006/main">
@@ -778,7 +809,27 @@
           </a:p>
           <a:p xmlns:a="http://schemas.openxmlformats.org/drawingml/2006/main">
             <a:r>
-              <a:t>Operation accuracy, numerical agreement and approximation over an extent are different claims. A full placement-chain accuracy estimate is not a requirement-28 obligation. Internal differentiation, caching or adapter design is implementation freedom. Missing consumer tests are verification work, not new design questions.</a:t>
+              <a:t>The 24 WKT tests use hand-specified lexical expectations. Padding, keyword case, preferred aliases, delimiters and exponent spelling converge. Quoted spaces, escaped quotes, metadata and frame epochs survive. The decimal **6378137.12345678912345** survives exactly. A PROJ writer round trip is a negative preservation control because it rounds that value.</a:t>
+            </a:r>
+          </a:p>
+          <a:p xmlns:a="http://schemas.openxmlformats.org/drawingml/2006/main">
+            <a:r>
+              <a:t/>
+            </a:r>
+          </a:p>
+          <a:p xmlns:a="http://schemas.openxmlformats.org/drawingml/2006/main">
+            <a:r>
+              <a:t>Different CRS names remain different tokens even when an engine establishes equivalent coordinate meaning. Fixed-point validation rejects non-normalized authored text. Coordinate-epoch wrappers and unknown syntax fail explicitly. Context-dependent legacy UNIT aliases are unsupported, and one strict parser is not proof of all OGC grammar coverage. Normalization and complete scene validation are separate claims.</a:t>
+            </a:r>
+          </a:p>
+          <a:p xmlns:a="http://schemas.openxmlformats.org/drawingml/2006/main">
+            <a:r>
+              <a:t/>
+            </a:r>
+          </a:p>
+          <a:p xmlns:a="http://schemas.openxmlformats.org/drawingml/2006/main">
+            <a:r>
+              <a:t>Candidate choices are under review. Partial controls do not certify full placement or geodetic accuracy.</a:t>
             </a:r>
           </a:p>
         </p:txBody>
@@ -848,22 +899,22 @@
           <a:lstStyle xmlns:a="http://schemas.openxmlformats.org/drawingml/2006/main"/>
           <a:p xmlns:a="http://schemas.openxmlformats.org/drawingml/2006/main">
             <a:r>
-              <a:t>Derived from README.md section: A concrete composition result</a:t>
-            </a:r>
-          </a:p>
-          <a:p xmlns:a="http://schemas.openxmlformats.org/drawingml/2006/main">
-            <a:r>
-              <a:t>README SHA-256: 8f0794252dfaf20987e91d9105eea3c27c08d53a39966ee10e3e6661351c9104</a:t>
-            </a:r>
-          </a:p>
-          <a:p xmlns:a="http://schemas.openxmlformats.org/drawingml/2006/main">
-            <a:r>
-              <a:t>Execution receipt SHA-256: 3c05a1c04f708c147e0167cb7cc1f5ddfbf7eced6d0ceaaa6fef82d670dacbc7</a:t>
-            </a:r>
-          </a:p>
-          <a:p xmlns:a="http://schemas.openxmlformats.org/drawingml/2006/main">
-            <a:r>
-              <a:t>Executed source commit: d1746ce725999e2a472df6c6dee13a804ff732e2</a:t>
+              <a:t>README section: Executed reader coverage</a:t>
+            </a:r>
+          </a:p>
+          <a:p xmlns:a="http://schemas.openxmlformats.org/drawingml/2006/main">
+            <a:r>
+              <a:t>README SHA-256: a6550b6c7f648584c331248ac1f10e122034e919e9e160ea2c58fc571e2ae9b5</a:t>
+            </a:r>
+          </a:p>
+          <a:p xmlns:a="http://schemas.openxmlformats.org/drawingml/2006/main">
+            <a:r>
+              <a:t>Execution receipt SHA-256: 0bd771677c2dccde1727cb9e53d93fcbb3e4b8b0cd3a99fc963f40e2b32dea7a</a:t>
+            </a:r>
+          </a:p>
+          <a:p xmlns:a="http://schemas.openxmlformats.org/drawingml/2006/main">
+            <a:r>
+              <a:t>Executed source: 6d8323764ad44953887cac9781375b7c7176e928</a:t>
             </a:r>
           </a:p>
           <a:p xmlns:a="http://schemas.openxmlformats.org/drawingml/2006/main">
@@ -873,7 +924,37 @@
           </a:p>
           <a:p xmlns:a="http://schemas.openxmlformats.org/drawingml/2006/main">
             <a:r>
-              <a:t>The independent descendant keeps its own source CRS when the scene is referenced into an assembly. An unmarked WKT property does not establish a new binding. A stronger layer can override the enclosing composed definition without changing the independent child. Equivalent composed data keeps this interpretation after ordinary flattening. This is CRS discovery, not computed geospatial placement or resolved export.</a:t>
+              <a:t>Composition controls cover references, stronger layers, variants, class inheritance, equivalent composed data, independent binding and unavailable unloaded content. Source controls cover requiredness, blocks, types, variability, finite values, singular signed scale, defaults, held/linear interpolation and quaternion slerp. Longitude 179 to -179 interpolates to zero without invented unwrapping.</a:t>
+            </a:r>
+          </a:p>
+          <a:p xmlns:a="http://schemas.openxmlformats.org/drawingml/2006/main">
+            <a:r>
+              <a:t/>
+            </a:r>
+          </a:p>
+          <a:p xmlns:a="http://schemas.openxmlformats.org/drawingml/2006/main">
+            <a:r>
+              <a:t>Origin controls accept only directly bound top-level anchors without ordinary adjustments or geometry offsets. They cover France projections, Colorado site calibration, source-first geographic-to-ECEF conversion and defaultPrim output selection. Nested/descendant frame requests and ordinary adjustments stop while dependent model contracts are missing. Invalid latitude and absent default output fail without a substitute.</a:t>
+            </a:r>
+          </a:p>
+          <a:p xmlns:a="http://schemas.openxmlformats.org/drawingml/2006/main">
+            <a:r>
+              <a:t/>
+            </a:r>
+          </a:p>
+          <a:p xmlns:a="http://schemas.openxmlformats.org/drawingml/2006/main">
+            <a:r>
+              <a:t>Provider CSVs are PROJ-generated intake/rounding references, not survey truth. All readers use PROJ: native 9.4.1, headless and OV 9.8.1. Matching pipeline tokens are checked before comparing these results. Cases meet a predeclared 2 mm reference distance; analytic equatorial ECEF cases meet a separate 20 nm computational allowance. Neither threshold is geodetic accuracy. The geographic identity query is checked component-for-component in its declared units, without an angle-as-length metric.</a:t>
+            </a:r>
+          </a:p>
+          <a:p xmlns:a="http://schemas.openxmlformats.org/drawingml/2006/main">
+            <a:r>
+              <a:t/>
+            </a:r>
+          </a:p>
+          <a:p xmlns:a="http://schemas.openxmlformats.org/drawingml/2006/main">
+            <a:r>
+              <a:t>Candidate choices are under review. Partial controls do not certify full placement or geodetic accuracy.</a:t>
             </a:r>
           </a:p>
         </p:txBody>
@@ -943,22 +1024,22 @@
           <a:lstStyle xmlns:a="http://schemas.openxmlformats.org/drawingml/2006/main"/>
           <a:p xmlns:a="http://schemas.openxmlformats.org/drawingml/2006/main">
             <a:r>
-              <a:t>Derived from README.md section: What this run executed</a:t>
-            </a:r>
-          </a:p>
-          <a:p xmlns:a="http://schemas.openxmlformats.org/drawingml/2006/main">
-            <a:r>
-              <a:t>README SHA-256: 8f0794252dfaf20987e91d9105eea3c27c08d53a39966ee10e3e6661351c9104</a:t>
-            </a:r>
-          </a:p>
-          <a:p xmlns:a="http://schemas.openxmlformats.org/drawingml/2006/main">
-            <a:r>
-              <a:t>Execution receipt SHA-256: 3c05a1c04f708c147e0167cb7cc1f5ddfbf7eced6d0ceaaa6fef82d670dacbc7</a:t>
-            </a:r>
-          </a:p>
-          <a:p xmlns:a="http://schemas.openxmlformats.org/drawingml/2006/main">
-            <a:r>
-              <a:t>Executed source commit: d1746ce725999e2a472df6c6dee13a804ff732e2</a:t>
+              <a:t>README section: Same France origin in each runtime</a:t>
+            </a:r>
+          </a:p>
+          <a:p xmlns:a="http://schemas.openxmlformats.org/drawingml/2006/main">
+            <a:r>
+              <a:t>README SHA-256: a6550b6c7f648584c331248ac1f10e122034e919e9e160ea2c58fc571e2ae9b5</a:t>
+            </a:r>
+          </a:p>
+          <a:p xmlns:a="http://schemas.openxmlformats.org/drawingml/2006/main">
+            <a:r>
+              <a:t>Execution receipt SHA-256: 0bd771677c2dccde1727cb9e53d93fcbb3e4b8b0cd3a99fc963f40e2b32dea7a</a:t>
+            </a:r>
+          </a:p>
+          <a:p xmlns:a="http://schemas.openxmlformats.org/drawingml/2006/main">
+            <a:r>
+              <a:t>Executed source: 6d8323764ad44953887cac9781375b7c7176e928</a:t>
             </a:r>
           </a:p>
           <a:p xmlns:a="http://schemas.openxmlformats.org/drawingml/2006/main">
@@ -968,7 +1049,7 @@
           </a:p>
           <a:p xmlns:a="http://schemas.openxmlformats.org/drawingml/2006/main">
             <a:r>
-              <a:t>Headless OpenUSD, independently written native C++ OpenUSD and a live OV stage each match authored expectations. The readers do not import one another's discovery function. Native discovery does not exercise Hydra placement. Live OV discovery does not ingest resolved geometry. The 15 tests also check the readiness gate, fixture field ownership and the previous resolver's incompatibility.</a:t>
+              <a:t>France point 0 serves as an illustrative model-anchor origin. Source: RGF93 v2b / CC49 with NGF-IGN69 height. Output: Lambert-93 with the same height reference. Every displayed component is in metres.</a:t>
             </a:r>
           </a:p>
           <a:p xmlns:a="http://schemas.openxmlformats.org/drawingml/2006/main">
@@ -978,7 +1059,17 @@
           </a:p>
           <a:p xmlns:a="http://schemas.openxmlformats.org/drawingml/2006/main">
             <a:r>
-              <a:t>Partial checks reject absent binding, a broken nearest binding, wrong WKT type or variability and an empty definition. A broken nearest binding cannot fall back to an enclosing CRS. Available enclosing scope remains readable with a payload unloaded; content absent from that payload fails. These checks do not certify WKT normalization, the dependency declaration or whole-asset conformance.</a:t>
+              <a:t>All 59 origins are checked in both directions. Source values and definitions remain unchanged. This resolves coordinates only and supplies no measurement-coordinate carrier or Hydra/OV geometry ingestion. Unchanged height in this pair does not test a vertical-datum conversion.</a:t>
+            </a:r>
+          </a:p>
+          <a:p xmlns:a="http://schemas.openxmlformats.org/drawingml/2006/main">
+            <a:r>
+              <a:t/>
+            </a:r>
+          </a:p>
+          <a:p xmlns:a="http://schemas.openxmlformats.org/drawingml/2006/main">
+            <a:r>
+              <a:t>Candidate choices are under review. Partial controls do not certify full placement or geodetic accuracy.</a:t>
             </a:r>
           </a:p>
         </p:txBody>
@@ -1048,22 +1139,22 @@
           <a:lstStyle xmlns:a="http://schemas.openxmlformats.org/drawingml/2006/main"/>
           <a:p xmlns:a="http://schemas.openxmlformats.org/drawingml/2006/main">
             <a:r>
-              <a:t>Derived from README.md section: Why earlier passing tests were insufficient</a:t>
-            </a:r>
-          </a:p>
-          <a:p xmlns:a="http://schemas.openxmlformats.org/drawingml/2006/main">
-            <a:r>
-              <a:t>README SHA-256: 8f0794252dfaf20987e91d9105eea3c27c08d53a39966ee10e3e6661351c9104</a:t>
-            </a:r>
-          </a:p>
-          <a:p xmlns:a="http://schemas.openxmlformats.org/drawingml/2006/main">
-            <a:r>
-              <a:t>Execution receipt SHA-256: 3c05a1c04f708c147e0167cb7cc1f5ddfbf7eced6d0ceaaa6fef82d670dacbc7</a:t>
-            </a:r>
-          </a:p>
-          <a:p xmlns:a="http://schemas.openxmlformats.org/drawingml/2006/main">
-            <a:r>
-              <a:t>Executed source commit: d1746ce725999e2a472df6c6dee13a804ff732e2</a:t>
+              <a:t>README section: Source interpolation and the sampling record</a:t>
+            </a:r>
+          </a:p>
+          <a:p xmlns:a="http://schemas.openxmlformats.org/drawingml/2006/main">
+            <a:r>
+              <a:t>README SHA-256: a6550b6c7f648584c331248ac1f10e122034e919e9e160ea2c58fc571e2ae9b5</a:t>
+            </a:r>
+          </a:p>
+          <a:p xmlns:a="http://schemas.openxmlformats.org/drawingml/2006/main">
+            <a:r>
+              <a:t>Execution receipt SHA-256: 0bd771677c2dccde1727cb9e53d93fcbb3e4b8b0cd3a99fc963f40e2b32dea7a</a:t>
+            </a:r>
+          </a:p>
+          <a:p xmlns:a="http://schemas.openxmlformats.org/drawingml/2006/main">
+            <a:r>
+              <a:t>Executed source: 6d8323764ad44953887cac9781375b7c7176e928</a:t>
             </a:r>
           </a:p>
           <a:p xmlns:a="http://schemas.openxmlformats.org/drawingml/2006/main">
@@ -1073,7 +1164,7 @@
           </a:p>
           <a:p xmlns:a="http://schemas.openxmlformats.org/drawingml/2006/main">
             <a:r>
-              <a:t>The earlier freeze pinned private experimental answers, then tested code against those answers. A requirements-only intake excluded contradictory design text. Execution results became the headline despite known specification dependencies.</a:t>
+              <a:t>A WGS84 anchor moves from longitude -1 degree to +1 degree on the equator at zero height. At time 5, Core linear source interpolation yields longitude zero before ECEF conversion. Each reader returns X = 6378137 m, Y = 0 m, Z = 0 m.</a:t>
             </a:r>
           </a:p>
           <a:p xmlns:a="http://schemas.openxmlformats.org/drawingml/2006/main">
@@ -1083,7 +1174,7 @@
           </a:p>
           <a:p xmlns:a="http://schemas.openxmlformats.org/drawingml/2006/main">
             <a:r>
-              <a:t>The prior relationship-based placement reader fails a reference-binding fixture from the shared proposal. This run exposes that mismatch and excludes the old placement candidate. Passing tests cannot substitute a private model for the shared data contract.</a:t>
+              <a:t>Interpolating only the converted endpoints instead puts the midpoint **971.421158 m** away. A standalone USD coordinate record writes sample keys 0, 5 and 10 with explicit timeCodesPerSecond = 48; a fresh reader verifies both. This is a sampling-record control, not a resolved-scene export or a guarantee between export samples.</a:t>
             </a:r>
           </a:p>
           <a:p xmlns:a="http://schemas.openxmlformats.org/drawingml/2006/main">
@@ -1093,7 +1184,122 @@
           </a:p>
           <a:p xmlns:a="http://schemas.openxmlformats.org/drawingml/2006/main">
             <a:r>
-              <a:t>The default gate now stops dependent execution. It still finishes independently specified checks and delivers their receipt. No previous render, projected coordinate, export or test count is presented as evidence from this run. The remaining blockers are the named proposal contracts, not deferred mechanical work.</a:t>
+              <a:t>Candidate choices are under review. Partial controls do not certify full placement or geodetic accuracy.</a:t>
+            </a:r>
+          </a:p>
+        </p:txBody>
+      </p:sp>
+      <p:sp>
+        <p:nvSpPr>
+          <p:cNvPr id="4" name="Slide Number Placeholder 3"/>
+          <p:cNvSpPr>
+            <a:spLocks xmlns:a="http://schemas.openxmlformats.org/drawingml/2006/main" noGrp="1"/>
+          </p:cNvSpPr>
+          <p:nvPr>
+            <p:ph type="sldNum" idx="5"/>
+          </p:nvPr>
+        </p:nvSpPr>
+        <p:spPr/>
+        <p:txBody>
+          <a:bodyPr xmlns:a="http://schemas.openxmlformats.org/drawingml/2006/main"/>
+          <a:lstStyle xmlns:a="http://schemas.openxmlformats.org/drawingml/2006/main"/>
+          <a:p xmlns:a="http://schemas.openxmlformats.org/drawingml/2006/main"/>
+        </p:txBody>
+      </p:sp>
+    </p:spTree>
+  </p:cSld>
+  <p:clrMapOvr>
+    <a:masterClrMapping xmlns:a="http://schemas.openxmlformats.org/drawingml/2006/main"/>
+  </p:clrMapOvr>
+</p:notes>
+</file>
+
+<file path=ppt/notesSlides/notesSlide8.xml><?xml version="1.0" encoding="utf-8"?>
+<p:notes xmlns:p="http://schemas.openxmlformats.org/presentationml/2006/main">
+  <p:cSld>
+    <p:spTree>
+      <p:nvGrpSpPr>
+        <p:cNvPr id="1" name=""/>
+        <p:cNvGrpSpPr/>
+        <p:nvPr/>
+      </p:nvGrpSpPr>
+      <p:grpSpPr>
+        <a:xfrm xmlns:a="http://schemas.openxmlformats.org/drawingml/2006/main"/>
+      </p:grpSpPr>
+      <p:sp>
+        <p:nvSpPr>
+          <p:cNvPr id="2" name="Slide Image Placeholder 1"/>
+          <p:cNvSpPr>
+            <a:spLocks xmlns:a="http://schemas.openxmlformats.org/drawingml/2006/main" noGrp="1"/>
+          </p:cNvSpPr>
+          <p:nvPr>
+            <p:ph type="sldImg" idx="0"/>
+          </p:nvPr>
+        </p:nvSpPr>
+        <p:spPr/>
+      </p:sp>
+      <p:sp>
+        <p:nvSpPr>
+          <p:cNvPr id="3" name="Notes Placeholder 2"/>
+          <p:cNvSpPr>
+            <a:spLocks xmlns:a="http://schemas.openxmlformats.org/drawingml/2006/main" noGrp="1"/>
+          </p:cNvSpPr>
+          <p:nvPr>
+            <p:ph type="body" idx="1"/>
+          </p:nvPr>
+        </p:nvSpPr>
+        <p:spPr/>
+        <p:txBody>
+          <a:bodyPr xmlns:a="http://schemas.openxmlformats.org/drawingml/2006/main"/>
+          <a:lstStyle xmlns:a="http://schemas.openxmlformats.org/drawingml/2006/main"/>
+          <a:p xmlns:a="http://schemas.openxmlformats.org/drawingml/2006/main">
+            <a:r>
+              <a:t>README section: Postimplementation audit and delivery boundary</a:t>
+            </a:r>
+          </a:p>
+          <a:p xmlns:a="http://schemas.openxmlformats.org/drawingml/2006/main">
+            <a:r>
+              <a:t>README SHA-256: a6550b6c7f648584c331248ac1f10e122034e919e9e160ea2c58fc571e2ae9b5</a:t>
+            </a:r>
+          </a:p>
+          <a:p xmlns:a="http://schemas.openxmlformats.org/drawingml/2006/main">
+            <a:r>
+              <a:t>Execution receipt SHA-256: 0bd771677c2dccde1727cb9e53d93fcbb3e4b8b0cd3a99fc963f40e2b32dea7a</a:t>
+            </a:r>
+          </a:p>
+          <a:p xmlns:a="http://schemas.openxmlformats.org/drawingml/2006/main">
+            <a:r>
+              <a:t>Executed source: 6d8323764ad44953887cac9781375b7c7176e928</a:t>
+            </a:r>
+          </a:p>
+          <a:p xmlns:a="http://schemas.openxmlformats.org/drawingml/2006/main">
+            <a:r>
+              <a:t/>
+            </a:r>
+          </a:p>
+          <a:p xmlns:a="http://schemas.openxmlformats.org/drawingml/2006/main">
+            <a:r>
+              <a:t>The audit tightened the partial origin adapter to reject nested/descendant frame requests rather than applying an incomplete model. It also corrected geographic identity reporting to use exact component comparison instead of a length metric. These repairs change consumer support/reporting, add no scene fact and do not amend the proposal to match code. Source fixtures author only crs:wkt and the three candidate placement fields. Resolution rewrites no source xformOps, resetXformStack, definitions, bindings or sampling keys.</a:t>
+            </a:r>
+          </a:p>
+          <a:p xmlns:a="http://schemas.openxmlformats.org/drawingml/2006/main">
+            <a:r>
+              <a:t/>
+            </a:r>
+          </a:p>
+          <a:p xmlns:a="http://schemas.openxmlformats.org/drawingml/2006/main">
+            <a:r>
+              <a:t>Full model frames, project-adjusted placement, geometry and bounds, Hydra/OV resolved geometry, measurement-associated data and conservative resolved-scene export depend on the four missing contracts. These partial tests do not certify near-unit quaternion validation policy or geographic-distance controls. Group adoption and geodetic accuracy remain distinct from passing execution.</a:t>
+            </a:r>
+          </a:p>
+          <a:p xmlns:a="http://schemas.openxmlformats.org/drawingml/2006/main">
+            <a:r>
+              <a:t/>
+            </a:r>
+          </a:p>
+          <a:p xmlns:a="http://schemas.openxmlformats.org/drawingml/2006/main">
+            <a:r>
+              <a:t>Candidate choices are under review. Partial controls do not certify full placement or geodetic accuracy.</a:t>
             </a:r>
           </a:p>
         </p:txBody>
@@ -1161,7 +1367,7 @@
   </p:cSld>
   <p:clrMap bg1="lt1" tx1="dk1" bg2="lt2" tx2="dk2" accent1="accent1" accent2="accent2" accent3="accent3" accent4="accent4" accent5="accent5" accent6="accent6" hlink="hlink" folHlink="folHlink"/>
   <p:sldLayoutIdLst>
-    <p:sldLayoutId xmlns:r="http://schemas.openxmlformats.org/officeDocument/2006/relationships" id="2147483649" r:id="R4fdc1eb2369f4945"/>
+    <p:sldLayoutId xmlns:r="http://schemas.openxmlformats.org/officeDocument/2006/relationships" id="2147483649" r:id="Rcd37ab972c5c4338"/>
   </p:sldLayoutIdLst>
   <p:txStyles>
     <p:titleStyle>
@@ -1712,7 +1918,7 @@
           <p:cNvPr id="5" name="">
             <a:extLst xmlns:a="http://schemas.openxmlformats.org/drawingml/2006/main">
               <a:ext uri="{FF2B5EF4-FFF2-40B4-BE49-F238E27FC236}">
-                <a16:creationId xmlns:a16="http://schemas.microsoft.com/office/drawing/2014/main" id="{9AA75507-E850-4890-B1B6-72ADD8027CDC}"/>
+                <a16:creationId xmlns:a16="http://schemas.microsoft.com/office/drawing/2014/main" id="{D38AC88D-572C-4E6C-86E0-D89B446D12AE}"/>
               </a:ext>
             </a:extLst>
           </p:cNvPr>
@@ -1759,7 +1965,7 @@
                 <a:ea typeface="Arial"/>
                 <a:cs typeface="Arial"/>
               </a:rPr>
-              <a:t>Geospatial: defined CRS binding, blocked placement</a:t>
+              <a:t>Geospatial proposal readiness</a:t>
             </a:r>
           </a:p>
         </p:txBody>
@@ -1769,7 +1975,7 @@
           <p:cNvPr id="2" name="">
             <a:extLst xmlns:a="http://schemas.openxmlformats.org/drawingml/2006/main">
               <a:ext uri="{FF2B5EF4-FFF2-40B4-BE49-F238E27FC236}">
-                <a16:creationId xmlns:a16="http://schemas.microsoft.com/office/drawing/2014/main" id="{5C4A0A41-69AC-4076-92E1-7ED99804212F}"/>
+                <a16:creationId xmlns:a16="http://schemas.microsoft.com/office/drawing/2014/main" id="{D533467E-C677-4F07-A7E7-7EED90D02341}"/>
               </a:ext>
             </a:extLst>
           </p:cNvPr>
@@ -1780,8 +1986,8 @@
         </p:nvSpPr>
         <p:spPr>
           <a:xfrm xmlns:a="http://schemas.openxmlformats.org/drawingml/2006/main">
-            <a:off x="609600" y="1562100"/>
-            <a:ext cx="10972800" cy="1504950"/>
+            <a:off x="609600" y="1676400"/>
+            <a:ext cx="10972800" cy="1600200"/>
           </a:xfrm>
           <a:prstGeom xmlns:a="http://schemas.openxmlformats.org/drawingml/2006/main" prst="rect">
             <a:avLst/>
@@ -1798,7 +2004,7 @@
           <a:lstStyle xmlns:a="http://schemas.openxmlformats.org/drawingml/2006/main"/>
           <a:p xmlns:a="http://schemas.openxmlformats.org/drawingml/2006/main">
             <a:pPr>
-              <a:defRPr sz="2175" b="0">
+              <a:defRPr sz="2850" b="1">
                 <a:solidFill>
                   <a:srgbClr val="233542"/>
                 </a:solidFill>
@@ -1808,7 +2014,7 @@
               </a:defRPr>
             </a:pPr>
             <a:r>
-              <a:rPr sz="2175" b="0">
+              <a:rPr sz="2850" b="1">
                 <a:solidFill>
                   <a:srgbClr val="233542"/>
                 </a:solidFill>
@@ -1816,7 +2022,7 @@
                 <a:ea typeface="Arial"/>
                 <a:cs typeface="Arial"/>
               </a:rPr>
-              <a:t>The current shared proposal still needs exact authored definitions before a full placement build can follow it without guessing. This run stops dependent placement and executes the defined CRS discovery and composition behavior in three independent readers.</a:t>
+              <a:t>Four contracts still block complete model placement. The local candidate supplies concrete answers for five former gaps.</a:t>
             </a:r>
           </a:p>
         </p:txBody>
@@ -1826,7 +2032,7 @@
           <p:cNvPr id="3" name="">
             <a:extLst xmlns:a="http://schemas.openxmlformats.org/drawingml/2006/main">
               <a:ext uri="{FF2B5EF4-FFF2-40B4-BE49-F238E27FC236}">
-                <a16:creationId xmlns:a16="http://schemas.microsoft.com/office/drawing/2014/main" id="{1F14BFC5-62EB-46A2-B3FB-FBCC51CB955C}"/>
+                <a16:creationId xmlns:a16="http://schemas.microsoft.com/office/drawing/2014/main" id="{CF0156A7-D787-4474-93EA-A542BEB4FAAC}"/>
               </a:ext>
             </a:extLst>
           </p:cNvPr>
@@ -1837,8 +2043,8 @@
         </p:nvSpPr>
         <p:spPr>
           <a:xfrm xmlns:a="http://schemas.openxmlformats.org/drawingml/2006/main">
-            <a:off x="609600" y="3181350"/>
-            <a:ext cx="10972800" cy="1695450"/>
+            <a:off x="609600" y="3619500"/>
+            <a:ext cx="10972800" cy="1104900"/>
           </a:xfrm>
           <a:prstGeom xmlns:a="http://schemas.openxmlformats.org/drawingml/2006/main" prst="rect">
             <a:avLst/>
@@ -1855,9 +2061,9 @@
           <a:lstStyle xmlns:a="http://schemas.openxmlformats.org/drawingml/2006/main"/>
           <a:p xmlns:a="http://schemas.openxmlformats.org/drawingml/2006/main">
             <a:pPr>
-              <a:defRPr sz="2175" b="0">
+              <a:defRPr sz="2325" b="0">
                 <a:solidFill>
-                  <a:srgbClr val="233542"/>
+                  <a:srgbClr val="117E89"/>
                 </a:solidFill>
                 <a:latin typeface="Arial"/>
                 <a:ea typeface="Arial"/>
@@ -1865,15 +2071,15 @@
               </a:defRPr>
             </a:pPr>
             <a:r>
-              <a:rPr sz="2175" b="0">
+              <a:rPr sz="2325" b="0">
                 <a:solidFill>
-                  <a:srgbClr val="233542"/>
+                  <a:srgbClr val="117E89"/>
                 </a:solidFill>
                 <a:latin typeface="Arial"/>
                 <a:ea typeface="Arial"/>
                 <a:cs typeface="Arial"/>
               </a:rPr>
-              <a:t>The editorial revision closes obsolete interface and transform-authoring contradictions. The remaining audit identifies eight narrower missing contracts and one existing 3D-versus-2D example inconsistency. It does not reopen agreed functional outcomes or treat internal implementation methods as standardized data.</a:t>
+              <a:t>64 tests passed. 37 cases and 168 queries per reader, with source data unchanged.</a:t>
             </a:r>
           </a:p>
         </p:txBody>
@@ -1883,7 +2089,7 @@
           <p:cNvPr id="4" name="">
             <a:extLst xmlns:a="http://schemas.openxmlformats.org/drawingml/2006/main">
               <a:ext uri="{FF2B5EF4-FFF2-40B4-BE49-F238E27FC236}">
-                <a16:creationId xmlns:a16="http://schemas.microsoft.com/office/drawing/2014/main" id="{D226E867-1AD9-4104-8900-FAAEA496E2D3}"/>
+                <a16:creationId xmlns:a16="http://schemas.microsoft.com/office/drawing/2014/main" id="{E48B182B-B3A5-4F52-A078-F6DD2E4A59CC}"/>
               </a:ext>
             </a:extLst>
           </p:cNvPr>
@@ -1894,8 +2100,8 @@
         </p:nvSpPr>
         <p:spPr>
           <a:xfrm xmlns:a="http://schemas.openxmlformats.org/drawingml/2006/main">
-            <a:off x="609600" y="4991100"/>
-            <a:ext cx="10972800" cy="1409700"/>
+            <a:off x="609600" y="5238750"/>
+            <a:ext cx="10972800" cy="990600"/>
           </a:xfrm>
           <a:prstGeom xmlns:a="http://schemas.openxmlformats.org/drawingml/2006/main" prst="rect">
             <a:avLst/>
@@ -1912,7 +2118,7 @@
           <a:lstStyle xmlns:a="http://schemas.openxmlformats.org/drawingml/2006/main"/>
           <a:p xmlns:a="http://schemas.openxmlformats.org/drawingml/2006/main">
             <a:pPr>
-              <a:defRPr sz="2175" b="0">
+              <a:defRPr sz="2100" b="0">
                 <a:solidFill>
                   <a:srgbClr val="233542"/>
                 </a:solidFill>
@@ -1922,7 +2128,7 @@
               </a:defRPr>
             </a:pPr>
             <a:r>
-              <a:rPr sz="2175" b="0">
+              <a:rPr sz="2100" b="0">
                 <a:solidFill>
                   <a:srgbClr val="233542"/>
                 </a:solidFill>
@@ -1930,7 +2136,7 @@
                 <a:ea typeface="Arial"/>
                 <a:cs typeface="Arial"/>
               </a:rPr>
-              <a:t>Fresh evidence: 15 tests passed. Each reader passed 12 cases and 19 queries, giving 57 reader/query checks. Source layers and fixture bytes remained unchanged. This run executed zero projection or placement jobs and produced no resolved export.</a:t>
+              <a:t>Headless OpenUSD, native OpenUSD and live OV resolve direct anchor origins. Full model placement remains stopped.</a:t>
             </a:r>
           </a:p>
         </p:txBody>
@@ -1938,7 +2144,7 @@
     </p:spTree>
     <p:extLst>
       <p:ext uri="{BB962C8B-B14F-4D97-AF65-F5344CB8AC3E}">
-        <p14:creationId xmlns:p14="http://schemas.microsoft.com/office/powerpoint/2010/main" val="1331678390"/>
+        <p14:creationId xmlns:p14="http://schemas.microsoft.com/office/powerpoint/2010/main" val="1099006725"/>
       </p:ext>
     </p:extLst>
   </p:cSld>
@@ -1966,10 +2172,10 @@
       </p:grpSpPr>
       <p:sp>
         <p:nvSpPr>
-          <p:cNvPr id="4" name="">
+          <p:cNvPr id="3" name="">
             <a:extLst xmlns:a="http://schemas.openxmlformats.org/drawingml/2006/main">
               <a:ext uri="{FF2B5EF4-FFF2-40B4-BE49-F238E27FC236}">
-                <a16:creationId xmlns:a16="http://schemas.microsoft.com/office/drawing/2014/main" id="{77FA3A30-0772-42CF-A15D-26CC5BF7CCEC}"/>
+                <a16:creationId xmlns:a16="http://schemas.microsoft.com/office/drawing/2014/main" id="{EC1F7C91-5F22-4E40-8F34-43D506E7EE5C}"/>
               </a:ext>
             </a:extLst>
           </p:cNvPr>
@@ -2016,39 +2222,39 @@
                 <a:ea typeface="Arial"/>
                 <a:cs typeface="Arial"/>
               </a:rPr>
-              <a:t>What is already settled</a:t>
+              <a:t>Concrete candidate answers</a:t>
             </a:r>
           </a:p>
         </p:txBody>
       </p:sp>
       <p:graphicFrame>
         <p:nvGraphicFramePr>
-          <p:cNvPr id="5" name=""/>
+          <p:cNvPr id="4" name=""/>
           <p:cNvGraphicFramePr/>
           <p:nvPr/>
         </p:nvGraphicFramePr>
         <p:xfrm>
-          <a:off xmlns:a="http://schemas.openxmlformats.org/drawingml/2006/main" x="609600" y="1562100"/>
-          <a:ext xmlns:a="http://schemas.openxmlformats.org/drawingml/2006/main" cx="10972800" cy="4114800"/>
+          <a:off xmlns:a="http://schemas.openxmlformats.org/drawingml/2006/main" x="609600" y="1428750"/>
+          <a:ext xmlns:a="http://schemas.openxmlformats.org/drawingml/2006/main" cx="10972800" cy="4762500"/>
         </p:xfrm>
         <a:graphic xmlns:a="http://schemas.openxmlformats.org/drawingml/2006/main">
           <a:graphicData uri="http://schemas.openxmlformats.org/drawingml/2006/table">
             <a:tbl>
-              <a:tblPr firstRow="1" bandRow="0"/>
+              <a:tblPr/>
               <a:tblGrid>
-                <a:gridCol w="3238500"/>
-                <a:gridCol w="7734300"/>
+                <a:gridCol w="2647950"/>
+                <a:gridCol w="8324850"/>
               </a:tblGrid>
-              <a:tr h="685800">
-                <a:tc>
-                  <a:txBody>
-                    <a:bodyPr>
-                      <a:noAutofit/>
-                    </a:bodyPr>
-                    <a:lstStyle/>
-                    <a:p>
-                      <a:r>
-                        <a:rPr sz="1800" b="1">
+              <a:tr h="793750">
+                <a:tc>
+                  <a:txBody>
+                    <a:bodyPr>
+                      <a:noAutofit/>
+                    </a:bodyPr>
+                    <a:lstStyle/>
+                    <a:p>
+                      <a:r>
+                        <a:rPr sz="1725" b="1">
                           <a:solidFill>
                             <a:srgbClr val="FFFFFF"/>
                           </a:solidFill>
@@ -2056,7 +2262,7 @@
                           <a:ea typeface="Arial"/>
                           <a:cs typeface="Arial"/>
                         </a:rPr>
-                        <a:t>Authored fact or outcome</a:t>
+                        <a:t>Subject</a:t>
                       </a:r>
                     </a:p>
                   </a:txBody>
@@ -2074,7 +2280,7 @@
                     <a:lstStyle/>
                     <a:p>
                       <a:r>
-                        <a:rPr sz="1800" b="1">
+                        <a:rPr sz="1725" b="1">
                           <a:solidFill>
                             <a:srgbClr val="FFFFFF"/>
                           </a:solidFill>
@@ -2082,7 +2288,7 @@
                           <a:ea typeface="Arial"/>
                           <a:cs typeface="Arial"/>
                         </a:rPr>
-                        <a:t>Existing answer</a:t>
+                        <a:t>Proposed contract</a:t>
                       </a:r>
                     </a:p>
                   </a:txBody>
@@ -2093,50 +2299,50 @@
                   </a:tcPr>
                 </a:tc>
               </a:tr>
-              <a:tr h="685800">
-                <a:tc>
-                  <a:txBody>
-                    <a:bodyPr>
-                      <a:noAutofit/>
-                    </a:bodyPr>
-                    <a:lstStyle/>
-                    <a:p>
-                      <a:r>
-                        <a:rPr sz="1800" b="0">
-                          <a:solidFill>
-                            <a:srgbClr val="233542"/>
-                          </a:solidFill>
-                          <a:latin typeface="Arial"/>
-                          <a:ea typeface="Arial"/>
-                          <a:cs typeface="Arial"/>
-                        </a:rPr>
-                        <a:t>CRS authority</a:t>
-                      </a:r>
-                    </a:p>
-                  </a:txBody>
-                  <a:tcPr marL="91440" marR="91440" marT="45720" marB="45720">
-                    <a:solidFill>
-                      <a:srgbClr val="FFFFFF"/>
-                    </a:solidFill>
-                  </a:tcPr>
-                </a:tc>
-                <a:tc>
-                  <a:txBody>
-                    <a:bodyPr>
-                      <a:noAutofit/>
-                    </a:bodyPr>
-                    <a:lstStyle/>
-                    <a:p>
-                      <a:r>
-                        <a:rPr sz="1800" b="0">
-                          <a:solidFill>
-                            <a:srgbClr val="233542"/>
-                          </a:solidFill>
-                          <a:latin typeface="Arial"/>
-                          <a:ea typeface="Arial"/>
-                          <a:cs typeface="Arial"/>
-                        </a:rPr>
-                        <a:t>Complete WKT is authoritative. The typed definition stores uniform token crs:wkt.</a:t>
+              <a:tr h="793750">
+                <a:tc>
+                  <a:txBody>
+                    <a:bodyPr>
+                      <a:noAutofit/>
+                    </a:bodyPr>
+                    <a:lstStyle/>
+                    <a:p>
+                      <a:r>
+                        <a:rPr sz="1725" b="0">
+                          <a:solidFill>
+                            <a:srgbClr val="233542"/>
+                          </a:solidFill>
+                          <a:latin typeface="Arial"/>
+                          <a:ea typeface="Arial"/>
+                          <a:cs typeface="Arial"/>
+                        </a:rPr>
+                        <a:t>Placement fields</a:t>
+                      </a:r>
+                    </a:p>
+                  </a:txBody>
+                  <a:tcPr marL="91440" marR="91440" marT="45720" marB="45720">
+                    <a:solidFill>
+                      <a:srgbClr val="FFFFFF"/>
+                    </a:solidFill>
+                  </a:tcPr>
+                </a:tc>
+                <a:tc>
+                  <a:txBody>
+                    <a:bodyPr>
+                      <a:noAutofit/>
+                    </a:bodyPr>
+                    <a:lstStyle/>
+                    <a:p>
+                      <a:r>
+                        <a:rPr sz="1725" b="0">
+                          <a:solidFill>
+                            <a:srgbClr val="233542"/>
+                          </a:solidFill>
+                          <a:latin typeface="Arial"/>
+                          <a:ea typeface="Arial"/>
+                          <a:cs typeface="Arial"/>
+                        </a:rPr>
+                        <a:t>Varying crs:position double3 has no fallback. crs:orientation quatd defaults to identity. crs:scale double3 defaults to (1,1,1). Explicit blocks remain unavailable.</a:t>
                       </a:r>
                     </a:p>
                   </a:txBody>
@@ -2147,50 +2353,50 @@
                   </a:tcPr>
                 </a:tc>
               </a:tr>
-              <a:tr h="685800">
-                <a:tc>
-                  <a:txBody>
-                    <a:bodyPr>
-                      <a:noAutofit/>
-                    </a:bodyPr>
-                    <a:lstStyle/>
-                    <a:p>
-                      <a:r>
-                        <a:rPr sz="1800" b="0">
-                          <a:solidFill>
-                            <a:srgbClr val="233542"/>
-                          </a:solidFill>
-                          <a:latin typeface="Arial"/>
-                          <a:ea typeface="Arial"/>
-                          <a:cs typeface="Arial"/>
-                        </a:rPr>
-                        <a:t>Binding and composition</a:t>
-                      </a:r>
-                    </a:p>
-                  </a:txBody>
-                  <a:tcPr marL="91440" marR="91440" marT="45720" marB="45720">
-                    <a:solidFill>
-                      <a:srgbClr val="FFFFFF"/>
-                    </a:solidFill>
-                  </a:tcPr>
-                </a:tc>
-                <a:tc>
-                  <a:txBody>
-                    <a:bodyPr>
-                      <a:noAutofit/>
-                    </a:bodyPr>
-                    <a:lstStyle/>
-                    <a:p>
-                      <a:r>
-                        <a:rPr sz="1800" b="0">
-                          <a:solidFill>
-                            <a:srgbClr val="233542"/>
-                          </a:solidFill>
-                          <a:latin typeface="Arial"/>
-                          <a:ea typeface="Arial"/>
-                          <a:cs typeface="Arial"/>
-                        </a:rPr>
-                        <a:t>Applied binding uses a CRS reference. Nearest direct binding defines composed subtree scope.</a:t>
+              <a:tr h="793750">
+                <a:tc>
+                  <a:txBody>
+                    <a:bodyPr>
+                      <a:noAutofit/>
+                    </a:bodyPr>
+                    <a:lstStyle/>
+                    <a:p>
+                      <a:r>
+                        <a:rPr sz="1725" b="0">
+                          <a:solidFill>
+                            <a:srgbClr val="233542"/>
+                          </a:solidFill>
+                          <a:latin typeface="Arial"/>
+                          <a:ea typeface="Arial"/>
+                          <a:cs typeface="Arial"/>
+                        </a:rPr>
+                        <a:t>Coordinate components</a:t>
+                      </a:r>
+                    </a:p>
+                  </a:txBody>
+                  <a:tcPr marL="91440" marR="91440" marT="45720" marB="45720">
+                    <a:solidFill>
+                      <a:srgbClr val="FFFFFF"/>
+                    </a:solidFill>
+                  </a:tcPr>
+                </a:tc>
+                <a:tc>
+                  <a:txBody>
+                    <a:bodyPr>
+                      <a:noAutofit/>
+                    </a:bodyPr>
+                    <a:lstStyle/>
+                    <a:p>
+                      <a:r>
+                        <a:rPr sz="1725" b="0">
+                          <a:solidFill>
+                            <a:srgbClr val="233542"/>
+                          </a:solidFill>
+                          <a:latin typeface="Arial"/>
+                          <a:ea typeface="Arial"/>
+                          <a:cs typeface="Arial"/>
+                        </a:rPr>
+                        <a:t>Easting/northing/up, longitude/latitude/height, or geocentric XYZ. Use declared WKT units and height reference. Scene upAxis does not relabel the tuple.</a:t>
                       </a:r>
                     </a:p>
                   </a:txBody>
@@ -2201,50 +2407,50 @@
                   </a:tcPr>
                 </a:tc>
               </a:tr>
-              <a:tr h="685800">
-                <a:tc>
-                  <a:txBody>
-                    <a:bodyPr>
-                      <a:noAutofit/>
-                    </a:bodyPr>
-                    <a:lstStyle/>
-                    <a:p>
-                      <a:r>
-                        <a:rPr sz="1800" b="0">
-                          <a:solidFill>
-                            <a:srgbClr val="233542"/>
-                          </a:solidFill>
-                          <a:latin typeface="Arial"/>
-                          <a:ea typeface="Arial"/>
-                          <a:cs typeface="Arial"/>
-                        </a:rPr>
-                        <a:t>Placement order</a:t>
-                      </a:r>
-                    </a:p>
-                  </a:txBody>
-                  <a:tcPr marL="91440" marR="91440" marT="45720" marB="45720">
-                    <a:solidFill>
-                      <a:srgbClr val="FFFFFF"/>
-                    </a:solidFill>
-                  </a:tcPr>
-                </a:tc>
-                <a:tc>
-                  <a:txBody>
-                    <a:bodyPr>
-                      <a:noAutofit/>
-                    </a:bodyPr>
-                    <a:lstStyle/>
-                    <a:p>
-                      <a:r>
-                        <a:rPr sz="1800" b="0">
-                          <a:solidFill>
-                            <a:srgbClr val="233542"/>
-                          </a:solidFill>
-                          <a:latin typeface="Arial"/>
-                          <a:ea typeface="Arial"/>
-                          <a:cs typeface="Arial"/>
-                        </a:rPr>
-                        <a:t>Separate CRS position, orientation and scale resolve before ordinary USD transforms.</a:t>
+              <a:tr h="793750">
+                <a:tc>
+                  <a:txBody>
+                    <a:bodyPr>
+                      <a:noAutofit/>
+                    </a:bodyPr>
+                    <a:lstStyle/>
+                    <a:p>
+                      <a:r>
+                        <a:rPr sz="1725" b="0">
+                          <a:solidFill>
+                            <a:srgbClr val="233542"/>
+                          </a:solidFill>
+                          <a:latin typeface="Arial"/>
+                          <a:ea typeface="Arial"/>
+                          <a:cs typeface="Arial"/>
+                        </a:rPr>
+                        <a:t>Orientation and scale</a:t>
+                      </a:r>
+                    </a:p>
+                  </a:txBody>
+                  <a:tcPr marL="91440" marR="91440" marT="45720" marB="45720">
+                    <a:solidFill>
+                      <a:srgbClr val="FFFFFF"/>
+                    </a:solidFill>
+                  </a:tcPr>
+                </a:tc>
+                <a:tc>
+                  <a:txBody>
+                    <a:bodyPr>
+                      <a:noAutofit/>
+                    </a:bodyPr>
+                    <a:lstStyle/>
+                    <a:p>
+                      <a:r>
+                        <a:rPr sz="1725" b="0">
+                          <a:solidFill>
+                            <a:srgbClr val="233542"/>
+                          </a:solidFill>
+                          <a:latin typeface="Arial"/>
+                          <a:ea typeface="Arial"/>
+                          <a:cs typeface="Arial"/>
+                        </a:rPr>
+                        <a:t>Model scale precedes orientation. Source bases are projected grid axes, geographic geodetic ENU or geocentric XYZ. The stage-axis adapter still needs specification.</a:t>
                       </a:r>
                     </a:p>
                   </a:txBody>
@@ -2255,50 +2461,50 @@
                   </a:tcPr>
                 </a:tc>
               </a:tr>
-              <a:tr h="685800">
-                <a:tc>
-                  <a:txBody>
-                    <a:bodyPr>
-                      <a:noAutofit/>
-                    </a:bodyPr>
-                    <a:lstStyle/>
-                    <a:p>
-                      <a:r>
-                        <a:rPr sz="1800" b="0">
-                          <a:solidFill>
-                            <a:srgbClr val="233542"/>
-                          </a:solidFill>
-                          <a:latin typeface="Arial"/>
-                          <a:ea typeface="Arial"/>
-                          <a:cs typeface="Arial"/>
-                        </a:rPr>
-                        <a:t>Source and output</a:t>
-                      </a:r>
-                    </a:p>
-                  </a:txBody>
-                  <a:tcPr marL="91440" marR="91440" marT="45720" marB="45720">
-                    <a:solidFill>
-                      <a:srgbClr val="FFFFFF"/>
-                    </a:solidFill>
-                  </a:tcPr>
-                </a:tc>
-                <a:tc>
-                  <a:txBody>
-                    <a:bodyPr>
-                      <a:noAutofit/>
-                    </a:bodyPr>
-                    <a:lstStyle/>
-                    <a:p>
-                      <a:r>
-                        <a:rPr sz="1800" b="0">
-                          <a:solidFill>
-                            <a:srgbClr val="233542"/>
-                          </a:solidFill>
-                          <a:latin typeface="Arial"/>
-                          <a:ea typeface="Arial"/>
-                          <a:cs typeface="Arial"/>
-                        </a:rPr>
-                        <a:t>Preserve source facts and adjusted physical placement. The consumer selects the output CRS.</a:t>
+              <a:tr h="793750">
+                <a:tc>
+                  <a:txBody>
+                    <a:bodyPr>
+                      <a:noAutofit/>
+                    </a:bodyPr>
+                    <a:lstStyle/>
+                    <a:p>
+                      <a:r>
+                        <a:rPr sz="1725" b="0">
+                          <a:solidFill>
+                            <a:srgbClr val="233542"/>
+                          </a:solidFill>
+                          <a:latin typeface="Arial"/>
+                          <a:ea typeface="Arial"/>
+                          <a:cs typeface="Arial"/>
+                        </a:rPr>
+                        <a:t>WKT string normalization</a:t>
+                      </a:r>
+                    </a:p>
+                  </a:txBody>
+                  <a:tcPr marL="91440" marR="91440" marT="45720" marB="45720">
+                    <a:solidFill>
+                      <a:srgbClr val="FFFFFF"/>
+                    </a:solidFill>
+                  </a:tcPr>
+                </a:tc>
+                <a:tc>
+                  <a:txBody>
+                    <a:bodyPr>
+                      <a:noAutofit/>
+                    </a:bodyPr>
+                    <a:lstStyle/>
+                    <a:p>
+                      <a:r>
+                        <a:rPr sz="1725" b="0">
+                          <a:solidFill>
+                            <a:srgbClr val="233542"/>
+                          </a:solidFill>
+                          <a:latin typeface="Arial"/>
+                          <a:ea typeface="Arial"/>
+                          <a:cs typeface="Arial"/>
+                        </a:rPr>
+                        <a:t>OGC preferred spelling and delimiters, preserved quoted content and node order, W3C exact canonical decimal/integer spelling. Token identity differs from CRS equivalence.</a:t>
                       </a:r>
                     </a:p>
                   </a:txBody>
@@ -2309,50 +2515,50 @@
                   </a:tcPr>
                 </a:tc>
               </a:tr>
-              <a:tr h="685800">
-                <a:tc>
-                  <a:txBody>
-                    <a:bodyPr>
-                      <a:noAutofit/>
-                    </a:bodyPr>
-                    <a:lstStyle/>
-                    <a:p>
-                      <a:r>
-                        <a:rPr sz="1800" b="0">
-                          <a:solidFill>
-                            <a:srgbClr val="233542"/>
-                          </a:solidFill>
-                          <a:latin typeface="Arial"/>
-                          <a:ea typeface="Arial"/>
-                          <a:cs typeface="Arial"/>
-                        </a:rPr>
-                        <a:t>Stage conventions</a:t>
-                      </a:r>
-                    </a:p>
-                  </a:txBody>
-                  <a:tcPr marL="91440" marR="91440" marT="45720" marB="45720">
-                    <a:solidFill>
-                      <a:srgbClr val="FFFFFF"/>
-                    </a:solidFill>
-                  </a:tcPr>
-                </a:tc>
-                <a:tc>
-                  <a:txBody>
-                    <a:bodyPr>
-                      <a:noAutofit/>
-                    </a:bodyPr>
-                    <a:lstStyle/>
-                    <a:p>
-                      <a:r>
-                        <a:rPr sz="1800" b="0">
-                          <a:solidFill>
-                            <a:srgbClr val="233542"/>
-                          </a:solidFill>
-                          <a:latin typeface="Arial"/>
-                          <a:ea typeface="Arial"/>
-                          <a:cs typeface="Arial"/>
-                        </a:rPr>
-                        <a:t>Writers or assemblers author unit/up-axis correctives. Readers honor ordinary USD data.</a:t>
+              <a:tr h="793750">
+                <a:tc>
+                  <a:txBody>
+                    <a:bodyPr>
+                      <a:noAutofit/>
+                    </a:bodyPr>
+                    <a:lstStyle/>
+                    <a:p>
+                      <a:r>
+                        <a:rPr sz="1725" b="0">
+                          <a:solidFill>
+                            <a:srgbClr val="233542"/>
+                          </a:solidFill>
+                          <a:latin typeface="Arial"/>
+                          <a:ea typeface="Arial"/>
+                          <a:cs typeface="Arial"/>
+                        </a:rPr>
+                        <a:t>Comparison and sampling</a:t>
+                      </a:r>
+                    </a:p>
+                  </a:txBody>
+                  <a:tcPr marL="91440" marR="91440" marT="45720" marB="45720">
+                    <a:solidFill>
+                      <a:srgbClr val="FFFFFF"/>
+                    </a:solidFill>
+                  </a:tcPr>
+                </a:tc>
+                <a:tc>
+                  <a:txBody>
+                    <a:bodyPr>
+                      <a:noAutofit/>
+                    </a:bodyPr>
+                    <a:lstStyle/>
+                    <a:p>
+                      <a:r>
+                        <a:rPr sz="1725" b="0">
+                          <a:solidFill>
+                            <a:srgbClr val="233542"/>
+                          </a:solidFill>
+                          <a:latin typeface="Arial"/>
+                          <a:ea typeface="Arial"/>
+                          <a:cs typeface="Arial"/>
+                        </a:rPr>
+                        <a:t>Separate operation accuracy, approximation error and reader agreement. Actual timeSamples and explicit timeCodesPerSecond record the sampling schedule.</a:t>
                       </a:r>
                     </a:p>
                   </a:txBody>
@@ -2367,67 +2573,10 @@
           </a:graphicData>
         </a:graphic>
       </p:graphicFrame>
-      <p:sp>
-        <p:nvSpPr>
-          <p:cNvPr id="3" name="">
-            <a:extLst xmlns:a="http://schemas.openxmlformats.org/drawingml/2006/main">
-              <a:ext uri="{FF2B5EF4-FFF2-40B4-BE49-F238E27FC236}">
-                <a16:creationId xmlns:a16="http://schemas.microsoft.com/office/drawing/2014/main" id="{658CBA51-9A5E-4B7B-98FA-28A5D74050D7}"/>
-              </a:ext>
-            </a:extLst>
-          </p:cNvPr>
-          <p:cNvSpPr>
-            <a:spLocks xmlns:a="http://schemas.openxmlformats.org/drawingml/2006/main" noGrp="1"/>
-          </p:cNvSpPr>
-          <p:nvPr/>
-        </p:nvSpPr>
-        <p:spPr>
-          <a:xfrm xmlns:a="http://schemas.openxmlformats.org/drawingml/2006/main">
-            <a:off x="609600" y="5905500"/>
-            <a:ext cx="10972800" cy="666750"/>
-          </a:xfrm>
-          <a:prstGeom xmlns:a="http://schemas.openxmlformats.org/drawingml/2006/main" prst="rect">
-            <a:avLst/>
-          </a:prstGeom>
-          <a:noFill xmlns:a="http://schemas.openxmlformats.org/drawingml/2006/main"/>
-          <a:ln xmlns:a="http://schemas.openxmlformats.org/drawingml/2006/main" w="0">
-            <a:noFill/>
-          </a:ln>
-        </p:spPr>
-        <p:txBody>
-          <a:bodyPr xmlns:a="http://schemas.openxmlformats.org/drawingml/2006/main">
-            <a:noAutofit/>
-          </a:bodyPr>
-          <a:lstStyle xmlns:a="http://schemas.openxmlformats.org/drawingml/2006/main"/>
-          <a:p xmlns:a="http://schemas.openxmlformats.org/drawingml/2006/main">
-            <a:pPr>
-              <a:defRPr sz="1800" b="0">
-                <a:solidFill>
-                  <a:srgbClr val="233542"/>
-                </a:solidFill>
-                <a:latin typeface="Arial"/>
-                <a:ea typeface="Arial"/>
-                <a:cs typeface="Arial"/>
-              </a:defRPr>
-            </a:pPr>
-            <a:r>
-              <a:rPr sz="1800" b="0">
-                <a:solidFill>
-                  <a:srgbClr val="233542"/>
-                </a:solidFill>
-                <a:latin typeface="Arial"/>
-                <a:ea typeface="Arial"/>
-                <a:cs typeface="Arial"/>
-              </a:rPr>
-              <a:t>Geographic source positions and geographic coordinate queries are supported. Site calibration lives in a derived CRS definition.</a:t>
-            </a:r>
-          </a:p>
-        </p:txBody>
-      </p:sp>
     </p:spTree>
     <p:extLst>
       <p:ext uri="{BB962C8B-B14F-4D97-AF65-F5344CB8AC3E}">
-        <p14:creationId xmlns:p14="http://schemas.microsoft.com/office/powerpoint/2010/main" val="737590343"/>
+        <p14:creationId xmlns:p14="http://schemas.microsoft.com/office/powerpoint/2010/main" val="349535359"/>
       </p:ext>
     </p:extLst>
   </p:cSld>
@@ -2458,7 +2607,7 @@
           <p:cNvPr id="4" name="">
             <a:extLst xmlns:a="http://schemas.openxmlformats.org/drawingml/2006/main">
               <a:ext uri="{FF2B5EF4-FFF2-40B4-BE49-F238E27FC236}">
-                <a16:creationId xmlns:a16="http://schemas.microsoft.com/office/drawing/2014/main" id="{74BBA167-9E02-417F-A399-F98422C51514}"/>
+                <a16:creationId xmlns:a16="http://schemas.microsoft.com/office/drawing/2014/main" id="{C3E1A522-0859-4D01-A90A-D6ACAB05A1CD}"/>
               </a:ext>
             </a:extLst>
           </p:cNvPr>
@@ -2505,7 +2654,7 @@
                 <a:ea typeface="Arial"/>
                 <a:cs typeface="Arial"/>
               </a:rPr>
-              <a:t>Missing authored representation</a:t>
+              <a:t>Four contracts still required</a:t>
             </a:r>
           </a:p>
         </p:txBody>
@@ -2517,27 +2666,27 @@
           <p:nvPr/>
         </p:nvGraphicFramePr>
         <p:xfrm>
-          <a:off xmlns:a="http://schemas.openxmlformats.org/drawingml/2006/main" x="609600" y="1562100"/>
-          <a:ext xmlns:a="http://schemas.openxmlformats.org/drawingml/2006/main" cx="10972800" cy="4095750"/>
+          <a:off xmlns:a="http://schemas.openxmlformats.org/drawingml/2006/main" x="609600" y="1428750"/>
+          <a:ext xmlns:a="http://schemas.openxmlformats.org/drawingml/2006/main" cx="10972800" cy="4457700"/>
         </p:xfrm>
         <a:graphic xmlns:a="http://schemas.openxmlformats.org/drawingml/2006/main">
           <a:graphicData uri="http://schemas.openxmlformats.org/drawingml/2006/table">
             <a:tbl>
-              <a:tblPr firstRow="1" bandRow="0"/>
+              <a:tblPr/>
               <a:tblGrid>
-                <a:gridCol w="3333750"/>
-                <a:gridCol w="7639050"/>
+                <a:gridCol w="3286125"/>
+                <a:gridCol w="7686675"/>
               </a:tblGrid>
-              <a:tr h="585107">
-                <a:tc>
-                  <a:txBody>
-                    <a:bodyPr>
-                      <a:noAutofit/>
-                    </a:bodyPr>
-                    <a:lstStyle/>
-                    <a:p>
-                      <a:r>
-                        <a:rPr sz="1725" b="1">
+              <a:tr h="891540">
+                <a:tc>
+                  <a:txBody>
+                    <a:bodyPr>
+                      <a:noAutofit/>
+                    </a:bodyPr>
+                    <a:lstStyle/>
+                    <a:p>
+                      <a:r>
+                        <a:rPr sz="1800" b="1">
                           <a:solidFill>
                             <a:srgbClr val="FFFFFF"/>
                           </a:solidFill>
@@ -2545,7 +2694,7 @@
                           <a:ea typeface="Arial"/>
                           <a:cs typeface="Arial"/>
                         </a:rPr>
-                        <a:t>Audit category</a:t>
+                        <a:t>Contract</a:t>
                       </a:r>
                     </a:p>
                   </a:txBody>
@@ -2563,7 +2712,7 @@
                     <a:lstStyle/>
                     <a:p>
                       <a:r>
-                        <a:rPr sz="1725" b="1">
+                        <a:rPr sz="1800" b="1">
                           <a:solidFill>
                             <a:srgbClr val="FFFFFF"/>
                           </a:solidFill>
@@ -2571,7 +2720,7 @@
                           <a:ea typeface="Arial"/>
                           <a:cs typeface="Arial"/>
                         </a:rPr>
-                        <a:t>Exact contract still required</a:t>
+                        <a:t>What remains unspecified</a:t>
                       </a:r>
                     </a:p>
                   </a:txBody>
@@ -2582,50 +2731,50 @@
                   </a:tcPr>
                 </a:tc>
               </a:tr>
-              <a:tr h="585107">
-                <a:tc>
-                  <a:txBody>
-                    <a:bodyPr>
-                      <a:noAutofit/>
-                    </a:bodyPr>
-                    <a:lstStyle/>
-                    <a:p>
-                      <a:r>
-                        <a:rPr sz="1725" b="0">
-                          <a:solidFill>
-                            <a:srgbClr val="233542"/>
-                          </a:solidFill>
-                          <a:latin typeface="Arial"/>
-                          <a:ea typeface="Arial"/>
-                          <a:cs typeface="Arial"/>
-                        </a:rPr>
-                        <a:t>G02: placement fields</a:t>
-                      </a:r>
-                    </a:p>
-                  </a:txBody>
-                  <a:tcPr marL="91440" marR="91440" marT="45720" marB="45720">
-                    <a:solidFill>
-                      <a:srgbClr val="FFFFFF"/>
-                    </a:solidFill>
-                  </a:tcPr>
-                </a:tc>
-                <a:tc>
-                  <a:txBody>
-                    <a:bodyPr>
-                      <a:noAutofit/>
-                    </a:bodyPr>
-                    <a:lstStyle/>
-                    <a:p>
-                      <a:r>
-                        <a:rPr sz="1725" b="0">
-                          <a:solidFill>
-                            <a:srgbClr val="233542"/>
-                          </a:solidFill>
-                          <a:latin typeface="Arial"/>
-                          <a:ea typeface="Arial"/>
-                          <a:cs typeface="Arial"/>
-                        </a:rPr>
-                        <a:t>Names, types, defaults/requiredness, applicability, orientation/scale bases and mutual order.</a:t>
+              <a:tr h="891540">
+                <a:tc>
+                  <a:txBody>
+                    <a:bodyPr>
+                      <a:noAutofit/>
+                    </a:bodyPr>
+                    <a:lstStyle/>
+                    <a:p>
+                      <a:r>
+                        <a:rPr sz="1800" b="0">
+                          <a:solidFill>
+                            <a:srgbClr val="233542"/>
+                          </a:solidFill>
+                          <a:latin typeface="Arial"/>
+                          <a:ea typeface="Arial"/>
+                          <a:cs typeface="Arial"/>
+                        </a:rPr>
+                        <a:t>G03 / Q3: project-adjustment frame</a:t>
+                      </a:r>
+                    </a:p>
+                  </a:txBody>
+                  <a:tcPr marL="91440" marR="91440" marT="45720" marB="45720">
+                    <a:solidFill>
+                      <a:srgbClr val="FFFFFF"/>
+                    </a:solidFill>
+                  </a:tcPr>
+                </a:tc>
+                <a:tc>
+                  <a:txBody>
+                    <a:bodyPr>
+                      <a:noAutofit/>
+                    </a:bodyPr>
+                    <a:lstStyle/>
+                    <a:p>
+                      <a:r>
+                        <a:rPr sz="1800" b="0">
+                          <a:solidFill>
+                            <a:srgbClr val="233542"/>
+                          </a:solidFill>
+                          <a:latin typeface="Arial"/>
+                          <a:ea typeface="Arial"/>
+                          <a:cs typeface="Arial"/>
+                        </a:rPr>
+                        <a:t>Axes, units, pivot and controlling composed context for ordinary project adjustments, including nested bindings and output changes. Post-placement order is settled.</a:t>
                       </a:r>
                     </a:p>
                   </a:txBody>
@@ -2636,50 +2785,50 @@
                   </a:tcPr>
                 </a:tc>
               </a:tr>
-              <a:tr h="585107">
-                <a:tc>
-                  <a:txBody>
-                    <a:bodyPr>
-                      <a:noAutofit/>
-                    </a:bodyPr>
-                    <a:lstStyle/>
-                    <a:p>
-                      <a:r>
-                        <a:rPr sz="1725" b="0">
-                          <a:solidFill>
-                            <a:srgbClr val="233542"/>
-                          </a:solidFill>
-                          <a:latin typeface="Arial"/>
-                          <a:ea typeface="Arial"/>
-                          <a:cs typeface="Arial"/>
-                        </a:rPr>
-                        <a:t>G05: WKT string normalization</a:t>
-                      </a:r>
-                    </a:p>
-                  </a:txBody>
-                  <a:tcPr marL="91440" marR="91440" marT="45720" marB="45720">
-                    <a:solidFill>
-                      <a:srgbClr val="FFFFFF"/>
-                    </a:solidFill>
-                  </a:tcPr>
-                </a:tc>
-                <a:tc>
-                  <a:txBody>
-                    <a:bodyPr>
-                      <a:noAutofit/>
-                    </a:bodyPr>
-                    <a:lstStyle/>
-                    <a:p>
-                      <a:r>
-                        <a:rPr sz="1725" b="0">
-                          <a:solidFill>
-                            <a:srgbClr val="233542"/>
-                          </a:solidFill>
-                          <a:latin typeface="Arial"/>
-                          <a:ea typeface="Arial"/>
-                          <a:cs typeface="Arial"/>
-                        </a:rPr>
-                        <a:t>A prescribed serialized normal form that preserves the represented information.</a:t>
+              <a:tr h="891540">
+                <a:tc>
+                  <a:txBody>
+                    <a:bodyPr>
+                      <a:noAutofit/>
+                    </a:bodyPr>
+                    <a:lstStyle/>
+                    <a:p>
+                      <a:r>
+                        <a:rPr sz="1800" b="0">
+                          <a:solidFill>
+                            <a:srgbClr val="233542"/>
+                          </a:solidFill>
+                          <a:latin typeface="Arial"/>
+                          <a:ea typeface="Arial"/>
+                          <a:cs typeface="Arial"/>
+                        </a:rPr>
+                        <a:t>G04 / Q6: stage and placement bases</a:t>
+                      </a:r>
+                    </a:p>
+                  </a:txBody>
+                  <a:tcPr marL="91440" marR="91440" marT="45720" marB="45720">
+                    <a:solidFill>
+                      <a:srgbClr val="FFFFFF"/>
+                    </a:solidFill>
+                  </a:tcPr>
+                </a:tc>
+                <a:tc>
+                  <a:txBody>
+                    <a:bodyPr>
+                      <a:noAutofit/>
+                    </a:bodyPr>
+                    <a:lstStyle/>
+                    <a:p>
+                      <a:r>
+                        <a:rPr sz="1800" b="0">
+                          <a:solidFill>
+                            <a:srgbClr val="233542"/>
+                          </a:solidFill>
+                          <a:latin typeface="Arial"/>
+                          <a:ea typeface="Arial"/>
+                          <a:cs typeface="Arial"/>
+                        </a:rPr>
+                        <a:t>Exact mapping between stage axes/distances, the proposed source placement bases and resolved result bases. Coordinate tuples do not supply that mapping.</a:t>
                       </a:r>
                     </a:p>
                   </a:txBody>
@@ -2690,50 +2839,50 @@
                   </a:tcPr>
                 </a:tc>
               </a:tr>
-              <a:tr h="585107">
-                <a:tc>
-                  <a:txBody>
-                    <a:bodyPr>
-                      <a:noAutofit/>
-                    </a:bodyPr>
-                    <a:lstStyle/>
-                    <a:p>
-                      <a:r>
-                        <a:rPr sz="1725" b="0">
-                          <a:solidFill>
-                            <a:srgbClr val="233542"/>
-                          </a:solidFill>
-                          <a:latin typeface="Arial"/>
-                          <a:ea typeface="Arial"/>
-                          <a:cs typeface="Arial"/>
-                        </a:rPr>
-                        <a:t>G06: measurement coordinates</a:t>
-                      </a:r>
-                    </a:p>
-                  </a:txBody>
-                  <a:tcPr marL="91440" marR="91440" marT="45720" marB="45720">
-                    <a:solidFill>
-                      <a:srgbClr val="FFFFFF"/>
-                    </a:solidFill>
-                  </a:tcPr>
-                </a:tc>
-                <a:tc>
-                  <a:txBody>
-                    <a:bodyPr>
-                      <a:noAutofit/>
-                    </a:bodyPr>
-                    <a:lstStyle/>
-                    <a:p>
-                      <a:r>
-                        <a:rPr sz="1725" b="0">
-                          <a:solidFill>
-                            <a:srgbClr val="233542"/>
-                          </a:solidFill>
-                          <a:latin typeface="Arial"/>
-                          <a:ea typeface="Arial"/>
-                          <a:cs typeface="Arial"/>
-                        </a:rPr>
-                        <a:t>An authored association identifying source coordinates, including external assets.</a:t>
+              <a:tr h="891540">
+                <a:tc>
+                  <a:txBody>
+                    <a:bodyPr>
+                      <a:noAutofit/>
+                    </a:bodyPr>
+                    <a:lstStyle/>
+                    <a:p>
+                      <a:r>
+                        <a:rPr sz="1800" b="0">
+                          <a:solidFill>
+                            <a:srgbClr val="233542"/>
+                          </a:solidFill>
+                          <a:latin typeface="Arial"/>
+                          <a:ea typeface="Arial"/>
+                          <a:cs typeface="Arial"/>
+                        </a:rPr>
+                        <a:t>G06 / Q11: measurement association</a:t>
+                      </a:r>
+                    </a:p>
+                  </a:txBody>
+                  <a:tcPr marL="91440" marR="91440" marT="45720" marB="45720">
+                    <a:solidFill>
+                      <a:srgbClr val="FFFFFF"/>
+                    </a:solidFill>
+                  </a:tcPr>
+                </a:tc>
+                <a:tc>
+                  <a:txBody>
+                    <a:bodyPr>
+                      <a:noAutofit/>
+                    </a:bodyPr>
+                    <a:lstStyle/>
+                    <a:p>
+                      <a:r>
+                        <a:rPr sz="1800" b="0">
+                          <a:solidFill>
+                            <a:srgbClr val="233542"/>
+                          </a:solidFill>
+                          <a:latin typeface="Arial"/>
+                          <a:ea typeface="Arial"/>
+                          <a:cs typeface="Arial"/>
+                        </a:rPr>
+                        <a:t>Authored coordinate roles/domains for USD properties and external assets, including multiple domains and conflicting external CRS metadata.</a:t>
                       </a:r>
                     </a:p>
                   </a:txBody>
@@ -2744,158 +2893,50 @@
                   </a:tcPr>
                 </a:tc>
               </a:tr>
-              <a:tr h="585107">
-                <a:tc>
-                  <a:txBody>
-                    <a:bodyPr>
-                      <a:noAutofit/>
-                    </a:bodyPr>
-                    <a:lstStyle/>
-                    <a:p>
-                      <a:r>
-                        <a:rPr sz="1725" b="0">
-                          <a:solidFill>
-                            <a:srgbClr val="233542"/>
-                          </a:solidFill>
-                          <a:latin typeface="Arial"/>
-                          <a:ea typeface="Arial"/>
-                          <a:cs typeface="Arial"/>
-                        </a:rPr>
-                        <a:t>G07: dependency declaration</a:t>
-                      </a:r>
-                    </a:p>
-                  </a:txBody>
-                  <a:tcPr marL="91440" marR="91440" marT="45720" marB="45720">
-                    <a:solidFill>
-                      <a:srgbClr val="FFFFFF"/>
-                    </a:solidFill>
-                  </a:tcPr>
-                </a:tc>
-                <a:tc>
-                  <a:txBody>
-                    <a:bodyPr>
-                      <a:noAutofit/>
-                    </a:bodyPr>
-                    <a:lstStyle/>
-                    <a:p>
-                      <a:r>
-                        <a:rPr sz="1725" b="0">
-                          <a:solidFill>
-                            <a:srgbClr val="233542"/>
-                          </a:solidFill>
-                          <a:latin typeface="Arial"/>
-                          <a:ea typeface="Arial"/>
-                          <a:cs typeface="Arial"/>
-                        </a:rPr>
-                        <a:t>A carrier and composition rule readable without traversal, including unloaded content.</a:t>
-                      </a:r>
-                    </a:p>
-                  </a:txBody>
-                  <a:tcPr marL="91440" marR="91440" marT="45720" marB="45720">
-                    <a:solidFill>
-                      <a:srgbClr val="FFFFFF"/>
-                    </a:solidFill>
-                  </a:tcPr>
-                </a:tc>
-              </a:tr>
-              <a:tr h="585107">
-                <a:tc>
-                  <a:txBody>
-                    <a:bodyPr>
-                      <a:noAutofit/>
-                    </a:bodyPr>
-                    <a:lstStyle/>
-                    <a:p>
-                      <a:r>
-                        <a:rPr sz="1725" b="0">
-                          <a:solidFill>
-                            <a:srgbClr val="233542"/>
-                          </a:solidFill>
-                          <a:latin typeface="Arial"/>
-                          <a:ea typeface="Arial"/>
-                          <a:cs typeface="Arial"/>
-                        </a:rPr>
-                        <a:t>G09: export sampling</a:t>
-                      </a:r>
-                    </a:p>
-                  </a:txBody>
-                  <a:tcPr marL="91440" marR="91440" marT="45720" marB="45720">
-                    <a:solidFill>
-                      <a:srgbClr val="FFFFFF"/>
-                    </a:solidFill>
-                  </a:tcPr>
-                </a:tc>
-                <a:tc>
-                  <a:txBody>
-                    <a:bodyPr>
-                      <a:noAutofit/>
-                    </a:bodyPr>
-                    <a:lstStyle/>
-                    <a:p>
-                      <a:r>
-                        <a:rPr sz="1725" b="0">
-                          <a:solidFill>
-                            <a:srgbClr val="233542"/>
-                          </a:solidFill>
-                          <a:latin typeface="Arial"/>
-                          <a:ea typeface="Arial"/>
-                          <a:cs typeface="Arial"/>
-                        </a:rPr>
-                        <a:t>A record distinguishing exported-sample interpolation from original-source resolution.</a:t>
-                      </a:r>
-                    </a:p>
-                  </a:txBody>
-                  <a:tcPr marL="91440" marR="91440" marT="45720" marB="45720">
-                    <a:solidFill>
-                      <a:srgbClr val="FFFFFF"/>
-                    </a:solidFill>
-                  </a:tcPr>
-                </a:tc>
-              </a:tr>
-              <a:tr h="585107">
-                <a:tc>
-                  <a:txBody>
-                    <a:bodyPr>
-                      <a:noAutofit/>
-                    </a:bodyPr>
-                    <a:lstStyle/>
-                    <a:p>
-                      <a:r>
-                        <a:rPr sz="1725" b="0">
-                          <a:solidFill>
-                            <a:srgbClr val="233542"/>
-                          </a:solidFill>
-                          <a:latin typeface="Arial"/>
-                          <a:ea typeface="Arial"/>
-                          <a:cs typeface="Arial"/>
-                        </a:rPr>
-                        <a:t>G10: existing inconsistency</a:t>
-                      </a:r>
-                    </a:p>
-                  </a:txBody>
-                  <a:tcPr marL="91440" marR="91440" marT="45720" marB="45720">
-                    <a:solidFill>
-                      <a:srgbClr val="FFFFFF"/>
-                    </a:solidFill>
-                  </a:tcPr>
-                </a:tc>
-                <a:tc>
-                  <a:txBody>
-                    <a:bodyPr>
-                      <a:noAutofit/>
-                    </a:bodyPr>
-                    <a:lstStyle/>
-                    <a:p>
-                      <a:r>
-                        <a:rPr sz="1725" b="0">
-                          <a:solidFill>
-                            <a:srgbClr val="233542"/>
-                          </a:solidFill>
-                          <a:latin typeface="Arial"/>
-                          <a:ea typeface="Arial"/>
-                          <a:cs typeface="Arial"/>
-                        </a:rPr>
-                        <a:t>Reconcile the 3D scope statement with two-axis WKT examples without silently broadening scope.</a:t>
+              <a:tr h="891540">
+                <a:tc>
+                  <a:txBody>
+                    <a:bodyPr>
+                      <a:noAutofit/>
+                    </a:bodyPr>
+                    <a:lstStyle/>
+                    <a:p>
+                      <a:r>
+                        <a:rPr sz="1800" b="0">
+                          <a:solidFill>
+                            <a:srgbClr val="233542"/>
+                          </a:solidFill>
+                          <a:latin typeface="Arial"/>
+                          <a:ea typeface="Arial"/>
+                          <a:cs typeface="Arial"/>
+                        </a:rPr>
+                        <a:t>G07 / Q12: dependency declaration</a:t>
+                      </a:r>
+                    </a:p>
+                  </a:txBody>
+                  <a:tcPr marL="91440" marR="91440" marT="45720" marB="45720">
+                    <a:solidFill>
+                      <a:srgbClr val="FFFFFF"/>
+                    </a:solidFill>
+                  </a:tcPr>
+                </a:tc>
+                <a:tc>
+                  <a:txBody>
+                    <a:bodyPr>
+                      <a:noAutofit/>
+                    </a:bodyPr>
+                    <a:lstStyle/>
+                    <a:p>
+                      <a:r>
+                        <a:rPr sz="1800" b="0">
+                          <a:solidFill>
+                            <a:srgbClr val="233542"/>
+                          </a:solidFill>
+                          <a:latin typeface="Arial"/>
+                          <a:ea typeface="Arial"/>
+                          <a:cs typeface="Arial"/>
+                        </a:rPr>
+                        <a:t>Authored carrier and conservative assembly/export maintenance through references, unloaded payloads and composition, readable without traversal.</a:t>
                       </a:r>
                     </a:p>
                   </a:txBody>
@@ -2915,7 +2956,7 @@
           <p:cNvPr id="3" name="">
             <a:extLst xmlns:a="http://schemas.openxmlformats.org/drawingml/2006/main">
               <a:ext uri="{FF2B5EF4-FFF2-40B4-BE49-F238E27FC236}">
-                <a16:creationId xmlns:a16="http://schemas.microsoft.com/office/drawing/2014/main" id="{58835F3B-3523-4D7A-A798-7A5115D4FDD2}"/>
+                <a16:creationId xmlns:a16="http://schemas.microsoft.com/office/drawing/2014/main" id="{EAE6F0EE-016A-47A5-A36E-EDCF3531F011}"/>
               </a:ext>
             </a:extLst>
           </p:cNvPr>
@@ -2926,8 +2967,8 @@
         </p:nvSpPr>
         <p:spPr>
           <a:xfrm xmlns:a="http://schemas.openxmlformats.org/drawingml/2006/main">
-            <a:off x="609600" y="5886450"/>
-            <a:ext cx="10972800" cy="685800"/>
+            <a:off x="609600" y="6134100"/>
+            <a:ext cx="10972800" cy="514350"/>
           </a:xfrm>
           <a:prstGeom xmlns:a="http://schemas.openxmlformats.org/drawingml/2006/main" prst="rect">
             <a:avLst/>
@@ -2944,7 +2985,7 @@
           <a:lstStyle xmlns:a="http://schemas.openxmlformats.org/drawingml/2006/main"/>
           <a:p xmlns:a="http://schemas.openxmlformats.org/drawingml/2006/main">
             <a:pPr>
-              <a:defRPr sz="1800" b="0">
+              <a:defRPr sz="1650" b="0">
                 <a:solidFill>
                   <a:srgbClr val="233542"/>
                 </a:solidFill>
@@ -2954,7 +2995,7 @@
               </a:defRPr>
             </a:pPr>
             <a:r>
-              <a:rPr sz="1800" b="0">
+              <a:rPr sz="1650" b="0">
                 <a:solidFill>
                   <a:srgbClr val="233542"/>
                 </a:solidFill>
@@ -2962,7 +3003,7 @@
                 <a:ea typeface="Arial"/>
                 <a:cs typeface="Arial"/>
               </a:rPr>
-              <a:t>Questions 2, 10, 11, 12 and 14 retain the specific representation work.</a:t>
+              <a:t>Question 9 separately concerns geographic scene geometry, frames and bounds. Geographic coordinate queries already belong to initial scope.</a:t>
             </a:r>
           </a:p>
         </p:txBody>
@@ -2970,7 +3011,7 @@
     </p:spTree>
     <p:extLst>
       <p:ext uri="{BB962C8B-B14F-4D97-AF65-F5344CB8AC3E}">
-        <p14:creationId xmlns:p14="http://schemas.microsoft.com/office/powerpoint/2010/main" val="635578242"/>
+        <p14:creationId xmlns:p14="http://schemas.microsoft.com/office/powerpoint/2010/main" val="885362114"/>
       </p:ext>
     </p:extLst>
   </p:cSld>
@@ -2998,10 +3039,10 @@
       </p:grpSpPr>
       <p:sp>
         <p:nvSpPr>
-          <p:cNvPr id="4" name="">
+          <p:cNvPr id="6" name="">
             <a:extLst xmlns:a="http://schemas.openxmlformats.org/drawingml/2006/main">
               <a:ext uri="{FF2B5EF4-FFF2-40B4-BE49-F238E27FC236}">
-                <a16:creationId xmlns:a16="http://schemas.microsoft.com/office/drawing/2014/main" id="{6F0971EC-F004-4A08-B201-E5F7F1E2F91F}"/>
+                <a16:creationId xmlns:a16="http://schemas.microsoft.com/office/drawing/2014/main" id="{BA8BDE36-C783-44BB-9161-BF1CE088ECA8}"/>
               </a:ext>
             </a:extLst>
           </p:cNvPr>
@@ -3048,255 +3089,17 @@
                 <a:ea typeface="Arial"/>
                 <a:cs typeface="Arial"/>
               </a:rPr>
-              <a:t>Missing observable definitions</a:t>
+              <a:t>WKT string normalization</a:t>
             </a:r>
           </a:p>
         </p:txBody>
       </p:sp>
-      <p:graphicFrame>
-        <p:nvGraphicFramePr>
-          <p:cNvPr id="5" name=""/>
-          <p:cNvGraphicFramePr/>
-          <p:nvPr/>
-        </p:nvGraphicFramePr>
-        <p:xfrm>
-          <a:off xmlns:a="http://schemas.openxmlformats.org/drawingml/2006/main" x="609600" y="1562100"/>
-          <a:ext xmlns:a="http://schemas.openxmlformats.org/drawingml/2006/main" cx="10972800" cy="2952750"/>
-        </p:xfrm>
-        <a:graphic xmlns:a="http://schemas.openxmlformats.org/drawingml/2006/main">
-          <a:graphicData uri="http://schemas.openxmlformats.org/drawingml/2006/table">
-            <a:tbl>
-              <a:tblPr firstRow="1" bandRow="0"/>
-              <a:tblGrid>
-                <a:gridCol w="3524250"/>
-                <a:gridCol w="7448550"/>
-              </a:tblGrid>
-              <a:tr h="738188">
-                <a:tc>
-                  <a:txBody>
-                    <a:bodyPr>
-                      <a:noAutofit/>
-                    </a:bodyPr>
-                    <a:lstStyle/>
-                    <a:p>
-                      <a:r>
-                        <a:rPr sz="1875" b="1">
-                          <a:solidFill>
-                            <a:srgbClr val="FFFFFF"/>
-                          </a:solidFill>
-                          <a:latin typeface="Arial"/>
-                          <a:ea typeface="Arial"/>
-                          <a:cs typeface="Arial"/>
-                        </a:rPr>
-                        <a:t>Audit category</a:t>
-                      </a:r>
-                    </a:p>
-                  </a:txBody>
-                  <a:tcPr marL="91440" marR="91440" marT="45720" marB="45720">
-                    <a:solidFill>
-                      <a:srgbClr val="233542"/>
-                    </a:solidFill>
-                  </a:tcPr>
-                </a:tc>
-                <a:tc>
-                  <a:txBody>
-                    <a:bodyPr>
-                      <a:noAutofit/>
-                    </a:bodyPr>
-                    <a:lstStyle/>
-                    <a:p>
-                      <a:r>
-                        <a:rPr sz="1875" b="1">
-                          <a:solidFill>
-                            <a:srgbClr val="FFFFFF"/>
-                          </a:solidFill>
-                          <a:latin typeface="Arial"/>
-                          <a:ea typeface="Arial"/>
-                          <a:cs typeface="Arial"/>
-                        </a:rPr>
-                        <a:t>Agreed outcome and narrower missing meaning</a:t>
-                      </a:r>
-                    </a:p>
-                  </a:txBody>
-                  <a:tcPr marL="91440" marR="91440" marT="45720" marB="45720">
-                    <a:solidFill>
-                      <a:srgbClr val="233542"/>
-                    </a:solidFill>
-                  </a:tcPr>
-                </a:tc>
-              </a:tr>
-              <a:tr h="738188">
-                <a:tc>
-                  <a:txBody>
-                    <a:bodyPr>
-                      <a:noAutofit/>
-                    </a:bodyPr>
-                    <a:lstStyle/>
-                    <a:p>
-                      <a:r>
-                        <a:rPr sz="1875" b="0">
-                          <a:solidFill>
-                            <a:srgbClr val="233542"/>
-                          </a:solidFill>
-                          <a:latin typeface="Arial"/>
-                          <a:ea typeface="Arial"/>
-                          <a:cs typeface="Arial"/>
-                        </a:rPr>
-                        <a:t>G03: project adjustments</a:t>
-                      </a:r>
-                    </a:p>
-                  </a:txBody>
-                  <a:tcPr marL="91440" marR="91440" marT="45720" marB="45720">
-                    <a:solidFill>
-                      <a:srgbClr val="FFFFFF"/>
-                    </a:solidFill>
-                  </a:tcPr>
-                </a:tc>
-                <a:tc>
-                  <a:txBody>
-                    <a:bodyPr>
-                      <a:noAutofit/>
-                    </a:bodyPr>
-                    <a:lstStyle/>
-                    <a:p>
-                      <a:r>
-                        <a:rPr sz="1875" b="0">
-                          <a:solidFill>
-                            <a:srgbClr val="233542"/>
-                          </a:solidFill>
-                          <a:latin typeface="Arial"/>
-                          <a:ea typeface="Arial"/>
-                          <a:cs typeface="Arial"/>
-                        </a:rPr>
-                        <a:t>Post-placement adjustments preserve physical placement. Their authored coordinate frame remains undefined.</a:t>
-                      </a:r>
-                    </a:p>
-                  </a:txBody>
-                  <a:tcPr marL="91440" marR="91440" marT="45720" marB="45720">
-                    <a:solidFill>
-                      <a:srgbClr val="FFFFFF"/>
-                    </a:solidFill>
-                  </a:tcPr>
-                </a:tc>
-              </a:tr>
-              <a:tr h="738188">
-                <a:tc>
-                  <a:txBody>
-                    <a:bodyPr>
-                      <a:noAutofit/>
-                    </a:bodyPr>
-                    <a:lstStyle/>
-                    <a:p>
-                      <a:r>
-                        <a:rPr sz="1875" b="0">
-                          <a:solidFill>
-                            <a:srgbClr val="233542"/>
-                          </a:solidFill>
-                          <a:latin typeface="Arial"/>
-                          <a:ea typeface="Arial"/>
-                          <a:cs typeface="Arial"/>
-                        </a:rPr>
-                        <a:t>G04: components and scene domain</a:t>
-                      </a:r>
-                    </a:p>
-                  </a:txBody>
-                  <a:tcPr marL="91440" marR="91440" marT="45720" marB="45720">
-                    <a:solidFill>
-                      <a:srgbClr val="FFFFFF"/>
-                    </a:solidFill>
-                  </a:tcPr>
-                </a:tc>
-                <a:tc>
-                  <a:txBody>
-                    <a:bodyPr>
-                      <a:noAutofit/>
-                    </a:bodyPr>
-                    <a:lstStyle/>
-                    <a:p>
-                      <a:r>
-                        <a:rPr sz="1875" b="0">
-                          <a:solidFill>
-                            <a:srgbClr val="233542"/>
-                          </a:solidFill>
-                          <a:latin typeface="Arial"/>
-                          <a:ea typeface="Arial"/>
-                          <a:cs typeface="Arial"/>
-                        </a:rPr>
-                        <a:t>E/N/up and geographic queries are settled. Other component mappings and geographic scene frames/bounds remain open.</a:t>
-                      </a:r>
-                    </a:p>
-                  </a:txBody>
-                  <a:tcPr marL="91440" marR="91440" marT="45720" marB="45720">
-                    <a:solidFill>
-                      <a:srgbClr val="FFFFFF"/>
-                    </a:solidFill>
-                  </a:tcPr>
-                </a:tc>
-              </a:tr>
-              <a:tr h="738188">
-                <a:tc>
-                  <a:txBody>
-                    <a:bodyPr>
-                      <a:noAutofit/>
-                    </a:bodyPr>
-                    <a:lstStyle/>
-                    <a:p>
-                      <a:r>
-                        <a:rPr sz="1875" b="0">
-                          <a:solidFill>
-                            <a:srgbClr val="233542"/>
-                          </a:solidFill>
-                          <a:latin typeface="Arial"/>
-                          <a:ea typeface="Arial"/>
-                          <a:cs typeface="Arial"/>
-                        </a:rPr>
-                        <a:t>G08: extent and agreement</a:t>
-                      </a:r>
-                    </a:p>
-                  </a:txBody>
-                  <a:tcPr marL="91440" marR="91440" marT="45720" marB="45720">
-                    <a:solidFill>
-                      <a:srgbClr val="FFFFFF"/>
-                    </a:solidFill>
-                  </a:tcPr>
-                </a:tc>
-                <a:tc>
-                  <a:txBody>
-                    <a:bodyPr>
-                      <a:noAutofit/>
-                    </a:bodyPr>
-                    <a:lstStyle/>
-                    <a:p>
-                      <a:r>
-                        <a:rPr sz="1875" b="0">
-                          <a:solidFill>
-                            <a:srgbClr val="233542"/>
-                          </a:solidFill>
-                          <a:latin typeface="Arial"/>
-                          <a:ea typeface="Arial"/>
-                          <a:cs typeface="Arial"/>
-                        </a:rPr>
-                        <a:t>State the approximation domain, how the claim is satisfied and how comparable operations are measured.</a:t>
-                      </a:r>
-                    </a:p>
-                  </a:txBody>
-                  <a:tcPr marL="91440" marR="91440" marT="45720" marB="45720">
-                    <a:solidFill>
-                      <a:srgbClr val="FFFFFF"/>
-                    </a:solidFill>
-                  </a:tcPr>
-                </a:tc>
-              </a:tr>
-            </a:tbl>
-          </a:graphicData>
-        </a:graphic>
-      </p:graphicFrame>
       <p:sp>
         <p:nvSpPr>
-          <p:cNvPr id="3" name="">
+          <p:cNvPr id="2" name="">
             <a:extLst xmlns:a="http://schemas.openxmlformats.org/drawingml/2006/main">
               <a:ext uri="{FF2B5EF4-FFF2-40B4-BE49-F238E27FC236}">
-                <a16:creationId xmlns:a16="http://schemas.microsoft.com/office/drawing/2014/main" id="{7067724D-30B3-43B3-8420-0B95B7DB6ED5}"/>
+                <a16:creationId xmlns:a16="http://schemas.microsoft.com/office/drawing/2014/main" id="{8530EC61-A5B0-4739-A78B-9D3ADB1D8F37}"/>
               </a:ext>
             </a:extLst>
           </p:cNvPr>
@@ -3307,8 +3110,8 @@
         </p:nvSpPr>
         <p:spPr>
           <a:xfrm xmlns:a="http://schemas.openxmlformats.org/drawingml/2006/main">
-            <a:off x="609600" y="4743450"/>
-            <a:ext cx="10972800" cy="1828800"/>
+            <a:off x="609600" y="1466850"/>
+            <a:ext cx="10972800" cy="647700"/>
           </a:xfrm>
           <a:prstGeom xmlns:a="http://schemas.openxmlformats.org/drawingml/2006/main" prst="rect">
             <a:avLst/>
@@ -3325,7 +3128,7 @@
           <a:lstStyle xmlns:a="http://schemas.openxmlformats.org/drawingml/2006/main"/>
           <a:p xmlns:a="http://schemas.openxmlformats.org/drawingml/2006/main">
             <a:pPr>
-              <a:defRPr sz="1800" b="0">
+              <a:defRPr sz="2100" b="0">
                 <a:solidFill>
                   <a:srgbClr val="233542"/>
                 </a:solidFill>
@@ -3335,7 +3138,7 @@
               </a:defRPr>
             </a:pPr>
             <a:r>
-              <a:rPr sz="1800" b="0">
+              <a:rPr sz="2100" b="0">
                 <a:solidFill>
                   <a:srgbClr val="233542"/>
                 </a:solidFill>
@@ -3343,7 +3146,464 @@
                 <a:ea typeface="Arial"/>
                 <a:cs typeface="Arial"/>
               </a:rPr>
-              <a:t>Operation accuracy, numerical agreement and approximation over an extent are different claims. A full placement-chain accuracy estimate is not a requirement-28 obligation. Internal differentiation, caching or adapter design is implementation freedom. Missing consumer tests are verification work, not new design questions.</a:t>
+              <a:t>24 tests check lexical identity while preserving represented information.</a:t>
+            </a:r>
+          </a:p>
+        </p:txBody>
+      </p:sp>
+      <p:graphicFrame>
+        <p:nvGraphicFramePr>
+          <p:cNvPr id="8" name=""/>
+          <p:cNvGraphicFramePr/>
+          <p:nvPr/>
+        </p:nvGraphicFramePr>
+        <p:xfrm>
+          <a:off xmlns:a="http://schemas.openxmlformats.org/drawingml/2006/main" x="609600" y="2400300"/>
+          <a:ext xmlns:a="http://schemas.openxmlformats.org/drawingml/2006/main" cx="10972800" cy="2667000"/>
+        </p:xfrm>
+        <a:graphic xmlns:a="http://schemas.openxmlformats.org/drawingml/2006/main">
+          <a:graphicData uri="http://schemas.openxmlformats.org/drawingml/2006/table">
+            <a:tbl>
+              <a:tblPr/>
+              <a:tblGrid>
+                <a:gridCol w="2238375"/>
+                <a:gridCol w="4362450"/>
+                <a:gridCol w="4371975"/>
+              </a:tblGrid>
+              <a:tr h="666750">
+                <a:tc>
+                  <a:txBody>
+                    <a:bodyPr>
+                      <a:noAutofit/>
+                    </a:bodyPr>
+                    <a:lstStyle/>
+                    <a:p>
+                      <a:r>
+                        <a:rPr sz="1725" b="1">
+                          <a:solidFill>
+                            <a:srgbClr val="FFFFFF"/>
+                          </a:solidFill>
+                          <a:latin typeface="Arial"/>
+                          <a:ea typeface="Arial"/>
+                          <a:cs typeface="Arial"/>
+                        </a:rPr>
+                        <a:t>WKT fragment</a:t>
+                      </a:r>
+                    </a:p>
+                  </a:txBody>
+                  <a:tcPr marL="91440" marR="91440" marT="45720" marB="45720">
+                    <a:solidFill>
+                      <a:srgbClr val="233542"/>
+                    </a:solidFill>
+                  </a:tcPr>
+                </a:tc>
+                <a:tc>
+                  <a:txBody>
+                    <a:bodyPr>
+                      <a:noAutofit/>
+                    </a:bodyPr>
+                    <a:lstStyle/>
+                    <a:p>
+                      <a:r>
+                        <a:rPr sz="1725" b="1">
+                          <a:solidFill>
+                            <a:srgbClr val="FFFFFF"/>
+                          </a:solidFill>
+                          <a:latin typeface="Arial"/>
+                          <a:ea typeface="Arial"/>
+                          <a:cs typeface="Arial"/>
+                        </a:rPr>
+                        <a:t>Before</a:t>
+                      </a:r>
+                    </a:p>
+                  </a:txBody>
+                  <a:tcPr marL="91440" marR="91440" marT="45720" marB="45720">
+                    <a:solidFill>
+                      <a:srgbClr val="233542"/>
+                    </a:solidFill>
+                  </a:tcPr>
+                </a:tc>
+                <a:tc>
+                  <a:txBody>
+                    <a:bodyPr>
+                      <a:noAutofit/>
+                    </a:bodyPr>
+                    <a:lstStyle/>
+                    <a:p>
+                      <a:r>
+                        <a:rPr sz="1725" b="1">
+                          <a:solidFill>
+                            <a:srgbClr val="FFFFFF"/>
+                          </a:solidFill>
+                          <a:latin typeface="Arial"/>
+                          <a:ea typeface="Arial"/>
+                          <a:cs typeface="Arial"/>
+                        </a:rPr>
+                        <a:t>Normalized</a:t>
+                      </a:r>
+                    </a:p>
+                  </a:txBody>
+                  <a:tcPr marL="91440" marR="91440" marT="45720" marB="45720">
+                    <a:solidFill>
+                      <a:srgbClr val="233542"/>
+                    </a:solidFill>
+                  </a:tcPr>
+                </a:tc>
+              </a:tr>
+              <a:tr h="666750">
+                <a:tc>
+                  <a:txBody>
+                    <a:bodyPr>
+                      <a:noAutofit/>
+                    </a:bodyPr>
+                    <a:lstStyle/>
+                    <a:p>
+                      <a:r>
+                        <a:rPr sz="1725" b="0">
+                          <a:solidFill>
+                            <a:srgbClr val="233542"/>
+                          </a:solidFill>
+                          <a:latin typeface="Arial"/>
+                          <a:ea typeface="Arial"/>
+                          <a:cs typeface="Arial"/>
+                        </a:rPr>
+                        <a:t>Numeric spelling</a:t>
+                      </a:r>
+                    </a:p>
+                  </a:txBody>
+                  <a:tcPr marL="91440" marR="91440" marT="45720" marB="45720">
+                    <a:solidFill>
+                      <a:srgbClr val="FFFFFF"/>
+                    </a:solidFill>
+                  </a:tcPr>
+                </a:tc>
+                <a:tc>
+                  <a:txBody>
+                    <a:bodyPr>
+                      <a:noAutofit/>
+                    </a:bodyPr>
+                    <a:lstStyle/>
+                    <a:p>
+                      <a:r>
+                        <a:rPr sz="1725" b="0">
+                          <a:solidFill>
+                            <a:srgbClr val="233542"/>
+                          </a:solidFill>
+                          <a:latin typeface="Arial"/>
+                          <a:ea typeface="Arial"/>
+                          <a:cs typeface="Arial"/>
+                        </a:rPr>
+                        <a:t>LENGTHUNIT["metre",1E0]</a:t>
+                      </a:r>
+                    </a:p>
+                  </a:txBody>
+                  <a:tcPr marL="91440" marR="91440" marT="45720" marB="45720">
+                    <a:solidFill>
+                      <a:srgbClr val="FFFFFF"/>
+                    </a:solidFill>
+                  </a:tcPr>
+                </a:tc>
+                <a:tc>
+                  <a:txBody>
+                    <a:bodyPr>
+                      <a:noAutofit/>
+                    </a:bodyPr>
+                    <a:lstStyle/>
+                    <a:p>
+                      <a:r>
+                        <a:rPr sz="1725" b="0">
+                          <a:solidFill>
+                            <a:srgbClr val="233542"/>
+                          </a:solidFill>
+                          <a:latin typeface="Arial"/>
+                          <a:ea typeface="Arial"/>
+                          <a:cs typeface="Arial"/>
+                        </a:rPr>
+                        <a:t>LENGTHUNIT["metre",1.0]</a:t>
+                      </a:r>
+                    </a:p>
+                  </a:txBody>
+                  <a:tcPr marL="91440" marR="91440" marT="45720" marB="45720">
+                    <a:solidFill>
+                      <a:srgbClr val="FFFFFF"/>
+                    </a:solidFill>
+                  </a:tcPr>
+                </a:tc>
+              </a:tr>
+              <a:tr h="666750">
+                <a:tc>
+                  <a:txBody>
+                    <a:bodyPr>
+                      <a:noAutofit/>
+                    </a:bodyPr>
+                    <a:lstStyle/>
+                    <a:p>
+                      <a:r>
+                        <a:rPr sz="1725" b="0">
+                          <a:solidFill>
+                            <a:srgbClr val="233542"/>
+                          </a:solidFill>
+                          <a:latin typeface="Arial"/>
+                          <a:ea typeface="Arial"/>
+                          <a:cs typeface="Arial"/>
+                        </a:rPr>
+                        <a:t>Exact decimal</a:t>
+                      </a:r>
+                    </a:p>
+                  </a:txBody>
+                  <a:tcPr marL="91440" marR="91440" marT="45720" marB="45720">
+                    <a:solidFill>
+                      <a:srgbClr val="FFFFFF"/>
+                    </a:solidFill>
+                  </a:tcPr>
+                </a:tc>
+                <a:tc>
+                  <a:txBody>
+                    <a:bodyPr>
+                      <a:noAutofit/>
+                    </a:bodyPr>
+                    <a:lstStyle/>
+                    <a:p>
+                      <a:r>
+                        <a:rPr sz="1725" b="0">
+                          <a:solidFill>
+                            <a:srgbClr val="233542"/>
+                          </a:solidFill>
+                          <a:latin typeface="Arial"/>
+                          <a:ea typeface="Arial"/>
+                          <a:cs typeface="Arial"/>
+                        </a:rPr>
+                        <a:t>6378137.12345678912345</a:t>
+                      </a:r>
+                    </a:p>
+                  </a:txBody>
+                  <a:tcPr marL="91440" marR="91440" marT="45720" marB="45720">
+                    <a:solidFill>
+                      <a:srgbClr val="FFFFFF"/>
+                    </a:solidFill>
+                  </a:tcPr>
+                </a:tc>
+                <a:tc>
+                  <a:txBody>
+                    <a:bodyPr>
+                      <a:noAutofit/>
+                    </a:bodyPr>
+                    <a:lstStyle/>
+                    <a:p>
+                      <a:r>
+                        <a:rPr sz="1725" b="0">
+                          <a:solidFill>
+                            <a:srgbClr val="233542"/>
+                          </a:solidFill>
+                          <a:latin typeface="Arial"/>
+                          <a:ea typeface="Arial"/>
+                          <a:cs typeface="Arial"/>
+                        </a:rPr>
+                        <a:t>6378137.12345678912345</a:t>
+                      </a:r>
+                    </a:p>
+                  </a:txBody>
+                  <a:tcPr marL="91440" marR="91440" marT="45720" marB="45720">
+                    <a:solidFill>
+                      <a:srgbClr val="FFFFFF"/>
+                    </a:solidFill>
+                  </a:tcPr>
+                </a:tc>
+              </a:tr>
+              <a:tr h="666750">
+                <a:tc>
+                  <a:txBody>
+                    <a:bodyPr>
+                      <a:noAutofit/>
+                    </a:bodyPr>
+                    <a:lstStyle/>
+                    <a:p>
+                      <a:r>
+                        <a:rPr sz="1725" b="0">
+                          <a:solidFill>
+                            <a:srgbClr val="233542"/>
+                          </a:solidFill>
+                          <a:latin typeface="Arial"/>
+                          <a:ea typeface="Arial"/>
+                          <a:cs typeface="Arial"/>
+                        </a:rPr>
+                        <a:t>Quoted content</a:t>
+                      </a:r>
+                    </a:p>
+                  </a:txBody>
+                  <a:tcPr marL="91440" marR="91440" marT="45720" marB="45720">
+                    <a:solidFill>
+                      <a:srgbClr val="FFFFFF"/>
+                    </a:solidFill>
+                  </a:tcPr>
+                </a:tc>
+                <a:tc>
+                  <a:txBody>
+                    <a:bodyPr>
+                      <a:noAutofit/>
+                    </a:bodyPr>
+                    <a:lstStyle/>
+                    <a:p>
+                      <a:r>
+                        <a:rPr sz="1725" b="0">
+                          <a:solidFill>
+                            <a:srgbClr val="233542"/>
+                          </a:solidFill>
+                          <a:latin typeface="Arial"/>
+                          <a:ea typeface="Arial"/>
+                          <a:cs typeface="Arial"/>
+                        </a:rPr>
+                        <a:t>REMARK["Keep  spaces"]</a:t>
+                      </a:r>
+                    </a:p>
+                  </a:txBody>
+                  <a:tcPr marL="91440" marR="91440" marT="45720" marB="45720">
+                    <a:solidFill>
+                      <a:srgbClr val="FFFFFF"/>
+                    </a:solidFill>
+                  </a:tcPr>
+                </a:tc>
+                <a:tc>
+                  <a:txBody>
+                    <a:bodyPr>
+                      <a:noAutofit/>
+                    </a:bodyPr>
+                    <a:lstStyle/>
+                    <a:p>
+                      <a:r>
+                        <a:rPr sz="1725" b="0">
+                          <a:solidFill>
+                            <a:srgbClr val="233542"/>
+                          </a:solidFill>
+                          <a:latin typeface="Arial"/>
+                          <a:ea typeface="Arial"/>
+                          <a:cs typeface="Arial"/>
+                        </a:rPr>
+                        <a:t>REMARK["Keep  spaces"]</a:t>
+                      </a:r>
+                    </a:p>
+                  </a:txBody>
+                  <a:tcPr marL="91440" marR="91440" marT="45720" marB="45720">
+                    <a:solidFill>
+                      <a:srgbClr val="FFFFFF"/>
+                    </a:solidFill>
+                  </a:tcPr>
+                </a:tc>
+              </a:tr>
+            </a:tbl>
+          </a:graphicData>
+        </a:graphic>
+      </p:graphicFrame>
+      <p:sp>
+        <p:nvSpPr>
+          <p:cNvPr id="4" name="">
+            <a:extLst xmlns:a="http://schemas.openxmlformats.org/drawingml/2006/main">
+              <a:ext uri="{FF2B5EF4-FFF2-40B4-BE49-F238E27FC236}">
+                <a16:creationId xmlns:a16="http://schemas.microsoft.com/office/drawing/2014/main" id="{FEFCD270-81A6-45D6-92FC-817B42FE48A8}"/>
+              </a:ext>
+            </a:extLst>
+          </p:cNvPr>
+          <p:cNvSpPr>
+            <a:spLocks xmlns:a="http://schemas.openxmlformats.org/drawingml/2006/main" noGrp="1"/>
+          </p:cNvSpPr>
+          <p:nvPr/>
+        </p:nvSpPr>
+        <p:spPr>
+          <a:xfrm xmlns:a="http://schemas.openxmlformats.org/drawingml/2006/main">
+            <a:off x="609600" y="5381625"/>
+            <a:ext cx="10972800" cy="666750"/>
+          </a:xfrm>
+          <a:prstGeom xmlns:a="http://schemas.openxmlformats.org/drawingml/2006/main" prst="rect">
+            <a:avLst/>
+          </a:prstGeom>
+          <a:noFill xmlns:a="http://schemas.openxmlformats.org/drawingml/2006/main"/>
+          <a:ln xmlns:a="http://schemas.openxmlformats.org/drawingml/2006/main" w="0">
+            <a:noFill/>
+          </a:ln>
+        </p:spPr>
+        <p:txBody>
+          <a:bodyPr xmlns:a="http://schemas.openxmlformats.org/drawingml/2006/main">
+            <a:noAutofit/>
+          </a:bodyPr>
+          <a:lstStyle xmlns:a="http://schemas.openxmlformats.org/drawingml/2006/main"/>
+          <a:p xmlns:a="http://schemas.openxmlformats.org/drawingml/2006/main">
+            <a:pPr>
+              <a:defRPr sz="2025" b="0">
+                <a:solidFill>
+                  <a:srgbClr val="233542"/>
+                </a:solidFill>
+                <a:latin typeface="Arial"/>
+                <a:ea typeface="Arial"/>
+                <a:cs typeface="Arial"/>
+              </a:defRPr>
+            </a:pPr>
+            <a:r>
+              <a:rPr sz="2025" b="0">
+                <a:solidFill>
+                  <a:srgbClr val="233542"/>
+                </a:solidFill>
+                <a:latin typeface="Arial"/>
+                <a:ea typeface="Arial"/>
+                <a:cs typeface="Arial"/>
+              </a:rPr>
+              <a:t>Different display names retain different tokens. CRS equivalence requires a separate engine comparison.</a:t>
+            </a:r>
+          </a:p>
+        </p:txBody>
+      </p:sp>
+      <p:sp>
+        <p:nvSpPr>
+          <p:cNvPr id="5" name="">
+            <a:extLst xmlns:a="http://schemas.openxmlformats.org/drawingml/2006/main">
+              <a:ext uri="{FF2B5EF4-FFF2-40B4-BE49-F238E27FC236}">
+                <a16:creationId xmlns:a16="http://schemas.microsoft.com/office/drawing/2014/main" id="{45F7D35E-9A2E-47F4-878C-478D8FA04527}"/>
+              </a:ext>
+            </a:extLst>
+          </p:cNvPr>
+          <p:cNvSpPr>
+            <a:spLocks xmlns:a="http://schemas.openxmlformats.org/drawingml/2006/main" noGrp="1"/>
+          </p:cNvSpPr>
+          <p:nvPr/>
+        </p:nvSpPr>
+        <p:spPr>
+          <a:xfrm xmlns:a="http://schemas.openxmlformats.org/drawingml/2006/main">
+            <a:off x="609600" y="6267450"/>
+            <a:ext cx="10972800" cy="400050"/>
+          </a:xfrm>
+          <a:prstGeom xmlns:a="http://schemas.openxmlformats.org/drawingml/2006/main" prst="rect">
+            <a:avLst/>
+          </a:prstGeom>
+          <a:noFill xmlns:a="http://schemas.openxmlformats.org/drawingml/2006/main"/>
+          <a:ln xmlns:a="http://schemas.openxmlformats.org/drawingml/2006/main" w="0">
+            <a:noFill/>
+          </a:ln>
+        </p:spPr>
+        <p:txBody>
+          <a:bodyPr xmlns:a="http://schemas.openxmlformats.org/drawingml/2006/main">
+            <a:noAutofit/>
+          </a:bodyPr>
+          <a:lstStyle xmlns:a="http://schemas.openxmlformats.org/drawingml/2006/main"/>
+          <a:p xmlns:a="http://schemas.openxmlformats.org/drawingml/2006/main">
+            <a:pPr>
+              <a:defRPr sz="1500" b="0">
+                <a:solidFill>
+                  <a:srgbClr val="233542"/>
+                </a:solidFill>
+                <a:latin typeface="Arial"/>
+                <a:ea typeface="Arial"/>
+                <a:cs typeface="Arial"/>
+              </a:defRPr>
+            </a:pPr>
+            <a:r>
+              <a:rPr sz="1500" b="0">
+                <a:solidFill>
+                  <a:srgbClr val="233542"/>
+                </a:solidFill>
+                <a:latin typeface="Arial"/>
+                <a:ea typeface="Arial"/>
+                <a:cs typeface="Arial"/>
+              </a:rPr>
+              <a:t>Illustrative fragments from the tested lexical rules. Context-sensitive legacy UNIT aliases are unsupported.</a:t>
             </a:r>
           </a:p>
         </p:txBody>
@@ -3351,7 +3611,7 @@
     </p:spTree>
     <p:extLst>
       <p:ext uri="{BB962C8B-B14F-4D97-AF65-F5344CB8AC3E}">
-        <p14:creationId xmlns:p14="http://schemas.microsoft.com/office/powerpoint/2010/main" val="2054069735"/>
+        <p14:creationId xmlns:p14="http://schemas.microsoft.com/office/powerpoint/2010/main" val="343420008"/>
       </p:ext>
     </p:extLst>
   </p:cSld>
@@ -3379,10 +3639,10 @@
       </p:grpSpPr>
       <p:sp>
         <p:nvSpPr>
-          <p:cNvPr id="4" name="">
+          <p:cNvPr id="5" name="">
             <a:extLst xmlns:a="http://schemas.openxmlformats.org/drawingml/2006/main">
               <a:ext uri="{FF2B5EF4-FFF2-40B4-BE49-F238E27FC236}">
-                <a16:creationId xmlns:a16="http://schemas.microsoft.com/office/drawing/2014/main" id="{6856C54F-7B27-4301-AA12-7781FA456691}"/>
+                <a16:creationId xmlns:a16="http://schemas.microsoft.com/office/drawing/2014/main" id="{6AC68655-A247-4C9B-8F67-9A8BA099889E}"/>
               </a:ext>
             </a:extLst>
           </p:cNvPr>
@@ -3429,40 +3689,41 @@
                 <a:ea typeface="Arial"/>
                 <a:cs typeface="Arial"/>
               </a:rPr>
-              <a:t>A concrete composition result</a:t>
+              <a:t>Executed reader coverage</a:t>
             </a:r>
           </a:p>
         </p:txBody>
       </p:sp>
       <p:graphicFrame>
         <p:nvGraphicFramePr>
-          <p:cNvPr id="5" name=""/>
+          <p:cNvPr id="6" name=""/>
           <p:cNvGraphicFramePr/>
           <p:nvPr/>
         </p:nvGraphicFramePr>
         <p:xfrm>
-          <a:off xmlns:a="http://schemas.openxmlformats.org/drawingml/2006/main" x="609600" y="1562100"/>
-          <a:ext xmlns:a="http://schemas.openxmlformats.org/drawingml/2006/main" cx="10972800" cy="3238500"/>
+          <a:off xmlns:a="http://schemas.openxmlformats.org/drawingml/2006/main" x="609600" y="1524000"/>
+          <a:ext xmlns:a="http://schemas.openxmlformats.org/drawingml/2006/main" cx="10972800" cy="2667000"/>
         </p:xfrm>
         <a:graphic xmlns:a="http://schemas.openxmlformats.org/drawingml/2006/main">
           <a:graphicData uri="http://schemas.openxmlformats.org/drawingml/2006/table">
             <a:tbl>
-              <a:tblPr firstRow="1" bandRow="0"/>
+              <a:tblPr/>
               <a:tblGrid>
-                <a:gridCol w="4572000"/>
-                <a:gridCol w="3143250"/>
-                <a:gridCol w="3257550"/>
+                <a:gridCol w="4714875"/>
+                <a:gridCol w="2085975"/>
+                <a:gridCol w="2085975"/>
+                <a:gridCol w="2085975"/>
               </a:tblGrid>
-              <a:tr h="647700">
-                <a:tc>
-                  <a:txBody>
-                    <a:bodyPr>
-                      <a:noAutofit/>
-                    </a:bodyPr>
-                    <a:lstStyle/>
-                    <a:p>
-                      <a:r>
-                        <a:rPr sz="1800" b="1">
+              <a:tr h="666750">
+                <a:tc>
+                  <a:txBody>
+                    <a:bodyPr>
+                      <a:noAutofit/>
+                    </a:bodyPr>
+                    <a:lstStyle/>
+                    <a:p>
+                      <a:r>
+                        <a:rPr sz="1875" b="1">
                           <a:solidFill>
                             <a:srgbClr val="FFFFFF"/>
                           </a:solidFill>
@@ -3470,7 +3731,7 @@
                           <a:ea typeface="Arial"/>
                           <a:cs typeface="Arial"/>
                         </a:rPr>
-                        <a:t>Queried prim</a:t>
+                        <a:t>Control family</a:t>
                       </a:r>
                     </a:p>
                   </a:txBody>
@@ -3488,7 +3749,7 @@
                     <a:lstStyle/>
                     <a:p>
                       <a:r>
-                        <a:rPr sz="1800" b="1">
+                        <a:rPr sz="1875" b="1">
                           <a:solidFill>
                             <a:srgbClr val="FFFFFF"/>
                           </a:solidFill>
@@ -3496,7 +3757,7 @@
                           <a:ea typeface="Arial"/>
                           <a:cs typeface="Arial"/>
                         </a:rPr>
-                        <a:t>Nearest direct binding</a:t>
+                        <a:t>Cases per reader</a:t>
                       </a:r>
                     </a:p>
                   </a:txBody>
@@ -3514,7 +3775,7 @@
                     <a:lstStyle/>
                     <a:p>
                       <a:r>
-                        <a:rPr sz="1800" b="1">
+                        <a:rPr sz="1875" b="1">
                           <a:solidFill>
                             <a:srgbClr val="FFFFFF"/>
                           </a:solidFill>
@@ -3522,7 +3783,7 @@
                           <a:ea typeface="Arial"/>
                           <a:cs typeface="Arial"/>
                         </a:rPr>
-                        <a:t>Returned definition</a:t>
+                        <a:t>Queries per reader</a:t>
                       </a:r>
                     </a:p>
                   </a:txBody>
@@ -3532,77 +3793,129 @@
                     </a:solidFill>
                   </a:tcPr>
                 </a:tc>
+                <a:tc>
+                  <a:txBody>
+                    <a:bodyPr>
+                      <a:noAutofit/>
+                    </a:bodyPr>
+                    <a:lstStyle/>
+                    <a:p>
+                      <a:r>
+                        <a:rPr sz="1875" b="1">
+                          <a:solidFill>
+                            <a:srgbClr val="FFFFFF"/>
+                          </a:solidFill>
+                          <a:latin typeface="Arial"/>
+                          <a:ea typeface="Arial"/>
+                          <a:cs typeface="Arial"/>
+                        </a:rPr>
+                        <a:t>Expected failures</a:t>
+                      </a:r>
+                    </a:p>
+                  </a:txBody>
+                  <a:tcPr marL="91440" marR="91440" marT="45720" marB="45720">
+                    <a:solidFill>
+                      <a:srgbClr val="233542"/>
+                    </a:solidFill>
+                  </a:tcPr>
+                </a:tc>
               </a:tr>
-              <a:tr h="647700">
-                <a:tc>
-                  <a:txBody>
-                    <a:bodyPr>
-                      <a:noAutofit/>
-                    </a:bodyPr>
-                    <a:lstStyle/>
-                    <a:p>
-                      <a:r>
-                        <a:rPr sz="1800" b="0">
-                          <a:solidFill>
-                            <a:srgbClr val="233542"/>
-                          </a:solidFill>
-                          <a:latin typeface="Arial"/>
-                          <a:ea typeface="Arial"/>
-                          <a:cs typeface="Arial"/>
-                        </a:rPr>
-                        <a:t>/World/Data</a:t>
-                      </a:r>
-                    </a:p>
-                  </a:txBody>
-                  <a:tcPr marL="91440" marR="91440" marT="45720" marB="45720">
-                    <a:solidFill>
-                      <a:srgbClr val="FFFFFF"/>
-                    </a:solidFill>
-                  </a:tcPr>
-                </a:tc>
-                <a:tc>
-                  <a:txBody>
-                    <a:bodyPr>
-                      <a:noAutofit/>
-                    </a:bodyPr>
-                    <a:lstStyle/>
-                    <a:p>
-                      <a:r>
-                        <a:rPr sz="1800" b="0">
-                          <a:solidFill>
-                            <a:srgbClr val="233542"/>
-                          </a:solidFill>
-                          <a:latin typeface="Arial"/>
-                          <a:ea typeface="Arial"/>
-                          <a:cs typeface="Arial"/>
-                        </a:rPr>
-                        <a:t>/World</a:t>
-                      </a:r>
-                    </a:p>
-                  </a:txBody>
-                  <a:tcPr marL="91440" marR="91440" marT="45720" marB="45720">
-                    <a:solidFill>
-                      <a:srgbClr val="FFFFFF"/>
-                    </a:solidFill>
-                  </a:tcPr>
-                </a:tc>
-                <a:tc>
-                  <a:txBody>
-                    <a:bodyPr>
-                      <a:noAutofit/>
-                    </a:bodyPr>
-                    <a:lstStyle/>
-                    <a:p>
-                      <a:r>
-                        <a:rPr sz="1800" b="0">
-                          <a:solidFill>
-                            <a:srgbClr val="233542"/>
-                          </a:solidFill>
-                          <a:latin typeface="Arial"/>
-                          <a:ea typeface="Arial"/>
-                          <a:cs typeface="Arial"/>
-                        </a:rPr>
-                        <a:t>Geocentric ITRF2020</a:t>
+              <a:tr h="666750">
+                <a:tc>
+                  <a:txBody>
+                    <a:bodyPr>
+                      <a:noAutofit/>
+                    </a:bodyPr>
+                    <a:lstStyle/>
+                    <a:p>
+                      <a:r>
+                        <a:rPr sz="1875" b="0">
+                          <a:solidFill>
+                            <a:srgbClr val="233542"/>
+                          </a:solidFill>
+                          <a:latin typeface="Arial"/>
+                          <a:ea typeface="Arial"/>
+                          <a:cs typeface="Arial"/>
+                        </a:rPr>
+                        <a:t>Binding and composition</a:t>
+                      </a:r>
+                    </a:p>
+                  </a:txBody>
+                  <a:tcPr marL="91440" marR="91440" marT="45720" marB="45720">
+                    <a:solidFill>
+                      <a:srgbClr val="FFFFFF"/>
+                    </a:solidFill>
+                  </a:tcPr>
+                </a:tc>
+                <a:tc>
+                  <a:txBody>
+                    <a:bodyPr>
+                      <a:noAutofit/>
+                    </a:bodyPr>
+                    <a:lstStyle/>
+                    <a:p>
+                      <a:r>
+                        <a:rPr sz="1875" b="0">
+                          <a:solidFill>
+                            <a:srgbClr val="233542"/>
+                          </a:solidFill>
+                          <a:latin typeface="Arial"/>
+                          <a:ea typeface="Arial"/>
+                          <a:cs typeface="Arial"/>
+                        </a:rPr>
+                        <a:t>12</a:t>
+                      </a:r>
+                    </a:p>
+                  </a:txBody>
+                  <a:tcPr marL="91440" marR="91440" marT="45720" marB="45720">
+                    <a:solidFill>
+                      <a:srgbClr val="FFFFFF"/>
+                    </a:solidFill>
+                  </a:tcPr>
+                </a:tc>
+                <a:tc>
+                  <a:txBody>
+                    <a:bodyPr>
+                      <a:noAutofit/>
+                    </a:bodyPr>
+                    <a:lstStyle/>
+                    <a:p>
+                      <a:r>
+                        <a:rPr sz="1875" b="0">
+                          <a:solidFill>
+                            <a:srgbClr val="233542"/>
+                          </a:solidFill>
+                          <a:latin typeface="Arial"/>
+                          <a:ea typeface="Arial"/>
+                          <a:cs typeface="Arial"/>
+                        </a:rPr>
+                        <a:t>19</a:t>
+                      </a:r>
+                    </a:p>
+                  </a:txBody>
+                  <a:tcPr marL="91440" marR="91440" marT="45720" marB="45720">
+                    <a:solidFill>
+                      <a:srgbClr val="FFFFFF"/>
+                    </a:solidFill>
+                  </a:tcPr>
+                </a:tc>
+                <a:tc>
+                  <a:txBody>
+                    <a:bodyPr>
+                      <a:noAutofit/>
+                    </a:bodyPr>
+                    <a:lstStyle/>
+                    <a:p>
+                      <a:r>
+                        <a:rPr sz="1875" b="0">
+                          <a:solidFill>
+                            <a:srgbClr val="233542"/>
+                          </a:solidFill>
+                          <a:latin typeface="Arial"/>
+                          <a:ea typeface="Arial"/>
+                          <a:cs typeface="Arial"/>
+                        </a:rPr>
+                        <a:t>6</a:t>
                       </a:r>
                     </a:p>
                   </a:txBody>
@@ -3613,76 +3926,102 @@
                   </a:tcPr>
                 </a:tc>
               </a:tr>
-              <a:tr h="647700">
-                <a:tc>
-                  <a:txBody>
-                    <a:bodyPr>
-                      <a:noAutofit/>
-                    </a:bodyPr>
-                    <a:lstStyle/>
-                    <a:p>
-                      <a:r>
-                        <a:rPr sz="1800" b="0">
-                          <a:solidFill>
-                            <a:srgbClr val="233542"/>
-                          </a:solidFill>
-                          <a:latin typeface="Arial"/>
-                          <a:ea typeface="Arial"/>
-                          <a:cs typeface="Arial"/>
-                        </a:rPr>
-                        <a:t>/World/Independent/Data</a:t>
-                      </a:r>
-                    </a:p>
-                  </a:txBody>
-                  <a:tcPr marL="91440" marR="91440" marT="45720" marB="45720">
-                    <a:solidFill>
-                      <a:srgbClr val="FFFFFF"/>
-                    </a:solidFill>
-                  </a:tcPr>
-                </a:tc>
-                <a:tc>
-                  <a:txBody>
-                    <a:bodyPr>
-                      <a:noAutofit/>
-                    </a:bodyPr>
-                    <a:lstStyle/>
-                    <a:p>
-                      <a:r>
-                        <a:rPr sz="1800" b="0">
-                          <a:solidFill>
-                            <a:srgbClr val="233542"/>
-                          </a:solidFill>
-                          <a:latin typeface="Arial"/>
-                          <a:ea typeface="Arial"/>
-                          <a:cs typeface="Arial"/>
-                        </a:rPr>
-                        <a:t>/World/Independent</a:t>
-                      </a:r>
-                    </a:p>
-                  </a:txBody>
-                  <a:tcPr marL="91440" marR="91440" marT="45720" marB="45720">
-                    <a:solidFill>
-                      <a:srgbClr val="FFFFFF"/>
-                    </a:solidFill>
-                  </a:tcPr>
-                </a:tc>
-                <a:tc>
-                  <a:txBody>
-                    <a:bodyPr>
-                      <a:noAutofit/>
-                    </a:bodyPr>
-                    <a:lstStyle/>
-                    <a:p>
-                      <a:r>
-                        <a:rPr sz="1800" b="0">
-                          <a:solidFill>
-                            <a:srgbClr val="233542"/>
-                          </a:solidFill>
-                          <a:latin typeface="Arial"/>
-                          <a:ea typeface="Arial"/>
-                          <a:cs typeface="Arial"/>
-                        </a:rPr>
-                        <a:t>NAD83 grid with NAVD88 height</a:t>
+              <a:tr h="666750">
+                <a:tc>
+                  <a:txBody>
+                    <a:bodyPr>
+                      <a:noAutofit/>
+                    </a:bodyPr>
+                    <a:lstStyle/>
+                    <a:p>
+                      <a:r>
+                        <a:rPr sz="1875" b="0">
+                          <a:solidFill>
+                            <a:srgbClr val="233542"/>
+                          </a:solidFill>
+                          <a:latin typeface="Arial"/>
+                          <a:ea typeface="Arial"/>
+                          <a:cs typeface="Arial"/>
+                        </a:rPr>
+                        <a:t>Source placement values</a:t>
+                      </a:r>
+                    </a:p>
+                  </a:txBody>
+                  <a:tcPr marL="91440" marR="91440" marT="45720" marB="45720">
+                    <a:solidFill>
+                      <a:srgbClr val="FFFFFF"/>
+                    </a:solidFill>
+                  </a:tcPr>
+                </a:tc>
+                <a:tc>
+                  <a:txBody>
+                    <a:bodyPr>
+                      <a:noAutofit/>
+                    </a:bodyPr>
+                    <a:lstStyle/>
+                    <a:p>
+                      <a:r>
+                        <a:rPr sz="1875" b="0">
+                          <a:solidFill>
+                            <a:srgbClr val="233542"/>
+                          </a:solidFill>
+                          <a:latin typeface="Arial"/>
+                          <a:ea typeface="Arial"/>
+                          <a:cs typeface="Arial"/>
+                        </a:rPr>
+                        <a:t>12</a:t>
+                      </a:r>
+                    </a:p>
+                  </a:txBody>
+                  <a:tcPr marL="91440" marR="91440" marT="45720" marB="45720">
+                    <a:solidFill>
+                      <a:srgbClr val="FFFFFF"/>
+                    </a:solidFill>
+                  </a:tcPr>
+                </a:tc>
+                <a:tc>
+                  <a:txBody>
+                    <a:bodyPr>
+                      <a:noAutofit/>
+                    </a:bodyPr>
+                    <a:lstStyle/>
+                    <a:p>
+                      <a:r>
+                        <a:rPr sz="1875" b="0">
+                          <a:solidFill>
+                            <a:srgbClr val="233542"/>
+                          </a:solidFill>
+                          <a:latin typeface="Arial"/>
+                          <a:ea typeface="Arial"/>
+                          <a:cs typeface="Arial"/>
+                        </a:rPr>
+                        <a:t>12</a:t>
+                      </a:r>
+                    </a:p>
+                  </a:txBody>
+                  <a:tcPr marL="91440" marR="91440" marT="45720" marB="45720">
+                    <a:solidFill>
+                      <a:srgbClr val="FFFFFF"/>
+                    </a:solidFill>
+                  </a:tcPr>
+                </a:tc>
+                <a:tc>
+                  <a:txBody>
+                    <a:bodyPr>
+                      <a:noAutofit/>
+                    </a:bodyPr>
+                    <a:lstStyle/>
+                    <a:p>
+                      <a:r>
+                        <a:rPr sz="1875" b="0">
+                          <a:solidFill>
+                            <a:srgbClr val="233542"/>
+                          </a:solidFill>
+                          <a:latin typeface="Arial"/>
+                          <a:ea typeface="Arial"/>
+                          <a:cs typeface="Arial"/>
+                        </a:rPr>
+                        <a:t>6</a:t>
                       </a:r>
                     </a:p>
                   </a:txBody>
@@ -3693,156 +4032,102 @@
                   </a:tcPr>
                 </a:tc>
               </a:tr>
-              <a:tr h="647700">
-                <a:tc>
-                  <a:txBody>
-                    <a:bodyPr>
-                      <a:noAutofit/>
-                    </a:bodyPr>
-                    <a:lstStyle/>
-                    <a:p>
-                      <a:r>
-                        <a:rPr sz="1800" b="0">
-                          <a:solidFill>
-                            <a:srgbClr val="233542"/>
-                          </a:solidFill>
-                          <a:latin typeface="Arial"/>
-                          <a:ea typeface="Arial"/>
-                          <a:cs typeface="Arial"/>
-                        </a:rPr>
-                        <a:t>/World/Unmarked</a:t>
-                      </a:r>
-                    </a:p>
-                  </a:txBody>
-                  <a:tcPr marL="91440" marR="91440" marT="45720" marB="45720">
-                    <a:solidFill>
-                      <a:srgbClr val="FFFFFF"/>
-                    </a:solidFill>
-                  </a:tcPr>
-                </a:tc>
-                <a:tc>
-                  <a:txBody>
-                    <a:bodyPr>
-                      <a:noAutofit/>
-                    </a:bodyPr>
-                    <a:lstStyle/>
-                    <a:p>
-                      <a:r>
-                        <a:rPr sz="1800" b="0">
-                          <a:solidFill>
-                            <a:srgbClr val="233542"/>
-                          </a:solidFill>
-                          <a:latin typeface="Arial"/>
-                          <a:ea typeface="Arial"/>
-                          <a:cs typeface="Arial"/>
-                        </a:rPr>
-                        <a:t>/World</a:t>
-                      </a:r>
-                    </a:p>
-                  </a:txBody>
-                  <a:tcPr marL="91440" marR="91440" marT="45720" marB="45720">
-                    <a:solidFill>
-                      <a:srgbClr val="FFFFFF"/>
-                    </a:solidFill>
-                  </a:tcPr>
-                </a:tc>
-                <a:tc>
-                  <a:txBody>
-                    <a:bodyPr>
-                      <a:noAutofit/>
-                    </a:bodyPr>
-                    <a:lstStyle/>
-                    <a:p>
-                      <a:r>
-                        <a:rPr sz="1800" b="0">
-                          <a:solidFill>
-                            <a:srgbClr val="233542"/>
-                          </a:solidFill>
-                          <a:latin typeface="Arial"/>
-                          <a:ea typeface="Arial"/>
-                          <a:cs typeface="Arial"/>
-                        </a:rPr>
-                        <a:t>Geocentric ITRF2020</a:t>
-                      </a:r>
-                    </a:p>
-                  </a:txBody>
-                  <a:tcPr marL="91440" marR="91440" marT="45720" marB="45720">
-                    <a:solidFill>
-                      <a:srgbClr val="FFFFFF"/>
-                    </a:solidFill>
-                  </a:tcPr>
-                </a:tc>
-              </a:tr>
-              <a:tr h="647700">
-                <a:tc>
-                  <a:txBody>
-                    <a:bodyPr>
-                      <a:noAutofit/>
-                    </a:bodyPr>
-                    <a:lstStyle/>
-                    <a:p>
-                      <a:r>
-                        <a:rPr sz="1800" b="0">
-                          <a:solidFill>
-                            <a:srgbClr val="233542"/>
-                          </a:solidFill>
-                          <a:latin typeface="Arial"/>
-                          <a:ea typeface="Arial"/>
-                          <a:cs typeface="Arial"/>
-                        </a:rPr>
-                        <a:t>/Assembly/Independent/Data</a:t>
-                      </a:r>
-                    </a:p>
-                  </a:txBody>
-                  <a:tcPr marL="91440" marR="91440" marT="45720" marB="45720">
-                    <a:solidFill>
-                      <a:srgbClr val="FFFFFF"/>
-                    </a:solidFill>
-                  </a:tcPr>
-                </a:tc>
-                <a:tc>
-                  <a:txBody>
-                    <a:bodyPr>
-                      <a:noAutofit/>
-                    </a:bodyPr>
-                    <a:lstStyle/>
-                    <a:p>
-                      <a:r>
-                        <a:rPr sz="1800" b="0">
-                          <a:solidFill>
-                            <a:srgbClr val="233542"/>
-                          </a:solidFill>
-                          <a:latin typeface="Arial"/>
-                          <a:ea typeface="Arial"/>
-                          <a:cs typeface="Arial"/>
-                        </a:rPr>
-                        <a:t>/Assembly/Independent</a:t>
-                      </a:r>
-                    </a:p>
-                  </a:txBody>
-                  <a:tcPr marL="91440" marR="91440" marT="45720" marB="45720">
-                    <a:solidFill>
-                      <a:srgbClr val="FFFFFF"/>
-                    </a:solidFill>
-                  </a:tcPr>
-                </a:tc>
-                <a:tc>
-                  <a:txBody>
-                    <a:bodyPr>
-                      <a:noAutofit/>
-                    </a:bodyPr>
-                    <a:lstStyle/>
-                    <a:p>
-                      <a:r>
-                        <a:rPr sz="1800" b="0">
-                          <a:solidFill>
-                            <a:srgbClr val="233542"/>
-                          </a:solidFill>
-                          <a:latin typeface="Arial"/>
-                          <a:ea typeface="Arial"/>
-                          <a:cs typeface="Arial"/>
-                        </a:rPr>
-                        <a:t>NAD83 grid with NAVD88 height</a:t>
+              <a:tr h="666750">
+                <a:tc>
+                  <a:txBody>
+                    <a:bodyPr>
+                      <a:noAutofit/>
+                    </a:bodyPr>
+                    <a:lstStyle/>
+                    <a:p>
+                      <a:r>
+                        <a:rPr sz="1875" b="0">
+                          <a:solidFill>
+                            <a:srgbClr val="233542"/>
+                          </a:solidFill>
+                          <a:latin typeface="Arial"/>
+                          <a:ea typeface="Arial"/>
+                          <a:cs typeface="Arial"/>
+                        </a:rPr>
+                        <a:t>Direct anchor-origin coordinates</a:t>
+                      </a:r>
+                    </a:p>
+                  </a:txBody>
+                  <a:tcPr marL="91440" marR="91440" marT="45720" marB="45720">
+                    <a:solidFill>
+                      <a:srgbClr val="FFFFFF"/>
+                    </a:solidFill>
+                  </a:tcPr>
+                </a:tc>
+                <a:tc>
+                  <a:txBody>
+                    <a:bodyPr>
+                      <a:noAutofit/>
+                    </a:bodyPr>
+                    <a:lstStyle/>
+                    <a:p>
+                      <a:r>
+                        <a:rPr sz="1875" b="0">
+                          <a:solidFill>
+                            <a:srgbClr val="233542"/>
+                          </a:solidFill>
+                          <a:latin typeface="Arial"/>
+                          <a:ea typeface="Arial"/>
+                          <a:cs typeface="Arial"/>
+                        </a:rPr>
+                        <a:t>13</a:t>
+                      </a:r>
+                    </a:p>
+                  </a:txBody>
+                  <a:tcPr marL="91440" marR="91440" marT="45720" marB="45720">
+                    <a:solidFill>
+                      <a:srgbClr val="FFFFFF"/>
+                    </a:solidFill>
+                  </a:tcPr>
+                </a:tc>
+                <a:tc>
+                  <a:txBody>
+                    <a:bodyPr>
+                      <a:noAutofit/>
+                    </a:bodyPr>
+                    <a:lstStyle/>
+                    <a:p>
+                      <a:r>
+                        <a:rPr sz="1875" b="0">
+                          <a:solidFill>
+                            <a:srgbClr val="233542"/>
+                          </a:solidFill>
+                          <a:latin typeface="Arial"/>
+                          <a:ea typeface="Arial"/>
+                          <a:cs typeface="Arial"/>
+                        </a:rPr>
+                        <a:t>137</a:t>
+                      </a:r>
+                    </a:p>
+                  </a:txBody>
+                  <a:tcPr marL="91440" marR="91440" marT="45720" marB="45720">
+                    <a:solidFill>
+                      <a:srgbClr val="FFFFFF"/>
+                    </a:solidFill>
+                  </a:tcPr>
+                </a:tc>
+                <a:tc>
+                  <a:txBody>
+                    <a:bodyPr>
+                      <a:noAutofit/>
+                    </a:bodyPr>
+                    <a:lstStyle/>
+                    <a:p>
+                      <a:r>
+                        <a:rPr sz="1875" b="0">
+                          <a:solidFill>
+                            <a:srgbClr val="233542"/>
+                          </a:solidFill>
+                          <a:latin typeface="Arial"/>
+                          <a:ea typeface="Arial"/>
+                          <a:cs typeface="Arial"/>
+                        </a:rPr>
+                        <a:t>5</a:t>
                       </a:r>
                     </a:p>
                   </a:txBody>
@@ -3862,7 +4147,7 @@
           <p:cNvPr id="3" name="">
             <a:extLst xmlns:a="http://schemas.openxmlformats.org/drawingml/2006/main">
               <a:ext uri="{FF2B5EF4-FFF2-40B4-BE49-F238E27FC236}">
-                <a16:creationId xmlns:a16="http://schemas.microsoft.com/office/drawing/2014/main" id="{FBBE5CC8-5060-438A-A8E0-054B4F096E81}"/>
+                <a16:creationId xmlns:a16="http://schemas.microsoft.com/office/drawing/2014/main" id="{70B3864F-FEFC-4EC0-A8B7-4659F9066A8B}"/>
               </a:ext>
             </a:extLst>
           </p:cNvPr>
@@ -3873,8 +4158,8 @@
         </p:nvSpPr>
         <p:spPr>
           <a:xfrm xmlns:a="http://schemas.openxmlformats.org/drawingml/2006/main">
-            <a:off x="609600" y="5029200"/>
-            <a:ext cx="10972800" cy="1543050"/>
+            <a:off x="609600" y="4600575"/>
+            <a:ext cx="10972800" cy="876300"/>
           </a:xfrm>
           <a:prstGeom xmlns:a="http://schemas.openxmlformats.org/drawingml/2006/main" prst="rect">
             <a:avLst/>
@@ -3891,7 +4176,7 @@
           <a:lstStyle xmlns:a="http://schemas.openxmlformats.org/drawingml/2006/main"/>
           <a:p xmlns:a="http://schemas.openxmlformats.org/drawingml/2006/main">
             <a:pPr>
-              <a:defRPr sz="1800" b="0">
+              <a:defRPr sz="2025" b="0">
                 <a:solidFill>
                   <a:srgbClr val="233542"/>
                 </a:solidFill>
@@ -3901,7 +4186,7 @@
               </a:defRPr>
             </a:pPr>
             <a:r>
-              <a:rPr sz="1800" b="0">
+              <a:rPr sz="2025" b="0">
                 <a:solidFill>
                   <a:srgbClr val="233542"/>
                 </a:solidFill>
@@ -3909,7 +4194,64 @@
                 <a:ea typeface="Arial"/>
                 <a:cs typeface="Arial"/>
               </a:rPr>
-              <a:t>The independent descendant keeps its own source CRS when the scene is referenced into an assembly. An unmarked WKT property does not establish a new binding.</a:t>
+              <a:t>Every reader checks the same authored scenes. Direct origins include France projections, Colorado site calibration and analytic ECEF conversions.</a:t>
+            </a:r>
+          </a:p>
+        </p:txBody>
+      </p:sp>
+      <p:sp>
+        <p:nvSpPr>
+          <p:cNvPr id="4" name="">
+            <a:extLst xmlns:a="http://schemas.openxmlformats.org/drawingml/2006/main">
+              <a:ext uri="{FF2B5EF4-FFF2-40B4-BE49-F238E27FC236}">
+                <a16:creationId xmlns:a16="http://schemas.microsoft.com/office/drawing/2014/main" id="{907B1A33-0781-40F2-B0C4-8C4AB26D0838}"/>
+              </a:ext>
+            </a:extLst>
+          </p:cNvPr>
+          <p:cNvSpPr>
+            <a:spLocks xmlns:a="http://schemas.openxmlformats.org/drawingml/2006/main" noGrp="1"/>
+          </p:cNvSpPr>
+          <p:nvPr/>
+        </p:nvSpPr>
+        <p:spPr>
+          <a:xfrm xmlns:a="http://schemas.openxmlformats.org/drawingml/2006/main">
+            <a:off x="609600" y="5800725"/>
+            <a:ext cx="10972800" cy="638175"/>
+          </a:xfrm>
+          <a:prstGeom xmlns:a="http://schemas.openxmlformats.org/drawingml/2006/main" prst="rect">
+            <a:avLst/>
+          </a:prstGeom>
+          <a:noFill xmlns:a="http://schemas.openxmlformats.org/drawingml/2006/main"/>
+          <a:ln xmlns:a="http://schemas.openxmlformats.org/drawingml/2006/main" w="0">
+            <a:noFill/>
+          </a:ln>
+        </p:spPr>
+        <p:txBody>
+          <a:bodyPr xmlns:a="http://schemas.openxmlformats.org/drawingml/2006/main">
+            <a:noAutofit/>
+          </a:bodyPr>
+          <a:lstStyle xmlns:a="http://schemas.openxmlformats.org/drawingml/2006/main"/>
+          <a:p xmlns:a="http://schemas.openxmlformats.org/drawingml/2006/main">
+            <a:pPr>
+              <a:defRPr sz="1725" b="0">
+                <a:solidFill>
+                  <a:srgbClr val="233542"/>
+                </a:solidFill>
+                <a:latin typeface="Arial"/>
+                <a:ea typeface="Arial"/>
+                <a:cs typeface="Arial"/>
+              </a:defRPr>
+            </a:pPr>
+            <a:r>
+              <a:rPr sz="1725" b="0">
+                <a:solidFill>
+                  <a:srgbClr val="233542"/>
+                </a:solidFill>
+                <a:latin typeface="Arial"/>
+                <a:ea typeface="Arial"/>
+                <a:cs typeface="Arial"/>
+              </a:rPr>
+              <a:t>Expected failures include unsupported frame requests. Source data stays unchanged. PROJ is shared across readers.</a:t>
             </a:r>
           </a:p>
         </p:txBody>
@@ -3917,7 +4259,7 @@
     </p:spTree>
     <p:extLst>
       <p:ext uri="{BB962C8B-B14F-4D97-AF65-F5344CB8AC3E}">
-        <p14:creationId xmlns:p14="http://schemas.microsoft.com/office/powerpoint/2010/main" val="253808289"/>
+        <p14:creationId xmlns:p14="http://schemas.microsoft.com/office/powerpoint/2010/main" val="2061671859"/>
       </p:ext>
     </p:extLst>
   </p:cSld>
@@ -3945,10 +4287,10 @@
       </p:grpSpPr>
       <p:sp>
         <p:nvSpPr>
-          <p:cNvPr id="4" name="">
+          <p:cNvPr id="5" name="">
             <a:extLst xmlns:a="http://schemas.openxmlformats.org/drawingml/2006/main">
               <a:ext uri="{FF2B5EF4-FFF2-40B4-BE49-F238E27FC236}">
-                <a16:creationId xmlns:a16="http://schemas.microsoft.com/office/drawing/2014/main" id="{F6F14438-97B9-4C98-928D-88DFB2A9FDD0}"/>
+                <a16:creationId xmlns:a16="http://schemas.microsoft.com/office/drawing/2014/main" id="{4432FCC3-38BC-4060-9DA5-E4373F9D3852}"/>
               </a:ext>
             </a:extLst>
           </p:cNvPr>
@@ -3995,600 +4337,17 @@
                 <a:ea typeface="Arial"/>
                 <a:cs typeface="Arial"/>
               </a:rPr>
-              <a:t>What this run executed</a:t>
+              <a:t>Same France origin in each runtime</a:t>
             </a:r>
           </a:p>
         </p:txBody>
       </p:sp>
-      <p:graphicFrame>
-        <p:nvGraphicFramePr>
-          <p:cNvPr id="5" name=""/>
-          <p:cNvGraphicFramePr/>
-          <p:nvPr/>
-        </p:nvGraphicFramePr>
-        <p:xfrm>
-          <a:off xmlns:a="http://schemas.openxmlformats.org/drawingml/2006/main" x="609600" y="1562100"/>
-          <a:ext xmlns:a="http://schemas.openxmlformats.org/drawingml/2006/main" cx="10972800" cy="3286125"/>
-        </p:xfrm>
-        <a:graphic xmlns:a="http://schemas.openxmlformats.org/drawingml/2006/main">
-          <a:graphicData uri="http://schemas.openxmlformats.org/drawingml/2006/table">
-            <a:tbl>
-              <a:tblPr firstRow="1" bandRow="0"/>
-              <a:tblGrid>
-                <a:gridCol w="7810500"/>
-                <a:gridCol w="1333500"/>
-                <a:gridCol w="1828800"/>
-              </a:tblGrid>
-              <a:tr h="469446">
-                <a:tc>
-                  <a:txBody>
-                    <a:bodyPr>
-                      <a:noAutofit/>
-                    </a:bodyPr>
-                    <a:lstStyle/>
-                    <a:p>
-                      <a:r>
-                        <a:rPr sz="1800" b="1">
-                          <a:solidFill>
-                            <a:srgbClr val="FFFFFF"/>
-                          </a:solidFill>
-                          <a:latin typeface="Arial"/>
-                          <a:ea typeface="Arial"/>
-                          <a:cs typeface="Arial"/>
-                        </a:rPr>
-                        <a:t>Control group</a:t>
-                      </a:r>
-                    </a:p>
-                  </a:txBody>
-                  <a:tcPr marL="91440" marR="91440" marT="45720" marB="45720">
-                    <a:solidFill>
-                      <a:srgbClr val="233542"/>
-                    </a:solidFill>
-                  </a:tcPr>
-                </a:tc>
-                <a:tc>
-                  <a:txBody>
-                    <a:bodyPr>
-                      <a:noAutofit/>
-                    </a:bodyPr>
-                    <a:lstStyle/>
-                    <a:p>
-                      <a:r>
-                        <a:rPr sz="1800" b="1">
-                          <a:solidFill>
-                            <a:srgbClr val="FFFFFF"/>
-                          </a:solidFill>
-                          <a:latin typeface="Arial"/>
-                          <a:ea typeface="Arial"/>
-                          <a:cs typeface="Arial"/>
-                        </a:rPr>
-                        <a:t>Cases</a:t>
-                      </a:r>
-                    </a:p>
-                  </a:txBody>
-                  <a:tcPr marL="91440" marR="91440" marT="45720" marB="45720">
-                    <a:solidFill>
-                      <a:srgbClr val="233542"/>
-                    </a:solidFill>
-                  </a:tcPr>
-                </a:tc>
-                <a:tc>
-                  <a:txBody>
-                    <a:bodyPr>
-                      <a:noAutofit/>
-                    </a:bodyPr>
-                    <a:lstStyle/>
-                    <a:p>
-                      <a:r>
-                        <a:rPr sz="1800" b="1">
-                          <a:solidFill>
-                            <a:srgbClr val="FFFFFF"/>
-                          </a:solidFill>
-                          <a:latin typeface="Arial"/>
-                          <a:ea typeface="Arial"/>
-                          <a:cs typeface="Arial"/>
-                        </a:rPr>
-                        <a:t>Queries per reader</a:t>
-                      </a:r>
-                    </a:p>
-                  </a:txBody>
-                  <a:tcPr marL="91440" marR="91440" marT="45720" marB="45720">
-                    <a:solidFill>
-                      <a:srgbClr val="233542"/>
-                    </a:solidFill>
-                  </a:tcPr>
-                </a:tc>
-              </a:tr>
-              <a:tr h="469446">
-                <a:tc>
-                  <a:txBody>
-                    <a:bodyPr>
-                      <a:noAutofit/>
-                    </a:bodyPr>
-                    <a:lstStyle/>
-                    <a:p>
-                      <a:r>
-                        <a:rPr sz="1800" b="0">
-                          <a:solidFill>
-                            <a:srgbClr val="233542"/>
-                          </a:solidFill>
-                          <a:latin typeface="Arial"/>
-                          <a:ea typeface="Arial"/>
-                          <a:cs typeface="Arial"/>
-                        </a:rPr>
-                        <a:t>References and referenced assembly</a:t>
-                      </a:r>
-                    </a:p>
-                  </a:txBody>
-                  <a:tcPr marL="91440" marR="91440" marT="45720" marB="45720">
-                    <a:solidFill>
-                      <a:srgbClr val="FFFFFF"/>
-                    </a:solidFill>
-                  </a:tcPr>
-                </a:tc>
-                <a:tc>
-                  <a:txBody>
-                    <a:bodyPr>
-                      <a:noAutofit/>
-                    </a:bodyPr>
-                    <a:lstStyle/>
-                    <a:p>
-                      <a:r>
-                        <a:rPr sz="1800" b="0">
-                          <a:solidFill>
-                            <a:srgbClr val="233542"/>
-                          </a:solidFill>
-                          <a:latin typeface="Arial"/>
-                          <a:ea typeface="Arial"/>
-                          <a:cs typeface="Arial"/>
-                        </a:rPr>
-                        <a:t>2</a:t>
-                      </a:r>
-                    </a:p>
-                  </a:txBody>
-                  <a:tcPr marL="91440" marR="91440" marT="45720" marB="45720">
-                    <a:solidFill>
-                      <a:srgbClr val="FFFFFF"/>
-                    </a:solidFill>
-                  </a:tcPr>
-                </a:tc>
-                <a:tc>
-                  <a:txBody>
-                    <a:bodyPr>
-                      <a:noAutofit/>
-                    </a:bodyPr>
-                    <a:lstStyle/>
-                    <a:p>
-                      <a:r>
-                        <a:rPr sz="1800" b="0">
-                          <a:solidFill>
-                            <a:srgbClr val="233542"/>
-                          </a:solidFill>
-                          <a:latin typeface="Arial"/>
-                          <a:ea typeface="Arial"/>
-                          <a:cs typeface="Arial"/>
-                        </a:rPr>
-                        <a:t>6</a:t>
-                      </a:r>
-                    </a:p>
-                  </a:txBody>
-                  <a:tcPr marL="91440" marR="91440" marT="45720" marB="45720">
-                    <a:solidFill>
-                      <a:srgbClr val="FFFFFF"/>
-                    </a:solidFill>
-                  </a:tcPr>
-                </a:tc>
-              </a:tr>
-              <a:tr h="469446">
-                <a:tc>
-                  <a:txBody>
-                    <a:bodyPr>
-                      <a:noAutofit/>
-                    </a:bodyPr>
-                    <a:lstStyle/>
-                    <a:p>
-                      <a:r>
-                        <a:rPr sz="1800" b="0">
-                          <a:solidFill>
-                            <a:srgbClr val="233542"/>
-                          </a:solidFill>
-                          <a:latin typeface="Arial"/>
-                          <a:ea typeface="Arial"/>
-                          <a:cs typeface="Arial"/>
-                        </a:rPr>
-                        <a:t>Stronger layer, variant and inherits</a:t>
-                      </a:r>
-                    </a:p>
-                  </a:txBody>
-                  <a:tcPr marL="91440" marR="91440" marT="45720" marB="45720">
-                    <a:solidFill>
-                      <a:srgbClr val="FFFFFF"/>
-                    </a:solidFill>
-                  </a:tcPr>
-                </a:tc>
-                <a:tc>
-                  <a:txBody>
-                    <a:bodyPr>
-                      <a:noAutofit/>
-                    </a:bodyPr>
-                    <a:lstStyle/>
-                    <a:p>
-                      <a:r>
-                        <a:rPr sz="1800" b="0">
-                          <a:solidFill>
-                            <a:srgbClr val="233542"/>
-                          </a:solidFill>
-                          <a:latin typeface="Arial"/>
-                          <a:ea typeface="Arial"/>
-                          <a:cs typeface="Arial"/>
-                        </a:rPr>
-                        <a:t>3</a:t>
-                      </a:r>
-                    </a:p>
-                  </a:txBody>
-                  <a:tcPr marL="91440" marR="91440" marT="45720" marB="45720">
-                    <a:solidFill>
-                      <a:srgbClr val="FFFFFF"/>
-                    </a:solidFill>
-                  </a:tcPr>
-                </a:tc>
-                <a:tc>
-                  <a:txBody>
-                    <a:bodyPr>
-                      <a:noAutofit/>
-                    </a:bodyPr>
-                    <a:lstStyle/>
-                    <a:p>
-                      <a:r>
-                        <a:rPr sz="1800" b="0">
-                          <a:solidFill>
-                            <a:srgbClr val="233542"/>
-                          </a:solidFill>
-                          <a:latin typeface="Arial"/>
-                          <a:ea typeface="Arial"/>
-                          <a:cs typeface="Arial"/>
-                        </a:rPr>
-                        <a:t>4</a:t>
-                      </a:r>
-                    </a:p>
-                  </a:txBody>
-                  <a:tcPr marL="91440" marR="91440" marT="45720" marB="45720">
-                    <a:solidFill>
-                      <a:srgbClr val="FFFFFF"/>
-                    </a:solidFill>
-                  </a:tcPr>
-                </a:tc>
-              </a:tr>
-              <a:tr h="469446">
-                <a:tc>
-                  <a:txBody>
-                    <a:bodyPr>
-                      <a:noAutofit/>
-                    </a:bodyPr>
-                    <a:lstStyle/>
-                    <a:p>
-                      <a:r>
-                        <a:rPr sz="1800" b="0">
-                          <a:solidFill>
-                            <a:srgbClr val="233542"/>
-                          </a:solidFill>
-                          <a:latin typeface="Arial"/>
-                          <a:ea typeface="Arial"/>
-                          <a:cs typeface="Arial"/>
-                        </a:rPr>
-                        <a:t>Equivalent composed data</a:t>
-                      </a:r>
-                    </a:p>
-                  </a:txBody>
-                  <a:tcPr marL="91440" marR="91440" marT="45720" marB="45720">
-                    <a:solidFill>
-                      <a:srgbClr val="FFFFFF"/>
-                    </a:solidFill>
-                  </a:tcPr>
-                </a:tc>
-                <a:tc>
-                  <a:txBody>
-                    <a:bodyPr>
-                      <a:noAutofit/>
-                    </a:bodyPr>
-                    <a:lstStyle/>
-                    <a:p>
-                      <a:r>
-                        <a:rPr sz="1800" b="0">
-                          <a:solidFill>
-                            <a:srgbClr val="233542"/>
-                          </a:solidFill>
-                          <a:latin typeface="Arial"/>
-                          <a:ea typeface="Arial"/>
-                          <a:cs typeface="Arial"/>
-                        </a:rPr>
-                        <a:t>1</a:t>
-                      </a:r>
-                    </a:p>
-                  </a:txBody>
-                  <a:tcPr marL="91440" marR="91440" marT="45720" marB="45720">
-                    <a:solidFill>
-                      <a:srgbClr val="FFFFFF"/>
-                    </a:solidFill>
-                  </a:tcPr>
-                </a:tc>
-                <a:tc>
-                  <a:txBody>
-                    <a:bodyPr>
-                      <a:noAutofit/>
-                    </a:bodyPr>
-                    <a:lstStyle/>
-                    <a:p>
-                      <a:r>
-                        <a:rPr sz="1800" b="0">
-                          <a:solidFill>
-                            <a:srgbClr val="233542"/>
-                          </a:solidFill>
-                          <a:latin typeface="Arial"/>
-                          <a:ea typeface="Arial"/>
-                          <a:cs typeface="Arial"/>
-                        </a:rPr>
-                        <a:t>2</a:t>
-                      </a:r>
-                    </a:p>
-                  </a:txBody>
-                  <a:tcPr marL="91440" marR="91440" marT="45720" marB="45720">
-                    <a:solidFill>
-                      <a:srgbClr val="FFFFFF"/>
-                    </a:solidFill>
-                  </a:tcPr>
-                </a:tc>
-              </a:tr>
-              <a:tr h="469446">
-                <a:tc>
-                  <a:txBody>
-                    <a:bodyPr>
-                      <a:noAutofit/>
-                    </a:bodyPr>
-                    <a:lstStyle/>
-                    <a:p>
-                      <a:r>
-                        <a:rPr sz="1800" b="0">
-                          <a:solidFill>
-                            <a:srgbClr val="233542"/>
-                          </a:solidFill>
-                          <a:latin typeface="Arial"/>
-                          <a:ea typeface="Arial"/>
-                          <a:cs typeface="Arial"/>
-                        </a:rPr>
-                        <a:t>Unloaded payload</a:t>
-                      </a:r>
-                    </a:p>
-                  </a:txBody>
-                  <a:tcPr marL="91440" marR="91440" marT="45720" marB="45720">
-                    <a:solidFill>
-                      <a:srgbClr val="FFFFFF"/>
-                    </a:solidFill>
-                  </a:tcPr>
-                </a:tc>
-                <a:tc>
-                  <a:txBody>
-                    <a:bodyPr>
-                      <a:noAutofit/>
-                    </a:bodyPr>
-                    <a:lstStyle/>
-                    <a:p>
-                      <a:r>
-                        <a:rPr sz="1800" b="0">
-                          <a:solidFill>
-                            <a:srgbClr val="233542"/>
-                          </a:solidFill>
-                          <a:latin typeface="Arial"/>
-                          <a:ea typeface="Arial"/>
-                          <a:cs typeface="Arial"/>
-                        </a:rPr>
-                        <a:t>1</a:t>
-                      </a:r>
-                    </a:p>
-                  </a:txBody>
-                  <a:tcPr marL="91440" marR="91440" marT="45720" marB="45720">
-                    <a:solidFill>
-                      <a:srgbClr val="FFFFFF"/>
-                    </a:solidFill>
-                  </a:tcPr>
-                </a:tc>
-                <a:tc>
-                  <a:txBody>
-                    <a:bodyPr>
-                      <a:noAutofit/>
-                    </a:bodyPr>
-                    <a:lstStyle/>
-                    <a:p>
-                      <a:r>
-                        <a:rPr sz="1800" b="0">
-                          <a:solidFill>
-                            <a:srgbClr val="233542"/>
-                          </a:solidFill>
-                          <a:latin typeface="Arial"/>
-                          <a:ea typeface="Arial"/>
-                          <a:cs typeface="Arial"/>
-                        </a:rPr>
-                        <a:t>2</a:t>
-                      </a:r>
-                    </a:p>
-                  </a:txBody>
-                  <a:tcPr marL="91440" marR="91440" marT="45720" marB="45720">
-                    <a:solidFill>
-                      <a:srgbClr val="FFFFFF"/>
-                    </a:solidFill>
-                  </a:tcPr>
-                </a:tc>
-              </a:tr>
-              <a:tr h="469446">
-                <a:tc>
-                  <a:txBody>
-                    <a:bodyPr>
-                      <a:noAutofit/>
-                    </a:bodyPr>
-                    <a:lstStyle/>
-                    <a:p>
-                      <a:r>
-                        <a:rPr sz="1800" b="0">
-                          <a:solidFill>
-                            <a:srgbClr val="233542"/>
-                          </a:solidFill>
-                          <a:latin typeface="Arial"/>
-                          <a:ea typeface="Arial"/>
-                          <a:cs typeface="Arial"/>
-                        </a:rPr>
-                        <a:t>Missing, broken or invalid definitions</a:t>
-                      </a:r>
-                    </a:p>
-                  </a:txBody>
-                  <a:tcPr marL="91440" marR="91440" marT="45720" marB="45720">
-                    <a:solidFill>
-                      <a:srgbClr val="FFFFFF"/>
-                    </a:solidFill>
-                  </a:tcPr>
-                </a:tc>
-                <a:tc>
-                  <a:txBody>
-                    <a:bodyPr>
-                      <a:noAutofit/>
-                    </a:bodyPr>
-                    <a:lstStyle/>
-                    <a:p>
-                      <a:r>
-                        <a:rPr sz="1800" b="0">
-                          <a:solidFill>
-                            <a:srgbClr val="233542"/>
-                          </a:solidFill>
-                          <a:latin typeface="Arial"/>
-                          <a:ea typeface="Arial"/>
-                          <a:cs typeface="Arial"/>
-                        </a:rPr>
-                        <a:t>5</a:t>
-                      </a:r>
-                    </a:p>
-                  </a:txBody>
-                  <a:tcPr marL="91440" marR="91440" marT="45720" marB="45720">
-                    <a:solidFill>
-                      <a:srgbClr val="FFFFFF"/>
-                    </a:solidFill>
-                  </a:tcPr>
-                </a:tc>
-                <a:tc>
-                  <a:txBody>
-                    <a:bodyPr>
-                      <a:noAutofit/>
-                    </a:bodyPr>
-                    <a:lstStyle/>
-                    <a:p>
-                      <a:r>
-                        <a:rPr sz="1800" b="0">
-                          <a:solidFill>
-                            <a:srgbClr val="233542"/>
-                          </a:solidFill>
-                          <a:latin typeface="Arial"/>
-                          <a:ea typeface="Arial"/>
-                          <a:cs typeface="Arial"/>
-                        </a:rPr>
-                        <a:t>5</a:t>
-                      </a:r>
-                    </a:p>
-                  </a:txBody>
-                  <a:tcPr marL="91440" marR="91440" marT="45720" marB="45720">
-                    <a:solidFill>
-                      <a:srgbClr val="FFFFFF"/>
-                    </a:solidFill>
-                  </a:tcPr>
-                </a:tc>
-              </a:tr>
-              <a:tr h="469446">
-                <a:tc>
-                  <a:txBody>
-                    <a:bodyPr>
-                      <a:noAutofit/>
-                    </a:bodyPr>
-                    <a:lstStyle/>
-                    <a:p>
-                      <a:r>
-                        <a:rPr sz="1800" b="0">
-                          <a:solidFill>
-                            <a:srgbClr val="233542"/>
-                          </a:solidFill>
-                          <a:latin typeface="Arial"/>
-                          <a:ea typeface="Arial"/>
-                          <a:cs typeface="Arial"/>
-                        </a:rPr>
-                        <a:t>Total</a:t>
-                      </a:r>
-                    </a:p>
-                  </a:txBody>
-                  <a:tcPr marL="91440" marR="91440" marT="45720" marB="45720">
-                    <a:solidFill>
-                      <a:srgbClr val="FFFFFF"/>
-                    </a:solidFill>
-                  </a:tcPr>
-                </a:tc>
-                <a:tc>
-                  <a:txBody>
-                    <a:bodyPr>
-                      <a:noAutofit/>
-                    </a:bodyPr>
-                    <a:lstStyle/>
-                    <a:p>
-                      <a:r>
-                        <a:rPr sz="1800" b="0">
-                          <a:solidFill>
-                            <a:srgbClr val="233542"/>
-                          </a:solidFill>
-                          <a:latin typeface="Arial"/>
-                          <a:ea typeface="Arial"/>
-                          <a:cs typeface="Arial"/>
-                        </a:rPr>
-                        <a:t>12</a:t>
-                      </a:r>
-                    </a:p>
-                  </a:txBody>
-                  <a:tcPr marL="91440" marR="91440" marT="45720" marB="45720">
-                    <a:solidFill>
-                      <a:srgbClr val="FFFFFF"/>
-                    </a:solidFill>
-                  </a:tcPr>
-                </a:tc>
-                <a:tc>
-                  <a:txBody>
-                    <a:bodyPr>
-                      <a:noAutofit/>
-                    </a:bodyPr>
-                    <a:lstStyle/>
-                    <a:p>
-                      <a:r>
-                        <a:rPr sz="1800" b="0">
-                          <a:solidFill>
-                            <a:srgbClr val="233542"/>
-                          </a:solidFill>
-                          <a:latin typeface="Arial"/>
-                          <a:ea typeface="Arial"/>
-                          <a:cs typeface="Arial"/>
-                        </a:rPr>
-                        <a:t>19</a:t>
-                      </a:r>
-                    </a:p>
-                  </a:txBody>
-                  <a:tcPr marL="91440" marR="91440" marT="45720" marB="45720">
-                    <a:solidFill>
-                      <a:srgbClr val="FFFFFF"/>
-                    </a:solidFill>
-                  </a:tcPr>
-                </a:tc>
-              </a:tr>
-            </a:tbl>
-          </a:graphicData>
-        </a:graphic>
-      </p:graphicFrame>
       <p:sp>
         <p:nvSpPr>
-          <p:cNvPr id="3" name="">
+          <p:cNvPr id="2" name="">
             <a:extLst xmlns:a="http://schemas.openxmlformats.org/drawingml/2006/main">
               <a:ext uri="{FF2B5EF4-FFF2-40B4-BE49-F238E27FC236}">
-                <a16:creationId xmlns:a16="http://schemas.microsoft.com/office/drawing/2014/main" id="{461DEF8E-8705-4093-BFCB-1BBE997DFB71}"/>
+                <a16:creationId xmlns:a16="http://schemas.microsoft.com/office/drawing/2014/main" id="{D2DD38FB-7BE3-4EE1-9868-F320D2D700E1}"/>
               </a:ext>
             </a:extLst>
           </p:cNvPr>
@@ -4599,8 +4358,8 @@
         </p:nvSpPr>
         <p:spPr>
           <a:xfrm xmlns:a="http://schemas.openxmlformats.org/drawingml/2006/main">
-            <a:off x="609600" y="5076825"/>
-            <a:ext cx="10972800" cy="1495425"/>
+            <a:off x="609600" y="1447800"/>
+            <a:ext cx="10972800" cy="1276350"/>
           </a:xfrm>
           <a:prstGeom xmlns:a="http://schemas.openxmlformats.org/drawingml/2006/main" prst="rect">
             <a:avLst/>
@@ -4617,7 +4376,7 @@
           <a:lstStyle xmlns:a="http://schemas.openxmlformats.org/drawingml/2006/main"/>
           <a:p xmlns:a="http://schemas.openxmlformats.org/drawingml/2006/main">
             <a:pPr>
-              <a:defRPr sz="1800" b="0">
+              <a:defRPr sz="2025" b="0">
                 <a:solidFill>
                   <a:srgbClr val="233542"/>
                 </a:solidFill>
@@ -4627,7 +4386,7 @@
               </a:defRPr>
             </a:pPr>
             <a:r>
-              <a:rPr sz="1800" b="0">
+              <a:rPr sz="2025" b="0">
                 <a:solidFill>
                   <a:srgbClr val="233542"/>
                 </a:solidFill>
@@ -4635,17 +4394,599 @@
                 <a:ea typeface="Arial"/>
                 <a:cs typeface="Arial"/>
               </a:rPr>
-              <a:t>Headless OpenUSD, independently written native C++ OpenUSD and a live OV stage each match authored expectations.</a:t>
-            </a:r>
-          </a:p>
-          <a:p xmlns:a="http://schemas.openxmlformats.org/drawingml/2006/main">
-            <a:r>
-              <a:t/>
-            </a:r>
-          </a:p>
+              <a:t>France point 0 serves as an illustrative model-anchor origin. Source: RGF93 v2b / CC49 with NGF-IGN69 height. Output: Lambert-93 with the same height reference. Every displayed component is in metres.</a:t>
+            </a:r>
+          </a:p>
+        </p:txBody>
+      </p:sp>
+      <p:graphicFrame>
+        <p:nvGraphicFramePr>
+          <p:cNvPr id="7" name=""/>
+          <p:cNvGraphicFramePr/>
+          <p:nvPr/>
+        </p:nvGraphicFramePr>
+        <p:xfrm>
+          <a:off xmlns:a="http://schemas.openxmlformats.org/drawingml/2006/main" x="609600" y="3114675"/>
+          <a:ext xmlns:a="http://schemas.openxmlformats.org/drawingml/2006/main" cx="10972800" cy="2057400"/>
+        </p:xfrm>
+        <a:graphic xmlns:a="http://schemas.openxmlformats.org/drawingml/2006/main">
+          <a:graphicData uri="http://schemas.openxmlformats.org/drawingml/2006/table">
+            <a:tbl>
+              <a:tblPr/>
+              <a:tblGrid>
+                <a:gridCol w="1733550"/>
+                <a:gridCol w="2333625"/>
+                <a:gridCol w="2333625"/>
+                <a:gridCol w="2286000"/>
+                <a:gridCol w="2286000"/>
+              </a:tblGrid>
+              <a:tr h="514350">
+                <a:tc>
+                  <a:txBody>
+                    <a:bodyPr>
+                      <a:noAutofit/>
+                    </a:bodyPr>
+                    <a:lstStyle/>
+                    <a:p>
+                      <a:r>
+                        <a:rPr sz="1875" b="1">
+                          <a:solidFill>
+                            <a:srgbClr val="FFFFFF"/>
+                          </a:solidFill>
+                          <a:latin typeface="Arial"/>
+                          <a:ea typeface="Arial"/>
+                          <a:cs typeface="Arial"/>
+                        </a:rPr>
+                        <a:t>Component</a:t>
+                      </a:r>
+                    </a:p>
+                  </a:txBody>
+                  <a:tcPr marL="91440" marR="91440" marT="45720" marB="45720">
+                    <a:solidFill>
+                      <a:srgbClr val="233542"/>
+                    </a:solidFill>
+                  </a:tcPr>
+                </a:tc>
+                <a:tc>
+                  <a:txBody>
+                    <a:bodyPr>
+                      <a:noAutofit/>
+                    </a:bodyPr>
+                    <a:lstStyle/>
+                    <a:p>
+                      <a:r>
+                        <a:rPr sz="1875" b="1">
+                          <a:solidFill>
+                            <a:srgbClr val="FFFFFF"/>
+                          </a:solidFill>
+                          <a:latin typeface="Arial"/>
+                          <a:ea typeface="Arial"/>
+                          <a:cs typeface="Arial"/>
+                        </a:rPr>
+                        <a:t>Source CC49</a:t>
+                      </a:r>
+                    </a:p>
+                  </a:txBody>
+                  <a:tcPr marL="91440" marR="91440" marT="45720" marB="45720">
+                    <a:solidFill>
+                      <a:srgbClr val="233542"/>
+                    </a:solidFill>
+                  </a:tcPr>
+                </a:tc>
+                <a:tc>
+                  <a:txBody>
+                    <a:bodyPr>
+                      <a:noAutofit/>
+                    </a:bodyPr>
+                    <a:lstStyle/>
+                    <a:p>
+                      <a:r>
+                        <a:rPr sz="1875" b="1">
+                          <a:solidFill>
+                            <a:srgbClr val="FFFFFF"/>
+                          </a:solidFill>
+                          <a:latin typeface="Arial"/>
+                          <a:ea typeface="Arial"/>
+                          <a:cs typeface="Arial"/>
+                        </a:rPr>
+                        <a:t>Headless USD</a:t>
+                      </a:r>
+                    </a:p>
+                  </a:txBody>
+                  <a:tcPr marL="91440" marR="91440" marT="45720" marB="45720">
+                    <a:solidFill>
+                      <a:srgbClr val="233542"/>
+                    </a:solidFill>
+                  </a:tcPr>
+                </a:tc>
+                <a:tc>
+                  <a:txBody>
+                    <a:bodyPr>
+                      <a:noAutofit/>
+                    </a:bodyPr>
+                    <a:lstStyle/>
+                    <a:p>
+                      <a:r>
+                        <a:rPr sz="1875" b="1">
+                          <a:solidFill>
+                            <a:srgbClr val="FFFFFF"/>
+                          </a:solidFill>
+                          <a:latin typeface="Arial"/>
+                          <a:ea typeface="Arial"/>
+                          <a:cs typeface="Arial"/>
+                        </a:rPr>
+                        <a:t>Native USD</a:t>
+                      </a:r>
+                    </a:p>
+                  </a:txBody>
+                  <a:tcPr marL="91440" marR="91440" marT="45720" marB="45720">
+                    <a:solidFill>
+                      <a:srgbClr val="233542"/>
+                    </a:solidFill>
+                  </a:tcPr>
+                </a:tc>
+                <a:tc>
+                  <a:txBody>
+                    <a:bodyPr>
+                      <a:noAutofit/>
+                    </a:bodyPr>
+                    <a:lstStyle/>
+                    <a:p>
+                      <a:r>
+                        <a:rPr sz="1875" b="1">
+                          <a:solidFill>
+                            <a:srgbClr val="FFFFFF"/>
+                          </a:solidFill>
+                          <a:latin typeface="Arial"/>
+                          <a:ea typeface="Arial"/>
+                          <a:cs typeface="Arial"/>
+                        </a:rPr>
+                        <a:t>Live OV</a:t>
+                      </a:r>
+                    </a:p>
+                  </a:txBody>
+                  <a:tcPr marL="91440" marR="91440" marT="45720" marB="45720">
+                    <a:solidFill>
+                      <a:srgbClr val="233542"/>
+                    </a:solidFill>
+                  </a:tcPr>
+                </a:tc>
+              </a:tr>
+              <a:tr h="514350">
+                <a:tc>
+                  <a:txBody>
+                    <a:bodyPr>
+                      <a:noAutofit/>
+                    </a:bodyPr>
+                    <a:lstStyle/>
+                    <a:p>
+                      <a:r>
+                        <a:rPr sz="1875" b="0">
+                          <a:solidFill>
+                            <a:srgbClr val="233542"/>
+                          </a:solidFill>
+                          <a:latin typeface="Arial"/>
+                          <a:ea typeface="Arial"/>
+                          <a:cs typeface="Arial"/>
+                        </a:rPr>
+                        <a:t>Easting</a:t>
+                      </a:r>
+                    </a:p>
+                  </a:txBody>
+                  <a:tcPr marL="91440" marR="91440" marT="45720" marB="45720">
+                    <a:solidFill>
+                      <a:srgbClr val="FFFFFF"/>
+                    </a:solidFill>
+                  </a:tcPr>
+                </a:tc>
+                <a:tc>
+                  <a:txBody>
+                    <a:bodyPr>
+                      <a:noAutofit/>
+                    </a:bodyPr>
+                    <a:lstStyle/>
+                    <a:p>
+                      <a:r>
+                        <a:rPr sz="1875" b="0">
+                          <a:solidFill>
+                            <a:srgbClr val="233542"/>
+                          </a:solidFill>
+                          <a:latin typeface="Arial"/>
+                          <a:ea typeface="Arial"/>
+                          <a:cs typeface="Arial"/>
+                        </a:rPr>
+                        <a:t>1661099.0390</a:t>
+                      </a:r>
+                    </a:p>
+                  </a:txBody>
+                  <a:tcPr marL="91440" marR="91440" marT="45720" marB="45720">
+                    <a:solidFill>
+                      <a:srgbClr val="FFFFFF"/>
+                    </a:solidFill>
+                  </a:tcPr>
+                </a:tc>
+                <a:tc>
+                  <a:txBody>
+                    <a:bodyPr>
+                      <a:noAutofit/>
+                    </a:bodyPr>
+                    <a:lstStyle/>
+                    <a:p>
+                      <a:r>
+                        <a:rPr sz="1875" b="0">
+                          <a:solidFill>
+                            <a:srgbClr val="233542"/>
+                          </a:solidFill>
+                          <a:latin typeface="Arial"/>
+                          <a:ea typeface="Arial"/>
+                          <a:cs typeface="Arial"/>
+                        </a:rPr>
+                        <a:t>661101.1094</a:t>
+                      </a:r>
+                    </a:p>
+                  </a:txBody>
+                  <a:tcPr marL="91440" marR="91440" marT="45720" marB="45720">
+                    <a:solidFill>
+                      <a:srgbClr val="FFFFFF"/>
+                    </a:solidFill>
+                  </a:tcPr>
+                </a:tc>
+                <a:tc>
+                  <a:txBody>
+                    <a:bodyPr>
+                      <a:noAutofit/>
+                    </a:bodyPr>
+                    <a:lstStyle/>
+                    <a:p>
+                      <a:r>
+                        <a:rPr sz="1875" b="0">
+                          <a:solidFill>
+                            <a:srgbClr val="233542"/>
+                          </a:solidFill>
+                          <a:latin typeface="Arial"/>
+                          <a:ea typeface="Arial"/>
+                          <a:cs typeface="Arial"/>
+                        </a:rPr>
+                        <a:t>661101.1094</a:t>
+                      </a:r>
+                    </a:p>
+                  </a:txBody>
+                  <a:tcPr marL="91440" marR="91440" marT="45720" marB="45720">
+                    <a:solidFill>
+                      <a:srgbClr val="FFFFFF"/>
+                    </a:solidFill>
+                  </a:tcPr>
+                </a:tc>
+                <a:tc>
+                  <a:txBody>
+                    <a:bodyPr>
+                      <a:noAutofit/>
+                    </a:bodyPr>
+                    <a:lstStyle/>
+                    <a:p>
+                      <a:r>
+                        <a:rPr sz="1875" b="0">
+                          <a:solidFill>
+                            <a:srgbClr val="233542"/>
+                          </a:solidFill>
+                          <a:latin typeface="Arial"/>
+                          <a:ea typeface="Arial"/>
+                          <a:cs typeface="Arial"/>
+                        </a:rPr>
+                        <a:t>661101.1094</a:t>
+                      </a:r>
+                    </a:p>
+                  </a:txBody>
+                  <a:tcPr marL="91440" marR="91440" marT="45720" marB="45720">
+                    <a:solidFill>
+                      <a:srgbClr val="FFFFFF"/>
+                    </a:solidFill>
+                  </a:tcPr>
+                </a:tc>
+              </a:tr>
+              <a:tr h="514350">
+                <a:tc>
+                  <a:txBody>
+                    <a:bodyPr>
+                      <a:noAutofit/>
+                    </a:bodyPr>
+                    <a:lstStyle/>
+                    <a:p>
+                      <a:r>
+                        <a:rPr sz="1875" b="0">
+                          <a:solidFill>
+                            <a:srgbClr val="233542"/>
+                          </a:solidFill>
+                          <a:latin typeface="Arial"/>
+                          <a:ea typeface="Arial"/>
+                          <a:cs typeface="Arial"/>
+                        </a:rPr>
+                        <a:t>Northing</a:t>
+                      </a:r>
+                    </a:p>
+                  </a:txBody>
+                  <a:tcPr marL="91440" marR="91440" marT="45720" marB="45720">
+                    <a:solidFill>
+                      <a:srgbClr val="FFFFFF"/>
+                    </a:solidFill>
+                  </a:tcPr>
+                </a:tc>
+                <a:tc>
+                  <a:txBody>
+                    <a:bodyPr>
+                      <a:noAutofit/>
+                    </a:bodyPr>
+                    <a:lstStyle/>
+                    <a:p>
+                      <a:r>
+                        <a:rPr sz="1875" b="0">
+                          <a:solidFill>
+                            <a:srgbClr val="233542"/>
+                          </a:solidFill>
+                          <a:latin typeface="Arial"/>
+                          <a:ea typeface="Arial"/>
+                          <a:cs typeface="Arial"/>
+                        </a:rPr>
+                        <a:t>8180053.1170</a:t>
+                      </a:r>
+                    </a:p>
+                  </a:txBody>
+                  <a:tcPr marL="91440" marR="91440" marT="45720" marB="45720">
+                    <a:solidFill>
+                      <a:srgbClr val="FFFFFF"/>
+                    </a:solidFill>
+                  </a:tcPr>
+                </a:tc>
+                <a:tc>
+                  <a:txBody>
+                    <a:bodyPr>
+                      <a:noAutofit/>
+                    </a:bodyPr>
+                    <a:lstStyle/>
+                    <a:p>
+                      <a:r>
+                        <a:rPr sz="1875" b="0">
+                          <a:solidFill>
+                            <a:srgbClr val="233542"/>
+                          </a:solidFill>
+                          <a:latin typeface="Arial"/>
+                          <a:ea typeface="Arial"/>
+                          <a:cs typeface="Arial"/>
+                        </a:rPr>
+                        <a:t>6857834.2565</a:t>
+                      </a:r>
+                    </a:p>
+                  </a:txBody>
+                  <a:tcPr marL="91440" marR="91440" marT="45720" marB="45720">
+                    <a:solidFill>
+                      <a:srgbClr val="FFFFFF"/>
+                    </a:solidFill>
+                  </a:tcPr>
+                </a:tc>
+                <a:tc>
+                  <a:txBody>
+                    <a:bodyPr>
+                      <a:noAutofit/>
+                    </a:bodyPr>
+                    <a:lstStyle/>
+                    <a:p>
+                      <a:r>
+                        <a:rPr sz="1875" b="0">
+                          <a:solidFill>
+                            <a:srgbClr val="233542"/>
+                          </a:solidFill>
+                          <a:latin typeface="Arial"/>
+                          <a:ea typeface="Arial"/>
+                          <a:cs typeface="Arial"/>
+                        </a:rPr>
+                        <a:t>6857834.2565</a:t>
+                      </a:r>
+                    </a:p>
+                  </a:txBody>
+                  <a:tcPr marL="91440" marR="91440" marT="45720" marB="45720">
+                    <a:solidFill>
+                      <a:srgbClr val="FFFFFF"/>
+                    </a:solidFill>
+                  </a:tcPr>
+                </a:tc>
+                <a:tc>
+                  <a:txBody>
+                    <a:bodyPr>
+                      <a:noAutofit/>
+                    </a:bodyPr>
+                    <a:lstStyle/>
+                    <a:p>
+                      <a:r>
+                        <a:rPr sz="1875" b="0">
+                          <a:solidFill>
+                            <a:srgbClr val="233542"/>
+                          </a:solidFill>
+                          <a:latin typeface="Arial"/>
+                          <a:ea typeface="Arial"/>
+                          <a:cs typeface="Arial"/>
+                        </a:rPr>
+                        <a:t>6857834.2565</a:t>
+                      </a:r>
+                    </a:p>
+                  </a:txBody>
+                  <a:tcPr marL="91440" marR="91440" marT="45720" marB="45720">
+                    <a:solidFill>
+                      <a:srgbClr val="FFFFFF"/>
+                    </a:solidFill>
+                  </a:tcPr>
+                </a:tc>
+              </a:tr>
+              <a:tr h="514350">
+                <a:tc>
+                  <a:txBody>
+                    <a:bodyPr>
+                      <a:noAutofit/>
+                    </a:bodyPr>
+                    <a:lstStyle/>
+                    <a:p>
+                      <a:r>
+                        <a:rPr sz="1875" b="0">
+                          <a:solidFill>
+                            <a:srgbClr val="233542"/>
+                          </a:solidFill>
+                          <a:latin typeface="Arial"/>
+                          <a:ea typeface="Arial"/>
+                          <a:cs typeface="Arial"/>
+                        </a:rPr>
+                        <a:t>Height</a:t>
+                      </a:r>
+                    </a:p>
+                  </a:txBody>
+                  <a:tcPr marL="91440" marR="91440" marT="45720" marB="45720">
+                    <a:solidFill>
+                      <a:srgbClr val="FFFFFF"/>
+                    </a:solidFill>
+                  </a:tcPr>
+                </a:tc>
+                <a:tc>
+                  <a:txBody>
+                    <a:bodyPr>
+                      <a:noAutofit/>
+                    </a:bodyPr>
+                    <a:lstStyle/>
+                    <a:p>
+                      <a:r>
+                        <a:rPr sz="1875" b="0">
+                          <a:solidFill>
+                            <a:srgbClr val="233542"/>
+                          </a:solidFill>
+                          <a:latin typeface="Arial"/>
+                          <a:ea typeface="Arial"/>
+                          <a:cs typeface="Arial"/>
+                        </a:rPr>
+                        <a:t>37.2980</a:t>
+                      </a:r>
+                    </a:p>
+                  </a:txBody>
+                  <a:tcPr marL="91440" marR="91440" marT="45720" marB="45720">
+                    <a:solidFill>
+                      <a:srgbClr val="FFFFFF"/>
+                    </a:solidFill>
+                  </a:tcPr>
+                </a:tc>
+                <a:tc>
+                  <a:txBody>
+                    <a:bodyPr>
+                      <a:noAutofit/>
+                    </a:bodyPr>
+                    <a:lstStyle/>
+                    <a:p>
+                      <a:r>
+                        <a:rPr sz="1875" b="0">
+                          <a:solidFill>
+                            <a:srgbClr val="233542"/>
+                          </a:solidFill>
+                          <a:latin typeface="Arial"/>
+                          <a:ea typeface="Arial"/>
+                          <a:cs typeface="Arial"/>
+                        </a:rPr>
+                        <a:t>37.2980</a:t>
+                      </a:r>
+                    </a:p>
+                  </a:txBody>
+                  <a:tcPr marL="91440" marR="91440" marT="45720" marB="45720">
+                    <a:solidFill>
+                      <a:srgbClr val="FFFFFF"/>
+                    </a:solidFill>
+                  </a:tcPr>
+                </a:tc>
+                <a:tc>
+                  <a:txBody>
+                    <a:bodyPr>
+                      <a:noAutofit/>
+                    </a:bodyPr>
+                    <a:lstStyle/>
+                    <a:p>
+                      <a:r>
+                        <a:rPr sz="1875" b="0">
+                          <a:solidFill>
+                            <a:srgbClr val="233542"/>
+                          </a:solidFill>
+                          <a:latin typeface="Arial"/>
+                          <a:ea typeface="Arial"/>
+                          <a:cs typeface="Arial"/>
+                        </a:rPr>
+                        <a:t>37.2980</a:t>
+                      </a:r>
+                    </a:p>
+                  </a:txBody>
+                  <a:tcPr marL="91440" marR="91440" marT="45720" marB="45720">
+                    <a:solidFill>
+                      <a:srgbClr val="FFFFFF"/>
+                    </a:solidFill>
+                  </a:tcPr>
+                </a:tc>
+                <a:tc>
+                  <a:txBody>
+                    <a:bodyPr>
+                      <a:noAutofit/>
+                    </a:bodyPr>
+                    <a:lstStyle/>
+                    <a:p>
+                      <a:r>
+                        <a:rPr sz="1875" b="0">
+                          <a:solidFill>
+                            <a:srgbClr val="233542"/>
+                          </a:solidFill>
+                          <a:latin typeface="Arial"/>
+                          <a:ea typeface="Arial"/>
+                          <a:cs typeface="Arial"/>
+                        </a:rPr>
+                        <a:t>37.2980</a:t>
+                      </a:r>
+                    </a:p>
+                  </a:txBody>
+                  <a:tcPr marL="91440" marR="91440" marT="45720" marB="45720">
+                    <a:solidFill>
+                      <a:srgbClr val="FFFFFF"/>
+                    </a:solidFill>
+                  </a:tcPr>
+                </a:tc>
+              </a:tr>
+            </a:tbl>
+          </a:graphicData>
+        </a:graphic>
+      </p:graphicFrame>
+      <p:sp>
+        <p:nvSpPr>
+          <p:cNvPr id="4" name="">
+            <a:extLst xmlns:a="http://schemas.openxmlformats.org/drawingml/2006/main">
+              <a:ext uri="{FF2B5EF4-FFF2-40B4-BE49-F238E27FC236}">
+                <a16:creationId xmlns:a16="http://schemas.microsoft.com/office/drawing/2014/main" id="{444B2907-89B4-453B-8AB9-3FA3BE73436E}"/>
+              </a:ext>
+            </a:extLst>
+          </p:cNvPr>
+          <p:cNvSpPr>
+            <a:spLocks xmlns:a="http://schemas.openxmlformats.org/drawingml/2006/main" noGrp="1"/>
+          </p:cNvSpPr>
+          <p:nvPr/>
+        </p:nvSpPr>
+        <p:spPr>
+          <a:xfrm xmlns:a="http://schemas.openxmlformats.org/drawingml/2006/main">
+            <a:off x="609600" y="5619750"/>
+            <a:ext cx="10972800" cy="762000"/>
+          </a:xfrm>
+          <a:prstGeom xmlns:a="http://schemas.openxmlformats.org/drawingml/2006/main" prst="rect">
+            <a:avLst/>
+          </a:prstGeom>
+          <a:noFill xmlns:a="http://schemas.openxmlformats.org/drawingml/2006/main"/>
+          <a:ln xmlns:a="http://schemas.openxmlformats.org/drawingml/2006/main" w="0">
+            <a:noFill/>
+          </a:ln>
+        </p:spPr>
+        <p:txBody>
+          <a:bodyPr xmlns:a="http://schemas.openxmlformats.org/drawingml/2006/main">
+            <a:noAutofit/>
+          </a:bodyPr>
+          <a:lstStyle xmlns:a="http://schemas.openxmlformats.org/drawingml/2006/main"/>
           <a:p xmlns:a="http://schemas.openxmlformats.org/drawingml/2006/main">
             <a:pPr>
-              <a:defRPr sz="1800" b="0">
+              <a:defRPr sz="1950" b="0">
                 <a:solidFill>
                   <a:srgbClr val="233542"/>
                 </a:solidFill>
@@ -4655,7 +4996,7 @@
               </a:defRPr>
             </a:pPr>
             <a:r>
-              <a:rPr sz="1800" b="0">
+              <a:rPr sz="1950" b="0">
                 <a:solidFill>
                   <a:srgbClr val="233542"/>
                 </a:solidFill>
@@ -4663,7 +5004,7 @@
                 <a:ea typeface="Arial"/>
                 <a:cs typeface="Arial"/>
               </a:rPr>
-              <a:t>Native discovery does not exercise Hydra placement. Live OV discovery does not ingest resolved geometry.</a:t>
+              <a:t>All 59 France origins pass in both directions. Coordinates only, with no geometry or measurement-domain claim.</a:t>
             </a:r>
           </a:p>
         </p:txBody>
@@ -4671,7 +5012,7 @@
     </p:spTree>
     <p:extLst>
       <p:ext uri="{BB962C8B-B14F-4D97-AF65-F5344CB8AC3E}">
-        <p14:creationId xmlns:p14="http://schemas.microsoft.com/office/powerpoint/2010/main" val="1561719119"/>
+        <p14:creationId xmlns:p14="http://schemas.microsoft.com/office/powerpoint/2010/main" val="1245853513"/>
       </p:ext>
     </p:extLst>
   </p:cSld>
@@ -4699,10 +5040,10 @@
       </p:grpSpPr>
       <p:sp>
         <p:nvSpPr>
-          <p:cNvPr id="5" name="">
+          <p:cNvPr id="6" name="">
             <a:extLst xmlns:a="http://schemas.openxmlformats.org/drawingml/2006/main">
               <a:ext uri="{FF2B5EF4-FFF2-40B4-BE49-F238E27FC236}">
-                <a16:creationId xmlns:a16="http://schemas.microsoft.com/office/drawing/2014/main" id="{E527E902-4C11-432E-B748-13242A91FDE1}"/>
+                <a16:creationId xmlns:a16="http://schemas.microsoft.com/office/drawing/2014/main" id="{2F1183DC-BF4A-494A-AA64-C9CFC6303745}"/>
               </a:ext>
             </a:extLst>
           </p:cNvPr>
@@ -4749,7 +5090,7 @@
                 <a:ea typeface="Arial"/>
                 <a:cs typeface="Arial"/>
               </a:rPr>
-              <a:t>Why earlier passing tests were insufficient</a:t>
+              <a:t>Source interpolation and export samples</a:t>
             </a:r>
           </a:p>
         </p:txBody>
@@ -4759,7 +5100,7 @@
           <p:cNvPr id="2" name="">
             <a:extLst xmlns:a="http://schemas.openxmlformats.org/drawingml/2006/main">
               <a:ext uri="{FF2B5EF4-FFF2-40B4-BE49-F238E27FC236}">
-                <a16:creationId xmlns:a16="http://schemas.microsoft.com/office/drawing/2014/main" id="{224CDF28-3F43-4AEC-91D1-BFCBA65DDEFD}"/>
+                <a16:creationId xmlns:a16="http://schemas.microsoft.com/office/drawing/2014/main" id="{78212309-E2F0-4919-B50C-2F4D5EDC2B3C}"/>
               </a:ext>
             </a:extLst>
           </p:cNvPr>
@@ -4770,8 +5111,8 @@
         </p:nvSpPr>
         <p:spPr>
           <a:xfrm xmlns:a="http://schemas.openxmlformats.org/drawingml/2006/main">
-            <a:off x="609600" y="1562100"/>
-            <a:ext cx="10972800" cy="1362075"/>
+            <a:off x="609600" y="1466850"/>
+            <a:ext cx="10972800" cy="1219200"/>
           </a:xfrm>
           <a:prstGeom xmlns:a="http://schemas.openxmlformats.org/drawingml/2006/main" prst="rect">
             <a:avLst/>
@@ -4788,7 +5129,7 @@
           <a:lstStyle xmlns:a="http://schemas.openxmlformats.org/drawingml/2006/main"/>
           <a:p xmlns:a="http://schemas.openxmlformats.org/drawingml/2006/main">
             <a:pPr>
-              <a:defRPr sz="2100" b="0">
+              <a:defRPr sz="2025" b="0">
                 <a:solidFill>
                   <a:srgbClr val="233542"/>
                 </a:solidFill>
@@ -4798,7 +5139,7 @@
               </a:defRPr>
             </a:pPr>
             <a:r>
-              <a:rPr sz="2100" b="0">
+              <a:rPr sz="2025" b="0">
                 <a:solidFill>
                   <a:srgbClr val="233542"/>
                 </a:solidFill>
@@ -4806,17 +5147,360 @@
                 <a:ea typeface="Arial"/>
                 <a:cs typeface="Arial"/>
               </a:rPr>
-              <a:t>The earlier freeze pinned private experimental answers, then tested code against those answers. A requirements-only intake excluded contradictory design text. Execution results became the headline despite known specification dependencies.</a:t>
+              <a:t>A WGS84 anchor moves from longitude -1 degree to +1 degree on the equator at zero height. At time 5, Core linear source interpolation yields longitude zero before ECEF conversion. Each reader returns X = 6378137 m, Y = 0 m, Z = 0 m.</a:t>
             </a:r>
           </a:p>
         </p:txBody>
       </p:sp>
+      <p:graphicFrame>
+        <p:nvGraphicFramePr>
+          <p:cNvPr id="8" name=""/>
+          <p:cNvGraphicFramePr/>
+          <p:nvPr/>
+        </p:nvGraphicFramePr>
+        <p:xfrm>
+          <a:off xmlns:a="http://schemas.openxmlformats.org/drawingml/2006/main" x="609600" y="2981325"/>
+          <a:ext xmlns:a="http://schemas.openxmlformats.org/drawingml/2006/main" cx="10972800" cy="1952625"/>
+        </p:xfrm>
+        <a:graphic xmlns:a="http://schemas.openxmlformats.org/drawingml/2006/main">
+          <a:graphicData uri="http://schemas.openxmlformats.org/drawingml/2006/table">
+            <a:tbl>
+              <a:tblPr/>
+              <a:tblGrid>
+                <a:gridCol w="2190750"/>
+                <a:gridCol w="4572000"/>
+                <a:gridCol w="4210050"/>
+              </a:tblGrid>
+              <a:tr h="488156">
+                <a:tc>
+                  <a:txBody>
+                    <a:bodyPr>
+                      <a:noAutofit/>
+                    </a:bodyPr>
+                    <a:lstStyle/>
+                    <a:p>
+                      <a:r>
+                        <a:rPr sz="1950" b="1">
+                          <a:solidFill>
+                            <a:srgbClr val="FFFFFF"/>
+                          </a:solidFill>
+                          <a:latin typeface="Arial"/>
+                          <a:ea typeface="Arial"/>
+                          <a:cs typeface="Arial"/>
+                        </a:rPr>
+                        <a:t>Time code</a:t>
+                      </a:r>
+                    </a:p>
+                  </a:txBody>
+                  <a:tcPr marL="91440" marR="91440" marT="45720" marB="45720">
+                    <a:solidFill>
+                      <a:srgbClr val="233542"/>
+                    </a:solidFill>
+                  </a:tcPr>
+                </a:tc>
+                <a:tc>
+                  <a:txBody>
+                    <a:bodyPr>
+                      <a:noAutofit/>
+                    </a:bodyPr>
+                    <a:lstStyle/>
+                    <a:p>
+                      <a:r>
+                        <a:rPr sz="1950" b="1">
+                          <a:solidFill>
+                            <a:srgbClr val="FFFFFF"/>
+                          </a:solidFill>
+                          <a:latin typeface="Arial"/>
+                          <a:ea typeface="Arial"/>
+                          <a:cs typeface="Arial"/>
+                        </a:rPr>
+                        <a:t>Source longitude (degrees)</a:t>
+                      </a:r>
+                    </a:p>
+                  </a:txBody>
+                  <a:tcPr marL="91440" marR="91440" marT="45720" marB="45720">
+                    <a:solidFill>
+                      <a:srgbClr val="233542"/>
+                    </a:solidFill>
+                  </a:tcPr>
+                </a:tc>
+                <a:tc>
+                  <a:txBody>
+                    <a:bodyPr>
+                      <a:noAutofit/>
+                    </a:bodyPr>
+                    <a:lstStyle/>
+                    <a:p>
+                      <a:r>
+                        <a:rPr sz="1950" b="1">
+                          <a:solidFill>
+                            <a:srgbClr val="FFFFFF"/>
+                          </a:solidFill>
+                          <a:latin typeface="Arial"/>
+                          <a:ea typeface="Arial"/>
+                          <a:cs typeface="Arial"/>
+                        </a:rPr>
+                        <a:t>Resolved ECEF X (m)</a:t>
+                      </a:r>
+                    </a:p>
+                  </a:txBody>
+                  <a:tcPr marL="91440" marR="91440" marT="45720" marB="45720">
+                    <a:solidFill>
+                      <a:srgbClr val="233542"/>
+                    </a:solidFill>
+                  </a:tcPr>
+                </a:tc>
+              </a:tr>
+              <a:tr h="488156">
+                <a:tc>
+                  <a:txBody>
+                    <a:bodyPr>
+                      <a:noAutofit/>
+                    </a:bodyPr>
+                    <a:lstStyle/>
+                    <a:p>
+                      <a:r>
+                        <a:rPr sz="1950" b="0">
+                          <a:solidFill>
+                            <a:srgbClr val="233542"/>
+                          </a:solidFill>
+                          <a:latin typeface="Arial"/>
+                          <a:ea typeface="Arial"/>
+                          <a:cs typeface="Arial"/>
+                        </a:rPr>
+                        <a:t>0</a:t>
+                      </a:r>
+                    </a:p>
+                  </a:txBody>
+                  <a:tcPr marL="91440" marR="91440" marT="45720" marB="45720">
+                    <a:solidFill>
+                      <a:srgbClr val="FFFFFF"/>
+                    </a:solidFill>
+                  </a:tcPr>
+                </a:tc>
+                <a:tc>
+                  <a:txBody>
+                    <a:bodyPr>
+                      <a:noAutofit/>
+                    </a:bodyPr>
+                    <a:lstStyle/>
+                    <a:p>
+                      <a:r>
+                        <a:rPr sz="1950" b="0">
+                          <a:solidFill>
+                            <a:srgbClr val="233542"/>
+                          </a:solidFill>
+                          <a:latin typeface="Arial"/>
+                          <a:ea typeface="Arial"/>
+                          <a:cs typeface="Arial"/>
+                        </a:rPr>
+                        <a:t>-1</a:t>
+                      </a:r>
+                    </a:p>
+                  </a:txBody>
+                  <a:tcPr marL="91440" marR="91440" marT="45720" marB="45720">
+                    <a:solidFill>
+                      <a:srgbClr val="FFFFFF"/>
+                    </a:solidFill>
+                  </a:tcPr>
+                </a:tc>
+                <a:tc>
+                  <a:txBody>
+                    <a:bodyPr>
+                      <a:noAutofit/>
+                    </a:bodyPr>
+                    <a:lstStyle/>
+                    <a:p>
+                      <a:r>
+                        <a:rPr sz="1950" b="0">
+                          <a:solidFill>
+                            <a:srgbClr val="233542"/>
+                          </a:solidFill>
+                          <a:latin typeface="Arial"/>
+                          <a:ea typeface="Arial"/>
+                          <a:cs typeface="Arial"/>
+                        </a:rPr>
+                        <a:t>6377165.578842</a:t>
+                      </a:r>
+                    </a:p>
+                  </a:txBody>
+                  <a:tcPr marL="91440" marR="91440" marT="45720" marB="45720">
+                    <a:solidFill>
+                      <a:srgbClr val="FFFFFF"/>
+                    </a:solidFill>
+                  </a:tcPr>
+                </a:tc>
+              </a:tr>
+              <a:tr h="488156">
+                <a:tc>
+                  <a:txBody>
+                    <a:bodyPr>
+                      <a:noAutofit/>
+                    </a:bodyPr>
+                    <a:lstStyle/>
+                    <a:p>
+                      <a:r>
+                        <a:rPr sz="1950" b="0">
+                          <a:solidFill>
+                            <a:srgbClr val="233542"/>
+                          </a:solidFill>
+                          <a:latin typeface="Arial"/>
+                          <a:ea typeface="Arial"/>
+                          <a:cs typeface="Arial"/>
+                        </a:rPr>
+                        <a:t>5</a:t>
+                      </a:r>
+                    </a:p>
+                  </a:txBody>
+                  <a:tcPr marL="91440" marR="91440" marT="45720" marB="45720">
+                    <a:solidFill>
+                      <a:srgbClr val="FFFFFF"/>
+                    </a:solidFill>
+                  </a:tcPr>
+                </a:tc>
+                <a:tc>
+                  <a:txBody>
+                    <a:bodyPr>
+                      <a:noAutofit/>
+                    </a:bodyPr>
+                    <a:lstStyle/>
+                    <a:p>
+                      <a:r>
+                        <a:rPr sz="1950" b="0">
+                          <a:solidFill>
+                            <a:srgbClr val="233542"/>
+                          </a:solidFill>
+                          <a:latin typeface="Arial"/>
+                          <a:ea typeface="Arial"/>
+                          <a:cs typeface="Arial"/>
+                        </a:rPr>
+                        <a:t>0</a:t>
+                      </a:r>
+                    </a:p>
+                  </a:txBody>
+                  <a:tcPr marL="91440" marR="91440" marT="45720" marB="45720">
+                    <a:solidFill>
+                      <a:srgbClr val="FFFFFF"/>
+                    </a:solidFill>
+                  </a:tcPr>
+                </a:tc>
+                <a:tc>
+                  <a:txBody>
+                    <a:bodyPr>
+                      <a:noAutofit/>
+                    </a:bodyPr>
+                    <a:lstStyle/>
+                    <a:p>
+                      <a:r>
+                        <a:rPr sz="1950" b="0">
+                          <a:solidFill>
+                            <a:srgbClr val="233542"/>
+                          </a:solidFill>
+                          <a:latin typeface="Arial"/>
+                          <a:ea typeface="Arial"/>
+                          <a:cs typeface="Arial"/>
+                        </a:rPr>
+                        <a:t>6378137.000000</a:t>
+                      </a:r>
+                    </a:p>
+                  </a:txBody>
+                  <a:tcPr marL="91440" marR="91440" marT="45720" marB="45720">
+                    <a:solidFill>
+                      <a:srgbClr val="FFFFFF"/>
+                    </a:solidFill>
+                  </a:tcPr>
+                </a:tc>
+              </a:tr>
+              <a:tr h="488156">
+                <a:tc>
+                  <a:txBody>
+                    <a:bodyPr>
+                      <a:noAutofit/>
+                    </a:bodyPr>
+                    <a:lstStyle/>
+                    <a:p>
+                      <a:r>
+                        <a:rPr sz="1950" b="0">
+                          <a:solidFill>
+                            <a:srgbClr val="233542"/>
+                          </a:solidFill>
+                          <a:latin typeface="Arial"/>
+                          <a:ea typeface="Arial"/>
+                          <a:cs typeface="Arial"/>
+                        </a:rPr>
+                        <a:t>10</a:t>
+                      </a:r>
+                    </a:p>
+                  </a:txBody>
+                  <a:tcPr marL="91440" marR="91440" marT="45720" marB="45720">
+                    <a:solidFill>
+                      <a:srgbClr val="FFFFFF"/>
+                    </a:solidFill>
+                  </a:tcPr>
+                </a:tc>
+                <a:tc>
+                  <a:txBody>
+                    <a:bodyPr>
+                      <a:noAutofit/>
+                    </a:bodyPr>
+                    <a:lstStyle/>
+                    <a:p>
+                      <a:r>
+                        <a:rPr sz="1950" b="0">
+                          <a:solidFill>
+                            <a:srgbClr val="233542"/>
+                          </a:solidFill>
+                          <a:latin typeface="Arial"/>
+                          <a:ea typeface="Arial"/>
+                          <a:cs typeface="Arial"/>
+                        </a:rPr>
+                        <a:t>1</a:t>
+                      </a:r>
+                    </a:p>
+                  </a:txBody>
+                  <a:tcPr marL="91440" marR="91440" marT="45720" marB="45720">
+                    <a:solidFill>
+                      <a:srgbClr val="FFFFFF"/>
+                    </a:solidFill>
+                  </a:tcPr>
+                </a:tc>
+                <a:tc>
+                  <a:txBody>
+                    <a:bodyPr>
+                      <a:noAutofit/>
+                    </a:bodyPr>
+                    <a:lstStyle/>
+                    <a:p>
+                      <a:r>
+                        <a:rPr sz="1950" b="0">
+                          <a:solidFill>
+                            <a:srgbClr val="233542"/>
+                          </a:solidFill>
+                          <a:latin typeface="Arial"/>
+                          <a:ea typeface="Arial"/>
+                          <a:cs typeface="Arial"/>
+                        </a:rPr>
+                        <a:t>6377165.578842</a:t>
+                      </a:r>
+                    </a:p>
+                  </a:txBody>
+                  <a:tcPr marL="91440" marR="91440" marT="45720" marB="45720">
+                    <a:solidFill>
+                      <a:srgbClr val="FFFFFF"/>
+                    </a:solidFill>
+                  </a:tcPr>
+                </a:tc>
+              </a:tr>
+            </a:tbl>
+          </a:graphicData>
+        </a:graphic>
+      </p:graphicFrame>
       <p:sp>
         <p:nvSpPr>
-          <p:cNvPr id="3" name="">
+          <p:cNvPr id="4" name="">
             <a:extLst xmlns:a="http://schemas.openxmlformats.org/drawingml/2006/main">
               <a:ext uri="{FF2B5EF4-FFF2-40B4-BE49-F238E27FC236}">
-                <a16:creationId xmlns:a16="http://schemas.microsoft.com/office/drawing/2014/main" id="{D0875367-DBE4-4117-9FB7-3BD43235DD43}"/>
+                <a16:creationId xmlns:a16="http://schemas.microsoft.com/office/drawing/2014/main" id="{14BC048D-1A89-4379-8775-C93736667323}"/>
               </a:ext>
             </a:extLst>
           </p:cNvPr>
@@ -4827,8 +5511,8 @@
         </p:nvSpPr>
         <p:spPr>
           <a:xfrm xmlns:a="http://schemas.openxmlformats.org/drawingml/2006/main">
-            <a:off x="609600" y="3038475"/>
-            <a:ext cx="10972800" cy="1409700"/>
+            <a:off x="609600" y="5229225"/>
+            <a:ext cx="10972800" cy="714375"/>
           </a:xfrm>
           <a:prstGeom xmlns:a="http://schemas.openxmlformats.org/drawingml/2006/main" prst="rect">
             <a:avLst/>
@@ -4845,9 +5529,9 @@
           <a:lstStyle xmlns:a="http://schemas.openxmlformats.org/drawingml/2006/main"/>
           <a:p xmlns:a="http://schemas.openxmlformats.org/drawingml/2006/main">
             <a:pPr>
-              <a:defRPr sz="2100" b="0">
+              <a:defRPr sz="2175" b="1">
                 <a:solidFill>
-                  <a:srgbClr val="233542"/>
+                  <a:srgbClr val="117E89"/>
                 </a:solidFill>
                 <a:latin typeface="Arial"/>
                 <a:ea typeface="Arial"/>
@@ -4855,25 +5539,25 @@
               </a:defRPr>
             </a:pPr>
             <a:r>
-              <a:rPr sz="2100" b="0">
+              <a:rPr sz="2175" b="1">
                 <a:solidFill>
-                  <a:srgbClr val="233542"/>
+                  <a:srgbClr val="117E89"/>
                 </a:solidFill>
                 <a:latin typeface="Arial"/>
                 <a:ea typeface="Arial"/>
                 <a:cs typeface="Arial"/>
               </a:rPr>
-              <a:t>The prior relationship-based placement reader fails a reference-binding fixture from the shared proposal. This run exposes that mismatch and excludes the old placement candidate. Passing tests cannot substitute a private model for the shared data contract.</a:t>
+              <a:t>Interpolating only the converted endpoints misses the midpoint by 971.421158 m.</a:t>
             </a:r>
           </a:p>
         </p:txBody>
       </p:sp>
       <p:sp>
         <p:nvSpPr>
-          <p:cNvPr id="4" name="">
+          <p:cNvPr id="5" name="">
             <a:extLst xmlns:a="http://schemas.openxmlformats.org/drawingml/2006/main">
               <a:ext uri="{FF2B5EF4-FFF2-40B4-BE49-F238E27FC236}">
-                <a16:creationId xmlns:a16="http://schemas.microsoft.com/office/drawing/2014/main" id="{F7A7286D-5D8E-487F-B739-B4779651ECE5}"/>
+                <a16:creationId xmlns:a16="http://schemas.microsoft.com/office/drawing/2014/main" id="{1D3775A4-D4FE-4EEB-B3C3-AA30B86204EF}"/>
               </a:ext>
             </a:extLst>
           </p:cNvPr>
@@ -4884,8 +5568,8 @@
         </p:nvSpPr>
         <p:spPr>
           <a:xfrm xmlns:a="http://schemas.openxmlformats.org/drawingml/2006/main">
-            <a:off x="609600" y="4562475"/>
-            <a:ext cx="10972800" cy="1600200"/>
+            <a:off x="609600" y="6134100"/>
+            <a:ext cx="10972800" cy="504825"/>
           </a:xfrm>
           <a:prstGeom xmlns:a="http://schemas.openxmlformats.org/drawingml/2006/main" prst="rect">
             <a:avLst/>
@@ -4902,7 +5586,7 @@
           <a:lstStyle xmlns:a="http://schemas.openxmlformats.org/drawingml/2006/main"/>
           <a:p xmlns:a="http://schemas.openxmlformats.org/drawingml/2006/main">
             <a:pPr>
-              <a:defRPr sz="2100" b="0">
+              <a:defRPr sz="1650" b="0">
                 <a:solidFill>
                   <a:srgbClr val="233542"/>
                 </a:solidFill>
@@ -4912,7 +5596,7 @@
               </a:defRPr>
             </a:pPr>
             <a:r>
-              <a:rPr sz="2100" b="0">
+              <a:rPr sz="1650" b="0">
                 <a:solidFill>
                   <a:srgbClr val="233542"/>
                 </a:solidFill>
@@ -4920,7 +5604,7 @@
                 <a:ea typeface="Arial"/>
                 <a:cs typeface="Arial"/>
               </a:rPr>
-              <a:t>The default gate now stops dependent execution. It still finishes independently specified checks and delivers their receipt. No previous render, projected coordinate, export or test count is presented as evidence from this run. The remaining blockers are the named proposal contracts, not deferred mechanical work.</a:t>
+              <a:t>Fresh USD sampling record: keys 0, 5, 10 and explicit timeCodesPerSecond 48. This is not a resolved-scene export.</a:t>
             </a:r>
           </a:p>
         </p:txBody>
@@ -4928,7 +5612,207 @@
     </p:spTree>
     <p:extLst>
       <p:ext uri="{BB962C8B-B14F-4D97-AF65-F5344CB8AC3E}">
-        <p14:creationId xmlns:p14="http://schemas.microsoft.com/office/powerpoint/2010/main" val="1779971183"/>
+        <p14:creationId xmlns:p14="http://schemas.microsoft.com/office/powerpoint/2010/main" val="575833637"/>
+      </p:ext>
+    </p:extLst>
+  </p:cSld>
+</p:sld>
+</file>
+
+<file path=ppt/slides/slide8.xml><?xml version="1.0" encoding="utf-8"?>
+<p:sld xmlns:p="http://schemas.openxmlformats.org/presentationml/2006/main">
+  <p:cSld>
+    <p:bg>
+      <p:bgPr>
+        <a:solidFill xmlns:a="http://schemas.openxmlformats.org/drawingml/2006/main">
+          <a:srgbClr val="FFFFFF"/>
+        </a:solidFill>
+      </p:bgPr>
+    </p:bg>
+    <p:spTree>
+      <p:nvGrpSpPr>
+        <p:cNvPr id="1" name=""/>
+        <p:cNvGrpSpPr/>
+        <p:nvPr/>
+      </p:nvGrpSpPr>
+      <p:grpSpPr>
+        <a:xfrm xmlns:a="http://schemas.openxmlformats.org/drawingml/2006/main"/>
+      </p:grpSpPr>
+      <p:sp>
+        <p:nvSpPr>
+          <p:cNvPr id="4" name="">
+            <a:extLst xmlns:a="http://schemas.openxmlformats.org/drawingml/2006/main">
+              <a:ext uri="{FF2B5EF4-FFF2-40B4-BE49-F238E27FC236}">
+                <a16:creationId xmlns:a16="http://schemas.microsoft.com/office/drawing/2014/main" id="{9200D392-AFC4-48D1-9ED7-7BA212F6A2E9}"/>
+              </a:ext>
+            </a:extLst>
+          </p:cNvPr>
+          <p:cNvSpPr>
+            <a:spLocks xmlns:a="http://schemas.openxmlformats.org/drawingml/2006/main" noGrp="1"/>
+          </p:cNvSpPr>
+          <p:nvPr/>
+        </p:nvSpPr>
+        <p:spPr>
+          <a:xfrm xmlns:a="http://schemas.openxmlformats.org/drawingml/2006/main">
+            <a:off x="609600" y="381000"/>
+            <a:ext cx="10972800" cy="952500"/>
+          </a:xfrm>
+          <a:prstGeom xmlns:a="http://schemas.openxmlformats.org/drawingml/2006/main" prst="rect">
+            <a:avLst/>
+          </a:prstGeom>
+          <a:noFill xmlns:a="http://schemas.openxmlformats.org/drawingml/2006/main"/>
+          <a:ln xmlns:a="http://schemas.openxmlformats.org/drawingml/2006/main" w="0">
+            <a:noFill/>
+          </a:ln>
+        </p:spPr>
+        <p:txBody>
+          <a:bodyPr xmlns:a="http://schemas.openxmlformats.org/drawingml/2006/main">
+            <a:noAutofit/>
+          </a:bodyPr>
+          <a:lstStyle xmlns:a="http://schemas.openxmlformats.org/drawingml/2006/main"/>
+          <a:p xmlns:a="http://schemas.openxmlformats.org/drawingml/2006/main">
+            <a:pPr>
+              <a:defRPr sz="3150" b="1">
+                <a:solidFill>
+                  <a:srgbClr val="233542"/>
+                </a:solidFill>
+                <a:latin typeface="Arial"/>
+                <a:ea typeface="Arial"/>
+                <a:cs typeface="Arial"/>
+              </a:defRPr>
+            </a:pPr>
+            <a:r>
+              <a:rPr sz="3150" b="1">
+                <a:solidFill>
+                  <a:srgbClr val="233542"/>
+                </a:solidFill>
+                <a:latin typeface="Arial"/>
+                <a:ea typeface="Arial"/>
+                <a:cs typeface="Arial"/>
+              </a:rPr>
+              <a:t>Postimplementation audit</a:t>
+            </a:r>
+          </a:p>
+        </p:txBody>
+      </p:sp>
+      <p:sp>
+        <p:nvSpPr>
+          <p:cNvPr id="2" name="">
+            <a:extLst xmlns:a="http://schemas.openxmlformats.org/drawingml/2006/main">
+              <a:ext uri="{FF2B5EF4-FFF2-40B4-BE49-F238E27FC236}">
+                <a16:creationId xmlns:a16="http://schemas.microsoft.com/office/drawing/2014/main" id="{24136973-6413-4886-B3A5-DD8C6B6A3647}"/>
+              </a:ext>
+            </a:extLst>
+          </p:cNvPr>
+          <p:cNvSpPr>
+            <a:spLocks xmlns:a="http://schemas.openxmlformats.org/drawingml/2006/main" noGrp="1"/>
+          </p:cNvSpPr>
+          <p:nvPr/>
+        </p:nvSpPr>
+        <p:spPr>
+          <a:xfrm xmlns:a="http://schemas.openxmlformats.org/drawingml/2006/main">
+            <a:off x="609600" y="1543050"/>
+            <a:ext cx="10972800" cy="2305050"/>
+          </a:xfrm>
+          <a:prstGeom xmlns:a="http://schemas.openxmlformats.org/drawingml/2006/main" prst="rect">
+            <a:avLst/>
+          </a:prstGeom>
+          <a:noFill xmlns:a="http://schemas.openxmlformats.org/drawingml/2006/main"/>
+          <a:ln xmlns:a="http://schemas.openxmlformats.org/drawingml/2006/main" w="0">
+            <a:noFill/>
+          </a:ln>
+        </p:spPr>
+        <p:txBody>
+          <a:bodyPr xmlns:a="http://schemas.openxmlformats.org/drawingml/2006/main">
+            <a:noAutofit/>
+          </a:bodyPr>
+          <a:lstStyle xmlns:a="http://schemas.openxmlformats.org/drawingml/2006/main"/>
+          <a:p xmlns:a="http://schemas.openxmlformats.org/drawingml/2006/main">
+            <a:pPr>
+              <a:defRPr sz="2175" b="0">
+                <a:solidFill>
+                  <a:srgbClr val="233542"/>
+                </a:solidFill>
+                <a:latin typeface="Arial"/>
+                <a:ea typeface="Arial"/>
+                <a:cs typeface="Arial"/>
+              </a:defRPr>
+            </a:pPr>
+            <a:r>
+              <a:rPr sz="2175" b="0">
+                <a:solidFill>
+                  <a:srgbClr val="233542"/>
+                </a:solidFill>
+                <a:latin typeface="Arial"/>
+                <a:ea typeface="Arial"/>
+                <a:cs typeface="Arial"/>
+              </a:rPr>
+              <a:t>The audit tightened the partial origin adapter to reject nested/descendant frame requests rather than applying an incomplete model. It also corrected geographic identity reporting to use exact component comparison instead of a length metric. These repairs change consumer support/reporting, add no scene fact and do not amend the proposal to match code. Source fixtures author only crs:wkt and the three candidate placement fields. Resolution rewrites no source xformOps, resetXformStack, definitions, bindings or sampling keys.</a:t>
+            </a:r>
+          </a:p>
+        </p:txBody>
+      </p:sp>
+      <p:sp>
+        <p:nvSpPr>
+          <p:cNvPr id="3" name="">
+            <a:extLst xmlns:a="http://schemas.openxmlformats.org/drawingml/2006/main">
+              <a:ext uri="{FF2B5EF4-FFF2-40B4-BE49-F238E27FC236}">
+                <a16:creationId xmlns:a16="http://schemas.microsoft.com/office/drawing/2014/main" id="{202F0503-142B-4A0E-A635-635C2FAD874F}"/>
+              </a:ext>
+            </a:extLst>
+          </p:cNvPr>
+          <p:cNvSpPr>
+            <a:spLocks xmlns:a="http://schemas.openxmlformats.org/drawingml/2006/main" noGrp="1"/>
+          </p:cNvSpPr>
+          <p:nvPr/>
+        </p:nvSpPr>
+        <p:spPr>
+          <a:xfrm xmlns:a="http://schemas.openxmlformats.org/drawingml/2006/main">
+            <a:off x="609600" y="4257675"/>
+            <a:ext cx="10972800" cy="2114550"/>
+          </a:xfrm>
+          <a:prstGeom xmlns:a="http://schemas.openxmlformats.org/drawingml/2006/main" prst="rect">
+            <a:avLst/>
+          </a:prstGeom>
+          <a:noFill xmlns:a="http://schemas.openxmlformats.org/drawingml/2006/main"/>
+          <a:ln xmlns:a="http://schemas.openxmlformats.org/drawingml/2006/main" w="0">
+            <a:noFill/>
+          </a:ln>
+        </p:spPr>
+        <p:txBody>
+          <a:bodyPr xmlns:a="http://schemas.openxmlformats.org/drawingml/2006/main">
+            <a:noAutofit/>
+          </a:bodyPr>
+          <a:lstStyle xmlns:a="http://schemas.openxmlformats.org/drawingml/2006/main"/>
+          <a:p xmlns:a="http://schemas.openxmlformats.org/drawingml/2006/main">
+            <a:pPr>
+              <a:defRPr sz="2025" b="0">
+                <a:solidFill>
+                  <a:srgbClr val="233542"/>
+                </a:solidFill>
+                <a:latin typeface="Arial"/>
+                <a:ea typeface="Arial"/>
+                <a:cs typeface="Arial"/>
+              </a:defRPr>
+            </a:pPr>
+            <a:r>
+              <a:rPr sz="2025" b="0">
+                <a:solidFill>
+                  <a:srgbClr val="233542"/>
+                </a:solidFill>
+                <a:latin typeface="Arial"/>
+                <a:ea typeface="Arial"/>
+                <a:cs typeface="Arial"/>
+              </a:rPr>
+              <a:t>Full model frames, project-adjusted placement, geometry and bounds, Hydra/OV resolved geometry, measurement-associated data and conservative resolved-scene export depend on the four missing contracts. These partial tests do not certify near-unit quaternion validation policy or geographic-distance controls. Group adoption and geodetic accuracy remain distinct from passing execution.</a:t>
+            </a:r>
+          </a:p>
+        </p:txBody>
+      </p:sp>
+    </p:spTree>
+    <p:extLst>
+      <p:ext uri="{BB962C8B-B14F-4D97-AF65-F5344CB8AC3E}">
+        <p14:creationId xmlns:p14="http://schemas.microsoft.com/office/powerpoint/2010/main" val="40831956"/>
       </p:ext>
     </p:extLst>
   </p:cSld>

--- a/extras/usd/examples/usdGeospatialBuild/delivery/geospatial-build.pptx
+++ b/extras/usd/examples/usdGeospatialBuild/delivery/geospatial-build.pptx
@@ -2,20 +2,22 @@
 <file path=ppt/presentation.xml><?xml version="1.0" encoding="utf-8"?>
 <p:presentation xmlns:p="http://schemas.openxmlformats.org/presentationml/2006/main">
   <p:sldMasterIdLst>
-    <p:sldMasterId xmlns:r="http://schemas.openxmlformats.org/officeDocument/2006/relationships" id="2147483648" r:id="R1dd0eece0c7846f5"/>
+    <p:sldMasterId xmlns:r="http://schemas.openxmlformats.org/officeDocument/2006/relationships" id="2147483648" r:id="Rde02cfb239a843fc"/>
   </p:sldMasterIdLst>
   <p:notesMasterIdLst>
-    <p:notesMasterId xmlns:r="http://schemas.openxmlformats.org/officeDocument/2006/relationships" r:id="Rd0787b643d004cc3"/>
+    <p:notesMasterId xmlns:r="http://schemas.openxmlformats.org/officeDocument/2006/relationships" r:id="R2da6416b36554272"/>
   </p:notesMasterIdLst>
   <p:sldIdLst>
-    <p:sldId xmlns:r="http://schemas.openxmlformats.org/officeDocument/2006/relationships" id="256" r:id="Rc6f66e6d36054b89"/>
-    <p:sldId xmlns:r="http://schemas.openxmlformats.org/officeDocument/2006/relationships" id="257" r:id="R22c475efa875491e"/>
-    <p:sldId xmlns:r="http://schemas.openxmlformats.org/officeDocument/2006/relationships" id="258" r:id="Rd7ec1ece282f4808"/>
-    <p:sldId xmlns:r="http://schemas.openxmlformats.org/officeDocument/2006/relationships" id="259" r:id="R8cd7d225c56e4713"/>
-    <p:sldId xmlns:r="http://schemas.openxmlformats.org/officeDocument/2006/relationships" id="260" r:id="R39f2e07d80964dea"/>
-    <p:sldId xmlns:r="http://schemas.openxmlformats.org/officeDocument/2006/relationships" id="261" r:id="R86354ad13d81458d"/>
-    <p:sldId xmlns:r="http://schemas.openxmlformats.org/officeDocument/2006/relationships" id="262" r:id="Rc1e0844b6d9747e1"/>
-    <p:sldId xmlns:r="http://schemas.openxmlformats.org/officeDocument/2006/relationships" id="263" r:id="R38a2cf3ef80c4f43"/>
+    <p:sldId xmlns:r="http://schemas.openxmlformats.org/officeDocument/2006/relationships" id="256" r:id="R54a7a7a8b617410e"/>
+    <p:sldId xmlns:r="http://schemas.openxmlformats.org/officeDocument/2006/relationships" id="257" r:id="R133410885cdb48a7"/>
+    <p:sldId xmlns:r="http://schemas.openxmlformats.org/officeDocument/2006/relationships" id="258" r:id="R7e3c879bf9a747e8"/>
+    <p:sldId xmlns:r="http://schemas.openxmlformats.org/officeDocument/2006/relationships" id="259" r:id="R4c80bad8cd024ffc"/>
+    <p:sldId xmlns:r="http://schemas.openxmlformats.org/officeDocument/2006/relationships" id="260" r:id="Raa830915dfe24196"/>
+    <p:sldId xmlns:r="http://schemas.openxmlformats.org/officeDocument/2006/relationships" id="261" r:id="R8da20666cab54a03"/>
+    <p:sldId xmlns:r="http://schemas.openxmlformats.org/officeDocument/2006/relationships" id="262" r:id="R85ffe6ee43bc4b0c"/>
+    <p:sldId xmlns:r="http://schemas.openxmlformats.org/officeDocument/2006/relationships" id="263" r:id="R63efb70e9f4a4699"/>
+    <p:sldId xmlns:r="http://schemas.openxmlformats.org/officeDocument/2006/relationships" id="264" r:id="R26c884d5b91f42a6"/>
+    <p:sldId xmlns:r="http://schemas.openxmlformats.org/officeDocument/2006/relationships" id="265" r:id="R0a9f7bb3338b441e"/>
   </p:sldIdLst>
   <p:sldSz cx="12192000" cy="6858000"/>
   <p:notesSz cx="6858000" cy="9144000"/>
@@ -449,22 +451,37 @@
           <a:lstStyle xmlns:a="http://schemas.openxmlformats.org/drawingml/2006/main"/>
           <a:p xmlns:a="http://schemas.openxmlformats.org/drawingml/2006/main">
             <a:r>
-              <a:t>README section: Opening</a:t>
-            </a:r>
-          </a:p>
-          <a:p xmlns:a="http://schemas.openxmlformats.org/drawingml/2006/main">
-            <a:r>
-              <a:t>README SHA-256: a6550b6c7f648584c331248ac1f10e122034e919e9e160ea2c58fc571e2ae9b5</a:t>
-            </a:r>
-          </a:p>
-          <a:p xmlns:a="http://schemas.openxmlformats.org/drawingml/2006/main">
-            <a:r>
-              <a:t>Execution receipt SHA-256: 0bd771677c2dccde1727cb9e53d93fcbb3e4b8b0cd3a99fc963f40e2b32dea7a</a:t>
-            </a:r>
-          </a:p>
-          <a:p xmlns:a="http://schemas.openxmlformats.org/drawingml/2006/main">
-            <a:r>
-              <a:t>Executed source: 6d8323764ad44953887cac9781375b7c7176e928</a:t>
+              <a:t>README section: Proposal authority and decisions requiring review</a:t>
+            </a:r>
+          </a:p>
+          <a:p xmlns:a="http://schemas.openxmlformats.org/drawingml/2006/main">
+            <a:r>
+              <a:t>README SHA-256: c8526cd9672f2b8759543cc9d70a0c46dfb12b90f6efdc873b35ce1f4b6c0226</a:t>
+            </a:r>
+          </a:p>
+          <a:p xmlns:a="http://schemas.openxmlformats.org/drawingml/2006/main">
+            <a:r>
+              <a:t>Receipt SHA-256: 6c79acd04eab6bc51bc3a0e3ed50dcd66f1e7ec12395db537c76bc0dbb94a35d</a:t>
+            </a:r>
+          </a:p>
+          <a:p xmlns:a="http://schemas.openxmlformats.org/drawingml/2006/main">
+            <a:r>
+              <a:t>Immutable execution receipt SHA-256: d3c90dd02e9642080edef6d0dfed00c95e6e3d01e18b746df9fdd185e63c31ca</a:t>
+            </a:r>
+          </a:p>
+          <a:p xmlns:a="http://schemas.openxmlformats.org/drawingml/2006/main">
+            <a:r>
+              <a:t>Proposal SHA-256: 2120953af221f83816486afbe88a06768e206d23cb570b5e39a193f254ba7a11</a:t>
+            </a:r>
+          </a:p>
+          <a:p xmlns:a="http://schemas.openxmlformats.org/drawingml/2006/main">
+            <a:r>
+              <a:t>Integration evidence SHA-256: 235be1ab2b43c161614d1bba09517b8cb20166592929e7061d6b53f59f2ae8e9</a:t>
+            </a:r>
+          </a:p>
+          <a:p xmlns:a="http://schemas.openxmlformats.org/drawingml/2006/main">
+            <a:r>
+              <a:t>Executed source parent: 874ad2059b4a0c168600804acc9ce56e5834d35a; exact executed files frozen in receipt.</a:t>
             </a:r>
           </a:p>
           <a:p xmlns:a="http://schemas.openxmlformats.org/drawingml/2006/main">
@@ -474,7 +491,7 @@
           </a:p>
           <a:p xmlns:a="http://schemas.openxmlformats.org/drawingml/2006/main">
             <a:r>
-              <a:t>Four contracts still block complete model placement. The local candidate supplies concrete answers for five former gaps.</a:t>
+              <a:t>Local candidate, not group agreement or whole-requirement conformance. Two placement implementations; all use PROJ. OV reuses Python with a verified runtime geometry sink, without an OV render claim. Hydra uses a resolved ordinary-USD export from C++ results. Source data and measured limitations are documented in the README.</a:t>
             </a:r>
           </a:p>
           <a:p xmlns:a="http://schemas.openxmlformats.org/drawingml/2006/main">
@@ -484,17 +501,107 @@
           </a:p>
           <a:p xmlns:a="http://schemas.openxmlformats.org/drawingml/2006/main">
             <a:r>
-              <a:t>64 tests passed. 37 cases and 168 queries per reader, with source data unchanged.</a:t>
-            </a:r>
-          </a:p>
-          <a:p xmlns:a="http://schemas.openxmlformats.org/drawingml/2006/main">
-            <a:r>
               <a:t/>
             </a:r>
           </a:p>
-          <a:p xmlns:a="http://schemas.openxmlformats.org/drawingml/2006/main">
-            <a:r>
-              <a:t>Headless OpenUSD, native OpenUSD and live OV resolve direct anchor origins. Full model placement remains stopped.</a:t>
+        </p:txBody>
+      </p:sp>
+      <p:sp>
+        <p:nvSpPr>
+          <p:cNvPr id="4" name="Slide Number Placeholder 3"/>
+          <p:cNvSpPr>
+            <a:spLocks xmlns:a="http://schemas.openxmlformats.org/drawingml/2006/main" noGrp="1"/>
+          </p:cNvSpPr>
+          <p:nvPr>
+            <p:ph type="sldNum" idx="5"/>
+          </p:nvPr>
+        </p:nvSpPr>
+        <p:spPr/>
+        <p:txBody>
+          <a:bodyPr xmlns:a="http://schemas.openxmlformats.org/drawingml/2006/main"/>
+          <a:lstStyle xmlns:a="http://schemas.openxmlformats.org/drawingml/2006/main"/>
+          <a:p xmlns:a="http://schemas.openxmlformats.org/drawingml/2006/main"/>
+        </p:txBody>
+      </p:sp>
+    </p:spTree>
+  </p:cSld>
+  <p:clrMapOvr>
+    <a:masterClrMapping xmlns:a="http://schemas.openxmlformats.org/drawingml/2006/main"/>
+  </p:clrMapOvr>
+</p:notes>
+</file>
+
+<file path=ppt/notesSlides/notesSlide10.xml><?xml version="1.0" encoding="utf-8"?>
+<p:notes xmlns:p="http://schemas.openxmlformats.org/presentationml/2006/main">
+  <p:cSld>
+    <p:spTree>
+      <p:nvGrpSpPr>
+        <p:cNvPr id="1" name=""/>
+        <p:cNvGrpSpPr/>
+        <p:nvPr/>
+      </p:nvGrpSpPr>
+      <p:grpSpPr>
+        <a:xfrm xmlns:a="http://schemas.openxmlformats.org/drawingml/2006/main"/>
+      </p:grpSpPr>
+      <p:sp>
+        <p:nvSpPr>
+          <p:cNvPr id="2" name="Slide Image Placeholder 1"/>
+          <p:cNvSpPr>
+            <a:spLocks xmlns:a="http://schemas.openxmlformats.org/drawingml/2006/main" noGrp="1"/>
+          </p:cNvSpPr>
+          <p:nvPr>
+            <p:ph type="sldImg" idx="0"/>
+          </p:nvPr>
+        </p:nvSpPr>
+        <p:spPr/>
+      </p:sp>
+      <p:sp>
+        <p:nvSpPr>
+          <p:cNvPr id="3" name="Notes Placeholder 2"/>
+          <p:cNvSpPr>
+            <a:spLocks xmlns:a="http://schemas.openxmlformats.org/drawingml/2006/main" noGrp="1"/>
+          </p:cNvSpPr>
+          <p:nvPr>
+            <p:ph type="body" idx="1"/>
+          </p:nvPr>
+        </p:nvSpPr>
+        <p:spPr/>
+        <p:txBody>
+          <a:bodyPr xmlns:a="http://schemas.openxmlformats.org/drawingml/2006/main"/>
+          <a:lstStyle xmlns:a="http://schemas.openxmlformats.org/drawingml/2006/main"/>
+          <a:p xmlns:a="http://schemas.openxmlformats.org/drawingml/2006/main">
+            <a:r>
+              <a:t>README section: Actual consumers and shared components</a:t>
+            </a:r>
+          </a:p>
+          <a:p xmlns:a="http://schemas.openxmlformats.org/drawingml/2006/main">
+            <a:r>
+              <a:t>README SHA-256: c8526cd9672f2b8759543cc9d70a0c46dfb12b90f6efdc873b35ce1f4b6c0226</a:t>
+            </a:r>
+          </a:p>
+          <a:p xmlns:a="http://schemas.openxmlformats.org/drawingml/2006/main">
+            <a:r>
+              <a:t>Receipt SHA-256: 6c79acd04eab6bc51bc3a0e3ed50dcd66f1e7ec12395db537c76bc0dbb94a35d</a:t>
+            </a:r>
+          </a:p>
+          <a:p xmlns:a="http://schemas.openxmlformats.org/drawingml/2006/main">
+            <a:r>
+              <a:t>Immutable execution receipt SHA-256: d3c90dd02e9642080edef6d0dfed00c95e6e3d01e18b746df9fdd185e63c31ca</a:t>
+            </a:r>
+          </a:p>
+          <a:p xmlns:a="http://schemas.openxmlformats.org/drawingml/2006/main">
+            <a:r>
+              <a:t>Proposal SHA-256: 2120953af221f83816486afbe88a06768e206d23cb570b5e39a193f254ba7a11</a:t>
+            </a:r>
+          </a:p>
+          <a:p xmlns:a="http://schemas.openxmlformats.org/drawingml/2006/main">
+            <a:r>
+              <a:t>Integration evidence SHA-256: 235be1ab2b43c161614d1bba09517b8cb20166592929e7061d6b53f59f2ae8e9</a:t>
+            </a:r>
+          </a:p>
+          <a:p xmlns:a="http://schemas.openxmlformats.org/drawingml/2006/main">
+            <a:r>
+              <a:t>Executed source parent: 874ad2059b4a0c168600804acc9ce56e5834d35a; exact executed files frozen in receipt.</a:t>
             </a:r>
           </a:p>
           <a:p xmlns:a="http://schemas.openxmlformats.org/drawingml/2006/main">
@@ -504,7 +611,17 @@
           </a:p>
           <a:p xmlns:a="http://schemas.openxmlformats.org/drawingml/2006/main">
             <a:r>
-              <a:t>Candidate choices are under review. Partial controls do not certify full placement or geodetic accuracy.</a:t>
+              <a:t>Local candidate, not group agreement or whole-requirement conformance. Two placement implementations; all use PROJ. OV reuses Python with a verified runtime geometry sink, without an OV render claim. Hydra uses a resolved ordinary-USD export from C++ results. Source data and measured limitations are documented in the README.</a:t>
+            </a:r>
+          </a:p>
+          <a:p xmlns:a="http://schemas.openxmlformats.org/drawingml/2006/main">
+            <a:r>
+              <a:t/>
+            </a:r>
+          </a:p>
+          <a:p xmlns:a="http://schemas.openxmlformats.org/drawingml/2006/main">
+            <a:r>
+              <a:t/>
             </a:r>
           </a:p>
         </p:txBody>
@@ -574,22 +691,37 @@
           <a:lstStyle xmlns:a="http://schemas.openxmlformats.org/drawingml/2006/main"/>
           <a:p xmlns:a="http://schemas.openxmlformats.org/drawingml/2006/main">
             <a:r>
-              <a:t>README section: Concrete candidate answers</a:t>
-            </a:r>
-          </a:p>
-          <a:p xmlns:a="http://schemas.openxmlformats.org/drawingml/2006/main">
-            <a:r>
-              <a:t>README SHA-256: a6550b6c7f648584c331248ac1f10e122034e919e9e160ea2c58fc571e2ae9b5</a:t>
-            </a:r>
-          </a:p>
-          <a:p xmlns:a="http://schemas.openxmlformats.org/drawingml/2006/main">
-            <a:r>
-              <a:t>Execution receipt SHA-256: 0bd771677c2dccde1727cb9e53d93fcbb3e4b8b0cd3a99fc963f40e2b32dea7a</a:t>
-            </a:r>
-          </a:p>
-          <a:p xmlns:a="http://schemas.openxmlformats.org/drawingml/2006/main">
-            <a:r>
-              <a:t>Executed source: 6d8323764ad44953887cac9781375b7c7176e928</a:t>
+              <a:t>README section: Proposal authority and decisions requiring review</a:t>
+            </a:r>
+          </a:p>
+          <a:p xmlns:a="http://schemas.openxmlformats.org/drawingml/2006/main">
+            <a:r>
+              <a:t>README SHA-256: c8526cd9672f2b8759543cc9d70a0c46dfb12b90f6efdc873b35ce1f4b6c0226</a:t>
+            </a:r>
+          </a:p>
+          <a:p xmlns:a="http://schemas.openxmlformats.org/drawingml/2006/main">
+            <a:r>
+              <a:t>Receipt SHA-256: 6c79acd04eab6bc51bc3a0e3ed50dcd66f1e7ec12395db537c76bc0dbb94a35d</a:t>
+            </a:r>
+          </a:p>
+          <a:p xmlns:a="http://schemas.openxmlformats.org/drawingml/2006/main">
+            <a:r>
+              <a:t>Immutable execution receipt SHA-256: d3c90dd02e9642080edef6d0dfed00c95e6e3d01e18b746df9fdd185e63c31ca</a:t>
+            </a:r>
+          </a:p>
+          <a:p xmlns:a="http://schemas.openxmlformats.org/drawingml/2006/main">
+            <a:r>
+              <a:t>Proposal SHA-256: 2120953af221f83816486afbe88a06768e206d23cb570b5e39a193f254ba7a11</a:t>
+            </a:r>
+          </a:p>
+          <a:p xmlns:a="http://schemas.openxmlformats.org/drawingml/2006/main">
+            <a:r>
+              <a:t>Integration evidence SHA-256: 235be1ab2b43c161614d1bba09517b8cb20166592929e7061d6b53f59f2ae8e9</a:t>
+            </a:r>
+          </a:p>
+          <a:p xmlns:a="http://schemas.openxmlformats.org/drawingml/2006/main">
+            <a:r>
+              <a:t>Executed source parent: 874ad2059b4a0c168600804acc9ce56e5834d35a; exact executed files frozen in receipt.</a:t>
             </a:r>
           </a:p>
           <a:p xmlns:a="http://schemas.openxmlformats.org/drawingml/2006/main">
@@ -599,7 +731,7 @@
           </a:p>
           <a:p xmlns:a="http://schemas.openxmlformats.org/drawingml/2006/main">
             <a:r>
-              <a:t>Reference-based binding, ordinary transforms after CRS placement, source preservation and writer-authored unit/up-axis conformance retain their existing direction. Coordinate epochs remain roadmap work. No private epoch, coordinate-role relationship or dependency flag is introduced.</a:t>
+              <a:t>Local candidate, not group agreement or whole-requirement conformance. Two placement implementations; all use PROJ. OV reuses Python with a verified runtime geometry sink, without an OV render claim. Hydra uses a resolved ordinary-USD export from C++ results. Source data and measured limitations are documented in the README.</a:t>
             </a:r>
           </a:p>
           <a:p xmlns:a="http://schemas.openxmlformats.org/drawingml/2006/main">
@@ -609,7 +741,7 @@
           </a:p>
           <a:p xmlns:a="http://schemas.openxmlformats.org/drawingml/2006/main">
             <a:r>
-              <a:t>Candidate choices are under review. Partial controls do not certify full placement or geodetic accuracy.</a:t>
+              <a:t/>
             </a:r>
           </a:p>
         </p:txBody>
@@ -679,22 +811,37 @@
           <a:lstStyle xmlns:a="http://schemas.openxmlformats.org/drawingml/2006/main"/>
           <a:p xmlns:a="http://schemas.openxmlformats.org/drawingml/2006/main">
             <a:r>
-              <a:t>README section: Four contracts still required</a:t>
-            </a:r>
-          </a:p>
-          <a:p xmlns:a="http://schemas.openxmlformats.org/drawingml/2006/main">
-            <a:r>
-              <a:t>README SHA-256: a6550b6c7f648584c331248ac1f10e122034e919e9e160ea2c58fc571e2ae9b5</a:t>
-            </a:r>
-          </a:p>
-          <a:p xmlns:a="http://schemas.openxmlformats.org/drawingml/2006/main">
-            <a:r>
-              <a:t>Execution receipt SHA-256: 0bd771677c2dccde1727cb9e53d93fcbb3e4b8b0cd3a99fc963f40e2b32dea7a</a:t>
-            </a:r>
-          </a:p>
-          <a:p xmlns:a="http://schemas.openxmlformats.org/drawingml/2006/main">
-            <a:r>
-              <a:t>Executed source: 6d8323764ad44953887cac9781375b7c7176e928</a:t>
+              <a:t>README section: Physical placement and ordinary transforms</a:t>
+            </a:r>
+          </a:p>
+          <a:p xmlns:a="http://schemas.openxmlformats.org/drawingml/2006/main">
+            <a:r>
+              <a:t>README SHA-256: c8526cd9672f2b8759543cc9d70a0c46dfb12b90f6efdc873b35ce1f4b6c0226</a:t>
+            </a:r>
+          </a:p>
+          <a:p xmlns:a="http://schemas.openxmlformats.org/drawingml/2006/main">
+            <a:r>
+              <a:t>Receipt SHA-256: 6c79acd04eab6bc51bc3a0e3ed50dcd66f1e7ec12395db537c76bc0dbb94a35d</a:t>
+            </a:r>
+          </a:p>
+          <a:p xmlns:a="http://schemas.openxmlformats.org/drawingml/2006/main">
+            <a:r>
+              <a:t>Immutable execution receipt SHA-256: d3c90dd02e9642080edef6d0dfed00c95e6e3d01e18b746df9fdd185e63c31ca</a:t>
+            </a:r>
+          </a:p>
+          <a:p xmlns:a="http://schemas.openxmlformats.org/drawingml/2006/main">
+            <a:r>
+              <a:t>Proposal SHA-256: 2120953af221f83816486afbe88a06768e206d23cb570b5e39a193f254ba7a11</a:t>
+            </a:r>
+          </a:p>
+          <a:p xmlns:a="http://schemas.openxmlformats.org/drawingml/2006/main">
+            <a:r>
+              <a:t>Integration evidence SHA-256: 235be1ab2b43c161614d1bba09517b8cb20166592929e7061d6b53f59f2ae8e9</a:t>
+            </a:r>
+          </a:p>
+          <a:p xmlns:a="http://schemas.openxmlformats.org/drawingml/2006/main">
+            <a:r>
+              <a:t>Executed source parent: 874ad2059b4a0c168600804acc9ce56e5834d35a; exact executed files frozen in receipt.</a:t>
             </a:r>
           </a:p>
           <a:p xmlns:a="http://schemas.openxmlformats.org/drawingml/2006/main">
@@ -704,7 +851,7 @@
           </a:p>
           <a:p xmlns:a="http://schemas.openxmlformats.org/drawingml/2006/main">
             <a:r>
-              <a:t>Question 9 separately concerns geographic scene geometry, frames and bounds. Geographic coordinate queries already belong to initial scope. The candidate closes former field-definition, lexical-normalization, result-comparison, sampling-record and 2D-illustration gaps for this derivation. Adoption review is separate from derivability.</a:t>
+              <a:t>Local candidate, not group agreement or whole-requirement conformance. Two placement implementations; all use PROJ. OV reuses Python with a verified runtime geometry sink, without an OV render claim. Hydra uses a resolved ordinary-USD export from C++ results. Source data and measured limitations are documented in the README.</a:t>
             </a:r>
           </a:p>
           <a:p xmlns:a="http://schemas.openxmlformats.org/drawingml/2006/main">
@@ -714,7 +861,7 @@
           </a:p>
           <a:p xmlns:a="http://schemas.openxmlformats.org/drawingml/2006/main">
             <a:r>
-              <a:t>Candidate choices are under review. Partial controls do not certify full placement or geodetic accuracy.</a:t>
+              <a:t/>
             </a:r>
           </a:p>
         </p:txBody>
@@ -784,22 +931,37 @@
           <a:lstStyle xmlns:a="http://schemas.openxmlformats.org/drawingml/2006/main"/>
           <a:p xmlns:a="http://schemas.openxmlformats.org/drawingml/2006/main">
             <a:r>
-              <a:t>README section: WKT string normalization evidence</a:t>
-            </a:r>
-          </a:p>
-          <a:p xmlns:a="http://schemas.openxmlformats.org/drawingml/2006/main">
-            <a:r>
-              <a:t>README SHA-256: a6550b6c7f648584c331248ac1f10e122034e919e9e160ea2c58fc571e2ae9b5</a:t>
-            </a:r>
-          </a:p>
-          <a:p xmlns:a="http://schemas.openxmlformats.org/drawingml/2006/main">
-            <a:r>
-              <a:t>Execution receipt SHA-256: 0bd771677c2dccde1727cb9e53d93fcbb3e4b8b0cd3a99fc963f40e2b32dea7a</a:t>
-            </a:r>
-          </a:p>
-          <a:p xmlns:a="http://schemas.openxmlformats.org/drawingml/2006/main">
-            <a:r>
-              <a:t>Executed source: 6d8323764ad44953887cac9781375b7c7176e928</a:t>
+              <a:t>README section: Eiffel model and native Hydra rendering</a:t>
+            </a:r>
+          </a:p>
+          <a:p xmlns:a="http://schemas.openxmlformats.org/drawingml/2006/main">
+            <a:r>
+              <a:t>README SHA-256: c8526cd9672f2b8759543cc9d70a0c46dfb12b90f6efdc873b35ce1f4b6c0226</a:t>
+            </a:r>
+          </a:p>
+          <a:p xmlns:a="http://schemas.openxmlformats.org/drawingml/2006/main">
+            <a:r>
+              <a:t>Receipt SHA-256: 6c79acd04eab6bc51bc3a0e3ed50dcd66f1e7ec12395db537c76bc0dbb94a35d</a:t>
+            </a:r>
+          </a:p>
+          <a:p xmlns:a="http://schemas.openxmlformats.org/drawingml/2006/main">
+            <a:r>
+              <a:t>Immutable execution receipt SHA-256: d3c90dd02e9642080edef6d0dfed00c95e6e3d01e18b746df9fdd185e63c31ca</a:t>
+            </a:r>
+          </a:p>
+          <a:p xmlns:a="http://schemas.openxmlformats.org/drawingml/2006/main">
+            <a:r>
+              <a:t>Proposal SHA-256: 2120953af221f83816486afbe88a06768e206d23cb570b5e39a193f254ba7a11</a:t>
+            </a:r>
+          </a:p>
+          <a:p xmlns:a="http://schemas.openxmlformats.org/drawingml/2006/main">
+            <a:r>
+              <a:t>Integration evidence SHA-256: 235be1ab2b43c161614d1bba09517b8cb20166592929e7061d6b53f59f2ae8e9</a:t>
+            </a:r>
+          </a:p>
+          <a:p xmlns:a="http://schemas.openxmlformats.org/drawingml/2006/main">
+            <a:r>
+              <a:t>Executed source parent: 874ad2059b4a0c168600804acc9ce56e5834d35a; exact executed files frozen in receipt.</a:t>
             </a:r>
           </a:p>
           <a:p xmlns:a="http://schemas.openxmlformats.org/drawingml/2006/main">
@@ -809,7 +971,7 @@
           </a:p>
           <a:p xmlns:a="http://schemas.openxmlformats.org/drawingml/2006/main">
             <a:r>
-              <a:t>The 24 WKT tests use hand-specified lexical expectations. Padding, keyword case, preferred aliases, delimiters and exponent spelling converge. Quoted spaces, escaped quotes, metadata and frame epochs survive. The decimal **6378137.12345678912345** survives exactly. A PROJ writer round trip is a negative preservation control because it rounds that value.</a:t>
+              <a:t>Local candidate, not group agreement or whole-requirement conformance. Two placement implementations; all use PROJ. OV reuses Python with a verified runtime geometry sink, without an OV render claim. Hydra uses a resolved ordinary-USD export from C++ results. Source data and measured limitations are documented in the README.</a:t>
             </a:r>
           </a:p>
           <a:p xmlns:a="http://schemas.openxmlformats.org/drawingml/2006/main">
@@ -819,17 +981,7 @@
           </a:p>
           <a:p xmlns:a="http://schemas.openxmlformats.org/drawingml/2006/main">
             <a:r>
-              <a:t>Different CRS names remain different tokens even when an engine establishes equivalent coordinate meaning. Fixed-point validation rejects non-normalized authored text. Coordinate-epoch wrappers and unknown syntax fail explicitly. Context-dependent legacy UNIT aliases are unsupported, and one strict parser is not proof of all OGC grammar coverage. Normalization and complete scene validation are separate claims.</a:t>
-            </a:r>
-          </a:p>
-          <a:p xmlns:a="http://schemas.openxmlformats.org/drawingml/2006/main">
-            <a:r>
               <a:t/>
-            </a:r>
-          </a:p>
-          <a:p xmlns:a="http://schemas.openxmlformats.org/drawingml/2006/main">
-            <a:r>
-              <a:t>Candidate choices are under review. Partial controls do not certify full placement or geodetic accuracy.</a:t>
             </a:r>
           </a:p>
         </p:txBody>
@@ -899,22 +1051,37 @@
           <a:lstStyle xmlns:a="http://schemas.openxmlformats.org/drawingml/2006/main"/>
           <a:p xmlns:a="http://schemas.openxmlformats.org/drawingml/2006/main">
             <a:r>
-              <a:t>README section: Executed reader coverage</a:t>
-            </a:r>
-          </a:p>
-          <a:p xmlns:a="http://schemas.openxmlformats.org/drawingml/2006/main">
-            <a:r>
-              <a:t>README SHA-256: a6550b6c7f648584c331248ac1f10e122034e919e9e160ea2c58fc571e2ae9b5</a:t>
-            </a:r>
-          </a:p>
-          <a:p xmlns:a="http://schemas.openxmlformats.org/drawingml/2006/main">
-            <a:r>
-              <a:t>Execution receipt SHA-256: 0bd771677c2dccde1727cb9e53d93fcbb3e4b8b0cd3a99fc963f40e2b32dea7a</a:t>
-            </a:r>
-          </a:p>
-          <a:p xmlns:a="http://schemas.openxmlformats.org/drawingml/2006/main">
-            <a:r>
-              <a:t>Executed source: 6d8323764ad44953887cac9781375b7c7176e928</a:t>
+              <a:t>README section: Colorado survey geometry and site calibration</a:t>
+            </a:r>
+          </a:p>
+          <a:p xmlns:a="http://schemas.openxmlformats.org/drawingml/2006/main">
+            <a:r>
+              <a:t>README SHA-256: c8526cd9672f2b8759543cc9d70a0c46dfb12b90f6efdc873b35ce1f4b6c0226</a:t>
+            </a:r>
+          </a:p>
+          <a:p xmlns:a="http://schemas.openxmlformats.org/drawingml/2006/main">
+            <a:r>
+              <a:t>Receipt SHA-256: 6c79acd04eab6bc51bc3a0e3ed50dcd66f1e7ec12395db537c76bc0dbb94a35d</a:t>
+            </a:r>
+          </a:p>
+          <a:p xmlns:a="http://schemas.openxmlformats.org/drawingml/2006/main">
+            <a:r>
+              <a:t>Immutable execution receipt SHA-256: d3c90dd02e9642080edef6d0dfed00c95e6e3d01e18b746df9fdd185e63c31ca</a:t>
+            </a:r>
+          </a:p>
+          <a:p xmlns:a="http://schemas.openxmlformats.org/drawingml/2006/main">
+            <a:r>
+              <a:t>Proposal SHA-256: 2120953af221f83816486afbe88a06768e206d23cb570b5e39a193f254ba7a11</a:t>
+            </a:r>
+          </a:p>
+          <a:p xmlns:a="http://schemas.openxmlformats.org/drawingml/2006/main">
+            <a:r>
+              <a:t>Integration evidence SHA-256: 235be1ab2b43c161614d1bba09517b8cb20166592929e7061d6b53f59f2ae8e9</a:t>
+            </a:r>
+          </a:p>
+          <a:p xmlns:a="http://schemas.openxmlformats.org/drawingml/2006/main">
+            <a:r>
+              <a:t>Executed source parent: 874ad2059b4a0c168600804acc9ce56e5834d35a; exact executed files frozen in receipt.</a:t>
             </a:r>
           </a:p>
           <a:p xmlns:a="http://schemas.openxmlformats.org/drawingml/2006/main">
@@ -924,7 +1091,7 @@
           </a:p>
           <a:p xmlns:a="http://schemas.openxmlformats.org/drawingml/2006/main">
             <a:r>
-              <a:t>Composition controls cover references, stronger layers, variants, class inheritance, equivalent composed data, independent binding and unavailable unloaded content. Source controls cover requiredness, blocks, types, variability, finite values, singular signed scale, defaults, held/linear interpolation and quaternion slerp. Longitude 179 to -179 interpolates to zero without invented unwrapping.</a:t>
+              <a:t>Local candidate, not group agreement or whole-requirement conformance. Two placement implementations; all use PROJ. OV reuses Python with a verified runtime geometry sink, without an OV render claim. Hydra uses a resolved ordinary-USD export from C++ results. Source data and measured limitations are documented in the README.</a:t>
             </a:r>
           </a:p>
           <a:p xmlns:a="http://schemas.openxmlformats.org/drawingml/2006/main">
@@ -934,27 +1101,7 @@
           </a:p>
           <a:p xmlns:a="http://schemas.openxmlformats.org/drawingml/2006/main">
             <a:r>
-              <a:t>Origin controls accept only directly bound top-level anchors without ordinary adjustments or geometry offsets. They cover France projections, Colorado site calibration, source-first geographic-to-ECEF conversion and defaultPrim output selection. Nested/descendant frame requests and ordinary adjustments stop while dependent model contracts are missing. Invalid latitude and absent default output fail without a substitute.</a:t>
-            </a:r>
-          </a:p>
-          <a:p xmlns:a="http://schemas.openxmlformats.org/drawingml/2006/main">
-            <a:r>
               <a:t/>
-            </a:r>
-          </a:p>
-          <a:p xmlns:a="http://schemas.openxmlformats.org/drawingml/2006/main">
-            <a:r>
-              <a:t>Provider CSVs are PROJ-generated intake/rounding references, not survey truth. All readers use PROJ: native 9.4.1, headless and OV 9.8.1. Matching pipeline tokens are checked before comparing these results. Cases meet a predeclared 2 mm reference distance; analytic equatorial ECEF cases meet a separate 20 nm computational allowance. Neither threshold is geodetic accuracy. The geographic identity query is checked component-for-component in its declared units, without an angle-as-length metric.</a:t>
-            </a:r>
-          </a:p>
-          <a:p xmlns:a="http://schemas.openxmlformats.org/drawingml/2006/main">
-            <a:r>
-              <a:t/>
-            </a:r>
-          </a:p>
-          <a:p xmlns:a="http://schemas.openxmlformats.org/drawingml/2006/main">
-            <a:r>
-              <a:t>Candidate choices are under review. Partial controls do not certify full placement or geodetic accuracy.</a:t>
             </a:r>
           </a:p>
         </p:txBody>
@@ -1024,22 +1171,37 @@
           <a:lstStyle xmlns:a="http://schemas.openxmlformats.org/drawingml/2006/main"/>
           <a:p xmlns:a="http://schemas.openxmlformats.org/drawingml/2006/main">
             <a:r>
-              <a:t>README section: Same France origin in each runtime</a:t>
-            </a:r>
-          </a:p>
-          <a:p xmlns:a="http://schemas.openxmlformats.org/drawingml/2006/main">
-            <a:r>
-              <a:t>README SHA-256: a6550b6c7f648584c331248ac1f10e122034e919e9e160ea2c58fc571e2ae9b5</a:t>
-            </a:r>
-          </a:p>
-          <a:p xmlns:a="http://schemas.openxmlformats.org/drawingml/2006/main">
-            <a:r>
-              <a:t>Execution receipt SHA-256: 0bd771677c2dccde1727cb9e53d93fcbb3e4b8b0cd3a99fc963f40e2b32dea7a</a:t>
-            </a:r>
-          </a:p>
-          <a:p xmlns:a="http://schemas.openxmlformats.org/drawingml/2006/main">
-            <a:r>
-              <a:t>Executed source: 6d8323764ad44953887cac9781375b7c7176e928</a:t>
+              <a:t>README section: Non-visual measurements and regional geometry</a:t>
+            </a:r>
+          </a:p>
+          <a:p xmlns:a="http://schemas.openxmlformats.org/drawingml/2006/main">
+            <a:r>
+              <a:t>README SHA-256: c8526cd9672f2b8759543cc9d70a0c46dfb12b90f6efdc873b35ce1f4b6c0226</a:t>
+            </a:r>
+          </a:p>
+          <a:p xmlns:a="http://schemas.openxmlformats.org/drawingml/2006/main">
+            <a:r>
+              <a:t>Receipt SHA-256: 6c79acd04eab6bc51bc3a0e3ed50dcd66f1e7ec12395db537c76bc0dbb94a35d</a:t>
+            </a:r>
+          </a:p>
+          <a:p xmlns:a="http://schemas.openxmlformats.org/drawingml/2006/main">
+            <a:r>
+              <a:t>Immutable execution receipt SHA-256: d3c90dd02e9642080edef6d0dfed00c95e6e3d01e18b746df9fdd185e63c31ca</a:t>
+            </a:r>
+          </a:p>
+          <a:p xmlns:a="http://schemas.openxmlformats.org/drawingml/2006/main">
+            <a:r>
+              <a:t>Proposal SHA-256: 2120953af221f83816486afbe88a06768e206d23cb570b5e39a193f254ba7a11</a:t>
+            </a:r>
+          </a:p>
+          <a:p xmlns:a="http://schemas.openxmlformats.org/drawingml/2006/main">
+            <a:r>
+              <a:t>Integration evidence SHA-256: 235be1ab2b43c161614d1bba09517b8cb20166592929e7061d6b53f59f2ae8e9</a:t>
+            </a:r>
+          </a:p>
+          <a:p xmlns:a="http://schemas.openxmlformats.org/drawingml/2006/main">
+            <a:r>
+              <a:t>Executed source parent: 874ad2059b4a0c168600804acc9ce56e5834d35a; exact executed files frozen in receipt.</a:t>
             </a:r>
           </a:p>
           <a:p xmlns:a="http://schemas.openxmlformats.org/drawingml/2006/main">
@@ -1049,7 +1211,7 @@
           </a:p>
           <a:p xmlns:a="http://schemas.openxmlformats.org/drawingml/2006/main">
             <a:r>
-              <a:t>France point 0 serves as an illustrative model-anchor origin. Source: RGF93 v2b / CC49 with NGF-IGN69 height. Output: Lambert-93 with the same height reference. Every displayed component is in metres.</a:t>
+              <a:t>Local candidate, not group agreement or whole-requirement conformance. Two placement implementations; all use PROJ. OV reuses Python with a verified runtime geometry sink, without an OV render claim. Hydra uses a resolved ordinary-USD export from C++ results. Source data and measured limitations are documented in the README.</a:t>
             </a:r>
           </a:p>
           <a:p xmlns:a="http://schemas.openxmlformats.org/drawingml/2006/main">
@@ -1059,17 +1221,7 @@
           </a:p>
           <a:p xmlns:a="http://schemas.openxmlformats.org/drawingml/2006/main">
             <a:r>
-              <a:t>All 59 origins are checked in both directions. Source values and definitions remain unchanged. This resolves coordinates only and supplies no measurement-coordinate carrier or Hydra/OV geometry ingestion. Unchanged height in this pair does not test a vertical-datum conversion.</a:t>
-            </a:r>
-          </a:p>
-          <a:p xmlns:a="http://schemas.openxmlformats.org/drawingml/2006/main">
-            <a:r>
               <a:t/>
-            </a:r>
-          </a:p>
-          <a:p xmlns:a="http://schemas.openxmlformats.org/drawingml/2006/main">
-            <a:r>
-              <a:t>Candidate choices are under review. Partial controls do not certify full placement or geodetic accuracy.</a:t>
             </a:r>
           </a:p>
         </p:txBody>
@@ -1139,22 +1291,37 @@
           <a:lstStyle xmlns:a="http://schemas.openxmlformats.org/drawingml/2006/main"/>
           <a:p xmlns:a="http://schemas.openxmlformats.org/drawingml/2006/main">
             <a:r>
-              <a:t>README section: Source interpolation and the sampling record</a:t>
-            </a:r>
-          </a:p>
-          <a:p xmlns:a="http://schemas.openxmlformats.org/drawingml/2006/main">
-            <a:r>
-              <a:t>README SHA-256: a6550b6c7f648584c331248ac1f10e122034e919e9e160ea2c58fc571e2ae9b5</a:t>
-            </a:r>
-          </a:p>
-          <a:p xmlns:a="http://schemas.openxmlformats.org/drawingml/2006/main">
-            <a:r>
-              <a:t>Execution receipt SHA-256: 0bd771677c2dccde1727cb9e53d93fcbb3e4b8b0cd3a99fc963f40e2b32dea7a</a:t>
-            </a:r>
-          </a:p>
-          <a:p xmlns:a="http://schemas.openxmlformats.org/drawingml/2006/main">
-            <a:r>
-              <a:t>Executed source: 6d8323764ad44953887cac9781375b7c7176e928</a:t>
+              <a:t>README section: Non-visual measurements and regional geometry</a:t>
+            </a:r>
+          </a:p>
+          <a:p xmlns:a="http://schemas.openxmlformats.org/drawingml/2006/main">
+            <a:r>
+              <a:t>README SHA-256: c8526cd9672f2b8759543cc9d70a0c46dfb12b90f6efdc873b35ce1f4b6c0226</a:t>
+            </a:r>
+          </a:p>
+          <a:p xmlns:a="http://schemas.openxmlformats.org/drawingml/2006/main">
+            <a:r>
+              <a:t>Receipt SHA-256: 6c79acd04eab6bc51bc3a0e3ed50dcd66f1e7ec12395db537c76bc0dbb94a35d</a:t>
+            </a:r>
+          </a:p>
+          <a:p xmlns:a="http://schemas.openxmlformats.org/drawingml/2006/main">
+            <a:r>
+              <a:t>Immutable execution receipt SHA-256: d3c90dd02e9642080edef6d0dfed00c95e6e3d01e18b746df9fdd185e63c31ca</a:t>
+            </a:r>
+          </a:p>
+          <a:p xmlns:a="http://schemas.openxmlformats.org/drawingml/2006/main">
+            <a:r>
+              <a:t>Proposal SHA-256: 2120953af221f83816486afbe88a06768e206d23cb570b5e39a193f254ba7a11</a:t>
+            </a:r>
+          </a:p>
+          <a:p xmlns:a="http://schemas.openxmlformats.org/drawingml/2006/main">
+            <a:r>
+              <a:t>Integration evidence SHA-256: 235be1ab2b43c161614d1bba09517b8cb20166592929e7061d6b53f59f2ae8e9</a:t>
+            </a:r>
+          </a:p>
+          <a:p xmlns:a="http://schemas.openxmlformats.org/drawingml/2006/main">
+            <a:r>
+              <a:t>Executed source parent: 874ad2059b4a0c168600804acc9ce56e5834d35a; exact executed files frozen in receipt.</a:t>
             </a:r>
           </a:p>
           <a:p xmlns:a="http://schemas.openxmlformats.org/drawingml/2006/main">
@@ -1164,7 +1331,7 @@
           </a:p>
           <a:p xmlns:a="http://schemas.openxmlformats.org/drawingml/2006/main">
             <a:r>
-              <a:t>A WGS84 anchor moves from longitude -1 degree to +1 degree on the equator at zero height. At time 5, Core linear source interpolation yields longitude zero before ECEF conversion. Each reader returns X = 6378137 m, Y = 0 m, Z = 0 m.</a:t>
+              <a:t>Local candidate, not group agreement or whole-requirement conformance. Two placement implementations; all use PROJ. OV reuses Python with a verified runtime geometry sink, without an OV render claim. Hydra uses a resolved ordinary-USD export from C++ results. Source data and measured limitations are documented in the README.</a:t>
             </a:r>
           </a:p>
           <a:p xmlns:a="http://schemas.openxmlformats.org/drawingml/2006/main">
@@ -1174,17 +1341,7 @@
           </a:p>
           <a:p xmlns:a="http://schemas.openxmlformats.org/drawingml/2006/main">
             <a:r>
-              <a:t>Interpolating only the converted endpoints instead puts the midpoint **971.421158 m** away. A standalone USD coordinate record writes sample keys 0, 5 and 10 with explicit timeCodesPerSecond = 48; a fresh reader verifies both. This is a sampling-record control, not a resolved-scene export or a guarantee between export samples.</a:t>
-            </a:r>
-          </a:p>
-          <a:p xmlns:a="http://schemas.openxmlformats.org/drawingml/2006/main">
-            <a:r>
               <a:t/>
-            </a:r>
-          </a:p>
-          <a:p xmlns:a="http://schemas.openxmlformats.org/drawingml/2006/main">
-            <a:r>
-              <a:t>Candidate choices are under review. Partial controls do not certify full placement or geodetic accuracy.</a:t>
             </a:r>
           </a:p>
         </p:txBody>
@@ -1254,22 +1411,37 @@
           <a:lstStyle xmlns:a="http://schemas.openxmlformats.org/drawingml/2006/main"/>
           <a:p xmlns:a="http://schemas.openxmlformats.org/drawingml/2006/main">
             <a:r>
-              <a:t>README section: Postimplementation audit and delivery boundary</a:t>
-            </a:r>
-          </a:p>
-          <a:p xmlns:a="http://schemas.openxmlformats.org/drawingml/2006/main">
-            <a:r>
-              <a:t>README SHA-256: a6550b6c7f648584c331248ac1f10e122034e919e9e160ea2c58fc571e2ae9b5</a:t>
-            </a:r>
-          </a:p>
-          <a:p xmlns:a="http://schemas.openxmlformats.org/drawingml/2006/main">
-            <a:r>
-              <a:t>Execution receipt SHA-256: 0bd771677c2dccde1727cb9e53d93fcbb3e4b8b0cd3a99fc963f40e2b32dea7a</a:t>
-            </a:r>
-          </a:p>
-          <a:p xmlns:a="http://schemas.openxmlformats.org/drawingml/2006/main">
-            <a:r>
-              <a:t>Executed source: 6d8323764ad44953887cac9781375b7c7176e928</a:t>
+              <a:t>README section: Same partner coordinate inputs in both implementations and the OV host</a:t>
+            </a:r>
+          </a:p>
+          <a:p xmlns:a="http://schemas.openxmlformats.org/drawingml/2006/main">
+            <a:r>
+              <a:t>README SHA-256: c8526cd9672f2b8759543cc9d70a0c46dfb12b90f6efdc873b35ce1f4b6c0226</a:t>
+            </a:r>
+          </a:p>
+          <a:p xmlns:a="http://schemas.openxmlformats.org/drawingml/2006/main">
+            <a:r>
+              <a:t>Receipt SHA-256: 6c79acd04eab6bc51bc3a0e3ed50dcd66f1e7ec12395db537c76bc0dbb94a35d</a:t>
+            </a:r>
+          </a:p>
+          <a:p xmlns:a="http://schemas.openxmlformats.org/drawingml/2006/main">
+            <a:r>
+              <a:t>Immutable execution receipt SHA-256: d3c90dd02e9642080edef6d0dfed00c95e6e3d01e18b746df9fdd185e63c31ca</a:t>
+            </a:r>
+          </a:p>
+          <a:p xmlns:a="http://schemas.openxmlformats.org/drawingml/2006/main">
+            <a:r>
+              <a:t>Proposal SHA-256: 2120953af221f83816486afbe88a06768e206d23cb570b5e39a193f254ba7a11</a:t>
+            </a:r>
+          </a:p>
+          <a:p xmlns:a="http://schemas.openxmlformats.org/drawingml/2006/main">
+            <a:r>
+              <a:t>Integration evidence SHA-256: 235be1ab2b43c161614d1bba09517b8cb20166592929e7061d6b53f59f2ae8e9</a:t>
+            </a:r>
+          </a:p>
+          <a:p xmlns:a="http://schemas.openxmlformats.org/drawingml/2006/main">
+            <a:r>
+              <a:t>Executed source parent: 874ad2059b4a0c168600804acc9ce56e5834d35a; exact executed files frozen in receipt.</a:t>
             </a:r>
           </a:p>
           <a:p xmlns:a="http://schemas.openxmlformats.org/drawingml/2006/main">
@@ -1279,7 +1451,7 @@
           </a:p>
           <a:p xmlns:a="http://schemas.openxmlformats.org/drawingml/2006/main">
             <a:r>
-              <a:t>The audit tightened the partial origin adapter to reject nested/descendant frame requests rather than applying an incomplete model. It also corrected geographic identity reporting to use exact component comparison instead of a length metric. These repairs change consumer support/reporting, add no scene fact and do not amend the proposal to match code. Source fixtures author only crs:wkt and the three candidate placement fields. Resolution rewrites no source xformOps, resetXformStack, definitions, bindings or sampling keys.</a:t>
+              <a:t>Local candidate, not group agreement or whole-requirement conformance. Two placement implementations; all use PROJ. OV reuses Python with a verified runtime geometry sink, without an OV render claim. Hydra uses a resolved ordinary-USD export from C++ results. Source data and measured limitations are documented in the README.</a:t>
             </a:r>
           </a:p>
           <a:p xmlns:a="http://schemas.openxmlformats.org/drawingml/2006/main">
@@ -1289,17 +1461,127 @@
           </a:p>
           <a:p xmlns:a="http://schemas.openxmlformats.org/drawingml/2006/main">
             <a:r>
-              <a:t>Full model frames, project-adjusted placement, geometry and bounds, Hydra/OV resolved geometry, measurement-associated data and conservative resolved-scene export depend on the four missing contracts. These partial tests do not certify near-unit quaternion validation policy or geographic-distance controls. Group adoption and geodetic accuracy remain distinct from passing execution.</a:t>
-            </a:r>
-          </a:p>
-          <a:p xmlns:a="http://schemas.openxmlformats.org/drawingml/2006/main">
-            <a:r>
               <a:t/>
             </a:r>
           </a:p>
-          <a:p xmlns:a="http://schemas.openxmlformats.org/drawingml/2006/main">
-            <a:r>
-              <a:t>Candidate choices are under review. Partial controls do not certify full placement or geodetic accuracy.</a:t>
+        </p:txBody>
+      </p:sp>
+      <p:sp>
+        <p:nvSpPr>
+          <p:cNvPr id="4" name="Slide Number Placeholder 3"/>
+          <p:cNvSpPr>
+            <a:spLocks xmlns:a="http://schemas.openxmlformats.org/drawingml/2006/main" noGrp="1"/>
+          </p:cNvSpPr>
+          <p:nvPr>
+            <p:ph type="sldNum" idx="5"/>
+          </p:nvPr>
+        </p:nvSpPr>
+        <p:spPr/>
+        <p:txBody>
+          <a:bodyPr xmlns:a="http://schemas.openxmlformats.org/drawingml/2006/main"/>
+          <a:lstStyle xmlns:a="http://schemas.openxmlformats.org/drawingml/2006/main"/>
+          <a:p xmlns:a="http://schemas.openxmlformats.org/drawingml/2006/main"/>
+        </p:txBody>
+      </p:sp>
+    </p:spTree>
+  </p:cSld>
+  <p:clrMapOvr>
+    <a:masterClrMapping xmlns:a="http://schemas.openxmlformats.org/drawingml/2006/main"/>
+  </p:clrMapOvr>
+</p:notes>
+</file>
+
+<file path=ppt/notesSlides/notesSlide9.xml><?xml version="1.0" encoding="utf-8"?>
+<p:notes xmlns:p="http://schemas.openxmlformats.org/presentationml/2006/main">
+  <p:cSld>
+    <p:spTree>
+      <p:nvGrpSpPr>
+        <p:cNvPr id="1" name=""/>
+        <p:cNvGrpSpPr/>
+        <p:nvPr/>
+      </p:nvGrpSpPr>
+      <p:grpSpPr>
+        <a:xfrm xmlns:a="http://schemas.openxmlformats.org/drawingml/2006/main"/>
+      </p:grpSpPr>
+      <p:sp>
+        <p:nvSpPr>
+          <p:cNvPr id="2" name="Slide Image Placeholder 1"/>
+          <p:cNvSpPr>
+            <a:spLocks xmlns:a="http://schemas.openxmlformats.org/drawingml/2006/main" noGrp="1"/>
+          </p:cNvSpPr>
+          <p:nvPr>
+            <p:ph type="sldImg" idx="0"/>
+          </p:nvPr>
+        </p:nvSpPr>
+        <p:spPr/>
+      </p:sp>
+      <p:sp>
+        <p:nvSpPr>
+          <p:cNvPr id="3" name="Notes Placeholder 2"/>
+          <p:cNvSpPr>
+            <a:spLocks xmlns:a="http://schemas.openxmlformats.org/drawingml/2006/main" noGrp="1"/>
+          </p:cNvSpPr>
+          <p:nvPr>
+            <p:ph type="body" idx="1"/>
+          </p:nvPr>
+        </p:nvSpPr>
+        <p:spPr/>
+        <p:txBody>
+          <a:bodyPr xmlns:a="http://schemas.openxmlformats.org/drawingml/2006/main"/>
+          <a:lstStyle xmlns:a="http://schemas.openxmlformats.org/drawingml/2006/main"/>
+          <a:p xmlns:a="http://schemas.openxmlformats.org/drawingml/2006/main">
+            <a:r>
+              <a:t>README section: Source interpolation and freshly reread exports</a:t>
+            </a:r>
+          </a:p>
+          <a:p xmlns:a="http://schemas.openxmlformats.org/drawingml/2006/main">
+            <a:r>
+              <a:t>README SHA-256: c8526cd9672f2b8759543cc9d70a0c46dfb12b90f6efdc873b35ce1f4b6c0226</a:t>
+            </a:r>
+          </a:p>
+          <a:p xmlns:a="http://schemas.openxmlformats.org/drawingml/2006/main">
+            <a:r>
+              <a:t>Receipt SHA-256: 6c79acd04eab6bc51bc3a0e3ed50dcd66f1e7ec12395db537c76bc0dbb94a35d</a:t>
+            </a:r>
+          </a:p>
+          <a:p xmlns:a="http://schemas.openxmlformats.org/drawingml/2006/main">
+            <a:r>
+              <a:t>Immutable execution receipt SHA-256: d3c90dd02e9642080edef6d0dfed00c95e6e3d01e18b746df9fdd185e63c31ca</a:t>
+            </a:r>
+          </a:p>
+          <a:p xmlns:a="http://schemas.openxmlformats.org/drawingml/2006/main">
+            <a:r>
+              <a:t>Proposal SHA-256: 2120953af221f83816486afbe88a06768e206d23cb570b5e39a193f254ba7a11</a:t>
+            </a:r>
+          </a:p>
+          <a:p xmlns:a="http://schemas.openxmlformats.org/drawingml/2006/main">
+            <a:r>
+              <a:t>Integration evidence SHA-256: 235be1ab2b43c161614d1bba09517b8cb20166592929e7061d6b53f59f2ae8e9</a:t>
+            </a:r>
+          </a:p>
+          <a:p xmlns:a="http://schemas.openxmlformats.org/drawingml/2006/main">
+            <a:r>
+              <a:t>Executed source parent: 874ad2059b4a0c168600804acc9ce56e5834d35a; exact executed files frozen in receipt.</a:t>
+            </a:r>
+          </a:p>
+          <a:p xmlns:a="http://schemas.openxmlformats.org/drawingml/2006/main">
+            <a:r>
+              <a:t/>
+            </a:r>
+          </a:p>
+          <a:p xmlns:a="http://schemas.openxmlformats.org/drawingml/2006/main">
+            <a:r>
+              <a:t>Local candidate, not group agreement or whole-requirement conformance. Two placement implementations; all use PROJ. OV reuses Python with a verified runtime geometry sink, without an OV render claim. Hydra uses a resolved ordinary-USD export from C++ results. Source data and measured limitations are documented in the README.</a:t>
+            </a:r>
+          </a:p>
+          <a:p xmlns:a="http://schemas.openxmlformats.org/drawingml/2006/main">
+            <a:r>
+              <a:t/>
+            </a:r>
+          </a:p>
+          <a:p xmlns:a="http://schemas.openxmlformats.org/drawingml/2006/main">
+            <a:r>
+              <a:t>The curve is a 61-point analytic visualization guide. Dots are the three actual resolved sample positions verified in fresh geometry exports. Source longitude goes from 0 to 2 degrees. Chart offset is for presentation only. Literal chart snapshots round plotted values to six decimals; underlying results remain unchanged.</a:t>
             </a:r>
           </a:p>
         </p:txBody>
@@ -1367,7 +1649,7 @@
   </p:cSld>
   <p:clrMap bg1="lt1" tx1="dk1" bg2="lt2" tx2="dk2" accent1="accent1" accent2="accent2" accent3="accent3" accent4="accent4" accent5="accent5" accent6="accent6" hlink="hlink" folHlink="folHlink"/>
   <p:sldLayoutIdLst>
-    <p:sldLayoutId xmlns:r="http://schemas.openxmlformats.org/officeDocument/2006/relationships" id="2147483649" r:id="Rcd37ab972c5c4338"/>
+    <p:sldLayoutId xmlns:r="http://schemas.openxmlformats.org/officeDocument/2006/relationships" id="2147483649" r:id="Rddd8393df91b485f"/>
   </p:sldLayoutIdLst>
   <p:txStyles>
     <p:titleStyle>
@@ -1894,7 +2176,1123 @@
 </a:theme>
 </file>
 
+<file path=ppt/slides/charts/chart1.xml><?xml version="1.0" encoding="utf-8"?>
+<c:chartSpace xmlns:c="http://schemas.openxmlformats.org/drawingml/2006/chart" xmlns:r="http://schemas.openxmlformats.org/officeDocument/2006/relationships">
+  <c:lang val="en-US"/>
+  <c:chart>
+    <c:title>
+      <c:tx>
+        <c:rich>
+          <a:bodyPr xmlns:a="http://schemas.openxmlformats.org/drawingml/2006/main"/>
+          <a:lstStyle xmlns:a="http://schemas.openxmlformats.org/drawingml/2006/main"/>
+          <a:p xmlns:a="http://schemas.openxmlformats.org/drawingml/2006/main">
+            <a:r>
+              <a:rPr sz="1875" b="1">
+                <a:solidFill>
+                  <a:srgbClr val="213744"/>
+                </a:solidFill>
+                <a:latin typeface="Arial"/>
+                <a:ea typeface="Arial"/>
+                <a:cs typeface="Arial"/>
+              </a:rPr>
+              <a:t>Source-first ECEF path</a:t>
+            </a:r>
+          </a:p>
+        </c:rich>
+      </c:tx>
+      <c:overlay val="0"/>
+      <c:txPr>
+        <a:bodyPr xmlns:a="http://schemas.openxmlformats.org/drawingml/2006/main" anchorCtr="1"/>
+        <a:lstStyle xmlns:a="http://schemas.openxmlformats.org/drawingml/2006/main"/>
+        <a:p xmlns:a="http://schemas.openxmlformats.org/drawingml/2006/main">
+          <a:pPr>
+            <a:defRPr sz="1875" b="1">
+              <a:solidFill>
+                <a:srgbClr val="213744"/>
+              </a:solidFill>
+              <a:latin typeface="Arial"/>
+              <a:ea typeface="Arial"/>
+              <a:cs typeface="Arial"/>
+            </a:defRPr>
+          </a:pPr>
+        </a:p>
+      </c:txPr>
+    </c:title>
+    <c:plotArea>
+      <c:scatterChart>
+        <c:scatterStyle val="lineMarker"/>
+        <c:ser>
+          <c:idx val="0"/>
+          <c:order val="0"/>
+          <c:tx>
+            <c:v>Analytic guide</c:v>
+          </c:tx>
+          <c:spPr>
+            <a:ln xmlns:a="http://schemas.openxmlformats.org/drawingml/2006/main" w="28575">
+              <a:solidFill>
+                <a:srgbClr val="157C87"/>
+              </a:solidFill>
+            </a:ln>
+          </c:spPr>
+          <c:marker>
+            <c:symbol val="none"/>
+          </c:marker>
+          <c:xVal>
+            <c:numRef>
+              <c:f>'Chart Data'!$A$2:$A$62</c:f>
+              <c:numCache>
+                <c:formatCode>General</c:formatCode>
+                <c:ptCount val="61"/>
+                <c:pt idx="0">
+                  <c:v>0</c:v>
+                </c:pt>
+                <c:pt idx="1">
+                  <c:v>3.710649</c:v>
+                </c:pt>
+                <c:pt idx="2">
+                  <c:v>7.421298</c:v>
+                </c:pt>
+                <c:pt idx="3">
+                  <c:v>11.131943</c:v>
+                </c:pt>
+                <c:pt idx="4">
+                  <c:v>14.842585</c:v>
+                </c:pt>
+                <c:pt idx="5">
+                  <c:v>18.553222</c:v>
+                </c:pt>
+                <c:pt idx="6">
+                  <c:v>22.263853</c:v>
+                </c:pt>
+                <c:pt idx="7">
+                  <c:v>25.974476</c:v>
+                </c:pt>
+                <c:pt idx="8">
+                  <c:v>29.68509</c:v>
+                </c:pt>
+                <c:pt idx="9">
+                  <c:v>33.395695</c:v>
+                </c:pt>
+                <c:pt idx="10">
+                  <c:v>37.106288</c:v>
+                </c:pt>
+                <c:pt idx="11">
+                  <c:v>40.816868</c:v>
+                </c:pt>
+                <c:pt idx="12">
+                  <c:v>44.527435</c:v>
+                </c:pt>
+                <c:pt idx="13">
+                  <c:v>48.237986</c:v>
+                </c:pt>
+                <c:pt idx="14">
+                  <c:v>51.948521</c:v>
+                </c:pt>
+                <c:pt idx="15">
+                  <c:v>55.659039</c:v>
+                </c:pt>
+                <c:pt idx="16">
+                  <c:v>59.369538</c:v>
+                </c:pt>
+                <c:pt idx="17">
+                  <c:v>63.080016</c:v>
+                </c:pt>
+                <c:pt idx="18">
+                  <c:v>66.790474</c:v>
+                </c:pt>
+                <c:pt idx="19">
+                  <c:v>70.500908</c:v>
+                </c:pt>
+                <c:pt idx="20">
+                  <c:v>74.211319</c:v>
+                </c:pt>
+                <c:pt idx="21">
+                  <c:v>77.921705</c:v>
+                </c:pt>
+                <c:pt idx="22">
+                  <c:v>81.632064</c:v>
+                </c:pt>
+                <c:pt idx="23">
+                  <c:v>85.342396</c:v>
+                </c:pt>
+                <c:pt idx="24">
+                  <c:v>89.052699</c:v>
+                </c:pt>
+                <c:pt idx="25">
+                  <c:v>92.762972</c:v>
+                </c:pt>
+                <c:pt idx="26">
+                  <c:v>96.473213</c:v>
+                </c:pt>
+                <c:pt idx="27">
+                  <c:v>100.183422</c:v>
+                </c:pt>
+                <c:pt idx="28">
+                  <c:v>103.893596</c:v>
+                </c:pt>
+                <c:pt idx="29">
+                  <c:v>107.603736</c:v>
+                </c:pt>
+                <c:pt idx="30">
+                  <c:v>111.313839</c:v>
+                </c:pt>
+                <c:pt idx="31">
+                  <c:v>115.023905</c:v>
+                </c:pt>
+                <c:pt idx="32">
+                  <c:v>118.733931</c:v>
+                </c:pt>
+                <c:pt idx="33">
+                  <c:v>122.443918</c:v>
+                </c:pt>
+                <c:pt idx="34">
+                  <c:v>126.153863</c:v>
+                </c:pt>
+                <c:pt idx="35">
+                  <c:v>129.863765</c:v>
+                </c:pt>
+                <c:pt idx="36">
+                  <c:v>133.573623</c:v>
+                </c:pt>
+                <c:pt idx="37">
+                  <c:v>137.283436</c:v>
+                </c:pt>
+                <c:pt idx="38">
+                  <c:v>140.993203</c:v>
+                </c:pt>
+                <c:pt idx="39">
+                  <c:v>144.702922</c:v>
+                </c:pt>
+                <c:pt idx="40">
+                  <c:v>148.412592</c:v>
+                </c:pt>
+                <c:pt idx="41">
+                  <c:v>152.122211</c:v>
+                </c:pt>
+                <c:pt idx="42">
+                  <c:v>155.831779</c:v>
+                </c:pt>
+                <c:pt idx="43">
+                  <c:v>159.541295</c:v>
+                </c:pt>
+                <c:pt idx="44">
+                  <c:v>163.250756</c:v>
+                </c:pt>
+                <c:pt idx="45">
+                  <c:v>166.960163</c:v>
+                </c:pt>
+                <c:pt idx="46">
+                  <c:v>170.669512</c:v>
+                </c:pt>
+                <c:pt idx="47">
+                  <c:v>174.378804</c:v>
+                </c:pt>
+                <c:pt idx="48">
+                  <c:v>178.088037</c:v>
+                </c:pt>
+                <c:pt idx="49">
+                  <c:v>181.79721</c:v>
+                </c:pt>
+                <c:pt idx="50">
+                  <c:v>185.506321</c:v>
+                </c:pt>
+                <c:pt idx="51">
+                  <c:v>189.215369</c:v>
+                </c:pt>
+                <c:pt idx="52">
+                  <c:v>192.924353</c:v>
+                </c:pt>
+                <c:pt idx="53">
+                  <c:v>196.633272</c:v>
+                </c:pt>
+                <c:pt idx="54">
+                  <c:v>200.342125</c:v>
+                </c:pt>
+                <c:pt idx="55">
+                  <c:v>204.050909</c:v>
+                </c:pt>
+                <c:pt idx="56">
+                  <c:v>207.759625</c:v>
+                </c:pt>
+                <c:pt idx="57">
+                  <c:v>211.46827</c:v>
+                </c:pt>
+                <c:pt idx="58">
+                  <c:v>215.176844</c:v>
+                </c:pt>
+                <c:pt idx="59">
+                  <c:v>218.885344</c:v>
+                </c:pt>
+                <c:pt idx="60">
+                  <c:v>222.593771</c:v>
+                </c:pt>
+              </c:numCache>
+            </c:numRef>
+          </c:xVal>
+          <c:yVal>
+            <c:numRef>
+              <c:f>'Chart Data'!$B$2:$B$62</c:f>
+              <c:numCache>
+                <c:formatCode>0</c:formatCode>
+                <c:ptCount val="61"/>
+                <c:pt idx="0">
+                  <c:v>1942.694364</c:v>
+                </c:pt>
+                <c:pt idx="1">
+                  <c:v>1941.61498</c:v>
+                </c:pt>
+                <c:pt idx="2">
+                  <c:v>1938.376828</c:v>
+                </c:pt>
+                <c:pt idx="3">
+                  <c:v>1932.979909</c:v>
+                </c:pt>
+                <c:pt idx="4">
+                  <c:v>1925.424224</c:v>
+                </c:pt>
+                <c:pt idx="5">
+                  <c:v>1915.709777</c:v>
+                </c:pt>
+                <c:pt idx="6">
+                  <c:v>1903.836571</c:v>
+                </c:pt>
+                <c:pt idx="7">
+                  <c:v>1889.80461</c:v>
+                </c:pt>
+                <c:pt idx="8">
+                  <c:v>1873.613898</c:v>
+                </c:pt>
+                <c:pt idx="9">
+                  <c:v>1855.264441</c:v>
+                </c:pt>
+                <c:pt idx="10">
+                  <c:v>1834.756245</c:v>
+                </c:pt>
+                <c:pt idx="11">
+                  <c:v>1812.089317</c:v>
+                </c:pt>
+                <c:pt idx="12">
+                  <c:v>1787.263665</c:v>
+                </c:pt>
+                <c:pt idx="13">
+                  <c:v>1760.279297</c:v>
+                </c:pt>
+                <c:pt idx="14">
+                  <c:v>1731.136223</c:v>
+                </c:pt>
+                <c:pt idx="15">
+                  <c:v>1699.834451</c:v>
+                </c:pt>
+                <c:pt idx="16">
+                  <c:v>1666.373994</c:v>
+                </c:pt>
+                <c:pt idx="17">
+                  <c:v>1630.754861</c:v>
+                </c:pt>
+                <c:pt idx="18">
+                  <c:v>1592.977066</c:v>
+                </c:pt>
+                <c:pt idx="19">
+                  <c:v>1553.040621</c:v>
+                </c:pt>
+                <c:pt idx="20">
+                  <c:v>1510.945539</c:v>
+                </c:pt>
+                <c:pt idx="21">
+                  <c:v>1466.691834</c:v>
+                </c:pt>
+                <c:pt idx="22">
+                  <c:v>1420.279523</c:v>
+                </c:pt>
+                <c:pt idx="23">
+                  <c:v>1371.70862</c:v>
+                </c:pt>
+                <c:pt idx="24">
+                  <c:v>1320.979142</c:v>
+                </c:pt>
+                <c:pt idx="25">
+                  <c:v>1268.091105</c:v>
+                </c:pt>
+                <c:pt idx="26">
+                  <c:v>1213.044529</c:v>
+                </c:pt>
+                <c:pt idx="27">
+                  <c:v>1155.839431</c:v>
+                </c:pt>
+                <c:pt idx="28">
+                  <c:v>1096.475831</c:v>
+                </c:pt>
+                <c:pt idx="29">
+                  <c:v>1034.953749</c:v>
+                </c:pt>
+                <c:pt idx="30">
+                  <c:v>971.273206</c:v>
+                </c:pt>
+                <c:pt idx="31">
+                  <c:v>905.434223</c:v>
+                </c:pt>
+                <c:pt idx="32">
+                  <c:v>837.436823</c:v>
+                </c:pt>
+                <c:pt idx="33">
+                  <c:v>767.281029</c:v>
+                </c:pt>
+                <c:pt idx="34">
+                  <c:v>694.966864</c:v>
+                </c:pt>
+                <c:pt idx="35">
+                  <c:v>620.494353</c:v>
+                </c:pt>
+                <c:pt idx="36">
+                  <c:v>543.863521</c:v>
+                </c:pt>
+                <c:pt idx="37">
+                  <c:v>465.074394</c:v>
+                </c:pt>
+                <c:pt idx="38">
+                  <c:v>384.126998</c:v>
+                </c:pt>
+                <c:pt idx="39">
+                  <c:v>301.021362</c:v>
+                </c:pt>
+                <c:pt idx="40">
+                  <c:v>215.757513</c:v>
+                </c:pt>
+                <c:pt idx="41">
+                  <c:v>128.33548</c:v>
+                </c:pt>
+                <c:pt idx="42">
+                  <c:v>38.755293</c:v>
+                </c:pt>
+                <c:pt idx="43">
+                  <c:v>-52.983018</c:v>
+                </c:pt>
+                <c:pt idx="44">
+                  <c:v>-146.879423</c:v>
+                </c:pt>
+                <c:pt idx="45">
+                  <c:v>-242.933888</c:v>
+                </c:pt>
+                <c:pt idx="46">
+                  <c:v>-341.146382</c:v>
+                </c:pt>
+                <c:pt idx="47">
+                  <c:v>-441.516871</c:v>
+                </c:pt>
+                <c:pt idx="48">
+                  <c:v>-544.045322</c:v>
+                </c:pt>
+                <c:pt idx="49">
+                  <c:v>-648.7317</c:v>
+                </c:pt>
+                <c:pt idx="50">
+                  <c:v>-755.575969</c:v>
+                </c:pt>
+                <c:pt idx="51">
+                  <c:v>-864.578093</c:v>
+                </c:pt>
+                <c:pt idx="52">
+                  <c:v>-975.738036</c:v>
+                </c:pt>
+                <c:pt idx="53">
+                  <c:v>-1089.055759</c:v>
+                </c:pt>
+                <c:pt idx="54">
+                  <c:v>-1204.531224</c:v>
+                </c:pt>
+                <c:pt idx="55">
+                  <c:v>-1322.164393</c:v>
+                </c:pt>
+                <c:pt idx="56">
+                  <c:v>-1441.955225</c:v>
+                </c:pt>
+                <c:pt idx="57">
+                  <c:v>-1563.903679</c:v>
+                </c:pt>
+                <c:pt idx="58">
+                  <c:v>-1688.009716</c:v>
+                </c:pt>
+                <c:pt idx="59">
+                  <c:v>-1814.273292</c:v>
+                </c:pt>
+                <c:pt idx="60">
+                  <c:v>-1942.694364</c:v>
+                </c:pt>
+              </c:numCache>
+            </c:numRef>
+          </c:yVal>
+        </c:ser>
+        <c:ser>
+          <c:idx val="1"/>
+          <c:order val="1"/>
+          <c:tx>
+            <c:v>Converted endpoint chord</c:v>
+          </c:tx>
+          <c:spPr>
+            <a:ln xmlns:a="http://schemas.openxmlformats.org/drawingml/2006/main" w="28575">
+              <a:solidFill>
+                <a:srgbClr val="A25D20"/>
+              </a:solidFill>
+            </a:ln>
+          </c:spPr>
+          <c:marker>
+            <c:symbol val="none"/>
+          </c:marker>
+          <c:xVal>
+            <c:numRef>
+              <c:f>'Chart Data'!$C$2:$C$3</c:f>
+              <c:numCache>
+                <c:formatCode>General</c:formatCode>
+                <c:ptCount val="2"/>
+                <c:pt idx="0">
+                  <c:v>0</c:v>
+                </c:pt>
+                <c:pt idx="1">
+                  <c:v>222.593771</c:v>
+                </c:pt>
+              </c:numCache>
+            </c:numRef>
+          </c:xVal>
+          <c:yVal>
+            <c:numRef>
+              <c:f>'Chart Data'!$D$2:$D$3</c:f>
+              <c:numCache>
+                <c:formatCode>0</c:formatCode>
+                <c:ptCount val="2"/>
+                <c:pt idx="0">
+                  <c:v>1942.694364</c:v>
+                </c:pt>
+                <c:pt idx="1">
+                  <c:v>-1942.694364</c:v>
+                </c:pt>
+              </c:numCache>
+            </c:numRef>
+          </c:yVal>
+        </c:ser>
+        <c:ser>
+          <c:idx val="2"/>
+          <c:order val="2"/>
+          <c:tx>
+            <c:v>Resolved export samples</c:v>
+          </c:tx>
+          <c:spPr>
+            <a:solidFill xmlns:a="http://schemas.openxmlformats.org/drawingml/2006/main">
+              <a:srgbClr val="2A6199"/>
+            </a:solidFill>
+            <a:ln xmlns:a="http://schemas.openxmlformats.org/drawingml/2006/main" w="0">
+              <a:noFill/>
+            </a:ln>
+          </c:spPr>
+          <c:marker>
+            <c:symbol val="circle"/>
+            <c:size val="10"/>
+            <c:spPr>
+              <a:noFill xmlns:a="http://schemas.openxmlformats.org/drawingml/2006/main"/>
+            </c:spPr>
+          </c:marker>
+          <c:xVal>
+            <c:numRef>
+              <c:f>'Chart Data'!$E$2:$E$4</c:f>
+              <c:numCache>
+                <c:formatCode>General</c:formatCode>
+                <c:ptCount val="3"/>
+                <c:pt idx="0">
+                  <c:v>0</c:v>
+                </c:pt>
+                <c:pt idx="1">
+                  <c:v>111.313839</c:v>
+                </c:pt>
+                <c:pt idx="2">
+                  <c:v>222.593771</c:v>
+                </c:pt>
+              </c:numCache>
+            </c:numRef>
+          </c:xVal>
+          <c:yVal>
+            <c:numRef>
+              <c:f>'Chart Data'!$F$2:$F$4</c:f>
+              <c:numCache>
+                <c:formatCode>0</c:formatCode>
+                <c:ptCount val="3"/>
+                <c:pt idx="0">
+                  <c:v>1942.694364</c:v>
+                </c:pt>
+                <c:pt idx="1">
+                  <c:v>971.273206</c:v>
+                </c:pt>
+                <c:pt idx="2">
+                  <c:v>-1942.694364</c:v>
+                </c:pt>
+              </c:numCache>
+            </c:numRef>
+          </c:yVal>
+        </c:ser>
+        <c:dLbls>
+          <c:txPr>
+            <a:bodyPr xmlns:a="http://schemas.openxmlformats.org/drawingml/2006/main" anchorCtr="1"/>
+            <a:lstStyle xmlns:a="http://schemas.openxmlformats.org/drawingml/2006/main"/>
+            <a:p xmlns:a="http://schemas.openxmlformats.org/drawingml/2006/main">
+              <a:pPr>
+                <a:defRPr>
+                  <a:latin typeface="Arial"/>
+                  <a:ea typeface="Arial"/>
+                  <a:cs typeface="Arial"/>
+                </a:defRPr>
+              </a:pPr>
+            </a:p>
+          </c:txPr>
+          <c:showLegendKey val="0"/>
+          <c:showVal val="0"/>
+          <c:showCatName val="0"/>
+          <c:showSerName val="0"/>
+          <c:showPercent val="0"/>
+          <c:showBubbleSize val="0"/>
+          <c:showLeaderLines val="0"/>
+        </c:dLbls>
+        <c:axId val="48650112"/>
+        <c:axId val="48672768"/>
+      </c:scatterChart>
+      <c:valAx>
+        <c:axId val="48672768"/>
+        <c:scaling>
+          <c:orientation val="minMax"/>
+        </c:scaling>
+        <c:delete val="0"/>
+        <c:axPos val="l"/>
+        <c:majorGridlines>
+          <c:spPr>
+            <a:ln xmlns:a="http://schemas.openxmlformats.org/drawingml/2006/main" w="9525">
+              <a:solidFill>
+                <a:srgbClr val="E9EEF1"/>
+              </a:solidFill>
+            </a:ln>
+          </c:spPr>
+        </c:majorGridlines>
+        <c:title>
+          <c:tx>
+            <c:rich>
+              <a:bodyPr xmlns:a="http://schemas.openxmlformats.org/drawingml/2006/main"/>
+              <a:lstStyle xmlns:a="http://schemas.openxmlformats.org/drawingml/2006/main"/>
+              <a:p xmlns:a="http://schemas.openxmlformats.org/drawingml/2006/main">
+                <a:r>
+                  <a:rPr sz="1425">
+                    <a:solidFill>
+                      <a:srgbClr val="213744"/>
+                    </a:solidFill>
+                    <a:latin typeface="Arial"/>
+                    <a:ea typeface="Arial"/>
+                    <a:cs typeface="Arial"/>
+                  </a:rPr>
+                  <a:t>ECEF X relative to chord midpoint (m)</a:t>
+                </a:r>
+              </a:p>
+            </c:rich>
+          </c:tx>
+          <c:overlay val="0"/>
+          <c:txPr>
+            <a:bodyPr xmlns:a="http://schemas.openxmlformats.org/drawingml/2006/main" anchorCtr="1"/>
+            <a:lstStyle xmlns:a="http://schemas.openxmlformats.org/drawingml/2006/main"/>
+            <a:p xmlns:a="http://schemas.openxmlformats.org/drawingml/2006/main">
+              <a:pPr>
+                <a:defRPr sz="1425">
+                  <a:solidFill>
+                    <a:srgbClr val="213744"/>
+                  </a:solidFill>
+                  <a:latin typeface="Arial"/>
+                  <a:ea typeface="Arial"/>
+                  <a:cs typeface="Arial"/>
+                </a:defRPr>
+              </a:pPr>
+            </a:p>
+          </c:txPr>
+        </c:title>
+        <c:numFmt formatCode="0"/>
+        <c:majorTickMark val="none"/>
+        <c:minorTickMark val="none"/>
+        <c:spPr>
+          <a:ln xmlns:a="http://schemas.openxmlformats.org/drawingml/2006/main" w="9525">
+            <a:solidFill>
+              <a:srgbClr val="D7E1E6"/>
+            </a:solidFill>
+          </a:ln>
+        </c:spPr>
+        <c:txPr>
+          <a:bodyPr xmlns:a="http://schemas.openxmlformats.org/drawingml/2006/main" anchorCtr="1"/>
+          <a:lstStyle xmlns:a="http://schemas.openxmlformats.org/drawingml/2006/main"/>
+          <a:p xmlns:a="http://schemas.openxmlformats.org/drawingml/2006/main">
+            <a:pPr>
+              <a:defRPr sz="1350">
+                <a:solidFill>
+                  <a:srgbClr val="526B79"/>
+                </a:solidFill>
+                <a:latin typeface="Arial"/>
+                <a:ea typeface="Arial"/>
+                <a:cs typeface="Arial"/>
+              </a:defRPr>
+            </a:pPr>
+          </a:p>
+        </c:txPr>
+        <c:crossAx val="48650112"/>
+      </c:valAx>
+      <c:valAx>
+        <c:axId val="48650112"/>
+        <c:scaling>
+          <c:orientation val="minMax"/>
+        </c:scaling>
+        <c:delete val="0"/>
+        <c:axPos val="b"/>
+        <c:majorGridlines>
+          <c:spPr>
+            <a:ln xmlns:a="http://schemas.openxmlformats.org/drawingml/2006/main" w="9525">
+              <a:solidFill>
+                <a:srgbClr val="E9EEF1"/>
+              </a:solidFill>
+            </a:ln>
+          </c:spPr>
+        </c:majorGridlines>
+        <c:title>
+          <c:tx>
+            <c:rich>
+              <a:bodyPr xmlns:a="http://schemas.openxmlformats.org/drawingml/2006/main"/>
+              <a:lstStyle xmlns:a="http://schemas.openxmlformats.org/drawingml/2006/main"/>
+              <a:p xmlns:a="http://schemas.openxmlformats.org/drawingml/2006/main">
+                <a:r>
+                  <a:rPr sz="1425">
+                    <a:solidFill>
+                      <a:srgbClr val="213744"/>
+                    </a:solidFill>
+                    <a:latin typeface="Arial"/>
+                    <a:ea typeface="Arial"/>
+                    <a:cs typeface="Arial"/>
+                  </a:rPr>
+                  <a:t>ECEF Y (km)</a:t>
+                </a:r>
+              </a:p>
+            </c:rich>
+          </c:tx>
+          <c:overlay val="0"/>
+          <c:txPr>
+            <a:bodyPr xmlns:a="http://schemas.openxmlformats.org/drawingml/2006/main" anchorCtr="1"/>
+            <a:lstStyle xmlns:a="http://schemas.openxmlformats.org/drawingml/2006/main"/>
+            <a:p xmlns:a="http://schemas.openxmlformats.org/drawingml/2006/main">
+              <a:pPr>
+                <a:defRPr sz="1425">
+                  <a:solidFill>
+                    <a:srgbClr val="213744"/>
+                  </a:solidFill>
+                  <a:latin typeface="Arial"/>
+                  <a:ea typeface="Arial"/>
+                  <a:cs typeface="Arial"/>
+                </a:defRPr>
+              </a:pPr>
+            </a:p>
+          </c:txPr>
+        </c:title>
+        <c:numFmt formatCode="0"/>
+        <c:majorTickMark val="none"/>
+        <c:minorTickMark val="none"/>
+        <c:spPr>
+          <a:ln xmlns:a="http://schemas.openxmlformats.org/drawingml/2006/main" w="9525">
+            <a:solidFill>
+              <a:srgbClr val="D7E1E6"/>
+            </a:solidFill>
+          </a:ln>
+        </c:spPr>
+        <c:txPr>
+          <a:bodyPr xmlns:a="http://schemas.openxmlformats.org/drawingml/2006/main" anchorCtr="1"/>
+          <a:lstStyle xmlns:a="http://schemas.openxmlformats.org/drawingml/2006/main"/>
+          <a:p xmlns:a="http://schemas.openxmlformats.org/drawingml/2006/main">
+            <a:pPr>
+              <a:defRPr sz="1350">
+                <a:solidFill>
+                  <a:srgbClr val="526B79"/>
+                </a:solidFill>
+                <a:latin typeface="Arial"/>
+                <a:ea typeface="Arial"/>
+                <a:cs typeface="Arial"/>
+              </a:defRPr>
+            </a:pPr>
+          </a:p>
+        </c:txPr>
+        <c:crossAx val="48672768"/>
+      </c:valAx>
+      <c:spPr>
+        <a:solidFill xmlns:a="http://schemas.openxmlformats.org/drawingml/2006/main">
+          <a:srgbClr val="FFFFFF"/>
+        </a:solidFill>
+      </c:spPr>
+    </c:plotArea>
+    <c:legend>
+      <c:legendPos val="b"/>
+      <c:overlay val="0"/>
+      <c:txPr>
+        <a:bodyPr xmlns:a="http://schemas.openxmlformats.org/drawingml/2006/main" anchorCtr="1"/>
+        <a:lstStyle xmlns:a="http://schemas.openxmlformats.org/drawingml/2006/main"/>
+        <a:p xmlns:a="http://schemas.openxmlformats.org/drawingml/2006/main">
+          <a:pPr>
+            <a:defRPr sz="1350">
+              <a:solidFill>
+                <a:srgbClr val="213744"/>
+              </a:solidFill>
+              <a:latin typeface="Arial"/>
+              <a:ea typeface="Arial"/>
+              <a:cs typeface="Arial"/>
+            </a:defRPr>
+          </a:pPr>
+        </a:p>
+      </c:txPr>
+    </c:legend>
+    <c:plotVisOnly val="1"/>
+  </c:chart>
+  <c:spPr>
+    <a:solidFill xmlns:a="http://schemas.openxmlformats.org/drawingml/2006/main">
+      <a:srgbClr val="FFFFFF"/>
+    </a:solidFill>
+  </c:spPr>
+  <c:externalData r:id="rIdChartSnapshot1">
+    <c:autoUpdate val="0"/>
+  </c:externalData>
+</c:chartSpace>
+</file>
+
 <file path=ppt/slides/slide1.xml><?xml version="1.0" encoding="utf-8"?>
+<p:sld xmlns:p="http://schemas.openxmlformats.org/presentationml/2006/main">
+  <p:cSld>
+    <p:bg>
+      <p:bgPr>
+        <a:solidFill xmlns:a="http://schemas.openxmlformats.org/drawingml/2006/main">
+          <a:srgbClr val="FFFFFF"/>
+        </a:solidFill>
+      </p:bgPr>
+    </p:bg>
+    <p:spTree>
+      <p:nvGrpSpPr>
+        <p:cNvPr id="1" name=""/>
+        <p:cNvGrpSpPr/>
+        <p:nvPr/>
+      </p:nvGrpSpPr>
+      <p:grpSpPr>
+        <a:xfrm xmlns:a="http://schemas.openxmlformats.org/drawingml/2006/main"/>
+      </p:grpSpPr>
+      <p:sp>
+        <p:nvSpPr>
+          <p:cNvPr id="6" name="">
+            <a:extLst xmlns:a="http://schemas.openxmlformats.org/drawingml/2006/main">
+              <a:ext uri="{FF2B5EF4-FFF2-40B4-BE49-F238E27FC236}">
+                <a16:creationId xmlns:a16="http://schemas.microsoft.com/office/drawing/2014/main" id="{20F183E2-6E86-4AA4-BE14-51F549863F7F}"/>
+              </a:ext>
+            </a:extLst>
+          </p:cNvPr>
+          <p:cNvSpPr>
+            <a:spLocks xmlns:a="http://schemas.openxmlformats.org/drawingml/2006/main" noGrp="1"/>
+          </p:cNvSpPr>
+          <p:nvPr/>
+        </p:nvSpPr>
+        <p:spPr>
+          <a:xfrm xmlns:a="http://schemas.openxmlformats.org/drawingml/2006/main">
+            <a:off x="609600" y="333375"/>
+            <a:ext cx="10972800" cy="1047750"/>
+          </a:xfrm>
+          <a:prstGeom xmlns:a="http://schemas.openxmlformats.org/drawingml/2006/main" prst="rect">
+            <a:avLst/>
+          </a:prstGeom>
+          <a:noFill xmlns:a="http://schemas.openxmlformats.org/drawingml/2006/main"/>
+          <a:ln xmlns:a="http://schemas.openxmlformats.org/drawingml/2006/main" w="0">
+            <a:noFill/>
+          </a:ln>
+        </p:spPr>
+        <p:txBody>
+          <a:bodyPr xmlns:a="http://schemas.openxmlformats.org/drawingml/2006/main">
+            <a:noAutofit/>
+          </a:bodyPr>
+          <a:lstStyle xmlns:a="http://schemas.openxmlformats.org/drawingml/2006/main"/>
+          <a:p xmlns:a="http://schemas.openxmlformats.org/drawingml/2006/main">
+            <a:pPr>
+              <a:defRPr sz="3150" b="1">
+                <a:solidFill>
+                  <a:srgbClr val="213744"/>
+                </a:solidFill>
+                <a:latin typeface="Arial"/>
+                <a:ea typeface="Arial"/>
+                <a:cs typeface="Arial"/>
+              </a:defRPr>
+            </a:pPr>
+            <a:r>
+              <a:rPr sz="3150" b="1">
+                <a:solidFill>
+                  <a:srgbClr val="213744"/>
+                </a:solidFill>
+                <a:latin typeface="Arial"/>
+                <a:ea typeface="Arial"/>
+                <a:cs typeface="Arial"/>
+              </a:rPr>
+              <a:t>Proposal quality and candidate evidence</a:t>
+            </a:r>
+          </a:p>
+        </p:txBody>
+      </p:sp>
+      <p:sp>
+        <p:nvSpPr>
+          <p:cNvPr id="2" name="">
+            <a:extLst xmlns:a="http://schemas.openxmlformats.org/drawingml/2006/main">
+              <a:ext uri="{FF2B5EF4-FFF2-40B4-BE49-F238E27FC236}">
+                <a16:creationId xmlns:a16="http://schemas.microsoft.com/office/drawing/2014/main" id="{F3BD5200-BF7B-4527-949C-D6128B9F5649}"/>
+              </a:ext>
+            </a:extLst>
+          </p:cNvPr>
+          <p:cNvSpPr>
+            <a:spLocks xmlns:a="http://schemas.openxmlformats.org/drawingml/2006/main" noGrp="1"/>
+          </p:cNvSpPr>
+          <p:nvPr/>
+        </p:nvSpPr>
+        <p:spPr>
+          <a:xfrm xmlns:a="http://schemas.openxmlformats.org/drawingml/2006/main">
+            <a:off x="609600" y="1647825"/>
+            <a:ext cx="10972800" cy="1066800"/>
+          </a:xfrm>
+          <a:prstGeom xmlns:a="http://schemas.openxmlformats.org/drawingml/2006/main" prst="rect">
+            <a:avLst/>
+          </a:prstGeom>
+          <a:noFill xmlns:a="http://schemas.openxmlformats.org/drawingml/2006/main"/>
+          <a:ln xmlns:a="http://schemas.openxmlformats.org/drawingml/2006/main" w="0">
+            <a:noFill/>
+          </a:ln>
+        </p:spPr>
+        <p:txBody>
+          <a:bodyPr xmlns:a="http://schemas.openxmlformats.org/drawingml/2006/main">
+            <a:noAutofit/>
+          </a:bodyPr>
+          <a:lstStyle xmlns:a="http://schemas.openxmlformats.org/drawingml/2006/main"/>
+          <a:p xmlns:a="http://schemas.openxmlformats.org/drawingml/2006/main">
+            <a:pPr>
+              <a:defRPr sz="2925" b="1">
+                <a:solidFill>
+                  <a:srgbClr val="213744"/>
+                </a:solidFill>
+                <a:latin typeface="Arial"/>
+                <a:ea typeface="Arial"/>
+                <a:cs typeface="Arial"/>
+              </a:defRPr>
+            </a:pPr>
+            <a:r>
+              <a:rPr sz="2925" b="1">
+                <a:solidFill>
+                  <a:srgbClr val="213744"/>
+                </a:solidFill>
+                <a:latin typeface="Arial"/>
+                <a:ea typeface="Arial"/>
+                <a:cs typeface="Arial"/>
+              </a:rPr>
+              <a:t>The emailed leans now have explicit local candidate contracts.</a:t>
+            </a:r>
+          </a:p>
+        </p:txBody>
+      </p:sp>
+      <p:sp>
+        <p:nvSpPr>
+          <p:cNvPr id="3" name="">
+            <a:extLst xmlns:a="http://schemas.openxmlformats.org/drawingml/2006/main">
+              <a:ext uri="{FF2B5EF4-FFF2-40B4-BE49-F238E27FC236}">
+                <a16:creationId xmlns:a16="http://schemas.microsoft.com/office/drawing/2014/main" id="{481A6D71-482B-48FB-A5B4-6D64C40DAD2C}"/>
+              </a:ext>
+            </a:extLst>
+          </p:cNvPr>
+          <p:cNvSpPr>
+            <a:spLocks xmlns:a="http://schemas.openxmlformats.org/drawingml/2006/main" noGrp="1"/>
+          </p:cNvSpPr>
+          <p:nvPr/>
+        </p:nvSpPr>
+        <p:spPr>
+          <a:xfrm xmlns:a="http://schemas.openxmlformats.org/drawingml/2006/main">
+            <a:off x="609600" y="3076575"/>
+            <a:ext cx="10972800" cy="1238250"/>
+          </a:xfrm>
+          <a:prstGeom xmlns:a="http://schemas.openxmlformats.org/drawingml/2006/main" prst="rect">
+            <a:avLst/>
+          </a:prstGeom>
+          <a:noFill xmlns:a="http://schemas.openxmlformats.org/drawingml/2006/main"/>
+          <a:ln xmlns:a="http://schemas.openxmlformats.org/drawingml/2006/main" w="0">
+            <a:noFill/>
+          </a:ln>
+        </p:spPr>
+        <p:txBody>
+          <a:bodyPr xmlns:a="http://schemas.openxmlformats.org/drawingml/2006/main">
+            <a:noAutofit/>
+          </a:bodyPr>
+          <a:lstStyle xmlns:a="http://schemas.openxmlformats.org/drawingml/2006/main"/>
+          <a:p xmlns:a="http://schemas.openxmlformats.org/drawingml/2006/main">
+            <a:pPr>
+              <a:defRPr sz="2400" b="0">
+                <a:solidFill>
+                  <a:srgbClr val="A25D20"/>
+                </a:solidFill>
+                <a:latin typeface="Arial"/>
+                <a:ea typeface="Arial"/>
+                <a:cs typeface="Arial"/>
+              </a:defRPr>
+            </a:pPr>
+            <a:r>
+              <a:rPr sz="2400" b="0">
+                <a:solidFill>
+                  <a:srgbClr val="A25D20"/>
+                </a:solidFill>
+                <a:latin typeface="Arial"/>
+                <a:ea typeface="Arial"/>
+                <a:cs typeface="Arial"/>
+              </a:rPr>
+              <a:t>The group still needs to review those choices. Independently CRS-bound point-instancer prototypes remain a model gap.</a:t>
+            </a:r>
+          </a:p>
+        </p:txBody>
+      </p:sp>
+      <p:sp>
+        <p:nvSpPr>
+          <p:cNvPr id="4" name="">
+            <a:extLst xmlns:a="http://schemas.openxmlformats.org/drawingml/2006/main">
+              <a:ext uri="{FF2B5EF4-FFF2-40B4-BE49-F238E27FC236}">
+                <a16:creationId xmlns:a16="http://schemas.microsoft.com/office/drawing/2014/main" id="{757F7960-0B41-44FF-BED7-C75F50212BAE}"/>
+              </a:ext>
+            </a:extLst>
+          </p:cNvPr>
+          <p:cNvSpPr>
+            <a:spLocks xmlns:a="http://schemas.openxmlformats.org/drawingml/2006/main" noGrp="1"/>
+          </p:cNvSpPr>
+          <p:nvPr/>
+        </p:nvSpPr>
+        <p:spPr>
+          <a:xfrm xmlns:a="http://schemas.openxmlformats.org/drawingml/2006/main">
+            <a:off x="609600" y="4762500"/>
+            <a:ext cx="10972800" cy="1019175"/>
+          </a:xfrm>
+          <a:prstGeom xmlns:a="http://schemas.openxmlformats.org/drawingml/2006/main" prst="rect">
+            <a:avLst/>
+          </a:prstGeom>
+          <a:noFill xmlns:a="http://schemas.openxmlformats.org/drawingml/2006/main"/>
+          <a:ln xmlns:a="http://schemas.openxmlformats.org/drawingml/2006/main" w="0">
+            <a:noFill/>
+          </a:ln>
+        </p:spPr>
+        <p:txBody>
+          <a:bodyPr xmlns:a="http://schemas.openxmlformats.org/drawingml/2006/main">
+            <a:noAutofit/>
+          </a:bodyPr>
+          <a:lstStyle xmlns:a="http://schemas.openxmlformats.org/drawingml/2006/main"/>
+          <a:p xmlns:a="http://schemas.openxmlformats.org/drawingml/2006/main">
+            <a:pPr>
+              <a:defRPr sz="2400" b="0">
+                <a:solidFill>
+                  <a:srgbClr val="157C87"/>
+                </a:solidFill>
+                <a:latin typeface="Arial"/>
+                <a:ea typeface="Arial"/>
+                <a:cs typeface="Arial"/>
+              </a:defRPr>
+            </a:pPr>
+            <a:r>
+              <a:rPr sz="2400" b="0">
+                <a:solidFill>
+                  <a:srgbClr val="157C87"/>
+                </a:solidFill>
+                <a:latin typeface="Arial"/>
+                <a:ea typeface="Arial"/>
+                <a:cs typeface="Arial"/>
+              </a:rPr>
+              <a:t>64 regressions and 47 distinguishing controls passed.</a:t>
+            </a:r>
+          </a:p>
+          <a:p xmlns:a="http://schemas.openxmlformats.org/drawingml/2006/main">
+            <a:pPr>
+              <a:defRPr sz="2400" b="0">
+                <a:solidFill>
+                  <a:srgbClr val="157C87"/>
+                </a:solidFill>
+                <a:latin typeface="Arial"/>
+                <a:ea typeface="Arial"/>
+                <a:cs typeface="Arial"/>
+              </a:defRPr>
+            </a:pPr>
+            <a:r>
+              <a:rPr sz="2400" b="0">
+                <a:solidFill>
+                  <a:srgbClr val="157C87"/>
+                </a:solidFill>
+                <a:latin typeface="Arial"/>
+                <a:ea typeface="Arial"/>
+                <a:cs typeface="Arial"/>
+              </a:rPr>
+              <a:t>204,729 coordinate results per Python/C++ path.</a:t>
+            </a:r>
+          </a:p>
+        </p:txBody>
+      </p:sp>
+      <p:sp>
+        <p:nvSpPr>
+          <p:cNvPr id="5" name="">
+            <a:extLst xmlns:a="http://schemas.openxmlformats.org/drawingml/2006/main">
+              <a:ext uri="{FF2B5EF4-FFF2-40B4-BE49-F238E27FC236}">
+                <a16:creationId xmlns:a16="http://schemas.microsoft.com/office/drawing/2014/main" id="{0A20D608-7FCD-4A6F-B8BB-69D2E3DE1932}"/>
+              </a:ext>
+            </a:extLst>
+          </p:cNvPr>
+          <p:cNvSpPr>
+            <a:spLocks xmlns:a="http://schemas.openxmlformats.org/drawingml/2006/main" noGrp="1"/>
+          </p:cNvSpPr>
+          <p:nvPr/>
+        </p:nvSpPr>
+        <p:spPr>
+          <a:xfrm xmlns:a="http://schemas.openxmlformats.org/drawingml/2006/main">
+            <a:off x="609600" y="6210300"/>
+            <a:ext cx="10972800" cy="428625"/>
+          </a:xfrm>
+          <a:prstGeom xmlns:a="http://schemas.openxmlformats.org/drawingml/2006/main" prst="rect">
+            <a:avLst/>
+          </a:prstGeom>
+          <a:noFill xmlns:a="http://schemas.openxmlformats.org/drawingml/2006/main"/>
+          <a:ln xmlns:a="http://schemas.openxmlformats.org/drawingml/2006/main" w="0">
+            <a:noFill/>
+          </a:ln>
+        </p:spPr>
+        <p:txBody>
+          <a:bodyPr xmlns:a="http://schemas.openxmlformats.org/drawingml/2006/main">
+            <a:noAutofit/>
+          </a:bodyPr>
+          <a:lstStyle xmlns:a="http://schemas.openxmlformats.org/drawingml/2006/main"/>
+          <a:p xmlns:a="http://schemas.openxmlformats.org/drawingml/2006/main">
+            <a:pPr>
+              <a:defRPr sz="1725" b="0">
+                <a:solidFill>
+                  <a:srgbClr val="526B79"/>
+                </a:solidFill>
+                <a:latin typeface="Arial"/>
+                <a:ea typeface="Arial"/>
+                <a:cs typeface="Arial"/>
+              </a:defRPr>
+            </a:pPr>
+            <a:r>
+              <a:rPr sz="1725" b="0">
+                <a:solidFill>
+                  <a:srgbClr val="526B79"/>
+                </a:solidFill>
+                <a:latin typeface="Arial"/>
+                <a:ea typeface="Arial"/>
+                <a:cs typeface="Arial"/>
+              </a:rPr>
+              <a:t>Geographic scene frames/bounds remain Q9. Complete proposal conformance is not claimed.</a:t>
+            </a:r>
+          </a:p>
+        </p:txBody>
+      </p:sp>
+    </p:spTree>
+    <p:extLst>
+      <p:ext uri="{BB962C8B-B14F-4D97-AF65-F5344CB8AC3E}">
+        <p14:creationId xmlns:p14="http://schemas.microsoft.com/office/powerpoint/2010/main" val="985122918"/>
+      </p:ext>
+    </p:extLst>
+  </p:cSld>
+</p:sld>
+</file>
+
+<file path=ppt/slides/slide10.xml><?xml version="1.0" encoding="utf-8"?>
 <p:sld xmlns:p="http://schemas.openxmlformats.org/presentationml/2006/main">
   <p:cSld>
     <p:bg>
@@ -1918,7 +3316,7 @@
           <p:cNvPr id="5" name="">
             <a:extLst xmlns:a="http://schemas.openxmlformats.org/drawingml/2006/main">
               <a:ext uri="{FF2B5EF4-FFF2-40B4-BE49-F238E27FC236}">
-                <a16:creationId xmlns:a16="http://schemas.microsoft.com/office/drawing/2014/main" id="{D38AC88D-572C-4E6C-86E0-D89B446D12AE}"/>
+                <a16:creationId xmlns:a16="http://schemas.microsoft.com/office/drawing/2014/main" id="{DC3A6E04-EE57-49A9-977C-08E2F089715E}"/>
               </a:ext>
             </a:extLst>
           </p:cNvPr>
@@ -1929,8 +3327,8 @@
         </p:nvSpPr>
         <p:spPr>
           <a:xfrm xmlns:a="http://schemas.openxmlformats.org/drawingml/2006/main">
-            <a:off x="609600" y="381000"/>
-            <a:ext cx="10972800" cy="952500"/>
+            <a:off x="609600" y="333375"/>
+            <a:ext cx="10972800" cy="1047750"/>
           </a:xfrm>
           <a:prstGeom xmlns:a="http://schemas.openxmlformats.org/drawingml/2006/main" prst="rect">
             <a:avLst/>
@@ -1949,7 +3347,7 @@
             <a:pPr>
               <a:defRPr sz="3150" b="1">
                 <a:solidFill>
-                  <a:srgbClr val="233542"/>
+                  <a:srgbClr val="213744"/>
                 </a:solidFill>
                 <a:latin typeface="Arial"/>
                 <a:ea typeface="Arial"/>
@@ -1959,23 +3357,261 @@
             <a:r>
               <a:rPr sz="3150" b="1">
                 <a:solidFill>
-                  <a:srgbClr val="233542"/>
+                  <a:srgbClr val="213744"/>
                 </a:solidFill>
                 <a:latin typeface="Arial"/>
                 <a:ea typeface="Arial"/>
                 <a:cs typeface="Arial"/>
               </a:rPr>
-              <a:t>Geospatial proposal readiness</a:t>
+              <a:t>Consumer evidence and remaining limits</a:t>
             </a:r>
           </a:p>
         </p:txBody>
       </p:sp>
+      <p:graphicFrame>
+        <p:nvGraphicFramePr>
+          <p:cNvPr id="6" name=""/>
+          <p:cNvGraphicFramePr/>
+          <p:nvPr/>
+        </p:nvGraphicFramePr>
+        <p:xfrm>
+          <a:off xmlns:a="http://schemas.openxmlformats.org/drawingml/2006/main" x="609600" y="1476375"/>
+          <a:ext xmlns:a="http://schemas.openxmlformats.org/drawingml/2006/main" cx="10972800" cy="3190875"/>
+        </p:xfrm>
+        <a:graphic xmlns:a="http://schemas.openxmlformats.org/drawingml/2006/main">
+          <a:graphicData uri="http://schemas.openxmlformats.org/drawingml/2006/table">
+            <a:tbl>
+              <a:tblPr/>
+              <a:tblGrid>
+                <a:gridCol w="3048000"/>
+                <a:gridCol w="7924800"/>
+              </a:tblGrid>
+              <a:tr h="797719">
+                <a:tc>
+                  <a:txBody>
+                    <a:bodyPr>
+                      <a:noAutofit/>
+                    </a:bodyPr>
+                    <a:lstStyle/>
+                    <a:p>
+                      <a:r>
+                        <a:rPr sz="1875" b="1">
+                          <a:solidFill>
+                            <a:srgbClr val="FFFFFF"/>
+                          </a:solidFill>
+                          <a:latin typeface="Arial"/>
+                          <a:ea typeface="Arial"/>
+                          <a:cs typeface="Arial"/>
+                        </a:rPr>
+                        <a:t>Consumer</a:t>
+                      </a:r>
+                    </a:p>
+                  </a:txBody>
+                  <a:tcPr marL="91440" marR="91440" marT="45720" marB="45720">
+                    <a:solidFill>
+                      <a:srgbClr val="213744"/>
+                    </a:solidFill>
+                  </a:tcPr>
+                </a:tc>
+                <a:tc>
+                  <a:txBody>
+                    <a:bodyPr>
+                      <a:noAutofit/>
+                    </a:bodyPr>
+                    <a:lstStyle/>
+                    <a:p>
+                      <a:r>
+                        <a:rPr sz="1875" b="1">
+                          <a:solidFill>
+                            <a:srgbClr val="FFFFFF"/>
+                          </a:solidFill>
+                          <a:latin typeface="Arial"/>
+                          <a:ea typeface="Arial"/>
+                          <a:cs typeface="Arial"/>
+                        </a:rPr>
+                        <a:t>Evidence reaching its output</a:t>
+                      </a:r>
+                    </a:p>
+                  </a:txBody>
+                  <a:tcPr marL="91440" marR="91440" marT="45720" marB="45720">
+                    <a:solidFill>
+                      <a:srgbClr val="213744"/>
+                    </a:solidFill>
+                  </a:tcPr>
+                </a:tc>
+              </a:tr>
+              <a:tr h="797719">
+                <a:tc>
+                  <a:txBody>
+                    <a:bodyPr>
+                      <a:noAutofit/>
+                    </a:bodyPr>
+                    <a:lstStyle/>
+                    <a:p>
+                      <a:r>
+                        <a:rPr sz="1875" b="0">
+                          <a:solidFill>
+                            <a:srgbClr val="213744"/>
+                          </a:solidFill>
+                          <a:latin typeface="Arial"/>
+                          <a:ea typeface="Arial"/>
+                          <a:cs typeface="Arial"/>
+                        </a:rPr>
+                        <a:t>USD Python and C++</a:t>
+                      </a:r>
+                    </a:p>
+                  </a:txBody>
+                  <a:tcPr marL="91440" marR="91440" marT="45720" marB="45720">
+                    <a:solidFill>
+                      <a:srgbClr val="FFFFFF"/>
+                    </a:solidFill>
+                  </a:tcPr>
+                </a:tc>
+                <a:tc>
+                  <a:txBody>
+                    <a:bodyPr>
+                      <a:noAutofit/>
+                    </a:bodyPr>
+                    <a:lstStyle/>
+                    <a:p>
+                      <a:r>
+                        <a:rPr sz="1875" b="0">
+                          <a:solidFill>
+                            <a:srgbClr val="213744"/>
+                          </a:solidFill>
+                          <a:latin typeface="Arial"/>
+                          <a:ea typeface="Arial"/>
+                          <a:cs typeface="Arial"/>
+                        </a:rPr>
+                        <a:t>Independent placement arithmetic; full point maps, Cartesian frame estimates and polygonal bounds. Shared PROJ and external decoding.</a:t>
+                      </a:r>
+                    </a:p>
+                  </a:txBody>
+                  <a:tcPr marL="91440" marR="91440" marT="45720" marB="45720">
+                    <a:solidFill>
+                      <a:srgbClr val="FFFFFF"/>
+                    </a:solidFill>
+                  </a:tcPr>
+                </a:tc>
+              </a:tr>
+              <a:tr h="797719">
+                <a:tc>
+                  <a:txBody>
+                    <a:bodyPr>
+                      <a:noAutofit/>
+                    </a:bodyPr>
+                    <a:lstStyle/>
+                    <a:p>
+                      <a:r>
+                        <a:rPr sz="1875" b="0">
+                          <a:solidFill>
+                            <a:srgbClr val="213744"/>
+                          </a:solidFill>
+                          <a:latin typeface="Arial"/>
+                          <a:ea typeface="Arial"/>
+                          <a:cs typeface="Arial"/>
+                        </a:rPr>
+                        <a:t>Omniverse live geometry</a:t>
+                      </a:r>
+                    </a:p>
+                  </a:txBody>
+                  <a:tcPr marL="91440" marR="91440" marT="45720" marB="45720">
+                    <a:solidFill>
+                      <a:srgbClr val="FFFFFF"/>
+                    </a:solidFill>
+                  </a:tcPr>
+                </a:tc>
+                <a:tc>
+                  <a:txBody>
+                    <a:bodyPr>
+                      <a:noAutofit/>
+                    </a:bodyPr>
+                    <a:lstStyle/>
+                    <a:p>
+                      <a:r>
+                        <a:rPr sz="1875" b="0">
+                          <a:solidFill>
+                            <a:srgbClr val="213744"/>
+                          </a:solidFill>
+                          <a:latin typeface="Arial"/>
+                          <a:ea typeface="Arial"/>
+                          <a:cs typeface="Arial"/>
+                        </a:rPr>
+                        <a:t>177,846 vertices read back from runtime buffers/matrices. 27 edit, failure and recovery checks. Reuses Python placement.</a:t>
+                      </a:r>
+                    </a:p>
+                  </a:txBody>
+                  <a:tcPr marL="91440" marR="91440" marT="45720" marB="45720">
+                    <a:solidFill>
+                      <a:srgbClr val="FFFFFF"/>
+                    </a:solidFill>
+                  </a:tcPr>
+                </a:tc>
+              </a:tr>
+              <a:tr h="797719">
+                <a:tc>
+                  <a:txBody>
+                    <a:bodyPr>
+                      <a:noAutofit/>
+                    </a:bodyPr>
+                    <a:lstStyle/>
+                    <a:p>
+                      <a:r>
+                        <a:rPr sz="1875" b="0">
+                          <a:solidFill>
+                            <a:srgbClr val="213744"/>
+                          </a:solidFill>
+                          <a:latin typeface="Arial"/>
+                          <a:ea typeface="Arial"/>
+                          <a:cs typeface="Arial"/>
+                        </a:rPr>
+                        <a:t>Hydra / Storm</a:t>
+                      </a:r>
+                    </a:p>
+                  </a:txBody>
+                  <a:tcPr marL="91440" marR="91440" marT="45720" marB="45720">
+                    <a:solidFill>
+                      <a:srgbClr val="FFFFFF"/>
+                    </a:solidFill>
+                  </a:tcPr>
+                </a:tc>
+                <a:tc>
+                  <a:txBody>
+                    <a:bodyPr>
+                      <a:noAutofit/>
+                    </a:bodyPr>
+                    <a:lstStyle/>
+                    <a:p>
+                      <a:r>
+                        <a:rPr sz="1875" b="0">
+                          <a:solidFill>
+                            <a:srgbClr val="213744"/>
+                          </a:solidFill>
+                          <a:latin typeface="Arial"/>
+                          <a:ea typeface="Arial"/>
+                          <a:cs typeface="Arial"/>
+                        </a:rPr>
+                        <a:t>Two ordinary resolved exports reach points/transform data sources and the native renderer. No live CRS filter.</a:t>
+                      </a:r>
+                    </a:p>
+                  </a:txBody>
+                  <a:tcPr marL="91440" marR="91440" marT="45720" marB="45720">
+                    <a:solidFill>
+                      <a:srgbClr val="FFFFFF"/>
+                    </a:solidFill>
+                  </a:tcPr>
+                </a:tc>
+              </a:tr>
+            </a:tbl>
+          </a:graphicData>
+        </a:graphic>
+      </p:graphicFrame>
       <p:sp>
         <p:nvSpPr>
-          <p:cNvPr id="2" name="">
+          <p:cNvPr id="3" name="">
             <a:extLst xmlns:a="http://schemas.openxmlformats.org/drawingml/2006/main">
               <a:ext uri="{FF2B5EF4-FFF2-40B4-BE49-F238E27FC236}">
-                <a16:creationId xmlns:a16="http://schemas.microsoft.com/office/drawing/2014/main" id="{D533467E-C677-4F07-A7E7-7EED90D02341}"/>
+                <a16:creationId xmlns:a16="http://schemas.microsoft.com/office/drawing/2014/main" id="{26F41EDE-1C5B-4A12-BAE9-3656950A6F8F}"/>
               </a:ext>
             </a:extLst>
           </p:cNvPr>
@@ -1986,8 +3622,8 @@
         </p:nvSpPr>
         <p:spPr>
           <a:xfrm xmlns:a="http://schemas.openxmlformats.org/drawingml/2006/main">
-            <a:off x="609600" y="1676400"/>
-            <a:ext cx="10972800" cy="1600200"/>
+            <a:off x="609600" y="4972050"/>
+            <a:ext cx="10972800" cy="561975"/>
           </a:xfrm>
           <a:prstGeom xmlns:a="http://schemas.openxmlformats.org/drawingml/2006/main" prst="rect">
             <a:avLst/>
@@ -2004,9 +3640,9 @@
           <a:lstStyle xmlns:a="http://schemas.openxmlformats.org/drawingml/2006/main"/>
           <a:p xmlns:a="http://schemas.openxmlformats.org/drawingml/2006/main">
             <a:pPr>
-              <a:defRPr sz="2850" b="1">
-                <a:solidFill>
-                  <a:srgbClr val="233542"/>
+              <a:defRPr sz="2250" b="1">
+                <a:solidFill>
+                  <a:srgbClr val="157C87"/>
                 </a:solidFill>
                 <a:latin typeface="Arial"/>
                 <a:ea typeface="Arial"/>
@@ -2014,25 +3650,25 @@
               </a:defRPr>
             </a:pPr>
             <a:r>
-              <a:rPr sz="2850" b="1">
-                <a:solidFill>
-                  <a:srgbClr val="233542"/>
+              <a:rPr sz="2250" b="1">
+                <a:solidFill>
+                  <a:srgbClr val="157C87"/>
                 </a:solidFill>
                 <a:latin typeface="Arial"/>
                 <a:ea typeface="Arial"/>
                 <a:cs typeface="Arial"/>
               </a:rPr>
-              <a:t>Four contracts still block complete model placement. The local candidate supplies concrete answers for five former gaps.</a:t>
+              <a:t>Eight exports pass fresh-reader checks. Authored source layers remain unchanged.</a:t>
             </a:r>
           </a:p>
         </p:txBody>
       </p:sp>
       <p:sp>
         <p:nvSpPr>
-          <p:cNvPr id="3" name="">
+          <p:cNvPr id="4" name="">
             <a:extLst xmlns:a="http://schemas.openxmlformats.org/drawingml/2006/main">
               <a:ext uri="{FF2B5EF4-FFF2-40B4-BE49-F238E27FC236}">
-                <a16:creationId xmlns:a16="http://schemas.microsoft.com/office/drawing/2014/main" id="{CF0156A7-D787-4474-93EA-A542BEB4FAAC}"/>
+                <a16:creationId xmlns:a16="http://schemas.microsoft.com/office/drawing/2014/main" id="{92A9EB75-FD14-4D3E-8696-A87EFDDA2694}"/>
               </a:ext>
             </a:extLst>
           </p:cNvPr>
@@ -2043,8 +3679,8 @@
         </p:nvSpPr>
         <p:spPr>
           <a:xfrm xmlns:a="http://schemas.openxmlformats.org/drawingml/2006/main">
-            <a:off x="609600" y="3619500"/>
-            <a:ext cx="10972800" cy="1104900"/>
+            <a:off x="609600" y="5791200"/>
+            <a:ext cx="10972800" cy="933450"/>
           </a:xfrm>
           <a:prstGeom xmlns:a="http://schemas.openxmlformats.org/drawingml/2006/main" prst="rect">
             <a:avLst/>
@@ -2061,9 +3697,9 @@
           <a:lstStyle xmlns:a="http://schemas.openxmlformats.org/drawingml/2006/main"/>
           <a:p xmlns:a="http://schemas.openxmlformats.org/drawingml/2006/main">
             <a:pPr>
-              <a:defRPr sz="2325" b="0">
-                <a:solidFill>
-                  <a:srgbClr val="117E89"/>
+              <a:defRPr sz="2025" b="0">
+                <a:solidFill>
+                  <a:srgbClr val="A25D20"/>
                 </a:solidFill>
                 <a:latin typeface="Arial"/>
                 <a:ea typeface="Arial"/>
@@ -2071,72 +3707,15 @@
               </a:defRPr>
             </a:pPr>
             <a:r>
-              <a:rPr sz="2325" b="0">
-                <a:solidFill>
-                  <a:srgbClr val="117E89"/>
+              <a:rPr sz="2025" b="0">
+                <a:solidFill>
+                  <a:srgbClr val="A25D20"/>
                 </a:solidFill>
                 <a:latin typeface="Arial"/>
                 <a:ea typeface="Arial"/>
                 <a:cs typeface="Arial"/>
               </a:rPr>
-              <a:t>64 tests passed. 37 cases and 168 queries per reader, with source data unchanged.</a:t>
-            </a:r>
-          </a:p>
-        </p:txBody>
-      </p:sp>
-      <p:sp>
-        <p:nvSpPr>
-          <p:cNvPr id="4" name="">
-            <a:extLst xmlns:a="http://schemas.openxmlformats.org/drawingml/2006/main">
-              <a:ext uri="{FF2B5EF4-FFF2-40B4-BE49-F238E27FC236}">
-                <a16:creationId xmlns:a16="http://schemas.microsoft.com/office/drawing/2014/main" id="{E48B182B-B3A5-4F52-A078-F6DD2E4A59CC}"/>
-              </a:ext>
-            </a:extLst>
-          </p:cNvPr>
-          <p:cNvSpPr>
-            <a:spLocks xmlns:a="http://schemas.openxmlformats.org/drawingml/2006/main" noGrp="1"/>
-          </p:cNvSpPr>
-          <p:nvPr/>
-        </p:nvSpPr>
-        <p:spPr>
-          <a:xfrm xmlns:a="http://schemas.openxmlformats.org/drawingml/2006/main">
-            <a:off x="609600" y="5238750"/>
-            <a:ext cx="10972800" cy="990600"/>
-          </a:xfrm>
-          <a:prstGeom xmlns:a="http://schemas.openxmlformats.org/drawingml/2006/main" prst="rect">
-            <a:avLst/>
-          </a:prstGeom>
-          <a:noFill xmlns:a="http://schemas.openxmlformats.org/drawingml/2006/main"/>
-          <a:ln xmlns:a="http://schemas.openxmlformats.org/drawingml/2006/main" w="0">
-            <a:noFill/>
-          </a:ln>
-        </p:spPr>
-        <p:txBody>
-          <a:bodyPr xmlns:a="http://schemas.openxmlformats.org/drawingml/2006/main">
-            <a:noAutofit/>
-          </a:bodyPr>
-          <a:lstStyle xmlns:a="http://schemas.openxmlformats.org/drawingml/2006/main"/>
-          <a:p xmlns:a="http://schemas.openxmlformats.org/drawingml/2006/main">
-            <a:pPr>
-              <a:defRPr sz="2100" b="0">
-                <a:solidFill>
-                  <a:srgbClr val="233542"/>
-                </a:solidFill>
-                <a:latin typeface="Arial"/>
-                <a:ea typeface="Arial"/>
-                <a:cs typeface="Arial"/>
-              </a:defRPr>
-            </a:pPr>
-            <a:r>
-              <a:rPr sz="2100" b="0">
-                <a:solidFill>
-                  <a:srgbClr val="233542"/>
-                </a:solidFill>
-                <a:latin typeface="Arial"/>
-                <a:ea typeface="Arial"/>
-                <a:cs typeface="Arial"/>
-              </a:rPr>
-              <a:t>Headless OpenUSD, native OpenUSD and live OV resolve direct anchor origins. Full model placement remains stopped.</a:t>
+              <a:t>Remaining limits: bound point-instancer prototypes, geographic scene frames/bounds, continuous nonlinear certificates and physics integration. Candidate choices still need group review.</a:t>
             </a:r>
           </a:p>
         </p:txBody>
@@ -2144,7 +3723,7 @@
     </p:spTree>
     <p:extLst>
       <p:ext uri="{BB962C8B-B14F-4D97-AF65-F5344CB8AC3E}">
-        <p14:creationId xmlns:p14="http://schemas.microsoft.com/office/powerpoint/2010/main" val="1099006725"/>
+        <p14:creationId xmlns:p14="http://schemas.microsoft.com/office/powerpoint/2010/main" val="591610580"/>
       </p:ext>
     </p:extLst>
   </p:cSld>
@@ -2172,10 +3751,10 @@
       </p:grpSpPr>
       <p:sp>
         <p:nvSpPr>
-          <p:cNvPr id="3" name="">
+          <p:cNvPr id="4" name="">
             <a:extLst xmlns:a="http://schemas.openxmlformats.org/drawingml/2006/main">
               <a:ext uri="{FF2B5EF4-FFF2-40B4-BE49-F238E27FC236}">
-                <a16:creationId xmlns:a16="http://schemas.microsoft.com/office/drawing/2014/main" id="{EC1F7C91-5F22-4E40-8F34-43D506E7EE5C}"/>
+                <a16:creationId xmlns:a16="http://schemas.microsoft.com/office/drawing/2014/main" id="{3E35642A-1BA7-40D3-B8B0-F28E145E70C1}"/>
               </a:ext>
             </a:extLst>
           </p:cNvPr>
@@ -2186,8 +3765,8 @@
         </p:nvSpPr>
         <p:spPr>
           <a:xfrm xmlns:a="http://schemas.openxmlformats.org/drawingml/2006/main">
-            <a:off x="609600" y="381000"/>
-            <a:ext cx="10972800" cy="952500"/>
+            <a:off x="609600" y="333375"/>
+            <a:ext cx="10972800" cy="1047750"/>
           </a:xfrm>
           <a:prstGeom xmlns:a="http://schemas.openxmlformats.org/drawingml/2006/main" prst="rect">
             <a:avLst/>
@@ -2206,7 +3785,7 @@
             <a:pPr>
               <a:defRPr sz="3150" b="1">
                 <a:solidFill>
-                  <a:srgbClr val="233542"/>
+                  <a:srgbClr val="213744"/>
                 </a:solidFill>
                 <a:latin typeface="Arial"/>
                 <a:ea typeface="Arial"/>
@@ -2216,36 +3795,36 @@
             <a:r>
               <a:rPr sz="3150" b="1">
                 <a:solidFill>
-                  <a:srgbClr val="233542"/>
+                  <a:srgbClr val="213744"/>
                 </a:solidFill>
                 <a:latin typeface="Arial"/>
                 <a:ea typeface="Arial"/>
                 <a:cs typeface="Arial"/>
               </a:rPr>
-              <a:t>Concrete candidate answers</a:t>
+              <a:t>Concrete contracts for group review</a:t>
             </a:r>
           </a:p>
         </p:txBody>
       </p:sp>
       <p:graphicFrame>
         <p:nvGraphicFramePr>
-          <p:cNvPr id="4" name=""/>
+          <p:cNvPr id="5" name=""/>
           <p:cNvGraphicFramePr/>
           <p:nvPr/>
         </p:nvGraphicFramePr>
         <p:xfrm>
           <a:off xmlns:a="http://schemas.openxmlformats.org/drawingml/2006/main" x="609600" y="1428750"/>
-          <a:ext xmlns:a="http://schemas.openxmlformats.org/drawingml/2006/main" cx="10972800" cy="4762500"/>
+          <a:ext xmlns:a="http://schemas.openxmlformats.org/drawingml/2006/main" cx="10972800" cy="4429125"/>
         </p:xfrm>
         <a:graphic xmlns:a="http://schemas.openxmlformats.org/drawingml/2006/main">
           <a:graphicData uri="http://schemas.openxmlformats.org/drawingml/2006/table">
             <a:tbl>
               <a:tblPr/>
               <a:tblGrid>
-                <a:gridCol w="2647950"/>
-                <a:gridCol w="8324850"/>
+                <a:gridCol w="2857500"/>
+                <a:gridCol w="8115300"/>
               </a:tblGrid>
-              <a:tr h="793750">
+              <a:tr h="885825">
                 <a:tc>
                   <a:txBody>
                     <a:bodyPr>
@@ -2254,7 +3833,7 @@
                     <a:lstStyle/>
                     <a:p>
                       <a:r>
-                        <a:rPr sz="1725" b="1">
+                        <a:rPr sz="1875" b="1">
                           <a:solidFill>
                             <a:srgbClr val="FFFFFF"/>
                           </a:solidFill>
@@ -2268,7 +3847,7 @@
                   </a:txBody>
                   <a:tcPr marL="91440" marR="91440" marT="45720" marB="45720">
                     <a:solidFill>
-                      <a:srgbClr val="233542"/>
+                      <a:srgbClr val="213744"/>
                     </a:solidFill>
                   </a:tcPr>
                 </a:tc>
@@ -2280,7 +3859,7 @@
                     <a:lstStyle/>
                     <a:p>
                       <a:r>
-                        <a:rPr sz="1725" b="1">
+                        <a:rPr sz="1875" b="1">
                           <a:solidFill>
                             <a:srgbClr val="FFFFFF"/>
                           </a:solidFill>
@@ -2288,18 +3867,18 @@
                           <a:ea typeface="Arial"/>
                           <a:cs typeface="Arial"/>
                         </a:rPr>
-                        <a:t>Proposed contract</a:t>
+                        <a:t>Concrete candidate answer</a:t>
                       </a:r>
                     </a:p>
                   </a:txBody>
                   <a:tcPr marL="91440" marR="91440" marT="45720" marB="45720">
                     <a:solidFill>
-                      <a:srgbClr val="233542"/>
+                      <a:srgbClr val="213744"/>
                     </a:solidFill>
                   </a:tcPr>
                 </a:tc>
               </a:tr>
-              <a:tr h="793750">
+              <a:tr h="885825">
                 <a:tc>
                   <a:txBody>
                     <a:bodyPr>
@@ -2308,15 +3887,15 @@
                     <a:lstStyle/>
                     <a:p>
                       <a:r>
-                        <a:rPr sz="1725" b="0">
+                        <a:rPr sz="1875" b="0">
                           <a:solidFill>
-                            <a:srgbClr val="233542"/>
+                            <a:srgbClr val="213744"/>
                           </a:solidFill>
                           <a:latin typeface="Arial"/>
                           <a:ea typeface="Arial"/>
                           <a:cs typeface="Arial"/>
                         </a:rPr>
-                        <a:t>Placement fields</a:t>
+                        <a:t>Q3: working frame</a:t>
                       </a:r>
                     </a:p>
                   </a:txBody>
@@ -2334,15 +3913,15 @@
                     <a:lstStyle/>
                     <a:p>
                       <a:r>
-                        <a:rPr sz="1725" b="0">
+                        <a:rPr sz="1875" b="0">
                           <a:solidFill>
-                            <a:srgbClr val="233542"/>
+                            <a:srgbClr val="213744"/>
                           </a:solidFill>
                           <a:latin typeface="Arial"/>
                           <a:ea typeface="Arial"/>
                           <a:cs typeface="Arial"/>
                         </a:rPr>
-                        <a:t>Varying crs:position double3 has no fallback. crs:orientation quatd defaults to identity. crs:scale double3 defaults to (1,1,1). Explicit blocks remain unavailable.</a:t>
+                        <a:t>Nearest enclosing CRS fixes the adjustment chart. The candidate specifies origins, pivots and descendant resets.</a:t>
                       </a:r>
                     </a:p>
                   </a:txBody>
@@ -2353,7 +3932,7 @@
                   </a:tcPr>
                 </a:tc>
               </a:tr>
-              <a:tr h="793750">
+              <a:tr h="885825">
                 <a:tc>
                   <a:txBody>
                     <a:bodyPr>
@@ -2362,15 +3941,15 @@
                     <a:lstStyle/>
                     <a:p>
                       <a:r>
-                        <a:rPr sz="1725" b="0">
+                        <a:rPr sz="1875" b="0">
                           <a:solidFill>
-                            <a:srgbClr val="233542"/>
+                            <a:srgbClr val="213744"/>
                           </a:solidFill>
                           <a:latin typeface="Arial"/>
                           <a:ea typeface="Arial"/>
                           <a:cs typeface="Arial"/>
                         </a:rPr>
-                        <a:t>Coordinate components</a:t>
+                        <a:t>Q6: axes and units</a:t>
                       </a:r>
                     </a:p>
                   </a:txBody>
@@ -2388,15 +3967,15 @@
                     <a:lstStyle/>
                     <a:p>
                       <a:r>
-                        <a:rPr sz="1725" b="0">
+                        <a:rPr sz="1875" b="0">
                           <a:solidFill>
-                            <a:srgbClr val="233542"/>
+                            <a:srgbClr val="213744"/>
                           </a:solidFill>
                           <a:latin typeface="Arial"/>
                           <a:ea typeface="Arial"/>
                           <a:cs typeface="Arial"/>
                         </a:rPr>
-                        <a:t>Easting/northing/up, longitude/latitude/height, or geocentric XYZ. Use declared WKT units and height reference. Scene upAxis does not relabel the tuple.</a:t>
+                        <a:t>Z-up: (x,y,z). Y-up: (x,-z,y). Convert stage units before scale and orientation.</a:t>
                       </a:r>
                     </a:p>
                   </a:txBody>
@@ -2407,7 +3986,7 @@
                   </a:tcPr>
                 </a:tc>
               </a:tr>
-              <a:tr h="793750">
+              <a:tr h="885825">
                 <a:tc>
                   <a:txBody>
                     <a:bodyPr>
@@ -2416,15 +3995,15 @@
                     <a:lstStyle/>
                     <a:p>
                       <a:r>
-                        <a:rPr sz="1725" b="0">
+                        <a:rPr sz="1875" b="0">
                           <a:solidFill>
-                            <a:srgbClr val="233542"/>
+                            <a:srgbClr val="213744"/>
                           </a:solidFill>
                           <a:latin typeface="Arial"/>
                           <a:ea typeface="Arial"/>
                           <a:cs typeface="Arial"/>
                         </a:rPr>
-                        <a:t>Orientation and scale</a:t>
+                        <a:t>Q11: measurements</a:t>
                       </a:r>
                     </a:p>
                   </a:txBody>
@@ -2442,15 +4021,15 @@
                     <a:lstStyle/>
                     <a:p>
                       <a:r>
-                        <a:rPr sz="1725" b="0">
+                        <a:rPr sz="1875" b="0">
                           <a:solidFill>
-                            <a:srgbClr val="233542"/>
+                            <a:srgbClr val="213744"/>
                           </a:solidFill>
                           <a:latin typeface="Arial"/>
                           <a:ea typeface="Arial"/>
                           <a:cs typeface="Arial"/>
                         </a:rPr>
-                        <a:t>Model scale precedes orientation. Source bases are projected grid axes, geographic geodetic ENU or geocentric XYZ. The stage-axis adapter still needs specification.</a:t>
+                        <a:t>A proposed non-Xformable data-source schema selects asset, format, field and coordinate domain. Native formats retain values and times.</a:t>
                       </a:r>
                     </a:p>
                   </a:txBody>
@@ -2461,7 +4040,7 @@
                   </a:tcPr>
                 </a:tc>
               </a:tr>
-              <a:tr h="793750">
+              <a:tr h="885825">
                 <a:tc>
                   <a:txBody>
                     <a:bodyPr>
@@ -2470,15 +4049,15 @@
                     <a:lstStyle/>
                     <a:p>
                       <a:r>
-                        <a:rPr sz="1725" b="0">
+                        <a:rPr sz="1875" b="0">
                           <a:solidFill>
-                            <a:srgbClr val="233542"/>
+                            <a:srgbClr val="213744"/>
                           </a:solidFill>
                           <a:latin typeface="Arial"/>
                           <a:ea typeface="Arial"/>
                           <a:cs typeface="Arial"/>
                         </a:rPr>
-                        <a:t>WKT string normalization</a:t>
+                        <a:t>Q12: dependency</a:t>
                       </a:r>
                     </a:p>
                   </a:txBody>
@@ -2496,69 +4075,15 @@
                     <a:lstStyle/>
                     <a:p>
                       <a:r>
-                        <a:rPr sz="1725" b="0">
+                        <a:rPr sz="1875" b="0">
                           <a:solidFill>
-                            <a:srgbClr val="233542"/>
+                            <a:srgbClr val="213744"/>
                           </a:solidFill>
                           <a:latin typeface="Arial"/>
                           <a:ea typeface="Arial"/>
                           <a:cs typeface="Arial"/>
                         </a:rPr>
-                        <a:t>OGC preferred spelling and delimiters, preserved quoted content and node order, W3C exact canonical decimal/integer spelling. Token identity differs from CRS equivalence.</a:t>
-                      </a:r>
-                    </a:p>
-                  </a:txBody>
-                  <a:tcPr marL="91440" marR="91440" marT="45720" marB="45720">
-                    <a:solidFill>
-                      <a:srgbClr val="FFFFFF"/>
-                    </a:solidFill>
-                  </a:tcPr>
-                </a:tc>
-              </a:tr>
-              <a:tr h="793750">
-                <a:tc>
-                  <a:txBody>
-                    <a:bodyPr>
-                      <a:noAutofit/>
-                    </a:bodyPr>
-                    <a:lstStyle/>
-                    <a:p>
-                      <a:r>
-                        <a:rPr sz="1725" b="0">
-                          <a:solidFill>
-                            <a:srgbClr val="233542"/>
-                          </a:solidFill>
-                          <a:latin typeface="Arial"/>
-                          <a:ea typeface="Arial"/>
-                          <a:cs typeface="Arial"/>
-                        </a:rPr>
-                        <a:t>Comparison and sampling</a:t>
-                      </a:r>
-                    </a:p>
-                  </a:txBody>
-                  <a:tcPr marL="91440" marR="91440" marT="45720" marB="45720">
-                    <a:solidFill>
-                      <a:srgbClr val="FFFFFF"/>
-                    </a:solidFill>
-                  </a:tcPr>
-                </a:tc>
-                <a:tc>
-                  <a:txBody>
-                    <a:bodyPr>
-                      <a:noAutofit/>
-                    </a:bodyPr>
-                    <a:lstStyle/>
-                    <a:p>
-                      <a:r>
-                        <a:rPr sz="1725" b="0">
-                          <a:solidFill>
-                            <a:srgbClr val="233542"/>
-                          </a:solidFill>
-                          <a:latin typeface="Arial"/>
-                          <a:ea typeface="Arial"/>
-                          <a:cs typeface="Arial"/>
-                        </a:rPr>
-                        <a:t>Separate operation accuracy, approximation error and reader agreement. Actual timeSamples and explicit timeCodesPerSecond record the sampling schedule.</a:t>
+                        <a:t>Profiles on defaultPrim carries a conservative hard capability claim for the whole scene, including unloaded content.</a:t>
                       </a:r>
                     </a:p>
                   </a:txBody>
@@ -2573,10 +4098,67 @@
           </a:graphicData>
         </a:graphic>
       </p:graphicFrame>
+      <p:sp>
+        <p:nvSpPr>
+          <p:cNvPr id="3" name="">
+            <a:extLst xmlns:a="http://schemas.openxmlformats.org/drawingml/2006/main">
+              <a:ext uri="{FF2B5EF4-FFF2-40B4-BE49-F238E27FC236}">
+                <a16:creationId xmlns:a16="http://schemas.microsoft.com/office/drawing/2014/main" id="{6863E12C-EB80-48BA-B9A9-733253B381BF}"/>
+              </a:ext>
+            </a:extLst>
+          </p:cNvPr>
+          <p:cNvSpPr>
+            <a:spLocks xmlns:a="http://schemas.openxmlformats.org/drawingml/2006/main" noGrp="1"/>
+          </p:cNvSpPr>
+          <p:nvPr/>
+        </p:nvSpPr>
+        <p:spPr>
+          <a:xfrm xmlns:a="http://schemas.openxmlformats.org/drawingml/2006/main">
+            <a:off x="609600" y="6105525"/>
+            <a:ext cx="10972800" cy="628650"/>
+          </a:xfrm>
+          <a:prstGeom xmlns:a="http://schemas.openxmlformats.org/drawingml/2006/main" prst="rect">
+            <a:avLst/>
+          </a:prstGeom>
+          <a:noFill xmlns:a="http://schemas.openxmlformats.org/drawingml/2006/main"/>
+          <a:ln xmlns:a="http://schemas.openxmlformats.org/drawingml/2006/main" w="0">
+            <a:noFill/>
+          </a:ln>
+        </p:spPr>
+        <p:txBody>
+          <a:bodyPr xmlns:a="http://schemas.openxmlformats.org/drawingml/2006/main">
+            <a:noAutofit/>
+          </a:bodyPr>
+          <a:lstStyle xmlns:a="http://schemas.openxmlformats.org/drawingml/2006/main"/>
+          <a:p xmlns:a="http://schemas.openxmlformats.org/drawingml/2006/main">
+            <a:pPr>
+              <a:defRPr sz="1875" b="0">
+                <a:solidFill>
+                  <a:srgbClr val="A25D20"/>
+                </a:solidFill>
+                <a:latin typeface="Arial"/>
+                <a:ea typeface="Arial"/>
+                <a:cs typeface="Arial"/>
+              </a:defRPr>
+            </a:pPr>
+            <a:r>
+              <a:rPr sz="1875" b="0">
+                <a:solidFill>
+                  <a:srgbClr val="A25D20"/>
+                </a:solidFill>
+                <a:latin typeface="Arial"/>
+                <a:ea typeface="Arial"/>
+                <a:cs typeface="Arial"/>
+              </a:rPr>
+              <a:t>These are proposed details, including a new external-association schema. Passing tests does not establish group agreement.</a:t>
+            </a:r>
+          </a:p>
+        </p:txBody>
+      </p:sp>
     </p:spTree>
     <p:extLst>
       <p:ext uri="{BB962C8B-B14F-4D97-AF65-F5344CB8AC3E}">
-        <p14:creationId xmlns:p14="http://schemas.microsoft.com/office/powerpoint/2010/main" val="349535359"/>
+        <p14:creationId xmlns:p14="http://schemas.microsoft.com/office/powerpoint/2010/main" val="919488112"/>
       </p:ext>
     </p:extLst>
   </p:cSld>
@@ -2604,10 +4186,10 @@
       </p:grpSpPr>
       <p:sp>
         <p:nvSpPr>
-          <p:cNvPr id="4" name="">
+          <p:cNvPr id="6" name="">
             <a:extLst xmlns:a="http://schemas.openxmlformats.org/drawingml/2006/main">
               <a:ext uri="{FF2B5EF4-FFF2-40B4-BE49-F238E27FC236}">
-                <a16:creationId xmlns:a16="http://schemas.microsoft.com/office/drawing/2014/main" id="{C3E1A522-0859-4D01-A90A-D6ACAB05A1CD}"/>
+                <a16:creationId xmlns:a16="http://schemas.microsoft.com/office/drawing/2014/main" id="{BF79E4CA-3A3E-4B7B-AF78-4B84C072AF1F}"/>
               </a:ext>
             </a:extLst>
           </p:cNvPr>
@@ -2618,8 +4200,8 @@
         </p:nvSpPr>
         <p:spPr>
           <a:xfrm xmlns:a="http://schemas.openxmlformats.org/drawingml/2006/main">
-            <a:off x="609600" y="381000"/>
-            <a:ext cx="10972800" cy="952500"/>
+            <a:off x="609600" y="333375"/>
+            <a:ext cx="10972800" cy="1047750"/>
           </a:xfrm>
           <a:prstGeom xmlns:a="http://schemas.openxmlformats.org/drawingml/2006/main" prst="rect">
             <a:avLst/>
@@ -2638,7 +4220,7 @@
             <a:pPr>
               <a:defRPr sz="3150" b="1">
                 <a:solidFill>
-                  <a:srgbClr val="233542"/>
+                  <a:srgbClr val="213744"/>
                 </a:solidFill>
                 <a:latin typeface="Arial"/>
                 <a:ea typeface="Arial"/>
@@ -2648,36 +4230,95 @@
             <a:r>
               <a:rPr sz="3150" b="1">
                 <a:solidFill>
-                  <a:srgbClr val="233542"/>
+                  <a:srgbClr val="213744"/>
                 </a:solidFill>
                 <a:latin typeface="Arial"/>
                 <a:ea typeface="Arial"/>
                 <a:cs typeface="Arial"/>
               </a:rPr>
-              <a:t>Four contracts still required</a:t>
+              <a:t>A fixed working frame for project adjustments</a:t>
+            </a:r>
+          </a:p>
+        </p:txBody>
+      </p:sp>
+      <p:sp>
+        <p:nvSpPr>
+          <p:cNvPr id="2" name="">
+            <a:extLst xmlns:a="http://schemas.openxmlformats.org/drawingml/2006/main">
+              <a:ext uri="{FF2B5EF4-FFF2-40B4-BE49-F238E27FC236}">
+                <a16:creationId xmlns:a16="http://schemas.microsoft.com/office/drawing/2014/main" id="{53E13377-E809-4778-8C4C-FC949E32EA2F}"/>
+              </a:ext>
+            </a:extLst>
+          </p:cNvPr>
+          <p:cNvSpPr>
+            <a:spLocks xmlns:a="http://schemas.openxmlformats.org/drawingml/2006/main" noGrp="1"/>
+          </p:cNvSpPr>
+          <p:nvPr/>
+        </p:nvSpPr>
+        <p:spPr>
+          <a:xfrm xmlns:a="http://schemas.openxmlformats.org/drawingml/2006/main">
+            <a:off x="609600" y="1504950"/>
+            <a:ext cx="10972800" cy="762000"/>
+          </a:xfrm>
+          <a:prstGeom xmlns:a="http://schemas.openxmlformats.org/drawingml/2006/main" prst="rect">
+            <a:avLst/>
+          </a:prstGeom>
+          <a:noFill xmlns:a="http://schemas.openxmlformats.org/drawingml/2006/main"/>
+          <a:ln xmlns:a="http://schemas.openxmlformats.org/drawingml/2006/main" w="0">
+            <a:noFill/>
+          </a:ln>
+        </p:spPr>
+        <p:txBody>
+          <a:bodyPr xmlns:a="http://schemas.openxmlformats.org/drawingml/2006/main">
+            <a:noAutofit/>
+          </a:bodyPr>
+          <a:lstStyle xmlns:a="http://schemas.openxmlformats.org/drawingml/2006/main"/>
+          <a:p xmlns:a="http://schemas.openxmlformats.org/drawingml/2006/main">
+            <a:pPr>
+              <a:defRPr sz="2250" b="0">
+                <a:solidFill>
+                  <a:srgbClr val="213744"/>
+                </a:solidFill>
+                <a:latin typeface="Arial"/>
+                <a:ea typeface="Arial"/>
+                <a:cs typeface="Arial"/>
+              </a:defRPr>
+            </a:pPr>
+            <a:r>
+              <a:rPr sz="2250" b="0">
+                <a:solidFill>
+                  <a:srgbClr val="213744"/>
+                </a:solidFill>
+                <a:latin typeface="Arial"/>
+                <a:ea typeface="Arial"/>
+                <a:cs typeface="Arial"/>
+              </a:rPr>
+              <a:t>A geographic asset sits inside a projected site. Its model orientation turns local X northward.</a:t>
             </a:r>
           </a:p>
         </p:txBody>
       </p:sp>
       <p:graphicFrame>
         <p:nvGraphicFramePr>
-          <p:cNvPr id="5" name=""/>
+          <p:cNvPr id="8" name=""/>
           <p:cNvGraphicFramePr/>
           <p:nvPr/>
         </p:nvGraphicFramePr>
         <p:xfrm>
-          <a:off xmlns:a="http://schemas.openxmlformats.org/drawingml/2006/main" x="609600" y="1428750"/>
-          <a:ext xmlns:a="http://schemas.openxmlformats.org/drawingml/2006/main" cx="10972800" cy="4457700"/>
+          <a:off xmlns:a="http://schemas.openxmlformats.org/drawingml/2006/main" x="609600" y="2562225"/>
+          <a:ext xmlns:a="http://schemas.openxmlformats.org/drawingml/2006/main" cx="10972800" cy="2257425"/>
         </p:xfrm>
         <a:graphic xmlns:a="http://schemas.openxmlformats.org/drawingml/2006/main">
           <a:graphicData uri="http://schemas.openxmlformats.org/drawingml/2006/table">
             <a:tbl>
               <a:tblPr/>
               <a:tblGrid>
-                <a:gridCol w="3286125"/>
-                <a:gridCol w="7686675"/>
+                <a:gridCol w="4514850"/>
+                <a:gridCol w="2152650"/>
+                <a:gridCol w="2152650"/>
+                <a:gridCol w="2152650"/>
               </a:tblGrid>
-              <a:tr h="891540">
+              <a:tr h="564356">
                 <a:tc>
                   <a:txBody>
                     <a:bodyPr>
@@ -2686,7 +4327,7 @@
                     <a:lstStyle/>
                     <a:p>
                       <a:r>
-                        <a:rPr sz="1800" b="1">
+                        <a:rPr sz="1875" b="1">
                           <a:solidFill>
                             <a:srgbClr val="FFFFFF"/>
                           </a:solidFill>
@@ -2694,13 +4335,13 @@
                           <a:ea typeface="Arial"/>
                           <a:cs typeface="Arial"/>
                         </a:rPr>
-                        <a:t>Contract</a:t>
+                        <a:t>Queried position</a:t>
                       </a:r>
                     </a:p>
                   </a:txBody>
                   <a:tcPr marL="91440" marR="91440" marT="45720" marB="45720">
                     <a:solidFill>
-                      <a:srgbClr val="233542"/>
+                      <a:srgbClr val="213744"/>
                     </a:solidFill>
                   </a:tcPr>
                 </a:tc>
@@ -2712,7 +4353,7 @@
                     <a:lstStyle/>
                     <a:p>
                       <a:r>
-                        <a:rPr sz="1800" b="1">
+                        <a:rPr sz="1875" b="1">
                           <a:solidFill>
                             <a:srgbClr val="FFFFFF"/>
                           </a:solidFill>
@@ -2720,18 +4361,16 @@
                           <a:ea typeface="Arial"/>
                           <a:cs typeface="Arial"/>
                         </a:rPr>
-                        <a:t>What remains unspecified</a:t>
+                        <a:t>Easting (m)</a:t>
                       </a:r>
                     </a:p>
                   </a:txBody>
                   <a:tcPr marL="91440" marR="91440" marT="45720" marB="45720">
                     <a:solidFill>
-                      <a:srgbClr val="233542"/>
+                      <a:srgbClr val="213744"/>
                     </a:solidFill>
                   </a:tcPr>
                 </a:tc>
-              </a:tr>
-              <a:tr h="891540">
                 <a:tc>
                   <a:txBody>
                     <a:bodyPr>
@@ -2740,15 +4379,69 @@
                     <a:lstStyle/>
                     <a:p>
                       <a:r>
-                        <a:rPr sz="1800" b="0">
+                        <a:rPr sz="1875" b="1">
                           <a:solidFill>
-                            <a:srgbClr val="233542"/>
+                            <a:srgbClr val="FFFFFF"/>
                           </a:solidFill>
                           <a:latin typeface="Arial"/>
                           <a:ea typeface="Arial"/>
                           <a:cs typeface="Arial"/>
                         </a:rPr>
-                        <a:t>G03 / Q3: project-adjustment frame</a:t>
+                        <a:t>Northing (m)</a:t>
+                      </a:r>
+                    </a:p>
+                  </a:txBody>
+                  <a:tcPr marL="91440" marR="91440" marT="45720" marB="45720">
+                    <a:solidFill>
+                      <a:srgbClr val="213744"/>
+                    </a:solidFill>
+                  </a:tcPr>
+                </a:tc>
+                <a:tc>
+                  <a:txBody>
+                    <a:bodyPr>
+                      <a:noAutofit/>
+                    </a:bodyPr>
+                    <a:lstStyle/>
+                    <a:p>
+                      <a:r>
+                        <a:rPr sz="1875" b="1">
+                          <a:solidFill>
+                            <a:srgbClr val="FFFFFF"/>
+                          </a:solidFill>
+                          <a:latin typeface="Arial"/>
+                          <a:ea typeface="Arial"/>
+                          <a:cs typeface="Arial"/>
+                        </a:rPr>
+                        <a:t>Height (m)</a:t>
+                      </a:r>
+                    </a:p>
+                  </a:txBody>
+                  <a:tcPr marL="91440" marR="91440" marT="45720" marB="45720">
+                    <a:solidFill>
+                      <a:srgbClr val="213744"/>
+                    </a:solidFill>
+                  </a:tcPr>
+                </a:tc>
+              </a:tr>
+              <a:tr h="564356">
+                <a:tc>
+                  <a:txBody>
+                    <a:bodyPr>
+                      <a:noAutofit/>
+                    </a:bodyPr>
+                    <a:lstStyle/>
+                    <a:p>
+                      <a:r>
+                        <a:rPr sz="1875" b="0">
+                          <a:solidFill>
+                            <a:srgbClr val="213744"/>
+                          </a:solidFill>
+                          <a:latin typeface="Arial"/>
+                          <a:ea typeface="Arial"/>
+                          <a:cs typeface="Arial"/>
+                        </a:rPr>
+                        <a:t>Anchor with +10 site adjustment</a:t>
                       </a:r>
                     </a:p>
                   </a:txBody>
@@ -2766,43 +4459,15 @@
                     <a:lstStyle/>
                     <a:p>
                       <a:r>
-                        <a:rPr sz="1800" b="0">
+                        <a:rPr sz="1875" b="0">
                           <a:solidFill>
-                            <a:srgbClr val="233542"/>
+                            <a:srgbClr val="213744"/>
                           </a:solidFill>
                           <a:latin typeface="Arial"/>
                           <a:ea typeface="Arial"/>
                           <a:cs typeface="Arial"/>
                         </a:rPr>
-                        <a:t>Axes, units, pivot and controlling composed context for ordinary project adjustments, including nested bindings and output changes. Post-placement order is settled.</a:t>
-                      </a:r>
-                    </a:p>
-                  </a:txBody>
-                  <a:tcPr marL="91440" marR="91440" marT="45720" marB="45720">
-                    <a:solidFill>
-                      <a:srgbClr val="FFFFFF"/>
-                    </a:solidFill>
-                  </a:tcPr>
-                </a:tc>
-              </a:tr>
-              <a:tr h="891540">
-                <a:tc>
-                  <a:txBody>
-                    <a:bodyPr>
-                      <a:noAutofit/>
-                    </a:bodyPr>
-                    <a:lstStyle/>
-                    <a:p>
-                      <a:r>
-                        <a:rPr sz="1800" b="0">
-                          <a:solidFill>
-                            <a:srgbClr val="233542"/>
-                          </a:solidFill>
-                          <a:latin typeface="Arial"/>
-                          <a:ea typeface="Arial"/>
-                          <a:cs typeface="Arial"/>
-                        </a:rPr>
-                        <a:t>G04 / Q6: stage and placement bases</a:t>
+                        <a:t>448262.0014</a:t>
                       </a:r>
                     </a:p>
                   </a:txBody>
@@ -2820,43 +4485,15 @@
                     <a:lstStyle/>
                     <a:p>
                       <a:r>
-                        <a:rPr sz="1800" b="0">
+                        <a:rPr sz="1875" b="0">
                           <a:solidFill>
-                            <a:srgbClr val="233542"/>
+                            <a:srgbClr val="213744"/>
                           </a:solidFill>
                           <a:latin typeface="Arial"/>
                           <a:ea typeface="Arial"/>
                           <a:cs typeface="Arial"/>
                         </a:rPr>
-                        <a:t>Exact mapping between stage axes/distances, the proposed source placement bases and resolved result bases. Coordinate tuples do not supply that mapping.</a:t>
-                      </a:r>
-                    </a:p>
-                  </a:txBody>
-                  <a:tcPr marL="91440" marR="91440" marT="45720" marB="45720">
-                    <a:solidFill>
-                      <a:srgbClr val="FFFFFF"/>
-                    </a:solidFill>
-                  </a:tcPr>
-                </a:tc>
-              </a:tr>
-              <a:tr h="891540">
-                <a:tc>
-                  <a:txBody>
-                    <a:bodyPr>
-                      <a:noAutofit/>
-                    </a:bodyPr>
-                    <a:lstStyle/>
-                    <a:p>
-                      <a:r>
-                        <a:rPr sz="1800" b="0">
-                          <a:solidFill>
-                            <a:srgbClr val="233542"/>
-                          </a:solidFill>
-                          <a:latin typeface="Arial"/>
-                          <a:ea typeface="Arial"/>
-                          <a:cs typeface="Arial"/>
-                        </a:rPr>
-                        <a:t>G06 / Q11: measurement association</a:t>
+                        <a:t>5411954.9099</a:t>
                       </a:r>
                     </a:p>
                   </a:txBody>
@@ -2874,15 +4511,15 @@
                     <a:lstStyle/>
                     <a:p>
                       <a:r>
-                        <a:rPr sz="1800" b="0">
+                        <a:rPr sz="1875" b="0">
                           <a:solidFill>
-                            <a:srgbClr val="233542"/>
+                            <a:srgbClr val="213744"/>
                           </a:solidFill>
                           <a:latin typeface="Arial"/>
                           <a:ea typeface="Arial"/>
                           <a:cs typeface="Arial"/>
                         </a:rPr>
-                        <a:t>Authored coordinate roles/domains for USD properties and external assets, including multiple domains and conflicting external CRS metadata.</a:t>
+                        <a:t>35.0000</a:t>
                       </a:r>
                     </a:p>
                   </a:txBody>
@@ -2893,7 +4530,7 @@
                   </a:tcPr>
                 </a:tc>
               </a:tr>
-              <a:tr h="891540">
+              <a:tr h="564356">
                 <a:tc>
                   <a:txBody>
                     <a:bodyPr>
@@ -2902,15 +4539,15 @@
                     <a:lstStyle/>
                     <a:p>
                       <a:r>
-                        <a:rPr sz="1800" b="0">
+                        <a:rPr sz="1875" b="0">
                           <a:solidFill>
-                            <a:srgbClr val="233542"/>
+                            <a:srgbClr val="213744"/>
                           </a:solidFill>
                           <a:latin typeface="Arial"/>
                           <a:ea typeface="Arial"/>
                           <a:cs typeface="Arial"/>
                         </a:rPr>
-                        <a:t>G07 / Q12: dependency declaration</a:t>
+                        <a:t>Child with +3 local X</a:t>
                       </a:r>
                     </a:p>
                   </a:txBody>
@@ -2928,15 +4565,173 @@
                     <a:lstStyle/>
                     <a:p>
                       <a:r>
-                        <a:rPr sz="1800" b="0">
+                        <a:rPr sz="1875" b="0">
                           <a:solidFill>
-                            <a:srgbClr val="233542"/>
+                            <a:srgbClr val="213744"/>
                           </a:solidFill>
                           <a:latin typeface="Arial"/>
                           <a:ea typeface="Arial"/>
                           <a:cs typeface="Arial"/>
                         </a:rPr>
-                        <a:t>Authored carrier and conservative assembly/export maintenance through references, unloaded payloads and composition, readable without traversal.</a:t>
+                        <a:t>448262.0292</a:t>
+                      </a:r>
+                    </a:p>
+                  </a:txBody>
+                  <a:tcPr marL="91440" marR="91440" marT="45720" marB="45720">
+                    <a:solidFill>
+                      <a:srgbClr val="FFFFFF"/>
+                    </a:solidFill>
+                  </a:tcPr>
+                </a:tc>
+                <a:tc>
+                  <a:txBody>
+                    <a:bodyPr>
+                      <a:noAutofit/>
+                    </a:bodyPr>
+                    <a:lstStyle/>
+                    <a:p>
+                      <a:r>
+                        <a:rPr sz="1875" b="0">
+                          <a:solidFill>
+                            <a:srgbClr val="213744"/>
+                          </a:solidFill>
+                          <a:latin typeface="Arial"/>
+                          <a:ea typeface="Arial"/>
+                          <a:cs typeface="Arial"/>
+                        </a:rPr>
+                        <a:t>5411957.9087</a:t>
+                      </a:r>
+                    </a:p>
+                  </a:txBody>
+                  <a:tcPr marL="91440" marR="91440" marT="45720" marB="45720">
+                    <a:solidFill>
+                      <a:srgbClr val="FFFFFF"/>
+                    </a:solidFill>
+                  </a:tcPr>
+                </a:tc>
+                <a:tc>
+                  <a:txBody>
+                    <a:bodyPr>
+                      <a:noAutofit/>
+                    </a:bodyPr>
+                    <a:lstStyle/>
+                    <a:p>
+                      <a:r>
+                        <a:rPr sz="1875" b="0">
+                          <a:solidFill>
+                            <a:srgbClr val="213744"/>
+                          </a:solidFill>
+                          <a:latin typeface="Arial"/>
+                          <a:ea typeface="Arial"/>
+                          <a:cs typeface="Arial"/>
+                        </a:rPr>
+                        <a:t>35.0000</a:t>
+                      </a:r>
+                    </a:p>
+                  </a:txBody>
+                  <a:tcPr marL="91440" marR="91440" marT="45720" marB="45720">
+                    <a:solidFill>
+                      <a:srgbClr val="FFFFFF"/>
+                    </a:solidFill>
+                  </a:tcPr>
+                </a:tc>
+              </a:tr>
+              <a:tr h="564356">
+                <a:tc>
+                  <a:txBody>
+                    <a:bodyPr>
+                      <a:noAutofit/>
+                    </a:bodyPr>
+                    <a:lstStyle/>
+                    <a:p>
+                      <a:r>
+                        <a:rPr sz="1875" b="0">
+                          <a:solidFill>
+                            <a:srgbClr val="213744"/>
+                          </a:solidFill>
+                          <a:latin typeface="Arial"/>
+                          <a:ea typeface="Arial"/>
+                          <a:cs typeface="Arial"/>
+                        </a:rPr>
+                        <a:t>Child with ordinary reset</a:t>
+                      </a:r>
+                    </a:p>
+                  </a:txBody>
+                  <a:tcPr marL="91440" marR="91440" marT="45720" marB="45720">
+                    <a:solidFill>
+                      <a:srgbClr val="FFFFFF"/>
+                    </a:solidFill>
+                  </a:tcPr>
+                </a:tc>
+                <a:tc>
+                  <a:txBody>
+                    <a:bodyPr>
+                      <a:noAutofit/>
+                    </a:bodyPr>
+                    <a:lstStyle/>
+                    <a:p>
+                      <a:r>
+                        <a:rPr sz="1875" b="0">
+                          <a:solidFill>
+                            <a:srgbClr val="213744"/>
+                          </a:solidFill>
+                          <a:latin typeface="Arial"/>
+                          <a:ea typeface="Arial"/>
+                          <a:cs typeface="Arial"/>
+                        </a:rPr>
+                        <a:t>448252.0292</a:t>
+                      </a:r>
+                    </a:p>
+                  </a:txBody>
+                  <a:tcPr marL="91440" marR="91440" marT="45720" marB="45720">
+                    <a:solidFill>
+                      <a:srgbClr val="FFFFFF"/>
+                    </a:solidFill>
+                  </a:tcPr>
+                </a:tc>
+                <a:tc>
+                  <a:txBody>
+                    <a:bodyPr>
+                      <a:noAutofit/>
+                    </a:bodyPr>
+                    <a:lstStyle/>
+                    <a:p>
+                      <a:r>
+                        <a:rPr sz="1875" b="0">
+                          <a:solidFill>
+                            <a:srgbClr val="213744"/>
+                          </a:solidFill>
+                          <a:latin typeface="Arial"/>
+                          <a:ea typeface="Arial"/>
+                          <a:cs typeface="Arial"/>
+                        </a:rPr>
+                        <a:t>5411957.9087</a:t>
+                      </a:r>
+                    </a:p>
+                  </a:txBody>
+                  <a:tcPr marL="91440" marR="91440" marT="45720" marB="45720">
+                    <a:solidFill>
+                      <a:srgbClr val="FFFFFF"/>
+                    </a:solidFill>
+                  </a:tcPr>
+                </a:tc>
+                <a:tc>
+                  <a:txBody>
+                    <a:bodyPr>
+                      <a:noAutofit/>
+                    </a:bodyPr>
+                    <a:lstStyle/>
+                    <a:p>
+                      <a:r>
+                        <a:rPr sz="1875" b="0">
+                          <a:solidFill>
+                            <a:srgbClr val="213744"/>
+                          </a:solidFill>
+                          <a:latin typeface="Arial"/>
+                          <a:ea typeface="Arial"/>
+                          <a:cs typeface="Arial"/>
+                        </a:rPr>
+                        <a:t>35.0000</a:t>
                       </a:r>
                     </a:p>
                   </a:txBody>
@@ -2953,10 +4748,10 @@
       </p:graphicFrame>
       <p:sp>
         <p:nvSpPr>
-          <p:cNvPr id="3" name="">
+          <p:cNvPr id="4" name="">
             <a:extLst xmlns:a="http://schemas.openxmlformats.org/drawingml/2006/main">
               <a:ext uri="{FF2B5EF4-FFF2-40B4-BE49-F238E27FC236}">
-                <a16:creationId xmlns:a16="http://schemas.microsoft.com/office/drawing/2014/main" id="{EAE6F0EE-016A-47A5-A36E-EDCF3531F011}"/>
+                <a16:creationId xmlns:a16="http://schemas.microsoft.com/office/drawing/2014/main" id="{AE676D42-5B4E-488D-AAF0-81EAB55BC93E}"/>
               </a:ext>
             </a:extLst>
           </p:cNvPr>
@@ -2967,8 +4762,8 @@
         </p:nvSpPr>
         <p:spPr>
           <a:xfrm xmlns:a="http://schemas.openxmlformats.org/drawingml/2006/main">
-            <a:off x="609600" y="6134100"/>
-            <a:ext cx="10972800" cy="514350"/>
+            <a:off x="609600" y="5133975"/>
+            <a:ext cx="10972800" cy="990600"/>
           </a:xfrm>
           <a:prstGeom xmlns:a="http://schemas.openxmlformats.org/drawingml/2006/main" prst="rect">
             <a:avLst/>
@@ -2985,9 +4780,9 @@
           <a:lstStyle xmlns:a="http://schemas.openxmlformats.org/drawingml/2006/main"/>
           <a:p xmlns:a="http://schemas.openxmlformats.org/drawingml/2006/main">
             <a:pPr>
-              <a:defRPr sz="1650" b="0">
-                <a:solidFill>
-                  <a:srgbClr val="233542"/>
+              <a:defRPr sz="2175" b="0">
+                <a:solidFill>
+                  <a:srgbClr val="157C87"/>
                 </a:solidFill>
                 <a:latin typeface="Arial"/>
                 <a:ea typeface="Arial"/>
@@ -2995,15 +4790,95 @@
               </a:defRPr>
             </a:pPr>
             <a:r>
+              <a:rPr sz="2175" b="0">
+                <a:solidFill>
+                  <a:srgbClr val="157C87"/>
+                </a:solidFill>
+                <a:latin typeface="Arial"/>
+                <a:ea typeface="Arial"/>
+                <a:cs typeface="Arial"/>
+              </a:rPr>
+              <a:t>The +10 follows site easting. The child offset follows the oriented model.</a:t>
+            </a:r>
+          </a:p>
+          <a:p xmlns:a="http://schemas.openxmlformats.org/drawingml/2006/main">
+            <a:pPr>
+              <a:defRPr sz="2175" b="0">
+                <a:solidFill>
+                  <a:srgbClr val="157C87"/>
+                </a:solidFill>
+                <a:latin typeface="Arial"/>
+                <a:ea typeface="Arial"/>
+                <a:cs typeface="Arial"/>
+              </a:defRPr>
+            </a:pPr>
+            <a:r>
+              <a:rPr sz="2175" b="0">
+                <a:solidFill>
+                  <a:srgbClr val="157C87"/>
+                </a:solidFill>
+                <a:latin typeface="Arial"/>
+                <a:ea typeface="Arial"/>
+                <a:cs typeface="Arial"/>
+              </a:rPr>
+              <a:t>The reset removes the ordinary adjustment and retains CRS placement.</a:t>
+            </a:r>
+          </a:p>
+        </p:txBody>
+      </p:sp>
+      <p:sp>
+        <p:nvSpPr>
+          <p:cNvPr id="5" name="">
+            <a:extLst xmlns:a="http://schemas.openxmlformats.org/drawingml/2006/main">
+              <a:ext uri="{FF2B5EF4-FFF2-40B4-BE49-F238E27FC236}">
+                <a16:creationId xmlns:a16="http://schemas.microsoft.com/office/drawing/2014/main" id="{183AF568-FFD9-45EA-BEF4-B1D4B9EF4EFE}"/>
+              </a:ext>
+            </a:extLst>
+          </p:cNvPr>
+          <p:cNvSpPr>
+            <a:spLocks xmlns:a="http://schemas.openxmlformats.org/drawingml/2006/main" noGrp="1"/>
+          </p:cNvSpPr>
+          <p:nvPr/>
+        </p:nvSpPr>
+        <p:spPr>
+          <a:xfrm xmlns:a="http://schemas.openxmlformats.org/drawingml/2006/main">
+            <a:off x="609600" y="6305550"/>
+            <a:ext cx="10972800" cy="438150"/>
+          </a:xfrm>
+          <a:prstGeom xmlns:a="http://schemas.openxmlformats.org/drawingml/2006/main" prst="rect">
+            <a:avLst/>
+          </a:prstGeom>
+          <a:noFill xmlns:a="http://schemas.openxmlformats.org/drawingml/2006/main"/>
+          <a:ln xmlns:a="http://schemas.openxmlformats.org/drawingml/2006/main" w="0">
+            <a:noFill/>
+          </a:ln>
+        </p:spPr>
+        <p:txBody>
+          <a:bodyPr xmlns:a="http://schemas.openxmlformats.org/drawingml/2006/main">
+            <a:noAutofit/>
+          </a:bodyPr>
+          <a:lstStyle xmlns:a="http://schemas.openxmlformats.org/drawingml/2006/main"/>
+          <a:p xmlns:a="http://schemas.openxmlformats.org/drawingml/2006/main">
+            <a:pPr>
+              <a:defRPr sz="1650" b="0">
+                <a:solidFill>
+                  <a:srgbClr val="526B79"/>
+                </a:solidFill>
+                <a:latin typeface="Arial"/>
+                <a:ea typeface="Arial"/>
+                <a:cs typeface="Arial"/>
+              </a:defRPr>
+            </a:pPr>
+            <a:r>
               <a:rPr sz="1650" b="0">
                 <a:solidFill>
-                  <a:srgbClr val="233542"/>
+                  <a:srgbClr val="526B79"/>
                 </a:solidFill>
                 <a:latin typeface="Arial"/>
                 <a:ea typeface="Arial"/>
                 <a:cs typeface="Arial"/>
               </a:rPr>
-              <a:t>Question 9 separately concerns geographic scene geometry, frames and bounds. Geographic coordinate queries already belong to initial scope.</a:t>
+              <a:t>Reprojection to ECEF preserves the same adjusted physical result. Ordinary parent transforms remain excluded at a direct binding.</a:t>
             </a:r>
           </a:p>
         </p:txBody>
@@ -3011,7 +4886,7 @@
     </p:spTree>
     <p:extLst>
       <p:ext uri="{BB962C8B-B14F-4D97-AF65-F5344CB8AC3E}">
-        <p14:creationId xmlns:p14="http://schemas.microsoft.com/office/powerpoint/2010/main" val="885362114"/>
+        <p14:creationId xmlns:p14="http://schemas.microsoft.com/office/powerpoint/2010/main" val="1946306800"/>
       </p:ext>
     </p:extLst>
   </p:cSld>
@@ -3039,10 +4914,10 @@
       </p:grpSpPr>
       <p:sp>
         <p:nvSpPr>
-          <p:cNvPr id="6" name="">
+          <p:cNvPr id="7" name="">
             <a:extLst xmlns:a="http://schemas.openxmlformats.org/drawingml/2006/main">
               <a:ext uri="{FF2B5EF4-FFF2-40B4-BE49-F238E27FC236}">
-                <a16:creationId xmlns:a16="http://schemas.microsoft.com/office/drawing/2014/main" id="{BA8BDE36-C783-44BB-9161-BF1CE088ECA8}"/>
+                <a16:creationId xmlns:a16="http://schemas.microsoft.com/office/drawing/2014/main" id="{FE900492-1FC5-4953-9957-84929CE9C45A}"/>
               </a:ext>
             </a:extLst>
           </p:cNvPr>
@@ -3053,8 +4928,8 @@
         </p:nvSpPr>
         <p:spPr>
           <a:xfrm xmlns:a="http://schemas.openxmlformats.org/drawingml/2006/main">
-            <a:off x="609600" y="381000"/>
-            <a:ext cx="10972800" cy="952500"/>
+            <a:off x="609600" y="333375"/>
+            <a:ext cx="10972800" cy="1047750"/>
           </a:xfrm>
           <a:prstGeom xmlns:a="http://schemas.openxmlformats.org/drawingml/2006/main" prst="rect">
             <a:avLst/>
@@ -3073,7 +4948,7 @@
             <a:pPr>
               <a:defRPr sz="3150" b="1">
                 <a:solidFill>
-                  <a:srgbClr val="233542"/>
+                  <a:srgbClr val="213744"/>
                 </a:solidFill>
                 <a:latin typeface="Arial"/>
                 <a:ea typeface="Arial"/>
@@ -3083,23 +4958,45 @@
             <a:r>
               <a:rPr sz="3150" b="1">
                 <a:solidFill>
-                  <a:srgbClr val="233542"/>
+                  <a:srgbClr val="213744"/>
                 </a:solidFill>
                 <a:latin typeface="Arial"/>
                 <a:ea typeface="Arial"/>
                 <a:cs typeface="Arial"/>
               </a:rPr>
-              <a:t>WKT string normalization</a:t>
+              <a:t>Eiffel geometry in the native Hydra consumer</a:t>
             </a:r>
           </a:p>
         </p:txBody>
       </p:sp>
+      <p:pic>
+        <p:nvPicPr>
+          <p:cNvPr id="8" name=""/>
+          <p:cNvPicPr>
+            <a:picLocks xmlns:a="http://schemas.openxmlformats.org/drawingml/2006/main" noChangeAspect="1"/>
+          </p:cNvPicPr>
+          <p:nvPr/>
+        </p:nvPicPr>
+        <p:blipFill>
+          <a:blip xmlns:r="http://schemas.openxmlformats.org/officeDocument/2006/relationships" xmlns:a="http://schemas.openxmlformats.org/drawingml/2006/main" r:embed="R06b4362a47174dda"/>
+          <a:stretch xmlns:a="http://schemas.openxmlformats.org/drawingml/2006/main"/>
+        </p:blipFill>
+        <p:spPr>
+          <a:xfrm xmlns:a="http://schemas.openxmlformats.org/drawingml/2006/main">
+            <a:off x="285750" y="1453455"/>
+            <a:ext cx="7667625" cy="4313039"/>
+          </a:xfrm>
+          <a:prstGeom xmlns:a="http://schemas.openxmlformats.org/drawingml/2006/main" prst="rect">
+            <a:avLst/>
+          </a:prstGeom>
+        </p:spPr>
+      </p:pic>
       <p:sp>
         <p:nvSpPr>
-          <p:cNvPr id="2" name="">
+          <p:cNvPr id="3" name="">
             <a:extLst xmlns:a="http://schemas.openxmlformats.org/drawingml/2006/main">
               <a:ext uri="{FF2B5EF4-FFF2-40B4-BE49-F238E27FC236}">
-                <a16:creationId xmlns:a16="http://schemas.microsoft.com/office/drawing/2014/main" id="{8530EC61-A5B0-4739-A78B-9D3ADB1D8F37}"/>
+                <a16:creationId xmlns:a16="http://schemas.microsoft.com/office/drawing/2014/main" id="{4AEA1437-A405-4ED1-AB68-3F9B30CB6BEB}"/>
               </a:ext>
             </a:extLst>
           </p:cNvPr>
@@ -3110,8 +5007,8 @@
         </p:nvSpPr>
         <p:spPr>
           <a:xfrm xmlns:a="http://schemas.openxmlformats.org/drawingml/2006/main">
-            <a:off x="609600" y="1466850"/>
-            <a:ext cx="10972800" cy="647700"/>
+            <a:off x="8239125" y="1752600"/>
+            <a:ext cx="3333750" cy="600075"/>
           </a:xfrm>
           <a:prstGeom xmlns:a="http://schemas.openxmlformats.org/drawingml/2006/main" prst="rect">
             <a:avLst/>
@@ -3128,9 +5025,9 @@
           <a:lstStyle xmlns:a="http://schemas.openxmlformats.org/drawingml/2006/main"/>
           <a:p xmlns:a="http://schemas.openxmlformats.org/drawingml/2006/main">
             <a:pPr>
-              <a:defRPr sz="2100" b="0">
-                <a:solidFill>
-                  <a:srgbClr val="233542"/>
+              <a:defRPr sz="2700" b="1">
+                <a:solidFill>
+                  <a:srgbClr val="157C87"/>
                 </a:solidFill>
                 <a:latin typeface="Arial"/>
                 <a:ea typeface="Arial"/>
@@ -3138,368 +5035,25 @@
               </a:defRPr>
             </a:pPr>
             <a:r>
-              <a:rPr sz="2100" b="0">
-                <a:solidFill>
-                  <a:srgbClr val="233542"/>
+              <a:rPr sz="2700" b="1">
+                <a:solidFill>
+                  <a:srgbClr val="157C87"/>
                 </a:solidFill>
                 <a:latin typeface="Arial"/>
                 <a:ea typeface="Arial"/>
                 <a:cs typeface="Arial"/>
               </a:rPr>
-              <a:t>24 tests check lexical identity while preserving represented information.</a:t>
+              <a:t>163,440 vertices</a:t>
             </a:r>
           </a:p>
         </p:txBody>
       </p:sp>
-      <p:graphicFrame>
-        <p:nvGraphicFramePr>
-          <p:cNvPr id="8" name=""/>
-          <p:cNvGraphicFramePr/>
-          <p:nvPr/>
-        </p:nvGraphicFramePr>
-        <p:xfrm>
-          <a:off xmlns:a="http://schemas.openxmlformats.org/drawingml/2006/main" x="609600" y="2400300"/>
-          <a:ext xmlns:a="http://schemas.openxmlformats.org/drawingml/2006/main" cx="10972800" cy="2667000"/>
-        </p:xfrm>
-        <a:graphic xmlns:a="http://schemas.openxmlformats.org/drawingml/2006/main">
-          <a:graphicData uri="http://schemas.openxmlformats.org/drawingml/2006/table">
-            <a:tbl>
-              <a:tblPr/>
-              <a:tblGrid>
-                <a:gridCol w="2238375"/>
-                <a:gridCol w="4362450"/>
-                <a:gridCol w="4371975"/>
-              </a:tblGrid>
-              <a:tr h="666750">
-                <a:tc>
-                  <a:txBody>
-                    <a:bodyPr>
-                      <a:noAutofit/>
-                    </a:bodyPr>
-                    <a:lstStyle/>
-                    <a:p>
-                      <a:r>
-                        <a:rPr sz="1725" b="1">
-                          <a:solidFill>
-                            <a:srgbClr val="FFFFFF"/>
-                          </a:solidFill>
-                          <a:latin typeface="Arial"/>
-                          <a:ea typeface="Arial"/>
-                          <a:cs typeface="Arial"/>
-                        </a:rPr>
-                        <a:t>WKT fragment</a:t>
-                      </a:r>
-                    </a:p>
-                  </a:txBody>
-                  <a:tcPr marL="91440" marR="91440" marT="45720" marB="45720">
-                    <a:solidFill>
-                      <a:srgbClr val="233542"/>
-                    </a:solidFill>
-                  </a:tcPr>
-                </a:tc>
-                <a:tc>
-                  <a:txBody>
-                    <a:bodyPr>
-                      <a:noAutofit/>
-                    </a:bodyPr>
-                    <a:lstStyle/>
-                    <a:p>
-                      <a:r>
-                        <a:rPr sz="1725" b="1">
-                          <a:solidFill>
-                            <a:srgbClr val="FFFFFF"/>
-                          </a:solidFill>
-                          <a:latin typeface="Arial"/>
-                          <a:ea typeface="Arial"/>
-                          <a:cs typeface="Arial"/>
-                        </a:rPr>
-                        <a:t>Before</a:t>
-                      </a:r>
-                    </a:p>
-                  </a:txBody>
-                  <a:tcPr marL="91440" marR="91440" marT="45720" marB="45720">
-                    <a:solidFill>
-                      <a:srgbClr val="233542"/>
-                    </a:solidFill>
-                  </a:tcPr>
-                </a:tc>
-                <a:tc>
-                  <a:txBody>
-                    <a:bodyPr>
-                      <a:noAutofit/>
-                    </a:bodyPr>
-                    <a:lstStyle/>
-                    <a:p>
-                      <a:r>
-                        <a:rPr sz="1725" b="1">
-                          <a:solidFill>
-                            <a:srgbClr val="FFFFFF"/>
-                          </a:solidFill>
-                          <a:latin typeface="Arial"/>
-                          <a:ea typeface="Arial"/>
-                          <a:cs typeface="Arial"/>
-                        </a:rPr>
-                        <a:t>Normalized</a:t>
-                      </a:r>
-                    </a:p>
-                  </a:txBody>
-                  <a:tcPr marL="91440" marR="91440" marT="45720" marB="45720">
-                    <a:solidFill>
-                      <a:srgbClr val="233542"/>
-                    </a:solidFill>
-                  </a:tcPr>
-                </a:tc>
-              </a:tr>
-              <a:tr h="666750">
-                <a:tc>
-                  <a:txBody>
-                    <a:bodyPr>
-                      <a:noAutofit/>
-                    </a:bodyPr>
-                    <a:lstStyle/>
-                    <a:p>
-                      <a:r>
-                        <a:rPr sz="1725" b="0">
-                          <a:solidFill>
-                            <a:srgbClr val="233542"/>
-                          </a:solidFill>
-                          <a:latin typeface="Arial"/>
-                          <a:ea typeface="Arial"/>
-                          <a:cs typeface="Arial"/>
-                        </a:rPr>
-                        <a:t>Numeric spelling</a:t>
-                      </a:r>
-                    </a:p>
-                  </a:txBody>
-                  <a:tcPr marL="91440" marR="91440" marT="45720" marB="45720">
-                    <a:solidFill>
-                      <a:srgbClr val="FFFFFF"/>
-                    </a:solidFill>
-                  </a:tcPr>
-                </a:tc>
-                <a:tc>
-                  <a:txBody>
-                    <a:bodyPr>
-                      <a:noAutofit/>
-                    </a:bodyPr>
-                    <a:lstStyle/>
-                    <a:p>
-                      <a:r>
-                        <a:rPr sz="1725" b="0">
-                          <a:solidFill>
-                            <a:srgbClr val="233542"/>
-                          </a:solidFill>
-                          <a:latin typeface="Arial"/>
-                          <a:ea typeface="Arial"/>
-                          <a:cs typeface="Arial"/>
-                        </a:rPr>
-                        <a:t>LENGTHUNIT["metre",1E0]</a:t>
-                      </a:r>
-                    </a:p>
-                  </a:txBody>
-                  <a:tcPr marL="91440" marR="91440" marT="45720" marB="45720">
-                    <a:solidFill>
-                      <a:srgbClr val="FFFFFF"/>
-                    </a:solidFill>
-                  </a:tcPr>
-                </a:tc>
-                <a:tc>
-                  <a:txBody>
-                    <a:bodyPr>
-                      <a:noAutofit/>
-                    </a:bodyPr>
-                    <a:lstStyle/>
-                    <a:p>
-                      <a:r>
-                        <a:rPr sz="1725" b="0">
-                          <a:solidFill>
-                            <a:srgbClr val="233542"/>
-                          </a:solidFill>
-                          <a:latin typeface="Arial"/>
-                          <a:ea typeface="Arial"/>
-                          <a:cs typeface="Arial"/>
-                        </a:rPr>
-                        <a:t>LENGTHUNIT["metre",1.0]</a:t>
-                      </a:r>
-                    </a:p>
-                  </a:txBody>
-                  <a:tcPr marL="91440" marR="91440" marT="45720" marB="45720">
-                    <a:solidFill>
-                      <a:srgbClr val="FFFFFF"/>
-                    </a:solidFill>
-                  </a:tcPr>
-                </a:tc>
-              </a:tr>
-              <a:tr h="666750">
-                <a:tc>
-                  <a:txBody>
-                    <a:bodyPr>
-                      <a:noAutofit/>
-                    </a:bodyPr>
-                    <a:lstStyle/>
-                    <a:p>
-                      <a:r>
-                        <a:rPr sz="1725" b="0">
-                          <a:solidFill>
-                            <a:srgbClr val="233542"/>
-                          </a:solidFill>
-                          <a:latin typeface="Arial"/>
-                          <a:ea typeface="Arial"/>
-                          <a:cs typeface="Arial"/>
-                        </a:rPr>
-                        <a:t>Exact decimal</a:t>
-                      </a:r>
-                    </a:p>
-                  </a:txBody>
-                  <a:tcPr marL="91440" marR="91440" marT="45720" marB="45720">
-                    <a:solidFill>
-                      <a:srgbClr val="FFFFFF"/>
-                    </a:solidFill>
-                  </a:tcPr>
-                </a:tc>
-                <a:tc>
-                  <a:txBody>
-                    <a:bodyPr>
-                      <a:noAutofit/>
-                    </a:bodyPr>
-                    <a:lstStyle/>
-                    <a:p>
-                      <a:r>
-                        <a:rPr sz="1725" b="0">
-                          <a:solidFill>
-                            <a:srgbClr val="233542"/>
-                          </a:solidFill>
-                          <a:latin typeface="Arial"/>
-                          <a:ea typeface="Arial"/>
-                          <a:cs typeface="Arial"/>
-                        </a:rPr>
-                        <a:t>6378137.12345678912345</a:t>
-                      </a:r>
-                    </a:p>
-                  </a:txBody>
-                  <a:tcPr marL="91440" marR="91440" marT="45720" marB="45720">
-                    <a:solidFill>
-                      <a:srgbClr val="FFFFFF"/>
-                    </a:solidFill>
-                  </a:tcPr>
-                </a:tc>
-                <a:tc>
-                  <a:txBody>
-                    <a:bodyPr>
-                      <a:noAutofit/>
-                    </a:bodyPr>
-                    <a:lstStyle/>
-                    <a:p>
-                      <a:r>
-                        <a:rPr sz="1725" b="0">
-                          <a:solidFill>
-                            <a:srgbClr val="233542"/>
-                          </a:solidFill>
-                          <a:latin typeface="Arial"/>
-                          <a:ea typeface="Arial"/>
-                          <a:cs typeface="Arial"/>
-                        </a:rPr>
-                        <a:t>6378137.12345678912345</a:t>
-                      </a:r>
-                    </a:p>
-                  </a:txBody>
-                  <a:tcPr marL="91440" marR="91440" marT="45720" marB="45720">
-                    <a:solidFill>
-                      <a:srgbClr val="FFFFFF"/>
-                    </a:solidFill>
-                  </a:tcPr>
-                </a:tc>
-              </a:tr>
-              <a:tr h="666750">
-                <a:tc>
-                  <a:txBody>
-                    <a:bodyPr>
-                      <a:noAutofit/>
-                    </a:bodyPr>
-                    <a:lstStyle/>
-                    <a:p>
-                      <a:r>
-                        <a:rPr sz="1725" b="0">
-                          <a:solidFill>
-                            <a:srgbClr val="233542"/>
-                          </a:solidFill>
-                          <a:latin typeface="Arial"/>
-                          <a:ea typeface="Arial"/>
-                          <a:cs typeface="Arial"/>
-                        </a:rPr>
-                        <a:t>Quoted content</a:t>
-                      </a:r>
-                    </a:p>
-                  </a:txBody>
-                  <a:tcPr marL="91440" marR="91440" marT="45720" marB="45720">
-                    <a:solidFill>
-                      <a:srgbClr val="FFFFFF"/>
-                    </a:solidFill>
-                  </a:tcPr>
-                </a:tc>
-                <a:tc>
-                  <a:txBody>
-                    <a:bodyPr>
-                      <a:noAutofit/>
-                    </a:bodyPr>
-                    <a:lstStyle/>
-                    <a:p>
-                      <a:r>
-                        <a:rPr sz="1725" b="0">
-                          <a:solidFill>
-                            <a:srgbClr val="233542"/>
-                          </a:solidFill>
-                          <a:latin typeface="Arial"/>
-                          <a:ea typeface="Arial"/>
-                          <a:cs typeface="Arial"/>
-                        </a:rPr>
-                        <a:t>REMARK["Keep  spaces"]</a:t>
-                      </a:r>
-                    </a:p>
-                  </a:txBody>
-                  <a:tcPr marL="91440" marR="91440" marT="45720" marB="45720">
-                    <a:solidFill>
-                      <a:srgbClr val="FFFFFF"/>
-                    </a:solidFill>
-                  </a:tcPr>
-                </a:tc>
-                <a:tc>
-                  <a:txBody>
-                    <a:bodyPr>
-                      <a:noAutofit/>
-                    </a:bodyPr>
-                    <a:lstStyle/>
-                    <a:p>
-                      <a:r>
-                        <a:rPr sz="1725" b="0">
-                          <a:solidFill>
-                            <a:srgbClr val="233542"/>
-                          </a:solidFill>
-                          <a:latin typeface="Arial"/>
-                          <a:ea typeface="Arial"/>
-                          <a:cs typeface="Arial"/>
-                        </a:rPr>
-                        <a:t>REMARK["Keep  spaces"]</a:t>
-                      </a:r>
-                    </a:p>
-                  </a:txBody>
-                  <a:tcPr marL="91440" marR="91440" marT="45720" marB="45720">
-                    <a:solidFill>
-                      <a:srgbClr val="FFFFFF"/>
-                    </a:solidFill>
-                  </a:tcPr>
-                </a:tc>
-              </a:tr>
-            </a:tbl>
-          </a:graphicData>
-        </a:graphic>
-      </p:graphicFrame>
       <p:sp>
         <p:nvSpPr>
           <p:cNvPr id="4" name="">
             <a:extLst xmlns:a="http://schemas.openxmlformats.org/drawingml/2006/main">
               <a:ext uri="{FF2B5EF4-FFF2-40B4-BE49-F238E27FC236}">
-                <a16:creationId xmlns:a16="http://schemas.microsoft.com/office/drawing/2014/main" id="{FEFCD270-81A6-45D6-92FC-817B42FE48A8}"/>
+                <a16:creationId xmlns:a16="http://schemas.microsoft.com/office/drawing/2014/main" id="{22ED5F05-AA62-46E1-AE3D-A607F5FECBD1}"/>
               </a:ext>
             </a:extLst>
           </p:cNvPr>
@@ -3510,8 +5064,8 @@
         </p:nvSpPr>
         <p:spPr>
           <a:xfrm xmlns:a="http://schemas.openxmlformats.org/drawingml/2006/main">
-            <a:off x="609600" y="5381625"/>
-            <a:ext cx="10972800" cy="666750"/>
+            <a:off x="8239125" y="2638425"/>
+            <a:ext cx="3333750" cy="2085975"/>
           </a:xfrm>
           <a:prstGeom xmlns:a="http://schemas.openxmlformats.org/drawingml/2006/main" prst="rect">
             <a:avLst/>
@@ -3530,7 +5084,7 @@
             <a:pPr>
               <a:defRPr sz="2025" b="0">
                 <a:solidFill>
-                  <a:srgbClr val="233542"/>
+                  <a:srgbClr val="213744"/>
                 </a:solidFill>
                 <a:latin typeface="Arial"/>
                 <a:ea typeface="Arial"/>
@@ -3540,13 +5094,82 @@
             <a:r>
               <a:rPr sz="2025" b="0">
                 <a:solidFill>
-                  <a:srgbClr val="233542"/>
+                  <a:srgbClr val="213744"/>
                 </a:solidFill>
                 <a:latin typeface="Arial"/>
                 <a:ea typeface="Arial"/>
                 <a:cs typeface="Arial"/>
               </a:rPr>
-              <a:t>Different display names retain different tokens. CRS equivalence requires a separate engine comparison.</a:t>
+              <a:t>C++ pointwise results</a:t>
+            </a:r>
+          </a:p>
+          <a:p xmlns:a="http://schemas.openxmlformats.org/drawingml/2006/main">
+            <a:pPr>
+              <a:defRPr sz="2025" b="0">
+                <a:solidFill>
+                  <a:srgbClr val="213744"/>
+                </a:solidFill>
+                <a:latin typeface="Arial"/>
+                <a:ea typeface="Arial"/>
+                <a:cs typeface="Arial"/>
+              </a:defRPr>
+            </a:pPr>
+            <a:r>
+              <a:rPr sz="2025" b="0">
+                <a:solidFill>
+                  <a:srgbClr val="213744"/>
+                </a:solidFill>
+                <a:latin typeface="Arial"/>
+                <a:ea typeface="Arial"/>
+                <a:cs typeface="Arial"/>
+              </a:rPr>
+              <a:t>Fresh USD export readers</a:t>
+            </a:r>
+          </a:p>
+          <a:p xmlns:a="http://schemas.openxmlformats.org/drawingml/2006/main">
+            <a:pPr>
+              <a:defRPr sz="2025" b="0">
+                <a:solidFill>
+                  <a:srgbClr val="213744"/>
+                </a:solidFill>
+                <a:latin typeface="Arial"/>
+                <a:ea typeface="Arial"/>
+                <a:cs typeface="Arial"/>
+              </a:defRPr>
+            </a:pPr>
+            <a:r>
+              <a:rPr sz="2025" b="0">
+                <a:solidFill>
+                  <a:srgbClr val="213744"/>
+                </a:solidFill>
+                <a:latin typeface="Arial"/>
+                <a:ea typeface="Arial"/>
+                <a:cs typeface="Arial"/>
+              </a:rPr>
+              <a:t>Hydra points and transforms</a:t>
+            </a:r>
+          </a:p>
+          <a:p xmlns:a="http://schemas.openxmlformats.org/drawingml/2006/main">
+            <a:pPr>
+              <a:defRPr sz="2025" b="0">
+                <a:solidFill>
+                  <a:srgbClr val="213744"/>
+                </a:solidFill>
+                <a:latin typeface="Arial"/>
+                <a:ea typeface="Arial"/>
+                <a:cs typeface="Arial"/>
+              </a:defRPr>
+            </a:pPr>
+            <a:r>
+              <a:rPr sz="2025" b="0">
+                <a:solidFill>
+                  <a:srgbClr val="213744"/>
+                </a:solidFill>
+                <a:latin typeface="Arial"/>
+                <a:ea typeface="Arial"/>
+                <a:cs typeface="Arial"/>
+              </a:rPr>
+              <a:t>Native Storm color output</a:t>
             </a:r>
           </a:p>
         </p:txBody>
@@ -3556,7 +5179,7 @@
           <p:cNvPr id="5" name="">
             <a:extLst xmlns:a="http://schemas.openxmlformats.org/drawingml/2006/main">
               <a:ext uri="{FF2B5EF4-FFF2-40B4-BE49-F238E27FC236}">
-                <a16:creationId xmlns:a16="http://schemas.microsoft.com/office/drawing/2014/main" id="{45F7D35E-9A2E-47F4-878C-478D8FA04527}"/>
+                <a16:creationId xmlns:a16="http://schemas.microsoft.com/office/drawing/2014/main" id="{2909EF76-FD20-47BB-AD00-C9B597419E55}"/>
               </a:ext>
             </a:extLst>
           </p:cNvPr>
@@ -3567,8 +5190,8 @@
         </p:nvSpPr>
         <p:spPr>
           <a:xfrm xmlns:a="http://schemas.openxmlformats.org/drawingml/2006/main">
-            <a:off x="609600" y="6267450"/>
-            <a:ext cx="10972800" cy="400050"/>
+            <a:off x="8239125" y="5076825"/>
+            <a:ext cx="3333750" cy="752475"/>
           </a:xfrm>
           <a:prstGeom xmlns:a="http://schemas.openxmlformats.org/drawingml/2006/main" prst="rect">
             <a:avLst/>
@@ -3585,9 +5208,9 @@
           <a:lstStyle xmlns:a="http://schemas.openxmlformats.org/drawingml/2006/main"/>
           <a:p xmlns:a="http://schemas.openxmlformats.org/drawingml/2006/main">
             <a:pPr>
-              <a:defRPr sz="1500" b="0">
-                <a:solidFill>
-                  <a:srgbClr val="233542"/>
+              <a:defRPr sz="1800" b="0">
+                <a:solidFill>
+                  <a:srgbClr val="526B79"/>
                 </a:solidFill>
                 <a:latin typeface="Arial"/>
                 <a:ea typeface="Arial"/>
@@ -3595,15 +5218,95 @@
               </a:defRPr>
             </a:pPr>
             <a:r>
-              <a:rPr sz="1500" b="0">
-                <a:solidFill>
-                  <a:srgbClr val="233542"/>
+              <a:rPr sz="1800" b="0">
+                <a:solidFill>
+                  <a:srgbClr val="526B79"/>
                 </a:solidFill>
                 <a:latin typeface="Arial"/>
                 <a:ea typeface="Arial"/>
                 <a:cs typeface="Arial"/>
               </a:rPr>
-              <a:t>Illustrative fragments from the tested lexical rules. Context-sensitive legacy UNIT aliases are unsupported.</a:t>
+              <a:t>Illustrative plane and markers.</a:t>
+            </a:r>
+          </a:p>
+          <a:p xmlns:a="http://schemas.openxmlformats.org/drawingml/2006/main">
+            <a:pPr>
+              <a:defRPr sz="1800" b="0">
+                <a:solidFill>
+                  <a:srgbClr val="526B79"/>
+                </a:solidFill>
+                <a:latin typeface="Arial"/>
+                <a:ea typeface="Arial"/>
+                <a:cs typeface="Arial"/>
+              </a:defRPr>
+            </a:pPr>
+            <a:r>
+              <a:rPr sz="1800" b="0">
+                <a:solidFill>
+                  <a:srgbClr val="526B79"/>
+                </a:solidFill>
+                <a:latin typeface="Arial"/>
+                <a:ea typeface="Arial"/>
+                <a:cs typeface="Arial"/>
+              </a:rPr>
+              <a:t>No surveyed Paris context.</a:t>
+            </a:r>
+          </a:p>
+        </p:txBody>
+      </p:sp>
+      <p:sp>
+        <p:nvSpPr>
+          <p:cNvPr id="6" name="">
+            <a:extLst xmlns:a="http://schemas.openxmlformats.org/drawingml/2006/main">
+              <a:ext uri="{FF2B5EF4-FFF2-40B4-BE49-F238E27FC236}">
+                <a16:creationId xmlns:a16="http://schemas.microsoft.com/office/drawing/2014/main" id="{DB3E8D27-57B8-4C69-9469-5BFC2D3FC453}"/>
+              </a:ext>
+            </a:extLst>
+          </p:cNvPr>
+          <p:cNvSpPr>
+            <a:spLocks xmlns:a="http://schemas.openxmlformats.org/drawingml/2006/main" noGrp="1"/>
+          </p:cNvSpPr>
+          <p:nvPr/>
+        </p:nvSpPr>
+        <p:spPr>
+          <a:xfrm xmlns:a="http://schemas.openxmlformats.org/drawingml/2006/main">
+            <a:off x="609600" y="6219825"/>
+            <a:ext cx="10972800" cy="485775"/>
+          </a:xfrm>
+          <a:prstGeom xmlns:a="http://schemas.openxmlformats.org/drawingml/2006/main" prst="rect">
+            <a:avLst/>
+          </a:prstGeom>
+          <a:noFill xmlns:a="http://schemas.openxmlformats.org/drawingml/2006/main"/>
+          <a:ln xmlns:a="http://schemas.openxmlformats.org/drawingml/2006/main" w="0">
+            <a:noFill/>
+          </a:ln>
+        </p:spPr>
+        <p:txBody>
+          <a:bodyPr xmlns:a="http://schemas.openxmlformats.org/drawingml/2006/main">
+            <a:noAutofit/>
+          </a:bodyPr>
+          <a:lstStyle xmlns:a="http://schemas.openxmlformats.org/drawingml/2006/main"/>
+          <a:p xmlns:a="http://schemas.openxmlformats.org/drawingml/2006/main">
+            <a:pPr>
+              <a:defRPr sz="1800" b="0">
+                <a:solidFill>
+                  <a:srgbClr val="526B79"/>
+                </a:solidFill>
+                <a:latin typeface="Arial"/>
+                <a:ea typeface="Arial"/>
+                <a:cs typeface="Arial"/>
+              </a:defRPr>
+            </a:pPr>
+            <a:r>
+              <a:rPr sz="1800" b="0">
+                <a:solidFill>
+                  <a:srgbClr val="526B79"/>
+                </a:solidFill>
+                <a:latin typeface="Arial"/>
+                <a:ea typeface="Arial"/>
+                <a:cs typeface="Arial"/>
+              </a:rPr>
+              <a:t>The renderer consumes an ordinary resolved export. This run does not install a live geospatial scene-index filter.</a:t>
             </a:r>
           </a:p>
         </p:txBody>
@@ -3611,7 +5314,7 @@
     </p:spTree>
     <p:extLst>
       <p:ext uri="{BB962C8B-B14F-4D97-AF65-F5344CB8AC3E}">
-        <p14:creationId xmlns:p14="http://schemas.microsoft.com/office/powerpoint/2010/main" val="343420008"/>
+        <p14:creationId xmlns:p14="http://schemas.microsoft.com/office/powerpoint/2010/main" val="423970486"/>
       </p:ext>
     </p:extLst>
   </p:cSld>
@@ -3639,10 +5342,10 @@
       </p:grpSpPr>
       <p:sp>
         <p:nvSpPr>
-          <p:cNvPr id="5" name="">
+          <p:cNvPr id="7" name="">
             <a:extLst xmlns:a="http://schemas.openxmlformats.org/drawingml/2006/main">
               <a:ext uri="{FF2B5EF4-FFF2-40B4-BE49-F238E27FC236}">
-                <a16:creationId xmlns:a16="http://schemas.microsoft.com/office/drawing/2014/main" id="{6AC68655-A247-4C9B-8F67-9A8BA099889E}"/>
+                <a16:creationId xmlns:a16="http://schemas.microsoft.com/office/drawing/2014/main" id="{5049A040-A04B-4A8E-95A9-71017F61A1F8}"/>
               </a:ext>
             </a:extLst>
           </p:cNvPr>
@@ -3653,8 +5356,8 @@
         </p:nvSpPr>
         <p:spPr>
           <a:xfrm xmlns:a="http://schemas.openxmlformats.org/drawingml/2006/main">
-            <a:off x="609600" y="381000"/>
-            <a:ext cx="10972800" cy="952500"/>
+            <a:off x="609600" y="333375"/>
+            <a:ext cx="10972800" cy="1047750"/>
           </a:xfrm>
           <a:prstGeom xmlns:a="http://schemas.openxmlformats.org/drawingml/2006/main" prst="rect">
             <a:avLst/>
@@ -3673,7 +5376,7 @@
             <a:pPr>
               <a:defRPr sz="3150" b="1">
                 <a:solidFill>
-                  <a:srgbClr val="233542"/>
+                  <a:srgbClr val="213744"/>
                 </a:solidFill>
                 <a:latin typeface="Arial"/>
                 <a:ea typeface="Arial"/>
@@ -3683,471 +5386,45 @@
             <a:r>
               <a:rPr sz="3150" b="1">
                 <a:solidFill>
-                  <a:srgbClr val="233542"/>
+                  <a:srgbClr val="213744"/>
                 </a:solidFill>
                 <a:latin typeface="Arial"/>
                 <a:ea typeface="Arial"/>
                 <a:cs typeface="Arial"/>
               </a:rPr>
-              <a:t>Executed reader coverage</a:t>
+              <a:t>Colorado survey geometry in a calibrated site</a:t>
             </a:r>
           </a:p>
         </p:txBody>
       </p:sp>
-      <p:graphicFrame>
-        <p:nvGraphicFramePr>
-          <p:cNvPr id="6" name=""/>
-          <p:cNvGraphicFramePr/>
+      <p:pic>
+        <p:nvPicPr>
+          <p:cNvPr id="8" name=""/>
+          <p:cNvPicPr>
+            <a:picLocks xmlns:a="http://schemas.openxmlformats.org/drawingml/2006/main" noChangeAspect="1"/>
+          </p:cNvPicPr>
           <p:nvPr/>
-        </p:nvGraphicFramePr>
-        <p:xfrm>
-          <a:off xmlns:a="http://schemas.openxmlformats.org/drawingml/2006/main" x="609600" y="1524000"/>
-          <a:ext xmlns:a="http://schemas.openxmlformats.org/drawingml/2006/main" cx="10972800" cy="2667000"/>
-        </p:xfrm>
-        <a:graphic xmlns:a="http://schemas.openxmlformats.org/drawingml/2006/main">
-          <a:graphicData uri="http://schemas.openxmlformats.org/drawingml/2006/table">
-            <a:tbl>
-              <a:tblPr/>
-              <a:tblGrid>
-                <a:gridCol w="4714875"/>
-                <a:gridCol w="2085975"/>
-                <a:gridCol w="2085975"/>
-                <a:gridCol w="2085975"/>
-              </a:tblGrid>
-              <a:tr h="666750">
-                <a:tc>
-                  <a:txBody>
-                    <a:bodyPr>
-                      <a:noAutofit/>
-                    </a:bodyPr>
-                    <a:lstStyle/>
-                    <a:p>
-                      <a:r>
-                        <a:rPr sz="1875" b="1">
-                          <a:solidFill>
-                            <a:srgbClr val="FFFFFF"/>
-                          </a:solidFill>
-                          <a:latin typeface="Arial"/>
-                          <a:ea typeface="Arial"/>
-                          <a:cs typeface="Arial"/>
-                        </a:rPr>
-                        <a:t>Control family</a:t>
-                      </a:r>
-                    </a:p>
-                  </a:txBody>
-                  <a:tcPr marL="91440" marR="91440" marT="45720" marB="45720">
-                    <a:solidFill>
-                      <a:srgbClr val="233542"/>
-                    </a:solidFill>
-                  </a:tcPr>
-                </a:tc>
-                <a:tc>
-                  <a:txBody>
-                    <a:bodyPr>
-                      <a:noAutofit/>
-                    </a:bodyPr>
-                    <a:lstStyle/>
-                    <a:p>
-                      <a:r>
-                        <a:rPr sz="1875" b="1">
-                          <a:solidFill>
-                            <a:srgbClr val="FFFFFF"/>
-                          </a:solidFill>
-                          <a:latin typeface="Arial"/>
-                          <a:ea typeface="Arial"/>
-                          <a:cs typeface="Arial"/>
-                        </a:rPr>
-                        <a:t>Cases per reader</a:t>
-                      </a:r>
-                    </a:p>
-                  </a:txBody>
-                  <a:tcPr marL="91440" marR="91440" marT="45720" marB="45720">
-                    <a:solidFill>
-                      <a:srgbClr val="233542"/>
-                    </a:solidFill>
-                  </a:tcPr>
-                </a:tc>
-                <a:tc>
-                  <a:txBody>
-                    <a:bodyPr>
-                      <a:noAutofit/>
-                    </a:bodyPr>
-                    <a:lstStyle/>
-                    <a:p>
-                      <a:r>
-                        <a:rPr sz="1875" b="1">
-                          <a:solidFill>
-                            <a:srgbClr val="FFFFFF"/>
-                          </a:solidFill>
-                          <a:latin typeface="Arial"/>
-                          <a:ea typeface="Arial"/>
-                          <a:cs typeface="Arial"/>
-                        </a:rPr>
-                        <a:t>Queries per reader</a:t>
-                      </a:r>
-                    </a:p>
-                  </a:txBody>
-                  <a:tcPr marL="91440" marR="91440" marT="45720" marB="45720">
-                    <a:solidFill>
-                      <a:srgbClr val="233542"/>
-                    </a:solidFill>
-                  </a:tcPr>
-                </a:tc>
-                <a:tc>
-                  <a:txBody>
-                    <a:bodyPr>
-                      <a:noAutofit/>
-                    </a:bodyPr>
-                    <a:lstStyle/>
-                    <a:p>
-                      <a:r>
-                        <a:rPr sz="1875" b="1">
-                          <a:solidFill>
-                            <a:srgbClr val="FFFFFF"/>
-                          </a:solidFill>
-                          <a:latin typeface="Arial"/>
-                          <a:ea typeface="Arial"/>
-                          <a:cs typeface="Arial"/>
-                        </a:rPr>
-                        <a:t>Expected failures</a:t>
-                      </a:r>
-                    </a:p>
-                  </a:txBody>
-                  <a:tcPr marL="91440" marR="91440" marT="45720" marB="45720">
-                    <a:solidFill>
-                      <a:srgbClr val="233542"/>
-                    </a:solidFill>
-                  </a:tcPr>
-                </a:tc>
-              </a:tr>
-              <a:tr h="666750">
-                <a:tc>
-                  <a:txBody>
-                    <a:bodyPr>
-                      <a:noAutofit/>
-                    </a:bodyPr>
-                    <a:lstStyle/>
-                    <a:p>
-                      <a:r>
-                        <a:rPr sz="1875" b="0">
-                          <a:solidFill>
-                            <a:srgbClr val="233542"/>
-                          </a:solidFill>
-                          <a:latin typeface="Arial"/>
-                          <a:ea typeface="Arial"/>
-                          <a:cs typeface="Arial"/>
-                        </a:rPr>
-                        <a:t>Binding and composition</a:t>
-                      </a:r>
-                    </a:p>
-                  </a:txBody>
-                  <a:tcPr marL="91440" marR="91440" marT="45720" marB="45720">
-                    <a:solidFill>
-                      <a:srgbClr val="FFFFFF"/>
-                    </a:solidFill>
-                  </a:tcPr>
-                </a:tc>
-                <a:tc>
-                  <a:txBody>
-                    <a:bodyPr>
-                      <a:noAutofit/>
-                    </a:bodyPr>
-                    <a:lstStyle/>
-                    <a:p>
-                      <a:r>
-                        <a:rPr sz="1875" b="0">
-                          <a:solidFill>
-                            <a:srgbClr val="233542"/>
-                          </a:solidFill>
-                          <a:latin typeface="Arial"/>
-                          <a:ea typeface="Arial"/>
-                          <a:cs typeface="Arial"/>
-                        </a:rPr>
-                        <a:t>12</a:t>
-                      </a:r>
-                    </a:p>
-                  </a:txBody>
-                  <a:tcPr marL="91440" marR="91440" marT="45720" marB="45720">
-                    <a:solidFill>
-                      <a:srgbClr val="FFFFFF"/>
-                    </a:solidFill>
-                  </a:tcPr>
-                </a:tc>
-                <a:tc>
-                  <a:txBody>
-                    <a:bodyPr>
-                      <a:noAutofit/>
-                    </a:bodyPr>
-                    <a:lstStyle/>
-                    <a:p>
-                      <a:r>
-                        <a:rPr sz="1875" b="0">
-                          <a:solidFill>
-                            <a:srgbClr val="233542"/>
-                          </a:solidFill>
-                          <a:latin typeface="Arial"/>
-                          <a:ea typeface="Arial"/>
-                          <a:cs typeface="Arial"/>
-                        </a:rPr>
-                        <a:t>19</a:t>
-                      </a:r>
-                    </a:p>
-                  </a:txBody>
-                  <a:tcPr marL="91440" marR="91440" marT="45720" marB="45720">
-                    <a:solidFill>
-                      <a:srgbClr val="FFFFFF"/>
-                    </a:solidFill>
-                  </a:tcPr>
-                </a:tc>
-                <a:tc>
-                  <a:txBody>
-                    <a:bodyPr>
-                      <a:noAutofit/>
-                    </a:bodyPr>
-                    <a:lstStyle/>
-                    <a:p>
-                      <a:r>
-                        <a:rPr sz="1875" b="0">
-                          <a:solidFill>
-                            <a:srgbClr val="233542"/>
-                          </a:solidFill>
-                          <a:latin typeface="Arial"/>
-                          <a:ea typeface="Arial"/>
-                          <a:cs typeface="Arial"/>
-                        </a:rPr>
-                        <a:t>6</a:t>
-                      </a:r>
-                    </a:p>
-                  </a:txBody>
-                  <a:tcPr marL="91440" marR="91440" marT="45720" marB="45720">
-                    <a:solidFill>
-                      <a:srgbClr val="FFFFFF"/>
-                    </a:solidFill>
-                  </a:tcPr>
-                </a:tc>
-              </a:tr>
-              <a:tr h="666750">
-                <a:tc>
-                  <a:txBody>
-                    <a:bodyPr>
-                      <a:noAutofit/>
-                    </a:bodyPr>
-                    <a:lstStyle/>
-                    <a:p>
-                      <a:r>
-                        <a:rPr sz="1875" b="0">
-                          <a:solidFill>
-                            <a:srgbClr val="233542"/>
-                          </a:solidFill>
-                          <a:latin typeface="Arial"/>
-                          <a:ea typeface="Arial"/>
-                          <a:cs typeface="Arial"/>
-                        </a:rPr>
-                        <a:t>Source placement values</a:t>
-                      </a:r>
-                    </a:p>
-                  </a:txBody>
-                  <a:tcPr marL="91440" marR="91440" marT="45720" marB="45720">
-                    <a:solidFill>
-                      <a:srgbClr val="FFFFFF"/>
-                    </a:solidFill>
-                  </a:tcPr>
-                </a:tc>
-                <a:tc>
-                  <a:txBody>
-                    <a:bodyPr>
-                      <a:noAutofit/>
-                    </a:bodyPr>
-                    <a:lstStyle/>
-                    <a:p>
-                      <a:r>
-                        <a:rPr sz="1875" b="0">
-                          <a:solidFill>
-                            <a:srgbClr val="233542"/>
-                          </a:solidFill>
-                          <a:latin typeface="Arial"/>
-                          <a:ea typeface="Arial"/>
-                          <a:cs typeface="Arial"/>
-                        </a:rPr>
-                        <a:t>12</a:t>
-                      </a:r>
-                    </a:p>
-                  </a:txBody>
-                  <a:tcPr marL="91440" marR="91440" marT="45720" marB="45720">
-                    <a:solidFill>
-                      <a:srgbClr val="FFFFFF"/>
-                    </a:solidFill>
-                  </a:tcPr>
-                </a:tc>
-                <a:tc>
-                  <a:txBody>
-                    <a:bodyPr>
-                      <a:noAutofit/>
-                    </a:bodyPr>
-                    <a:lstStyle/>
-                    <a:p>
-                      <a:r>
-                        <a:rPr sz="1875" b="0">
-                          <a:solidFill>
-                            <a:srgbClr val="233542"/>
-                          </a:solidFill>
-                          <a:latin typeface="Arial"/>
-                          <a:ea typeface="Arial"/>
-                          <a:cs typeface="Arial"/>
-                        </a:rPr>
-                        <a:t>12</a:t>
-                      </a:r>
-                    </a:p>
-                  </a:txBody>
-                  <a:tcPr marL="91440" marR="91440" marT="45720" marB="45720">
-                    <a:solidFill>
-                      <a:srgbClr val="FFFFFF"/>
-                    </a:solidFill>
-                  </a:tcPr>
-                </a:tc>
-                <a:tc>
-                  <a:txBody>
-                    <a:bodyPr>
-                      <a:noAutofit/>
-                    </a:bodyPr>
-                    <a:lstStyle/>
-                    <a:p>
-                      <a:r>
-                        <a:rPr sz="1875" b="0">
-                          <a:solidFill>
-                            <a:srgbClr val="233542"/>
-                          </a:solidFill>
-                          <a:latin typeface="Arial"/>
-                          <a:ea typeface="Arial"/>
-                          <a:cs typeface="Arial"/>
-                        </a:rPr>
-                        <a:t>6</a:t>
-                      </a:r>
-                    </a:p>
-                  </a:txBody>
-                  <a:tcPr marL="91440" marR="91440" marT="45720" marB="45720">
-                    <a:solidFill>
-                      <a:srgbClr val="FFFFFF"/>
-                    </a:solidFill>
-                  </a:tcPr>
-                </a:tc>
-              </a:tr>
-              <a:tr h="666750">
-                <a:tc>
-                  <a:txBody>
-                    <a:bodyPr>
-                      <a:noAutofit/>
-                    </a:bodyPr>
-                    <a:lstStyle/>
-                    <a:p>
-                      <a:r>
-                        <a:rPr sz="1875" b="0">
-                          <a:solidFill>
-                            <a:srgbClr val="233542"/>
-                          </a:solidFill>
-                          <a:latin typeface="Arial"/>
-                          <a:ea typeface="Arial"/>
-                          <a:cs typeface="Arial"/>
-                        </a:rPr>
-                        <a:t>Direct anchor-origin coordinates</a:t>
-                      </a:r>
-                    </a:p>
-                  </a:txBody>
-                  <a:tcPr marL="91440" marR="91440" marT="45720" marB="45720">
-                    <a:solidFill>
-                      <a:srgbClr val="FFFFFF"/>
-                    </a:solidFill>
-                  </a:tcPr>
-                </a:tc>
-                <a:tc>
-                  <a:txBody>
-                    <a:bodyPr>
-                      <a:noAutofit/>
-                    </a:bodyPr>
-                    <a:lstStyle/>
-                    <a:p>
-                      <a:r>
-                        <a:rPr sz="1875" b="0">
-                          <a:solidFill>
-                            <a:srgbClr val="233542"/>
-                          </a:solidFill>
-                          <a:latin typeface="Arial"/>
-                          <a:ea typeface="Arial"/>
-                          <a:cs typeface="Arial"/>
-                        </a:rPr>
-                        <a:t>13</a:t>
-                      </a:r>
-                    </a:p>
-                  </a:txBody>
-                  <a:tcPr marL="91440" marR="91440" marT="45720" marB="45720">
-                    <a:solidFill>
-                      <a:srgbClr val="FFFFFF"/>
-                    </a:solidFill>
-                  </a:tcPr>
-                </a:tc>
-                <a:tc>
-                  <a:txBody>
-                    <a:bodyPr>
-                      <a:noAutofit/>
-                    </a:bodyPr>
-                    <a:lstStyle/>
-                    <a:p>
-                      <a:r>
-                        <a:rPr sz="1875" b="0">
-                          <a:solidFill>
-                            <a:srgbClr val="233542"/>
-                          </a:solidFill>
-                          <a:latin typeface="Arial"/>
-                          <a:ea typeface="Arial"/>
-                          <a:cs typeface="Arial"/>
-                        </a:rPr>
-                        <a:t>137</a:t>
-                      </a:r>
-                    </a:p>
-                  </a:txBody>
-                  <a:tcPr marL="91440" marR="91440" marT="45720" marB="45720">
-                    <a:solidFill>
-                      <a:srgbClr val="FFFFFF"/>
-                    </a:solidFill>
-                  </a:tcPr>
-                </a:tc>
-                <a:tc>
-                  <a:txBody>
-                    <a:bodyPr>
-                      <a:noAutofit/>
-                    </a:bodyPr>
-                    <a:lstStyle/>
-                    <a:p>
-                      <a:r>
-                        <a:rPr sz="1875" b="0">
-                          <a:solidFill>
-                            <a:srgbClr val="233542"/>
-                          </a:solidFill>
-                          <a:latin typeface="Arial"/>
-                          <a:ea typeface="Arial"/>
-                          <a:cs typeface="Arial"/>
-                        </a:rPr>
-                        <a:t>5</a:t>
-                      </a:r>
-                    </a:p>
-                  </a:txBody>
-                  <a:tcPr marL="91440" marR="91440" marT="45720" marB="45720">
-                    <a:solidFill>
-                      <a:srgbClr val="FFFFFF"/>
-                    </a:solidFill>
-                  </a:tcPr>
-                </a:tc>
-              </a:tr>
-            </a:tbl>
-          </a:graphicData>
-        </a:graphic>
-      </p:graphicFrame>
+        </p:nvPicPr>
+        <p:blipFill>
+          <a:blip xmlns:r="http://schemas.openxmlformats.org/officeDocument/2006/relationships" xmlns:a="http://schemas.openxmlformats.org/drawingml/2006/main" r:embed="Racf75f57d7e341fa"/>
+          <a:stretch xmlns:a="http://schemas.openxmlformats.org/drawingml/2006/main"/>
+        </p:blipFill>
+        <p:spPr>
+          <a:xfrm xmlns:a="http://schemas.openxmlformats.org/drawingml/2006/main">
+            <a:off x="238125" y="1453158"/>
+            <a:ext cx="7753350" cy="4361259"/>
+          </a:xfrm>
+          <a:prstGeom xmlns:a="http://schemas.openxmlformats.org/drawingml/2006/main" prst="rect">
+            <a:avLst/>
+          </a:prstGeom>
+        </p:spPr>
+      </p:pic>
       <p:sp>
         <p:nvSpPr>
           <p:cNvPr id="3" name="">
             <a:extLst xmlns:a="http://schemas.openxmlformats.org/drawingml/2006/main">
               <a:ext uri="{FF2B5EF4-FFF2-40B4-BE49-F238E27FC236}">
-                <a16:creationId xmlns:a16="http://schemas.microsoft.com/office/drawing/2014/main" id="{70B3864F-FEFC-4EC0-A8B7-4659F9066A8B}"/>
+                <a16:creationId xmlns:a16="http://schemas.microsoft.com/office/drawing/2014/main" id="{417DC696-436A-472B-9D49-75EC0AB43452}"/>
               </a:ext>
             </a:extLst>
           </p:cNvPr>
@@ -4158,8 +5435,8 @@
         </p:nvSpPr>
         <p:spPr>
           <a:xfrm xmlns:a="http://schemas.openxmlformats.org/drawingml/2006/main">
-            <a:off x="609600" y="4600575"/>
-            <a:ext cx="10972800" cy="876300"/>
+            <a:off x="8248650" y="1724025"/>
+            <a:ext cx="3324225" cy="600075"/>
           </a:xfrm>
           <a:prstGeom xmlns:a="http://schemas.openxmlformats.org/drawingml/2006/main" prst="rect">
             <a:avLst/>
@@ -4176,9 +5453,9 @@
           <a:lstStyle xmlns:a="http://schemas.openxmlformats.org/drawingml/2006/main"/>
           <a:p xmlns:a="http://schemas.openxmlformats.org/drawingml/2006/main">
             <a:pPr>
-              <a:defRPr sz="2025" b="0">
-                <a:solidFill>
-                  <a:srgbClr val="233542"/>
+              <a:defRPr sz="2700" b="1">
+                <a:solidFill>
+                  <a:srgbClr val="157C87"/>
                 </a:solidFill>
                 <a:latin typeface="Arial"/>
                 <a:ea typeface="Arial"/>
@@ -4186,15 +5463,15 @@
               </a:defRPr>
             </a:pPr>
             <a:r>
-              <a:rPr sz="2025" b="0">
-                <a:solidFill>
-                  <a:srgbClr val="233542"/>
+              <a:rPr sz="2700" b="1">
+                <a:solidFill>
+                  <a:srgbClr val="157C87"/>
                 </a:solidFill>
                 <a:latin typeface="Arial"/>
                 <a:ea typeface="Arial"/>
                 <a:cs typeface="Arial"/>
               </a:rPr>
-              <a:t>Every reader checks the same authored scenes. Direct origins include France projections, Colorado site calibration and analytic ECEF conversions.</a:t>
+              <a:t>14,359 vertices</a:t>
             </a:r>
           </a:p>
         </p:txBody>
@@ -4204,7 +5481,7 @@
           <p:cNvPr id="4" name="">
             <a:extLst xmlns:a="http://schemas.openxmlformats.org/drawingml/2006/main">
               <a:ext uri="{FF2B5EF4-FFF2-40B4-BE49-F238E27FC236}">
-                <a16:creationId xmlns:a16="http://schemas.microsoft.com/office/drawing/2014/main" id="{907B1A33-0781-40F2-B0C4-8C4AB26D0838}"/>
+                <a16:creationId xmlns:a16="http://schemas.microsoft.com/office/drawing/2014/main" id="{39B56DF1-2661-43F9-B3E3-550D4FC5DDEB}"/>
               </a:ext>
             </a:extLst>
           </p:cNvPr>
@@ -4215,8 +5492,8 @@
         </p:nvSpPr>
         <p:spPr>
           <a:xfrm xmlns:a="http://schemas.openxmlformats.org/drawingml/2006/main">
-            <a:off x="609600" y="5800725"/>
-            <a:ext cx="10972800" cy="638175"/>
+            <a:off x="8248650" y="2628900"/>
+            <a:ext cx="3324225" cy="2181225"/>
           </a:xfrm>
           <a:prstGeom xmlns:a="http://schemas.openxmlformats.org/drawingml/2006/main" prst="rect">
             <a:avLst/>
@@ -4233,9 +5510,9 @@
           <a:lstStyle xmlns:a="http://schemas.openxmlformats.org/drawingml/2006/main"/>
           <a:p xmlns:a="http://schemas.openxmlformats.org/drawingml/2006/main">
             <a:pPr>
-              <a:defRPr sz="1725" b="0">
-                <a:solidFill>
-                  <a:srgbClr val="233542"/>
+              <a:defRPr sz="2025" b="0">
+                <a:solidFill>
+                  <a:srgbClr val="213744"/>
                 </a:solidFill>
                 <a:latin typeface="Arial"/>
                 <a:ea typeface="Arial"/>
@@ -4243,15 +5520,221 @@
               </a:defRPr>
             </a:pPr>
             <a:r>
+              <a:rPr sz="2025" b="0">
+                <a:solidFill>
+                  <a:srgbClr val="213744"/>
+                </a:solidFill>
+                <a:latin typeface="Arial"/>
+                <a:ea typeface="Arial"/>
+                <a:cs typeface="Arial"/>
+              </a:rPr>
+              <a:t>Original LandXML breaklines</a:t>
+            </a:r>
+          </a:p>
+          <a:p xmlns:a="http://schemas.openxmlformats.org/drawingml/2006/main">
+            <a:pPr>
+              <a:defRPr sz="2025" b="0">
+                <a:solidFill>
+                  <a:srgbClr val="213744"/>
+                </a:solidFill>
+                <a:latin typeface="Arial"/>
+                <a:ea typeface="Arial"/>
+                <a:cs typeface="Arial"/>
+              </a:defRPr>
+            </a:pPr>
+            <a:r>
+              <a:rPr sz="2025" b="0">
+                <a:solidFill>
+                  <a:srgbClr val="213744"/>
+                </a:solidFill>
+                <a:latin typeface="Arial"/>
+                <a:ea typeface="Arial"/>
+                <a:cs typeface="Arial"/>
+              </a:rPr>
+              <a:t>WKT-carried site calibration</a:t>
+            </a:r>
+          </a:p>
+          <a:p xmlns:a="http://schemas.openxmlformats.org/drawingml/2006/main">
+            <a:pPr>
+              <a:defRPr sz="2025" b="0">
+                <a:solidFill>
+                  <a:srgbClr val="213744"/>
+                </a:solidFill>
+                <a:latin typeface="Arial"/>
+                <a:ea typeface="Arial"/>
+                <a:cs typeface="Arial"/>
+              </a:defRPr>
+            </a:pPr>
+            <a:r>
+              <a:rPr sz="2025" b="0">
+                <a:solidFill>
+                  <a:srgbClr val="213744"/>
+                </a:solidFill>
+                <a:latin typeface="Arial"/>
+                <a:ea typeface="Arial"/>
+                <a:cs typeface="Arial"/>
+              </a:rPr>
+              <a:t>Declared US survey feet</a:t>
+            </a:r>
+          </a:p>
+          <a:p xmlns:a="http://schemas.openxmlformats.org/drawingml/2006/main">
+            <a:pPr>
+              <a:defRPr sz="2025" b="0">
+                <a:solidFill>
+                  <a:srgbClr val="213744"/>
+                </a:solidFill>
+                <a:latin typeface="Arial"/>
+                <a:ea typeface="Arial"/>
+                <a:cs typeface="Arial"/>
+              </a:defRPr>
+            </a:pPr>
+            <a:r>
+              <a:rPr sz="2025" b="0">
+                <a:solidFill>
+                  <a:srgbClr val="213744"/>
+                </a:solidFill>
+                <a:latin typeface="Arial"/>
+                <a:ea typeface="Arial"/>
+                <a:cs typeface="Arial"/>
+              </a:rPr>
+              <a:t>Separate stage conventions</a:t>
+            </a:r>
+          </a:p>
+        </p:txBody>
+      </p:sp>
+      <p:sp>
+        <p:nvSpPr>
+          <p:cNvPr id="5" name="">
+            <a:extLst xmlns:a="http://schemas.openxmlformats.org/drawingml/2006/main">
+              <a:ext uri="{FF2B5EF4-FFF2-40B4-BE49-F238E27FC236}">
+                <a16:creationId xmlns:a16="http://schemas.microsoft.com/office/drawing/2014/main" id="{4EFCCED7-F343-43C0-90F9-37189263546B}"/>
+              </a:ext>
+            </a:extLst>
+          </p:cNvPr>
+          <p:cNvSpPr>
+            <a:spLocks xmlns:a="http://schemas.openxmlformats.org/drawingml/2006/main" noGrp="1"/>
+          </p:cNvSpPr>
+          <p:nvPr/>
+        </p:nvSpPr>
+        <p:spPr>
+          <a:xfrm xmlns:a="http://schemas.openxmlformats.org/drawingml/2006/main">
+            <a:off x="8248650" y="5181600"/>
+            <a:ext cx="3324225" cy="742950"/>
+          </a:xfrm>
+          <a:prstGeom xmlns:a="http://schemas.openxmlformats.org/drawingml/2006/main" prst="rect">
+            <a:avLst/>
+          </a:prstGeom>
+          <a:noFill xmlns:a="http://schemas.openxmlformats.org/drawingml/2006/main"/>
+          <a:ln xmlns:a="http://schemas.openxmlformats.org/drawingml/2006/main" w="0">
+            <a:noFill/>
+          </a:ln>
+        </p:spPr>
+        <p:txBody>
+          <a:bodyPr xmlns:a="http://schemas.openxmlformats.org/drawingml/2006/main">
+            <a:noAutofit/>
+          </a:bodyPr>
+          <a:lstStyle xmlns:a="http://schemas.openxmlformats.org/drawingml/2006/main"/>
+          <a:p xmlns:a="http://schemas.openxmlformats.org/drawingml/2006/main">
+            <a:pPr>
+              <a:defRPr sz="1875" b="0">
+                <a:solidFill>
+                  <a:srgbClr val="526B79"/>
+                </a:solidFill>
+                <a:latin typeface="Arial"/>
+                <a:ea typeface="Arial"/>
+                <a:cs typeface="Arial"/>
+              </a:defRPr>
+            </a:pPr>
+            <a:r>
+              <a:rPr sz="1875" b="0">
+                <a:solidFill>
+                  <a:srgbClr val="526B79"/>
+                </a:solidFill>
+                <a:latin typeface="Arial"/>
+                <a:ea typeface="Arial"/>
+                <a:cs typeface="Arial"/>
+              </a:rPr>
+              <a:t>No terrain surface</a:t>
+            </a:r>
+          </a:p>
+          <a:p xmlns:a="http://schemas.openxmlformats.org/drawingml/2006/main">
+            <a:pPr>
+              <a:defRPr sz="1875" b="0">
+                <a:solidFill>
+                  <a:srgbClr val="526B79"/>
+                </a:solidFill>
+                <a:latin typeface="Arial"/>
+                <a:ea typeface="Arial"/>
+                <a:cs typeface="Arial"/>
+              </a:defRPr>
+            </a:pPr>
+            <a:r>
+              <a:rPr sz="1875" b="0">
+                <a:solidFill>
+                  <a:srgbClr val="526B79"/>
+                </a:solidFill>
+                <a:latin typeface="Arial"/>
+                <a:ea typeface="Arial"/>
+                <a:cs typeface="Arial"/>
+              </a:rPr>
+              <a:t>was fabricated.</a:t>
+            </a:r>
+          </a:p>
+        </p:txBody>
+      </p:sp>
+      <p:sp>
+        <p:nvSpPr>
+          <p:cNvPr id="6" name="">
+            <a:extLst xmlns:a="http://schemas.openxmlformats.org/drawingml/2006/main">
+              <a:ext uri="{FF2B5EF4-FFF2-40B4-BE49-F238E27FC236}">
+                <a16:creationId xmlns:a16="http://schemas.microsoft.com/office/drawing/2014/main" id="{DC6F2A8D-55A0-4525-84B3-9B63354B360C}"/>
+              </a:ext>
+            </a:extLst>
+          </p:cNvPr>
+          <p:cNvSpPr>
+            <a:spLocks xmlns:a="http://schemas.openxmlformats.org/drawingml/2006/main" noGrp="1"/>
+          </p:cNvSpPr>
+          <p:nvPr/>
+        </p:nvSpPr>
+        <p:spPr>
+          <a:xfrm xmlns:a="http://schemas.openxmlformats.org/drawingml/2006/main">
+            <a:off x="609600" y="6200775"/>
+            <a:ext cx="10972800" cy="581025"/>
+          </a:xfrm>
+          <a:prstGeom xmlns:a="http://schemas.openxmlformats.org/drawingml/2006/main" prst="rect">
+            <a:avLst/>
+          </a:prstGeom>
+          <a:noFill xmlns:a="http://schemas.openxmlformats.org/drawingml/2006/main"/>
+          <a:ln xmlns:a="http://schemas.openxmlformats.org/drawingml/2006/main" w="0">
+            <a:noFill/>
+          </a:ln>
+        </p:spPr>
+        <p:txBody>
+          <a:bodyPr xmlns:a="http://schemas.openxmlformats.org/drawingml/2006/main">
+            <a:noAutofit/>
+          </a:bodyPr>
+          <a:lstStyle xmlns:a="http://schemas.openxmlformats.org/drawingml/2006/main"/>
+          <a:p xmlns:a="http://schemas.openxmlformats.org/drawingml/2006/main">
+            <a:pPr>
+              <a:defRPr sz="1725" b="0">
+                <a:solidFill>
+                  <a:srgbClr val="526B79"/>
+                </a:solidFill>
+                <a:latin typeface="Arial"/>
+                <a:ea typeface="Arial"/>
+                <a:cs typeface="Arial"/>
+              </a:defRPr>
+            </a:pPr>
+            <a:r>
               <a:rPr sz="1725" b="0">
                 <a:solidFill>
-                  <a:srgbClr val="233542"/>
+                  <a:srgbClr val="526B79"/>
                 </a:solidFill>
                 <a:latin typeface="Arial"/>
                 <a:ea typeface="Arial"/>
                 <a:cs typeface="Arial"/>
               </a:rPr>
-              <a:t>Expected failures include unsupported frame requests. Source data stays unchanged. PROJ is shared across readers.</a:t>
+              <a:t>Fresh readers verify the resolved geometry. Polygonal bounds cover returned vertices and straight faces, with no continuous-surface certificate.</a:t>
             </a:r>
           </a:p>
         </p:txBody>
@@ -4259,7 +5742,7 @@
     </p:spTree>
     <p:extLst>
       <p:ext uri="{BB962C8B-B14F-4D97-AF65-F5344CB8AC3E}">
-        <p14:creationId xmlns:p14="http://schemas.microsoft.com/office/powerpoint/2010/main" val="2061671859"/>
+        <p14:creationId xmlns:p14="http://schemas.microsoft.com/office/powerpoint/2010/main" val="2130764067"/>
       </p:ext>
     </p:extLst>
   </p:cSld>
@@ -4290,7 +5773,7 @@
           <p:cNvPr id="5" name="">
             <a:extLst xmlns:a="http://schemas.openxmlformats.org/drawingml/2006/main">
               <a:ext uri="{FF2B5EF4-FFF2-40B4-BE49-F238E27FC236}">
-                <a16:creationId xmlns:a16="http://schemas.microsoft.com/office/drawing/2014/main" id="{4432FCC3-38BC-4060-9DA5-E4373F9D3852}"/>
+                <a16:creationId xmlns:a16="http://schemas.microsoft.com/office/drawing/2014/main" id="{198705F0-18FA-4A33-A0AD-0586A5135D52}"/>
               </a:ext>
             </a:extLst>
           </p:cNvPr>
@@ -4301,8 +5784,8 @@
         </p:nvSpPr>
         <p:spPr>
           <a:xfrm xmlns:a="http://schemas.openxmlformats.org/drawingml/2006/main">
-            <a:off x="609600" y="381000"/>
-            <a:ext cx="10972800" cy="952500"/>
+            <a:off x="609600" y="333375"/>
+            <a:ext cx="10972800" cy="1047750"/>
           </a:xfrm>
           <a:prstGeom xmlns:a="http://schemas.openxmlformats.org/drawingml/2006/main" prst="rect">
             <a:avLst/>
@@ -4321,7 +5804,7 @@
             <a:pPr>
               <a:defRPr sz="3150" b="1">
                 <a:solidFill>
-                  <a:srgbClr val="233542"/>
+                  <a:srgbClr val="213744"/>
                 </a:solidFill>
                 <a:latin typeface="Arial"/>
                 <a:ea typeface="Arial"/>
@@ -4331,23 +5814,45 @@
             <a:r>
               <a:rPr sz="3150" b="1">
                 <a:solidFill>
-                  <a:srgbClr val="233542"/>
+                  <a:srgbClr val="213744"/>
                 </a:solidFill>
                 <a:latin typeface="Arial"/>
                 <a:ea typeface="Arial"/>
                 <a:cs typeface="Arial"/>
               </a:rPr>
-              <a:t>Same France origin in each runtime</a:t>
+              <a:t>Georeferenced measurements remain usable as data</a:t>
             </a:r>
           </a:p>
         </p:txBody>
       </p:sp>
+      <p:pic>
+        <p:nvPicPr>
+          <p:cNvPr id="6" name=""/>
+          <p:cNvPicPr>
+            <a:picLocks xmlns:a="http://schemas.openxmlformats.org/drawingml/2006/main" noChangeAspect="1"/>
+          </p:cNvPicPr>
+          <p:nvPr/>
+        </p:nvPicPr>
+        <p:blipFill>
+          <a:blip xmlns:r="http://schemas.openxmlformats.org/officeDocument/2006/relationships" xmlns:a="http://schemas.openxmlformats.org/drawingml/2006/main" r:embed="Rc1bd0301090b4eb1"/>
+          <a:stretch xmlns:a="http://schemas.openxmlformats.org/drawingml/2006/main"/>
+        </p:blipFill>
+        <p:spPr>
+          <a:xfrm xmlns:a="http://schemas.openxmlformats.org/drawingml/2006/main">
+            <a:off x="2425303" y="1466850"/>
+            <a:ext cx="7322344" cy="3514725"/>
+          </a:xfrm>
+          <a:prstGeom xmlns:a="http://schemas.openxmlformats.org/drawingml/2006/main" prst="rect">
+            <a:avLst/>
+          </a:prstGeom>
+        </p:spPr>
+      </p:pic>
       <p:sp>
         <p:nvSpPr>
-          <p:cNvPr id="2" name="">
+          <p:cNvPr id="3" name="">
             <a:extLst xmlns:a="http://schemas.openxmlformats.org/drawingml/2006/main">
               <a:ext uri="{FF2B5EF4-FFF2-40B4-BE49-F238E27FC236}">
-                <a16:creationId xmlns:a16="http://schemas.microsoft.com/office/drawing/2014/main" id="{D2DD38FB-7BE3-4EE1-9868-F320D2D700E1}"/>
+                <a16:creationId xmlns:a16="http://schemas.microsoft.com/office/drawing/2014/main" id="{2C331095-46A3-4F56-A135-51FDF7657FBD}"/>
               </a:ext>
             </a:extLst>
           </p:cNvPr>
@@ -4358,8 +5863,8 @@
         </p:nvSpPr>
         <p:spPr>
           <a:xfrm xmlns:a="http://schemas.openxmlformats.org/drawingml/2006/main">
-            <a:off x="609600" y="1447800"/>
-            <a:ext cx="10972800" cy="1276350"/>
+            <a:off x="609600" y="5210175"/>
+            <a:ext cx="10972800" cy="447675"/>
           </a:xfrm>
           <a:prstGeom xmlns:a="http://schemas.openxmlformats.org/drawingml/2006/main" prst="rect">
             <a:avLst/>
@@ -4376,9 +5881,9 @@
           <a:lstStyle xmlns:a="http://schemas.openxmlformats.org/drawingml/2006/main"/>
           <a:p xmlns:a="http://schemas.openxmlformats.org/drawingml/2006/main">
             <a:pPr>
-              <a:defRPr sz="2025" b="0">
-                <a:solidFill>
-                  <a:srgbClr val="233542"/>
+              <a:defRPr sz="2250" b="1">
+                <a:solidFill>
+                  <a:srgbClr val="157C87"/>
                 </a:solidFill>
                 <a:latin typeface="Arial"/>
                 <a:ea typeface="Arial"/>
@@ -4386,578 +5891,25 @@
               </a:defRPr>
             </a:pPr>
             <a:r>
-              <a:rPr sz="2025" b="0">
-                <a:solidFill>
-                  <a:srgbClr val="233542"/>
+              <a:rPr sz="2250" b="1">
+                <a:solidFill>
+                  <a:srgbClr val="157C87"/>
                 </a:solidFill>
                 <a:latin typeface="Arial"/>
                 <a:ea typeface="Arial"/>
                 <a:cs typeface="Arial"/>
               </a:rPr>
-              <a:t>France point 0 serves as an illustrative model-anchor origin. Source: RGF93 v2b / CC49 with NGF-IGN69 height. Output: Lambert-93 with the same height reference. Every displayed component is in metres.</a:t>
+              <a:t>2,664 original values and horizontal coordinates remain paired.</a:t>
             </a:r>
           </a:p>
         </p:txBody>
       </p:sp>
-      <p:graphicFrame>
-        <p:nvGraphicFramePr>
-          <p:cNvPr id="7" name=""/>
-          <p:cNvGraphicFramePr/>
-          <p:nvPr/>
-        </p:nvGraphicFramePr>
-        <p:xfrm>
-          <a:off xmlns:a="http://schemas.openxmlformats.org/drawingml/2006/main" x="609600" y="3114675"/>
-          <a:ext xmlns:a="http://schemas.openxmlformats.org/drawingml/2006/main" cx="10972800" cy="2057400"/>
-        </p:xfrm>
-        <a:graphic xmlns:a="http://schemas.openxmlformats.org/drawingml/2006/main">
-          <a:graphicData uri="http://schemas.openxmlformats.org/drawingml/2006/table">
-            <a:tbl>
-              <a:tblPr/>
-              <a:tblGrid>
-                <a:gridCol w="1733550"/>
-                <a:gridCol w="2333625"/>
-                <a:gridCol w="2333625"/>
-                <a:gridCol w="2286000"/>
-                <a:gridCol w="2286000"/>
-              </a:tblGrid>
-              <a:tr h="514350">
-                <a:tc>
-                  <a:txBody>
-                    <a:bodyPr>
-                      <a:noAutofit/>
-                    </a:bodyPr>
-                    <a:lstStyle/>
-                    <a:p>
-                      <a:r>
-                        <a:rPr sz="1875" b="1">
-                          <a:solidFill>
-                            <a:srgbClr val="FFFFFF"/>
-                          </a:solidFill>
-                          <a:latin typeface="Arial"/>
-                          <a:ea typeface="Arial"/>
-                          <a:cs typeface="Arial"/>
-                        </a:rPr>
-                        <a:t>Component</a:t>
-                      </a:r>
-                    </a:p>
-                  </a:txBody>
-                  <a:tcPr marL="91440" marR="91440" marT="45720" marB="45720">
-                    <a:solidFill>
-                      <a:srgbClr val="233542"/>
-                    </a:solidFill>
-                  </a:tcPr>
-                </a:tc>
-                <a:tc>
-                  <a:txBody>
-                    <a:bodyPr>
-                      <a:noAutofit/>
-                    </a:bodyPr>
-                    <a:lstStyle/>
-                    <a:p>
-                      <a:r>
-                        <a:rPr sz="1875" b="1">
-                          <a:solidFill>
-                            <a:srgbClr val="FFFFFF"/>
-                          </a:solidFill>
-                          <a:latin typeface="Arial"/>
-                          <a:ea typeface="Arial"/>
-                          <a:cs typeface="Arial"/>
-                        </a:rPr>
-                        <a:t>Source CC49</a:t>
-                      </a:r>
-                    </a:p>
-                  </a:txBody>
-                  <a:tcPr marL="91440" marR="91440" marT="45720" marB="45720">
-                    <a:solidFill>
-                      <a:srgbClr val="233542"/>
-                    </a:solidFill>
-                  </a:tcPr>
-                </a:tc>
-                <a:tc>
-                  <a:txBody>
-                    <a:bodyPr>
-                      <a:noAutofit/>
-                    </a:bodyPr>
-                    <a:lstStyle/>
-                    <a:p>
-                      <a:r>
-                        <a:rPr sz="1875" b="1">
-                          <a:solidFill>
-                            <a:srgbClr val="FFFFFF"/>
-                          </a:solidFill>
-                          <a:latin typeface="Arial"/>
-                          <a:ea typeface="Arial"/>
-                          <a:cs typeface="Arial"/>
-                        </a:rPr>
-                        <a:t>Headless USD</a:t>
-                      </a:r>
-                    </a:p>
-                  </a:txBody>
-                  <a:tcPr marL="91440" marR="91440" marT="45720" marB="45720">
-                    <a:solidFill>
-                      <a:srgbClr val="233542"/>
-                    </a:solidFill>
-                  </a:tcPr>
-                </a:tc>
-                <a:tc>
-                  <a:txBody>
-                    <a:bodyPr>
-                      <a:noAutofit/>
-                    </a:bodyPr>
-                    <a:lstStyle/>
-                    <a:p>
-                      <a:r>
-                        <a:rPr sz="1875" b="1">
-                          <a:solidFill>
-                            <a:srgbClr val="FFFFFF"/>
-                          </a:solidFill>
-                          <a:latin typeface="Arial"/>
-                          <a:ea typeface="Arial"/>
-                          <a:cs typeface="Arial"/>
-                        </a:rPr>
-                        <a:t>Native USD</a:t>
-                      </a:r>
-                    </a:p>
-                  </a:txBody>
-                  <a:tcPr marL="91440" marR="91440" marT="45720" marB="45720">
-                    <a:solidFill>
-                      <a:srgbClr val="233542"/>
-                    </a:solidFill>
-                  </a:tcPr>
-                </a:tc>
-                <a:tc>
-                  <a:txBody>
-                    <a:bodyPr>
-                      <a:noAutofit/>
-                    </a:bodyPr>
-                    <a:lstStyle/>
-                    <a:p>
-                      <a:r>
-                        <a:rPr sz="1875" b="1">
-                          <a:solidFill>
-                            <a:srgbClr val="FFFFFF"/>
-                          </a:solidFill>
-                          <a:latin typeface="Arial"/>
-                          <a:ea typeface="Arial"/>
-                          <a:cs typeface="Arial"/>
-                        </a:rPr>
-                        <a:t>Live OV</a:t>
-                      </a:r>
-                    </a:p>
-                  </a:txBody>
-                  <a:tcPr marL="91440" marR="91440" marT="45720" marB="45720">
-                    <a:solidFill>
-                      <a:srgbClr val="233542"/>
-                    </a:solidFill>
-                  </a:tcPr>
-                </a:tc>
-              </a:tr>
-              <a:tr h="514350">
-                <a:tc>
-                  <a:txBody>
-                    <a:bodyPr>
-                      <a:noAutofit/>
-                    </a:bodyPr>
-                    <a:lstStyle/>
-                    <a:p>
-                      <a:r>
-                        <a:rPr sz="1875" b="0">
-                          <a:solidFill>
-                            <a:srgbClr val="233542"/>
-                          </a:solidFill>
-                          <a:latin typeface="Arial"/>
-                          <a:ea typeface="Arial"/>
-                          <a:cs typeface="Arial"/>
-                        </a:rPr>
-                        <a:t>Easting</a:t>
-                      </a:r>
-                    </a:p>
-                  </a:txBody>
-                  <a:tcPr marL="91440" marR="91440" marT="45720" marB="45720">
-                    <a:solidFill>
-                      <a:srgbClr val="FFFFFF"/>
-                    </a:solidFill>
-                  </a:tcPr>
-                </a:tc>
-                <a:tc>
-                  <a:txBody>
-                    <a:bodyPr>
-                      <a:noAutofit/>
-                    </a:bodyPr>
-                    <a:lstStyle/>
-                    <a:p>
-                      <a:r>
-                        <a:rPr sz="1875" b="0">
-                          <a:solidFill>
-                            <a:srgbClr val="233542"/>
-                          </a:solidFill>
-                          <a:latin typeface="Arial"/>
-                          <a:ea typeface="Arial"/>
-                          <a:cs typeface="Arial"/>
-                        </a:rPr>
-                        <a:t>1661099.0390</a:t>
-                      </a:r>
-                    </a:p>
-                  </a:txBody>
-                  <a:tcPr marL="91440" marR="91440" marT="45720" marB="45720">
-                    <a:solidFill>
-                      <a:srgbClr val="FFFFFF"/>
-                    </a:solidFill>
-                  </a:tcPr>
-                </a:tc>
-                <a:tc>
-                  <a:txBody>
-                    <a:bodyPr>
-                      <a:noAutofit/>
-                    </a:bodyPr>
-                    <a:lstStyle/>
-                    <a:p>
-                      <a:r>
-                        <a:rPr sz="1875" b="0">
-                          <a:solidFill>
-                            <a:srgbClr val="233542"/>
-                          </a:solidFill>
-                          <a:latin typeface="Arial"/>
-                          <a:ea typeface="Arial"/>
-                          <a:cs typeface="Arial"/>
-                        </a:rPr>
-                        <a:t>661101.1094</a:t>
-                      </a:r>
-                    </a:p>
-                  </a:txBody>
-                  <a:tcPr marL="91440" marR="91440" marT="45720" marB="45720">
-                    <a:solidFill>
-                      <a:srgbClr val="FFFFFF"/>
-                    </a:solidFill>
-                  </a:tcPr>
-                </a:tc>
-                <a:tc>
-                  <a:txBody>
-                    <a:bodyPr>
-                      <a:noAutofit/>
-                    </a:bodyPr>
-                    <a:lstStyle/>
-                    <a:p>
-                      <a:r>
-                        <a:rPr sz="1875" b="0">
-                          <a:solidFill>
-                            <a:srgbClr val="233542"/>
-                          </a:solidFill>
-                          <a:latin typeface="Arial"/>
-                          <a:ea typeface="Arial"/>
-                          <a:cs typeface="Arial"/>
-                        </a:rPr>
-                        <a:t>661101.1094</a:t>
-                      </a:r>
-                    </a:p>
-                  </a:txBody>
-                  <a:tcPr marL="91440" marR="91440" marT="45720" marB="45720">
-                    <a:solidFill>
-                      <a:srgbClr val="FFFFFF"/>
-                    </a:solidFill>
-                  </a:tcPr>
-                </a:tc>
-                <a:tc>
-                  <a:txBody>
-                    <a:bodyPr>
-                      <a:noAutofit/>
-                    </a:bodyPr>
-                    <a:lstStyle/>
-                    <a:p>
-                      <a:r>
-                        <a:rPr sz="1875" b="0">
-                          <a:solidFill>
-                            <a:srgbClr val="233542"/>
-                          </a:solidFill>
-                          <a:latin typeface="Arial"/>
-                          <a:ea typeface="Arial"/>
-                          <a:cs typeface="Arial"/>
-                        </a:rPr>
-                        <a:t>661101.1094</a:t>
-                      </a:r>
-                    </a:p>
-                  </a:txBody>
-                  <a:tcPr marL="91440" marR="91440" marT="45720" marB="45720">
-                    <a:solidFill>
-                      <a:srgbClr val="FFFFFF"/>
-                    </a:solidFill>
-                  </a:tcPr>
-                </a:tc>
-              </a:tr>
-              <a:tr h="514350">
-                <a:tc>
-                  <a:txBody>
-                    <a:bodyPr>
-                      <a:noAutofit/>
-                    </a:bodyPr>
-                    <a:lstStyle/>
-                    <a:p>
-                      <a:r>
-                        <a:rPr sz="1875" b="0">
-                          <a:solidFill>
-                            <a:srgbClr val="233542"/>
-                          </a:solidFill>
-                          <a:latin typeface="Arial"/>
-                          <a:ea typeface="Arial"/>
-                          <a:cs typeface="Arial"/>
-                        </a:rPr>
-                        <a:t>Northing</a:t>
-                      </a:r>
-                    </a:p>
-                  </a:txBody>
-                  <a:tcPr marL="91440" marR="91440" marT="45720" marB="45720">
-                    <a:solidFill>
-                      <a:srgbClr val="FFFFFF"/>
-                    </a:solidFill>
-                  </a:tcPr>
-                </a:tc>
-                <a:tc>
-                  <a:txBody>
-                    <a:bodyPr>
-                      <a:noAutofit/>
-                    </a:bodyPr>
-                    <a:lstStyle/>
-                    <a:p>
-                      <a:r>
-                        <a:rPr sz="1875" b="0">
-                          <a:solidFill>
-                            <a:srgbClr val="233542"/>
-                          </a:solidFill>
-                          <a:latin typeface="Arial"/>
-                          <a:ea typeface="Arial"/>
-                          <a:cs typeface="Arial"/>
-                        </a:rPr>
-                        <a:t>8180053.1170</a:t>
-                      </a:r>
-                    </a:p>
-                  </a:txBody>
-                  <a:tcPr marL="91440" marR="91440" marT="45720" marB="45720">
-                    <a:solidFill>
-                      <a:srgbClr val="FFFFFF"/>
-                    </a:solidFill>
-                  </a:tcPr>
-                </a:tc>
-                <a:tc>
-                  <a:txBody>
-                    <a:bodyPr>
-                      <a:noAutofit/>
-                    </a:bodyPr>
-                    <a:lstStyle/>
-                    <a:p>
-                      <a:r>
-                        <a:rPr sz="1875" b="0">
-                          <a:solidFill>
-                            <a:srgbClr val="233542"/>
-                          </a:solidFill>
-                          <a:latin typeface="Arial"/>
-                          <a:ea typeface="Arial"/>
-                          <a:cs typeface="Arial"/>
-                        </a:rPr>
-                        <a:t>6857834.2565</a:t>
-                      </a:r>
-                    </a:p>
-                  </a:txBody>
-                  <a:tcPr marL="91440" marR="91440" marT="45720" marB="45720">
-                    <a:solidFill>
-                      <a:srgbClr val="FFFFFF"/>
-                    </a:solidFill>
-                  </a:tcPr>
-                </a:tc>
-                <a:tc>
-                  <a:txBody>
-                    <a:bodyPr>
-                      <a:noAutofit/>
-                    </a:bodyPr>
-                    <a:lstStyle/>
-                    <a:p>
-                      <a:r>
-                        <a:rPr sz="1875" b="0">
-                          <a:solidFill>
-                            <a:srgbClr val="233542"/>
-                          </a:solidFill>
-                          <a:latin typeface="Arial"/>
-                          <a:ea typeface="Arial"/>
-                          <a:cs typeface="Arial"/>
-                        </a:rPr>
-                        <a:t>6857834.2565</a:t>
-                      </a:r>
-                    </a:p>
-                  </a:txBody>
-                  <a:tcPr marL="91440" marR="91440" marT="45720" marB="45720">
-                    <a:solidFill>
-                      <a:srgbClr val="FFFFFF"/>
-                    </a:solidFill>
-                  </a:tcPr>
-                </a:tc>
-                <a:tc>
-                  <a:txBody>
-                    <a:bodyPr>
-                      <a:noAutofit/>
-                    </a:bodyPr>
-                    <a:lstStyle/>
-                    <a:p>
-                      <a:r>
-                        <a:rPr sz="1875" b="0">
-                          <a:solidFill>
-                            <a:srgbClr val="233542"/>
-                          </a:solidFill>
-                          <a:latin typeface="Arial"/>
-                          <a:ea typeface="Arial"/>
-                          <a:cs typeface="Arial"/>
-                        </a:rPr>
-                        <a:t>6857834.2565</a:t>
-                      </a:r>
-                    </a:p>
-                  </a:txBody>
-                  <a:tcPr marL="91440" marR="91440" marT="45720" marB="45720">
-                    <a:solidFill>
-                      <a:srgbClr val="FFFFFF"/>
-                    </a:solidFill>
-                  </a:tcPr>
-                </a:tc>
-              </a:tr>
-              <a:tr h="514350">
-                <a:tc>
-                  <a:txBody>
-                    <a:bodyPr>
-                      <a:noAutofit/>
-                    </a:bodyPr>
-                    <a:lstStyle/>
-                    <a:p>
-                      <a:r>
-                        <a:rPr sz="1875" b="0">
-                          <a:solidFill>
-                            <a:srgbClr val="233542"/>
-                          </a:solidFill>
-                          <a:latin typeface="Arial"/>
-                          <a:ea typeface="Arial"/>
-                          <a:cs typeface="Arial"/>
-                        </a:rPr>
-                        <a:t>Height</a:t>
-                      </a:r>
-                    </a:p>
-                  </a:txBody>
-                  <a:tcPr marL="91440" marR="91440" marT="45720" marB="45720">
-                    <a:solidFill>
-                      <a:srgbClr val="FFFFFF"/>
-                    </a:solidFill>
-                  </a:tcPr>
-                </a:tc>
-                <a:tc>
-                  <a:txBody>
-                    <a:bodyPr>
-                      <a:noAutofit/>
-                    </a:bodyPr>
-                    <a:lstStyle/>
-                    <a:p>
-                      <a:r>
-                        <a:rPr sz="1875" b="0">
-                          <a:solidFill>
-                            <a:srgbClr val="233542"/>
-                          </a:solidFill>
-                          <a:latin typeface="Arial"/>
-                          <a:ea typeface="Arial"/>
-                          <a:cs typeface="Arial"/>
-                        </a:rPr>
-                        <a:t>37.2980</a:t>
-                      </a:r>
-                    </a:p>
-                  </a:txBody>
-                  <a:tcPr marL="91440" marR="91440" marT="45720" marB="45720">
-                    <a:solidFill>
-                      <a:srgbClr val="FFFFFF"/>
-                    </a:solidFill>
-                  </a:tcPr>
-                </a:tc>
-                <a:tc>
-                  <a:txBody>
-                    <a:bodyPr>
-                      <a:noAutofit/>
-                    </a:bodyPr>
-                    <a:lstStyle/>
-                    <a:p>
-                      <a:r>
-                        <a:rPr sz="1875" b="0">
-                          <a:solidFill>
-                            <a:srgbClr val="233542"/>
-                          </a:solidFill>
-                          <a:latin typeface="Arial"/>
-                          <a:ea typeface="Arial"/>
-                          <a:cs typeface="Arial"/>
-                        </a:rPr>
-                        <a:t>37.2980</a:t>
-                      </a:r>
-                    </a:p>
-                  </a:txBody>
-                  <a:tcPr marL="91440" marR="91440" marT="45720" marB="45720">
-                    <a:solidFill>
-                      <a:srgbClr val="FFFFFF"/>
-                    </a:solidFill>
-                  </a:tcPr>
-                </a:tc>
-                <a:tc>
-                  <a:txBody>
-                    <a:bodyPr>
-                      <a:noAutofit/>
-                    </a:bodyPr>
-                    <a:lstStyle/>
-                    <a:p>
-                      <a:r>
-                        <a:rPr sz="1875" b="0">
-                          <a:solidFill>
-                            <a:srgbClr val="233542"/>
-                          </a:solidFill>
-                          <a:latin typeface="Arial"/>
-                          <a:ea typeface="Arial"/>
-                          <a:cs typeface="Arial"/>
-                        </a:rPr>
-                        <a:t>37.2980</a:t>
-                      </a:r>
-                    </a:p>
-                  </a:txBody>
-                  <a:tcPr marL="91440" marR="91440" marT="45720" marB="45720">
-                    <a:solidFill>
-                      <a:srgbClr val="FFFFFF"/>
-                    </a:solidFill>
-                  </a:tcPr>
-                </a:tc>
-                <a:tc>
-                  <a:txBody>
-                    <a:bodyPr>
-                      <a:noAutofit/>
-                    </a:bodyPr>
-                    <a:lstStyle/>
-                    <a:p>
-                      <a:r>
-                        <a:rPr sz="1875" b="0">
-                          <a:solidFill>
-                            <a:srgbClr val="233542"/>
-                          </a:solidFill>
-                          <a:latin typeface="Arial"/>
-                          <a:ea typeface="Arial"/>
-                          <a:cs typeface="Arial"/>
-                        </a:rPr>
-                        <a:t>37.2980</a:t>
-                      </a:r>
-                    </a:p>
-                  </a:txBody>
-                  <a:tcPr marL="91440" marR="91440" marT="45720" marB="45720">
-                    <a:solidFill>
-                      <a:srgbClr val="FFFFFF"/>
-                    </a:solidFill>
-                  </a:tcPr>
-                </a:tc>
-              </a:tr>
-            </a:tbl>
-          </a:graphicData>
-        </a:graphic>
-      </p:graphicFrame>
       <p:sp>
         <p:nvSpPr>
           <p:cNvPr id="4" name="">
             <a:extLst xmlns:a="http://schemas.openxmlformats.org/drawingml/2006/main">
               <a:ext uri="{FF2B5EF4-FFF2-40B4-BE49-F238E27FC236}">
-                <a16:creationId xmlns:a16="http://schemas.microsoft.com/office/drawing/2014/main" id="{444B2907-89B4-453B-8AB9-3FA3BE73436E}"/>
+                <a16:creationId xmlns:a16="http://schemas.microsoft.com/office/drawing/2014/main" id="{4C288A83-86E9-4FE1-AABF-B360B067FB26}"/>
               </a:ext>
             </a:extLst>
           </p:cNvPr>
@@ -4968,8 +5920,8 @@
         </p:nvSpPr>
         <p:spPr>
           <a:xfrm xmlns:a="http://schemas.openxmlformats.org/drawingml/2006/main">
-            <a:off x="609600" y="5619750"/>
-            <a:ext cx="10972800" cy="762000"/>
+            <a:off x="609600" y="5857875"/>
+            <a:ext cx="10972800" cy="828675"/>
           </a:xfrm>
           <a:prstGeom xmlns:a="http://schemas.openxmlformats.org/drawingml/2006/main" prst="rect">
             <a:avLst/>
@@ -4986,9 +5938,9 @@
           <a:lstStyle xmlns:a="http://schemas.openxmlformats.org/drawingml/2006/main"/>
           <a:p xmlns:a="http://schemas.openxmlformats.org/drawingml/2006/main">
             <a:pPr>
-              <a:defRPr sz="1950" b="0">
-                <a:solidFill>
-                  <a:srgbClr val="233542"/>
+              <a:defRPr sz="2100" b="0">
+                <a:solidFill>
+                  <a:srgbClr val="213744"/>
                 </a:solidFill>
                 <a:latin typeface="Arial"/>
                 <a:ea typeface="Arial"/>
@@ -4996,15 +5948,15 @@
               </a:defRPr>
             </a:pPr>
             <a:r>
-              <a:rPr sz="1950" b="0">
-                <a:solidFill>
-                  <a:srgbClr val="233542"/>
+              <a:rPr sz="2100" b="0">
+                <a:solidFill>
+                  <a:srgbClr val="213744"/>
                 </a:solidFill>
                 <a:latin typeface="Arial"/>
                 <a:ea typeface="Arial"/>
                 <a:cs typeface="Arial"/>
               </a:rPr>
-              <a:t>All 59 France origins pass in both directions. Coordinates only, with no geometry or measurement-domain claim.</a:t>
+              <a:t>The association invents no height, physical units or observation times. A 3D request fails without a height reference and coordinate.</a:t>
             </a:r>
           </a:p>
         </p:txBody>
@@ -5012,7 +5964,7 @@
     </p:spTree>
     <p:extLst>
       <p:ext uri="{BB962C8B-B14F-4D97-AF65-F5344CB8AC3E}">
-        <p14:creationId xmlns:p14="http://schemas.microsoft.com/office/powerpoint/2010/main" val="1245853513"/>
+        <p14:creationId xmlns:p14="http://schemas.microsoft.com/office/powerpoint/2010/main" val="873845668"/>
       </p:ext>
     </p:extLst>
   </p:cSld>
@@ -5040,10 +5992,10 @@
       </p:grpSpPr>
       <p:sp>
         <p:nvSpPr>
-          <p:cNvPr id="6" name="">
+          <p:cNvPr id="7" name="">
             <a:extLst xmlns:a="http://schemas.openxmlformats.org/drawingml/2006/main">
               <a:ext uri="{FF2B5EF4-FFF2-40B4-BE49-F238E27FC236}">
-                <a16:creationId xmlns:a16="http://schemas.microsoft.com/office/drawing/2014/main" id="{2F1183DC-BF4A-494A-AA64-C9CFC6303745}"/>
+                <a16:creationId xmlns:a16="http://schemas.microsoft.com/office/drawing/2014/main" id="{E1E8AA9A-C937-4953-9747-3CB3A0E91012}"/>
               </a:ext>
             </a:extLst>
           </p:cNvPr>
@@ -5054,8 +6006,8 @@
         </p:nvSpPr>
         <p:spPr>
           <a:xfrm xmlns:a="http://schemas.openxmlformats.org/drawingml/2006/main">
-            <a:off x="609600" y="381000"/>
-            <a:ext cx="10972800" cy="952500"/>
+            <a:off x="609600" y="333375"/>
+            <a:ext cx="10972800" cy="1047750"/>
           </a:xfrm>
           <a:prstGeom xmlns:a="http://schemas.openxmlformats.org/drawingml/2006/main" prst="rect">
             <a:avLst/>
@@ -5074,7 +6026,7 @@
             <a:pPr>
               <a:defRPr sz="3150" b="1">
                 <a:solidFill>
-                  <a:srgbClr val="233542"/>
+                  <a:srgbClr val="213744"/>
                 </a:solidFill>
                 <a:latin typeface="Arial"/>
                 <a:ea typeface="Arial"/>
@@ -5084,23 +6036,45 @@
             <a:r>
               <a:rPr sz="3150" b="1">
                 <a:solidFill>
-                  <a:srgbClr val="233542"/>
+                  <a:srgbClr val="213744"/>
                 </a:solidFill>
                 <a:latin typeface="Arial"/>
                 <a:ea typeface="Arial"/>
                 <a:cs typeface="Arial"/>
               </a:rPr>
-              <a:t>Source interpolation and export samples</a:t>
+              <a:t>Regional geometry retains its source coordinates</a:t>
             </a:r>
           </a:p>
         </p:txBody>
       </p:sp>
+      <p:pic>
+        <p:nvPicPr>
+          <p:cNvPr id="8" name=""/>
+          <p:cNvPicPr>
+            <a:picLocks xmlns:a="http://schemas.openxmlformats.org/drawingml/2006/main" noChangeAspect="1"/>
+          </p:cNvPicPr>
+          <p:nvPr/>
+        </p:nvPicPr>
+        <p:blipFill>
+          <a:blip xmlns:r="http://schemas.openxmlformats.org/officeDocument/2006/relationships" xmlns:a="http://schemas.openxmlformats.org/drawingml/2006/main" r:embed="Rd86f07368a3c49c8"/>
+          <a:stretch xmlns:a="http://schemas.openxmlformats.org/drawingml/2006/main"/>
+        </p:blipFill>
+        <p:spPr>
+          <a:xfrm xmlns:a="http://schemas.openxmlformats.org/drawingml/2006/main">
+            <a:off x="701976" y="1409700"/>
+            <a:ext cx="5644548" cy="4886325"/>
+          </a:xfrm>
+          <a:prstGeom xmlns:a="http://schemas.openxmlformats.org/drawingml/2006/main" prst="rect">
+            <a:avLst/>
+          </a:prstGeom>
+        </p:spPr>
+      </p:pic>
       <p:sp>
         <p:nvSpPr>
-          <p:cNvPr id="2" name="">
+          <p:cNvPr id="3" name="">
             <a:extLst xmlns:a="http://schemas.openxmlformats.org/drawingml/2006/main">
               <a:ext uri="{FF2B5EF4-FFF2-40B4-BE49-F238E27FC236}">
-                <a16:creationId xmlns:a16="http://schemas.microsoft.com/office/drawing/2014/main" id="{78212309-E2F0-4919-B50C-2F4D5EDC2B3C}"/>
+                <a16:creationId xmlns:a16="http://schemas.microsoft.com/office/drawing/2014/main" id="{11621353-0A90-42BC-A14C-4502E9D6155B}"/>
               </a:ext>
             </a:extLst>
           </p:cNvPr>
@@ -5111,8 +6085,8 @@
         </p:nvSpPr>
         <p:spPr>
           <a:xfrm xmlns:a="http://schemas.openxmlformats.org/drawingml/2006/main">
-            <a:off x="609600" y="1466850"/>
-            <a:ext cx="10972800" cy="1219200"/>
+            <a:off x="7200900" y="1790700"/>
+            <a:ext cx="4381500" cy="542925"/>
           </a:xfrm>
           <a:prstGeom xmlns:a="http://schemas.openxmlformats.org/drawingml/2006/main" prst="rect">
             <a:avLst/>
@@ -5129,9 +6103,9 @@
           <a:lstStyle xmlns:a="http://schemas.openxmlformats.org/drawingml/2006/main"/>
           <a:p xmlns:a="http://schemas.openxmlformats.org/drawingml/2006/main">
             <a:pPr>
-              <a:defRPr sz="2025" b="0">
-                <a:solidFill>
-                  <a:srgbClr val="233542"/>
+              <a:defRPr sz="2700" b="1">
+                <a:solidFill>
+                  <a:srgbClr val="157C87"/>
                 </a:solidFill>
                 <a:latin typeface="Arial"/>
                 <a:ea typeface="Arial"/>
@@ -5139,368 +6113,25 @@
               </a:defRPr>
             </a:pPr>
             <a:r>
-              <a:rPr sz="2025" b="0">
-                <a:solidFill>
-                  <a:srgbClr val="233542"/>
+              <a:rPr sz="2700" b="1">
+                <a:solidFill>
+                  <a:srgbClr val="157C87"/>
                 </a:solidFill>
                 <a:latin typeface="Arial"/>
                 <a:ea typeface="Arial"/>
                 <a:cs typeface="Arial"/>
               </a:rPr>
-              <a:t>A WGS84 anchor moves from longitude -1 degree to +1 degree on the equator at zero height. At time 5, Core linear source interpolation yields longitude zero before ECEF conversion. Each reader returns X = 6378137 m, Y = 0 m, Z = 0 m.</a:t>
+              <a:t>15,822 vertices</a:t>
             </a:r>
           </a:p>
         </p:txBody>
       </p:sp>
-      <p:graphicFrame>
-        <p:nvGraphicFramePr>
-          <p:cNvPr id="8" name=""/>
-          <p:cNvGraphicFramePr/>
-          <p:nvPr/>
-        </p:nvGraphicFramePr>
-        <p:xfrm>
-          <a:off xmlns:a="http://schemas.openxmlformats.org/drawingml/2006/main" x="609600" y="2981325"/>
-          <a:ext xmlns:a="http://schemas.openxmlformats.org/drawingml/2006/main" cx="10972800" cy="1952625"/>
-        </p:xfrm>
-        <a:graphic xmlns:a="http://schemas.openxmlformats.org/drawingml/2006/main">
-          <a:graphicData uri="http://schemas.openxmlformats.org/drawingml/2006/table">
-            <a:tbl>
-              <a:tblPr/>
-              <a:tblGrid>
-                <a:gridCol w="2190750"/>
-                <a:gridCol w="4572000"/>
-                <a:gridCol w="4210050"/>
-              </a:tblGrid>
-              <a:tr h="488156">
-                <a:tc>
-                  <a:txBody>
-                    <a:bodyPr>
-                      <a:noAutofit/>
-                    </a:bodyPr>
-                    <a:lstStyle/>
-                    <a:p>
-                      <a:r>
-                        <a:rPr sz="1950" b="1">
-                          <a:solidFill>
-                            <a:srgbClr val="FFFFFF"/>
-                          </a:solidFill>
-                          <a:latin typeface="Arial"/>
-                          <a:ea typeface="Arial"/>
-                          <a:cs typeface="Arial"/>
-                        </a:rPr>
-                        <a:t>Time code</a:t>
-                      </a:r>
-                    </a:p>
-                  </a:txBody>
-                  <a:tcPr marL="91440" marR="91440" marT="45720" marB="45720">
-                    <a:solidFill>
-                      <a:srgbClr val="233542"/>
-                    </a:solidFill>
-                  </a:tcPr>
-                </a:tc>
-                <a:tc>
-                  <a:txBody>
-                    <a:bodyPr>
-                      <a:noAutofit/>
-                    </a:bodyPr>
-                    <a:lstStyle/>
-                    <a:p>
-                      <a:r>
-                        <a:rPr sz="1950" b="1">
-                          <a:solidFill>
-                            <a:srgbClr val="FFFFFF"/>
-                          </a:solidFill>
-                          <a:latin typeface="Arial"/>
-                          <a:ea typeface="Arial"/>
-                          <a:cs typeface="Arial"/>
-                        </a:rPr>
-                        <a:t>Source longitude (degrees)</a:t>
-                      </a:r>
-                    </a:p>
-                  </a:txBody>
-                  <a:tcPr marL="91440" marR="91440" marT="45720" marB="45720">
-                    <a:solidFill>
-                      <a:srgbClr val="233542"/>
-                    </a:solidFill>
-                  </a:tcPr>
-                </a:tc>
-                <a:tc>
-                  <a:txBody>
-                    <a:bodyPr>
-                      <a:noAutofit/>
-                    </a:bodyPr>
-                    <a:lstStyle/>
-                    <a:p>
-                      <a:r>
-                        <a:rPr sz="1950" b="1">
-                          <a:solidFill>
-                            <a:srgbClr val="FFFFFF"/>
-                          </a:solidFill>
-                          <a:latin typeface="Arial"/>
-                          <a:ea typeface="Arial"/>
-                          <a:cs typeface="Arial"/>
-                        </a:rPr>
-                        <a:t>Resolved ECEF X (m)</a:t>
-                      </a:r>
-                    </a:p>
-                  </a:txBody>
-                  <a:tcPr marL="91440" marR="91440" marT="45720" marB="45720">
-                    <a:solidFill>
-                      <a:srgbClr val="233542"/>
-                    </a:solidFill>
-                  </a:tcPr>
-                </a:tc>
-              </a:tr>
-              <a:tr h="488156">
-                <a:tc>
-                  <a:txBody>
-                    <a:bodyPr>
-                      <a:noAutofit/>
-                    </a:bodyPr>
-                    <a:lstStyle/>
-                    <a:p>
-                      <a:r>
-                        <a:rPr sz="1950" b="0">
-                          <a:solidFill>
-                            <a:srgbClr val="233542"/>
-                          </a:solidFill>
-                          <a:latin typeface="Arial"/>
-                          <a:ea typeface="Arial"/>
-                          <a:cs typeface="Arial"/>
-                        </a:rPr>
-                        <a:t>0</a:t>
-                      </a:r>
-                    </a:p>
-                  </a:txBody>
-                  <a:tcPr marL="91440" marR="91440" marT="45720" marB="45720">
-                    <a:solidFill>
-                      <a:srgbClr val="FFFFFF"/>
-                    </a:solidFill>
-                  </a:tcPr>
-                </a:tc>
-                <a:tc>
-                  <a:txBody>
-                    <a:bodyPr>
-                      <a:noAutofit/>
-                    </a:bodyPr>
-                    <a:lstStyle/>
-                    <a:p>
-                      <a:r>
-                        <a:rPr sz="1950" b="0">
-                          <a:solidFill>
-                            <a:srgbClr val="233542"/>
-                          </a:solidFill>
-                          <a:latin typeface="Arial"/>
-                          <a:ea typeface="Arial"/>
-                          <a:cs typeface="Arial"/>
-                        </a:rPr>
-                        <a:t>-1</a:t>
-                      </a:r>
-                    </a:p>
-                  </a:txBody>
-                  <a:tcPr marL="91440" marR="91440" marT="45720" marB="45720">
-                    <a:solidFill>
-                      <a:srgbClr val="FFFFFF"/>
-                    </a:solidFill>
-                  </a:tcPr>
-                </a:tc>
-                <a:tc>
-                  <a:txBody>
-                    <a:bodyPr>
-                      <a:noAutofit/>
-                    </a:bodyPr>
-                    <a:lstStyle/>
-                    <a:p>
-                      <a:r>
-                        <a:rPr sz="1950" b="0">
-                          <a:solidFill>
-                            <a:srgbClr val="233542"/>
-                          </a:solidFill>
-                          <a:latin typeface="Arial"/>
-                          <a:ea typeface="Arial"/>
-                          <a:cs typeface="Arial"/>
-                        </a:rPr>
-                        <a:t>6377165.578842</a:t>
-                      </a:r>
-                    </a:p>
-                  </a:txBody>
-                  <a:tcPr marL="91440" marR="91440" marT="45720" marB="45720">
-                    <a:solidFill>
-                      <a:srgbClr val="FFFFFF"/>
-                    </a:solidFill>
-                  </a:tcPr>
-                </a:tc>
-              </a:tr>
-              <a:tr h="488156">
-                <a:tc>
-                  <a:txBody>
-                    <a:bodyPr>
-                      <a:noAutofit/>
-                    </a:bodyPr>
-                    <a:lstStyle/>
-                    <a:p>
-                      <a:r>
-                        <a:rPr sz="1950" b="0">
-                          <a:solidFill>
-                            <a:srgbClr val="233542"/>
-                          </a:solidFill>
-                          <a:latin typeface="Arial"/>
-                          <a:ea typeface="Arial"/>
-                          <a:cs typeface="Arial"/>
-                        </a:rPr>
-                        <a:t>5</a:t>
-                      </a:r>
-                    </a:p>
-                  </a:txBody>
-                  <a:tcPr marL="91440" marR="91440" marT="45720" marB="45720">
-                    <a:solidFill>
-                      <a:srgbClr val="FFFFFF"/>
-                    </a:solidFill>
-                  </a:tcPr>
-                </a:tc>
-                <a:tc>
-                  <a:txBody>
-                    <a:bodyPr>
-                      <a:noAutofit/>
-                    </a:bodyPr>
-                    <a:lstStyle/>
-                    <a:p>
-                      <a:r>
-                        <a:rPr sz="1950" b="0">
-                          <a:solidFill>
-                            <a:srgbClr val="233542"/>
-                          </a:solidFill>
-                          <a:latin typeface="Arial"/>
-                          <a:ea typeface="Arial"/>
-                          <a:cs typeface="Arial"/>
-                        </a:rPr>
-                        <a:t>0</a:t>
-                      </a:r>
-                    </a:p>
-                  </a:txBody>
-                  <a:tcPr marL="91440" marR="91440" marT="45720" marB="45720">
-                    <a:solidFill>
-                      <a:srgbClr val="FFFFFF"/>
-                    </a:solidFill>
-                  </a:tcPr>
-                </a:tc>
-                <a:tc>
-                  <a:txBody>
-                    <a:bodyPr>
-                      <a:noAutofit/>
-                    </a:bodyPr>
-                    <a:lstStyle/>
-                    <a:p>
-                      <a:r>
-                        <a:rPr sz="1950" b="0">
-                          <a:solidFill>
-                            <a:srgbClr val="233542"/>
-                          </a:solidFill>
-                          <a:latin typeface="Arial"/>
-                          <a:ea typeface="Arial"/>
-                          <a:cs typeface="Arial"/>
-                        </a:rPr>
-                        <a:t>6378137.000000</a:t>
-                      </a:r>
-                    </a:p>
-                  </a:txBody>
-                  <a:tcPr marL="91440" marR="91440" marT="45720" marB="45720">
-                    <a:solidFill>
-                      <a:srgbClr val="FFFFFF"/>
-                    </a:solidFill>
-                  </a:tcPr>
-                </a:tc>
-              </a:tr>
-              <a:tr h="488156">
-                <a:tc>
-                  <a:txBody>
-                    <a:bodyPr>
-                      <a:noAutofit/>
-                    </a:bodyPr>
-                    <a:lstStyle/>
-                    <a:p>
-                      <a:r>
-                        <a:rPr sz="1950" b="0">
-                          <a:solidFill>
-                            <a:srgbClr val="233542"/>
-                          </a:solidFill>
-                          <a:latin typeface="Arial"/>
-                          <a:ea typeface="Arial"/>
-                          <a:cs typeface="Arial"/>
-                        </a:rPr>
-                        <a:t>10</a:t>
-                      </a:r>
-                    </a:p>
-                  </a:txBody>
-                  <a:tcPr marL="91440" marR="91440" marT="45720" marB="45720">
-                    <a:solidFill>
-                      <a:srgbClr val="FFFFFF"/>
-                    </a:solidFill>
-                  </a:tcPr>
-                </a:tc>
-                <a:tc>
-                  <a:txBody>
-                    <a:bodyPr>
-                      <a:noAutofit/>
-                    </a:bodyPr>
-                    <a:lstStyle/>
-                    <a:p>
-                      <a:r>
-                        <a:rPr sz="1950" b="0">
-                          <a:solidFill>
-                            <a:srgbClr val="233542"/>
-                          </a:solidFill>
-                          <a:latin typeface="Arial"/>
-                          <a:ea typeface="Arial"/>
-                          <a:cs typeface="Arial"/>
-                        </a:rPr>
-                        <a:t>1</a:t>
-                      </a:r>
-                    </a:p>
-                  </a:txBody>
-                  <a:tcPr marL="91440" marR="91440" marT="45720" marB="45720">
-                    <a:solidFill>
-                      <a:srgbClr val="FFFFFF"/>
-                    </a:solidFill>
-                  </a:tcPr>
-                </a:tc>
-                <a:tc>
-                  <a:txBody>
-                    <a:bodyPr>
-                      <a:noAutofit/>
-                    </a:bodyPr>
-                    <a:lstStyle/>
-                    <a:p>
-                      <a:r>
-                        <a:rPr sz="1950" b="0">
-                          <a:solidFill>
-                            <a:srgbClr val="233542"/>
-                          </a:solidFill>
-                          <a:latin typeface="Arial"/>
-                          <a:ea typeface="Arial"/>
-                          <a:cs typeface="Arial"/>
-                        </a:rPr>
-                        <a:t>6377165.578842</a:t>
-                      </a:r>
-                    </a:p>
-                  </a:txBody>
-                  <a:tcPr marL="91440" marR="91440" marT="45720" marB="45720">
-                    <a:solidFill>
-                      <a:srgbClr val="FFFFFF"/>
-                    </a:solidFill>
-                  </a:tcPr>
-                </a:tc>
-              </a:tr>
-            </a:tbl>
-          </a:graphicData>
-        </a:graphic>
-      </p:graphicFrame>
       <p:sp>
         <p:nvSpPr>
           <p:cNvPr id="4" name="">
             <a:extLst xmlns:a="http://schemas.openxmlformats.org/drawingml/2006/main">
               <a:ext uri="{FF2B5EF4-FFF2-40B4-BE49-F238E27FC236}">
-                <a16:creationId xmlns:a16="http://schemas.microsoft.com/office/drawing/2014/main" id="{14BC048D-1A89-4379-8775-C93736667323}"/>
+                <a16:creationId xmlns:a16="http://schemas.microsoft.com/office/drawing/2014/main" id="{E0CD636D-BD57-4162-978C-A47A8179B801}"/>
               </a:ext>
             </a:extLst>
           </p:cNvPr>
@@ -5511,8 +6142,8 @@
         </p:nvSpPr>
         <p:spPr>
           <a:xfrm xmlns:a="http://schemas.openxmlformats.org/drawingml/2006/main">
-            <a:off x="609600" y="5229225"/>
-            <a:ext cx="10972800" cy="714375"/>
+            <a:off x="7200900" y="2686050"/>
+            <a:ext cx="4381500" cy="1914525"/>
           </a:xfrm>
           <a:prstGeom xmlns:a="http://schemas.openxmlformats.org/drawingml/2006/main" prst="rect">
             <a:avLst/>
@@ -5529,9 +6160,9 @@
           <a:lstStyle xmlns:a="http://schemas.openxmlformats.org/drawingml/2006/main"/>
           <a:p xmlns:a="http://schemas.openxmlformats.org/drawingml/2006/main">
             <a:pPr>
-              <a:defRPr sz="2175" b="1">
-                <a:solidFill>
-                  <a:srgbClr val="117E89"/>
+              <a:defRPr sz="2175" b="0">
+                <a:solidFill>
+                  <a:srgbClr val="213744"/>
                 </a:solidFill>
                 <a:latin typeface="Arial"/>
                 <a:ea typeface="Arial"/>
@@ -5539,15 +6170,84 @@
               </a:defRPr>
             </a:pPr>
             <a:r>
-              <a:rPr sz="2175" b="1">
-                <a:solidFill>
-                  <a:srgbClr val="117E89"/>
+              <a:rPr sz="2175" b="0">
+                <a:solidFill>
+                  <a:srgbClr val="213744"/>
                 </a:solidFill>
                 <a:latin typeface="Arial"/>
                 <a:ea typeface="Arial"/>
                 <a:cs typeface="Arial"/>
               </a:rPr>
-              <a:t>Interpolating only the converted endpoints misses the midpoint by 971.421158 m.</a:t>
+              <a:t>2,386 railway parts</a:t>
+            </a:r>
+          </a:p>
+          <a:p xmlns:a="http://schemas.openxmlformats.org/drawingml/2006/main">
+            <a:pPr>
+              <a:defRPr sz="2175" b="0">
+                <a:solidFill>
+                  <a:srgbClr val="213744"/>
+                </a:solidFill>
+                <a:latin typeface="Arial"/>
+                <a:ea typeface="Arial"/>
+                <a:cs typeface="Arial"/>
+              </a:defRPr>
+            </a:pPr>
+            <a:r>
+              <a:rPr sz="2175" b="0">
+                <a:solidFill>
+                  <a:srgbClr val="213744"/>
+                </a:solidFill>
+                <a:latin typeface="Arial"/>
+                <a:ea typeface="Arial"/>
+                <a:cs typeface="Arial"/>
+              </a:rPr>
+              <a:t>Explicit horizontal source copy</a:t>
+            </a:r>
+          </a:p>
+          <a:p xmlns:a="http://schemas.openxmlformats.org/drawingml/2006/main">
+            <a:pPr>
+              <a:defRPr sz="2175" b="0">
+                <a:solidFill>
+                  <a:srgbClr val="213744"/>
+                </a:solidFill>
+                <a:latin typeface="Arial"/>
+                <a:ea typeface="Arial"/>
+                <a:cs typeface="Arial"/>
+              </a:defRPr>
+            </a:pPr>
+            <a:r>
+              <a:rPr sz="2175" b="0">
+                <a:solidFill>
+                  <a:srgbClr val="213744"/>
+                </a:solidFill>
+                <a:latin typeface="Arial"/>
+                <a:ea typeface="Arial"/>
+                <a:cs typeface="Arial"/>
+              </a:rPr>
+              <a:t>UTM 32 output coordinates</a:t>
+            </a:r>
+          </a:p>
+          <a:p xmlns:a="http://schemas.openxmlformats.org/drawingml/2006/main">
+            <a:pPr>
+              <a:defRPr sz="2175" b="0">
+                <a:solidFill>
+                  <a:srgbClr val="213744"/>
+                </a:solidFill>
+                <a:latin typeface="Arial"/>
+                <a:ea typeface="Arial"/>
+                <a:cs typeface="Arial"/>
+              </a:defRPr>
+            </a:pPr>
+            <a:r>
+              <a:rPr sz="2175" b="0">
+                <a:solidFill>
+                  <a:srgbClr val="213744"/>
+                </a:solidFill>
+                <a:latin typeface="Arial"/>
+                <a:ea typeface="Arial"/>
+                <a:cs typeface="Arial"/>
+              </a:rPr>
+              <a:t>Original data retained</a:t>
             </a:r>
           </a:p>
         </p:txBody>
@@ -5557,7 +6257,7 @@
           <p:cNvPr id="5" name="">
             <a:extLst xmlns:a="http://schemas.openxmlformats.org/drawingml/2006/main">
               <a:ext uri="{FF2B5EF4-FFF2-40B4-BE49-F238E27FC236}">
-                <a16:creationId xmlns:a16="http://schemas.microsoft.com/office/drawing/2014/main" id="{1D3775A4-D4FE-4EEB-B3C3-AA30B86204EF}"/>
+                <a16:creationId xmlns:a16="http://schemas.microsoft.com/office/drawing/2014/main" id="{1484FDA2-B72C-4A44-A219-92D5A170FC04}"/>
               </a:ext>
             </a:extLst>
           </p:cNvPr>
@@ -5568,8 +6268,8 @@
         </p:nvSpPr>
         <p:spPr>
           <a:xfrm xmlns:a="http://schemas.openxmlformats.org/drawingml/2006/main">
-            <a:off x="609600" y="6134100"/>
-            <a:ext cx="10972800" cy="504825"/>
+            <a:off x="7200900" y="5095875"/>
+            <a:ext cx="4381500" cy="904875"/>
           </a:xfrm>
           <a:prstGeom xmlns:a="http://schemas.openxmlformats.org/drawingml/2006/main" prst="rect">
             <a:avLst/>
@@ -5586,9 +6286,9 @@
           <a:lstStyle xmlns:a="http://schemas.openxmlformats.org/drawingml/2006/main"/>
           <a:p xmlns:a="http://schemas.openxmlformats.org/drawingml/2006/main">
             <a:pPr>
-              <a:defRPr sz="1650" b="0">
-                <a:solidFill>
-                  <a:srgbClr val="233542"/>
+              <a:defRPr sz="2025" b="0">
+                <a:solidFill>
+                  <a:srgbClr val="A25D20"/>
                 </a:solidFill>
                 <a:latin typeface="Arial"/>
                 <a:ea typeface="Arial"/>
@@ -5596,15 +6296,95 @@
               </a:defRPr>
             </a:pPr>
             <a:r>
+              <a:rPr sz="2025" b="0">
+                <a:solidFill>
+                  <a:srgbClr val="A25D20"/>
+                </a:solidFill>
+                <a:latin typeface="Arial"/>
+                <a:ea typeface="Arial"/>
+                <a:cs typeface="Arial"/>
+              </a:rPr>
+              <a:t>Original third components</a:t>
+            </a:r>
+          </a:p>
+          <a:p xmlns:a="http://schemas.openxmlformats.org/drawingml/2006/main">
+            <a:pPr>
+              <a:defRPr sz="2025" b="0">
+                <a:solidFill>
+                  <a:srgbClr val="A25D20"/>
+                </a:solidFill>
+                <a:latin typeface="Arial"/>
+                <a:ea typeface="Arial"/>
+                <a:cs typeface="Arial"/>
+              </a:defRPr>
+            </a:pPr>
+            <a:r>
+              <a:rPr sz="2025" b="0">
+                <a:solidFill>
+                  <a:srgbClr val="A25D20"/>
+                </a:solidFill>
+                <a:latin typeface="Arial"/>
+                <a:ea typeface="Arial"/>
+                <a:cs typeface="Arial"/>
+              </a:rPr>
+              <a:t>remain uninterpreted.</a:t>
+            </a:r>
+          </a:p>
+        </p:txBody>
+      </p:sp>
+      <p:sp>
+        <p:nvSpPr>
+          <p:cNvPr id="6" name="">
+            <a:extLst xmlns:a="http://schemas.openxmlformats.org/drawingml/2006/main">
+              <a:ext uri="{FF2B5EF4-FFF2-40B4-BE49-F238E27FC236}">
+                <a16:creationId xmlns:a16="http://schemas.microsoft.com/office/drawing/2014/main" id="{0D2ACC8E-6A22-469B-99C9-B0A50A1A364B}"/>
+              </a:ext>
+            </a:extLst>
+          </p:cNvPr>
+          <p:cNvSpPr>
+            <a:spLocks xmlns:a="http://schemas.openxmlformats.org/drawingml/2006/main" noGrp="1"/>
+          </p:cNvSpPr>
+          <p:nvPr/>
+        </p:nvSpPr>
+        <p:spPr>
+          <a:xfrm xmlns:a="http://schemas.openxmlformats.org/drawingml/2006/main">
+            <a:off x="609600" y="6381750"/>
+            <a:ext cx="10972800" cy="333375"/>
+          </a:xfrm>
+          <a:prstGeom xmlns:a="http://schemas.openxmlformats.org/drawingml/2006/main" prst="rect">
+            <a:avLst/>
+          </a:prstGeom>
+          <a:noFill xmlns:a="http://schemas.openxmlformats.org/drawingml/2006/main"/>
+          <a:ln xmlns:a="http://schemas.openxmlformats.org/drawingml/2006/main" w="0">
+            <a:noFill/>
+          </a:ln>
+        </p:spPr>
+        <p:txBody>
+          <a:bodyPr xmlns:a="http://schemas.openxmlformats.org/drawingml/2006/main">
+            <a:noAutofit/>
+          </a:bodyPr>
+          <a:lstStyle xmlns:a="http://schemas.openxmlformats.org/drawingml/2006/main"/>
+          <a:p xmlns:a="http://schemas.openxmlformats.org/drawingml/2006/main">
+            <a:pPr>
+              <a:defRPr sz="1650" b="0">
+                <a:solidFill>
+                  <a:srgbClr val="526B79"/>
+                </a:solidFill>
+                <a:latin typeface="Arial"/>
+                <a:ea typeface="Arial"/>
+                <a:cs typeface="Arial"/>
+              </a:defRPr>
+            </a:pPr>
+            <a:r>
               <a:rPr sz="1650" b="0">
                 <a:solidFill>
-                  <a:srgbClr val="233542"/>
+                  <a:srgbClr val="526B79"/>
                 </a:solidFill>
                 <a:latin typeface="Arial"/>
                 <a:ea typeface="Arial"/>
                 <a:cs typeface="Arial"/>
               </a:rPr>
-              <a:t>Fresh USD sampling record: keys 0, 5, 10 and explicit timeCodesPerSecond 48. This is not a resolved-scene export.</a:t>
+              <a:t>The larger-scale workflows keep useful 2D resolution without inventing height. Plot offsets serve display only.</a:t>
             </a:r>
           </a:p>
         </p:txBody>
@@ -5612,7 +6392,7 @@
     </p:spTree>
     <p:extLst>
       <p:ext uri="{BB962C8B-B14F-4D97-AF65-F5344CB8AC3E}">
-        <p14:creationId xmlns:p14="http://schemas.microsoft.com/office/powerpoint/2010/main" val="575833637"/>
+        <p14:creationId xmlns:p14="http://schemas.microsoft.com/office/powerpoint/2010/main" val="1627296343"/>
       </p:ext>
     </p:extLst>
   </p:cSld>
@@ -5640,10 +6420,10 @@
       </p:grpSpPr>
       <p:sp>
         <p:nvSpPr>
-          <p:cNvPr id="4" name="">
+          <p:cNvPr id="7" name="">
             <a:extLst xmlns:a="http://schemas.openxmlformats.org/drawingml/2006/main">
               <a:ext uri="{FF2B5EF4-FFF2-40B4-BE49-F238E27FC236}">
-                <a16:creationId xmlns:a16="http://schemas.microsoft.com/office/drawing/2014/main" id="{9200D392-AFC4-48D1-9ED7-7BA212F6A2E9}"/>
+                <a16:creationId xmlns:a16="http://schemas.microsoft.com/office/drawing/2014/main" id="{AFBAE026-B2CD-4239-A546-A2DA9AAF02F9}"/>
               </a:ext>
             </a:extLst>
           </p:cNvPr>
@@ -5654,8 +6434,8 @@
         </p:nvSpPr>
         <p:spPr>
           <a:xfrm xmlns:a="http://schemas.openxmlformats.org/drawingml/2006/main">
-            <a:off x="609600" y="381000"/>
-            <a:ext cx="10972800" cy="952500"/>
+            <a:off x="609600" y="333375"/>
+            <a:ext cx="10972800" cy="1047750"/>
           </a:xfrm>
           <a:prstGeom xmlns:a="http://schemas.openxmlformats.org/drawingml/2006/main" prst="rect">
             <a:avLst/>
@@ -5674,7 +6454,7 @@
             <a:pPr>
               <a:defRPr sz="3150" b="1">
                 <a:solidFill>
-                  <a:srgbClr val="233542"/>
+                  <a:srgbClr val="213744"/>
                 </a:solidFill>
                 <a:latin typeface="Arial"/>
                 <a:ea typeface="Arial"/>
@@ -5684,13 +6464,13 @@
             <a:r>
               <a:rPr sz="3150" b="1">
                 <a:solidFill>
-                  <a:srgbClr val="233542"/>
+                  <a:srgbClr val="213744"/>
                 </a:solidFill>
                 <a:latin typeface="Arial"/>
                 <a:ea typeface="Arial"/>
                 <a:cs typeface="Arial"/>
               </a:rPr>
-              <a:t>Postimplementation audit</a:t>
+              <a:t>Matching partner-coordinate queries</a:t>
             </a:r>
           </a:p>
         </p:txBody>
@@ -5700,7 +6480,7 @@
           <p:cNvPr id="2" name="">
             <a:extLst xmlns:a="http://schemas.openxmlformats.org/drawingml/2006/main">
               <a:ext uri="{FF2B5EF4-FFF2-40B4-BE49-F238E27FC236}">
-                <a16:creationId xmlns:a16="http://schemas.microsoft.com/office/drawing/2014/main" id="{24136973-6413-4886-B3A5-DD8C6B6A3647}"/>
+                <a16:creationId xmlns:a16="http://schemas.microsoft.com/office/drawing/2014/main" id="{1069267D-9E75-4280-8DA3-867E3F9EA463}"/>
               </a:ext>
             </a:extLst>
           </p:cNvPr>
@@ -5711,8 +6491,8 @@
         </p:nvSpPr>
         <p:spPr>
           <a:xfrm xmlns:a="http://schemas.openxmlformats.org/drawingml/2006/main">
-            <a:off x="609600" y="1543050"/>
-            <a:ext cx="10972800" cy="2305050"/>
+            <a:off x="609600" y="1485900"/>
+            <a:ext cx="10972800" cy="419100"/>
           </a:xfrm>
           <a:prstGeom xmlns:a="http://schemas.openxmlformats.org/drawingml/2006/main" prst="rect">
             <a:avLst/>
@@ -5729,9 +6509,9 @@
           <a:lstStyle xmlns:a="http://schemas.openxmlformats.org/drawingml/2006/main"/>
           <a:p xmlns:a="http://schemas.openxmlformats.org/drawingml/2006/main">
             <a:pPr>
-              <a:defRPr sz="2175" b="0">
-                <a:solidFill>
-                  <a:srgbClr val="233542"/>
+              <a:defRPr sz="2025" b="1">
+                <a:solidFill>
+                  <a:srgbClr val="157C87"/>
                 </a:solidFill>
                 <a:latin typeface="Arial"/>
                 <a:ea typeface="Arial"/>
@@ -5739,25 +6519,578 @@
               </a:defRPr>
             </a:pPr>
             <a:r>
-              <a:rPr sz="2175" b="0">
-                <a:solidFill>
-                  <a:srgbClr val="233542"/>
+              <a:rPr sz="2025" b="1">
+                <a:solidFill>
+                  <a:srgbClr val="157C87"/>
                 </a:solidFill>
                 <a:latin typeface="Arial"/>
                 <a:ea typeface="Arial"/>
                 <a:cs typeface="Arial"/>
               </a:rPr>
-              <a:t>The audit tightened the partial origin adapter to reject nested/descendant frame requests rather than applying an incomplete model. It also corrected geographic identity reporting to use exact component comparison instead of a length metric. These repairs change consumer support/reporting, add no scene fact and do not amend the proposal to match code. Source fixtures author only crs:wkt and the three candidate placement fields. Resolution rewrites no source xformOps, resetXformStack, definitions, bindings or sampling keys.</a:t>
+              <a:t>France: CC49 to Lambert-93 (metres)</a:t>
             </a:r>
           </a:p>
         </p:txBody>
       </p:sp>
+      <p:graphicFrame>
+        <p:nvGraphicFramePr>
+          <p:cNvPr id="9" name=""/>
+          <p:cNvGraphicFramePr/>
+          <p:nvPr/>
+        </p:nvGraphicFramePr>
+        <p:xfrm>
+          <a:off xmlns:a="http://schemas.openxmlformats.org/drawingml/2006/main" x="609600" y="1990725"/>
+          <a:ext xmlns:a="http://schemas.openxmlformats.org/drawingml/2006/main" cx="10972800" cy="1562100"/>
+        </p:xfrm>
+        <a:graphic xmlns:a="http://schemas.openxmlformats.org/drawingml/2006/main">
+          <a:graphicData uri="http://schemas.openxmlformats.org/drawingml/2006/table">
+            <a:tbl>
+              <a:tblPr/>
+              <a:tblGrid>
+                <a:gridCol w="1809750"/>
+                <a:gridCol w="2219325"/>
+                <a:gridCol w="2219325"/>
+                <a:gridCol w="2219325"/>
+                <a:gridCol w="2505075"/>
+              </a:tblGrid>
+              <a:tr h="390525">
+                <a:tc>
+                  <a:txBody>
+                    <a:bodyPr>
+                      <a:noAutofit/>
+                    </a:bodyPr>
+                    <a:lstStyle/>
+                    <a:p>
+                      <a:r>
+                        <a:rPr sz="1650" b="1">
+                          <a:solidFill>
+                            <a:srgbClr val="FFFFFF"/>
+                          </a:solidFill>
+                          <a:latin typeface="Arial"/>
+                          <a:ea typeface="Arial"/>
+                          <a:cs typeface="Arial"/>
+                        </a:rPr>
+                        <a:t>Component</a:t>
+                      </a:r>
+                    </a:p>
+                  </a:txBody>
+                  <a:tcPr marL="91440" marR="91440" marT="45720" marB="45720">
+                    <a:solidFill>
+                      <a:srgbClr val="213744"/>
+                    </a:solidFill>
+                  </a:tcPr>
+                </a:tc>
+                <a:tc>
+                  <a:txBody>
+                    <a:bodyPr>
+                      <a:noAutofit/>
+                    </a:bodyPr>
+                    <a:lstStyle/>
+                    <a:p>
+                      <a:r>
+                        <a:rPr sz="1650" b="1">
+                          <a:solidFill>
+                            <a:srgbClr val="FFFFFF"/>
+                          </a:solidFill>
+                          <a:latin typeface="Arial"/>
+                          <a:ea typeface="Arial"/>
+                          <a:cs typeface="Arial"/>
+                        </a:rPr>
+                        <a:t>Source</a:t>
+                      </a:r>
+                    </a:p>
+                  </a:txBody>
+                  <a:tcPr marL="91440" marR="91440" marT="45720" marB="45720">
+                    <a:solidFill>
+                      <a:srgbClr val="213744"/>
+                    </a:solidFill>
+                  </a:tcPr>
+                </a:tc>
+                <a:tc>
+                  <a:txBody>
+                    <a:bodyPr>
+                      <a:noAutofit/>
+                    </a:bodyPr>
+                    <a:lstStyle/>
+                    <a:p>
+                      <a:r>
+                        <a:rPr sz="1650" b="1">
+                          <a:solidFill>
+                            <a:srgbClr val="FFFFFF"/>
+                          </a:solidFill>
+                          <a:latin typeface="Arial"/>
+                          <a:ea typeface="Arial"/>
+                          <a:cs typeface="Arial"/>
+                        </a:rPr>
+                        <a:t>USD Python</a:t>
+                      </a:r>
+                    </a:p>
+                  </a:txBody>
+                  <a:tcPr marL="91440" marR="91440" marT="45720" marB="45720">
+                    <a:solidFill>
+                      <a:srgbClr val="213744"/>
+                    </a:solidFill>
+                  </a:tcPr>
+                </a:tc>
+                <a:tc>
+                  <a:txBody>
+                    <a:bodyPr>
+                      <a:noAutofit/>
+                    </a:bodyPr>
+                    <a:lstStyle/>
+                    <a:p>
+                      <a:r>
+                        <a:rPr sz="1650" b="1">
+                          <a:solidFill>
+                            <a:srgbClr val="FFFFFF"/>
+                          </a:solidFill>
+                          <a:latin typeface="Arial"/>
+                          <a:ea typeface="Arial"/>
+                          <a:cs typeface="Arial"/>
+                        </a:rPr>
+                        <a:t>USD C++</a:t>
+                      </a:r>
+                    </a:p>
+                  </a:txBody>
+                  <a:tcPr marL="91440" marR="91440" marT="45720" marB="45720">
+                    <a:solidFill>
+                      <a:srgbClr val="213744"/>
+                    </a:solidFill>
+                  </a:tcPr>
+                </a:tc>
+                <a:tc>
+                  <a:txBody>
+                    <a:bodyPr>
+                      <a:noAutofit/>
+                    </a:bodyPr>
+                    <a:lstStyle/>
+                    <a:p>
+                      <a:r>
+                        <a:rPr sz="1650" b="1">
+                          <a:solidFill>
+                            <a:srgbClr val="FFFFFF"/>
+                          </a:solidFill>
+                          <a:latin typeface="Arial"/>
+                          <a:ea typeface="Arial"/>
+                          <a:cs typeface="Arial"/>
+                        </a:rPr>
+                        <a:t>OV-hosted Python</a:t>
+                      </a:r>
+                    </a:p>
+                  </a:txBody>
+                  <a:tcPr marL="91440" marR="91440" marT="45720" marB="45720">
+                    <a:solidFill>
+                      <a:srgbClr val="213744"/>
+                    </a:solidFill>
+                  </a:tcPr>
+                </a:tc>
+              </a:tr>
+              <a:tr h="390525">
+                <a:tc>
+                  <a:txBody>
+                    <a:bodyPr>
+                      <a:noAutofit/>
+                    </a:bodyPr>
+                    <a:lstStyle/>
+                    <a:p>
+                      <a:r>
+                        <a:rPr sz="1650" b="0">
+                          <a:solidFill>
+                            <a:srgbClr val="213744"/>
+                          </a:solidFill>
+                          <a:latin typeface="Arial"/>
+                          <a:ea typeface="Arial"/>
+                          <a:cs typeface="Arial"/>
+                        </a:rPr>
+                        <a:t>Easting</a:t>
+                      </a:r>
+                    </a:p>
+                  </a:txBody>
+                  <a:tcPr marL="91440" marR="91440" marT="45720" marB="45720">
+                    <a:solidFill>
+                      <a:srgbClr val="FFFFFF"/>
+                    </a:solidFill>
+                  </a:tcPr>
+                </a:tc>
+                <a:tc>
+                  <a:txBody>
+                    <a:bodyPr>
+                      <a:noAutofit/>
+                    </a:bodyPr>
+                    <a:lstStyle/>
+                    <a:p>
+                      <a:r>
+                        <a:rPr sz="1650" b="0">
+                          <a:solidFill>
+                            <a:srgbClr val="213744"/>
+                          </a:solidFill>
+                          <a:latin typeface="Arial"/>
+                          <a:ea typeface="Arial"/>
+                          <a:cs typeface="Arial"/>
+                        </a:rPr>
+                        <a:t>1661099.0390</a:t>
+                      </a:r>
+                    </a:p>
+                  </a:txBody>
+                  <a:tcPr marL="91440" marR="91440" marT="45720" marB="45720">
+                    <a:solidFill>
+                      <a:srgbClr val="FFFFFF"/>
+                    </a:solidFill>
+                  </a:tcPr>
+                </a:tc>
+                <a:tc>
+                  <a:txBody>
+                    <a:bodyPr>
+                      <a:noAutofit/>
+                    </a:bodyPr>
+                    <a:lstStyle/>
+                    <a:p>
+                      <a:r>
+                        <a:rPr sz="1650" b="0">
+                          <a:solidFill>
+                            <a:srgbClr val="213744"/>
+                          </a:solidFill>
+                          <a:latin typeface="Arial"/>
+                          <a:ea typeface="Arial"/>
+                          <a:cs typeface="Arial"/>
+                        </a:rPr>
+                        <a:t>661101.1094</a:t>
+                      </a:r>
+                    </a:p>
+                  </a:txBody>
+                  <a:tcPr marL="91440" marR="91440" marT="45720" marB="45720">
+                    <a:solidFill>
+                      <a:srgbClr val="FFFFFF"/>
+                    </a:solidFill>
+                  </a:tcPr>
+                </a:tc>
+                <a:tc>
+                  <a:txBody>
+                    <a:bodyPr>
+                      <a:noAutofit/>
+                    </a:bodyPr>
+                    <a:lstStyle/>
+                    <a:p>
+                      <a:r>
+                        <a:rPr sz="1650" b="0">
+                          <a:solidFill>
+                            <a:srgbClr val="213744"/>
+                          </a:solidFill>
+                          <a:latin typeface="Arial"/>
+                          <a:ea typeface="Arial"/>
+                          <a:cs typeface="Arial"/>
+                        </a:rPr>
+                        <a:t>661101.1094</a:t>
+                      </a:r>
+                    </a:p>
+                  </a:txBody>
+                  <a:tcPr marL="91440" marR="91440" marT="45720" marB="45720">
+                    <a:solidFill>
+                      <a:srgbClr val="FFFFFF"/>
+                    </a:solidFill>
+                  </a:tcPr>
+                </a:tc>
+                <a:tc>
+                  <a:txBody>
+                    <a:bodyPr>
+                      <a:noAutofit/>
+                    </a:bodyPr>
+                    <a:lstStyle/>
+                    <a:p>
+                      <a:r>
+                        <a:rPr sz="1650" b="0">
+                          <a:solidFill>
+                            <a:srgbClr val="213744"/>
+                          </a:solidFill>
+                          <a:latin typeface="Arial"/>
+                          <a:ea typeface="Arial"/>
+                          <a:cs typeface="Arial"/>
+                        </a:rPr>
+                        <a:t>661101.1094</a:t>
+                      </a:r>
+                    </a:p>
+                  </a:txBody>
+                  <a:tcPr marL="91440" marR="91440" marT="45720" marB="45720">
+                    <a:solidFill>
+                      <a:srgbClr val="FFFFFF"/>
+                    </a:solidFill>
+                  </a:tcPr>
+                </a:tc>
+              </a:tr>
+              <a:tr h="390525">
+                <a:tc>
+                  <a:txBody>
+                    <a:bodyPr>
+                      <a:noAutofit/>
+                    </a:bodyPr>
+                    <a:lstStyle/>
+                    <a:p>
+                      <a:r>
+                        <a:rPr sz="1650" b="0">
+                          <a:solidFill>
+                            <a:srgbClr val="213744"/>
+                          </a:solidFill>
+                          <a:latin typeface="Arial"/>
+                          <a:ea typeface="Arial"/>
+                          <a:cs typeface="Arial"/>
+                        </a:rPr>
+                        <a:t>Northing</a:t>
+                      </a:r>
+                    </a:p>
+                  </a:txBody>
+                  <a:tcPr marL="91440" marR="91440" marT="45720" marB="45720">
+                    <a:solidFill>
+                      <a:srgbClr val="FFFFFF"/>
+                    </a:solidFill>
+                  </a:tcPr>
+                </a:tc>
+                <a:tc>
+                  <a:txBody>
+                    <a:bodyPr>
+                      <a:noAutofit/>
+                    </a:bodyPr>
+                    <a:lstStyle/>
+                    <a:p>
+                      <a:r>
+                        <a:rPr sz="1650" b="0">
+                          <a:solidFill>
+                            <a:srgbClr val="213744"/>
+                          </a:solidFill>
+                          <a:latin typeface="Arial"/>
+                          <a:ea typeface="Arial"/>
+                          <a:cs typeface="Arial"/>
+                        </a:rPr>
+                        <a:t>8180053.1170</a:t>
+                      </a:r>
+                    </a:p>
+                  </a:txBody>
+                  <a:tcPr marL="91440" marR="91440" marT="45720" marB="45720">
+                    <a:solidFill>
+                      <a:srgbClr val="FFFFFF"/>
+                    </a:solidFill>
+                  </a:tcPr>
+                </a:tc>
+                <a:tc>
+                  <a:txBody>
+                    <a:bodyPr>
+                      <a:noAutofit/>
+                    </a:bodyPr>
+                    <a:lstStyle/>
+                    <a:p>
+                      <a:r>
+                        <a:rPr sz="1650" b="0">
+                          <a:solidFill>
+                            <a:srgbClr val="213744"/>
+                          </a:solidFill>
+                          <a:latin typeface="Arial"/>
+                          <a:ea typeface="Arial"/>
+                          <a:cs typeface="Arial"/>
+                        </a:rPr>
+                        <a:t>6857834.2565</a:t>
+                      </a:r>
+                    </a:p>
+                  </a:txBody>
+                  <a:tcPr marL="91440" marR="91440" marT="45720" marB="45720">
+                    <a:solidFill>
+                      <a:srgbClr val="FFFFFF"/>
+                    </a:solidFill>
+                  </a:tcPr>
+                </a:tc>
+                <a:tc>
+                  <a:txBody>
+                    <a:bodyPr>
+                      <a:noAutofit/>
+                    </a:bodyPr>
+                    <a:lstStyle/>
+                    <a:p>
+                      <a:r>
+                        <a:rPr sz="1650" b="0">
+                          <a:solidFill>
+                            <a:srgbClr val="213744"/>
+                          </a:solidFill>
+                          <a:latin typeface="Arial"/>
+                          <a:ea typeface="Arial"/>
+                          <a:cs typeface="Arial"/>
+                        </a:rPr>
+                        <a:t>6857834.2565</a:t>
+                      </a:r>
+                    </a:p>
+                  </a:txBody>
+                  <a:tcPr marL="91440" marR="91440" marT="45720" marB="45720">
+                    <a:solidFill>
+                      <a:srgbClr val="FFFFFF"/>
+                    </a:solidFill>
+                  </a:tcPr>
+                </a:tc>
+                <a:tc>
+                  <a:txBody>
+                    <a:bodyPr>
+                      <a:noAutofit/>
+                    </a:bodyPr>
+                    <a:lstStyle/>
+                    <a:p>
+                      <a:r>
+                        <a:rPr sz="1650" b="0">
+                          <a:solidFill>
+                            <a:srgbClr val="213744"/>
+                          </a:solidFill>
+                          <a:latin typeface="Arial"/>
+                          <a:ea typeface="Arial"/>
+                          <a:cs typeface="Arial"/>
+                        </a:rPr>
+                        <a:t>6857834.2565</a:t>
+                      </a:r>
+                    </a:p>
+                  </a:txBody>
+                  <a:tcPr marL="91440" marR="91440" marT="45720" marB="45720">
+                    <a:solidFill>
+                      <a:srgbClr val="FFFFFF"/>
+                    </a:solidFill>
+                  </a:tcPr>
+                </a:tc>
+              </a:tr>
+              <a:tr h="390525">
+                <a:tc>
+                  <a:txBody>
+                    <a:bodyPr>
+                      <a:noAutofit/>
+                    </a:bodyPr>
+                    <a:lstStyle/>
+                    <a:p>
+                      <a:r>
+                        <a:rPr sz="1650" b="0">
+                          <a:solidFill>
+                            <a:srgbClr val="213744"/>
+                          </a:solidFill>
+                          <a:latin typeface="Arial"/>
+                          <a:ea typeface="Arial"/>
+                          <a:cs typeface="Arial"/>
+                        </a:rPr>
+                        <a:t>Height</a:t>
+                      </a:r>
+                    </a:p>
+                  </a:txBody>
+                  <a:tcPr marL="91440" marR="91440" marT="45720" marB="45720">
+                    <a:solidFill>
+                      <a:srgbClr val="FFFFFF"/>
+                    </a:solidFill>
+                  </a:tcPr>
+                </a:tc>
+                <a:tc>
+                  <a:txBody>
+                    <a:bodyPr>
+                      <a:noAutofit/>
+                    </a:bodyPr>
+                    <a:lstStyle/>
+                    <a:p>
+                      <a:r>
+                        <a:rPr sz="1650" b="0">
+                          <a:solidFill>
+                            <a:srgbClr val="213744"/>
+                          </a:solidFill>
+                          <a:latin typeface="Arial"/>
+                          <a:ea typeface="Arial"/>
+                          <a:cs typeface="Arial"/>
+                        </a:rPr>
+                        <a:t>37.2980</a:t>
+                      </a:r>
+                    </a:p>
+                  </a:txBody>
+                  <a:tcPr marL="91440" marR="91440" marT="45720" marB="45720">
+                    <a:solidFill>
+                      <a:srgbClr val="FFFFFF"/>
+                    </a:solidFill>
+                  </a:tcPr>
+                </a:tc>
+                <a:tc>
+                  <a:txBody>
+                    <a:bodyPr>
+                      <a:noAutofit/>
+                    </a:bodyPr>
+                    <a:lstStyle/>
+                    <a:p>
+                      <a:r>
+                        <a:rPr sz="1650" b="0">
+                          <a:solidFill>
+                            <a:srgbClr val="213744"/>
+                          </a:solidFill>
+                          <a:latin typeface="Arial"/>
+                          <a:ea typeface="Arial"/>
+                          <a:cs typeface="Arial"/>
+                        </a:rPr>
+                        <a:t>37.2980</a:t>
+                      </a:r>
+                    </a:p>
+                  </a:txBody>
+                  <a:tcPr marL="91440" marR="91440" marT="45720" marB="45720">
+                    <a:solidFill>
+                      <a:srgbClr val="FFFFFF"/>
+                    </a:solidFill>
+                  </a:tcPr>
+                </a:tc>
+                <a:tc>
+                  <a:txBody>
+                    <a:bodyPr>
+                      <a:noAutofit/>
+                    </a:bodyPr>
+                    <a:lstStyle/>
+                    <a:p>
+                      <a:r>
+                        <a:rPr sz="1650" b="0">
+                          <a:solidFill>
+                            <a:srgbClr val="213744"/>
+                          </a:solidFill>
+                          <a:latin typeface="Arial"/>
+                          <a:ea typeface="Arial"/>
+                          <a:cs typeface="Arial"/>
+                        </a:rPr>
+                        <a:t>37.2980</a:t>
+                      </a:r>
+                    </a:p>
+                  </a:txBody>
+                  <a:tcPr marL="91440" marR="91440" marT="45720" marB="45720">
+                    <a:solidFill>
+                      <a:srgbClr val="FFFFFF"/>
+                    </a:solidFill>
+                  </a:tcPr>
+                </a:tc>
+                <a:tc>
+                  <a:txBody>
+                    <a:bodyPr>
+                      <a:noAutofit/>
+                    </a:bodyPr>
+                    <a:lstStyle/>
+                    <a:p>
+                      <a:r>
+                        <a:rPr sz="1650" b="0">
+                          <a:solidFill>
+                            <a:srgbClr val="213744"/>
+                          </a:solidFill>
+                          <a:latin typeface="Arial"/>
+                          <a:ea typeface="Arial"/>
+                          <a:cs typeface="Arial"/>
+                        </a:rPr>
+                        <a:t>37.2980</a:t>
+                      </a:r>
+                    </a:p>
+                  </a:txBody>
+                  <a:tcPr marL="91440" marR="91440" marT="45720" marB="45720">
+                    <a:solidFill>
+                      <a:srgbClr val="FFFFFF"/>
+                    </a:solidFill>
+                  </a:tcPr>
+                </a:tc>
+              </a:tr>
+            </a:tbl>
+          </a:graphicData>
+        </a:graphic>
+      </p:graphicFrame>
       <p:sp>
         <p:nvSpPr>
-          <p:cNvPr id="3" name="">
+          <p:cNvPr id="4" name="">
             <a:extLst xmlns:a="http://schemas.openxmlformats.org/drawingml/2006/main">
               <a:ext uri="{FF2B5EF4-FFF2-40B4-BE49-F238E27FC236}">
-                <a16:creationId xmlns:a16="http://schemas.microsoft.com/office/drawing/2014/main" id="{202F0503-142B-4A0E-A635-635C2FAD874F}"/>
+                <a16:creationId xmlns:a16="http://schemas.microsoft.com/office/drawing/2014/main" id="{77D02744-46E5-4595-A8C2-071AC0EC540B}"/>
               </a:ext>
             </a:extLst>
           </p:cNvPr>
@@ -5768,8 +7101,8 @@
         </p:nvSpPr>
         <p:spPr>
           <a:xfrm xmlns:a="http://schemas.openxmlformats.org/drawingml/2006/main">
-            <a:off x="609600" y="4257675"/>
-            <a:ext cx="10972800" cy="2114550"/>
+            <a:off x="609600" y="3810000"/>
+            <a:ext cx="10972800" cy="419100"/>
           </a:xfrm>
           <a:prstGeom xmlns:a="http://schemas.openxmlformats.org/drawingml/2006/main" prst="rect">
             <a:avLst/>
@@ -5786,9 +7119,9 @@
           <a:lstStyle xmlns:a="http://schemas.openxmlformats.org/drawingml/2006/main"/>
           <a:p xmlns:a="http://schemas.openxmlformats.org/drawingml/2006/main">
             <a:pPr>
-              <a:defRPr sz="2025" b="0">
-                <a:solidFill>
-                  <a:srgbClr val="233542"/>
+              <a:defRPr sz="2025" b="1">
+                <a:solidFill>
+                  <a:srgbClr val="157C87"/>
                 </a:solidFill>
                 <a:latin typeface="Arial"/>
                 <a:ea typeface="Arial"/>
@@ -5796,15 +7129,625 @@
               </a:defRPr>
             </a:pPr>
             <a:r>
-              <a:rPr sz="2025" b="0">
-                <a:solidFill>
-                  <a:srgbClr val="233542"/>
+              <a:rPr sz="2025" b="1">
+                <a:solidFill>
+                  <a:srgbClr val="157C87"/>
                 </a:solidFill>
                 <a:latin typeface="Arial"/>
                 <a:ea typeface="Arial"/>
                 <a:cs typeface="Arial"/>
               </a:rPr>
-              <a:t>Full model frames, project-adjusted placement, geometry and bounds, Hydra/OV resolved geometry, measurement-associated data and conservative resolved-scene export depend on the four missing contracts. These partial tests do not certify near-unit quaternion validation policy or geographic-distance controls. Group adoption and geodetic accuracy remain distinct from passing execution.</a:t>
+              <a:t>Colorado: State Plane to calibrated site (US survey feet)</a:t>
+            </a:r>
+          </a:p>
+        </p:txBody>
+      </p:sp>
+      <p:graphicFrame>
+        <p:nvGraphicFramePr>
+          <p:cNvPr id="11" name=""/>
+          <p:cNvGraphicFramePr/>
+          <p:nvPr/>
+        </p:nvGraphicFramePr>
+        <p:xfrm>
+          <a:off xmlns:a="http://schemas.openxmlformats.org/drawingml/2006/main" x="609600" y="4314825"/>
+          <a:ext xmlns:a="http://schemas.openxmlformats.org/drawingml/2006/main" cx="10972800" cy="1562100"/>
+        </p:xfrm>
+        <a:graphic xmlns:a="http://schemas.openxmlformats.org/drawingml/2006/main">
+          <a:graphicData uri="http://schemas.openxmlformats.org/drawingml/2006/table">
+            <a:tbl>
+              <a:tblPr/>
+              <a:tblGrid>
+                <a:gridCol w="1809750"/>
+                <a:gridCol w="2219325"/>
+                <a:gridCol w="2219325"/>
+                <a:gridCol w="2219325"/>
+                <a:gridCol w="2505075"/>
+              </a:tblGrid>
+              <a:tr h="390525">
+                <a:tc>
+                  <a:txBody>
+                    <a:bodyPr>
+                      <a:noAutofit/>
+                    </a:bodyPr>
+                    <a:lstStyle/>
+                    <a:p>
+                      <a:r>
+                        <a:rPr sz="1650" b="1">
+                          <a:solidFill>
+                            <a:srgbClr val="FFFFFF"/>
+                          </a:solidFill>
+                          <a:latin typeface="Arial"/>
+                          <a:ea typeface="Arial"/>
+                          <a:cs typeface="Arial"/>
+                        </a:rPr>
+                        <a:t>Component</a:t>
+                      </a:r>
+                    </a:p>
+                  </a:txBody>
+                  <a:tcPr marL="91440" marR="91440" marT="45720" marB="45720">
+                    <a:solidFill>
+                      <a:srgbClr val="213744"/>
+                    </a:solidFill>
+                  </a:tcPr>
+                </a:tc>
+                <a:tc>
+                  <a:txBody>
+                    <a:bodyPr>
+                      <a:noAutofit/>
+                    </a:bodyPr>
+                    <a:lstStyle/>
+                    <a:p>
+                      <a:r>
+                        <a:rPr sz="1650" b="1">
+                          <a:solidFill>
+                            <a:srgbClr val="FFFFFF"/>
+                          </a:solidFill>
+                          <a:latin typeface="Arial"/>
+                          <a:ea typeface="Arial"/>
+                          <a:cs typeface="Arial"/>
+                        </a:rPr>
+                        <a:t>Source</a:t>
+                      </a:r>
+                    </a:p>
+                  </a:txBody>
+                  <a:tcPr marL="91440" marR="91440" marT="45720" marB="45720">
+                    <a:solidFill>
+                      <a:srgbClr val="213744"/>
+                    </a:solidFill>
+                  </a:tcPr>
+                </a:tc>
+                <a:tc>
+                  <a:txBody>
+                    <a:bodyPr>
+                      <a:noAutofit/>
+                    </a:bodyPr>
+                    <a:lstStyle/>
+                    <a:p>
+                      <a:r>
+                        <a:rPr sz="1650" b="1">
+                          <a:solidFill>
+                            <a:srgbClr val="FFFFFF"/>
+                          </a:solidFill>
+                          <a:latin typeface="Arial"/>
+                          <a:ea typeface="Arial"/>
+                          <a:cs typeface="Arial"/>
+                        </a:rPr>
+                        <a:t>USD Python</a:t>
+                      </a:r>
+                    </a:p>
+                  </a:txBody>
+                  <a:tcPr marL="91440" marR="91440" marT="45720" marB="45720">
+                    <a:solidFill>
+                      <a:srgbClr val="213744"/>
+                    </a:solidFill>
+                  </a:tcPr>
+                </a:tc>
+                <a:tc>
+                  <a:txBody>
+                    <a:bodyPr>
+                      <a:noAutofit/>
+                    </a:bodyPr>
+                    <a:lstStyle/>
+                    <a:p>
+                      <a:r>
+                        <a:rPr sz="1650" b="1">
+                          <a:solidFill>
+                            <a:srgbClr val="FFFFFF"/>
+                          </a:solidFill>
+                          <a:latin typeface="Arial"/>
+                          <a:ea typeface="Arial"/>
+                          <a:cs typeface="Arial"/>
+                        </a:rPr>
+                        <a:t>USD C++</a:t>
+                      </a:r>
+                    </a:p>
+                  </a:txBody>
+                  <a:tcPr marL="91440" marR="91440" marT="45720" marB="45720">
+                    <a:solidFill>
+                      <a:srgbClr val="213744"/>
+                    </a:solidFill>
+                  </a:tcPr>
+                </a:tc>
+                <a:tc>
+                  <a:txBody>
+                    <a:bodyPr>
+                      <a:noAutofit/>
+                    </a:bodyPr>
+                    <a:lstStyle/>
+                    <a:p>
+                      <a:r>
+                        <a:rPr sz="1650" b="1">
+                          <a:solidFill>
+                            <a:srgbClr val="FFFFFF"/>
+                          </a:solidFill>
+                          <a:latin typeface="Arial"/>
+                          <a:ea typeface="Arial"/>
+                          <a:cs typeface="Arial"/>
+                        </a:rPr>
+                        <a:t>OV-hosted Python</a:t>
+                      </a:r>
+                    </a:p>
+                  </a:txBody>
+                  <a:tcPr marL="91440" marR="91440" marT="45720" marB="45720">
+                    <a:solidFill>
+                      <a:srgbClr val="213744"/>
+                    </a:solidFill>
+                  </a:tcPr>
+                </a:tc>
+              </a:tr>
+              <a:tr h="390525">
+                <a:tc>
+                  <a:txBody>
+                    <a:bodyPr>
+                      <a:noAutofit/>
+                    </a:bodyPr>
+                    <a:lstStyle/>
+                    <a:p>
+                      <a:r>
+                        <a:rPr sz="1650" b="0">
+                          <a:solidFill>
+                            <a:srgbClr val="213744"/>
+                          </a:solidFill>
+                          <a:latin typeface="Arial"/>
+                          <a:ea typeface="Arial"/>
+                          <a:cs typeface="Arial"/>
+                        </a:rPr>
+                        <a:t>Easting</a:t>
+                      </a:r>
+                    </a:p>
+                  </a:txBody>
+                  <a:tcPr marL="91440" marR="91440" marT="45720" marB="45720">
+                    <a:solidFill>
+                      <a:srgbClr val="FFFFFF"/>
+                    </a:solidFill>
+                  </a:tcPr>
+                </a:tc>
+                <a:tc>
+                  <a:txBody>
+                    <a:bodyPr>
+                      <a:noAutofit/>
+                    </a:bodyPr>
+                    <a:lstStyle/>
+                    <a:p>
+                      <a:r>
+                        <a:rPr sz="1650" b="0">
+                          <a:solidFill>
+                            <a:srgbClr val="213744"/>
+                          </a:solidFill>
+                          <a:latin typeface="Arial"/>
+                          <a:ea typeface="Arial"/>
+                          <a:cs typeface="Arial"/>
+                        </a:rPr>
+                        <a:t>3108002.1122</a:t>
+                      </a:r>
+                    </a:p>
+                  </a:txBody>
+                  <a:tcPr marL="91440" marR="91440" marT="45720" marB="45720">
+                    <a:solidFill>
+                      <a:srgbClr val="FFFFFF"/>
+                    </a:solidFill>
+                  </a:tcPr>
+                </a:tc>
+                <a:tc>
+                  <a:txBody>
+                    <a:bodyPr>
+                      <a:noAutofit/>
+                    </a:bodyPr>
+                    <a:lstStyle/>
+                    <a:p>
+                      <a:r>
+                        <a:rPr sz="1650" b="0">
+                          <a:solidFill>
+                            <a:srgbClr val="213744"/>
+                          </a:solidFill>
+                          <a:latin typeface="Arial"/>
+                          <a:ea typeface="Arial"/>
+                          <a:cs typeface="Arial"/>
+                        </a:rPr>
+                        <a:t>3108871.4501</a:t>
+                      </a:r>
+                    </a:p>
+                  </a:txBody>
+                  <a:tcPr marL="91440" marR="91440" marT="45720" marB="45720">
+                    <a:solidFill>
+                      <a:srgbClr val="FFFFFF"/>
+                    </a:solidFill>
+                  </a:tcPr>
+                </a:tc>
+                <a:tc>
+                  <a:txBody>
+                    <a:bodyPr>
+                      <a:noAutofit/>
+                    </a:bodyPr>
+                    <a:lstStyle/>
+                    <a:p>
+                      <a:r>
+                        <a:rPr sz="1650" b="0">
+                          <a:solidFill>
+                            <a:srgbClr val="213744"/>
+                          </a:solidFill>
+                          <a:latin typeface="Arial"/>
+                          <a:ea typeface="Arial"/>
+                          <a:cs typeface="Arial"/>
+                        </a:rPr>
+                        <a:t>3108871.4501</a:t>
+                      </a:r>
+                    </a:p>
+                  </a:txBody>
+                  <a:tcPr marL="91440" marR="91440" marT="45720" marB="45720">
+                    <a:solidFill>
+                      <a:srgbClr val="FFFFFF"/>
+                    </a:solidFill>
+                  </a:tcPr>
+                </a:tc>
+                <a:tc>
+                  <a:txBody>
+                    <a:bodyPr>
+                      <a:noAutofit/>
+                    </a:bodyPr>
+                    <a:lstStyle/>
+                    <a:p>
+                      <a:r>
+                        <a:rPr sz="1650" b="0">
+                          <a:solidFill>
+                            <a:srgbClr val="213744"/>
+                          </a:solidFill>
+                          <a:latin typeface="Arial"/>
+                          <a:ea typeface="Arial"/>
+                          <a:cs typeface="Arial"/>
+                        </a:rPr>
+                        <a:t>3108871.4501</a:t>
+                      </a:r>
+                    </a:p>
+                  </a:txBody>
+                  <a:tcPr marL="91440" marR="91440" marT="45720" marB="45720">
+                    <a:solidFill>
+                      <a:srgbClr val="FFFFFF"/>
+                    </a:solidFill>
+                  </a:tcPr>
+                </a:tc>
+              </a:tr>
+              <a:tr h="390525">
+                <a:tc>
+                  <a:txBody>
+                    <a:bodyPr>
+                      <a:noAutofit/>
+                    </a:bodyPr>
+                    <a:lstStyle/>
+                    <a:p>
+                      <a:r>
+                        <a:rPr sz="1650" b="0">
+                          <a:solidFill>
+                            <a:srgbClr val="213744"/>
+                          </a:solidFill>
+                          <a:latin typeface="Arial"/>
+                          <a:ea typeface="Arial"/>
+                          <a:cs typeface="Arial"/>
+                        </a:rPr>
+                        <a:t>Northing</a:t>
+                      </a:r>
+                    </a:p>
+                  </a:txBody>
+                  <a:tcPr marL="91440" marR="91440" marT="45720" marB="45720">
+                    <a:solidFill>
+                      <a:srgbClr val="FFFFFF"/>
+                    </a:solidFill>
+                  </a:tcPr>
+                </a:tc>
+                <a:tc>
+                  <a:txBody>
+                    <a:bodyPr>
+                      <a:noAutofit/>
+                    </a:bodyPr>
+                    <a:lstStyle/>
+                    <a:p>
+                      <a:r>
+                        <a:rPr sz="1650" b="0">
+                          <a:solidFill>
+                            <a:srgbClr val="213744"/>
+                          </a:solidFill>
+                          <a:latin typeface="Arial"/>
+                          <a:ea typeface="Arial"/>
+                          <a:cs typeface="Arial"/>
+                        </a:rPr>
+                        <a:t>1752265.0666</a:t>
+                      </a:r>
+                    </a:p>
+                  </a:txBody>
+                  <a:tcPr marL="91440" marR="91440" marT="45720" marB="45720">
+                    <a:solidFill>
+                      <a:srgbClr val="FFFFFF"/>
+                    </a:solidFill>
+                  </a:tcPr>
+                </a:tc>
+                <a:tc>
+                  <a:txBody>
+                    <a:bodyPr>
+                      <a:noAutofit/>
+                    </a:bodyPr>
+                    <a:lstStyle/>
+                    <a:p>
+                      <a:r>
+                        <a:rPr sz="1650" b="0">
+                          <a:solidFill>
+                            <a:srgbClr val="213744"/>
+                          </a:solidFill>
+                          <a:latin typeface="Arial"/>
+                          <a:ea typeface="Arial"/>
+                          <a:cs typeface="Arial"/>
+                        </a:rPr>
+                        <a:t>1206317.4694</a:t>
+                      </a:r>
+                    </a:p>
+                  </a:txBody>
+                  <a:tcPr marL="91440" marR="91440" marT="45720" marB="45720">
+                    <a:solidFill>
+                      <a:srgbClr val="FFFFFF"/>
+                    </a:solidFill>
+                  </a:tcPr>
+                </a:tc>
+                <a:tc>
+                  <a:txBody>
+                    <a:bodyPr>
+                      <a:noAutofit/>
+                    </a:bodyPr>
+                    <a:lstStyle/>
+                    <a:p>
+                      <a:r>
+                        <a:rPr sz="1650" b="0">
+                          <a:solidFill>
+                            <a:srgbClr val="213744"/>
+                          </a:solidFill>
+                          <a:latin typeface="Arial"/>
+                          <a:ea typeface="Arial"/>
+                          <a:cs typeface="Arial"/>
+                        </a:rPr>
+                        <a:t>1206317.4694</a:t>
+                      </a:r>
+                    </a:p>
+                  </a:txBody>
+                  <a:tcPr marL="91440" marR="91440" marT="45720" marB="45720">
+                    <a:solidFill>
+                      <a:srgbClr val="FFFFFF"/>
+                    </a:solidFill>
+                  </a:tcPr>
+                </a:tc>
+                <a:tc>
+                  <a:txBody>
+                    <a:bodyPr>
+                      <a:noAutofit/>
+                    </a:bodyPr>
+                    <a:lstStyle/>
+                    <a:p>
+                      <a:r>
+                        <a:rPr sz="1650" b="0">
+                          <a:solidFill>
+                            <a:srgbClr val="213744"/>
+                          </a:solidFill>
+                          <a:latin typeface="Arial"/>
+                          <a:ea typeface="Arial"/>
+                          <a:cs typeface="Arial"/>
+                        </a:rPr>
+                        <a:t>1206317.4694</a:t>
+                      </a:r>
+                    </a:p>
+                  </a:txBody>
+                  <a:tcPr marL="91440" marR="91440" marT="45720" marB="45720">
+                    <a:solidFill>
+                      <a:srgbClr val="FFFFFF"/>
+                    </a:solidFill>
+                  </a:tcPr>
+                </a:tc>
+              </a:tr>
+              <a:tr h="390525">
+                <a:tc>
+                  <a:txBody>
+                    <a:bodyPr>
+                      <a:noAutofit/>
+                    </a:bodyPr>
+                    <a:lstStyle/>
+                    <a:p>
+                      <a:r>
+                        <a:rPr sz="1650" b="0">
+                          <a:solidFill>
+                            <a:srgbClr val="213744"/>
+                          </a:solidFill>
+                          <a:latin typeface="Arial"/>
+                          <a:ea typeface="Arial"/>
+                          <a:cs typeface="Arial"/>
+                        </a:rPr>
+                        <a:t>Height</a:t>
+                      </a:r>
+                    </a:p>
+                  </a:txBody>
+                  <a:tcPr marL="91440" marR="91440" marT="45720" marB="45720">
+                    <a:solidFill>
+                      <a:srgbClr val="FFFFFF"/>
+                    </a:solidFill>
+                  </a:tcPr>
+                </a:tc>
+                <a:tc>
+                  <a:txBody>
+                    <a:bodyPr>
+                      <a:noAutofit/>
+                    </a:bodyPr>
+                    <a:lstStyle/>
+                    <a:p>
+                      <a:r>
+                        <a:rPr sz="1650" b="0">
+                          <a:solidFill>
+                            <a:srgbClr val="213744"/>
+                          </a:solidFill>
+                          <a:latin typeface="Arial"/>
+                          <a:ea typeface="Arial"/>
+                          <a:cs typeface="Arial"/>
+                        </a:rPr>
+                        <a:t>5482.9424</a:t>
+                      </a:r>
+                    </a:p>
+                  </a:txBody>
+                  <a:tcPr marL="91440" marR="91440" marT="45720" marB="45720">
+                    <a:solidFill>
+                      <a:srgbClr val="FFFFFF"/>
+                    </a:solidFill>
+                  </a:tcPr>
+                </a:tc>
+                <a:tc>
+                  <a:txBody>
+                    <a:bodyPr>
+                      <a:noAutofit/>
+                    </a:bodyPr>
+                    <a:lstStyle/>
+                    <a:p>
+                      <a:r>
+                        <a:rPr sz="1650" b="0">
+                          <a:solidFill>
+                            <a:srgbClr val="213744"/>
+                          </a:solidFill>
+                          <a:latin typeface="Arial"/>
+                          <a:ea typeface="Arial"/>
+                          <a:cs typeface="Arial"/>
+                        </a:rPr>
+                        <a:t>5484.6779</a:t>
+                      </a:r>
+                    </a:p>
+                  </a:txBody>
+                  <a:tcPr marL="91440" marR="91440" marT="45720" marB="45720">
+                    <a:solidFill>
+                      <a:srgbClr val="FFFFFF"/>
+                    </a:solidFill>
+                  </a:tcPr>
+                </a:tc>
+                <a:tc>
+                  <a:txBody>
+                    <a:bodyPr>
+                      <a:noAutofit/>
+                    </a:bodyPr>
+                    <a:lstStyle/>
+                    <a:p>
+                      <a:r>
+                        <a:rPr sz="1650" b="0">
+                          <a:solidFill>
+                            <a:srgbClr val="213744"/>
+                          </a:solidFill>
+                          <a:latin typeface="Arial"/>
+                          <a:ea typeface="Arial"/>
+                          <a:cs typeface="Arial"/>
+                        </a:rPr>
+                        <a:t>5484.6779</a:t>
+                      </a:r>
+                    </a:p>
+                  </a:txBody>
+                  <a:tcPr marL="91440" marR="91440" marT="45720" marB="45720">
+                    <a:solidFill>
+                      <a:srgbClr val="FFFFFF"/>
+                    </a:solidFill>
+                  </a:tcPr>
+                </a:tc>
+                <a:tc>
+                  <a:txBody>
+                    <a:bodyPr>
+                      <a:noAutofit/>
+                    </a:bodyPr>
+                    <a:lstStyle/>
+                    <a:p>
+                      <a:r>
+                        <a:rPr sz="1650" b="0">
+                          <a:solidFill>
+                            <a:srgbClr val="213744"/>
+                          </a:solidFill>
+                          <a:latin typeface="Arial"/>
+                          <a:ea typeface="Arial"/>
+                          <a:cs typeface="Arial"/>
+                        </a:rPr>
+                        <a:t>5484.6779</a:t>
+                      </a:r>
+                    </a:p>
+                  </a:txBody>
+                  <a:tcPr marL="91440" marR="91440" marT="45720" marB="45720">
+                    <a:solidFill>
+                      <a:srgbClr val="FFFFFF"/>
+                    </a:solidFill>
+                  </a:tcPr>
+                </a:tc>
+              </a:tr>
+            </a:tbl>
+          </a:graphicData>
+        </a:graphic>
+      </p:graphicFrame>
+      <p:sp>
+        <p:nvSpPr>
+          <p:cNvPr id="6" name="">
+            <a:extLst xmlns:a="http://schemas.openxmlformats.org/drawingml/2006/main">
+              <a:ext uri="{FF2B5EF4-FFF2-40B4-BE49-F238E27FC236}">
+                <a16:creationId xmlns:a16="http://schemas.microsoft.com/office/drawing/2014/main" id="{971E5FB3-A62D-46BE-B100-77AF36224FED}"/>
+              </a:ext>
+            </a:extLst>
+          </p:cNvPr>
+          <p:cNvSpPr>
+            <a:spLocks xmlns:a="http://schemas.openxmlformats.org/drawingml/2006/main" noGrp="1"/>
+          </p:cNvSpPr>
+          <p:nvPr/>
+        </p:nvSpPr>
+        <p:spPr>
+          <a:xfrm xmlns:a="http://schemas.openxmlformats.org/drawingml/2006/main">
+            <a:off x="609600" y="6238875"/>
+            <a:ext cx="10972800" cy="523875"/>
+          </a:xfrm>
+          <a:prstGeom xmlns:a="http://schemas.openxmlformats.org/drawingml/2006/main" prst="rect">
+            <a:avLst/>
+          </a:prstGeom>
+          <a:noFill xmlns:a="http://schemas.openxmlformats.org/drawingml/2006/main"/>
+          <a:ln xmlns:a="http://schemas.openxmlformats.org/drawingml/2006/main" w="0">
+            <a:noFill/>
+          </a:ln>
+        </p:spPr>
+        <p:txBody>
+          <a:bodyPr xmlns:a="http://schemas.openxmlformats.org/drawingml/2006/main">
+            <a:noAutofit/>
+          </a:bodyPr>
+          <a:lstStyle xmlns:a="http://schemas.openxmlformats.org/drawingml/2006/main"/>
+          <a:p xmlns:a="http://schemas.openxmlformats.org/drawingml/2006/main">
+            <a:pPr>
+              <a:defRPr sz="1650" b="0">
+                <a:solidFill>
+                  <a:srgbClr val="526B79"/>
+                </a:solidFill>
+                <a:latin typeface="Arial"/>
+                <a:ea typeface="Arial"/>
+                <a:cs typeface="Arial"/>
+              </a:defRPr>
+            </a:pPr>
+            <a:r>
+              <a:rPr sz="1650" b="0">
+                <a:solidFill>
+                  <a:srgbClr val="526B79"/>
+                </a:solidFill>
+                <a:latin typeface="Arial"/>
+                <a:ea typeface="Arial"/>
+                <a:cs typeface="Arial"/>
+              </a:rPr>
+              <a:t>Both USD implementations agree. OV reuses Python placement. All paths share PROJ; these comparisons do not certify survey accuracy.</a:t>
             </a:r>
           </a:p>
         </p:txBody>
@@ -5812,7 +7755,429 @@
     </p:spTree>
     <p:extLst>
       <p:ext uri="{BB962C8B-B14F-4D97-AF65-F5344CB8AC3E}">
-        <p14:creationId xmlns:p14="http://schemas.microsoft.com/office/powerpoint/2010/main" val="40831956"/>
+        <p14:creationId xmlns:p14="http://schemas.microsoft.com/office/powerpoint/2010/main" val="1282784304"/>
+      </p:ext>
+    </p:extLst>
+  </p:cSld>
+</p:sld>
+</file>
+
+<file path=ppt/slides/slide9.xml><?xml version="1.0" encoding="utf-8"?>
+<p:sld xmlns:p="http://schemas.openxmlformats.org/presentationml/2006/main">
+  <p:cSld>
+    <p:bg>
+      <p:bgPr>
+        <a:solidFill xmlns:a="http://schemas.openxmlformats.org/drawingml/2006/main">
+          <a:srgbClr val="FFFFFF"/>
+        </a:solidFill>
+      </p:bgPr>
+    </p:bg>
+    <p:spTree>
+      <p:nvGrpSpPr>
+        <p:cNvPr id="1" name=""/>
+        <p:cNvGrpSpPr/>
+        <p:nvPr/>
+      </p:nvGrpSpPr>
+      <p:grpSpPr>
+        <a:xfrm xmlns:a="http://schemas.openxmlformats.org/drawingml/2006/main"/>
+      </p:grpSpPr>
+      <p:sp>
+        <p:nvSpPr>
+          <p:cNvPr id="7" name="">
+            <a:extLst xmlns:a="http://schemas.openxmlformats.org/drawingml/2006/main">
+              <a:ext uri="{FF2B5EF4-FFF2-40B4-BE49-F238E27FC236}">
+                <a16:creationId xmlns:a16="http://schemas.microsoft.com/office/drawing/2014/main" id="{421708AB-6346-48CF-810D-08E480E0C8B6}"/>
+              </a:ext>
+            </a:extLst>
+          </p:cNvPr>
+          <p:cNvSpPr>
+            <a:spLocks xmlns:a="http://schemas.openxmlformats.org/drawingml/2006/main" noGrp="1"/>
+          </p:cNvSpPr>
+          <p:nvPr/>
+        </p:nvSpPr>
+        <p:spPr>
+          <a:xfrm xmlns:a="http://schemas.openxmlformats.org/drawingml/2006/main">
+            <a:off x="609600" y="333375"/>
+            <a:ext cx="10972800" cy="1047750"/>
+          </a:xfrm>
+          <a:prstGeom xmlns:a="http://schemas.openxmlformats.org/drawingml/2006/main" prst="rect">
+            <a:avLst/>
+          </a:prstGeom>
+          <a:noFill xmlns:a="http://schemas.openxmlformats.org/drawingml/2006/main"/>
+          <a:ln xmlns:a="http://schemas.openxmlformats.org/drawingml/2006/main" w="0">
+            <a:noFill/>
+          </a:ln>
+        </p:spPr>
+        <p:txBody>
+          <a:bodyPr xmlns:a="http://schemas.openxmlformats.org/drawingml/2006/main">
+            <a:noAutofit/>
+          </a:bodyPr>
+          <a:lstStyle xmlns:a="http://schemas.openxmlformats.org/drawingml/2006/main"/>
+          <a:p xmlns:a="http://schemas.openxmlformats.org/drawingml/2006/main">
+            <a:pPr>
+              <a:defRPr sz="3150" b="1">
+                <a:solidFill>
+                  <a:srgbClr val="213744"/>
+                </a:solidFill>
+                <a:latin typeface="Arial"/>
+                <a:ea typeface="Arial"/>
+                <a:cs typeface="Arial"/>
+              </a:defRPr>
+            </a:pPr>
+            <a:r>
+              <a:rPr sz="3150" b="1">
+                <a:solidFill>
+                  <a:srgbClr val="213744"/>
+                </a:solidFill>
+                <a:latin typeface="Arial"/>
+                <a:ea typeface="Arial"/>
+                <a:cs typeface="Arial"/>
+              </a:rPr>
+              <a:t>Source interpolation and sampled exports</a:t>
+            </a:r>
+          </a:p>
+        </p:txBody>
+      </p:sp>
+      <p:graphicFrame>
+        <p:nvGraphicFramePr>
+          <p:cNvPr id="8" name="Chart"/>
+          <p:cNvGraphicFramePr/>
+          <p:nvPr/>
+        </p:nvGraphicFramePr>
+        <p:xfrm>
+          <a:off xmlns:a="http://schemas.openxmlformats.org/drawingml/2006/main" x="428625" y="1552575"/>
+          <a:ext xmlns:a="http://schemas.openxmlformats.org/drawingml/2006/main" cx="7162800" cy="4105275"/>
+        </p:xfrm>
+        <a:graphic xmlns:a="http://schemas.openxmlformats.org/drawingml/2006/main">
+          <a:graphicData uri="http://schemas.openxmlformats.org/drawingml/2006/chart">
+            <c:chart xmlns:r="http://schemas.openxmlformats.org/officeDocument/2006/relationships" xmlns:c="http://schemas.openxmlformats.org/drawingml/2006/chart" r:id="R2acb5832f09e4f68"/>
+          </a:graphicData>
+        </a:graphic>
+      </p:graphicFrame>
+      <p:sp>
+        <p:nvSpPr>
+          <p:cNvPr id="3" name="">
+            <a:extLst xmlns:a="http://schemas.openxmlformats.org/drawingml/2006/main">
+              <a:ext uri="{FF2B5EF4-FFF2-40B4-BE49-F238E27FC236}">
+                <a16:creationId xmlns:a16="http://schemas.microsoft.com/office/drawing/2014/main" id="{47B9A050-DCED-4F08-BFB8-FE985A7C0ADE}"/>
+              </a:ext>
+            </a:extLst>
+          </p:cNvPr>
+          <p:cNvSpPr>
+            <a:spLocks xmlns:a="http://schemas.openxmlformats.org/drawingml/2006/main" noGrp="1"/>
+          </p:cNvSpPr>
+          <p:nvPr/>
+        </p:nvSpPr>
+        <p:spPr>
+          <a:xfrm xmlns:a="http://schemas.openxmlformats.org/drawingml/2006/main">
+            <a:off x="8020050" y="1924050"/>
+            <a:ext cx="3562350" cy="590550"/>
+          </a:xfrm>
+          <a:prstGeom xmlns:a="http://schemas.openxmlformats.org/drawingml/2006/main" prst="rect">
+            <a:avLst/>
+          </a:prstGeom>
+          <a:noFill xmlns:a="http://schemas.openxmlformats.org/drawingml/2006/main"/>
+          <a:ln xmlns:a="http://schemas.openxmlformats.org/drawingml/2006/main" w="0">
+            <a:noFill/>
+          </a:ln>
+        </p:spPr>
+        <p:txBody>
+          <a:bodyPr xmlns:a="http://schemas.openxmlformats.org/drawingml/2006/main">
+            <a:noAutofit/>
+          </a:bodyPr>
+          <a:lstStyle xmlns:a="http://schemas.openxmlformats.org/drawingml/2006/main"/>
+          <a:p xmlns:a="http://schemas.openxmlformats.org/drawingml/2006/main">
+            <a:pPr>
+              <a:defRPr sz="3000" b="1">
+                <a:solidFill>
+                  <a:srgbClr val="157C87"/>
+                </a:solidFill>
+                <a:latin typeface="Arial"/>
+                <a:ea typeface="Arial"/>
+                <a:cs typeface="Arial"/>
+              </a:defRPr>
+            </a:pPr>
+            <a:r>
+              <a:rPr sz="3000" b="1">
+                <a:solidFill>
+                  <a:srgbClr val="157C87"/>
+                </a:solidFill>
+                <a:latin typeface="Arial"/>
+                <a:ea typeface="Arial"/>
+                <a:cs typeface="Arial"/>
+              </a:rPr>
+              <a:t>971.421 m</a:t>
+            </a:r>
+          </a:p>
+        </p:txBody>
+      </p:sp>
+      <p:sp>
+        <p:nvSpPr>
+          <p:cNvPr id="4" name="">
+            <a:extLst xmlns:a="http://schemas.openxmlformats.org/drawingml/2006/main">
+              <a:ext uri="{FF2B5EF4-FFF2-40B4-BE49-F238E27FC236}">
+                <a16:creationId xmlns:a16="http://schemas.microsoft.com/office/drawing/2014/main" id="{E4861F78-5378-4928-9712-BF317081974C}"/>
+              </a:ext>
+            </a:extLst>
+          </p:cNvPr>
+          <p:cNvSpPr>
+            <a:spLocks xmlns:a="http://schemas.openxmlformats.org/drawingml/2006/main" noGrp="1"/>
+          </p:cNvSpPr>
+          <p:nvPr/>
+        </p:nvSpPr>
+        <p:spPr>
+          <a:xfrm xmlns:a="http://schemas.openxmlformats.org/drawingml/2006/main">
+            <a:off x="8020050" y="2781300"/>
+            <a:ext cx="3562350" cy="1257300"/>
+          </a:xfrm>
+          <a:prstGeom xmlns:a="http://schemas.openxmlformats.org/drawingml/2006/main" prst="rect">
+            <a:avLst/>
+          </a:prstGeom>
+          <a:noFill xmlns:a="http://schemas.openxmlformats.org/drawingml/2006/main"/>
+          <a:ln xmlns:a="http://schemas.openxmlformats.org/drawingml/2006/main" w="0">
+            <a:noFill/>
+          </a:ln>
+        </p:spPr>
+        <p:txBody>
+          <a:bodyPr xmlns:a="http://schemas.openxmlformats.org/drawingml/2006/main">
+            <a:noAutofit/>
+          </a:bodyPr>
+          <a:lstStyle xmlns:a="http://schemas.openxmlformats.org/drawingml/2006/main"/>
+          <a:p xmlns:a="http://schemas.openxmlformats.org/drawingml/2006/main">
+            <a:pPr>
+              <a:defRPr sz="2100" b="0">
+                <a:solidFill>
+                  <a:srgbClr val="213744"/>
+                </a:solidFill>
+                <a:latin typeface="Arial"/>
+                <a:ea typeface="Arial"/>
+                <a:cs typeface="Arial"/>
+              </a:defRPr>
+            </a:pPr>
+            <a:r>
+              <a:rPr sz="2100" b="0">
+                <a:solidFill>
+                  <a:srgbClr val="213744"/>
+                </a:solidFill>
+                <a:latin typeface="Arial"/>
+                <a:ea typeface="Arial"/>
+                <a:cs typeface="Arial"/>
+              </a:rPr>
+              <a:t>Midpoint difference from</a:t>
+            </a:r>
+          </a:p>
+          <a:p xmlns:a="http://schemas.openxmlformats.org/drawingml/2006/main">
+            <a:pPr>
+              <a:defRPr sz="2100" b="0">
+                <a:solidFill>
+                  <a:srgbClr val="213744"/>
+                </a:solidFill>
+                <a:latin typeface="Arial"/>
+                <a:ea typeface="Arial"/>
+                <a:cs typeface="Arial"/>
+              </a:defRPr>
+            </a:pPr>
+            <a:r>
+              <a:rPr sz="2100" b="0">
+                <a:solidFill>
+                  <a:srgbClr val="213744"/>
+                </a:solidFill>
+                <a:latin typeface="Arial"/>
+                <a:ea typeface="Arial"/>
+                <a:cs typeface="Arial"/>
+              </a:rPr>
+              <a:t>interpolating only the</a:t>
+            </a:r>
+          </a:p>
+          <a:p xmlns:a="http://schemas.openxmlformats.org/drawingml/2006/main">
+            <a:pPr>
+              <a:defRPr sz="2100" b="0">
+                <a:solidFill>
+                  <a:srgbClr val="213744"/>
+                </a:solidFill>
+                <a:latin typeface="Arial"/>
+                <a:ea typeface="Arial"/>
+                <a:cs typeface="Arial"/>
+              </a:defRPr>
+            </a:pPr>
+            <a:r>
+              <a:rPr sz="2100" b="0">
+                <a:solidFill>
+                  <a:srgbClr val="213744"/>
+                </a:solidFill>
+                <a:latin typeface="Arial"/>
+                <a:ea typeface="Arial"/>
+                <a:cs typeface="Arial"/>
+              </a:rPr>
+              <a:t>converted endpoints.</a:t>
+            </a:r>
+          </a:p>
+        </p:txBody>
+      </p:sp>
+      <p:sp>
+        <p:nvSpPr>
+          <p:cNvPr id="5" name="">
+            <a:extLst xmlns:a="http://schemas.openxmlformats.org/drawingml/2006/main">
+              <a:ext uri="{FF2B5EF4-FFF2-40B4-BE49-F238E27FC236}">
+                <a16:creationId xmlns:a16="http://schemas.microsoft.com/office/drawing/2014/main" id="{EF7046D7-D8BA-4117-B4FD-04AFA93EC6C6}"/>
+              </a:ext>
+            </a:extLst>
+          </p:cNvPr>
+          <p:cNvSpPr>
+            <a:spLocks xmlns:a="http://schemas.openxmlformats.org/drawingml/2006/main" noGrp="1"/>
+          </p:cNvSpPr>
+          <p:nvPr/>
+        </p:nvSpPr>
+        <p:spPr>
+          <a:xfrm xmlns:a="http://schemas.openxmlformats.org/drawingml/2006/main">
+            <a:off x="8020050" y="4505325"/>
+            <a:ext cx="3562350" cy="1095375"/>
+          </a:xfrm>
+          <a:prstGeom xmlns:a="http://schemas.openxmlformats.org/drawingml/2006/main" prst="rect">
+            <a:avLst/>
+          </a:prstGeom>
+          <a:noFill xmlns:a="http://schemas.openxmlformats.org/drawingml/2006/main"/>
+          <a:ln xmlns:a="http://schemas.openxmlformats.org/drawingml/2006/main" w="0">
+            <a:noFill/>
+          </a:ln>
+        </p:spPr>
+        <p:txBody>
+          <a:bodyPr xmlns:a="http://schemas.openxmlformats.org/drawingml/2006/main">
+            <a:noAutofit/>
+          </a:bodyPr>
+          <a:lstStyle xmlns:a="http://schemas.openxmlformats.org/drawingml/2006/main"/>
+          <a:p xmlns:a="http://schemas.openxmlformats.org/drawingml/2006/main">
+            <a:pPr>
+              <a:defRPr sz="2025" b="0">
+                <a:solidFill>
+                  <a:srgbClr val="213744"/>
+                </a:solidFill>
+                <a:latin typeface="Arial"/>
+                <a:ea typeface="Arial"/>
+                <a:cs typeface="Arial"/>
+              </a:defRPr>
+            </a:pPr>
+            <a:r>
+              <a:rPr sz="2025" b="0">
+                <a:solidFill>
+                  <a:srgbClr val="213744"/>
+                </a:solidFill>
+                <a:latin typeface="Arial"/>
+                <a:ea typeface="Arial"/>
+                <a:cs typeface="Arial"/>
+              </a:rPr>
+              <a:t>Fresh geometry exports</a:t>
+            </a:r>
+          </a:p>
+          <a:p xmlns:a="http://schemas.openxmlformats.org/drawingml/2006/main">
+            <a:pPr>
+              <a:defRPr sz="2025" b="0">
+                <a:solidFill>
+                  <a:srgbClr val="213744"/>
+                </a:solidFill>
+                <a:latin typeface="Arial"/>
+                <a:ea typeface="Arial"/>
+                <a:cs typeface="Arial"/>
+              </a:defRPr>
+            </a:pPr>
+            <a:r>
+              <a:rPr sz="2025" b="0">
+                <a:solidFill>
+                  <a:srgbClr val="213744"/>
+                </a:solidFill>
+                <a:latin typeface="Arial"/>
+                <a:ea typeface="Arial"/>
+                <a:cs typeface="Arial"/>
+              </a:rPr>
+              <a:t>Sample keys 0, 5, 10</a:t>
+            </a:r>
+          </a:p>
+          <a:p xmlns:a="http://schemas.openxmlformats.org/drawingml/2006/main">
+            <a:pPr>
+              <a:defRPr sz="2025" b="0">
+                <a:solidFill>
+                  <a:srgbClr val="213744"/>
+                </a:solidFill>
+                <a:latin typeface="Arial"/>
+                <a:ea typeface="Arial"/>
+                <a:cs typeface="Arial"/>
+              </a:defRPr>
+            </a:pPr>
+            <a:r>
+              <a:rPr sz="2025" b="0">
+                <a:solidFill>
+                  <a:srgbClr val="213744"/>
+                </a:solidFill>
+                <a:latin typeface="Arial"/>
+                <a:ea typeface="Arial"/>
+                <a:cs typeface="Arial"/>
+              </a:rPr>
+              <a:t>timeCodesPerSecond = 48</a:t>
+            </a:r>
+          </a:p>
+        </p:txBody>
+      </p:sp>
+      <p:sp>
+        <p:nvSpPr>
+          <p:cNvPr id="6" name="">
+            <a:extLst xmlns:a="http://schemas.openxmlformats.org/drawingml/2006/main">
+              <a:ext uri="{FF2B5EF4-FFF2-40B4-BE49-F238E27FC236}">
+                <a16:creationId xmlns:a16="http://schemas.microsoft.com/office/drawing/2014/main" id="{4A233801-AEA9-4C37-B558-5A128844A9FF}"/>
+              </a:ext>
+            </a:extLst>
+          </p:cNvPr>
+          <p:cNvSpPr>
+            <a:spLocks xmlns:a="http://schemas.openxmlformats.org/drawingml/2006/main" noGrp="1"/>
+          </p:cNvSpPr>
+          <p:nvPr/>
+        </p:nvSpPr>
+        <p:spPr>
+          <a:xfrm xmlns:a="http://schemas.openxmlformats.org/drawingml/2006/main">
+            <a:off x="609600" y="6105525"/>
+            <a:ext cx="10972800" cy="666750"/>
+          </a:xfrm>
+          <a:prstGeom xmlns:a="http://schemas.openxmlformats.org/drawingml/2006/main" prst="rect">
+            <a:avLst/>
+          </a:prstGeom>
+          <a:noFill xmlns:a="http://schemas.openxmlformats.org/drawingml/2006/main"/>
+          <a:ln xmlns:a="http://schemas.openxmlformats.org/drawingml/2006/main" w="0">
+            <a:noFill/>
+          </a:ln>
+        </p:spPr>
+        <p:txBody>
+          <a:bodyPr xmlns:a="http://schemas.openxmlformats.org/drawingml/2006/main">
+            <a:noAutofit/>
+          </a:bodyPr>
+          <a:lstStyle xmlns:a="http://schemas.openxmlformats.org/drawingml/2006/main"/>
+          <a:p xmlns:a="http://schemas.openxmlformats.org/drawingml/2006/main">
+            <a:pPr>
+              <a:defRPr sz="1800" b="0">
+                <a:solidFill>
+                  <a:srgbClr val="526B79"/>
+                </a:solidFill>
+                <a:latin typeface="Arial"/>
+                <a:ea typeface="Arial"/>
+                <a:cs typeface="Arial"/>
+              </a:defRPr>
+            </a:pPr>
+            <a:r>
+              <a:rPr sz="1800" b="0">
+                <a:solidFill>
+                  <a:srgbClr val="526B79"/>
+                </a:solidFill>
+                <a:latin typeface="Arial"/>
+                <a:ea typeface="Arial"/>
+                <a:cs typeface="Arial"/>
+              </a:rPr>
+              <a:t>Both readers verify each exported sample. No original-trajectory guarantee is claimed between samples. Chart axes use different distance scales.</a:t>
+            </a:r>
+          </a:p>
+        </p:txBody>
+      </p:sp>
+    </p:spTree>
+    <p:extLst>
+      <p:ext uri="{BB962C8B-B14F-4D97-AF65-F5344CB8AC3E}">
+        <p14:creationId xmlns:p14="http://schemas.microsoft.com/office/powerpoint/2010/main" val="84676947"/>
       </p:ext>
     </p:extLst>
   </p:cSld>

--- a/extras/usd/examples/usdGeospatialBuild/delivery/geospatial-build.pptx
+++ b/extras/usd/examples/usdGeospatialBuild/delivery/geospatial-build.pptx
@@ -2,22 +2,22 @@
 <file path=ppt/presentation.xml><?xml version="1.0" encoding="utf-8"?>
 <p:presentation xmlns:p="http://schemas.openxmlformats.org/presentationml/2006/main">
   <p:sldMasterIdLst>
-    <p:sldMasterId xmlns:r="http://schemas.openxmlformats.org/officeDocument/2006/relationships" id="2147483648" r:id="Rde02cfb239a843fc"/>
+    <p:sldMasterId xmlns:r="http://schemas.openxmlformats.org/officeDocument/2006/relationships" id="2147483648" r:id="R8a9c9b49e7844aae"/>
   </p:sldMasterIdLst>
   <p:notesMasterIdLst>
-    <p:notesMasterId xmlns:r="http://schemas.openxmlformats.org/officeDocument/2006/relationships" r:id="R2da6416b36554272"/>
+    <p:notesMasterId xmlns:r="http://schemas.openxmlformats.org/officeDocument/2006/relationships" r:id="R8f2f26abd1134ea7"/>
   </p:notesMasterIdLst>
   <p:sldIdLst>
-    <p:sldId xmlns:r="http://schemas.openxmlformats.org/officeDocument/2006/relationships" id="256" r:id="R54a7a7a8b617410e"/>
-    <p:sldId xmlns:r="http://schemas.openxmlformats.org/officeDocument/2006/relationships" id="257" r:id="R133410885cdb48a7"/>
-    <p:sldId xmlns:r="http://schemas.openxmlformats.org/officeDocument/2006/relationships" id="258" r:id="R7e3c879bf9a747e8"/>
-    <p:sldId xmlns:r="http://schemas.openxmlformats.org/officeDocument/2006/relationships" id="259" r:id="R4c80bad8cd024ffc"/>
-    <p:sldId xmlns:r="http://schemas.openxmlformats.org/officeDocument/2006/relationships" id="260" r:id="Raa830915dfe24196"/>
-    <p:sldId xmlns:r="http://schemas.openxmlformats.org/officeDocument/2006/relationships" id="261" r:id="R8da20666cab54a03"/>
-    <p:sldId xmlns:r="http://schemas.openxmlformats.org/officeDocument/2006/relationships" id="262" r:id="R85ffe6ee43bc4b0c"/>
-    <p:sldId xmlns:r="http://schemas.openxmlformats.org/officeDocument/2006/relationships" id="263" r:id="R63efb70e9f4a4699"/>
-    <p:sldId xmlns:r="http://schemas.openxmlformats.org/officeDocument/2006/relationships" id="264" r:id="R26c884d5b91f42a6"/>
-    <p:sldId xmlns:r="http://schemas.openxmlformats.org/officeDocument/2006/relationships" id="265" r:id="R0a9f7bb3338b441e"/>
+    <p:sldId xmlns:r="http://schemas.openxmlformats.org/officeDocument/2006/relationships" id="256" r:id="R3f8c324f15444381"/>
+    <p:sldId xmlns:r="http://schemas.openxmlformats.org/officeDocument/2006/relationships" id="257" r:id="Rf7f279fa977b4f9a"/>
+    <p:sldId xmlns:r="http://schemas.openxmlformats.org/officeDocument/2006/relationships" id="258" r:id="R19a4c575fdac4dfe"/>
+    <p:sldId xmlns:r="http://schemas.openxmlformats.org/officeDocument/2006/relationships" id="259" r:id="R8849873a68f845bd"/>
+    <p:sldId xmlns:r="http://schemas.openxmlformats.org/officeDocument/2006/relationships" id="260" r:id="R5e9a00e1a4c4495f"/>
+    <p:sldId xmlns:r="http://schemas.openxmlformats.org/officeDocument/2006/relationships" id="261" r:id="R7e754cbd976f442c"/>
+    <p:sldId xmlns:r="http://schemas.openxmlformats.org/officeDocument/2006/relationships" id="262" r:id="R8a4da9c791624fd0"/>
+    <p:sldId xmlns:r="http://schemas.openxmlformats.org/officeDocument/2006/relationships" id="263" r:id="R93182e4830ef4dbe"/>
+    <p:sldId xmlns:r="http://schemas.openxmlformats.org/officeDocument/2006/relationships" id="264" r:id="Re3b19bf37ed44496"/>
+    <p:sldId xmlns:r="http://schemas.openxmlformats.org/officeDocument/2006/relationships" id="265" r:id="R545936b4151047f4"/>
   </p:sldIdLst>
   <p:sldSz cx="12192000" cy="6858000"/>
   <p:notesSz cx="6858000" cy="9144000"/>
@@ -451,37 +451,37 @@
           <a:lstStyle xmlns:a="http://schemas.openxmlformats.org/drawingml/2006/main"/>
           <a:p xmlns:a="http://schemas.openxmlformats.org/drawingml/2006/main">
             <a:r>
-              <a:t>README section: Proposal authority and decisions requiring review</a:t>
-            </a:r>
-          </a:p>
-          <a:p xmlns:a="http://schemas.openxmlformats.org/drawingml/2006/main">
-            <a:r>
-              <a:t>README SHA-256: c8526cd9672f2b8759543cc9d70a0c46dfb12b90f6efdc873b35ce1f4b6c0226</a:t>
-            </a:r>
-          </a:p>
-          <a:p xmlns:a="http://schemas.openxmlformats.org/drawingml/2006/main">
-            <a:r>
-              <a:t>Receipt SHA-256: 6c79acd04eab6bc51bc3a0e3ed50dcd66f1e7ec12395db537c76bc0dbb94a35d</a:t>
-            </a:r>
-          </a:p>
-          <a:p xmlns:a="http://schemas.openxmlformats.org/drawingml/2006/main">
-            <a:r>
-              <a:t>Immutable execution receipt SHA-256: d3c90dd02e9642080edef6d0dfed00c95e6e3d01e18b746df9fdd185e63c31ca</a:t>
-            </a:r>
-          </a:p>
-          <a:p xmlns:a="http://schemas.openxmlformats.org/drawingml/2006/main">
-            <a:r>
-              <a:t>Proposal SHA-256: 2120953af221f83816486afbe88a06768e206d23cb570b5e39a193f254ba7a11</a:t>
-            </a:r>
-          </a:p>
-          <a:p xmlns:a="http://schemas.openxmlformats.org/drawingml/2006/main">
-            <a:r>
-              <a:t>Integration evidence SHA-256: 235be1ab2b43c161614d1bba09517b8cb20166592929e7061d6b53f59f2ae8e9</a:t>
-            </a:r>
-          </a:p>
-          <a:p xmlns:a="http://schemas.openxmlformats.org/drawingml/2006/main">
-            <a:r>
-              <a:t>Executed source parent: 874ad2059b4a0c168600804acc9ce56e5834d35a; exact executed files frozen in receipt.</a:t>
+              <a:t>README section: Proposal quality and review choices</a:t>
+            </a:r>
+          </a:p>
+          <a:p xmlns:a="http://schemas.openxmlformats.org/drawingml/2006/main">
+            <a:r>
+              <a:t>README SHA-256: f471c007044418d39804cfdc39a84f82cd195d428bd6cd934455f544ff35ab11</a:t>
+            </a:r>
+          </a:p>
+          <a:p xmlns:a="http://schemas.openxmlformats.org/drawingml/2006/main">
+            <a:r>
+              <a:t>Receipt SHA-256: f9694edf234e4a69cef58bb6ea0f5551b45f22c4f3a61501db1b27f513c44fed</a:t>
+            </a:r>
+          </a:p>
+          <a:p xmlns:a="http://schemas.openxmlformats.org/drawingml/2006/main">
+            <a:r>
+              <a:t>Immutable execution receipt SHA-256: 3baf0e2c215e8ac2ea30fb41197242b663469cd51f31ba48dc9e6c0d7b76833c</a:t>
+            </a:r>
+          </a:p>
+          <a:p xmlns:a="http://schemas.openxmlformats.org/drawingml/2006/main">
+            <a:r>
+              <a:t>Proposal SHA-256: 1727a552053cfdcdf202e2c84ad1209d1a898fe2eab2e322d51e9c7b4ad7c7c0</a:t>
+            </a:r>
+          </a:p>
+          <a:p xmlns:a="http://schemas.openxmlformats.org/drawingml/2006/main">
+            <a:r>
+              <a:t>Integration evidence SHA-256: 0bcdb95aa92032522d31c919ae91894cece9557fbd0371cb3a66fdcdb8199fd1</a:t>
+            </a:r>
+          </a:p>
+          <a:p xmlns:a="http://schemas.openxmlformats.org/drawingml/2006/main">
+            <a:r>
+              <a:t>Executed source parent: 5c116fd2dd5767d42d34083d616edf66723efe92; exact executed files frozen in receipt.</a:t>
             </a:r>
           </a:p>
           <a:p xmlns:a="http://schemas.openxmlformats.org/drawingml/2006/main">
@@ -571,37 +571,37 @@
           <a:lstStyle xmlns:a="http://schemas.openxmlformats.org/drawingml/2006/main"/>
           <a:p xmlns:a="http://schemas.openxmlformats.org/drawingml/2006/main">
             <a:r>
-              <a:t>README section: Actual consumers and shared components</a:t>
-            </a:r>
-          </a:p>
-          <a:p xmlns:a="http://schemas.openxmlformats.org/drawingml/2006/main">
-            <a:r>
-              <a:t>README SHA-256: c8526cd9672f2b8759543cc9d70a0c46dfb12b90f6efdc873b35ce1f4b6c0226</a:t>
-            </a:r>
-          </a:p>
-          <a:p xmlns:a="http://schemas.openxmlformats.org/drawingml/2006/main">
-            <a:r>
-              <a:t>Receipt SHA-256: 6c79acd04eab6bc51bc3a0e3ed50dcd66f1e7ec12395db537c76bc0dbb94a35d</a:t>
-            </a:r>
-          </a:p>
-          <a:p xmlns:a="http://schemas.openxmlformats.org/drawingml/2006/main">
-            <a:r>
-              <a:t>Immutable execution receipt SHA-256: d3c90dd02e9642080edef6d0dfed00c95e6e3d01e18b746df9fdd185e63c31ca</a:t>
-            </a:r>
-          </a:p>
-          <a:p xmlns:a="http://schemas.openxmlformats.org/drawingml/2006/main">
-            <a:r>
-              <a:t>Proposal SHA-256: 2120953af221f83816486afbe88a06768e206d23cb570b5e39a193f254ba7a11</a:t>
-            </a:r>
-          </a:p>
-          <a:p xmlns:a="http://schemas.openxmlformats.org/drawingml/2006/main">
-            <a:r>
-              <a:t>Integration evidence SHA-256: 235be1ab2b43c161614d1bba09517b8cb20166592929e7061d6b53f59f2ae8e9</a:t>
-            </a:r>
-          </a:p>
-          <a:p xmlns:a="http://schemas.openxmlformats.org/drawingml/2006/main">
-            <a:r>
-              <a:t>Executed source parent: 874ad2059b4a0c168600804acc9ce56e5834d35a; exact executed files frozen in receipt.</a:t>
+              <a:t>README section: Consumer evidence and limits</a:t>
+            </a:r>
+          </a:p>
+          <a:p xmlns:a="http://schemas.openxmlformats.org/drawingml/2006/main">
+            <a:r>
+              <a:t>README SHA-256: f471c007044418d39804cfdc39a84f82cd195d428bd6cd934455f544ff35ab11</a:t>
+            </a:r>
+          </a:p>
+          <a:p xmlns:a="http://schemas.openxmlformats.org/drawingml/2006/main">
+            <a:r>
+              <a:t>Receipt SHA-256: f9694edf234e4a69cef58bb6ea0f5551b45f22c4f3a61501db1b27f513c44fed</a:t>
+            </a:r>
+          </a:p>
+          <a:p xmlns:a="http://schemas.openxmlformats.org/drawingml/2006/main">
+            <a:r>
+              <a:t>Immutable execution receipt SHA-256: 3baf0e2c215e8ac2ea30fb41197242b663469cd51f31ba48dc9e6c0d7b76833c</a:t>
+            </a:r>
+          </a:p>
+          <a:p xmlns:a="http://schemas.openxmlformats.org/drawingml/2006/main">
+            <a:r>
+              <a:t>Proposal SHA-256: 1727a552053cfdcdf202e2c84ad1209d1a898fe2eab2e322d51e9c7b4ad7c7c0</a:t>
+            </a:r>
+          </a:p>
+          <a:p xmlns:a="http://schemas.openxmlformats.org/drawingml/2006/main">
+            <a:r>
+              <a:t>Integration evidence SHA-256: 0bcdb95aa92032522d31c919ae91894cece9557fbd0371cb3a66fdcdb8199fd1</a:t>
+            </a:r>
+          </a:p>
+          <a:p xmlns:a="http://schemas.openxmlformats.org/drawingml/2006/main">
+            <a:r>
+              <a:t>Executed source parent: 5c116fd2dd5767d42d34083d616edf66723efe92; exact executed files frozen in receipt.</a:t>
             </a:r>
           </a:p>
           <a:p xmlns:a="http://schemas.openxmlformats.org/drawingml/2006/main">
@@ -691,37 +691,37 @@
           <a:lstStyle xmlns:a="http://schemas.openxmlformats.org/drawingml/2006/main"/>
           <a:p xmlns:a="http://schemas.openxmlformats.org/drawingml/2006/main">
             <a:r>
-              <a:t>README section: Proposal authority and decisions requiring review</a:t>
-            </a:r>
-          </a:p>
-          <a:p xmlns:a="http://schemas.openxmlformats.org/drawingml/2006/main">
-            <a:r>
-              <a:t>README SHA-256: c8526cd9672f2b8759543cc9d70a0c46dfb12b90f6efdc873b35ce1f4b6c0226</a:t>
-            </a:r>
-          </a:p>
-          <a:p xmlns:a="http://schemas.openxmlformats.org/drawingml/2006/main">
-            <a:r>
-              <a:t>Receipt SHA-256: 6c79acd04eab6bc51bc3a0e3ed50dcd66f1e7ec12395db537c76bc0dbb94a35d</a:t>
-            </a:r>
-          </a:p>
-          <a:p xmlns:a="http://schemas.openxmlformats.org/drawingml/2006/main">
-            <a:r>
-              <a:t>Immutable execution receipt SHA-256: d3c90dd02e9642080edef6d0dfed00c95e6e3d01e18b746df9fdd185e63c31ca</a:t>
-            </a:r>
-          </a:p>
-          <a:p xmlns:a="http://schemas.openxmlformats.org/drawingml/2006/main">
-            <a:r>
-              <a:t>Proposal SHA-256: 2120953af221f83816486afbe88a06768e206d23cb570b5e39a193f254ba7a11</a:t>
-            </a:r>
-          </a:p>
-          <a:p xmlns:a="http://schemas.openxmlformats.org/drawingml/2006/main">
-            <a:r>
-              <a:t>Integration evidence SHA-256: 235be1ab2b43c161614d1bba09517b8cb20166592929e7061d6b53f59f2ae8e9</a:t>
-            </a:r>
-          </a:p>
-          <a:p xmlns:a="http://schemas.openxmlformats.org/drawingml/2006/main">
-            <a:r>
-              <a:t>Executed source parent: 874ad2059b4a0c168600804acc9ce56e5834d35a; exact executed files frozen in receipt.</a:t>
+              <a:t>README section: Proposal quality and review choices</a:t>
+            </a:r>
+          </a:p>
+          <a:p xmlns:a="http://schemas.openxmlformats.org/drawingml/2006/main">
+            <a:r>
+              <a:t>README SHA-256: f471c007044418d39804cfdc39a84f82cd195d428bd6cd934455f544ff35ab11</a:t>
+            </a:r>
+          </a:p>
+          <a:p xmlns:a="http://schemas.openxmlformats.org/drawingml/2006/main">
+            <a:r>
+              <a:t>Receipt SHA-256: f9694edf234e4a69cef58bb6ea0f5551b45f22c4f3a61501db1b27f513c44fed</a:t>
+            </a:r>
+          </a:p>
+          <a:p xmlns:a="http://schemas.openxmlformats.org/drawingml/2006/main">
+            <a:r>
+              <a:t>Immutable execution receipt SHA-256: 3baf0e2c215e8ac2ea30fb41197242b663469cd51f31ba48dc9e6c0d7b76833c</a:t>
+            </a:r>
+          </a:p>
+          <a:p xmlns:a="http://schemas.openxmlformats.org/drawingml/2006/main">
+            <a:r>
+              <a:t>Proposal SHA-256: 1727a552053cfdcdf202e2c84ad1209d1a898fe2eab2e322d51e9c7b4ad7c7c0</a:t>
+            </a:r>
+          </a:p>
+          <a:p xmlns:a="http://schemas.openxmlformats.org/drawingml/2006/main">
+            <a:r>
+              <a:t>Integration evidence SHA-256: 0bcdb95aa92032522d31c919ae91894cece9557fbd0371cb3a66fdcdb8199fd1</a:t>
+            </a:r>
+          </a:p>
+          <a:p xmlns:a="http://schemas.openxmlformats.org/drawingml/2006/main">
+            <a:r>
+              <a:t>Executed source parent: 5c116fd2dd5767d42d34083d616edf66723efe92; exact executed files frozen in receipt.</a:t>
             </a:r>
           </a:p>
           <a:p xmlns:a="http://schemas.openxmlformats.org/drawingml/2006/main">
@@ -811,37 +811,37 @@
           <a:lstStyle xmlns:a="http://schemas.openxmlformats.org/drawingml/2006/main"/>
           <a:p xmlns:a="http://schemas.openxmlformats.org/drawingml/2006/main">
             <a:r>
-              <a:t>README section: Physical placement and ordinary transforms</a:t>
-            </a:r>
-          </a:p>
-          <a:p xmlns:a="http://schemas.openxmlformats.org/drawingml/2006/main">
-            <a:r>
-              <a:t>README SHA-256: c8526cd9672f2b8759543cc9d70a0c46dfb12b90f6efdc873b35ce1f4b6c0226</a:t>
-            </a:r>
-          </a:p>
-          <a:p xmlns:a="http://schemas.openxmlformats.org/drawingml/2006/main">
-            <a:r>
-              <a:t>Receipt SHA-256: 6c79acd04eab6bc51bc3a0e3ed50dcd66f1e7ec12395db537c76bc0dbb94a35d</a:t>
-            </a:r>
-          </a:p>
-          <a:p xmlns:a="http://schemas.openxmlformats.org/drawingml/2006/main">
-            <a:r>
-              <a:t>Immutable execution receipt SHA-256: d3c90dd02e9642080edef6d0dfed00c95e6e3d01e18b746df9fdd185e63c31ca</a:t>
-            </a:r>
-          </a:p>
-          <a:p xmlns:a="http://schemas.openxmlformats.org/drawingml/2006/main">
-            <a:r>
-              <a:t>Proposal SHA-256: 2120953af221f83816486afbe88a06768e206d23cb570b5e39a193f254ba7a11</a:t>
-            </a:r>
-          </a:p>
-          <a:p xmlns:a="http://schemas.openxmlformats.org/drawingml/2006/main">
-            <a:r>
-              <a:t>Integration evidence SHA-256: 235be1ab2b43c161614d1bba09517b8cb20166592929e7061d6b53f59f2ae8e9</a:t>
-            </a:r>
-          </a:p>
-          <a:p xmlns:a="http://schemas.openxmlformats.org/drawingml/2006/main">
-            <a:r>
-              <a:t>Executed source parent: 874ad2059b4a0c168600804acc9ce56e5834d35a; exact executed files frozen in receipt.</a:t>
+              <a:t>README section: Ordered math and the descendant choice</a:t>
+            </a:r>
+          </a:p>
+          <a:p xmlns:a="http://schemas.openxmlformats.org/drawingml/2006/main">
+            <a:r>
+              <a:t>README SHA-256: f471c007044418d39804cfdc39a84f82cd195d428bd6cd934455f544ff35ab11</a:t>
+            </a:r>
+          </a:p>
+          <a:p xmlns:a="http://schemas.openxmlformats.org/drawingml/2006/main">
+            <a:r>
+              <a:t>Receipt SHA-256: f9694edf234e4a69cef58bb6ea0f5551b45f22c4f3a61501db1b27f513c44fed</a:t>
+            </a:r>
+          </a:p>
+          <a:p xmlns:a="http://schemas.openxmlformats.org/drawingml/2006/main">
+            <a:r>
+              <a:t>Immutable execution receipt SHA-256: 3baf0e2c215e8ac2ea30fb41197242b663469cd51f31ba48dc9e6c0d7b76833c</a:t>
+            </a:r>
+          </a:p>
+          <a:p xmlns:a="http://schemas.openxmlformats.org/drawingml/2006/main">
+            <a:r>
+              <a:t>Proposal SHA-256: 1727a552053cfdcdf202e2c84ad1209d1a898fe2eab2e322d51e9c7b4ad7c7c0</a:t>
+            </a:r>
+          </a:p>
+          <a:p xmlns:a="http://schemas.openxmlformats.org/drawingml/2006/main">
+            <a:r>
+              <a:t>Integration evidence SHA-256: 0bcdb95aa92032522d31c919ae91894cece9557fbd0371cb3a66fdcdb8199fd1</a:t>
+            </a:r>
+          </a:p>
+          <a:p xmlns:a="http://schemas.openxmlformats.org/drawingml/2006/main">
+            <a:r>
+              <a:t>Executed source parent: 5c116fd2dd5767d42d34083d616edf66723efe92; exact executed files frozen in receipt.</a:t>
             </a:r>
           </a:p>
           <a:p xmlns:a="http://schemas.openxmlformats.org/drawingml/2006/main">
@@ -931,37 +931,37 @@
           <a:lstStyle xmlns:a="http://schemas.openxmlformats.org/drawingml/2006/main"/>
           <a:p xmlns:a="http://schemas.openxmlformats.org/drawingml/2006/main">
             <a:r>
-              <a:t>README section: Eiffel model and native Hydra rendering</a:t>
-            </a:r>
-          </a:p>
-          <a:p xmlns:a="http://schemas.openxmlformats.org/drawingml/2006/main">
-            <a:r>
-              <a:t>README SHA-256: c8526cd9672f2b8759543cc9d70a0c46dfb12b90f6efdc873b35ce1f4b6c0226</a:t>
-            </a:r>
-          </a:p>
-          <a:p xmlns:a="http://schemas.openxmlformats.org/drawingml/2006/main">
-            <a:r>
-              <a:t>Receipt SHA-256: 6c79acd04eab6bc51bc3a0e3ed50dcd66f1e7ec12395db537c76bc0dbb94a35d</a:t>
-            </a:r>
-          </a:p>
-          <a:p xmlns:a="http://schemas.openxmlformats.org/drawingml/2006/main">
-            <a:r>
-              <a:t>Immutable execution receipt SHA-256: d3c90dd02e9642080edef6d0dfed00c95e6e3d01e18b746df9fdd185e63c31ca</a:t>
-            </a:r>
-          </a:p>
-          <a:p xmlns:a="http://schemas.openxmlformats.org/drawingml/2006/main">
-            <a:r>
-              <a:t>Proposal SHA-256: 2120953af221f83816486afbe88a06768e206d23cb570b5e39a193f254ba7a11</a:t>
-            </a:r>
-          </a:p>
-          <a:p xmlns:a="http://schemas.openxmlformats.org/drawingml/2006/main">
-            <a:r>
-              <a:t>Integration evidence SHA-256: 235be1ab2b43c161614d1bba09517b8cb20166592929e7061d6b53f59f2ae8e9</a:t>
-            </a:r>
-          </a:p>
-          <a:p xmlns:a="http://schemas.openxmlformats.org/drawingml/2006/main">
-            <a:r>
-              <a:t>Executed source parent: 874ad2059b4a0c168600804acc9ce56e5834d35a; exact executed files frozen in receipt.</a:t>
+              <a:t>README section: Eiffel geometry and shading</a:t>
+            </a:r>
+          </a:p>
+          <a:p xmlns:a="http://schemas.openxmlformats.org/drawingml/2006/main">
+            <a:r>
+              <a:t>README SHA-256: f471c007044418d39804cfdc39a84f82cd195d428bd6cd934455f544ff35ab11</a:t>
+            </a:r>
+          </a:p>
+          <a:p xmlns:a="http://schemas.openxmlformats.org/drawingml/2006/main">
+            <a:r>
+              <a:t>Receipt SHA-256: f9694edf234e4a69cef58bb6ea0f5551b45f22c4f3a61501db1b27f513c44fed</a:t>
+            </a:r>
+          </a:p>
+          <a:p xmlns:a="http://schemas.openxmlformats.org/drawingml/2006/main">
+            <a:r>
+              <a:t>Immutable execution receipt SHA-256: 3baf0e2c215e8ac2ea30fb41197242b663469cd51f31ba48dc9e6c0d7b76833c</a:t>
+            </a:r>
+          </a:p>
+          <a:p xmlns:a="http://schemas.openxmlformats.org/drawingml/2006/main">
+            <a:r>
+              <a:t>Proposal SHA-256: 1727a552053cfdcdf202e2c84ad1209d1a898fe2eab2e322d51e9c7b4ad7c7c0</a:t>
+            </a:r>
+          </a:p>
+          <a:p xmlns:a="http://schemas.openxmlformats.org/drawingml/2006/main">
+            <a:r>
+              <a:t>Integration evidence SHA-256: 0bcdb95aa92032522d31c919ae91894cece9557fbd0371cb3a66fdcdb8199fd1</a:t>
+            </a:r>
+          </a:p>
+          <a:p xmlns:a="http://schemas.openxmlformats.org/drawingml/2006/main">
+            <a:r>
+              <a:t>Executed source parent: 5c116fd2dd5767d42d34083d616edf66723efe92; exact executed files frozen in receipt.</a:t>
             </a:r>
           </a:p>
           <a:p xmlns:a="http://schemas.openxmlformats.org/drawingml/2006/main">
@@ -981,7 +981,7 @@
           </a:p>
           <a:p xmlns:a="http://schemas.openxmlformats.org/drawingml/2006/main">
             <a:r>
-              <a:t/>
+              <a:t>Eiffel mesh: ( FREE ) La tour Eiffel by SDC PERFORMANCE, https://sketchfab.com/3d-models/free-la-tour-eiffel-8553f94d06e24cb4b0fde1080f281674 ; CC BY 4.0, https://creativecommons.org/licenses/by/4.0/ . Reoriented, placed and rendered with illustrative context. Actual native Storm output from this frozen run.</a:t>
             </a:r>
           </a:p>
         </p:txBody>
@@ -1051,37 +1051,37 @@
           <a:lstStyle xmlns:a="http://schemas.openxmlformats.org/drawingml/2006/main"/>
           <a:p xmlns:a="http://schemas.openxmlformats.org/drawingml/2006/main">
             <a:r>
-              <a:t>README section: Colorado survey geometry and site calibration</a:t>
-            </a:r>
-          </a:p>
-          <a:p xmlns:a="http://schemas.openxmlformats.org/drawingml/2006/main">
-            <a:r>
-              <a:t>README SHA-256: c8526cd9672f2b8759543cc9d70a0c46dfb12b90f6efdc873b35ce1f4b6c0226</a:t>
-            </a:r>
-          </a:p>
-          <a:p xmlns:a="http://schemas.openxmlformats.org/drawingml/2006/main">
-            <a:r>
-              <a:t>Receipt SHA-256: 6c79acd04eab6bc51bc3a0e3ed50dcd66f1e7ec12395db537c76bc0dbb94a35d</a:t>
-            </a:r>
-          </a:p>
-          <a:p xmlns:a="http://schemas.openxmlformats.org/drawingml/2006/main">
-            <a:r>
-              <a:t>Immutable execution receipt SHA-256: d3c90dd02e9642080edef6d0dfed00c95e6e3d01e18b746df9fdd185e63c31ca</a:t>
-            </a:r>
-          </a:p>
-          <a:p xmlns:a="http://schemas.openxmlformats.org/drawingml/2006/main">
-            <a:r>
-              <a:t>Proposal SHA-256: 2120953af221f83816486afbe88a06768e206d23cb570b5e39a193f254ba7a11</a:t>
-            </a:r>
-          </a:p>
-          <a:p xmlns:a="http://schemas.openxmlformats.org/drawingml/2006/main">
-            <a:r>
-              <a:t>Integration evidence SHA-256: 235be1ab2b43c161614d1bba09517b8cb20166592929e7061d6b53f59f2ae8e9</a:t>
-            </a:r>
-          </a:p>
-          <a:p xmlns:a="http://schemas.openxmlformats.org/drawingml/2006/main">
-            <a:r>
-              <a:t>Executed source parent: 874ad2059b4a0c168600804acc9ce56e5834d35a; exact executed files frozen in receipt.</a:t>
+              <a:t>README section: Colorado site calibration</a:t>
+            </a:r>
+          </a:p>
+          <a:p xmlns:a="http://schemas.openxmlformats.org/drawingml/2006/main">
+            <a:r>
+              <a:t>README SHA-256: f471c007044418d39804cfdc39a84f82cd195d428bd6cd934455f544ff35ab11</a:t>
+            </a:r>
+          </a:p>
+          <a:p xmlns:a="http://schemas.openxmlformats.org/drawingml/2006/main">
+            <a:r>
+              <a:t>Receipt SHA-256: f9694edf234e4a69cef58bb6ea0f5551b45f22c4f3a61501db1b27f513c44fed</a:t>
+            </a:r>
+          </a:p>
+          <a:p xmlns:a="http://schemas.openxmlformats.org/drawingml/2006/main">
+            <a:r>
+              <a:t>Immutable execution receipt SHA-256: 3baf0e2c215e8ac2ea30fb41197242b663469cd51f31ba48dc9e6c0d7b76833c</a:t>
+            </a:r>
+          </a:p>
+          <a:p xmlns:a="http://schemas.openxmlformats.org/drawingml/2006/main">
+            <a:r>
+              <a:t>Proposal SHA-256: 1727a552053cfdcdf202e2c84ad1209d1a898fe2eab2e322d51e9c7b4ad7c7c0</a:t>
+            </a:r>
+          </a:p>
+          <a:p xmlns:a="http://schemas.openxmlformats.org/drawingml/2006/main">
+            <a:r>
+              <a:t>Integration evidence SHA-256: 0bcdb95aa92032522d31c919ae91894cece9557fbd0371cb3a66fdcdb8199fd1</a:t>
+            </a:r>
+          </a:p>
+          <a:p xmlns:a="http://schemas.openxmlformats.org/drawingml/2006/main">
+            <a:r>
+              <a:t>Executed source parent: 5c116fd2dd5767d42d34083d616edf66723efe92; exact executed files frozen in receipt.</a:t>
             </a:r>
           </a:p>
           <a:p xmlns:a="http://schemas.openxmlformats.org/drawingml/2006/main">
@@ -1171,37 +1171,37 @@
           <a:lstStyle xmlns:a="http://schemas.openxmlformats.org/drawingml/2006/main"/>
           <a:p xmlns:a="http://schemas.openxmlformats.org/drawingml/2006/main">
             <a:r>
-              <a:t>README section: Non-visual measurements and regional geometry</a:t>
-            </a:r>
-          </a:p>
-          <a:p xmlns:a="http://schemas.openxmlformats.org/drawingml/2006/main">
-            <a:r>
-              <a:t>README SHA-256: c8526cd9672f2b8759543cc9d70a0c46dfb12b90f6efdc873b35ce1f4b6c0226</a:t>
-            </a:r>
-          </a:p>
-          <a:p xmlns:a="http://schemas.openxmlformats.org/drawingml/2006/main">
-            <a:r>
-              <a:t>Receipt SHA-256: 6c79acd04eab6bc51bc3a0e3ed50dcd66f1e7ec12395db537c76bc0dbb94a35d</a:t>
-            </a:r>
-          </a:p>
-          <a:p xmlns:a="http://schemas.openxmlformats.org/drawingml/2006/main">
-            <a:r>
-              <a:t>Immutable execution receipt SHA-256: d3c90dd02e9642080edef6d0dfed00c95e6e3d01e18b746df9fdd185e63c31ca</a:t>
-            </a:r>
-          </a:p>
-          <a:p xmlns:a="http://schemas.openxmlformats.org/drawingml/2006/main">
-            <a:r>
-              <a:t>Proposal SHA-256: 2120953af221f83816486afbe88a06768e206d23cb570b5e39a193f254ba7a11</a:t>
-            </a:r>
-          </a:p>
-          <a:p xmlns:a="http://schemas.openxmlformats.org/drawingml/2006/main">
-            <a:r>
-              <a:t>Integration evidence SHA-256: 235be1ab2b43c161614d1bba09517b8cb20166592929e7061d6b53f59f2ae8e9</a:t>
-            </a:r>
-          </a:p>
-          <a:p xmlns:a="http://schemas.openxmlformats.org/drawingml/2006/main">
-            <a:r>
-              <a:t>Executed source parent: 874ad2059b4a0c168600804acc9ce56e5834d35a; exact executed files frozen in receipt.</a:t>
+              <a:t>README section: Native measurements and larger-scale workflows</a:t>
+            </a:r>
+          </a:p>
+          <a:p xmlns:a="http://schemas.openxmlformats.org/drawingml/2006/main">
+            <a:r>
+              <a:t>README SHA-256: f471c007044418d39804cfdc39a84f82cd195d428bd6cd934455f544ff35ab11</a:t>
+            </a:r>
+          </a:p>
+          <a:p xmlns:a="http://schemas.openxmlformats.org/drawingml/2006/main">
+            <a:r>
+              <a:t>Receipt SHA-256: f9694edf234e4a69cef58bb6ea0f5551b45f22c4f3a61501db1b27f513c44fed</a:t>
+            </a:r>
+          </a:p>
+          <a:p xmlns:a="http://schemas.openxmlformats.org/drawingml/2006/main">
+            <a:r>
+              <a:t>Immutable execution receipt SHA-256: 3baf0e2c215e8ac2ea30fb41197242b663469cd51f31ba48dc9e6c0d7b76833c</a:t>
+            </a:r>
+          </a:p>
+          <a:p xmlns:a="http://schemas.openxmlformats.org/drawingml/2006/main">
+            <a:r>
+              <a:t>Proposal SHA-256: 1727a552053cfdcdf202e2c84ad1209d1a898fe2eab2e322d51e9c7b4ad7c7c0</a:t>
+            </a:r>
+          </a:p>
+          <a:p xmlns:a="http://schemas.openxmlformats.org/drawingml/2006/main">
+            <a:r>
+              <a:t>Integration evidence SHA-256: 0bcdb95aa92032522d31c919ae91894cece9557fbd0371cb3a66fdcdb8199fd1</a:t>
+            </a:r>
+          </a:p>
+          <a:p xmlns:a="http://schemas.openxmlformats.org/drawingml/2006/main">
+            <a:r>
+              <a:t>Executed source parent: 5c116fd2dd5767d42d34083d616edf66723efe92; exact executed files frozen in receipt.</a:t>
             </a:r>
           </a:p>
           <a:p xmlns:a="http://schemas.openxmlformats.org/drawingml/2006/main">
@@ -1291,37 +1291,37 @@
           <a:lstStyle xmlns:a="http://schemas.openxmlformats.org/drawingml/2006/main"/>
           <a:p xmlns:a="http://schemas.openxmlformats.org/drawingml/2006/main">
             <a:r>
-              <a:t>README section: Non-visual measurements and regional geometry</a:t>
-            </a:r>
-          </a:p>
-          <a:p xmlns:a="http://schemas.openxmlformats.org/drawingml/2006/main">
-            <a:r>
-              <a:t>README SHA-256: c8526cd9672f2b8759543cc9d70a0c46dfb12b90f6efdc873b35ce1f4b6c0226</a:t>
-            </a:r>
-          </a:p>
-          <a:p xmlns:a="http://schemas.openxmlformats.org/drawingml/2006/main">
-            <a:r>
-              <a:t>Receipt SHA-256: 6c79acd04eab6bc51bc3a0e3ed50dcd66f1e7ec12395db537c76bc0dbb94a35d</a:t>
-            </a:r>
-          </a:p>
-          <a:p xmlns:a="http://schemas.openxmlformats.org/drawingml/2006/main">
-            <a:r>
-              <a:t>Immutable execution receipt SHA-256: d3c90dd02e9642080edef6d0dfed00c95e6e3d01e18b746df9fdd185e63c31ca</a:t>
-            </a:r>
-          </a:p>
-          <a:p xmlns:a="http://schemas.openxmlformats.org/drawingml/2006/main">
-            <a:r>
-              <a:t>Proposal SHA-256: 2120953af221f83816486afbe88a06768e206d23cb570b5e39a193f254ba7a11</a:t>
-            </a:r>
-          </a:p>
-          <a:p xmlns:a="http://schemas.openxmlformats.org/drawingml/2006/main">
-            <a:r>
-              <a:t>Integration evidence SHA-256: 235be1ab2b43c161614d1bba09517b8cb20166592929e7061d6b53f59f2ae8e9</a:t>
-            </a:r>
-          </a:p>
-          <a:p xmlns:a="http://schemas.openxmlformats.org/drawingml/2006/main">
-            <a:r>
-              <a:t>Executed source parent: 874ad2059b4a0c168600804acc9ce56e5834d35a; exact executed files frozen in receipt.</a:t>
+              <a:t>README section: Native measurements and larger-scale workflows</a:t>
+            </a:r>
+          </a:p>
+          <a:p xmlns:a="http://schemas.openxmlformats.org/drawingml/2006/main">
+            <a:r>
+              <a:t>README SHA-256: f471c007044418d39804cfdc39a84f82cd195d428bd6cd934455f544ff35ab11</a:t>
+            </a:r>
+          </a:p>
+          <a:p xmlns:a="http://schemas.openxmlformats.org/drawingml/2006/main">
+            <a:r>
+              <a:t>Receipt SHA-256: f9694edf234e4a69cef58bb6ea0f5551b45f22c4f3a61501db1b27f513c44fed</a:t>
+            </a:r>
+          </a:p>
+          <a:p xmlns:a="http://schemas.openxmlformats.org/drawingml/2006/main">
+            <a:r>
+              <a:t>Immutable execution receipt SHA-256: 3baf0e2c215e8ac2ea30fb41197242b663469cd51f31ba48dc9e6c0d7b76833c</a:t>
+            </a:r>
+          </a:p>
+          <a:p xmlns:a="http://schemas.openxmlformats.org/drawingml/2006/main">
+            <a:r>
+              <a:t>Proposal SHA-256: 1727a552053cfdcdf202e2c84ad1209d1a898fe2eab2e322d51e9c7b4ad7c7c0</a:t>
+            </a:r>
+          </a:p>
+          <a:p xmlns:a="http://schemas.openxmlformats.org/drawingml/2006/main">
+            <a:r>
+              <a:t>Integration evidence SHA-256: 0bcdb95aa92032522d31c919ae91894cece9557fbd0371cb3a66fdcdb8199fd1</a:t>
+            </a:r>
+          </a:p>
+          <a:p xmlns:a="http://schemas.openxmlformats.org/drawingml/2006/main">
+            <a:r>
+              <a:t>Executed source parent: 5c116fd2dd5767d42d34083d616edf66723efe92; exact executed files frozen in receipt.</a:t>
             </a:r>
           </a:p>
           <a:p xmlns:a="http://schemas.openxmlformats.org/drawingml/2006/main">
@@ -1411,37 +1411,37 @@
           <a:lstStyle xmlns:a="http://schemas.openxmlformats.org/drawingml/2006/main"/>
           <a:p xmlns:a="http://schemas.openxmlformats.org/drawingml/2006/main">
             <a:r>
-              <a:t>README section: Same partner coordinate inputs in both implementations and the OV host</a:t>
-            </a:r>
-          </a:p>
-          <a:p xmlns:a="http://schemas.openxmlformats.org/drawingml/2006/main">
-            <a:r>
-              <a:t>README SHA-256: c8526cd9672f2b8759543cc9d70a0c46dfb12b90f6efdc873b35ce1f4b6c0226</a:t>
-            </a:r>
-          </a:p>
-          <a:p xmlns:a="http://schemas.openxmlformats.org/drawingml/2006/main">
-            <a:r>
-              <a:t>Receipt SHA-256: 6c79acd04eab6bc51bc3a0e3ed50dcd66f1e7ec12395db537c76bc0dbb94a35d</a:t>
-            </a:r>
-          </a:p>
-          <a:p xmlns:a="http://schemas.openxmlformats.org/drawingml/2006/main">
-            <a:r>
-              <a:t>Immutable execution receipt SHA-256: d3c90dd02e9642080edef6d0dfed00c95e6e3d01e18b746df9fdd185e63c31ca</a:t>
-            </a:r>
-          </a:p>
-          <a:p xmlns:a="http://schemas.openxmlformats.org/drawingml/2006/main">
-            <a:r>
-              <a:t>Proposal SHA-256: 2120953af221f83816486afbe88a06768e206d23cb570b5e39a193f254ba7a11</a:t>
-            </a:r>
-          </a:p>
-          <a:p xmlns:a="http://schemas.openxmlformats.org/drawingml/2006/main">
-            <a:r>
-              <a:t>Integration evidence SHA-256: 235be1ab2b43c161614d1bba09517b8cb20166592929e7061d6b53f59f2ae8e9</a:t>
-            </a:r>
-          </a:p>
-          <a:p xmlns:a="http://schemas.openxmlformats.org/drawingml/2006/main">
-            <a:r>
-              <a:t>Executed source parent: 874ad2059b4a0c168600804acc9ce56e5834d35a; exact executed files frozen in receipt.</a:t>
+              <a:t>README section: Same partner data in both placements</a:t>
+            </a:r>
+          </a:p>
+          <a:p xmlns:a="http://schemas.openxmlformats.org/drawingml/2006/main">
+            <a:r>
+              <a:t>README SHA-256: f471c007044418d39804cfdc39a84f82cd195d428bd6cd934455f544ff35ab11</a:t>
+            </a:r>
+          </a:p>
+          <a:p xmlns:a="http://schemas.openxmlformats.org/drawingml/2006/main">
+            <a:r>
+              <a:t>Receipt SHA-256: f9694edf234e4a69cef58bb6ea0f5551b45f22c4f3a61501db1b27f513c44fed</a:t>
+            </a:r>
+          </a:p>
+          <a:p xmlns:a="http://schemas.openxmlformats.org/drawingml/2006/main">
+            <a:r>
+              <a:t>Immutable execution receipt SHA-256: 3baf0e2c215e8ac2ea30fb41197242b663469cd51f31ba48dc9e6c0d7b76833c</a:t>
+            </a:r>
+          </a:p>
+          <a:p xmlns:a="http://schemas.openxmlformats.org/drawingml/2006/main">
+            <a:r>
+              <a:t>Proposal SHA-256: 1727a552053cfdcdf202e2c84ad1209d1a898fe2eab2e322d51e9c7b4ad7c7c0</a:t>
+            </a:r>
+          </a:p>
+          <a:p xmlns:a="http://schemas.openxmlformats.org/drawingml/2006/main">
+            <a:r>
+              <a:t>Integration evidence SHA-256: 0bcdb95aa92032522d31c919ae91894cece9557fbd0371cb3a66fdcdb8199fd1</a:t>
+            </a:r>
+          </a:p>
+          <a:p xmlns:a="http://schemas.openxmlformats.org/drawingml/2006/main">
+            <a:r>
+              <a:t>Executed source parent: 5c116fd2dd5767d42d34083d616edf66723efe92; exact executed files frozen in receipt.</a:t>
             </a:r>
           </a:p>
           <a:p xmlns:a="http://schemas.openxmlformats.org/drawingml/2006/main">
@@ -1531,37 +1531,37 @@
           <a:lstStyle xmlns:a="http://schemas.openxmlformats.org/drawingml/2006/main"/>
           <a:p xmlns:a="http://schemas.openxmlformats.org/drawingml/2006/main">
             <a:r>
-              <a:t>README section: Source interpolation and freshly reread exports</a:t>
-            </a:r>
-          </a:p>
-          <a:p xmlns:a="http://schemas.openxmlformats.org/drawingml/2006/main">
-            <a:r>
-              <a:t>README SHA-256: c8526cd9672f2b8759543cc9d70a0c46dfb12b90f6efdc873b35ce1f4b6c0226</a:t>
-            </a:r>
-          </a:p>
-          <a:p xmlns:a="http://schemas.openxmlformats.org/drawingml/2006/main">
-            <a:r>
-              <a:t>Receipt SHA-256: 6c79acd04eab6bc51bc3a0e3ed50dcd66f1e7ec12395db537c76bc0dbb94a35d</a:t>
-            </a:r>
-          </a:p>
-          <a:p xmlns:a="http://schemas.openxmlformats.org/drawingml/2006/main">
-            <a:r>
-              <a:t>Immutable execution receipt SHA-256: d3c90dd02e9642080edef6d0dfed00c95e6e3d01e18b746df9fdd185e63c31ca</a:t>
-            </a:r>
-          </a:p>
-          <a:p xmlns:a="http://schemas.openxmlformats.org/drawingml/2006/main">
-            <a:r>
-              <a:t>Proposal SHA-256: 2120953af221f83816486afbe88a06768e206d23cb570b5e39a193f254ba7a11</a:t>
-            </a:r>
-          </a:p>
-          <a:p xmlns:a="http://schemas.openxmlformats.org/drawingml/2006/main">
-            <a:r>
-              <a:t>Integration evidence SHA-256: 235be1ab2b43c161614d1bba09517b8cb20166592929e7061d6b53f59f2ae8e9</a:t>
-            </a:r>
-          </a:p>
-          <a:p xmlns:a="http://schemas.openxmlformats.org/drawingml/2006/main">
-            <a:r>
-              <a:t>Executed source parent: 874ad2059b4a0c168600804acc9ce56e5834d35a; exact executed files frozen in receipt.</a:t>
+              <a:t>README section: Geographic scene charts and exports</a:t>
+            </a:r>
+          </a:p>
+          <a:p xmlns:a="http://schemas.openxmlformats.org/drawingml/2006/main">
+            <a:r>
+              <a:t>README SHA-256: f471c007044418d39804cfdc39a84f82cd195d428bd6cd934455f544ff35ab11</a:t>
+            </a:r>
+          </a:p>
+          <a:p xmlns:a="http://schemas.openxmlformats.org/drawingml/2006/main">
+            <a:r>
+              <a:t>Receipt SHA-256: f9694edf234e4a69cef58bb6ea0f5551b45f22c4f3a61501db1b27f513c44fed</a:t>
+            </a:r>
+          </a:p>
+          <a:p xmlns:a="http://schemas.openxmlformats.org/drawingml/2006/main">
+            <a:r>
+              <a:t>Immutable execution receipt SHA-256: 3baf0e2c215e8ac2ea30fb41197242b663469cd51f31ba48dc9e6c0d7b76833c</a:t>
+            </a:r>
+          </a:p>
+          <a:p xmlns:a="http://schemas.openxmlformats.org/drawingml/2006/main">
+            <a:r>
+              <a:t>Proposal SHA-256: 1727a552053cfdcdf202e2c84ad1209d1a898fe2eab2e322d51e9c7b4ad7c7c0</a:t>
+            </a:r>
+          </a:p>
+          <a:p xmlns:a="http://schemas.openxmlformats.org/drawingml/2006/main">
+            <a:r>
+              <a:t>Integration evidence SHA-256: 0bcdb95aa92032522d31c919ae91894cece9557fbd0371cb3a66fdcdb8199fd1</a:t>
+            </a:r>
+          </a:p>
+          <a:p xmlns:a="http://schemas.openxmlformats.org/drawingml/2006/main">
+            <a:r>
+              <a:t>Executed source parent: 5c116fd2dd5767d42d34083d616edf66723efe92; exact executed files frozen in receipt.</a:t>
             </a:r>
           </a:p>
           <a:p xmlns:a="http://schemas.openxmlformats.org/drawingml/2006/main">
@@ -1649,7 +1649,7 @@
   </p:cSld>
   <p:clrMap bg1="lt1" tx1="dk1" bg2="lt2" tx2="dk2" accent1="accent1" accent2="accent2" accent3="accent3" accent4="accent4" accent5="accent5" accent6="accent6" hlink="hlink" folHlink="folHlink"/>
   <p:sldLayoutIdLst>
-    <p:sldLayoutId xmlns:r="http://schemas.openxmlformats.org/officeDocument/2006/relationships" id="2147483649" r:id="Rddd8393df91b485f"/>
+    <p:sldLayoutId xmlns:r="http://schemas.openxmlformats.org/officeDocument/2006/relationships" id="2147483649" r:id="Radc18a526a34415f"/>
   </p:sldLayoutIdLst>
   <p:txStyles>
     <p:titleStyle>
@@ -2979,7 +2979,7 @@
           <p:cNvPr id="6" name="">
             <a:extLst xmlns:a="http://schemas.openxmlformats.org/drawingml/2006/main">
               <a:ext uri="{FF2B5EF4-FFF2-40B4-BE49-F238E27FC236}">
-                <a16:creationId xmlns:a16="http://schemas.microsoft.com/office/drawing/2014/main" id="{20F183E2-6E86-4AA4-BE14-51F549863F7F}"/>
+                <a16:creationId xmlns:a16="http://schemas.microsoft.com/office/drawing/2014/main" id="{9709C7C5-5949-4F64-9D94-6251AA830D44}"/>
               </a:ext>
             </a:extLst>
           </p:cNvPr>
@@ -3026,7 +3026,7 @@
                 <a:ea typeface="Arial"/>
                 <a:cs typeface="Arial"/>
               </a:rPr>
-              <a:t>Proposal quality and candidate evidence</a:t>
+              <a:t>Proposal quality and review choices</a:t>
             </a:r>
           </a:p>
         </p:txBody>
@@ -3036,7 +3036,7 @@
           <p:cNvPr id="2" name="">
             <a:extLst xmlns:a="http://schemas.openxmlformats.org/drawingml/2006/main">
               <a:ext uri="{FF2B5EF4-FFF2-40B4-BE49-F238E27FC236}">
-                <a16:creationId xmlns:a16="http://schemas.microsoft.com/office/drawing/2014/main" id="{F3BD5200-BF7B-4527-949C-D6128B9F5649}"/>
+                <a16:creationId xmlns:a16="http://schemas.microsoft.com/office/drawing/2014/main" id="{1430BA4B-8469-4C39-8DE6-7E345CDF3553}"/>
               </a:ext>
             </a:extLst>
           </p:cNvPr>
@@ -3083,7 +3083,7 @@
                 <a:ea typeface="Arial"/>
                 <a:cs typeface="Arial"/>
               </a:rPr>
-              <a:t>The emailed leans now have explicit local candidate contracts.</a:t>
+              <a:t>Known contract gaps now have concrete proposed answers.</a:t>
             </a:r>
           </a:p>
         </p:txBody>
@@ -3093,7 +3093,7 @@
           <p:cNvPr id="3" name="">
             <a:extLst xmlns:a="http://schemas.openxmlformats.org/drawingml/2006/main">
               <a:ext uri="{FF2B5EF4-FFF2-40B4-BE49-F238E27FC236}">
-                <a16:creationId xmlns:a16="http://schemas.microsoft.com/office/drawing/2014/main" id="{481A6D71-482B-48FB-A5B4-6D64C40DAD2C}"/>
+                <a16:creationId xmlns:a16="http://schemas.microsoft.com/office/drawing/2014/main" id="{F616881D-7C10-4D5F-BCF8-603703F1750E}"/>
               </a:ext>
             </a:extLst>
           </p:cNvPr>
@@ -3140,7 +3140,7 @@
                 <a:ea typeface="Arial"/>
                 <a:cs typeface="Arial"/>
               </a:rPr>
-              <a:t>The group still needs to review those choices. Independently CRS-bound point-instancer prototypes remain a model gap.</a:t>
+              <a:t>Position and model attitude are source inputs. Detailed transform, dataset, instance and scene-chart choices still need author review.</a:t>
             </a:r>
           </a:p>
         </p:txBody>
@@ -3150,7 +3150,7 @@
           <p:cNvPr id="4" name="">
             <a:extLst xmlns:a="http://schemas.openxmlformats.org/drawingml/2006/main">
               <a:ext uri="{FF2B5EF4-FFF2-40B4-BE49-F238E27FC236}">
-                <a16:creationId xmlns:a16="http://schemas.microsoft.com/office/drawing/2014/main" id="{757F7960-0B41-44FF-BED7-C75F50212BAE}"/>
+                <a16:creationId xmlns:a16="http://schemas.microsoft.com/office/drawing/2014/main" id="{24173D9E-658F-4F52-8B42-4B0E7486A06F}"/>
               </a:ext>
             </a:extLst>
           </p:cNvPr>
@@ -3197,7 +3197,7 @@
                 <a:ea typeface="Arial"/>
                 <a:cs typeface="Arial"/>
               </a:rPr>
-              <a:t>64 regressions and 47 distinguishing controls passed.</a:t>
+              <a:t>64 regressions and 61 distinguishing controls passed.</a:t>
             </a:r>
           </a:p>
           <a:p xmlns:a="http://schemas.openxmlformats.org/drawingml/2006/main">
@@ -3220,7 +3220,7 @@
                 <a:ea typeface="Arial"/>
                 <a:cs typeface="Arial"/>
               </a:rPr>
-              <a:t>204,729 coordinate results per Python/C++ path.</a:t>
+              <a:t>213,231 coordinate results per Python/C++ path.</a:t>
             </a:r>
           </a:p>
         </p:txBody>
@@ -3230,7 +3230,7 @@
           <p:cNvPr id="5" name="">
             <a:extLst xmlns:a="http://schemas.openxmlformats.org/drawingml/2006/main">
               <a:ext uri="{FF2B5EF4-FFF2-40B4-BE49-F238E27FC236}">
-                <a16:creationId xmlns:a16="http://schemas.microsoft.com/office/drawing/2014/main" id="{0A20D608-7FCD-4A6F-B8BB-69D2E3DE1932}"/>
+                <a16:creationId xmlns:a16="http://schemas.microsoft.com/office/drawing/2014/main" id="{E2D3918A-F10E-4CDA-A986-A58988764068}"/>
               </a:ext>
             </a:extLst>
           </p:cNvPr>
@@ -3277,7 +3277,7 @@
                 <a:ea typeface="Arial"/>
                 <a:cs typeface="Arial"/>
               </a:rPr>
-              <a:t>Geographic scene frames/bounds remain Q9. Complete proposal conformance is not claimed.</a:t>
+              <a:t>No new computed source properties. Group adoption and whole-proposal conformance are not claimed.</a:t>
             </a:r>
           </a:p>
         </p:txBody>
@@ -3285,7 +3285,7 @@
     </p:spTree>
     <p:extLst>
       <p:ext uri="{BB962C8B-B14F-4D97-AF65-F5344CB8AC3E}">
-        <p14:creationId xmlns:p14="http://schemas.microsoft.com/office/powerpoint/2010/main" val="985122918"/>
+        <p14:creationId xmlns:p14="http://schemas.microsoft.com/office/powerpoint/2010/main" val="387407555"/>
       </p:ext>
     </p:extLst>
   </p:cSld>
@@ -3316,7 +3316,7 @@
           <p:cNvPr id="5" name="">
             <a:extLst xmlns:a="http://schemas.openxmlformats.org/drawingml/2006/main">
               <a:ext uri="{FF2B5EF4-FFF2-40B4-BE49-F238E27FC236}">
-                <a16:creationId xmlns:a16="http://schemas.microsoft.com/office/drawing/2014/main" id="{DC3A6E04-EE57-49A9-977C-08E2F089715E}"/>
+                <a16:creationId xmlns:a16="http://schemas.microsoft.com/office/drawing/2014/main" id="{F49717B1-84CB-4488-90ED-7FB1AFF61B05}"/>
               </a:ext>
             </a:extLst>
           </p:cNvPr>
@@ -3363,7 +3363,7 @@
                 <a:ea typeface="Arial"/>
                 <a:cs typeface="Arial"/>
               </a:rPr>
-              <a:t>Consumer evidence and remaining limits</a:t>
+              <a:t>Verified consumers and remaining evidence limits</a:t>
             </a:r>
           </a:p>
         </p:txBody>
@@ -3537,7 +3537,7 @@
                           <a:ea typeface="Arial"/>
                           <a:cs typeface="Arial"/>
                         </a:rPr>
-                        <a:t>177,846 vertices read back from runtime buffers/matrices. 27 edit, failure and recovery checks. Reuses Python placement.</a:t>
+                        <a:t>177,864 vertices read back from runtime buffers/matrices. 36 edit, failure and recovery checks. Reuses Python placement.</a:t>
                       </a:r>
                     </a:p>
                   </a:txBody>
@@ -3611,7 +3611,7 @@
           <p:cNvPr id="3" name="">
             <a:extLst xmlns:a="http://schemas.openxmlformats.org/drawingml/2006/main">
               <a:ext uri="{FF2B5EF4-FFF2-40B4-BE49-F238E27FC236}">
-                <a16:creationId xmlns:a16="http://schemas.microsoft.com/office/drawing/2014/main" id="{26F41EDE-1C5B-4A12-BAE9-3656950A6F8F}"/>
+                <a16:creationId xmlns:a16="http://schemas.microsoft.com/office/drawing/2014/main" id="{2175C659-6DC6-4808-8495-2CB9C893BD41}"/>
               </a:ext>
             </a:extLst>
           </p:cNvPr>
@@ -3658,7 +3658,7 @@
                 <a:ea typeface="Arial"/>
                 <a:cs typeface="Arial"/>
               </a:rPr>
-              <a:t>Eight exports pass fresh-reader checks. Authored source layers remain unchanged.</a:t>
+              <a:t>All 11 exports pass fresh-reader checks. Geographic scene charts and bound prototypes are covered.</a:t>
             </a:r>
           </a:p>
         </p:txBody>
@@ -3668,7 +3668,7 @@
           <p:cNvPr id="4" name="">
             <a:extLst xmlns:a="http://schemas.openxmlformats.org/drawingml/2006/main">
               <a:ext uri="{FF2B5EF4-FFF2-40B4-BE49-F238E27FC236}">
-                <a16:creationId xmlns:a16="http://schemas.microsoft.com/office/drawing/2014/main" id="{92A9EB75-FD14-4D3E-8696-A87EFDDA2694}"/>
+                <a16:creationId xmlns:a16="http://schemas.microsoft.com/office/drawing/2014/main" id="{4C411C8D-7134-4CB7-8215-3C62679BAFE5}"/>
               </a:ext>
             </a:extLst>
           </p:cNvPr>
@@ -3715,7 +3715,7 @@
                 <a:ea typeface="Arial"/>
                 <a:cs typeface="Arial"/>
               </a:rPr>
-              <a:t>Remaining limits: bound point-instancer prototypes, geographic scene frames/bounds, continuous nonlinear certificates and physics integration. Candidate choices still need group review.</a:t>
+              <a:t>Remaining evidence limits: continuous nonlinear certificates, general primvar coverage and physics integration. Detailed candidate choices still need author review.</a:t>
             </a:r>
           </a:p>
         </p:txBody>
@@ -3723,7 +3723,7 @@
     </p:spTree>
     <p:extLst>
       <p:ext uri="{BB962C8B-B14F-4D97-AF65-F5344CB8AC3E}">
-        <p14:creationId xmlns:p14="http://schemas.microsoft.com/office/powerpoint/2010/main" val="591610580"/>
+        <p14:creationId xmlns:p14="http://schemas.microsoft.com/office/powerpoint/2010/main" val="814754788"/>
       </p:ext>
     </p:extLst>
   </p:cSld>
@@ -3754,7 +3754,7 @@
           <p:cNvPr id="4" name="">
             <a:extLst xmlns:a="http://schemas.openxmlformats.org/drawingml/2006/main">
               <a:ext uri="{FF2B5EF4-FFF2-40B4-BE49-F238E27FC236}">
-                <a16:creationId xmlns:a16="http://schemas.microsoft.com/office/drawing/2014/main" id="{3E35642A-1BA7-40D3-B8B0-F28E145E70C1}"/>
+                <a16:creationId xmlns:a16="http://schemas.microsoft.com/office/drawing/2014/main" id="{898F8119-5EF2-4445-832B-B33FA1D6B68A}"/>
               </a:ext>
             </a:extLst>
           </p:cNvPr>
@@ -3801,7 +3801,7 @@
                 <a:ea typeface="Arial"/>
                 <a:cs typeface="Arial"/>
               </a:rPr>
-              <a:t>Concrete contracts for group review</a:t>
+              <a:t>Authored inputs and computed results</a:t>
             </a:r>
           </a:p>
         </p:txBody>
@@ -3814,7 +3814,7 @@
         </p:nvGraphicFramePr>
         <p:xfrm>
           <a:off xmlns:a="http://schemas.openxmlformats.org/drawingml/2006/main" x="609600" y="1428750"/>
-          <a:ext xmlns:a="http://schemas.openxmlformats.org/drawingml/2006/main" cx="10972800" cy="4429125"/>
+          <a:ext xmlns:a="http://schemas.openxmlformats.org/drawingml/2006/main" cx="10972800" cy="4286250"/>
         </p:xfrm>
         <a:graphic xmlns:a="http://schemas.openxmlformats.org/drawingml/2006/main">
           <a:graphicData uri="http://schemas.openxmlformats.org/drawingml/2006/table">
@@ -3824,7 +3824,7 @@
                 <a:gridCol w="2857500"/>
                 <a:gridCol w="8115300"/>
               </a:tblGrid>
-              <a:tr h="885825">
+              <a:tr h="714375">
                 <a:tc>
                   <a:txBody>
                     <a:bodyPr>
@@ -3833,7 +3833,7 @@
                     <a:lstStyle/>
                     <a:p>
                       <a:r>
-                        <a:rPr sz="1875" b="1">
+                        <a:rPr sz="1800" b="1">
                           <a:solidFill>
                             <a:srgbClr val="FFFFFF"/>
                           </a:solidFill>
@@ -3841,7 +3841,7 @@
                           <a:ea typeface="Arial"/>
                           <a:cs typeface="Arial"/>
                         </a:rPr>
-                        <a:t>Subject</a:t>
+                        <a:t>Authored inputs</a:t>
                       </a:r>
                     </a:p>
                   </a:txBody>
@@ -3859,7 +3859,7 @@
                     <a:lstStyle/>
                     <a:p>
                       <a:r>
-                        <a:rPr sz="1875" b="1">
+                        <a:rPr sz="1800" b="1">
                           <a:solidFill>
                             <a:srgbClr val="FFFFFF"/>
                           </a:solidFill>
@@ -3867,7 +3867,7 @@
                           <a:ea typeface="Arial"/>
                           <a:cs typeface="Arial"/>
                         </a:rPr>
-                        <a:t>Concrete candidate answer</a:t>
+                        <a:t>Meaning in the proposed model</a:t>
                       </a:r>
                     </a:p>
                   </a:txBody>
@@ -3878,7 +3878,7 @@
                   </a:tcPr>
                 </a:tc>
               </a:tr>
-              <a:tr h="885825">
+              <a:tr h="714375">
                 <a:tc>
                   <a:txBody>
                     <a:bodyPr>
@@ -3887,7 +3887,7 @@
                     <a:lstStyle/>
                     <a:p>
                       <a:r>
-                        <a:rPr sz="1875" b="0">
+                        <a:rPr sz="1800" b="0">
                           <a:solidFill>
                             <a:srgbClr val="213744"/>
                           </a:solidFill>
@@ -3895,7 +3895,7 @@
                           <a:ea typeface="Arial"/>
                           <a:cs typeface="Arial"/>
                         </a:rPr>
-                        <a:t>Q3: working frame</a:t>
+                        <a:t>crs:position</a:t>
                       </a:r>
                     </a:p>
                   </a:txBody>
@@ -3913,7 +3913,7 @@
                     <a:lstStyle/>
                     <a:p>
                       <a:r>
-                        <a:rPr sz="1875" b="0">
+                        <a:rPr sz="1800" b="0">
                           <a:solidFill>
                             <a:srgbClr val="213744"/>
                           </a:solidFill>
@@ -3921,7 +3921,7 @@
                           <a:ea typeface="Arial"/>
                           <a:cs typeface="Arial"/>
                         </a:rPr>
-                        <a:t>Nearest enclosing CRS fixes the adjustment chart. The candidate specifies origins, pivots and descendant resets.</a:t>
+                        <a:t>Absolute 3D model origin in source WKT components, units and height reference.</a:t>
                       </a:r>
                     </a:p>
                   </a:txBody>
@@ -3932,7 +3932,7 @@
                   </a:tcPr>
                 </a:tc>
               </a:tr>
-              <a:tr h="885825">
+              <a:tr h="714375">
                 <a:tc>
                   <a:txBody>
                     <a:bodyPr>
@@ -3941,7 +3941,7 @@
                     <a:lstStyle/>
                     <a:p>
                       <a:r>
-                        <a:rPr sz="1875" b="0">
+                        <a:rPr sz="1800" b="0">
                           <a:solidFill>
                             <a:srgbClr val="213744"/>
                           </a:solidFill>
@@ -3949,7 +3949,7 @@
                           <a:ea typeface="Arial"/>
                           <a:cs typeface="Arial"/>
                         </a:rPr>
-                        <a:t>Q6: axes and units</a:t>
+                        <a:t>crs:orientation</a:t>
                       </a:r>
                     </a:p>
                   </a:txBody>
@@ -3967,7 +3967,7 @@
                     <a:lstStyle/>
                     <a:p>
                       <a:r>
-                        <a:rPr sz="1875" b="0">
+                        <a:rPr sz="1800" b="0">
                           <a:solidFill>
                             <a:srgbClr val="213744"/>
                           </a:solidFill>
@@ -3975,7 +3975,7 @@
                           <a:ea typeface="Arial"/>
                           <a:cs typeface="Arial"/>
                         </a:rPr>
-                        <a:t>Z-up: (x,y,z). Y-up: (x,-z,y). Convert stage units before scale and orientation.</a:t>
+                        <a:t>Physical geodetic ENU model attitude; identity fallback. Distinct from projected grid convergence.</a:t>
                       </a:r>
                     </a:p>
                   </a:txBody>
@@ -3986,7 +3986,7 @@
                   </a:tcPr>
                 </a:tc>
               </a:tr>
-              <a:tr h="885825">
+              <a:tr h="714375">
                 <a:tc>
                   <a:txBody>
                     <a:bodyPr>
@@ -3995,7 +3995,7 @@
                     <a:lstStyle/>
                     <a:p>
                       <a:r>
-                        <a:rPr sz="1875" b="0">
+                        <a:rPr sz="1800" b="0">
                           <a:solidFill>
                             <a:srgbClr val="213744"/>
                           </a:solidFill>
@@ -4003,7 +4003,7 @@
                           <a:ea typeface="Arial"/>
                           <a:cs typeface="Arial"/>
                         </a:rPr>
-                        <a:t>Q11: measurements</a:t>
+                        <a:t>Ordinary xformOps</a:t>
                       </a:r>
                     </a:p>
                   </a:txBody>
@@ -4021,7 +4021,7 @@
                     <a:lstStyle/>
                     <a:p>
                       <a:r>
-                        <a:rPr sz="1875" b="0">
+                        <a:rPr sz="1800" b="0">
                           <a:solidFill>
                             <a:srgbClr val="213744"/>
                           </a:solidFill>
@@ -4029,7 +4029,7 @@
                           <a:ea typeface="Arial"/>
                           <a:cs typeface="Arial"/>
                         </a:rPr>
-                        <a:t>A proposed non-Xformable data-source schema selects asset, format, field and coordinate domain. Native formats retain values and times.</a:t>
+                        <a:t>Intentional scale, pivots and project adjustment. Descendant stacks retain model-local meaning.</a:t>
                       </a:r>
                     </a:p>
                   </a:txBody>
@@ -4040,7 +4040,7 @@
                   </a:tcPr>
                 </a:tc>
               </a:tr>
-              <a:tr h="885825">
+              <a:tr h="714375">
                 <a:tc>
                   <a:txBody>
                     <a:bodyPr>
@@ -4049,7 +4049,7 @@
                     <a:lstStyle/>
                     <a:p>
                       <a:r>
-                        <a:rPr sz="1875" b="0">
+                        <a:rPr sz="1800" b="0">
                           <a:solidFill>
                             <a:srgbClr val="213744"/>
                           </a:solidFill>
@@ -4057,7 +4057,7 @@
                           <a:ea typeface="Arial"/>
                           <a:cs typeface="Arial"/>
                         </a:rPr>
-                        <a:t>Q12: dependency</a:t>
+                        <a:t>Native data association</a:t>
                       </a:r>
                     </a:p>
                   </a:txBody>
@@ -4075,7 +4075,7 @@
                     <a:lstStyle/>
                     <a:p>
                       <a:r>
-                        <a:rPr sz="1875" b="0">
+                        <a:rPr sz="1800" b="0">
                           <a:solidFill>
                             <a:srgbClr val="213744"/>
                           </a:solidFill>
@@ -4083,7 +4083,61 @@
                           <a:ea typeface="Arial"/>
                           <a:cs typeface="Arial"/>
                         </a:rPr>
-                        <a:t>Profiles on defaultPrim carries a conservative hard capability claim for the whole scene, including unloaded content.</a:t>
+                        <a:t>Asset, format, field and coordinate domain. Values, masks and observation times remain native.</a:t>
+                      </a:r>
+                    </a:p>
+                  </a:txBody>
+                  <a:tcPr marL="91440" marR="91440" marT="45720" marB="45720">
+                    <a:solidFill>
+                      <a:srgbClr val="FFFFFF"/>
+                    </a:solidFill>
+                  </a:tcPr>
+                </a:tc>
+              </a:tr>
+              <a:tr h="714375">
+                <a:tc>
+                  <a:txBody>
+                    <a:bodyPr>
+                      <a:noAutofit/>
+                    </a:bodyPr>
+                    <a:lstStyle/>
+                    <a:p>
+                      <a:r>
+                        <a:rPr sz="1800" b="0">
+                          <a:solidFill>
+                            <a:srgbClr val="213744"/>
+                          </a:solidFill>
+                          <a:latin typeface="Arial"/>
+                          <a:ea typeface="Arial"/>
+                          <a:cs typeface="Arial"/>
+                        </a:rPr>
+                        <a:t>Computed results</a:t>
+                      </a:r>
+                    </a:p>
+                  </a:txBody>
+                  <a:tcPr marL="91440" marR="91440" marT="45720" marB="45720">
+                    <a:solidFill>
+                      <a:srgbClr val="FFFFFF"/>
+                    </a:solidFill>
+                  </a:tcPr>
+                </a:tc>
+                <a:tc>
+                  <a:txBody>
+                    <a:bodyPr>
+                      <a:noAutofit/>
+                    </a:bodyPr>
+                    <a:lstStyle/>
+                    <a:p>
+                      <a:r>
+                        <a:rPr sz="1800" b="0">
+                          <a:solidFill>
+                            <a:srgbClr val="213744"/>
+                          </a:solidFill>
+                          <a:latin typeface="Arial"/>
+                          <a:ea typeface="Arial"/>
+                          <a:cs typeface="Arial"/>
+                        </a:rPr>
+                        <a:t>Resolution, convergence, projection scale and bounds are results; no crs:scale source property.</a:t>
                       </a:r>
                     </a:p>
                   </a:txBody>
@@ -4103,7 +4157,7 @@
           <p:cNvPr id="3" name="">
             <a:extLst xmlns:a="http://schemas.openxmlformats.org/drawingml/2006/main">
               <a:ext uri="{FF2B5EF4-FFF2-40B4-BE49-F238E27FC236}">
-                <a16:creationId xmlns:a16="http://schemas.microsoft.com/office/drawing/2014/main" id="{6863E12C-EB80-48BA-B9A9-733253B381BF}"/>
+                <a16:creationId xmlns:a16="http://schemas.microsoft.com/office/drawing/2014/main" id="{9078AFF5-3C70-4379-AC93-8ED726D26658}"/>
               </a:ext>
             </a:extLst>
           </p:cNvPr>
@@ -4150,7 +4204,7 @@
                 <a:ea typeface="Arial"/>
                 <a:cs typeface="Arial"/>
               </a:rPr>
-              <a:t>These are proposed details, including a new external-association schema. Passing tests does not establish group agreement.</a:t>
+              <a:t>This is a complete review candidate. Tests do not establish author agreement to the detailed choices.</a:t>
             </a:r>
           </a:p>
         </p:txBody>
@@ -4158,7 +4212,7 @@
     </p:spTree>
     <p:extLst>
       <p:ext uri="{BB962C8B-B14F-4D97-AF65-F5344CB8AC3E}">
-        <p14:creationId xmlns:p14="http://schemas.microsoft.com/office/powerpoint/2010/main" val="919488112"/>
+        <p14:creationId xmlns:p14="http://schemas.microsoft.com/office/powerpoint/2010/main" val="859447311"/>
       </p:ext>
     </p:extLst>
   </p:cSld>
@@ -4189,7 +4243,7 @@
           <p:cNvPr id="6" name="">
             <a:extLst xmlns:a="http://schemas.openxmlformats.org/drawingml/2006/main">
               <a:ext uri="{FF2B5EF4-FFF2-40B4-BE49-F238E27FC236}">
-                <a16:creationId xmlns:a16="http://schemas.microsoft.com/office/drawing/2014/main" id="{BF79E4CA-3A3E-4B7B-AF78-4B84C072AF1F}"/>
+                <a16:creationId xmlns:a16="http://schemas.microsoft.com/office/drawing/2014/main" id="{C766EBB2-01C0-4D95-B64A-25957D7CE6DB}"/>
               </a:ext>
             </a:extLst>
           </p:cNvPr>
@@ -4236,7 +4290,7 @@
                 <a:ea typeface="Arial"/>
                 <a:cs typeface="Arial"/>
               </a:rPr>
-              <a:t>A fixed working frame for project adjustments</a:t>
+              <a:t>Anchor adjustments and model-local descendants</a:t>
             </a:r>
           </a:p>
         </p:txBody>
@@ -4246,7 +4300,7 @@
           <p:cNvPr id="2" name="">
             <a:extLst xmlns:a="http://schemas.openxmlformats.org/drawingml/2006/main">
               <a:ext uri="{FF2B5EF4-FFF2-40B4-BE49-F238E27FC236}">
-                <a16:creationId xmlns:a16="http://schemas.microsoft.com/office/drawing/2014/main" id="{53E13377-E809-4778-8C4C-FC949E32EA2F}"/>
+                <a16:creationId xmlns:a16="http://schemas.microsoft.com/office/drawing/2014/main" id="{8DD487D3-E216-4620-8511-8C8E8124C8E4}"/>
               </a:ext>
             </a:extLst>
           </p:cNvPr>
@@ -4751,7 +4805,7 @@
           <p:cNvPr id="4" name="">
             <a:extLst xmlns:a="http://schemas.openxmlformats.org/drawingml/2006/main">
               <a:ext uri="{FF2B5EF4-FFF2-40B4-BE49-F238E27FC236}">
-                <a16:creationId xmlns:a16="http://schemas.microsoft.com/office/drawing/2014/main" id="{AE676D42-5B4E-488D-AAF0-81EAB55BC93E}"/>
+                <a16:creationId xmlns:a16="http://schemas.microsoft.com/office/drawing/2014/main" id="{05DF5E75-851C-49E4-B30A-C4B1609898E1}"/>
               </a:ext>
             </a:extLst>
           </p:cNvPr>
@@ -4831,7 +4885,7 @@
           <p:cNvPr id="5" name="">
             <a:extLst xmlns:a="http://schemas.openxmlformats.org/drawingml/2006/main">
               <a:ext uri="{FF2B5EF4-FFF2-40B4-BE49-F238E27FC236}">
-                <a16:creationId xmlns:a16="http://schemas.microsoft.com/office/drawing/2014/main" id="{183AF568-FFD9-45EA-BEF4-B1D4B9EF4EFE}"/>
+                <a16:creationId xmlns:a16="http://schemas.microsoft.com/office/drawing/2014/main" id="{00D66EFD-816C-47FF-8C09-E5755E66DCF6}"/>
               </a:ext>
             </a:extLst>
           </p:cNvPr>
@@ -4878,7 +4932,7 @@
                 <a:ea typeface="Arial"/>
                 <a:cs typeface="Arial"/>
               </a:rPr>
-              <a:t>Reprojection to ECEF preserves the same adjusted physical result. Ordinary parent transforms remain excluded at a direct binding.</a:t>
+              <a:t>The raw working-axis child alternative differs by 4.222 m. Descendant semantics are proposed for review.</a:t>
             </a:r>
           </a:p>
         </p:txBody>
@@ -4886,7 +4940,7 @@
     </p:spTree>
     <p:extLst>
       <p:ext uri="{BB962C8B-B14F-4D97-AF65-F5344CB8AC3E}">
-        <p14:creationId xmlns:p14="http://schemas.microsoft.com/office/powerpoint/2010/main" val="1946306800"/>
+        <p14:creationId xmlns:p14="http://schemas.microsoft.com/office/powerpoint/2010/main" val="651390213"/>
       </p:ext>
     </p:extLst>
   </p:cSld>
@@ -4917,7 +4971,7 @@
           <p:cNvPr id="7" name="">
             <a:extLst xmlns:a="http://schemas.openxmlformats.org/drawingml/2006/main">
               <a:ext uri="{FF2B5EF4-FFF2-40B4-BE49-F238E27FC236}">
-                <a16:creationId xmlns:a16="http://schemas.microsoft.com/office/drawing/2014/main" id="{FE900492-1FC5-4953-9957-84929CE9C45A}"/>
+                <a16:creationId xmlns:a16="http://schemas.microsoft.com/office/drawing/2014/main" id="{02060096-28E2-417D-B655-51EA4C21960C}"/>
               </a:ext>
             </a:extLst>
           </p:cNvPr>
@@ -4964,7 +5018,7 @@
                 <a:ea typeface="Arial"/>
                 <a:cs typeface="Arial"/>
               </a:rPr>
-              <a:t>Eiffel geometry in the native Hydra consumer</a:t>
+              <a:t>Eiffel geometry in native Hydra / Storm</a:t>
             </a:r>
           </a:p>
         </p:txBody>
@@ -4978,7 +5032,7 @@
           <p:nvPr/>
         </p:nvPicPr>
         <p:blipFill>
-          <a:blip xmlns:r="http://schemas.openxmlformats.org/officeDocument/2006/relationships" xmlns:a="http://schemas.openxmlformats.org/drawingml/2006/main" r:embed="R06b4362a47174dda"/>
+          <a:blip xmlns:r="http://schemas.openxmlformats.org/officeDocument/2006/relationships" xmlns:a="http://schemas.openxmlformats.org/drawingml/2006/main" r:embed="R0654262e2e72446b"/>
           <a:stretch xmlns:a="http://schemas.openxmlformats.org/drawingml/2006/main"/>
         </p:blipFill>
         <p:spPr>
@@ -4996,7 +5050,7 @@
           <p:cNvPr id="3" name="">
             <a:extLst xmlns:a="http://schemas.openxmlformats.org/drawingml/2006/main">
               <a:ext uri="{FF2B5EF4-FFF2-40B4-BE49-F238E27FC236}">
-                <a16:creationId xmlns:a16="http://schemas.microsoft.com/office/drawing/2014/main" id="{4AEA1437-A405-4ED1-AB68-3F9B30CB6BEB}"/>
+                <a16:creationId xmlns:a16="http://schemas.microsoft.com/office/drawing/2014/main" id="{14F196C6-98C0-46D4-A42B-88272699349F}"/>
               </a:ext>
             </a:extLst>
           </p:cNvPr>
@@ -5053,7 +5107,7 @@
           <p:cNvPr id="4" name="">
             <a:extLst xmlns:a="http://schemas.openxmlformats.org/drawingml/2006/main">
               <a:ext uri="{FF2B5EF4-FFF2-40B4-BE49-F238E27FC236}">
-                <a16:creationId xmlns:a16="http://schemas.microsoft.com/office/drawing/2014/main" id="{22ED5F05-AA62-46E1-AE3D-A607F5FECBD1}"/>
+                <a16:creationId xmlns:a16="http://schemas.microsoft.com/office/drawing/2014/main" id="{61365638-CC26-4039-91FE-38E284B35684}"/>
               </a:ext>
             </a:extLst>
           </p:cNvPr>
@@ -5123,7 +5177,7 @@
                 <a:ea typeface="Arial"/>
                 <a:cs typeface="Arial"/>
               </a:rPr>
-              <a:t>Fresh USD export readers</a:t>
+              <a:t>163,416 shading normals</a:t>
             </a:r>
           </a:p>
           <a:p xmlns:a="http://schemas.openxmlformats.org/drawingml/2006/main">
@@ -5146,7 +5200,7 @@
                 <a:ea typeface="Arial"/>
                 <a:cs typeface="Arial"/>
               </a:rPr>
-              <a:t>Hydra points and transforms</a:t>
+              <a:t>Fresh USD export readers</a:t>
             </a:r>
           </a:p>
           <a:p xmlns:a="http://schemas.openxmlformats.org/drawingml/2006/main">
@@ -5179,7 +5233,7 @@
           <p:cNvPr id="5" name="">
             <a:extLst xmlns:a="http://schemas.openxmlformats.org/drawingml/2006/main">
               <a:ext uri="{FF2B5EF4-FFF2-40B4-BE49-F238E27FC236}">
-                <a16:creationId xmlns:a16="http://schemas.microsoft.com/office/drawing/2014/main" id="{2909EF76-FD20-47BB-AD00-C9B597419E55}"/>
+                <a16:creationId xmlns:a16="http://schemas.microsoft.com/office/drawing/2014/main" id="{11F5003E-E044-4DED-886A-DDB8A0DB1686}"/>
               </a:ext>
             </a:extLst>
           </p:cNvPr>
@@ -5259,7 +5313,7 @@
           <p:cNvPr id="6" name="">
             <a:extLst xmlns:a="http://schemas.openxmlformats.org/drawingml/2006/main">
               <a:ext uri="{FF2B5EF4-FFF2-40B4-BE49-F238E27FC236}">
-                <a16:creationId xmlns:a16="http://schemas.microsoft.com/office/drawing/2014/main" id="{DB3E8D27-57B8-4C69-9469-5BFC2D3FC453}"/>
+                <a16:creationId xmlns:a16="http://schemas.microsoft.com/office/drawing/2014/main" id="{F8E54D7A-7988-48AD-A20A-AEA72475353C}"/>
               </a:ext>
             </a:extLst>
           </p:cNvPr>
@@ -5314,7 +5368,7 @@
     </p:spTree>
     <p:extLst>
       <p:ext uri="{BB962C8B-B14F-4D97-AF65-F5344CB8AC3E}">
-        <p14:creationId xmlns:p14="http://schemas.microsoft.com/office/powerpoint/2010/main" val="423970486"/>
+        <p14:creationId xmlns:p14="http://schemas.microsoft.com/office/powerpoint/2010/main" val="1742066659"/>
       </p:ext>
     </p:extLst>
   </p:cSld>
@@ -5345,7 +5399,7 @@
           <p:cNvPr id="7" name="">
             <a:extLst xmlns:a="http://schemas.openxmlformats.org/drawingml/2006/main">
               <a:ext uri="{FF2B5EF4-FFF2-40B4-BE49-F238E27FC236}">
-                <a16:creationId xmlns:a16="http://schemas.microsoft.com/office/drawing/2014/main" id="{5049A040-A04B-4A8E-95A9-71017F61A1F8}"/>
+                <a16:creationId xmlns:a16="http://schemas.microsoft.com/office/drawing/2014/main" id="{C11A9428-4E45-4D7A-B49B-B162F9C5E911}"/>
               </a:ext>
             </a:extLst>
           </p:cNvPr>
@@ -5392,7 +5446,7 @@
                 <a:ea typeface="Arial"/>
                 <a:cs typeface="Arial"/>
               </a:rPr>
-              <a:t>Colorado survey geometry in a calibrated site</a:t>
+              <a:t>Colorado survey in a calibrated site</a:t>
             </a:r>
           </a:p>
         </p:txBody>
@@ -5406,7 +5460,7 @@
           <p:nvPr/>
         </p:nvPicPr>
         <p:blipFill>
-          <a:blip xmlns:r="http://schemas.openxmlformats.org/officeDocument/2006/relationships" xmlns:a="http://schemas.openxmlformats.org/drawingml/2006/main" r:embed="Racf75f57d7e341fa"/>
+          <a:blip xmlns:r="http://schemas.openxmlformats.org/officeDocument/2006/relationships" xmlns:a="http://schemas.openxmlformats.org/drawingml/2006/main" r:embed="R498990e703bf4387"/>
           <a:stretch xmlns:a="http://schemas.openxmlformats.org/drawingml/2006/main"/>
         </p:blipFill>
         <p:spPr>
@@ -5424,7 +5478,7 @@
           <p:cNvPr id="3" name="">
             <a:extLst xmlns:a="http://schemas.openxmlformats.org/drawingml/2006/main">
               <a:ext uri="{FF2B5EF4-FFF2-40B4-BE49-F238E27FC236}">
-                <a16:creationId xmlns:a16="http://schemas.microsoft.com/office/drawing/2014/main" id="{417DC696-436A-472B-9D49-75EC0AB43452}"/>
+                <a16:creationId xmlns:a16="http://schemas.microsoft.com/office/drawing/2014/main" id="{D7606484-FC0F-4ADE-95A4-FA923BF49AB5}"/>
               </a:ext>
             </a:extLst>
           </p:cNvPr>
@@ -5481,7 +5535,7 @@
           <p:cNvPr id="4" name="">
             <a:extLst xmlns:a="http://schemas.openxmlformats.org/drawingml/2006/main">
               <a:ext uri="{FF2B5EF4-FFF2-40B4-BE49-F238E27FC236}">
-                <a16:creationId xmlns:a16="http://schemas.microsoft.com/office/drawing/2014/main" id="{39B56DF1-2661-43F9-B3E3-550D4FC5DDEB}"/>
+                <a16:creationId xmlns:a16="http://schemas.microsoft.com/office/drawing/2014/main" id="{7EB658BA-230C-430A-BFF6-3F1627288571}"/>
               </a:ext>
             </a:extLst>
           </p:cNvPr>
@@ -5607,7 +5661,7 @@
           <p:cNvPr id="5" name="">
             <a:extLst xmlns:a="http://schemas.openxmlformats.org/drawingml/2006/main">
               <a:ext uri="{FF2B5EF4-FFF2-40B4-BE49-F238E27FC236}">
-                <a16:creationId xmlns:a16="http://schemas.microsoft.com/office/drawing/2014/main" id="{4EFCCED7-F343-43C0-90F9-37189263546B}"/>
+                <a16:creationId xmlns:a16="http://schemas.microsoft.com/office/drawing/2014/main" id="{5D9F2A6E-DBBB-46F9-886C-29706B571227}"/>
               </a:ext>
             </a:extLst>
           </p:cNvPr>
@@ -5687,7 +5741,7 @@
           <p:cNvPr id="6" name="">
             <a:extLst xmlns:a="http://schemas.openxmlformats.org/drawingml/2006/main">
               <a:ext uri="{FF2B5EF4-FFF2-40B4-BE49-F238E27FC236}">
-                <a16:creationId xmlns:a16="http://schemas.microsoft.com/office/drawing/2014/main" id="{DC6F2A8D-55A0-4525-84B3-9B63354B360C}"/>
+                <a16:creationId xmlns:a16="http://schemas.microsoft.com/office/drawing/2014/main" id="{A77B112D-63E6-4286-8DC7-1C9EEC440CA0}"/>
               </a:ext>
             </a:extLst>
           </p:cNvPr>
@@ -5742,7 +5796,7 @@
     </p:spTree>
     <p:extLst>
       <p:ext uri="{BB962C8B-B14F-4D97-AF65-F5344CB8AC3E}">
-        <p14:creationId xmlns:p14="http://schemas.microsoft.com/office/powerpoint/2010/main" val="2130764067"/>
+        <p14:creationId xmlns:p14="http://schemas.microsoft.com/office/powerpoint/2010/main" val="1185984270"/>
       </p:ext>
     </p:extLst>
   </p:cSld>
@@ -5773,7 +5827,7 @@
           <p:cNvPr id="5" name="">
             <a:extLst xmlns:a="http://schemas.openxmlformats.org/drawingml/2006/main">
               <a:ext uri="{FF2B5EF4-FFF2-40B4-BE49-F238E27FC236}">
-                <a16:creationId xmlns:a16="http://schemas.microsoft.com/office/drawing/2014/main" id="{198705F0-18FA-4A33-A0AD-0586A5135D52}"/>
+                <a16:creationId xmlns:a16="http://schemas.microsoft.com/office/drawing/2014/main" id="{2533BB52-F4A7-49C7-8838-1E77013B3BA7}"/>
               </a:ext>
             </a:extLst>
           </p:cNvPr>
@@ -5820,7 +5874,7 @@
                 <a:ea typeface="Arial"/>
                 <a:cs typeface="Arial"/>
               </a:rPr>
-              <a:t>Georeferenced measurements remain usable as data</a:t>
+              <a:t>Global measurements in geographic and ECEF coordinates</a:t>
             </a:r>
           </a:p>
         </p:txBody>
@@ -5834,7 +5888,7 @@
           <p:nvPr/>
         </p:nvPicPr>
         <p:blipFill>
-          <a:blip xmlns:r="http://schemas.openxmlformats.org/officeDocument/2006/relationships" xmlns:a="http://schemas.openxmlformats.org/drawingml/2006/main" r:embed="Rc1bd0301090b4eb1"/>
+          <a:blip xmlns:r="http://schemas.openxmlformats.org/officeDocument/2006/relationships" xmlns:a="http://schemas.openxmlformats.org/drawingml/2006/main" r:embed="R2c43a07783f0466d"/>
           <a:stretch xmlns:a="http://schemas.openxmlformats.org/drawingml/2006/main"/>
         </p:blipFill>
         <p:spPr>
@@ -5852,7 +5906,7 @@
           <p:cNvPr id="3" name="">
             <a:extLst xmlns:a="http://schemas.openxmlformats.org/drawingml/2006/main">
               <a:ext uri="{FF2B5EF4-FFF2-40B4-BE49-F238E27FC236}">
-                <a16:creationId xmlns:a16="http://schemas.microsoft.com/office/drawing/2014/main" id="{2C331095-46A3-4F56-A135-51FDF7657FBD}"/>
+                <a16:creationId xmlns:a16="http://schemas.microsoft.com/office/drawing/2014/main" id="{50949073-DA8D-4CC3-A956-7D262D8DD517}"/>
               </a:ext>
             </a:extLst>
           </p:cNvPr>
@@ -5899,7 +5953,7 @@
                 <a:ea typeface="Arial"/>
                 <a:cs typeface="Arial"/>
               </a:rPr>
-              <a:t>2,664 original values and horizontal coordinates remain paired.</a:t>
+              <a:t>154 synthetic 3D samples retain values and two observation times.</a:t>
             </a:r>
           </a:p>
         </p:txBody>
@@ -5909,7 +5963,7 @@
           <p:cNvPr id="4" name="">
             <a:extLst xmlns:a="http://schemas.openxmlformats.org/drawingml/2006/main">
               <a:ext uri="{FF2B5EF4-FFF2-40B4-BE49-F238E27FC236}">
-                <a16:creationId xmlns:a16="http://schemas.microsoft.com/office/drawing/2014/main" id="{4C288A83-86E9-4FE1-AABF-B360B067FB26}"/>
+                <a16:creationId xmlns:a16="http://schemas.microsoft.com/office/drawing/2014/main" id="{FBE2CEF1-3D7C-4534-9306-681A2C194252}"/>
               </a:ext>
             </a:extLst>
           </p:cNvPr>
@@ -5956,7 +6010,7 @@
                 <a:ea typeface="Arial"/>
                 <a:cs typeface="Arial"/>
               </a:rPr>
-              <a:t>The association invents no height, physical units or observation times. A 3D request fails without a height reference and coordinate.</a:t>
+              <a:t>Explicit 100 m ellipsoidal height; illustrative temperature in kelvin. Both readers resolve geographic and ECEF outputs. Observation time is distinct from epoch.</a:t>
             </a:r>
           </a:p>
         </p:txBody>
@@ -5964,7 +6018,7 @@
     </p:spTree>
     <p:extLst>
       <p:ext uri="{BB962C8B-B14F-4D97-AF65-F5344CB8AC3E}">
-        <p14:creationId xmlns:p14="http://schemas.microsoft.com/office/powerpoint/2010/main" val="873845668"/>
+        <p14:creationId xmlns:p14="http://schemas.microsoft.com/office/powerpoint/2010/main" val="1201974988"/>
       </p:ext>
     </p:extLst>
   </p:cSld>
@@ -5995,7 +6049,7 @@
           <p:cNvPr id="7" name="">
             <a:extLst xmlns:a="http://schemas.openxmlformats.org/drawingml/2006/main">
               <a:ext uri="{FF2B5EF4-FFF2-40B4-BE49-F238E27FC236}">
-                <a16:creationId xmlns:a16="http://schemas.microsoft.com/office/drawing/2014/main" id="{E1E8AA9A-C937-4953-9747-3CB3A0E91012}"/>
+                <a16:creationId xmlns:a16="http://schemas.microsoft.com/office/drawing/2014/main" id="{3331E018-4635-416F-AAF2-79E65E7425A5}"/>
               </a:ext>
             </a:extLst>
           </p:cNvPr>
@@ -6042,7 +6096,7 @@
                 <a:ea typeface="Arial"/>
                 <a:cs typeface="Arial"/>
               </a:rPr>
-              <a:t>Regional geometry retains its source coordinates</a:t>
+              <a:t>Railway geometry retains its source coordinates</a:t>
             </a:r>
           </a:p>
         </p:txBody>
@@ -6056,7 +6110,7 @@
           <p:nvPr/>
         </p:nvPicPr>
         <p:blipFill>
-          <a:blip xmlns:r="http://schemas.openxmlformats.org/officeDocument/2006/relationships" xmlns:a="http://schemas.openxmlformats.org/drawingml/2006/main" r:embed="Rd86f07368a3c49c8"/>
+          <a:blip xmlns:r="http://schemas.openxmlformats.org/officeDocument/2006/relationships" xmlns:a="http://schemas.openxmlformats.org/drawingml/2006/main" r:embed="R5ae96a8ae9c14ab3"/>
           <a:stretch xmlns:a="http://schemas.openxmlformats.org/drawingml/2006/main"/>
         </p:blipFill>
         <p:spPr>
@@ -6074,7 +6128,7 @@
           <p:cNvPr id="3" name="">
             <a:extLst xmlns:a="http://schemas.openxmlformats.org/drawingml/2006/main">
               <a:ext uri="{FF2B5EF4-FFF2-40B4-BE49-F238E27FC236}">
-                <a16:creationId xmlns:a16="http://schemas.microsoft.com/office/drawing/2014/main" id="{11621353-0A90-42BC-A14C-4502E9D6155B}"/>
+                <a16:creationId xmlns:a16="http://schemas.microsoft.com/office/drawing/2014/main" id="{CCFCBC98-4AD5-4F3F-AC4E-1421302A7ABE}"/>
               </a:ext>
             </a:extLst>
           </p:cNvPr>
@@ -6131,7 +6185,7 @@
           <p:cNvPr id="4" name="">
             <a:extLst xmlns:a="http://schemas.openxmlformats.org/drawingml/2006/main">
               <a:ext uri="{FF2B5EF4-FFF2-40B4-BE49-F238E27FC236}">
-                <a16:creationId xmlns:a16="http://schemas.microsoft.com/office/drawing/2014/main" id="{E0CD636D-BD57-4162-978C-A47A8179B801}"/>
+                <a16:creationId xmlns:a16="http://schemas.microsoft.com/office/drawing/2014/main" id="{25F9D69D-5F36-476B-AC69-20417FDA5BD1}"/>
               </a:ext>
             </a:extLst>
           </p:cNvPr>
@@ -6257,7 +6311,7 @@
           <p:cNvPr id="5" name="">
             <a:extLst xmlns:a="http://schemas.openxmlformats.org/drawingml/2006/main">
               <a:ext uri="{FF2B5EF4-FFF2-40B4-BE49-F238E27FC236}">
-                <a16:creationId xmlns:a16="http://schemas.microsoft.com/office/drawing/2014/main" id="{1484FDA2-B72C-4A44-A219-92D5A170FC04}"/>
+                <a16:creationId xmlns:a16="http://schemas.microsoft.com/office/drawing/2014/main" id="{2674E3ED-2C68-4103-83CE-DAD7AC44E084}"/>
               </a:ext>
             </a:extLst>
           </p:cNvPr>
@@ -6337,7 +6391,7 @@
           <p:cNvPr id="6" name="">
             <a:extLst xmlns:a="http://schemas.openxmlformats.org/drawingml/2006/main">
               <a:ext uri="{FF2B5EF4-FFF2-40B4-BE49-F238E27FC236}">
-                <a16:creationId xmlns:a16="http://schemas.microsoft.com/office/drawing/2014/main" id="{0D2ACC8E-6A22-469B-99C9-B0A50A1A364B}"/>
+                <a16:creationId xmlns:a16="http://schemas.microsoft.com/office/drawing/2014/main" id="{6F2E5857-D5D6-41C9-9CD7-4CCE1651D3F2}"/>
               </a:ext>
             </a:extLst>
           </p:cNvPr>
@@ -6392,7 +6446,7 @@
     </p:spTree>
     <p:extLst>
       <p:ext uri="{BB962C8B-B14F-4D97-AF65-F5344CB8AC3E}">
-        <p14:creationId xmlns:p14="http://schemas.microsoft.com/office/powerpoint/2010/main" val="1627296343"/>
+        <p14:creationId xmlns:p14="http://schemas.microsoft.com/office/powerpoint/2010/main" val="426570032"/>
       </p:ext>
     </p:extLst>
   </p:cSld>
@@ -6423,7 +6477,7 @@
           <p:cNvPr id="7" name="">
             <a:extLst xmlns:a="http://schemas.openxmlformats.org/drawingml/2006/main">
               <a:ext uri="{FF2B5EF4-FFF2-40B4-BE49-F238E27FC236}">
-                <a16:creationId xmlns:a16="http://schemas.microsoft.com/office/drawing/2014/main" id="{AFBAE026-B2CD-4239-A546-A2DA9AAF02F9}"/>
+                <a16:creationId xmlns:a16="http://schemas.microsoft.com/office/drawing/2014/main" id="{231F8456-5B25-40D4-B8B4-5A973A2D44FA}"/>
               </a:ext>
             </a:extLst>
           </p:cNvPr>
@@ -6470,7 +6524,7 @@
                 <a:ea typeface="Arial"/>
                 <a:cs typeface="Arial"/>
               </a:rPr>
-              <a:t>Matching partner-coordinate queries</a:t>
+              <a:t>The same partner data in both placements</a:t>
             </a:r>
           </a:p>
         </p:txBody>
@@ -6480,7 +6534,7 @@
           <p:cNvPr id="2" name="">
             <a:extLst xmlns:a="http://schemas.openxmlformats.org/drawingml/2006/main">
               <a:ext uri="{FF2B5EF4-FFF2-40B4-BE49-F238E27FC236}">
-                <a16:creationId xmlns:a16="http://schemas.microsoft.com/office/drawing/2014/main" id="{1069267D-9E75-4280-8DA3-867E3F9EA463}"/>
+                <a16:creationId xmlns:a16="http://schemas.microsoft.com/office/drawing/2014/main" id="{EF28643E-2F81-4439-B064-E8E615F5342A}"/>
               </a:ext>
             </a:extLst>
           </p:cNvPr>
@@ -7090,7 +7144,7 @@
           <p:cNvPr id="4" name="">
             <a:extLst xmlns:a="http://schemas.openxmlformats.org/drawingml/2006/main">
               <a:ext uri="{FF2B5EF4-FFF2-40B4-BE49-F238E27FC236}">
-                <a16:creationId xmlns:a16="http://schemas.microsoft.com/office/drawing/2014/main" id="{77D02744-46E5-4595-A8C2-071AC0EC540B}"/>
+                <a16:creationId xmlns:a16="http://schemas.microsoft.com/office/drawing/2014/main" id="{1901A62E-AF30-4C09-9099-D5C5738FB418}"/>
               </a:ext>
             </a:extLst>
           </p:cNvPr>
@@ -7700,7 +7754,7 @@
           <p:cNvPr id="6" name="">
             <a:extLst xmlns:a="http://schemas.openxmlformats.org/drawingml/2006/main">
               <a:ext uri="{FF2B5EF4-FFF2-40B4-BE49-F238E27FC236}">
-                <a16:creationId xmlns:a16="http://schemas.microsoft.com/office/drawing/2014/main" id="{971E5FB3-A62D-46BE-B100-77AF36224FED}"/>
+                <a16:creationId xmlns:a16="http://schemas.microsoft.com/office/drawing/2014/main" id="{1B648329-FA0B-44A2-873E-B0B16F63AEF7}"/>
               </a:ext>
             </a:extLst>
           </p:cNvPr>
@@ -7755,7 +7809,7 @@
     </p:spTree>
     <p:extLst>
       <p:ext uri="{BB962C8B-B14F-4D97-AF65-F5344CB8AC3E}">
-        <p14:creationId xmlns:p14="http://schemas.microsoft.com/office/powerpoint/2010/main" val="1282784304"/>
+        <p14:creationId xmlns:p14="http://schemas.microsoft.com/office/powerpoint/2010/main" val="374381457"/>
       </p:ext>
     </p:extLst>
   </p:cSld>
@@ -7786,7 +7840,7 @@
           <p:cNvPr id="7" name="">
             <a:extLst xmlns:a="http://schemas.openxmlformats.org/drawingml/2006/main">
               <a:ext uri="{FF2B5EF4-FFF2-40B4-BE49-F238E27FC236}">
-                <a16:creationId xmlns:a16="http://schemas.microsoft.com/office/drawing/2014/main" id="{421708AB-6346-48CF-810D-08E480E0C8B6}"/>
+                <a16:creationId xmlns:a16="http://schemas.microsoft.com/office/drawing/2014/main" id="{A2309A21-3D12-462A-9AD4-28D070FC646B}"/>
               </a:ext>
             </a:extLst>
           </p:cNvPr>
@@ -7850,7 +7904,7 @@
         </p:xfrm>
         <a:graphic xmlns:a="http://schemas.openxmlformats.org/drawingml/2006/main">
           <a:graphicData uri="http://schemas.openxmlformats.org/drawingml/2006/chart">
-            <c:chart xmlns:r="http://schemas.openxmlformats.org/officeDocument/2006/relationships" xmlns:c="http://schemas.openxmlformats.org/drawingml/2006/chart" r:id="R2acb5832f09e4f68"/>
+            <c:chart xmlns:r="http://schemas.openxmlformats.org/officeDocument/2006/relationships" xmlns:c="http://schemas.openxmlformats.org/drawingml/2006/chart" r:id="Rf2cb10de781e4f6a"/>
           </a:graphicData>
         </a:graphic>
       </p:graphicFrame>
@@ -7859,7 +7913,7 @@
           <p:cNvPr id="3" name="">
             <a:extLst xmlns:a="http://schemas.openxmlformats.org/drawingml/2006/main">
               <a:ext uri="{FF2B5EF4-FFF2-40B4-BE49-F238E27FC236}">
-                <a16:creationId xmlns:a16="http://schemas.microsoft.com/office/drawing/2014/main" id="{47B9A050-DCED-4F08-BFB8-FE985A7C0ADE}"/>
+                <a16:creationId xmlns:a16="http://schemas.microsoft.com/office/drawing/2014/main" id="{3E9F76D7-B88C-4955-9949-7F896D9CB31B}"/>
               </a:ext>
             </a:extLst>
           </p:cNvPr>
@@ -7916,7 +7970,7 @@
           <p:cNvPr id="4" name="">
             <a:extLst xmlns:a="http://schemas.openxmlformats.org/drawingml/2006/main">
               <a:ext uri="{FF2B5EF4-FFF2-40B4-BE49-F238E27FC236}">
-                <a16:creationId xmlns:a16="http://schemas.microsoft.com/office/drawing/2014/main" id="{E4861F78-5378-4928-9712-BF317081974C}"/>
+                <a16:creationId xmlns:a16="http://schemas.microsoft.com/office/drawing/2014/main" id="{FAF5EBA8-9582-47EC-881B-5CD42609863A}"/>
               </a:ext>
             </a:extLst>
           </p:cNvPr>
@@ -8019,7 +8073,7 @@
           <p:cNvPr id="5" name="">
             <a:extLst xmlns:a="http://schemas.openxmlformats.org/drawingml/2006/main">
               <a:ext uri="{FF2B5EF4-FFF2-40B4-BE49-F238E27FC236}">
-                <a16:creationId xmlns:a16="http://schemas.microsoft.com/office/drawing/2014/main" id="{EF7046D7-D8BA-4117-B4FD-04AFA93EC6C6}"/>
+                <a16:creationId xmlns:a16="http://schemas.microsoft.com/office/drawing/2014/main" id="{68643C15-C24B-43C5-AA8C-78AD7C0900DB}"/>
               </a:ext>
             </a:extLst>
           </p:cNvPr>
@@ -8122,7 +8176,7 @@
           <p:cNvPr id="6" name="">
             <a:extLst xmlns:a="http://schemas.openxmlformats.org/drawingml/2006/main">
               <a:ext uri="{FF2B5EF4-FFF2-40B4-BE49-F238E27FC236}">
-                <a16:creationId xmlns:a16="http://schemas.microsoft.com/office/drawing/2014/main" id="{4A233801-AEA9-4C37-B558-5A128844A9FF}"/>
+                <a16:creationId xmlns:a16="http://schemas.microsoft.com/office/drawing/2014/main" id="{D4DCF8B0-DC43-4B9F-AF6A-FFA426953868}"/>
               </a:ext>
             </a:extLst>
           </p:cNvPr>
@@ -8177,7 +8231,7 @@
     </p:spTree>
     <p:extLst>
       <p:ext uri="{BB962C8B-B14F-4D97-AF65-F5344CB8AC3E}">
-        <p14:creationId xmlns:p14="http://schemas.microsoft.com/office/powerpoint/2010/main" val="84676947"/>
+        <p14:creationId xmlns:p14="http://schemas.microsoft.com/office/powerpoint/2010/main" val="1420045238"/>
       </p:ext>
     </p:extLst>
   </p:cSld>

--- a/extras/usd/examples/usdGeospatialBuild/delivery/geospatial-build.pptx
+++ b/extras/usd/examples/usdGeospatialBuild/delivery/geospatial-build.pptx
@@ -2,26 +2,26 @@
 <file path=ppt/presentation.xml><?xml version="1.0" encoding="utf-8"?>
 <p:presentation xmlns:p="http://schemas.openxmlformats.org/presentationml/2006/main">
   <p:sldMasterIdLst>
-    <p:sldMasterId xmlns:r="http://schemas.openxmlformats.org/officeDocument/2006/relationships" id="2147483648" r:id="R8901746ec3dd4c8e"/>
+    <p:sldMasterId xmlns:r="http://schemas.openxmlformats.org/officeDocument/2006/relationships" id="2147483648" r:id="R03740ff4bb0e4a2e"/>
   </p:sldMasterIdLst>
   <p:notesMasterIdLst>
-    <p:notesMasterId xmlns:r="http://schemas.openxmlformats.org/officeDocument/2006/relationships" r:id="R5d6a9f9e9810472e"/>
+    <p:notesMasterId xmlns:r="http://schemas.openxmlformats.org/officeDocument/2006/relationships" r:id="Rcebec120b52b408f"/>
   </p:notesMasterIdLst>
   <p:sldIdLst>
-    <p:sldId xmlns:r="http://schemas.openxmlformats.org/officeDocument/2006/relationships" id="256" r:id="R991b8ac733be4a8d"/>
-    <p:sldId xmlns:r="http://schemas.openxmlformats.org/officeDocument/2006/relationships" id="257" r:id="R509a829bc7d84e2c"/>
-    <p:sldId xmlns:r="http://schemas.openxmlformats.org/officeDocument/2006/relationships" id="258" r:id="R688a28a404aa48e7"/>
-    <p:sldId xmlns:r="http://schemas.openxmlformats.org/officeDocument/2006/relationships" id="259" r:id="Rd87e6c00a0b64f21"/>
-    <p:sldId xmlns:r="http://schemas.openxmlformats.org/officeDocument/2006/relationships" id="260" r:id="Rec7135b852a949be"/>
-    <p:sldId xmlns:r="http://schemas.openxmlformats.org/officeDocument/2006/relationships" id="261" r:id="R1fb6548ecec347f8"/>
-    <p:sldId xmlns:r="http://schemas.openxmlformats.org/officeDocument/2006/relationships" id="262" r:id="R1bfd4317d2614b46"/>
-    <p:sldId xmlns:r="http://schemas.openxmlformats.org/officeDocument/2006/relationships" id="263" r:id="R6bf3c1e34af54b7f"/>
-    <p:sldId xmlns:r="http://schemas.openxmlformats.org/officeDocument/2006/relationships" id="264" r:id="Rb0800cc21dbe4995"/>
-    <p:sldId xmlns:r="http://schemas.openxmlformats.org/officeDocument/2006/relationships" id="265" r:id="Rba1ef84558434f35"/>
-    <p:sldId xmlns:r="http://schemas.openxmlformats.org/officeDocument/2006/relationships" id="266" r:id="R2d0dfe7959554bb7"/>
-    <p:sldId xmlns:r="http://schemas.openxmlformats.org/officeDocument/2006/relationships" id="267" r:id="R8f07bc0b168c4da3"/>
-    <p:sldId xmlns:r="http://schemas.openxmlformats.org/officeDocument/2006/relationships" id="268" r:id="Ra8d3a7c4d66f4fee"/>
-    <p:sldId xmlns:r="http://schemas.openxmlformats.org/officeDocument/2006/relationships" id="269" r:id="R91d990e0db6f4ecb"/>
+    <p:sldId xmlns:r="http://schemas.openxmlformats.org/officeDocument/2006/relationships" id="256" r:id="Rc336eeb4ab154cb7"/>
+    <p:sldId xmlns:r="http://schemas.openxmlformats.org/officeDocument/2006/relationships" id="257" r:id="R530cc6729af3476f"/>
+    <p:sldId xmlns:r="http://schemas.openxmlformats.org/officeDocument/2006/relationships" id="258" r:id="R4c868b37a97a46b6"/>
+    <p:sldId xmlns:r="http://schemas.openxmlformats.org/officeDocument/2006/relationships" id="259" r:id="R42cefb046e254832"/>
+    <p:sldId xmlns:r="http://schemas.openxmlformats.org/officeDocument/2006/relationships" id="260" r:id="R630202b3d46b4c4d"/>
+    <p:sldId xmlns:r="http://schemas.openxmlformats.org/officeDocument/2006/relationships" id="261" r:id="R4334d98dc21d41e8"/>
+    <p:sldId xmlns:r="http://schemas.openxmlformats.org/officeDocument/2006/relationships" id="262" r:id="R0880b9c5649743a4"/>
+    <p:sldId xmlns:r="http://schemas.openxmlformats.org/officeDocument/2006/relationships" id="263" r:id="R7ca3e0a0e81d4017"/>
+    <p:sldId xmlns:r="http://schemas.openxmlformats.org/officeDocument/2006/relationships" id="264" r:id="Rf0815b3a734248e1"/>
+    <p:sldId xmlns:r="http://schemas.openxmlformats.org/officeDocument/2006/relationships" id="265" r:id="R8cc4889ab0bb4c16"/>
+    <p:sldId xmlns:r="http://schemas.openxmlformats.org/officeDocument/2006/relationships" id="266" r:id="R7cb2d114c0f44b93"/>
+    <p:sldId xmlns:r="http://schemas.openxmlformats.org/officeDocument/2006/relationships" id="267" r:id="R57259f88cb5e4f0c"/>
+    <p:sldId xmlns:r="http://schemas.openxmlformats.org/officeDocument/2006/relationships" id="268" r:id="R3d73954d34c44e59"/>
+    <p:sldId xmlns:r="http://schemas.openxmlformats.org/officeDocument/2006/relationships" id="269" r:id="R898cdd03f6c34f21"/>
   </p:sldIdLst>
   <p:sldSz cx="12192000" cy="6858000"/>
   <p:notesSz cx="6858000" cy="9144000"/>
@@ -211,16 +211,16 @@
         <a:srgbClr val="96607D"/>
       </a:folHlink>
     </a:clrScheme>
-    <a:fontScheme name="Office">
+    <a:fontScheme name="">
       <a:majorFont>
-        <a:latin typeface="Calibri Light"/>
-        <a:ea typeface="Calibri Light"/>
-        <a:cs typeface="Calibri Light"/>
+        <a:latin typeface="Aptos"/>
+        <a:ea typeface=""/>
+        <a:cs typeface=""/>
       </a:majorFont>
       <a:minorFont>
-        <a:latin typeface="Calibri"/>
-        <a:ea typeface="Calibri"/>
-        <a:cs typeface="Calibri"/>
+        <a:latin typeface="Aptos"/>
+        <a:ea typeface=""/>
+        <a:cs typeface=""/>
       </a:minorFont>
     </a:fontScheme>
     <a:fmtScheme name="ChatGPT">
@@ -465,27 +465,27 @@
           </a:p>
           <a:p xmlns:a="http://schemas.openxmlformats.org/drawingml/2006/main">
             <a:r>
-              <a:t>README SHA-256 a45f759d69e14f28301cce5931f6578c8a64ebc8262403a6c8cc3b15b9a0b069</a:t>
-            </a:r>
-          </a:p>
-          <a:p xmlns:a="http://schemas.openxmlformats.org/drawingml/2006/main">
-            <a:r>
-              <a:t>Proposal SHA-256 1727a552053cfdcdf202e2c84ad1209d1a898fe2eab2e322d51e9c7b4ad7c7c0</a:t>
-            </a:r>
-          </a:p>
-          <a:p xmlns:a="http://schemas.openxmlformats.org/drawingml/2006/main">
-            <a:r>
-              <a:t>Immutable execution receipt SHA-256 3baf0e2c215e8ac2ea30fb41197242b663469cd51f31ba48dc9e6c0d7b76833c</a:t>
-            </a:r>
-          </a:p>
-          <a:p xmlns:a="http://schemas.openxmlformats.org/drawingml/2006/main">
-            <a:r>
-              <a:t>Later audit SHA-256 9456363dd93059d7884c0b71a7942f5eed5454ee0d0628e567c2f4856b60a00b</a:t>
-            </a:r>
-          </a:p>
-          <a:p xmlns:a="http://schemas.openxmlformats.org/drawingml/2006/main">
-            <a:r>
-              <a:t>Explanatory delivery refresh of the same frozen execution, with later audit disclosure. No new runtime execution or repairs.</a:t>
+              <a:t>README SHA-256 516b20d0c5b90558e7659c4ca71b2f2741d929c1a41d2427ac823f265f49b730</a:t>
+            </a:r>
+          </a:p>
+          <a:p xmlns:a="http://schemas.openxmlformats.org/drawingml/2006/main">
+            <a:r>
+              <a:t>Proposal SHA-256 02323339203777b80b0bf8969f2392a4663b78be29e88f26f859df376999774a</a:t>
+            </a:r>
+          </a:p>
+          <a:p xmlns:a="http://schemas.openxmlformats.org/drawingml/2006/main">
+            <a:r>
+              <a:t>Immutable execution receipt SHA-256 4f212b53f00cd7f31bae7b94ea63e6a4b99e3a9cf9e645b2989e888a51ceecbf</a:t>
+            </a:r>
+          </a:p>
+          <a:p xmlns:a="http://schemas.openxmlformats.org/drawingml/2006/main">
+            <a:r>
+              <a:t>Later audit SHA-256 75abc802636f2e337b6fda2002b14f4ddf89f434901bae4a034734403f73e35f</a:t>
+            </a:r>
+          </a:p>
+          <a:p xmlns:a="http://schemas.openxmlformats.org/drawingml/2006/main">
+            <a:r>
+              <a:t>Fresh October 7 execution of the merged proposal candidate, compared with the prior immutable run and followed by repeated independent diagnostics. No runtime implementation repairs.</a:t>
             </a:r>
           </a:p>
           <a:p xmlns:a="http://schemas.openxmlformats.org/drawingml/2006/main">
@@ -590,12 +590,12 @@
           </a:p>
           <a:p xmlns:a="http://schemas.openxmlformats.org/drawingml/2006/main">
             <a:r>
-              <a:t>Proposal: ### External measurement association at proposal/proposal-source.txt:1558</a:t>
-            </a:r>
-          </a:p>
-          <a:p xmlns:a="http://schemas.openxmlformats.org/drawingml/2006/main">
-            <a:r>
-              <a:t>Functional requirements: [{"id":8,"title":"Brought-in data keeps its coordinates and its CRS.","line":710},{"id":12,"title":"No angle read as a length.","line":790},{"id":19,"title":"Resolution leaves the scene as authored.","line":894},{"id":21,"title":"Never placed by a guess.","line":930}]</a:t>
+              <a:t>Proposal: ### External measurement association at proposal/proposal-source.txt:1594</a:t>
+            </a:r>
+          </a:p>
+          <a:p xmlns:a="http://schemas.openxmlformats.org/drawingml/2006/main">
+            <a:r>
+              <a:t>Functional requirements: [{"id":8,"title":"Brought-in data keeps its coordinates and its CRS.","line":746},{"id":12,"title":"No angle read as a length.","line":826},{"id":19,"title":"Resolution leaves the scene as authored.","line":930},{"id":21,"title":"Never placed by a guess.","line":966}]</a:t>
             </a:r>
           </a:p>
           <a:p xmlns:a="http://schemas.openxmlformats.org/drawingml/2006/main">
@@ -610,27 +610,27 @@
           </a:p>
           <a:p xmlns:a="http://schemas.openxmlformats.org/drawingml/2006/main">
             <a:r>
-              <a:t>README SHA-256 a45f759d69e14f28301cce5931f6578c8a64ebc8262403a6c8cc3b15b9a0b069</a:t>
-            </a:r>
-          </a:p>
-          <a:p xmlns:a="http://schemas.openxmlformats.org/drawingml/2006/main">
-            <a:r>
-              <a:t>Proposal SHA-256 1727a552053cfdcdf202e2c84ad1209d1a898fe2eab2e322d51e9c7b4ad7c7c0</a:t>
-            </a:r>
-          </a:p>
-          <a:p xmlns:a="http://schemas.openxmlformats.org/drawingml/2006/main">
-            <a:r>
-              <a:t>Immutable execution receipt SHA-256 3baf0e2c215e8ac2ea30fb41197242b663469cd51f31ba48dc9e6c0d7b76833c</a:t>
-            </a:r>
-          </a:p>
-          <a:p xmlns:a="http://schemas.openxmlformats.org/drawingml/2006/main">
-            <a:r>
-              <a:t>Later audit SHA-256 9456363dd93059d7884c0b71a7942f5eed5454ee0d0628e567c2f4856b60a00b</a:t>
-            </a:r>
-          </a:p>
-          <a:p xmlns:a="http://schemas.openxmlformats.org/drawingml/2006/main">
-            <a:r>
-              <a:t>Explanatory delivery refresh of the same frozen execution, with later audit disclosure. No new runtime execution or repairs.</a:t>
+              <a:t>README SHA-256 516b20d0c5b90558e7659c4ca71b2f2741d929c1a41d2427ac823f265f49b730</a:t>
+            </a:r>
+          </a:p>
+          <a:p xmlns:a="http://schemas.openxmlformats.org/drawingml/2006/main">
+            <a:r>
+              <a:t>Proposal SHA-256 02323339203777b80b0bf8969f2392a4663b78be29e88f26f859df376999774a</a:t>
+            </a:r>
+          </a:p>
+          <a:p xmlns:a="http://schemas.openxmlformats.org/drawingml/2006/main">
+            <a:r>
+              <a:t>Immutable execution receipt SHA-256 4f212b53f00cd7f31bae7b94ea63e6a4b99e3a9cf9e645b2989e888a51ceecbf</a:t>
+            </a:r>
+          </a:p>
+          <a:p xmlns:a="http://schemas.openxmlformats.org/drawingml/2006/main">
+            <a:r>
+              <a:t>Later audit SHA-256 75abc802636f2e337b6fda2002b14f4ddf89f434901bae4a034734403f73e35f</a:t>
+            </a:r>
+          </a:p>
+          <a:p xmlns:a="http://schemas.openxmlformats.org/drawingml/2006/main">
+            <a:r>
+              <a:t>Fresh October 7 execution of the merged proposal candidate, compared with the prior immutable run and followed by repeated independent diagnostics. No runtime implementation repairs.</a:t>
             </a:r>
           </a:p>
           <a:p xmlns:a="http://schemas.openxmlformats.org/drawingml/2006/main">
@@ -735,12 +735,12 @@
           </a:p>
           <a:p xmlns:a="http://schemas.openxmlformats.org/drawingml/2006/main">
             <a:r>
-              <a:t>Proposal: #### Evaluation at proposal/proposal-source.txt:1788</a:t>
-            </a:r>
-          </a:p>
-          <a:p xmlns:a="http://schemas.openxmlformats.org/drawingml/2006/main">
-            <a:r>
-              <a:t>Functional requirements: [{"id":20,"title":"Positions between recorded moments.","line":913},{"id":29,"title":"Implementable from the text alone.","line":1070}]</a:t>
+              <a:t>Proposal: #### Evaluation at proposal/proposal-source.txt:1887</a:t>
+            </a:r>
+          </a:p>
+          <a:p xmlns:a="http://schemas.openxmlformats.org/drawingml/2006/main">
+            <a:r>
+              <a:t>Functional requirements: [{"id":20,"title":"Positions between recorded moments.","line":949},{"id":29,"title":"Implementable from the text alone.","line":1106}]</a:t>
             </a:r>
           </a:p>
           <a:p xmlns:a="http://schemas.openxmlformats.org/drawingml/2006/main">
@@ -755,27 +755,27 @@
           </a:p>
           <a:p xmlns:a="http://schemas.openxmlformats.org/drawingml/2006/main">
             <a:r>
-              <a:t>README SHA-256 a45f759d69e14f28301cce5931f6578c8a64ebc8262403a6c8cc3b15b9a0b069</a:t>
-            </a:r>
-          </a:p>
-          <a:p xmlns:a="http://schemas.openxmlformats.org/drawingml/2006/main">
-            <a:r>
-              <a:t>Proposal SHA-256 1727a552053cfdcdf202e2c84ad1209d1a898fe2eab2e322d51e9c7b4ad7c7c0</a:t>
-            </a:r>
-          </a:p>
-          <a:p xmlns:a="http://schemas.openxmlformats.org/drawingml/2006/main">
-            <a:r>
-              <a:t>Immutable execution receipt SHA-256 3baf0e2c215e8ac2ea30fb41197242b663469cd51f31ba48dc9e6c0d7b76833c</a:t>
-            </a:r>
-          </a:p>
-          <a:p xmlns:a="http://schemas.openxmlformats.org/drawingml/2006/main">
-            <a:r>
-              <a:t>Later audit SHA-256 9456363dd93059d7884c0b71a7942f5eed5454ee0d0628e567c2f4856b60a00b</a:t>
-            </a:r>
-          </a:p>
-          <a:p xmlns:a="http://schemas.openxmlformats.org/drawingml/2006/main">
-            <a:r>
-              <a:t>Explanatory delivery refresh of the same frozen execution, with later audit disclosure. No new runtime execution or repairs.</a:t>
+              <a:t>README SHA-256 516b20d0c5b90558e7659c4ca71b2f2741d929c1a41d2427ac823f265f49b730</a:t>
+            </a:r>
+          </a:p>
+          <a:p xmlns:a="http://schemas.openxmlformats.org/drawingml/2006/main">
+            <a:r>
+              <a:t>Proposal SHA-256 02323339203777b80b0bf8969f2392a4663b78be29e88f26f859df376999774a</a:t>
+            </a:r>
+          </a:p>
+          <a:p xmlns:a="http://schemas.openxmlformats.org/drawingml/2006/main">
+            <a:r>
+              <a:t>Immutable execution receipt SHA-256 4f212b53f00cd7f31bae7b94ea63e6a4b99e3a9cf9e645b2989e888a51ceecbf</a:t>
+            </a:r>
+          </a:p>
+          <a:p xmlns:a="http://schemas.openxmlformats.org/drawingml/2006/main">
+            <a:r>
+              <a:t>Later audit SHA-256 75abc802636f2e337b6fda2002b14f4ddf89f434901bae4a034734403f73e35f</a:t>
+            </a:r>
+          </a:p>
+          <a:p xmlns:a="http://schemas.openxmlformats.org/drawingml/2006/main">
+            <a:r>
+              <a:t>Fresh October 7 execution of the merged proposal candidate, compared with the prior immutable run and followed by repeated independent diagnostics. No runtime implementation repairs.</a:t>
             </a:r>
           </a:p>
           <a:p xmlns:a="http://schemas.openxmlformats.org/drawingml/2006/main">
@@ -860,27 +860,27 @@
           </a:p>
           <a:p xmlns:a="http://schemas.openxmlformats.org/drawingml/2006/main">
             <a:r>
-              <a:t>README SHA-256 a45f759d69e14f28301cce5931f6578c8a64ebc8262403a6c8cc3b15b9a0b069</a:t>
-            </a:r>
-          </a:p>
-          <a:p xmlns:a="http://schemas.openxmlformats.org/drawingml/2006/main">
-            <a:r>
-              <a:t>Proposal SHA-256 1727a552053cfdcdf202e2c84ad1209d1a898fe2eab2e322d51e9c7b4ad7c7c0</a:t>
-            </a:r>
-          </a:p>
-          <a:p xmlns:a="http://schemas.openxmlformats.org/drawingml/2006/main">
-            <a:r>
-              <a:t>Immutable execution receipt SHA-256 3baf0e2c215e8ac2ea30fb41197242b663469cd51f31ba48dc9e6c0d7b76833c</a:t>
-            </a:r>
-          </a:p>
-          <a:p xmlns:a="http://schemas.openxmlformats.org/drawingml/2006/main">
-            <a:r>
-              <a:t>Later audit SHA-256 9456363dd93059d7884c0b71a7942f5eed5454ee0d0628e567c2f4856b60a00b</a:t>
-            </a:r>
-          </a:p>
-          <a:p xmlns:a="http://schemas.openxmlformats.org/drawingml/2006/main">
-            <a:r>
-              <a:t>Explanatory delivery refresh of the same frozen execution, with later audit disclosure. No new runtime execution or repairs.</a:t>
+              <a:t>README SHA-256 516b20d0c5b90558e7659c4ca71b2f2741d929c1a41d2427ac823f265f49b730</a:t>
+            </a:r>
+          </a:p>
+          <a:p xmlns:a="http://schemas.openxmlformats.org/drawingml/2006/main">
+            <a:r>
+              <a:t>Proposal SHA-256 02323339203777b80b0bf8969f2392a4663b78be29e88f26f859df376999774a</a:t>
+            </a:r>
+          </a:p>
+          <a:p xmlns:a="http://schemas.openxmlformats.org/drawingml/2006/main">
+            <a:r>
+              <a:t>Immutable execution receipt SHA-256 4f212b53f00cd7f31bae7b94ea63e6a4b99e3a9cf9e645b2989e888a51ceecbf</a:t>
+            </a:r>
+          </a:p>
+          <a:p xmlns:a="http://schemas.openxmlformats.org/drawingml/2006/main">
+            <a:r>
+              <a:t>Later audit SHA-256 75abc802636f2e337b6fda2002b14f4ddf89f434901bae4a034734403f73e35f</a:t>
+            </a:r>
+          </a:p>
+          <a:p xmlns:a="http://schemas.openxmlformats.org/drawingml/2006/main">
+            <a:r>
+              <a:t>Fresh October 7 execution of the merged proposal candidate, compared with the prior immutable run and followed by repeated independent diagnostics. No runtime implementation repairs.</a:t>
             </a:r>
           </a:p>
           <a:p xmlns:a="http://schemas.openxmlformats.org/drawingml/2006/main">
@@ -965,27 +965,27 @@
           </a:p>
           <a:p xmlns:a="http://schemas.openxmlformats.org/drawingml/2006/main">
             <a:r>
-              <a:t>README SHA-256 a45f759d69e14f28301cce5931f6578c8a64ebc8262403a6c8cc3b15b9a0b069</a:t>
-            </a:r>
-          </a:p>
-          <a:p xmlns:a="http://schemas.openxmlformats.org/drawingml/2006/main">
-            <a:r>
-              <a:t>Proposal SHA-256 1727a552053cfdcdf202e2c84ad1209d1a898fe2eab2e322d51e9c7b4ad7c7c0</a:t>
-            </a:r>
-          </a:p>
-          <a:p xmlns:a="http://schemas.openxmlformats.org/drawingml/2006/main">
-            <a:r>
-              <a:t>Immutable execution receipt SHA-256 3baf0e2c215e8ac2ea30fb41197242b663469cd51f31ba48dc9e6c0d7b76833c</a:t>
-            </a:r>
-          </a:p>
-          <a:p xmlns:a="http://schemas.openxmlformats.org/drawingml/2006/main">
-            <a:r>
-              <a:t>Later audit SHA-256 9456363dd93059d7884c0b71a7942f5eed5454ee0d0628e567c2f4856b60a00b</a:t>
-            </a:r>
-          </a:p>
-          <a:p xmlns:a="http://schemas.openxmlformats.org/drawingml/2006/main">
-            <a:r>
-              <a:t>Explanatory delivery refresh of the same frozen execution, with later audit disclosure. No new runtime execution or repairs.</a:t>
+              <a:t>README SHA-256 516b20d0c5b90558e7659c4ca71b2f2741d929c1a41d2427ac823f265f49b730</a:t>
+            </a:r>
+          </a:p>
+          <a:p xmlns:a="http://schemas.openxmlformats.org/drawingml/2006/main">
+            <a:r>
+              <a:t>Proposal SHA-256 02323339203777b80b0bf8969f2392a4663b78be29e88f26f859df376999774a</a:t>
+            </a:r>
+          </a:p>
+          <a:p xmlns:a="http://schemas.openxmlformats.org/drawingml/2006/main">
+            <a:r>
+              <a:t>Immutable execution receipt SHA-256 4f212b53f00cd7f31bae7b94ea63e6a4b99e3a9cf9e645b2989e888a51ceecbf</a:t>
+            </a:r>
+          </a:p>
+          <a:p xmlns:a="http://schemas.openxmlformats.org/drawingml/2006/main">
+            <a:r>
+              <a:t>Later audit SHA-256 75abc802636f2e337b6fda2002b14f4ddf89f434901bae4a034734403f73e35f</a:t>
+            </a:r>
+          </a:p>
+          <a:p xmlns:a="http://schemas.openxmlformats.org/drawingml/2006/main">
+            <a:r>
+              <a:t>Fresh October 7 execution of the merged proposal candidate, compared with the prior immutable run and followed by repeated independent diagnostics. No runtime implementation repairs.</a:t>
             </a:r>
           </a:p>
           <a:p xmlns:a="http://schemas.openxmlformats.org/drawingml/2006/main">
@@ -1065,32 +1065,32 @@
           </a:p>
           <a:p xmlns:a="http://schemas.openxmlformats.org/drawingml/2006/main">
             <a:r>
-              <a:t>[["Python and C++ readers","213,231 coordinate results per reader. Maximum measured difference 3.39e-08 m. They share PROJ and native dataset decoding."],["Omniverse stage geometry integration","Reuses Python placement. Recorded readback covers 177,864 geometry vertices and 36 edit, failure and recovery checks, across 35 jobs."],["Hydra / Storm","Two selected ordinary USD bakes reach native rendering. This consumer path uses the C++ placement results."],["Recorded tests","64 regressions and 61 distinguishing controls passed. The later audit exposes cases the suite missed."],["Source preservation","Original inputs and 40 executed source-file hashes remain unchanged. The immutable receipt identifies the executed content."],["Bake readbacks","11 selected exports were checked. The later nested-geometry case demonstrates that the original inventory check was incomplete."]]</a:t>
-            </a:r>
-          </a:p>
-          <a:p xmlns:a="http://schemas.openxmlformats.org/drawingml/2006/main">
-            <a:r>
-              <a:t>README SHA-256 a45f759d69e14f28301cce5931f6578c8a64ebc8262403a6c8cc3b15b9a0b069</a:t>
-            </a:r>
-          </a:p>
-          <a:p xmlns:a="http://schemas.openxmlformats.org/drawingml/2006/main">
-            <a:r>
-              <a:t>Proposal SHA-256 1727a552053cfdcdf202e2c84ad1209d1a898fe2eab2e322d51e9c7b4ad7c7c0</a:t>
-            </a:r>
-          </a:p>
-          <a:p xmlns:a="http://schemas.openxmlformats.org/drawingml/2006/main">
-            <a:r>
-              <a:t>Immutable execution receipt SHA-256 3baf0e2c215e8ac2ea30fb41197242b663469cd51f31ba48dc9e6c0d7b76833c</a:t>
-            </a:r>
-          </a:p>
-          <a:p xmlns:a="http://schemas.openxmlformats.org/drawingml/2006/main">
-            <a:r>
-              <a:t>Later audit SHA-256 9456363dd93059d7884c0b71a7942f5eed5454ee0d0628e567c2f4856b60a00b</a:t>
-            </a:r>
-          </a:p>
-          <a:p xmlns:a="http://schemas.openxmlformats.org/drawingml/2006/main">
-            <a:r>
-              <a:t>Explanatory delivery refresh of the same frozen execution, with later audit disclosure. No new runtime execution or repairs.</a:t>
+              <a:t>[["Python and C++ readers","213,231 coordinate results per reader. Maximum measured difference 3.39e-08 m. They share PROJ and native dataset decoding."],["Omniverse stage geometry integration","Reuses Python placement. Recorded readback covers 177,864 geometry vertices and 36 edit, failure and recovery checks, across 35 jobs."],["Hydra / Storm","Two selected ordinary USD bakes reach native rendering. This consumer path uses the C++ placement results."],["Recorded tests","64 regressions and 61 distinguishing controls passed. The later audit exposes cases the suite missed."],["Source preservation","Original inputs and all frozen execution files remained unchanged during this run. The immutable receipt identifies the exact executed content."],["Bake readbacks","11 selected exports were checked. The later nested-geometry case demonstrates that the original inventory check was incomplete."]]</a:t>
+            </a:r>
+          </a:p>
+          <a:p xmlns:a="http://schemas.openxmlformats.org/drawingml/2006/main">
+            <a:r>
+              <a:t>README SHA-256 516b20d0c5b90558e7659c4ca71b2f2741d929c1a41d2427ac823f265f49b730</a:t>
+            </a:r>
+          </a:p>
+          <a:p xmlns:a="http://schemas.openxmlformats.org/drawingml/2006/main">
+            <a:r>
+              <a:t>Proposal SHA-256 02323339203777b80b0bf8969f2392a4663b78be29e88f26f859df376999774a</a:t>
+            </a:r>
+          </a:p>
+          <a:p xmlns:a="http://schemas.openxmlformats.org/drawingml/2006/main">
+            <a:r>
+              <a:t>Immutable execution receipt SHA-256 4f212b53f00cd7f31bae7b94ea63e6a4b99e3a9cf9e645b2989e888a51ceecbf</a:t>
+            </a:r>
+          </a:p>
+          <a:p xmlns:a="http://schemas.openxmlformats.org/drawingml/2006/main">
+            <a:r>
+              <a:t>Later audit SHA-256 75abc802636f2e337b6fda2002b14f4ddf89f434901bae4a034734403f73e35f</a:t>
+            </a:r>
+          </a:p>
+          <a:p xmlns:a="http://schemas.openxmlformats.org/drawingml/2006/main">
+            <a:r>
+              <a:t>Fresh October 7 execution of the merged proposal candidate, compared with the prior immutable run and followed by repeated independent diagnostics. No runtime implementation repairs.</a:t>
             </a:r>
           </a:p>
           <a:p xmlns:a="http://schemas.openxmlformats.org/drawingml/2006/main">
@@ -1195,12 +1195,12 @@
           </a:p>
           <a:p xmlns:a="http://schemas.openxmlformats.org/drawingml/2006/main">
             <a:r>
-              <a:t>Proposal: #### Authored properties at proposal/proposal-source.txt:1476</a:t>
-            </a:r>
-          </a:p>
-          <a:p xmlns:a="http://schemas.openxmlformats.org/drawingml/2006/main">
-            <a:r>
-              <a:t>Functional requirements: [{"id":9,"title":"Positions, and offsets from them.","line":736},{"id":10,"title":"Offsets along the axes of their position.","line":754},{"id":12,"title":"No angle read as a length.","line":790},{"id":14,"title":"Scene conventions stay the scene's.","line":821},{"id":15,"title":"Placement separate from conformance.","line":834}]</a:t>
+              <a:t>Proposal: #### Authored properties at proposal/proposal-source.txt:1512</a:t>
+            </a:r>
+          </a:p>
+          <a:p xmlns:a="http://schemas.openxmlformats.org/drawingml/2006/main">
+            <a:r>
+              <a:t>Functional requirements: [{"id":9,"title":"Positions, and offsets from them.","line":772},{"id":10,"title":"Offsets along the axes of their position.","line":790},{"id":12,"title":"No angle read as a length.","line":826},{"id":14,"title":"Scene conventions stay the scene's.","line":857},{"id":15,"title":"Placement separate from conformance.","line":870}]</a:t>
             </a:r>
           </a:p>
           <a:p xmlns:a="http://schemas.openxmlformats.org/drawingml/2006/main">
@@ -1215,27 +1215,27 @@
           </a:p>
           <a:p xmlns:a="http://schemas.openxmlformats.org/drawingml/2006/main">
             <a:r>
-              <a:t>README SHA-256 a45f759d69e14f28301cce5931f6578c8a64ebc8262403a6c8cc3b15b9a0b069</a:t>
-            </a:r>
-          </a:p>
-          <a:p xmlns:a="http://schemas.openxmlformats.org/drawingml/2006/main">
-            <a:r>
-              <a:t>Proposal SHA-256 1727a552053cfdcdf202e2c84ad1209d1a898fe2eab2e322d51e9c7b4ad7c7c0</a:t>
-            </a:r>
-          </a:p>
-          <a:p xmlns:a="http://schemas.openxmlformats.org/drawingml/2006/main">
-            <a:r>
-              <a:t>Immutable execution receipt SHA-256 3baf0e2c215e8ac2ea30fb41197242b663469cd51f31ba48dc9e6c0d7b76833c</a:t>
-            </a:r>
-          </a:p>
-          <a:p xmlns:a="http://schemas.openxmlformats.org/drawingml/2006/main">
-            <a:r>
-              <a:t>Later audit SHA-256 9456363dd93059d7884c0b71a7942f5eed5454ee0d0628e567c2f4856b60a00b</a:t>
-            </a:r>
-          </a:p>
-          <a:p xmlns:a="http://schemas.openxmlformats.org/drawingml/2006/main">
-            <a:r>
-              <a:t>Explanatory delivery refresh of the same frozen execution, with later audit disclosure. No new runtime execution or repairs.</a:t>
+              <a:t>README SHA-256 516b20d0c5b90558e7659c4ca71b2f2741d929c1a41d2427ac823f265f49b730</a:t>
+            </a:r>
+          </a:p>
+          <a:p xmlns:a="http://schemas.openxmlformats.org/drawingml/2006/main">
+            <a:r>
+              <a:t>Proposal SHA-256 02323339203777b80b0bf8969f2392a4663b78be29e88f26f859df376999774a</a:t>
+            </a:r>
+          </a:p>
+          <a:p xmlns:a="http://schemas.openxmlformats.org/drawingml/2006/main">
+            <a:r>
+              <a:t>Immutable execution receipt SHA-256 4f212b53f00cd7f31bae7b94ea63e6a4b99e3a9cf9e645b2989e888a51ceecbf</a:t>
+            </a:r>
+          </a:p>
+          <a:p xmlns:a="http://schemas.openxmlformats.org/drawingml/2006/main">
+            <a:r>
+              <a:t>Later audit SHA-256 75abc802636f2e337b6fda2002b14f4ddf89f434901bae4a034734403f73e35f</a:t>
+            </a:r>
+          </a:p>
+          <a:p xmlns:a="http://schemas.openxmlformats.org/drawingml/2006/main">
+            <a:r>
+              <a:t>Fresh October 7 execution of the merged proposal candidate, compared with the prior immutable run and followed by repeated independent diagnostics. No runtime implementation repairs.</a:t>
             </a:r>
           </a:p>
           <a:p xmlns:a="http://schemas.openxmlformats.org/drawingml/2006/main">
@@ -1340,12 +1340,12 @@
           </a:p>
           <a:p xmlns:a="http://schemas.openxmlformats.org/drawingml/2006/main">
             <a:r>
-              <a:t>Proposal: ### Source placement evaluation and transform order at proposal/proposal-source.txt:1750</a:t>
-            </a:r>
-          </a:p>
-          <a:p xmlns:a="http://schemas.openxmlformats.org/drawingml/2006/main">
-            <a:r>
-              <a:t>Functional requirements: [{"id":9,"title":"Positions, and offsets from them.","line":736},{"id":12,"title":"No angle read as a length.","line":790},{"id":13,"title":"One axis mapping.","line":804},{"id":16,"title":"One CRS out.","line":846},{"id":19,"title":"Resolution leaves the scene as authored.","line":894}]</a:t>
+              <a:t>Proposal: ### Source placement evaluation and transform order at proposal/proposal-source.txt:1787</a:t>
+            </a:r>
+          </a:p>
+          <a:p xmlns:a="http://schemas.openxmlformats.org/drawingml/2006/main">
+            <a:r>
+              <a:t>Functional requirements: [{"id":9,"title":"Positions, and offsets from them.","line":772},{"id":12,"title":"No angle read as a length.","line":826},{"id":13,"title":"One axis mapping.","line":840},{"id":16,"title":"One CRS out.","line":882},{"id":19,"title":"Resolution leaves the scene as authored.","line":930}]</a:t>
             </a:r>
           </a:p>
           <a:p xmlns:a="http://schemas.openxmlformats.org/drawingml/2006/main">
@@ -1360,27 +1360,27 @@
           </a:p>
           <a:p xmlns:a="http://schemas.openxmlformats.org/drawingml/2006/main">
             <a:r>
-              <a:t>README SHA-256 a45f759d69e14f28301cce5931f6578c8a64ebc8262403a6c8cc3b15b9a0b069</a:t>
-            </a:r>
-          </a:p>
-          <a:p xmlns:a="http://schemas.openxmlformats.org/drawingml/2006/main">
-            <a:r>
-              <a:t>Proposal SHA-256 1727a552053cfdcdf202e2c84ad1209d1a898fe2eab2e322d51e9c7b4ad7c7c0</a:t>
-            </a:r>
-          </a:p>
-          <a:p xmlns:a="http://schemas.openxmlformats.org/drawingml/2006/main">
-            <a:r>
-              <a:t>Immutable execution receipt SHA-256 3baf0e2c215e8ac2ea30fb41197242b663469cd51f31ba48dc9e6c0d7b76833c</a:t>
-            </a:r>
-          </a:p>
-          <a:p xmlns:a="http://schemas.openxmlformats.org/drawingml/2006/main">
-            <a:r>
-              <a:t>Later audit SHA-256 9456363dd93059d7884c0b71a7942f5eed5454ee0d0628e567c2f4856b60a00b</a:t>
-            </a:r>
-          </a:p>
-          <a:p xmlns:a="http://schemas.openxmlformats.org/drawingml/2006/main">
-            <a:r>
-              <a:t>Explanatory delivery refresh of the same frozen execution, with later audit disclosure. No new runtime execution or repairs.</a:t>
+              <a:t>README SHA-256 516b20d0c5b90558e7659c4ca71b2f2741d929c1a41d2427ac823f265f49b730</a:t>
+            </a:r>
+          </a:p>
+          <a:p xmlns:a="http://schemas.openxmlformats.org/drawingml/2006/main">
+            <a:r>
+              <a:t>Proposal SHA-256 02323339203777b80b0bf8969f2392a4663b78be29e88f26f859df376999774a</a:t>
+            </a:r>
+          </a:p>
+          <a:p xmlns:a="http://schemas.openxmlformats.org/drawingml/2006/main">
+            <a:r>
+              <a:t>Immutable execution receipt SHA-256 4f212b53f00cd7f31bae7b94ea63e6a4b99e3a9cf9e645b2989e888a51ceecbf</a:t>
+            </a:r>
+          </a:p>
+          <a:p xmlns:a="http://schemas.openxmlformats.org/drawingml/2006/main">
+            <a:r>
+              <a:t>Later audit SHA-256 75abc802636f2e337b6fda2002b14f4ddf89f434901bae4a034734403f73e35f</a:t>
+            </a:r>
+          </a:p>
+          <a:p xmlns:a="http://schemas.openxmlformats.org/drawingml/2006/main">
+            <a:r>
+              <a:t>Fresh October 7 execution of the merged proposal candidate, compared with the prior immutable run and followed by repeated independent diagnostics. No runtime implementation repairs.</a:t>
             </a:r>
           </a:p>
           <a:p xmlns:a="http://schemas.openxmlformats.org/drawingml/2006/main">
@@ -1485,12 +1485,12 @@
           </a:p>
           <a:p xmlns:a="http://schemas.openxmlformats.org/drawingml/2006/main">
             <a:r>
-              <a:t>Proposal: #### Evaluation at proposal/proposal-source.txt:1788</a:t>
-            </a:r>
-          </a:p>
-          <a:p xmlns:a="http://schemas.openxmlformats.org/drawingml/2006/main">
-            <a:r>
-              <a:t>Functional requirements: [{"id":9,"title":"Positions, and offsets from them.","line":736},{"id":14,"title":"Scene conventions stay the scene's.","line":821},{"id":15,"title":"Placement separate from conformance.","line":834},{"id":17,"title":"The same answer for every consumer.","line":866},{"id":19,"title":"Resolution leaves the scene as authored.","line":894}]</a:t>
+              <a:t>Proposal: #### Evaluation at proposal/proposal-source.txt:1887</a:t>
+            </a:r>
+          </a:p>
+          <a:p xmlns:a="http://schemas.openxmlformats.org/drawingml/2006/main">
+            <a:r>
+              <a:t>Functional requirements: [{"id":9,"title":"Positions, and offsets from them.","line":772},{"id":14,"title":"Scene conventions stay the scene's.","line":857},{"id":15,"title":"Placement separate from conformance.","line":870},{"id":17,"title":"The same answer for every consumer.","line":902},{"id":19,"title":"Resolution leaves the scene as authored.","line":930}]</a:t>
             </a:r>
           </a:p>
           <a:p xmlns:a="http://schemas.openxmlformats.org/drawingml/2006/main">
@@ -1505,27 +1505,27 @@
           </a:p>
           <a:p xmlns:a="http://schemas.openxmlformats.org/drawingml/2006/main">
             <a:r>
-              <a:t>README SHA-256 a45f759d69e14f28301cce5931f6578c8a64ebc8262403a6c8cc3b15b9a0b069</a:t>
-            </a:r>
-          </a:p>
-          <a:p xmlns:a="http://schemas.openxmlformats.org/drawingml/2006/main">
-            <a:r>
-              <a:t>Proposal SHA-256 1727a552053cfdcdf202e2c84ad1209d1a898fe2eab2e322d51e9c7b4ad7c7c0</a:t>
-            </a:r>
-          </a:p>
-          <a:p xmlns:a="http://schemas.openxmlformats.org/drawingml/2006/main">
-            <a:r>
-              <a:t>Immutable execution receipt SHA-256 3baf0e2c215e8ac2ea30fb41197242b663469cd51f31ba48dc9e6c0d7b76833c</a:t>
-            </a:r>
-          </a:p>
-          <a:p xmlns:a="http://schemas.openxmlformats.org/drawingml/2006/main">
-            <a:r>
-              <a:t>Later audit SHA-256 9456363dd93059d7884c0b71a7942f5eed5454ee0d0628e567c2f4856b60a00b</a:t>
-            </a:r>
-          </a:p>
-          <a:p xmlns:a="http://schemas.openxmlformats.org/drawingml/2006/main">
-            <a:r>
-              <a:t>Explanatory delivery refresh of the same frozen execution, with later audit disclosure. No new runtime execution or repairs.</a:t>
+              <a:t>README SHA-256 516b20d0c5b90558e7659c4ca71b2f2741d929c1a41d2427ac823f265f49b730</a:t>
+            </a:r>
+          </a:p>
+          <a:p xmlns:a="http://schemas.openxmlformats.org/drawingml/2006/main">
+            <a:r>
+              <a:t>Proposal SHA-256 02323339203777b80b0bf8969f2392a4663b78be29e88f26f859df376999774a</a:t>
+            </a:r>
+          </a:p>
+          <a:p xmlns:a="http://schemas.openxmlformats.org/drawingml/2006/main">
+            <a:r>
+              <a:t>Immutable execution receipt SHA-256 4f212b53f00cd7f31bae7b94ea63e6a4b99e3a9cf9e645b2989e888a51ceecbf</a:t>
+            </a:r>
+          </a:p>
+          <a:p xmlns:a="http://schemas.openxmlformats.org/drawingml/2006/main">
+            <a:r>
+              <a:t>Later audit SHA-256 75abc802636f2e337b6fda2002b14f4ddf89f434901bae4a034734403f73e35f</a:t>
+            </a:r>
+          </a:p>
+          <a:p xmlns:a="http://schemas.openxmlformats.org/drawingml/2006/main">
+            <a:r>
+              <a:t>Fresh October 7 execution of the merged proposal candidate, compared with the prior immutable run and followed by repeated independent diagnostics. No runtime implementation repairs.</a:t>
             </a:r>
           </a:p>
           <a:p xmlns:a="http://schemas.openxmlformats.org/drawingml/2006/main">
@@ -1630,12 +1630,12 @@
           </a:p>
           <a:p xmlns:a="http://schemas.openxmlformats.org/drawingml/2006/main">
             <a:r>
-              <a:t>Proposal: ### Extent and result comparison at proposal/proposal-source.txt:1919</a:t>
-            </a:r>
-          </a:p>
-          <a:p xmlns:a="http://schemas.openxmlformats.org/drawingml/2006/main">
-            <a:r>
-              <a:t>Functional requirements: [{"id":4,"title":"A site's own grid is a CRS like any other.","line":633},{"id":13,"title":"One axis mapping.","line":804},{"id":16,"title":"One CRS out.","line":846},{"id":17,"title":"The same answer for every consumer.","line":866},{"id":18,"title":"Coordinates back out.","line":879},{"id":28,"title":"A result says what produced it.","line":1052},{"id":29,"title":"Implementable from the text alone.","line":1070}]</a:t>
+              <a:t>Proposal: ### Extent and result comparison at proposal/proposal-source.txt:2018</a:t>
+            </a:r>
+          </a:p>
+          <a:p xmlns:a="http://schemas.openxmlformats.org/drawingml/2006/main">
+            <a:r>
+              <a:t>Functional requirements: [{"id":4,"title":"A site's own grid is a CRS like any other.","line":669},{"id":13,"title":"One axis mapping.","line":840},{"id":16,"title":"One CRS out.","line":882},{"id":17,"title":"The same answer for every consumer.","line":902},{"id":18,"title":"Coordinates back out.","line":915},{"id":28,"title":"A result says what produced it.","line":1088},{"id":29,"title":"Implementable from the text alone.","line":1106}]</a:t>
             </a:r>
           </a:p>
           <a:p xmlns:a="http://schemas.openxmlformats.org/drawingml/2006/main">
@@ -1650,27 +1650,27 @@
           </a:p>
           <a:p xmlns:a="http://schemas.openxmlformats.org/drawingml/2006/main">
             <a:r>
-              <a:t>README SHA-256 a45f759d69e14f28301cce5931f6578c8a64ebc8262403a6c8cc3b15b9a0b069</a:t>
-            </a:r>
-          </a:p>
-          <a:p xmlns:a="http://schemas.openxmlformats.org/drawingml/2006/main">
-            <a:r>
-              <a:t>Proposal SHA-256 1727a552053cfdcdf202e2c84ad1209d1a898fe2eab2e322d51e9c7b4ad7c7c0</a:t>
-            </a:r>
-          </a:p>
-          <a:p xmlns:a="http://schemas.openxmlformats.org/drawingml/2006/main">
-            <a:r>
-              <a:t>Immutable execution receipt SHA-256 3baf0e2c215e8ac2ea30fb41197242b663469cd51f31ba48dc9e6c0d7b76833c</a:t>
-            </a:r>
-          </a:p>
-          <a:p xmlns:a="http://schemas.openxmlformats.org/drawingml/2006/main">
-            <a:r>
-              <a:t>Later audit SHA-256 9456363dd93059d7884c0b71a7942f5eed5454ee0d0628e567c2f4856b60a00b</a:t>
-            </a:r>
-          </a:p>
-          <a:p xmlns:a="http://schemas.openxmlformats.org/drawingml/2006/main">
-            <a:r>
-              <a:t>Explanatory delivery refresh of the same frozen execution, with later audit disclosure. No new runtime execution or repairs.</a:t>
+              <a:t>README SHA-256 516b20d0c5b90558e7659c4ca71b2f2741d929c1a41d2427ac823f265f49b730</a:t>
+            </a:r>
+          </a:p>
+          <a:p xmlns:a="http://schemas.openxmlformats.org/drawingml/2006/main">
+            <a:r>
+              <a:t>Proposal SHA-256 02323339203777b80b0bf8969f2392a4663b78be29e88f26f859df376999774a</a:t>
+            </a:r>
+          </a:p>
+          <a:p xmlns:a="http://schemas.openxmlformats.org/drawingml/2006/main">
+            <a:r>
+              <a:t>Immutable execution receipt SHA-256 4f212b53f00cd7f31bae7b94ea63e6a4b99e3a9cf9e645b2989e888a51ceecbf</a:t>
+            </a:r>
+          </a:p>
+          <a:p xmlns:a="http://schemas.openxmlformats.org/drawingml/2006/main">
+            <a:r>
+              <a:t>Later audit SHA-256 75abc802636f2e337b6fda2002b14f4ddf89f434901bae4a034734403f73e35f</a:t>
+            </a:r>
+          </a:p>
+          <a:p xmlns:a="http://schemas.openxmlformats.org/drawingml/2006/main">
+            <a:r>
+              <a:t>Fresh October 7 execution of the merged proposal candidate, compared with the prior immutable run and followed by repeated independent diagnostics. No runtime implementation repairs.</a:t>
             </a:r>
           </a:p>
           <a:p xmlns:a="http://schemas.openxmlformats.org/drawingml/2006/main">
@@ -1775,12 +1775,12 @@
           </a:p>
           <a:p xmlns:a="http://schemas.openxmlformats.org/drawingml/2006/main">
             <a:r>
-              <a:t>Proposal: ### Explicit export and sampling at proposal/proposal-source.txt:1972</a:t>
-            </a:r>
-          </a:p>
-          <a:p xmlns:a="http://schemas.openxmlformats.org/drawingml/2006/main">
-            <a:r>
-              <a:t>Functional requirements: [{"id":17,"title":"The same answer for every consumer.","line":866},{"id":19,"title":"Resolution leaves the scene as authored.","line":894},{"id":23,"title":"Detail that does not depend on location.","line":992},{"id":25,"title":"Additive for consumers that ignore it.","line":1016},{"id":29,"title":"Implementable from the text alone.","line":1070}]</a:t>
+              <a:t>Proposal: ### Explicit export and sampling at proposal/proposal-source.txt:2071</a:t>
+            </a:r>
+          </a:p>
+          <a:p xmlns:a="http://schemas.openxmlformats.org/drawingml/2006/main">
+            <a:r>
+              <a:t>Functional requirements: [{"id":17,"title":"The same answer for every consumer.","line":902},{"id":19,"title":"Resolution leaves the scene as authored.","line":930},{"id":23,"title":"Detail that does not depend on location.","line":1028},{"id":25,"title":"Additive for consumers that ignore it.","line":1052},{"id":29,"title":"Implementable from the text alone.","line":1106}]</a:t>
             </a:r>
           </a:p>
           <a:p xmlns:a="http://schemas.openxmlformats.org/drawingml/2006/main">
@@ -1795,27 +1795,27 @@
           </a:p>
           <a:p xmlns:a="http://schemas.openxmlformats.org/drawingml/2006/main">
             <a:r>
-              <a:t>README SHA-256 a45f759d69e14f28301cce5931f6578c8a64ebc8262403a6c8cc3b15b9a0b069</a:t>
-            </a:r>
-          </a:p>
-          <a:p xmlns:a="http://schemas.openxmlformats.org/drawingml/2006/main">
-            <a:r>
-              <a:t>Proposal SHA-256 1727a552053cfdcdf202e2c84ad1209d1a898fe2eab2e322d51e9c7b4ad7c7c0</a:t>
-            </a:r>
-          </a:p>
-          <a:p xmlns:a="http://schemas.openxmlformats.org/drawingml/2006/main">
-            <a:r>
-              <a:t>Immutable execution receipt SHA-256 3baf0e2c215e8ac2ea30fb41197242b663469cd51f31ba48dc9e6c0d7b76833c</a:t>
-            </a:r>
-          </a:p>
-          <a:p xmlns:a="http://schemas.openxmlformats.org/drawingml/2006/main">
-            <a:r>
-              <a:t>Later audit SHA-256 9456363dd93059d7884c0b71a7942f5eed5454ee0d0628e567c2f4856b60a00b</a:t>
-            </a:r>
-          </a:p>
-          <a:p xmlns:a="http://schemas.openxmlformats.org/drawingml/2006/main">
-            <a:r>
-              <a:t>Explanatory delivery refresh of the same frozen execution, with later audit disclosure. No new runtime execution or repairs.</a:t>
+              <a:t>README SHA-256 516b20d0c5b90558e7659c4ca71b2f2741d929c1a41d2427ac823f265f49b730</a:t>
+            </a:r>
+          </a:p>
+          <a:p xmlns:a="http://schemas.openxmlformats.org/drawingml/2006/main">
+            <a:r>
+              <a:t>Proposal SHA-256 02323339203777b80b0bf8969f2392a4663b78be29e88f26f859df376999774a</a:t>
+            </a:r>
+          </a:p>
+          <a:p xmlns:a="http://schemas.openxmlformats.org/drawingml/2006/main">
+            <a:r>
+              <a:t>Immutable execution receipt SHA-256 4f212b53f00cd7f31bae7b94ea63e6a4b99e3a9cf9e645b2989e888a51ceecbf</a:t>
+            </a:r>
+          </a:p>
+          <a:p xmlns:a="http://schemas.openxmlformats.org/drawingml/2006/main">
+            <a:r>
+              <a:t>Later audit SHA-256 75abc802636f2e337b6fda2002b14f4ddf89f434901bae4a034734403f73e35f</a:t>
+            </a:r>
+          </a:p>
+          <a:p xmlns:a="http://schemas.openxmlformats.org/drawingml/2006/main">
+            <a:r>
+              <a:t>Fresh October 7 execution of the merged proposal candidate, compared with the prior immutable run and followed by repeated independent diagnostics. No runtime implementation repairs.</a:t>
             </a:r>
           </a:p>
           <a:p xmlns:a="http://schemas.openxmlformats.org/drawingml/2006/main">
@@ -1920,12 +1920,12 @@
           </a:p>
           <a:p xmlns:a="http://schemas.openxmlformats.org/drawingml/2006/main">
             <a:r>
-              <a:t>Proposal: ### External measurement association at proposal/proposal-source.txt:1558</a:t>
-            </a:r>
-          </a:p>
-          <a:p xmlns:a="http://schemas.openxmlformats.org/drawingml/2006/main">
-            <a:r>
-              <a:t>Functional requirements: [{"id":8,"title":"Brought-in data keeps its coordinates and its CRS.","line":710},{"id":12,"title":"No angle read as a length.","line":790},{"id":18,"title":"Coordinates back out.","line":879},{"id":19,"title":"Resolution leaves the scene as authored.","line":894},{"id":21,"title":"Never placed by a guess.","line":930},{"id":30,"title":"Measurements remain usable as data.","line":962}]</a:t>
+              <a:t>Proposal: ### External measurement association at proposal/proposal-source.txt:1594</a:t>
+            </a:r>
+          </a:p>
+          <a:p xmlns:a="http://schemas.openxmlformats.org/drawingml/2006/main">
+            <a:r>
+              <a:t>Functional requirements: [{"id":8,"title":"Brought-in data keeps its coordinates and its CRS.","line":746},{"id":12,"title":"No angle read as a length.","line":826},{"id":18,"title":"Coordinates back out.","line":915},{"id":19,"title":"Resolution leaves the scene as authored.","line":930},{"id":21,"title":"Never placed by a guess.","line":966},{"id":30,"title":"Measurements remain usable as data.","line":998}]</a:t>
             </a:r>
           </a:p>
           <a:p xmlns:a="http://schemas.openxmlformats.org/drawingml/2006/main">
@@ -1940,27 +1940,27 @@
           </a:p>
           <a:p xmlns:a="http://schemas.openxmlformats.org/drawingml/2006/main">
             <a:r>
-              <a:t>README SHA-256 a45f759d69e14f28301cce5931f6578c8a64ebc8262403a6c8cc3b15b9a0b069</a:t>
-            </a:r>
-          </a:p>
-          <a:p xmlns:a="http://schemas.openxmlformats.org/drawingml/2006/main">
-            <a:r>
-              <a:t>Proposal SHA-256 1727a552053cfdcdf202e2c84ad1209d1a898fe2eab2e322d51e9c7b4ad7c7c0</a:t>
-            </a:r>
-          </a:p>
-          <a:p xmlns:a="http://schemas.openxmlformats.org/drawingml/2006/main">
-            <a:r>
-              <a:t>Immutable execution receipt SHA-256 3baf0e2c215e8ac2ea30fb41197242b663469cd51f31ba48dc9e6c0d7b76833c</a:t>
-            </a:r>
-          </a:p>
-          <a:p xmlns:a="http://schemas.openxmlformats.org/drawingml/2006/main">
-            <a:r>
-              <a:t>Later audit SHA-256 9456363dd93059d7884c0b71a7942f5eed5454ee0d0628e567c2f4856b60a00b</a:t>
-            </a:r>
-          </a:p>
-          <a:p xmlns:a="http://schemas.openxmlformats.org/drawingml/2006/main">
-            <a:r>
-              <a:t>Explanatory delivery refresh of the same frozen execution, with later audit disclosure. No new runtime execution or repairs.</a:t>
+              <a:t>README SHA-256 516b20d0c5b90558e7659c4ca71b2f2741d929c1a41d2427ac823f265f49b730</a:t>
+            </a:r>
+          </a:p>
+          <a:p xmlns:a="http://schemas.openxmlformats.org/drawingml/2006/main">
+            <a:r>
+              <a:t>Proposal SHA-256 02323339203777b80b0bf8969f2392a4663b78be29e88f26f859df376999774a</a:t>
+            </a:r>
+          </a:p>
+          <a:p xmlns:a="http://schemas.openxmlformats.org/drawingml/2006/main">
+            <a:r>
+              <a:t>Immutable execution receipt SHA-256 4f212b53f00cd7f31bae7b94ea63e6a4b99e3a9cf9e645b2989e888a51ceecbf</a:t>
+            </a:r>
+          </a:p>
+          <a:p xmlns:a="http://schemas.openxmlformats.org/drawingml/2006/main">
+            <a:r>
+              <a:t>Later audit SHA-256 75abc802636f2e337b6fda2002b14f4ddf89f434901bae4a034734403f73e35f</a:t>
+            </a:r>
+          </a:p>
+          <a:p xmlns:a="http://schemas.openxmlformats.org/drawingml/2006/main">
+            <a:r>
+              <a:t>Fresh October 7 execution of the merged proposal candidate, compared with the prior immutable run and followed by repeated independent diagnostics. No runtime implementation repairs.</a:t>
             </a:r>
           </a:p>
           <a:p xmlns:a="http://schemas.openxmlformats.org/drawingml/2006/main">
@@ -2045,27 +2045,27 @@
           </a:p>
           <a:p xmlns:a="http://schemas.openxmlformats.org/drawingml/2006/main">
             <a:r>
-              <a:t>README SHA-256 a45f759d69e14f28301cce5931f6578c8a64ebc8262403a6c8cc3b15b9a0b069</a:t>
-            </a:r>
-          </a:p>
-          <a:p xmlns:a="http://schemas.openxmlformats.org/drawingml/2006/main">
-            <a:r>
-              <a:t>Proposal SHA-256 1727a552053cfdcdf202e2c84ad1209d1a898fe2eab2e322d51e9c7b4ad7c7c0</a:t>
-            </a:r>
-          </a:p>
-          <a:p xmlns:a="http://schemas.openxmlformats.org/drawingml/2006/main">
-            <a:r>
-              <a:t>Immutable execution receipt SHA-256 3baf0e2c215e8ac2ea30fb41197242b663469cd51f31ba48dc9e6c0d7b76833c</a:t>
-            </a:r>
-          </a:p>
-          <a:p xmlns:a="http://schemas.openxmlformats.org/drawingml/2006/main">
-            <a:r>
-              <a:t>Later audit SHA-256 9456363dd93059d7884c0b71a7942f5eed5454ee0d0628e567c2f4856b60a00b</a:t>
-            </a:r>
-          </a:p>
-          <a:p xmlns:a="http://schemas.openxmlformats.org/drawingml/2006/main">
-            <a:r>
-              <a:t>Explanatory delivery refresh of the same frozen execution, with later audit disclosure. No new runtime execution or repairs.</a:t>
+              <a:t>README SHA-256 516b20d0c5b90558e7659c4ca71b2f2741d929c1a41d2427ac823f265f49b730</a:t>
+            </a:r>
+          </a:p>
+          <a:p xmlns:a="http://schemas.openxmlformats.org/drawingml/2006/main">
+            <a:r>
+              <a:t>Proposal SHA-256 02323339203777b80b0bf8969f2392a4663b78be29e88f26f859df376999774a</a:t>
+            </a:r>
+          </a:p>
+          <a:p xmlns:a="http://schemas.openxmlformats.org/drawingml/2006/main">
+            <a:r>
+              <a:t>Immutable execution receipt SHA-256 4f212b53f00cd7f31bae7b94ea63e6a4b99e3a9cf9e645b2989e888a51ceecbf</a:t>
+            </a:r>
+          </a:p>
+          <a:p xmlns:a="http://schemas.openxmlformats.org/drawingml/2006/main">
+            <a:r>
+              <a:t>Later audit SHA-256 75abc802636f2e337b6fda2002b14f4ddf89f434901bae4a034734403f73e35f</a:t>
+            </a:r>
+          </a:p>
+          <a:p xmlns:a="http://schemas.openxmlformats.org/drawingml/2006/main">
+            <a:r>
+              <a:t>Fresh October 7 execution of the merged proposal candidate, compared with the prior immutable run and followed by repeated independent diagnostics. No runtime implementation repairs.</a:t>
             </a:r>
           </a:p>
           <a:p xmlns:a="http://schemas.openxmlformats.org/drawingml/2006/main">
@@ -2170,12 +2170,12 @@
           </a:p>
           <a:p xmlns:a="http://schemas.openxmlformats.org/drawingml/2006/main">
             <a:r>
-              <a:t>Proposal: #### Decision on question 7: site calibration at proposal/proposal-source.txt:1247</a:t>
-            </a:r>
-          </a:p>
-          <a:p xmlns:a="http://schemas.openxmlformats.org/drawingml/2006/main">
-            <a:r>
-              <a:t>Functional requirements: [{"id":4,"title":"A site's own grid is a CRS like any other.","line":633},{"id":14,"title":"Scene conventions stay the scene's.","line":821},{"id":15,"title":"Placement separate from conformance.","line":834},{"id":17,"title":"The same answer for every consumer.","line":866}]</a:t>
+              <a:t>Proposal: #### Decision on question 7: site calibration at proposal/proposal-source.txt:1283</a:t>
+            </a:r>
+          </a:p>
+          <a:p xmlns:a="http://schemas.openxmlformats.org/drawingml/2006/main">
+            <a:r>
+              <a:t>Functional requirements: [{"id":4,"title":"A site's own grid is a CRS like any other.","line":669},{"id":14,"title":"Scene conventions stay the scene's.","line":857},{"id":15,"title":"Placement separate from conformance.","line":870},{"id":17,"title":"The same answer for every consumer.","line":902}]</a:t>
             </a:r>
           </a:p>
           <a:p xmlns:a="http://schemas.openxmlformats.org/drawingml/2006/main">
@@ -2190,27 +2190,27 @@
           </a:p>
           <a:p xmlns:a="http://schemas.openxmlformats.org/drawingml/2006/main">
             <a:r>
-              <a:t>README SHA-256 a45f759d69e14f28301cce5931f6578c8a64ebc8262403a6c8cc3b15b9a0b069</a:t>
-            </a:r>
-          </a:p>
-          <a:p xmlns:a="http://schemas.openxmlformats.org/drawingml/2006/main">
-            <a:r>
-              <a:t>Proposal SHA-256 1727a552053cfdcdf202e2c84ad1209d1a898fe2eab2e322d51e9c7b4ad7c7c0</a:t>
-            </a:r>
-          </a:p>
-          <a:p xmlns:a="http://schemas.openxmlformats.org/drawingml/2006/main">
-            <a:r>
-              <a:t>Immutable execution receipt SHA-256 3baf0e2c215e8ac2ea30fb41197242b663469cd51f31ba48dc9e6c0d7b76833c</a:t>
-            </a:r>
-          </a:p>
-          <a:p xmlns:a="http://schemas.openxmlformats.org/drawingml/2006/main">
-            <a:r>
-              <a:t>Later audit SHA-256 9456363dd93059d7884c0b71a7942f5eed5454ee0d0628e567c2f4856b60a00b</a:t>
-            </a:r>
-          </a:p>
-          <a:p xmlns:a="http://schemas.openxmlformats.org/drawingml/2006/main">
-            <a:r>
-              <a:t>Explanatory delivery refresh of the same frozen execution, with later audit disclosure. No new runtime execution or repairs.</a:t>
+              <a:t>README SHA-256 516b20d0c5b90558e7659c4ca71b2f2741d929c1a41d2427ac823f265f49b730</a:t>
+            </a:r>
+          </a:p>
+          <a:p xmlns:a="http://schemas.openxmlformats.org/drawingml/2006/main">
+            <a:r>
+              <a:t>Proposal SHA-256 02323339203777b80b0bf8969f2392a4663b78be29e88f26f859df376999774a</a:t>
+            </a:r>
+          </a:p>
+          <a:p xmlns:a="http://schemas.openxmlformats.org/drawingml/2006/main">
+            <a:r>
+              <a:t>Immutable execution receipt SHA-256 4f212b53f00cd7f31bae7b94ea63e6a4b99e3a9cf9e645b2989e888a51ceecbf</a:t>
+            </a:r>
+          </a:p>
+          <a:p xmlns:a="http://schemas.openxmlformats.org/drawingml/2006/main">
+            <a:r>
+              <a:t>Later audit SHA-256 75abc802636f2e337b6fda2002b14f4ddf89f434901bae4a034734403f73e35f</a:t>
+            </a:r>
+          </a:p>
+          <a:p xmlns:a="http://schemas.openxmlformats.org/drawingml/2006/main">
+            <a:r>
+              <a:t>Fresh October 7 execution of the merged proposal candidate, compared with the prior immutable run and followed by repeated independent diagnostics. No runtime implementation repairs.</a:t>
             </a:r>
           </a:p>
           <a:p xmlns:a="http://schemas.openxmlformats.org/drawingml/2006/main">
@@ -2257,6 +2257,1661 @@
       <p:grpSpPr>
         <a:xfrm xmlns:a="http://schemas.openxmlformats.org/drawingml/2006/main"/>
       </p:grpSpPr>
+      <p:sp>
+        <p:nvSpPr>
+          <p:cNvPr id="3" name="Title">
+            <a:extLst xmlns:a="http://schemas.openxmlformats.org/drawingml/2006/main">
+              <a:ext uri="{FF2B5EF4-FFF2-40B4-BE49-F238E27FC236}">
+                <a16:creationId xmlns:a16="http://schemas.microsoft.com/office/drawing/2014/main" id="{220659E9-D203-4473-AA5F-2871A1BDF4B9}"/>
+              </a:ext>
+            </a:extLst>
+          </p:cNvPr>
+          <p:cNvSpPr>
+            <a:spLocks xmlns:a="http://schemas.openxmlformats.org/drawingml/2006/main" noGrp="1"/>
+          </p:cNvSpPr>
+          <p:nvPr>
+            <p:ph type="title" idx="0"/>
+          </p:nvPr>
+        </p:nvSpPr>
+        <p:spPr>
+          <a:xfrm xmlns:a="http://schemas.openxmlformats.org/drawingml/2006/main">
+            <a:off x="1219200" y="2590800"/>
+            <a:ext cx="9753600" cy="990600"/>
+          </a:xfrm>
+          <a:prstGeom xmlns:a="http://schemas.openxmlformats.org/drawingml/2006/main" prst="rect">
+            <a:avLst/>
+          </a:prstGeom>
+          <a:noFill xmlns:a="http://schemas.openxmlformats.org/drawingml/2006/main"/>
+          <a:ln xmlns:a="http://schemas.openxmlformats.org/drawingml/2006/main">
+            <a:noFill/>
+            <a:prstDash val="solid"/>
+          </a:ln>
+        </p:spPr>
+        <p:txBody>
+          <a:bodyPr xmlns:a="http://schemas.openxmlformats.org/drawingml/2006/main" wrap="square" lIns="0" tIns="0" rIns="0" bIns="0" anchor="ctr">
+            <a:normAutofit/>
+          </a:bodyPr>
+          <a:lstStyle xmlns:a="http://schemas.openxmlformats.org/drawingml/2006/main">
+            <a:defPPr algn="ctr">
+              <a:defRPr sz="4800" b="1">
+                <a:solidFill>
+                  <a:schemeClr val="tx1"/>
+                </a:solidFill>
+                <a:latin typeface="+mj-lt"/>
+                <a:ea typeface="+mj-lt"/>
+                <a:cs typeface="+mj-lt"/>
+              </a:defRPr>
+            </a:defPPr>
+            <a:lvl1pPr marL="0" indent="0">
+              <a:lnSpc>
+                <a:spcPct val="110000"/>
+              </a:lnSpc>
+              <a:spcBef>
+                <a:spcPts val="0"/>
+              </a:spcBef>
+              <a:spcAft>
+                <a:spcPts val="0"/>
+              </a:spcAft>
+              <a:buNone/>
+            </a:lvl1pPr>
+            <a:lvl2pPr marL="0" indent="0">
+              <a:lnSpc>
+                <a:spcPct val="110000"/>
+              </a:lnSpc>
+              <a:spcBef>
+                <a:spcPts val="0"/>
+              </a:spcBef>
+              <a:spcAft>
+                <a:spcPts val="0"/>
+              </a:spcAft>
+              <a:buNone/>
+            </a:lvl2pPr>
+            <a:lvl3pPr marL="0" indent="0">
+              <a:lnSpc>
+                <a:spcPct val="110000"/>
+              </a:lnSpc>
+              <a:spcBef>
+                <a:spcPts val="0"/>
+              </a:spcBef>
+              <a:spcAft>
+                <a:spcPts val="0"/>
+              </a:spcAft>
+              <a:buNone/>
+            </a:lvl3pPr>
+            <a:lvl4pPr marL="0" indent="0">
+              <a:lnSpc>
+                <a:spcPct val="110000"/>
+              </a:lnSpc>
+              <a:spcBef>
+                <a:spcPts val="0"/>
+              </a:spcBef>
+              <a:spcAft>
+                <a:spcPts val="0"/>
+              </a:spcAft>
+              <a:buNone/>
+            </a:lvl4pPr>
+            <a:lvl5pPr marL="0" indent="0">
+              <a:lnSpc>
+                <a:spcPct val="110000"/>
+              </a:lnSpc>
+              <a:spcBef>
+                <a:spcPts val="0"/>
+              </a:spcBef>
+              <a:spcAft>
+                <a:spcPts val="0"/>
+              </a:spcAft>
+              <a:buNone/>
+            </a:lvl5pPr>
+            <a:lvl6pPr marL="0" indent="0">
+              <a:lnSpc>
+                <a:spcPct val="110000"/>
+              </a:lnSpc>
+              <a:spcBef>
+                <a:spcPts val="0"/>
+              </a:spcBef>
+              <a:spcAft>
+                <a:spcPts val="0"/>
+              </a:spcAft>
+              <a:buNone/>
+            </a:lvl6pPr>
+            <a:lvl7pPr marL="0" indent="0">
+              <a:lnSpc>
+                <a:spcPct val="110000"/>
+              </a:lnSpc>
+              <a:spcBef>
+                <a:spcPts val="0"/>
+              </a:spcBef>
+              <a:spcAft>
+                <a:spcPts val="0"/>
+              </a:spcAft>
+              <a:buNone/>
+            </a:lvl7pPr>
+            <a:lvl8pPr marL="0" indent="0">
+              <a:lnSpc>
+                <a:spcPct val="110000"/>
+              </a:lnSpc>
+              <a:spcBef>
+                <a:spcPts val="0"/>
+              </a:spcBef>
+              <a:spcAft>
+                <a:spcPts val="0"/>
+              </a:spcAft>
+              <a:buNone/>
+            </a:lvl8pPr>
+            <a:lvl9pPr marL="0" indent="0">
+              <a:lnSpc>
+                <a:spcPct val="110000"/>
+              </a:lnSpc>
+              <a:spcBef>
+                <a:spcPts val="0"/>
+              </a:spcBef>
+              <a:spcAft>
+                <a:spcPts val="0"/>
+              </a:spcAft>
+              <a:buNone/>
+            </a:lvl9pPr>
+          </a:lstStyle>
+          <a:p xmlns:a="http://schemas.openxmlformats.org/drawingml/2006/main"/>
+        </p:txBody>
+      </p:sp>
+      <p:sp>
+        <p:nvSpPr>
+          <p:cNvPr id="2" name="Subtitle">
+            <a:extLst xmlns:a="http://schemas.openxmlformats.org/drawingml/2006/main">
+              <a:ext uri="{FF2B5EF4-FFF2-40B4-BE49-F238E27FC236}">
+                <a16:creationId xmlns:a16="http://schemas.microsoft.com/office/drawing/2014/main" id="{1F75DA7E-1AE4-47CA-8A2C-599C2659F0E8}"/>
+              </a:ext>
+            </a:extLst>
+          </p:cNvPr>
+          <p:cNvSpPr>
+            <a:spLocks xmlns:a="http://schemas.openxmlformats.org/drawingml/2006/main" noGrp="1"/>
+          </p:cNvSpPr>
+          <p:nvPr>
+            <p:ph type="subTitle" idx="1"/>
+          </p:nvPr>
+        </p:nvSpPr>
+        <p:spPr>
+          <a:xfrm xmlns:a="http://schemas.openxmlformats.org/drawingml/2006/main">
+            <a:off x="1828800" y="3771900"/>
+            <a:ext cx="8534400" cy="762000"/>
+          </a:xfrm>
+          <a:prstGeom xmlns:a="http://schemas.openxmlformats.org/drawingml/2006/main" prst="rect">
+            <a:avLst/>
+          </a:prstGeom>
+          <a:noFill xmlns:a="http://schemas.openxmlformats.org/drawingml/2006/main"/>
+          <a:ln xmlns:a="http://schemas.openxmlformats.org/drawingml/2006/main">
+            <a:noFill/>
+            <a:prstDash val="solid"/>
+          </a:ln>
+        </p:spPr>
+        <p:txBody>
+          <a:bodyPr xmlns:a="http://schemas.openxmlformats.org/drawingml/2006/main" wrap="square" lIns="0" tIns="0" rIns="0" bIns="0" anchor="ctr">
+            <a:normAutofit/>
+          </a:bodyPr>
+          <a:lstStyle xmlns:a="http://schemas.openxmlformats.org/drawingml/2006/main">
+            <a:defPPr algn="ctr">
+              <a:defRPr sz="2100" b="0">
+                <a:solidFill>
+                  <a:schemeClr val="tx1"/>
+                </a:solidFill>
+                <a:latin typeface="+mn-lt"/>
+                <a:ea typeface="+mn-lt"/>
+                <a:cs typeface="+mn-lt"/>
+              </a:defRPr>
+            </a:defPPr>
+            <a:lvl1pPr marL="0" indent="0">
+              <a:lnSpc>
+                <a:spcPct val="110000"/>
+              </a:lnSpc>
+              <a:spcBef>
+                <a:spcPts val="0"/>
+              </a:spcBef>
+              <a:spcAft>
+                <a:spcPts val="0"/>
+              </a:spcAft>
+              <a:buNone/>
+            </a:lvl1pPr>
+            <a:lvl2pPr marL="0" indent="0">
+              <a:lnSpc>
+                <a:spcPct val="110000"/>
+              </a:lnSpc>
+              <a:spcBef>
+                <a:spcPts val="0"/>
+              </a:spcBef>
+              <a:spcAft>
+                <a:spcPts val="0"/>
+              </a:spcAft>
+              <a:buNone/>
+            </a:lvl2pPr>
+            <a:lvl3pPr marL="0" indent="0">
+              <a:lnSpc>
+                <a:spcPct val="110000"/>
+              </a:lnSpc>
+              <a:spcBef>
+                <a:spcPts val="0"/>
+              </a:spcBef>
+              <a:spcAft>
+                <a:spcPts val="0"/>
+              </a:spcAft>
+              <a:buNone/>
+            </a:lvl3pPr>
+            <a:lvl4pPr marL="0" indent="0">
+              <a:lnSpc>
+                <a:spcPct val="110000"/>
+              </a:lnSpc>
+              <a:spcBef>
+                <a:spcPts val="0"/>
+              </a:spcBef>
+              <a:spcAft>
+                <a:spcPts val="0"/>
+              </a:spcAft>
+              <a:buNone/>
+            </a:lvl4pPr>
+            <a:lvl5pPr marL="0" indent="0">
+              <a:lnSpc>
+                <a:spcPct val="110000"/>
+              </a:lnSpc>
+              <a:spcBef>
+                <a:spcPts val="0"/>
+              </a:spcBef>
+              <a:spcAft>
+                <a:spcPts val="0"/>
+              </a:spcAft>
+              <a:buNone/>
+            </a:lvl5pPr>
+            <a:lvl6pPr marL="0" indent="0">
+              <a:lnSpc>
+                <a:spcPct val="110000"/>
+              </a:lnSpc>
+              <a:spcBef>
+                <a:spcPts val="0"/>
+              </a:spcBef>
+              <a:spcAft>
+                <a:spcPts val="0"/>
+              </a:spcAft>
+              <a:buNone/>
+            </a:lvl6pPr>
+            <a:lvl7pPr marL="0" indent="0">
+              <a:lnSpc>
+                <a:spcPct val="110000"/>
+              </a:lnSpc>
+              <a:spcBef>
+                <a:spcPts val="0"/>
+              </a:spcBef>
+              <a:spcAft>
+                <a:spcPts val="0"/>
+              </a:spcAft>
+              <a:buNone/>
+            </a:lvl7pPr>
+            <a:lvl8pPr marL="0" indent="0">
+              <a:lnSpc>
+                <a:spcPct val="110000"/>
+              </a:lnSpc>
+              <a:spcBef>
+                <a:spcPts val="0"/>
+              </a:spcBef>
+              <a:spcAft>
+                <a:spcPts val="0"/>
+              </a:spcAft>
+              <a:buNone/>
+            </a:lvl8pPr>
+            <a:lvl9pPr marL="0" indent="0">
+              <a:lnSpc>
+                <a:spcPct val="110000"/>
+              </a:lnSpc>
+              <a:spcBef>
+                <a:spcPts val="0"/>
+              </a:spcBef>
+              <a:spcAft>
+                <a:spcPts val="0"/>
+              </a:spcAft>
+              <a:buNone/>
+            </a:lvl9pPr>
+          </a:lstStyle>
+          <a:p xmlns:a="http://schemas.openxmlformats.org/drawingml/2006/main"/>
+        </p:txBody>
+      </p:sp>
+    </p:spTree>
+  </p:cSld>
+</p:sldLayout>
+</file>
+
+<file path=ppt/slideLayouts/slideLayout2.xml><?xml version="1.0" encoding="utf-8"?>
+<p:sldLayout xmlns:p="http://schemas.openxmlformats.org/presentationml/2006/main">
+  <p:cSld name="Section Header">
+    <p:spTree>
+      <p:nvGrpSpPr>
+        <p:cNvPr id="1" name=""/>
+        <p:cNvGrpSpPr/>
+        <p:nvPr/>
+      </p:nvGrpSpPr>
+      <p:grpSpPr>
+        <a:xfrm xmlns:a="http://schemas.openxmlformats.org/drawingml/2006/main"/>
+      </p:grpSpPr>
+      <p:sp>
+        <p:nvSpPr>
+          <p:cNvPr id="2" name="Section title">
+            <a:extLst xmlns:a="http://schemas.openxmlformats.org/drawingml/2006/main">
+              <a:ext uri="{FF2B5EF4-FFF2-40B4-BE49-F238E27FC236}">
+                <a16:creationId xmlns:a16="http://schemas.microsoft.com/office/drawing/2014/main" id="{BBD11E14-5A80-4070-B363-D8B4AAB9BC48}"/>
+              </a:ext>
+            </a:extLst>
+          </p:cNvPr>
+          <p:cNvSpPr>
+            <a:spLocks xmlns:a="http://schemas.openxmlformats.org/drawingml/2006/main" noGrp="1"/>
+          </p:cNvSpPr>
+          <p:nvPr>
+            <p:ph type="title" idx="0"/>
+          </p:nvPr>
+        </p:nvSpPr>
+        <p:spPr>
+          <a:xfrm xmlns:a="http://schemas.openxmlformats.org/drawingml/2006/main">
+            <a:off x="1219200" y="2857500"/>
+            <a:ext cx="9753600" cy="1143000"/>
+          </a:xfrm>
+          <a:prstGeom xmlns:a="http://schemas.openxmlformats.org/drawingml/2006/main" prst="rect">
+            <a:avLst/>
+          </a:prstGeom>
+          <a:noFill xmlns:a="http://schemas.openxmlformats.org/drawingml/2006/main"/>
+          <a:ln xmlns:a="http://schemas.openxmlformats.org/drawingml/2006/main">
+            <a:noFill/>
+            <a:prstDash val="solid"/>
+          </a:ln>
+        </p:spPr>
+        <p:txBody>
+          <a:bodyPr xmlns:a="http://schemas.openxmlformats.org/drawingml/2006/main" wrap="square" lIns="0" tIns="0" rIns="0" bIns="0" anchor="ctr">
+            <a:normAutofit/>
+          </a:bodyPr>
+          <a:lstStyle xmlns:a="http://schemas.openxmlformats.org/drawingml/2006/main">
+            <a:defPPr algn="ctr">
+              <a:defRPr sz="4200" b="1">
+                <a:solidFill>
+                  <a:schemeClr val="tx1"/>
+                </a:solidFill>
+                <a:latin typeface="+mj-lt"/>
+                <a:ea typeface="+mj-lt"/>
+                <a:cs typeface="+mj-lt"/>
+              </a:defRPr>
+            </a:defPPr>
+            <a:lvl1pPr marL="0" indent="0">
+              <a:lnSpc>
+                <a:spcPct val="110000"/>
+              </a:lnSpc>
+              <a:spcBef>
+                <a:spcPts val="0"/>
+              </a:spcBef>
+              <a:spcAft>
+                <a:spcPts val="0"/>
+              </a:spcAft>
+              <a:buNone/>
+            </a:lvl1pPr>
+            <a:lvl2pPr marL="0" indent="0">
+              <a:lnSpc>
+                <a:spcPct val="110000"/>
+              </a:lnSpc>
+              <a:spcBef>
+                <a:spcPts val="0"/>
+              </a:spcBef>
+              <a:spcAft>
+                <a:spcPts val="0"/>
+              </a:spcAft>
+              <a:buNone/>
+            </a:lvl2pPr>
+            <a:lvl3pPr marL="0" indent="0">
+              <a:lnSpc>
+                <a:spcPct val="110000"/>
+              </a:lnSpc>
+              <a:spcBef>
+                <a:spcPts val="0"/>
+              </a:spcBef>
+              <a:spcAft>
+                <a:spcPts val="0"/>
+              </a:spcAft>
+              <a:buNone/>
+            </a:lvl3pPr>
+            <a:lvl4pPr marL="0" indent="0">
+              <a:lnSpc>
+                <a:spcPct val="110000"/>
+              </a:lnSpc>
+              <a:spcBef>
+                <a:spcPts val="0"/>
+              </a:spcBef>
+              <a:spcAft>
+                <a:spcPts val="0"/>
+              </a:spcAft>
+              <a:buNone/>
+            </a:lvl4pPr>
+            <a:lvl5pPr marL="0" indent="0">
+              <a:lnSpc>
+                <a:spcPct val="110000"/>
+              </a:lnSpc>
+              <a:spcBef>
+                <a:spcPts val="0"/>
+              </a:spcBef>
+              <a:spcAft>
+                <a:spcPts val="0"/>
+              </a:spcAft>
+              <a:buNone/>
+            </a:lvl5pPr>
+            <a:lvl6pPr marL="0" indent="0">
+              <a:lnSpc>
+                <a:spcPct val="110000"/>
+              </a:lnSpc>
+              <a:spcBef>
+                <a:spcPts val="0"/>
+              </a:spcBef>
+              <a:spcAft>
+                <a:spcPts val="0"/>
+              </a:spcAft>
+              <a:buNone/>
+            </a:lvl6pPr>
+            <a:lvl7pPr marL="0" indent="0">
+              <a:lnSpc>
+                <a:spcPct val="110000"/>
+              </a:lnSpc>
+              <a:spcBef>
+                <a:spcPts val="0"/>
+              </a:spcBef>
+              <a:spcAft>
+                <a:spcPts val="0"/>
+              </a:spcAft>
+              <a:buNone/>
+            </a:lvl7pPr>
+            <a:lvl8pPr marL="0" indent="0">
+              <a:lnSpc>
+                <a:spcPct val="110000"/>
+              </a:lnSpc>
+              <a:spcBef>
+                <a:spcPts val="0"/>
+              </a:spcBef>
+              <a:spcAft>
+                <a:spcPts val="0"/>
+              </a:spcAft>
+              <a:buNone/>
+            </a:lvl8pPr>
+            <a:lvl9pPr marL="0" indent="0">
+              <a:lnSpc>
+                <a:spcPct val="110000"/>
+              </a:lnSpc>
+              <a:spcBef>
+                <a:spcPts val="0"/>
+              </a:spcBef>
+              <a:spcAft>
+                <a:spcPts val="0"/>
+              </a:spcAft>
+              <a:buNone/>
+            </a:lvl9pPr>
+          </a:lstStyle>
+          <a:p xmlns:a="http://schemas.openxmlformats.org/drawingml/2006/main"/>
+        </p:txBody>
+      </p:sp>
+    </p:spTree>
+  </p:cSld>
+</p:sldLayout>
+</file>
+
+<file path=ppt/slideLayouts/slideLayout3.xml><?xml version="1.0" encoding="utf-8"?>
+<p:sldLayout xmlns:p="http://schemas.openxmlformats.org/presentationml/2006/main">
+  <p:cSld name="Title and Body">
+    <p:spTree>
+      <p:nvGrpSpPr>
+        <p:cNvPr id="1" name=""/>
+        <p:cNvGrpSpPr/>
+        <p:nvPr/>
+      </p:nvGrpSpPr>
+      <p:grpSpPr>
+        <a:xfrm xmlns:a="http://schemas.openxmlformats.org/drawingml/2006/main"/>
+      </p:grpSpPr>
+      <p:sp>
+        <p:nvSpPr>
+          <p:cNvPr id="3" name="Title">
+            <a:extLst xmlns:a="http://schemas.openxmlformats.org/drawingml/2006/main">
+              <a:ext uri="{FF2B5EF4-FFF2-40B4-BE49-F238E27FC236}">
+                <a16:creationId xmlns:a16="http://schemas.microsoft.com/office/drawing/2014/main" id="{2185428A-A9AE-4754-A167-A4883351AA5A}"/>
+              </a:ext>
+            </a:extLst>
+          </p:cNvPr>
+          <p:cNvSpPr>
+            <a:spLocks xmlns:a="http://schemas.openxmlformats.org/drawingml/2006/main" noGrp="1"/>
+          </p:cNvSpPr>
+          <p:nvPr>
+            <p:ph type="title" idx="0"/>
+          </p:nvPr>
+        </p:nvSpPr>
+        <p:spPr>
+          <a:xfrm xmlns:a="http://schemas.openxmlformats.org/drawingml/2006/main">
+            <a:off x="685800" y="533400"/>
+            <a:ext cx="10820400" cy="838200"/>
+          </a:xfrm>
+          <a:prstGeom xmlns:a="http://schemas.openxmlformats.org/drawingml/2006/main" prst="rect">
+            <a:avLst/>
+          </a:prstGeom>
+          <a:noFill xmlns:a="http://schemas.openxmlformats.org/drawingml/2006/main"/>
+          <a:ln xmlns:a="http://schemas.openxmlformats.org/drawingml/2006/main">
+            <a:noFill/>
+            <a:prstDash val="solid"/>
+          </a:ln>
+        </p:spPr>
+        <p:txBody>
+          <a:bodyPr xmlns:a="http://schemas.openxmlformats.org/drawingml/2006/main" wrap="square" lIns="0" tIns="0" rIns="0" bIns="0" anchor="t">
+            <a:normAutofit/>
+          </a:bodyPr>
+          <a:lstStyle xmlns:a="http://schemas.openxmlformats.org/drawingml/2006/main">
+            <a:defPPr algn="l">
+              <a:defRPr sz="3300" b="1">
+                <a:solidFill>
+                  <a:schemeClr val="tx1"/>
+                </a:solidFill>
+                <a:latin typeface="+mj-lt"/>
+                <a:ea typeface="+mj-lt"/>
+                <a:cs typeface="+mj-lt"/>
+              </a:defRPr>
+            </a:defPPr>
+            <a:lvl1pPr marL="0" indent="0">
+              <a:lnSpc>
+                <a:spcPct val="110000"/>
+              </a:lnSpc>
+              <a:spcBef>
+                <a:spcPts val="0"/>
+              </a:spcBef>
+              <a:spcAft>
+                <a:spcPts val="0"/>
+              </a:spcAft>
+              <a:buNone/>
+            </a:lvl1pPr>
+            <a:lvl2pPr marL="0" indent="0">
+              <a:lnSpc>
+                <a:spcPct val="110000"/>
+              </a:lnSpc>
+              <a:spcBef>
+                <a:spcPts val="0"/>
+              </a:spcBef>
+              <a:spcAft>
+                <a:spcPts val="0"/>
+              </a:spcAft>
+              <a:buNone/>
+            </a:lvl2pPr>
+            <a:lvl3pPr marL="0" indent="0">
+              <a:lnSpc>
+                <a:spcPct val="110000"/>
+              </a:lnSpc>
+              <a:spcBef>
+                <a:spcPts val="0"/>
+              </a:spcBef>
+              <a:spcAft>
+                <a:spcPts val="0"/>
+              </a:spcAft>
+              <a:buNone/>
+            </a:lvl3pPr>
+            <a:lvl4pPr marL="0" indent="0">
+              <a:lnSpc>
+                <a:spcPct val="110000"/>
+              </a:lnSpc>
+              <a:spcBef>
+                <a:spcPts val="0"/>
+              </a:spcBef>
+              <a:spcAft>
+                <a:spcPts val="0"/>
+              </a:spcAft>
+              <a:buNone/>
+            </a:lvl4pPr>
+            <a:lvl5pPr marL="0" indent="0">
+              <a:lnSpc>
+                <a:spcPct val="110000"/>
+              </a:lnSpc>
+              <a:spcBef>
+                <a:spcPts val="0"/>
+              </a:spcBef>
+              <a:spcAft>
+                <a:spcPts val="0"/>
+              </a:spcAft>
+              <a:buNone/>
+            </a:lvl5pPr>
+            <a:lvl6pPr marL="0" indent="0">
+              <a:lnSpc>
+                <a:spcPct val="110000"/>
+              </a:lnSpc>
+              <a:spcBef>
+                <a:spcPts val="0"/>
+              </a:spcBef>
+              <a:spcAft>
+                <a:spcPts val="0"/>
+              </a:spcAft>
+              <a:buNone/>
+            </a:lvl6pPr>
+            <a:lvl7pPr marL="0" indent="0">
+              <a:lnSpc>
+                <a:spcPct val="110000"/>
+              </a:lnSpc>
+              <a:spcBef>
+                <a:spcPts val="0"/>
+              </a:spcBef>
+              <a:spcAft>
+                <a:spcPts val="0"/>
+              </a:spcAft>
+              <a:buNone/>
+            </a:lvl7pPr>
+            <a:lvl8pPr marL="0" indent="0">
+              <a:lnSpc>
+                <a:spcPct val="110000"/>
+              </a:lnSpc>
+              <a:spcBef>
+                <a:spcPts val="0"/>
+              </a:spcBef>
+              <a:spcAft>
+                <a:spcPts val="0"/>
+              </a:spcAft>
+              <a:buNone/>
+            </a:lvl8pPr>
+            <a:lvl9pPr marL="0" indent="0">
+              <a:lnSpc>
+                <a:spcPct val="110000"/>
+              </a:lnSpc>
+              <a:spcBef>
+                <a:spcPts val="0"/>
+              </a:spcBef>
+              <a:spcAft>
+                <a:spcPts val="0"/>
+              </a:spcAft>
+              <a:buNone/>
+            </a:lvl9pPr>
+          </a:lstStyle>
+          <a:p xmlns:a="http://schemas.openxmlformats.org/drawingml/2006/main"/>
+        </p:txBody>
+      </p:sp>
+      <p:sp>
+        <p:nvSpPr>
+          <p:cNvPr id="2" name="Body">
+            <a:extLst xmlns:a="http://schemas.openxmlformats.org/drawingml/2006/main">
+              <a:ext uri="{FF2B5EF4-FFF2-40B4-BE49-F238E27FC236}">
+                <a16:creationId xmlns:a16="http://schemas.microsoft.com/office/drawing/2014/main" id="{4A01EE01-423C-4BF1-BAD9-AD71A01B2E74}"/>
+              </a:ext>
+            </a:extLst>
+          </p:cNvPr>
+          <p:cNvSpPr>
+            <a:spLocks xmlns:a="http://schemas.openxmlformats.org/drawingml/2006/main" noGrp="1"/>
+          </p:cNvSpPr>
+          <p:nvPr>
+            <p:ph type="body" idx="1"/>
+          </p:nvPr>
+        </p:nvSpPr>
+        <p:spPr>
+          <a:xfrm xmlns:a="http://schemas.openxmlformats.org/drawingml/2006/main">
+            <a:off x="685800" y="1905000"/>
+            <a:ext cx="10820400" cy="4267200"/>
+          </a:xfrm>
+          <a:prstGeom xmlns:a="http://schemas.openxmlformats.org/drawingml/2006/main" prst="rect">
+            <a:avLst/>
+          </a:prstGeom>
+          <a:noFill xmlns:a="http://schemas.openxmlformats.org/drawingml/2006/main"/>
+          <a:ln xmlns:a="http://schemas.openxmlformats.org/drawingml/2006/main">
+            <a:noFill/>
+            <a:prstDash val="solid"/>
+          </a:ln>
+        </p:spPr>
+        <p:txBody>
+          <a:bodyPr xmlns:a="http://schemas.openxmlformats.org/drawingml/2006/main" wrap="square" lIns="0" tIns="0" rIns="0" bIns="0" anchor="t">
+            <a:normAutofit/>
+          </a:bodyPr>
+          <a:lstStyle xmlns:a="http://schemas.openxmlformats.org/drawingml/2006/main">
+            <a:defPPr algn="l">
+              <a:defRPr sz="2250" b="0">
+                <a:solidFill>
+                  <a:schemeClr val="tx1"/>
+                </a:solidFill>
+                <a:latin typeface="+mn-lt"/>
+                <a:ea typeface="+mn-lt"/>
+                <a:cs typeface="+mn-lt"/>
+              </a:defRPr>
+            </a:defPPr>
+            <a:lvl1pPr marL="228600" indent="-228600">
+              <a:lnSpc>
+                <a:spcPct val="110000"/>
+              </a:lnSpc>
+              <a:spcBef>
+                <a:spcPts val="0"/>
+              </a:spcBef>
+              <a:spcAft>
+                <a:spcPts val="1200"/>
+              </a:spcAft>
+              <a:buChar char="•"/>
+            </a:lvl1pPr>
+            <a:lvl2pPr marL="533400" indent="-228600">
+              <a:lnSpc>
+                <a:spcPct val="110000"/>
+              </a:lnSpc>
+              <a:spcBef>
+                <a:spcPts val="0"/>
+              </a:spcBef>
+              <a:spcAft>
+                <a:spcPts val="1200"/>
+              </a:spcAft>
+              <a:buChar char="•"/>
+            </a:lvl2pPr>
+            <a:lvl3pPr marL="838200" indent="-228600">
+              <a:lnSpc>
+                <a:spcPct val="110000"/>
+              </a:lnSpc>
+              <a:spcBef>
+                <a:spcPts val="0"/>
+              </a:spcBef>
+              <a:spcAft>
+                <a:spcPts val="1200"/>
+              </a:spcAft>
+              <a:buChar char="•"/>
+            </a:lvl3pPr>
+            <a:lvl4pPr marL="1143000" indent="-228600">
+              <a:lnSpc>
+                <a:spcPct val="110000"/>
+              </a:lnSpc>
+              <a:spcBef>
+                <a:spcPts val="0"/>
+              </a:spcBef>
+              <a:spcAft>
+                <a:spcPts val="1200"/>
+              </a:spcAft>
+              <a:buChar char="•"/>
+            </a:lvl4pPr>
+            <a:lvl5pPr marL="1447800" indent="-228600">
+              <a:lnSpc>
+                <a:spcPct val="110000"/>
+              </a:lnSpc>
+              <a:spcBef>
+                <a:spcPts val="0"/>
+              </a:spcBef>
+              <a:spcAft>
+                <a:spcPts val="1200"/>
+              </a:spcAft>
+              <a:buChar char="•"/>
+            </a:lvl5pPr>
+            <a:lvl6pPr marL="1752600" indent="-228600">
+              <a:lnSpc>
+                <a:spcPct val="110000"/>
+              </a:lnSpc>
+              <a:spcBef>
+                <a:spcPts val="0"/>
+              </a:spcBef>
+              <a:spcAft>
+                <a:spcPts val="1200"/>
+              </a:spcAft>
+              <a:buChar char="•"/>
+            </a:lvl6pPr>
+            <a:lvl7pPr marL="2057400" indent="-228600">
+              <a:lnSpc>
+                <a:spcPct val="110000"/>
+              </a:lnSpc>
+              <a:spcBef>
+                <a:spcPts val="0"/>
+              </a:spcBef>
+              <a:spcAft>
+                <a:spcPts val="1200"/>
+              </a:spcAft>
+              <a:buChar char="•"/>
+            </a:lvl7pPr>
+            <a:lvl8pPr marL="2362200" indent="-228600">
+              <a:lnSpc>
+                <a:spcPct val="110000"/>
+              </a:lnSpc>
+              <a:spcBef>
+                <a:spcPts val="0"/>
+              </a:spcBef>
+              <a:spcAft>
+                <a:spcPts val="1200"/>
+              </a:spcAft>
+              <a:buChar char="•"/>
+            </a:lvl8pPr>
+            <a:lvl9pPr marL="2667000" indent="-228600">
+              <a:lnSpc>
+                <a:spcPct val="110000"/>
+              </a:lnSpc>
+              <a:spcBef>
+                <a:spcPts val="0"/>
+              </a:spcBef>
+              <a:spcAft>
+                <a:spcPts val="1200"/>
+              </a:spcAft>
+              <a:buChar char="•"/>
+            </a:lvl9pPr>
+          </a:lstStyle>
+          <a:p xmlns:a="http://schemas.openxmlformats.org/drawingml/2006/main"/>
+        </p:txBody>
+      </p:sp>
+    </p:spTree>
+  </p:cSld>
+</p:sldLayout>
+</file>
+
+<file path=ppt/slideLayouts/slideLayout4.xml><?xml version="1.0" encoding="utf-8"?>
+<p:sldLayout xmlns:p="http://schemas.openxmlformats.org/presentationml/2006/main">
+  <p:cSld name="Title and Two Column">
+    <p:spTree>
+      <p:nvGrpSpPr>
+        <p:cNvPr id="1" name=""/>
+        <p:cNvGrpSpPr/>
+        <p:nvPr/>
+      </p:nvGrpSpPr>
+      <p:grpSpPr>
+        <a:xfrm xmlns:a="http://schemas.openxmlformats.org/drawingml/2006/main"/>
+      </p:grpSpPr>
+      <p:sp>
+        <p:nvSpPr>
+          <p:cNvPr id="4" name="Title">
+            <a:extLst xmlns:a="http://schemas.openxmlformats.org/drawingml/2006/main">
+              <a:ext uri="{FF2B5EF4-FFF2-40B4-BE49-F238E27FC236}">
+                <a16:creationId xmlns:a16="http://schemas.microsoft.com/office/drawing/2014/main" id="{1F18A24A-B485-4A01-8117-0E26196E5EA9}"/>
+              </a:ext>
+            </a:extLst>
+          </p:cNvPr>
+          <p:cNvSpPr>
+            <a:spLocks xmlns:a="http://schemas.openxmlformats.org/drawingml/2006/main" noGrp="1"/>
+          </p:cNvSpPr>
+          <p:nvPr>
+            <p:ph type="title" idx="0"/>
+          </p:nvPr>
+        </p:nvSpPr>
+        <p:spPr>
+          <a:xfrm xmlns:a="http://schemas.openxmlformats.org/drawingml/2006/main">
+            <a:off x="685800" y="533400"/>
+            <a:ext cx="10820400" cy="838200"/>
+          </a:xfrm>
+          <a:prstGeom xmlns:a="http://schemas.openxmlformats.org/drawingml/2006/main" prst="rect">
+            <a:avLst/>
+          </a:prstGeom>
+          <a:noFill xmlns:a="http://schemas.openxmlformats.org/drawingml/2006/main"/>
+          <a:ln xmlns:a="http://schemas.openxmlformats.org/drawingml/2006/main">
+            <a:noFill/>
+            <a:prstDash val="solid"/>
+          </a:ln>
+        </p:spPr>
+        <p:txBody>
+          <a:bodyPr xmlns:a="http://schemas.openxmlformats.org/drawingml/2006/main" wrap="square" lIns="0" tIns="0" rIns="0" bIns="0" anchor="t">
+            <a:normAutofit/>
+          </a:bodyPr>
+          <a:lstStyle xmlns:a="http://schemas.openxmlformats.org/drawingml/2006/main">
+            <a:defPPr algn="l">
+              <a:defRPr sz="3300" b="1">
+                <a:solidFill>
+                  <a:schemeClr val="tx1"/>
+                </a:solidFill>
+                <a:latin typeface="+mj-lt"/>
+                <a:ea typeface="+mj-lt"/>
+                <a:cs typeface="+mj-lt"/>
+              </a:defRPr>
+            </a:defPPr>
+            <a:lvl1pPr marL="0" indent="0">
+              <a:lnSpc>
+                <a:spcPct val="110000"/>
+              </a:lnSpc>
+              <a:spcBef>
+                <a:spcPts val="0"/>
+              </a:spcBef>
+              <a:spcAft>
+                <a:spcPts val="0"/>
+              </a:spcAft>
+              <a:buNone/>
+            </a:lvl1pPr>
+            <a:lvl2pPr marL="0" indent="0">
+              <a:lnSpc>
+                <a:spcPct val="110000"/>
+              </a:lnSpc>
+              <a:spcBef>
+                <a:spcPts val="0"/>
+              </a:spcBef>
+              <a:spcAft>
+                <a:spcPts val="0"/>
+              </a:spcAft>
+              <a:buNone/>
+            </a:lvl2pPr>
+            <a:lvl3pPr marL="0" indent="0">
+              <a:lnSpc>
+                <a:spcPct val="110000"/>
+              </a:lnSpc>
+              <a:spcBef>
+                <a:spcPts val="0"/>
+              </a:spcBef>
+              <a:spcAft>
+                <a:spcPts val="0"/>
+              </a:spcAft>
+              <a:buNone/>
+            </a:lvl3pPr>
+            <a:lvl4pPr marL="0" indent="0">
+              <a:lnSpc>
+                <a:spcPct val="110000"/>
+              </a:lnSpc>
+              <a:spcBef>
+                <a:spcPts val="0"/>
+              </a:spcBef>
+              <a:spcAft>
+                <a:spcPts val="0"/>
+              </a:spcAft>
+              <a:buNone/>
+            </a:lvl4pPr>
+            <a:lvl5pPr marL="0" indent="0">
+              <a:lnSpc>
+                <a:spcPct val="110000"/>
+              </a:lnSpc>
+              <a:spcBef>
+                <a:spcPts val="0"/>
+              </a:spcBef>
+              <a:spcAft>
+                <a:spcPts val="0"/>
+              </a:spcAft>
+              <a:buNone/>
+            </a:lvl5pPr>
+            <a:lvl6pPr marL="0" indent="0">
+              <a:lnSpc>
+                <a:spcPct val="110000"/>
+              </a:lnSpc>
+              <a:spcBef>
+                <a:spcPts val="0"/>
+              </a:spcBef>
+              <a:spcAft>
+                <a:spcPts val="0"/>
+              </a:spcAft>
+              <a:buNone/>
+            </a:lvl6pPr>
+            <a:lvl7pPr marL="0" indent="0">
+              <a:lnSpc>
+                <a:spcPct val="110000"/>
+              </a:lnSpc>
+              <a:spcBef>
+                <a:spcPts val="0"/>
+              </a:spcBef>
+              <a:spcAft>
+                <a:spcPts val="0"/>
+              </a:spcAft>
+              <a:buNone/>
+            </a:lvl7pPr>
+            <a:lvl8pPr marL="0" indent="0">
+              <a:lnSpc>
+                <a:spcPct val="110000"/>
+              </a:lnSpc>
+              <a:spcBef>
+                <a:spcPts val="0"/>
+              </a:spcBef>
+              <a:spcAft>
+                <a:spcPts val="0"/>
+              </a:spcAft>
+              <a:buNone/>
+            </a:lvl8pPr>
+            <a:lvl9pPr marL="0" indent="0">
+              <a:lnSpc>
+                <a:spcPct val="110000"/>
+              </a:lnSpc>
+              <a:spcBef>
+                <a:spcPts val="0"/>
+              </a:spcBef>
+              <a:spcAft>
+                <a:spcPts val="0"/>
+              </a:spcAft>
+              <a:buNone/>
+            </a:lvl9pPr>
+          </a:lstStyle>
+          <a:p xmlns:a="http://schemas.openxmlformats.org/drawingml/2006/main"/>
+        </p:txBody>
+      </p:sp>
+      <p:sp>
+        <p:nvSpPr>
+          <p:cNvPr id="2" name="Left column">
+            <a:extLst xmlns:a="http://schemas.openxmlformats.org/drawingml/2006/main">
+              <a:ext uri="{FF2B5EF4-FFF2-40B4-BE49-F238E27FC236}">
+                <a16:creationId xmlns:a16="http://schemas.microsoft.com/office/drawing/2014/main" id="{B4D9F165-3908-428C-9190-966CE7848D93}"/>
+              </a:ext>
+            </a:extLst>
+          </p:cNvPr>
+          <p:cNvSpPr>
+            <a:spLocks xmlns:a="http://schemas.openxmlformats.org/drawingml/2006/main" noGrp="1"/>
+          </p:cNvSpPr>
+          <p:nvPr>
+            <p:ph type="body" idx="1"/>
+          </p:nvPr>
+        </p:nvSpPr>
+        <p:spPr>
+          <a:xfrm xmlns:a="http://schemas.openxmlformats.org/drawingml/2006/main">
+            <a:off x="685800" y="1905000"/>
+            <a:ext cx="5029200" cy="4267200"/>
+          </a:xfrm>
+          <a:prstGeom xmlns:a="http://schemas.openxmlformats.org/drawingml/2006/main" prst="rect">
+            <a:avLst/>
+          </a:prstGeom>
+          <a:noFill xmlns:a="http://schemas.openxmlformats.org/drawingml/2006/main"/>
+          <a:ln xmlns:a="http://schemas.openxmlformats.org/drawingml/2006/main">
+            <a:noFill/>
+            <a:prstDash val="solid"/>
+          </a:ln>
+        </p:spPr>
+        <p:txBody>
+          <a:bodyPr xmlns:a="http://schemas.openxmlformats.org/drawingml/2006/main" wrap="square" lIns="0" tIns="0" rIns="0" bIns="0" anchor="t">
+            <a:normAutofit/>
+          </a:bodyPr>
+          <a:lstStyle xmlns:a="http://schemas.openxmlformats.org/drawingml/2006/main">
+            <a:defPPr algn="l">
+              <a:defRPr sz="2100" b="0">
+                <a:solidFill>
+                  <a:schemeClr val="tx1"/>
+                </a:solidFill>
+                <a:latin typeface="+mn-lt"/>
+                <a:ea typeface="+mn-lt"/>
+                <a:cs typeface="+mn-lt"/>
+              </a:defRPr>
+            </a:defPPr>
+            <a:lvl1pPr marL="228600" indent="-228600">
+              <a:lnSpc>
+                <a:spcPct val="110000"/>
+              </a:lnSpc>
+              <a:spcBef>
+                <a:spcPts val="0"/>
+              </a:spcBef>
+              <a:spcAft>
+                <a:spcPts val="1200"/>
+              </a:spcAft>
+              <a:buChar char="•"/>
+            </a:lvl1pPr>
+            <a:lvl2pPr marL="533400" indent="-228600">
+              <a:lnSpc>
+                <a:spcPct val="110000"/>
+              </a:lnSpc>
+              <a:spcBef>
+                <a:spcPts val="0"/>
+              </a:spcBef>
+              <a:spcAft>
+                <a:spcPts val="1200"/>
+              </a:spcAft>
+              <a:buChar char="•"/>
+            </a:lvl2pPr>
+            <a:lvl3pPr marL="838200" indent="-228600">
+              <a:lnSpc>
+                <a:spcPct val="110000"/>
+              </a:lnSpc>
+              <a:spcBef>
+                <a:spcPts val="0"/>
+              </a:spcBef>
+              <a:spcAft>
+                <a:spcPts val="1200"/>
+              </a:spcAft>
+              <a:buChar char="•"/>
+            </a:lvl3pPr>
+            <a:lvl4pPr marL="1143000" indent="-228600">
+              <a:lnSpc>
+                <a:spcPct val="110000"/>
+              </a:lnSpc>
+              <a:spcBef>
+                <a:spcPts val="0"/>
+              </a:spcBef>
+              <a:spcAft>
+                <a:spcPts val="1200"/>
+              </a:spcAft>
+              <a:buChar char="•"/>
+            </a:lvl4pPr>
+            <a:lvl5pPr marL="1447800" indent="-228600">
+              <a:lnSpc>
+                <a:spcPct val="110000"/>
+              </a:lnSpc>
+              <a:spcBef>
+                <a:spcPts val="0"/>
+              </a:spcBef>
+              <a:spcAft>
+                <a:spcPts val="1200"/>
+              </a:spcAft>
+              <a:buChar char="•"/>
+            </a:lvl5pPr>
+            <a:lvl6pPr marL="1752600" indent="-228600">
+              <a:lnSpc>
+                <a:spcPct val="110000"/>
+              </a:lnSpc>
+              <a:spcBef>
+                <a:spcPts val="0"/>
+              </a:spcBef>
+              <a:spcAft>
+                <a:spcPts val="1200"/>
+              </a:spcAft>
+              <a:buChar char="•"/>
+            </a:lvl6pPr>
+            <a:lvl7pPr marL="2057400" indent="-228600">
+              <a:lnSpc>
+                <a:spcPct val="110000"/>
+              </a:lnSpc>
+              <a:spcBef>
+                <a:spcPts val="0"/>
+              </a:spcBef>
+              <a:spcAft>
+                <a:spcPts val="1200"/>
+              </a:spcAft>
+              <a:buChar char="•"/>
+            </a:lvl7pPr>
+            <a:lvl8pPr marL="2362200" indent="-228600">
+              <a:lnSpc>
+                <a:spcPct val="110000"/>
+              </a:lnSpc>
+              <a:spcBef>
+                <a:spcPts val="0"/>
+              </a:spcBef>
+              <a:spcAft>
+                <a:spcPts val="1200"/>
+              </a:spcAft>
+              <a:buChar char="•"/>
+            </a:lvl8pPr>
+            <a:lvl9pPr marL="2667000" indent="-228600">
+              <a:lnSpc>
+                <a:spcPct val="110000"/>
+              </a:lnSpc>
+              <a:spcBef>
+                <a:spcPts val="0"/>
+              </a:spcBef>
+              <a:spcAft>
+                <a:spcPts val="1200"/>
+              </a:spcAft>
+              <a:buChar char="•"/>
+            </a:lvl9pPr>
+          </a:lstStyle>
+          <a:p xmlns:a="http://schemas.openxmlformats.org/drawingml/2006/main"/>
+        </p:txBody>
+      </p:sp>
+      <p:sp>
+        <p:nvSpPr>
+          <p:cNvPr id="3" name="Right column">
+            <a:extLst xmlns:a="http://schemas.openxmlformats.org/drawingml/2006/main">
+              <a:ext uri="{FF2B5EF4-FFF2-40B4-BE49-F238E27FC236}">
+                <a16:creationId xmlns:a16="http://schemas.microsoft.com/office/drawing/2014/main" id="{1D455195-7D37-4699-9600-513CE51B2A45}"/>
+              </a:ext>
+            </a:extLst>
+          </p:cNvPr>
+          <p:cNvSpPr>
+            <a:spLocks xmlns:a="http://schemas.openxmlformats.org/drawingml/2006/main" noGrp="1"/>
+          </p:cNvSpPr>
+          <p:nvPr>
+            <p:ph type="body" idx="2"/>
+          </p:nvPr>
+        </p:nvSpPr>
+        <p:spPr>
+          <a:xfrm xmlns:a="http://schemas.openxmlformats.org/drawingml/2006/main">
+            <a:off x="6477000" y="1905000"/>
+            <a:ext cx="5029200" cy="4267200"/>
+          </a:xfrm>
+          <a:prstGeom xmlns:a="http://schemas.openxmlformats.org/drawingml/2006/main" prst="rect">
+            <a:avLst/>
+          </a:prstGeom>
+          <a:noFill xmlns:a="http://schemas.openxmlformats.org/drawingml/2006/main"/>
+          <a:ln xmlns:a="http://schemas.openxmlformats.org/drawingml/2006/main">
+            <a:noFill/>
+            <a:prstDash val="solid"/>
+          </a:ln>
+        </p:spPr>
+        <p:txBody>
+          <a:bodyPr xmlns:a="http://schemas.openxmlformats.org/drawingml/2006/main" wrap="square" lIns="0" tIns="0" rIns="0" bIns="0" anchor="t">
+            <a:normAutofit/>
+          </a:bodyPr>
+          <a:lstStyle xmlns:a="http://schemas.openxmlformats.org/drawingml/2006/main">
+            <a:defPPr algn="l">
+              <a:defRPr sz="2100" b="0">
+                <a:solidFill>
+                  <a:schemeClr val="tx1"/>
+                </a:solidFill>
+                <a:latin typeface="+mn-lt"/>
+                <a:ea typeface="+mn-lt"/>
+                <a:cs typeface="+mn-lt"/>
+              </a:defRPr>
+            </a:defPPr>
+            <a:lvl1pPr marL="228600" indent="-228600">
+              <a:lnSpc>
+                <a:spcPct val="110000"/>
+              </a:lnSpc>
+              <a:spcBef>
+                <a:spcPts val="0"/>
+              </a:spcBef>
+              <a:spcAft>
+                <a:spcPts val="1200"/>
+              </a:spcAft>
+              <a:buChar char="•"/>
+            </a:lvl1pPr>
+            <a:lvl2pPr marL="533400" indent="-228600">
+              <a:lnSpc>
+                <a:spcPct val="110000"/>
+              </a:lnSpc>
+              <a:spcBef>
+                <a:spcPts val="0"/>
+              </a:spcBef>
+              <a:spcAft>
+                <a:spcPts val="1200"/>
+              </a:spcAft>
+              <a:buChar char="•"/>
+            </a:lvl2pPr>
+            <a:lvl3pPr marL="838200" indent="-228600">
+              <a:lnSpc>
+                <a:spcPct val="110000"/>
+              </a:lnSpc>
+              <a:spcBef>
+                <a:spcPts val="0"/>
+              </a:spcBef>
+              <a:spcAft>
+                <a:spcPts val="1200"/>
+              </a:spcAft>
+              <a:buChar char="•"/>
+            </a:lvl3pPr>
+            <a:lvl4pPr marL="1143000" indent="-228600">
+              <a:lnSpc>
+                <a:spcPct val="110000"/>
+              </a:lnSpc>
+              <a:spcBef>
+                <a:spcPts val="0"/>
+              </a:spcBef>
+              <a:spcAft>
+                <a:spcPts val="1200"/>
+              </a:spcAft>
+              <a:buChar char="•"/>
+            </a:lvl4pPr>
+            <a:lvl5pPr marL="1447800" indent="-228600">
+              <a:lnSpc>
+                <a:spcPct val="110000"/>
+              </a:lnSpc>
+              <a:spcBef>
+                <a:spcPts val="0"/>
+              </a:spcBef>
+              <a:spcAft>
+                <a:spcPts val="1200"/>
+              </a:spcAft>
+              <a:buChar char="•"/>
+            </a:lvl5pPr>
+            <a:lvl6pPr marL="1752600" indent="-228600">
+              <a:lnSpc>
+                <a:spcPct val="110000"/>
+              </a:lnSpc>
+              <a:spcBef>
+                <a:spcPts val="0"/>
+              </a:spcBef>
+              <a:spcAft>
+                <a:spcPts val="1200"/>
+              </a:spcAft>
+              <a:buChar char="•"/>
+            </a:lvl6pPr>
+            <a:lvl7pPr marL="2057400" indent="-228600">
+              <a:lnSpc>
+                <a:spcPct val="110000"/>
+              </a:lnSpc>
+              <a:spcBef>
+                <a:spcPts val="0"/>
+              </a:spcBef>
+              <a:spcAft>
+                <a:spcPts val="1200"/>
+              </a:spcAft>
+              <a:buChar char="•"/>
+            </a:lvl7pPr>
+            <a:lvl8pPr marL="2362200" indent="-228600">
+              <a:lnSpc>
+                <a:spcPct val="110000"/>
+              </a:lnSpc>
+              <a:spcBef>
+                <a:spcPts val="0"/>
+              </a:spcBef>
+              <a:spcAft>
+                <a:spcPts val="1200"/>
+              </a:spcAft>
+              <a:buChar char="•"/>
+            </a:lvl8pPr>
+            <a:lvl9pPr marL="2667000" indent="-228600">
+              <a:lnSpc>
+                <a:spcPct val="110000"/>
+              </a:lnSpc>
+              <a:spcBef>
+                <a:spcPts val="0"/>
+              </a:spcBef>
+              <a:spcAft>
+                <a:spcPts val="1200"/>
+              </a:spcAft>
+              <a:buChar char="•"/>
+            </a:lvl9pPr>
+          </a:lstStyle>
+          <a:p xmlns:a="http://schemas.openxmlformats.org/drawingml/2006/main"/>
+        </p:txBody>
+      </p:sp>
+    </p:spTree>
+  </p:cSld>
+</p:sldLayout>
+</file>
+
+<file path=ppt/slideLayouts/slideLayout5.xml><?xml version="1.0" encoding="utf-8"?>
+<p:sldLayout xmlns:p="http://schemas.openxmlformats.org/presentationml/2006/main">
+  <p:cSld name="Title and One Column">
+    <p:spTree>
+      <p:nvGrpSpPr>
+        <p:cNvPr id="1" name=""/>
+        <p:cNvGrpSpPr/>
+        <p:nvPr/>
+      </p:nvGrpSpPr>
+      <p:grpSpPr>
+        <a:xfrm xmlns:a="http://schemas.openxmlformats.org/drawingml/2006/main"/>
+      </p:grpSpPr>
+      <p:sp>
+        <p:nvSpPr>
+          <p:cNvPr id="3" name="Title">
+            <a:extLst xmlns:a="http://schemas.openxmlformats.org/drawingml/2006/main">
+              <a:ext uri="{FF2B5EF4-FFF2-40B4-BE49-F238E27FC236}">
+                <a16:creationId xmlns:a16="http://schemas.microsoft.com/office/drawing/2014/main" id="{A30F211D-3C5B-4295-92D5-00AA23A6033B}"/>
+              </a:ext>
+            </a:extLst>
+          </p:cNvPr>
+          <p:cNvSpPr>
+            <a:spLocks xmlns:a="http://schemas.openxmlformats.org/drawingml/2006/main" noGrp="1"/>
+          </p:cNvSpPr>
+          <p:nvPr>
+            <p:ph type="title" idx="0"/>
+          </p:nvPr>
+        </p:nvSpPr>
+        <p:spPr>
+          <a:xfrm xmlns:a="http://schemas.openxmlformats.org/drawingml/2006/main">
+            <a:off x="685800" y="533400"/>
+            <a:ext cx="10820400" cy="838200"/>
+          </a:xfrm>
+          <a:prstGeom xmlns:a="http://schemas.openxmlformats.org/drawingml/2006/main" prst="rect">
+            <a:avLst/>
+          </a:prstGeom>
+          <a:noFill xmlns:a="http://schemas.openxmlformats.org/drawingml/2006/main"/>
+          <a:ln xmlns:a="http://schemas.openxmlformats.org/drawingml/2006/main">
+            <a:noFill/>
+            <a:prstDash val="solid"/>
+          </a:ln>
+        </p:spPr>
+        <p:txBody>
+          <a:bodyPr xmlns:a="http://schemas.openxmlformats.org/drawingml/2006/main" wrap="square" lIns="0" tIns="0" rIns="0" bIns="0" anchor="t">
+            <a:normAutofit/>
+          </a:bodyPr>
+          <a:lstStyle xmlns:a="http://schemas.openxmlformats.org/drawingml/2006/main">
+            <a:defPPr algn="l">
+              <a:defRPr sz="3300" b="1">
+                <a:solidFill>
+                  <a:schemeClr val="tx1"/>
+                </a:solidFill>
+                <a:latin typeface="+mj-lt"/>
+                <a:ea typeface="+mj-lt"/>
+                <a:cs typeface="+mj-lt"/>
+              </a:defRPr>
+            </a:defPPr>
+            <a:lvl1pPr marL="0" indent="0">
+              <a:lnSpc>
+                <a:spcPct val="110000"/>
+              </a:lnSpc>
+              <a:spcBef>
+                <a:spcPts val="0"/>
+              </a:spcBef>
+              <a:spcAft>
+                <a:spcPts val="0"/>
+              </a:spcAft>
+              <a:buNone/>
+            </a:lvl1pPr>
+            <a:lvl2pPr marL="0" indent="0">
+              <a:lnSpc>
+                <a:spcPct val="110000"/>
+              </a:lnSpc>
+              <a:spcBef>
+                <a:spcPts val="0"/>
+              </a:spcBef>
+              <a:spcAft>
+                <a:spcPts val="0"/>
+              </a:spcAft>
+              <a:buNone/>
+            </a:lvl2pPr>
+            <a:lvl3pPr marL="0" indent="0">
+              <a:lnSpc>
+                <a:spcPct val="110000"/>
+              </a:lnSpc>
+              <a:spcBef>
+                <a:spcPts val="0"/>
+              </a:spcBef>
+              <a:spcAft>
+                <a:spcPts val="0"/>
+              </a:spcAft>
+              <a:buNone/>
+            </a:lvl3pPr>
+            <a:lvl4pPr marL="0" indent="0">
+              <a:lnSpc>
+                <a:spcPct val="110000"/>
+              </a:lnSpc>
+              <a:spcBef>
+                <a:spcPts val="0"/>
+              </a:spcBef>
+              <a:spcAft>
+                <a:spcPts val="0"/>
+              </a:spcAft>
+              <a:buNone/>
+            </a:lvl4pPr>
+            <a:lvl5pPr marL="0" indent="0">
+              <a:lnSpc>
+                <a:spcPct val="110000"/>
+              </a:lnSpc>
+              <a:spcBef>
+                <a:spcPts val="0"/>
+              </a:spcBef>
+              <a:spcAft>
+                <a:spcPts val="0"/>
+              </a:spcAft>
+              <a:buNone/>
+            </a:lvl5pPr>
+            <a:lvl6pPr marL="0" indent="0">
+              <a:lnSpc>
+                <a:spcPct val="110000"/>
+              </a:lnSpc>
+              <a:spcBef>
+                <a:spcPts val="0"/>
+              </a:spcBef>
+              <a:spcAft>
+                <a:spcPts val="0"/>
+              </a:spcAft>
+              <a:buNone/>
+            </a:lvl6pPr>
+            <a:lvl7pPr marL="0" indent="0">
+              <a:lnSpc>
+                <a:spcPct val="110000"/>
+              </a:lnSpc>
+              <a:spcBef>
+                <a:spcPts val="0"/>
+              </a:spcBef>
+              <a:spcAft>
+                <a:spcPts val="0"/>
+              </a:spcAft>
+              <a:buNone/>
+            </a:lvl7pPr>
+            <a:lvl8pPr marL="0" indent="0">
+              <a:lnSpc>
+                <a:spcPct val="110000"/>
+              </a:lnSpc>
+              <a:spcBef>
+                <a:spcPts val="0"/>
+              </a:spcBef>
+              <a:spcAft>
+                <a:spcPts val="0"/>
+              </a:spcAft>
+              <a:buNone/>
+            </a:lvl8pPr>
+            <a:lvl9pPr marL="0" indent="0">
+              <a:lnSpc>
+                <a:spcPct val="110000"/>
+              </a:lnSpc>
+              <a:spcBef>
+                <a:spcPts val="0"/>
+              </a:spcBef>
+              <a:spcAft>
+                <a:spcPts val="0"/>
+              </a:spcAft>
+              <a:buNone/>
+            </a:lvl9pPr>
+          </a:lstStyle>
+          <a:p xmlns:a="http://schemas.openxmlformats.org/drawingml/2006/main"/>
+        </p:txBody>
+      </p:sp>
+      <p:sp>
+        <p:nvSpPr>
+          <p:cNvPr id="2" name="Left column">
+            <a:extLst xmlns:a="http://schemas.openxmlformats.org/drawingml/2006/main">
+              <a:ext uri="{FF2B5EF4-FFF2-40B4-BE49-F238E27FC236}">
+                <a16:creationId xmlns:a16="http://schemas.microsoft.com/office/drawing/2014/main" id="{87AE72FE-A597-42F4-B993-42C5BDCE5A8E}"/>
+              </a:ext>
+            </a:extLst>
+          </p:cNvPr>
+          <p:cNvSpPr>
+            <a:spLocks xmlns:a="http://schemas.openxmlformats.org/drawingml/2006/main" noGrp="1"/>
+          </p:cNvSpPr>
+          <p:nvPr>
+            <p:ph type="body" idx="1"/>
+          </p:nvPr>
+        </p:nvSpPr>
+        <p:spPr>
+          <a:xfrm xmlns:a="http://schemas.openxmlformats.org/drawingml/2006/main">
+            <a:off x="685800" y="1905000"/>
+            <a:ext cx="5029200" cy="4267200"/>
+          </a:xfrm>
+          <a:prstGeom xmlns:a="http://schemas.openxmlformats.org/drawingml/2006/main" prst="rect">
+            <a:avLst/>
+          </a:prstGeom>
+          <a:noFill xmlns:a="http://schemas.openxmlformats.org/drawingml/2006/main"/>
+          <a:ln xmlns:a="http://schemas.openxmlformats.org/drawingml/2006/main">
+            <a:noFill/>
+            <a:prstDash val="solid"/>
+          </a:ln>
+        </p:spPr>
+        <p:txBody>
+          <a:bodyPr xmlns:a="http://schemas.openxmlformats.org/drawingml/2006/main" wrap="square" lIns="0" tIns="0" rIns="0" bIns="0" anchor="t">
+            <a:normAutofit/>
+          </a:bodyPr>
+          <a:lstStyle xmlns:a="http://schemas.openxmlformats.org/drawingml/2006/main">
+            <a:defPPr algn="l">
+              <a:defRPr sz="2250" b="0">
+                <a:solidFill>
+                  <a:schemeClr val="tx1"/>
+                </a:solidFill>
+                <a:latin typeface="+mn-lt"/>
+                <a:ea typeface="+mn-lt"/>
+                <a:cs typeface="+mn-lt"/>
+              </a:defRPr>
+            </a:defPPr>
+            <a:lvl1pPr marL="228600" indent="-228600">
+              <a:lnSpc>
+                <a:spcPct val="110000"/>
+              </a:lnSpc>
+              <a:spcBef>
+                <a:spcPts val="0"/>
+              </a:spcBef>
+              <a:spcAft>
+                <a:spcPts val="1200"/>
+              </a:spcAft>
+              <a:buChar char="•"/>
+            </a:lvl1pPr>
+            <a:lvl2pPr marL="533400" indent="-228600">
+              <a:lnSpc>
+                <a:spcPct val="110000"/>
+              </a:lnSpc>
+              <a:spcBef>
+                <a:spcPts val="0"/>
+              </a:spcBef>
+              <a:spcAft>
+                <a:spcPts val="1200"/>
+              </a:spcAft>
+              <a:buChar char="•"/>
+            </a:lvl2pPr>
+            <a:lvl3pPr marL="838200" indent="-228600">
+              <a:lnSpc>
+                <a:spcPct val="110000"/>
+              </a:lnSpc>
+              <a:spcBef>
+                <a:spcPts val="0"/>
+              </a:spcBef>
+              <a:spcAft>
+                <a:spcPts val="1200"/>
+              </a:spcAft>
+              <a:buChar char="•"/>
+            </a:lvl3pPr>
+            <a:lvl4pPr marL="1143000" indent="-228600">
+              <a:lnSpc>
+                <a:spcPct val="110000"/>
+              </a:lnSpc>
+              <a:spcBef>
+                <a:spcPts val="0"/>
+              </a:spcBef>
+              <a:spcAft>
+                <a:spcPts val="1200"/>
+              </a:spcAft>
+              <a:buChar char="•"/>
+            </a:lvl4pPr>
+            <a:lvl5pPr marL="1447800" indent="-228600">
+              <a:lnSpc>
+                <a:spcPct val="110000"/>
+              </a:lnSpc>
+              <a:spcBef>
+                <a:spcPts val="0"/>
+              </a:spcBef>
+              <a:spcAft>
+                <a:spcPts val="1200"/>
+              </a:spcAft>
+              <a:buChar char="•"/>
+            </a:lvl5pPr>
+            <a:lvl6pPr marL="1752600" indent="-228600">
+              <a:lnSpc>
+                <a:spcPct val="110000"/>
+              </a:lnSpc>
+              <a:spcBef>
+                <a:spcPts val="0"/>
+              </a:spcBef>
+              <a:spcAft>
+                <a:spcPts val="1200"/>
+              </a:spcAft>
+              <a:buChar char="•"/>
+            </a:lvl6pPr>
+            <a:lvl7pPr marL="2057400" indent="-228600">
+              <a:lnSpc>
+                <a:spcPct val="110000"/>
+              </a:lnSpc>
+              <a:spcBef>
+                <a:spcPts val="0"/>
+              </a:spcBef>
+              <a:spcAft>
+                <a:spcPts val="1200"/>
+              </a:spcAft>
+              <a:buChar char="•"/>
+            </a:lvl7pPr>
+            <a:lvl8pPr marL="2362200" indent="-228600">
+              <a:lnSpc>
+                <a:spcPct val="110000"/>
+              </a:lnSpc>
+              <a:spcBef>
+                <a:spcPts val="0"/>
+              </a:spcBef>
+              <a:spcAft>
+                <a:spcPts val="1200"/>
+              </a:spcAft>
+              <a:buChar char="•"/>
+            </a:lvl8pPr>
+            <a:lvl9pPr marL="2667000" indent="-228600">
+              <a:lnSpc>
+                <a:spcPct val="110000"/>
+              </a:lnSpc>
+              <a:spcBef>
+                <a:spcPts val="0"/>
+              </a:spcBef>
+              <a:spcAft>
+                <a:spcPts val="1200"/>
+              </a:spcAft>
+              <a:buChar char="•"/>
+            </a:lvl9pPr>
+          </a:lstStyle>
+          <a:p xmlns:a="http://schemas.openxmlformats.org/drawingml/2006/main"/>
+        </p:txBody>
+      </p:sp>
+    </p:spTree>
+  </p:cSld>
+</p:sldLayout>
+</file>
+
+<file path=ppt/slideLayouts/slideLayout6.xml><?xml version="1.0" encoding="utf-8"?>
+<p:sldLayout xmlns:p="http://schemas.openxmlformats.org/presentationml/2006/main" type="blank">
+  <p:cSld name="Blank">
+    <p:spTree>
+      <p:nvGrpSpPr>
+        <p:cNvPr id="1" name=""/>
+        <p:cNvGrpSpPr/>
+        <p:nvPr/>
+      </p:nvGrpSpPr>
+      <p:grpSpPr>
+        <a:xfrm xmlns:a="http://schemas.openxmlformats.org/drawingml/2006/main"/>
+      </p:grpSpPr>
     </p:spTree>
   </p:cSld>
 </p:sldLayout>
@@ -2283,7 +3938,12 @@
   </p:cSld>
   <p:clrMap bg1="lt1" tx1="dk1" bg2="lt2" tx2="dk2" accent1="accent1" accent2="accent2" accent3="accent3" accent4="accent4" accent5="accent5" accent6="accent6" hlink="hlink" folHlink="folHlink"/>
   <p:sldLayoutIdLst>
-    <p:sldLayoutId xmlns:r="http://schemas.openxmlformats.org/officeDocument/2006/relationships" id="2147483649" r:id="R63993a8ec42f4b90"/>
+    <p:sldLayoutId xmlns:r="http://schemas.openxmlformats.org/officeDocument/2006/relationships" id="2147483649" r:id="Rd553a99e5c8742ce"/>
+    <p:sldLayoutId xmlns:r="http://schemas.openxmlformats.org/officeDocument/2006/relationships" id="2147483650" r:id="R408132e069874fcd"/>
+    <p:sldLayoutId xmlns:r="http://schemas.openxmlformats.org/officeDocument/2006/relationships" id="2147483651" r:id="Rd963513004a04202"/>
+    <p:sldLayoutId xmlns:r="http://schemas.openxmlformats.org/officeDocument/2006/relationships" id="2147483652" r:id="R5462bf3210d842d5"/>
+    <p:sldLayoutId xmlns:r="http://schemas.openxmlformats.org/officeDocument/2006/relationships" id="2147483653" r:id="R205afdfa0fcd4551"/>
+    <p:sldLayoutId xmlns:r="http://schemas.openxmlformats.org/officeDocument/2006/relationships" id="2147483654" r:id="R023c756582894d55"/>
   </p:sldLayoutIdLst>
   <p:txStyles>
     <p:titleStyle>
@@ -2606,16 +4266,16 @@
         <a:srgbClr val="96607D"/>
       </a:folHlink>
     </a:clrScheme>
-    <a:fontScheme name="Office">
+    <a:fontScheme name="">
       <a:majorFont>
-        <a:latin typeface="Calibri Light"/>
-        <a:ea typeface="Calibri Light"/>
-        <a:cs typeface="Calibri Light"/>
+        <a:latin typeface="Aptos"/>
+        <a:ea typeface=""/>
+        <a:cs typeface=""/>
       </a:majorFont>
       <a:minorFont>
-        <a:latin typeface="Calibri"/>
-        <a:ea typeface="Calibri"/>
-        <a:cs typeface="Calibri"/>
+        <a:latin typeface="Aptos"/>
+        <a:ea typeface=""/>
+        <a:cs typeface=""/>
       </a:minorFont>
     </a:fontScheme>
     <a:fmtScheme name="ChatGPT">
@@ -2868,6 +4528,7 @@
           </c:val>
         </c:ser>
         <c:dLbls>
+          <c:numFmt formatCode="0.0" sourceLinked="0"/>
           <c:txPr>
             <a:bodyPr xmlns:a="http://schemas.openxmlformats.org/drawingml/2006/main" anchorCtr="1"/>
             <a:lstStyle xmlns:a="http://schemas.openxmlformats.org/drawingml/2006/main"/>
@@ -3097,7 +4758,7 @@
           <p:cNvPr id="5" name="">
             <a:extLst xmlns:a="http://schemas.openxmlformats.org/drawingml/2006/main">
               <a:ext uri="{FF2B5EF4-FFF2-40B4-BE49-F238E27FC236}">
-                <a16:creationId xmlns:a16="http://schemas.microsoft.com/office/drawing/2014/main" id="{65404368-CA0A-4ED6-84A0-FAF0F330019C}"/>
+                <a16:creationId xmlns:a16="http://schemas.microsoft.com/office/drawing/2014/main" id="{C8D60A16-78C3-4EE0-AFB8-9F873F12A3CF}"/>
               </a:ext>
             </a:extLst>
           </p:cNvPr>
@@ -3127,7 +4788,18 @@
           <a:bodyPr xmlns:a="http://schemas.openxmlformats.org/drawingml/2006/main" anchor="t">
             <a:noAutofit/>
           </a:bodyPr>
-          <a:lstStyle xmlns:a="http://schemas.openxmlformats.org/drawingml/2006/main"/>
+          <a:lstStyle xmlns:a="http://schemas.openxmlformats.org/drawingml/2006/main">
+            <a:defPPr>
+              <a:defRPr sz="3150" b="1">
+                <a:solidFill>
+                  <a:srgbClr val="213744"/>
+                </a:solidFill>
+                <a:latin typeface="Arial"/>
+                <a:ea typeface="Arial"/>
+                <a:cs typeface="Arial"/>
+              </a:defRPr>
+            </a:defPPr>
+          </a:lstStyle>
           <a:p xmlns:a="http://schemas.openxmlformats.org/drawingml/2006/main">
             <a:pPr>
               <a:defRPr sz="3150" b="1">
@@ -3158,7 +4830,7 @@
           <p:cNvPr id="2" name="">
             <a:extLst xmlns:a="http://schemas.openxmlformats.org/drawingml/2006/main">
               <a:ext uri="{FF2B5EF4-FFF2-40B4-BE49-F238E27FC236}">
-                <a16:creationId xmlns:a16="http://schemas.microsoft.com/office/drawing/2014/main" id="{EEC180C0-43E7-4493-B47D-58521CAE435F}"/>
+                <a16:creationId xmlns:a16="http://schemas.microsoft.com/office/drawing/2014/main" id="{E31A36F0-9BEB-4F15-B98F-D3886E3A0997}"/>
               </a:ext>
             </a:extLst>
           </p:cNvPr>
@@ -3188,7 +4860,18 @@
           <a:bodyPr xmlns:a="http://schemas.openxmlformats.org/drawingml/2006/main" anchor="t">
             <a:noAutofit/>
           </a:bodyPr>
-          <a:lstStyle xmlns:a="http://schemas.openxmlformats.org/drawingml/2006/main"/>
+          <a:lstStyle xmlns:a="http://schemas.openxmlformats.org/drawingml/2006/main">
+            <a:defPPr>
+              <a:defRPr sz="2325" b="0">
+                <a:solidFill>
+                  <a:srgbClr val="213744"/>
+                </a:solidFill>
+                <a:latin typeface="Arial"/>
+                <a:ea typeface="Arial"/>
+                <a:cs typeface="Arial"/>
+              </a:defRPr>
+            </a:defPPr>
+          </a:lstStyle>
           <a:p xmlns:a="http://schemas.openxmlformats.org/drawingml/2006/main">
             <a:pPr>
               <a:defRPr sz="2325" b="0">
@@ -3219,7 +4902,7 @@
           <p:cNvPr id="3" name="">
             <a:extLst xmlns:a="http://schemas.openxmlformats.org/drawingml/2006/main">
               <a:ext uri="{FF2B5EF4-FFF2-40B4-BE49-F238E27FC236}">
-                <a16:creationId xmlns:a16="http://schemas.microsoft.com/office/drawing/2014/main" id="{A4AFE987-6D67-4F6C-8CF5-FAA68E94516E}"/>
+                <a16:creationId xmlns:a16="http://schemas.microsoft.com/office/drawing/2014/main" id="{BAC565FE-91AD-4BD8-9B0A-AB0CE696C6B6}"/>
               </a:ext>
             </a:extLst>
           </p:cNvPr>
@@ -3249,7 +4932,18 @@
           <a:bodyPr xmlns:a="http://schemas.openxmlformats.org/drawingml/2006/main" anchor="t">
             <a:noAutofit/>
           </a:bodyPr>
-          <a:lstStyle xmlns:a="http://schemas.openxmlformats.org/drawingml/2006/main"/>
+          <a:lstStyle xmlns:a="http://schemas.openxmlformats.org/drawingml/2006/main">
+            <a:defPPr>
+              <a:defRPr sz="2325" b="0">
+                <a:solidFill>
+                  <a:srgbClr val="157C87"/>
+                </a:solidFill>
+                <a:latin typeface="Arial"/>
+                <a:ea typeface="Arial"/>
+                <a:cs typeface="Arial"/>
+              </a:defRPr>
+            </a:defPPr>
+          </a:lstStyle>
           <a:p xmlns:a="http://schemas.openxmlformats.org/drawingml/2006/main">
             <a:pPr>
               <a:defRPr sz="2325" b="0">
@@ -3270,7 +4964,7 @@
                 <a:ea typeface="Arial"/>
                 <a:cs typeface="Arial"/>
               </a:rPr>
-              <a:t>The question: can another implementer derive the behavior without guessing? The draft now defines the tested inputs and rules. Those choices still need group review.</a:t>
+              <a:t>The merged background separates map-grid distances and north from physical model size and orientation. A narrow clarification keeps stage axes distinct. Existing placement rules remain unchanged.</a:t>
             </a:r>
           </a:p>
         </p:txBody>
@@ -3280,7 +4974,7 @@
           <p:cNvPr id="4" name="">
             <a:extLst xmlns:a="http://schemas.openxmlformats.org/drawingml/2006/main">
               <a:ext uri="{FF2B5EF4-FFF2-40B4-BE49-F238E27FC236}">
-                <a16:creationId xmlns:a16="http://schemas.microsoft.com/office/drawing/2014/main" id="{6BD85FDD-38D6-4BA2-A29A-1E4CA473BE92}"/>
+                <a16:creationId xmlns:a16="http://schemas.microsoft.com/office/drawing/2014/main" id="{93662254-A4ED-4FB9-9B1B-57F2519AB24D}"/>
               </a:ext>
             </a:extLst>
           </p:cNvPr>
@@ -3310,7 +5004,18 @@
           <a:bodyPr xmlns:a="http://schemas.openxmlformats.org/drawingml/2006/main" anchor="t">
             <a:noAutofit/>
           </a:bodyPr>
-          <a:lstStyle xmlns:a="http://schemas.openxmlformats.org/drawingml/2006/main"/>
+          <a:lstStyle xmlns:a="http://schemas.openxmlformats.org/drawingml/2006/main">
+            <a:defPPr>
+              <a:defRPr sz="2025" b="0">
+                <a:solidFill>
+                  <a:srgbClr val="526B79"/>
+                </a:solidFill>
+                <a:latin typeface="Arial"/>
+                <a:ea typeface="Arial"/>
+                <a:cs typeface="Arial"/>
+              </a:defRPr>
+            </a:defPPr>
+          </a:lstStyle>
           <a:p xmlns:a="http://schemas.openxmlformats.org/drawingml/2006/main">
             <a:pPr>
               <a:defRPr sz="2025" b="0">
@@ -3331,7 +5036,7 @@
                 <a:ea typeface="Arial"/>
                 <a:cs typeface="Arial"/>
               </a:rPr>
-              <a:t>Selected demonstrations work. A later audit found seven prototype issues. No additional model blocker was confirmed; this does not establish complete coverage.</a:t>
+              <a:t>The fresh run reproduces the selected results with no numerical changes. Seven known prototype issues also reproduce. Clearer explanation does not mean those defects are fixed.</a:t>
             </a:r>
           </a:p>
         </p:txBody>
@@ -3339,7 +5044,7 @@
     </p:spTree>
     <p:extLst>
       <p:ext uri="{BB962C8B-B14F-4D97-AF65-F5344CB8AC3E}">
-        <p14:creationId xmlns:p14="http://schemas.microsoft.com/office/powerpoint/2010/main" val="1329898867"/>
+        <p14:creationId xmlns:p14="http://schemas.microsoft.com/office/powerpoint/2010/main" val="2105127"/>
       </p:ext>
     </p:extLst>
   </p:cSld>
@@ -3370,7 +5075,7 @@
           <p:cNvPr id="9" name="">
             <a:extLst xmlns:a="http://schemas.openxmlformats.org/drawingml/2006/main">
               <a:ext uri="{FF2B5EF4-FFF2-40B4-BE49-F238E27FC236}">
-                <a16:creationId xmlns:a16="http://schemas.microsoft.com/office/drawing/2014/main" id="{9FA5CAD0-44ED-4A25-9DBE-85A15C2A28A2}"/>
+                <a16:creationId xmlns:a16="http://schemas.microsoft.com/office/drawing/2014/main" id="{4D307153-D94B-44C8-8601-7196D7A2E91B}"/>
               </a:ext>
             </a:extLst>
           </p:cNvPr>
@@ -3400,7 +5105,18 @@
           <a:bodyPr xmlns:a="http://schemas.openxmlformats.org/drawingml/2006/main" anchor="t">
             <a:noAutofit/>
           </a:bodyPr>
-          <a:lstStyle xmlns:a="http://schemas.openxmlformats.org/drawingml/2006/main"/>
+          <a:lstStyle xmlns:a="http://schemas.openxmlformats.org/drawingml/2006/main">
+            <a:defPPr>
+              <a:defRPr sz="3150" b="1">
+                <a:solidFill>
+                  <a:srgbClr val="213744"/>
+                </a:solidFill>
+                <a:latin typeface="Arial"/>
+                <a:ea typeface="Arial"/>
+                <a:cs typeface="Arial"/>
+              </a:defRPr>
+            </a:defPPr>
+          </a:lstStyle>
           <a:p xmlns:a="http://schemas.openxmlformats.org/drawingml/2006/main">
             <a:pPr>
               <a:defRPr sz="3150" b="1">
@@ -3431,7 +5147,7 @@
           <p:cNvPr id="2" name="">
             <a:extLst xmlns:a="http://schemas.openxmlformats.org/drawingml/2006/main">
               <a:ext uri="{FF2B5EF4-FFF2-40B4-BE49-F238E27FC236}">
-                <a16:creationId xmlns:a16="http://schemas.microsoft.com/office/drawing/2014/main" id="{EE0024D1-0446-446C-81FF-DBB7BA79644D}"/>
+                <a16:creationId xmlns:a16="http://schemas.microsoft.com/office/drawing/2014/main" id="{6B273EF4-58A1-46BB-A5B5-BD79CE69D0D0}"/>
               </a:ext>
             </a:extLst>
           </p:cNvPr>
@@ -3461,7 +5177,18 @@
           <a:bodyPr xmlns:a="http://schemas.openxmlformats.org/drawingml/2006/main" anchor="t">
             <a:noAutofit/>
           </a:bodyPr>
-          <a:lstStyle xmlns:a="http://schemas.openxmlformats.org/drawingml/2006/main"/>
+          <a:lstStyle xmlns:a="http://schemas.openxmlformats.org/drawingml/2006/main">
+            <a:defPPr>
+              <a:defRPr sz="2325" b="1">
+                <a:solidFill>
+                  <a:srgbClr val="157C87"/>
+                </a:solidFill>
+                <a:latin typeface="Arial"/>
+                <a:ea typeface="Arial"/>
+                <a:cs typeface="Arial"/>
+              </a:defRPr>
+            </a:defPPr>
+          </a:lstStyle>
           <a:p xmlns:a="http://schemas.openxmlformats.org/drawingml/2006/main">
             <a:pPr>
               <a:defRPr sz="2325" b="1">
@@ -3489,14 +5216,20 @@
       </p:sp>
       <p:pic>
         <p:nvPicPr>
-          <p:cNvPr id="11" name=""/>
+          <p:cNvPr id="3" name="">
+            <a:extLst xmlns:a="http://schemas.openxmlformats.org/drawingml/2006/main">
+              <a:ext uri="{FF2B5EF4-FFF2-40B4-BE49-F238E27FC236}">
+                <a16:creationId xmlns:a16="http://schemas.microsoft.com/office/drawing/2014/main" id="{1E0DBABB-D27B-4046-A810-149F2659D54D}"/>
+              </a:ext>
+            </a:extLst>
+          </p:cNvPr>
           <p:cNvPicPr>
             <a:picLocks xmlns:a="http://schemas.openxmlformats.org/drawingml/2006/main" noChangeAspect="1"/>
           </p:cNvPicPr>
           <p:nvPr/>
         </p:nvPicPr>
         <p:blipFill>
-          <a:blip xmlns:r="http://schemas.openxmlformats.org/officeDocument/2006/relationships" xmlns:a="http://schemas.openxmlformats.org/drawingml/2006/main" r:embed="R66bbf444a85f4034"/>
+          <a:blip xmlns:r="http://schemas.openxmlformats.org/officeDocument/2006/relationships" xmlns:a="http://schemas.openxmlformats.org/drawingml/2006/main" r:embed="R5a3c4667fbfa46b3"/>
           <a:stretch xmlns:a="http://schemas.openxmlformats.org/drawingml/2006/main"/>
         </p:blipFill>
         <p:spPr>
@@ -3514,7 +5247,7 @@
           <p:cNvPr id="4" name="">
             <a:extLst xmlns:a="http://schemas.openxmlformats.org/drawingml/2006/main">
               <a:ext uri="{FF2B5EF4-FFF2-40B4-BE49-F238E27FC236}">
-                <a16:creationId xmlns:a16="http://schemas.microsoft.com/office/drawing/2014/main" id="{42625F29-27A8-4579-B586-97230A85997B}"/>
+                <a16:creationId xmlns:a16="http://schemas.microsoft.com/office/drawing/2014/main" id="{D78AA00A-2B71-4C5F-AB7F-E044908661B6}"/>
               </a:ext>
             </a:extLst>
           </p:cNvPr>
@@ -3544,7 +5277,18 @@
           <a:bodyPr xmlns:a="http://schemas.openxmlformats.org/drawingml/2006/main" anchor="t">
             <a:noAutofit/>
           </a:bodyPr>
-          <a:lstStyle xmlns:a="http://schemas.openxmlformats.org/drawingml/2006/main"/>
+          <a:lstStyle xmlns:a="http://schemas.openxmlformats.org/drawingml/2006/main">
+            <a:defPPr>
+              <a:defRPr sz="1650" b="1">
+                <a:solidFill>
+                  <a:srgbClr val="157C87"/>
+                </a:solidFill>
+                <a:latin typeface="Arial"/>
+                <a:ea typeface="Arial"/>
+                <a:cs typeface="Arial"/>
+              </a:defRPr>
+            </a:defPPr>
+          </a:lstStyle>
           <a:p xmlns:a="http://schemas.openxmlformats.org/drawingml/2006/main">
             <a:pPr>
               <a:defRPr sz="1650" b="1">
@@ -3575,7 +5319,7 @@
           <p:cNvPr id="5" name="">
             <a:extLst xmlns:a="http://schemas.openxmlformats.org/drawingml/2006/main">
               <a:ext uri="{FF2B5EF4-FFF2-40B4-BE49-F238E27FC236}">
-                <a16:creationId xmlns:a16="http://schemas.microsoft.com/office/drawing/2014/main" id="{9A063B63-4002-4292-8B75-6600310C3631}"/>
+                <a16:creationId xmlns:a16="http://schemas.microsoft.com/office/drawing/2014/main" id="{7044622D-FA76-4EAF-BBDF-BC0DEDAB463A}"/>
               </a:ext>
             </a:extLst>
           </p:cNvPr>
@@ -3605,7 +5349,18 @@
           <a:bodyPr xmlns:a="http://schemas.openxmlformats.org/drawingml/2006/main" anchor="t">
             <a:noAutofit/>
           </a:bodyPr>
-          <a:lstStyle xmlns:a="http://schemas.openxmlformats.org/drawingml/2006/main"/>
+          <a:lstStyle xmlns:a="http://schemas.openxmlformats.org/drawingml/2006/main">
+            <a:defPPr>
+              <a:defRPr sz="1800" b="0">
+                <a:solidFill>
+                  <a:srgbClr val="213744"/>
+                </a:solidFill>
+                <a:latin typeface="Arial"/>
+                <a:ea typeface="Arial"/>
+                <a:cs typeface="Arial"/>
+              </a:defRPr>
+            </a:defPPr>
+          </a:lstStyle>
           <a:p xmlns:a="http://schemas.openxmlformats.org/drawingml/2006/main">
             <a:pPr>
               <a:defRPr sz="1800" b="0">
@@ -3636,7 +5391,7 @@
           <p:cNvPr id="6" name="">
             <a:extLst xmlns:a="http://schemas.openxmlformats.org/drawingml/2006/main">
               <a:ext uri="{FF2B5EF4-FFF2-40B4-BE49-F238E27FC236}">
-                <a16:creationId xmlns:a16="http://schemas.microsoft.com/office/drawing/2014/main" id="{C4885DE8-3166-4363-B827-0BF7F6EF5E2A}"/>
+                <a16:creationId xmlns:a16="http://schemas.microsoft.com/office/drawing/2014/main" id="{068C5AB4-737D-45A5-A565-4B6B1C8AB448}"/>
               </a:ext>
             </a:extLst>
           </p:cNvPr>
@@ -3666,7 +5421,18 @@
           <a:bodyPr xmlns:a="http://schemas.openxmlformats.org/drawingml/2006/main" anchor="t">
             <a:noAutofit/>
           </a:bodyPr>
-          <a:lstStyle xmlns:a="http://schemas.openxmlformats.org/drawingml/2006/main"/>
+          <a:lstStyle xmlns:a="http://schemas.openxmlformats.org/drawingml/2006/main">
+            <a:defPPr>
+              <a:defRPr sz="1650" b="1">
+                <a:solidFill>
+                  <a:srgbClr val="157C87"/>
+                </a:solidFill>
+                <a:latin typeface="Arial"/>
+                <a:ea typeface="Arial"/>
+                <a:cs typeface="Arial"/>
+              </a:defRPr>
+            </a:defPPr>
+          </a:lstStyle>
           <a:p xmlns:a="http://schemas.openxmlformats.org/drawingml/2006/main">
             <a:pPr>
               <a:defRPr sz="1650" b="1">
@@ -3697,7 +5463,7 @@
           <p:cNvPr id="7" name="">
             <a:extLst xmlns:a="http://schemas.openxmlformats.org/drawingml/2006/main">
               <a:ext uri="{FF2B5EF4-FFF2-40B4-BE49-F238E27FC236}">
-                <a16:creationId xmlns:a16="http://schemas.microsoft.com/office/drawing/2014/main" id="{C97C1D50-1683-4116-83FD-8C37CEBE3DB8}"/>
+                <a16:creationId xmlns:a16="http://schemas.microsoft.com/office/drawing/2014/main" id="{3995FE27-49CD-4941-B5BC-D6C38EEBA8B1}"/>
               </a:ext>
             </a:extLst>
           </p:cNvPr>
@@ -3727,7 +5493,18 @@
           <a:bodyPr xmlns:a="http://schemas.openxmlformats.org/drawingml/2006/main" anchor="t">
             <a:noAutofit/>
           </a:bodyPr>
-          <a:lstStyle xmlns:a="http://schemas.openxmlformats.org/drawingml/2006/main"/>
+          <a:lstStyle xmlns:a="http://schemas.openxmlformats.org/drawingml/2006/main">
+            <a:defPPr>
+              <a:defRPr sz="1800" b="0">
+                <a:solidFill>
+                  <a:srgbClr val="213744"/>
+                </a:solidFill>
+                <a:latin typeface="Arial"/>
+                <a:ea typeface="Arial"/>
+                <a:cs typeface="Arial"/>
+              </a:defRPr>
+            </a:defPPr>
+          </a:lstStyle>
           <a:p xmlns:a="http://schemas.openxmlformats.org/drawingml/2006/main">
             <a:pPr>
               <a:defRPr sz="1800" b="0">
@@ -3758,7 +5535,7 @@
           <p:cNvPr id="8" name="">
             <a:extLst xmlns:a="http://schemas.openxmlformats.org/drawingml/2006/main">
               <a:ext uri="{FF2B5EF4-FFF2-40B4-BE49-F238E27FC236}">
-                <a16:creationId xmlns:a16="http://schemas.microsoft.com/office/drawing/2014/main" id="{AB94F6D9-9DF9-4FBE-844A-CD8F45A18571}"/>
+                <a16:creationId xmlns:a16="http://schemas.microsoft.com/office/drawing/2014/main" id="{9F650FB1-06F4-4B30-91C6-2BC8A59965A6}"/>
               </a:ext>
             </a:extLst>
           </p:cNvPr>
@@ -3788,7 +5565,18 @@
           <a:bodyPr xmlns:a="http://schemas.openxmlformats.org/drawingml/2006/main" anchor="t">
             <a:noAutofit/>
           </a:bodyPr>
-          <a:lstStyle xmlns:a="http://schemas.openxmlformats.org/drawingml/2006/main"/>
+          <a:lstStyle xmlns:a="http://schemas.openxmlformats.org/drawingml/2006/main">
+            <a:defPPr>
+              <a:defRPr sz="1350" b="0">
+                <a:solidFill>
+                  <a:srgbClr val="526B79"/>
+                </a:solidFill>
+                <a:latin typeface="Arial"/>
+                <a:ea typeface="Arial"/>
+                <a:cs typeface="Arial"/>
+              </a:defRPr>
+            </a:defPPr>
+          </a:lstStyle>
           <a:p xmlns:a="http://schemas.openxmlformats.org/drawingml/2006/main">
             <a:pPr>
               <a:defRPr sz="1350" b="0">
@@ -3817,7 +5605,7 @@
     </p:spTree>
     <p:extLst>
       <p:ext uri="{BB962C8B-B14F-4D97-AF65-F5344CB8AC3E}">
-        <p14:creationId xmlns:p14="http://schemas.microsoft.com/office/powerpoint/2010/main" val="121795502"/>
+        <p14:creationId xmlns:p14="http://schemas.microsoft.com/office/powerpoint/2010/main" val="1667724693"/>
       </p:ext>
     </p:extLst>
   </p:cSld>
@@ -3848,7 +5636,7 @@
           <p:cNvPr id="7" name="">
             <a:extLst xmlns:a="http://schemas.openxmlformats.org/drawingml/2006/main">
               <a:ext uri="{FF2B5EF4-FFF2-40B4-BE49-F238E27FC236}">
-                <a16:creationId xmlns:a16="http://schemas.microsoft.com/office/drawing/2014/main" id="{EA3800C2-9EDA-4CDF-A966-B82169C5AF81}"/>
+                <a16:creationId xmlns:a16="http://schemas.microsoft.com/office/drawing/2014/main" id="{FB1808EC-2E13-4BA0-982B-1EF43D1995D2}"/>
               </a:ext>
             </a:extLst>
           </p:cNvPr>
@@ -3878,7 +5666,18 @@
           <a:bodyPr xmlns:a="http://schemas.openxmlformats.org/drawingml/2006/main" anchor="t">
             <a:noAutofit/>
           </a:bodyPr>
-          <a:lstStyle xmlns:a="http://schemas.openxmlformats.org/drawingml/2006/main"/>
+          <a:lstStyle xmlns:a="http://schemas.openxmlformats.org/drawingml/2006/main">
+            <a:defPPr>
+              <a:defRPr sz="3150" b="1">
+                <a:solidFill>
+                  <a:srgbClr val="213744"/>
+                </a:solidFill>
+                <a:latin typeface="Arial"/>
+                <a:ea typeface="Arial"/>
+                <a:cs typeface="Arial"/>
+              </a:defRPr>
+            </a:defPPr>
+          </a:lstStyle>
           <a:p xmlns:a="http://schemas.openxmlformats.org/drawingml/2006/main">
             <a:pPr>
               <a:defRPr sz="3150" b="1">
@@ -3909,7 +5708,7 @@
           <p:cNvPr id="2" name="">
             <a:extLst xmlns:a="http://schemas.openxmlformats.org/drawingml/2006/main">
               <a:ext uri="{FF2B5EF4-FFF2-40B4-BE49-F238E27FC236}">
-                <a16:creationId xmlns:a16="http://schemas.microsoft.com/office/drawing/2014/main" id="{52C152B9-35CF-425A-8F33-F9DF47D0F26D}"/>
+                <a16:creationId xmlns:a16="http://schemas.microsoft.com/office/drawing/2014/main" id="{82F66357-1293-4A68-B4F2-FD7E6360F6BC}"/>
               </a:ext>
             </a:extLst>
           </p:cNvPr>
@@ -3939,7 +5738,18 @@
           <a:bodyPr xmlns:a="http://schemas.openxmlformats.org/drawingml/2006/main" anchor="t">
             <a:noAutofit/>
           </a:bodyPr>
-          <a:lstStyle xmlns:a="http://schemas.openxmlformats.org/drawingml/2006/main"/>
+          <a:lstStyle xmlns:a="http://schemas.openxmlformats.org/drawingml/2006/main">
+            <a:defPPr>
+              <a:defRPr sz="2250" b="1">
+                <a:solidFill>
+                  <a:srgbClr val="157C87"/>
+                </a:solidFill>
+                <a:latin typeface="Arial"/>
+                <a:ea typeface="Arial"/>
+                <a:cs typeface="Arial"/>
+              </a:defRPr>
+            </a:defPPr>
+          </a:lstStyle>
           <a:p xmlns:a="http://schemas.openxmlformats.org/drawingml/2006/main">
             <a:pPr>
               <a:defRPr sz="2250" b="1">
@@ -3967,7 +5777,13 @@
       </p:sp>
       <p:graphicFrame>
         <p:nvGraphicFramePr>
-          <p:cNvPr id="9" name="Chart"/>
+          <p:cNvPr id="3" name="Chart">
+            <a:extLst xmlns:a="http://schemas.openxmlformats.org/drawingml/2006/main">
+              <a:ext uri="{FF2B5EF4-FFF2-40B4-BE49-F238E27FC236}">
+                <a16:creationId xmlns:a16="http://schemas.microsoft.com/office/drawing/2014/main" id="{BE6B5CFE-E99A-4E75-B6FB-0361FF4D09F7}"/>
+              </a:ext>
+            </a:extLst>
+          </p:cNvPr>
           <p:cNvGraphicFramePr/>
           <p:nvPr/>
         </p:nvGraphicFramePr>
@@ -3977,7 +5793,7 @@
         </p:xfrm>
         <a:graphic xmlns:a="http://schemas.openxmlformats.org/drawingml/2006/main">
           <a:graphicData uri="http://schemas.openxmlformats.org/drawingml/2006/chart">
-            <c:chart xmlns:r="http://schemas.openxmlformats.org/officeDocument/2006/relationships" xmlns:c="http://schemas.openxmlformats.org/drawingml/2006/chart" r:id="Rf9b45f0bca1849bf"/>
+            <c:chart xmlns:r="http://schemas.openxmlformats.org/officeDocument/2006/relationships" xmlns:c="http://schemas.openxmlformats.org/drawingml/2006/chart" r:id="Rd814ae8aeb1741e1"/>
           </a:graphicData>
         </a:graphic>
       </p:graphicFrame>
@@ -3986,7 +5802,7 @@
           <p:cNvPr id="4" name="">
             <a:extLst xmlns:a="http://schemas.openxmlformats.org/drawingml/2006/main">
               <a:ext uri="{FF2B5EF4-FFF2-40B4-BE49-F238E27FC236}">
-                <a16:creationId xmlns:a16="http://schemas.microsoft.com/office/drawing/2014/main" id="{330E83A2-59BB-4DD1-A549-C6716F596392}"/>
+                <a16:creationId xmlns:a16="http://schemas.microsoft.com/office/drawing/2014/main" id="{9F003387-EB0F-4CDB-942B-B63147D5DB6F}"/>
               </a:ext>
             </a:extLst>
           </p:cNvPr>
@@ -4016,7 +5832,18 @@
           <a:bodyPr xmlns:a="http://schemas.openxmlformats.org/drawingml/2006/main" anchor="t">
             <a:noAutofit/>
           </a:bodyPr>
-          <a:lstStyle xmlns:a="http://schemas.openxmlformats.org/drawingml/2006/main"/>
+          <a:lstStyle xmlns:a="http://schemas.openxmlformats.org/drawingml/2006/main">
+            <a:defPPr>
+              <a:defRPr sz="2250" b="1">
+                <a:solidFill>
+                  <a:srgbClr val="213744"/>
+                </a:solidFill>
+                <a:latin typeface="Arial"/>
+                <a:ea typeface="Arial"/>
+                <a:cs typeface="Arial"/>
+              </a:defRPr>
+            </a:defPPr>
+          </a:lstStyle>
           <a:p xmlns:a="http://schemas.openxmlformats.org/drawingml/2006/main">
             <a:pPr>
               <a:defRPr sz="2250" b="1">
@@ -4047,7 +5874,7 @@
           <p:cNvPr id="5" name="">
             <a:extLst xmlns:a="http://schemas.openxmlformats.org/drawingml/2006/main">
               <a:ext uri="{FF2B5EF4-FFF2-40B4-BE49-F238E27FC236}">
-                <a16:creationId xmlns:a16="http://schemas.microsoft.com/office/drawing/2014/main" id="{8546DB51-5BD9-44E2-B0CD-7EB5E514F1D9}"/>
+                <a16:creationId xmlns:a16="http://schemas.microsoft.com/office/drawing/2014/main" id="{742EE51F-07A0-49BE-9295-FBE6043852B4}"/>
               </a:ext>
             </a:extLst>
           </p:cNvPr>
@@ -4077,7 +5904,18 @@
           <a:bodyPr xmlns:a="http://schemas.openxmlformats.org/drawingml/2006/main" anchor="t">
             <a:noAutofit/>
           </a:bodyPr>
-          <a:lstStyle xmlns:a="http://schemas.openxmlformats.org/drawingml/2006/main"/>
+          <a:lstStyle xmlns:a="http://schemas.openxmlformats.org/drawingml/2006/main">
+            <a:defPPr>
+              <a:defRPr sz="2025" b="0">
+                <a:solidFill>
+                  <a:srgbClr val="213744"/>
+                </a:solidFill>
+                <a:latin typeface="Arial"/>
+                <a:ea typeface="Arial"/>
+                <a:cs typeface="Arial"/>
+              </a:defRPr>
+            </a:defPPr>
+          </a:lstStyle>
           <a:p xmlns:a="http://schemas.openxmlformats.org/drawingml/2006/main">
             <a:pPr>
               <a:defRPr sz="2025" b="0">
@@ -4108,7 +5946,7 @@
           <p:cNvPr id="6" name="">
             <a:extLst xmlns:a="http://schemas.openxmlformats.org/drawingml/2006/main">
               <a:ext uri="{FF2B5EF4-FFF2-40B4-BE49-F238E27FC236}">
-                <a16:creationId xmlns:a16="http://schemas.microsoft.com/office/drawing/2014/main" id="{140D5B93-DD20-4A49-AF59-955679803EFE}"/>
+                <a16:creationId xmlns:a16="http://schemas.microsoft.com/office/drawing/2014/main" id="{4FC0A719-5B98-47F6-801F-4507E801A28A}"/>
               </a:ext>
             </a:extLst>
           </p:cNvPr>
@@ -4138,7 +5976,18 @@
           <a:bodyPr xmlns:a="http://schemas.openxmlformats.org/drawingml/2006/main" anchor="t">
             <a:noAutofit/>
           </a:bodyPr>
-          <a:lstStyle xmlns:a="http://schemas.openxmlformats.org/drawingml/2006/main"/>
+          <a:lstStyle xmlns:a="http://schemas.openxmlformats.org/drawingml/2006/main">
+            <a:defPPr>
+              <a:defRPr sz="1800" b="0">
+                <a:solidFill>
+                  <a:srgbClr val="526B79"/>
+                </a:solidFill>
+                <a:latin typeface="Arial"/>
+                <a:ea typeface="Arial"/>
+                <a:cs typeface="Arial"/>
+              </a:defRPr>
+            </a:defPPr>
+          </a:lstStyle>
           <a:p xmlns:a="http://schemas.openxmlformats.org/drawingml/2006/main">
             <a:pPr>
               <a:defRPr sz="1800" b="0">
@@ -4167,7 +6016,7 @@
     </p:spTree>
     <p:extLst>
       <p:ext uri="{BB962C8B-B14F-4D97-AF65-F5344CB8AC3E}">
-        <p14:creationId xmlns:p14="http://schemas.microsoft.com/office/powerpoint/2010/main" val="1282733613"/>
+        <p14:creationId xmlns:p14="http://schemas.microsoft.com/office/powerpoint/2010/main" val="607872323"/>
       </p:ext>
     </p:extLst>
   </p:cSld>
@@ -4198,7 +6047,7 @@
           <p:cNvPr id="4" name="">
             <a:extLst xmlns:a="http://schemas.openxmlformats.org/drawingml/2006/main">
               <a:ext uri="{FF2B5EF4-FFF2-40B4-BE49-F238E27FC236}">
-                <a16:creationId xmlns:a16="http://schemas.microsoft.com/office/drawing/2014/main" id="{C6CACD5C-69DB-4C1C-843D-FC242C30A41C}"/>
+                <a16:creationId xmlns:a16="http://schemas.microsoft.com/office/drawing/2014/main" id="{2DBDE8B4-401F-4681-86EA-B0AAEF9035E2}"/>
               </a:ext>
             </a:extLst>
           </p:cNvPr>
@@ -4228,7 +6077,18 @@
           <a:bodyPr xmlns:a="http://schemas.openxmlformats.org/drawingml/2006/main" anchor="t">
             <a:noAutofit/>
           </a:bodyPr>
-          <a:lstStyle xmlns:a="http://schemas.openxmlformats.org/drawingml/2006/main"/>
+          <a:lstStyle xmlns:a="http://schemas.openxmlformats.org/drawingml/2006/main">
+            <a:defPPr>
+              <a:defRPr sz="3150" b="1">
+                <a:solidFill>
+                  <a:srgbClr val="213744"/>
+                </a:solidFill>
+                <a:latin typeface="Arial"/>
+                <a:ea typeface="Arial"/>
+                <a:cs typeface="Arial"/>
+              </a:defRPr>
+            </a:defPPr>
+          </a:lstStyle>
           <a:p xmlns:a="http://schemas.openxmlformats.org/drawingml/2006/main">
             <a:pPr>
               <a:defRPr sz="3150" b="1">
@@ -4256,7 +6116,13 @@
       </p:sp>
       <p:graphicFrame>
         <p:nvGraphicFramePr>
-          <p:cNvPr id="5" name=""/>
+          <p:cNvPr id="2" name="">
+            <a:extLst xmlns:a="http://schemas.openxmlformats.org/drawingml/2006/main">
+              <a:ext uri="{FF2B5EF4-FFF2-40B4-BE49-F238E27FC236}">
+                <a16:creationId xmlns:a16="http://schemas.microsoft.com/office/drawing/2014/main" id="{A0A6F905-2E35-4455-88D9-F3D667A020C3}"/>
+              </a:ext>
+            </a:extLst>
+          </p:cNvPr>
           <p:cNvGraphicFramePr/>
           <p:nvPr/>
         </p:nvGraphicFramePr>
@@ -4605,7 +6471,7 @@
           <p:cNvPr id="3" name="">
             <a:extLst xmlns:a="http://schemas.openxmlformats.org/drawingml/2006/main">
               <a:ext uri="{FF2B5EF4-FFF2-40B4-BE49-F238E27FC236}">
-                <a16:creationId xmlns:a16="http://schemas.microsoft.com/office/drawing/2014/main" id="{F33E548E-9C7B-4B7C-A013-CC3D7A758F76}"/>
+                <a16:creationId xmlns:a16="http://schemas.microsoft.com/office/drawing/2014/main" id="{B5918D31-1BFA-42CB-8361-4E5A1C15CE99}"/>
               </a:ext>
             </a:extLst>
           </p:cNvPr>
@@ -4635,7 +6501,18 @@
           <a:bodyPr xmlns:a="http://schemas.openxmlformats.org/drawingml/2006/main" anchor="t">
             <a:noAutofit/>
           </a:bodyPr>
-          <a:lstStyle xmlns:a="http://schemas.openxmlformats.org/drawingml/2006/main"/>
+          <a:lstStyle xmlns:a="http://schemas.openxmlformats.org/drawingml/2006/main">
+            <a:defPPr>
+              <a:defRPr sz="1950" b="0">
+                <a:solidFill>
+                  <a:srgbClr val="A25D20"/>
+                </a:solidFill>
+                <a:latin typeface="Arial"/>
+                <a:ea typeface="Arial"/>
+                <a:cs typeface="Arial"/>
+              </a:defRPr>
+            </a:defPPr>
+          </a:lstStyle>
           <a:p xmlns:a="http://schemas.openxmlformats.org/drawingml/2006/main">
             <a:pPr>
               <a:defRPr sz="1950" b="0">
@@ -4664,7 +6541,7 @@
     </p:spTree>
     <p:extLst>
       <p:ext uri="{BB962C8B-B14F-4D97-AF65-F5344CB8AC3E}">
-        <p14:creationId xmlns:p14="http://schemas.microsoft.com/office/powerpoint/2010/main" val="553023959"/>
+        <p14:creationId xmlns:p14="http://schemas.microsoft.com/office/powerpoint/2010/main" val="74984838"/>
       </p:ext>
     </p:extLst>
   </p:cSld>
@@ -4695,7 +6572,7 @@
           <p:cNvPr id="4" name="">
             <a:extLst xmlns:a="http://schemas.openxmlformats.org/drawingml/2006/main">
               <a:ext uri="{FF2B5EF4-FFF2-40B4-BE49-F238E27FC236}">
-                <a16:creationId xmlns:a16="http://schemas.microsoft.com/office/drawing/2014/main" id="{D9E6A118-D71B-4CE3-8E65-06471975CB2D}"/>
+                <a16:creationId xmlns:a16="http://schemas.microsoft.com/office/drawing/2014/main" id="{56924FCE-E771-4274-9C8A-8F437FFA3A46}"/>
               </a:ext>
             </a:extLst>
           </p:cNvPr>
@@ -4725,7 +6602,18 @@
           <a:bodyPr xmlns:a="http://schemas.openxmlformats.org/drawingml/2006/main" anchor="t">
             <a:noAutofit/>
           </a:bodyPr>
-          <a:lstStyle xmlns:a="http://schemas.openxmlformats.org/drawingml/2006/main"/>
+          <a:lstStyle xmlns:a="http://schemas.openxmlformats.org/drawingml/2006/main">
+            <a:defPPr>
+              <a:defRPr sz="3150" b="1">
+                <a:solidFill>
+                  <a:srgbClr val="213744"/>
+                </a:solidFill>
+                <a:latin typeface="Arial"/>
+                <a:ea typeface="Arial"/>
+                <a:cs typeface="Arial"/>
+              </a:defRPr>
+            </a:defPPr>
+          </a:lstStyle>
           <a:p xmlns:a="http://schemas.openxmlformats.org/drawingml/2006/main">
             <a:pPr>
               <a:defRPr sz="3150" b="1">
@@ -4753,7 +6641,13 @@
       </p:sp>
       <p:graphicFrame>
         <p:nvGraphicFramePr>
-          <p:cNvPr id="5" name=""/>
+          <p:cNvPr id="2" name="">
+            <a:extLst xmlns:a="http://schemas.openxmlformats.org/drawingml/2006/main">
+              <a:ext uri="{FF2B5EF4-FFF2-40B4-BE49-F238E27FC236}">
+                <a16:creationId xmlns:a16="http://schemas.microsoft.com/office/drawing/2014/main" id="{C8D4C97B-0688-47D3-9A28-EF2529166536}"/>
+              </a:ext>
+            </a:extLst>
+          </p:cNvPr>
           <p:cNvGraphicFramePr/>
           <p:nvPr/>
         </p:nvGraphicFramePr>
@@ -5102,7 +6996,7 @@
           <p:cNvPr id="3" name="">
             <a:extLst xmlns:a="http://schemas.openxmlformats.org/drawingml/2006/main">
               <a:ext uri="{FF2B5EF4-FFF2-40B4-BE49-F238E27FC236}">
-                <a16:creationId xmlns:a16="http://schemas.microsoft.com/office/drawing/2014/main" id="{E645BA15-B343-4965-9F47-7C08DCE5E54F}"/>
+                <a16:creationId xmlns:a16="http://schemas.microsoft.com/office/drawing/2014/main" id="{5E1EB3FB-1996-43D8-9924-A0DD436F2AAB}"/>
               </a:ext>
             </a:extLst>
           </p:cNvPr>
@@ -5132,7 +7026,18 @@
           <a:bodyPr xmlns:a="http://schemas.openxmlformats.org/drawingml/2006/main" anchor="t">
             <a:noAutofit/>
           </a:bodyPr>
-          <a:lstStyle xmlns:a="http://schemas.openxmlformats.org/drawingml/2006/main"/>
+          <a:lstStyle xmlns:a="http://schemas.openxmlformats.org/drawingml/2006/main">
+            <a:defPPr>
+              <a:defRPr sz="1950" b="0">
+                <a:solidFill>
+                  <a:srgbClr val="A25D20"/>
+                </a:solidFill>
+                <a:latin typeface="Arial"/>
+                <a:ea typeface="Arial"/>
+                <a:cs typeface="Arial"/>
+              </a:defRPr>
+            </a:defPPr>
+          </a:lstStyle>
           <a:p xmlns:a="http://schemas.openxmlformats.org/drawingml/2006/main">
             <a:pPr>
               <a:defRPr sz="1950" b="0">
@@ -5161,7 +7066,7 @@
     </p:spTree>
     <p:extLst>
       <p:ext uri="{BB962C8B-B14F-4D97-AF65-F5344CB8AC3E}">
-        <p14:creationId xmlns:p14="http://schemas.microsoft.com/office/powerpoint/2010/main" val="1333930309"/>
+        <p14:creationId xmlns:p14="http://schemas.microsoft.com/office/powerpoint/2010/main" val="1024770362"/>
       </p:ext>
     </p:extLst>
   </p:cSld>
@@ -5192,7 +7097,7 @@
           <p:cNvPr id="4" name="">
             <a:extLst xmlns:a="http://schemas.openxmlformats.org/drawingml/2006/main">
               <a:ext uri="{FF2B5EF4-FFF2-40B4-BE49-F238E27FC236}">
-                <a16:creationId xmlns:a16="http://schemas.microsoft.com/office/drawing/2014/main" id="{1FF94C11-2C5B-4AD9-820D-53930A4EBE64}"/>
+                <a16:creationId xmlns:a16="http://schemas.microsoft.com/office/drawing/2014/main" id="{74A59391-F3FC-44F9-87DD-9DD6A1A40D74}"/>
               </a:ext>
             </a:extLst>
           </p:cNvPr>
@@ -5222,7 +7127,18 @@
           <a:bodyPr xmlns:a="http://schemas.openxmlformats.org/drawingml/2006/main" anchor="t">
             <a:noAutofit/>
           </a:bodyPr>
-          <a:lstStyle xmlns:a="http://schemas.openxmlformats.org/drawingml/2006/main"/>
+          <a:lstStyle xmlns:a="http://schemas.openxmlformats.org/drawingml/2006/main">
+            <a:defPPr>
+              <a:defRPr sz="3150" b="1">
+                <a:solidFill>
+                  <a:srgbClr val="213744"/>
+                </a:solidFill>
+                <a:latin typeface="Arial"/>
+                <a:ea typeface="Arial"/>
+                <a:cs typeface="Arial"/>
+              </a:defRPr>
+            </a:defPPr>
+          </a:lstStyle>
           <a:p xmlns:a="http://schemas.openxmlformats.org/drawingml/2006/main">
             <a:pPr>
               <a:defRPr sz="3150" b="1">
@@ -5250,7 +7166,13 @@
       </p:sp>
       <p:graphicFrame>
         <p:nvGraphicFramePr>
-          <p:cNvPr id="5" name=""/>
+          <p:cNvPr id="2" name="">
+            <a:extLst xmlns:a="http://schemas.openxmlformats.org/drawingml/2006/main">
+              <a:ext uri="{FF2B5EF4-FFF2-40B4-BE49-F238E27FC236}">
+                <a16:creationId xmlns:a16="http://schemas.microsoft.com/office/drawing/2014/main" id="{6658C26E-BB19-41F0-80C1-917DCDB7B0BE}"/>
+              </a:ext>
+            </a:extLst>
+          </p:cNvPr>
           <p:cNvGraphicFramePr/>
           <p:nvPr/>
         </p:nvGraphicFramePr>
@@ -5579,7 +7501,7 @@
                           <a:ea typeface="Arial"/>
                           <a:cs typeface="Arial"/>
                         </a:rPr>
-                        <a:t>Original inputs and 40 executed source-file hashes remain unchanged. The immutable receipt identifies the executed content.</a:t>
+                        <a:t>Original inputs and all frozen execution files remained unchanged during this run. The immutable receipt identifies the exact executed content.</a:t>
                       </a:r>
                     </a:p>
                   </a:txBody>
@@ -5653,7 +7575,7 @@
           <p:cNvPr id="3" name="">
             <a:extLst xmlns:a="http://schemas.openxmlformats.org/drawingml/2006/main">
               <a:ext uri="{FF2B5EF4-FFF2-40B4-BE49-F238E27FC236}">
-                <a16:creationId xmlns:a16="http://schemas.microsoft.com/office/drawing/2014/main" id="{A9714003-9C38-468B-9DC0-AE8839511D4B}"/>
+                <a16:creationId xmlns:a16="http://schemas.microsoft.com/office/drawing/2014/main" id="{0C805AAC-28C6-492F-84CF-DBB3B771503D}"/>
               </a:ext>
             </a:extLst>
           </p:cNvPr>
@@ -5683,7 +7605,18 @@
           <a:bodyPr xmlns:a="http://schemas.openxmlformats.org/drawingml/2006/main" anchor="t">
             <a:noAutofit/>
           </a:bodyPr>
-          <a:lstStyle xmlns:a="http://schemas.openxmlformats.org/drawingml/2006/main"/>
+          <a:lstStyle xmlns:a="http://schemas.openxmlformats.org/drawingml/2006/main">
+            <a:defPPr>
+              <a:defRPr sz="1875" b="0">
+                <a:solidFill>
+                  <a:srgbClr val="526B79"/>
+                </a:solidFill>
+                <a:latin typeface="Arial"/>
+                <a:ea typeface="Arial"/>
+                <a:cs typeface="Arial"/>
+              </a:defRPr>
+            </a:defPPr>
+          </a:lstStyle>
           <a:p xmlns:a="http://schemas.openxmlformats.org/drawingml/2006/main">
             <a:pPr>
               <a:defRPr sz="1875" b="0">
@@ -5712,7 +7645,7 @@
     </p:spTree>
     <p:extLst>
       <p:ext uri="{BB962C8B-B14F-4D97-AF65-F5344CB8AC3E}">
-        <p14:creationId xmlns:p14="http://schemas.microsoft.com/office/powerpoint/2010/main" val="2045297964"/>
+        <p14:creationId xmlns:p14="http://schemas.microsoft.com/office/powerpoint/2010/main" val="115224191"/>
       </p:ext>
     </p:extLst>
   </p:cSld>
@@ -5743,7 +7676,7 @@
           <p:cNvPr id="5" name="">
             <a:extLst xmlns:a="http://schemas.openxmlformats.org/drawingml/2006/main">
               <a:ext uri="{FF2B5EF4-FFF2-40B4-BE49-F238E27FC236}">
-                <a16:creationId xmlns:a16="http://schemas.microsoft.com/office/drawing/2014/main" id="{39199EB5-27C0-4B6E-9A1B-AB8064662C93}"/>
+                <a16:creationId xmlns:a16="http://schemas.microsoft.com/office/drawing/2014/main" id="{51D3FA83-3CF0-4D29-80A1-A92E66F44436}"/>
               </a:ext>
             </a:extLst>
           </p:cNvPr>
@@ -5773,7 +7706,18 @@
           <a:bodyPr xmlns:a="http://schemas.openxmlformats.org/drawingml/2006/main" anchor="t">
             <a:noAutofit/>
           </a:bodyPr>
-          <a:lstStyle xmlns:a="http://schemas.openxmlformats.org/drawingml/2006/main"/>
+          <a:lstStyle xmlns:a="http://schemas.openxmlformats.org/drawingml/2006/main">
+            <a:defPPr>
+              <a:defRPr sz="3150" b="1">
+                <a:solidFill>
+                  <a:srgbClr val="213744"/>
+                </a:solidFill>
+                <a:latin typeface="Arial"/>
+                <a:ea typeface="Arial"/>
+                <a:cs typeface="Arial"/>
+              </a:defRPr>
+            </a:defPPr>
+          </a:lstStyle>
           <a:p xmlns:a="http://schemas.openxmlformats.org/drawingml/2006/main">
             <a:pPr>
               <a:defRPr sz="3150" b="1">
@@ -5804,7 +7748,7 @@
           <p:cNvPr id="2" name="">
             <a:extLst xmlns:a="http://schemas.openxmlformats.org/drawingml/2006/main">
               <a:ext uri="{FF2B5EF4-FFF2-40B4-BE49-F238E27FC236}">
-                <a16:creationId xmlns:a16="http://schemas.microsoft.com/office/drawing/2014/main" id="{A1EE7CC0-0196-4325-A82D-427C94BE25A1}"/>
+                <a16:creationId xmlns:a16="http://schemas.microsoft.com/office/drawing/2014/main" id="{47D4F09B-0FC0-4AEF-BCFF-648BA4FDC251}"/>
               </a:ext>
             </a:extLst>
           </p:cNvPr>
@@ -5834,7 +7778,18 @@
           <a:bodyPr xmlns:a="http://schemas.openxmlformats.org/drawingml/2006/main" anchor="t">
             <a:noAutofit/>
           </a:bodyPr>
-          <a:lstStyle xmlns:a="http://schemas.openxmlformats.org/drawingml/2006/main"/>
+          <a:lstStyle xmlns:a="http://schemas.openxmlformats.org/drawingml/2006/main">
+            <a:defPPr>
+              <a:defRPr sz="2325" b="0">
+                <a:solidFill>
+                  <a:srgbClr val="213744"/>
+                </a:solidFill>
+                <a:latin typeface="Arial"/>
+                <a:ea typeface="Arial"/>
+                <a:cs typeface="Arial"/>
+              </a:defRPr>
+            </a:defPPr>
+          </a:lstStyle>
           <a:p xmlns:a="http://schemas.openxmlformats.org/drawingml/2006/main">
             <a:pPr>
               <a:defRPr sz="2325" b="0">
@@ -5862,7 +7817,13 @@
       </p:sp>
       <p:graphicFrame>
         <p:nvGraphicFramePr>
-          <p:cNvPr id="7" name=""/>
+          <p:cNvPr id="3" name="">
+            <a:extLst xmlns:a="http://schemas.openxmlformats.org/drawingml/2006/main">
+              <a:ext uri="{FF2B5EF4-FFF2-40B4-BE49-F238E27FC236}">
+                <a16:creationId xmlns:a16="http://schemas.microsoft.com/office/drawing/2014/main" id="{5CF45E00-BF87-475F-B612-865502752FD2}"/>
+              </a:ext>
+            </a:extLst>
+          </p:cNvPr>
           <p:cNvGraphicFramePr/>
           <p:nvPr/>
         </p:nvGraphicFramePr>
@@ -6157,7 +8118,7 @@
           <p:cNvPr id="4" name="">
             <a:extLst xmlns:a="http://schemas.openxmlformats.org/drawingml/2006/main">
               <a:ext uri="{FF2B5EF4-FFF2-40B4-BE49-F238E27FC236}">
-                <a16:creationId xmlns:a16="http://schemas.microsoft.com/office/drawing/2014/main" id="{73D176F9-FF4E-4005-9001-608D76CF5949}"/>
+                <a16:creationId xmlns:a16="http://schemas.microsoft.com/office/drawing/2014/main" id="{AC9A4B84-0A44-491B-8109-BFFA354A6E4E}"/>
               </a:ext>
             </a:extLst>
           </p:cNvPr>
@@ -6187,7 +8148,18 @@
           <a:bodyPr xmlns:a="http://schemas.openxmlformats.org/drawingml/2006/main" anchor="t">
             <a:noAutofit/>
           </a:bodyPr>
-          <a:lstStyle xmlns:a="http://schemas.openxmlformats.org/drawingml/2006/main"/>
+          <a:lstStyle xmlns:a="http://schemas.openxmlformats.org/drawingml/2006/main">
+            <a:defPPr>
+              <a:defRPr sz="2025" b="0">
+                <a:solidFill>
+                  <a:srgbClr val="157C87"/>
+                </a:solidFill>
+                <a:latin typeface="Arial"/>
+                <a:ea typeface="Arial"/>
+                <a:cs typeface="Arial"/>
+              </a:defRPr>
+            </a:defPPr>
+          </a:lstStyle>
           <a:p xmlns:a="http://schemas.openxmlformats.org/drawingml/2006/main">
             <a:pPr>
               <a:defRPr sz="2025" b="0">
@@ -6216,7 +8188,7 @@
     </p:spTree>
     <p:extLst>
       <p:ext uri="{BB962C8B-B14F-4D97-AF65-F5344CB8AC3E}">
-        <p14:creationId xmlns:p14="http://schemas.microsoft.com/office/powerpoint/2010/main" val="1702470801"/>
+        <p14:creationId xmlns:p14="http://schemas.microsoft.com/office/powerpoint/2010/main" val="1186204746"/>
       </p:ext>
     </p:extLst>
   </p:cSld>
@@ -6247,7 +8219,7 @@
           <ns0:cNvPr id="9" name="">
             <ns1:extLst>
               <ns1:ext uri="{FF2B5EF4-FFF2-40B4-BE49-F238E27FC236}">
-                <ns2:creationId id="{1F0BDE01-7AF1-4660-85A6-40F7ED3F9B45}"/>
+                <ns2:creationId id="{A8997B19-FBF6-432E-9D97-F01C839DB4EB}"/>
               </ns1:ext>
             </ns1:extLst>
           </ns0:cNvPr>
@@ -6277,7 +8249,18 @@
           <ns1:bodyPr anchor="t">
             <ns1:noAutofit/>
           </ns1:bodyPr>
-          <ns1:lstStyle/>
+          <ns1:lstStyle>
+            <ns1:defPPr>
+              <ns1:defRPr sz="3150" b="1">
+                <ns1:solidFill>
+                  <ns1:srgbClr val="213744"/>
+                </ns1:solidFill>
+                <ns1:latin typeface="Arial"/>
+                <ns1:ea typeface="Arial"/>
+                <ns1:cs typeface="Arial"/>
+              </ns1:defRPr>
+            </ns1:defPPr>
+          </ns1:lstStyle>
           <ns1:p>
             <ns1:pPr>
               <ns1:defRPr sz="3150" b="1">
@@ -6308,7 +8291,7 @@
           <ns0:cNvPr id="2" name="">
             <ns1:extLst>
               <ns1:ext uri="{FF2B5EF4-FFF2-40B4-BE49-F238E27FC236}">
-                <ns2:creationId id="{A1A630AD-CBCB-4482-8963-EBEF2595E6EA}"/>
+                <ns2:creationId id="{A0046876-670D-44A8-BB36-C1818ACA27BE}"/>
               </ns1:ext>
             </ns1:extLst>
           </ns0:cNvPr>
@@ -6338,7 +8321,18 @@
           <ns1:bodyPr anchor="t">
             <ns1:noAutofit/>
           </ns1:bodyPr>
-          <ns1:lstStyle/>
+          <ns1:lstStyle>
+            <ns1:defPPr>
+              <ns1:defRPr sz="2325" b="1">
+                <ns1:solidFill>
+                  <ns1:srgbClr val="157C87"/>
+                </ns1:solidFill>
+                <ns1:latin typeface="Arial"/>
+                <ns1:ea typeface="Arial"/>
+                <ns1:cs typeface="Arial"/>
+              </ns1:defRPr>
+            </ns1:defPPr>
+          </ns1:lstStyle>
           <ns1:p>
             <ns1:pPr>
               <ns1:defRPr sz="2325" b="1">
@@ -6366,18 +8360,22 @@
       </ns0:sp>
       <ns0:pic>
         <ns0:nvPicPr>
-          <ns0:cNvPr id="11" name=""/>
+          <ns0:cNvPr id="3" name="">
+            <ns1:extLst>
+              <ns1:ext uri="{FF2B5EF4-FFF2-40B4-BE49-F238E27FC236}">
+                <ns2:creationId id="{AE6A5364-26FC-4894-B9BA-E8C98454E129}"/>
+              </ns1:ext>
+            </ns1:extLst>
+          </ns0:cNvPr>
           <ns0:cNvPicPr>
             <ns1:picLocks noChangeAspect="1"/>
           </ns0:cNvPicPr>
           <ns0:nvPr/>
         </ns0:nvPicPr>
         <ns0:blipFill>
-          <ns1:blip ns3:embed="R0a86b55bcb1d4937"/>
+          <ns1:blip ns3:embed="Rfd4a5a114129447e"/>
           <ns1:srcRect l="0" t="8974" r="0" b="33333"/>
-          <ns1:stretch>
-            <ns1:fillRect l="0" t="0" r="0" b="0"/>
-          </ns1:stretch>
+          <ns1:stretch/>
         </ns0:blipFill>
         <ns0:spPr>
           <ns1:xfrm>
@@ -6394,7 +8392,7 @@
           <ns0:cNvPr id="4" name="">
             <ns1:extLst>
               <ns1:ext uri="{FF2B5EF4-FFF2-40B4-BE49-F238E27FC236}">
-                <ns2:creationId id="{5E48D08A-A045-4D3A-9BAC-4B9A46661E0F}"/>
+                <ns2:creationId id="{793B4E92-1261-4548-9CFD-6623CC26C48C}"/>
               </ns1:ext>
             </ns1:extLst>
           </ns0:cNvPr>
@@ -6424,7 +8422,18 @@
           <ns1:bodyPr anchor="t">
             <ns1:noAutofit/>
           </ns1:bodyPr>
-          <ns1:lstStyle/>
+          <ns1:lstStyle>
+            <ns1:defPPr>
+              <ns1:defRPr sz="1650" b="1">
+                <ns1:solidFill>
+                  <ns1:srgbClr val="157C87"/>
+                </ns1:solidFill>
+                <ns1:latin typeface="Arial"/>
+                <ns1:ea typeface="Arial"/>
+                <ns1:cs typeface="Arial"/>
+              </ns1:defRPr>
+            </ns1:defPPr>
+          </ns1:lstStyle>
           <ns1:p>
             <ns1:pPr>
               <ns1:defRPr sz="1650" b="1">
@@ -6455,7 +8464,7 @@
           <ns0:cNvPr id="5" name="">
             <ns1:extLst>
               <ns1:ext uri="{FF2B5EF4-FFF2-40B4-BE49-F238E27FC236}">
-                <ns2:creationId id="{C5C3DED6-1B0B-45EB-93DF-5C1CFAE423A7}"/>
+                <ns2:creationId id="{B89751A4-573F-47A5-87F4-C1863A5E5A88}"/>
               </ns1:ext>
             </ns1:extLst>
           </ns0:cNvPr>
@@ -6485,7 +8494,18 @@
           <ns1:bodyPr anchor="t">
             <ns1:noAutofit/>
           </ns1:bodyPr>
-          <ns1:lstStyle/>
+          <ns1:lstStyle>
+            <ns1:defPPr>
+              <ns1:defRPr sz="1800" b="0">
+                <ns1:solidFill>
+                  <ns1:srgbClr val="213744"/>
+                </ns1:solidFill>
+                <ns1:latin typeface="Arial"/>
+                <ns1:ea typeface="Arial"/>
+                <ns1:cs typeface="Arial"/>
+              </ns1:defRPr>
+            </ns1:defPPr>
+          </ns1:lstStyle>
           <ns1:p>
             <ns1:pPr>
               <ns1:defRPr sz="1800" b="0">
@@ -6516,7 +8536,7 @@
           <ns0:cNvPr id="6" name="">
             <ns1:extLst>
               <ns1:ext uri="{FF2B5EF4-FFF2-40B4-BE49-F238E27FC236}">
-                <ns2:creationId id="{BECA3207-1A8E-4156-A0BA-786419882077}"/>
+                <ns2:creationId id="{691ADE80-F196-470B-B53E-A5698918D270}"/>
               </ns1:ext>
             </ns1:extLst>
           </ns0:cNvPr>
@@ -6546,7 +8566,18 @@
           <ns1:bodyPr anchor="t">
             <ns1:noAutofit/>
           </ns1:bodyPr>
-          <ns1:lstStyle/>
+          <ns1:lstStyle>
+            <ns1:defPPr>
+              <ns1:defRPr sz="1650" b="1">
+                <ns1:solidFill>
+                  <ns1:srgbClr val="157C87"/>
+                </ns1:solidFill>
+                <ns1:latin typeface="Arial"/>
+                <ns1:ea typeface="Arial"/>
+                <ns1:cs typeface="Arial"/>
+              </ns1:defRPr>
+            </ns1:defPPr>
+          </ns1:lstStyle>
           <ns1:p>
             <ns1:pPr>
               <ns1:defRPr sz="1650" b="1">
@@ -6577,7 +8608,7 @@
           <ns0:cNvPr id="7" name="">
             <ns1:extLst>
               <ns1:ext uri="{FF2B5EF4-FFF2-40B4-BE49-F238E27FC236}">
-                <ns2:creationId id="{09510A33-8CFE-40FC-88C7-EA923125CAFE}"/>
+                <ns2:creationId id="{88C1F53E-E920-409D-A9F0-FC162DDCA51F}"/>
               </ns1:ext>
             </ns1:extLst>
           </ns0:cNvPr>
@@ -6607,7 +8638,18 @@
           <ns1:bodyPr anchor="t">
             <ns1:noAutofit/>
           </ns1:bodyPr>
-          <ns1:lstStyle/>
+          <ns1:lstStyle>
+            <ns1:defPPr>
+              <ns1:defRPr sz="1800" b="0">
+                <ns1:solidFill>
+                  <ns1:srgbClr val="213744"/>
+                </ns1:solidFill>
+                <ns1:latin typeface="Arial"/>
+                <ns1:ea typeface="Arial"/>
+                <ns1:cs typeface="Arial"/>
+              </ns1:defRPr>
+            </ns1:defPPr>
+          </ns1:lstStyle>
           <ns1:p>
             <ns1:pPr>
               <ns1:defRPr sz="1800" b="0">
@@ -6638,7 +8680,7 @@
           <ns0:cNvPr id="8" name="">
             <ns1:extLst>
               <ns1:ext uri="{FF2B5EF4-FFF2-40B4-BE49-F238E27FC236}">
-                <ns2:creationId id="{77721CDB-FDDF-4B8C-A959-C946CE78599A}"/>
+                <ns2:creationId id="{F036CAFA-53D5-4192-8777-444138BA875A}"/>
               </ns1:ext>
             </ns1:extLst>
           </ns0:cNvPr>
@@ -6668,7 +8710,18 @@
           <ns1:bodyPr anchor="t">
             <ns1:noAutofit/>
           </ns1:bodyPr>
-          <ns1:lstStyle/>
+          <ns1:lstStyle>
+            <ns1:defPPr>
+              <ns1:defRPr sz="1350" b="0">
+                <ns1:solidFill>
+                  <ns1:srgbClr val="526B79"/>
+                </ns1:solidFill>
+                <ns1:latin typeface="Arial"/>
+                <ns1:ea typeface="Arial"/>
+                <ns1:cs typeface="Arial"/>
+              </ns1:defRPr>
+            </ns1:defPPr>
+          </ns1:lstStyle>
           <ns1:p>
             <ns1:pPr>
               <ns1:defRPr sz="1350" b="0">
@@ -6697,7 +8750,7 @@
     </ns0:spTree>
     <ns0:extLst>
       <ns0:ext uri="{BB962C8B-B14F-4D97-AF65-F5344CB8AC3E}">
-        <ns4:creationId val="1465094394"/>
+        <ns4:creationId val="342702757"/>
       </ns0:ext>
     </ns0:extLst>
   </ns0:cSld>
@@ -6728,7 +8781,7 @@
           <ns0:cNvPr id="9" name="">
             <ns1:extLst>
               <ns1:ext uri="{FF2B5EF4-FFF2-40B4-BE49-F238E27FC236}">
-                <ns2:creationId id="{1D47866D-759F-41D1-82C8-3A1A98332431}"/>
+                <ns2:creationId id="{660F4F99-9711-46BE-A86F-64F56A35CD52}"/>
               </ns1:ext>
             </ns1:extLst>
           </ns0:cNvPr>
@@ -6758,7 +8811,18 @@
           <ns1:bodyPr anchor="t">
             <ns1:noAutofit/>
           </ns1:bodyPr>
-          <ns1:lstStyle/>
+          <ns1:lstStyle>
+            <ns1:defPPr>
+              <ns1:defRPr sz="3150" b="1">
+                <ns1:solidFill>
+                  <ns1:srgbClr val="213744"/>
+                </ns1:solidFill>
+                <ns1:latin typeface="Arial"/>
+                <ns1:ea typeface="Arial"/>
+                <ns1:cs typeface="Arial"/>
+              </ns1:defRPr>
+            </ns1:defPPr>
+          </ns1:lstStyle>
           <ns1:p>
             <ns1:pPr>
               <ns1:defRPr sz="3150" b="1">
@@ -6789,7 +8853,7 @@
           <ns0:cNvPr id="2" name="">
             <ns1:extLst>
               <ns1:ext uri="{FF2B5EF4-FFF2-40B4-BE49-F238E27FC236}">
-                <ns2:creationId id="{F94DD4E3-18AF-44CA-B060-7E434F9767CA}"/>
+                <ns2:creationId id="{6FEFF846-2D8C-4E48-BAE8-B5619BDCC334}"/>
               </ns1:ext>
             </ns1:extLst>
           </ns0:cNvPr>
@@ -6819,7 +8883,18 @@
           <ns1:bodyPr anchor="t">
             <ns1:noAutofit/>
           </ns1:bodyPr>
-          <ns1:lstStyle/>
+          <ns1:lstStyle>
+            <ns1:defPPr>
+              <ns1:defRPr sz="2325" b="1">
+                <ns1:solidFill>
+                  <ns1:srgbClr val="157C87"/>
+                </ns1:solidFill>
+                <ns1:latin typeface="Arial"/>
+                <ns1:ea typeface="Arial"/>
+                <ns1:cs typeface="Arial"/>
+              </ns1:defRPr>
+            </ns1:defPPr>
+          </ns1:lstStyle>
           <ns1:p>
             <ns1:pPr>
               <ns1:defRPr sz="2325" b="1">
@@ -6847,18 +8922,22 @@
       </ns0:sp>
       <ns0:pic>
         <ns0:nvPicPr>
-          <ns0:cNvPr id="11" name=""/>
+          <ns0:cNvPr id="3" name="">
+            <ns1:extLst>
+              <ns1:ext uri="{FF2B5EF4-FFF2-40B4-BE49-F238E27FC236}">
+                <ns2:creationId id="{427A7AFA-4EE7-4987-B107-12D9E4F62684}"/>
+              </ns1:ext>
+            </ns1:extLst>
+          </ns0:cNvPr>
           <ns0:cNvPicPr>
             <ns1:picLocks noChangeAspect="1"/>
           </ns0:cNvPicPr>
           <ns0:nvPr/>
         </ns0:nvPicPr>
         <ns0:blipFill>
-          <ns1:blip ns3:embed="R89afa665a7ce42a7"/>
+          <ns1:blip ns3:embed="R46ca8c7b4f3c44ef"/>
           <ns1:srcRect l="0" t="8974" r="0" b="33333"/>
-          <ns1:stretch>
-            <ns1:fillRect l="0" t="0" r="0" b="0"/>
-          </ns1:stretch>
+          <ns1:stretch/>
         </ns0:blipFill>
         <ns0:spPr>
           <ns1:xfrm>
@@ -6875,7 +8954,7 @@
           <ns0:cNvPr id="4" name="">
             <ns1:extLst>
               <ns1:ext uri="{FF2B5EF4-FFF2-40B4-BE49-F238E27FC236}">
-                <ns2:creationId id="{45B4C72B-528D-4599-AC97-3E9D1573258F}"/>
+                <ns2:creationId id="{738DA97F-3CF6-42EA-AA2B-270B77F4A3E0}"/>
               </ns1:ext>
             </ns1:extLst>
           </ns0:cNvPr>
@@ -6905,7 +8984,18 @@
           <ns1:bodyPr anchor="t">
             <ns1:noAutofit/>
           </ns1:bodyPr>
-          <ns1:lstStyle/>
+          <ns1:lstStyle>
+            <ns1:defPPr>
+              <ns1:defRPr sz="1650" b="1">
+                <ns1:solidFill>
+                  <ns1:srgbClr val="157C87"/>
+                </ns1:solidFill>
+                <ns1:latin typeface="Arial"/>
+                <ns1:ea typeface="Arial"/>
+                <ns1:cs typeface="Arial"/>
+              </ns1:defRPr>
+            </ns1:defPPr>
+          </ns1:lstStyle>
           <ns1:p>
             <ns1:pPr>
               <ns1:defRPr sz="1650" b="1">
@@ -6936,7 +9026,7 @@
           <ns0:cNvPr id="5" name="">
             <ns1:extLst>
               <ns1:ext uri="{FF2B5EF4-FFF2-40B4-BE49-F238E27FC236}">
-                <ns2:creationId id="{160DD388-3033-44F2-A719-09DCA7E6D876}"/>
+                <ns2:creationId id="{8EC15DC7-B656-4DFA-AB7E-393AB3CC1B96}"/>
               </ns1:ext>
             </ns1:extLst>
           </ns0:cNvPr>
@@ -6966,7 +9056,18 @@
           <ns1:bodyPr anchor="t">
             <ns1:noAutofit/>
           </ns1:bodyPr>
-          <ns1:lstStyle/>
+          <ns1:lstStyle>
+            <ns1:defPPr>
+              <ns1:defRPr sz="1800" b="0">
+                <ns1:solidFill>
+                  <ns1:srgbClr val="213744"/>
+                </ns1:solidFill>
+                <ns1:latin typeface="Arial"/>
+                <ns1:ea typeface="Arial"/>
+                <ns1:cs typeface="Arial"/>
+              </ns1:defRPr>
+            </ns1:defPPr>
+          </ns1:lstStyle>
           <ns1:p>
             <ns1:pPr>
               <ns1:defRPr sz="1800" b="0">
@@ -6997,7 +9098,7 @@
           <ns0:cNvPr id="6" name="">
             <ns1:extLst>
               <ns1:ext uri="{FF2B5EF4-FFF2-40B4-BE49-F238E27FC236}">
-                <ns2:creationId id="{B3D3A38C-2F28-4328-BC82-F5F2BC2FED87}"/>
+                <ns2:creationId id="{D783CBEA-A742-47F5-BC74-1BA013814A04}"/>
               </ns1:ext>
             </ns1:extLst>
           </ns0:cNvPr>
@@ -7027,7 +9128,18 @@
           <ns1:bodyPr anchor="t">
             <ns1:noAutofit/>
           </ns1:bodyPr>
-          <ns1:lstStyle/>
+          <ns1:lstStyle>
+            <ns1:defPPr>
+              <ns1:defRPr sz="1650" b="1">
+                <ns1:solidFill>
+                  <ns1:srgbClr val="157C87"/>
+                </ns1:solidFill>
+                <ns1:latin typeface="Arial"/>
+                <ns1:ea typeface="Arial"/>
+                <ns1:cs typeface="Arial"/>
+              </ns1:defRPr>
+            </ns1:defPPr>
+          </ns1:lstStyle>
           <ns1:p>
             <ns1:pPr>
               <ns1:defRPr sz="1650" b="1">
@@ -7058,7 +9170,7 @@
           <ns0:cNvPr id="7" name="">
             <ns1:extLst>
               <ns1:ext uri="{FF2B5EF4-FFF2-40B4-BE49-F238E27FC236}">
-                <ns2:creationId id="{721F031B-8FD0-4558-A388-A73DB8B33D3F}"/>
+                <ns2:creationId id="{B845B4EC-CD2B-4090-8330-61420B51D03D}"/>
               </ns1:ext>
             </ns1:extLst>
           </ns0:cNvPr>
@@ -7088,7 +9200,18 @@
           <ns1:bodyPr anchor="t">
             <ns1:noAutofit/>
           </ns1:bodyPr>
-          <ns1:lstStyle/>
+          <ns1:lstStyle>
+            <ns1:defPPr>
+              <ns1:defRPr sz="1800" b="0">
+                <ns1:solidFill>
+                  <ns1:srgbClr val="213744"/>
+                </ns1:solidFill>
+                <ns1:latin typeface="Arial"/>
+                <ns1:ea typeface="Arial"/>
+                <ns1:cs typeface="Arial"/>
+              </ns1:defRPr>
+            </ns1:defPPr>
+          </ns1:lstStyle>
           <ns1:p>
             <ns1:pPr>
               <ns1:defRPr sz="1800" b="0">
@@ -7119,7 +9242,7 @@
           <ns0:cNvPr id="8" name="">
             <ns1:extLst>
               <ns1:ext uri="{FF2B5EF4-FFF2-40B4-BE49-F238E27FC236}">
-                <ns2:creationId id="{7C0F9179-650B-4F6F-9376-6B18B27173B8}"/>
+                <ns2:creationId id="{7D9C4843-0C26-4430-A117-03FF13E0D239}"/>
               </ns1:ext>
             </ns1:extLst>
           </ns0:cNvPr>
@@ -7149,7 +9272,18 @@
           <ns1:bodyPr anchor="t">
             <ns1:noAutofit/>
           </ns1:bodyPr>
-          <ns1:lstStyle/>
+          <ns1:lstStyle>
+            <ns1:defPPr>
+              <ns1:defRPr sz="1350" b="0">
+                <ns1:solidFill>
+                  <ns1:srgbClr val="526B79"/>
+                </ns1:solidFill>
+                <ns1:latin typeface="Arial"/>
+                <ns1:ea typeface="Arial"/>
+                <ns1:cs typeface="Arial"/>
+              </ns1:defRPr>
+            </ns1:defPPr>
+          </ns1:lstStyle>
           <ns1:p>
             <ns1:pPr>
               <ns1:defRPr sz="1350" b="0">
@@ -7178,7 +9312,7 @@
     </ns0:spTree>
     <ns0:extLst>
       <ns0:ext uri="{BB962C8B-B14F-4D97-AF65-F5344CB8AC3E}">
-        <ns4:creationId val="866545666"/>
+        <ns4:creationId val="912373193"/>
       </ns0:ext>
     </ns0:extLst>
   </ns0:cSld>
@@ -7209,7 +9343,7 @@
           <p:cNvPr id="8" name="">
             <a:extLst xmlns:a="http://schemas.openxmlformats.org/drawingml/2006/main">
               <a:ext uri="{FF2B5EF4-FFF2-40B4-BE49-F238E27FC236}">
-                <a16:creationId xmlns:a16="http://schemas.microsoft.com/office/drawing/2014/main" id="{4DDC8E45-3EDF-4367-83AF-C4D81A51BAE0}"/>
+                <a16:creationId xmlns:a16="http://schemas.microsoft.com/office/drawing/2014/main" id="{CC556289-84F8-4CB8-BF07-FAEA60A311E8}"/>
               </a:ext>
             </a:extLst>
           </p:cNvPr>
@@ -7239,7 +9373,18 @@
           <a:bodyPr xmlns:a="http://schemas.openxmlformats.org/drawingml/2006/main" anchor="t">
             <a:noAutofit/>
           </a:bodyPr>
-          <a:lstStyle xmlns:a="http://schemas.openxmlformats.org/drawingml/2006/main"/>
+          <a:lstStyle xmlns:a="http://schemas.openxmlformats.org/drawingml/2006/main">
+            <a:defPPr>
+              <a:defRPr sz="3150" b="1">
+                <a:solidFill>
+                  <a:srgbClr val="213744"/>
+                </a:solidFill>
+                <a:latin typeface="Arial"/>
+                <a:ea typeface="Arial"/>
+                <a:cs typeface="Arial"/>
+              </a:defRPr>
+            </a:defPPr>
+          </a:lstStyle>
           <a:p xmlns:a="http://schemas.openxmlformats.org/drawingml/2006/main">
             <a:pPr>
               <a:defRPr sz="3150" b="1">
@@ -7270,7 +9415,7 @@
           <p:cNvPr id="2" name="">
             <a:extLst xmlns:a="http://schemas.openxmlformats.org/drawingml/2006/main">
               <a:ext uri="{FF2B5EF4-FFF2-40B4-BE49-F238E27FC236}">
-                <a16:creationId xmlns:a16="http://schemas.microsoft.com/office/drawing/2014/main" id="{0EC0BCFA-550B-42CD-AEA1-5016A1D6D922}"/>
+                <a16:creationId xmlns:a16="http://schemas.microsoft.com/office/drawing/2014/main" id="{D60B97B2-4F20-47A1-AC76-79281264E868}"/>
               </a:ext>
             </a:extLst>
           </p:cNvPr>
@@ -7300,7 +9445,18 @@
           <a:bodyPr xmlns:a="http://schemas.openxmlformats.org/drawingml/2006/main" anchor="t">
             <a:noAutofit/>
           </a:bodyPr>
-          <a:lstStyle xmlns:a="http://schemas.openxmlformats.org/drawingml/2006/main"/>
+          <a:lstStyle xmlns:a="http://schemas.openxmlformats.org/drawingml/2006/main">
+            <a:defPPr>
+              <a:defRPr sz="2325" b="0">
+                <a:solidFill>
+                  <a:srgbClr val="213744"/>
+                </a:solidFill>
+                <a:latin typeface="Arial"/>
+                <a:ea typeface="Arial"/>
+                <a:cs typeface="Arial"/>
+              </a:defRPr>
+            </a:defPPr>
+          </a:lstStyle>
           <a:p xmlns:a="http://schemas.openxmlformats.org/drawingml/2006/main">
             <a:pPr>
               <a:defRPr sz="2325" b="0">
@@ -7331,7 +9487,7 @@
           <p:cNvPr id="3" name="">
             <a:extLst xmlns:a="http://schemas.openxmlformats.org/drawingml/2006/main">
               <a:ext uri="{FF2B5EF4-FFF2-40B4-BE49-F238E27FC236}">
-                <a16:creationId xmlns:a16="http://schemas.microsoft.com/office/drawing/2014/main" id="{332A35C9-60B7-4621-A27C-2ECB3E992B12}"/>
+                <a16:creationId xmlns:a16="http://schemas.microsoft.com/office/drawing/2014/main" id="{D7DC10D9-5E66-4882-B7E2-D5E55D31EAE2}"/>
               </a:ext>
             </a:extLst>
           </p:cNvPr>
@@ -7361,7 +9517,18 @@
           <a:bodyPr xmlns:a="http://schemas.openxmlformats.org/drawingml/2006/main" anchor="t">
             <a:noAutofit/>
           </a:bodyPr>
-          <a:lstStyle xmlns:a="http://schemas.openxmlformats.org/drawingml/2006/main"/>
+          <a:lstStyle xmlns:a="http://schemas.openxmlformats.org/drawingml/2006/main">
+            <a:defPPr>
+              <a:defRPr sz="1875" b="1">
+                <a:solidFill>
+                  <a:srgbClr val="157C87"/>
+                </a:solidFill>
+                <a:latin typeface="Arial"/>
+                <a:ea typeface="Arial"/>
+                <a:cs typeface="Arial"/>
+              </a:defRPr>
+            </a:defPPr>
+          </a:lstStyle>
           <a:p xmlns:a="http://schemas.openxmlformats.org/drawingml/2006/main">
             <a:pPr>
               <a:defRPr sz="1875" b="1">
@@ -7389,7 +9556,13 @@
       </p:sp>
       <p:graphicFrame>
         <p:nvGraphicFramePr>
-          <p:cNvPr id="11" name=""/>
+          <p:cNvPr id="4" name="">
+            <a:extLst xmlns:a="http://schemas.openxmlformats.org/drawingml/2006/main">
+              <a:ext uri="{FF2B5EF4-FFF2-40B4-BE49-F238E27FC236}">
+                <a16:creationId xmlns:a16="http://schemas.microsoft.com/office/drawing/2014/main" id="{D5D1D4AE-4C5D-4135-BE8E-D259CE924804}"/>
+              </a:ext>
+            </a:extLst>
+          </p:cNvPr>
           <p:cNvGraphicFramePr/>
           <p:nvPr/>
         </p:nvGraphicFramePr>
@@ -7735,7 +9908,7 @@
           <p:cNvPr id="5" name="">
             <a:extLst xmlns:a="http://schemas.openxmlformats.org/drawingml/2006/main">
               <a:ext uri="{FF2B5EF4-FFF2-40B4-BE49-F238E27FC236}">
-                <a16:creationId xmlns:a16="http://schemas.microsoft.com/office/drawing/2014/main" id="{3545969C-4C7C-4A06-A467-CCEEB07FBD8B}"/>
+                <a16:creationId xmlns:a16="http://schemas.microsoft.com/office/drawing/2014/main" id="{24BC7458-6C3C-4DCC-AC2B-509F1BDECCF4}"/>
               </a:ext>
             </a:extLst>
           </p:cNvPr>
@@ -7765,7 +9938,18 @@
           <a:bodyPr xmlns:a="http://schemas.openxmlformats.org/drawingml/2006/main" anchor="t">
             <a:noAutofit/>
           </a:bodyPr>
-          <a:lstStyle xmlns:a="http://schemas.openxmlformats.org/drawingml/2006/main"/>
+          <a:lstStyle xmlns:a="http://schemas.openxmlformats.org/drawingml/2006/main">
+            <a:defPPr>
+              <a:defRPr sz="1875" b="1">
+                <a:solidFill>
+                  <a:srgbClr val="157C87"/>
+                </a:solidFill>
+                <a:latin typeface="Arial"/>
+                <a:ea typeface="Arial"/>
+                <a:cs typeface="Arial"/>
+              </a:defRPr>
+            </a:defPPr>
+          </a:lstStyle>
           <a:p xmlns:a="http://schemas.openxmlformats.org/drawingml/2006/main">
             <a:pPr>
               <a:defRPr sz="1875" b="1">
@@ -7793,7 +9977,13 @@
       </p:sp>
       <p:graphicFrame>
         <p:nvGraphicFramePr>
-          <p:cNvPr id="13" name=""/>
+          <p:cNvPr id="6" name="">
+            <a:extLst xmlns:a="http://schemas.openxmlformats.org/drawingml/2006/main">
+              <a:ext uri="{FF2B5EF4-FFF2-40B4-BE49-F238E27FC236}">
+                <a16:creationId xmlns:a16="http://schemas.microsoft.com/office/drawing/2014/main" id="{36FD42DF-65F8-436F-A290-8B1D41FA9F6D}"/>
+              </a:ext>
+            </a:extLst>
+          </p:cNvPr>
           <p:cNvGraphicFramePr/>
           <p:nvPr/>
         </p:nvGraphicFramePr>
@@ -8139,7 +10329,7 @@
           <p:cNvPr id="7" name="">
             <a:extLst xmlns:a="http://schemas.openxmlformats.org/drawingml/2006/main">
               <a:ext uri="{FF2B5EF4-FFF2-40B4-BE49-F238E27FC236}">
-                <a16:creationId xmlns:a16="http://schemas.microsoft.com/office/drawing/2014/main" id="{60636990-EED8-4C09-ACC8-B14B6B99A8C9}"/>
+                <a16:creationId xmlns:a16="http://schemas.microsoft.com/office/drawing/2014/main" id="{4E918993-3FE6-46E1-8C8A-526DEB4D516F}"/>
               </a:ext>
             </a:extLst>
           </p:cNvPr>
@@ -8169,7 +10359,18 @@
           <a:bodyPr xmlns:a="http://schemas.openxmlformats.org/drawingml/2006/main" anchor="t">
             <a:noAutofit/>
           </a:bodyPr>
-          <a:lstStyle xmlns:a="http://schemas.openxmlformats.org/drawingml/2006/main"/>
+          <a:lstStyle xmlns:a="http://schemas.openxmlformats.org/drawingml/2006/main">
+            <a:defPPr>
+              <a:defRPr sz="1725" b="0">
+                <a:solidFill>
+                  <a:srgbClr val="526B79"/>
+                </a:solidFill>
+                <a:latin typeface="Arial"/>
+                <a:ea typeface="Arial"/>
+                <a:cs typeface="Arial"/>
+              </a:defRPr>
+            </a:defPPr>
+          </a:lstStyle>
           <a:p xmlns:a="http://schemas.openxmlformats.org/drawingml/2006/main">
             <a:pPr>
               <a:defRPr sz="1725" b="0">
@@ -8198,7 +10399,7 @@
     </p:spTree>
     <p:extLst>
       <p:ext uri="{BB962C8B-B14F-4D97-AF65-F5344CB8AC3E}">
-        <p14:creationId xmlns:p14="http://schemas.microsoft.com/office/powerpoint/2010/main" val="1673537037"/>
+        <p14:creationId xmlns:p14="http://schemas.microsoft.com/office/powerpoint/2010/main" val="1240854999"/>
       </p:ext>
     </p:extLst>
   </p:cSld>
@@ -8229,7 +10430,7 @@
           <p:cNvPr id="9" name="">
             <a:extLst xmlns:a="http://schemas.openxmlformats.org/drawingml/2006/main">
               <a:ext uri="{FF2B5EF4-FFF2-40B4-BE49-F238E27FC236}">
-                <a16:creationId xmlns:a16="http://schemas.microsoft.com/office/drawing/2014/main" id="{3BCDAC36-B3EC-46F0-B0CD-981978FB2DFC}"/>
+                <a16:creationId xmlns:a16="http://schemas.microsoft.com/office/drawing/2014/main" id="{1D7067A2-1238-4C49-B217-6691362A3C61}"/>
               </a:ext>
             </a:extLst>
           </p:cNvPr>
@@ -8259,7 +10460,18 @@
           <a:bodyPr xmlns:a="http://schemas.openxmlformats.org/drawingml/2006/main" anchor="t">
             <a:noAutofit/>
           </a:bodyPr>
-          <a:lstStyle xmlns:a="http://schemas.openxmlformats.org/drawingml/2006/main"/>
+          <a:lstStyle xmlns:a="http://schemas.openxmlformats.org/drawingml/2006/main">
+            <a:defPPr>
+              <a:defRPr sz="3150" b="1">
+                <a:solidFill>
+                  <a:srgbClr val="213744"/>
+                </a:solidFill>
+                <a:latin typeface="Arial"/>
+                <a:ea typeface="Arial"/>
+                <a:cs typeface="Arial"/>
+              </a:defRPr>
+            </a:defPPr>
+          </a:lstStyle>
           <a:p xmlns:a="http://schemas.openxmlformats.org/drawingml/2006/main">
             <a:pPr>
               <a:defRPr sz="3150" b="1">
@@ -8290,7 +10502,7 @@
           <p:cNvPr id="2" name="">
             <a:extLst xmlns:a="http://schemas.openxmlformats.org/drawingml/2006/main">
               <a:ext uri="{FF2B5EF4-FFF2-40B4-BE49-F238E27FC236}">
-                <a16:creationId xmlns:a16="http://schemas.microsoft.com/office/drawing/2014/main" id="{FA210D90-EDBA-4F16-809D-3687A9918C24}"/>
+                <a16:creationId xmlns:a16="http://schemas.microsoft.com/office/drawing/2014/main" id="{5A64ED0F-A8AD-4663-A6AF-4E0E8FA9B207}"/>
               </a:ext>
             </a:extLst>
           </p:cNvPr>
@@ -8320,7 +10532,18 @@
           <a:bodyPr xmlns:a="http://schemas.openxmlformats.org/drawingml/2006/main" anchor="t">
             <a:noAutofit/>
           </a:bodyPr>
-          <a:lstStyle xmlns:a="http://schemas.openxmlformats.org/drawingml/2006/main"/>
+          <a:lstStyle xmlns:a="http://schemas.openxmlformats.org/drawingml/2006/main">
+            <a:defPPr>
+              <a:defRPr sz="2325" b="1">
+                <a:solidFill>
+                  <a:srgbClr val="157C87"/>
+                </a:solidFill>
+                <a:latin typeface="Arial"/>
+                <a:ea typeface="Arial"/>
+                <a:cs typeface="Arial"/>
+              </a:defRPr>
+            </a:defPPr>
+          </a:lstStyle>
           <a:p xmlns:a="http://schemas.openxmlformats.org/drawingml/2006/main">
             <a:pPr>
               <a:defRPr sz="2325" b="1">
@@ -8348,14 +10571,20 @@
       </p:sp>
       <p:pic>
         <p:nvPicPr>
-          <p:cNvPr id="11" name=""/>
+          <p:cNvPr id="3" name="">
+            <a:extLst xmlns:a="http://schemas.openxmlformats.org/drawingml/2006/main">
+              <a:ext uri="{FF2B5EF4-FFF2-40B4-BE49-F238E27FC236}">
+                <a16:creationId xmlns:a16="http://schemas.microsoft.com/office/drawing/2014/main" id="{605AD69D-7903-42F5-AE7F-52959F8A7CE7}"/>
+              </a:ext>
+            </a:extLst>
+          </p:cNvPr>
           <p:cNvPicPr>
             <a:picLocks xmlns:a="http://schemas.openxmlformats.org/drawingml/2006/main" noChangeAspect="1"/>
           </p:cNvPicPr>
           <p:nvPr/>
         </p:nvPicPr>
         <p:blipFill>
-          <a:blip xmlns:r="http://schemas.openxmlformats.org/officeDocument/2006/relationships" xmlns:a="http://schemas.openxmlformats.org/drawingml/2006/main" r:embed="Redf0e614e70e4045"/>
+          <a:blip xmlns:r="http://schemas.openxmlformats.org/officeDocument/2006/relationships" xmlns:a="http://schemas.openxmlformats.org/drawingml/2006/main" r:embed="R8b7aa18c79314023"/>
           <a:stretch xmlns:a="http://schemas.openxmlformats.org/drawingml/2006/main"/>
         </p:blipFill>
         <p:spPr>
@@ -8373,7 +10602,7 @@
           <p:cNvPr id="4" name="">
             <a:extLst xmlns:a="http://schemas.openxmlformats.org/drawingml/2006/main">
               <a:ext uri="{FF2B5EF4-FFF2-40B4-BE49-F238E27FC236}">
-                <a16:creationId xmlns:a16="http://schemas.microsoft.com/office/drawing/2014/main" id="{9F297252-5C92-44C5-B5FC-8626F1E6F663}"/>
+                <a16:creationId xmlns:a16="http://schemas.microsoft.com/office/drawing/2014/main" id="{39EF8DE5-BCA5-4D0B-BCCB-28001A13F029}"/>
               </a:ext>
             </a:extLst>
           </p:cNvPr>
@@ -8403,7 +10632,18 @@
           <a:bodyPr xmlns:a="http://schemas.openxmlformats.org/drawingml/2006/main" anchor="t">
             <a:noAutofit/>
           </a:bodyPr>
-          <a:lstStyle xmlns:a="http://schemas.openxmlformats.org/drawingml/2006/main"/>
+          <a:lstStyle xmlns:a="http://schemas.openxmlformats.org/drawingml/2006/main">
+            <a:defPPr>
+              <a:defRPr sz="1650" b="1">
+                <a:solidFill>
+                  <a:srgbClr val="157C87"/>
+                </a:solidFill>
+                <a:latin typeface="Arial"/>
+                <a:ea typeface="Arial"/>
+                <a:cs typeface="Arial"/>
+              </a:defRPr>
+            </a:defPPr>
+          </a:lstStyle>
           <a:p xmlns:a="http://schemas.openxmlformats.org/drawingml/2006/main">
             <a:pPr>
               <a:defRPr sz="1650" b="1">
@@ -8434,7 +10674,7 @@
           <p:cNvPr id="5" name="">
             <a:extLst xmlns:a="http://schemas.openxmlformats.org/drawingml/2006/main">
               <a:ext uri="{FF2B5EF4-FFF2-40B4-BE49-F238E27FC236}">
-                <a16:creationId xmlns:a16="http://schemas.microsoft.com/office/drawing/2014/main" id="{6A4D40E1-2C6D-48CD-8AFD-4729A9320DBE}"/>
+                <a16:creationId xmlns:a16="http://schemas.microsoft.com/office/drawing/2014/main" id="{D65B6ED9-060B-4EA8-8B56-5835EBE71B34}"/>
               </a:ext>
             </a:extLst>
           </p:cNvPr>
@@ -8464,7 +10704,18 @@
           <a:bodyPr xmlns:a="http://schemas.openxmlformats.org/drawingml/2006/main" anchor="t">
             <a:noAutofit/>
           </a:bodyPr>
-          <a:lstStyle xmlns:a="http://schemas.openxmlformats.org/drawingml/2006/main"/>
+          <a:lstStyle xmlns:a="http://schemas.openxmlformats.org/drawingml/2006/main">
+            <a:defPPr>
+              <a:defRPr sz="1800" b="0">
+                <a:solidFill>
+                  <a:srgbClr val="213744"/>
+                </a:solidFill>
+                <a:latin typeface="Arial"/>
+                <a:ea typeface="Arial"/>
+                <a:cs typeface="Arial"/>
+              </a:defRPr>
+            </a:defPPr>
+          </a:lstStyle>
           <a:p xmlns:a="http://schemas.openxmlformats.org/drawingml/2006/main">
             <a:pPr>
               <a:defRPr sz="1800" b="0">
@@ -8495,7 +10746,7 @@
           <p:cNvPr id="6" name="">
             <a:extLst xmlns:a="http://schemas.openxmlformats.org/drawingml/2006/main">
               <a:ext uri="{FF2B5EF4-FFF2-40B4-BE49-F238E27FC236}">
-                <a16:creationId xmlns:a16="http://schemas.microsoft.com/office/drawing/2014/main" id="{82BE0FB3-CDFD-4E6D-B69C-C8797F8839C9}"/>
+                <a16:creationId xmlns:a16="http://schemas.microsoft.com/office/drawing/2014/main" id="{A159CD9D-9221-45D4-A770-A0324CBF5D5D}"/>
               </a:ext>
             </a:extLst>
           </p:cNvPr>
@@ -8525,7 +10776,18 @@
           <a:bodyPr xmlns:a="http://schemas.openxmlformats.org/drawingml/2006/main" anchor="t">
             <a:noAutofit/>
           </a:bodyPr>
-          <a:lstStyle xmlns:a="http://schemas.openxmlformats.org/drawingml/2006/main"/>
+          <a:lstStyle xmlns:a="http://schemas.openxmlformats.org/drawingml/2006/main">
+            <a:defPPr>
+              <a:defRPr sz="1650" b="1">
+                <a:solidFill>
+                  <a:srgbClr val="157C87"/>
+                </a:solidFill>
+                <a:latin typeface="Arial"/>
+                <a:ea typeface="Arial"/>
+                <a:cs typeface="Arial"/>
+              </a:defRPr>
+            </a:defPPr>
+          </a:lstStyle>
           <a:p xmlns:a="http://schemas.openxmlformats.org/drawingml/2006/main">
             <a:pPr>
               <a:defRPr sz="1650" b="1">
@@ -8556,7 +10818,7 @@
           <p:cNvPr id="7" name="">
             <a:extLst xmlns:a="http://schemas.openxmlformats.org/drawingml/2006/main">
               <a:ext uri="{FF2B5EF4-FFF2-40B4-BE49-F238E27FC236}">
-                <a16:creationId xmlns:a16="http://schemas.microsoft.com/office/drawing/2014/main" id="{0518B390-8E26-4DB1-9860-DA22F79FF516}"/>
+                <a16:creationId xmlns:a16="http://schemas.microsoft.com/office/drawing/2014/main" id="{A55F29CC-4D69-403A-929D-8D74CF66577C}"/>
               </a:ext>
             </a:extLst>
           </p:cNvPr>
@@ -8586,7 +10848,18 @@
           <a:bodyPr xmlns:a="http://schemas.openxmlformats.org/drawingml/2006/main" anchor="t">
             <a:noAutofit/>
           </a:bodyPr>
-          <a:lstStyle xmlns:a="http://schemas.openxmlformats.org/drawingml/2006/main"/>
+          <a:lstStyle xmlns:a="http://schemas.openxmlformats.org/drawingml/2006/main">
+            <a:defPPr>
+              <a:defRPr sz="1800" b="0">
+                <a:solidFill>
+                  <a:srgbClr val="213744"/>
+                </a:solidFill>
+                <a:latin typeface="Arial"/>
+                <a:ea typeface="Arial"/>
+                <a:cs typeface="Arial"/>
+              </a:defRPr>
+            </a:defPPr>
+          </a:lstStyle>
           <a:p xmlns:a="http://schemas.openxmlformats.org/drawingml/2006/main">
             <a:pPr>
               <a:defRPr sz="1800" b="0">
@@ -8617,7 +10890,7 @@
           <p:cNvPr id="8" name="">
             <a:extLst xmlns:a="http://schemas.openxmlformats.org/drawingml/2006/main">
               <a:ext uri="{FF2B5EF4-FFF2-40B4-BE49-F238E27FC236}">
-                <a16:creationId xmlns:a16="http://schemas.microsoft.com/office/drawing/2014/main" id="{FCC34774-083A-4083-92C2-DCEED74F4C35}"/>
+                <a16:creationId xmlns:a16="http://schemas.microsoft.com/office/drawing/2014/main" id="{93D7C810-AF82-4BDE-9908-6F9A539BCF85}"/>
               </a:ext>
             </a:extLst>
           </p:cNvPr>
@@ -8647,7 +10920,18 @@
           <a:bodyPr xmlns:a="http://schemas.openxmlformats.org/drawingml/2006/main" anchor="t">
             <a:noAutofit/>
           </a:bodyPr>
-          <a:lstStyle xmlns:a="http://schemas.openxmlformats.org/drawingml/2006/main"/>
+          <a:lstStyle xmlns:a="http://schemas.openxmlformats.org/drawingml/2006/main">
+            <a:defPPr>
+              <a:defRPr sz="1350" b="0">
+                <a:solidFill>
+                  <a:srgbClr val="526B79"/>
+                </a:solidFill>
+                <a:latin typeface="Arial"/>
+                <a:ea typeface="Arial"/>
+                <a:cs typeface="Arial"/>
+              </a:defRPr>
+            </a:defPPr>
+          </a:lstStyle>
           <a:p xmlns:a="http://schemas.openxmlformats.org/drawingml/2006/main">
             <a:pPr>
               <a:defRPr sz="1350" b="0">
@@ -8676,7 +10960,7 @@
     </p:spTree>
     <p:extLst>
       <p:ext uri="{BB962C8B-B14F-4D97-AF65-F5344CB8AC3E}">
-        <p14:creationId xmlns:p14="http://schemas.microsoft.com/office/powerpoint/2010/main" val="21936802"/>
+        <p14:creationId xmlns:p14="http://schemas.microsoft.com/office/powerpoint/2010/main" val="649580977"/>
       </p:ext>
     </p:extLst>
   </p:cSld>
@@ -8707,7 +10991,7 @@
           <p:cNvPr id="6" name="">
             <a:extLst xmlns:a="http://schemas.openxmlformats.org/drawingml/2006/main">
               <a:ext uri="{FF2B5EF4-FFF2-40B4-BE49-F238E27FC236}">
-                <a16:creationId xmlns:a16="http://schemas.microsoft.com/office/drawing/2014/main" id="{B7A1D6BF-29F3-4921-9653-80B7E93B38DB}"/>
+                <a16:creationId xmlns:a16="http://schemas.microsoft.com/office/drawing/2014/main" id="{92F94A92-7B97-49EE-97A3-DDFF37A06220}"/>
               </a:ext>
             </a:extLst>
           </p:cNvPr>
@@ -8737,7 +11021,18 @@
           <a:bodyPr xmlns:a="http://schemas.openxmlformats.org/drawingml/2006/main" anchor="t">
             <a:noAutofit/>
           </a:bodyPr>
-          <a:lstStyle xmlns:a="http://schemas.openxmlformats.org/drawingml/2006/main"/>
+          <a:lstStyle xmlns:a="http://schemas.openxmlformats.org/drawingml/2006/main">
+            <a:defPPr>
+              <a:defRPr sz="3150" b="1">
+                <a:solidFill>
+                  <a:srgbClr val="213744"/>
+                </a:solidFill>
+                <a:latin typeface="Arial"/>
+                <a:ea typeface="Arial"/>
+                <a:cs typeface="Arial"/>
+              </a:defRPr>
+            </a:defPPr>
+          </a:lstStyle>
           <a:p xmlns:a="http://schemas.openxmlformats.org/drawingml/2006/main">
             <a:pPr>
               <a:defRPr sz="3150" b="1">
@@ -8768,7 +11063,7 @@
           <p:cNvPr id="2" name="">
             <a:extLst xmlns:a="http://schemas.openxmlformats.org/drawingml/2006/main">
               <a:ext uri="{FF2B5EF4-FFF2-40B4-BE49-F238E27FC236}">
-                <a16:creationId xmlns:a16="http://schemas.microsoft.com/office/drawing/2014/main" id="{E941A44C-6538-493D-965B-44751BFE3B85}"/>
+                <a16:creationId xmlns:a16="http://schemas.microsoft.com/office/drawing/2014/main" id="{3B2E9724-D19A-4130-97E6-F1CBA533AE82}"/>
               </a:ext>
             </a:extLst>
           </p:cNvPr>
@@ -8798,7 +11093,18 @@
           <a:bodyPr xmlns:a="http://schemas.openxmlformats.org/drawingml/2006/main" anchor="t">
             <a:noAutofit/>
           </a:bodyPr>
-          <a:lstStyle xmlns:a="http://schemas.openxmlformats.org/drawingml/2006/main"/>
+          <a:lstStyle xmlns:a="http://schemas.openxmlformats.org/drawingml/2006/main">
+            <a:defPPr>
+              <a:defRPr sz="2250" b="0">
+                <a:solidFill>
+                  <a:srgbClr val="213744"/>
+                </a:solidFill>
+                <a:latin typeface="Arial"/>
+                <a:ea typeface="Arial"/>
+                <a:cs typeface="Arial"/>
+              </a:defRPr>
+            </a:defPPr>
+          </a:lstStyle>
           <a:p xmlns:a="http://schemas.openxmlformats.org/drawingml/2006/main">
             <a:pPr>
               <a:defRPr sz="2250" b="0">
@@ -8826,14 +11132,20 @@
       </p:sp>
       <p:pic>
         <p:nvPicPr>
-          <p:cNvPr id="8" name=""/>
+          <p:cNvPr id="3" name="">
+            <a:extLst xmlns:a="http://schemas.openxmlformats.org/drawingml/2006/main">
+              <a:ext uri="{FF2B5EF4-FFF2-40B4-BE49-F238E27FC236}">
+                <a16:creationId xmlns:a16="http://schemas.microsoft.com/office/drawing/2014/main" id="{E3811190-EFD5-4201-8BB4-8DEAF5D33217}"/>
+              </a:ext>
+            </a:extLst>
+          </p:cNvPr>
           <p:cNvPicPr>
             <a:picLocks xmlns:a="http://schemas.openxmlformats.org/drawingml/2006/main" noChangeAspect="1"/>
           </p:cNvPicPr>
           <p:nvPr/>
         </p:nvPicPr>
         <p:blipFill>
-          <a:blip xmlns:r="http://schemas.openxmlformats.org/officeDocument/2006/relationships" xmlns:a="http://schemas.openxmlformats.org/drawingml/2006/main" r:embed="R897db4e78b664be4"/>
+          <a:blip xmlns:r="http://schemas.openxmlformats.org/officeDocument/2006/relationships" xmlns:a="http://schemas.openxmlformats.org/drawingml/2006/main" r:embed="R0b1fc4eb1f484ab1"/>
           <a:stretch xmlns:a="http://schemas.openxmlformats.org/drawingml/2006/main"/>
         </p:blipFill>
         <p:spPr>
@@ -8851,7 +11163,7 @@
           <p:cNvPr id="4" name="">
             <a:extLst xmlns:a="http://schemas.openxmlformats.org/drawingml/2006/main">
               <a:ext uri="{FF2B5EF4-FFF2-40B4-BE49-F238E27FC236}">
-                <a16:creationId xmlns:a16="http://schemas.microsoft.com/office/drawing/2014/main" id="{86AA60C4-8265-423A-A194-DF0B059B5E91}"/>
+                <a16:creationId xmlns:a16="http://schemas.microsoft.com/office/drawing/2014/main" id="{6AA03224-CBEA-42BB-A679-8DE2455C4F33}"/>
               </a:ext>
             </a:extLst>
           </p:cNvPr>
@@ -8881,7 +11193,18 @@
           <a:bodyPr xmlns:a="http://schemas.openxmlformats.org/drawingml/2006/main" anchor="t">
             <a:noAutofit/>
           </a:bodyPr>
-          <a:lstStyle xmlns:a="http://schemas.openxmlformats.org/drawingml/2006/main"/>
+          <a:lstStyle xmlns:a="http://schemas.openxmlformats.org/drawingml/2006/main">
+            <a:defPPr>
+              <a:defRPr sz="1875" b="0">
+                <a:solidFill>
+                  <a:srgbClr val="157C87"/>
+                </a:solidFill>
+                <a:latin typeface="Arial"/>
+                <a:ea typeface="Arial"/>
+                <a:cs typeface="Arial"/>
+              </a:defRPr>
+            </a:defPPr>
+          </a:lstStyle>
           <a:p xmlns:a="http://schemas.openxmlformats.org/drawingml/2006/main">
             <a:pPr>
               <a:defRPr sz="1875" b="0">
@@ -8912,7 +11235,7 @@
           <p:cNvPr id="5" name="">
             <a:extLst xmlns:a="http://schemas.openxmlformats.org/drawingml/2006/main">
               <a:ext uri="{FF2B5EF4-FFF2-40B4-BE49-F238E27FC236}">
-                <a16:creationId xmlns:a16="http://schemas.microsoft.com/office/drawing/2014/main" id="{32E456A4-0744-49E6-B920-240DB7F858AC}"/>
+                <a16:creationId xmlns:a16="http://schemas.microsoft.com/office/drawing/2014/main" id="{D3FEA31A-B19F-4E19-BC6F-163054D8B2AC}"/>
               </a:ext>
             </a:extLst>
           </p:cNvPr>
@@ -8942,7 +11265,18 @@
           <a:bodyPr xmlns:a="http://schemas.openxmlformats.org/drawingml/2006/main" anchor="t">
             <a:noAutofit/>
           </a:bodyPr>
-          <a:lstStyle xmlns:a="http://schemas.openxmlformats.org/drawingml/2006/main"/>
+          <a:lstStyle xmlns:a="http://schemas.openxmlformats.org/drawingml/2006/main">
+            <a:defPPr>
+              <a:defRPr sz="1575" b="0">
+                <a:solidFill>
+                  <a:srgbClr val="526B79"/>
+                </a:solidFill>
+                <a:latin typeface="Arial"/>
+                <a:ea typeface="Arial"/>
+                <a:cs typeface="Arial"/>
+              </a:defRPr>
+            </a:defPPr>
+          </a:lstStyle>
           <a:p xmlns:a="http://schemas.openxmlformats.org/drawingml/2006/main">
             <a:pPr>
               <a:defRPr sz="1575" b="0">
@@ -8971,7 +11305,7 @@
     </p:spTree>
     <p:extLst>
       <p:ext uri="{BB962C8B-B14F-4D97-AF65-F5344CB8AC3E}">
-        <p14:creationId xmlns:p14="http://schemas.microsoft.com/office/powerpoint/2010/main" val="1483927669"/>
+        <p14:creationId xmlns:p14="http://schemas.microsoft.com/office/powerpoint/2010/main" val="1385028474"/>
       </p:ext>
     </p:extLst>
   </p:cSld>
@@ -9002,7 +11336,7 @@
           <p:cNvPr id="5" name="">
             <a:extLst xmlns:a="http://schemas.openxmlformats.org/drawingml/2006/main">
               <a:ext uri="{FF2B5EF4-FFF2-40B4-BE49-F238E27FC236}">
-                <a16:creationId xmlns:a16="http://schemas.microsoft.com/office/drawing/2014/main" id="{845606DD-E85F-4439-A659-D7F37649D321}"/>
+                <a16:creationId xmlns:a16="http://schemas.microsoft.com/office/drawing/2014/main" id="{FBC84943-F769-4E05-AAD7-18C5FF4A70A4}"/>
               </a:ext>
             </a:extLst>
           </p:cNvPr>
@@ -9032,7 +11366,18 @@
           <a:bodyPr xmlns:a="http://schemas.openxmlformats.org/drawingml/2006/main" anchor="t">
             <a:noAutofit/>
           </a:bodyPr>
-          <a:lstStyle xmlns:a="http://schemas.openxmlformats.org/drawingml/2006/main"/>
+          <a:lstStyle xmlns:a="http://schemas.openxmlformats.org/drawingml/2006/main">
+            <a:defPPr>
+              <a:defRPr sz="3150" b="1">
+                <a:solidFill>
+                  <a:srgbClr val="213744"/>
+                </a:solidFill>
+                <a:latin typeface="Arial"/>
+                <a:ea typeface="Arial"/>
+                <a:cs typeface="Arial"/>
+              </a:defRPr>
+            </a:defPPr>
+          </a:lstStyle>
           <a:p xmlns:a="http://schemas.openxmlformats.org/drawingml/2006/main">
             <a:pPr>
               <a:defRPr sz="3150" b="1">
@@ -9063,7 +11408,7 @@
           <p:cNvPr id="2" name="">
             <a:extLst xmlns:a="http://schemas.openxmlformats.org/drawingml/2006/main">
               <a:ext uri="{FF2B5EF4-FFF2-40B4-BE49-F238E27FC236}">
-                <a16:creationId xmlns:a16="http://schemas.microsoft.com/office/drawing/2014/main" id="{A31959C9-7C79-4230-9BAB-F0E5BDF73203}"/>
+                <a16:creationId xmlns:a16="http://schemas.microsoft.com/office/drawing/2014/main" id="{9FB0D66B-5E44-4497-ABA1-9A2BAB572953}"/>
               </a:ext>
             </a:extLst>
           </p:cNvPr>
@@ -9093,7 +11438,18 @@
           <a:bodyPr xmlns:a="http://schemas.openxmlformats.org/drawingml/2006/main" anchor="t">
             <a:noAutofit/>
           </a:bodyPr>
-          <a:lstStyle xmlns:a="http://schemas.openxmlformats.org/drawingml/2006/main"/>
+          <a:lstStyle xmlns:a="http://schemas.openxmlformats.org/drawingml/2006/main">
+            <a:defPPr>
+              <a:defRPr sz="2250" b="0">
+                <a:solidFill>
+                  <a:srgbClr val="213744"/>
+                </a:solidFill>
+                <a:latin typeface="Arial"/>
+                <a:ea typeface="Arial"/>
+                <a:cs typeface="Arial"/>
+              </a:defRPr>
+            </a:defPPr>
+          </a:lstStyle>
           <a:p xmlns:a="http://schemas.openxmlformats.org/drawingml/2006/main">
             <a:pPr>
               <a:defRPr sz="2250" b="0">
@@ -9121,7 +11477,13 @@
       </p:sp>
       <p:graphicFrame>
         <p:nvGraphicFramePr>
-          <p:cNvPr id="7" name=""/>
+          <p:cNvPr id="3" name="">
+            <a:extLst xmlns:a="http://schemas.openxmlformats.org/drawingml/2006/main">
+              <a:ext uri="{FF2B5EF4-FFF2-40B4-BE49-F238E27FC236}">
+                <a16:creationId xmlns:a16="http://schemas.microsoft.com/office/drawing/2014/main" id="{86ED5D3F-E0B4-4AB8-BE3A-3DFCB95D4261}"/>
+              </a:ext>
+            </a:extLst>
+          </p:cNvPr>
           <p:cNvGraphicFramePr/>
           <p:nvPr/>
         </p:nvGraphicFramePr>
@@ -9578,7 +11940,7 @@
           <p:cNvPr id="4" name="">
             <a:extLst xmlns:a="http://schemas.openxmlformats.org/drawingml/2006/main">
               <a:ext uri="{FF2B5EF4-FFF2-40B4-BE49-F238E27FC236}">
-                <a16:creationId xmlns:a16="http://schemas.microsoft.com/office/drawing/2014/main" id="{5DB8D73B-D817-4713-A8BF-E8F880D3ACBB}"/>
+                <a16:creationId xmlns:a16="http://schemas.microsoft.com/office/drawing/2014/main" id="{2A0D9D80-ECB5-4435-9575-E27A5110AD9C}"/>
               </a:ext>
             </a:extLst>
           </p:cNvPr>
@@ -9608,7 +11970,18 @@
           <a:bodyPr xmlns:a="http://schemas.openxmlformats.org/drawingml/2006/main" anchor="t">
             <a:noAutofit/>
           </a:bodyPr>
-          <a:lstStyle xmlns:a="http://schemas.openxmlformats.org/drawingml/2006/main"/>
+          <a:lstStyle xmlns:a="http://schemas.openxmlformats.org/drawingml/2006/main">
+            <a:defPPr>
+              <a:defRPr sz="1800" b="0">
+                <a:solidFill>
+                  <a:srgbClr val="A25D20"/>
+                </a:solidFill>
+                <a:latin typeface="Arial"/>
+                <a:ea typeface="Arial"/>
+                <a:cs typeface="Arial"/>
+              </a:defRPr>
+            </a:defPPr>
+          </a:lstStyle>
           <a:p xmlns:a="http://schemas.openxmlformats.org/drawingml/2006/main">
             <a:pPr>
               <a:defRPr sz="1800" b="0">
@@ -9637,7 +12010,7 @@
     </p:spTree>
     <p:extLst>
       <p:ext uri="{BB962C8B-B14F-4D97-AF65-F5344CB8AC3E}">
-        <p14:creationId xmlns:p14="http://schemas.microsoft.com/office/powerpoint/2010/main" val="207730346"/>
+        <p14:creationId xmlns:p14="http://schemas.microsoft.com/office/powerpoint/2010/main" val="1322089845"/>
       </p:ext>
     </p:extLst>
   </p:cSld>
@@ -9668,7 +12041,7 @@
           <p:cNvPr id="9" name="">
             <a:extLst xmlns:a="http://schemas.openxmlformats.org/drawingml/2006/main">
               <a:ext uri="{FF2B5EF4-FFF2-40B4-BE49-F238E27FC236}">
-                <a16:creationId xmlns:a16="http://schemas.microsoft.com/office/drawing/2014/main" id="{7A25B002-EAD8-4B23-BA99-32CE8FA8E78A}"/>
+                <a16:creationId xmlns:a16="http://schemas.microsoft.com/office/drawing/2014/main" id="{0D7063AB-BC4F-4F2A-88FD-5E32E18D89BB}"/>
               </a:ext>
             </a:extLst>
           </p:cNvPr>
@@ -9698,7 +12071,18 @@
           <a:bodyPr xmlns:a="http://schemas.openxmlformats.org/drawingml/2006/main" anchor="t">
             <a:noAutofit/>
           </a:bodyPr>
-          <a:lstStyle xmlns:a="http://schemas.openxmlformats.org/drawingml/2006/main"/>
+          <a:lstStyle xmlns:a="http://schemas.openxmlformats.org/drawingml/2006/main">
+            <a:defPPr>
+              <a:defRPr sz="3150" b="1">
+                <a:solidFill>
+                  <a:srgbClr val="213744"/>
+                </a:solidFill>
+                <a:latin typeface="Arial"/>
+                <a:ea typeface="Arial"/>
+                <a:cs typeface="Arial"/>
+              </a:defRPr>
+            </a:defPPr>
+          </a:lstStyle>
           <a:p xmlns:a="http://schemas.openxmlformats.org/drawingml/2006/main">
             <a:pPr>
               <a:defRPr sz="3150" b="1">
@@ -9729,7 +12113,7 @@
           <p:cNvPr id="2" name="">
             <a:extLst xmlns:a="http://schemas.openxmlformats.org/drawingml/2006/main">
               <a:ext uri="{FF2B5EF4-FFF2-40B4-BE49-F238E27FC236}">
-                <a16:creationId xmlns:a16="http://schemas.microsoft.com/office/drawing/2014/main" id="{F50FF2E1-905F-4606-932F-E110793F485D}"/>
+                <a16:creationId xmlns:a16="http://schemas.microsoft.com/office/drawing/2014/main" id="{88066F21-6D6C-4C7E-8B45-853AEE432EFC}"/>
               </a:ext>
             </a:extLst>
           </p:cNvPr>
@@ -9759,7 +12143,18 @@
           <a:bodyPr xmlns:a="http://schemas.openxmlformats.org/drawingml/2006/main" anchor="t">
             <a:noAutofit/>
           </a:bodyPr>
-          <a:lstStyle xmlns:a="http://schemas.openxmlformats.org/drawingml/2006/main"/>
+          <a:lstStyle xmlns:a="http://schemas.openxmlformats.org/drawingml/2006/main">
+            <a:defPPr>
+              <a:defRPr sz="2325" b="1">
+                <a:solidFill>
+                  <a:srgbClr val="157C87"/>
+                </a:solidFill>
+                <a:latin typeface="Arial"/>
+                <a:ea typeface="Arial"/>
+                <a:cs typeface="Arial"/>
+              </a:defRPr>
+            </a:defPPr>
+          </a:lstStyle>
           <a:p xmlns:a="http://schemas.openxmlformats.org/drawingml/2006/main">
             <a:pPr>
               <a:defRPr sz="2325" b="1">
@@ -9787,14 +12182,20 @@
       </p:sp>
       <p:pic>
         <p:nvPicPr>
-          <p:cNvPr id="11" name=""/>
+          <p:cNvPr id="3" name="">
+            <a:extLst xmlns:a="http://schemas.openxmlformats.org/drawingml/2006/main">
+              <a:ext uri="{FF2B5EF4-FFF2-40B4-BE49-F238E27FC236}">
+                <a16:creationId xmlns:a16="http://schemas.microsoft.com/office/drawing/2014/main" id="{DD8ACDB4-857F-4588-8F16-6B1EC37F6B3C}"/>
+              </a:ext>
+            </a:extLst>
+          </p:cNvPr>
           <p:cNvPicPr>
             <a:picLocks xmlns:a="http://schemas.openxmlformats.org/drawingml/2006/main" noChangeAspect="1"/>
           </p:cNvPicPr>
           <p:nvPr/>
         </p:nvPicPr>
         <p:blipFill>
-          <a:blip xmlns:r="http://schemas.openxmlformats.org/officeDocument/2006/relationships" xmlns:a="http://schemas.openxmlformats.org/drawingml/2006/main" r:embed="R870ab05cce7a4d3b"/>
+          <a:blip xmlns:r="http://schemas.openxmlformats.org/officeDocument/2006/relationships" xmlns:a="http://schemas.openxmlformats.org/drawingml/2006/main" r:embed="R84745d2bd1d74eac"/>
           <a:stretch xmlns:a="http://schemas.openxmlformats.org/drawingml/2006/main"/>
         </p:blipFill>
         <p:spPr>
@@ -9812,7 +12213,7 @@
           <p:cNvPr id="4" name="">
             <a:extLst xmlns:a="http://schemas.openxmlformats.org/drawingml/2006/main">
               <a:ext uri="{FF2B5EF4-FFF2-40B4-BE49-F238E27FC236}">
-                <a16:creationId xmlns:a16="http://schemas.microsoft.com/office/drawing/2014/main" id="{DB989FB5-58AE-4441-A800-DE59C77B8123}"/>
+                <a16:creationId xmlns:a16="http://schemas.microsoft.com/office/drawing/2014/main" id="{84C2E3AA-F4C1-4153-8B64-46CD28C78285}"/>
               </a:ext>
             </a:extLst>
           </p:cNvPr>
@@ -9842,7 +12243,18 @@
           <a:bodyPr xmlns:a="http://schemas.openxmlformats.org/drawingml/2006/main" anchor="t">
             <a:noAutofit/>
           </a:bodyPr>
-          <a:lstStyle xmlns:a="http://schemas.openxmlformats.org/drawingml/2006/main"/>
+          <a:lstStyle xmlns:a="http://schemas.openxmlformats.org/drawingml/2006/main">
+            <a:defPPr>
+              <a:defRPr sz="1650" b="1">
+                <a:solidFill>
+                  <a:srgbClr val="157C87"/>
+                </a:solidFill>
+                <a:latin typeface="Arial"/>
+                <a:ea typeface="Arial"/>
+                <a:cs typeface="Arial"/>
+              </a:defRPr>
+            </a:defPPr>
+          </a:lstStyle>
           <a:p xmlns:a="http://schemas.openxmlformats.org/drawingml/2006/main">
             <a:pPr>
               <a:defRPr sz="1650" b="1">
@@ -9873,7 +12285,7 @@
           <p:cNvPr id="5" name="">
             <a:extLst xmlns:a="http://schemas.openxmlformats.org/drawingml/2006/main">
               <a:ext uri="{FF2B5EF4-FFF2-40B4-BE49-F238E27FC236}">
-                <a16:creationId xmlns:a16="http://schemas.microsoft.com/office/drawing/2014/main" id="{336F84FC-9469-4077-BC95-327135DFC544}"/>
+                <a16:creationId xmlns:a16="http://schemas.microsoft.com/office/drawing/2014/main" id="{5132ECD4-A1D6-407E-9CA4-303E7CCE946A}"/>
               </a:ext>
             </a:extLst>
           </p:cNvPr>
@@ -9903,7 +12315,18 @@
           <a:bodyPr xmlns:a="http://schemas.openxmlformats.org/drawingml/2006/main" anchor="t">
             <a:noAutofit/>
           </a:bodyPr>
-          <a:lstStyle xmlns:a="http://schemas.openxmlformats.org/drawingml/2006/main"/>
+          <a:lstStyle xmlns:a="http://schemas.openxmlformats.org/drawingml/2006/main">
+            <a:defPPr>
+              <a:defRPr sz="1800" b="0">
+                <a:solidFill>
+                  <a:srgbClr val="213744"/>
+                </a:solidFill>
+                <a:latin typeface="Arial"/>
+                <a:ea typeface="Arial"/>
+                <a:cs typeface="Arial"/>
+              </a:defRPr>
+            </a:defPPr>
+          </a:lstStyle>
           <a:p xmlns:a="http://schemas.openxmlformats.org/drawingml/2006/main">
             <a:pPr>
               <a:defRPr sz="1800" b="0">
@@ -9934,7 +12357,7 @@
           <p:cNvPr id="6" name="">
             <a:extLst xmlns:a="http://schemas.openxmlformats.org/drawingml/2006/main">
               <a:ext uri="{FF2B5EF4-FFF2-40B4-BE49-F238E27FC236}">
-                <a16:creationId xmlns:a16="http://schemas.microsoft.com/office/drawing/2014/main" id="{D0B963D7-8CA9-4A25-B988-87AC88568197}"/>
+                <a16:creationId xmlns:a16="http://schemas.microsoft.com/office/drawing/2014/main" id="{140DEB75-B3B2-4BAF-9281-2EA3B52C3D96}"/>
               </a:ext>
             </a:extLst>
           </p:cNvPr>
@@ -9964,7 +12387,18 @@
           <a:bodyPr xmlns:a="http://schemas.openxmlformats.org/drawingml/2006/main" anchor="t">
             <a:noAutofit/>
           </a:bodyPr>
-          <a:lstStyle xmlns:a="http://schemas.openxmlformats.org/drawingml/2006/main"/>
+          <a:lstStyle xmlns:a="http://schemas.openxmlformats.org/drawingml/2006/main">
+            <a:defPPr>
+              <a:defRPr sz="1650" b="1">
+                <a:solidFill>
+                  <a:srgbClr val="157C87"/>
+                </a:solidFill>
+                <a:latin typeface="Arial"/>
+                <a:ea typeface="Arial"/>
+                <a:cs typeface="Arial"/>
+              </a:defRPr>
+            </a:defPPr>
+          </a:lstStyle>
           <a:p xmlns:a="http://schemas.openxmlformats.org/drawingml/2006/main">
             <a:pPr>
               <a:defRPr sz="1650" b="1">
@@ -9995,7 +12429,7 @@
           <p:cNvPr id="7" name="">
             <a:extLst xmlns:a="http://schemas.openxmlformats.org/drawingml/2006/main">
               <a:ext uri="{FF2B5EF4-FFF2-40B4-BE49-F238E27FC236}">
-                <a16:creationId xmlns:a16="http://schemas.microsoft.com/office/drawing/2014/main" id="{F293E2F9-963C-468E-B39C-C0FE9B8B7717}"/>
+                <a16:creationId xmlns:a16="http://schemas.microsoft.com/office/drawing/2014/main" id="{4E2D8C1C-C6BC-4EE3-BB28-85F3AB4B0F5D}"/>
               </a:ext>
             </a:extLst>
           </p:cNvPr>
@@ -10025,7 +12459,18 @@
           <a:bodyPr xmlns:a="http://schemas.openxmlformats.org/drawingml/2006/main" anchor="t">
             <a:noAutofit/>
           </a:bodyPr>
-          <a:lstStyle xmlns:a="http://schemas.openxmlformats.org/drawingml/2006/main"/>
+          <a:lstStyle xmlns:a="http://schemas.openxmlformats.org/drawingml/2006/main">
+            <a:defPPr>
+              <a:defRPr sz="1800" b="0">
+                <a:solidFill>
+                  <a:srgbClr val="213744"/>
+                </a:solidFill>
+                <a:latin typeface="Arial"/>
+                <a:ea typeface="Arial"/>
+                <a:cs typeface="Arial"/>
+              </a:defRPr>
+            </a:defPPr>
+          </a:lstStyle>
           <a:p xmlns:a="http://schemas.openxmlformats.org/drawingml/2006/main">
             <a:pPr>
               <a:defRPr sz="1800" b="0">
@@ -10056,7 +12501,7 @@
           <p:cNvPr id="8" name="">
             <a:extLst xmlns:a="http://schemas.openxmlformats.org/drawingml/2006/main">
               <a:ext uri="{FF2B5EF4-FFF2-40B4-BE49-F238E27FC236}">
-                <a16:creationId xmlns:a16="http://schemas.microsoft.com/office/drawing/2014/main" id="{8AEB2282-640A-46FB-8182-B21587C78532}"/>
+                <a16:creationId xmlns:a16="http://schemas.microsoft.com/office/drawing/2014/main" id="{F024C352-014E-4C70-BF26-0543EEF606AF}"/>
               </a:ext>
             </a:extLst>
           </p:cNvPr>
@@ -10086,7 +12531,18 @@
           <a:bodyPr xmlns:a="http://schemas.openxmlformats.org/drawingml/2006/main" anchor="t">
             <a:noAutofit/>
           </a:bodyPr>
-          <a:lstStyle xmlns:a="http://schemas.openxmlformats.org/drawingml/2006/main"/>
+          <a:lstStyle xmlns:a="http://schemas.openxmlformats.org/drawingml/2006/main">
+            <a:defPPr>
+              <a:defRPr sz="1350" b="0">
+                <a:solidFill>
+                  <a:srgbClr val="526B79"/>
+                </a:solidFill>
+                <a:latin typeface="Arial"/>
+                <a:ea typeface="Arial"/>
+                <a:cs typeface="Arial"/>
+              </a:defRPr>
+            </a:defPPr>
+          </a:lstStyle>
           <a:p xmlns:a="http://schemas.openxmlformats.org/drawingml/2006/main">
             <a:pPr>
               <a:defRPr sz="1350" b="0">
@@ -10115,7 +12571,7 @@
     </p:spTree>
     <p:extLst>
       <p:ext uri="{BB962C8B-B14F-4D97-AF65-F5344CB8AC3E}">
-        <p14:creationId xmlns:p14="http://schemas.microsoft.com/office/powerpoint/2010/main" val="1544593935"/>
+        <p14:creationId xmlns:p14="http://schemas.microsoft.com/office/powerpoint/2010/main" val="1721608692"/>
       </p:ext>
     </p:extLst>
   </p:cSld>
@@ -10163,16 +12619,16 @@
         <a:srgbClr val="96607D"/>
       </a:folHlink>
     </a:clrScheme>
-    <a:fontScheme name="Office">
+    <a:fontScheme name="">
       <a:majorFont>
-        <a:latin typeface="Calibri Light"/>
-        <a:ea typeface="Calibri Light"/>
-        <a:cs typeface="Calibri Light"/>
+        <a:latin typeface="Aptos"/>
+        <a:ea typeface=""/>
+        <a:cs typeface=""/>
       </a:majorFont>
       <a:minorFont>
-        <a:latin typeface="Calibri"/>
-        <a:ea typeface="Calibri"/>
-        <a:cs typeface="Calibri"/>
+        <a:latin typeface="Aptos"/>
+        <a:ea typeface=""/>
+        <a:cs typeface=""/>
       </a:minorFont>
     </a:fontScheme>
     <a:fmtScheme name="ChatGPT">

--- a/extras/usd/examples/usdGeospatialBuild/delivery/geospatial-build.pptx
+++ b/extras/usd/examples/usdGeospatialBuild/delivery/geospatial-build.pptx
@@ -2,26 +2,26 @@
 <file path=ppt/presentation.xml><?xml version="1.0" encoding="utf-8"?>
 <p:presentation xmlns:p="http://schemas.openxmlformats.org/presentationml/2006/main">
   <p:sldMasterIdLst>
-    <p:sldMasterId xmlns:r="http://schemas.openxmlformats.org/officeDocument/2006/relationships" id="2147483648" r:id="R03740ff4bb0e4a2e"/>
+    <p:sldMasterId xmlns:r="http://schemas.openxmlformats.org/officeDocument/2006/relationships" id="2147483648" r:id="Rdb7e2e0cc0f74f48"/>
   </p:sldMasterIdLst>
   <p:notesMasterIdLst>
-    <p:notesMasterId xmlns:r="http://schemas.openxmlformats.org/officeDocument/2006/relationships" r:id="Rcebec120b52b408f"/>
+    <p:notesMasterId xmlns:r="http://schemas.openxmlformats.org/officeDocument/2006/relationships" r:id="R040f136531de4a88"/>
   </p:notesMasterIdLst>
   <p:sldIdLst>
-    <p:sldId xmlns:r="http://schemas.openxmlformats.org/officeDocument/2006/relationships" id="256" r:id="Rc336eeb4ab154cb7"/>
-    <p:sldId xmlns:r="http://schemas.openxmlformats.org/officeDocument/2006/relationships" id="257" r:id="R530cc6729af3476f"/>
-    <p:sldId xmlns:r="http://schemas.openxmlformats.org/officeDocument/2006/relationships" id="258" r:id="R4c868b37a97a46b6"/>
-    <p:sldId xmlns:r="http://schemas.openxmlformats.org/officeDocument/2006/relationships" id="259" r:id="R42cefb046e254832"/>
-    <p:sldId xmlns:r="http://schemas.openxmlformats.org/officeDocument/2006/relationships" id="260" r:id="R630202b3d46b4c4d"/>
-    <p:sldId xmlns:r="http://schemas.openxmlformats.org/officeDocument/2006/relationships" id="261" r:id="R4334d98dc21d41e8"/>
-    <p:sldId xmlns:r="http://schemas.openxmlformats.org/officeDocument/2006/relationships" id="262" r:id="R0880b9c5649743a4"/>
-    <p:sldId xmlns:r="http://schemas.openxmlformats.org/officeDocument/2006/relationships" id="263" r:id="R7ca3e0a0e81d4017"/>
-    <p:sldId xmlns:r="http://schemas.openxmlformats.org/officeDocument/2006/relationships" id="264" r:id="Rf0815b3a734248e1"/>
-    <p:sldId xmlns:r="http://schemas.openxmlformats.org/officeDocument/2006/relationships" id="265" r:id="R8cc4889ab0bb4c16"/>
-    <p:sldId xmlns:r="http://schemas.openxmlformats.org/officeDocument/2006/relationships" id="266" r:id="R7cb2d114c0f44b93"/>
-    <p:sldId xmlns:r="http://schemas.openxmlformats.org/officeDocument/2006/relationships" id="267" r:id="R57259f88cb5e4f0c"/>
-    <p:sldId xmlns:r="http://schemas.openxmlformats.org/officeDocument/2006/relationships" id="268" r:id="R3d73954d34c44e59"/>
-    <p:sldId xmlns:r="http://schemas.openxmlformats.org/officeDocument/2006/relationships" id="269" r:id="R898cdd03f6c34f21"/>
+    <p:sldId xmlns:r="http://schemas.openxmlformats.org/officeDocument/2006/relationships" id="256" r:id="R97802bcd5ce04758"/>
+    <p:sldId xmlns:r="http://schemas.openxmlformats.org/officeDocument/2006/relationships" id="257" r:id="Rbfd173ff249e4525"/>
+    <p:sldId xmlns:r="http://schemas.openxmlformats.org/officeDocument/2006/relationships" id="258" r:id="R99a4a70af04f4271"/>
+    <p:sldId xmlns:r="http://schemas.openxmlformats.org/officeDocument/2006/relationships" id="259" r:id="R90ea7b0f14d44179"/>
+    <p:sldId xmlns:r="http://schemas.openxmlformats.org/officeDocument/2006/relationships" id="260" r:id="R0fe1607c7ea646ba"/>
+    <p:sldId xmlns:r="http://schemas.openxmlformats.org/officeDocument/2006/relationships" id="261" r:id="R6ecd547532664220"/>
+    <p:sldId xmlns:r="http://schemas.openxmlformats.org/officeDocument/2006/relationships" id="262" r:id="R75eb8b4bfe754741"/>
+    <p:sldId xmlns:r="http://schemas.openxmlformats.org/officeDocument/2006/relationships" id="263" r:id="R4060aa22fcc84108"/>
+    <p:sldId xmlns:r="http://schemas.openxmlformats.org/officeDocument/2006/relationships" id="264" r:id="Ra9b805987d6e4d05"/>
+    <p:sldId xmlns:r="http://schemas.openxmlformats.org/officeDocument/2006/relationships" id="265" r:id="Rf4ec0743b14e4da1"/>
+    <p:sldId xmlns:r="http://schemas.openxmlformats.org/officeDocument/2006/relationships" id="266" r:id="R1c2206ef310c4212"/>
+    <p:sldId xmlns:r="http://schemas.openxmlformats.org/officeDocument/2006/relationships" id="267" r:id="R0142330e72d94e4c"/>
+    <p:sldId xmlns:r="http://schemas.openxmlformats.org/officeDocument/2006/relationships" id="268" r:id="R4d28be993475403c"/>
+    <p:sldId xmlns:r="http://schemas.openxmlformats.org/officeDocument/2006/relationships" id="269" r:id="Rb04c1697162b446f"/>
   </p:sldIdLst>
   <p:sldSz cx="12192000" cy="6858000"/>
   <p:notesSz cx="6858000" cy="9144000"/>
@@ -455,7 +455,7 @@
           <a:lstStyle xmlns:a="http://schemas.openxmlformats.org/drawingml/2006/main"/>
           <a:p xmlns:a="http://schemas.openxmlformats.org/drawingml/2006/main">
             <a:r>
-              <a:t>{"section":"Assessment of the proposal","status":[["Proposal definitions","The candidate specifies inputs and evaluation rules for the displayed cases. Detailed choices still need group review."],["Newly confirmed model gap","This audit established no additional data-model blocker. It does not establish an exhaustive search for missing meaning."],["Implementation evidence","The selected cases work. 7 later audit issues remain failed or unverified."],["Deferred capabilities","Coordinate epochs and scene-authored transformation resources remain on the roadmap. Initial choices must preserve a path to adding them."]]}</a:t>
+              <a:t>{"section":"Assessment of the proposal","status":[["Proposal definitions","A focused requirements baseline is separate from the full candidate used for execution. Supported meaning and pending conventions are distinguished."],["Newly confirmed model gap","No additional undefined model rule was confirmed in reviewed paths. This is a scoped assessment, not an exhaustive completeness proof."],["Implementation evidence","The selected cases work. 6 prior defects pass fresh counterexamples; 1 remains unresolved."],["Deferred capabilities","Coordinate epochs and scene-authored transformation resources remain on the roadmap. Initial choices must preserve a path to adding them."]]}</a:t>
             </a:r>
           </a:p>
           <a:p xmlns:a="http://schemas.openxmlformats.org/drawingml/2006/main">
@@ -465,27 +465,27 @@
           </a:p>
           <a:p xmlns:a="http://schemas.openxmlformats.org/drawingml/2006/main">
             <a:r>
-              <a:t>README SHA-256 516b20d0c5b90558e7659c4ca71b2f2741d929c1a41d2427ac823f265f49b730</a:t>
-            </a:r>
-          </a:p>
-          <a:p xmlns:a="http://schemas.openxmlformats.org/drawingml/2006/main">
-            <a:r>
-              <a:t>Proposal SHA-256 02323339203777b80b0bf8969f2392a4663b78be29e88f26f859df376999774a</a:t>
-            </a:r>
-          </a:p>
-          <a:p xmlns:a="http://schemas.openxmlformats.org/drawingml/2006/main">
-            <a:r>
-              <a:t>Immutable execution receipt SHA-256 4f212b53f00cd7f31bae7b94ea63e6a4b99e3a9cf9e645b2989e888a51ceecbf</a:t>
-            </a:r>
-          </a:p>
-          <a:p xmlns:a="http://schemas.openxmlformats.org/drawingml/2006/main">
-            <a:r>
-              <a:t>Later audit SHA-256 75abc802636f2e337b6fda2002b14f4ddf89f434901bae4a034734403f73e35f</a:t>
-            </a:r>
-          </a:p>
-          <a:p xmlns:a="http://schemas.openxmlformats.org/drawingml/2006/main">
-            <a:r>
-              <a:t>Fresh October 7 execution of the merged proposal candidate, compared with the prior immutable run and followed by repeated independent diagnostics. No runtime implementation repairs.</a:t>
+              <a:t>README SHA-256 708a3b5c2d26a82e32e7ec3c381c2ebb7cda8274fd4567709f98d76d85ca8f6c</a:t>
+            </a:r>
+          </a:p>
+          <a:p xmlns:a="http://schemas.openxmlformats.org/drawingml/2006/main">
+            <a:r>
+              <a:t>Proposal SHA-256 28768109389139a56d5c8e5f473446bfa46dd1ab46a48924165b97fb92cb7ae9</a:t>
+            </a:r>
+          </a:p>
+          <a:p xmlns:a="http://schemas.openxmlformats.org/drawingml/2006/main">
+            <a:r>
+              <a:t>Immutable execution receipt SHA-256 b12019e039ab52f930fb2f4321ca2289875bcdefbd3dbbd669b72a8689647e46</a:t>
+            </a:r>
+          </a:p>
+          <a:p xmlns:a="http://schemas.openxmlformats.org/drawingml/2006/main">
+            <a:r>
+              <a:t>Later audit SHA-256 e7e5278ba30509b5a3e94196ffdb6d59aaa54eadacae97022f6ffab098d94a9a</a:t>
+            </a:r>
+          </a:p>
+          <a:p xmlns:a="http://schemas.openxmlformats.org/drawingml/2006/main">
+            <a:r>
+              <a:t>Fresh October 8 execution of the local stacked follow-up, with clause-traced adapter repairs and repeated independent diagnostics. No changes have been published.</a:t>
             </a:r>
           </a:p>
           <a:p xmlns:a="http://schemas.openxmlformats.org/drawingml/2006/main">
@@ -590,12 +590,12 @@
           </a:p>
           <a:p xmlns:a="http://schemas.openxmlformats.org/drawingml/2006/main">
             <a:r>
-              <a:t>Proposal: ### External measurement association at proposal/proposal-source.txt:1594</a:t>
-            </a:r>
-          </a:p>
-          <a:p xmlns:a="http://schemas.openxmlformats.org/drawingml/2006/main">
-            <a:r>
-              <a:t>Functional requirements: [{"id":8,"title":"Brought-in data keeps its coordinates and its CRS.","line":746},{"id":12,"title":"No angle read as a length.","line":826},{"id":19,"title":"Resolution leaves the scene as authored.","line":930},{"id":21,"title":"Never placed by a guess.","line":966}]</a:t>
+              <a:t>Proposal: ### External measurement association at proposal/proposal-source.txt:1610</a:t>
+            </a:r>
+          </a:p>
+          <a:p xmlns:a="http://schemas.openxmlformats.org/drawingml/2006/main">
+            <a:r>
+              <a:t>Functional requirements: [{"id":8,"title":"Brought-in data keeps its coordinates and its CRS.","line":751},{"id":12,"title":"No angle read as a length.","line":831},{"id":19,"title":"Resolution leaves the scene as authored.","line":932},{"id":21,"title":"Never placed by a guess.","line":968}]</a:t>
             </a:r>
           </a:p>
           <a:p xmlns:a="http://schemas.openxmlformats.org/drawingml/2006/main">
@@ -610,27 +610,27 @@
           </a:p>
           <a:p xmlns:a="http://schemas.openxmlformats.org/drawingml/2006/main">
             <a:r>
-              <a:t>README SHA-256 516b20d0c5b90558e7659c4ca71b2f2741d929c1a41d2427ac823f265f49b730</a:t>
-            </a:r>
-          </a:p>
-          <a:p xmlns:a="http://schemas.openxmlformats.org/drawingml/2006/main">
-            <a:r>
-              <a:t>Proposal SHA-256 02323339203777b80b0bf8969f2392a4663b78be29e88f26f859df376999774a</a:t>
-            </a:r>
-          </a:p>
-          <a:p xmlns:a="http://schemas.openxmlformats.org/drawingml/2006/main">
-            <a:r>
-              <a:t>Immutable execution receipt SHA-256 4f212b53f00cd7f31bae7b94ea63e6a4b99e3a9cf9e645b2989e888a51ceecbf</a:t>
-            </a:r>
-          </a:p>
-          <a:p xmlns:a="http://schemas.openxmlformats.org/drawingml/2006/main">
-            <a:r>
-              <a:t>Later audit SHA-256 75abc802636f2e337b6fda2002b14f4ddf89f434901bae4a034734403f73e35f</a:t>
-            </a:r>
-          </a:p>
-          <a:p xmlns:a="http://schemas.openxmlformats.org/drawingml/2006/main">
-            <a:r>
-              <a:t>Fresh October 7 execution of the merged proposal candidate, compared with the prior immutable run and followed by repeated independent diagnostics. No runtime implementation repairs.</a:t>
+              <a:t>README SHA-256 708a3b5c2d26a82e32e7ec3c381c2ebb7cda8274fd4567709f98d76d85ca8f6c</a:t>
+            </a:r>
+          </a:p>
+          <a:p xmlns:a="http://schemas.openxmlformats.org/drawingml/2006/main">
+            <a:r>
+              <a:t>Proposal SHA-256 28768109389139a56d5c8e5f473446bfa46dd1ab46a48924165b97fb92cb7ae9</a:t>
+            </a:r>
+          </a:p>
+          <a:p xmlns:a="http://schemas.openxmlformats.org/drawingml/2006/main">
+            <a:r>
+              <a:t>Immutable execution receipt SHA-256 b12019e039ab52f930fb2f4321ca2289875bcdefbd3dbbd669b72a8689647e46</a:t>
+            </a:r>
+          </a:p>
+          <a:p xmlns:a="http://schemas.openxmlformats.org/drawingml/2006/main">
+            <a:r>
+              <a:t>Later audit SHA-256 e7e5278ba30509b5a3e94196ffdb6d59aaa54eadacae97022f6ffab098d94a9a</a:t>
+            </a:r>
+          </a:p>
+          <a:p xmlns:a="http://schemas.openxmlformats.org/drawingml/2006/main">
+            <a:r>
+              <a:t>Fresh October 8 execution of the local stacked follow-up, with clause-traced adapter repairs and repeated independent diagnostics. No changes have been published.</a:t>
             </a:r>
           </a:p>
           <a:p xmlns:a="http://schemas.openxmlformats.org/drawingml/2006/main">
@@ -735,12 +735,12 @@
           </a:p>
           <a:p xmlns:a="http://schemas.openxmlformats.org/drawingml/2006/main">
             <a:r>
-              <a:t>Proposal: #### Evaluation at proposal/proposal-source.txt:1887</a:t>
-            </a:r>
-          </a:p>
-          <a:p xmlns:a="http://schemas.openxmlformats.org/drawingml/2006/main">
-            <a:r>
-              <a:t>Functional requirements: [{"id":20,"title":"Positions between recorded moments.","line":949},{"id":29,"title":"Implementable from the text alone.","line":1106}]</a:t>
+              <a:t>Proposal: #### Evaluation at proposal/proposal-source.txt:1910</a:t>
+            </a:r>
+          </a:p>
+          <a:p xmlns:a="http://schemas.openxmlformats.org/drawingml/2006/main">
+            <a:r>
+              <a:t>Functional requirements: [{"id":20,"title":"Positions between recorded moments.","line":951},{"id":29,"title":"Implementable from the text alone.","line":1117}]</a:t>
             </a:r>
           </a:p>
           <a:p xmlns:a="http://schemas.openxmlformats.org/drawingml/2006/main">
@@ -755,27 +755,27 @@
           </a:p>
           <a:p xmlns:a="http://schemas.openxmlformats.org/drawingml/2006/main">
             <a:r>
-              <a:t>README SHA-256 516b20d0c5b90558e7659c4ca71b2f2741d929c1a41d2427ac823f265f49b730</a:t>
-            </a:r>
-          </a:p>
-          <a:p xmlns:a="http://schemas.openxmlformats.org/drawingml/2006/main">
-            <a:r>
-              <a:t>Proposal SHA-256 02323339203777b80b0bf8969f2392a4663b78be29e88f26f859df376999774a</a:t>
-            </a:r>
-          </a:p>
-          <a:p xmlns:a="http://schemas.openxmlformats.org/drawingml/2006/main">
-            <a:r>
-              <a:t>Immutable execution receipt SHA-256 4f212b53f00cd7f31bae7b94ea63e6a4b99e3a9cf9e645b2989e888a51ceecbf</a:t>
-            </a:r>
-          </a:p>
-          <a:p xmlns:a="http://schemas.openxmlformats.org/drawingml/2006/main">
-            <a:r>
-              <a:t>Later audit SHA-256 75abc802636f2e337b6fda2002b14f4ddf89f434901bae4a034734403f73e35f</a:t>
-            </a:r>
-          </a:p>
-          <a:p xmlns:a="http://schemas.openxmlformats.org/drawingml/2006/main">
-            <a:r>
-              <a:t>Fresh October 7 execution of the merged proposal candidate, compared with the prior immutable run and followed by repeated independent diagnostics. No runtime implementation repairs.</a:t>
+              <a:t>README SHA-256 708a3b5c2d26a82e32e7ec3c381c2ebb7cda8274fd4567709f98d76d85ca8f6c</a:t>
+            </a:r>
+          </a:p>
+          <a:p xmlns:a="http://schemas.openxmlformats.org/drawingml/2006/main">
+            <a:r>
+              <a:t>Proposal SHA-256 28768109389139a56d5c8e5f473446bfa46dd1ab46a48924165b97fb92cb7ae9</a:t>
+            </a:r>
+          </a:p>
+          <a:p xmlns:a="http://schemas.openxmlformats.org/drawingml/2006/main">
+            <a:r>
+              <a:t>Immutable execution receipt SHA-256 b12019e039ab52f930fb2f4321ca2289875bcdefbd3dbbd669b72a8689647e46</a:t>
+            </a:r>
+          </a:p>
+          <a:p xmlns:a="http://schemas.openxmlformats.org/drawingml/2006/main">
+            <a:r>
+              <a:t>Later audit SHA-256 e7e5278ba30509b5a3e94196ffdb6d59aaa54eadacae97022f6ffab098d94a9a</a:t>
+            </a:r>
+          </a:p>
+          <a:p xmlns:a="http://schemas.openxmlformats.org/drawingml/2006/main">
+            <a:r>
+              <a:t>Fresh October 8 execution of the local stacked follow-up, with clause-traced adapter repairs and repeated independent diagnostics. No changes have been published.</a:t>
             </a:r>
           </a:p>
           <a:p xmlns:a="http://schemas.openxmlformats.org/drawingml/2006/main">
@@ -850,37 +850,37 @@
           <a:lstStyle xmlns:a="http://schemas.openxmlformats.org/drawingml/2006/main"/>
           <a:p xmlns:a="http://schemas.openxmlformats.org/drawingml/2006/main">
             <a:r>
-              <a:t>{"section":"Proposed choices awaiting agreement","status":[["Proposal definitions","The candidate specifies inputs and evaluation rules for the displayed cases. Detailed choices still need group review."],["Newly confirmed model gap","This audit established no additional data-model blocker. It does not establish an exhaustive search for missing meaning."],["Implementation evidence","The selected cases work. 7 later audit issues remain failed or unverified."],["Deferred capabilities","Coordinate epochs and scene-authored transformation resources remain on the roadmap. Initial choices must preserve a path to adding them."]]}</a:t>
-            </a:r>
-          </a:p>
-          <a:p xmlns:a="http://schemas.openxmlformats.org/drawingml/2006/main">
-            <a:r>
-              <a:t>[["Physical orientation","Record model orientation relative to local east, north and up. A different map projection does not redefine it."],["The object with its own georeference","Its ordinary scale, rotation and translation adjust placed geometry in a fixed project frame."],["Child objects","Child transforms define model-local geometry. Their offsets follow model axes instead of being silently reinterpreted as map axes."],["Independently georeferenced repeated models","Keep a prototype's own geographic placement and apply each instance effect once."],["Geographic queries and scene geometry","Return longitude/latitude/height for geographic queries. Cartesian geometry and bounds use the datum's Earth-centred frame."]]</a:t>
-            </a:r>
-          </a:p>
-          <a:p xmlns:a="http://schemas.openxmlformats.org/drawingml/2006/main">
-            <a:r>
-              <a:t>README SHA-256 516b20d0c5b90558e7659c4ca71b2f2741d929c1a41d2427ac823f265f49b730</a:t>
-            </a:r>
-          </a:p>
-          <a:p xmlns:a="http://schemas.openxmlformats.org/drawingml/2006/main">
-            <a:r>
-              <a:t>Proposal SHA-256 02323339203777b80b0bf8969f2392a4663b78be29e88f26f859df376999774a</a:t>
-            </a:r>
-          </a:p>
-          <a:p xmlns:a="http://schemas.openxmlformats.org/drawingml/2006/main">
-            <a:r>
-              <a:t>Immutable execution receipt SHA-256 4f212b53f00cd7f31bae7b94ea63e6a4b99e3a9cf9e645b2989e888a51ceecbf</a:t>
-            </a:r>
-          </a:p>
-          <a:p xmlns:a="http://schemas.openxmlformats.org/drawingml/2006/main">
-            <a:r>
-              <a:t>Later audit SHA-256 75abc802636f2e337b6fda2002b14f4ddf89f434901bae4a034734403f73e35f</a:t>
-            </a:r>
-          </a:p>
-          <a:p xmlns:a="http://schemas.openxmlformats.org/drawingml/2006/main">
-            <a:r>
-              <a:t>Fresh October 7 execution of the merged proposal candidate, compared with the prior immutable run and followed by repeated independent diagnostics. No runtime implementation repairs.</a:t>
+              <a:t>{"section":"Proposed choices awaiting agreement","status":[["Proposal definitions","A focused requirements baseline is separate from the full candidate used for execution. Supported meaning and pending conventions are distinguished."],["Newly confirmed model gap","No additional undefined model rule was confirmed in reviewed paths. This is a scoped assessment, not an exhaustive completeness proof."],["Implementation evidence","The selected cases work. 6 prior defects pass fresh counterexamples; 1 remains unresolved."],["Deferred capabilities","Coordinate epochs and scene-authored transformation resources remain on the roadmap. Initial choices must preserve a path to adding them."]]}</a:t>
+            </a:r>
+          </a:p>
+          <a:p xmlns:a="http://schemas.openxmlformats.org/drawingml/2006/main">
+            <a:r>
+              <a:t>[["Physical orientation","Input-only meaning is supported. Stored quaternion versus one heading/pitch/roll tuple and its interpolation need review."],["The object with its own georeference","Project adjustment meaning is supported. The detailed fixed working-frame convention remains a candidate."],["Child objects","Model-local meaning is supported. The follow-up specifies chart/reset details and tests that offsets retain their interpretation."],["Independently georeferenced repeated models","Keep a prototype's own geographic placement and apply each instance effect once."],["Geographic queries and scene geometry","Return longitude/latitude/height for geographic queries. Cartesian geometry and bounds use the datum's Earth-centred frame."]]</a:t>
+            </a:r>
+          </a:p>
+          <a:p xmlns:a="http://schemas.openxmlformats.org/drawingml/2006/main">
+            <a:r>
+              <a:t>README SHA-256 708a3b5c2d26a82e32e7ec3c381c2ebb7cda8274fd4567709f98d76d85ca8f6c</a:t>
+            </a:r>
+          </a:p>
+          <a:p xmlns:a="http://schemas.openxmlformats.org/drawingml/2006/main">
+            <a:r>
+              <a:t>Proposal SHA-256 28768109389139a56d5c8e5f473446bfa46dd1ab46a48924165b97fb92cb7ae9</a:t>
+            </a:r>
+          </a:p>
+          <a:p xmlns:a="http://schemas.openxmlformats.org/drawingml/2006/main">
+            <a:r>
+              <a:t>Immutable execution receipt SHA-256 b12019e039ab52f930fb2f4321ca2289875bcdefbd3dbbd669b72a8689647e46</a:t>
+            </a:r>
+          </a:p>
+          <a:p xmlns:a="http://schemas.openxmlformats.org/drawingml/2006/main">
+            <a:r>
+              <a:t>Later audit SHA-256 e7e5278ba30509b5a3e94196ffdb6d59aaa54eadacae97022f6ffab098d94a9a</a:t>
+            </a:r>
+          </a:p>
+          <a:p xmlns:a="http://schemas.openxmlformats.org/drawingml/2006/main">
+            <a:r>
+              <a:t>Fresh October 8 execution of the local stacked follow-up, with clause-traced adapter repairs and repeated independent diagnostics. No changes have been published.</a:t>
             </a:r>
           </a:p>
           <a:p xmlns:a="http://schemas.openxmlformats.org/drawingml/2006/main">
@@ -955,37 +955,37 @@
           <a:lstStyle xmlns:a="http://schemas.openxmlformats.org/drawingml/2006/main"/>
           <a:p xmlns:a="http://schemas.openxmlformats.org/drawingml/2006/main">
             <a:r>
-              <a:t>{"section":"Proposed choices awaiting agreement","status":[["Proposal definitions","The candidate specifies inputs and evaluation rules for the displayed cases. Detailed choices still need group review."],["Newly confirmed model gap","This audit established no additional data-model blocker. It does not establish an exhaustive search for missing meaning."],["Implementation evidence","The selected cases work. 7 later audit issues remain failed or unverified."],["Deferred capabilities","Coordinate epochs and scene-authored transformation resources remain on the roadmap. Initial choices must preserve a path to adding them."]]}</a:t>
-            </a:r>
-          </a:p>
-          <a:p xmlns:a="http://schemas.openxmlformats.org/drawingml/2006/main">
-            <a:r>
-              <a:t>[["Native data association","Name the asset, format, field and coordinate domain. Preserve the association between values, locations and observation times."],["WKT string normalization","A prescribed text form supports token comparison. Different normalized texts can still describe equivalent CRSs."],["Semantic CRS comparison","Specify equivalence criteria and the comparison domain, accounting for relevant axes, units and metadata."],["Dependency declaration using Profiles","Declare the composed scene's need for geospatial interpretation, including unloaded content. Writers and assemblers maintain the declaration."],["Baked output context","Keep a Cartesian CRS context without an active placement binding, so readers do not apply georeferencing a second time."]]</a:t>
-            </a:r>
-          </a:p>
-          <a:p xmlns:a="http://schemas.openxmlformats.org/drawingml/2006/main">
-            <a:r>
-              <a:t>README SHA-256 516b20d0c5b90558e7659c4ca71b2f2741d929c1a41d2427ac823f265f49b730</a:t>
-            </a:r>
-          </a:p>
-          <a:p xmlns:a="http://schemas.openxmlformats.org/drawingml/2006/main">
-            <a:r>
-              <a:t>Proposal SHA-256 02323339203777b80b0bf8969f2392a4663b78be29e88f26f859df376999774a</a:t>
-            </a:r>
-          </a:p>
-          <a:p xmlns:a="http://schemas.openxmlformats.org/drawingml/2006/main">
-            <a:r>
-              <a:t>Immutable execution receipt SHA-256 4f212b53f00cd7f31bae7b94ea63e6a4b99e3a9cf9e645b2989e888a51ceecbf</a:t>
-            </a:r>
-          </a:p>
-          <a:p xmlns:a="http://schemas.openxmlformats.org/drawingml/2006/main">
-            <a:r>
-              <a:t>Later audit SHA-256 75abc802636f2e337b6fda2002b14f4ddf89f434901bae4a034734403f73e35f</a:t>
-            </a:r>
-          </a:p>
-          <a:p xmlns:a="http://schemas.openxmlformats.org/drawingml/2006/main">
-            <a:r>
-              <a:t>Fresh October 7 execution of the merged proposal candidate, compared with the prior immutable run and followed by repeated independent diagnostics. No runtime implementation repairs.</a:t>
+              <a:t>{"section":"Proposed choices awaiting agreement","status":[["Proposal definitions","A focused requirements baseline is separate from the full candidate used for execution. Supported meaning and pending conventions are distinguished."],["Newly confirmed model gap","No additional undefined model rule was confirmed in reviewed paths. This is a scoped assessment, not an exhaustive completeness proof."],["Implementation evidence","The selected cases work. 6 prior defects pass fresh counterexamples; 1 remains unresolved."],["Deferred capabilities","Coordinate epochs and scene-authored transformation resources remain on the roadmap. Initial choices must preserve a path to adding them."]]}</a:t>
+            </a:r>
+          </a:p>
+          <a:p xmlns:a="http://schemas.openxmlformats.org/drawingml/2006/main">
+            <a:r>
+              <a:t>[["Native data association","Name the asset, format, field and coordinate domain. Preserve the association between values, locations and observation times."],["WKT string normalization","A prescribed text form supports token comparison. Different normalized texts can still describe equivalent CRSs."],["Semantic CRS comparison","Specify equivalence criteria and the comparison domain, accounting for relevant axes, units and metadata."],["Dependency declaration using Profiles","Declare the composed scene's need for geospatial interpretation, including unloaded content. Writers and assemblers maintain the declaration."],["Baked output context","Record a Cartesian CRS and ordinary double-precision origin. Preserve precision and space/time coverage."]]</a:t>
+            </a:r>
+          </a:p>
+          <a:p xmlns:a="http://schemas.openxmlformats.org/drawingml/2006/main">
+            <a:r>
+              <a:t>README SHA-256 708a3b5c2d26a82e32e7ec3c381c2ebb7cda8274fd4567709f98d76d85ca8f6c</a:t>
+            </a:r>
+          </a:p>
+          <a:p xmlns:a="http://schemas.openxmlformats.org/drawingml/2006/main">
+            <a:r>
+              <a:t>Proposal SHA-256 28768109389139a56d5c8e5f473446bfa46dd1ab46a48924165b97fb92cb7ae9</a:t>
+            </a:r>
+          </a:p>
+          <a:p xmlns:a="http://schemas.openxmlformats.org/drawingml/2006/main">
+            <a:r>
+              <a:t>Immutable execution receipt SHA-256 b12019e039ab52f930fb2f4321ca2289875bcdefbd3dbbd669b72a8689647e46</a:t>
+            </a:r>
+          </a:p>
+          <a:p xmlns:a="http://schemas.openxmlformats.org/drawingml/2006/main">
+            <a:r>
+              <a:t>Later audit SHA-256 e7e5278ba30509b5a3e94196ffdb6d59aaa54eadacae97022f6ffab098d94a9a</a:t>
+            </a:r>
+          </a:p>
+          <a:p xmlns:a="http://schemas.openxmlformats.org/drawingml/2006/main">
+            <a:r>
+              <a:t>Fresh October 8 execution of the local stacked follow-up, with clause-traced adapter repairs and repeated independent diagnostics. No changes have been published.</a:t>
             </a:r>
           </a:p>
           <a:p xmlns:a="http://schemas.openxmlformats.org/drawingml/2006/main">
@@ -1060,37 +1060,37 @@
           <a:lstStyle xmlns:a="http://schemas.openxmlformats.org/drawingml/2006/main"/>
           <a:p xmlns:a="http://schemas.openxmlformats.org/drawingml/2006/main">
             <a:r>
-              <a:t>{"section":"Detailed evidence","status":[["Proposal definitions","The candidate specifies inputs and evaluation rules for the displayed cases. Detailed choices still need group review."],["Newly confirmed model gap","This audit established no additional data-model blocker. It does not establish an exhaustive search for missing meaning."],["Implementation evidence","The selected cases work. 7 later audit issues remain failed or unverified."],["Deferred capabilities","Coordinate epochs and scene-authored transformation resources remain on the roadmap. Initial choices must preserve a path to adding them."]]}</a:t>
-            </a:r>
-          </a:p>
-          <a:p xmlns:a="http://schemas.openxmlformats.org/drawingml/2006/main">
-            <a:r>
-              <a:t>[["Python and C++ readers","213,231 coordinate results per reader. Maximum measured difference 3.39e-08 m. They share PROJ and native dataset decoding."],["Omniverse stage geometry integration","Reuses Python placement. Recorded readback covers 177,864 geometry vertices and 36 edit, failure and recovery checks, across 35 jobs."],["Hydra / Storm","Two selected ordinary USD bakes reach native rendering. This consumer path uses the C++ placement results."],["Recorded tests","64 regressions and 61 distinguishing controls passed. The later audit exposes cases the suite missed."],["Source preservation","Original inputs and all frozen execution files remained unchanged during this run. The immutable receipt identifies the exact executed content."],["Bake readbacks","11 selected exports were checked. The later nested-geometry case demonstrates that the original inventory check was incomplete."]]</a:t>
-            </a:r>
-          </a:p>
-          <a:p xmlns:a="http://schemas.openxmlformats.org/drawingml/2006/main">
-            <a:r>
-              <a:t>README SHA-256 516b20d0c5b90558e7659c4ca71b2f2741d929c1a41d2427ac823f265f49b730</a:t>
-            </a:r>
-          </a:p>
-          <a:p xmlns:a="http://schemas.openxmlformats.org/drawingml/2006/main">
-            <a:r>
-              <a:t>Proposal SHA-256 02323339203777b80b0bf8969f2392a4663b78be29e88f26f859df376999774a</a:t>
-            </a:r>
-          </a:p>
-          <a:p xmlns:a="http://schemas.openxmlformats.org/drawingml/2006/main">
-            <a:r>
-              <a:t>Immutable execution receipt SHA-256 4f212b53f00cd7f31bae7b94ea63e6a4b99e3a9cf9e645b2989e888a51ceecbf</a:t>
-            </a:r>
-          </a:p>
-          <a:p xmlns:a="http://schemas.openxmlformats.org/drawingml/2006/main">
-            <a:r>
-              <a:t>Later audit SHA-256 75abc802636f2e337b6fda2002b14f4ddf89f434901bae4a034734403f73e35f</a:t>
-            </a:r>
-          </a:p>
-          <a:p xmlns:a="http://schemas.openxmlformats.org/drawingml/2006/main">
-            <a:r>
-              <a:t>Fresh October 7 execution of the merged proposal candidate, compared with the prior immutable run and followed by repeated independent diagnostics. No runtime implementation repairs.</a:t>
+              <a:t>{"section":"Detailed evidence","status":[["Proposal definitions","A focused requirements baseline is separate from the full candidate used for execution. Supported meaning and pending conventions are distinguished."],["Newly confirmed model gap","No additional undefined model rule was confirmed in reviewed paths. This is a scoped assessment, not an exhaustive completeness proof."],["Implementation evidence","The selected cases work. 6 prior defects pass fresh counterexamples; 1 remains unresolved."],["Deferred capabilities","Coordinate epochs and scene-authored transformation resources remain on the roadmap. Initial choices must preserve a path to adding them."]]}</a:t>
+            </a:r>
+          </a:p>
+          <a:p xmlns:a="http://schemas.openxmlformats.org/drawingml/2006/main">
+            <a:r>
+              <a:t>[["Python and C++ readers","213,231 coordinate results per reader. Maximum measured difference 3.39e-08 m. They share PROJ and native dataset decoding."],["Omniverse stage geometry integration","Reuses Python placement. Recorded readback covers 177,864 geometry vertices and 36 edit, failure and recovery checks, across 35 jobs."],["Hydra / Storm","Two selected ordinary USD bakes reach native rendering. This consumer path uses the C++ placement results."],["Recorded tests","70 regressions and 61 distinguishing controls passed. Fresh independent diagnostics verify six repairs and retain the unresolved normal case."],["Source preservation","Original inputs and all frozen execution files remained unchanged during this run. The immutable receipt identifies the exact executed content."],["Bake readbacks","11 selected exports were checked. The fresh nested-geometry counterexample verifies the complete inventory, including unexpected extras."]]</a:t>
+            </a:r>
+          </a:p>
+          <a:p xmlns:a="http://schemas.openxmlformats.org/drawingml/2006/main">
+            <a:r>
+              <a:t>README SHA-256 708a3b5c2d26a82e32e7ec3c381c2ebb7cda8274fd4567709f98d76d85ca8f6c</a:t>
+            </a:r>
+          </a:p>
+          <a:p xmlns:a="http://schemas.openxmlformats.org/drawingml/2006/main">
+            <a:r>
+              <a:t>Proposal SHA-256 28768109389139a56d5c8e5f473446bfa46dd1ab46a48924165b97fb92cb7ae9</a:t>
+            </a:r>
+          </a:p>
+          <a:p xmlns:a="http://schemas.openxmlformats.org/drawingml/2006/main">
+            <a:r>
+              <a:t>Immutable execution receipt SHA-256 b12019e039ab52f930fb2f4321ca2289875bcdefbd3dbbd669b72a8689647e46</a:t>
+            </a:r>
+          </a:p>
+          <a:p xmlns:a="http://schemas.openxmlformats.org/drawingml/2006/main">
+            <a:r>
+              <a:t>Later audit SHA-256 e7e5278ba30509b5a3e94196ffdb6d59aaa54eadacae97022f6ffab098d94a9a</a:t>
+            </a:r>
+          </a:p>
+          <a:p xmlns:a="http://schemas.openxmlformats.org/drawingml/2006/main">
+            <a:r>
+              <a:t>Fresh October 8 execution of the local stacked follow-up, with clause-traced adapter repairs and repeated independent diagnostics. No changes have been published.</a:t>
             </a:r>
           </a:p>
           <a:p xmlns:a="http://schemas.openxmlformats.org/drawingml/2006/main">
@@ -1195,12 +1195,12 @@
           </a:p>
           <a:p xmlns:a="http://schemas.openxmlformats.org/drawingml/2006/main">
             <a:r>
-              <a:t>Proposal: #### Authored properties at proposal/proposal-source.txt:1512</a:t>
-            </a:r>
-          </a:p>
-          <a:p xmlns:a="http://schemas.openxmlformats.org/drawingml/2006/main">
-            <a:r>
-              <a:t>Functional requirements: [{"id":9,"title":"Positions, and offsets from them.","line":772},{"id":10,"title":"Offsets along the axes of their position.","line":790},{"id":12,"title":"No angle read as a length.","line":826},{"id":14,"title":"Scene conventions stay the scene's.","line":857},{"id":15,"title":"Placement separate from conformance.","line":870}]</a:t>
+              <a:t>Proposal: #### Authored properties at proposal/proposal-source.txt:1523</a:t>
+            </a:r>
+          </a:p>
+          <a:p xmlns:a="http://schemas.openxmlformats.org/drawingml/2006/main">
+            <a:r>
+              <a:t>Functional requirements: [{"id":9,"title":"Positions, and offsets from them.","line":777},{"id":10,"title":"Offsets along the axes of their position.","line":795},{"id":12,"title":"No angle read as a length.","line":831},{"id":14,"title":"Scene conventions stay the scene's.","line":857},{"id":15,"title":"Placement separate from conformance.","line":870}]</a:t>
             </a:r>
           </a:p>
           <a:p xmlns:a="http://schemas.openxmlformats.org/drawingml/2006/main">
@@ -1215,27 +1215,27 @@
           </a:p>
           <a:p xmlns:a="http://schemas.openxmlformats.org/drawingml/2006/main">
             <a:r>
-              <a:t>README SHA-256 516b20d0c5b90558e7659c4ca71b2f2741d929c1a41d2427ac823f265f49b730</a:t>
-            </a:r>
-          </a:p>
-          <a:p xmlns:a="http://schemas.openxmlformats.org/drawingml/2006/main">
-            <a:r>
-              <a:t>Proposal SHA-256 02323339203777b80b0bf8969f2392a4663b78be29e88f26f859df376999774a</a:t>
-            </a:r>
-          </a:p>
-          <a:p xmlns:a="http://schemas.openxmlformats.org/drawingml/2006/main">
-            <a:r>
-              <a:t>Immutable execution receipt SHA-256 4f212b53f00cd7f31bae7b94ea63e6a4b99e3a9cf9e645b2989e888a51ceecbf</a:t>
-            </a:r>
-          </a:p>
-          <a:p xmlns:a="http://schemas.openxmlformats.org/drawingml/2006/main">
-            <a:r>
-              <a:t>Later audit SHA-256 75abc802636f2e337b6fda2002b14f4ddf89f434901bae4a034734403f73e35f</a:t>
-            </a:r>
-          </a:p>
-          <a:p xmlns:a="http://schemas.openxmlformats.org/drawingml/2006/main">
-            <a:r>
-              <a:t>Fresh October 7 execution of the merged proposal candidate, compared with the prior immutable run and followed by repeated independent diagnostics. No runtime implementation repairs.</a:t>
+              <a:t>README SHA-256 708a3b5c2d26a82e32e7ec3c381c2ebb7cda8274fd4567709f98d76d85ca8f6c</a:t>
+            </a:r>
+          </a:p>
+          <a:p xmlns:a="http://schemas.openxmlformats.org/drawingml/2006/main">
+            <a:r>
+              <a:t>Proposal SHA-256 28768109389139a56d5c8e5f473446bfa46dd1ab46a48924165b97fb92cb7ae9</a:t>
+            </a:r>
+          </a:p>
+          <a:p xmlns:a="http://schemas.openxmlformats.org/drawingml/2006/main">
+            <a:r>
+              <a:t>Immutable execution receipt SHA-256 b12019e039ab52f930fb2f4321ca2289875bcdefbd3dbbd669b72a8689647e46</a:t>
+            </a:r>
+          </a:p>
+          <a:p xmlns:a="http://schemas.openxmlformats.org/drawingml/2006/main">
+            <a:r>
+              <a:t>Later audit SHA-256 e7e5278ba30509b5a3e94196ffdb6d59aaa54eadacae97022f6ffab098d94a9a</a:t>
+            </a:r>
+          </a:p>
+          <a:p xmlns:a="http://schemas.openxmlformats.org/drawingml/2006/main">
+            <a:r>
+              <a:t>Fresh October 8 execution of the local stacked follow-up, with clause-traced adapter repairs and repeated independent diagnostics. No changes have been published.</a:t>
             </a:r>
           </a:p>
           <a:p xmlns:a="http://schemas.openxmlformats.org/drawingml/2006/main">
@@ -1340,12 +1340,12 @@
           </a:p>
           <a:p xmlns:a="http://schemas.openxmlformats.org/drawingml/2006/main">
             <a:r>
-              <a:t>Proposal: ### Source placement evaluation and transform order at proposal/proposal-source.txt:1787</a:t>
-            </a:r>
-          </a:p>
-          <a:p xmlns:a="http://schemas.openxmlformats.org/drawingml/2006/main">
-            <a:r>
-              <a:t>Functional requirements: [{"id":9,"title":"Positions, and offsets from them.","line":772},{"id":12,"title":"No angle read as a length.","line":826},{"id":13,"title":"One axis mapping.","line":840},{"id":16,"title":"One CRS out.","line":882},{"id":19,"title":"Resolution leaves the scene as authored.","line":930}]</a:t>
+              <a:t>Proposal: ### Source placement evaluation and transform order at proposal/proposal-source.txt:1810</a:t>
+            </a:r>
+          </a:p>
+          <a:p xmlns:a="http://schemas.openxmlformats.org/drawingml/2006/main">
+            <a:r>
+              <a:t>Functional requirements: [{"id":9,"title":"Positions, and offsets from them.","line":777},{"id":12,"title":"No angle read as a length.","line":831},{"id":13,"title":"One axis mapping.","line":845},{"id":16,"title":"One CRS out.","line":882},{"id":19,"title":"Resolution leaves the scene as authored.","line":932}]</a:t>
             </a:r>
           </a:p>
           <a:p xmlns:a="http://schemas.openxmlformats.org/drawingml/2006/main">
@@ -1360,27 +1360,27 @@
           </a:p>
           <a:p xmlns:a="http://schemas.openxmlformats.org/drawingml/2006/main">
             <a:r>
-              <a:t>README SHA-256 516b20d0c5b90558e7659c4ca71b2f2741d929c1a41d2427ac823f265f49b730</a:t>
-            </a:r>
-          </a:p>
-          <a:p xmlns:a="http://schemas.openxmlformats.org/drawingml/2006/main">
-            <a:r>
-              <a:t>Proposal SHA-256 02323339203777b80b0bf8969f2392a4663b78be29e88f26f859df376999774a</a:t>
-            </a:r>
-          </a:p>
-          <a:p xmlns:a="http://schemas.openxmlformats.org/drawingml/2006/main">
-            <a:r>
-              <a:t>Immutable execution receipt SHA-256 4f212b53f00cd7f31bae7b94ea63e6a4b99e3a9cf9e645b2989e888a51ceecbf</a:t>
-            </a:r>
-          </a:p>
-          <a:p xmlns:a="http://schemas.openxmlformats.org/drawingml/2006/main">
-            <a:r>
-              <a:t>Later audit SHA-256 75abc802636f2e337b6fda2002b14f4ddf89f434901bae4a034734403f73e35f</a:t>
-            </a:r>
-          </a:p>
-          <a:p xmlns:a="http://schemas.openxmlformats.org/drawingml/2006/main">
-            <a:r>
-              <a:t>Fresh October 7 execution of the merged proposal candidate, compared with the prior immutable run and followed by repeated independent diagnostics. No runtime implementation repairs.</a:t>
+              <a:t>README SHA-256 708a3b5c2d26a82e32e7ec3c381c2ebb7cda8274fd4567709f98d76d85ca8f6c</a:t>
+            </a:r>
+          </a:p>
+          <a:p xmlns:a="http://schemas.openxmlformats.org/drawingml/2006/main">
+            <a:r>
+              <a:t>Proposal SHA-256 28768109389139a56d5c8e5f473446bfa46dd1ab46a48924165b97fb92cb7ae9</a:t>
+            </a:r>
+          </a:p>
+          <a:p xmlns:a="http://schemas.openxmlformats.org/drawingml/2006/main">
+            <a:r>
+              <a:t>Immutable execution receipt SHA-256 b12019e039ab52f930fb2f4321ca2289875bcdefbd3dbbd669b72a8689647e46</a:t>
+            </a:r>
+          </a:p>
+          <a:p xmlns:a="http://schemas.openxmlformats.org/drawingml/2006/main">
+            <a:r>
+              <a:t>Later audit SHA-256 e7e5278ba30509b5a3e94196ffdb6d59aaa54eadacae97022f6ffab098d94a9a</a:t>
+            </a:r>
+          </a:p>
+          <a:p xmlns:a="http://schemas.openxmlformats.org/drawingml/2006/main">
+            <a:r>
+              <a:t>Fresh October 8 execution of the local stacked follow-up, with clause-traced adapter repairs and repeated independent diagnostics. No changes have been published.</a:t>
             </a:r>
           </a:p>
           <a:p xmlns:a="http://schemas.openxmlformats.org/drawingml/2006/main">
@@ -1475,22 +1475,22 @@
           </a:p>
           <a:p xmlns:a="http://schemas.openxmlformats.org/drawingml/2006/main">
             <a:r>
-              <a:t>Implication for proposal quality: Order changes the result. The control makes the proposed child-transform choice reviewable; matching readers do not establish agreement.</a:t>
-            </a:r>
-          </a:p>
-          <a:p xmlns:a="http://schemas.openxmlformats.org/drawingml/2006/main">
-            <a:r>
-              <a:t>Limit: The image is informative. The child-transform rule is a proposed clarification, not a claim that the call settled every descendant case.</a:t>
-            </a:r>
-          </a:p>
-          <a:p xmlns:a="http://schemas.openxmlformats.org/drawingml/2006/main">
-            <a:r>
-              <a:t>Proposal: #### Evaluation at proposal/proposal-source.txt:1887</a:t>
-            </a:r>
-          </a:p>
-          <a:p xmlns:a="http://schemas.openxmlformats.org/drawingml/2006/main">
-            <a:r>
-              <a:t>Functional requirements: [{"id":9,"title":"Positions, and offsets from them.","line":772},{"id":14,"title":"Scene conventions stay the scene's.","line":857},{"id":15,"title":"Placement separate from conformance.","line":870},{"id":17,"title":"The same answer for every consumer.","line":902},{"id":19,"title":"Resolution leaves the scene as authored.","line":930}]</a:t>
+              <a:t>Implication for proposal quality: Order changes the result. The control tests the agreed anchor/child distinction while detailed chart and instance conventions remain candidates.</a:t>
+            </a:r>
+          </a:p>
+          <a:p xmlns:a="http://schemas.openxmlformats.org/drawingml/2006/main">
+            <a:r>
+              <a:t>Limit: The image is informative. Feedback supports project adjustments versus model-local child offsets; detailed rules still need review.</a:t>
+            </a:r>
+          </a:p>
+          <a:p xmlns:a="http://schemas.openxmlformats.org/drawingml/2006/main">
+            <a:r>
+              <a:t>Proposal: #### Evaluation at proposal/proposal-source.txt:1910</a:t>
+            </a:r>
+          </a:p>
+          <a:p xmlns:a="http://schemas.openxmlformats.org/drawingml/2006/main">
+            <a:r>
+              <a:t>Functional requirements: [{"id":9,"title":"Positions, and offsets from them.","line":777},{"id":14,"title":"Scene conventions stay the scene's.","line":857},{"id":15,"title":"Placement separate from conformance.","line":870},{"id":17,"title":"The same answer for every consumer.","line":902},{"id":19,"title":"Resolution leaves the scene as authored.","line":932}]</a:t>
             </a:r>
           </a:p>
           <a:p xmlns:a="http://schemas.openxmlformats.org/drawingml/2006/main">
@@ -1505,27 +1505,27 @@
           </a:p>
           <a:p xmlns:a="http://schemas.openxmlformats.org/drawingml/2006/main">
             <a:r>
-              <a:t>README SHA-256 516b20d0c5b90558e7659c4ca71b2f2741d929c1a41d2427ac823f265f49b730</a:t>
-            </a:r>
-          </a:p>
-          <a:p xmlns:a="http://schemas.openxmlformats.org/drawingml/2006/main">
-            <a:r>
-              <a:t>Proposal SHA-256 02323339203777b80b0bf8969f2392a4663b78be29e88f26f859df376999774a</a:t>
-            </a:r>
-          </a:p>
-          <a:p xmlns:a="http://schemas.openxmlformats.org/drawingml/2006/main">
-            <a:r>
-              <a:t>Immutable execution receipt SHA-256 4f212b53f00cd7f31bae7b94ea63e6a4b99e3a9cf9e645b2989e888a51ceecbf</a:t>
-            </a:r>
-          </a:p>
-          <a:p xmlns:a="http://schemas.openxmlformats.org/drawingml/2006/main">
-            <a:r>
-              <a:t>Later audit SHA-256 75abc802636f2e337b6fda2002b14f4ddf89f434901bae4a034734403f73e35f</a:t>
-            </a:r>
-          </a:p>
-          <a:p xmlns:a="http://schemas.openxmlformats.org/drawingml/2006/main">
-            <a:r>
-              <a:t>Fresh October 7 execution of the merged proposal candidate, compared with the prior immutable run and followed by repeated independent diagnostics. No runtime implementation repairs.</a:t>
+              <a:t>README SHA-256 708a3b5c2d26a82e32e7ec3c381c2ebb7cda8274fd4567709f98d76d85ca8f6c</a:t>
+            </a:r>
+          </a:p>
+          <a:p xmlns:a="http://schemas.openxmlformats.org/drawingml/2006/main">
+            <a:r>
+              <a:t>Proposal SHA-256 28768109389139a56d5c8e5f473446bfa46dd1ab46a48924165b97fb92cb7ae9</a:t>
+            </a:r>
+          </a:p>
+          <a:p xmlns:a="http://schemas.openxmlformats.org/drawingml/2006/main">
+            <a:r>
+              <a:t>Immutable execution receipt SHA-256 b12019e039ab52f930fb2f4321ca2289875bcdefbd3dbbd669b72a8689647e46</a:t>
+            </a:r>
+          </a:p>
+          <a:p xmlns:a="http://schemas.openxmlformats.org/drawingml/2006/main">
+            <a:r>
+              <a:t>Later audit SHA-256 e7e5278ba30509b5a3e94196ffdb6d59aaa54eadacae97022f6ffab098d94a9a</a:t>
+            </a:r>
+          </a:p>
+          <a:p xmlns:a="http://schemas.openxmlformats.org/drawingml/2006/main">
+            <a:r>
+              <a:t>Fresh October 8 execution of the local stacked follow-up, with clause-traced adapter repairs and repeated independent diagnostics. No changes have been published.</a:t>
             </a:r>
           </a:p>
           <a:p xmlns:a="http://schemas.openxmlformats.org/drawingml/2006/main">
@@ -1625,17 +1625,17 @@
           </a:p>
           <a:p xmlns:a="http://schemas.openxmlformats.org/drawingml/2006/main">
             <a:r>
-              <a:t>Limit: Both readers use PROJ, the same CRS conversion library, and share native dataset decoding. Agreement therefore does not independently verify geodetic accuracy or detect shared mistakes. The later audit also finds incomplete per-component and angular error reporting.</a:t>
-            </a:r>
-          </a:p>
-          <a:p xmlns:a="http://schemas.openxmlformats.org/drawingml/2006/main">
-            <a:r>
-              <a:t>Proposal: ### Extent and result comparison at proposal/proposal-source.txt:2018</a:t>
-            </a:r>
-          </a:p>
-          <a:p xmlns:a="http://schemas.openxmlformats.org/drawingml/2006/main">
-            <a:r>
-              <a:t>Functional requirements: [{"id":4,"title":"A site's own grid is a CRS like any other.","line":669},{"id":13,"title":"One axis mapping.","line":840},{"id":16,"title":"One CRS out.","line":882},{"id":17,"title":"The same answer for every consumer.","line":902},{"id":18,"title":"Coordinates back out.","line":915},{"id":28,"title":"A result says what produced it.","line":1088},{"id":29,"title":"Implementable from the text alone.","line":1106}]</a:t>
+              <a:t>Limit: Both readers use PROJ and share dataset decoding. Agreement is limited to tested domains and is not independent geodetic validation.</a:t>
+            </a:r>
+          </a:p>
+          <a:p xmlns:a="http://schemas.openxmlformats.org/drawingml/2006/main">
+            <a:r>
+              <a:t>Proposal: ### Extent and result comparison at proposal/proposal-source.txt:2042</a:t>
+            </a:r>
+          </a:p>
+          <a:p xmlns:a="http://schemas.openxmlformats.org/drawingml/2006/main">
+            <a:r>
+              <a:t>Functional requirements: [{"id":4,"title":"A site's own grid is a CRS like any other.","line":674},{"id":13,"title":"One axis mapping.","line":845},{"id":16,"title":"One CRS out.","line":882},{"id":17,"title":"The same answer for every consumer.","line":902},{"id":18,"title":"Coordinates back out.","line":917},{"id":28,"title":"A result says what produced it.","line":1099},{"id":29,"title":"Implementable from the text alone.","line":1117}]</a:t>
             </a:r>
           </a:p>
           <a:p xmlns:a="http://schemas.openxmlformats.org/drawingml/2006/main">
@@ -1645,32 +1645,32 @@
           </a:p>
           <a:p xmlns:a="http://schemas.openxmlformats.org/drawingml/2006/main">
             <a:r>
-              <a:t>The tables round one point per dataset to six decimals in their declared units. Shared PROJ and decoding limit independence. Required component/angular reports remain incomplete (audit A6). {"France_01":{"source":[1661099.039,8180053.117,37.298],"source_label":"CC49","target_label":"Lambert-93","unit":"m","python":[661101.1094171533,6857834.256535667,37.297999998112694],"native":[661101.1094171533,6857834.256535667,37.298000000906654],"ov":[661101.1094171533,6857834.256535667,37.297999998112694]},"Colorado_02":{"source":[3108002.1122,1752265.0666,5482.9424],"source_label":"State Plane","target_label":"Westminster site grid","unit":"ftUS","python":[3108871.450100667,1206317.4694031866,5484.677949332321],"native":[3108871.450100667,1206317.469403112,5484.677949268161],"ov":[3108871.450100667,1206317.4694031866,5484.677949332321]}}</a:t>
-            </a:r>
-          </a:p>
-          <a:p xmlns:a="http://schemas.openxmlformats.org/drawingml/2006/main">
-            <a:r>
-              <a:t>README SHA-256 516b20d0c5b90558e7659c4ca71b2f2741d929c1a41d2427ac823f265f49b730</a:t>
-            </a:r>
-          </a:p>
-          <a:p xmlns:a="http://schemas.openxmlformats.org/drawingml/2006/main">
-            <a:r>
-              <a:t>Proposal SHA-256 02323339203777b80b0bf8969f2392a4663b78be29e88f26f859df376999774a</a:t>
-            </a:r>
-          </a:p>
-          <a:p xmlns:a="http://schemas.openxmlformats.org/drawingml/2006/main">
-            <a:r>
-              <a:t>Immutable execution receipt SHA-256 4f212b53f00cd7f31bae7b94ea63e6a4b99e3a9cf9e645b2989e888a51ceecbf</a:t>
-            </a:r>
-          </a:p>
-          <a:p xmlns:a="http://schemas.openxmlformats.org/drawingml/2006/main">
-            <a:r>
-              <a:t>Later audit SHA-256 75abc802636f2e337b6fda2002b14f4ddf89f434901bae4a034734403f73e35f</a:t>
-            </a:r>
-          </a:p>
-          <a:p xmlns:a="http://schemas.openxmlformats.org/drawingml/2006/main">
-            <a:r>
-              <a:t>Fresh October 7 execution of the merged proposal candidate, compared with the prior immutable run and followed by repeated independent diagnostics. No runtime implementation repairs.</a:t>
+              <a:t>The tables round one point per dataset to six decimals in their declared units. Shared PROJ and decoding limit independence. Component, magnitude and angular reporting now pass the independent counterexample. {"France_01":{"source":[1661099.039,8180053.117,37.298],"source_label":"CC49","target_label":"Lambert-93","unit":"m","python":[661101.1094171533,6857834.256535667,37.297999998112694],"native":[661101.1094171533,6857834.256535667,37.298000000906654],"ov":[661101.1094171533,6857834.256535667,37.297999998112694]},"Colorado_02":{"source":[3108002.1122,1752265.0666,5482.9424],"source_label":"State Plane","target_label":"Westminster site grid","unit":"ftUS","python":[3108871.450100667,1206317.4694031866,5484.677949332321],"native":[3108871.450100667,1206317.469403112,5484.677949268161],"ov":[3108871.450100667,1206317.4694031866,5484.677949332321]}}</a:t>
+            </a:r>
+          </a:p>
+          <a:p xmlns:a="http://schemas.openxmlformats.org/drawingml/2006/main">
+            <a:r>
+              <a:t>README SHA-256 708a3b5c2d26a82e32e7ec3c381c2ebb7cda8274fd4567709f98d76d85ca8f6c</a:t>
+            </a:r>
+          </a:p>
+          <a:p xmlns:a="http://schemas.openxmlformats.org/drawingml/2006/main">
+            <a:r>
+              <a:t>Proposal SHA-256 28768109389139a56d5c8e5f473446bfa46dd1ab46a48924165b97fb92cb7ae9</a:t>
+            </a:r>
+          </a:p>
+          <a:p xmlns:a="http://schemas.openxmlformats.org/drawingml/2006/main">
+            <a:r>
+              <a:t>Immutable execution receipt SHA-256 b12019e039ab52f930fb2f4321ca2289875bcdefbd3dbbd669b72a8689647e46</a:t>
+            </a:r>
+          </a:p>
+          <a:p xmlns:a="http://schemas.openxmlformats.org/drawingml/2006/main">
+            <a:r>
+              <a:t>Later audit SHA-256 e7e5278ba30509b5a3e94196ffdb6d59aaa54eadacae97022f6ffab098d94a9a</a:t>
+            </a:r>
+          </a:p>
+          <a:p xmlns:a="http://schemas.openxmlformats.org/drawingml/2006/main">
+            <a:r>
+              <a:t>Fresh October 8 execution of the local stacked follow-up, with clause-traced adapter repairs and repeated independent diagnostics. No changes have been published.</a:t>
             </a:r>
           </a:p>
           <a:p xmlns:a="http://schemas.openxmlformats.org/drawingml/2006/main">
@@ -1760,27 +1760,27 @@
           </a:p>
           <a:p xmlns:a="http://schemas.openxmlformats.org/drawingml/2006/main">
             <a:r>
-              <a:t>Observed: The C++ reader's resolved Eiffel copy reaches Hydra/Storm, a USD rendering path. This image is actual output from the recorded run.</a:t>
-            </a:r>
-          </a:p>
-          <a:p xmlns:a="http://schemas.openxmlformats.org/drawingml/2006/main">
-            <a:r>
-              <a:t>Implication for proposal quality: This case shows compatibility with an ordinary USD renderer. A separate nested-geometry failure prevents a claim that every bake is correct.</a:t>
-            </a:r>
-          </a:p>
-          <a:p xmlns:a="http://schemas.openxmlformats.org/drawingml/2006/main">
-            <a:r>
-              <a:t>Limit: The ground plane is illustrative, without surveyed Paris context. This run has no geospatial Hydra filter or Omniverse render proof. Other bake diagnostics fail, as listed below.</a:t>
-            </a:r>
-          </a:p>
-          <a:p xmlns:a="http://schemas.openxmlformats.org/drawingml/2006/main">
-            <a:r>
-              <a:t>Proposal: ### Explicit export and sampling at proposal/proposal-source.txt:2071</a:t>
-            </a:r>
-          </a:p>
-          <a:p xmlns:a="http://schemas.openxmlformats.org/drawingml/2006/main">
-            <a:r>
-              <a:t>Functional requirements: [{"id":17,"title":"The same answer for every consumer.","line":902},{"id":19,"title":"Resolution leaves the scene as authored.","line":930},{"id":23,"title":"Detail that does not depend on location.","line":1028},{"id":25,"title":"Additive for consumers that ignore it.","line":1052},{"id":29,"title":"Implementable from the text alone.","line":1106}]</a:t>
+              <a:t>Observed: Native Hydra/Storm renders the ordinary USD bake. A double-precision origin keeps local points small; fresh readers recover the placement.</a:t>
+            </a:r>
+          </a:p>
+          <a:p xmlns:a="http://schemas.openxmlformats.org/drawingml/2006/main">
+            <a:r>
+              <a:t>Implication for proposal quality: Unaware viewers receive resolved ordinary geometry. Fresh checks reject duplicate meshes and retain an unrelated applied schema.</a:t>
+            </a:r>
+          </a:p>
+          <a:p xmlns:a="http://schemas.openxmlformats.org/drawingml/2006/main">
+            <a:r>
+              <a:t>Limit: This is a recorded native render. General materials, primvars and continuous coverage remain unverified.</a:t>
+            </a:r>
+          </a:p>
+          <a:p xmlns:a="http://schemas.openxmlformats.org/drawingml/2006/main">
+            <a:r>
+              <a:t>Proposal: ### Explicit export and sampling at proposal/proposal-source.txt:2095</a:t>
+            </a:r>
+          </a:p>
+          <a:p xmlns:a="http://schemas.openxmlformats.org/drawingml/2006/main">
+            <a:r>
+              <a:t>Functional requirements: [{"id":17,"title":"The same answer for every consumer.","line":902},{"id":19,"title":"Resolution leaves the scene as authored.","line":932},{"id":23,"title":"Detail that does not depend on location.","line":1038},{"id":25,"title":"Additive for consumers that ignore it.","line":1062},{"id":29,"title":"Implementable from the text alone.","line":1117}]</a:t>
             </a:r>
           </a:p>
           <a:p xmlns:a="http://schemas.openxmlformats.org/drawingml/2006/main">
@@ -1795,27 +1795,27 @@
           </a:p>
           <a:p xmlns:a="http://schemas.openxmlformats.org/drawingml/2006/main">
             <a:r>
-              <a:t>README SHA-256 516b20d0c5b90558e7659c4ca71b2f2741d929c1a41d2427ac823f265f49b730</a:t>
-            </a:r>
-          </a:p>
-          <a:p xmlns:a="http://schemas.openxmlformats.org/drawingml/2006/main">
-            <a:r>
-              <a:t>Proposal SHA-256 02323339203777b80b0bf8969f2392a4663b78be29e88f26f859df376999774a</a:t>
-            </a:r>
-          </a:p>
-          <a:p xmlns:a="http://schemas.openxmlformats.org/drawingml/2006/main">
-            <a:r>
-              <a:t>Immutable execution receipt SHA-256 4f212b53f00cd7f31bae7b94ea63e6a4b99e3a9cf9e645b2989e888a51ceecbf</a:t>
-            </a:r>
-          </a:p>
-          <a:p xmlns:a="http://schemas.openxmlformats.org/drawingml/2006/main">
-            <a:r>
-              <a:t>Later audit SHA-256 75abc802636f2e337b6fda2002b14f4ddf89f434901bae4a034734403f73e35f</a:t>
-            </a:r>
-          </a:p>
-          <a:p xmlns:a="http://schemas.openxmlformats.org/drawingml/2006/main">
-            <a:r>
-              <a:t>Fresh October 7 execution of the merged proposal candidate, compared with the prior immutable run and followed by repeated independent diagnostics. No runtime implementation repairs.</a:t>
+              <a:t>README SHA-256 708a3b5c2d26a82e32e7ec3c381c2ebb7cda8274fd4567709f98d76d85ca8f6c</a:t>
+            </a:r>
+          </a:p>
+          <a:p xmlns:a="http://schemas.openxmlformats.org/drawingml/2006/main">
+            <a:r>
+              <a:t>Proposal SHA-256 28768109389139a56d5c8e5f473446bfa46dd1ab46a48924165b97fb92cb7ae9</a:t>
+            </a:r>
+          </a:p>
+          <a:p xmlns:a="http://schemas.openxmlformats.org/drawingml/2006/main">
+            <a:r>
+              <a:t>Immutable execution receipt SHA-256 b12019e039ab52f930fb2f4321ca2289875bcdefbd3dbbd669b72a8689647e46</a:t>
+            </a:r>
+          </a:p>
+          <a:p xmlns:a="http://schemas.openxmlformats.org/drawingml/2006/main">
+            <a:r>
+              <a:t>Later audit SHA-256 e7e5278ba30509b5a3e94196ffdb6d59aaa54eadacae97022f6ffab098d94a9a</a:t>
+            </a:r>
+          </a:p>
+          <a:p xmlns:a="http://schemas.openxmlformats.org/drawingml/2006/main">
+            <a:r>
+              <a:t>Fresh October 8 execution of the local stacked follow-up, with clause-traced adapter repairs and repeated independent diagnostics. No changes have been published.</a:t>
             </a:r>
           </a:p>
           <a:p xmlns:a="http://schemas.openxmlformats.org/drawingml/2006/main">
@@ -1915,17 +1915,17 @@
           </a:p>
           <a:p xmlns:a="http://schemas.openxmlformats.org/drawingml/2006/main">
             <a:r>
-              <a:t>Limit: The heatmap contains synthetic temperatures in kelvin. A different array layout mispairs four of six values and locations. This passing case does not establish support for every layout.</a:t>
-            </a:r>
-          </a:p>
-          <a:p xmlns:a="http://schemas.openxmlformats.org/drawingml/2006/main">
-            <a:r>
-              <a:t>Proposal: ### External measurement association at proposal/proposal-source.txt:1594</a:t>
-            </a:r>
-          </a:p>
-          <a:p xmlns:a="http://schemas.openxmlformats.org/drawingml/2006/main">
-            <a:r>
-              <a:t>Functional requirements: [{"id":8,"title":"Brought-in data keeps its coordinates and its CRS.","line":746},{"id":12,"title":"No angle read as a length.","line":826},{"id":18,"title":"Coordinates back out.","line":915},{"id":19,"title":"Resolution leaves the scene as authored.","line":930},{"id":21,"title":"Never placed by a guess.","line":966},{"id":30,"title":"Measurements remain usable as data.","line":998}]</a:t>
+              <a:t>Limit: Synthetic values. Dimension-name tests check associations independently of the shared decoder.</a:t>
+            </a:r>
+          </a:p>
+          <a:p xmlns:a="http://schemas.openxmlformats.org/drawingml/2006/main">
+            <a:r>
+              <a:t>Proposal: ### External measurement association at proposal/proposal-source.txt:1610</a:t>
+            </a:r>
+          </a:p>
+          <a:p xmlns:a="http://schemas.openxmlformats.org/drawingml/2006/main">
+            <a:r>
+              <a:t>Functional requirements: [{"id":8,"title":"Brought-in data keeps its coordinates and its CRS.","line":751},{"id":12,"title":"No angle read as a length.","line":831},{"id":18,"title":"Coordinates back out.","line":917},{"id":19,"title":"Resolution leaves the scene as authored.","line":932},{"id":21,"title":"Never placed by a guess.","line":968},{"id":30,"title":"Measurements remain usable as data.","line":1003}]</a:t>
             </a:r>
           </a:p>
           <a:p xmlns:a="http://schemas.openxmlformats.org/drawingml/2006/main">
@@ -1940,27 +1940,27 @@
           </a:p>
           <a:p xmlns:a="http://schemas.openxmlformats.org/drawingml/2006/main">
             <a:r>
-              <a:t>README SHA-256 516b20d0c5b90558e7659c4ca71b2f2741d929c1a41d2427ac823f265f49b730</a:t>
-            </a:r>
-          </a:p>
-          <a:p xmlns:a="http://schemas.openxmlformats.org/drawingml/2006/main">
-            <a:r>
-              <a:t>Proposal SHA-256 02323339203777b80b0bf8969f2392a4663b78be29e88f26f859df376999774a</a:t>
-            </a:r>
-          </a:p>
-          <a:p xmlns:a="http://schemas.openxmlformats.org/drawingml/2006/main">
-            <a:r>
-              <a:t>Immutable execution receipt SHA-256 4f212b53f00cd7f31bae7b94ea63e6a4b99e3a9cf9e645b2989e888a51ceecbf</a:t>
-            </a:r>
-          </a:p>
-          <a:p xmlns:a="http://schemas.openxmlformats.org/drawingml/2006/main">
-            <a:r>
-              <a:t>Later audit SHA-256 75abc802636f2e337b6fda2002b14f4ddf89f434901bae4a034734403f73e35f</a:t>
-            </a:r>
-          </a:p>
-          <a:p xmlns:a="http://schemas.openxmlformats.org/drawingml/2006/main">
-            <a:r>
-              <a:t>Fresh October 7 execution of the merged proposal candidate, compared with the prior immutable run and followed by repeated independent diagnostics. No runtime implementation repairs.</a:t>
+              <a:t>README SHA-256 708a3b5c2d26a82e32e7ec3c381c2ebb7cda8274fd4567709f98d76d85ca8f6c</a:t>
+            </a:r>
+          </a:p>
+          <a:p xmlns:a="http://schemas.openxmlformats.org/drawingml/2006/main">
+            <a:r>
+              <a:t>Proposal SHA-256 28768109389139a56d5c8e5f473446bfa46dd1ab46a48924165b97fb92cb7ae9</a:t>
+            </a:r>
+          </a:p>
+          <a:p xmlns:a="http://schemas.openxmlformats.org/drawingml/2006/main">
+            <a:r>
+              <a:t>Immutable execution receipt SHA-256 b12019e039ab52f930fb2f4321ca2289875bcdefbd3dbbd669b72a8689647e46</a:t>
+            </a:r>
+          </a:p>
+          <a:p xmlns:a="http://schemas.openxmlformats.org/drawingml/2006/main">
+            <a:r>
+              <a:t>Later audit SHA-256 e7e5278ba30509b5a3e94196ffdb6d59aaa54eadacae97022f6ffab098d94a9a</a:t>
+            </a:r>
+          </a:p>
+          <a:p xmlns:a="http://schemas.openxmlformats.org/drawingml/2006/main">
+            <a:r>
+              <a:t>Fresh October 8 execution of the local stacked follow-up, with clause-traced adapter repairs and repeated independent diagnostics. No changes have been published.</a:t>
             </a:r>
           </a:p>
           <a:p xmlns:a="http://schemas.openxmlformats.org/drawingml/2006/main">
@@ -2035,7 +2035,7 @@
           <a:lstStyle xmlns:a="http://schemas.openxmlformats.org/drawingml/2006/main"/>
           <a:p xmlns:a="http://schemas.openxmlformats.org/drawingml/2006/main">
             <a:r>
-              <a:t>{"section":"What the later audit changes","status":[["Proposal definitions","The candidate specifies inputs and evaluation rules for the displayed cases. Detailed choices still need group review."],["Newly confirmed model gap","This audit established no additional data-model blocker. It does not establish an exhaustive search for missing meaning."],["Implementation evidence","The selected cases work. 7 later audit issues remain failed or unverified."],["Deferred capabilities","Coordinate epochs and scene-authored transformation resources remain on the roadmap. Initial choices must preserve a path to adding them."]],"issues":[["Surface lighting directions","A private sampling shortcut has no justified error bound. One projected case differs by about 1.24 degrees."],["Repeated models","A referenced model outside the bound subtree fails instead of receiving the instancer's placement."],["Baked geometry","Two source triangles become three output triangles. The check misses the extra geometry."],["Measurement locations","A different array dimension order pairs four of six values with the wrong locations. Both readers share this decoder."],["Other scene information","The bake removes an unrelated MotionAPI schema application, changing other scene meaning."],["Error reporting","Reports omit required per-component errors and separate angular errors."],["Invalid input detection","An invalid placement attribute on an inherited-only child is silently ignored."]]}</a:t>
+              <a:t>{"section":"Fresh independent audit","status":[["Proposal definitions","A focused requirements baseline is separate from the full candidate used for execution. Supported meaning and pending conventions are distinguished."],["Newly confirmed model gap","No additional undefined model rule was confirmed in reviewed paths. This is a scoped assessment, not an exhaustive completeness proof."],["Implementation evidence","The selected cases work. 6 prior defects pass fresh counterexamples; 1 remains unresolved."],["Deferred capabilities","Coordinate epochs and scene-authored transformation resources remain on the roadmap. Initial choices must preserve a path to adding them."]],"issues":[["Surface lighting directions","Remaining: normal sampling has no justified domain/error bound; projected difference about 1.24 degrees."],["Repeated models","Corrected: an unbound library prototype receives its instancer placement in both readers."],["Baked geometry","Corrected: two source meshes yield exactly two baked meshes; extras are rejected."],["Measurement locations","Corrected: all six measurements retain the coordinates declared by dimension names."],["Other scene information","Corrected: the bake retains MotionAPI and its velocity-scale value."],["Error reporting","Corrected: reports include component errors, magnitudes and angular errors."],["Invalid input detection","Corrected: both readers reject an invalid child placement field."]]}</a:t>
             </a:r>
           </a:p>
           <a:p xmlns:a="http://schemas.openxmlformats.org/drawingml/2006/main">
@@ -2045,27 +2045,27 @@
           </a:p>
           <a:p xmlns:a="http://schemas.openxmlformats.org/drawingml/2006/main">
             <a:r>
-              <a:t>README SHA-256 516b20d0c5b90558e7659c4ca71b2f2741d929c1a41d2427ac823f265f49b730</a:t>
-            </a:r>
-          </a:p>
-          <a:p xmlns:a="http://schemas.openxmlformats.org/drawingml/2006/main">
-            <a:r>
-              <a:t>Proposal SHA-256 02323339203777b80b0bf8969f2392a4663b78be29e88f26f859df376999774a</a:t>
-            </a:r>
-          </a:p>
-          <a:p xmlns:a="http://schemas.openxmlformats.org/drawingml/2006/main">
-            <a:r>
-              <a:t>Immutable execution receipt SHA-256 4f212b53f00cd7f31bae7b94ea63e6a4b99e3a9cf9e645b2989e888a51ceecbf</a:t>
-            </a:r>
-          </a:p>
-          <a:p xmlns:a="http://schemas.openxmlformats.org/drawingml/2006/main">
-            <a:r>
-              <a:t>Later audit SHA-256 75abc802636f2e337b6fda2002b14f4ddf89f434901bae4a034734403f73e35f</a:t>
-            </a:r>
-          </a:p>
-          <a:p xmlns:a="http://schemas.openxmlformats.org/drawingml/2006/main">
-            <a:r>
-              <a:t>Fresh October 7 execution of the merged proposal candidate, compared with the prior immutable run and followed by repeated independent diagnostics. No runtime implementation repairs.</a:t>
+              <a:t>README SHA-256 708a3b5c2d26a82e32e7ec3c381c2ebb7cda8274fd4567709f98d76d85ca8f6c</a:t>
+            </a:r>
+          </a:p>
+          <a:p xmlns:a="http://schemas.openxmlformats.org/drawingml/2006/main">
+            <a:r>
+              <a:t>Proposal SHA-256 28768109389139a56d5c8e5f473446bfa46dd1ab46a48924165b97fb92cb7ae9</a:t>
+            </a:r>
+          </a:p>
+          <a:p xmlns:a="http://schemas.openxmlformats.org/drawingml/2006/main">
+            <a:r>
+              <a:t>Immutable execution receipt SHA-256 b12019e039ab52f930fb2f4321ca2289875bcdefbd3dbbd669b72a8689647e46</a:t>
+            </a:r>
+          </a:p>
+          <a:p xmlns:a="http://schemas.openxmlformats.org/drawingml/2006/main">
+            <a:r>
+              <a:t>Later audit SHA-256 e7e5278ba30509b5a3e94196ffdb6d59aaa54eadacae97022f6ffab098d94a9a</a:t>
+            </a:r>
+          </a:p>
+          <a:p xmlns:a="http://schemas.openxmlformats.org/drawingml/2006/main">
+            <a:r>
+              <a:t>Fresh October 8 execution of the local stacked follow-up, with clause-traced adapter repairs and repeated independent diagnostics. No changes have been published.</a:t>
             </a:r>
           </a:p>
           <a:p xmlns:a="http://schemas.openxmlformats.org/drawingml/2006/main">
@@ -2170,12 +2170,12 @@
           </a:p>
           <a:p xmlns:a="http://schemas.openxmlformats.org/drawingml/2006/main">
             <a:r>
-              <a:t>Proposal: #### Decision on question 7: site calibration at proposal/proposal-source.txt:1283</a:t>
-            </a:r>
-          </a:p>
-          <a:p xmlns:a="http://schemas.openxmlformats.org/drawingml/2006/main">
-            <a:r>
-              <a:t>Functional requirements: [{"id":4,"title":"A site's own grid is a CRS like any other.","line":669},{"id":14,"title":"Scene conventions stay the scene's.","line":857},{"id":15,"title":"Placement separate from conformance.","line":870},{"id":17,"title":"The same answer for every consumer.","line":902}]</a:t>
+              <a:t>Proposal: #### Decision on question 7: site calibration at proposal/proposal-source.txt:1294</a:t>
+            </a:r>
+          </a:p>
+          <a:p xmlns:a="http://schemas.openxmlformats.org/drawingml/2006/main">
+            <a:r>
+              <a:t>Functional requirements: [{"id":4,"title":"A site's own grid is a CRS like any other.","line":674},{"id":14,"title":"Scene conventions stay the scene's.","line":857},{"id":15,"title":"Placement separate from conformance.","line":870},{"id":17,"title":"The same answer for every consumer.","line":902}]</a:t>
             </a:r>
           </a:p>
           <a:p xmlns:a="http://schemas.openxmlformats.org/drawingml/2006/main">
@@ -2190,27 +2190,27 @@
           </a:p>
           <a:p xmlns:a="http://schemas.openxmlformats.org/drawingml/2006/main">
             <a:r>
-              <a:t>README SHA-256 516b20d0c5b90558e7659c4ca71b2f2741d929c1a41d2427ac823f265f49b730</a:t>
-            </a:r>
-          </a:p>
-          <a:p xmlns:a="http://schemas.openxmlformats.org/drawingml/2006/main">
-            <a:r>
-              <a:t>Proposal SHA-256 02323339203777b80b0bf8969f2392a4663b78be29e88f26f859df376999774a</a:t>
-            </a:r>
-          </a:p>
-          <a:p xmlns:a="http://schemas.openxmlformats.org/drawingml/2006/main">
-            <a:r>
-              <a:t>Immutable execution receipt SHA-256 4f212b53f00cd7f31bae7b94ea63e6a4b99e3a9cf9e645b2989e888a51ceecbf</a:t>
-            </a:r>
-          </a:p>
-          <a:p xmlns:a="http://schemas.openxmlformats.org/drawingml/2006/main">
-            <a:r>
-              <a:t>Later audit SHA-256 75abc802636f2e337b6fda2002b14f4ddf89f434901bae4a034734403f73e35f</a:t>
-            </a:r>
-          </a:p>
-          <a:p xmlns:a="http://schemas.openxmlformats.org/drawingml/2006/main">
-            <a:r>
-              <a:t>Fresh October 7 execution of the merged proposal candidate, compared with the prior immutable run and followed by repeated independent diagnostics. No runtime implementation repairs.</a:t>
+              <a:t>README SHA-256 708a3b5c2d26a82e32e7ec3c381c2ebb7cda8274fd4567709f98d76d85ca8f6c</a:t>
+            </a:r>
+          </a:p>
+          <a:p xmlns:a="http://schemas.openxmlformats.org/drawingml/2006/main">
+            <a:r>
+              <a:t>Proposal SHA-256 28768109389139a56d5c8e5f473446bfa46dd1ab46a48924165b97fb92cb7ae9</a:t>
+            </a:r>
+          </a:p>
+          <a:p xmlns:a="http://schemas.openxmlformats.org/drawingml/2006/main">
+            <a:r>
+              <a:t>Immutable execution receipt SHA-256 b12019e039ab52f930fb2f4321ca2289875bcdefbd3dbbd669b72a8689647e46</a:t>
+            </a:r>
+          </a:p>
+          <a:p xmlns:a="http://schemas.openxmlformats.org/drawingml/2006/main">
+            <a:r>
+              <a:t>Later audit SHA-256 e7e5278ba30509b5a3e94196ffdb6d59aaa54eadacae97022f6ffab098d94a9a</a:t>
+            </a:r>
+          </a:p>
+          <a:p xmlns:a="http://schemas.openxmlformats.org/drawingml/2006/main">
+            <a:r>
+              <a:t>Fresh October 8 execution of the local stacked follow-up, with clause-traced adapter repairs and repeated independent diagnostics. No changes have been published.</a:t>
             </a:r>
           </a:p>
           <a:p xmlns:a="http://schemas.openxmlformats.org/drawingml/2006/main">
@@ -2262,7 +2262,7 @@
           <p:cNvPr id="3" name="Title">
             <a:extLst xmlns:a="http://schemas.openxmlformats.org/drawingml/2006/main">
               <a:ext uri="{FF2B5EF4-FFF2-40B4-BE49-F238E27FC236}">
-                <a16:creationId xmlns:a16="http://schemas.microsoft.com/office/drawing/2014/main" id="{220659E9-D203-4473-AA5F-2871A1BDF4B9}"/>
+                <a16:creationId xmlns:a16="http://schemas.microsoft.com/office/drawing/2014/main" id="{21BB5223-5EEC-44E0-AE9A-8D60D412E027}"/>
               </a:ext>
             </a:extLst>
           </p:cNvPr>
@@ -2419,7 +2419,7 @@
           <p:cNvPr id="2" name="Subtitle">
             <a:extLst xmlns:a="http://schemas.openxmlformats.org/drawingml/2006/main">
               <a:ext uri="{FF2B5EF4-FFF2-40B4-BE49-F238E27FC236}">
-                <a16:creationId xmlns:a16="http://schemas.microsoft.com/office/drawing/2014/main" id="{1F75DA7E-1AE4-47CA-8A2C-599C2659F0E8}"/>
+                <a16:creationId xmlns:a16="http://schemas.microsoft.com/office/drawing/2014/main" id="{011BF116-BB13-46A9-90BE-2E473EF69CE7}"/>
               </a:ext>
             </a:extLst>
           </p:cNvPr>
@@ -2593,7 +2593,7 @@
           <p:cNvPr id="2" name="Section title">
             <a:extLst xmlns:a="http://schemas.openxmlformats.org/drawingml/2006/main">
               <a:ext uri="{FF2B5EF4-FFF2-40B4-BE49-F238E27FC236}">
-                <a16:creationId xmlns:a16="http://schemas.microsoft.com/office/drawing/2014/main" id="{BBD11E14-5A80-4070-B363-D8B4AAB9BC48}"/>
+                <a16:creationId xmlns:a16="http://schemas.microsoft.com/office/drawing/2014/main" id="{23BCB66F-27A5-4AE5-BCD3-AEAC8EE46F7D}"/>
               </a:ext>
             </a:extLst>
           </p:cNvPr>
@@ -2767,7 +2767,7 @@
           <p:cNvPr id="3" name="Title">
             <a:extLst xmlns:a="http://schemas.openxmlformats.org/drawingml/2006/main">
               <a:ext uri="{FF2B5EF4-FFF2-40B4-BE49-F238E27FC236}">
-                <a16:creationId xmlns:a16="http://schemas.microsoft.com/office/drawing/2014/main" id="{2185428A-A9AE-4754-A167-A4883351AA5A}"/>
+                <a16:creationId xmlns:a16="http://schemas.microsoft.com/office/drawing/2014/main" id="{24E279D9-2EB9-416D-A08E-5E01B5862D6E}"/>
               </a:ext>
             </a:extLst>
           </p:cNvPr>
@@ -2924,7 +2924,7 @@
           <p:cNvPr id="2" name="Body">
             <a:extLst xmlns:a="http://schemas.openxmlformats.org/drawingml/2006/main">
               <a:ext uri="{FF2B5EF4-FFF2-40B4-BE49-F238E27FC236}">
-                <a16:creationId xmlns:a16="http://schemas.microsoft.com/office/drawing/2014/main" id="{4A01EE01-423C-4BF1-BAD9-AD71A01B2E74}"/>
+                <a16:creationId xmlns:a16="http://schemas.microsoft.com/office/drawing/2014/main" id="{AC70189C-322D-4E71-A2D1-BFAC58395084}"/>
               </a:ext>
             </a:extLst>
           </p:cNvPr>
@@ -3098,7 +3098,7 @@
           <p:cNvPr id="4" name="Title">
             <a:extLst xmlns:a="http://schemas.openxmlformats.org/drawingml/2006/main">
               <a:ext uri="{FF2B5EF4-FFF2-40B4-BE49-F238E27FC236}">
-                <a16:creationId xmlns:a16="http://schemas.microsoft.com/office/drawing/2014/main" id="{1F18A24A-B485-4A01-8117-0E26196E5EA9}"/>
+                <a16:creationId xmlns:a16="http://schemas.microsoft.com/office/drawing/2014/main" id="{E444A410-EB75-4A5B-9E35-5A33E8322C64}"/>
               </a:ext>
             </a:extLst>
           </p:cNvPr>
@@ -3255,7 +3255,7 @@
           <p:cNvPr id="2" name="Left column">
             <a:extLst xmlns:a="http://schemas.openxmlformats.org/drawingml/2006/main">
               <a:ext uri="{FF2B5EF4-FFF2-40B4-BE49-F238E27FC236}">
-                <a16:creationId xmlns:a16="http://schemas.microsoft.com/office/drawing/2014/main" id="{B4D9F165-3908-428C-9190-966CE7848D93}"/>
+                <a16:creationId xmlns:a16="http://schemas.microsoft.com/office/drawing/2014/main" id="{9A7B4911-8414-46C6-BD4E-8A208B2817F5}"/>
               </a:ext>
             </a:extLst>
           </p:cNvPr>
@@ -3412,7 +3412,7 @@
           <p:cNvPr id="3" name="Right column">
             <a:extLst xmlns:a="http://schemas.openxmlformats.org/drawingml/2006/main">
               <a:ext uri="{FF2B5EF4-FFF2-40B4-BE49-F238E27FC236}">
-                <a16:creationId xmlns:a16="http://schemas.microsoft.com/office/drawing/2014/main" id="{1D455195-7D37-4699-9600-513CE51B2A45}"/>
+                <a16:creationId xmlns:a16="http://schemas.microsoft.com/office/drawing/2014/main" id="{10785BDE-9A24-4D8D-AB5A-9E6CEE9EFD03}"/>
               </a:ext>
             </a:extLst>
           </p:cNvPr>
@@ -3586,7 +3586,7 @@
           <p:cNvPr id="3" name="Title">
             <a:extLst xmlns:a="http://schemas.openxmlformats.org/drawingml/2006/main">
               <a:ext uri="{FF2B5EF4-FFF2-40B4-BE49-F238E27FC236}">
-                <a16:creationId xmlns:a16="http://schemas.microsoft.com/office/drawing/2014/main" id="{A30F211D-3C5B-4295-92D5-00AA23A6033B}"/>
+                <a16:creationId xmlns:a16="http://schemas.microsoft.com/office/drawing/2014/main" id="{EA7322A0-617E-4A6D-9B63-543C50B1B663}"/>
               </a:ext>
             </a:extLst>
           </p:cNvPr>
@@ -3743,7 +3743,7 @@
           <p:cNvPr id="2" name="Left column">
             <a:extLst xmlns:a="http://schemas.openxmlformats.org/drawingml/2006/main">
               <a:ext uri="{FF2B5EF4-FFF2-40B4-BE49-F238E27FC236}">
-                <a16:creationId xmlns:a16="http://schemas.microsoft.com/office/drawing/2014/main" id="{87AE72FE-A597-42F4-B993-42C5BDCE5A8E}"/>
+                <a16:creationId xmlns:a16="http://schemas.microsoft.com/office/drawing/2014/main" id="{7A3F0FC4-FCCF-498D-B8AB-DC92CFA92172}"/>
               </a:ext>
             </a:extLst>
           </p:cNvPr>
@@ -3938,12 +3938,12 @@
   </p:cSld>
   <p:clrMap bg1="lt1" tx1="dk1" bg2="lt2" tx2="dk2" accent1="accent1" accent2="accent2" accent3="accent3" accent4="accent4" accent5="accent5" accent6="accent6" hlink="hlink" folHlink="folHlink"/>
   <p:sldLayoutIdLst>
-    <p:sldLayoutId xmlns:r="http://schemas.openxmlformats.org/officeDocument/2006/relationships" id="2147483649" r:id="Rd553a99e5c8742ce"/>
-    <p:sldLayoutId xmlns:r="http://schemas.openxmlformats.org/officeDocument/2006/relationships" id="2147483650" r:id="R408132e069874fcd"/>
-    <p:sldLayoutId xmlns:r="http://schemas.openxmlformats.org/officeDocument/2006/relationships" id="2147483651" r:id="Rd963513004a04202"/>
-    <p:sldLayoutId xmlns:r="http://schemas.openxmlformats.org/officeDocument/2006/relationships" id="2147483652" r:id="R5462bf3210d842d5"/>
-    <p:sldLayoutId xmlns:r="http://schemas.openxmlformats.org/officeDocument/2006/relationships" id="2147483653" r:id="R205afdfa0fcd4551"/>
-    <p:sldLayoutId xmlns:r="http://schemas.openxmlformats.org/officeDocument/2006/relationships" id="2147483654" r:id="R023c756582894d55"/>
+    <p:sldLayoutId xmlns:r="http://schemas.openxmlformats.org/officeDocument/2006/relationships" id="2147483649" r:id="R47389a25d2694ec1"/>
+    <p:sldLayoutId xmlns:r="http://schemas.openxmlformats.org/officeDocument/2006/relationships" id="2147483650" r:id="R5c9e4b39db504ff9"/>
+    <p:sldLayoutId xmlns:r="http://schemas.openxmlformats.org/officeDocument/2006/relationships" id="2147483651" r:id="R974c490a934049ea"/>
+    <p:sldLayoutId xmlns:r="http://schemas.openxmlformats.org/officeDocument/2006/relationships" id="2147483652" r:id="R4bfcf0087f034859"/>
+    <p:sldLayoutId xmlns:r="http://schemas.openxmlformats.org/officeDocument/2006/relationships" id="2147483653" r:id="R9eb25a25fd9a4fc1"/>
+    <p:sldLayoutId xmlns:r="http://schemas.openxmlformats.org/officeDocument/2006/relationships" id="2147483654" r:id="Rac238190cc924918"/>
   </p:sldLayoutIdLst>
   <p:txStyles>
     <p:titleStyle>
@@ -4758,7 +4758,7 @@
           <p:cNvPr id="5" name="">
             <a:extLst xmlns:a="http://schemas.openxmlformats.org/drawingml/2006/main">
               <a:ext uri="{FF2B5EF4-FFF2-40B4-BE49-F238E27FC236}">
-                <a16:creationId xmlns:a16="http://schemas.microsoft.com/office/drawing/2014/main" id="{C8D60A16-78C3-4EE0-AFB8-9F873F12A3CF}"/>
+                <a16:creationId xmlns:a16="http://schemas.microsoft.com/office/drawing/2014/main" id="{B339C9E5-DF6F-4457-B0B3-C80E3076CF75}"/>
               </a:ext>
             </a:extLst>
           </p:cNvPr>
@@ -4830,7 +4830,7 @@
           <p:cNvPr id="2" name="">
             <a:extLst xmlns:a="http://schemas.openxmlformats.org/drawingml/2006/main">
               <a:ext uri="{FF2B5EF4-FFF2-40B4-BE49-F238E27FC236}">
-                <a16:creationId xmlns:a16="http://schemas.microsoft.com/office/drawing/2014/main" id="{E31A36F0-9BEB-4F15-B98F-D3886E3A0997}"/>
+                <a16:creationId xmlns:a16="http://schemas.microsoft.com/office/drawing/2014/main" id="{8D3C77EB-E9C4-44C3-8E48-EBA8BE154B7D}"/>
               </a:ext>
             </a:extLst>
           </p:cNvPr>
@@ -4902,7 +4902,7 @@
           <p:cNvPr id="3" name="">
             <a:extLst xmlns:a="http://schemas.openxmlformats.org/drawingml/2006/main">
               <a:ext uri="{FF2B5EF4-FFF2-40B4-BE49-F238E27FC236}">
-                <a16:creationId xmlns:a16="http://schemas.microsoft.com/office/drawing/2014/main" id="{BAC565FE-91AD-4BD8-9B0A-AB0CE696C6B6}"/>
+                <a16:creationId xmlns:a16="http://schemas.microsoft.com/office/drawing/2014/main" id="{E91A9F4F-FF3E-494E-90AE-08B943FBA73E}"/>
               </a:ext>
             </a:extLst>
           </p:cNvPr>
@@ -4964,7 +4964,7 @@
                 <a:ea typeface="Arial"/>
                 <a:cs typeface="Arial"/>
               </a:rPr>
-              <a:t>The merged background separates map-grid distances and north from physical model size and orientation. A narrow clarification keeps stage axes distinct. Existing placement rules remain unchanged.</a:t>
+              <a:t>The local split gives reviewers a focused requirements baseline and a separate full model/runtime candidate. Clearer array, invalid-input and bake rules now have fresh tests.</a:t>
             </a:r>
           </a:p>
         </p:txBody>
@@ -4974,7 +4974,7 @@
           <p:cNvPr id="4" name="">
             <a:extLst xmlns:a="http://schemas.openxmlformats.org/drawingml/2006/main">
               <a:ext uri="{FF2B5EF4-FFF2-40B4-BE49-F238E27FC236}">
-                <a16:creationId xmlns:a16="http://schemas.microsoft.com/office/drawing/2014/main" id="{93662254-A4ED-4FB9-9B1B-57F2519AB24D}"/>
+                <a16:creationId xmlns:a16="http://schemas.microsoft.com/office/drawing/2014/main" id="{04AF12E0-4D5D-4755-B730-A288F2D2AE4C}"/>
               </a:ext>
             </a:extLst>
           </p:cNvPr>
@@ -5036,7 +5036,7 @@
                 <a:ea typeface="Arial"/>
                 <a:cs typeface="Arial"/>
               </a:rPr>
-              <a:t>The fresh run reproduces the selected results with no numerical changes. Seven known prototype issues also reproduce. Clearer explanation does not mean those defects are fixed.</a:t>
+              <a:t>All prior recorded numeric results match. Six audited defects are corrected; normal sampling remains unresolved. Orientation storage and detailed conventions still need review.</a:t>
             </a:r>
           </a:p>
         </p:txBody>
@@ -5044,7 +5044,7 @@
     </p:spTree>
     <p:extLst>
       <p:ext uri="{BB962C8B-B14F-4D97-AF65-F5344CB8AC3E}">
-        <p14:creationId xmlns:p14="http://schemas.microsoft.com/office/powerpoint/2010/main" val="2105127"/>
+        <p14:creationId xmlns:p14="http://schemas.microsoft.com/office/powerpoint/2010/main" val="1674383663"/>
       </p:ext>
     </p:extLst>
   </p:cSld>
@@ -5075,7 +5075,7 @@
           <p:cNvPr id="9" name="">
             <a:extLst xmlns:a="http://schemas.openxmlformats.org/drawingml/2006/main">
               <a:ext uri="{FF2B5EF4-FFF2-40B4-BE49-F238E27FC236}">
-                <a16:creationId xmlns:a16="http://schemas.microsoft.com/office/drawing/2014/main" id="{4D307153-D94B-44C8-8601-7196D7A2E91B}"/>
+                <a16:creationId xmlns:a16="http://schemas.microsoft.com/office/drawing/2014/main" id="{F82EAF67-1390-4799-B7DD-5CD317638EE3}"/>
               </a:ext>
             </a:extLst>
           </p:cNvPr>
@@ -5147,7 +5147,7 @@
           <p:cNvPr id="2" name="">
             <a:extLst xmlns:a="http://schemas.openxmlformats.org/drawingml/2006/main">
               <a:ext uri="{FF2B5EF4-FFF2-40B4-BE49-F238E27FC236}">
-                <a16:creationId xmlns:a16="http://schemas.microsoft.com/office/drawing/2014/main" id="{6B273EF4-58A1-46BB-A5B5-BD79CE69D0D0}"/>
+                <a16:creationId xmlns:a16="http://schemas.microsoft.com/office/drawing/2014/main" id="{EC16A695-28E5-4D86-8A7A-DB6954A10881}"/>
               </a:ext>
             </a:extLst>
           </p:cNvPr>
@@ -5219,7 +5219,7 @@
           <p:cNvPr id="3" name="">
             <a:extLst xmlns:a="http://schemas.openxmlformats.org/drawingml/2006/main">
               <a:ext uri="{FF2B5EF4-FFF2-40B4-BE49-F238E27FC236}">
-                <a16:creationId xmlns:a16="http://schemas.microsoft.com/office/drawing/2014/main" id="{1E0DBABB-D27B-4046-A810-149F2659D54D}"/>
+                <a16:creationId xmlns:a16="http://schemas.microsoft.com/office/drawing/2014/main" id="{A4260F1B-37C8-46F2-9899-BEBC6ACD6FBC}"/>
               </a:ext>
             </a:extLst>
           </p:cNvPr>
@@ -5229,7 +5229,7 @@
           <p:nvPr/>
         </p:nvPicPr>
         <p:blipFill>
-          <a:blip xmlns:r="http://schemas.openxmlformats.org/officeDocument/2006/relationships" xmlns:a="http://schemas.openxmlformats.org/drawingml/2006/main" r:embed="R5a3c4667fbfa46b3"/>
+          <a:blip xmlns:r="http://schemas.openxmlformats.org/officeDocument/2006/relationships" xmlns:a="http://schemas.openxmlformats.org/drawingml/2006/main" r:embed="R2e02d866ed564574"/>
           <a:stretch xmlns:a="http://schemas.openxmlformats.org/drawingml/2006/main"/>
         </p:blipFill>
         <p:spPr>
@@ -5247,7 +5247,7 @@
           <p:cNvPr id="4" name="">
             <a:extLst xmlns:a="http://schemas.openxmlformats.org/drawingml/2006/main">
               <a:ext uri="{FF2B5EF4-FFF2-40B4-BE49-F238E27FC236}">
-                <a16:creationId xmlns:a16="http://schemas.microsoft.com/office/drawing/2014/main" id="{D78AA00A-2B71-4C5F-AB7F-E044908661B6}"/>
+                <a16:creationId xmlns:a16="http://schemas.microsoft.com/office/drawing/2014/main" id="{7ADD2866-C0AE-447F-8355-BD923741E0CC}"/>
               </a:ext>
             </a:extLst>
           </p:cNvPr>
@@ -5319,7 +5319,7 @@
           <p:cNvPr id="5" name="">
             <a:extLst xmlns:a="http://schemas.openxmlformats.org/drawingml/2006/main">
               <a:ext uri="{FF2B5EF4-FFF2-40B4-BE49-F238E27FC236}">
-                <a16:creationId xmlns:a16="http://schemas.microsoft.com/office/drawing/2014/main" id="{7044622D-FA76-4EAF-BBDF-BC0DEDAB463A}"/>
+                <a16:creationId xmlns:a16="http://schemas.microsoft.com/office/drawing/2014/main" id="{9420BE06-00E2-40E6-806B-A20C8BF214D6}"/>
               </a:ext>
             </a:extLst>
           </p:cNvPr>
@@ -5391,7 +5391,7 @@
           <p:cNvPr id="6" name="">
             <a:extLst xmlns:a="http://schemas.openxmlformats.org/drawingml/2006/main">
               <a:ext uri="{FF2B5EF4-FFF2-40B4-BE49-F238E27FC236}">
-                <a16:creationId xmlns:a16="http://schemas.microsoft.com/office/drawing/2014/main" id="{068C5AB4-737D-45A5-A565-4B6B1C8AB448}"/>
+                <a16:creationId xmlns:a16="http://schemas.microsoft.com/office/drawing/2014/main" id="{78ED6A29-2FF0-432D-A10D-9DEA0B618836}"/>
               </a:ext>
             </a:extLst>
           </p:cNvPr>
@@ -5463,7 +5463,7 @@
           <p:cNvPr id="7" name="">
             <a:extLst xmlns:a="http://schemas.openxmlformats.org/drawingml/2006/main">
               <a:ext uri="{FF2B5EF4-FFF2-40B4-BE49-F238E27FC236}">
-                <a16:creationId xmlns:a16="http://schemas.microsoft.com/office/drawing/2014/main" id="{3995FE27-49CD-4941-B5BC-D6C38EEBA8B1}"/>
+                <a16:creationId xmlns:a16="http://schemas.microsoft.com/office/drawing/2014/main" id="{82E1BB47-20E9-4B26-8668-3A1167A689C7}"/>
               </a:ext>
             </a:extLst>
           </p:cNvPr>
@@ -5535,7 +5535,7 @@
           <p:cNvPr id="8" name="">
             <a:extLst xmlns:a="http://schemas.openxmlformats.org/drawingml/2006/main">
               <a:ext uri="{FF2B5EF4-FFF2-40B4-BE49-F238E27FC236}">
-                <a16:creationId xmlns:a16="http://schemas.microsoft.com/office/drawing/2014/main" id="{9F650FB1-06F4-4B30-91C6-2BC8A59965A6}"/>
+                <a16:creationId xmlns:a16="http://schemas.microsoft.com/office/drawing/2014/main" id="{0E16DF49-A3FB-4C87-B501-3A3264A27C7E}"/>
               </a:ext>
             </a:extLst>
           </p:cNvPr>
@@ -5605,7 +5605,7 @@
     </p:spTree>
     <p:extLst>
       <p:ext uri="{BB962C8B-B14F-4D97-AF65-F5344CB8AC3E}">
-        <p14:creationId xmlns:p14="http://schemas.microsoft.com/office/powerpoint/2010/main" val="1667724693"/>
+        <p14:creationId xmlns:p14="http://schemas.microsoft.com/office/powerpoint/2010/main" val="465805258"/>
       </p:ext>
     </p:extLst>
   </p:cSld>
@@ -5636,7 +5636,7 @@
           <p:cNvPr id="7" name="">
             <a:extLst xmlns:a="http://schemas.openxmlformats.org/drawingml/2006/main">
               <a:ext uri="{FF2B5EF4-FFF2-40B4-BE49-F238E27FC236}">
-                <a16:creationId xmlns:a16="http://schemas.microsoft.com/office/drawing/2014/main" id="{FB1808EC-2E13-4BA0-982B-1EF43D1995D2}"/>
+                <a16:creationId xmlns:a16="http://schemas.microsoft.com/office/drawing/2014/main" id="{4D88F204-8723-436A-BF7F-03B1E7F10E19}"/>
               </a:ext>
             </a:extLst>
           </p:cNvPr>
@@ -5708,7 +5708,7 @@
           <p:cNvPr id="2" name="">
             <a:extLst xmlns:a="http://schemas.openxmlformats.org/drawingml/2006/main">
               <a:ext uri="{FF2B5EF4-FFF2-40B4-BE49-F238E27FC236}">
-                <a16:creationId xmlns:a16="http://schemas.microsoft.com/office/drawing/2014/main" id="{82F66357-1293-4A68-B4F2-FD7E6360F6BC}"/>
+                <a16:creationId xmlns:a16="http://schemas.microsoft.com/office/drawing/2014/main" id="{04A40F4B-5382-42BB-B555-FE28CD3429F7}"/>
               </a:ext>
             </a:extLst>
           </p:cNvPr>
@@ -5780,7 +5780,7 @@
           <p:cNvPr id="3" name="Chart">
             <a:extLst xmlns:a="http://schemas.openxmlformats.org/drawingml/2006/main">
               <a:ext uri="{FF2B5EF4-FFF2-40B4-BE49-F238E27FC236}">
-                <a16:creationId xmlns:a16="http://schemas.microsoft.com/office/drawing/2014/main" id="{BE6B5CFE-E99A-4E75-B6FB-0361FF4D09F7}"/>
+                <a16:creationId xmlns:a16="http://schemas.microsoft.com/office/drawing/2014/main" id="{4819782F-2B50-43D3-80EB-D1D8C64785F6}"/>
               </a:ext>
             </a:extLst>
           </p:cNvPr>
@@ -5793,7 +5793,7 @@
         </p:xfrm>
         <a:graphic xmlns:a="http://schemas.openxmlformats.org/drawingml/2006/main">
           <a:graphicData uri="http://schemas.openxmlformats.org/drawingml/2006/chart">
-            <c:chart xmlns:r="http://schemas.openxmlformats.org/officeDocument/2006/relationships" xmlns:c="http://schemas.openxmlformats.org/drawingml/2006/chart" r:id="Rd814ae8aeb1741e1"/>
+            <c:chart xmlns:r="http://schemas.openxmlformats.org/officeDocument/2006/relationships" xmlns:c="http://schemas.openxmlformats.org/drawingml/2006/chart" r:id="R737f6c6caba24874"/>
           </a:graphicData>
         </a:graphic>
       </p:graphicFrame>
@@ -5802,7 +5802,7 @@
           <p:cNvPr id="4" name="">
             <a:extLst xmlns:a="http://schemas.openxmlformats.org/drawingml/2006/main">
               <a:ext uri="{FF2B5EF4-FFF2-40B4-BE49-F238E27FC236}">
-                <a16:creationId xmlns:a16="http://schemas.microsoft.com/office/drawing/2014/main" id="{9F003387-EB0F-4CDB-942B-B63147D5DB6F}"/>
+                <a16:creationId xmlns:a16="http://schemas.microsoft.com/office/drawing/2014/main" id="{63714EE2-9E5C-4D9B-A271-23F1B303A628}"/>
               </a:ext>
             </a:extLst>
           </p:cNvPr>
@@ -5874,7 +5874,7 @@
           <p:cNvPr id="5" name="">
             <a:extLst xmlns:a="http://schemas.openxmlformats.org/drawingml/2006/main">
               <a:ext uri="{FF2B5EF4-FFF2-40B4-BE49-F238E27FC236}">
-                <a16:creationId xmlns:a16="http://schemas.microsoft.com/office/drawing/2014/main" id="{742EE51F-07A0-49BE-9295-FBE6043852B4}"/>
+                <a16:creationId xmlns:a16="http://schemas.microsoft.com/office/drawing/2014/main" id="{A4CFC832-D3F4-4D84-9B35-69442FCCD750}"/>
               </a:ext>
             </a:extLst>
           </p:cNvPr>
@@ -5946,7 +5946,7 @@
           <p:cNvPr id="6" name="">
             <a:extLst xmlns:a="http://schemas.openxmlformats.org/drawingml/2006/main">
               <a:ext uri="{FF2B5EF4-FFF2-40B4-BE49-F238E27FC236}">
-                <a16:creationId xmlns:a16="http://schemas.microsoft.com/office/drawing/2014/main" id="{4FC0A719-5B98-47F6-801F-4507E801A28A}"/>
+                <a16:creationId xmlns:a16="http://schemas.microsoft.com/office/drawing/2014/main" id="{AE1027ED-4A1E-4EE1-B372-BEAC93788B38}"/>
               </a:ext>
             </a:extLst>
           </p:cNvPr>
@@ -6016,7 +6016,7 @@
     </p:spTree>
     <p:extLst>
       <p:ext uri="{BB962C8B-B14F-4D97-AF65-F5344CB8AC3E}">
-        <p14:creationId xmlns:p14="http://schemas.microsoft.com/office/powerpoint/2010/main" val="607872323"/>
+        <p14:creationId xmlns:p14="http://schemas.microsoft.com/office/powerpoint/2010/main" val="1580927308"/>
       </p:ext>
     </p:extLst>
   </p:cSld>
@@ -6047,7 +6047,7 @@
           <p:cNvPr id="4" name="">
             <a:extLst xmlns:a="http://schemas.openxmlformats.org/drawingml/2006/main">
               <a:ext uri="{FF2B5EF4-FFF2-40B4-BE49-F238E27FC236}">
-                <a16:creationId xmlns:a16="http://schemas.microsoft.com/office/drawing/2014/main" id="{2DBDE8B4-401F-4681-86EA-B0AAEF9035E2}"/>
+                <a16:creationId xmlns:a16="http://schemas.microsoft.com/office/drawing/2014/main" id="{C166774B-7F2B-48AF-9D5B-65941AAE0262}"/>
               </a:ext>
             </a:extLst>
           </p:cNvPr>
@@ -6119,7 +6119,7 @@
           <p:cNvPr id="2" name="">
             <a:extLst xmlns:a="http://schemas.openxmlformats.org/drawingml/2006/main">
               <a:ext uri="{FF2B5EF4-FFF2-40B4-BE49-F238E27FC236}">
-                <a16:creationId xmlns:a16="http://schemas.microsoft.com/office/drawing/2014/main" id="{A0A6F905-2E35-4455-88D9-F3D667A020C3}"/>
+                <a16:creationId xmlns:a16="http://schemas.microsoft.com/office/drawing/2014/main" id="{F0A6E468-D0C7-41BD-B066-6163EA746BE4}"/>
               </a:ext>
             </a:extLst>
           </p:cNvPr>
@@ -6181,7 +6181,7 @@
                           <a:ea typeface="Arial"/>
                           <a:cs typeface="Arial"/>
                         </a:rPr>
-                        <a:t>Proposed meaning to review</a:t>
+                        <a:t>Supported meaning and candidate detail</a:t>
                       </a:r>
                     </a:p>
                   </a:txBody>
@@ -6235,7 +6235,7 @@
                           <a:ea typeface="Arial"/>
                           <a:cs typeface="Arial"/>
                         </a:rPr>
-                        <a:t>Record model orientation relative to local east, north and up. A different map projection does not redefine it.</a:t>
+                        <a:t>Input-only meaning is supported. Stored quaternion versus one heading/pitch/roll tuple and its interpolation need review.</a:t>
                       </a:r>
                     </a:p>
                   </a:txBody>
@@ -6289,7 +6289,7 @@
                           <a:ea typeface="Arial"/>
                           <a:cs typeface="Arial"/>
                         </a:rPr>
-                        <a:t>Its ordinary scale, rotation and translation adjust placed geometry in a fixed project frame.</a:t>
+                        <a:t>Project adjustment meaning is supported. The detailed fixed working-frame convention remains a candidate.</a:t>
                       </a:r>
                     </a:p>
                   </a:txBody>
@@ -6343,7 +6343,7 @@
                           <a:ea typeface="Arial"/>
                           <a:cs typeface="Arial"/>
                         </a:rPr>
-                        <a:t>Child transforms define model-local geometry. Their offsets follow model axes instead of being silently reinterpreted as map axes.</a:t>
+                        <a:t>Model-local meaning is supported. The follow-up specifies chart/reset details and tests that offsets retain their interpretation.</a:t>
                       </a:r>
                     </a:p>
                   </a:txBody>
@@ -6471,7 +6471,7 @@
           <p:cNvPr id="3" name="">
             <a:extLst xmlns:a="http://schemas.openxmlformats.org/drawingml/2006/main">
               <a:ext uri="{FF2B5EF4-FFF2-40B4-BE49-F238E27FC236}">
-                <a16:creationId xmlns:a16="http://schemas.microsoft.com/office/drawing/2014/main" id="{B5918D31-1BFA-42CB-8361-4E5A1C15CE99}"/>
+                <a16:creationId xmlns:a16="http://schemas.microsoft.com/office/drawing/2014/main" id="{3318E34D-242F-4065-B85A-6DF13EC76921}"/>
               </a:ext>
             </a:extLst>
           </p:cNvPr>
@@ -6533,7 +6533,7 @@
                 <a:ea typeface="Arial"/>
                 <a:cs typeface="Arial"/>
               </a:rPr>
-              <a:t>These are definitions in the candidate, not new inferred behavior supplied by the demonstrations.</a:t>
+              <a:t>Review stored orientation and detailed conventions; keep the supported input-only meaning.</a:t>
             </a:r>
           </a:p>
         </p:txBody>
@@ -6541,7 +6541,7 @@
     </p:spTree>
     <p:extLst>
       <p:ext uri="{BB962C8B-B14F-4D97-AF65-F5344CB8AC3E}">
-        <p14:creationId xmlns:p14="http://schemas.microsoft.com/office/powerpoint/2010/main" val="74984838"/>
+        <p14:creationId xmlns:p14="http://schemas.microsoft.com/office/powerpoint/2010/main" val="2059646077"/>
       </p:ext>
     </p:extLst>
   </p:cSld>
@@ -6572,7 +6572,7 @@
           <p:cNvPr id="4" name="">
             <a:extLst xmlns:a="http://schemas.openxmlformats.org/drawingml/2006/main">
               <a:ext uri="{FF2B5EF4-FFF2-40B4-BE49-F238E27FC236}">
-                <a16:creationId xmlns:a16="http://schemas.microsoft.com/office/drawing/2014/main" id="{56924FCE-E771-4274-9C8A-8F437FFA3A46}"/>
+                <a16:creationId xmlns:a16="http://schemas.microsoft.com/office/drawing/2014/main" id="{93DD7A22-F0D1-4E8E-A06D-1313101D09B7}"/>
               </a:ext>
             </a:extLst>
           </p:cNvPr>
@@ -6644,7 +6644,7 @@
           <p:cNvPr id="2" name="">
             <a:extLst xmlns:a="http://schemas.openxmlformats.org/drawingml/2006/main">
               <a:ext uri="{FF2B5EF4-FFF2-40B4-BE49-F238E27FC236}">
-                <a16:creationId xmlns:a16="http://schemas.microsoft.com/office/drawing/2014/main" id="{C8D4C97B-0688-47D3-9A28-EF2529166536}"/>
+                <a16:creationId xmlns:a16="http://schemas.microsoft.com/office/drawing/2014/main" id="{E85426E1-D85F-409F-92C1-18F056F48C77}"/>
               </a:ext>
             </a:extLst>
           </p:cNvPr>
@@ -6706,7 +6706,7 @@
                           <a:ea typeface="Arial"/>
                           <a:cs typeface="Arial"/>
                         </a:rPr>
-                        <a:t>Proposed meaning to review</a:t>
+                        <a:t>Supported meaning and candidate detail</a:t>
                       </a:r>
                     </a:p>
                   </a:txBody>
@@ -6976,7 +6976,7 @@
                           <a:ea typeface="Arial"/>
                           <a:cs typeface="Arial"/>
                         </a:rPr>
-                        <a:t>Keep a Cartesian CRS context without an active placement binding, so readers do not apply georeferencing a second time.</a:t>
+                        <a:t>Record a Cartesian CRS and ordinary double-precision origin. Preserve precision and space/time coverage.</a:t>
                       </a:r>
                     </a:p>
                   </a:txBody>
@@ -6996,7 +6996,7 @@
           <p:cNvPr id="3" name="">
             <a:extLst xmlns:a="http://schemas.openxmlformats.org/drawingml/2006/main">
               <a:ext uri="{FF2B5EF4-FFF2-40B4-BE49-F238E27FC236}">
-                <a16:creationId xmlns:a16="http://schemas.microsoft.com/office/drawing/2014/main" id="{5E1EB3FB-1996-43D8-9924-A0DD436F2AAB}"/>
+                <a16:creationId xmlns:a16="http://schemas.microsoft.com/office/drawing/2014/main" id="{1CB5E1FF-DAD5-413D-B09B-2CF3FE0ED234}"/>
               </a:ext>
             </a:extLst>
           </p:cNvPr>
@@ -7066,7 +7066,7 @@
     </p:spTree>
     <p:extLst>
       <p:ext uri="{BB962C8B-B14F-4D97-AF65-F5344CB8AC3E}">
-        <p14:creationId xmlns:p14="http://schemas.microsoft.com/office/powerpoint/2010/main" val="1024770362"/>
+        <p14:creationId xmlns:p14="http://schemas.microsoft.com/office/powerpoint/2010/main" val="1354288103"/>
       </p:ext>
     </p:extLst>
   </p:cSld>
@@ -7097,7 +7097,7 @@
           <p:cNvPr id="4" name="">
             <a:extLst xmlns:a="http://schemas.openxmlformats.org/drawingml/2006/main">
               <a:ext uri="{FF2B5EF4-FFF2-40B4-BE49-F238E27FC236}">
-                <a16:creationId xmlns:a16="http://schemas.microsoft.com/office/drawing/2014/main" id="{74A59391-F3FC-44F9-87DD-9DD6A1A40D74}"/>
+                <a16:creationId xmlns:a16="http://schemas.microsoft.com/office/drawing/2014/main" id="{0A8DA65A-F5AE-4A29-A568-644D37B5B6A5}"/>
               </a:ext>
             </a:extLst>
           </p:cNvPr>
@@ -7169,7 +7169,7 @@
           <p:cNvPr id="2" name="">
             <a:extLst xmlns:a="http://schemas.openxmlformats.org/drawingml/2006/main">
               <a:ext uri="{FF2B5EF4-FFF2-40B4-BE49-F238E27FC236}">
-                <a16:creationId xmlns:a16="http://schemas.microsoft.com/office/drawing/2014/main" id="{6658C26E-BB19-41F0-80C1-917DCDB7B0BE}"/>
+                <a16:creationId xmlns:a16="http://schemas.microsoft.com/office/drawing/2014/main" id="{880D8B17-AEEC-438A-88BC-789A1370D361}"/>
               </a:ext>
             </a:extLst>
           </p:cNvPr>
@@ -7447,7 +7447,7 @@
                           <a:ea typeface="Arial"/>
                           <a:cs typeface="Arial"/>
                         </a:rPr>
-                        <a:t>64 regressions and 61 distinguishing controls passed. The later audit exposes cases the suite missed.</a:t>
+                        <a:t>70 regressions and 61 distinguishing controls passed. Fresh independent diagnostics verify six repairs and retain the unresolved normal case.</a:t>
                       </a:r>
                     </a:p>
                   </a:txBody>
@@ -7555,7 +7555,7 @@
                           <a:ea typeface="Arial"/>
                           <a:cs typeface="Arial"/>
                         </a:rPr>
-                        <a:t>11 selected exports were checked. The later nested-geometry case demonstrates that the original inventory check was incomplete.</a:t>
+                        <a:t>11 selected exports were checked. The fresh nested-geometry counterexample verifies the complete inventory, including unexpected extras.</a:t>
                       </a:r>
                     </a:p>
                   </a:txBody>
@@ -7575,7 +7575,7 @@
           <p:cNvPr id="3" name="">
             <a:extLst xmlns:a="http://schemas.openxmlformats.org/drawingml/2006/main">
               <a:ext uri="{FF2B5EF4-FFF2-40B4-BE49-F238E27FC236}">
-                <a16:creationId xmlns:a16="http://schemas.microsoft.com/office/drawing/2014/main" id="{0C805AAC-28C6-492F-84CF-DBB3B771503D}"/>
+                <a16:creationId xmlns:a16="http://schemas.microsoft.com/office/drawing/2014/main" id="{799C3C2D-0E32-433F-A1CD-8C840C554423}"/>
               </a:ext>
             </a:extLst>
           </p:cNvPr>
@@ -7645,7 +7645,7 @@
     </p:spTree>
     <p:extLst>
       <p:ext uri="{BB962C8B-B14F-4D97-AF65-F5344CB8AC3E}">
-        <p14:creationId xmlns:p14="http://schemas.microsoft.com/office/powerpoint/2010/main" val="115224191"/>
+        <p14:creationId xmlns:p14="http://schemas.microsoft.com/office/powerpoint/2010/main" val="1941559474"/>
       </p:ext>
     </p:extLst>
   </p:cSld>
@@ -7676,7 +7676,7 @@
           <p:cNvPr id="5" name="">
             <a:extLst xmlns:a="http://schemas.openxmlformats.org/drawingml/2006/main">
               <a:ext uri="{FF2B5EF4-FFF2-40B4-BE49-F238E27FC236}">
-                <a16:creationId xmlns:a16="http://schemas.microsoft.com/office/drawing/2014/main" id="{51D3FA83-3CF0-4D29-80A1-A92E66F44436}"/>
+                <a16:creationId xmlns:a16="http://schemas.microsoft.com/office/drawing/2014/main" id="{16E05D2E-B59A-4A21-AE8D-177F977D3D34}"/>
               </a:ext>
             </a:extLst>
           </p:cNvPr>
@@ -7748,7 +7748,7 @@
           <p:cNvPr id="2" name="">
             <a:extLst xmlns:a="http://schemas.openxmlformats.org/drawingml/2006/main">
               <a:ext uri="{FF2B5EF4-FFF2-40B4-BE49-F238E27FC236}">
-                <a16:creationId xmlns:a16="http://schemas.microsoft.com/office/drawing/2014/main" id="{47D4F09B-0FC0-4AEF-BCFF-648BA4FDC251}"/>
+                <a16:creationId xmlns:a16="http://schemas.microsoft.com/office/drawing/2014/main" id="{7A894154-04AC-445D-9F96-91709503C409}"/>
               </a:ext>
             </a:extLst>
           </p:cNvPr>
@@ -7820,7 +7820,7 @@
           <p:cNvPr id="3" name="">
             <a:extLst xmlns:a="http://schemas.openxmlformats.org/drawingml/2006/main">
               <a:ext uri="{FF2B5EF4-FFF2-40B4-BE49-F238E27FC236}">
-                <a16:creationId xmlns:a16="http://schemas.microsoft.com/office/drawing/2014/main" id="{5CF45E00-BF87-475F-B612-865502752FD2}"/>
+                <a16:creationId xmlns:a16="http://schemas.microsoft.com/office/drawing/2014/main" id="{6FB36966-D90A-45AC-81F1-BDA953897139}"/>
               </a:ext>
             </a:extLst>
           </p:cNvPr>
@@ -8118,7 +8118,7 @@
           <p:cNvPr id="4" name="">
             <a:extLst xmlns:a="http://schemas.openxmlformats.org/drawingml/2006/main">
               <a:ext uri="{FF2B5EF4-FFF2-40B4-BE49-F238E27FC236}">
-                <a16:creationId xmlns:a16="http://schemas.microsoft.com/office/drawing/2014/main" id="{AC9A4B84-0A44-491B-8109-BFFA354A6E4E}"/>
+                <a16:creationId xmlns:a16="http://schemas.microsoft.com/office/drawing/2014/main" id="{921F0828-9793-4813-A65B-ADFABF4CBDF3}"/>
               </a:ext>
             </a:extLst>
           </p:cNvPr>
@@ -8188,7 +8188,7 @@
     </p:spTree>
     <p:extLst>
       <p:ext uri="{BB962C8B-B14F-4D97-AF65-F5344CB8AC3E}">
-        <p14:creationId xmlns:p14="http://schemas.microsoft.com/office/powerpoint/2010/main" val="1186204746"/>
+        <p14:creationId xmlns:p14="http://schemas.microsoft.com/office/powerpoint/2010/main" val="1763462481"/>
       </p:ext>
     </p:extLst>
   </p:cSld>
@@ -8219,7 +8219,7 @@
           <ns0:cNvPr id="9" name="">
             <ns1:extLst>
               <ns1:ext uri="{FF2B5EF4-FFF2-40B4-BE49-F238E27FC236}">
-                <ns2:creationId id="{A8997B19-FBF6-432E-9D97-F01C839DB4EB}"/>
+                <ns2:creationId id="{3D86A9BA-8A12-415A-BFB4-AFE6D8B382F5}"/>
               </ns1:ext>
             </ns1:extLst>
           </ns0:cNvPr>
@@ -8291,7 +8291,7 @@
           <ns0:cNvPr id="2" name="">
             <ns1:extLst>
               <ns1:ext uri="{FF2B5EF4-FFF2-40B4-BE49-F238E27FC236}">
-                <ns2:creationId id="{A0046876-670D-44A8-BB36-C1818ACA27BE}"/>
+                <ns2:creationId id="{95DF31BE-574A-427B-899C-1A671E863588}"/>
               </ns1:ext>
             </ns1:extLst>
           </ns0:cNvPr>
@@ -8363,7 +8363,7 @@
           <ns0:cNvPr id="3" name="">
             <ns1:extLst>
               <ns1:ext uri="{FF2B5EF4-FFF2-40B4-BE49-F238E27FC236}">
-                <ns2:creationId id="{AE6A5364-26FC-4894-B9BA-E8C98454E129}"/>
+                <ns2:creationId id="{D1B9E510-DBB8-4A17-A926-CC2A7BC0E611}"/>
               </ns1:ext>
             </ns1:extLst>
           </ns0:cNvPr>
@@ -8373,7 +8373,7 @@
           <ns0:nvPr/>
         </ns0:nvPicPr>
         <ns0:blipFill>
-          <ns1:blip ns3:embed="Rfd4a5a114129447e"/>
+          <ns1:blip ns3:embed="Rb8d858c899bd4a9d"/>
           <ns1:srcRect l="0" t="8974" r="0" b="33333"/>
           <ns1:stretch/>
         </ns0:blipFill>
@@ -8392,7 +8392,7 @@
           <ns0:cNvPr id="4" name="">
             <ns1:extLst>
               <ns1:ext uri="{FF2B5EF4-FFF2-40B4-BE49-F238E27FC236}">
-                <ns2:creationId id="{793B4E92-1261-4548-9CFD-6623CC26C48C}"/>
+                <ns2:creationId id="{AA1FB82F-B4E3-4407-BC1E-6CB4CAD6D4A2}"/>
               </ns1:ext>
             </ns1:extLst>
           </ns0:cNvPr>
@@ -8464,7 +8464,7 @@
           <ns0:cNvPr id="5" name="">
             <ns1:extLst>
               <ns1:ext uri="{FF2B5EF4-FFF2-40B4-BE49-F238E27FC236}">
-                <ns2:creationId id="{B89751A4-573F-47A5-87F4-C1863A5E5A88}"/>
+                <ns2:creationId id="{AFBC5CDA-3B79-4986-B954-948331925C04}"/>
               </ns1:ext>
             </ns1:extLst>
           </ns0:cNvPr>
@@ -8536,7 +8536,7 @@
           <ns0:cNvPr id="6" name="">
             <ns1:extLst>
               <ns1:ext uri="{FF2B5EF4-FFF2-40B4-BE49-F238E27FC236}">
-                <ns2:creationId id="{691ADE80-F196-470B-B53E-A5698918D270}"/>
+                <ns2:creationId id="{5E7D78C6-AD82-4579-A2AB-45EC61855353}"/>
               </ns1:ext>
             </ns1:extLst>
           </ns0:cNvPr>
@@ -8608,7 +8608,7 @@
           <ns0:cNvPr id="7" name="">
             <ns1:extLst>
               <ns1:ext uri="{FF2B5EF4-FFF2-40B4-BE49-F238E27FC236}">
-                <ns2:creationId id="{88C1F53E-E920-409D-A9F0-FC162DDCA51F}"/>
+                <ns2:creationId id="{F5C322F2-F9BD-4F8E-9897-CB49546197A9}"/>
               </ns1:ext>
             </ns1:extLst>
           </ns0:cNvPr>
@@ -8680,7 +8680,7 @@
           <ns0:cNvPr id="8" name="">
             <ns1:extLst>
               <ns1:ext uri="{FF2B5EF4-FFF2-40B4-BE49-F238E27FC236}">
-                <ns2:creationId id="{F036CAFA-53D5-4192-8777-444138BA875A}"/>
+                <ns2:creationId id="{7187F4B5-F0FB-492A-9A32-9AAD47943FD7}"/>
               </ns1:ext>
             </ns1:extLst>
           </ns0:cNvPr>
@@ -8750,7 +8750,7 @@
     </ns0:spTree>
     <ns0:extLst>
       <ns0:ext uri="{BB962C8B-B14F-4D97-AF65-F5344CB8AC3E}">
-        <ns4:creationId val="342702757"/>
+        <ns4:creationId val="773685833"/>
       </ns0:ext>
     </ns0:extLst>
   </ns0:cSld>
@@ -8781,7 +8781,7 @@
           <ns0:cNvPr id="9" name="">
             <ns1:extLst>
               <ns1:ext uri="{FF2B5EF4-FFF2-40B4-BE49-F238E27FC236}">
-                <ns2:creationId id="{660F4F99-9711-46BE-A86F-64F56A35CD52}"/>
+                <ns2:creationId id="{1C1CDA5B-1267-47BD-B596-97FA948C4411}"/>
               </ns1:ext>
             </ns1:extLst>
           </ns0:cNvPr>
@@ -8853,7 +8853,7 @@
           <ns0:cNvPr id="2" name="">
             <ns1:extLst>
               <ns1:ext uri="{FF2B5EF4-FFF2-40B4-BE49-F238E27FC236}">
-                <ns2:creationId id="{6FEFF846-2D8C-4E48-BAE8-B5619BDCC334}"/>
+                <ns2:creationId id="{0EE40F72-06B4-4962-822C-46F180EFB9A6}"/>
               </ns1:ext>
             </ns1:extLst>
           </ns0:cNvPr>
@@ -8925,7 +8925,7 @@
           <ns0:cNvPr id="3" name="">
             <ns1:extLst>
               <ns1:ext uri="{FF2B5EF4-FFF2-40B4-BE49-F238E27FC236}">
-                <ns2:creationId id="{427A7AFA-4EE7-4987-B107-12D9E4F62684}"/>
+                <ns2:creationId id="{5B2F041A-55EA-4CF6-B4CB-DDC39D22D3DD}"/>
               </ns1:ext>
             </ns1:extLst>
           </ns0:cNvPr>
@@ -8935,7 +8935,7 @@
           <ns0:nvPr/>
         </ns0:nvPicPr>
         <ns0:blipFill>
-          <ns1:blip ns3:embed="R46ca8c7b4f3c44ef"/>
+          <ns1:blip ns3:embed="Rd07a50b13ce94e34"/>
           <ns1:srcRect l="0" t="8974" r="0" b="33333"/>
           <ns1:stretch/>
         </ns0:blipFill>
@@ -8954,7 +8954,7 @@
           <ns0:cNvPr id="4" name="">
             <ns1:extLst>
               <ns1:ext uri="{FF2B5EF4-FFF2-40B4-BE49-F238E27FC236}">
-                <ns2:creationId id="{738DA97F-3CF6-42EA-AA2B-270B77F4A3E0}"/>
+                <ns2:creationId id="{2AFA0065-3D73-4AB4-93BA-76B91A21689E}"/>
               </ns1:ext>
             </ns1:extLst>
           </ns0:cNvPr>
@@ -9026,7 +9026,7 @@
           <ns0:cNvPr id="5" name="">
             <ns1:extLst>
               <ns1:ext uri="{FF2B5EF4-FFF2-40B4-BE49-F238E27FC236}">
-                <ns2:creationId id="{8EC15DC7-B656-4DFA-AB7E-393AB3CC1B96}"/>
+                <ns2:creationId id="{60A36E72-4900-410B-B28D-FD54E2625377}"/>
               </ns1:ext>
             </ns1:extLst>
           </ns0:cNvPr>
@@ -9098,7 +9098,7 @@
           <ns0:cNvPr id="6" name="">
             <ns1:extLst>
               <ns1:ext uri="{FF2B5EF4-FFF2-40B4-BE49-F238E27FC236}">
-                <ns2:creationId id="{D783CBEA-A742-47F5-BC74-1BA013814A04}"/>
+                <ns2:creationId id="{E7275140-8A84-4DC4-B145-B6805AB43F50}"/>
               </ns1:ext>
             </ns1:extLst>
           </ns0:cNvPr>
@@ -9170,7 +9170,7 @@
           <ns0:cNvPr id="7" name="">
             <ns1:extLst>
               <ns1:ext uri="{FF2B5EF4-FFF2-40B4-BE49-F238E27FC236}">
-                <ns2:creationId id="{B845B4EC-CD2B-4090-8330-61420B51D03D}"/>
+                <ns2:creationId id="{58C9DD7D-66BF-432A-9FC4-B91012BC2DA9}"/>
               </ns1:ext>
             </ns1:extLst>
           </ns0:cNvPr>
@@ -9232,7 +9232,7 @@
                 <ns1:ea typeface="Arial"/>
                 <ns1:cs typeface="Arial"/>
               </ns1:rPr>
-              <ns1:t>Order changes the result. The control makes the proposed child-transform choice reviewable; matching readers do not establish agreement.</ns1:t>
+              <ns1:t>Order changes the result. The control tests the agreed anchor/child distinction while detailed chart and instance conventions remain candidates.</ns1:t>
             </ns1:r>
           </ns1:p>
         </ns0:txBody>
@@ -9242,7 +9242,7 @@
           <ns0:cNvPr id="8" name="">
             <ns1:extLst>
               <ns1:ext uri="{FF2B5EF4-FFF2-40B4-BE49-F238E27FC236}">
-                <ns2:creationId id="{7D9C4843-0C26-4430-A117-03FF13E0D239}"/>
+                <ns2:creationId id="{640CC6FE-9A8D-4087-B2FE-61F6458301F3}"/>
               </ns1:ext>
             </ns1:extLst>
           </ns0:cNvPr>
@@ -9312,7 +9312,7 @@
     </ns0:spTree>
     <ns0:extLst>
       <ns0:ext uri="{BB962C8B-B14F-4D97-AF65-F5344CB8AC3E}">
-        <ns4:creationId val="912373193"/>
+        <ns4:creationId val="1795429975"/>
       </ns0:ext>
     </ns0:extLst>
   </ns0:cSld>
@@ -9343,7 +9343,7 @@
           <p:cNvPr id="8" name="">
             <a:extLst xmlns:a="http://schemas.openxmlformats.org/drawingml/2006/main">
               <a:ext uri="{FF2B5EF4-FFF2-40B4-BE49-F238E27FC236}">
-                <a16:creationId xmlns:a16="http://schemas.microsoft.com/office/drawing/2014/main" id="{CC556289-84F8-4CB8-BF07-FAEA60A311E8}"/>
+                <a16:creationId xmlns:a16="http://schemas.microsoft.com/office/drawing/2014/main" id="{4D88F6AE-F813-4737-BF5A-96A71640419A}"/>
               </a:ext>
             </a:extLst>
           </p:cNvPr>
@@ -9415,7 +9415,7 @@
           <p:cNvPr id="2" name="">
             <a:extLst xmlns:a="http://schemas.openxmlformats.org/drawingml/2006/main">
               <a:ext uri="{FF2B5EF4-FFF2-40B4-BE49-F238E27FC236}">
-                <a16:creationId xmlns:a16="http://schemas.microsoft.com/office/drawing/2014/main" id="{D60B97B2-4F20-47A1-AC76-79281264E868}"/>
+                <a16:creationId xmlns:a16="http://schemas.microsoft.com/office/drawing/2014/main" id="{B5EA8A7B-7FD6-4053-AA70-4E6294F30597}"/>
               </a:ext>
             </a:extLst>
           </p:cNvPr>
@@ -9487,7 +9487,7 @@
           <p:cNvPr id="3" name="">
             <a:extLst xmlns:a="http://schemas.openxmlformats.org/drawingml/2006/main">
               <a:ext uri="{FF2B5EF4-FFF2-40B4-BE49-F238E27FC236}">
-                <a16:creationId xmlns:a16="http://schemas.microsoft.com/office/drawing/2014/main" id="{D7DC10D9-5E66-4882-B7E2-D5E55D31EAE2}"/>
+                <a16:creationId xmlns:a16="http://schemas.microsoft.com/office/drawing/2014/main" id="{6A96EAB3-9548-4F44-9D49-1DA69B1EB6D6}"/>
               </a:ext>
             </a:extLst>
           </p:cNvPr>
@@ -9559,7 +9559,7 @@
           <p:cNvPr id="4" name="">
             <a:extLst xmlns:a="http://schemas.openxmlformats.org/drawingml/2006/main">
               <a:ext uri="{FF2B5EF4-FFF2-40B4-BE49-F238E27FC236}">
-                <a16:creationId xmlns:a16="http://schemas.microsoft.com/office/drawing/2014/main" id="{D5D1D4AE-4C5D-4135-BE8E-D259CE924804}"/>
+                <a16:creationId xmlns:a16="http://schemas.microsoft.com/office/drawing/2014/main" id="{D4AA487A-6D8C-4CA0-8A55-38B25EA0726C}"/>
               </a:ext>
             </a:extLst>
           </p:cNvPr>
@@ -9908,7 +9908,7 @@
           <p:cNvPr id="5" name="">
             <a:extLst xmlns:a="http://schemas.openxmlformats.org/drawingml/2006/main">
               <a:ext uri="{FF2B5EF4-FFF2-40B4-BE49-F238E27FC236}">
-                <a16:creationId xmlns:a16="http://schemas.microsoft.com/office/drawing/2014/main" id="{24BC7458-6C3C-4DCC-AC2B-509F1BDECCF4}"/>
+                <a16:creationId xmlns:a16="http://schemas.microsoft.com/office/drawing/2014/main" id="{9E09BC29-F537-4556-88DC-D3E9A3FB86EA}"/>
               </a:ext>
             </a:extLst>
           </p:cNvPr>
@@ -9980,7 +9980,7 @@
           <p:cNvPr id="6" name="">
             <a:extLst xmlns:a="http://schemas.openxmlformats.org/drawingml/2006/main">
               <a:ext uri="{FF2B5EF4-FFF2-40B4-BE49-F238E27FC236}">
-                <a16:creationId xmlns:a16="http://schemas.microsoft.com/office/drawing/2014/main" id="{36FD42DF-65F8-436F-A290-8B1D41FA9F6D}"/>
+                <a16:creationId xmlns:a16="http://schemas.microsoft.com/office/drawing/2014/main" id="{22300BC3-E6C5-42C0-A782-43161CFFA228}"/>
               </a:ext>
             </a:extLst>
           </p:cNvPr>
@@ -10329,7 +10329,7 @@
           <p:cNvPr id="7" name="">
             <a:extLst xmlns:a="http://schemas.openxmlformats.org/drawingml/2006/main">
               <a:ext uri="{FF2B5EF4-FFF2-40B4-BE49-F238E27FC236}">
-                <a16:creationId xmlns:a16="http://schemas.microsoft.com/office/drawing/2014/main" id="{4E918993-3FE6-46E1-8C8A-526DEB4D516F}"/>
+                <a16:creationId xmlns:a16="http://schemas.microsoft.com/office/drawing/2014/main" id="{AB736EB1-4787-4B8D-8DE7-72346DD23DB1}"/>
               </a:ext>
             </a:extLst>
           </p:cNvPr>
@@ -10391,7 +10391,7 @@
                 <a:ea typeface="Arial"/>
                 <a:cs typeface="Arial"/>
               </a:rPr>
-              <a:t>Both readers use PROJ, the same CRS conversion library, and share native dataset decoding.</a:t>
+              <a:t>Both readers use PROJ and share dataset decoding.</a:t>
             </a:r>
           </a:p>
         </p:txBody>
@@ -10399,7 +10399,7 @@
     </p:spTree>
     <p:extLst>
       <p:ext uri="{BB962C8B-B14F-4D97-AF65-F5344CB8AC3E}">
-        <p14:creationId xmlns:p14="http://schemas.microsoft.com/office/powerpoint/2010/main" val="1240854999"/>
+        <p14:creationId xmlns:p14="http://schemas.microsoft.com/office/powerpoint/2010/main" val="1433457696"/>
       </p:ext>
     </p:extLst>
   </p:cSld>
@@ -10430,7 +10430,7 @@
           <p:cNvPr id="9" name="">
             <a:extLst xmlns:a="http://schemas.openxmlformats.org/drawingml/2006/main">
               <a:ext uri="{FF2B5EF4-FFF2-40B4-BE49-F238E27FC236}">
-                <a16:creationId xmlns:a16="http://schemas.microsoft.com/office/drawing/2014/main" id="{1D7067A2-1238-4C49-B217-6691362A3C61}"/>
+                <a16:creationId xmlns:a16="http://schemas.microsoft.com/office/drawing/2014/main" id="{3CC839B3-EF91-499F-B0CF-FC7A652E98A4}"/>
               </a:ext>
             </a:extLst>
           </p:cNvPr>
@@ -10502,7 +10502,7 @@
           <p:cNvPr id="2" name="">
             <a:extLst xmlns:a="http://schemas.openxmlformats.org/drawingml/2006/main">
               <a:ext uri="{FF2B5EF4-FFF2-40B4-BE49-F238E27FC236}">
-                <a16:creationId xmlns:a16="http://schemas.microsoft.com/office/drawing/2014/main" id="{5A64ED0F-A8AD-4663-A6AF-4E0E8FA9B207}"/>
+                <a16:creationId xmlns:a16="http://schemas.microsoft.com/office/drawing/2014/main" id="{E8EB1B87-B39E-4EDA-A365-0F8D1CF10E12}"/>
               </a:ext>
             </a:extLst>
           </p:cNvPr>
@@ -10574,7 +10574,7 @@
           <p:cNvPr id="3" name="">
             <a:extLst xmlns:a="http://schemas.openxmlformats.org/drawingml/2006/main">
               <a:ext uri="{FF2B5EF4-FFF2-40B4-BE49-F238E27FC236}">
-                <a16:creationId xmlns:a16="http://schemas.microsoft.com/office/drawing/2014/main" id="{605AD69D-7903-42F5-AE7F-52959F8A7CE7}"/>
+                <a16:creationId xmlns:a16="http://schemas.microsoft.com/office/drawing/2014/main" id="{CD20ACF7-D592-43B7-AB26-2A9305C3A05B}"/>
               </a:ext>
             </a:extLst>
           </p:cNvPr>
@@ -10584,7 +10584,7 @@
           <p:nvPr/>
         </p:nvPicPr>
         <p:blipFill>
-          <a:blip xmlns:r="http://schemas.openxmlformats.org/officeDocument/2006/relationships" xmlns:a="http://schemas.openxmlformats.org/drawingml/2006/main" r:embed="R8b7aa18c79314023"/>
+          <a:blip xmlns:r="http://schemas.openxmlformats.org/officeDocument/2006/relationships" xmlns:a="http://schemas.openxmlformats.org/drawingml/2006/main" r:embed="R69731ffa422042f8"/>
           <a:stretch xmlns:a="http://schemas.openxmlformats.org/drawingml/2006/main"/>
         </p:blipFill>
         <p:spPr>
@@ -10602,7 +10602,7 @@
           <p:cNvPr id="4" name="">
             <a:extLst xmlns:a="http://schemas.openxmlformats.org/drawingml/2006/main">
               <a:ext uri="{FF2B5EF4-FFF2-40B4-BE49-F238E27FC236}">
-                <a16:creationId xmlns:a16="http://schemas.microsoft.com/office/drawing/2014/main" id="{39EF8DE5-BCA5-4D0B-BCCB-28001A13F029}"/>
+                <a16:creationId xmlns:a16="http://schemas.microsoft.com/office/drawing/2014/main" id="{EF80E8D1-1151-4D88-AC43-511AC9C69B6C}"/>
               </a:ext>
             </a:extLst>
           </p:cNvPr>
@@ -10674,7 +10674,7 @@
           <p:cNvPr id="5" name="">
             <a:extLst xmlns:a="http://schemas.openxmlformats.org/drawingml/2006/main">
               <a:ext uri="{FF2B5EF4-FFF2-40B4-BE49-F238E27FC236}">
-                <a16:creationId xmlns:a16="http://schemas.microsoft.com/office/drawing/2014/main" id="{D65B6ED9-060B-4EA8-8B56-5835EBE71B34}"/>
+                <a16:creationId xmlns:a16="http://schemas.microsoft.com/office/drawing/2014/main" id="{C8E54E40-F8C1-4638-A7A0-CEF1138A6FF7}"/>
               </a:ext>
             </a:extLst>
           </p:cNvPr>
@@ -10736,7 +10736,7 @@
                 <a:ea typeface="Arial"/>
                 <a:cs typeface="Arial"/>
               </a:rPr>
-              <a:t>The C++ reader's resolved Eiffel copy reaches Hydra/Storm, a USD rendering path. This image is actual output from the recorded run.</a:t>
+              <a:t>Native Hydra/Storm renders the ordinary USD bake. A double-precision origin keeps local points small; fresh readers recover the placement.</a:t>
             </a:r>
           </a:p>
         </p:txBody>
@@ -10746,7 +10746,7 @@
           <p:cNvPr id="6" name="">
             <a:extLst xmlns:a="http://schemas.openxmlformats.org/drawingml/2006/main">
               <a:ext uri="{FF2B5EF4-FFF2-40B4-BE49-F238E27FC236}">
-                <a16:creationId xmlns:a16="http://schemas.microsoft.com/office/drawing/2014/main" id="{A159CD9D-9221-45D4-A770-A0324CBF5D5D}"/>
+                <a16:creationId xmlns:a16="http://schemas.microsoft.com/office/drawing/2014/main" id="{E566D8F5-262D-4793-AADD-D8550E010C33}"/>
               </a:ext>
             </a:extLst>
           </p:cNvPr>
@@ -10818,7 +10818,7 @@
           <p:cNvPr id="7" name="">
             <a:extLst xmlns:a="http://schemas.openxmlformats.org/drawingml/2006/main">
               <a:ext uri="{FF2B5EF4-FFF2-40B4-BE49-F238E27FC236}">
-                <a16:creationId xmlns:a16="http://schemas.microsoft.com/office/drawing/2014/main" id="{A55F29CC-4D69-403A-929D-8D74CF66577C}"/>
+                <a16:creationId xmlns:a16="http://schemas.microsoft.com/office/drawing/2014/main" id="{C2A21F56-1397-45AB-80BE-51BE6A1CF5ED}"/>
               </a:ext>
             </a:extLst>
           </p:cNvPr>
@@ -10880,7 +10880,7 @@
                 <a:ea typeface="Arial"/>
                 <a:cs typeface="Arial"/>
               </a:rPr>
-              <a:t>This case shows compatibility with an ordinary USD renderer. A separate nested-geometry failure prevents a claim that every bake is correct.</a:t>
+              <a:t>Unaware viewers receive resolved ordinary geometry. Fresh checks reject duplicate meshes and retain an unrelated applied schema.</a:t>
             </a:r>
           </a:p>
         </p:txBody>
@@ -10890,7 +10890,7 @@
           <p:cNvPr id="8" name="">
             <a:extLst xmlns:a="http://schemas.openxmlformats.org/drawingml/2006/main">
               <a:ext uri="{FF2B5EF4-FFF2-40B4-BE49-F238E27FC236}">
-                <a16:creationId xmlns:a16="http://schemas.microsoft.com/office/drawing/2014/main" id="{93D7C810-AF82-4BDE-9908-6F9A539BCF85}"/>
+                <a16:creationId xmlns:a16="http://schemas.microsoft.com/office/drawing/2014/main" id="{236DBB13-2B5B-48D3-B2AC-E7AA50E5A065}"/>
               </a:ext>
             </a:extLst>
           </p:cNvPr>
@@ -10960,7 +10960,7 @@
     </p:spTree>
     <p:extLst>
       <p:ext uri="{BB962C8B-B14F-4D97-AF65-F5344CB8AC3E}">
-        <p14:creationId xmlns:p14="http://schemas.microsoft.com/office/powerpoint/2010/main" val="649580977"/>
+        <p14:creationId xmlns:p14="http://schemas.microsoft.com/office/powerpoint/2010/main" val="493390405"/>
       </p:ext>
     </p:extLst>
   </p:cSld>
@@ -10991,7 +10991,7 @@
           <p:cNvPr id="6" name="">
             <a:extLst xmlns:a="http://schemas.openxmlformats.org/drawingml/2006/main">
               <a:ext uri="{FF2B5EF4-FFF2-40B4-BE49-F238E27FC236}">
-                <a16:creationId xmlns:a16="http://schemas.microsoft.com/office/drawing/2014/main" id="{92F94A92-7B97-49EE-97A3-DDFF37A06220}"/>
+                <a16:creationId xmlns:a16="http://schemas.microsoft.com/office/drawing/2014/main" id="{0ADEBFD0-223D-499A-9C9D-EEB69517B6A7}"/>
               </a:ext>
             </a:extLst>
           </p:cNvPr>
@@ -11063,7 +11063,7 @@
           <p:cNvPr id="2" name="">
             <a:extLst xmlns:a="http://schemas.openxmlformats.org/drawingml/2006/main">
               <a:ext uri="{FF2B5EF4-FFF2-40B4-BE49-F238E27FC236}">
-                <a16:creationId xmlns:a16="http://schemas.microsoft.com/office/drawing/2014/main" id="{3B2E9724-D19A-4130-97E6-F1CBA533AE82}"/>
+                <a16:creationId xmlns:a16="http://schemas.microsoft.com/office/drawing/2014/main" id="{E00042F4-5461-4D9F-98F0-01A2508B728A}"/>
               </a:ext>
             </a:extLst>
           </p:cNvPr>
@@ -11135,7 +11135,7 @@
           <p:cNvPr id="3" name="">
             <a:extLst xmlns:a="http://schemas.openxmlformats.org/drawingml/2006/main">
               <a:ext uri="{FF2B5EF4-FFF2-40B4-BE49-F238E27FC236}">
-                <a16:creationId xmlns:a16="http://schemas.microsoft.com/office/drawing/2014/main" id="{E3811190-EFD5-4201-8BB4-8DEAF5D33217}"/>
+                <a16:creationId xmlns:a16="http://schemas.microsoft.com/office/drawing/2014/main" id="{53983AA4-94B5-4A56-A2B2-5D0DD0781D4A}"/>
               </a:ext>
             </a:extLst>
           </p:cNvPr>
@@ -11145,7 +11145,7 @@
           <p:nvPr/>
         </p:nvPicPr>
         <p:blipFill>
-          <a:blip xmlns:r="http://schemas.openxmlformats.org/officeDocument/2006/relationships" xmlns:a="http://schemas.openxmlformats.org/drawingml/2006/main" r:embed="R0b1fc4eb1f484ab1"/>
+          <a:blip xmlns:r="http://schemas.openxmlformats.org/officeDocument/2006/relationships" xmlns:a="http://schemas.openxmlformats.org/drawingml/2006/main" r:embed="R55dd3fba41f648b8"/>
           <a:stretch xmlns:a="http://schemas.openxmlformats.org/drawingml/2006/main"/>
         </p:blipFill>
         <p:spPr>
@@ -11163,7 +11163,7 @@
           <p:cNvPr id="4" name="">
             <a:extLst xmlns:a="http://schemas.openxmlformats.org/drawingml/2006/main">
               <a:ext uri="{FF2B5EF4-FFF2-40B4-BE49-F238E27FC236}">
-                <a16:creationId xmlns:a16="http://schemas.microsoft.com/office/drawing/2014/main" id="{6AA03224-CBEA-42BB-A679-8DE2455C4F33}"/>
+                <a16:creationId xmlns:a16="http://schemas.microsoft.com/office/drawing/2014/main" id="{44CFC8D4-1215-43D9-AAA3-65B7EF566683}"/>
               </a:ext>
             </a:extLst>
           </p:cNvPr>
@@ -11235,7 +11235,7 @@
           <p:cNvPr id="5" name="">
             <a:extLst xmlns:a="http://schemas.openxmlformats.org/drawingml/2006/main">
               <a:ext uri="{FF2B5EF4-FFF2-40B4-BE49-F238E27FC236}">
-                <a16:creationId xmlns:a16="http://schemas.microsoft.com/office/drawing/2014/main" id="{D3FEA31A-B19F-4E19-BC6F-163054D8B2AC}"/>
+                <a16:creationId xmlns:a16="http://schemas.microsoft.com/office/drawing/2014/main" id="{7EA5298A-05D9-4689-AA04-1F8065D63788}"/>
               </a:ext>
             </a:extLst>
           </p:cNvPr>
@@ -11297,7 +11297,7 @@
                 <a:ea typeface="Arial"/>
                 <a:cs typeface="Arial"/>
               </a:rPr>
-              <a:t>The heatmap contains synthetic temperatures in kelvin. A different array layout mispairs four of six values and locations. This passing case does not establish support for every layout.</a:t>
+              <a:t>Synthetic values. Dimension-name tests check associations independently of the shared decoder.</a:t>
             </a:r>
           </a:p>
         </p:txBody>
@@ -11305,7 +11305,7 @@
     </p:spTree>
     <p:extLst>
       <p:ext uri="{BB962C8B-B14F-4D97-AF65-F5344CB8AC3E}">
-        <p14:creationId xmlns:p14="http://schemas.microsoft.com/office/powerpoint/2010/main" val="1385028474"/>
+        <p14:creationId xmlns:p14="http://schemas.microsoft.com/office/powerpoint/2010/main" val="810960368"/>
       </p:ext>
     </p:extLst>
   </p:cSld>
@@ -11336,7 +11336,7 @@
           <p:cNvPr id="5" name="">
             <a:extLst xmlns:a="http://schemas.openxmlformats.org/drawingml/2006/main">
               <a:ext uri="{FF2B5EF4-FFF2-40B4-BE49-F238E27FC236}">
-                <a16:creationId xmlns:a16="http://schemas.microsoft.com/office/drawing/2014/main" id="{FBC84943-F769-4E05-AAD7-18C5FF4A70A4}"/>
+                <a16:creationId xmlns:a16="http://schemas.microsoft.com/office/drawing/2014/main" id="{C50E0C46-94AA-4C57-880E-62554390CEF9}"/>
               </a:ext>
             </a:extLst>
           </p:cNvPr>
@@ -11398,7 +11398,7 @@
                 <a:ea typeface="Arial"/>
                 <a:cs typeface="Arial"/>
               </a:rPr>
-              <a:t>What the later audit changes</a:t>
+              <a:t>Fresh independent audit</a:t>
             </a:r>
           </a:p>
         </p:txBody>
@@ -11408,7 +11408,7 @@
           <p:cNvPr id="2" name="">
             <a:extLst xmlns:a="http://schemas.openxmlformats.org/drawingml/2006/main">
               <a:ext uri="{FF2B5EF4-FFF2-40B4-BE49-F238E27FC236}">
-                <a16:creationId xmlns:a16="http://schemas.microsoft.com/office/drawing/2014/main" id="{9FB0D66B-5E44-4497-ABA1-9A2BAB572953}"/>
+                <a16:creationId xmlns:a16="http://schemas.microsoft.com/office/drawing/2014/main" id="{50294DF4-E680-4715-BEC3-984176784B67}"/>
               </a:ext>
             </a:extLst>
           </p:cNvPr>
@@ -11470,7 +11470,7 @@
                 <a:ea typeface="Arial"/>
                 <a:cs typeface="Arial"/>
               </a:rPr>
-              <a:t>The recorded suite passed, then the audit exercised cases it had missed.</a:t>
+              <a:t>Six prior defects pass fresh counterexamples; one remains unresolved.</a:t>
             </a:r>
           </a:p>
         </p:txBody>
@@ -11480,7 +11480,7 @@
           <p:cNvPr id="3" name="">
             <a:extLst xmlns:a="http://schemas.openxmlformats.org/drawingml/2006/main">
               <a:ext uri="{FF2B5EF4-FFF2-40B4-BE49-F238E27FC236}">
-                <a16:creationId xmlns:a16="http://schemas.microsoft.com/office/drawing/2014/main" id="{86ED5D3F-E0B4-4AB8-BE3A-3DFCB95D4261}"/>
+                <a16:creationId xmlns:a16="http://schemas.microsoft.com/office/drawing/2014/main" id="{F6E60BC6-AB7D-4F3E-B36E-02C8654A53A3}"/>
               </a:ext>
             </a:extLst>
           </p:cNvPr>
@@ -11542,7 +11542,7 @@
                           <a:ea typeface="Arial"/>
                           <a:cs typeface="Arial"/>
                         </a:rPr>
-                        <a:t>Confirmed issue</a:t>
+                        <a:t>Fresh audit result</a:t>
                       </a:r>
                     </a:p>
                   </a:txBody>
@@ -11596,7 +11596,7 @@
                           <a:ea typeface="Arial"/>
                           <a:cs typeface="Arial"/>
                         </a:rPr>
-                        <a:t>A private sampling shortcut has no justified error bound. One projected case differs by about 1.24 degrees.</a:t>
+                        <a:t>Remaining: normal sampling has no justified domain/error bound; projected difference about 1.24 degrees.</a:t>
                       </a:r>
                     </a:p>
                   </a:txBody>
@@ -11650,7 +11650,7 @@
                           <a:ea typeface="Arial"/>
                           <a:cs typeface="Arial"/>
                         </a:rPr>
-                        <a:t>A referenced model outside the bound subtree fails instead of receiving the instancer's placement.</a:t>
+                        <a:t>Corrected: an unbound library prototype receives its instancer placement in both readers.</a:t>
                       </a:r>
                     </a:p>
                   </a:txBody>
@@ -11704,7 +11704,7 @@
                           <a:ea typeface="Arial"/>
                           <a:cs typeface="Arial"/>
                         </a:rPr>
-                        <a:t>Two source triangles become three output triangles. The check misses the extra geometry.</a:t>
+                        <a:t>Corrected: two source meshes yield exactly two baked meshes; extras are rejected.</a:t>
                       </a:r>
                     </a:p>
                   </a:txBody>
@@ -11758,7 +11758,7 @@
                           <a:ea typeface="Arial"/>
                           <a:cs typeface="Arial"/>
                         </a:rPr>
-                        <a:t>A different array dimension order pairs four of six values with the wrong locations. Both readers share this decoder.</a:t>
+                        <a:t>Corrected: all six measurements retain the coordinates declared by dimension names.</a:t>
                       </a:r>
                     </a:p>
                   </a:txBody>
@@ -11812,7 +11812,7 @@
                           <a:ea typeface="Arial"/>
                           <a:cs typeface="Arial"/>
                         </a:rPr>
-                        <a:t>The bake removes an unrelated MotionAPI schema application, changing other scene meaning.</a:t>
+                        <a:t>Corrected: the bake retains MotionAPI and its velocity-scale value.</a:t>
                       </a:r>
                     </a:p>
                   </a:txBody>
@@ -11866,7 +11866,7 @@
                           <a:ea typeface="Arial"/>
                           <a:cs typeface="Arial"/>
                         </a:rPr>
-                        <a:t>Reports omit required per-component errors and separate angular errors.</a:t>
+                        <a:t>Corrected: reports include component errors, magnitudes and angular errors.</a:t>
                       </a:r>
                     </a:p>
                   </a:txBody>
@@ -11920,7 +11920,7 @@
                           <a:ea typeface="Arial"/>
                           <a:cs typeface="Arial"/>
                         </a:rPr>
-                        <a:t>An invalid placement attribute on an inherited-only child is silently ignored.</a:t>
+                        <a:t>Corrected: both readers reject an invalid child placement field.</a:t>
                       </a:r>
                     </a:p>
                   </a:txBody>
@@ -11940,7 +11940,7 @@
           <p:cNvPr id="4" name="">
             <a:extLst xmlns:a="http://schemas.openxmlformats.org/drawingml/2006/main">
               <a:ext uri="{FF2B5EF4-FFF2-40B4-BE49-F238E27FC236}">
-                <a16:creationId xmlns:a16="http://schemas.microsoft.com/office/drawing/2014/main" id="{2A0D9D80-ECB5-4435-9575-E27A5110AD9C}"/>
+                <a16:creationId xmlns:a16="http://schemas.microsoft.com/office/drawing/2014/main" id="{E364DE42-4A0A-4FA5-BC89-B680E3E16AB6}"/>
               </a:ext>
             </a:extLst>
           </p:cNvPr>
@@ -12002,7 +12002,7 @@
                 <a:ea typeface="Arial"/>
                 <a:cs typeface="Arial"/>
               </a:rPr>
-              <a:t>Repair these against the existing proposed rules. If repair reveals truly unspecified meaning, flag that separately.</a:t>
+              <a:t>Normal sampling still needs justified domain/error evidence. Do not turn its shortcut into a proposal rule.</a:t>
             </a:r>
           </a:p>
         </p:txBody>
@@ -12010,7 +12010,7 @@
     </p:spTree>
     <p:extLst>
       <p:ext uri="{BB962C8B-B14F-4D97-AF65-F5344CB8AC3E}">
-        <p14:creationId xmlns:p14="http://schemas.microsoft.com/office/powerpoint/2010/main" val="1322089845"/>
+        <p14:creationId xmlns:p14="http://schemas.microsoft.com/office/powerpoint/2010/main" val="486715488"/>
       </p:ext>
     </p:extLst>
   </p:cSld>
@@ -12041,7 +12041,7 @@
           <p:cNvPr id="9" name="">
             <a:extLst xmlns:a="http://schemas.openxmlformats.org/drawingml/2006/main">
               <a:ext uri="{FF2B5EF4-FFF2-40B4-BE49-F238E27FC236}">
-                <a16:creationId xmlns:a16="http://schemas.microsoft.com/office/drawing/2014/main" id="{0D7063AB-BC4F-4F2A-88FD-5E32E18D89BB}"/>
+                <a16:creationId xmlns:a16="http://schemas.microsoft.com/office/drawing/2014/main" id="{6967941E-35C9-495E-9987-7FFB410DBAC7}"/>
               </a:ext>
             </a:extLst>
           </p:cNvPr>
@@ -12113,7 +12113,7 @@
           <p:cNvPr id="2" name="">
             <a:extLst xmlns:a="http://schemas.openxmlformats.org/drawingml/2006/main">
               <a:ext uri="{FF2B5EF4-FFF2-40B4-BE49-F238E27FC236}">
-                <a16:creationId xmlns:a16="http://schemas.microsoft.com/office/drawing/2014/main" id="{88066F21-6D6C-4C7E-8B45-853AEE432EFC}"/>
+                <a16:creationId xmlns:a16="http://schemas.microsoft.com/office/drawing/2014/main" id="{2049EF4F-DFF8-4405-A447-DCA3DDDD3AB9}"/>
               </a:ext>
             </a:extLst>
           </p:cNvPr>
@@ -12185,7 +12185,7 @@
           <p:cNvPr id="3" name="">
             <a:extLst xmlns:a="http://schemas.openxmlformats.org/drawingml/2006/main">
               <a:ext uri="{FF2B5EF4-FFF2-40B4-BE49-F238E27FC236}">
-                <a16:creationId xmlns:a16="http://schemas.microsoft.com/office/drawing/2014/main" id="{DD8ACDB4-857F-4588-8F16-6B1EC37F6B3C}"/>
+                <a16:creationId xmlns:a16="http://schemas.microsoft.com/office/drawing/2014/main" id="{AF554BFF-712E-4472-9CC2-0CC9FD258AF5}"/>
               </a:ext>
             </a:extLst>
           </p:cNvPr>
@@ -12195,7 +12195,7 @@
           <p:nvPr/>
         </p:nvPicPr>
         <p:blipFill>
-          <a:blip xmlns:r="http://schemas.openxmlformats.org/officeDocument/2006/relationships" xmlns:a="http://schemas.openxmlformats.org/drawingml/2006/main" r:embed="R84745d2bd1d74eac"/>
+          <a:blip xmlns:r="http://schemas.openxmlformats.org/officeDocument/2006/relationships" xmlns:a="http://schemas.openxmlformats.org/drawingml/2006/main" r:embed="R2efcedba11f14ad1"/>
           <a:stretch xmlns:a="http://schemas.openxmlformats.org/drawingml/2006/main"/>
         </p:blipFill>
         <p:spPr>
@@ -12213,7 +12213,7 @@
           <p:cNvPr id="4" name="">
             <a:extLst xmlns:a="http://schemas.openxmlformats.org/drawingml/2006/main">
               <a:ext uri="{FF2B5EF4-FFF2-40B4-BE49-F238E27FC236}">
-                <a16:creationId xmlns:a16="http://schemas.microsoft.com/office/drawing/2014/main" id="{84C2E3AA-F4C1-4153-8B64-46CD28C78285}"/>
+                <a16:creationId xmlns:a16="http://schemas.microsoft.com/office/drawing/2014/main" id="{9CBAB235-C44A-41F7-8D58-09ECBD197082}"/>
               </a:ext>
             </a:extLst>
           </p:cNvPr>
@@ -12285,7 +12285,7 @@
           <p:cNvPr id="5" name="">
             <a:extLst xmlns:a="http://schemas.openxmlformats.org/drawingml/2006/main">
               <a:ext uri="{FF2B5EF4-FFF2-40B4-BE49-F238E27FC236}">
-                <a16:creationId xmlns:a16="http://schemas.microsoft.com/office/drawing/2014/main" id="{5132ECD4-A1D6-407E-9CA4-303E7CCE946A}"/>
+                <a16:creationId xmlns:a16="http://schemas.microsoft.com/office/drawing/2014/main" id="{08ED7D4D-5973-4C4F-BB21-16ABBEF14400}"/>
               </a:ext>
             </a:extLst>
           </p:cNvPr>
@@ -12357,7 +12357,7 @@
           <p:cNvPr id="6" name="">
             <a:extLst xmlns:a="http://schemas.openxmlformats.org/drawingml/2006/main">
               <a:ext uri="{FF2B5EF4-FFF2-40B4-BE49-F238E27FC236}">
-                <a16:creationId xmlns:a16="http://schemas.microsoft.com/office/drawing/2014/main" id="{140DEB75-B3B2-4BAF-9281-2EA3B52C3D96}"/>
+                <a16:creationId xmlns:a16="http://schemas.microsoft.com/office/drawing/2014/main" id="{04BA30B3-C2CE-44E6-B33F-CAD0CC72BBEB}"/>
               </a:ext>
             </a:extLst>
           </p:cNvPr>
@@ -12429,7 +12429,7 @@
           <p:cNvPr id="7" name="">
             <a:extLst xmlns:a="http://schemas.openxmlformats.org/drawingml/2006/main">
               <a:ext uri="{FF2B5EF4-FFF2-40B4-BE49-F238E27FC236}">
-                <a16:creationId xmlns:a16="http://schemas.microsoft.com/office/drawing/2014/main" id="{4E2D8C1C-C6BC-4EE3-BB28-85F3AB4B0F5D}"/>
+                <a16:creationId xmlns:a16="http://schemas.microsoft.com/office/drawing/2014/main" id="{D81F189A-E063-4C8A-9FC0-CCFCFA632491}"/>
               </a:ext>
             </a:extLst>
           </p:cNvPr>
@@ -12501,7 +12501,7 @@
           <p:cNvPr id="8" name="">
             <a:extLst xmlns:a="http://schemas.openxmlformats.org/drawingml/2006/main">
               <a:ext uri="{FF2B5EF4-FFF2-40B4-BE49-F238E27FC236}">
-                <a16:creationId xmlns:a16="http://schemas.microsoft.com/office/drawing/2014/main" id="{F024C352-014E-4C70-BF26-0543EEF606AF}"/>
+                <a16:creationId xmlns:a16="http://schemas.microsoft.com/office/drawing/2014/main" id="{0C071068-74FC-4568-A57A-66802C5B33F9}"/>
               </a:ext>
             </a:extLst>
           </p:cNvPr>
@@ -12571,7 +12571,7 @@
     </p:spTree>
     <p:extLst>
       <p:ext uri="{BB962C8B-B14F-4D97-AF65-F5344CB8AC3E}">
-        <p14:creationId xmlns:p14="http://schemas.microsoft.com/office/powerpoint/2010/main" val="1721608692"/>
+        <p14:creationId xmlns:p14="http://schemas.microsoft.com/office/powerpoint/2010/main" val="1666206875"/>
       </p:ext>
     </p:extLst>
   </p:cSld>

--- a/extras/usd/examples/usdGeospatialBuild/delivery/geospatial-build.pptx
+++ b/extras/usd/examples/usdGeospatialBuild/delivery/geospatial-build.pptx
@@ -2,26 +2,26 @@
 <file path=ppt/presentation.xml><?xml version="1.0" encoding="utf-8"?>
 <p:presentation xmlns:p="http://schemas.openxmlformats.org/presentationml/2006/main">
   <p:sldMasterIdLst>
-    <p:sldMasterId xmlns:r="http://schemas.openxmlformats.org/officeDocument/2006/relationships" id="2147483648" r:id="Rdb7e2e0cc0f74f48"/>
+    <p:sldMasterId xmlns:r="http://schemas.openxmlformats.org/officeDocument/2006/relationships" id="2147483648" r:id="Rf9bb615d0f5a45a3"/>
   </p:sldMasterIdLst>
   <p:notesMasterIdLst>
-    <p:notesMasterId xmlns:r="http://schemas.openxmlformats.org/officeDocument/2006/relationships" r:id="R040f136531de4a88"/>
+    <p:notesMasterId xmlns:r="http://schemas.openxmlformats.org/officeDocument/2006/relationships" r:id="R2d2db94645f9461d"/>
   </p:notesMasterIdLst>
   <p:sldIdLst>
-    <p:sldId xmlns:r="http://schemas.openxmlformats.org/officeDocument/2006/relationships" id="256" r:id="R97802bcd5ce04758"/>
-    <p:sldId xmlns:r="http://schemas.openxmlformats.org/officeDocument/2006/relationships" id="257" r:id="Rbfd173ff249e4525"/>
-    <p:sldId xmlns:r="http://schemas.openxmlformats.org/officeDocument/2006/relationships" id="258" r:id="R99a4a70af04f4271"/>
-    <p:sldId xmlns:r="http://schemas.openxmlformats.org/officeDocument/2006/relationships" id="259" r:id="R90ea7b0f14d44179"/>
-    <p:sldId xmlns:r="http://schemas.openxmlformats.org/officeDocument/2006/relationships" id="260" r:id="R0fe1607c7ea646ba"/>
-    <p:sldId xmlns:r="http://schemas.openxmlformats.org/officeDocument/2006/relationships" id="261" r:id="R6ecd547532664220"/>
-    <p:sldId xmlns:r="http://schemas.openxmlformats.org/officeDocument/2006/relationships" id="262" r:id="R75eb8b4bfe754741"/>
-    <p:sldId xmlns:r="http://schemas.openxmlformats.org/officeDocument/2006/relationships" id="263" r:id="R4060aa22fcc84108"/>
-    <p:sldId xmlns:r="http://schemas.openxmlformats.org/officeDocument/2006/relationships" id="264" r:id="Ra9b805987d6e4d05"/>
-    <p:sldId xmlns:r="http://schemas.openxmlformats.org/officeDocument/2006/relationships" id="265" r:id="Rf4ec0743b14e4da1"/>
-    <p:sldId xmlns:r="http://schemas.openxmlformats.org/officeDocument/2006/relationships" id="266" r:id="R1c2206ef310c4212"/>
-    <p:sldId xmlns:r="http://schemas.openxmlformats.org/officeDocument/2006/relationships" id="267" r:id="R0142330e72d94e4c"/>
-    <p:sldId xmlns:r="http://schemas.openxmlformats.org/officeDocument/2006/relationships" id="268" r:id="R4d28be993475403c"/>
-    <p:sldId xmlns:r="http://schemas.openxmlformats.org/officeDocument/2006/relationships" id="269" r:id="Rb04c1697162b446f"/>
+    <p:sldId xmlns:r="http://schemas.openxmlformats.org/officeDocument/2006/relationships" id="256" r:id="R549ff8e5d1294045"/>
+    <p:sldId xmlns:r="http://schemas.openxmlformats.org/officeDocument/2006/relationships" id="257" r:id="Rfd59fda9a86c4469"/>
+    <p:sldId xmlns:r="http://schemas.openxmlformats.org/officeDocument/2006/relationships" id="258" r:id="R3f0e028930484127"/>
+    <p:sldId xmlns:r="http://schemas.openxmlformats.org/officeDocument/2006/relationships" id="259" r:id="R0b2912092f644fc4"/>
+    <p:sldId xmlns:r="http://schemas.openxmlformats.org/officeDocument/2006/relationships" id="260" r:id="R3ad39765d598475e"/>
+    <p:sldId xmlns:r="http://schemas.openxmlformats.org/officeDocument/2006/relationships" id="261" r:id="R65ba8b15aefd4055"/>
+    <p:sldId xmlns:r="http://schemas.openxmlformats.org/officeDocument/2006/relationships" id="262" r:id="R247ff39179394db8"/>
+    <p:sldId xmlns:r="http://schemas.openxmlformats.org/officeDocument/2006/relationships" id="263" r:id="R85713a523be849dc"/>
+    <p:sldId xmlns:r="http://schemas.openxmlformats.org/officeDocument/2006/relationships" id="264" r:id="Rf6187c8511794cd7"/>
+    <p:sldId xmlns:r="http://schemas.openxmlformats.org/officeDocument/2006/relationships" id="265" r:id="R13dd1d220f4a4f3d"/>
+    <p:sldId xmlns:r="http://schemas.openxmlformats.org/officeDocument/2006/relationships" id="266" r:id="R5bf7df65ebe64a90"/>
+    <p:sldId xmlns:r="http://schemas.openxmlformats.org/officeDocument/2006/relationships" id="267" r:id="R94f721e25e6a4b08"/>
+    <p:sldId xmlns:r="http://schemas.openxmlformats.org/officeDocument/2006/relationships" id="268" r:id="Rf0bc6be3006b4cb7"/>
+    <p:sldId xmlns:r="http://schemas.openxmlformats.org/officeDocument/2006/relationships" id="269" r:id="Rcb179a09765b4fb3"/>
   </p:sldIdLst>
   <p:sldSz cx="12192000" cy="6858000"/>
   <p:notesSz cx="6858000" cy="9144000"/>
@@ -465,22 +465,22 @@
           </a:p>
           <a:p xmlns:a="http://schemas.openxmlformats.org/drawingml/2006/main">
             <a:r>
-              <a:t>README SHA-256 708a3b5c2d26a82e32e7ec3c381c2ebb7cda8274fd4567709f98d76d85ca8f6c</a:t>
-            </a:r>
-          </a:p>
-          <a:p xmlns:a="http://schemas.openxmlformats.org/drawingml/2006/main">
-            <a:r>
-              <a:t>Proposal SHA-256 28768109389139a56d5c8e5f473446bfa46dd1ab46a48924165b97fb92cb7ae9</a:t>
-            </a:r>
-          </a:p>
-          <a:p xmlns:a="http://schemas.openxmlformats.org/drawingml/2006/main">
-            <a:r>
-              <a:t>Immutable execution receipt SHA-256 b12019e039ab52f930fb2f4321ca2289875bcdefbd3dbbd669b72a8689647e46</a:t>
-            </a:r>
-          </a:p>
-          <a:p xmlns:a="http://schemas.openxmlformats.org/drawingml/2006/main">
-            <a:r>
-              <a:t>Later audit SHA-256 e7e5278ba30509b5a3e94196ffdb6d59aaa54eadacae97022f6ffab098d94a9a</a:t>
+              <a:t>README SHA-256 e7a38c47715e43994a8c44f1474cd6c4a0e924aab1ae63af557fc405cff0a90e</a:t>
+            </a:r>
+          </a:p>
+          <a:p xmlns:a="http://schemas.openxmlformats.org/drawingml/2006/main">
+            <a:r>
+              <a:t>Proposal SHA-256 0ed1dcda854e43bb82b7e830ba4b2224cdb8da0741fa9d6cb4fe459d4266ace0</a:t>
+            </a:r>
+          </a:p>
+          <a:p xmlns:a="http://schemas.openxmlformats.org/drawingml/2006/main">
+            <a:r>
+              <a:t>Immutable execution receipt SHA-256 bc2c422dc4a9ec855fe6831a1b6afcd2ef86961db5bc954bd71c74d5ec39d842</a:t>
+            </a:r>
+          </a:p>
+          <a:p xmlns:a="http://schemas.openxmlformats.org/drawingml/2006/main">
+            <a:r>
+              <a:t>Later audit SHA-256 2c11e5d97389f5cdcabab87f586d0511c5d6e4e8bdc0b2bd4cdcbfdb7f9d783c</a:t>
             </a:r>
           </a:p>
           <a:p xmlns:a="http://schemas.openxmlformats.org/drawingml/2006/main">
@@ -590,12 +590,12 @@
           </a:p>
           <a:p xmlns:a="http://schemas.openxmlformats.org/drawingml/2006/main">
             <a:r>
-              <a:t>Proposal: ### External measurement association at proposal/proposal-source.txt:1610</a:t>
-            </a:r>
-          </a:p>
-          <a:p xmlns:a="http://schemas.openxmlformats.org/drawingml/2006/main">
-            <a:r>
-              <a:t>Functional requirements: [{"id":8,"title":"Brought-in data keeps its coordinates and its CRS.","line":751},{"id":12,"title":"No angle read as a length.","line":831},{"id":19,"title":"Resolution leaves the scene as authored.","line":932},{"id":21,"title":"Never placed by a guess.","line":968}]</a:t>
+              <a:t>Proposal: ### External measurement association at proposal/proposal-source.txt:1630</a:t>
+            </a:r>
+          </a:p>
+          <a:p xmlns:a="http://schemas.openxmlformats.org/drawingml/2006/main">
+            <a:r>
+              <a:t>Functional requirements: [{"id":8,"title":"Brought-in data keeps its coordinates and its CRS.","line":753},{"id":12,"title":"No angle read as a length.","line":836},{"id":19,"title":"Resolution leaves the scene as authored.","line":937},{"id":21,"title":"Never placed by a guess.","line":973}]</a:t>
             </a:r>
           </a:p>
           <a:p xmlns:a="http://schemas.openxmlformats.org/drawingml/2006/main">
@@ -610,22 +610,22 @@
           </a:p>
           <a:p xmlns:a="http://schemas.openxmlformats.org/drawingml/2006/main">
             <a:r>
-              <a:t>README SHA-256 708a3b5c2d26a82e32e7ec3c381c2ebb7cda8274fd4567709f98d76d85ca8f6c</a:t>
-            </a:r>
-          </a:p>
-          <a:p xmlns:a="http://schemas.openxmlformats.org/drawingml/2006/main">
-            <a:r>
-              <a:t>Proposal SHA-256 28768109389139a56d5c8e5f473446bfa46dd1ab46a48924165b97fb92cb7ae9</a:t>
-            </a:r>
-          </a:p>
-          <a:p xmlns:a="http://schemas.openxmlformats.org/drawingml/2006/main">
-            <a:r>
-              <a:t>Immutable execution receipt SHA-256 b12019e039ab52f930fb2f4321ca2289875bcdefbd3dbbd669b72a8689647e46</a:t>
-            </a:r>
-          </a:p>
-          <a:p xmlns:a="http://schemas.openxmlformats.org/drawingml/2006/main">
-            <a:r>
-              <a:t>Later audit SHA-256 e7e5278ba30509b5a3e94196ffdb6d59aaa54eadacae97022f6ffab098d94a9a</a:t>
+              <a:t>README SHA-256 e7a38c47715e43994a8c44f1474cd6c4a0e924aab1ae63af557fc405cff0a90e</a:t>
+            </a:r>
+          </a:p>
+          <a:p xmlns:a="http://schemas.openxmlformats.org/drawingml/2006/main">
+            <a:r>
+              <a:t>Proposal SHA-256 0ed1dcda854e43bb82b7e830ba4b2224cdb8da0741fa9d6cb4fe459d4266ace0</a:t>
+            </a:r>
+          </a:p>
+          <a:p xmlns:a="http://schemas.openxmlformats.org/drawingml/2006/main">
+            <a:r>
+              <a:t>Immutable execution receipt SHA-256 bc2c422dc4a9ec855fe6831a1b6afcd2ef86961db5bc954bd71c74d5ec39d842</a:t>
+            </a:r>
+          </a:p>
+          <a:p xmlns:a="http://schemas.openxmlformats.org/drawingml/2006/main">
+            <a:r>
+              <a:t>Later audit SHA-256 2c11e5d97389f5cdcabab87f586d0511c5d6e4e8bdc0b2bd4cdcbfdb7f9d783c</a:t>
             </a:r>
           </a:p>
           <a:p xmlns:a="http://schemas.openxmlformats.org/drawingml/2006/main">
@@ -730,17 +730,17 @@
           </a:p>
           <a:p xmlns:a="http://schemas.openxmlformats.org/drawingml/2006/main">
             <a:r>
-              <a:t>Limit: The bake preserves time codes 0, 5, 10 and 48 time codes per second. It provides no original-trajectory guarantee between those samples.</a:t>
-            </a:r>
-          </a:p>
-          <a:p xmlns:a="http://schemas.openxmlformats.org/drawingml/2006/main">
-            <a:r>
-              <a:t>Proposal: #### Evaluation at proposal/proposal-source.txt:1910</a:t>
-            </a:r>
-          </a:p>
-          <a:p xmlns:a="http://schemas.openxmlformats.org/drawingml/2006/main">
-            <a:r>
-              <a:t>Functional requirements: [{"id":20,"title":"Positions between recorded moments.","line":951},{"id":29,"title":"Implementable from the text alone.","line":1117}]</a:t>
+              <a:t>Limit: Position interpolation is shown here. HPR wrap, held samples, reference offsets and value clips pass separate controls.</a:t>
+            </a:r>
+          </a:p>
+          <a:p xmlns:a="http://schemas.openxmlformats.org/drawingml/2006/main">
+            <a:r>
+              <a:t>Proposal: #### Evaluation at proposal/proposal-source.txt:1930</a:t>
+            </a:r>
+          </a:p>
+          <a:p xmlns:a="http://schemas.openxmlformats.org/drawingml/2006/main">
+            <a:r>
+              <a:t>Functional requirements: [{"id":20,"title":"Positions between recorded moments.","line":956},{"id":29,"title":"Implementable from the text alone.","line":1122}]</a:t>
             </a:r>
           </a:p>
           <a:p xmlns:a="http://schemas.openxmlformats.org/drawingml/2006/main">
@@ -755,22 +755,22 @@
           </a:p>
           <a:p xmlns:a="http://schemas.openxmlformats.org/drawingml/2006/main">
             <a:r>
-              <a:t>README SHA-256 708a3b5c2d26a82e32e7ec3c381c2ebb7cda8274fd4567709f98d76d85ca8f6c</a:t>
-            </a:r>
-          </a:p>
-          <a:p xmlns:a="http://schemas.openxmlformats.org/drawingml/2006/main">
-            <a:r>
-              <a:t>Proposal SHA-256 28768109389139a56d5c8e5f473446bfa46dd1ab46a48924165b97fb92cb7ae9</a:t>
-            </a:r>
-          </a:p>
-          <a:p xmlns:a="http://schemas.openxmlformats.org/drawingml/2006/main">
-            <a:r>
-              <a:t>Immutable execution receipt SHA-256 b12019e039ab52f930fb2f4321ca2289875bcdefbd3dbbd669b72a8689647e46</a:t>
-            </a:r>
-          </a:p>
-          <a:p xmlns:a="http://schemas.openxmlformats.org/drawingml/2006/main">
-            <a:r>
-              <a:t>Later audit SHA-256 e7e5278ba30509b5a3e94196ffdb6d59aaa54eadacae97022f6ffab098d94a9a</a:t>
+              <a:t>README SHA-256 e7a38c47715e43994a8c44f1474cd6c4a0e924aab1ae63af557fc405cff0a90e</a:t>
+            </a:r>
+          </a:p>
+          <a:p xmlns:a="http://schemas.openxmlformats.org/drawingml/2006/main">
+            <a:r>
+              <a:t>Proposal SHA-256 0ed1dcda854e43bb82b7e830ba4b2224cdb8da0741fa9d6cb4fe459d4266ace0</a:t>
+            </a:r>
+          </a:p>
+          <a:p xmlns:a="http://schemas.openxmlformats.org/drawingml/2006/main">
+            <a:r>
+              <a:t>Immutable execution receipt SHA-256 bc2c422dc4a9ec855fe6831a1b6afcd2ef86961db5bc954bd71c74d5ec39d842</a:t>
+            </a:r>
+          </a:p>
+          <a:p xmlns:a="http://schemas.openxmlformats.org/drawingml/2006/main">
+            <a:r>
+              <a:t>Later audit SHA-256 2c11e5d97389f5cdcabab87f586d0511c5d6e4e8bdc0b2bd4cdcbfdb7f9d783c</a:t>
             </a:r>
           </a:p>
           <a:p xmlns:a="http://schemas.openxmlformats.org/drawingml/2006/main">
@@ -855,27 +855,27 @@
           </a:p>
           <a:p xmlns:a="http://schemas.openxmlformats.org/drawingml/2006/main">
             <a:r>
-              <a:t>[["Physical orientation","Input-only meaning is supported. Stored quaternion versus one heading/pitch/roll tuple and its interpolation need review."],["The object with its own georeference","Project adjustment meaning is supported. The detailed fixed working-frame convention remains a candidate."],["Child objects","Model-local meaning is supported. The follow-up specifies chart/reset details and tests that offsets retain their interpretation."],["Independently georeferenced repeated models","Keep a prototype's own geographic placement and apply each instance effect once."],["Geographic queries and scene geometry","Return longitude/latitude/height for geographic queries. Cartesian geometry and bounds use the datum's Earth-centred frame."]]</a:t>
-            </a:r>
-          </a:p>
-          <a:p xmlns:a="http://schemas.openxmlformats.org/drawingml/2006/main">
-            <a:r>
-              <a:t>README SHA-256 708a3b5c2d26a82e32e7ec3c381c2ebb7cda8274fd4567709f98d76d85ca8f6c</a:t>
-            </a:r>
-          </a:p>
-          <a:p xmlns:a="http://schemas.openxmlformats.org/drawingml/2006/main">
-            <a:r>
-              <a:t>Proposal SHA-256 28768109389139a56d5c8e5f473446bfa46dd1ab46a48924165b97fb92cb7ae9</a:t>
-            </a:r>
-          </a:p>
-          <a:p xmlns:a="http://schemas.openxmlformats.org/drawingml/2006/main">
-            <a:r>
-              <a:t>Immutable execution receipt SHA-256 b12019e039ab52f930fb2f4321ca2289875bcdefbd3dbbd669b72a8689647e46</a:t>
-            </a:r>
-          </a:p>
-          <a:p xmlns:a="http://schemas.openxmlformats.org/drawingml/2006/main">
-            <a:r>
-              <a:t>Later audit SHA-256 e7e5278ba30509b5a3e94196ffdb6d59aaa54eadacae97022f6ffab098d94a9a</a:t>
+              <a:t>[["Physical orientation","Preferred HPR tuple in degrees, with explicit pose interpolation. Authored inputs only; adoption pending."],["The object with its own georeference","Project adjustment meaning is supported. The detailed fixed working-frame convention remains a candidate."],["Child objects","Model-local meaning is supported. The follow-up specifies chart/reset details and tests that offsets retain their interpretation."],["Independently georeferenced repeated models","Keep a prototype's own geographic placement and apply each instance effect once."],["Geographic queries and scene geometry","Return longitude/latitude/height for geographic queries. Cartesian geometry and bounds use the datum's Earth-centred frame."]]</a:t>
+            </a:r>
+          </a:p>
+          <a:p xmlns:a="http://schemas.openxmlformats.org/drawingml/2006/main">
+            <a:r>
+              <a:t>README SHA-256 e7a38c47715e43994a8c44f1474cd6c4a0e924aab1ae63af557fc405cff0a90e</a:t>
+            </a:r>
+          </a:p>
+          <a:p xmlns:a="http://schemas.openxmlformats.org/drawingml/2006/main">
+            <a:r>
+              <a:t>Proposal SHA-256 0ed1dcda854e43bb82b7e830ba4b2224cdb8da0741fa9d6cb4fe459d4266ace0</a:t>
+            </a:r>
+          </a:p>
+          <a:p xmlns:a="http://schemas.openxmlformats.org/drawingml/2006/main">
+            <a:r>
+              <a:t>Immutable execution receipt SHA-256 bc2c422dc4a9ec855fe6831a1b6afcd2ef86961db5bc954bd71c74d5ec39d842</a:t>
+            </a:r>
+          </a:p>
+          <a:p xmlns:a="http://schemas.openxmlformats.org/drawingml/2006/main">
+            <a:r>
+              <a:t>Later audit SHA-256 2c11e5d97389f5cdcabab87f586d0511c5d6e4e8bdc0b2bd4cdcbfdb7f9d783c</a:t>
             </a:r>
           </a:p>
           <a:p xmlns:a="http://schemas.openxmlformats.org/drawingml/2006/main">
@@ -965,22 +965,22 @@
           </a:p>
           <a:p xmlns:a="http://schemas.openxmlformats.org/drawingml/2006/main">
             <a:r>
-              <a:t>README SHA-256 708a3b5c2d26a82e32e7ec3c381c2ebb7cda8274fd4567709f98d76d85ca8f6c</a:t>
-            </a:r>
-          </a:p>
-          <a:p xmlns:a="http://schemas.openxmlformats.org/drawingml/2006/main">
-            <a:r>
-              <a:t>Proposal SHA-256 28768109389139a56d5c8e5f473446bfa46dd1ab46a48924165b97fb92cb7ae9</a:t>
-            </a:r>
-          </a:p>
-          <a:p xmlns:a="http://schemas.openxmlformats.org/drawingml/2006/main">
-            <a:r>
-              <a:t>Immutable execution receipt SHA-256 b12019e039ab52f930fb2f4321ca2289875bcdefbd3dbbd669b72a8689647e46</a:t>
-            </a:r>
-          </a:p>
-          <a:p xmlns:a="http://schemas.openxmlformats.org/drawingml/2006/main">
-            <a:r>
-              <a:t>Later audit SHA-256 e7e5278ba30509b5a3e94196ffdb6d59aaa54eadacae97022f6ffab098d94a9a</a:t>
+              <a:t>README SHA-256 e7a38c47715e43994a8c44f1474cd6c4a0e924aab1ae63af557fc405cff0a90e</a:t>
+            </a:r>
+          </a:p>
+          <a:p xmlns:a="http://schemas.openxmlformats.org/drawingml/2006/main">
+            <a:r>
+              <a:t>Proposal SHA-256 0ed1dcda854e43bb82b7e830ba4b2224cdb8da0741fa9d6cb4fe459d4266ace0</a:t>
+            </a:r>
+          </a:p>
+          <a:p xmlns:a="http://schemas.openxmlformats.org/drawingml/2006/main">
+            <a:r>
+              <a:t>Immutable execution receipt SHA-256 bc2c422dc4a9ec855fe6831a1b6afcd2ef86961db5bc954bd71c74d5ec39d842</a:t>
+            </a:r>
+          </a:p>
+          <a:p xmlns:a="http://schemas.openxmlformats.org/drawingml/2006/main">
+            <a:r>
+              <a:t>Later audit SHA-256 2c11e5d97389f5cdcabab87f586d0511c5d6e4e8bdc0b2bd4cdcbfdb7f9d783c</a:t>
             </a:r>
           </a:p>
           <a:p xmlns:a="http://schemas.openxmlformats.org/drawingml/2006/main">
@@ -1065,27 +1065,27 @@
           </a:p>
           <a:p xmlns:a="http://schemas.openxmlformats.org/drawingml/2006/main">
             <a:r>
-              <a:t>[["Python and C++ readers","213,231 coordinate results per reader. Maximum measured difference 3.39e-08 m. They share PROJ and native dataset decoding."],["Omniverse stage geometry integration","Reuses Python placement. Recorded readback covers 177,864 geometry vertices and 36 edit, failure and recovery checks, across 35 jobs."],["Hydra / Storm","Two selected ordinary USD bakes reach native rendering. This consumer path uses the C++ placement results."],["Recorded tests","70 regressions and 61 distinguishing controls passed. Fresh independent diagnostics verify six repairs and retain the unresolved normal case."],["Source preservation","Original inputs and all frozen execution files remained unchanged during this run. The immutable receipt identifies the exact executed content."],["Bake readbacks","11 selected exports were checked. The fresh nested-geometry counterexample verifies the complete inventory, including unexpected extras."]]</a:t>
-            </a:r>
-          </a:p>
-          <a:p xmlns:a="http://schemas.openxmlformats.org/drawingml/2006/main">
-            <a:r>
-              <a:t>README SHA-256 708a3b5c2d26a82e32e7ec3c381c2ebb7cda8274fd4567709f98d76d85ca8f6c</a:t>
-            </a:r>
-          </a:p>
-          <a:p xmlns:a="http://schemas.openxmlformats.org/drawingml/2006/main">
-            <a:r>
-              <a:t>Proposal SHA-256 28768109389139a56d5c8e5f473446bfa46dd1ab46a48924165b97fb92cb7ae9</a:t>
-            </a:r>
-          </a:p>
-          <a:p xmlns:a="http://schemas.openxmlformats.org/drawingml/2006/main">
-            <a:r>
-              <a:t>Immutable execution receipt SHA-256 b12019e039ab52f930fb2f4321ca2289875bcdefbd3dbbd669b72a8689647e46</a:t>
-            </a:r>
-          </a:p>
-          <a:p xmlns:a="http://schemas.openxmlformats.org/drawingml/2006/main">
-            <a:r>
-              <a:t>Later audit SHA-256 e7e5278ba30509b5a3e94196ffdb6d59aaa54eadacae97022f6ffab098d94a9a</a:t>
+              <a:t>[["Python and C++ readers","213,243 coordinate results per reader. Maximum measured difference 3.39e-08 m. They share PROJ and native dataset decoding."],["Omniverse stage geometry integration","Reuses Python placement. Recorded readback covers 177,872 geometry vertices and 48 edit, failure and recovery checks, across 39 jobs."],["Hydra / Storm","Two selected ordinary USD bakes reach native rendering. This consumer path uses the C++ placement results."],["Recorded tests","88 regressions and 65 distinguishing controls passed. Fresh independent diagnostics verify six repairs and retain the unresolved normal case."],["Source preservation","Original inputs and all frozen execution files remained unchanged during this run. The immutable receipt identifies the exact executed content."],["Bake readbacks","11 selected exports were checked. The fresh nested-geometry counterexample verifies the complete inventory, including unexpected extras."]]</a:t>
+            </a:r>
+          </a:p>
+          <a:p xmlns:a="http://schemas.openxmlformats.org/drawingml/2006/main">
+            <a:r>
+              <a:t>README SHA-256 e7a38c47715e43994a8c44f1474cd6c4a0e924aab1ae63af557fc405cff0a90e</a:t>
+            </a:r>
+          </a:p>
+          <a:p xmlns:a="http://schemas.openxmlformats.org/drawingml/2006/main">
+            <a:r>
+              <a:t>Proposal SHA-256 0ed1dcda854e43bb82b7e830ba4b2224cdb8da0741fa9d6cb4fe459d4266ace0</a:t>
+            </a:r>
+          </a:p>
+          <a:p xmlns:a="http://schemas.openxmlformats.org/drawingml/2006/main">
+            <a:r>
+              <a:t>Immutable execution receipt SHA-256 bc2c422dc4a9ec855fe6831a1b6afcd2ef86961db5bc954bd71c74d5ec39d842</a:t>
+            </a:r>
+          </a:p>
+          <a:p xmlns:a="http://schemas.openxmlformats.org/drawingml/2006/main">
+            <a:r>
+              <a:t>Later audit SHA-256 2c11e5d97389f5cdcabab87f586d0511c5d6e4e8bdc0b2bd4cdcbfdb7f9d783c</a:t>
             </a:r>
           </a:p>
           <a:p xmlns:a="http://schemas.openxmlformats.org/drawingml/2006/main">
@@ -1180,27 +1180,27 @@
           </a:p>
           <a:p xmlns:a="http://schemas.openxmlformats.org/drawingml/2006/main">
             <a:r>
-              <a:t>Observed: The candidate defines position and orientation inputs, with concrete component, unit, default and evaluation rules. Ordinary model transforms remain separate.</a:t>
-            </a:r>
-          </a:p>
-          <a:p xmlns:a="http://schemas.openxmlformats.org/drawingml/2006/main">
-            <a:r>
-              <a:t>Implication for proposal quality: These definitions make the intended inputs explicit. Their usefulness depends on the agreed meanings, not on choosing a particular implementation library.</a:t>
-            </a:r>
-          </a:p>
-          <a:p xmlns:a="http://schemas.openxmlformats.org/drawingml/2006/main">
-            <a:r>
-              <a:t>Limit: This is an explanation of proposed definitions. The group still needs to review them.</a:t>
-            </a:r>
-          </a:p>
-          <a:p xmlns:a="http://schemas.openxmlformats.org/drawingml/2006/main">
-            <a:r>
-              <a:t>Proposal: #### Authored properties at proposal/proposal-source.txt:1523</a:t>
-            </a:r>
-          </a:p>
-          <a:p xmlns:a="http://schemas.openxmlformats.org/drawingml/2006/main">
-            <a:r>
-              <a:t>Functional requirements: [{"id":9,"title":"Positions, and offsets from them.","line":777},{"id":10,"title":"Offsets along the axes of their position.","line":795},{"id":12,"title":"No angle read as a length.","line":831},{"id":14,"title":"Scene conventions stay the scene's.","line":857},{"id":15,"title":"Placement separate from conformance.","line":870}]</a:t>
+              <a:t>Observed: The source stores a single double3 heading/pitch/roll tuple in degrees. The rules define its true-north/ellipsoid-up meaning, rotation order and time-sample evaluation; computed quaternions stay transient.</a:t>
+            </a:r>
+          </a:p>
+          <a:p xmlns:a="http://schemas.openxmlformats.org/drawingml/2006/main">
+            <a:r>
+              <a:t>Implication for proposal quality: The proposed representation follows the concrete authoring workflow. New checks show that reading, editing and composing these inputs produces the specified physical pose.</a:t>
+            </a:r>
+          </a:p>
+          <a:p xmlns:a="http://schemas.openxmlformats.org/drawingml/2006/main">
+            <a:r>
+              <a:t>Limit: This is the preferred local candidate, not group adoption. At +170 and -170 degrees the readers pass through 180 degrees; ordinary tuple interpolation would face 0 degrees.</a:t>
+            </a:r>
+          </a:p>
+          <a:p xmlns:a="http://schemas.openxmlformats.org/drawingml/2006/main">
+            <a:r>
+              <a:t>Proposal: #### Authored properties at proposal/proposal-source.txt:1532</a:t>
+            </a:r>
+          </a:p>
+          <a:p xmlns:a="http://schemas.openxmlformats.org/drawingml/2006/main">
+            <a:r>
+              <a:t>Functional requirements: [{"id":9,"title":"Positions, and offsets from them.","line":779},{"id":10,"title":"Offsets along the axes of their position.","line":800},{"id":12,"title":"No angle read as a length.","line":836},{"id":14,"title":"Scene conventions stay the scene's.","line":862},{"id":15,"title":"Placement separate from conformance.","line":875}]</a:t>
             </a:r>
           </a:p>
           <a:p xmlns:a="http://schemas.openxmlformats.org/drawingml/2006/main">
@@ -1215,22 +1215,22 @@
           </a:p>
           <a:p xmlns:a="http://schemas.openxmlformats.org/drawingml/2006/main">
             <a:r>
-              <a:t>README SHA-256 708a3b5c2d26a82e32e7ec3c381c2ebb7cda8274fd4567709f98d76d85ca8f6c</a:t>
-            </a:r>
-          </a:p>
-          <a:p xmlns:a="http://schemas.openxmlformats.org/drawingml/2006/main">
-            <a:r>
-              <a:t>Proposal SHA-256 28768109389139a56d5c8e5f473446bfa46dd1ab46a48924165b97fb92cb7ae9</a:t>
-            </a:r>
-          </a:p>
-          <a:p xmlns:a="http://schemas.openxmlformats.org/drawingml/2006/main">
-            <a:r>
-              <a:t>Immutable execution receipt SHA-256 b12019e039ab52f930fb2f4321ca2289875bcdefbd3dbbd669b72a8689647e46</a:t>
-            </a:r>
-          </a:p>
-          <a:p xmlns:a="http://schemas.openxmlformats.org/drawingml/2006/main">
-            <a:r>
-              <a:t>Later audit SHA-256 e7e5278ba30509b5a3e94196ffdb6d59aaa54eadacae97022f6ffab098d94a9a</a:t>
+              <a:t>README SHA-256 e7a38c47715e43994a8c44f1474cd6c4a0e924aab1ae63af557fc405cff0a90e</a:t>
+            </a:r>
+          </a:p>
+          <a:p xmlns:a="http://schemas.openxmlformats.org/drawingml/2006/main">
+            <a:r>
+              <a:t>Proposal SHA-256 0ed1dcda854e43bb82b7e830ba4b2224cdb8da0741fa9d6cb4fe459d4266ace0</a:t>
+            </a:r>
+          </a:p>
+          <a:p xmlns:a="http://schemas.openxmlformats.org/drawingml/2006/main">
+            <a:r>
+              <a:t>Immutable execution receipt SHA-256 bc2c422dc4a9ec855fe6831a1b6afcd2ef86961db5bc954bd71c74d5ec39d842</a:t>
+            </a:r>
+          </a:p>
+          <a:p xmlns:a="http://schemas.openxmlformats.org/drawingml/2006/main">
+            <a:r>
+              <a:t>Later audit SHA-256 2c11e5d97389f5cdcabab87f586d0511c5d6e4e8bdc0b2bd4cdcbfdb7f9d783c</a:t>
             </a:r>
           </a:p>
           <a:p xmlns:a="http://schemas.openxmlformats.org/drawingml/2006/main">
@@ -1340,12 +1340,12 @@
           </a:p>
           <a:p xmlns:a="http://schemas.openxmlformats.org/drawingml/2006/main">
             <a:r>
-              <a:t>Proposal: ### Source placement evaluation and transform order at proposal/proposal-source.txt:1810</a:t>
-            </a:r>
-          </a:p>
-          <a:p xmlns:a="http://schemas.openxmlformats.org/drawingml/2006/main">
-            <a:r>
-              <a:t>Functional requirements: [{"id":9,"title":"Positions, and offsets from them.","line":777},{"id":12,"title":"No angle read as a length.","line":831},{"id":13,"title":"One axis mapping.","line":845},{"id":16,"title":"One CRS out.","line":882},{"id":19,"title":"Resolution leaves the scene as authored.","line":932}]</a:t>
+              <a:t>Proposal: ### Source placement evaluation and transform order at proposal/proposal-source.txt:1830</a:t>
+            </a:r>
+          </a:p>
+          <a:p xmlns:a="http://schemas.openxmlformats.org/drawingml/2006/main">
+            <a:r>
+              <a:t>Functional requirements: [{"id":9,"title":"Positions, and offsets from them.","line":779},{"id":12,"title":"No angle read as a length.","line":836},{"id":13,"title":"One axis mapping.","line":850},{"id":16,"title":"One CRS out.","line":887},{"id":19,"title":"Resolution leaves the scene as authored.","line":937}]</a:t>
             </a:r>
           </a:p>
           <a:p xmlns:a="http://schemas.openxmlformats.org/drawingml/2006/main">
@@ -1360,22 +1360,22 @@
           </a:p>
           <a:p xmlns:a="http://schemas.openxmlformats.org/drawingml/2006/main">
             <a:r>
-              <a:t>README SHA-256 708a3b5c2d26a82e32e7ec3c381c2ebb7cda8274fd4567709f98d76d85ca8f6c</a:t>
-            </a:r>
-          </a:p>
-          <a:p xmlns:a="http://schemas.openxmlformats.org/drawingml/2006/main">
-            <a:r>
-              <a:t>Proposal SHA-256 28768109389139a56d5c8e5f473446bfa46dd1ab46a48924165b97fb92cb7ae9</a:t>
-            </a:r>
-          </a:p>
-          <a:p xmlns:a="http://schemas.openxmlformats.org/drawingml/2006/main">
-            <a:r>
-              <a:t>Immutable execution receipt SHA-256 b12019e039ab52f930fb2f4321ca2289875bcdefbd3dbbd669b72a8689647e46</a:t>
-            </a:r>
-          </a:p>
-          <a:p xmlns:a="http://schemas.openxmlformats.org/drawingml/2006/main">
-            <a:r>
-              <a:t>Later audit SHA-256 e7e5278ba30509b5a3e94196ffdb6d59aaa54eadacae97022f6ffab098d94a9a</a:t>
+              <a:t>README SHA-256 e7a38c47715e43994a8c44f1474cd6c4a0e924aab1ae63af557fc405cff0a90e</a:t>
+            </a:r>
+          </a:p>
+          <a:p xmlns:a="http://schemas.openxmlformats.org/drawingml/2006/main">
+            <a:r>
+              <a:t>Proposal SHA-256 0ed1dcda854e43bb82b7e830ba4b2224cdb8da0741fa9d6cb4fe459d4266ace0</a:t>
+            </a:r>
+          </a:p>
+          <a:p xmlns:a="http://schemas.openxmlformats.org/drawingml/2006/main">
+            <a:r>
+              <a:t>Immutable execution receipt SHA-256 bc2c422dc4a9ec855fe6831a1b6afcd2ef86961db5bc954bd71c74d5ec39d842</a:t>
+            </a:r>
+          </a:p>
+          <a:p xmlns:a="http://schemas.openxmlformats.org/drawingml/2006/main">
+            <a:r>
+              <a:t>Later audit SHA-256 2c11e5d97389f5cdcabab87f586d0511c5d6e4e8bdc0b2bd4cdcbfdb7f9d783c</a:t>
             </a:r>
           </a:p>
           <a:p xmlns:a="http://schemas.openxmlformats.org/drawingml/2006/main">
@@ -1485,12 +1485,12 @@
           </a:p>
           <a:p xmlns:a="http://schemas.openxmlformats.org/drawingml/2006/main">
             <a:r>
-              <a:t>Proposal: #### Evaluation at proposal/proposal-source.txt:1910</a:t>
-            </a:r>
-          </a:p>
-          <a:p xmlns:a="http://schemas.openxmlformats.org/drawingml/2006/main">
-            <a:r>
-              <a:t>Functional requirements: [{"id":9,"title":"Positions, and offsets from them.","line":777},{"id":14,"title":"Scene conventions stay the scene's.","line":857},{"id":15,"title":"Placement separate from conformance.","line":870},{"id":17,"title":"The same answer for every consumer.","line":902},{"id":19,"title":"Resolution leaves the scene as authored.","line":932}]</a:t>
+              <a:t>Proposal: #### Evaluation at proposal/proposal-source.txt:1930</a:t>
+            </a:r>
+          </a:p>
+          <a:p xmlns:a="http://schemas.openxmlformats.org/drawingml/2006/main">
+            <a:r>
+              <a:t>Functional requirements: [{"id":9,"title":"Positions, and offsets from them.","line":779},{"id":14,"title":"Scene conventions stay the scene's.","line":862},{"id":15,"title":"Placement separate from conformance.","line":875},{"id":17,"title":"The same answer for every consumer.","line":907},{"id":19,"title":"Resolution leaves the scene as authored.","line":937}]</a:t>
             </a:r>
           </a:p>
           <a:p xmlns:a="http://schemas.openxmlformats.org/drawingml/2006/main">
@@ -1505,22 +1505,22 @@
           </a:p>
           <a:p xmlns:a="http://schemas.openxmlformats.org/drawingml/2006/main">
             <a:r>
-              <a:t>README SHA-256 708a3b5c2d26a82e32e7ec3c381c2ebb7cda8274fd4567709f98d76d85ca8f6c</a:t>
-            </a:r>
-          </a:p>
-          <a:p xmlns:a="http://schemas.openxmlformats.org/drawingml/2006/main">
-            <a:r>
-              <a:t>Proposal SHA-256 28768109389139a56d5c8e5f473446bfa46dd1ab46a48924165b97fb92cb7ae9</a:t>
-            </a:r>
-          </a:p>
-          <a:p xmlns:a="http://schemas.openxmlformats.org/drawingml/2006/main">
-            <a:r>
-              <a:t>Immutable execution receipt SHA-256 b12019e039ab52f930fb2f4321ca2289875bcdefbd3dbbd669b72a8689647e46</a:t>
-            </a:r>
-          </a:p>
-          <a:p xmlns:a="http://schemas.openxmlformats.org/drawingml/2006/main">
-            <a:r>
-              <a:t>Later audit SHA-256 e7e5278ba30509b5a3e94196ffdb6d59aaa54eadacae97022f6ffab098d94a9a</a:t>
+              <a:t>README SHA-256 e7a38c47715e43994a8c44f1474cd6c4a0e924aab1ae63af557fc405cff0a90e</a:t>
+            </a:r>
+          </a:p>
+          <a:p xmlns:a="http://schemas.openxmlformats.org/drawingml/2006/main">
+            <a:r>
+              <a:t>Proposal SHA-256 0ed1dcda854e43bb82b7e830ba4b2224cdb8da0741fa9d6cb4fe459d4266ace0</a:t>
+            </a:r>
+          </a:p>
+          <a:p xmlns:a="http://schemas.openxmlformats.org/drawingml/2006/main">
+            <a:r>
+              <a:t>Immutable execution receipt SHA-256 bc2c422dc4a9ec855fe6831a1b6afcd2ef86961db5bc954bd71c74d5ec39d842</a:t>
+            </a:r>
+          </a:p>
+          <a:p xmlns:a="http://schemas.openxmlformats.org/drawingml/2006/main">
+            <a:r>
+              <a:t>Later audit SHA-256 2c11e5d97389f5cdcabab87f586d0511c5d6e4e8bdc0b2bd4cdcbfdb7f9d783c</a:t>
             </a:r>
           </a:p>
           <a:p xmlns:a="http://schemas.openxmlformats.org/drawingml/2006/main">
@@ -1630,12 +1630,12 @@
           </a:p>
           <a:p xmlns:a="http://schemas.openxmlformats.org/drawingml/2006/main">
             <a:r>
-              <a:t>Proposal: ### Extent and result comparison at proposal/proposal-source.txt:2042</a:t>
-            </a:r>
-          </a:p>
-          <a:p xmlns:a="http://schemas.openxmlformats.org/drawingml/2006/main">
-            <a:r>
-              <a:t>Functional requirements: [{"id":4,"title":"A site's own grid is a CRS like any other.","line":674},{"id":13,"title":"One axis mapping.","line":845},{"id":16,"title":"One CRS out.","line":882},{"id":17,"title":"The same answer for every consumer.","line":902},{"id":18,"title":"Coordinates back out.","line":917},{"id":28,"title":"A result says what produced it.","line":1099},{"id":29,"title":"Implementable from the text alone.","line":1117}]</a:t>
+              <a:t>Proposal: ### Extent and result comparison at proposal/proposal-source.txt:2085</a:t>
+            </a:r>
+          </a:p>
+          <a:p xmlns:a="http://schemas.openxmlformats.org/drawingml/2006/main">
+            <a:r>
+              <a:t>Functional requirements: [{"id":4,"title":"A site's own grid is a CRS like any other.","line":676},{"id":13,"title":"One axis mapping.","line":850},{"id":16,"title":"One CRS out.","line":887},{"id":17,"title":"The same answer for every consumer.","line":907},{"id":18,"title":"Coordinates back out.","line":922},{"id":28,"title":"A result says what produced it.","line":1104},{"id":29,"title":"Implementable from the text alone.","line":1122}]</a:t>
             </a:r>
           </a:p>
           <a:p xmlns:a="http://schemas.openxmlformats.org/drawingml/2006/main">
@@ -1650,22 +1650,22 @@
           </a:p>
           <a:p xmlns:a="http://schemas.openxmlformats.org/drawingml/2006/main">
             <a:r>
-              <a:t>README SHA-256 708a3b5c2d26a82e32e7ec3c381c2ebb7cda8274fd4567709f98d76d85ca8f6c</a:t>
-            </a:r>
-          </a:p>
-          <a:p xmlns:a="http://schemas.openxmlformats.org/drawingml/2006/main">
-            <a:r>
-              <a:t>Proposal SHA-256 28768109389139a56d5c8e5f473446bfa46dd1ab46a48924165b97fb92cb7ae9</a:t>
-            </a:r>
-          </a:p>
-          <a:p xmlns:a="http://schemas.openxmlformats.org/drawingml/2006/main">
-            <a:r>
-              <a:t>Immutable execution receipt SHA-256 b12019e039ab52f930fb2f4321ca2289875bcdefbd3dbbd669b72a8689647e46</a:t>
-            </a:r>
-          </a:p>
-          <a:p xmlns:a="http://schemas.openxmlformats.org/drawingml/2006/main">
-            <a:r>
-              <a:t>Later audit SHA-256 e7e5278ba30509b5a3e94196ffdb6d59aaa54eadacae97022f6ffab098d94a9a</a:t>
+              <a:t>README SHA-256 e7a38c47715e43994a8c44f1474cd6c4a0e924aab1ae63af557fc405cff0a90e</a:t>
+            </a:r>
+          </a:p>
+          <a:p xmlns:a="http://schemas.openxmlformats.org/drawingml/2006/main">
+            <a:r>
+              <a:t>Proposal SHA-256 0ed1dcda854e43bb82b7e830ba4b2224cdb8da0741fa9d6cb4fe459d4266ace0</a:t>
+            </a:r>
+          </a:p>
+          <a:p xmlns:a="http://schemas.openxmlformats.org/drawingml/2006/main">
+            <a:r>
+              <a:t>Immutable execution receipt SHA-256 bc2c422dc4a9ec855fe6831a1b6afcd2ef86961db5bc954bd71c74d5ec39d842</a:t>
+            </a:r>
+          </a:p>
+          <a:p xmlns:a="http://schemas.openxmlformats.org/drawingml/2006/main">
+            <a:r>
+              <a:t>Later audit SHA-256 2c11e5d97389f5cdcabab87f586d0511c5d6e4e8bdc0b2bd4cdcbfdb7f9d783c</a:t>
             </a:r>
           </a:p>
           <a:p xmlns:a="http://schemas.openxmlformats.org/drawingml/2006/main">
@@ -1775,12 +1775,12 @@
           </a:p>
           <a:p xmlns:a="http://schemas.openxmlformats.org/drawingml/2006/main">
             <a:r>
-              <a:t>Proposal: ### Explicit export and sampling at proposal/proposal-source.txt:2095</a:t>
-            </a:r>
-          </a:p>
-          <a:p xmlns:a="http://schemas.openxmlformats.org/drawingml/2006/main">
-            <a:r>
-              <a:t>Functional requirements: [{"id":17,"title":"The same answer for every consumer.","line":902},{"id":19,"title":"Resolution leaves the scene as authored.","line":932},{"id":23,"title":"Detail that does not depend on location.","line":1038},{"id":25,"title":"Additive for consumers that ignore it.","line":1062},{"id":29,"title":"Implementable from the text alone.","line":1117}]</a:t>
+              <a:t>Proposal: ### Explicit export and sampling at proposal/proposal-source.txt:2138</a:t>
+            </a:r>
+          </a:p>
+          <a:p xmlns:a="http://schemas.openxmlformats.org/drawingml/2006/main">
+            <a:r>
+              <a:t>Functional requirements: [{"id":17,"title":"The same answer for every consumer.","line":907},{"id":19,"title":"Resolution leaves the scene as authored.","line":937},{"id":23,"title":"Detail that does not depend on location.","line":1043},{"id":25,"title":"Additive for consumers that ignore it.","line":1067},{"id":29,"title":"Implementable from the text alone.","line":1122}]</a:t>
             </a:r>
           </a:p>
           <a:p xmlns:a="http://schemas.openxmlformats.org/drawingml/2006/main">
@@ -1795,22 +1795,22 @@
           </a:p>
           <a:p xmlns:a="http://schemas.openxmlformats.org/drawingml/2006/main">
             <a:r>
-              <a:t>README SHA-256 708a3b5c2d26a82e32e7ec3c381c2ebb7cda8274fd4567709f98d76d85ca8f6c</a:t>
-            </a:r>
-          </a:p>
-          <a:p xmlns:a="http://schemas.openxmlformats.org/drawingml/2006/main">
-            <a:r>
-              <a:t>Proposal SHA-256 28768109389139a56d5c8e5f473446bfa46dd1ab46a48924165b97fb92cb7ae9</a:t>
-            </a:r>
-          </a:p>
-          <a:p xmlns:a="http://schemas.openxmlformats.org/drawingml/2006/main">
-            <a:r>
-              <a:t>Immutable execution receipt SHA-256 b12019e039ab52f930fb2f4321ca2289875bcdefbd3dbbd669b72a8689647e46</a:t>
-            </a:r>
-          </a:p>
-          <a:p xmlns:a="http://schemas.openxmlformats.org/drawingml/2006/main">
-            <a:r>
-              <a:t>Later audit SHA-256 e7e5278ba30509b5a3e94196ffdb6d59aaa54eadacae97022f6ffab098d94a9a</a:t>
+              <a:t>README SHA-256 e7a38c47715e43994a8c44f1474cd6c4a0e924aab1ae63af557fc405cff0a90e</a:t>
+            </a:r>
+          </a:p>
+          <a:p xmlns:a="http://schemas.openxmlformats.org/drawingml/2006/main">
+            <a:r>
+              <a:t>Proposal SHA-256 0ed1dcda854e43bb82b7e830ba4b2224cdb8da0741fa9d6cb4fe459d4266ace0</a:t>
+            </a:r>
+          </a:p>
+          <a:p xmlns:a="http://schemas.openxmlformats.org/drawingml/2006/main">
+            <a:r>
+              <a:t>Immutable execution receipt SHA-256 bc2c422dc4a9ec855fe6831a1b6afcd2ef86961db5bc954bd71c74d5ec39d842</a:t>
+            </a:r>
+          </a:p>
+          <a:p xmlns:a="http://schemas.openxmlformats.org/drawingml/2006/main">
+            <a:r>
+              <a:t>Later audit SHA-256 2c11e5d97389f5cdcabab87f586d0511c5d6e4e8bdc0b2bd4cdcbfdb7f9d783c</a:t>
             </a:r>
           </a:p>
           <a:p xmlns:a="http://schemas.openxmlformats.org/drawingml/2006/main">
@@ -1915,17 +1915,17 @@
           </a:p>
           <a:p xmlns:a="http://schemas.openxmlformats.org/drawingml/2006/main">
             <a:r>
-              <a:t>Limit: Synthetic values. Dimension-name tests check associations independently of the shared decoder.</a:t>
-            </a:r>
-          </a:p>
-          <a:p xmlns:a="http://schemas.openxmlformats.org/drawingml/2006/main">
-            <a:r>
-              <a:t>Proposal: ### External measurement association at proposal/proposal-source.txt:1610</a:t>
-            </a:r>
-          </a:p>
-          <a:p xmlns:a="http://schemas.openxmlformats.org/drawingml/2006/main">
-            <a:r>
-              <a:t>Functional requirements: [{"id":8,"title":"Brought-in data keeps its coordinates and its CRS.","line":751},{"id":12,"title":"No angle read as a length.","line":831},{"id":18,"title":"Coordinates back out.","line":917},{"id":19,"title":"Resolution leaves the scene as authored.","line":932},{"id":21,"title":"Never placed by a guess.","line":968},{"id":30,"title":"Measurements remain usable as data.","line":1003}]</a:t>
+              <a:t>Limit: The values are synthetic. Named-dimension associations are independently tested; agreeing readers alone cannot verify shared decoding.</a:t>
+            </a:r>
+          </a:p>
+          <a:p xmlns:a="http://schemas.openxmlformats.org/drawingml/2006/main">
+            <a:r>
+              <a:t>Proposal: ### External measurement association at proposal/proposal-source.txt:1630</a:t>
+            </a:r>
+          </a:p>
+          <a:p xmlns:a="http://schemas.openxmlformats.org/drawingml/2006/main">
+            <a:r>
+              <a:t>Functional requirements: [{"id":8,"title":"Brought-in data keeps its coordinates and its CRS.","line":753},{"id":12,"title":"No angle read as a length.","line":836},{"id":18,"title":"Coordinates back out.","line":922},{"id":19,"title":"Resolution leaves the scene as authored.","line":937},{"id":21,"title":"Never placed by a guess.","line":973},{"id":30,"title":"Measurements remain usable as data.","line":1008}]</a:t>
             </a:r>
           </a:p>
           <a:p xmlns:a="http://schemas.openxmlformats.org/drawingml/2006/main">
@@ -1940,22 +1940,22 @@
           </a:p>
           <a:p xmlns:a="http://schemas.openxmlformats.org/drawingml/2006/main">
             <a:r>
-              <a:t>README SHA-256 708a3b5c2d26a82e32e7ec3c381c2ebb7cda8274fd4567709f98d76d85ca8f6c</a:t>
-            </a:r>
-          </a:p>
-          <a:p xmlns:a="http://schemas.openxmlformats.org/drawingml/2006/main">
-            <a:r>
-              <a:t>Proposal SHA-256 28768109389139a56d5c8e5f473446bfa46dd1ab46a48924165b97fb92cb7ae9</a:t>
-            </a:r>
-          </a:p>
-          <a:p xmlns:a="http://schemas.openxmlformats.org/drawingml/2006/main">
-            <a:r>
-              <a:t>Immutable execution receipt SHA-256 b12019e039ab52f930fb2f4321ca2289875bcdefbd3dbbd669b72a8689647e46</a:t>
-            </a:r>
-          </a:p>
-          <a:p xmlns:a="http://schemas.openxmlformats.org/drawingml/2006/main">
-            <a:r>
-              <a:t>Later audit SHA-256 e7e5278ba30509b5a3e94196ffdb6d59aaa54eadacae97022f6ffab098d94a9a</a:t>
+              <a:t>README SHA-256 e7a38c47715e43994a8c44f1474cd6c4a0e924aab1ae63af557fc405cff0a90e</a:t>
+            </a:r>
+          </a:p>
+          <a:p xmlns:a="http://schemas.openxmlformats.org/drawingml/2006/main">
+            <a:r>
+              <a:t>Proposal SHA-256 0ed1dcda854e43bb82b7e830ba4b2224cdb8da0741fa9d6cb4fe459d4266ace0</a:t>
+            </a:r>
+          </a:p>
+          <a:p xmlns:a="http://schemas.openxmlformats.org/drawingml/2006/main">
+            <a:r>
+              <a:t>Immutable execution receipt SHA-256 bc2c422dc4a9ec855fe6831a1b6afcd2ef86961db5bc954bd71c74d5ec39d842</a:t>
+            </a:r>
+          </a:p>
+          <a:p xmlns:a="http://schemas.openxmlformats.org/drawingml/2006/main">
+            <a:r>
+              <a:t>Later audit SHA-256 2c11e5d97389f5cdcabab87f586d0511c5d6e4e8bdc0b2bd4cdcbfdb7f9d783c</a:t>
             </a:r>
           </a:p>
           <a:p xmlns:a="http://schemas.openxmlformats.org/drawingml/2006/main">
@@ -2045,22 +2045,22 @@
           </a:p>
           <a:p xmlns:a="http://schemas.openxmlformats.org/drawingml/2006/main">
             <a:r>
-              <a:t>README SHA-256 708a3b5c2d26a82e32e7ec3c381c2ebb7cda8274fd4567709f98d76d85ca8f6c</a:t>
-            </a:r>
-          </a:p>
-          <a:p xmlns:a="http://schemas.openxmlformats.org/drawingml/2006/main">
-            <a:r>
-              <a:t>Proposal SHA-256 28768109389139a56d5c8e5f473446bfa46dd1ab46a48924165b97fb92cb7ae9</a:t>
-            </a:r>
-          </a:p>
-          <a:p xmlns:a="http://schemas.openxmlformats.org/drawingml/2006/main">
-            <a:r>
-              <a:t>Immutable execution receipt SHA-256 b12019e039ab52f930fb2f4321ca2289875bcdefbd3dbbd669b72a8689647e46</a:t>
-            </a:r>
-          </a:p>
-          <a:p xmlns:a="http://schemas.openxmlformats.org/drawingml/2006/main">
-            <a:r>
-              <a:t>Later audit SHA-256 e7e5278ba30509b5a3e94196ffdb6d59aaa54eadacae97022f6ffab098d94a9a</a:t>
+              <a:t>README SHA-256 e7a38c47715e43994a8c44f1474cd6c4a0e924aab1ae63af557fc405cff0a90e</a:t>
+            </a:r>
+          </a:p>
+          <a:p xmlns:a="http://schemas.openxmlformats.org/drawingml/2006/main">
+            <a:r>
+              <a:t>Proposal SHA-256 0ed1dcda854e43bb82b7e830ba4b2224cdb8da0741fa9d6cb4fe459d4266ace0</a:t>
+            </a:r>
+          </a:p>
+          <a:p xmlns:a="http://schemas.openxmlformats.org/drawingml/2006/main">
+            <a:r>
+              <a:t>Immutable execution receipt SHA-256 bc2c422dc4a9ec855fe6831a1b6afcd2ef86961db5bc954bd71c74d5ec39d842</a:t>
+            </a:r>
+          </a:p>
+          <a:p xmlns:a="http://schemas.openxmlformats.org/drawingml/2006/main">
+            <a:r>
+              <a:t>Later audit SHA-256 2c11e5d97389f5cdcabab87f586d0511c5d6e4e8bdc0b2bd4cdcbfdb7f9d783c</a:t>
             </a:r>
           </a:p>
           <a:p xmlns:a="http://schemas.openxmlformats.org/drawingml/2006/main">
@@ -2170,12 +2170,12 @@
           </a:p>
           <a:p xmlns:a="http://schemas.openxmlformats.org/drawingml/2006/main">
             <a:r>
-              <a:t>Proposal: #### Decision on question 7: site calibration at proposal/proposal-source.txt:1294</a:t>
-            </a:r>
-          </a:p>
-          <a:p xmlns:a="http://schemas.openxmlformats.org/drawingml/2006/main">
-            <a:r>
-              <a:t>Functional requirements: [{"id":4,"title":"A site's own grid is a CRS like any other.","line":674},{"id":14,"title":"Scene conventions stay the scene's.","line":857},{"id":15,"title":"Placement separate from conformance.","line":870},{"id":17,"title":"The same answer for every consumer.","line":902}]</a:t>
+              <a:t>Proposal: #### Decision on question 7: site calibration at proposal/proposal-source.txt:1303</a:t>
+            </a:r>
+          </a:p>
+          <a:p xmlns:a="http://schemas.openxmlformats.org/drawingml/2006/main">
+            <a:r>
+              <a:t>Functional requirements: [{"id":4,"title":"A site's own grid is a CRS like any other.","line":676},{"id":14,"title":"Scene conventions stay the scene's.","line":862},{"id":15,"title":"Placement separate from conformance.","line":875},{"id":17,"title":"The same answer for every consumer.","line":907}]</a:t>
             </a:r>
           </a:p>
           <a:p xmlns:a="http://schemas.openxmlformats.org/drawingml/2006/main">
@@ -2190,22 +2190,22 @@
           </a:p>
           <a:p xmlns:a="http://schemas.openxmlformats.org/drawingml/2006/main">
             <a:r>
-              <a:t>README SHA-256 708a3b5c2d26a82e32e7ec3c381c2ebb7cda8274fd4567709f98d76d85ca8f6c</a:t>
-            </a:r>
-          </a:p>
-          <a:p xmlns:a="http://schemas.openxmlformats.org/drawingml/2006/main">
-            <a:r>
-              <a:t>Proposal SHA-256 28768109389139a56d5c8e5f473446bfa46dd1ab46a48924165b97fb92cb7ae9</a:t>
-            </a:r>
-          </a:p>
-          <a:p xmlns:a="http://schemas.openxmlformats.org/drawingml/2006/main">
-            <a:r>
-              <a:t>Immutable execution receipt SHA-256 b12019e039ab52f930fb2f4321ca2289875bcdefbd3dbbd669b72a8689647e46</a:t>
-            </a:r>
-          </a:p>
-          <a:p xmlns:a="http://schemas.openxmlformats.org/drawingml/2006/main">
-            <a:r>
-              <a:t>Later audit SHA-256 e7e5278ba30509b5a3e94196ffdb6d59aaa54eadacae97022f6ffab098d94a9a</a:t>
+              <a:t>README SHA-256 e7a38c47715e43994a8c44f1474cd6c4a0e924aab1ae63af557fc405cff0a90e</a:t>
+            </a:r>
+          </a:p>
+          <a:p xmlns:a="http://schemas.openxmlformats.org/drawingml/2006/main">
+            <a:r>
+              <a:t>Proposal SHA-256 0ed1dcda854e43bb82b7e830ba4b2224cdb8da0741fa9d6cb4fe459d4266ace0</a:t>
+            </a:r>
+          </a:p>
+          <a:p xmlns:a="http://schemas.openxmlformats.org/drawingml/2006/main">
+            <a:r>
+              <a:t>Immutable execution receipt SHA-256 bc2c422dc4a9ec855fe6831a1b6afcd2ef86961db5bc954bd71c74d5ec39d842</a:t>
+            </a:r>
+          </a:p>
+          <a:p xmlns:a="http://schemas.openxmlformats.org/drawingml/2006/main">
+            <a:r>
+              <a:t>Later audit SHA-256 2c11e5d97389f5cdcabab87f586d0511c5d6e4e8bdc0b2bd4cdcbfdb7f9d783c</a:t>
             </a:r>
           </a:p>
           <a:p xmlns:a="http://schemas.openxmlformats.org/drawingml/2006/main">
@@ -2262,7 +2262,7 @@
           <p:cNvPr id="3" name="Title">
             <a:extLst xmlns:a="http://schemas.openxmlformats.org/drawingml/2006/main">
               <a:ext uri="{FF2B5EF4-FFF2-40B4-BE49-F238E27FC236}">
-                <a16:creationId xmlns:a16="http://schemas.microsoft.com/office/drawing/2014/main" id="{21BB5223-5EEC-44E0-AE9A-8D60D412E027}"/>
+                <a16:creationId xmlns:a16="http://schemas.microsoft.com/office/drawing/2014/main" id="{589443B7-F491-4E4E-BBDD-573B9813CCA6}"/>
               </a:ext>
             </a:extLst>
           </p:cNvPr>
@@ -2419,7 +2419,7 @@
           <p:cNvPr id="2" name="Subtitle">
             <a:extLst xmlns:a="http://schemas.openxmlformats.org/drawingml/2006/main">
               <a:ext uri="{FF2B5EF4-FFF2-40B4-BE49-F238E27FC236}">
-                <a16:creationId xmlns:a16="http://schemas.microsoft.com/office/drawing/2014/main" id="{011BF116-BB13-46A9-90BE-2E473EF69CE7}"/>
+                <a16:creationId xmlns:a16="http://schemas.microsoft.com/office/drawing/2014/main" id="{C64C70A5-A4BD-47D7-BB1A-673AD6D257D7}"/>
               </a:ext>
             </a:extLst>
           </p:cNvPr>
@@ -2593,7 +2593,7 @@
           <p:cNvPr id="2" name="Section title">
             <a:extLst xmlns:a="http://schemas.openxmlformats.org/drawingml/2006/main">
               <a:ext uri="{FF2B5EF4-FFF2-40B4-BE49-F238E27FC236}">
-                <a16:creationId xmlns:a16="http://schemas.microsoft.com/office/drawing/2014/main" id="{23BCB66F-27A5-4AE5-BCD3-AEAC8EE46F7D}"/>
+                <a16:creationId xmlns:a16="http://schemas.microsoft.com/office/drawing/2014/main" id="{81B7AAEC-5292-4A83-9971-92D2773B5C79}"/>
               </a:ext>
             </a:extLst>
           </p:cNvPr>
@@ -2767,7 +2767,7 @@
           <p:cNvPr id="3" name="Title">
             <a:extLst xmlns:a="http://schemas.openxmlformats.org/drawingml/2006/main">
               <a:ext uri="{FF2B5EF4-FFF2-40B4-BE49-F238E27FC236}">
-                <a16:creationId xmlns:a16="http://schemas.microsoft.com/office/drawing/2014/main" id="{24E279D9-2EB9-416D-A08E-5E01B5862D6E}"/>
+                <a16:creationId xmlns:a16="http://schemas.microsoft.com/office/drawing/2014/main" id="{A6875809-DE26-4022-B6E7-A83AF9956BDC}"/>
               </a:ext>
             </a:extLst>
           </p:cNvPr>
@@ -2924,7 +2924,7 @@
           <p:cNvPr id="2" name="Body">
             <a:extLst xmlns:a="http://schemas.openxmlformats.org/drawingml/2006/main">
               <a:ext uri="{FF2B5EF4-FFF2-40B4-BE49-F238E27FC236}">
-                <a16:creationId xmlns:a16="http://schemas.microsoft.com/office/drawing/2014/main" id="{AC70189C-322D-4E71-A2D1-BFAC58395084}"/>
+                <a16:creationId xmlns:a16="http://schemas.microsoft.com/office/drawing/2014/main" id="{401D9240-D6BD-43EA-A35A-64CCAF4EC322}"/>
               </a:ext>
             </a:extLst>
           </p:cNvPr>
@@ -3098,7 +3098,7 @@
           <p:cNvPr id="4" name="Title">
             <a:extLst xmlns:a="http://schemas.openxmlformats.org/drawingml/2006/main">
               <a:ext uri="{FF2B5EF4-FFF2-40B4-BE49-F238E27FC236}">
-                <a16:creationId xmlns:a16="http://schemas.microsoft.com/office/drawing/2014/main" id="{E444A410-EB75-4A5B-9E35-5A33E8322C64}"/>
+                <a16:creationId xmlns:a16="http://schemas.microsoft.com/office/drawing/2014/main" id="{47F4A65D-249C-4836-B169-AE45EED44B21}"/>
               </a:ext>
             </a:extLst>
           </p:cNvPr>
@@ -3255,7 +3255,7 @@
           <p:cNvPr id="2" name="Left column">
             <a:extLst xmlns:a="http://schemas.openxmlformats.org/drawingml/2006/main">
               <a:ext uri="{FF2B5EF4-FFF2-40B4-BE49-F238E27FC236}">
-                <a16:creationId xmlns:a16="http://schemas.microsoft.com/office/drawing/2014/main" id="{9A7B4911-8414-46C6-BD4E-8A208B2817F5}"/>
+                <a16:creationId xmlns:a16="http://schemas.microsoft.com/office/drawing/2014/main" id="{DDB7F9C7-5DB0-49A8-90C3-53160992AD70}"/>
               </a:ext>
             </a:extLst>
           </p:cNvPr>
@@ -3412,7 +3412,7 @@
           <p:cNvPr id="3" name="Right column">
             <a:extLst xmlns:a="http://schemas.openxmlformats.org/drawingml/2006/main">
               <a:ext uri="{FF2B5EF4-FFF2-40B4-BE49-F238E27FC236}">
-                <a16:creationId xmlns:a16="http://schemas.microsoft.com/office/drawing/2014/main" id="{10785BDE-9A24-4D8D-AB5A-9E6CEE9EFD03}"/>
+                <a16:creationId xmlns:a16="http://schemas.microsoft.com/office/drawing/2014/main" id="{9580D369-38C5-462D-B215-2BF71FEECDEE}"/>
               </a:ext>
             </a:extLst>
           </p:cNvPr>
@@ -3586,7 +3586,7 @@
           <p:cNvPr id="3" name="Title">
             <a:extLst xmlns:a="http://schemas.openxmlformats.org/drawingml/2006/main">
               <a:ext uri="{FF2B5EF4-FFF2-40B4-BE49-F238E27FC236}">
-                <a16:creationId xmlns:a16="http://schemas.microsoft.com/office/drawing/2014/main" id="{EA7322A0-617E-4A6D-9B63-543C50B1B663}"/>
+                <a16:creationId xmlns:a16="http://schemas.microsoft.com/office/drawing/2014/main" id="{28ACD92B-798A-4E31-A617-470290B31D24}"/>
               </a:ext>
             </a:extLst>
           </p:cNvPr>
@@ -3743,7 +3743,7 @@
           <p:cNvPr id="2" name="Left column">
             <a:extLst xmlns:a="http://schemas.openxmlformats.org/drawingml/2006/main">
               <a:ext uri="{FF2B5EF4-FFF2-40B4-BE49-F238E27FC236}">
-                <a16:creationId xmlns:a16="http://schemas.microsoft.com/office/drawing/2014/main" id="{7A3F0FC4-FCCF-498D-B8AB-DC92CFA92172}"/>
+                <a16:creationId xmlns:a16="http://schemas.microsoft.com/office/drawing/2014/main" id="{0F0EA803-E8DB-43E9-B099-69E9A6F5B8C0}"/>
               </a:ext>
             </a:extLst>
           </p:cNvPr>
@@ -3938,12 +3938,12 @@
   </p:cSld>
   <p:clrMap bg1="lt1" tx1="dk1" bg2="lt2" tx2="dk2" accent1="accent1" accent2="accent2" accent3="accent3" accent4="accent4" accent5="accent5" accent6="accent6" hlink="hlink" folHlink="folHlink"/>
   <p:sldLayoutIdLst>
-    <p:sldLayoutId xmlns:r="http://schemas.openxmlformats.org/officeDocument/2006/relationships" id="2147483649" r:id="R47389a25d2694ec1"/>
-    <p:sldLayoutId xmlns:r="http://schemas.openxmlformats.org/officeDocument/2006/relationships" id="2147483650" r:id="R5c9e4b39db504ff9"/>
-    <p:sldLayoutId xmlns:r="http://schemas.openxmlformats.org/officeDocument/2006/relationships" id="2147483651" r:id="R974c490a934049ea"/>
-    <p:sldLayoutId xmlns:r="http://schemas.openxmlformats.org/officeDocument/2006/relationships" id="2147483652" r:id="R4bfcf0087f034859"/>
-    <p:sldLayoutId xmlns:r="http://schemas.openxmlformats.org/officeDocument/2006/relationships" id="2147483653" r:id="R9eb25a25fd9a4fc1"/>
-    <p:sldLayoutId xmlns:r="http://schemas.openxmlformats.org/officeDocument/2006/relationships" id="2147483654" r:id="Rac238190cc924918"/>
+    <p:sldLayoutId xmlns:r="http://schemas.openxmlformats.org/officeDocument/2006/relationships" id="2147483649" r:id="R1202b325ffe84126"/>
+    <p:sldLayoutId xmlns:r="http://schemas.openxmlformats.org/officeDocument/2006/relationships" id="2147483650" r:id="R50f88dabeddb4e34"/>
+    <p:sldLayoutId xmlns:r="http://schemas.openxmlformats.org/officeDocument/2006/relationships" id="2147483651" r:id="R816c748fecde4915"/>
+    <p:sldLayoutId xmlns:r="http://schemas.openxmlformats.org/officeDocument/2006/relationships" id="2147483652" r:id="Re72ad86a6f7e483e"/>
+    <p:sldLayoutId xmlns:r="http://schemas.openxmlformats.org/officeDocument/2006/relationships" id="2147483653" r:id="Rd6048145743e4f9b"/>
+    <p:sldLayoutId xmlns:r="http://schemas.openxmlformats.org/officeDocument/2006/relationships" id="2147483654" r:id="R5edcac9528e84997"/>
   </p:sldLayoutIdLst>
   <p:txStyles>
     <p:titleStyle>
@@ -4758,7 +4758,7 @@
           <p:cNvPr id="5" name="">
             <a:extLst xmlns:a="http://schemas.openxmlformats.org/drawingml/2006/main">
               <a:ext uri="{FF2B5EF4-FFF2-40B4-BE49-F238E27FC236}">
-                <a16:creationId xmlns:a16="http://schemas.microsoft.com/office/drawing/2014/main" id="{B339C9E5-DF6F-4457-B0B3-C80E3076CF75}"/>
+                <a16:creationId xmlns:a16="http://schemas.microsoft.com/office/drawing/2014/main" id="{B9C4D5B6-FC81-4520-BDB9-96063679D8D9}"/>
               </a:ext>
             </a:extLst>
           </p:cNvPr>
@@ -4830,7 +4830,7 @@
           <p:cNvPr id="2" name="">
             <a:extLst xmlns:a="http://schemas.openxmlformats.org/drawingml/2006/main">
               <a:ext uri="{FF2B5EF4-FFF2-40B4-BE49-F238E27FC236}">
-                <a16:creationId xmlns:a16="http://schemas.microsoft.com/office/drawing/2014/main" id="{8D3C77EB-E9C4-44C3-8E48-EBA8BE154B7D}"/>
+                <a16:creationId xmlns:a16="http://schemas.microsoft.com/office/drawing/2014/main" id="{00F62D1C-0AE8-4CB1-BD6E-05E0E6BFE869}"/>
               </a:ext>
             </a:extLst>
           </p:cNvPr>
@@ -4902,7 +4902,7 @@
           <p:cNvPr id="3" name="">
             <a:extLst xmlns:a="http://schemas.openxmlformats.org/drawingml/2006/main">
               <a:ext uri="{FF2B5EF4-FFF2-40B4-BE49-F238E27FC236}">
-                <a16:creationId xmlns:a16="http://schemas.microsoft.com/office/drawing/2014/main" id="{E91A9F4F-FF3E-494E-90AE-08B943FBA73E}"/>
+                <a16:creationId xmlns:a16="http://schemas.microsoft.com/office/drawing/2014/main" id="{57D2E54B-BBE8-4229-AA23-6C7611790BEA}"/>
               </a:ext>
             </a:extLst>
           </p:cNvPr>
@@ -4964,7 +4964,7 @@
                 <a:ea typeface="Arial"/>
                 <a:cs typeface="Arial"/>
               </a:rPr>
-              <a:t>The local split gives reviewers a focused requirements baseline and a separate full model/runtime candidate. Clearer array, invalid-input and bake rules now have fresh tests.</a:t>
+              <a:t>The full follow-up now starts from placement authoring: a readable heading/pitch/roll input, with explicit physical meaning and sample evaluation. The focused requirements baseline remains separate.</a:t>
             </a:r>
           </a:p>
         </p:txBody>
@@ -4974,7 +4974,7 @@
           <p:cNvPr id="4" name="">
             <a:extLst xmlns:a="http://schemas.openxmlformats.org/drawingml/2006/main">
               <a:ext uri="{FF2B5EF4-FFF2-40B4-BE49-F238E27FC236}">
-                <a16:creationId xmlns:a16="http://schemas.microsoft.com/office/drawing/2014/main" id="{04AF12E0-4D5D-4755-B730-A288F2D2AE4C}"/>
+                <a16:creationId xmlns:a16="http://schemas.microsoft.com/office/drawing/2014/main" id="{54523966-949A-4F93-ACE2-B98ED68B0512}"/>
               </a:ext>
             </a:extLst>
           </p:cNvPr>
@@ -5036,7 +5036,7 @@
                 <a:ea typeface="Arial"/>
                 <a:cs typeface="Arial"/>
               </a:rPr>
-              <a:t>All prior recorded numeric results match. Six audited defects are corrected; normal sampling remains unresolved. Orientation storage and detailed conventions still need review.</a:t>
+              <a:t>All 105 prior case comparisons remain within their existing acceptance limits. New orientation and composition controls pass. Normal sampling remains unresolved; the preferred HPR model still needs group adoption.</a:t>
             </a:r>
           </a:p>
         </p:txBody>
@@ -5044,7 +5044,7 @@
     </p:spTree>
     <p:extLst>
       <p:ext uri="{BB962C8B-B14F-4D97-AF65-F5344CB8AC3E}">
-        <p14:creationId xmlns:p14="http://schemas.microsoft.com/office/powerpoint/2010/main" val="1674383663"/>
+        <p14:creationId xmlns:p14="http://schemas.microsoft.com/office/powerpoint/2010/main" val="71205490"/>
       </p:ext>
     </p:extLst>
   </p:cSld>
@@ -5075,7 +5075,7 @@
           <p:cNvPr id="9" name="">
             <a:extLst xmlns:a="http://schemas.openxmlformats.org/drawingml/2006/main">
               <a:ext uri="{FF2B5EF4-FFF2-40B4-BE49-F238E27FC236}">
-                <a16:creationId xmlns:a16="http://schemas.microsoft.com/office/drawing/2014/main" id="{F82EAF67-1390-4799-B7DD-5CD317638EE3}"/>
+                <a16:creationId xmlns:a16="http://schemas.microsoft.com/office/drawing/2014/main" id="{50F85D39-18B0-4645-9E0B-1E526A4E0104}"/>
               </a:ext>
             </a:extLst>
           </p:cNvPr>
@@ -5147,7 +5147,7 @@
           <p:cNvPr id="2" name="">
             <a:extLst xmlns:a="http://schemas.openxmlformats.org/drawingml/2006/main">
               <a:ext uri="{FF2B5EF4-FFF2-40B4-BE49-F238E27FC236}">
-                <a16:creationId xmlns:a16="http://schemas.microsoft.com/office/drawing/2014/main" id="{EC16A695-28E5-4D86-8A7A-DB6954A10881}"/>
+                <a16:creationId xmlns:a16="http://schemas.microsoft.com/office/drawing/2014/main" id="{89E2141E-A7D6-4917-8CF3-F5A14DAAD5E9}"/>
               </a:ext>
             </a:extLst>
           </p:cNvPr>
@@ -5219,7 +5219,7 @@
           <p:cNvPr id="3" name="">
             <a:extLst xmlns:a="http://schemas.openxmlformats.org/drawingml/2006/main">
               <a:ext uri="{FF2B5EF4-FFF2-40B4-BE49-F238E27FC236}">
-                <a16:creationId xmlns:a16="http://schemas.microsoft.com/office/drawing/2014/main" id="{A4260F1B-37C8-46F2-9899-BEBC6ACD6FBC}"/>
+                <a16:creationId xmlns:a16="http://schemas.microsoft.com/office/drawing/2014/main" id="{E476F78F-CB94-48C1-BAE7-CAA7CD6604AD}"/>
               </a:ext>
             </a:extLst>
           </p:cNvPr>
@@ -5229,7 +5229,7 @@
           <p:nvPr/>
         </p:nvPicPr>
         <p:blipFill>
-          <a:blip xmlns:r="http://schemas.openxmlformats.org/officeDocument/2006/relationships" xmlns:a="http://schemas.openxmlformats.org/drawingml/2006/main" r:embed="R2e02d866ed564574"/>
+          <a:blip xmlns:r="http://schemas.openxmlformats.org/officeDocument/2006/relationships" xmlns:a="http://schemas.openxmlformats.org/drawingml/2006/main" r:embed="R5c9372ad25c642d4"/>
           <a:stretch xmlns:a="http://schemas.openxmlformats.org/drawingml/2006/main"/>
         </p:blipFill>
         <p:spPr>
@@ -5247,7 +5247,7 @@
           <p:cNvPr id="4" name="">
             <a:extLst xmlns:a="http://schemas.openxmlformats.org/drawingml/2006/main">
               <a:ext uri="{FF2B5EF4-FFF2-40B4-BE49-F238E27FC236}">
-                <a16:creationId xmlns:a16="http://schemas.microsoft.com/office/drawing/2014/main" id="{7ADD2866-C0AE-447F-8355-BD923741E0CC}"/>
+                <a16:creationId xmlns:a16="http://schemas.microsoft.com/office/drawing/2014/main" id="{966208A4-5B0A-4ACD-901E-1D72634D224E}"/>
               </a:ext>
             </a:extLst>
           </p:cNvPr>
@@ -5319,7 +5319,7 @@
           <p:cNvPr id="5" name="">
             <a:extLst xmlns:a="http://schemas.openxmlformats.org/drawingml/2006/main">
               <a:ext uri="{FF2B5EF4-FFF2-40B4-BE49-F238E27FC236}">
-                <a16:creationId xmlns:a16="http://schemas.microsoft.com/office/drawing/2014/main" id="{9420BE06-00E2-40E6-806B-A20C8BF214D6}"/>
+                <a16:creationId xmlns:a16="http://schemas.microsoft.com/office/drawing/2014/main" id="{26090DF2-927A-49F6-937D-CFE14A29B53E}"/>
               </a:ext>
             </a:extLst>
           </p:cNvPr>
@@ -5391,7 +5391,7 @@
           <p:cNvPr id="6" name="">
             <a:extLst xmlns:a="http://schemas.openxmlformats.org/drawingml/2006/main">
               <a:ext uri="{FF2B5EF4-FFF2-40B4-BE49-F238E27FC236}">
-                <a16:creationId xmlns:a16="http://schemas.microsoft.com/office/drawing/2014/main" id="{78ED6A29-2FF0-432D-A10D-9DEA0B618836}"/>
+                <a16:creationId xmlns:a16="http://schemas.microsoft.com/office/drawing/2014/main" id="{9446A2DE-A3E9-4679-8B09-A098D690C306}"/>
               </a:ext>
             </a:extLst>
           </p:cNvPr>
@@ -5463,7 +5463,7 @@
           <p:cNvPr id="7" name="">
             <a:extLst xmlns:a="http://schemas.openxmlformats.org/drawingml/2006/main">
               <a:ext uri="{FF2B5EF4-FFF2-40B4-BE49-F238E27FC236}">
-                <a16:creationId xmlns:a16="http://schemas.microsoft.com/office/drawing/2014/main" id="{82E1BB47-20E9-4B26-8668-3A1167A689C7}"/>
+                <a16:creationId xmlns:a16="http://schemas.microsoft.com/office/drawing/2014/main" id="{9A0338E3-861B-4E92-915E-67038AC95C81}"/>
               </a:ext>
             </a:extLst>
           </p:cNvPr>
@@ -5535,7 +5535,7 @@
           <p:cNvPr id="8" name="">
             <a:extLst xmlns:a="http://schemas.openxmlformats.org/drawingml/2006/main">
               <a:ext uri="{FF2B5EF4-FFF2-40B4-BE49-F238E27FC236}">
-                <a16:creationId xmlns:a16="http://schemas.microsoft.com/office/drawing/2014/main" id="{0E16DF49-A3FB-4C87-B501-3A3264A27C7E}"/>
+                <a16:creationId xmlns:a16="http://schemas.microsoft.com/office/drawing/2014/main" id="{B50FBA1C-1115-4179-B488-8C183EA3E1B8}"/>
               </a:ext>
             </a:extLst>
           </p:cNvPr>
@@ -5605,7 +5605,7 @@
     </p:spTree>
     <p:extLst>
       <p:ext uri="{BB962C8B-B14F-4D97-AF65-F5344CB8AC3E}">
-        <p14:creationId xmlns:p14="http://schemas.microsoft.com/office/powerpoint/2010/main" val="465805258"/>
+        <p14:creationId xmlns:p14="http://schemas.microsoft.com/office/powerpoint/2010/main" val="1605089012"/>
       </p:ext>
     </p:extLst>
   </p:cSld>
@@ -5636,7 +5636,7 @@
           <p:cNvPr id="7" name="">
             <a:extLst xmlns:a="http://schemas.openxmlformats.org/drawingml/2006/main">
               <a:ext uri="{FF2B5EF4-FFF2-40B4-BE49-F238E27FC236}">
-                <a16:creationId xmlns:a16="http://schemas.microsoft.com/office/drawing/2014/main" id="{4D88F204-8723-436A-BF7F-03B1E7F10E19}"/>
+                <a16:creationId xmlns:a16="http://schemas.microsoft.com/office/drawing/2014/main" id="{E9DC3F84-F697-4313-8765-636546700FB6}"/>
               </a:ext>
             </a:extLst>
           </p:cNvPr>
@@ -5708,7 +5708,7 @@
           <p:cNvPr id="2" name="">
             <a:extLst xmlns:a="http://schemas.openxmlformats.org/drawingml/2006/main">
               <a:ext uri="{FF2B5EF4-FFF2-40B4-BE49-F238E27FC236}">
-                <a16:creationId xmlns:a16="http://schemas.microsoft.com/office/drawing/2014/main" id="{04A40F4B-5382-42BB-B555-FE28CD3429F7}"/>
+                <a16:creationId xmlns:a16="http://schemas.microsoft.com/office/drawing/2014/main" id="{FDBCF429-2388-4EE9-B423-90438E83B9AC}"/>
               </a:ext>
             </a:extLst>
           </p:cNvPr>
@@ -5780,7 +5780,7 @@
           <p:cNvPr id="3" name="Chart">
             <a:extLst xmlns:a="http://schemas.openxmlformats.org/drawingml/2006/main">
               <a:ext uri="{FF2B5EF4-FFF2-40B4-BE49-F238E27FC236}">
-                <a16:creationId xmlns:a16="http://schemas.microsoft.com/office/drawing/2014/main" id="{4819782F-2B50-43D3-80EB-D1D8C64785F6}"/>
+                <a16:creationId xmlns:a16="http://schemas.microsoft.com/office/drawing/2014/main" id="{7BDF7478-3460-444B-B6FD-7BB1FC5A4ED4}"/>
               </a:ext>
             </a:extLst>
           </p:cNvPr>
@@ -5793,7 +5793,7 @@
         </p:xfrm>
         <a:graphic xmlns:a="http://schemas.openxmlformats.org/drawingml/2006/main">
           <a:graphicData uri="http://schemas.openxmlformats.org/drawingml/2006/chart">
-            <c:chart xmlns:r="http://schemas.openxmlformats.org/officeDocument/2006/relationships" xmlns:c="http://schemas.openxmlformats.org/drawingml/2006/chart" r:id="R737f6c6caba24874"/>
+            <c:chart xmlns:r="http://schemas.openxmlformats.org/officeDocument/2006/relationships" xmlns:c="http://schemas.openxmlformats.org/drawingml/2006/chart" r:id="Rb22176a038284531"/>
           </a:graphicData>
         </a:graphic>
       </p:graphicFrame>
@@ -5802,7 +5802,7 @@
           <p:cNvPr id="4" name="">
             <a:extLst xmlns:a="http://schemas.openxmlformats.org/drawingml/2006/main">
               <a:ext uri="{FF2B5EF4-FFF2-40B4-BE49-F238E27FC236}">
-                <a16:creationId xmlns:a16="http://schemas.microsoft.com/office/drawing/2014/main" id="{63714EE2-9E5C-4D9B-A271-23F1B303A628}"/>
+                <a16:creationId xmlns:a16="http://schemas.microsoft.com/office/drawing/2014/main" id="{F20050D4-DD38-41C7-A50C-9D0346EAD894}"/>
               </a:ext>
             </a:extLst>
           </p:cNvPr>
@@ -5874,7 +5874,7 @@
           <p:cNvPr id="5" name="">
             <a:extLst xmlns:a="http://schemas.openxmlformats.org/drawingml/2006/main">
               <a:ext uri="{FF2B5EF4-FFF2-40B4-BE49-F238E27FC236}">
-                <a16:creationId xmlns:a16="http://schemas.microsoft.com/office/drawing/2014/main" id="{A4CFC832-D3F4-4D84-9B35-69442FCCD750}"/>
+                <a16:creationId xmlns:a16="http://schemas.microsoft.com/office/drawing/2014/main" id="{5AB39E84-7237-452B-8C2E-81CC9C0B6224}"/>
               </a:ext>
             </a:extLst>
           </p:cNvPr>
@@ -5946,7 +5946,7 @@
           <p:cNvPr id="6" name="">
             <a:extLst xmlns:a="http://schemas.openxmlformats.org/drawingml/2006/main">
               <a:ext uri="{FF2B5EF4-FFF2-40B4-BE49-F238E27FC236}">
-                <a16:creationId xmlns:a16="http://schemas.microsoft.com/office/drawing/2014/main" id="{AE1027ED-4A1E-4EE1-B372-BEAC93788B38}"/>
+                <a16:creationId xmlns:a16="http://schemas.microsoft.com/office/drawing/2014/main" id="{D411DE03-7FE3-4BE1-9E2A-812D399280FE}"/>
               </a:ext>
             </a:extLst>
           </p:cNvPr>
@@ -6008,7 +6008,7 @@
                 <a:ea typeface="Arial"/>
                 <a:cs typeface="Arial"/>
               </a:rPr>
-              <a:t>The bake preserves time codes 0, 5, 10 and 48 time codes per second. It provides no original-trajectory guarantee between those samples.</a:t>
+              <a:t>Position interpolation is shown here. HPR wrap, held samples, reference offsets and value clips pass separate controls.</a:t>
             </a:r>
           </a:p>
         </p:txBody>
@@ -6016,7 +6016,7 @@
     </p:spTree>
     <p:extLst>
       <p:ext uri="{BB962C8B-B14F-4D97-AF65-F5344CB8AC3E}">
-        <p14:creationId xmlns:p14="http://schemas.microsoft.com/office/powerpoint/2010/main" val="1580927308"/>
+        <p14:creationId xmlns:p14="http://schemas.microsoft.com/office/powerpoint/2010/main" val="1506157751"/>
       </p:ext>
     </p:extLst>
   </p:cSld>
@@ -6047,7 +6047,7 @@
           <p:cNvPr id="4" name="">
             <a:extLst xmlns:a="http://schemas.openxmlformats.org/drawingml/2006/main">
               <a:ext uri="{FF2B5EF4-FFF2-40B4-BE49-F238E27FC236}">
-                <a16:creationId xmlns:a16="http://schemas.microsoft.com/office/drawing/2014/main" id="{C166774B-7F2B-48AF-9D5B-65941AAE0262}"/>
+                <a16:creationId xmlns:a16="http://schemas.microsoft.com/office/drawing/2014/main" id="{63D0A52E-9748-4142-94C3-BC1C466AD00F}"/>
               </a:ext>
             </a:extLst>
           </p:cNvPr>
@@ -6119,7 +6119,7 @@
           <p:cNvPr id="2" name="">
             <a:extLst xmlns:a="http://schemas.openxmlformats.org/drawingml/2006/main">
               <a:ext uri="{FF2B5EF4-FFF2-40B4-BE49-F238E27FC236}">
-                <a16:creationId xmlns:a16="http://schemas.microsoft.com/office/drawing/2014/main" id="{F0A6E468-D0C7-41BD-B066-6163EA746BE4}"/>
+                <a16:creationId xmlns:a16="http://schemas.microsoft.com/office/drawing/2014/main" id="{3CAFAAC1-95BB-48CE-B432-2AB28342149B}"/>
               </a:ext>
             </a:extLst>
           </p:cNvPr>
@@ -6235,7 +6235,7 @@
                           <a:ea typeface="Arial"/>
                           <a:cs typeface="Arial"/>
                         </a:rPr>
-                        <a:t>Input-only meaning is supported. Stored quaternion versus one heading/pitch/roll tuple and its interpolation need review.</a:t>
+                        <a:t>Preferred HPR tuple in degrees, with explicit pose interpolation. Authored inputs only; adoption pending.</a:t>
                       </a:r>
                     </a:p>
                   </a:txBody>
@@ -6471,7 +6471,7 @@
           <p:cNvPr id="3" name="">
             <a:extLst xmlns:a="http://schemas.openxmlformats.org/drawingml/2006/main">
               <a:ext uri="{FF2B5EF4-FFF2-40B4-BE49-F238E27FC236}">
-                <a16:creationId xmlns:a16="http://schemas.microsoft.com/office/drawing/2014/main" id="{3318E34D-242F-4065-B85A-6DF13EC76921}"/>
+                <a16:creationId xmlns:a16="http://schemas.microsoft.com/office/drawing/2014/main" id="{CF8881D9-77F1-4779-BE18-CBA9DDF6CE2A}"/>
               </a:ext>
             </a:extLst>
           </p:cNvPr>
@@ -6533,7 +6533,7 @@
                 <a:ea typeface="Arial"/>
                 <a:cs typeface="Arial"/>
               </a:rPr>
-              <a:t>Review stored orientation and detailed conventions; keep the supported input-only meaning.</a:t>
+              <a:t>Prefer HPR for authoring; review the precise pose convention and interpolation before adoption.</a:t>
             </a:r>
           </a:p>
         </p:txBody>
@@ -6541,7 +6541,7 @@
     </p:spTree>
     <p:extLst>
       <p:ext uri="{BB962C8B-B14F-4D97-AF65-F5344CB8AC3E}">
-        <p14:creationId xmlns:p14="http://schemas.microsoft.com/office/powerpoint/2010/main" val="2059646077"/>
+        <p14:creationId xmlns:p14="http://schemas.microsoft.com/office/powerpoint/2010/main" val="971006590"/>
       </p:ext>
     </p:extLst>
   </p:cSld>
@@ -6572,7 +6572,7 @@
           <p:cNvPr id="4" name="">
             <a:extLst xmlns:a="http://schemas.openxmlformats.org/drawingml/2006/main">
               <a:ext uri="{FF2B5EF4-FFF2-40B4-BE49-F238E27FC236}">
-                <a16:creationId xmlns:a16="http://schemas.microsoft.com/office/drawing/2014/main" id="{93DD7A22-F0D1-4E8E-A06D-1313101D09B7}"/>
+                <a16:creationId xmlns:a16="http://schemas.microsoft.com/office/drawing/2014/main" id="{1081F1EC-CF05-4A1F-A315-F3D517BEBAF8}"/>
               </a:ext>
             </a:extLst>
           </p:cNvPr>
@@ -6644,7 +6644,7 @@
           <p:cNvPr id="2" name="">
             <a:extLst xmlns:a="http://schemas.openxmlformats.org/drawingml/2006/main">
               <a:ext uri="{FF2B5EF4-FFF2-40B4-BE49-F238E27FC236}">
-                <a16:creationId xmlns:a16="http://schemas.microsoft.com/office/drawing/2014/main" id="{E85426E1-D85F-409F-92C1-18F056F48C77}"/>
+                <a16:creationId xmlns:a16="http://schemas.microsoft.com/office/drawing/2014/main" id="{E14D3E32-C483-4EF4-99C4-1654F9811FDD}"/>
               </a:ext>
             </a:extLst>
           </p:cNvPr>
@@ -6996,7 +6996,7 @@
           <p:cNvPr id="3" name="">
             <a:extLst xmlns:a="http://schemas.openxmlformats.org/drawingml/2006/main">
               <a:ext uri="{FF2B5EF4-FFF2-40B4-BE49-F238E27FC236}">
-                <a16:creationId xmlns:a16="http://schemas.microsoft.com/office/drawing/2014/main" id="{1CB5E1FF-DAD5-413D-B09B-2CF3FE0ED234}"/>
+                <a16:creationId xmlns:a16="http://schemas.microsoft.com/office/drawing/2014/main" id="{85731CF5-1065-4B63-85E6-E56D918A90F0}"/>
               </a:ext>
             </a:extLst>
           </p:cNvPr>
@@ -7066,7 +7066,7 @@
     </p:spTree>
     <p:extLst>
       <p:ext uri="{BB962C8B-B14F-4D97-AF65-F5344CB8AC3E}">
-        <p14:creationId xmlns:p14="http://schemas.microsoft.com/office/powerpoint/2010/main" val="1354288103"/>
+        <p14:creationId xmlns:p14="http://schemas.microsoft.com/office/powerpoint/2010/main" val="937388719"/>
       </p:ext>
     </p:extLst>
   </p:cSld>
@@ -7097,7 +7097,7 @@
           <p:cNvPr id="4" name="">
             <a:extLst xmlns:a="http://schemas.openxmlformats.org/drawingml/2006/main">
               <a:ext uri="{FF2B5EF4-FFF2-40B4-BE49-F238E27FC236}">
-                <a16:creationId xmlns:a16="http://schemas.microsoft.com/office/drawing/2014/main" id="{0A8DA65A-F5AE-4A29-A568-644D37B5B6A5}"/>
+                <a16:creationId xmlns:a16="http://schemas.microsoft.com/office/drawing/2014/main" id="{8B16CE18-35BB-40C7-9804-7D3F93B6FE13}"/>
               </a:ext>
             </a:extLst>
           </p:cNvPr>
@@ -7169,7 +7169,7 @@
           <p:cNvPr id="2" name="">
             <a:extLst xmlns:a="http://schemas.openxmlformats.org/drawingml/2006/main">
               <a:ext uri="{FF2B5EF4-FFF2-40B4-BE49-F238E27FC236}">
-                <a16:creationId xmlns:a16="http://schemas.microsoft.com/office/drawing/2014/main" id="{880D8B17-AEEC-438A-88BC-789A1370D361}"/>
+                <a16:creationId xmlns:a16="http://schemas.microsoft.com/office/drawing/2014/main" id="{8EA7B8C0-D0F1-4FA4-8D51-79BC3584C8FA}"/>
               </a:ext>
             </a:extLst>
           </p:cNvPr>
@@ -7285,7 +7285,7 @@
                           <a:ea typeface="Arial"/>
                           <a:cs typeface="Arial"/>
                         </a:rPr>
-                        <a:t>213,231 coordinate results per reader. Maximum measured difference 3.39e-08 m. They share PROJ and native dataset decoding.</a:t>
+                        <a:t>213,243 coordinate results per reader. Maximum measured difference 3.39e-08 m. They share PROJ and native dataset decoding.</a:t>
                       </a:r>
                     </a:p>
                   </a:txBody>
@@ -7339,7 +7339,7 @@
                           <a:ea typeface="Arial"/>
                           <a:cs typeface="Arial"/>
                         </a:rPr>
-                        <a:t>Reuses Python placement. Recorded readback covers 177,864 geometry vertices and 36 edit, failure and recovery checks, across 35 jobs.</a:t>
+                        <a:t>Reuses Python placement. Recorded readback covers 177,872 geometry vertices and 48 edit, failure and recovery checks, across 39 jobs.</a:t>
                       </a:r>
                     </a:p>
                   </a:txBody>
@@ -7447,7 +7447,7 @@
                           <a:ea typeface="Arial"/>
                           <a:cs typeface="Arial"/>
                         </a:rPr>
-                        <a:t>70 regressions and 61 distinguishing controls passed. Fresh independent diagnostics verify six repairs and retain the unresolved normal case.</a:t>
+                        <a:t>88 regressions and 65 distinguishing controls passed. Fresh independent diagnostics verify six repairs and retain the unresolved normal case.</a:t>
                       </a:r>
                     </a:p>
                   </a:txBody>
@@ -7575,7 +7575,7 @@
           <p:cNvPr id="3" name="">
             <a:extLst xmlns:a="http://schemas.openxmlformats.org/drawingml/2006/main">
               <a:ext uri="{FF2B5EF4-FFF2-40B4-BE49-F238E27FC236}">
-                <a16:creationId xmlns:a16="http://schemas.microsoft.com/office/drawing/2014/main" id="{799C3C2D-0E32-433F-A1CD-8C840C554423}"/>
+                <a16:creationId xmlns:a16="http://schemas.microsoft.com/office/drawing/2014/main" id="{32428F0A-2AFF-4D95-8286-241719A8C6E2}"/>
               </a:ext>
             </a:extLst>
           </p:cNvPr>
@@ -7645,7 +7645,7 @@
     </p:spTree>
     <p:extLst>
       <p:ext uri="{BB962C8B-B14F-4D97-AF65-F5344CB8AC3E}">
-        <p14:creationId xmlns:p14="http://schemas.microsoft.com/office/powerpoint/2010/main" val="1941559474"/>
+        <p14:creationId xmlns:p14="http://schemas.microsoft.com/office/powerpoint/2010/main" val="627203414"/>
       </p:ext>
     </p:extLst>
   </p:cSld>
@@ -7676,7 +7676,7 @@
           <p:cNvPr id="5" name="">
             <a:extLst xmlns:a="http://schemas.openxmlformats.org/drawingml/2006/main">
               <a:ext uri="{FF2B5EF4-FFF2-40B4-BE49-F238E27FC236}">
-                <a16:creationId xmlns:a16="http://schemas.microsoft.com/office/drawing/2014/main" id="{16E05D2E-B59A-4A21-AE8D-177F977D3D34}"/>
+                <a16:creationId xmlns:a16="http://schemas.microsoft.com/office/drawing/2014/main" id="{C7098617-C0EA-4FB6-8F6F-3873D5B86966}"/>
               </a:ext>
             </a:extLst>
           </p:cNvPr>
@@ -7748,7 +7748,7 @@
           <p:cNvPr id="2" name="">
             <a:extLst xmlns:a="http://schemas.openxmlformats.org/drawingml/2006/main">
               <a:ext uri="{FF2B5EF4-FFF2-40B4-BE49-F238E27FC236}">
-                <a16:creationId xmlns:a16="http://schemas.microsoft.com/office/drawing/2014/main" id="{7A894154-04AC-445D-9F96-91709503C409}"/>
+                <a16:creationId xmlns:a16="http://schemas.microsoft.com/office/drawing/2014/main" id="{B84A849F-7C28-4737-95FD-577076B289C4}"/>
               </a:ext>
             </a:extLst>
           </p:cNvPr>
@@ -7820,7 +7820,7 @@
           <p:cNvPr id="3" name="">
             <a:extLst xmlns:a="http://schemas.openxmlformats.org/drawingml/2006/main">
               <a:ext uri="{FF2B5EF4-FFF2-40B4-BE49-F238E27FC236}">
-                <a16:creationId xmlns:a16="http://schemas.microsoft.com/office/drawing/2014/main" id="{6FB36966-D90A-45AC-81F1-BDA953897139}"/>
+                <a16:creationId xmlns:a16="http://schemas.microsoft.com/office/drawing/2014/main" id="{90A3FDB3-3255-47AB-BEB4-BF3566A666BC}"/>
               </a:ext>
             </a:extLst>
           </p:cNvPr>
@@ -8098,7 +8098,7 @@
                           <a:ea typeface="Arial"/>
                           <a:cs typeface="Arial"/>
                         </a:rPr>
-                        <a:t>crs:orientation says which way the model faces and tilts relative to local east, north and up at its origin.</a:t>
+                        <a:t>crs:orientation stores heading, pitch and roll in degrees: which way the model faces and tilts at its origin.</a:t>
                       </a:r>
                     </a:p>
                   </a:txBody>
@@ -8118,7 +8118,7 @@
           <p:cNvPr id="4" name="">
             <a:extLst xmlns:a="http://schemas.openxmlformats.org/drawingml/2006/main">
               <a:ext uri="{FF2B5EF4-FFF2-40B4-BE49-F238E27FC236}">
-                <a16:creationId xmlns:a16="http://schemas.microsoft.com/office/drawing/2014/main" id="{921F0828-9793-4813-A65B-ADFABF4CBDF3}"/>
+                <a16:creationId xmlns:a16="http://schemas.microsoft.com/office/drawing/2014/main" id="{361B0EE0-C136-4D11-92F0-60D522DD8D18}"/>
               </a:ext>
             </a:extLst>
           </p:cNvPr>
@@ -8188,7 +8188,7 @@
     </p:spTree>
     <p:extLst>
       <p:ext uri="{BB962C8B-B14F-4D97-AF65-F5344CB8AC3E}">
-        <p14:creationId xmlns:p14="http://schemas.microsoft.com/office/powerpoint/2010/main" val="1763462481"/>
+        <p14:creationId xmlns:p14="http://schemas.microsoft.com/office/powerpoint/2010/main" val="1330021116"/>
       </p:ext>
     </p:extLst>
   </p:cSld>
@@ -8219,7 +8219,7 @@
           <ns0:cNvPr id="9" name="">
             <ns1:extLst>
               <ns1:ext uri="{FF2B5EF4-FFF2-40B4-BE49-F238E27FC236}">
-                <ns2:creationId id="{3D86A9BA-8A12-415A-BFB4-AFE6D8B382F5}"/>
+                <ns2:creationId id="{217C1DC2-1262-45F7-B10E-80D08A51C672}"/>
               </ns1:ext>
             </ns1:extLst>
           </ns0:cNvPr>
@@ -8291,7 +8291,7 @@
           <ns0:cNvPr id="2" name="">
             <ns1:extLst>
               <ns1:ext uri="{FF2B5EF4-FFF2-40B4-BE49-F238E27FC236}">
-                <ns2:creationId id="{95DF31BE-574A-427B-899C-1A671E863588}"/>
+                <ns2:creationId id="{29DBD395-82D2-48AD-824B-80B8FFB6A1AE}"/>
               </ns1:ext>
             </ns1:extLst>
           </ns0:cNvPr>
@@ -8363,7 +8363,7 @@
           <ns0:cNvPr id="3" name="">
             <ns1:extLst>
               <ns1:ext uri="{FF2B5EF4-FFF2-40B4-BE49-F238E27FC236}">
-                <ns2:creationId id="{D1B9E510-DBB8-4A17-A926-CC2A7BC0E611}"/>
+                <ns2:creationId id="{C9D8D000-B5F5-44E8-B716-B52FCBFC2AC9}"/>
               </ns1:ext>
             </ns1:extLst>
           </ns0:cNvPr>
@@ -8373,7 +8373,7 @@
           <ns0:nvPr/>
         </ns0:nvPicPr>
         <ns0:blipFill>
-          <ns1:blip ns3:embed="Rb8d858c899bd4a9d"/>
+          <ns1:blip ns3:embed="R71129250e8424158"/>
           <ns1:srcRect l="0" t="8974" r="0" b="33333"/>
           <ns1:stretch/>
         </ns0:blipFill>
@@ -8392,7 +8392,7 @@
           <ns0:cNvPr id="4" name="">
             <ns1:extLst>
               <ns1:ext uri="{FF2B5EF4-FFF2-40B4-BE49-F238E27FC236}">
-                <ns2:creationId id="{AA1FB82F-B4E3-4407-BC1E-6CB4CAD6D4A2}"/>
+                <ns2:creationId id="{A55CB239-0A2C-4E6C-975A-5C19188D57CB}"/>
               </ns1:ext>
             </ns1:extLst>
           </ns0:cNvPr>
@@ -8464,7 +8464,7 @@
           <ns0:cNvPr id="5" name="">
             <ns1:extLst>
               <ns1:ext uri="{FF2B5EF4-FFF2-40B4-BE49-F238E27FC236}">
-                <ns2:creationId id="{AFBC5CDA-3B79-4986-B954-948331925C04}"/>
+                <ns2:creationId id="{23B6FB3F-DF7B-4DBB-A0E5-3571FB3E92B6}"/>
               </ns1:ext>
             </ns1:extLst>
           </ns0:cNvPr>
@@ -8536,7 +8536,7 @@
           <ns0:cNvPr id="6" name="">
             <ns1:extLst>
               <ns1:ext uri="{FF2B5EF4-FFF2-40B4-BE49-F238E27FC236}">
-                <ns2:creationId id="{5E7D78C6-AD82-4579-A2AB-45EC61855353}"/>
+                <ns2:creationId id="{D1A0BC71-445A-4555-A396-D373BB04092A}"/>
               </ns1:ext>
             </ns1:extLst>
           </ns0:cNvPr>
@@ -8608,7 +8608,7 @@
           <ns0:cNvPr id="7" name="">
             <ns1:extLst>
               <ns1:ext uri="{FF2B5EF4-FFF2-40B4-BE49-F238E27FC236}">
-                <ns2:creationId id="{F5C322F2-F9BD-4F8E-9897-CB49546197A9}"/>
+                <ns2:creationId id="{26052368-F006-4134-8169-9EFFF25D3E72}"/>
               </ns1:ext>
             </ns1:extLst>
           </ns0:cNvPr>
@@ -8680,7 +8680,7 @@
           <ns0:cNvPr id="8" name="">
             <ns1:extLst>
               <ns1:ext uri="{FF2B5EF4-FFF2-40B4-BE49-F238E27FC236}">
-                <ns2:creationId id="{7187F4B5-F0FB-492A-9A32-9AAD47943FD7}"/>
+                <ns2:creationId id="{82AD54BB-B271-4D89-B98D-BB74520FD1F3}"/>
               </ns1:ext>
             </ns1:extLst>
           </ns0:cNvPr>
@@ -8750,7 +8750,7 @@
     </ns0:spTree>
     <ns0:extLst>
       <ns0:ext uri="{BB962C8B-B14F-4D97-AF65-F5344CB8AC3E}">
-        <ns4:creationId val="773685833"/>
+        <ns4:creationId val="60000145"/>
       </ns0:ext>
     </ns0:extLst>
   </ns0:cSld>
@@ -8781,7 +8781,7 @@
           <ns0:cNvPr id="9" name="">
             <ns1:extLst>
               <ns1:ext uri="{FF2B5EF4-FFF2-40B4-BE49-F238E27FC236}">
-                <ns2:creationId id="{1C1CDA5B-1267-47BD-B596-97FA948C4411}"/>
+                <ns2:creationId id="{E8680611-9BB4-4924-A1B7-B995CEF6F19C}"/>
               </ns1:ext>
             </ns1:extLst>
           </ns0:cNvPr>
@@ -8853,7 +8853,7 @@
           <ns0:cNvPr id="2" name="">
             <ns1:extLst>
               <ns1:ext uri="{FF2B5EF4-FFF2-40B4-BE49-F238E27FC236}">
-                <ns2:creationId id="{0EE40F72-06B4-4962-822C-46F180EFB9A6}"/>
+                <ns2:creationId id="{B476CFD8-BEC2-4394-BFCD-D376627604E5}"/>
               </ns1:ext>
             </ns1:extLst>
           </ns0:cNvPr>
@@ -8925,7 +8925,7 @@
           <ns0:cNvPr id="3" name="">
             <ns1:extLst>
               <ns1:ext uri="{FF2B5EF4-FFF2-40B4-BE49-F238E27FC236}">
-                <ns2:creationId id="{5B2F041A-55EA-4CF6-B4CB-DDC39D22D3DD}"/>
+                <ns2:creationId id="{C12E792C-1AC3-48B6-95D8-1654FF86FEAE}"/>
               </ns1:ext>
             </ns1:extLst>
           </ns0:cNvPr>
@@ -8935,7 +8935,7 @@
           <ns0:nvPr/>
         </ns0:nvPicPr>
         <ns0:blipFill>
-          <ns1:blip ns3:embed="Rd07a50b13ce94e34"/>
+          <ns1:blip ns3:embed="R7b9eee2dbe034fa3"/>
           <ns1:srcRect l="0" t="8974" r="0" b="33333"/>
           <ns1:stretch/>
         </ns0:blipFill>
@@ -8954,7 +8954,7 @@
           <ns0:cNvPr id="4" name="">
             <ns1:extLst>
               <ns1:ext uri="{FF2B5EF4-FFF2-40B4-BE49-F238E27FC236}">
-                <ns2:creationId id="{2AFA0065-3D73-4AB4-93BA-76B91A21689E}"/>
+                <ns2:creationId id="{F290FA25-A9D6-459E-B11C-039820519AD2}"/>
               </ns1:ext>
             </ns1:extLst>
           </ns0:cNvPr>
@@ -9026,7 +9026,7 @@
           <ns0:cNvPr id="5" name="">
             <ns1:extLst>
               <ns1:ext uri="{FF2B5EF4-FFF2-40B4-BE49-F238E27FC236}">
-                <ns2:creationId id="{60A36E72-4900-410B-B28D-FD54E2625377}"/>
+                <ns2:creationId id="{7E4878C4-8F12-4FC3-83D6-F6CC299D78BB}"/>
               </ns1:ext>
             </ns1:extLst>
           </ns0:cNvPr>
@@ -9098,7 +9098,7 @@
           <ns0:cNvPr id="6" name="">
             <ns1:extLst>
               <ns1:ext uri="{FF2B5EF4-FFF2-40B4-BE49-F238E27FC236}">
-                <ns2:creationId id="{E7275140-8A84-4DC4-B145-B6805AB43F50}"/>
+                <ns2:creationId id="{AA82C676-B1B9-4202-889E-46530D0B008C}"/>
               </ns1:ext>
             </ns1:extLst>
           </ns0:cNvPr>
@@ -9170,7 +9170,7 @@
           <ns0:cNvPr id="7" name="">
             <ns1:extLst>
               <ns1:ext uri="{FF2B5EF4-FFF2-40B4-BE49-F238E27FC236}">
-                <ns2:creationId id="{58C9DD7D-66BF-432A-9FC4-B91012BC2DA9}"/>
+                <ns2:creationId id="{4A61FED5-E9BB-4741-B87B-6162964EA437}"/>
               </ns1:ext>
             </ns1:extLst>
           </ns0:cNvPr>
@@ -9242,7 +9242,7 @@
           <ns0:cNvPr id="8" name="">
             <ns1:extLst>
               <ns1:ext uri="{FF2B5EF4-FFF2-40B4-BE49-F238E27FC236}">
-                <ns2:creationId id="{640CC6FE-9A8D-4087-B2FE-61F6458301F3}"/>
+                <ns2:creationId id="{5D039E69-0194-49C2-BB8A-35FC5A0E7F36}"/>
               </ns1:ext>
             </ns1:extLst>
           </ns0:cNvPr>
@@ -9312,7 +9312,7 @@
     </ns0:spTree>
     <ns0:extLst>
       <ns0:ext uri="{BB962C8B-B14F-4D97-AF65-F5344CB8AC3E}">
-        <ns4:creationId val="1795429975"/>
+        <ns4:creationId val="1982735989"/>
       </ns0:ext>
     </ns0:extLst>
   </ns0:cSld>
@@ -9343,7 +9343,7 @@
           <p:cNvPr id="8" name="">
             <a:extLst xmlns:a="http://schemas.openxmlformats.org/drawingml/2006/main">
               <a:ext uri="{FF2B5EF4-FFF2-40B4-BE49-F238E27FC236}">
-                <a16:creationId xmlns:a16="http://schemas.microsoft.com/office/drawing/2014/main" id="{4D88F6AE-F813-4737-BF5A-96A71640419A}"/>
+                <a16:creationId xmlns:a16="http://schemas.microsoft.com/office/drawing/2014/main" id="{21C678C0-7BE9-46A4-9CB2-D2B701244AF5}"/>
               </a:ext>
             </a:extLst>
           </p:cNvPr>
@@ -9415,7 +9415,7 @@
           <p:cNvPr id="2" name="">
             <a:extLst xmlns:a="http://schemas.openxmlformats.org/drawingml/2006/main">
               <a:ext uri="{FF2B5EF4-FFF2-40B4-BE49-F238E27FC236}">
-                <a16:creationId xmlns:a16="http://schemas.microsoft.com/office/drawing/2014/main" id="{B5EA8A7B-7FD6-4053-AA70-4E6294F30597}"/>
+                <a16:creationId xmlns:a16="http://schemas.microsoft.com/office/drawing/2014/main" id="{2BD3C420-61B5-4F2C-BB0E-61879D4CE061}"/>
               </a:ext>
             </a:extLst>
           </p:cNvPr>
@@ -9487,7 +9487,7 @@
           <p:cNvPr id="3" name="">
             <a:extLst xmlns:a="http://schemas.openxmlformats.org/drawingml/2006/main">
               <a:ext uri="{FF2B5EF4-FFF2-40B4-BE49-F238E27FC236}">
-                <a16:creationId xmlns:a16="http://schemas.microsoft.com/office/drawing/2014/main" id="{6A96EAB3-9548-4F44-9D49-1DA69B1EB6D6}"/>
+                <a16:creationId xmlns:a16="http://schemas.microsoft.com/office/drawing/2014/main" id="{CC0892FB-1929-4A97-89C6-6764EECA39B1}"/>
               </a:ext>
             </a:extLst>
           </p:cNvPr>
@@ -9559,7 +9559,7 @@
           <p:cNvPr id="4" name="">
             <a:extLst xmlns:a="http://schemas.openxmlformats.org/drawingml/2006/main">
               <a:ext uri="{FF2B5EF4-FFF2-40B4-BE49-F238E27FC236}">
-                <a16:creationId xmlns:a16="http://schemas.microsoft.com/office/drawing/2014/main" id="{D4AA487A-6D8C-4CA0-8A55-38B25EA0726C}"/>
+                <a16:creationId xmlns:a16="http://schemas.microsoft.com/office/drawing/2014/main" id="{CBB10B86-B2E0-413B-8F07-08071F4AB493}"/>
               </a:ext>
             </a:extLst>
           </p:cNvPr>
@@ -9908,7 +9908,7 @@
           <p:cNvPr id="5" name="">
             <a:extLst xmlns:a="http://schemas.openxmlformats.org/drawingml/2006/main">
               <a:ext uri="{FF2B5EF4-FFF2-40B4-BE49-F238E27FC236}">
-                <a16:creationId xmlns:a16="http://schemas.microsoft.com/office/drawing/2014/main" id="{9E09BC29-F537-4556-88DC-D3E9A3FB86EA}"/>
+                <a16:creationId xmlns:a16="http://schemas.microsoft.com/office/drawing/2014/main" id="{D4B2AC0D-0783-45B8-B801-44BD22541FAB}"/>
               </a:ext>
             </a:extLst>
           </p:cNvPr>
@@ -9980,7 +9980,7 @@
           <p:cNvPr id="6" name="">
             <a:extLst xmlns:a="http://schemas.openxmlformats.org/drawingml/2006/main">
               <a:ext uri="{FF2B5EF4-FFF2-40B4-BE49-F238E27FC236}">
-                <a16:creationId xmlns:a16="http://schemas.microsoft.com/office/drawing/2014/main" id="{22300BC3-E6C5-42C0-A782-43161CFFA228}"/>
+                <a16:creationId xmlns:a16="http://schemas.microsoft.com/office/drawing/2014/main" id="{E7775E7F-FC2E-42D6-8658-05236DFDA6D6}"/>
               </a:ext>
             </a:extLst>
           </p:cNvPr>
@@ -10329,7 +10329,7 @@
           <p:cNvPr id="7" name="">
             <a:extLst xmlns:a="http://schemas.openxmlformats.org/drawingml/2006/main">
               <a:ext uri="{FF2B5EF4-FFF2-40B4-BE49-F238E27FC236}">
-                <a16:creationId xmlns:a16="http://schemas.microsoft.com/office/drawing/2014/main" id="{AB736EB1-4787-4B8D-8DE7-72346DD23DB1}"/>
+                <a16:creationId xmlns:a16="http://schemas.microsoft.com/office/drawing/2014/main" id="{9050F218-F0FD-47EA-93C2-8FC8F6DEC108}"/>
               </a:ext>
             </a:extLst>
           </p:cNvPr>
@@ -10399,7 +10399,7 @@
     </p:spTree>
     <p:extLst>
       <p:ext uri="{BB962C8B-B14F-4D97-AF65-F5344CB8AC3E}">
-        <p14:creationId xmlns:p14="http://schemas.microsoft.com/office/powerpoint/2010/main" val="1433457696"/>
+        <p14:creationId xmlns:p14="http://schemas.microsoft.com/office/powerpoint/2010/main" val="213783025"/>
       </p:ext>
     </p:extLst>
   </p:cSld>
@@ -10430,7 +10430,7 @@
           <p:cNvPr id="9" name="">
             <a:extLst xmlns:a="http://schemas.openxmlformats.org/drawingml/2006/main">
               <a:ext uri="{FF2B5EF4-FFF2-40B4-BE49-F238E27FC236}">
-                <a16:creationId xmlns:a16="http://schemas.microsoft.com/office/drawing/2014/main" id="{3CC839B3-EF91-499F-B0CF-FC7A652E98A4}"/>
+                <a16:creationId xmlns:a16="http://schemas.microsoft.com/office/drawing/2014/main" id="{BE9B0715-1A07-4725-8D81-5B8CB3E12959}"/>
               </a:ext>
             </a:extLst>
           </p:cNvPr>
@@ -10502,7 +10502,7 @@
           <p:cNvPr id="2" name="">
             <a:extLst xmlns:a="http://schemas.openxmlformats.org/drawingml/2006/main">
               <a:ext uri="{FF2B5EF4-FFF2-40B4-BE49-F238E27FC236}">
-                <a16:creationId xmlns:a16="http://schemas.microsoft.com/office/drawing/2014/main" id="{E8EB1B87-B39E-4EDA-A365-0F8D1CF10E12}"/>
+                <a16:creationId xmlns:a16="http://schemas.microsoft.com/office/drawing/2014/main" id="{7E7563BE-9A0B-4155-A6E8-5D3E96B00228}"/>
               </a:ext>
             </a:extLst>
           </p:cNvPr>
@@ -10574,7 +10574,7 @@
           <p:cNvPr id="3" name="">
             <a:extLst xmlns:a="http://schemas.openxmlformats.org/drawingml/2006/main">
               <a:ext uri="{FF2B5EF4-FFF2-40B4-BE49-F238E27FC236}">
-                <a16:creationId xmlns:a16="http://schemas.microsoft.com/office/drawing/2014/main" id="{CD20ACF7-D592-43B7-AB26-2A9305C3A05B}"/>
+                <a16:creationId xmlns:a16="http://schemas.microsoft.com/office/drawing/2014/main" id="{65187886-06E1-4BA8-BB5F-784F1E186C19}"/>
               </a:ext>
             </a:extLst>
           </p:cNvPr>
@@ -10584,7 +10584,7 @@
           <p:nvPr/>
         </p:nvPicPr>
         <p:blipFill>
-          <a:blip xmlns:r="http://schemas.openxmlformats.org/officeDocument/2006/relationships" xmlns:a="http://schemas.openxmlformats.org/drawingml/2006/main" r:embed="R69731ffa422042f8"/>
+          <a:blip xmlns:r="http://schemas.openxmlformats.org/officeDocument/2006/relationships" xmlns:a="http://schemas.openxmlformats.org/drawingml/2006/main" r:embed="R383a418c57274d36"/>
           <a:stretch xmlns:a="http://schemas.openxmlformats.org/drawingml/2006/main"/>
         </p:blipFill>
         <p:spPr>
@@ -10602,7 +10602,7 @@
           <p:cNvPr id="4" name="">
             <a:extLst xmlns:a="http://schemas.openxmlformats.org/drawingml/2006/main">
               <a:ext uri="{FF2B5EF4-FFF2-40B4-BE49-F238E27FC236}">
-                <a16:creationId xmlns:a16="http://schemas.microsoft.com/office/drawing/2014/main" id="{EF80E8D1-1151-4D88-AC43-511AC9C69B6C}"/>
+                <a16:creationId xmlns:a16="http://schemas.microsoft.com/office/drawing/2014/main" id="{8F7A33E4-DF51-4438-9204-9EE1500D3A7B}"/>
               </a:ext>
             </a:extLst>
           </p:cNvPr>
@@ -10674,7 +10674,7 @@
           <p:cNvPr id="5" name="">
             <a:extLst xmlns:a="http://schemas.openxmlformats.org/drawingml/2006/main">
               <a:ext uri="{FF2B5EF4-FFF2-40B4-BE49-F238E27FC236}">
-                <a16:creationId xmlns:a16="http://schemas.microsoft.com/office/drawing/2014/main" id="{C8E54E40-F8C1-4638-A7A0-CEF1138A6FF7}"/>
+                <a16:creationId xmlns:a16="http://schemas.microsoft.com/office/drawing/2014/main" id="{A23B0A65-661C-4F2F-99FF-4E7B23993F29}"/>
               </a:ext>
             </a:extLst>
           </p:cNvPr>
@@ -10746,7 +10746,7 @@
           <p:cNvPr id="6" name="">
             <a:extLst xmlns:a="http://schemas.openxmlformats.org/drawingml/2006/main">
               <a:ext uri="{FF2B5EF4-FFF2-40B4-BE49-F238E27FC236}">
-                <a16:creationId xmlns:a16="http://schemas.microsoft.com/office/drawing/2014/main" id="{E566D8F5-262D-4793-AADD-D8550E010C33}"/>
+                <a16:creationId xmlns:a16="http://schemas.microsoft.com/office/drawing/2014/main" id="{668FCFF9-464F-4234-9454-D344F77A8DC4}"/>
               </a:ext>
             </a:extLst>
           </p:cNvPr>
@@ -10818,7 +10818,7 @@
           <p:cNvPr id="7" name="">
             <a:extLst xmlns:a="http://schemas.openxmlformats.org/drawingml/2006/main">
               <a:ext uri="{FF2B5EF4-FFF2-40B4-BE49-F238E27FC236}">
-                <a16:creationId xmlns:a16="http://schemas.microsoft.com/office/drawing/2014/main" id="{C2A21F56-1397-45AB-80BE-51BE6A1CF5ED}"/>
+                <a16:creationId xmlns:a16="http://schemas.microsoft.com/office/drawing/2014/main" id="{0F812867-10F2-45ED-A4AD-924E3C56E7B5}"/>
               </a:ext>
             </a:extLst>
           </p:cNvPr>
@@ -10890,7 +10890,7 @@
           <p:cNvPr id="8" name="">
             <a:extLst xmlns:a="http://schemas.openxmlformats.org/drawingml/2006/main">
               <a:ext uri="{FF2B5EF4-FFF2-40B4-BE49-F238E27FC236}">
-                <a16:creationId xmlns:a16="http://schemas.microsoft.com/office/drawing/2014/main" id="{236DBB13-2B5B-48D3-B2AC-E7AA50E5A065}"/>
+                <a16:creationId xmlns:a16="http://schemas.microsoft.com/office/drawing/2014/main" id="{7F67E0CC-ABD7-4A62-9473-9616E5BD1552}"/>
               </a:ext>
             </a:extLst>
           </p:cNvPr>
@@ -10960,7 +10960,7 @@
     </p:spTree>
     <p:extLst>
       <p:ext uri="{BB962C8B-B14F-4D97-AF65-F5344CB8AC3E}">
-        <p14:creationId xmlns:p14="http://schemas.microsoft.com/office/powerpoint/2010/main" val="493390405"/>
+        <p14:creationId xmlns:p14="http://schemas.microsoft.com/office/powerpoint/2010/main" val="1267397729"/>
       </p:ext>
     </p:extLst>
   </p:cSld>
@@ -10991,7 +10991,7 @@
           <p:cNvPr id="6" name="">
             <a:extLst xmlns:a="http://schemas.openxmlformats.org/drawingml/2006/main">
               <a:ext uri="{FF2B5EF4-FFF2-40B4-BE49-F238E27FC236}">
-                <a16:creationId xmlns:a16="http://schemas.microsoft.com/office/drawing/2014/main" id="{0ADEBFD0-223D-499A-9C9D-EEB69517B6A7}"/>
+                <a16:creationId xmlns:a16="http://schemas.microsoft.com/office/drawing/2014/main" id="{59B635C4-9525-4C1A-9F7A-CA1BC97F5EB8}"/>
               </a:ext>
             </a:extLst>
           </p:cNvPr>
@@ -11063,7 +11063,7 @@
           <p:cNvPr id="2" name="">
             <a:extLst xmlns:a="http://schemas.openxmlformats.org/drawingml/2006/main">
               <a:ext uri="{FF2B5EF4-FFF2-40B4-BE49-F238E27FC236}">
-                <a16:creationId xmlns:a16="http://schemas.microsoft.com/office/drawing/2014/main" id="{E00042F4-5461-4D9F-98F0-01A2508B728A}"/>
+                <a16:creationId xmlns:a16="http://schemas.microsoft.com/office/drawing/2014/main" id="{9BA54FBC-1368-4841-A940-80A707CF5991}"/>
               </a:ext>
             </a:extLst>
           </p:cNvPr>
@@ -11135,7 +11135,7 @@
           <p:cNvPr id="3" name="">
             <a:extLst xmlns:a="http://schemas.openxmlformats.org/drawingml/2006/main">
               <a:ext uri="{FF2B5EF4-FFF2-40B4-BE49-F238E27FC236}">
-                <a16:creationId xmlns:a16="http://schemas.microsoft.com/office/drawing/2014/main" id="{53983AA4-94B5-4A56-A2B2-5D0DD0781D4A}"/>
+                <a16:creationId xmlns:a16="http://schemas.microsoft.com/office/drawing/2014/main" id="{768AB706-4762-4848-AAA5-5E1C04A86EC8}"/>
               </a:ext>
             </a:extLst>
           </p:cNvPr>
@@ -11145,7 +11145,7 @@
           <p:nvPr/>
         </p:nvPicPr>
         <p:blipFill>
-          <a:blip xmlns:r="http://schemas.openxmlformats.org/officeDocument/2006/relationships" xmlns:a="http://schemas.openxmlformats.org/drawingml/2006/main" r:embed="R55dd3fba41f648b8"/>
+          <a:blip xmlns:r="http://schemas.openxmlformats.org/officeDocument/2006/relationships" xmlns:a="http://schemas.openxmlformats.org/drawingml/2006/main" r:embed="R0d4923b9de324e9c"/>
           <a:stretch xmlns:a="http://schemas.openxmlformats.org/drawingml/2006/main"/>
         </p:blipFill>
         <p:spPr>
@@ -11163,7 +11163,7 @@
           <p:cNvPr id="4" name="">
             <a:extLst xmlns:a="http://schemas.openxmlformats.org/drawingml/2006/main">
               <a:ext uri="{FF2B5EF4-FFF2-40B4-BE49-F238E27FC236}">
-                <a16:creationId xmlns:a16="http://schemas.microsoft.com/office/drawing/2014/main" id="{44CFC8D4-1215-43D9-AAA3-65B7EF566683}"/>
+                <a16:creationId xmlns:a16="http://schemas.microsoft.com/office/drawing/2014/main" id="{08D72438-EBAE-4271-8227-E20F8E23A110}"/>
               </a:ext>
             </a:extLst>
           </p:cNvPr>
@@ -11235,7 +11235,7 @@
           <p:cNvPr id="5" name="">
             <a:extLst xmlns:a="http://schemas.openxmlformats.org/drawingml/2006/main">
               <a:ext uri="{FF2B5EF4-FFF2-40B4-BE49-F238E27FC236}">
-                <a16:creationId xmlns:a16="http://schemas.microsoft.com/office/drawing/2014/main" id="{7EA5298A-05D9-4689-AA04-1F8065D63788}"/>
+                <a16:creationId xmlns:a16="http://schemas.microsoft.com/office/drawing/2014/main" id="{69825CCF-B4AE-40C2-8F33-38D172E4C43F}"/>
               </a:ext>
             </a:extLst>
           </p:cNvPr>
@@ -11297,7 +11297,7 @@
                 <a:ea typeface="Arial"/>
                 <a:cs typeface="Arial"/>
               </a:rPr>
-              <a:t>Synthetic values. Dimension-name tests check associations independently of the shared decoder.</a:t>
+              <a:t>The values are synthetic. Named-dimension associations are independently tested; agreeing readers alone cannot verify shared decoding.</a:t>
             </a:r>
           </a:p>
         </p:txBody>
@@ -11305,7 +11305,7 @@
     </p:spTree>
     <p:extLst>
       <p:ext uri="{BB962C8B-B14F-4D97-AF65-F5344CB8AC3E}">
-        <p14:creationId xmlns:p14="http://schemas.microsoft.com/office/powerpoint/2010/main" val="810960368"/>
+        <p14:creationId xmlns:p14="http://schemas.microsoft.com/office/powerpoint/2010/main" val="652356291"/>
       </p:ext>
     </p:extLst>
   </p:cSld>
@@ -11336,7 +11336,7 @@
           <p:cNvPr id="5" name="">
             <a:extLst xmlns:a="http://schemas.openxmlformats.org/drawingml/2006/main">
               <a:ext uri="{FF2B5EF4-FFF2-40B4-BE49-F238E27FC236}">
-                <a16:creationId xmlns:a16="http://schemas.microsoft.com/office/drawing/2014/main" id="{C50E0C46-94AA-4C57-880E-62554390CEF9}"/>
+                <a16:creationId xmlns:a16="http://schemas.microsoft.com/office/drawing/2014/main" id="{D3A34B28-8D9B-4062-A16E-F9DA22238A9A}"/>
               </a:ext>
             </a:extLst>
           </p:cNvPr>
@@ -11408,7 +11408,7 @@
           <p:cNvPr id="2" name="">
             <a:extLst xmlns:a="http://schemas.openxmlformats.org/drawingml/2006/main">
               <a:ext uri="{FF2B5EF4-FFF2-40B4-BE49-F238E27FC236}">
-                <a16:creationId xmlns:a16="http://schemas.microsoft.com/office/drawing/2014/main" id="{50294DF4-E680-4715-BEC3-984176784B67}"/>
+                <a16:creationId xmlns:a16="http://schemas.microsoft.com/office/drawing/2014/main" id="{0F73BD4F-8853-400F-8584-87238B5AA0DA}"/>
               </a:ext>
             </a:extLst>
           </p:cNvPr>
@@ -11480,7 +11480,7 @@
           <p:cNvPr id="3" name="">
             <a:extLst xmlns:a="http://schemas.openxmlformats.org/drawingml/2006/main">
               <a:ext uri="{FF2B5EF4-FFF2-40B4-BE49-F238E27FC236}">
-                <a16:creationId xmlns:a16="http://schemas.microsoft.com/office/drawing/2014/main" id="{F6E60BC6-AB7D-4F3E-B36E-02C8654A53A3}"/>
+                <a16:creationId xmlns:a16="http://schemas.microsoft.com/office/drawing/2014/main" id="{055B5895-0B96-4E30-83CC-DBE639B1AEF3}"/>
               </a:ext>
             </a:extLst>
           </p:cNvPr>
@@ -11940,7 +11940,7 @@
           <p:cNvPr id="4" name="">
             <a:extLst xmlns:a="http://schemas.openxmlformats.org/drawingml/2006/main">
               <a:ext uri="{FF2B5EF4-FFF2-40B4-BE49-F238E27FC236}">
-                <a16:creationId xmlns:a16="http://schemas.microsoft.com/office/drawing/2014/main" id="{E364DE42-4A0A-4FA5-BC89-B680E3E16AB6}"/>
+                <a16:creationId xmlns:a16="http://schemas.microsoft.com/office/drawing/2014/main" id="{0893E84F-C37C-434E-9707-B68FCB9AE912}"/>
               </a:ext>
             </a:extLst>
           </p:cNvPr>
@@ -12010,7 +12010,7 @@
     </p:spTree>
     <p:extLst>
       <p:ext uri="{BB962C8B-B14F-4D97-AF65-F5344CB8AC3E}">
-        <p14:creationId xmlns:p14="http://schemas.microsoft.com/office/powerpoint/2010/main" val="486715488"/>
+        <p14:creationId xmlns:p14="http://schemas.microsoft.com/office/powerpoint/2010/main" val="2132031523"/>
       </p:ext>
     </p:extLst>
   </p:cSld>
@@ -12041,7 +12041,7 @@
           <p:cNvPr id="9" name="">
             <a:extLst xmlns:a="http://schemas.openxmlformats.org/drawingml/2006/main">
               <a:ext uri="{FF2B5EF4-FFF2-40B4-BE49-F238E27FC236}">
-                <a16:creationId xmlns:a16="http://schemas.microsoft.com/office/drawing/2014/main" id="{6967941E-35C9-495E-9987-7FFB410DBAC7}"/>
+                <a16:creationId xmlns:a16="http://schemas.microsoft.com/office/drawing/2014/main" id="{DD6BF383-B061-4A35-ADC4-3150757226AA}"/>
               </a:ext>
             </a:extLst>
           </p:cNvPr>
@@ -12113,7 +12113,7 @@
           <p:cNvPr id="2" name="">
             <a:extLst xmlns:a="http://schemas.openxmlformats.org/drawingml/2006/main">
               <a:ext uri="{FF2B5EF4-FFF2-40B4-BE49-F238E27FC236}">
-                <a16:creationId xmlns:a16="http://schemas.microsoft.com/office/drawing/2014/main" id="{2049EF4F-DFF8-4405-A447-DCA3DDDD3AB9}"/>
+                <a16:creationId xmlns:a16="http://schemas.microsoft.com/office/drawing/2014/main" id="{AB34A648-595B-44F2-9C57-B0DBA56E59A8}"/>
               </a:ext>
             </a:extLst>
           </p:cNvPr>
@@ -12185,7 +12185,7 @@
           <p:cNvPr id="3" name="">
             <a:extLst xmlns:a="http://schemas.openxmlformats.org/drawingml/2006/main">
               <a:ext uri="{FF2B5EF4-FFF2-40B4-BE49-F238E27FC236}">
-                <a16:creationId xmlns:a16="http://schemas.microsoft.com/office/drawing/2014/main" id="{AF554BFF-712E-4472-9CC2-0CC9FD258AF5}"/>
+                <a16:creationId xmlns:a16="http://schemas.microsoft.com/office/drawing/2014/main" id="{6DAE4C99-07FE-42F6-8500-0C1354DAF36E}"/>
               </a:ext>
             </a:extLst>
           </p:cNvPr>
@@ -12195,7 +12195,7 @@
           <p:nvPr/>
         </p:nvPicPr>
         <p:blipFill>
-          <a:blip xmlns:r="http://schemas.openxmlformats.org/officeDocument/2006/relationships" xmlns:a="http://schemas.openxmlformats.org/drawingml/2006/main" r:embed="R2efcedba11f14ad1"/>
+          <a:blip xmlns:r="http://schemas.openxmlformats.org/officeDocument/2006/relationships" xmlns:a="http://schemas.openxmlformats.org/drawingml/2006/main" r:embed="R6037c39680914654"/>
           <a:stretch xmlns:a="http://schemas.openxmlformats.org/drawingml/2006/main"/>
         </p:blipFill>
         <p:spPr>
@@ -12213,7 +12213,7 @@
           <p:cNvPr id="4" name="">
             <a:extLst xmlns:a="http://schemas.openxmlformats.org/drawingml/2006/main">
               <a:ext uri="{FF2B5EF4-FFF2-40B4-BE49-F238E27FC236}">
-                <a16:creationId xmlns:a16="http://schemas.microsoft.com/office/drawing/2014/main" id="{9CBAB235-C44A-41F7-8D58-09ECBD197082}"/>
+                <a16:creationId xmlns:a16="http://schemas.microsoft.com/office/drawing/2014/main" id="{370C51C0-2BF0-477B-8D83-2566BD67DBF0}"/>
               </a:ext>
             </a:extLst>
           </p:cNvPr>
@@ -12285,7 +12285,7 @@
           <p:cNvPr id="5" name="">
             <a:extLst xmlns:a="http://schemas.openxmlformats.org/drawingml/2006/main">
               <a:ext uri="{FF2B5EF4-FFF2-40B4-BE49-F238E27FC236}">
-                <a16:creationId xmlns:a16="http://schemas.microsoft.com/office/drawing/2014/main" id="{08ED7D4D-5973-4C4F-BB21-16ABBEF14400}"/>
+                <a16:creationId xmlns:a16="http://schemas.microsoft.com/office/drawing/2014/main" id="{3F423587-9148-4C29-B4AC-7126AF427156}"/>
               </a:ext>
             </a:extLst>
           </p:cNvPr>
@@ -12357,7 +12357,7 @@
           <p:cNvPr id="6" name="">
             <a:extLst xmlns:a="http://schemas.openxmlformats.org/drawingml/2006/main">
               <a:ext uri="{FF2B5EF4-FFF2-40B4-BE49-F238E27FC236}">
-                <a16:creationId xmlns:a16="http://schemas.microsoft.com/office/drawing/2014/main" id="{04BA30B3-C2CE-44E6-B33F-CAD0CC72BBEB}"/>
+                <a16:creationId xmlns:a16="http://schemas.microsoft.com/office/drawing/2014/main" id="{CDFA1876-3D6A-4F51-89A6-25345B33756D}"/>
               </a:ext>
             </a:extLst>
           </p:cNvPr>
@@ -12429,7 +12429,7 @@
           <p:cNvPr id="7" name="">
             <a:extLst xmlns:a="http://schemas.openxmlformats.org/drawingml/2006/main">
               <a:ext uri="{FF2B5EF4-FFF2-40B4-BE49-F238E27FC236}">
-                <a16:creationId xmlns:a16="http://schemas.microsoft.com/office/drawing/2014/main" id="{D81F189A-E063-4C8A-9FC0-CCFCFA632491}"/>
+                <a16:creationId xmlns:a16="http://schemas.microsoft.com/office/drawing/2014/main" id="{4BB93905-3BBA-4E91-AC80-073CD641968F}"/>
               </a:ext>
             </a:extLst>
           </p:cNvPr>
@@ -12501,7 +12501,7 @@
           <p:cNvPr id="8" name="">
             <a:extLst xmlns:a="http://schemas.openxmlformats.org/drawingml/2006/main">
               <a:ext uri="{FF2B5EF4-FFF2-40B4-BE49-F238E27FC236}">
-                <a16:creationId xmlns:a16="http://schemas.microsoft.com/office/drawing/2014/main" id="{0C071068-74FC-4568-A57A-66802C5B33F9}"/>
+                <a16:creationId xmlns:a16="http://schemas.microsoft.com/office/drawing/2014/main" id="{6AC47F9D-C2C6-4FBF-BBF5-B6F49C54648A}"/>
               </a:ext>
             </a:extLst>
           </p:cNvPr>
@@ -12571,7 +12571,7 @@
     </p:spTree>
     <p:extLst>
       <p:ext uri="{BB962C8B-B14F-4D97-AF65-F5344CB8AC3E}">
-        <p14:creationId xmlns:p14="http://schemas.microsoft.com/office/powerpoint/2010/main" val="1666206875"/>
+        <p14:creationId xmlns:p14="http://schemas.microsoft.com/office/powerpoint/2010/main" val="1516864774"/>
       </p:ext>
     </p:extLst>
   </p:cSld>

--- a/extras/usd/examples/usdGeospatialBuild/delivery/geospatial-build.pptx
+++ b/extras/usd/examples/usdGeospatialBuild/delivery/geospatial-build.pptx
@@ -2,26 +2,26 @@
 <file path=ppt/presentation.xml><?xml version="1.0" encoding="utf-8"?>
 <p:presentation xmlns:p="http://schemas.openxmlformats.org/presentationml/2006/main">
   <p:sldMasterIdLst>
-    <p:sldMasterId xmlns:r="http://schemas.openxmlformats.org/officeDocument/2006/relationships" id="2147483648" r:id="Rdfba1843544343d3"/>
+    <p:sldMasterId xmlns:r="http://schemas.openxmlformats.org/officeDocument/2006/relationships" id="2147483648" r:id="R9f305b25e35240ce"/>
   </p:sldMasterIdLst>
   <p:notesMasterIdLst>
-    <p:notesMasterId xmlns:r="http://schemas.openxmlformats.org/officeDocument/2006/relationships" r:id="R78bb458733b44785"/>
+    <p:notesMasterId xmlns:r="http://schemas.openxmlformats.org/officeDocument/2006/relationships" r:id="R655df4b8610a47a3"/>
   </p:notesMasterIdLst>
   <p:sldIdLst>
-    <p:sldId xmlns:r="http://schemas.openxmlformats.org/officeDocument/2006/relationships" id="256" r:id="R0561bb57196a4964"/>
-    <p:sldId xmlns:r="http://schemas.openxmlformats.org/officeDocument/2006/relationships" id="257" r:id="Rec53372af7cb4d6d"/>
-    <p:sldId xmlns:r="http://schemas.openxmlformats.org/officeDocument/2006/relationships" id="258" r:id="R002ac477fa8d48c7"/>
-    <p:sldId xmlns:r="http://schemas.openxmlformats.org/officeDocument/2006/relationships" id="259" r:id="Rd0eccbc8ba064ccf"/>
-    <p:sldId xmlns:r="http://schemas.openxmlformats.org/officeDocument/2006/relationships" id="260" r:id="R29e24ee684a34d62"/>
-    <p:sldId xmlns:r="http://schemas.openxmlformats.org/officeDocument/2006/relationships" id="261" r:id="R7f417be9ef844295"/>
-    <p:sldId xmlns:r="http://schemas.openxmlformats.org/officeDocument/2006/relationships" id="262" r:id="Rcbe224f013e648f9"/>
-    <p:sldId xmlns:r="http://schemas.openxmlformats.org/officeDocument/2006/relationships" id="263" r:id="R08cdce61928447c9"/>
-    <p:sldId xmlns:r="http://schemas.openxmlformats.org/officeDocument/2006/relationships" id="264" r:id="Rc964f8576b854e50"/>
-    <p:sldId xmlns:r="http://schemas.openxmlformats.org/officeDocument/2006/relationships" id="265" r:id="R5c5b123e1bd74d0c"/>
-    <p:sldId xmlns:r="http://schemas.openxmlformats.org/officeDocument/2006/relationships" id="266" r:id="R6bb35783a8d143c1"/>
-    <p:sldId xmlns:r="http://schemas.openxmlformats.org/officeDocument/2006/relationships" id="267" r:id="R6039c4fd694f425a"/>
-    <p:sldId xmlns:r="http://schemas.openxmlformats.org/officeDocument/2006/relationships" id="268" r:id="R468a85123d794f08"/>
-    <p:sldId xmlns:r="http://schemas.openxmlformats.org/officeDocument/2006/relationships" id="269" r:id="R750acfe1cb914bc4"/>
+    <p:sldId xmlns:r="http://schemas.openxmlformats.org/officeDocument/2006/relationships" id="256" r:id="R2065c74de6154965"/>
+    <p:sldId xmlns:r="http://schemas.openxmlformats.org/officeDocument/2006/relationships" id="257" r:id="Rb8a20d546e9f4ff1"/>
+    <p:sldId xmlns:r="http://schemas.openxmlformats.org/officeDocument/2006/relationships" id="258" r:id="Rc01c7185d6fc46fd"/>
+    <p:sldId xmlns:r="http://schemas.openxmlformats.org/officeDocument/2006/relationships" id="259" r:id="Rf73741f5fb854842"/>
+    <p:sldId xmlns:r="http://schemas.openxmlformats.org/officeDocument/2006/relationships" id="260" r:id="R17153d3d980c4654"/>
+    <p:sldId xmlns:r="http://schemas.openxmlformats.org/officeDocument/2006/relationships" id="261" r:id="R83ad27dfcc4f4265"/>
+    <p:sldId xmlns:r="http://schemas.openxmlformats.org/officeDocument/2006/relationships" id="262" r:id="R1cc4c2f476724789"/>
+    <p:sldId xmlns:r="http://schemas.openxmlformats.org/officeDocument/2006/relationships" id="263" r:id="R7f6fa74f647f4bba"/>
+    <p:sldId xmlns:r="http://schemas.openxmlformats.org/officeDocument/2006/relationships" id="264" r:id="R2ba5cc79b46c42f2"/>
+    <p:sldId xmlns:r="http://schemas.openxmlformats.org/officeDocument/2006/relationships" id="265" r:id="R3d32a039ea014606"/>
+    <p:sldId xmlns:r="http://schemas.openxmlformats.org/officeDocument/2006/relationships" id="266" r:id="Reae08caa4bf34d12"/>
+    <p:sldId xmlns:r="http://schemas.openxmlformats.org/officeDocument/2006/relationships" id="267" r:id="R675f1e175b044cfa"/>
+    <p:sldId xmlns:r="http://schemas.openxmlformats.org/officeDocument/2006/relationships" id="268" r:id="Rbf004268b6cf4be7"/>
+    <p:sldId xmlns:r="http://schemas.openxmlformats.org/officeDocument/2006/relationships" id="269" r:id="R715d1b89862f4f98"/>
   </p:sldIdLst>
   <p:sldSz cx="12192000" cy="6858000"/>
   <p:notesSz cx="6858000" cy="9144000"/>
@@ -455,7 +455,7 @@
           <a:lstStyle xmlns:a="http://schemas.openxmlformats.org/drawingml/2006/main"/>
           <a:p xmlns:a="http://schemas.openxmlformats.org/drawingml/2006/main">
             <a:r>
-              <a:t>{"assessment":[["Data model and runtime rules","The draft separates authored inputs from computed results and defines placement, adjustment, query and bake behavior."],["Group alignment","The detailed orientation, frame, WKT string normalization and publication conventions remain proposed."],["Prototype limitations","Lighting directions lack an error bound. Rotation uncertainty is unquantified. A quoted CRS name causes false rejection."],["Verification coverage","Selected workflows and distinguishing controls support the rules. Broader composition and continuous space/time coverage remain unverified."]],"placement":[["Physical orientation","One heading/pitch/roll tuple describes physical attitude against local east, north and up. Projection effects stay computed."],["Project adjustments","The directly bound model's own xformOps adjust its placed result in a fixed project chart, including ordinary pivots."],["Child objects","Child transforms define model-local geometry. Their offsets follow model axes and the geospatial attitude."],["Repeated models","Each instance offset retains its instancer-local meaning. Independent prototype placement participates once. A required unavailable inverse fails."],["Geographic scene results","Geographic queries retain longitude/latitude/height. Cartesian geometry and bounds use the datum's Earth-centred frame."]],"data":[["Native data associations","Declare the asset, field and coordinate domain. Preserve named dimensions and observation times."],["WKT string normalization","Normalize lexical spelling without losing represented information. Equal tokens establish serialized identity."],["Semantic CRS comparison","Different normalized texts can represent equivalent CRSs. Comparison names its criteria and domain."],["Dependency declaration","Existing Profiles metadata carries a proposed complete publication summary, including unloaded and retained variant content."],["Baked coordinate context","Retain a Cartesian CRS and double-precision origin without an active source placement binding. Ordinary USD controls subsequent transforms."]]}</a:t>
+              <a:t>{"assessment":[["Data model and runtime rules","The draft separates authored inputs from computed results and defines placement, adjustment, query and bake behavior."],["Group alignment","Input and declaration rules have agreement. Detailed conventions and identities await review."],["Prototype limitations","Lighting directions lack an error bound. Rotation uncertainty is unquantified. A quoted CRS name causes false rejection."],["Verification coverage","Selected workflows and distinguishing controls support the rules. Broader composition and continuous space/time coverage remain unverified."]],"placement":[["Physical orientation","One heading/pitch/roll tuple describes physical attitude against local east, north and up. Projection effects stay computed."],["Project adjustments","The directly bound model's own xformOps adjust its placed result in a fixed project chart, including ordinary pivots."],["Child objects","Child transforms define model-local geometry. Their offsets follow model axes and the geospatial attitude."],["Repeated models","Each instance offset retains its instancer-local meaning. Independent prototype placement participates once. A required unavailable inverse fails."],["Geographic scene results","Geographic queries retain longitude/latitude/height. Cartesian geometry and bounds use the datum's Earth-centred frame."]],"data":[["Native data associations","Declare the asset, field and coordinate domain. Preserve named dimensions and observation times."],["WKT string normalization","Normalize lexical spelling without losing represented information. Equal tokens establish serialized identity."],["Semantic CRS comparison","Different normalized texts can represent equivalent CRSs. Comparison names its criteria and domain."],["Dependency declaration","Profiles records complete publication coverage, including unloaded and retained variant content. Fixed v1 identities remain proposed."],["Baked coordinate context","Retain a Cartesian CRS and double-precision origin without an active source placement binding. Ordinary USD controls subsequent transforms."]]}</a:t>
             </a:r>
           </a:p>
           <a:p xmlns:a="http://schemas.openxmlformats.org/drawingml/2006/main">
@@ -465,17 +465,17 @@
           </a:p>
           <a:p xmlns:a="http://schemas.openxmlformats.org/drawingml/2006/main">
             <a:r>
-              <a:t>Proposal 7b5b34b7282305135f672663a3cffb0f94342ecc SHA-256 010d4c0243e7e6985284cccadb00fb7c6f7b0c5c50f22d81bb31ada960548d75</a:t>
-            </a:r>
-          </a:p>
-          <a:p xmlns:a="http://schemas.openxmlformats.org/drawingml/2006/main">
-            <a:r>
-              <a:t>README SHA-256 32731631975544a0d484f84f76524fd94c3aac82ac3347a37b6990cbe7907035</a:t>
-            </a:r>
-          </a:p>
-          <a:p xmlns:a="http://schemas.openxmlformats.org/drawingml/2006/main">
-            <a:r>
-              <a:t>Immutable receipt SHA-256 db39bc27bc04bf7f70bfaf2e5048b085798e3ef8b72e58fa54a367a51b7b6d91</a:t>
+              <a:t>Proposal da2f49aad42811fc5d660c7bcf9ff190599f2d74 SHA-256 2613649fd06516d77339d73b56432e84613dd1925e739761efea738f41b4f0a4</a:t>
+            </a:r>
+          </a:p>
+          <a:p xmlns:a="http://schemas.openxmlformats.org/drawingml/2006/main">
+            <a:r>
+              <a:t>README SHA-256 f97eb66b4642d85817c1bface96cc358cea536a8a8104a439f22a2715af103d5</a:t>
+            </a:r>
+          </a:p>
+          <a:p xmlns:a="http://schemas.openxmlformats.org/drawingml/2006/main">
+            <a:r>
+              <a:t>Immutable receipt SHA-256 ad59ead3c86c780b6d79a243a23032e492c14809f0c01f575397ae221939068f</a:t>
             </a:r>
           </a:p>
           <a:p xmlns:a="http://schemas.openxmlformats.org/drawingml/2006/main">
@@ -485,7 +485,7 @@
           </a:p>
           <a:p xmlns:a="http://schemas.openxmlformats.org/drawingml/2006/main">
             <a:r>
-              <a:t>Full detailed model remains proposed. Python and C++ share PROJ and decoding. Omniverse reuses Python. Hydra consumes a resolved ordinary USD bake.</a:t>
+              <a:t>Accepted source and declaration rules are distinguished from detailed conventions and identities awaiting review. Python and C++ share PROJ and decoding. Omniverse reuses Python. Hydra consumes a resolved ordinary USD bake.</a:t>
             </a:r>
           </a:p>
         </p:txBody>
@@ -585,7 +585,7 @@
           </a:p>
           <a:p xmlns:a="http://schemas.openxmlformats.org/drawingml/2006/main">
             <a:r>
-              <a:t>Proposal clause: ### External measurement association at proposal/proposal-source.txt:1641</a:t>
+              <a:t>Proposal clause: ### External measurement association at proposal/proposal-source.txt:1689</a:t>
             </a:r>
           </a:p>
           <a:p xmlns:a="http://schemas.openxmlformats.org/drawingml/2006/main">
@@ -600,17 +600,17 @@
           </a:p>
           <a:p xmlns:a="http://schemas.openxmlformats.org/drawingml/2006/main">
             <a:r>
-              <a:t>Proposal 7b5b34b7282305135f672663a3cffb0f94342ecc SHA-256 010d4c0243e7e6985284cccadb00fb7c6f7b0c5c50f22d81bb31ada960548d75</a:t>
-            </a:r>
-          </a:p>
-          <a:p xmlns:a="http://schemas.openxmlformats.org/drawingml/2006/main">
-            <a:r>
-              <a:t>README SHA-256 32731631975544a0d484f84f76524fd94c3aac82ac3347a37b6990cbe7907035</a:t>
-            </a:r>
-          </a:p>
-          <a:p xmlns:a="http://schemas.openxmlformats.org/drawingml/2006/main">
-            <a:r>
-              <a:t>Immutable receipt SHA-256 db39bc27bc04bf7f70bfaf2e5048b085798e3ef8b72e58fa54a367a51b7b6d91</a:t>
+              <a:t>Proposal da2f49aad42811fc5d660c7bcf9ff190599f2d74 SHA-256 2613649fd06516d77339d73b56432e84613dd1925e739761efea738f41b4f0a4</a:t>
+            </a:r>
+          </a:p>
+          <a:p xmlns:a="http://schemas.openxmlformats.org/drawingml/2006/main">
+            <a:r>
+              <a:t>README SHA-256 f97eb66b4642d85817c1bface96cc358cea536a8a8104a439f22a2715af103d5</a:t>
+            </a:r>
+          </a:p>
+          <a:p xmlns:a="http://schemas.openxmlformats.org/drawingml/2006/main">
+            <a:r>
+              <a:t>Immutable receipt SHA-256 ad59ead3c86c780b6d79a243a23032e492c14809f0c01f575397ae221939068f</a:t>
             </a:r>
           </a:p>
           <a:p xmlns:a="http://schemas.openxmlformats.org/drawingml/2006/main">
@@ -620,7 +620,7 @@
           </a:p>
           <a:p xmlns:a="http://schemas.openxmlformats.org/drawingml/2006/main">
             <a:r>
-              <a:t>Full detailed model remains proposed. Python and C++ share PROJ and decoding. Omniverse reuses Python. Hydra consumes a resolved ordinary USD bake.</a:t>
+              <a:t>Accepted source and declaration rules are distinguished from detailed conventions and identities awaiting review. Python and C++ share PROJ and decoding. Omniverse reuses Python. Hydra consumes a resolved ordinary USD bake.</a:t>
             </a:r>
           </a:p>
         </p:txBody>
@@ -720,7 +720,7 @@
           </a:p>
           <a:p xmlns:a="http://schemas.openxmlformats.org/drawingml/2006/main">
             <a:r>
-              <a:t>Proposal clause: #### Evaluation at proposal/proposal-source.txt:1957</a:t>
+              <a:t>Proposal clause: #### Evaluation at proposal/proposal-source.txt:2016</a:t>
             </a:r>
           </a:p>
           <a:p xmlns:a="http://schemas.openxmlformats.org/drawingml/2006/main">
@@ -735,17 +735,17 @@
           </a:p>
           <a:p xmlns:a="http://schemas.openxmlformats.org/drawingml/2006/main">
             <a:r>
-              <a:t>Proposal 7b5b34b7282305135f672663a3cffb0f94342ecc SHA-256 010d4c0243e7e6985284cccadb00fb7c6f7b0c5c50f22d81bb31ada960548d75</a:t>
-            </a:r>
-          </a:p>
-          <a:p xmlns:a="http://schemas.openxmlformats.org/drawingml/2006/main">
-            <a:r>
-              <a:t>README SHA-256 32731631975544a0d484f84f76524fd94c3aac82ac3347a37b6990cbe7907035</a:t>
-            </a:r>
-          </a:p>
-          <a:p xmlns:a="http://schemas.openxmlformats.org/drawingml/2006/main">
-            <a:r>
-              <a:t>Immutable receipt SHA-256 db39bc27bc04bf7f70bfaf2e5048b085798e3ef8b72e58fa54a367a51b7b6d91</a:t>
+              <a:t>Proposal da2f49aad42811fc5d660c7bcf9ff190599f2d74 SHA-256 2613649fd06516d77339d73b56432e84613dd1925e739761efea738f41b4f0a4</a:t>
+            </a:r>
+          </a:p>
+          <a:p xmlns:a="http://schemas.openxmlformats.org/drawingml/2006/main">
+            <a:r>
+              <a:t>README SHA-256 f97eb66b4642d85817c1bface96cc358cea536a8a8104a439f22a2715af103d5</a:t>
+            </a:r>
+          </a:p>
+          <a:p xmlns:a="http://schemas.openxmlformats.org/drawingml/2006/main">
+            <a:r>
+              <a:t>Immutable receipt SHA-256 ad59ead3c86c780b6d79a243a23032e492c14809f0c01f575397ae221939068f</a:t>
             </a:r>
           </a:p>
           <a:p xmlns:a="http://schemas.openxmlformats.org/drawingml/2006/main">
@@ -755,7 +755,7 @@
           </a:p>
           <a:p xmlns:a="http://schemas.openxmlformats.org/drawingml/2006/main">
             <a:r>
-              <a:t>Full detailed model remains proposed. Python and C++ share PROJ and decoding. Omniverse reuses Python. Hydra consumes a resolved ordinary USD bake.</a:t>
+              <a:t>Accepted source and declaration rules are distinguished from detailed conventions and identities awaiting review. Python and C++ share PROJ and decoding. Omniverse reuses Python. Hydra consumes a resolved ordinary USD bake.</a:t>
             </a:r>
           </a:p>
         </p:txBody>
@@ -825,7 +825,7 @@
           <a:lstStyle xmlns:a="http://schemas.openxmlformats.org/drawingml/2006/main"/>
           <a:p xmlns:a="http://schemas.openxmlformats.org/drawingml/2006/main">
             <a:r>
-              <a:t>{"assessment":[["Data model and runtime rules","The draft separates authored inputs from computed results and defines placement, adjustment, query and bake behavior."],["Group alignment","The detailed orientation, frame, WKT string normalization and publication conventions remain proposed."],["Prototype limitations","Lighting directions lack an error bound. Rotation uncertainty is unquantified. A quoted CRS name causes false rejection."],["Verification coverage","Selected workflows and distinguishing controls support the rules. Broader composition and continuous space/time coverage remain unverified."]],"placement":[["Physical orientation","One heading/pitch/roll tuple describes physical attitude against local east, north and up. Projection effects stay computed."],["Project adjustments","The directly bound model's own xformOps adjust its placed result in a fixed project chart, including ordinary pivots."],["Child objects","Child transforms define model-local geometry. Their offsets follow model axes and the geospatial attitude."],["Repeated models","Each instance offset retains its instancer-local meaning. Independent prototype placement participates once. A required unavailable inverse fails."],["Geographic scene results","Geographic queries retain longitude/latitude/height. Cartesian geometry and bounds use the datum's Earth-centred frame."]],"data":[["Native data associations","Declare the asset, field and coordinate domain. Preserve named dimensions and observation times."],["WKT string normalization","Normalize lexical spelling without losing represented information. Equal tokens establish serialized identity."],["Semantic CRS comparison","Different normalized texts can represent equivalent CRSs. Comparison names its criteria and domain."],["Dependency declaration","Existing Profiles metadata carries a proposed complete publication summary, including unloaded and retained variant content."],["Baked coordinate context","Retain a Cartesian CRS and double-precision origin without an active source placement binding. Ordinary USD controls subsequent transforms."]]}</a:t>
+              <a:t>{"assessment":[["Data model and runtime rules","The draft separates authored inputs from computed results and defines placement, adjustment, query and bake behavior."],["Group alignment","Input and declaration rules have agreement. Detailed conventions and identities await review."],["Prototype limitations","Lighting directions lack an error bound. Rotation uncertainty is unquantified. A quoted CRS name causes false rejection."],["Verification coverage","Selected workflows and distinguishing controls support the rules. Broader composition and continuous space/time coverage remain unverified."]],"placement":[["Physical orientation","One heading/pitch/roll tuple describes physical attitude against local east, north and up. Projection effects stay computed."],["Project adjustments","The directly bound model's own xformOps adjust its placed result in a fixed project chart, including ordinary pivots."],["Child objects","Child transforms define model-local geometry. Their offsets follow model axes and the geospatial attitude."],["Repeated models","Each instance offset retains its instancer-local meaning. Independent prototype placement participates once. A required unavailable inverse fails."],["Geographic scene results","Geographic queries retain longitude/latitude/height. Cartesian geometry and bounds use the datum's Earth-centred frame."]],"data":[["Native data associations","Declare the asset, field and coordinate domain. Preserve named dimensions and observation times."],["WKT string normalization","Normalize lexical spelling without losing represented information. Equal tokens establish serialized identity."],["Semantic CRS comparison","Different normalized texts can represent equivalent CRSs. Comparison names its criteria and domain."],["Dependency declaration","Profiles records complete publication coverage, including unloaded and retained variant content. Fixed v1 identities remain proposed."],["Baked coordinate context","Retain a Cartesian CRS and double-precision origin without an active source placement binding. Ordinary USD controls subsequent transforms."]]}</a:t>
             </a:r>
           </a:p>
           <a:p xmlns:a="http://schemas.openxmlformats.org/drawingml/2006/main">
@@ -835,17 +835,17 @@
           </a:p>
           <a:p xmlns:a="http://schemas.openxmlformats.org/drawingml/2006/main">
             <a:r>
-              <a:t>Proposal 7b5b34b7282305135f672663a3cffb0f94342ecc SHA-256 010d4c0243e7e6985284cccadb00fb7c6f7b0c5c50f22d81bb31ada960548d75</a:t>
-            </a:r>
-          </a:p>
-          <a:p xmlns:a="http://schemas.openxmlformats.org/drawingml/2006/main">
-            <a:r>
-              <a:t>README SHA-256 32731631975544a0d484f84f76524fd94c3aac82ac3347a37b6990cbe7907035</a:t>
-            </a:r>
-          </a:p>
-          <a:p xmlns:a="http://schemas.openxmlformats.org/drawingml/2006/main">
-            <a:r>
-              <a:t>Immutable receipt SHA-256 db39bc27bc04bf7f70bfaf2e5048b085798e3ef8b72e58fa54a367a51b7b6d91</a:t>
+              <a:t>Proposal da2f49aad42811fc5d660c7bcf9ff190599f2d74 SHA-256 2613649fd06516d77339d73b56432e84613dd1925e739761efea738f41b4f0a4</a:t>
+            </a:r>
+          </a:p>
+          <a:p xmlns:a="http://schemas.openxmlformats.org/drawingml/2006/main">
+            <a:r>
+              <a:t>README SHA-256 f97eb66b4642d85817c1bface96cc358cea536a8a8104a439f22a2715af103d5</a:t>
+            </a:r>
+          </a:p>
+          <a:p xmlns:a="http://schemas.openxmlformats.org/drawingml/2006/main">
+            <a:r>
+              <a:t>Immutable receipt SHA-256 ad59ead3c86c780b6d79a243a23032e492c14809f0c01f575397ae221939068f</a:t>
             </a:r>
           </a:p>
           <a:p xmlns:a="http://schemas.openxmlformats.org/drawingml/2006/main">
@@ -855,7 +855,7 @@
           </a:p>
           <a:p xmlns:a="http://schemas.openxmlformats.org/drawingml/2006/main">
             <a:r>
-              <a:t>Full detailed model remains proposed. Python and C++ share PROJ and decoding. Omniverse reuses Python. Hydra consumes a resolved ordinary USD bake.</a:t>
+              <a:t>Accepted source and declaration rules are distinguished from detailed conventions and identities awaiting review. Python and C++ share PROJ and decoding. Omniverse reuses Python. Hydra consumes a resolved ordinary USD bake.</a:t>
             </a:r>
           </a:p>
         </p:txBody>
@@ -925,27 +925,27 @@
           <a:lstStyle xmlns:a="http://schemas.openxmlformats.org/drawingml/2006/main"/>
           <a:p xmlns:a="http://schemas.openxmlformats.org/drawingml/2006/main">
             <a:r>
-              <a:t>{"assessment":[["Data model and runtime rules","The draft separates authored inputs from computed results and defines placement, adjustment, query and bake behavior."],["Group alignment","The detailed orientation, frame, WKT string normalization and publication conventions remain proposed."],["Prototype limitations","Lighting directions lack an error bound. Rotation uncertainty is unquantified. A quoted CRS name causes false rejection."],["Verification coverage","Selected workflows and distinguishing controls support the rules. Broader composition and continuous space/time coverage remain unverified."]],"placement":[["Physical orientation","One heading/pitch/roll tuple describes physical attitude against local east, north and up. Projection effects stay computed."],["Project adjustments","The directly bound model's own xformOps adjust its placed result in a fixed project chart, including ordinary pivots."],["Child objects","Child transforms define model-local geometry. Their offsets follow model axes and the geospatial attitude."],["Repeated models","Each instance offset retains its instancer-local meaning. Independent prototype placement participates once. A required unavailable inverse fails."],["Geographic scene results","Geographic queries retain longitude/latitude/height. Cartesian geometry and bounds use the datum's Earth-centred frame."]],"data":[["Native data associations","Declare the asset, field and coordinate domain. Preserve named dimensions and observation times."],["WKT string normalization","Normalize lexical spelling without losing represented information. Equal tokens establish serialized identity."],["Semantic CRS comparison","Different normalized texts can represent equivalent CRSs. Comparison names its criteria and domain."],["Dependency declaration","Existing Profiles metadata carries a proposed complete publication summary, including unloaded and retained variant content."],["Baked coordinate context","Retain a Cartesian CRS and double-precision origin without an active source placement binding. Ordinary USD controls subsequent transforms."]]}</a:t>
-            </a:r>
-          </a:p>
-          <a:p xmlns:a="http://schemas.openxmlformats.org/drawingml/2006/main">
-            <a:r>
-              <a:t>[["Native data associations","Declare the asset, field and coordinate domain. Preserve named dimensions and observation times."],["WKT string normalization","Normalize lexical spelling without losing represented information. Equal tokens establish serialized identity."],["Semantic CRS comparison","Different normalized texts can represent equivalent CRSs. Comparison names its criteria and domain."],["Dependency declaration","Existing Profiles metadata carries a proposed complete publication summary, including unloaded and retained variant content."],["Baked coordinate context","Retain a Cartesian CRS and double-precision origin without an active source placement binding. Ordinary USD controls subsequent transforms."]]</a:t>
-            </a:r>
-          </a:p>
-          <a:p xmlns:a="http://schemas.openxmlformats.org/drawingml/2006/main">
-            <a:r>
-              <a:t>Proposal 7b5b34b7282305135f672663a3cffb0f94342ecc SHA-256 010d4c0243e7e6985284cccadb00fb7c6f7b0c5c50f22d81bb31ada960548d75</a:t>
-            </a:r>
-          </a:p>
-          <a:p xmlns:a="http://schemas.openxmlformats.org/drawingml/2006/main">
-            <a:r>
-              <a:t>README SHA-256 32731631975544a0d484f84f76524fd94c3aac82ac3347a37b6990cbe7907035</a:t>
-            </a:r>
-          </a:p>
-          <a:p xmlns:a="http://schemas.openxmlformats.org/drawingml/2006/main">
-            <a:r>
-              <a:t>Immutable receipt SHA-256 db39bc27bc04bf7f70bfaf2e5048b085798e3ef8b72e58fa54a367a51b7b6d91</a:t>
+              <a:t>{"assessment":[["Data model and runtime rules","The draft separates authored inputs from computed results and defines placement, adjustment, query and bake behavior."],["Group alignment","Input and declaration rules have agreement. Detailed conventions and identities await review."],["Prototype limitations","Lighting directions lack an error bound. Rotation uncertainty is unquantified. A quoted CRS name causes false rejection."],["Verification coverage","Selected workflows and distinguishing controls support the rules. Broader composition and continuous space/time coverage remain unverified."]],"placement":[["Physical orientation","One heading/pitch/roll tuple describes physical attitude against local east, north and up. Projection effects stay computed."],["Project adjustments","The directly bound model's own xformOps adjust its placed result in a fixed project chart, including ordinary pivots."],["Child objects","Child transforms define model-local geometry. Their offsets follow model axes and the geospatial attitude."],["Repeated models","Each instance offset retains its instancer-local meaning. Independent prototype placement participates once. A required unavailable inverse fails."],["Geographic scene results","Geographic queries retain longitude/latitude/height. Cartesian geometry and bounds use the datum's Earth-centred frame."]],"data":[["Native data associations","Declare the asset, field and coordinate domain. Preserve named dimensions and observation times."],["WKT string normalization","Normalize lexical spelling without losing represented information. Equal tokens establish serialized identity."],["Semantic CRS comparison","Different normalized texts can represent equivalent CRSs. Comparison names its criteria and domain."],["Dependency declaration","Profiles records complete publication coverage, including unloaded and retained variant content. Fixed v1 identities remain proposed."],["Baked coordinate context","Retain a Cartesian CRS and double-precision origin without an active source placement binding. Ordinary USD controls subsequent transforms."]]}</a:t>
+            </a:r>
+          </a:p>
+          <a:p xmlns:a="http://schemas.openxmlformats.org/drawingml/2006/main">
+            <a:r>
+              <a:t>[["Native data associations","Declare the asset, field and coordinate domain. Preserve named dimensions and observation times."],["WKT string normalization","Normalize lexical spelling without losing represented information. Equal tokens establish serialized identity."],["Semantic CRS comparison","Different normalized texts can represent equivalent CRSs. Comparison names its criteria and domain."],["Dependency declaration","Profiles records complete publication coverage, including unloaded and retained variant content. Fixed v1 identities remain proposed."],["Baked coordinate context","Retain a Cartesian CRS and double-precision origin without an active source placement binding. Ordinary USD controls subsequent transforms."]]</a:t>
+            </a:r>
+          </a:p>
+          <a:p xmlns:a="http://schemas.openxmlformats.org/drawingml/2006/main">
+            <a:r>
+              <a:t>Proposal da2f49aad42811fc5d660c7bcf9ff190599f2d74 SHA-256 2613649fd06516d77339d73b56432e84613dd1925e739761efea738f41b4f0a4</a:t>
+            </a:r>
+          </a:p>
+          <a:p xmlns:a="http://schemas.openxmlformats.org/drawingml/2006/main">
+            <a:r>
+              <a:t>README SHA-256 f97eb66b4642d85817c1bface96cc358cea536a8a8104a439f22a2715af103d5</a:t>
+            </a:r>
+          </a:p>
+          <a:p xmlns:a="http://schemas.openxmlformats.org/drawingml/2006/main">
+            <a:r>
+              <a:t>Immutable receipt SHA-256 ad59ead3c86c780b6d79a243a23032e492c14809f0c01f575397ae221939068f</a:t>
             </a:r>
           </a:p>
           <a:p xmlns:a="http://schemas.openxmlformats.org/drawingml/2006/main">
@@ -955,7 +955,7 @@
           </a:p>
           <a:p xmlns:a="http://schemas.openxmlformats.org/drawingml/2006/main">
             <a:r>
-              <a:t>Full detailed model remains proposed. Python and C++ share PROJ and decoding. Omniverse reuses Python. Hydra consumes a resolved ordinary USD bake.</a:t>
+              <a:t>Accepted source and declaration rules are distinguished from detailed conventions and identities awaiting review. Python and C++ share PROJ and decoding. Omniverse reuses Python. Hydra consumes a resolved ordinary USD bake.</a:t>
             </a:r>
           </a:p>
         </p:txBody>
@@ -1025,27 +1025,27 @@
           <a:lstStyle xmlns:a="http://schemas.openxmlformats.org/drawingml/2006/main"/>
           <a:p xmlns:a="http://schemas.openxmlformats.org/drawingml/2006/main">
             <a:r>
-              <a:t>{"assessment":[["Data model and runtime rules","The draft separates authored inputs from computed results and defines placement, adjustment, query and bake behavior."],["Group alignment","The detailed orientation, frame, WKT string normalization and publication conventions remain proposed."],["Prototype limitations","Lighting directions lack an error bound. Rotation uncertainty is unquantified. A quoted CRS name causes false rejection."],["Verification coverage","Selected workflows and distinguishing controls support the rules. Broader composition and continuous space/time coverage remain unverified."]],"placement":[["Physical orientation","One heading/pitch/roll tuple describes physical attitude against local east, north and up. Projection effects stay computed."],["Project adjustments","The directly bound model's own xformOps adjust its placed result in a fixed project chart, including ordinary pivots."],["Child objects","Child transforms define model-local geometry. Their offsets follow model axes and the geospatial attitude."],["Repeated models","Each instance offset retains its instancer-local meaning. Independent prototype placement participates once. A required unavailable inverse fails."],["Geographic scene results","Geographic queries retain longitude/latitude/height. Cartesian geometry and bounds use the datum's Earth-centred frame."]],"data":[["Native data associations","Declare the asset, field and coordinate domain. Preserve named dimensions and observation times."],["WKT string normalization","Normalize lexical spelling without losing represented information. Equal tokens establish serialized identity."],["Semantic CRS comparison","Different normalized texts can represent equivalent CRSs. Comparison names its criteria and domain."],["Dependency declaration","Existing Profiles metadata carries a proposed complete publication summary, including unloaded and retained variant content."],["Baked coordinate context","Retain a Cartesian CRS and double-precision origin without an active source placement binding. Ordinary USD controls subsequent transforms."]]}</a:t>
-            </a:r>
-          </a:p>
-          <a:p xmlns:a="http://schemas.openxmlformats.org/drawingml/2006/main">
-            <a:r>
-              <a:t>[["Python and C++ readers","213,243 coordinate results per reader. Maximum measured difference 3.39e-08 m. Shared PROJ and decoding."],["Omniverse stage geometry","Reuses Python placement. Readback covers 177,872 vertices and 48 edit, failure and recovery checks across 39 jobs."],["Hydra / Storm","Two selected ordinary USD bakes reach native rendering using C++-resolved placements."],["Recorded tests","113 contract tests and 65 distinguishing controls pass. Separate diagnostics expose the reported prototype limits."],["Source preservation","Original inputs and 47 frozen execution files remain unchanged. The immutable receipt identifies exact executed content."],["Bake readbacks","11 selected exports checked. No general material/primvar, physics or continuous trajectory conformance is claimed."]]</a:t>
-            </a:r>
-          </a:p>
-          <a:p xmlns:a="http://schemas.openxmlformats.org/drawingml/2006/main">
-            <a:r>
-              <a:t>Proposal 7b5b34b7282305135f672663a3cffb0f94342ecc SHA-256 010d4c0243e7e6985284cccadb00fb7c6f7b0c5c50f22d81bb31ada960548d75</a:t>
-            </a:r>
-          </a:p>
-          <a:p xmlns:a="http://schemas.openxmlformats.org/drawingml/2006/main">
-            <a:r>
-              <a:t>README SHA-256 32731631975544a0d484f84f76524fd94c3aac82ac3347a37b6990cbe7907035</a:t>
-            </a:r>
-          </a:p>
-          <a:p xmlns:a="http://schemas.openxmlformats.org/drawingml/2006/main">
-            <a:r>
-              <a:t>Immutable receipt SHA-256 db39bc27bc04bf7f70bfaf2e5048b085798e3ef8b72e58fa54a367a51b7b6d91</a:t>
+              <a:t>{"assessment":[["Data model and runtime rules","The draft separates authored inputs from computed results and defines placement, adjustment, query and bake behavior."],["Group alignment","Input and declaration rules have agreement. Detailed conventions and identities await review."],["Prototype limitations","Lighting directions lack an error bound. Rotation uncertainty is unquantified. A quoted CRS name causes false rejection."],["Verification coverage","Selected workflows and distinguishing controls support the rules. Broader composition and continuous space/time coverage remain unverified."]],"placement":[["Physical orientation","One heading/pitch/roll tuple describes physical attitude against local east, north and up. Projection effects stay computed."],["Project adjustments","The directly bound model's own xformOps adjust its placed result in a fixed project chart, including ordinary pivots."],["Child objects","Child transforms define model-local geometry. Their offsets follow model axes and the geospatial attitude."],["Repeated models","Each instance offset retains its instancer-local meaning. Independent prototype placement participates once. A required unavailable inverse fails."],["Geographic scene results","Geographic queries retain longitude/latitude/height. Cartesian geometry and bounds use the datum's Earth-centred frame."]],"data":[["Native data associations","Declare the asset, field and coordinate domain. Preserve named dimensions and observation times."],["WKT string normalization","Normalize lexical spelling without losing represented information. Equal tokens establish serialized identity."],["Semantic CRS comparison","Different normalized texts can represent equivalent CRSs. Comparison names its criteria and domain."],["Dependency declaration","Profiles records complete publication coverage, including unloaded and retained variant content. Fixed v1 identities remain proposed."],["Baked coordinate context","Retain a Cartesian CRS and double-precision origin without an active source placement binding. Ordinary USD controls subsequent transforms."]]}</a:t>
+            </a:r>
+          </a:p>
+          <a:p xmlns:a="http://schemas.openxmlformats.org/drawingml/2006/main">
+            <a:r>
+              <a:t>[["Python and C++ readers","213,243 coordinate results per reader. Maximum measured difference 3.39e-08 m. Shared PROJ and decoding."],["Omniverse stage geometry","Reuses Python placement. Readback covers 177,872 vertices and 48 edit, failure and recovery checks across 39 jobs."],["Hydra / Storm","Two selected ordinary USD bakes reach native rendering using C++-resolved placements."],["Recorded tests","116 contract tests and 65 distinguishing controls pass. Separate diagnostics expose the reported prototype limits."],["Source preservation","Original inputs and 48 frozen execution files remain unchanged. The immutable receipt identifies exact executed content."],["Bake readbacks","11 selected exports checked. No general material/primvar, physics or continuous trajectory conformance is claimed."]]</a:t>
+            </a:r>
+          </a:p>
+          <a:p xmlns:a="http://schemas.openxmlformats.org/drawingml/2006/main">
+            <a:r>
+              <a:t>Proposal da2f49aad42811fc5d660c7bcf9ff190599f2d74 SHA-256 2613649fd06516d77339d73b56432e84613dd1925e739761efea738f41b4f0a4</a:t>
+            </a:r>
+          </a:p>
+          <a:p xmlns:a="http://schemas.openxmlformats.org/drawingml/2006/main">
+            <a:r>
+              <a:t>README SHA-256 f97eb66b4642d85817c1bface96cc358cea536a8a8104a439f22a2715af103d5</a:t>
+            </a:r>
+          </a:p>
+          <a:p xmlns:a="http://schemas.openxmlformats.org/drawingml/2006/main">
+            <a:r>
+              <a:t>Immutable receipt SHA-256 ad59ead3c86c780b6d79a243a23032e492c14809f0c01f575397ae221939068f</a:t>
             </a:r>
           </a:p>
           <a:p xmlns:a="http://schemas.openxmlformats.org/drawingml/2006/main">
@@ -1055,7 +1055,7 @@
           </a:p>
           <a:p xmlns:a="http://schemas.openxmlformats.org/drawingml/2006/main">
             <a:r>
-              <a:t>Full detailed model remains proposed. Python and C++ share PROJ and decoding. Omniverse reuses Python. Hydra consumes a resolved ordinary USD bake.</a:t>
+              <a:t>Accepted source and declaration rules are distinguished from detailed conventions and identities awaiting review. Python and C++ share PROJ and decoding. Omniverse reuses Python. Hydra consumes a resolved ordinary USD bake.</a:t>
             </a:r>
           </a:p>
         </p:txBody>
@@ -1145,7 +1145,7 @@
           </a:p>
           <a:p xmlns:a="http://schemas.openxmlformats.org/drawingml/2006/main">
             <a:r>
-              <a:t>What this says about the proposal: Inputs-only authoring gives the reader one authority for each meaning. The detailed field and pose conventions remain proposed.</a:t>
+              <a:t>What this says about the proposal: Inputs-only authoring gives the reader one authority for each meaning. Source position and the heading/pitch/roll tuple are agreed; detailed pose conventions remain proposed.</a:t>
             </a:r>
           </a:p>
           <a:p xmlns:a="http://schemas.openxmlformats.org/drawingml/2006/main">
@@ -1155,7 +1155,7 @@
           </a:p>
           <a:p xmlns:a="http://schemas.openxmlformats.org/drawingml/2006/main">
             <a:r>
-              <a:t>Proposal clause: #### Authored properties at proposal/proposal-source.txt:1540</a:t>
+              <a:t>Proposal clause: #### Authored properties at proposal/proposal-source.txt:1588</a:t>
             </a:r>
           </a:p>
           <a:p xmlns:a="http://schemas.openxmlformats.org/drawingml/2006/main">
@@ -1170,17 +1170,17 @@
           </a:p>
           <a:p xmlns:a="http://schemas.openxmlformats.org/drawingml/2006/main">
             <a:r>
-              <a:t>Proposal 7b5b34b7282305135f672663a3cffb0f94342ecc SHA-256 010d4c0243e7e6985284cccadb00fb7c6f7b0c5c50f22d81bb31ada960548d75</a:t>
-            </a:r>
-          </a:p>
-          <a:p xmlns:a="http://schemas.openxmlformats.org/drawingml/2006/main">
-            <a:r>
-              <a:t>README SHA-256 32731631975544a0d484f84f76524fd94c3aac82ac3347a37b6990cbe7907035</a:t>
-            </a:r>
-          </a:p>
-          <a:p xmlns:a="http://schemas.openxmlformats.org/drawingml/2006/main">
-            <a:r>
-              <a:t>Immutable receipt SHA-256 db39bc27bc04bf7f70bfaf2e5048b085798e3ef8b72e58fa54a367a51b7b6d91</a:t>
+              <a:t>Proposal da2f49aad42811fc5d660c7bcf9ff190599f2d74 SHA-256 2613649fd06516d77339d73b56432e84613dd1925e739761efea738f41b4f0a4</a:t>
+            </a:r>
+          </a:p>
+          <a:p xmlns:a="http://schemas.openxmlformats.org/drawingml/2006/main">
+            <a:r>
+              <a:t>README SHA-256 f97eb66b4642d85817c1bface96cc358cea536a8a8104a439f22a2715af103d5</a:t>
+            </a:r>
+          </a:p>
+          <a:p xmlns:a="http://schemas.openxmlformats.org/drawingml/2006/main">
+            <a:r>
+              <a:t>Immutable receipt SHA-256 ad59ead3c86c780b6d79a243a23032e492c14809f0c01f575397ae221939068f</a:t>
             </a:r>
           </a:p>
           <a:p xmlns:a="http://schemas.openxmlformats.org/drawingml/2006/main">
@@ -1190,7 +1190,7 @@
           </a:p>
           <a:p xmlns:a="http://schemas.openxmlformats.org/drawingml/2006/main">
             <a:r>
-              <a:t>Full detailed model remains proposed. Python and C++ share PROJ and decoding. Omniverse reuses Python. Hydra consumes a resolved ordinary USD bake.</a:t>
+              <a:t>Accepted source and declaration rules are distinguished from detailed conventions and identities awaiting review. Python and C++ share PROJ and decoding. Omniverse reuses Python. Hydra consumes a resolved ordinary USD bake.</a:t>
             </a:r>
           </a:p>
         </p:txBody>
@@ -1290,7 +1290,7 @@
           </a:p>
           <a:p xmlns:a="http://schemas.openxmlformats.org/drawingml/2006/main">
             <a:r>
-              <a:t>Proposal clause: ### Source placement evaluation and transform order at proposal/proposal-source.txt:1857</a:t>
+              <a:t>Proposal clause: ### Source placement evaluation and transform order at proposal/proposal-source.txt:1916</a:t>
             </a:r>
           </a:p>
           <a:p xmlns:a="http://schemas.openxmlformats.org/drawingml/2006/main">
@@ -1305,17 +1305,17 @@
           </a:p>
           <a:p xmlns:a="http://schemas.openxmlformats.org/drawingml/2006/main">
             <a:r>
-              <a:t>Proposal 7b5b34b7282305135f672663a3cffb0f94342ecc SHA-256 010d4c0243e7e6985284cccadb00fb7c6f7b0c5c50f22d81bb31ada960548d75</a:t>
-            </a:r>
-          </a:p>
-          <a:p xmlns:a="http://schemas.openxmlformats.org/drawingml/2006/main">
-            <a:r>
-              <a:t>README SHA-256 32731631975544a0d484f84f76524fd94c3aac82ac3347a37b6990cbe7907035</a:t>
-            </a:r>
-          </a:p>
-          <a:p xmlns:a="http://schemas.openxmlformats.org/drawingml/2006/main">
-            <a:r>
-              <a:t>Immutable receipt SHA-256 db39bc27bc04bf7f70bfaf2e5048b085798e3ef8b72e58fa54a367a51b7b6d91</a:t>
+              <a:t>Proposal da2f49aad42811fc5d660c7bcf9ff190599f2d74 SHA-256 2613649fd06516d77339d73b56432e84613dd1925e739761efea738f41b4f0a4</a:t>
+            </a:r>
+          </a:p>
+          <a:p xmlns:a="http://schemas.openxmlformats.org/drawingml/2006/main">
+            <a:r>
+              <a:t>README SHA-256 f97eb66b4642d85817c1bface96cc358cea536a8a8104a439f22a2715af103d5</a:t>
+            </a:r>
+          </a:p>
+          <a:p xmlns:a="http://schemas.openxmlformats.org/drawingml/2006/main">
+            <a:r>
+              <a:t>Immutable receipt SHA-256 ad59ead3c86c780b6d79a243a23032e492c14809f0c01f575397ae221939068f</a:t>
             </a:r>
           </a:p>
           <a:p xmlns:a="http://schemas.openxmlformats.org/drawingml/2006/main">
@@ -1325,7 +1325,7 @@
           </a:p>
           <a:p xmlns:a="http://schemas.openxmlformats.org/drawingml/2006/main">
             <a:r>
-              <a:t>Full detailed model remains proposed. Python and C++ share PROJ and decoding. Omniverse reuses Python. Hydra consumes a resolved ordinary USD bake.</a:t>
+              <a:t>Accepted source and declaration rules are distinguished from detailed conventions and identities awaiting review. Python and C++ share PROJ and decoding. Omniverse reuses Python. Hydra consumes a resolved ordinary USD bake.</a:t>
             </a:r>
           </a:p>
         </p:txBody>
@@ -1425,7 +1425,7 @@
           </a:p>
           <a:p xmlns:a="http://schemas.openxmlformats.org/drawingml/2006/main">
             <a:r>
-              <a:t>Proposal clause: #### Evaluation at proposal/proposal-source.txt:1957</a:t>
+              <a:t>Proposal clause: #### Evaluation at proposal/proposal-source.txt:2016</a:t>
             </a:r>
           </a:p>
           <a:p xmlns:a="http://schemas.openxmlformats.org/drawingml/2006/main">
@@ -1440,17 +1440,17 @@
           </a:p>
           <a:p xmlns:a="http://schemas.openxmlformats.org/drawingml/2006/main">
             <a:r>
-              <a:t>Proposal 7b5b34b7282305135f672663a3cffb0f94342ecc SHA-256 010d4c0243e7e6985284cccadb00fb7c6f7b0c5c50f22d81bb31ada960548d75</a:t>
-            </a:r>
-          </a:p>
-          <a:p xmlns:a="http://schemas.openxmlformats.org/drawingml/2006/main">
-            <a:r>
-              <a:t>README SHA-256 32731631975544a0d484f84f76524fd94c3aac82ac3347a37b6990cbe7907035</a:t>
-            </a:r>
-          </a:p>
-          <a:p xmlns:a="http://schemas.openxmlformats.org/drawingml/2006/main">
-            <a:r>
-              <a:t>Immutable receipt SHA-256 db39bc27bc04bf7f70bfaf2e5048b085798e3ef8b72e58fa54a367a51b7b6d91</a:t>
+              <a:t>Proposal da2f49aad42811fc5d660c7bcf9ff190599f2d74 SHA-256 2613649fd06516d77339d73b56432e84613dd1925e739761efea738f41b4f0a4</a:t>
+            </a:r>
+          </a:p>
+          <a:p xmlns:a="http://schemas.openxmlformats.org/drawingml/2006/main">
+            <a:r>
+              <a:t>README SHA-256 f97eb66b4642d85817c1bface96cc358cea536a8a8104a439f22a2715af103d5</a:t>
+            </a:r>
+          </a:p>
+          <a:p xmlns:a="http://schemas.openxmlformats.org/drawingml/2006/main">
+            <a:r>
+              <a:t>Immutable receipt SHA-256 ad59ead3c86c780b6d79a243a23032e492c14809f0c01f575397ae221939068f</a:t>
             </a:r>
           </a:p>
           <a:p xmlns:a="http://schemas.openxmlformats.org/drawingml/2006/main">
@@ -1460,7 +1460,7 @@
           </a:p>
           <a:p xmlns:a="http://schemas.openxmlformats.org/drawingml/2006/main">
             <a:r>
-              <a:t>Full detailed model remains proposed. Python and C++ share PROJ and decoding. Omniverse reuses Python. Hydra consumes a resolved ordinary USD bake.</a:t>
+              <a:t>Accepted source and declaration rules are distinguished from detailed conventions and identities awaiting review. Python and C++ share PROJ and decoding. Omniverse reuses Python. Hydra consumes a resolved ordinary USD bake.</a:t>
             </a:r>
           </a:p>
         </p:txBody>
@@ -1560,7 +1560,7 @@
           </a:p>
           <a:p xmlns:a="http://schemas.openxmlformats.org/drawingml/2006/main">
             <a:r>
-              <a:t>Proposal clause: ### Extent and result comparison at proposal/proposal-source.txt:2138</a:t>
+              <a:t>Proposal clause: ### Extent and result comparison at proposal/proposal-source.txt:2197</a:t>
             </a:r>
           </a:p>
           <a:p xmlns:a="http://schemas.openxmlformats.org/drawingml/2006/main">
@@ -1575,17 +1575,17 @@
           </a:p>
           <a:p xmlns:a="http://schemas.openxmlformats.org/drawingml/2006/main">
             <a:r>
-              <a:t>Proposal 7b5b34b7282305135f672663a3cffb0f94342ecc SHA-256 010d4c0243e7e6985284cccadb00fb7c6f7b0c5c50f22d81bb31ada960548d75</a:t>
-            </a:r>
-          </a:p>
-          <a:p xmlns:a="http://schemas.openxmlformats.org/drawingml/2006/main">
-            <a:r>
-              <a:t>README SHA-256 32731631975544a0d484f84f76524fd94c3aac82ac3347a37b6990cbe7907035</a:t>
-            </a:r>
-          </a:p>
-          <a:p xmlns:a="http://schemas.openxmlformats.org/drawingml/2006/main">
-            <a:r>
-              <a:t>Immutable receipt SHA-256 db39bc27bc04bf7f70bfaf2e5048b085798e3ef8b72e58fa54a367a51b7b6d91</a:t>
+              <a:t>Proposal da2f49aad42811fc5d660c7bcf9ff190599f2d74 SHA-256 2613649fd06516d77339d73b56432e84613dd1925e739761efea738f41b4f0a4</a:t>
+            </a:r>
+          </a:p>
+          <a:p xmlns:a="http://schemas.openxmlformats.org/drawingml/2006/main">
+            <a:r>
+              <a:t>README SHA-256 f97eb66b4642d85817c1bface96cc358cea536a8a8104a439f22a2715af103d5</a:t>
+            </a:r>
+          </a:p>
+          <a:p xmlns:a="http://schemas.openxmlformats.org/drawingml/2006/main">
+            <a:r>
+              <a:t>Immutable receipt SHA-256 ad59ead3c86c780b6d79a243a23032e492c14809f0c01f575397ae221939068f</a:t>
             </a:r>
           </a:p>
           <a:p xmlns:a="http://schemas.openxmlformats.org/drawingml/2006/main">
@@ -1595,7 +1595,7 @@
           </a:p>
           <a:p xmlns:a="http://schemas.openxmlformats.org/drawingml/2006/main">
             <a:r>
-              <a:t>Full detailed model remains proposed. Python and C++ share PROJ and decoding. Omniverse reuses Python. Hydra consumes a resolved ordinary USD bake.</a:t>
+              <a:t>Accepted source and declaration rules are distinguished from detailed conventions and identities awaiting review. Python and C++ share PROJ and decoding. Omniverse reuses Python. Hydra consumes a resolved ordinary USD bake.</a:t>
             </a:r>
           </a:p>
         </p:txBody>
@@ -1695,7 +1695,7 @@
           </a:p>
           <a:p xmlns:a="http://schemas.openxmlformats.org/drawingml/2006/main">
             <a:r>
-              <a:t>Proposal clause: ### Explicit export and sampling at proposal/proposal-source.txt:2195</a:t>
+              <a:t>Proposal clause: ### Explicit export and sampling at proposal/proposal-source.txt:2254</a:t>
             </a:r>
           </a:p>
           <a:p xmlns:a="http://schemas.openxmlformats.org/drawingml/2006/main">
@@ -1710,17 +1710,17 @@
           </a:p>
           <a:p xmlns:a="http://schemas.openxmlformats.org/drawingml/2006/main">
             <a:r>
-              <a:t>Proposal 7b5b34b7282305135f672663a3cffb0f94342ecc SHA-256 010d4c0243e7e6985284cccadb00fb7c6f7b0c5c50f22d81bb31ada960548d75</a:t>
-            </a:r>
-          </a:p>
-          <a:p xmlns:a="http://schemas.openxmlformats.org/drawingml/2006/main">
-            <a:r>
-              <a:t>README SHA-256 32731631975544a0d484f84f76524fd94c3aac82ac3347a37b6990cbe7907035</a:t>
-            </a:r>
-          </a:p>
-          <a:p xmlns:a="http://schemas.openxmlformats.org/drawingml/2006/main">
-            <a:r>
-              <a:t>Immutable receipt SHA-256 db39bc27bc04bf7f70bfaf2e5048b085798e3ef8b72e58fa54a367a51b7b6d91</a:t>
+              <a:t>Proposal da2f49aad42811fc5d660c7bcf9ff190599f2d74 SHA-256 2613649fd06516d77339d73b56432e84613dd1925e739761efea738f41b4f0a4</a:t>
+            </a:r>
+          </a:p>
+          <a:p xmlns:a="http://schemas.openxmlformats.org/drawingml/2006/main">
+            <a:r>
+              <a:t>README SHA-256 f97eb66b4642d85817c1bface96cc358cea536a8a8104a439f22a2715af103d5</a:t>
+            </a:r>
+          </a:p>
+          <a:p xmlns:a="http://schemas.openxmlformats.org/drawingml/2006/main">
+            <a:r>
+              <a:t>Immutable receipt SHA-256 ad59ead3c86c780b6d79a243a23032e492c14809f0c01f575397ae221939068f</a:t>
             </a:r>
           </a:p>
           <a:p xmlns:a="http://schemas.openxmlformats.org/drawingml/2006/main">
@@ -1730,7 +1730,7 @@
           </a:p>
           <a:p xmlns:a="http://schemas.openxmlformats.org/drawingml/2006/main">
             <a:r>
-              <a:t>Full detailed model remains proposed. Python and C++ share PROJ and decoding. Omniverse reuses Python. Hydra consumes a resolved ordinary USD bake.</a:t>
+              <a:t>Accepted source and declaration rules are distinguished from detailed conventions and identities awaiting review. Python and C++ share PROJ and decoding. Omniverse reuses Python. Hydra consumes a resolved ordinary USD bake.</a:t>
             </a:r>
           </a:p>
         </p:txBody>
@@ -1830,7 +1830,7 @@
           </a:p>
           <a:p xmlns:a="http://schemas.openxmlformats.org/drawingml/2006/main">
             <a:r>
-              <a:t>Proposal clause: ### External measurement association at proposal/proposal-source.txt:1641</a:t>
+              <a:t>Proposal clause: ### External measurement association at proposal/proposal-source.txt:1689</a:t>
             </a:r>
           </a:p>
           <a:p xmlns:a="http://schemas.openxmlformats.org/drawingml/2006/main">
@@ -1845,17 +1845,17 @@
           </a:p>
           <a:p xmlns:a="http://schemas.openxmlformats.org/drawingml/2006/main">
             <a:r>
-              <a:t>Proposal 7b5b34b7282305135f672663a3cffb0f94342ecc SHA-256 010d4c0243e7e6985284cccadb00fb7c6f7b0c5c50f22d81bb31ada960548d75</a:t>
-            </a:r>
-          </a:p>
-          <a:p xmlns:a="http://schemas.openxmlformats.org/drawingml/2006/main">
-            <a:r>
-              <a:t>README SHA-256 32731631975544a0d484f84f76524fd94c3aac82ac3347a37b6990cbe7907035</a:t>
-            </a:r>
-          </a:p>
-          <a:p xmlns:a="http://schemas.openxmlformats.org/drawingml/2006/main">
-            <a:r>
-              <a:t>Immutable receipt SHA-256 db39bc27bc04bf7f70bfaf2e5048b085798e3ef8b72e58fa54a367a51b7b6d91</a:t>
+              <a:t>Proposal da2f49aad42811fc5d660c7bcf9ff190599f2d74 SHA-256 2613649fd06516d77339d73b56432e84613dd1925e739761efea738f41b4f0a4</a:t>
+            </a:r>
+          </a:p>
+          <a:p xmlns:a="http://schemas.openxmlformats.org/drawingml/2006/main">
+            <a:r>
+              <a:t>README SHA-256 f97eb66b4642d85817c1bface96cc358cea536a8a8104a439f22a2715af103d5</a:t>
+            </a:r>
+          </a:p>
+          <a:p xmlns:a="http://schemas.openxmlformats.org/drawingml/2006/main">
+            <a:r>
+              <a:t>Immutable receipt SHA-256 ad59ead3c86c780b6d79a243a23032e492c14809f0c01f575397ae221939068f</a:t>
             </a:r>
           </a:p>
           <a:p xmlns:a="http://schemas.openxmlformats.org/drawingml/2006/main">
@@ -1865,7 +1865,7 @@
           </a:p>
           <a:p xmlns:a="http://schemas.openxmlformats.org/drawingml/2006/main">
             <a:r>
-              <a:t>Full detailed model remains proposed. Python and C++ share PROJ and decoding. Omniverse reuses Python. Hydra consumes a resolved ordinary USD bake.</a:t>
+              <a:t>Accepted source and declaration rules are distinguished from detailed conventions and identities awaiting review. Python and C++ share PROJ and decoding. Omniverse reuses Python. Hydra consumes a resolved ordinary USD bake.</a:t>
             </a:r>
           </a:p>
         </p:txBody>
@@ -1935,7 +1935,7 @@
           <a:lstStyle xmlns:a="http://schemas.openxmlformats.org/drawingml/2006/main"/>
           <a:p xmlns:a="http://schemas.openxmlformats.org/drawingml/2006/main">
             <a:r>
-              <a:t>{"assessment":[["Data model and runtime rules","The draft separates authored inputs from computed results and defines placement, adjustment, query and bake behavior."],["Group alignment","The detailed orientation, frame, WKT string normalization and publication conventions remain proposed."],["Prototype limitations","Lighting directions lack an error bound. Rotation uncertainty is unquantified. A quoted CRS name causes false rejection."],["Verification coverage","Selected workflows and distinguishing controls support the rules. Broader composition and continuous space/time coverage remain unverified."]],"placement":[["Physical orientation","One heading/pitch/roll tuple describes physical attitude against local east, north and up. Projection effects stay computed."],["Project adjustments","The directly bound model's own xformOps adjust its placed result in a fixed project chart, including ordinary pivots."],["Child objects","Child transforms define model-local geometry. Their offsets follow model axes and the geospatial attitude."],["Repeated models","Each instance offset retains its instancer-local meaning. Independent prototype placement participates once. A required unavailable inverse fails."],["Geographic scene results","Geographic queries retain longitude/latitude/height. Cartesian geometry and bounds use the datum's Earth-centred frame."]],"data":[["Native data associations","Declare the asset, field and coordinate domain. Preserve named dimensions and observation times."],["WKT string normalization","Normalize lexical spelling without losing represented information. Equal tokens establish serialized identity."],["Semantic CRS comparison","Different normalized texts can represent equivalent CRSs. Comparison names its criteria and domain."],["Dependency declaration","Existing Profiles metadata carries a proposed complete publication summary, including unloaded and retained variant content."],["Baked coordinate context","Retain a Cartesian CRS and double-precision origin without an active source placement binding. Ordinary USD controls subsequent transforms."]]}</a:t>
+              <a:t>{"assessment":[["Data model and runtime rules","The draft separates authored inputs from computed results and defines placement, adjustment, query and bake behavior."],["Group alignment","Input and declaration rules have agreement. Detailed conventions and identities await review."],["Prototype limitations","Lighting directions lack an error bound. Rotation uncertainty is unquantified. A quoted CRS name causes false rejection."],["Verification coverage","Selected workflows and distinguishing controls support the rules. Broader composition and continuous space/time coverage remain unverified."]],"placement":[["Physical orientation","One heading/pitch/roll tuple describes physical attitude against local east, north and up. Projection effects stay computed."],["Project adjustments","The directly bound model's own xformOps adjust its placed result in a fixed project chart, including ordinary pivots."],["Child objects","Child transforms define model-local geometry. Their offsets follow model axes and the geospatial attitude."],["Repeated models","Each instance offset retains its instancer-local meaning. Independent prototype placement participates once. A required unavailable inverse fails."],["Geographic scene results","Geographic queries retain longitude/latitude/height. Cartesian geometry and bounds use the datum's Earth-centred frame."]],"data":[["Native data associations","Declare the asset, field and coordinate domain. Preserve named dimensions and observation times."],["WKT string normalization","Normalize lexical spelling without losing represented information. Equal tokens establish serialized identity."],["Semantic CRS comparison","Different normalized texts can represent equivalent CRSs. Comparison names its criteria and domain."],["Dependency declaration","Profiles records complete publication coverage, including unloaded and retained variant content. Fixed v1 identities remain proposed."],["Baked coordinate context","Retain a Cartesian CRS and double-precision origin without an active source placement binding. Ordinary USD controls subsequent transforms."]]}</a:t>
             </a:r>
           </a:p>
           <a:p xmlns:a="http://schemas.openxmlformats.org/drawingml/2006/main">
@@ -1945,17 +1945,17 @@
           </a:p>
           <a:p xmlns:a="http://schemas.openxmlformats.org/drawingml/2006/main">
             <a:r>
-              <a:t>Proposal 7b5b34b7282305135f672663a3cffb0f94342ecc SHA-256 010d4c0243e7e6985284cccadb00fb7c6f7b0c5c50f22d81bb31ada960548d75</a:t>
-            </a:r>
-          </a:p>
-          <a:p xmlns:a="http://schemas.openxmlformats.org/drawingml/2006/main">
-            <a:r>
-              <a:t>README SHA-256 32731631975544a0d484f84f76524fd94c3aac82ac3347a37b6990cbe7907035</a:t>
-            </a:r>
-          </a:p>
-          <a:p xmlns:a="http://schemas.openxmlformats.org/drawingml/2006/main">
-            <a:r>
-              <a:t>Immutable receipt SHA-256 db39bc27bc04bf7f70bfaf2e5048b085798e3ef8b72e58fa54a367a51b7b6d91</a:t>
+              <a:t>Proposal da2f49aad42811fc5d660c7bcf9ff190599f2d74 SHA-256 2613649fd06516d77339d73b56432e84613dd1925e739761efea738f41b4f0a4</a:t>
+            </a:r>
+          </a:p>
+          <a:p xmlns:a="http://schemas.openxmlformats.org/drawingml/2006/main">
+            <a:r>
+              <a:t>README SHA-256 f97eb66b4642d85817c1bface96cc358cea536a8a8104a439f22a2715af103d5</a:t>
+            </a:r>
+          </a:p>
+          <a:p xmlns:a="http://schemas.openxmlformats.org/drawingml/2006/main">
+            <a:r>
+              <a:t>Immutable receipt SHA-256 ad59ead3c86c780b6d79a243a23032e492c14809f0c01f575397ae221939068f</a:t>
             </a:r>
           </a:p>
           <a:p xmlns:a="http://schemas.openxmlformats.org/drawingml/2006/main">
@@ -1965,7 +1965,7 @@
           </a:p>
           <a:p xmlns:a="http://schemas.openxmlformats.org/drawingml/2006/main">
             <a:r>
-              <a:t>Full detailed model remains proposed. Python and C++ share PROJ and decoding. Omniverse reuses Python. Hydra consumes a resolved ordinary USD bake.</a:t>
+              <a:t>Accepted source and declaration rules are distinguished from detailed conventions and identities awaiting review. Python and C++ share PROJ and decoding. Omniverse reuses Python. Hydra consumes a resolved ordinary USD bake.</a:t>
             </a:r>
           </a:p>
         </p:txBody>
@@ -2065,7 +2065,7 @@
           </a:p>
           <a:p xmlns:a="http://schemas.openxmlformats.org/drawingml/2006/main">
             <a:r>
-              <a:t>Proposal clause: #### Decision on question 7: site calibration at proposal/proposal-source.txt:1304</a:t>
+              <a:t>Proposal clause: #### Decision on question 7: site calibration at proposal/proposal-source.txt:1344</a:t>
             </a:r>
           </a:p>
           <a:p xmlns:a="http://schemas.openxmlformats.org/drawingml/2006/main">
@@ -2080,17 +2080,17 @@
           </a:p>
           <a:p xmlns:a="http://schemas.openxmlformats.org/drawingml/2006/main">
             <a:r>
-              <a:t>Proposal 7b5b34b7282305135f672663a3cffb0f94342ecc SHA-256 010d4c0243e7e6985284cccadb00fb7c6f7b0c5c50f22d81bb31ada960548d75</a:t>
-            </a:r>
-          </a:p>
-          <a:p xmlns:a="http://schemas.openxmlformats.org/drawingml/2006/main">
-            <a:r>
-              <a:t>README SHA-256 32731631975544a0d484f84f76524fd94c3aac82ac3347a37b6990cbe7907035</a:t>
-            </a:r>
-          </a:p>
-          <a:p xmlns:a="http://schemas.openxmlformats.org/drawingml/2006/main">
-            <a:r>
-              <a:t>Immutable receipt SHA-256 db39bc27bc04bf7f70bfaf2e5048b085798e3ef8b72e58fa54a367a51b7b6d91</a:t>
+              <a:t>Proposal da2f49aad42811fc5d660c7bcf9ff190599f2d74 SHA-256 2613649fd06516d77339d73b56432e84613dd1925e739761efea738f41b4f0a4</a:t>
+            </a:r>
+          </a:p>
+          <a:p xmlns:a="http://schemas.openxmlformats.org/drawingml/2006/main">
+            <a:r>
+              <a:t>README SHA-256 f97eb66b4642d85817c1bface96cc358cea536a8a8104a439f22a2715af103d5</a:t>
+            </a:r>
+          </a:p>
+          <a:p xmlns:a="http://schemas.openxmlformats.org/drawingml/2006/main">
+            <a:r>
+              <a:t>Immutable receipt SHA-256 ad59ead3c86c780b6d79a243a23032e492c14809f0c01f575397ae221939068f</a:t>
             </a:r>
           </a:p>
           <a:p xmlns:a="http://schemas.openxmlformats.org/drawingml/2006/main">
@@ -2100,7 +2100,7 @@
           </a:p>
           <a:p xmlns:a="http://schemas.openxmlformats.org/drawingml/2006/main">
             <a:r>
-              <a:t>Full detailed model remains proposed. Python and C++ share PROJ and decoding. Omniverse reuses Python. Hydra consumes a resolved ordinary USD bake.</a:t>
+              <a:t>Accepted source and declaration rules are distinguished from detailed conventions and identities awaiting review. Python and C++ share PROJ and decoding. Omniverse reuses Python. Hydra consumes a resolved ordinary USD bake.</a:t>
             </a:r>
           </a:p>
         </p:txBody>
@@ -2147,7 +2147,7 @@
           <p:cNvPr id="3" name="Title">
             <a:extLst xmlns:a="http://schemas.openxmlformats.org/drawingml/2006/main">
               <a:ext uri="{FF2B5EF4-FFF2-40B4-BE49-F238E27FC236}">
-                <a16:creationId xmlns:a16="http://schemas.microsoft.com/office/drawing/2014/main" id="{8D475AEB-D8A4-4425-AD19-A4590C8F11A3}"/>
+                <a16:creationId xmlns:a16="http://schemas.microsoft.com/office/drawing/2014/main" id="{A50AC5D3-9C97-4890-A84B-63B6523E39BA}"/>
               </a:ext>
             </a:extLst>
           </p:cNvPr>
@@ -2304,7 +2304,7 @@
           <p:cNvPr id="2" name="Subtitle">
             <a:extLst xmlns:a="http://schemas.openxmlformats.org/drawingml/2006/main">
               <a:ext uri="{FF2B5EF4-FFF2-40B4-BE49-F238E27FC236}">
-                <a16:creationId xmlns:a16="http://schemas.microsoft.com/office/drawing/2014/main" id="{D0C48101-212F-46E7-9E8C-C3FE4774FA2B}"/>
+                <a16:creationId xmlns:a16="http://schemas.microsoft.com/office/drawing/2014/main" id="{AE74225E-70BD-434B-93C7-6BE012BDE7C8}"/>
               </a:ext>
             </a:extLst>
           </p:cNvPr>
@@ -2478,7 +2478,7 @@
           <p:cNvPr id="2" name="Section title">
             <a:extLst xmlns:a="http://schemas.openxmlformats.org/drawingml/2006/main">
               <a:ext uri="{FF2B5EF4-FFF2-40B4-BE49-F238E27FC236}">
-                <a16:creationId xmlns:a16="http://schemas.microsoft.com/office/drawing/2014/main" id="{34D6A53A-5B10-4DC9-9E8B-D787DBE97CC3}"/>
+                <a16:creationId xmlns:a16="http://schemas.microsoft.com/office/drawing/2014/main" id="{83815F44-81BC-40E4-A600-462971652472}"/>
               </a:ext>
             </a:extLst>
           </p:cNvPr>
@@ -2652,7 +2652,7 @@
           <p:cNvPr id="3" name="Title">
             <a:extLst xmlns:a="http://schemas.openxmlformats.org/drawingml/2006/main">
               <a:ext uri="{FF2B5EF4-FFF2-40B4-BE49-F238E27FC236}">
-                <a16:creationId xmlns:a16="http://schemas.microsoft.com/office/drawing/2014/main" id="{67DDC44D-6D65-499D-B972-FCD5DCCADD8D}"/>
+                <a16:creationId xmlns:a16="http://schemas.microsoft.com/office/drawing/2014/main" id="{3D05F309-2D97-49E7-B31C-0020415A5CC1}"/>
               </a:ext>
             </a:extLst>
           </p:cNvPr>
@@ -2809,7 +2809,7 @@
           <p:cNvPr id="2" name="Body">
             <a:extLst xmlns:a="http://schemas.openxmlformats.org/drawingml/2006/main">
               <a:ext uri="{FF2B5EF4-FFF2-40B4-BE49-F238E27FC236}">
-                <a16:creationId xmlns:a16="http://schemas.microsoft.com/office/drawing/2014/main" id="{582FC061-02E8-4446-9FCB-2F20B891AFDB}"/>
+                <a16:creationId xmlns:a16="http://schemas.microsoft.com/office/drawing/2014/main" id="{2814E0B4-1840-4BF6-BFE2-1FBC9617EF05}"/>
               </a:ext>
             </a:extLst>
           </p:cNvPr>
@@ -2983,7 +2983,7 @@
           <p:cNvPr id="4" name="Title">
             <a:extLst xmlns:a="http://schemas.openxmlformats.org/drawingml/2006/main">
               <a:ext uri="{FF2B5EF4-FFF2-40B4-BE49-F238E27FC236}">
-                <a16:creationId xmlns:a16="http://schemas.microsoft.com/office/drawing/2014/main" id="{1C87D3D1-8CE7-4F57-82C9-35480111BA34}"/>
+                <a16:creationId xmlns:a16="http://schemas.microsoft.com/office/drawing/2014/main" id="{64B1183B-6FBC-472E-8520-708D0186B1C4}"/>
               </a:ext>
             </a:extLst>
           </p:cNvPr>
@@ -3140,7 +3140,7 @@
           <p:cNvPr id="2" name="Left column">
             <a:extLst xmlns:a="http://schemas.openxmlformats.org/drawingml/2006/main">
               <a:ext uri="{FF2B5EF4-FFF2-40B4-BE49-F238E27FC236}">
-                <a16:creationId xmlns:a16="http://schemas.microsoft.com/office/drawing/2014/main" id="{00F73DAF-40C0-4D71-A688-1A568418A6B6}"/>
+                <a16:creationId xmlns:a16="http://schemas.microsoft.com/office/drawing/2014/main" id="{CB73622A-047C-497B-B5D2-497EB766C8FC}"/>
               </a:ext>
             </a:extLst>
           </p:cNvPr>
@@ -3297,7 +3297,7 @@
           <p:cNvPr id="3" name="Right column">
             <a:extLst xmlns:a="http://schemas.openxmlformats.org/drawingml/2006/main">
               <a:ext uri="{FF2B5EF4-FFF2-40B4-BE49-F238E27FC236}">
-                <a16:creationId xmlns:a16="http://schemas.microsoft.com/office/drawing/2014/main" id="{7994E8A3-D44C-4607-8341-C69D83D13011}"/>
+                <a16:creationId xmlns:a16="http://schemas.microsoft.com/office/drawing/2014/main" id="{1F6CF98F-C49D-4E28-9F61-0811C2929619}"/>
               </a:ext>
             </a:extLst>
           </p:cNvPr>
@@ -3471,7 +3471,7 @@
           <p:cNvPr id="3" name="Title">
             <a:extLst xmlns:a="http://schemas.openxmlformats.org/drawingml/2006/main">
               <a:ext uri="{FF2B5EF4-FFF2-40B4-BE49-F238E27FC236}">
-                <a16:creationId xmlns:a16="http://schemas.microsoft.com/office/drawing/2014/main" id="{8735B04F-4596-4A23-9907-64A68289ADF6}"/>
+                <a16:creationId xmlns:a16="http://schemas.microsoft.com/office/drawing/2014/main" id="{943F2BE3-00F1-44DF-ACBC-ACD4B7BDF6F8}"/>
               </a:ext>
             </a:extLst>
           </p:cNvPr>
@@ -3628,7 +3628,7 @@
           <p:cNvPr id="2" name="Left column">
             <a:extLst xmlns:a="http://schemas.openxmlformats.org/drawingml/2006/main">
               <a:ext uri="{FF2B5EF4-FFF2-40B4-BE49-F238E27FC236}">
-                <a16:creationId xmlns:a16="http://schemas.microsoft.com/office/drawing/2014/main" id="{7B8AEE93-2B53-4707-9B98-60F27BCA4ABD}"/>
+                <a16:creationId xmlns:a16="http://schemas.microsoft.com/office/drawing/2014/main" id="{CD05DE4A-E378-407C-ABE3-25241FC32561}"/>
               </a:ext>
             </a:extLst>
           </p:cNvPr>
@@ -3823,12 +3823,12 @@
   </p:cSld>
   <p:clrMap bg1="lt1" tx1="dk1" bg2="lt2" tx2="dk2" accent1="accent1" accent2="accent2" accent3="accent3" accent4="accent4" accent5="accent5" accent6="accent6" hlink="hlink" folHlink="folHlink"/>
   <p:sldLayoutIdLst>
-    <p:sldLayoutId xmlns:r="http://schemas.openxmlformats.org/officeDocument/2006/relationships" id="2147483649" r:id="Rff7ba0c0b2c04775"/>
-    <p:sldLayoutId xmlns:r="http://schemas.openxmlformats.org/officeDocument/2006/relationships" id="2147483650" r:id="Re5b51691d3ff47dd"/>
-    <p:sldLayoutId xmlns:r="http://schemas.openxmlformats.org/officeDocument/2006/relationships" id="2147483651" r:id="Rccf7f5c858c347e3"/>
-    <p:sldLayoutId xmlns:r="http://schemas.openxmlformats.org/officeDocument/2006/relationships" id="2147483652" r:id="R91544a1a63104f27"/>
-    <p:sldLayoutId xmlns:r="http://schemas.openxmlformats.org/officeDocument/2006/relationships" id="2147483653" r:id="R6f54fd9e991043d2"/>
-    <p:sldLayoutId xmlns:r="http://schemas.openxmlformats.org/officeDocument/2006/relationships" id="2147483654" r:id="R6d7aa54083a74a60"/>
+    <p:sldLayoutId xmlns:r="http://schemas.openxmlformats.org/officeDocument/2006/relationships" id="2147483649" r:id="R87b7fd6dd1f94ff7"/>
+    <p:sldLayoutId xmlns:r="http://schemas.openxmlformats.org/officeDocument/2006/relationships" id="2147483650" r:id="Re7154fb901144cf8"/>
+    <p:sldLayoutId xmlns:r="http://schemas.openxmlformats.org/officeDocument/2006/relationships" id="2147483651" r:id="R0ae1a6e7c51b43e2"/>
+    <p:sldLayoutId xmlns:r="http://schemas.openxmlformats.org/officeDocument/2006/relationships" id="2147483652" r:id="Rad93a27509c34cd5"/>
+    <p:sldLayoutId xmlns:r="http://schemas.openxmlformats.org/officeDocument/2006/relationships" id="2147483653" r:id="R24ee76392df941e8"/>
+    <p:sldLayoutId xmlns:r="http://schemas.openxmlformats.org/officeDocument/2006/relationships" id="2147483654" r:id="R9d1b6cdbfcfc4d77"/>
   </p:sldLayoutIdLst>
   <p:txStyles>
     <p:titleStyle>
@@ -4646,7 +4646,7 @@
           <p:cNvPr id="5" name="">
             <a:extLst xmlns:a="http://schemas.openxmlformats.org/drawingml/2006/main">
               <a:ext uri="{FF2B5EF4-FFF2-40B4-BE49-F238E27FC236}">
-                <a16:creationId xmlns:a16="http://schemas.microsoft.com/office/drawing/2014/main" id="{DD899C30-FA86-4363-9F3B-0C552D69CAF5}"/>
+                <a16:creationId xmlns:a16="http://schemas.microsoft.com/office/drawing/2014/main" id="{96F0D17F-808C-4451-B949-4BB06DFBDEDD}"/>
               </a:ext>
             </a:extLst>
           </p:cNvPr>
@@ -4714,7 +4714,7 @@
           <p:cNvPr id="2" name="">
             <a:extLst xmlns:a="http://schemas.openxmlformats.org/drawingml/2006/main">
               <a:ext uri="{FF2B5EF4-FFF2-40B4-BE49-F238E27FC236}">
-                <a16:creationId xmlns:a16="http://schemas.microsoft.com/office/drawing/2014/main" id="{98D9EC52-9C42-405D-8322-CFF040F49731}"/>
+                <a16:creationId xmlns:a16="http://schemas.microsoft.com/office/drawing/2014/main" id="{CF6014A7-A5E4-487C-B85B-193E7DF93C7D}"/>
               </a:ext>
             </a:extLst>
           </p:cNvPr>
@@ -4782,7 +4782,7 @@
           <p:cNvPr id="3" name="">
             <a:extLst xmlns:a="http://schemas.openxmlformats.org/drawingml/2006/main">
               <a:ext uri="{FF2B5EF4-FFF2-40B4-BE49-F238E27FC236}">
-                <a16:creationId xmlns:a16="http://schemas.microsoft.com/office/drawing/2014/main" id="{CA34F448-51F6-43F4-9D40-48736EE74195}"/>
+                <a16:creationId xmlns:a16="http://schemas.microsoft.com/office/drawing/2014/main" id="{4F4E33B8-6594-4AA9-8D2B-1BB4BC51C6A0}"/>
               </a:ext>
             </a:extLst>
           </p:cNvPr>
@@ -4850,7 +4850,7 @@
           <p:cNvPr id="4" name="">
             <a:extLst xmlns:a="http://schemas.openxmlformats.org/drawingml/2006/main">
               <a:ext uri="{FF2B5EF4-FFF2-40B4-BE49-F238E27FC236}">
-                <a16:creationId xmlns:a16="http://schemas.microsoft.com/office/drawing/2014/main" id="{4C2CEF57-6356-44BC-B267-96CA156D3345}"/>
+                <a16:creationId xmlns:a16="http://schemas.microsoft.com/office/drawing/2014/main" id="{FBD2666B-ED8F-4171-968B-F07346958D9E}"/>
               </a:ext>
             </a:extLst>
           </p:cNvPr>
@@ -4916,7 +4916,7 @@
     </p:spTree>
     <p:extLst>
       <p:ext uri="{BB962C8B-B14F-4D97-AF65-F5344CB8AC3E}">
-        <p14:creationId xmlns:p14="http://schemas.microsoft.com/office/powerpoint/2010/main" val="1749863232"/>
+        <p14:creationId xmlns:p14="http://schemas.microsoft.com/office/powerpoint/2010/main" val="2100642048"/>
       </p:ext>
     </p:extLst>
   </p:cSld>
@@ -4947,7 +4947,7 @@
           <p:cNvPr id="9" name="">
             <a:extLst xmlns:a="http://schemas.openxmlformats.org/drawingml/2006/main">
               <a:ext uri="{FF2B5EF4-FFF2-40B4-BE49-F238E27FC236}">
-                <a16:creationId xmlns:a16="http://schemas.microsoft.com/office/drawing/2014/main" id="{E2A57AD8-4157-42C0-AB8B-E4A3DB2D39B5}"/>
+                <a16:creationId xmlns:a16="http://schemas.microsoft.com/office/drawing/2014/main" id="{21576D8E-A85E-4F52-AC53-923385F554C3}"/>
               </a:ext>
             </a:extLst>
           </p:cNvPr>
@@ -5015,7 +5015,7 @@
           <p:cNvPr id="2" name="">
             <a:extLst xmlns:a="http://schemas.openxmlformats.org/drawingml/2006/main">
               <a:ext uri="{FF2B5EF4-FFF2-40B4-BE49-F238E27FC236}">
-                <a16:creationId xmlns:a16="http://schemas.microsoft.com/office/drawing/2014/main" id="{863DD7DA-49DB-4910-AE50-EB81FDB674AB}"/>
+                <a16:creationId xmlns:a16="http://schemas.microsoft.com/office/drawing/2014/main" id="{955C9E3B-290C-4CA9-BC9D-D4A0A45A2F66}"/>
               </a:ext>
             </a:extLst>
           </p:cNvPr>
@@ -5083,7 +5083,7 @@
           <p:cNvPr id="3" name="">
             <a:extLst xmlns:a="http://schemas.openxmlformats.org/drawingml/2006/main">
               <a:ext uri="{FF2B5EF4-FFF2-40B4-BE49-F238E27FC236}">
-                <a16:creationId xmlns:a16="http://schemas.microsoft.com/office/drawing/2014/main" id="{81C3B088-4811-4A03-980C-AE4540220605}"/>
+                <a16:creationId xmlns:a16="http://schemas.microsoft.com/office/drawing/2014/main" id="{CA313B4D-105C-4242-994C-09327999E7BE}"/>
               </a:ext>
             </a:extLst>
           </p:cNvPr>
@@ -5093,13 +5093,13 @@
           <p:nvPr/>
         </p:nvPicPr>
         <p:blipFill>
-          <a:blip xmlns:r="http://schemas.openxmlformats.org/officeDocument/2006/relationships" xmlns:a="http://schemas.openxmlformats.org/drawingml/2006/main" r:embed="Rbcfbe249142f457d"/>
+          <a:blip xmlns:r="http://schemas.openxmlformats.org/officeDocument/2006/relationships" xmlns:a="http://schemas.openxmlformats.org/drawingml/2006/main" r:embed="Rbb2905966eed44b9"/>
           <a:stretch xmlns:a="http://schemas.openxmlformats.org/drawingml/2006/main"/>
         </p:blipFill>
         <p:spPr>
           <a:xfrm xmlns:a="http://schemas.openxmlformats.org/drawingml/2006/main">
-            <a:off x="1878478" y="2381250"/>
-            <a:ext cx="4720294" cy="4086225"/>
+            <a:off x="609600" y="2558007"/>
+            <a:ext cx="7258050" cy="3732711"/>
           </a:xfrm>
           <a:prstGeom xmlns:a="http://schemas.openxmlformats.org/drawingml/2006/main" prst="rect">
             <a:avLst/>
@@ -5111,7 +5111,7 @@
           <p:cNvPr id="4" name="">
             <a:extLst xmlns:a="http://schemas.openxmlformats.org/drawingml/2006/main">
               <a:ext uri="{FF2B5EF4-FFF2-40B4-BE49-F238E27FC236}">
-                <a16:creationId xmlns:a16="http://schemas.microsoft.com/office/drawing/2014/main" id="{D74885AA-FF43-4B40-91ED-C91AE09083A6}"/>
+                <a16:creationId xmlns:a16="http://schemas.microsoft.com/office/drawing/2014/main" id="{D70A8B49-0766-4D9D-9D09-CBFECEDB773C}"/>
               </a:ext>
             </a:extLst>
           </p:cNvPr>
@@ -5179,7 +5179,7 @@
           <p:cNvPr id="5" name="">
             <a:extLst xmlns:a="http://schemas.openxmlformats.org/drawingml/2006/main">
               <a:ext uri="{FF2B5EF4-FFF2-40B4-BE49-F238E27FC236}">
-                <a16:creationId xmlns:a16="http://schemas.microsoft.com/office/drawing/2014/main" id="{703CC82C-4D23-4E05-AD16-7EFB814E3080}"/>
+                <a16:creationId xmlns:a16="http://schemas.microsoft.com/office/drawing/2014/main" id="{F64B633F-E476-4BD4-B266-688F5DC6A545}"/>
               </a:ext>
             </a:extLst>
           </p:cNvPr>
@@ -5247,7 +5247,7 @@
           <p:cNvPr id="6" name="">
             <a:extLst xmlns:a="http://schemas.openxmlformats.org/drawingml/2006/main">
               <a:ext uri="{FF2B5EF4-FFF2-40B4-BE49-F238E27FC236}">
-                <a16:creationId xmlns:a16="http://schemas.microsoft.com/office/drawing/2014/main" id="{D3CA1DF0-BE10-4451-B2E1-19F702FA7792}"/>
+                <a16:creationId xmlns:a16="http://schemas.microsoft.com/office/drawing/2014/main" id="{B63A3976-653D-4106-9FDE-E4F147EF49B1}"/>
               </a:ext>
             </a:extLst>
           </p:cNvPr>
@@ -5315,7 +5315,7 @@
           <p:cNvPr id="7" name="">
             <a:extLst xmlns:a="http://schemas.openxmlformats.org/drawingml/2006/main">
               <a:ext uri="{FF2B5EF4-FFF2-40B4-BE49-F238E27FC236}">
-                <a16:creationId xmlns:a16="http://schemas.microsoft.com/office/drawing/2014/main" id="{2782C00B-A739-4FD6-84F0-5E14739787AA}"/>
+                <a16:creationId xmlns:a16="http://schemas.microsoft.com/office/drawing/2014/main" id="{5885F3E6-9A6C-449E-A59F-AB0B2993D1B0}"/>
               </a:ext>
             </a:extLst>
           </p:cNvPr>
@@ -5383,7 +5383,7 @@
           <p:cNvPr id="8" name="">
             <a:extLst xmlns:a="http://schemas.openxmlformats.org/drawingml/2006/main">
               <a:ext uri="{FF2B5EF4-FFF2-40B4-BE49-F238E27FC236}">
-                <a16:creationId xmlns:a16="http://schemas.microsoft.com/office/drawing/2014/main" id="{C3CE3E4B-887D-45AA-A32F-86DB68997734}"/>
+                <a16:creationId xmlns:a16="http://schemas.microsoft.com/office/drawing/2014/main" id="{672233D1-9E15-41E8-8B0C-7786A3A2E2D0}"/>
               </a:ext>
             </a:extLst>
           </p:cNvPr>
@@ -5449,7 +5449,7 @@
     </p:spTree>
     <p:extLst>
       <p:ext uri="{BB962C8B-B14F-4D97-AF65-F5344CB8AC3E}">
-        <p14:creationId xmlns:p14="http://schemas.microsoft.com/office/powerpoint/2010/main" val="527987045"/>
+        <p14:creationId xmlns:p14="http://schemas.microsoft.com/office/powerpoint/2010/main" val="874142571"/>
       </p:ext>
     </p:extLst>
   </p:cSld>
@@ -5480,7 +5480,7 @@
           <p:cNvPr id="8" name="">
             <a:extLst xmlns:a="http://schemas.openxmlformats.org/drawingml/2006/main">
               <a:ext uri="{FF2B5EF4-FFF2-40B4-BE49-F238E27FC236}">
-                <a16:creationId xmlns:a16="http://schemas.microsoft.com/office/drawing/2014/main" id="{21A993A1-3212-4B56-BF46-68E8EB1A1457}"/>
+                <a16:creationId xmlns:a16="http://schemas.microsoft.com/office/drawing/2014/main" id="{DEDC4C2F-2E3B-452E-9D65-77DA5CC2CEC4}"/>
               </a:ext>
             </a:extLst>
           </p:cNvPr>
@@ -5548,7 +5548,7 @@
           <p:cNvPr id="2" name="">
             <a:extLst xmlns:a="http://schemas.openxmlformats.org/drawingml/2006/main">
               <a:ext uri="{FF2B5EF4-FFF2-40B4-BE49-F238E27FC236}">
-                <a16:creationId xmlns:a16="http://schemas.microsoft.com/office/drawing/2014/main" id="{80164E3A-0F69-42D4-B86D-134EB42A84D9}"/>
+                <a16:creationId xmlns:a16="http://schemas.microsoft.com/office/drawing/2014/main" id="{CE8D26BD-BB78-4F80-8FE3-05DE9A2E21B8}"/>
               </a:ext>
             </a:extLst>
           </p:cNvPr>
@@ -5616,7 +5616,7 @@
           <p:cNvPr id="3" name="">
             <a:extLst xmlns:a="http://schemas.openxmlformats.org/drawingml/2006/main">
               <a:ext uri="{FF2B5EF4-FFF2-40B4-BE49-F238E27FC236}">
-                <a16:creationId xmlns:a16="http://schemas.microsoft.com/office/drawing/2014/main" id="{190CF976-AC29-445D-A93B-5CA8E53DC522}"/>
+                <a16:creationId xmlns:a16="http://schemas.microsoft.com/office/drawing/2014/main" id="{74952E9E-7D84-4367-9C70-C271CB7E37B6}"/>
               </a:ext>
             </a:extLst>
           </p:cNvPr>
@@ -5684,7 +5684,7 @@
           <p:cNvPr id="4" name="Chart">
             <a:extLst xmlns:a="http://schemas.openxmlformats.org/drawingml/2006/main">
               <a:ext uri="{FF2B5EF4-FFF2-40B4-BE49-F238E27FC236}">
-                <a16:creationId xmlns:a16="http://schemas.microsoft.com/office/drawing/2014/main" id="{2EB04BBD-BCFA-4E41-BDF3-5F03E05BA3E5}"/>
+                <a16:creationId xmlns:a16="http://schemas.microsoft.com/office/drawing/2014/main" id="{4F0960DD-604D-4BBE-A6D6-612732239C26}"/>
               </a:ext>
             </a:extLst>
           </p:cNvPr>
@@ -5697,7 +5697,7 @@
         </p:xfrm>
         <a:graphic xmlns:a="http://schemas.openxmlformats.org/drawingml/2006/main">
           <a:graphicData uri="http://schemas.openxmlformats.org/drawingml/2006/chart">
-            <c:chart xmlns:r="http://schemas.openxmlformats.org/officeDocument/2006/relationships" xmlns:c="http://schemas.openxmlformats.org/drawingml/2006/chart" r:id="Rbee1f8f135e34072"/>
+            <c:chart xmlns:r="http://schemas.openxmlformats.org/officeDocument/2006/relationships" xmlns:c="http://schemas.openxmlformats.org/drawingml/2006/chart" r:id="R093850bba7d14aa5"/>
           </a:graphicData>
         </a:graphic>
       </p:graphicFrame>
@@ -5706,7 +5706,7 @@
           <p:cNvPr id="5" name="">
             <a:extLst xmlns:a="http://schemas.openxmlformats.org/drawingml/2006/main">
               <a:ext uri="{FF2B5EF4-FFF2-40B4-BE49-F238E27FC236}">
-                <a16:creationId xmlns:a16="http://schemas.microsoft.com/office/drawing/2014/main" id="{887BF657-EADC-4EA5-813D-62D45DFE3930}"/>
+                <a16:creationId xmlns:a16="http://schemas.microsoft.com/office/drawing/2014/main" id="{8DB78D98-B65F-4041-9BC9-06A2553B4E8F}"/>
               </a:ext>
             </a:extLst>
           </p:cNvPr>
@@ -5774,7 +5774,7 @@
           <p:cNvPr id="6" name="">
             <a:extLst xmlns:a="http://schemas.openxmlformats.org/drawingml/2006/main">
               <a:ext uri="{FF2B5EF4-FFF2-40B4-BE49-F238E27FC236}">
-                <a16:creationId xmlns:a16="http://schemas.microsoft.com/office/drawing/2014/main" id="{984EB732-139C-47B3-99F5-E7DB8F02CED5}"/>
+                <a16:creationId xmlns:a16="http://schemas.microsoft.com/office/drawing/2014/main" id="{CA890856-B246-49D4-9D61-8E75D7359CAF}"/>
               </a:ext>
             </a:extLst>
           </p:cNvPr>
@@ -5842,7 +5842,7 @@
           <p:cNvPr id="7" name="">
             <a:extLst xmlns:a="http://schemas.openxmlformats.org/drawingml/2006/main">
               <a:ext uri="{FF2B5EF4-FFF2-40B4-BE49-F238E27FC236}">
-                <a16:creationId xmlns:a16="http://schemas.microsoft.com/office/drawing/2014/main" id="{3171493D-7871-4AFB-8710-F75903DEF053}"/>
+                <a16:creationId xmlns:a16="http://schemas.microsoft.com/office/drawing/2014/main" id="{09CB1569-53D6-4087-B81B-B2E33DFF4915}"/>
               </a:ext>
             </a:extLst>
           </p:cNvPr>
@@ -5908,7 +5908,7 @@
     </p:spTree>
     <p:extLst>
       <p:ext uri="{BB962C8B-B14F-4D97-AF65-F5344CB8AC3E}">
-        <p14:creationId xmlns:p14="http://schemas.microsoft.com/office/powerpoint/2010/main" val="414453839"/>
+        <p14:creationId xmlns:p14="http://schemas.microsoft.com/office/powerpoint/2010/main" val="1794705531"/>
       </p:ext>
     </p:extLst>
   </p:cSld>
@@ -5939,7 +5939,7 @@
           <p:cNvPr id="4" name="">
             <a:extLst xmlns:a="http://schemas.openxmlformats.org/drawingml/2006/main">
               <a:ext uri="{FF2B5EF4-FFF2-40B4-BE49-F238E27FC236}">
-                <a16:creationId xmlns:a16="http://schemas.microsoft.com/office/drawing/2014/main" id="{5AEE1F4F-04D2-4CF8-8F5E-BF4204C85C7F}"/>
+                <a16:creationId xmlns:a16="http://schemas.microsoft.com/office/drawing/2014/main" id="{920241F1-1808-4A9A-909D-FEDD16F51114}"/>
               </a:ext>
             </a:extLst>
           </p:cNvPr>
@@ -6007,7 +6007,7 @@
           <p:cNvPr id="2" name="">
             <a:extLst xmlns:a="http://schemas.openxmlformats.org/drawingml/2006/main">
               <a:ext uri="{FF2B5EF4-FFF2-40B4-BE49-F238E27FC236}">
-                <a16:creationId xmlns:a16="http://schemas.microsoft.com/office/drawing/2014/main" id="{1C0958F2-C633-444B-A29E-781C43CD6B4A}"/>
+                <a16:creationId xmlns:a16="http://schemas.microsoft.com/office/drawing/2014/main" id="{E3257B85-6B9F-4646-8FCB-54B149EBFA88}"/>
               </a:ext>
             </a:extLst>
           </p:cNvPr>
@@ -6359,7 +6359,7 @@
           <p:cNvPr id="3" name="">
             <a:extLst xmlns:a="http://schemas.openxmlformats.org/drawingml/2006/main">
               <a:ext uri="{FF2B5EF4-FFF2-40B4-BE49-F238E27FC236}">
-                <a16:creationId xmlns:a16="http://schemas.microsoft.com/office/drawing/2014/main" id="{4D52E606-4866-4FE3-9F8D-9F0860862A20}"/>
+                <a16:creationId xmlns:a16="http://schemas.microsoft.com/office/drawing/2014/main" id="{961DB3FB-20D6-4097-878C-33EC7ED294DE}"/>
               </a:ext>
             </a:extLst>
           </p:cNvPr>
@@ -6425,7 +6425,7 @@
     </p:spTree>
     <p:extLst>
       <p:ext uri="{BB962C8B-B14F-4D97-AF65-F5344CB8AC3E}">
-        <p14:creationId xmlns:p14="http://schemas.microsoft.com/office/powerpoint/2010/main" val="1857045714"/>
+        <p14:creationId xmlns:p14="http://schemas.microsoft.com/office/powerpoint/2010/main" val="1815321188"/>
       </p:ext>
     </p:extLst>
   </p:cSld>
@@ -6456,7 +6456,7 @@
           <p:cNvPr id="4" name="">
             <a:extLst xmlns:a="http://schemas.openxmlformats.org/drawingml/2006/main">
               <a:ext uri="{FF2B5EF4-FFF2-40B4-BE49-F238E27FC236}">
-                <a16:creationId xmlns:a16="http://schemas.microsoft.com/office/drawing/2014/main" id="{AD5A4570-2A8A-4FFF-986F-F74B07AE3108}"/>
+                <a16:creationId xmlns:a16="http://schemas.microsoft.com/office/drawing/2014/main" id="{312E37A7-7494-4BCD-A8DE-7F82A546F9FE}"/>
               </a:ext>
             </a:extLst>
           </p:cNvPr>
@@ -6524,7 +6524,7 @@
           <p:cNvPr id="2" name="">
             <a:extLst xmlns:a="http://schemas.openxmlformats.org/drawingml/2006/main">
               <a:ext uri="{FF2B5EF4-FFF2-40B4-BE49-F238E27FC236}">
-                <a16:creationId xmlns:a16="http://schemas.microsoft.com/office/drawing/2014/main" id="{5D0931D9-2C51-4C38-867C-FE7FE9FD2261}"/>
+                <a16:creationId xmlns:a16="http://schemas.microsoft.com/office/drawing/2014/main" id="{1A22BDAA-4BE9-4E03-A8C7-0B2479E39887}"/>
               </a:ext>
             </a:extLst>
           </p:cNvPr>
@@ -6802,7 +6802,7 @@
                           <a:ea typeface="Arial"/>
                           <a:cs typeface="Arial"/>
                         </a:rPr>
-                        <a:t>Existing Profiles metadata carries a proposed complete publication summary, including unloaded and retained variant content.</a:t>
+                        <a:t>Profiles records complete publication coverage, including unloaded and retained variant content. Fixed v1 identities remain proposed.</a:t>
                       </a:r>
                     </a:p>
                   </a:txBody>
@@ -6876,7 +6876,7 @@
           <p:cNvPr id="3" name="">
             <a:extLst xmlns:a="http://schemas.openxmlformats.org/drawingml/2006/main">
               <a:ext uri="{FF2B5EF4-FFF2-40B4-BE49-F238E27FC236}">
-                <a16:creationId xmlns:a16="http://schemas.microsoft.com/office/drawing/2014/main" id="{51F5CC13-A329-4AE2-B061-85B813B28F86}"/>
+                <a16:creationId xmlns:a16="http://schemas.microsoft.com/office/drawing/2014/main" id="{31C5A975-ABB4-43A4-9A96-ECC204B30242}"/>
               </a:ext>
             </a:extLst>
           </p:cNvPr>
@@ -6942,7 +6942,7 @@
     </p:spTree>
     <p:extLst>
       <p:ext uri="{BB962C8B-B14F-4D97-AF65-F5344CB8AC3E}">
-        <p14:creationId xmlns:p14="http://schemas.microsoft.com/office/powerpoint/2010/main" val="1660350761"/>
+        <p14:creationId xmlns:p14="http://schemas.microsoft.com/office/powerpoint/2010/main" val="1549565108"/>
       </p:ext>
     </p:extLst>
   </p:cSld>
@@ -6973,7 +6973,7 @@
           <p:cNvPr id="4" name="">
             <a:extLst xmlns:a="http://schemas.openxmlformats.org/drawingml/2006/main">
               <a:ext uri="{FF2B5EF4-FFF2-40B4-BE49-F238E27FC236}">
-                <a16:creationId xmlns:a16="http://schemas.microsoft.com/office/drawing/2014/main" id="{FDEE6995-B652-4DEF-A1F3-04D33433421E}"/>
+                <a16:creationId xmlns:a16="http://schemas.microsoft.com/office/drawing/2014/main" id="{555D9875-C5AF-4193-916D-BB44F21F7B98}"/>
               </a:ext>
             </a:extLst>
           </p:cNvPr>
@@ -7041,7 +7041,7 @@
           <p:cNvPr id="2" name="">
             <a:extLst xmlns:a="http://schemas.openxmlformats.org/drawingml/2006/main">
               <a:ext uri="{FF2B5EF4-FFF2-40B4-BE49-F238E27FC236}">
-                <a16:creationId xmlns:a16="http://schemas.microsoft.com/office/drawing/2014/main" id="{10E54460-6455-4244-B983-9FA9E4E4BAF1}"/>
+                <a16:creationId xmlns:a16="http://schemas.microsoft.com/office/drawing/2014/main" id="{12288FC7-72B0-4232-A16C-945EAD6C75E0}"/>
               </a:ext>
             </a:extLst>
           </p:cNvPr>
@@ -7319,7 +7319,7 @@
                           <a:ea typeface="Arial"/>
                           <a:cs typeface="Arial"/>
                         </a:rPr>
-                        <a:t>113 contract tests and 65 distinguishing controls pass. Separate diagnostics expose the reported prototype limits.</a:t>
+                        <a:t>116 contract tests and 65 distinguishing controls pass. Separate diagnostics expose the reported prototype limits.</a:t>
                       </a:r>
                     </a:p>
                   </a:txBody>
@@ -7373,7 +7373,7 @@
                           <a:ea typeface="Arial"/>
                           <a:cs typeface="Arial"/>
                         </a:rPr>
-                        <a:t>Original inputs and 47 frozen execution files remain unchanged. The immutable receipt identifies exact executed content.</a:t>
+                        <a:t>Original inputs and 48 frozen execution files remain unchanged. The immutable receipt identifies exact executed content.</a:t>
                       </a:r>
                     </a:p>
                   </a:txBody>
@@ -7447,7 +7447,7 @@
           <p:cNvPr id="3" name="">
             <a:extLst xmlns:a="http://schemas.openxmlformats.org/drawingml/2006/main">
               <a:ext uri="{FF2B5EF4-FFF2-40B4-BE49-F238E27FC236}">
-                <a16:creationId xmlns:a16="http://schemas.microsoft.com/office/drawing/2014/main" id="{5ED00BD9-6875-4086-94C8-6014393951D7}"/>
+                <a16:creationId xmlns:a16="http://schemas.microsoft.com/office/drawing/2014/main" id="{4B4A559A-92E5-4D78-A00A-88CE65BFB08B}"/>
               </a:ext>
             </a:extLst>
           </p:cNvPr>
@@ -7513,7 +7513,7 @@
     </p:spTree>
     <p:extLst>
       <p:ext uri="{BB962C8B-B14F-4D97-AF65-F5344CB8AC3E}">
-        <p14:creationId xmlns:p14="http://schemas.microsoft.com/office/powerpoint/2010/main" val="997950830"/>
+        <p14:creationId xmlns:p14="http://schemas.microsoft.com/office/powerpoint/2010/main" val="1772005043"/>
       </p:ext>
     </p:extLst>
   </p:cSld>
@@ -7544,7 +7544,7 @@
           <p:cNvPr id="5" name="">
             <a:extLst xmlns:a="http://schemas.openxmlformats.org/drawingml/2006/main">
               <a:ext uri="{FF2B5EF4-FFF2-40B4-BE49-F238E27FC236}">
-                <a16:creationId xmlns:a16="http://schemas.microsoft.com/office/drawing/2014/main" id="{F2563E96-B631-492D-B075-820434AD974C}"/>
+                <a16:creationId xmlns:a16="http://schemas.microsoft.com/office/drawing/2014/main" id="{5BB62EBF-86D1-461E-845E-766AC9273C9D}"/>
               </a:ext>
             </a:extLst>
           </p:cNvPr>
@@ -7612,7 +7612,7 @@
           <p:cNvPr id="2" name="">
             <a:extLst xmlns:a="http://schemas.openxmlformats.org/drawingml/2006/main">
               <a:ext uri="{FF2B5EF4-FFF2-40B4-BE49-F238E27FC236}">
-                <a16:creationId xmlns:a16="http://schemas.microsoft.com/office/drawing/2014/main" id="{971577B2-44C9-43F8-BF1F-2D1E4E8B0D62}"/>
+                <a16:creationId xmlns:a16="http://schemas.microsoft.com/office/drawing/2014/main" id="{3B466CE3-F485-4981-9427-653B21AEDAFC}"/>
               </a:ext>
             </a:extLst>
           </p:cNvPr>
@@ -7680,7 +7680,7 @@
           <p:cNvPr id="3" name="">
             <a:extLst xmlns:a="http://schemas.openxmlformats.org/drawingml/2006/main">
               <a:ext uri="{FF2B5EF4-FFF2-40B4-BE49-F238E27FC236}">
-                <a16:creationId xmlns:a16="http://schemas.microsoft.com/office/drawing/2014/main" id="{D630B73E-B318-4CE3-9A99-4E363F244FBD}"/>
+                <a16:creationId xmlns:a16="http://schemas.microsoft.com/office/drawing/2014/main" id="{8349BCFA-108D-4D3C-B92F-3A1D4F35676D}"/>
               </a:ext>
             </a:extLst>
           </p:cNvPr>
@@ -7978,7 +7978,7 @@
           <p:cNvPr id="4" name="">
             <a:extLst xmlns:a="http://schemas.openxmlformats.org/drawingml/2006/main">
               <a:ext uri="{FF2B5EF4-FFF2-40B4-BE49-F238E27FC236}">
-                <a16:creationId xmlns:a16="http://schemas.microsoft.com/office/drawing/2014/main" id="{B93FA8A3-55ED-47CA-BC92-C16865E532E8}"/>
+                <a16:creationId xmlns:a16="http://schemas.microsoft.com/office/drawing/2014/main" id="{CAE02E76-AD85-475E-BE5A-0E9F7983BE90}"/>
               </a:ext>
             </a:extLst>
           </p:cNvPr>
@@ -8044,7 +8044,7 @@
     </p:spTree>
     <p:extLst>
       <p:ext uri="{BB962C8B-B14F-4D97-AF65-F5344CB8AC3E}">
-        <p14:creationId xmlns:p14="http://schemas.microsoft.com/office/powerpoint/2010/main" val="695027163"/>
+        <p14:creationId xmlns:p14="http://schemas.microsoft.com/office/powerpoint/2010/main" val="418793482"/>
       </p:ext>
     </p:extLst>
   </p:cSld>
@@ -8075,7 +8075,7 @@
           <p:cNvPr id="9" name="">
             <a:extLst xmlns:a="http://schemas.openxmlformats.org/drawingml/2006/main">
               <a:ext uri="{FF2B5EF4-FFF2-40B4-BE49-F238E27FC236}">
-                <a16:creationId xmlns:a16="http://schemas.microsoft.com/office/drawing/2014/main" id="{AA538F70-E80B-4B96-9F9A-1242D76F5EF1}"/>
+                <a16:creationId xmlns:a16="http://schemas.microsoft.com/office/drawing/2014/main" id="{E71A9758-A673-47E7-9054-AE43FA4A5C5C}"/>
               </a:ext>
             </a:extLst>
           </p:cNvPr>
@@ -8143,7 +8143,7 @@
           <p:cNvPr id="2" name="">
             <a:extLst xmlns:a="http://schemas.openxmlformats.org/drawingml/2006/main">
               <a:ext uri="{FF2B5EF4-FFF2-40B4-BE49-F238E27FC236}">
-                <a16:creationId xmlns:a16="http://schemas.microsoft.com/office/drawing/2014/main" id="{90CC91A2-A414-4E2B-A5EC-7792B46C0913}"/>
+                <a16:creationId xmlns:a16="http://schemas.microsoft.com/office/drawing/2014/main" id="{BD194932-34D2-4D3E-8E31-692EC3E7F47C}"/>
               </a:ext>
             </a:extLst>
           </p:cNvPr>
@@ -8211,7 +8211,7 @@
           <p:cNvPr id="3" name="">
             <a:extLst xmlns:a="http://schemas.openxmlformats.org/drawingml/2006/main">
               <a:ext uri="{FF2B5EF4-FFF2-40B4-BE49-F238E27FC236}">
-                <a16:creationId xmlns:a16="http://schemas.microsoft.com/office/drawing/2014/main" id="{C3246415-A39C-44F5-A383-0BD61C39C245}"/>
+                <a16:creationId xmlns:a16="http://schemas.microsoft.com/office/drawing/2014/main" id="{10FF5315-CE04-4EE0-9AB8-48A0D1FE9073}"/>
               </a:ext>
             </a:extLst>
           </p:cNvPr>
@@ -8221,7 +8221,7 @@
           <p:nvPr/>
         </p:nvPicPr>
         <p:blipFill>
-          <a:blip xmlns:r="http://schemas.openxmlformats.org/officeDocument/2006/relationships" xmlns:a="http://schemas.openxmlformats.org/drawingml/2006/main" r:embed="Ra928073ddee345e5"/>
+          <a:blip xmlns:r="http://schemas.openxmlformats.org/officeDocument/2006/relationships" xmlns:a="http://schemas.openxmlformats.org/drawingml/2006/main" r:embed="R5d40dfcef7ba4a49"/>
           <a:srcRect xmlns:a="http://schemas.openxmlformats.org/drawingml/2006/main" l="0" t="8974" r="0" b="33333"/>
           <a:stretch xmlns:a="http://schemas.openxmlformats.org/drawingml/2006/main"/>
         </p:blipFill>
@@ -8240,7 +8240,7 @@
           <p:cNvPr id="4" name="">
             <a:extLst xmlns:a="http://schemas.openxmlformats.org/drawingml/2006/main">
               <a:ext uri="{FF2B5EF4-FFF2-40B4-BE49-F238E27FC236}">
-                <a16:creationId xmlns:a16="http://schemas.microsoft.com/office/drawing/2014/main" id="{9EF8916F-EC4F-4874-98A9-D96A03344BE9}"/>
+                <a16:creationId xmlns:a16="http://schemas.microsoft.com/office/drawing/2014/main" id="{FFCFDC51-546D-41E5-95CD-1D76B84DD0E4}"/>
               </a:ext>
             </a:extLst>
           </p:cNvPr>
@@ -8308,7 +8308,7 @@
           <p:cNvPr id="5" name="">
             <a:extLst xmlns:a="http://schemas.openxmlformats.org/drawingml/2006/main">
               <a:ext uri="{FF2B5EF4-FFF2-40B4-BE49-F238E27FC236}">
-                <a16:creationId xmlns:a16="http://schemas.microsoft.com/office/drawing/2014/main" id="{7DACD6EA-F297-4A7C-8E2B-F14B6AFC7719}"/>
+                <a16:creationId xmlns:a16="http://schemas.microsoft.com/office/drawing/2014/main" id="{E8DBDD50-E9CD-4807-BCDD-107588235560}"/>
               </a:ext>
             </a:extLst>
           </p:cNvPr>
@@ -8376,7 +8376,7 @@
           <p:cNvPr id="6" name="">
             <a:extLst xmlns:a="http://schemas.openxmlformats.org/drawingml/2006/main">
               <a:ext uri="{FF2B5EF4-FFF2-40B4-BE49-F238E27FC236}">
-                <a16:creationId xmlns:a16="http://schemas.microsoft.com/office/drawing/2014/main" id="{DA0A6CF3-8317-4319-A170-2D9AB68E767D}"/>
+                <a16:creationId xmlns:a16="http://schemas.microsoft.com/office/drawing/2014/main" id="{7BD8DBE3-D7E6-45FA-8975-69B8C597FD9E}"/>
               </a:ext>
             </a:extLst>
           </p:cNvPr>
@@ -8444,7 +8444,7 @@
           <p:cNvPr id="7" name="">
             <a:extLst xmlns:a="http://schemas.openxmlformats.org/drawingml/2006/main">
               <a:ext uri="{FF2B5EF4-FFF2-40B4-BE49-F238E27FC236}">
-                <a16:creationId xmlns:a16="http://schemas.microsoft.com/office/drawing/2014/main" id="{1B1AA1B6-0BD9-4F1D-86AC-896F6CE2BDEA}"/>
+                <a16:creationId xmlns:a16="http://schemas.microsoft.com/office/drawing/2014/main" id="{F8735F64-E0FF-4626-BC67-E66014305142}"/>
               </a:ext>
             </a:extLst>
           </p:cNvPr>
@@ -8512,7 +8512,7 @@
           <p:cNvPr id="8" name="">
             <a:extLst xmlns:a="http://schemas.openxmlformats.org/drawingml/2006/main">
               <a:ext uri="{FF2B5EF4-FFF2-40B4-BE49-F238E27FC236}">
-                <a16:creationId xmlns:a16="http://schemas.microsoft.com/office/drawing/2014/main" id="{116FADAE-106C-446B-BACE-17D4152E4E66}"/>
+                <a16:creationId xmlns:a16="http://schemas.microsoft.com/office/drawing/2014/main" id="{28DA9AA7-B881-4BD5-BFFB-63AC10D7F2F1}"/>
               </a:ext>
             </a:extLst>
           </p:cNvPr>
@@ -8578,7 +8578,7 @@
     </p:spTree>
     <p:extLst>
       <p:ext uri="{BB962C8B-B14F-4D97-AF65-F5344CB8AC3E}">
-        <p14:creationId xmlns:p14="http://schemas.microsoft.com/office/powerpoint/2010/main" val="276423842"/>
+        <p14:creationId xmlns:p14="http://schemas.microsoft.com/office/powerpoint/2010/main" val="1437884512"/>
       </p:ext>
     </p:extLst>
   </p:cSld>
@@ -8609,7 +8609,7 @@
           <p:cNvPr id="9" name="">
             <a:extLst xmlns:a="http://schemas.openxmlformats.org/drawingml/2006/main">
               <a:ext uri="{FF2B5EF4-FFF2-40B4-BE49-F238E27FC236}">
-                <a16:creationId xmlns:a16="http://schemas.microsoft.com/office/drawing/2014/main" id="{1044AEC2-AE82-4FFB-AA65-5B19302B07A4}"/>
+                <a16:creationId xmlns:a16="http://schemas.microsoft.com/office/drawing/2014/main" id="{ADBC29F6-6DAE-4CF9-8AEF-A65797364C68}"/>
               </a:ext>
             </a:extLst>
           </p:cNvPr>
@@ -8677,7 +8677,7 @@
           <p:cNvPr id="2" name="">
             <a:extLst xmlns:a="http://schemas.openxmlformats.org/drawingml/2006/main">
               <a:ext uri="{FF2B5EF4-FFF2-40B4-BE49-F238E27FC236}">
-                <a16:creationId xmlns:a16="http://schemas.microsoft.com/office/drawing/2014/main" id="{CA0F4658-6741-4B98-B4B0-8AFAA7C1058D}"/>
+                <a16:creationId xmlns:a16="http://schemas.microsoft.com/office/drawing/2014/main" id="{5001E4A8-1BC3-4991-8088-1785B32FAED7}"/>
               </a:ext>
             </a:extLst>
           </p:cNvPr>
@@ -8745,7 +8745,7 @@
           <p:cNvPr id="3" name="">
             <a:extLst xmlns:a="http://schemas.openxmlformats.org/drawingml/2006/main">
               <a:ext uri="{FF2B5EF4-FFF2-40B4-BE49-F238E27FC236}">
-                <a16:creationId xmlns:a16="http://schemas.microsoft.com/office/drawing/2014/main" id="{012343D7-7670-468B-A4AB-C3FB25F18E4D}"/>
+                <a16:creationId xmlns:a16="http://schemas.microsoft.com/office/drawing/2014/main" id="{1AE72C8F-C62D-4BBD-8A14-6579E6F16B66}"/>
               </a:ext>
             </a:extLst>
           </p:cNvPr>
@@ -8755,7 +8755,7 @@
           <p:nvPr/>
         </p:nvPicPr>
         <p:blipFill>
-          <a:blip xmlns:r="http://schemas.openxmlformats.org/officeDocument/2006/relationships" xmlns:a="http://schemas.openxmlformats.org/drawingml/2006/main" r:embed="Rcd7626631d0342b1"/>
+          <a:blip xmlns:r="http://schemas.openxmlformats.org/officeDocument/2006/relationships" xmlns:a="http://schemas.openxmlformats.org/drawingml/2006/main" r:embed="R06f13d1dff514f79"/>
           <a:srcRect xmlns:a="http://schemas.openxmlformats.org/drawingml/2006/main" l="0" t="8974" r="0" b="33333"/>
           <a:stretch xmlns:a="http://schemas.openxmlformats.org/drawingml/2006/main"/>
         </p:blipFill>
@@ -8774,7 +8774,7 @@
           <p:cNvPr id="4" name="">
             <a:extLst xmlns:a="http://schemas.openxmlformats.org/drawingml/2006/main">
               <a:ext uri="{FF2B5EF4-FFF2-40B4-BE49-F238E27FC236}">
-                <a16:creationId xmlns:a16="http://schemas.microsoft.com/office/drawing/2014/main" id="{58D9335E-DEBC-43DF-B88E-D28A995F412D}"/>
+                <a16:creationId xmlns:a16="http://schemas.microsoft.com/office/drawing/2014/main" id="{DA825AA8-6511-4430-B817-A3E443D17E21}"/>
               </a:ext>
             </a:extLst>
           </p:cNvPr>
@@ -8842,7 +8842,7 @@
           <p:cNvPr id="5" name="">
             <a:extLst xmlns:a="http://schemas.openxmlformats.org/drawingml/2006/main">
               <a:ext uri="{FF2B5EF4-FFF2-40B4-BE49-F238E27FC236}">
-                <a16:creationId xmlns:a16="http://schemas.microsoft.com/office/drawing/2014/main" id="{06D2041B-4ABB-45B2-A164-4859502D7502}"/>
+                <a16:creationId xmlns:a16="http://schemas.microsoft.com/office/drawing/2014/main" id="{4B8C664C-E461-4731-92E0-62370CF23F0F}"/>
               </a:ext>
             </a:extLst>
           </p:cNvPr>
@@ -8910,7 +8910,7 @@
           <p:cNvPr id="6" name="">
             <a:extLst xmlns:a="http://schemas.openxmlformats.org/drawingml/2006/main">
               <a:ext uri="{FF2B5EF4-FFF2-40B4-BE49-F238E27FC236}">
-                <a16:creationId xmlns:a16="http://schemas.microsoft.com/office/drawing/2014/main" id="{F97E94B4-EDA8-4BDF-A4A2-AF5D9315AD99}"/>
+                <a16:creationId xmlns:a16="http://schemas.microsoft.com/office/drawing/2014/main" id="{F05EAB3B-2642-4440-B776-C5F5CC71F62E}"/>
               </a:ext>
             </a:extLst>
           </p:cNvPr>
@@ -8978,7 +8978,7 @@
           <p:cNvPr id="7" name="">
             <a:extLst xmlns:a="http://schemas.openxmlformats.org/drawingml/2006/main">
               <a:ext uri="{FF2B5EF4-FFF2-40B4-BE49-F238E27FC236}">
-                <a16:creationId xmlns:a16="http://schemas.microsoft.com/office/drawing/2014/main" id="{B17A1579-D4C1-493D-A9AA-2EAD1A39BD32}"/>
+                <a16:creationId xmlns:a16="http://schemas.microsoft.com/office/drawing/2014/main" id="{9EF9DA61-5C26-4503-AFB9-543E9F729167}"/>
               </a:ext>
             </a:extLst>
           </p:cNvPr>
@@ -9046,7 +9046,7 @@
           <p:cNvPr id="8" name="">
             <a:extLst xmlns:a="http://schemas.openxmlformats.org/drawingml/2006/main">
               <a:ext uri="{FF2B5EF4-FFF2-40B4-BE49-F238E27FC236}">
-                <a16:creationId xmlns:a16="http://schemas.microsoft.com/office/drawing/2014/main" id="{CE622457-F0F0-4574-B89D-7C86C78ACB9A}"/>
+                <a16:creationId xmlns:a16="http://schemas.microsoft.com/office/drawing/2014/main" id="{FE969F74-096C-4971-94F7-1D6B7F0FE25D}"/>
               </a:ext>
             </a:extLst>
           </p:cNvPr>
@@ -9112,7 +9112,7 @@
     </p:spTree>
     <p:extLst>
       <p:ext uri="{BB962C8B-B14F-4D97-AF65-F5344CB8AC3E}">
-        <p14:creationId xmlns:p14="http://schemas.microsoft.com/office/powerpoint/2010/main" val="1010929930"/>
+        <p14:creationId xmlns:p14="http://schemas.microsoft.com/office/powerpoint/2010/main" val="252688260"/>
       </p:ext>
     </p:extLst>
   </p:cSld>
@@ -9143,7 +9143,7 @@
           <p:cNvPr id="8" name="">
             <a:extLst xmlns:a="http://schemas.openxmlformats.org/drawingml/2006/main">
               <a:ext uri="{FF2B5EF4-FFF2-40B4-BE49-F238E27FC236}">
-                <a16:creationId xmlns:a16="http://schemas.microsoft.com/office/drawing/2014/main" id="{D045D77E-F59F-4437-A984-6F5FF38B660E}"/>
+                <a16:creationId xmlns:a16="http://schemas.microsoft.com/office/drawing/2014/main" id="{A31EF2DB-179A-4FB8-BF45-30B4468E39EA}"/>
               </a:ext>
             </a:extLst>
           </p:cNvPr>
@@ -9211,7 +9211,7 @@
           <p:cNvPr id="2" name="">
             <a:extLst xmlns:a="http://schemas.openxmlformats.org/drawingml/2006/main">
               <a:ext uri="{FF2B5EF4-FFF2-40B4-BE49-F238E27FC236}">
-                <a16:creationId xmlns:a16="http://schemas.microsoft.com/office/drawing/2014/main" id="{A45A709A-DA2E-4403-93F2-1072E87DD216}"/>
+                <a16:creationId xmlns:a16="http://schemas.microsoft.com/office/drawing/2014/main" id="{8BFFB91F-0614-412F-967F-D7C27EDB57EE}"/>
               </a:ext>
             </a:extLst>
           </p:cNvPr>
@@ -9279,7 +9279,7 @@
           <p:cNvPr id="3" name="">
             <a:extLst xmlns:a="http://schemas.openxmlformats.org/drawingml/2006/main">
               <a:ext uri="{FF2B5EF4-FFF2-40B4-BE49-F238E27FC236}">
-                <a16:creationId xmlns:a16="http://schemas.microsoft.com/office/drawing/2014/main" id="{C3EF841E-E312-4512-8B20-E674549C7918}"/>
+                <a16:creationId xmlns:a16="http://schemas.microsoft.com/office/drawing/2014/main" id="{86CF5164-009F-4392-8B3D-DECCBBCDD787}"/>
               </a:ext>
             </a:extLst>
           </p:cNvPr>
@@ -9347,7 +9347,7 @@
           <p:cNvPr id="4" name="">
             <a:extLst xmlns:a="http://schemas.openxmlformats.org/drawingml/2006/main">
               <a:ext uri="{FF2B5EF4-FFF2-40B4-BE49-F238E27FC236}">
-                <a16:creationId xmlns:a16="http://schemas.microsoft.com/office/drawing/2014/main" id="{FC8CD0AC-CA4B-4A25-A863-CFBE6141274E}"/>
+                <a16:creationId xmlns:a16="http://schemas.microsoft.com/office/drawing/2014/main" id="{099C4F64-843E-4DE2-A77D-69BDA46D82E5}"/>
               </a:ext>
             </a:extLst>
           </p:cNvPr>
@@ -9696,7 +9696,7 @@
           <p:cNvPr id="5" name="">
             <a:extLst xmlns:a="http://schemas.openxmlformats.org/drawingml/2006/main">
               <a:ext uri="{FF2B5EF4-FFF2-40B4-BE49-F238E27FC236}">
-                <a16:creationId xmlns:a16="http://schemas.microsoft.com/office/drawing/2014/main" id="{421C0DC1-FC45-46B2-9CC6-002D57A24453}"/>
+                <a16:creationId xmlns:a16="http://schemas.microsoft.com/office/drawing/2014/main" id="{AE311E57-A9D5-408D-8B35-9A868920DE4F}"/>
               </a:ext>
             </a:extLst>
           </p:cNvPr>
@@ -9764,7 +9764,7 @@
           <p:cNvPr id="6" name="">
             <a:extLst xmlns:a="http://schemas.openxmlformats.org/drawingml/2006/main">
               <a:ext uri="{FF2B5EF4-FFF2-40B4-BE49-F238E27FC236}">
-                <a16:creationId xmlns:a16="http://schemas.microsoft.com/office/drawing/2014/main" id="{57103520-77DE-444C-9E7A-0C15DC85337B}"/>
+                <a16:creationId xmlns:a16="http://schemas.microsoft.com/office/drawing/2014/main" id="{E1408FA4-F2F2-47FD-860B-548B124721C5}"/>
               </a:ext>
             </a:extLst>
           </p:cNvPr>
@@ -10113,7 +10113,7 @@
           <p:cNvPr id="7" name="">
             <a:extLst xmlns:a="http://schemas.openxmlformats.org/drawingml/2006/main">
               <a:ext uri="{FF2B5EF4-FFF2-40B4-BE49-F238E27FC236}">
-                <a16:creationId xmlns:a16="http://schemas.microsoft.com/office/drawing/2014/main" id="{5BEFB72E-6138-4960-9BB3-B47CADEFC067}"/>
+                <a16:creationId xmlns:a16="http://schemas.microsoft.com/office/drawing/2014/main" id="{9FD073C2-EDD9-4680-98D2-950597240A8A}"/>
               </a:ext>
             </a:extLst>
           </p:cNvPr>
@@ -10179,7 +10179,7 @@
     </p:spTree>
     <p:extLst>
       <p:ext uri="{BB962C8B-B14F-4D97-AF65-F5344CB8AC3E}">
-        <p14:creationId xmlns:p14="http://schemas.microsoft.com/office/powerpoint/2010/main" val="701503755"/>
+        <p14:creationId xmlns:p14="http://schemas.microsoft.com/office/powerpoint/2010/main" val="1569226765"/>
       </p:ext>
     </p:extLst>
   </p:cSld>
@@ -10210,7 +10210,7 @@
           <p:cNvPr id="9" name="">
             <a:extLst xmlns:a="http://schemas.openxmlformats.org/drawingml/2006/main">
               <a:ext uri="{FF2B5EF4-FFF2-40B4-BE49-F238E27FC236}">
-                <a16:creationId xmlns:a16="http://schemas.microsoft.com/office/drawing/2014/main" id="{FA47CCB9-E97A-4603-B8A5-546BE065D233}"/>
+                <a16:creationId xmlns:a16="http://schemas.microsoft.com/office/drawing/2014/main" id="{5F4C22E2-CFC5-4C08-A60E-3FC375186EF4}"/>
               </a:ext>
             </a:extLst>
           </p:cNvPr>
@@ -10278,7 +10278,7 @@
           <p:cNvPr id="2" name="">
             <a:extLst xmlns:a="http://schemas.openxmlformats.org/drawingml/2006/main">
               <a:ext uri="{FF2B5EF4-FFF2-40B4-BE49-F238E27FC236}">
-                <a16:creationId xmlns:a16="http://schemas.microsoft.com/office/drawing/2014/main" id="{2564FD89-DA37-451B-A74C-5F3DB1144696}"/>
+                <a16:creationId xmlns:a16="http://schemas.microsoft.com/office/drawing/2014/main" id="{28CFA4DB-C75F-4157-A0F6-84FBD362F5B7}"/>
               </a:ext>
             </a:extLst>
           </p:cNvPr>
@@ -10346,7 +10346,7 @@
           <p:cNvPr id="3" name="">
             <a:extLst xmlns:a="http://schemas.openxmlformats.org/drawingml/2006/main">
               <a:ext uri="{FF2B5EF4-FFF2-40B4-BE49-F238E27FC236}">
-                <a16:creationId xmlns:a16="http://schemas.microsoft.com/office/drawing/2014/main" id="{6E99F284-9B81-4187-8FC9-E2B8FB2D0430}"/>
+                <a16:creationId xmlns:a16="http://schemas.microsoft.com/office/drawing/2014/main" id="{D81102AE-847E-4C6B-A02E-1ED454DEA753}"/>
               </a:ext>
             </a:extLst>
           </p:cNvPr>
@@ -10356,7 +10356,7 @@
           <p:nvPr/>
         </p:nvPicPr>
         <p:blipFill>
-          <a:blip xmlns:r="http://schemas.openxmlformats.org/officeDocument/2006/relationships" xmlns:a="http://schemas.openxmlformats.org/drawingml/2006/main" r:embed="Rc9c5ba3a6d0a4408"/>
+          <a:blip xmlns:r="http://schemas.openxmlformats.org/officeDocument/2006/relationships" xmlns:a="http://schemas.openxmlformats.org/drawingml/2006/main" r:embed="R72e8dd37bfaa45d2"/>
           <a:stretch xmlns:a="http://schemas.openxmlformats.org/drawingml/2006/main"/>
         </p:blipFill>
         <p:spPr>
@@ -10374,7 +10374,7 @@
           <p:cNvPr id="4" name="">
             <a:extLst xmlns:a="http://schemas.openxmlformats.org/drawingml/2006/main">
               <a:ext uri="{FF2B5EF4-FFF2-40B4-BE49-F238E27FC236}">
-                <a16:creationId xmlns:a16="http://schemas.microsoft.com/office/drawing/2014/main" id="{08351795-9C56-4477-AA94-B3DEDC8FBD73}"/>
+                <a16:creationId xmlns:a16="http://schemas.microsoft.com/office/drawing/2014/main" id="{3C0D9E11-50E2-4F2D-A4D2-3FFCAF48F453}"/>
               </a:ext>
             </a:extLst>
           </p:cNvPr>
@@ -10442,7 +10442,7 @@
           <p:cNvPr id="5" name="">
             <a:extLst xmlns:a="http://schemas.openxmlformats.org/drawingml/2006/main">
               <a:ext uri="{FF2B5EF4-FFF2-40B4-BE49-F238E27FC236}">
-                <a16:creationId xmlns:a16="http://schemas.microsoft.com/office/drawing/2014/main" id="{377955D8-8153-4800-9446-79821C4E385C}"/>
+                <a16:creationId xmlns:a16="http://schemas.microsoft.com/office/drawing/2014/main" id="{E663510E-9496-4850-B6F6-F8886BD5F99E}"/>
               </a:ext>
             </a:extLst>
           </p:cNvPr>
@@ -10510,7 +10510,7 @@
           <p:cNvPr id="6" name="">
             <a:extLst xmlns:a="http://schemas.openxmlformats.org/drawingml/2006/main">
               <a:ext uri="{FF2B5EF4-FFF2-40B4-BE49-F238E27FC236}">
-                <a16:creationId xmlns:a16="http://schemas.microsoft.com/office/drawing/2014/main" id="{0F970FBB-30F8-46B1-8733-D09B0AC3CAEF}"/>
+                <a16:creationId xmlns:a16="http://schemas.microsoft.com/office/drawing/2014/main" id="{9841E020-9404-4562-ACA4-9FEEA9C3DDC1}"/>
               </a:ext>
             </a:extLst>
           </p:cNvPr>
@@ -10578,7 +10578,7 @@
           <p:cNvPr id="7" name="">
             <a:extLst xmlns:a="http://schemas.openxmlformats.org/drawingml/2006/main">
               <a:ext uri="{FF2B5EF4-FFF2-40B4-BE49-F238E27FC236}">
-                <a16:creationId xmlns:a16="http://schemas.microsoft.com/office/drawing/2014/main" id="{E3FF81F3-ADBA-41A0-9D81-BB797306AA65}"/>
+                <a16:creationId xmlns:a16="http://schemas.microsoft.com/office/drawing/2014/main" id="{4EDA09EA-D4B0-4331-9CA8-4277A7717510}"/>
               </a:ext>
             </a:extLst>
           </p:cNvPr>
@@ -10646,7 +10646,7 @@
           <p:cNvPr id="8" name="">
             <a:extLst xmlns:a="http://schemas.openxmlformats.org/drawingml/2006/main">
               <a:ext uri="{FF2B5EF4-FFF2-40B4-BE49-F238E27FC236}">
-                <a16:creationId xmlns:a16="http://schemas.microsoft.com/office/drawing/2014/main" id="{B85106D5-4320-499C-BF59-DAA5366195EC}"/>
+                <a16:creationId xmlns:a16="http://schemas.microsoft.com/office/drawing/2014/main" id="{BFA7507B-B629-4ABA-949E-874A4D998825}"/>
               </a:ext>
             </a:extLst>
           </p:cNvPr>
@@ -10712,7 +10712,7 @@
     </p:spTree>
     <p:extLst>
       <p:ext uri="{BB962C8B-B14F-4D97-AF65-F5344CB8AC3E}">
-        <p14:creationId xmlns:p14="http://schemas.microsoft.com/office/powerpoint/2010/main" val="946972507"/>
+        <p14:creationId xmlns:p14="http://schemas.microsoft.com/office/powerpoint/2010/main" val="134240948"/>
       </p:ext>
     </p:extLst>
   </p:cSld>
@@ -10743,7 +10743,7 @@
           <p:cNvPr id="6" name="">
             <a:extLst xmlns:a="http://schemas.openxmlformats.org/drawingml/2006/main">
               <a:ext uri="{FF2B5EF4-FFF2-40B4-BE49-F238E27FC236}">
-                <a16:creationId xmlns:a16="http://schemas.microsoft.com/office/drawing/2014/main" id="{E504A29B-2B1A-46B9-A931-178AD2C12048}"/>
+                <a16:creationId xmlns:a16="http://schemas.microsoft.com/office/drawing/2014/main" id="{91F393C5-CF2A-43AC-879A-C346606FD68E}"/>
               </a:ext>
             </a:extLst>
           </p:cNvPr>
@@ -10811,7 +10811,7 @@
           <p:cNvPr id="2" name="">
             <a:extLst xmlns:a="http://schemas.openxmlformats.org/drawingml/2006/main">
               <a:ext uri="{FF2B5EF4-FFF2-40B4-BE49-F238E27FC236}">
-                <a16:creationId xmlns:a16="http://schemas.microsoft.com/office/drawing/2014/main" id="{CBCD08D7-9821-4B55-BF35-85B53C988721}"/>
+                <a16:creationId xmlns:a16="http://schemas.microsoft.com/office/drawing/2014/main" id="{B3F21F8E-7D85-456E-B154-E922E0DC5AE0}"/>
               </a:ext>
             </a:extLst>
           </p:cNvPr>
@@ -10879,7 +10879,7 @@
           <p:cNvPr id="3" name="">
             <a:extLst xmlns:a="http://schemas.openxmlformats.org/drawingml/2006/main">
               <a:ext uri="{FF2B5EF4-FFF2-40B4-BE49-F238E27FC236}">
-                <a16:creationId xmlns:a16="http://schemas.microsoft.com/office/drawing/2014/main" id="{9A5C06E4-78F5-472C-9625-E3EBE1EA5415}"/>
+                <a16:creationId xmlns:a16="http://schemas.microsoft.com/office/drawing/2014/main" id="{BA7FC6C9-7247-4E3A-9E39-8B79A52E654C}"/>
               </a:ext>
             </a:extLst>
           </p:cNvPr>
@@ -10889,7 +10889,7 @@
           <p:nvPr/>
         </p:nvPicPr>
         <p:blipFill>
-          <a:blip xmlns:r="http://schemas.openxmlformats.org/officeDocument/2006/relationships" xmlns:a="http://schemas.openxmlformats.org/drawingml/2006/main" r:embed="Reff07694a7d64a09"/>
+          <a:blip xmlns:r="http://schemas.openxmlformats.org/officeDocument/2006/relationships" xmlns:a="http://schemas.openxmlformats.org/drawingml/2006/main" r:embed="Rce131b0a78ec4c5a"/>
           <a:stretch xmlns:a="http://schemas.openxmlformats.org/drawingml/2006/main"/>
         </p:blipFill>
         <p:spPr>
@@ -10907,7 +10907,7 @@
           <p:cNvPr id="4" name="">
             <a:extLst xmlns:a="http://schemas.openxmlformats.org/drawingml/2006/main">
               <a:ext uri="{FF2B5EF4-FFF2-40B4-BE49-F238E27FC236}">
-                <a16:creationId xmlns:a16="http://schemas.microsoft.com/office/drawing/2014/main" id="{7C2C00D1-CF25-459E-A44A-10512AE9F0F8}"/>
+                <a16:creationId xmlns:a16="http://schemas.microsoft.com/office/drawing/2014/main" id="{7C038111-B572-4E3B-BD84-9D8E1D0D1EF5}"/>
               </a:ext>
             </a:extLst>
           </p:cNvPr>
@@ -10975,7 +10975,7 @@
           <p:cNvPr id="5" name="">
             <a:extLst xmlns:a="http://schemas.openxmlformats.org/drawingml/2006/main">
               <a:ext uri="{FF2B5EF4-FFF2-40B4-BE49-F238E27FC236}">
-                <a16:creationId xmlns:a16="http://schemas.microsoft.com/office/drawing/2014/main" id="{2E6D4134-E17D-44FB-8B1D-01FF42EFF8B7}"/>
+                <a16:creationId xmlns:a16="http://schemas.microsoft.com/office/drawing/2014/main" id="{59723578-CE4A-49DC-AD8D-A469E6DC5652}"/>
               </a:ext>
             </a:extLst>
           </p:cNvPr>
@@ -11041,7 +11041,7 @@
     </p:spTree>
     <p:extLst>
       <p:ext uri="{BB962C8B-B14F-4D97-AF65-F5344CB8AC3E}">
-        <p14:creationId xmlns:p14="http://schemas.microsoft.com/office/powerpoint/2010/main" val="1844870903"/>
+        <p14:creationId xmlns:p14="http://schemas.microsoft.com/office/powerpoint/2010/main" val="230914736"/>
       </p:ext>
     </p:extLst>
   </p:cSld>
@@ -11072,7 +11072,7 @@
           <p:cNvPr id="5" name="">
             <a:extLst xmlns:a="http://schemas.openxmlformats.org/drawingml/2006/main">
               <a:ext uri="{FF2B5EF4-FFF2-40B4-BE49-F238E27FC236}">
-                <a16:creationId xmlns:a16="http://schemas.microsoft.com/office/drawing/2014/main" id="{F433CE2F-69C3-451D-94DC-F1647234B9E5}"/>
+                <a16:creationId xmlns:a16="http://schemas.microsoft.com/office/drawing/2014/main" id="{B92E377D-B5F5-4F34-86D5-7A2297E8CBEC}"/>
               </a:ext>
             </a:extLst>
           </p:cNvPr>
@@ -11140,7 +11140,7 @@
           <p:cNvPr id="2" name="">
             <a:extLst xmlns:a="http://schemas.openxmlformats.org/drawingml/2006/main">
               <a:ext uri="{FF2B5EF4-FFF2-40B4-BE49-F238E27FC236}">
-                <a16:creationId xmlns:a16="http://schemas.microsoft.com/office/drawing/2014/main" id="{284F7940-487C-487B-A593-8E9666687035}"/>
+                <a16:creationId xmlns:a16="http://schemas.microsoft.com/office/drawing/2014/main" id="{322DD70B-7863-4322-B4A7-22DDC8F00C63}"/>
               </a:ext>
             </a:extLst>
           </p:cNvPr>
@@ -11208,7 +11208,7 @@
           <p:cNvPr id="3" name="">
             <a:extLst xmlns:a="http://schemas.openxmlformats.org/drawingml/2006/main">
               <a:ext uri="{FF2B5EF4-FFF2-40B4-BE49-F238E27FC236}">
-                <a16:creationId xmlns:a16="http://schemas.microsoft.com/office/drawing/2014/main" id="{4B1098D2-71E0-4C49-8EDB-9E4F497AAC17}"/>
+                <a16:creationId xmlns:a16="http://schemas.microsoft.com/office/drawing/2014/main" id="{05FD2639-337E-44B1-A2C6-9C2F5B1AA6B8}"/>
               </a:ext>
             </a:extLst>
           </p:cNvPr>
@@ -11378,7 +11378,7 @@
                           <a:ea typeface="Arial"/>
                           <a:cs typeface="Arial"/>
                         </a:rPr>
-                        <a:t>The detailed orientation, frame, WKT string normalization and publication conventions remain proposed.</a:t>
+                        <a:t>Input and declaration rules have agreement. Detailed conventions and identities await review.</a:t>
                       </a:r>
                     </a:p>
                   </a:txBody>
@@ -11506,7 +11506,7 @@
           <p:cNvPr id="4" name="">
             <a:extLst xmlns:a="http://schemas.openxmlformats.org/drawingml/2006/main">
               <a:ext uri="{FF2B5EF4-FFF2-40B4-BE49-F238E27FC236}">
-                <a16:creationId xmlns:a16="http://schemas.microsoft.com/office/drawing/2014/main" id="{B98CC8FB-A0F7-4D71-9295-E5A0EEB3B969}"/>
+                <a16:creationId xmlns:a16="http://schemas.microsoft.com/office/drawing/2014/main" id="{6F04C8E4-72A0-4F69-8E12-0C8C341E9B40}"/>
               </a:ext>
             </a:extLst>
           </p:cNvPr>
@@ -11572,7 +11572,7 @@
     </p:spTree>
     <p:extLst>
       <p:ext uri="{BB962C8B-B14F-4D97-AF65-F5344CB8AC3E}">
-        <p14:creationId xmlns:p14="http://schemas.microsoft.com/office/powerpoint/2010/main" val="230428592"/>
+        <p14:creationId xmlns:p14="http://schemas.microsoft.com/office/powerpoint/2010/main" val="1631378121"/>
       </p:ext>
     </p:extLst>
   </p:cSld>
@@ -11603,7 +11603,7 @@
           <p:cNvPr id="9" name="">
             <a:extLst xmlns:a="http://schemas.openxmlformats.org/drawingml/2006/main">
               <a:ext uri="{FF2B5EF4-FFF2-40B4-BE49-F238E27FC236}">
-                <a16:creationId xmlns:a16="http://schemas.microsoft.com/office/drawing/2014/main" id="{EF417B38-50E6-415E-A50B-7FF9F8D6CAB4}"/>
+                <a16:creationId xmlns:a16="http://schemas.microsoft.com/office/drawing/2014/main" id="{73AA4BDE-39A7-4A7E-9F17-3BBDA3B31213}"/>
               </a:ext>
             </a:extLst>
           </p:cNvPr>
@@ -11671,7 +11671,7 @@
           <p:cNvPr id="2" name="">
             <a:extLst xmlns:a="http://schemas.openxmlformats.org/drawingml/2006/main">
               <a:ext uri="{FF2B5EF4-FFF2-40B4-BE49-F238E27FC236}">
-                <a16:creationId xmlns:a16="http://schemas.microsoft.com/office/drawing/2014/main" id="{F934C1B0-AB0B-4F5A-A520-BEF4063C4CCC}"/>
+                <a16:creationId xmlns:a16="http://schemas.microsoft.com/office/drawing/2014/main" id="{C65FD8E7-BC03-4305-9349-33F81188C92B}"/>
               </a:ext>
             </a:extLst>
           </p:cNvPr>
@@ -11739,7 +11739,7 @@
           <p:cNvPr id="3" name="">
             <a:extLst xmlns:a="http://schemas.openxmlformats.org/drawingml/2006/main">
               <a:ext uri="{FF2B5EF4-FFF2-40B4-BE49-F238E27FC236}">
-                <a16:creationId xmlns:a16="http://schemas.microsoft.com/office/drawing/2014/main" id="{4ACC1F64-21F6-4032-81EA-86D50EDF36D7}"/>
+                <a16:creationId xmlns:a16="http://schemas.microsoft.com/office/drawing/2014/main" id="{144E53A4-771F-4D41-B9EC-EA9491CD877C}"/>
               </a:ext>
             </a:extLst>
           </p:cNvPr>
@@ -11749,7 +11749,7 @@
           <p:nvPr/>
         </p:nvPicPr>
         <p:blipFill>
-          <a:blip xmlns:r="http://schemas.openxmlformats.org/officeDocument/2006/relationships" xmlns:a="http://schemas.openxmlformats.org/drawingml/2006/main" r:embed="Ra59159356e6a4547"/>
+          <a:blip xmlns:r="http://schemas.openxmlformats.org/officeDocument/2006/relationships" xmlns:a="http://schemas.openxmlformats.org/drawingml/2006/main" r:embed="R696969b9b1d7439a"/>
           <a:stretch xmlns:a="http://schemas.openxmlformats.org/drawingml/2006/main"/>
         </p:blipFill>
         <p:spPr>
@@ -11767,7 +11767,7 @@
           <p:cNvPr id="4" name="">
             <a:extLst xmlns:a="http://schemas.openxmlformats.org/drawingml/2006/main">
               <a:ext uri="{FF2B5EF4-FFF2-40B4-BE49-F238E27FC236}">
-                <a16:creationId xmlns:a16="http://schemas.microsoft.com/office/drawing/2014/main" id="{BB12225E-EC75-4ED2-A327-2AD85B0953EF}"/>
+                <a16:creationId xmlns:a16="http://schemas.microsoft.com/office/drawing/2014/main" id="{E1C5D8F5-BA8E-4524-9FCC-5AF1E63A9CD0}"/>
               </a:ext>
             </a:extLst>
           </p:cNvPr>
@@ -11835,7 +11835,7 @@
           <p:cNvPr id="5" name="">
             <a:extLst xmlns:a="http://schemas.openxmlformats.org/drawingml/2006/main">
               <a:ext uri="{FF2B5EF4-FFF2-40B4-BE49-F238E27FC236}">
-                <a16:creationId xmlns:a16="http://schemas.microsoft.com/office/drawing/2014/main" id="{C36AFE17-5D28-451D-B3DB-75F7442CBFC9}"/>
+                <a16:creationId xmlns:a16="http://schemas.microsoft.com/office/drawing/2014/main" id="{EE86E619-5F16-4378-A1D8-48A5196A7DD4}"/>
               </a:ext>
             </a:extLst>
           </p:cNvPr>
@@ -11903,7 +11903,7 @@
           <p:cNvPr id="6" name="">
             <a:extLst xmlns:a="http://schemas.openxmlformats.org/drawingml/2006/main">
               <a:ext uri="{FF2B5EF4-FFF2-40B4-BE49-F238E27FC236}">
-                <a16:creationId xmlns:a16="http://schemas.microsoft.com/office/drawing/2014/main" id="{71A67865-0E7C-43DC-94E0-D47FE3723D5D}"/>
+                <a16:creationId xmlns:a16="http://schemas.microsoft.com/office/drawing/2014/main" id="{74F651E1-1730-46EE-BF9E-74444D83C843}"/>
               </a:ext>
             </a:extLst>
           </p:cNvPr>
@@ -11971,7 +11971,7 @@
           <p:cNvPr id="7" name="">
             <a:extLst xmlns:a="http://schemas.openxmlformats.org/drawingml/2006/main">
               <a:ext uri="{FF2B5EF4-FFF2-40B4-BE49-F238E27FC236}">
-                <a16:creationId xmlns:a16="http://schemas.microsoft.com/office/drawing/2014/main" id="{F6729EE2-C0E6-4B17-82FA-4E37A2805C6A}"/>
+                <a16:creationId xmlns:a16="http://schemas.microsoft.com/office/drawing/2014/main" id="{7FBDB236-C074-473E-A844-A4956030C283}"/>
               </a:ext>
             </a:extLst>
           </p:cNvPr>
@@ -12039,7 +12039,7 @@
           <p:cNvPr id="8" name="">
             <a:extLst xmlns:a="http://schemas.openxmlformats.org/drawingml/2006/main">
               <a:ext uri="{FF2B5EF4-FFF2-40B4-BE49-F238E27FC236}">
-                <a16:creationId xmlns:a16="http://schemas.microsoft.com/office/drawing/2014/main" id="{BFA6F17F-FB6A-4E29-9C0C-2CE9C7ED1508}"/>
+                <a16:creationId xmlns:a16="http://schemas.microsoft.com/office/drawing/2014/main" id="{71EB2CB4-DC18-4C4E-91CF-0DD6DF41E14A}"/>
               </a:ext>
             </a:extLst>
           </p:cNvPr>
@@ -12105,7 +12105,7 @@
     </p:spTree>
     <p:extLst>
       <p:ext uri="{BB962C8B-B14F-4D97-AF65-F5344CB8AC3E}">
-        <p14:creationId xmlns:p14="http://schemas.microsoft.com/office/powerpoint/2010/main" val="537882496"/>
+        <p14:creationId xmlns:p14="http://schemas.microsoft.com/office/powerpoint/2010/main" val="1661851679"/>
       </p:ext>
     </p:extLst>
   </p:cSld>

--- a/extras/usd/examples/usdGeospatialBuild/delivery/geospatial-build.pptx
+++ b/extras/usd/examples/usdGeospatialBuild/delivery/geospatial-build.pptx
@@ -2,26 +2,29 @@
 <file path=ppt/presentation.xml><?xml version="1.0" encoding="utf-8"?>
 <p:presentation xmlns:p="http://schemas.openxmlformats.org/presentationml/2006/main">
   <p:sldMasterIdLst>
-    <p:sldMasterId xmlns:r="http://schemas.openxmlformats.org/officeDocument/2006/relationships" id="2147483648" r:id="R9f305b25e35240ce"/>
+    <p:sldMasterId xmlns:r="http://schemas.openxmlformats.org/officeDocument/2006/relationships" id="2147483648" r:id="R51495d12d7884150"/>
   </p:sldMasterIdLst>
   <p:notesMasterIdLst>
-    <p:notesMasterId xmlns:r="http://schemas.openxmlformats.org/officeDocument/2006/relationships" r:id="R655df4b8610a47a3"/>
+    <p:notesMasterId xmlns:r="http://schemas.openxmlformats.org/officeDocument/2006/relationships" r:id="R561b191d8cb74992"/>
   </p:notesMasterIdLst>
   <p:sldIdLst>
-    <p:sldId xmlns:r="http://schemas.openxmlformats.org/officeDocument/2006/relationships" id="256" r:id="R2065c74de6154965"/>
-    <p:sldId xmlns:r="http://schemas.openxmlformats.org/officeDocument/2006/relationships" id="257" r:id="Rb8a20d546e9f4ff1"/>
-    <p:sldId xmlns:r="http://schemas.openxmlformats.org/officeDocument/2006/relationships" id="258" r:id="Rc01c7185d6fc46fd"/>
-    <p:sldId xmlns:r="http://schemas.openxmlformats.org/officeDocument/2006/relationships" id="259" r:id="Rf73741f5fb854842"/>
-    <p:sldId xmlns:r="http://schemas.openxmlformats.org/officeDocument/2006/relationships" id="260" r:id="R17153d3d980c4654"/>
-    <p:sldId xmlns:r="http://schemas.openxmlformats.org/officeDocument/2006/relationships" id="261" r:id="R83ad27dfcc4f4265"/>
-    <p:sldId xmlns:r="http://schemas.openxmlformats.org/officeDocument/2006/relationships" id="262" r:id="R1cc4c2f476724789"/>
-    <p:sldId xmlns:r="http://schemas.openxmlformats.org/officeDocument/2006/relationships" id="263" r:id="R7f6fa74f647f4bba"/>
-    <p:sldId xmlns:r="http://schemas.openxmlformats.org/officeDocument/2006/relationships" id="264" r:id="R2ba5cc79b46c42f2"/>
-    <p:sldId xmlns:r="http://schemas.openxmlformats.org/officeDocument/2006/relationships" id="265" r:id="R3d32a039ea014606"/>
-    <p:sldId xmlns:r="http://schemas.openxmlformats.org/officeDocument/2006/relationships" id="266" r:id="Reae08caa4bf34d12"/>
-    <p:sldId xmlns:r="http://schemas.openxmlformats.org/officeDocument/2006/relationships" id="267" r:id="R675f1e175b044cfa"/>
-    <p:sldId xmlns:r="http://schemas.openxmlformats.org/officeDocument/2006/relationships" id="268" r:id="Rbf004268b6cf4be7"/>
-    <p:sldId xmlns:r="http://schemas.openxmlformats.org/officeDocument/2006/relationships" id="269" r:id="R715d1b89862f4f98"/>
+    <p:sldId xmlns:r="http://schemas.openxmlformats.org/officeDocument/2006/relationships" id="256" r:id="R818e630933ba4c39"/>
+    <p:sldId xmlns:r="http://schemas.openxmlformats.org/officeDocument/2006/relationships" id="257" r:id="R41e544912d3b41d9"/>
+    <p:sldId xmlns:r="http://schemas.openxmlformats.org/officeDocument/2006/relationships" id="258" r:id="Rfe4c7ad194dd4f32"/>
+    <p:sldId xmlns:r="http://schemas.openxmlformats.org/officeDocument/2006/relationships" id="259" r:id="R29325ae87fec4251"/>
+    <p:sldId xmlns:r="http://schemas.openxmlformats.org/officeDocument/2006/relationships" id="260" r:id="R7ed2aeaea17645e3"/>
+    <p:sldId xmlns:r="http://schemas.openxmlformats.org/officeDocument/2006/relationships" id="261" r:id="Rc09f8a9241b84a36"/>
+    <p:sldId xmlns:r="http://schemas.openxmlformats.org/officeDocument/2006/relationships" id="262" r:id="R9e5618f87d5245a9"/>
+    <p:sldId xmlns:r="http://schemas.openxmlformats.org/officeDocument/2006/relationships" id="263" r:id="R09640d070c97476f"/>
+    <p:sldId xmlns:r="http://schemas.openxmlformats.org/officeDocument/2006/relationships" id="264" r:id="R210d525897fe4ea0"/>
+    <p:sldId xmlns:r="http://schemas.openxmlformats.org/officeDocument/2006/relationships" id="265" r:id="Re56ac4a79adc490b"/>
+    <p:sldId xmlns:r="http://schemas.openxmlformats.org/officeDocument/2006/relationships" id="266" r:id="R0124ed7a7a634f25"/>
+    <p:sldId xmlns:r="http://schemas.openxmlformats.org/officeDocument/2006/relationships" id="267" r:id="Rfd764812830f4451"/>
+    <p:sldId xmlns:r="http://schemas.openxmlformats.org/officeDocument/2006/relationships" id="268" r:id="R2e73acb80b5d43dc"/>
+    <p:sldId xmlns:r="http://schemas.openxmlformats.org/officeDocument/2006/relationships" id="269" r:id="Rbd31d059a5264b67"/>
+    <p:sldId xmlns:r="http://schemas.openxmlformats.org/officeDocument/2006/relationships" id="270" r:id="Rad05041d79724318"/>
+    <p:sldId xmlns:r="http://schemas.openxmlformats.org/officeDocument/2006/relationships" id="271" r:id="Rcb5981d3e3e746dd"/>
+    <p:sldId xmlns:r="http://schemas.openxmlformats.org/officeDocument/2006/relationships" id="272" r:id="R6b152924a3334306"/>
   </p:sldIdLst>
   <p:sldSz cx="12192000" cy="6858000"/>
   <p:notesSz cx="6858000" cy="9144000"/>
@@ -455,7 +458,7 @@
           <a:lstStyle xmlns:a="http://schemas.openxmlformats.org/drawingml/2006/main"/>
           <a:p xmlns:a="http://schemas.openxmlformats.org/drawingml/2006/main">
             <a:r>
-              <a:t>{"assessment":[["Data model and runtime rules","The draft separates authored inputs from computed results and defines placement, adjustment, query and bake behavior."],["Group alignment","Input and declaration rules have agreement. Detailed conventions and identities await review."],["Prototype limitations","Lighting directions lack an error bound. Rotation uncertainty is unquantified. A quoted CRS name causes false rejection."],["Verification coverage","Selected workflows and distinguishing controls support the rules. Broader composition and continuous space/time coverage remain unverified."]],"placement":[["Physical orientation","One heading/pitch/roll tuple describes physical attitude against local east, north and up. Projection effects stay computed."],["Project adjustments","The directly bound model's own xformOps adjust its placed result in a fixed project chart, including ordinary pivots."],["Child objects","Child transforms define model-local geometry. Their offsets follow model axes and the geospatial attitude."],["Repeated models","Each instance offset retains its instancer-local meaning. Independent prototype placement participates once. A required unavailable inverse fails."],["Geographic scene results","Geographic queries retain longitude/latitude/height. Cartesian geometry and bounds use the datum's Earth-centred frame."]],"data":[["Native data associations","Declare the asset, field and coordinate domain. Preserve named dimensions and observation times."],["WKT string normalization","Normalize lexical spelling without losing represented information. Equal tokens establish serialized identity."],["Semantic CRS comparison","Different normalized texts can represent equivalent CRSs. Comparison names its criteria and domain."],["Dependency declaration","Profiles records complete publication coverage, including unloaded and retained variant content. Fixed v1 identities remain proposed."],["Baked coordinate context","Retain a Cartesian CRS and double-precision origin without an active source placement binding. Ordinary USD controls subsequent transforms."]]}</a:t>
+              <a:t>{"assessment":[["Data model and runtime rules","The draft separates authored inputs from computed results and defines placement, adjustment, query and bake behavior."],["Group alignment","Input and declaration rules have agreement. Detailed conventions and identities await review."],["Prototype limitations","Lighting directions lack an error bound. Rotation uncertainty is unquantified."],["Verification coverage","Selected workflows and distinguishing controls support the rules. Broader composition and continuous space/time coverage remain unverified."]],"placement":[["Physical orientation","One heading/pitch/roll tuple describes physical attitude against local east, north and up. Projection effects stay computed."],["Project adjustments","The directly bound model's own xformOps adjust its placed result in a fixed project chart, including ordinary pivots."],["Child objects","Child transforms define model-local geometry. Their offsets follow model axes and the geospatial attitude."],["Repeated models","Each instance offset retains its instancer-local meaning. Independent prototype placement participates once. A required unavailable inverse fails."],["Geographic scene results","Geographic queries retain longitude/latitude/height. Cartesian geometry and bounds use the datum's Earth-centred frame."]],"data":[["Native data associations","Declare the asset, field and coordinate domain. Preserve named dimensions and observation times."],["WKT string normalization","Normalize lexical spelling without losing represented information. Equal tokens establish serialized identity."],["Semantic CRS comparison","Different normalized texts can represent equivalent CRSs. Comparison names its criteria and domain."],["Dependency declaration","Profiles records complete publication coverage, including unloaded and retained variant content. Fixed v1 identities remain proposed."],["Baked coordinate context","Retain a Cartesian CRS and double-precision origin without an active source placement binding. Ordinary USD controls subsequent transforms."]]}</a:t>
             </a:r>
           </a:p>
           <a:p xmlns:a="http://schemas.openxmlformats.org/drawingml/2006/main">
@@ -465,17 +468,17 @@
           </a:p>
           <a:p xmlns:a="http://schemas.openxmlformats.org/drawingml/2006/main">
             <a:r>
-              <a:t>Proposal da2f49aad42811fc5d660c7bcf9ff190599f2d74 SHA-256 2613649fd06516d77339d73b56432e84613dd1925e739761efea738f41b4f0a4</a:t>
-            </a:r>
-          </a:p>
-          <a:p xmlns:a="http://schemas.openxmlformats.org/drawingml/2006/main">
-            <a:r>
-              <a:t>README SHA-256 f97eb66b4642d85817c1bface96cc358cea536a8a8104a439f22a2715af103d5</a:t>
-            </a:r>
-          </a:p>
-          <a:p xmlns:a="http://schemas.openxmlformats.org/drawingml/2006/main">
-            <a:r>
-              <a:t>Immutable receipt SHA-256 ad59ead3c86c780b6d79a243a23032e492c14809f0c01f575397ae221939068f</a:t>
+              <a:t>Proposal e51919927ced49b9c68bcd86160be468121f633d SHA-256 276ae17d60e9b4801947525528c98cfac58b25a7e6ac5999dc01ddb60a2e83b9</a:t>
+            </a:r>
+          </a:p>
+          <a:p xmlns:a="http://schemas.openxmlformats.org/drawingml/2006/main">
+            <a:r>
+              <a:t>README SHA-256 45d0fcc44e276a85c016d374e6b918459c016533b0cb63f0f87bce1ecda57c35</a:t>
+            </a:r>
+          </a:p>
+          <a:p xmlns:a="http://schemas.openxmlformats.org/drawingml/2006/main">
+            <a:r>
+              <a:t>Immutable receipt SHA-256 06cb0fd2cefe30543d04bb461497f3071d5027de6094175fdc52b969428bb975</a:t>
             </a:r>
           </a:p>
           <a:p xmlns:a="http://schemas.openxmlformats.org/drawingml/2006/main">
@@ -555,42 +558,42 @@
           <a:lstStyle xmlns:a="http://schemas.openxmlformats.org/drawingml/2006/main"/>
           <a:p xmlns:a="http://schemas.openxmlformats.org/drawingml/2006/main">
             <a:r>
-              <a:t>Question: Can incomplete source metadata still support a useful, explicitly horizontal workflow?</a:t>
-            </a:r>
-          </a:p>
-          <a:p xmlns:a="http://schemas.openxmlformats.org/drawingml/2006/main">
-            <a:r>
-              <a:t>Proposed rule: The reader resolves a declared horizontal association and preserves uninterpreted third components. It does not invent a height reference.</a:t>
-            </a:r>
-          </a:p>
-          <a:p xmlns:a="http://schemas.openxmlformats.org/drawingml/2006/main">
-            <a:r>
-              <a:t>Expected behavior: The horizontal railway copy resolves into UTM 32 while the original GeoJSON remains unchanged.</a:t>
-            </a:r>
-          </a:p>
-          <a:p xmlns:a="http://schemas.openxmlformats.org/drawingml/2006/main">
-            <a:r>
-              <a:t>Observed result: The horizontal copy resolves 15,822 vertices across 2,386 parts. The plot uses offsets only for display.</a:t>
-            </a:r>
-          </a:p>
-          <a:p xmlns:a="http://schemas.openxmlformats.org/drawingml/2006/main">
-            <a:r>
-              <a:t>What this says about the proposal: The draft supports horizontal resolution without inventing a height reference. The original third components remain uninterpreted.</a:t>
-            </a:r>
-          </a:p>
-          <a:p xmlns:a="http://schemas.openxmlformats.org/drawingml/2006/main">
-            <a:r>
-              <a:t>Limit: Horizontal coordinates only. The original third components remain uninterpreted and supply no physical 3D distance.</a:t>
-            </a:r>
-          </a:p>
-          <a:p xmlns:a="http://schemas.openxmlformats.org/drawingml/2006/main">
-            <a:r>
-              <a:t>Proposal clause: ### External measurement association at proposal/proposal-source.txt:1689</a:t>
-            </a:r>
-          </a:p>
-          <a:p xmlns:a="http://schemas.openxmlformats.org/drawingml/2006/main">
-            <a:r>
-              <a:t>Requirements: 8, 12, 19, 21</a:t>
+              <a:t>Question: Does an independently georeferenced prototype receive an instance offset exactly once?</a:t>
+            </a:r>
+          </a:p>
+          <a:p xmlns:a="http://schemas.openxmlformats.org/drawingml/2006/main">
+            <a:r>
+              <a:t>Proposed rule: Resolve the independent prototype placement once and retain the instance offset in its instancer-local frame.</a:t>
+            </a:r>
+          </a:p>
+          <a:p xmlns:a="http://schemas.openxmlformats.org/drawingml/2006/main">
+            <a:r>
+              <a:t>Expected behavior: A local ten-metre east offset produces the same physical displacement for inherited and independently bound prototypes.</a:t>
+            </a:r>
+          </a:p>
+          <a:p xmlns:a="http://schemas.openxmlformats.org/drawingml/2006/main">
+            <a:r>
+              <a:t>Observed result: Both readers return Earth-centred displacement [0, 10, 0] m for the two prototypes. Rotation and scale controls also distinguish the frame choices.</a:t>
+            </a:r>
+          </a:p>
+          <a:p xmlns:a="http://schemas.openxmlformats.org/drawingml/2006/main">
+            <a:r>
+              <a:t>What this says about the proposal: The selected controls test the occurrence contract rather than merely the prototype origin. An unavailable required inverse fails visibly.</a:t>
+            </a:r>
+          </a:p>
+          <a:p xmlns:a="http://schemas.openxmlformats.org/drawingml/2006/main">
+            <a:r>
+              <a:t>Limit: Synthetic displacement control. It does not establish surveyed placement or every instancer combination.</a:t>
+            </a:r>
+          </a:p>
+          <a:p xmlns:a="http://schemas.openxmlformats.org/drawingml/2006/main">
+            <a:r>
+              <a:t>Proposal clause: #### Queries, scene charts and instances at proposal/proposal-source.txt:2120</a:t>
+            </a:r>
+          </a:p>
+          <a:p xmlns:a="http://schemas.openxmlformats.org/drawingml/2006/main">
+            <a:r>
+              <a:t>Requirements: 8, 9, 11, 17, 19, 20</a:t>
             </a:r>
           </a:p>
           <a:p xmlns:a="http://schemas.openxmlformats.org/drawingml/2006/main">
@@ -600,17 +603,17 @@
           </a:p>
           <a:p xmlns:a="http://schemas.openxmlformats.org/drawingml/2006/main">
             <a:r>
-              <a:t>Proposal da2f49aad42811fc5d660c7bcf9ff190599f2d74 SHA-256 2613649fd06516d77339d73b56432e84613dd1925e739761efea738f41b4f0a4</a:t>
-            </a:r>
-          </a:p>
-          <a:p xmlns:a="http://schemas.openxmlformats.org/drawingml/2006/main">
-            <a:r>
-              <a:t>README SHA-256 f97eb66b4642d85817c1bface96cc358cea536a8a8104a439f22a2715af103d5</a:t>
-            </a:r>
-          </a:p>
-          <a:p xmlns:a="http://schemas.openxmlformats.org/drawingml/2006/main">
-            <a:r>
-              <a:t>Immutable receipt SHA-256 ad59ead3c86c780b6d79a243a23032e492c14809f0c01f575397ae221939068f</a:t>
+              <a:t>Proposal e51919927ced49b9c68bcd86160be468121f633d SHA-256 276ae17d60e9b4801947525528c98cfac58b25a7e6ac5999dc01ddb60a2e83b9</a:t>
+            </a:r>
+          </a:p>
+          <a:p xmlns:a="http://schemas.openxmlformats.org/drawingml/2006/main">
+            <a:r>
+              <a:t>README SHA-256 45d0fcc44e276a85c016d374e6b918459c016533b0cb63f0f87bce1ecda57c35</a:t>
+            </a:r>
+          </a:p>
+          <a:p xmlns:a="http://schemas.openxmlformats.org/drawingml/2006/main">
+            <a:r>
+              <a:t>Immutable receipt SHA-256 06cb0fd2cefe30543d04bb461497f3071d5027de6094175fdc52b969428bb975</a:t>
             </a:r>
           </a:p>
           <a:p xmlns:a="http://schemas.openxmlformats.org/drawingml/2006/main">
@@ -690,62 +693,27 @@
           <a:lstStyle xmlns:a="http://schemas.openxmlformats.org/drawingml/2006/main"/>
           <a:p xmlns:a="http://schemas.openxmlformats.org/drawingml/2006/main">
             <a:r>
-              <a:t>Question: Does the proposal define the result between authored moments?</a:t>
-            </a:r>
-          </a:p>
-          <a:p xmlns:a="http://schemas.openxmlformats.org/drawingml/2006/main">
-            <a:r>
-              <a:t>Proposed rule: Interpolate the authored source position first, then convert coordinates. Physical orientation uses composed heading/pitch/roll samples and shortest-arc pose interpolation.</a:t>
-            </a:r>
-          </a:p>
-          <a:p xmlns:a="http://schemas.openxmlformats.org/drawingml/2006/main">
-            <a:r>
-              <a:t>Expected behavior: The midpoint follows the source-defined path. An ambiguous half-turn requires an intermediate authored pose for interior-time evaluation.</a:t>
-            </a:r>
-          </a:p>
-          <a:p xmlns:a="http://schemas.openxmlformats.org/drawingml/2006/main">
-            <a:r>
-              <a:t>Observed result: Equatorial longitude changes from 0° to 2°. Interpolating converted endpoints misses the source-first midpoint by 971.421 m.</a:t>
-            </a:r>
-          </a:p>
-          <a:p xmlns:a="http://schemas.openxmlformats.org/drawingml/2006/main">
-            <a:r>
-              <a:t>What this says about the proposal: The order is testable. Sample keys alone cannot certify the original trajectory between samples.</a:t>
-            </a:r>
-          </a:p>
-          <a:p xmlns:a="http://schemas.openxmlformats.org/drawingml/2006/main">
-            <a:r>
-              <a:t>Limit: The bake preserves time codes 0, 5 and 10 at 48 time codes per second. Continuous trajectory coverage remains unverified.</a:t>
-            </a:r>
-          </a:p>
-          <a:p xmlns:a="http://schemas.openxmlformats.org/drawingml/2006/main">
-            <a:r>
-              <a:t>Proposal clause: #### Evaluation at proposal/proposal-source.txt:2016</a:t>
-            </a:r>
-          </a:p>
-          <a:p xmlns:a="http://schemas.openxmlformats.org/drawingml/2006/main">
-            <a:r>
-              <a:t>Requirements: 20, 29</a:t>
-            </a:r>
-          </a:p>
-          <a:p xmlns:a="http://schemas.openxmlformats.org/drawingml/2006/main">
-            <a:r>
-              <a:t>Chart uses the recorded t=0, 5, 10 coordinates. Six-decimal workbook snapshot values, whole-metre display labels. The bar is a negative control, not a measured failure of the source-first reader. Equatorial longitude changes from 0° to 2°. Interpolating converted endpoints misses the source-first midpoint by 971.421 m.</a:t>
-            </a:r>
-          </a:p>
-          <a:p xmlns:a="http://schemas.openxmlformats.org/drawingml/2006/main">
-            <a:r>
-              <a:t>Proposal da2f49aad42811fc5d660c7bcf9ff190599f2d74 SHA-256 2613649fd06516d77339d73b56432e84613dd1925e739761efea738f41b4f0a4</a:t>
-            </a:r>
-          </a:p>
-          <a:p xmlns:a="http://schemas.openxmlformats.org/drawingml/2006/main">
-            <a:r>
-              <a:t>README SHA-256 f97eb66b4642d85817c1bface96cc358cea536a8a8104a439f22a2715af103d5</a:t>
-            </a:r>
-          </a:p>
-          <a:p xmlns:a="http://schemas.openxmlformats.org/drawingml/2006/main">
-            <a:r>
-              <a:t>Immutable receipt SHA-256 ad59ead3c86c780b6d79a243a23032e492c14809f0c01f575397ae221939068f</a:t>
+              <a:t>{"assessment":[["Data model and runtime rules","The draft separates authored inputs from computed results and defines placement, adjustment, query and bake behavior."],["Group alignment","Input and declaration rules have agreement. Detailed conventions and identities await review."],["Prototype limitations","Lighting directions lack an error bound. Rotation uncertainty is unquantified."],["Verification coverage","Selected workflows and distinguishing controls support the rules. Broader composition and continuous space/time coverage remain unverified."]],"placement":[["Physical orientation","One heading/pitch/roll tuple describes physical attitude against local east, north and up. Projection effects stay computed."],["Project adjustments","The directly bound model's own xformOps adjust its placed result in a fixed project chart, including ordinary pivots."],["Child objects","Child transforms define model-local geometry. Their offsets follow model axes and the geospatial attitude."],["Repeated models","Each instance offset retains its instancer-local meaning. Independent prototype placement participates once. A required unavailable inverse fails."],["Geographic scene results","Geographic queries retain longitude/latitude/height. Cartesian geometry and bounds use the datum's Earth-centred frame."]],"data":[["Native data associations","Declare the asset, field and coordinate domain. Preserve named dimensions and observation times."],["WKT string normalization","Normalize lexical spelling without losing represented information. Equal tokens establish serialized identity."],["Semantic CRS comparison","Different normalized texts can represent equivalent CRSs. Comparison names its criteria and domain."],["Dependency declaration","Profiles records complete publication coverage, including unloaded and retained variant content. Fixed v1 identities remain proposed."],["Baked coordinate context","Retain a Cartesian CRS and double-precision origin without an active source placement binding. Ordinary USD controls subsequent transforms."]]}</a:t>
+            </a:r>
+          </a:p>
+          <a:p xmlns:a="http://schemas.openxmlformats.org/drawingml/2006/main">
+            <a:r>
+              <a:t>[["Normal transport","Confirmed prototype defect: one large projected face differs by 1.24 degrees across its domain. Centroid sampling has no justified domain/error bound. The source already requires a faithful derivative or covered approximation."],["Near-half-turn numerics","The proposed failure rule is clear. The prototype's 64-epsilon guard lacks a demonstrated rotational uncertainty bound and a quantified native diagnostic."],["Publisher coverage","Retained-variant and unloaded-payload controls pass, including detection of a stale empty claim. This is not a production validator for every composition or variant combination."],["Consumer coverage","Python and C++ share PROJ and external-data decoding. Omniverse reuses Python. General material/primvar baking, physics and nonlinear continuous space/time certificates remain unverified or visibly unsupported."]]</a:t>
+            </a:r>
+          </a:p>
+          <a:p xmlns:a="http://schemas.openxmlformats.org/drawingml/2006/main">
+            <a:r>
+              <a:t>Proposal e51919927ced49b9c68bcd86160be468121f633d SHA-256 276ae17d60e9b4801947525528c98cfac58b25a7e6ac5999dc01ddb60a2e83b9</a:t>
+            </a:r>
+          </a:p>
+          <a:p xmlns:a="http://schemas.openxmlformats.org/drawingml/2006/main">
+            <a:r>
+              <a:t>README SHA-256 45d0fcc44e276a85c016d374e6b918459c016533b0cb63f0f87bce1ecda57c35</a:t>
+            </a:r>
+          </a:p>
+          <a:p xmlns:a="http://schemas.openxmlformats.org/drawingml/2006/main">
+            <a:r>
+              <a:t>Immutable receipt SHA-256 06cb0fd2cefe30543d04bb461497f3071d5027de6094175fdc52b969428bb975</a:t>
             </a:r>
           </a:p>
           <a:p xmlns:a="http://schemas.openxmlformats.org/drawingml/2006/main">
@@ -825,27 +793,62 @@
           <a:lstStyle xmlns:a="http://schemas.openxmlformats.org/drawingml/2006/main"/>
           <a:p xmlns:a="http://schemas.openxmlformats.org/drawingml/2006/main">
             <a:r>
-              <a:t>{"assessment":[["Data model and runtime rules","The draft separates authored inputs from computed results and defines placement, adjustment, query and bake behavior."],["Group alignment","Input and declaration rules have agreement. Detailed conventions and identities await review."],["Prototype limitations","Lighting directions lack an error bound. Rotation uncertainty is unquantified. A quoted CRS name causes false rejection."],["Verification coverage","Selected workflows and distinguishing controls support the rules. Broader composition and continuous space/time coverage remain unverified."]],"placement":[["Physical orientation","One heading/pitch/roll tuple describes physical attitude against local east, north and up. Projection effects stay computed."],["Project adjustments","The directly bound model's own xformOps adjust its placed result in a fixed project chart, including ordinary pivots."],["Child objects","Child transforms define model-local geometry. Their offsets follow model axes and the geospatial attitude."],["Repeated models","Each instance offset retains its instancer-local meaning. Independent prototype placement participates once. A required unavailable inverse fails."],["Geographic scene results","Geographic queries retain longitude/latitude/height. Cartesian geometry and bounds use the datum's Earth-centred frame."]],"data":[["Native data associations","Declare the asset, field and coordinate domain. Preserve named dimensions and observation times."],["WKT string normalization","Normalize lexical spelling without losing represented information. Equal tokens establish serialized identity."],["Semantic CRS comparison","Different normalized texts can represent equivalent CRSs. Comparison names its criteria and domain."],["Dependency declaration","Profiles records complete publication coverage, including unloaded and retained variant content. Fixed v1 identities remain proposed."],["Baked coordinate context","Retain a Cartesian CRS and double-precision origin without an active source placement binding. Ordinary USD controls subsequent transforms."]]}</a:t>
-            </a:r>
-          </a:p>
-          <a:p xmlns:a="http://schemas.openxmlformats.org/drawingml/2006/main">
-            <a:r>
-              <a:t>[["Physical orientation","One heading/pitch/roll tuple describes physical attitude against local east, north and up. Projection effects stay computed."],["Project adjustments","The directly bound model's own xformOps adjust its placed result in a fixed project chart, including ordinary pivots."],["Child objects","Child transforms define model-local geometry. Their offsets follow model axes and the geospatial attitude."],["Repeated models","Each instance offset retains its instancer-local meaning. Independent prototype placement participates once. A required unavailable inverse fails."],["Geographic scene results","Geographic queries retain longitude/latitude/height. Cartesian geometry and bounds use the datum's Earth-centred frame."]]</a:t>
-            </a:r>
-          </a:p>
-          <a:p xmlns:a="http://schemas.openxmlformats.org/drawingml/2006/main">
-            <a:r>
-              <a:t>Proposal da2f49aad42811fc5d660c7bcf9ff190599f2d74 SHA-256 2613649fd06516d77339d73b56432e84613dd1925e739761efea738f41b4f0a4</a:t>
-            </a:r>
-          </a:p>
-          <a:p xmlns:a="http://schemas.openxmlformats.org/drawingml/2006/main">
-            <a:r>
-              <a:t>README SHA-256 f97eb66b4642d85817c1bface96cc358cea536a8a8104a439f22a2715af103d5</a:t>
-            </a:r>
-          </a:p>
-          <a:p xmlns:a="http://schemas.openxmlformats.org/drawingml/2006/main">
-            <a:r>
-              <a:t>Immutable receipt SHA-256 ad59ead3c86c780b6d79a243a23032e492c14809f0c01f575397ae221939068f</a:t>
+              <a:t>Question: Can a project's local survey grid participate as a defined CRS?</a:t>
+            </a:r>
+          </a:p>
+          <a:p xmlns:a="http://schemas.openxmlformats.org/drawingml/2006/main">
+            <a:r>
+              <a:t>Proposed rule: The source WKT describes how a calibrated site grid relates to a broader CRS, including its units and height meaning.</a:t>
+            </a:r>
+          </a:p>
+          <a:p xmlns:a="http://schemas.openxmlformats.org/drawingml/2006/main">
+            <a:r>
+              <a:t>Expected behavior: Partner survey lines resolve into the site grid without redefining the model units or up direction.</a:t>
+            </a:r>
+          </a:p>
+          <a:p xmlns:a="http://schemas.openxmlformats.org/drawingml/2006/main">
+            <a:r>
+              <a:t>Observed result: The original LandXML survey breaklines resolve and reach an ordinary USD bake rendered by Storm.</a:t>
+            </a:r>
+          </a:p>
+          <a:p xmlns:a="http://schemas.openxmlformats.org/drawingml/2006/main">
+            <a:r>
+              <a:t>What this says about the proposal: The partner case exercises a site's calibrated CRS. Its WKT-carried calibration participates in resolution.</a:t>
+            </a:r>
+          </a:p>
+          <a:p xmlns:a="http://schemas.openxmlformats.org/drawingml/2006/main">
+            <a:r>
+              <a:t>Limit: The survey-line image does not establish independent survey accuracy or a continuous terrain-surface certificate.</a:t>
+            </a:r>
+          </a:p>
+          <a:p xmlns:a="http://schemas.openxmlformats.org/drawingml/2006/main">
+            <a:r>
+              <a:t>Proposal clause: #### Decision on question 7: site calibration at proposal/proposal-source.txt:1355</a:t>
+            </a:r>
+          </a:p>
+          <a:p xmlns:a="http://schemas.openxmlformats.org/drawingml/2006/main">
+            <a:r>
+              <a:t>Requirements: 4, 14, 15, 17</a:t>
+            </a:r>
+          </a:p>
+          <a:p xmlns:a="http://schemas.openxmlformats.org/drawingml/2006/main">
+            <a:r>
+              <a:t/>
+            </a:r>
+          </a:p>
+          <a:p xmlns:a="http://schemas.openxmlformats.org/drawingml/2006/main">
+            <a:r>
+              <a:t>Proposal e51919927ced49b9c68bcd86160be468121f633d SHA-256 276ae17d60e9b4801947525528c98cfac58b25a7e6ac5999dc01ddb60a2e83b9</a:t>
+            </a:r>
+          </a:p>
+          <a:p xmlns:a="http://schemas.openxmlformats.org/drawingml/2006/main">
+            <a:r>
+              <a:t>README SHA-256 45d0fcc44e276a85c016d374e6b918459c016533b0cb63f0f87bce1ecda57c35</a:t>
+            </a:r>
+          </a:p>
+          <a:p xmlns:a="http://schemas.openxmlformats.org/drawingml/2006/main">
+            <a:r>
+              <a:t>Immutable receipt SHA-256 06cb0fd2cefe30543d04bb461497f3071d5027de6094175fdc52b969428bb975</a:t>
             </a:r>
           </a:p>
           <a:p xmlns:a="http://schemas.openxmlformats.org/drawingml/2006/main">
@@ -925,27 +928,62 @@
           <a:lstStyle xmlns:a="http://schemas.openxmlformats.org/drawingml/2006/main"/>
           <a:p xmlns:a="http://schemas.openxmlformats.org/drawingml/2006/main">
             <a:r>
-              <a:t>{"assessment":[["Data model and runtime rules","The draft separates authored inputs from computed results and defines placement, adjustment, query and bake behavior."],["Group alignment","Input and declaration rules have agreement. Detailed conventions and identities await review."],["Prototype limitations","Lighting directions lack an error bound. Rotation uncertainty is unquantified. A quoted CRS name causes false rejection."],["Verification coverage","Selected workflows and distinguishing controls support the rules. Broader composition and continuous space/time coverage remain unverified."]],"placement":[["Physical orientation","One heading/pitch/roll tuple describes physical attitude against local east, north and up. Projection effects stay computed."],["Project adjustments","The directly bound model's own xformOps adjust its placed result in a fixed project chart, including ordinary pivots."],["Child objects","Child transforms define model-local geometry. Their offsets follow model axes and the geospatial attitude."],["Repeated models","Each instance offset retains its instancer-local meaning. Independent prototype placement participates once. A required unavailable inverse fails."],["Geographic scene results","Geographic queries retain longitude/latitude/height. Cartesian geometry and bounds use the datum's Earth-centred frame."]],"data":[["Native data associations","Declare the asset, field and coordinate domain. Preserve named dimensions and observation times."],["WKT string normalization","Normalize lexical spelling without losing represented information. Equal tokens establish serialized identity."],["Semantic CRS comparison","Different normalized texts can represent equivalent CRSs. Comparison names its criteria and domain."],["Dependency declaration","Profiles records complete publication coverage, including unloaded and retained variant content. Fixed v1 identities remain proposed."],["Baked coordinate context","Retain a Cartesian CRS and double-precision origin without an active source placement binding. Ordinary USD controls subsequent transforms."]]}</a:t>
-            </a:r>
-          </a:p>
-          <a:p xmlns:a="http://schemas.openxmlformats.org/drawingml/2006/main">
-            <a:r>
-              <a:t>[["Native data associations","Declare the asset, field and coordinate domain. Preserve named dimensions and observation times."],["WKT string normalization","Normalize lexical spelling without losing represented information. Equal tokens establish serialized identity."],["Semantic CRS comparison","Different normalized texts can represent equivalent CRSs. Comparison names its criteria and domain."],["Dependency declaration","Profiles records complete publication coverage, including unloaded and retained variant content. Fixed v1 identities remain proposed."],["Baked coordinate context","Retain a Cartesian CRS and double-precision origin without an active source placement binding. Ordinary USD controls subsequent transforms."]]</a:t>
-            </a:r>
-          </a:p>
-          <a:p xmlns:a="http://schemas.openxmlformats.org/drawingml/2006/main">
-            <a:r>
-              <a:t>Proposal da2f49aad42811fc5d660c7bcf9ff190599f2d74 SHA-256 2613649fd06516d77339d73b56432e84613dd1925e739761efea738f41b4f0a4</a:t>
-            </a:r>
-          </a:p>
-          <a:p xmlns:a="http://schemas.openxmlformats.org/drawingml/2006/main">
-            <a:r>
-              <a:t>README SHA-256 f97eb66b4642d85817c1bface96cc358cea536a8a8104a439f22a2715af103d5</a:t>
-            </a:r>
-          </a:p>
-          <a:p xmlns:a="http://schemas.openxmlformats.org/drawingml/2006/main">
-            <a:r>
-              <a:t>Immutable receipt SHA-256 ad59ead3c86c780b6d79a243a23032e492c14809f0c01f575397ae221939068f</a:t>
+              <a:t>Question: Can incomplete source metadata still support a useful, explicitly horizontal workflow?</a:t>
+            </a:r>
+          </a:p>
+          <a:p xmlns:a="http://schemas.openxmlformats.org/drawingml/2006/main">
+            <a:r>
+              <a:t>Proposed rule: The reader resolves a declared horizontal association and preserves uninterpreted third components. It does not invent a height reference.</a:t>
+            </a:r>
+          </a:p>
+          <a:p xmlns:a="http://schemas.openxmlformats.org/drawingml/2006/main">
+            <a:r>
+              <a:t>Expected behavior: The horizontal railway copy resolves into UTM 32 while the original GeoJSON remains unchanged.</a:t>
+            </a:r>
+          </a:p>
+          <a:p xmlns:a="http://schemas.openxmlformats.org/drawingml/2006/main">
+            <a:r>
+              <a:t>Observed result: The horizontal copy resolves 15,822 vertices across 2,386 parts. The plot uses offsets only for display.</a:t>
+            </a:r>
+          </a:p>
+          <a:p xmlns:a="http://schemas.openxmlformats.org/drawingml/2006/main">
+            <a:r>
+              <a:t>What this says about the proposal: The draft supports horizontal resolution without inventing a height reference. The original third components remain uninterpreted.</a:t>
+            </a:r>
+          </a:p>
+          <a:p xmlns:a="http://schemas.openxmlformats.org/drawingml/2006/main">
+            <a:r>
+              <a:t>Limit: Horizontal coordinates only. The original third components remain uninterpreted and supply no physical 3D distance.</a:t>
+            </a:r>
+          </a:p>
+          <a:p xmlns:a="http://schemas.openxmlformats.org/drawingml/2006/main">
+            <a:r>
+              <a:t>Proposal clause: ### External measurement association at proposal/proposal-source.txt:1708</a:t>
+            </a:r>
+          </a:p>
+          <a:p xmlns:a="http://schemas.openxmlformats.org/drawingml/2006/main">
+            <a:r>
+              <a:t>Requirements: 8, 12, 19, 21</a:t>
+            </a:r>
+          </a:p>
+          <a:p xmlns:a="http://schemas.openxmlformats.org/drawingml/2006/main">
+            <a:r>
+              <a:t/>
+            </a:r>
+          </a:p>
+          <a:p xmlns:a="http://schemas.openxmlformats.org/drawingml/2006/main">
+            <a:r>
+              <a:t>Proposal e51919927ced49b9c68bcd86160be468121f633d SHA-256 276ae17d60e9b4801947525528c98cfac58b25a7e6ac5999dc01ddb60a2e83b9</a:t>
+            </a:r>
+          </a:p>
+          <a:p xmlns:a="http://schemas.openxmlformats.org/drawingml/2006/main">
+            <a:r>
+              <a:t>README SHA-256 45d0fcc44e276a85c016d374e6b918459c016533b0cb63f0f87bce1ecda57c35</a:t>
+            </a:r>
+          </a:p>
+          <a:p xmlns:a="http://schemas.openxmlformats.org/drawingml/2006/main">
+            <a:r>
+              <a:t>Immutable receipt SHA-256 06cb0fd2cefe30543d04bb461497f3071d5027de6094175fdc52b969428bb975</a:t>
             </a:r>
           </a:p>
           <a:p xmlns:a="http://schemas.openxmlformats.org/drawingml/2006/main">
@@ -1025,27 +1063,362 @@
           <a:lstStyle xmlns:a="http://schemas.openxmlformats.org/drawingml/2006/main"/>
           <a:p xmlns:a="http://schemas.openxmlformats.org/drawingml/2006/main">
             <a:r>
-              <a:t>{"assessment":[["Data model and runtime rules","The draft separates authored inputs from computed results and defines placement, adjustment, query and bake behavior."],["Group alignment","Input and declaration rules have agreement. Detailed conventions and identities await review."],["Prototype limitations","Lighting directions lack an error bound. Rotation uncertainty is unquantified. A quoted CRS name causes false rejection."],["Verification coverage","Selected workflows and distinguishing controls support the rules. Broader composition and continuous space/time coverage remain unverified."]],"placement":[["Physical orientation","One heading/pitch/roll tuple describes physical attitude against local east, north and up. Projection effects stay computed."],["Project adjustments","The directly bound model's own xformOps adjust its placed result in a fixed project chart, including ordinary pivots."],["Child objects","Child transforms define model-local geometry. Their offsets follow model axes and the geospatial attitude."],["Repeated models","Each instance offset retains its instancer-local meaning. Independent prototype placement participates once. A required unavailable inverse fails."],["Geographic scene results","Geographic queries retain longitude/latitude/height. Cartesian geometry and bounds use the datum's Earth-centred frame."]],"data":[["Native data associations","Declare the asset, field and coordinate domain. Preserve named dimensions and observation times."],["WKT string normalization","Normalize lexical spelling without losing represented information. Equal tokens establish serialized identity."],["Semantic CRS comparison","Different normalized texts can represent equivalent CRSs. Comparison names its criteria and domain."],["Dependency declaration","Profiles records complete publication coverage, including unloaded and retained variant content. Fixed v1 identities remain proposed."],["Baked coordinate context","Retain a Cartesian CRS and double-precision origin without an active source placement binding. Ordinary USD controls subsequent transforms."]]}</a:t>
-            </a:r>
-          </a:p>
-          <a:p xmlns:a="http://schemas.openxmlformats.org/drawingml/2006/main">
-            <a:r>
-              <a:t>[["Python and C++ readers","213,243 coordinate results per reader. Maximum measured difference 3.39e-08 m. Shared PROJ and decoding."],["Omniverse stage geometry","Reuses Python placement. Readback covers 177,872 vertices and 48 edit, failure and recovery checks across 39 jobs."],["Hydra / Storm","Two selected ordinary USD bakes reach native rendering using C++-resolved placements."],["Recorded tests","116 contract tests and 65 distinguishing controls pass. Separate diagnostics expose the reported prototype limits."],["Source preservation","Original inputs and 48 frozen execution files remain unchanged. The immutable receipt identifies exact executed content."],["Bake readbacks","11 selected exports checked. No general material/primvar, physics or continuous trajectory conformance is claimed."]]</a:t>
-            </a:r>
-          </a:p>
-          <a:p xmlns:a="http://schemas.openxmlformats.org/drawingml/2006/main">
-            <a:r>
-              <a:t>Proposal da2f49aad42811fc5d660c7bcf9ff190599f2d74 SHA-256 2613649fd06516d77339d73b56432e84613dd1925e739761efea738f41b4f0a4</a:t>
-            </a:r>
-          </a:p>
-          <a:p xmlns:a="http://schemas.openxmlformats.org/drawingml/2006/main">
-            <a:r>
-              <a:t>README SHA-256 f97eb66b4642d85817c1bface96cc358cea536a8a8104a439f22a2715af103d5</a:t>
-            </a:r>
-          </a:p>
-          <a:p xmlns:a="http://schemas.openxmlformats.org/drawingml/2006/main">
-            <a:r>
-              <a:t>Immutable receipt SHA-256 ad59ead3c86c780b6d79a243a23032e492c14809f0c01f575397ae221939068f</a:t>
+              <a:t>Question: Does the proposal define the result between authored moments?</a:t>
+            </a:r>
+          </a:p>
+          <a:p xmlns:a="http://schemas.openxmlformats.org/drawingml/2006/main">
+            <a:r>
+              <a:t>Proposed rule: Interpolate the authored source position first, then convert coordinates. Physical orientation uses composed heading/pitch/roll samples and shortest-arc pose interpolation.</a:t>
+            </a:r>
+          </a:p>
+          <a:p xmlns:a="http://schemas.openxmlformats.org/drawingml/2006/main">
+            <a:r>
+              <a:t>Expected behavior: The midpoint follows the source-defined path. An ambiguous half-turn requires an intermediate authored pose for interior-time evaluation.</a:t>
+            </a:r>
+          </a:p>
+          <a:p xmlns:a="http://schemas.openxmlformats.org/drawingml/2006/main">
+            <a:r>
+              <a:t>Observed result: Equatorial longitude changes from 0° to 2°. Interpolating converted endpoints misses the source-first midpoint by 971.421 m.</a:t>
+            </a:r>
+          </a:p>
+          <a:p xmlns:a="http://schemas.openxmlformats.org/drawingml/2006/main">
+            <a:r>
+              <a:t>What this says about the proposal: The order is testable. Sample keys alone cannot certify the original trajectory between samples.</a:t>
+            </a:r>
+          </a:p>
+          <a:p xmlns:a="http://schemas.openxmlformats.org/drawingml/2006/main">
+            <a:r>
+              <a:t>Limit: The bake preserves time codes 0, 5 and 10 at 48 time codes per second. Continuous trajectory coverage remains unverified.</a:t>
+            </a:r>
+          </a:p>
+          <a:p xmlns:a="http://schemas.openxmlformats.org/drawingml/2006/main">
+            <a:r>
+              <a:t>Proposal clause: #### Evaluation at proposal/proposal-source.txt:2023</a:t>
+            </a:r>
+          </a:p>
+          <a:p xmlns:a="http://schemas.openxmlformats.org/drawingml/2006/main">
+            <a:r>
+              <a:t>Requirements: 20, 29</a:t>
+            </a:r>
+          </a:p>
+          <a:p xmlns:a="http://schemas.openxmlformats.org/drawingml/2006/main">
+            <a:r>
+              <a:t>Chart uses the recorded t=0, 5, 10 coordinates. Six-decimal workbook snapshot values, whole-metre display labels. The bar is a negative control, not a measured failure of the source-first reader. Equatorial longitude changes from 0° to 2°. Interpolating converted endpoints misses the source-first midpoint by 971.421 m.</a:t>
+            </a:r>
+          </a:p>
+          <a:p xmlns:a="http://schemas.openxmlformats.org/drawingml/2006/main">
+            <a:r>
+              <a:t>Proposal e51919927ced49b9c68bcd86160be468121f633d SHA-256 276ae17d60e9b4801947525528c98cfac58b25a7e6ac5999dc01ddb60a2e83b9</a:t>
+            </a:r>
+          </a:p>
+          <a:p xmlns:a="http://schemas.openxmlformats.org/drawingml/2006/main">
+            <a:r>
+              <a:t>README SHA-256 45d0fcc44e276a85c016d374e6b918459c016533b0cb63f0f87bce1ecda57c35</a:t>
+            </a:r>
+          </a:p>
+          <a:p xmlns:a="http://schemas.openxmlformats.org/drawingml/2006/main">
+            <a:r>
+              <a:t>Immutable receipt SHA-256 06cb0fd2cefe30543d04bb461497f3071d5027de6094175fdc52b969428bb975</a:t>
+            </a:r>
+          </a:p>
+          <a:p xmlns:a="http://schemas.openxmlformats.org/drawingml/2006/main">
+            <a:r>
+              <a:t>Eiffel mesh: SDC PERFORMANCE, https://sketchfab.com/3d-models/free-la-tour-eiffel-8553f94d06e24cb4b0fde1080f281674, CC BY 4.0 https://creativecommons.org/licenses/by/4.0/ . Informative positions and ground context do not establish surveyed placement.</a:t>
+            </a:r>
+          </a:p>
+          <a:p xmlns:a="http://schemas.openxmlformats.org/drawingml/2006/main">
+            <a:r>
+              <a:t>Accepted source and declaration rules are distinguished from detailed conventions and identities awaiting review. Python and C++ share PROJ and decoding. Omniverse reuses Python. Hydra consumes a resolved ordinary USD bake.</a:t>
+            </a:r>
+          </a:p>
+        </p:txBody>
+      </p:sp>
+      <p:sp>
+        <p:nvSpPr>
+          <p:cNvPr id="4" name="Slide Number Placeholder 3"/>
+          <p:cNvSpPr>
+            <a:spLocks xmlns:a="http://schemas.openxmlformats.org/drawingml/2006/main" noGrp="1"/>
+          </p:cNvSpPr>
+          <p:nvPr>
+            <p:ph type="sldNum" idx="5"/>
+          </p:nvPr>
+        </p:nvSpPr>
+        <p:spPr/>
+        <p:txBody>
+          <a:bodyPr xmlns:a="http://schemas.openxmlformats.org/drawingml/2006/main"/>
+          <a:lstStyle xmlns:a="http://schemas.openxmlformats.org/drawingml/2006/main"/>
+          <a:p xmlns:a="http://schemas.openxmlformats.org/drawingml/2006/main"/>
+        </p:txBody>
+      </p:sp>
+    </p:spTree>
+  </p:cSld>
+  <p:clrMapOvr>
+    <a:masterClrMapping xmlns:a="http://schemas.openxmlformats.org/drawingml/2006/main"/>
+  </p:clrMapOvr>
+</p:notes>
+</file>
+
+<file path=ppt/notesSlides/notesSlide15.xml><?xml version="1.0" encoding="utf-8"?>
+<p:notes xmlns:p="http://schemas.openxmlformats.org/presentationml/2006/main">
+  <p:cSld>
+    <p:spTree>
+      <p:nvGrpSpPr>
+        <p:cNvPr id="1" name=""/>
+        <p:cNvGrpSpPr/>
+        <p:nvPr/>
+      </p:nvGrpSpPr>
+      <p:grpSpPr>
+        <a:xfrm xmlns:a="http://schemas.openxmlformats.org/drawingml/2006/main"/>
+      </p:grpSpPr>
+      <p:sp>
+        <p:nvSpPr>
+          <p:cNvPr id="2" name="Slide Image Placeholder 1"/>
+          <p:cNvSpPr>
+            <a:spLocks xmlns:a="http://schemas.openxmlformats.org/drawingml/2006/main" noGrp="1"/>
+          </p:cNvSpPr>
+          <p:nvPr>
+            <p:ph type="sldImg" idx="0"/>
+          </p:nvPr>
+        </p:nvSpPr>
+        <p:spPr/>
+      </p:sp>
+      <p:sp>
+        <p:nvSpPr>
+          <p:cNvPr id="3" name="Notes Placeholder 2"/>
+          <p:cNvSpPr>
+            <a:spLocks xmlns:a="http://schemas.openxmlformats.org/drawingml/2006/main" noGrp="1"/>
+          </p:cNvSpPr>
+          <p:nvPr>
+            <p:ph type="body" idx="1"/>
+          </p:nvPr>
+        </p:nvSpPr>
+        <p:spPr/>
+        <p:txBody>
+          <a:bodyPr xmlns:a="http://schemas.openxmlformats.org/drawingml/2006/main"/>
+          <a:lstStyle xmlns:a="http://schemas.openxmlformats.org/drawingml/2006/main"/>
+          <a:p xmlns:a="http://schemas.openxmlformats.org/drawingml/2006/main">
+            <a:r>
+              <a:t>{"assessment":[["Data model and runtime rules","The draft separates authored inputs from computed results and defines placement, adjustment, query and bake behavior."],["Group alignment","Input and declaration rules have agreement. Detailed conventions and identities await review."],["Prototype limitations","Lighting directions lack an error bound. Rotation uncertainty is unquantified."],["Verification coverage","Selected workflows and distinguishing controls support the rules. Broader composition and continuous space/time coverage remain unverified."]],"placement":[["Physical orientation","One heading/pitch/roll tuple describes physical attitude against local east, north and up. Projection effects stay computed."],["Project adjustments","The directly bound model's own xformOps adjust its placed result in a fixed project chart, including ordinary pivots."],["Child objects","Child transforms define model-local geometry. Their offsets follow model axes and the geospatial attitude."],["Repeated models","Each instance offset retains its instancer-local meaning. Independent prototype placement participates once. A required unavailable inverse fails."],["Geographic scene results","Geographic queries retain longitude/latitude/height. Cartesian geometry and bounds use the datum's Earth-centred frame."]],"data":[["Native data associations","Declare the asset, field and coordinate domain. Preserve named dimensions and observation times."],["WKT string normalization","Normalize lexical spelling without losing represented information. Equal tokens establish serialized identity."],["Semantic CRS comparison","Different normalized texts can represent equivalent CRSs. Comparison names its criteria and domain."],["Dependency declaration","Profiles records complete publication coverage, including unloaded and retained variant content. Fixed v1 identities remain proposed."],["Baked coordinate context","Retain a Cartesian CRS and double-precision origin without an active source placement binding. Ordinary USD controls subsequent transforms."]]}</a:t>
+            </a:r>
+          </a:p>
+          <a:p xmlns:a="http://schemas.openxmlformats.org/drawingml/2006/main">
+            <a:r>
+              <a:t>[["Physical orientation","One heading/pitch/roll tuple describes physical attitude against local east, north and up. Projection effects stay computed."],["Project adjustments","The directly bound model's own xformOps adjust its placed result in a fixed project chart, including ordinary pivots."],["Child objects","Child transforms define model-local geometry. Their offsets follow model axes and the geospatial attitude."],["Repeated models","Each instance offset retains its instancer-local meaning. Independent prototype placement participates once. A required unavailable inverse fails."],["Geographic scene results","Geographic queries retain longitude/latitude/height. Cartesian geometry and bounds use the datum's Earth-centred frame."]]</a:t>
+            </a:r>
+          </a:p>
+          <a:p xmlns:a="http://schemas.openxmlformats.org/drawingml/2006/main">
+            <a:r>
+              <a:t>Proposal e51919927ced49b9c68bcd86160be468121f633d SHA-256 276ae17d60e9b4801947525528c98cfac58b25a7e6ac5999dc01ddb60a2e83b9</a:t>
+            </a:r>
+          </a:p>
+          <a:p xmlns:a="http://schemas.openxmlformats.org/drawingml/2006/main">
+            <a:r>
+              <a:t>README SHA-256 45d0fcc44e276a85c016d374e6b918459c016533b0cb63f0f87bce1ecda57c35</a:t>
+            </a:r>
+          </a:p>
+          <a:p xmlns:a="http://schemas.openxmlformats.org/drawingml/2006/main">
+            <a:r>
+              <a:t>Immutable receipt SHA-256 06cb0fd2cefe30543d04bb461497f3071d5027de6094175fdc52b969428bb975</a:t>
+            </a:r>
+          </a:p>
+          <a:p xmlns:a="http://schemas.openxmlformats.org/drawingml/2006/main">
+            <a:r>
+              <a:t>Eiffel mesh: SDC PERFORMANCE, https://sketchfab.com/3d-models/free-la-tour-eiffel-8553f94d06e24cb4b0fde1080f281674, CC BY 4.0 https://creativecommons.org/licenses/by/4.0/ . Informative positions and ground context do not establish surveyed placement.</a:t>
+            </a:r>
+          </a:p>
+          <a:p xmlns:a="http://schemas.openxmlformats.org/drawingml/2006/main">
+            <a:r>
+              <a:t>Accepted source and declaration rules are distinguished from detailed conventions and identities awaiting review. Python and C++ share PROJ and decoding. Omniverse reuses Python. Hydra consumes a resolved ordinary USD bake.</a:t>
+            </a:r>
+          </a:p>
+        </p:txBody>
+      </p:sp>
+      <p:sp>
+        <p:nvSpPr>
+          <p:cNvPr id="4" name="Slide Number Placeholder 3"/>
+          <p:cNvSpPr>
+            <a:spLocks xmlns:a="http://schemas.openxmlformats.org/drawingml/2006/main" noGrp="1"/>
+          </p:cNvSpPr>
+          <p:nvPr>
+            <p:ph type="sldNum" idx="5"/>
+          </p:nvPr>
+        </p:nvSpPr>
+        <p:spPr/>
+        <p:txBody>
+          <a:bodyPr xmlns:a="http://schemas.openxmlformats.org/drawingml/2006/main"/>
+          <a:lstStyle xmlns:a="http://schemas.openxmlformats.org/drawingml/2006/main"/>
+          <a:p xmlns:a="http://schemas.openxmlformats.org/drawingml/2006/main"/>
+        </p:txBody>
+      </p:sp>
+    </p:spTree>
+  </p:cSld>
+  <p:clrMapOvr>
+    <a:masterClrMapping xmlns:a="http://schemas.openxmlformats.org/drawingml/2006/main"/>
+  </p:clrMapOvr>
+</p:notes>
+</file>
+
+<file path=ppt/notesSlides/notesSlide16.xml><?xml version="1.0" encoding="utf-8"?>
+<p:notes xmlns:p="http://schemas.openxmlformats.org/presentationml/2006/main">
+  <p:cSld>
+    <p:spTree>
+      <p:nvGrpSpPr>
+        <p:cNvPr id="1" name=""/>
+        <p:cNvGrpSpPr/>
+        <p:nvPr/>
+      </p:nvGrpSpPr>
+      <p:grpSpPr>
+        <a:xfrm xmlns:a="http://schemas.openxmlformats.org/drawingml/2006/main"/>
+      </p:grpSpPr>
+      <p:sp>
+        <p:nvSpPr>
+          <p:cNvPr id="2" name="Slide Image Placeholder 1"/>
+          <p:cNvSpPr>
+            <a:spLocks xmlns:a="http://schemas.openxmlformats.org/drawingml/2006/main" noGrp="1"/>
+          </p:cNvSpPr>
+          <p:nvPr>
+            <p:ph type="sldImg" idx="0"/>
+          </p:nvPr>
+        </p:nvSpPr>
+        <p:spPr/>
+      </p:sp>
+      <p:sp>
+        <p:nvSpPr>
+          <p:cNvPr id="3" name="Notes Placeholder 2"/>
+          <p:cNvSpPr>
+            <a:spLocks xmlns:a="http://schemas.openxmlformats.org/drawingml/2006/main" noGrp="1"/>
+          </p:cNvSpPr>
+          <p:nvPr>
+            <p:ph type="body" idx="1"/>
+          </p:nvPr>
+        </p:nvSpPr>
+        <p:spPr/>
+        <p:txBody>
+          <a:bodyPr xmlns:a="http://schemas.openxmlformats.org/drawingml/2006/main"/>
+          <a:lstStyle xmlns:a="http://schemas.openxmlformats.org/drawingml/2006/main"/>
+          <a:p xmlns:a="http://schemas.openxmlformats.org/drawingml/2006/main">
+            <a:r>
+              <a:t>{"assessment":[["Data model and runtime rules","The draft separates authored inputs from computed results and defines placement, adjustment, query and bake behavior."],["Group alignment","Input and declaration rules have agreement. Detailed conventions and identities await review."],["Prototype limitations","Lighting directions lack an error bound. Rotation uncertainty is unquantified."],["Verification coverage","Selected workflows and distinguishing controls support the rules. Broader composition and continuous space/time coverage remain unverified."]],"placement":[["Physical orientation","One heading/pitch/roll tuple describes physical attitude against local east, north and up. Projection effects stay computed."],["Project adjustments","The directly bound model's own xformOps adjust its placed result in a fixed project chart, including ordinary pivots."],["Child objects","Child transforms define model-local geometry. Their offsets follow model axes and the geospatial attitude."],["Repeated models","Each instance offset retains its instancer-local meaning. Independent prototype placement participates once. A required unavailable inverse fails."],["Geographic scene results","Geographic queries retain longitude/latitude/height. Cartesian geometry and bounds use the datum's Earth-centred frame."]],"data":[["Native data associations","Declare the asset, field and coordinate domain. Preserve named dimensions and observation times."],["WKT string normalization","Normalize lexical spelling without losing represented information. Equal tokens establish serialized identity."],["Semantic CRS comparison","Different normalized texts can represent equivalent CRSs. Comparison names its criteria and domain."],["Dependency declaration","Profiles records complete publication coverage, including unloaded and retained variant content. Fixed v1 identities remain proposed."],["Baked coordinate context","Retain a Cartesian CRS and double-precision origin without an active source placement binding. Ordinary USD controls subsequent transforms."]]}</a:t>
+            </a:r>
+          </a:p>
+          <a:p xmlns:a="http://schemas.openxmlformats.org/drawingml/2006/main">
+            <a:r>
+              <a:t>[["Native data associations","Declare the asset, field and coordinate domain. Preserve named dimensions and observation times."],["WKT string normalization","Normalize lexical spelling without losing represented information. Equal tokens establish serialized identity."],["Semantic CRS comparison","Different normalized texts can represent equivalent CRSs. Comparison names its criteria and domain."],["Dependency declaration","Profiles records complete publication coverage, including unloaded and retained variant content. Fixed v1 identities remain proposed."],["Baked coordinate context","Retain a Cartesian CRS and double-precision origin without an active source placement binding. Ordinary USD controls subsequent transforms."]]</a:t>
+            </a:r>
+          </a:p>
+          <a:p xmlns:a="http://schemas.openxmlformats.org/drawingml/2006/main">
+            <a:r>
+              <a:t>Proposal e51919927ced49b9c68bcd86160be468121f633d SHA-256 276ae17d60e9b4801947525528c98cfac58b25a7e6ac5999dc01ddb60a2e83b9</a:t>
+            </a:r>
+          </a:p>
+          <a:p xmlns:a="http://schemas.openxmlformats.org/drawingml/2006/main">
+            <a:r>
+              <a:t>README SHA-256 45d0fcc44e276a85c016d374e6b918459c016533b0cb63f0f87bce1ecda57c35</a:t>
+            </a:r>
+          </a:p>
+          <a:p xmlns:a="http://schemas.openxmlformats.org/drawingml/2006/main">
+            <a:r>
+              <a:t>Immutable receipt SHA-256 06cb0fd2cefe30543d04bb461497f3071d5027de6094175fdc52b969428bb975</a:t>
+            </a:r>
+          </a:p>
+          <a:p xmlns:a="http://schemas.openxmlformats.org/drawingml/2006/main">
+            <a:r>
+              <a:t>Eiffel mesh: SDC PERFORMANCE, https://sketchfab.com/3d-models/free-la-tour-eiffel-8553f94d06e24cb4b0fde1080f281674, CC BY 4.0 https://creativecommons.org/licenses/by/4.0/ . Informative positions and ground context do not establish surveyed placement.</a:t>
+            </a:r>
+          </a:p>
+          <a:p xmlns:a="http://schemas.openxmlformats.org/drawingml/2006/main">
+            <a:r>
+              <a:t>Accepted source and declaration rules are distinguished from detailed conventions and identities awaiting review. Python and C++ share PROJ and decoding. Omniverse reuses Python. Hydra consumes a resolved ordinary USD bake.</a:t>
+            </a:r>
+          </a:p>
+        </p:txBody>
+      </p:sp>
+      <p:sp>
+        <p:nvSpPr>
+          <p:cNvPr id="4" name="Slide Number Placeholder 3"/>
+          <p:cNvSpPr>
+            <a:spLocks xmlns:a="http://schemas.openxmlformats.org/drawingml/2006/main" noGrp="1"/>
+          </p:cNvSpPr>
+          <p:nvPr>
+            <p:ph type="sldNum" idx="5"/>
+          </p:nvPr>
+        </p:nvSpPr>
+        <p:spPr/>
+        <p:txBody>
+          <a:bodyPr xmlns:a="http://schemas.openxmlformats.org/drawingml/2006/main"/>
+          <a:lstStyle xmlns:a="http://schemas.openxmlformats.org/drawingml/2006/main"/>
+          <a:p xmlns:a="http://schemas.openxmlformats.org/drawingml/2006/main"/>
+        </p:txBody>
+      </p:sp>
+    </p:spTree>
+  </p:cSld>
+  <p:clrMapOvr>
+    <a:masterClrMapping xmlns:a="http://schemas.openxmlformats.org/drawingml/2006/main"/>
+  </p:clrMapOvr>
+</p:notes>
+</file>
+
+<file path=ppt/notesSlides/notesSlide17.xml><?xml version="1.0" encoding="utf-8"?>
+<p:notes xmlns:p="http://schemas.openxmlformats.org/presentationml/2006/main">
+  <p:cSld>
+    <p:spTree>
+      <p:nvGrpSpPr>
+        <p:cNvPr id="1" name=""/>
+        <p:cNvGrpSpPr/>
+        <p:nvPr/>
+      </p:nvGrpSpPr>
+      <p:grpSpPr>
+        <a:xfrm xmlns:a="http://schemas.openxmlformats.org/drawingml/2006/main"/>
+      </p:grpSpPr>
+      <p:sp>
+        <p:nvSpPr>
+          <p:cNvPr id="2" name="Slide Image Placeholder 1"/>
+          <p:cNvSpPr>
+            <a:spLocks xmlns:a="http://schemas.openxmlformats.org/drawingml/2006/main" noGrp="1"/>
+          </p:cNvSpPr>
+          <p:nvPr>
+            <p:ph type="sldImg" idx="0"/>
+          </p:nvPr>
+        </p:nvSpPr>
+        <p:spPr/>
+      </p:sp>
+      <p:sp>
+        <p:nvSpPr>
+          <p:cNvPr id="3" name="Notes Placeholder 2"/>
+          <p:cNvSpPr>
+            <a:spLocks xmlns:a="http://schemas.openxmlformats.org/drawingml/2006/main" noGrp="1"/>
+          </p:cNvSpPr>
+          <p:nvPr>
+            <p:ph type="body" idx="1"/>
+          </p:nvPr>
+        </p:nvSpPr>
+        <p:spPr/>
+        <p:txBody>
+          <a:bodyPr xmlns:a="http://schemas.openxmlformats.org/drawingml/2006/main"/>
+          <a:lstStyle xmlns:a="http://schemas.openxmlformats.org/drawingml/2006/main"/>
+          <a:p xmlns:a="http://schemas.openxmlformats.org/drawingml/2006/main">
+            <a:r>
+              <a:t>{"assessment":[["Data model and runtime rules","The draft separates authored inputs from computed results and defines placement, adjustment, query and bake behavior."],["Group alignment","Input and declaration rules have agreement. Detailed conventions and identities await review."],["Prototype limitations","Lighting directions lack an error bound. Rotation uncertainty is unquantified."],["Verification coverage","Selected workflows and distinguishing controls support the rules. Broader composition and continuous space/time coverage remain unverified."]],"placement":[["Physical orientation","One heading/pitch/roll tuple describes physical attitude against local east, north and up. Projection effects stay computed."],["Project adjustments","The directly bound model's own xformOps adjust its placed result in a fixed project chart, including ordinary pivots."],["Child objects","Child transforms define model-local geometry. Their offsets follow model axes and the geospatial attitude."],["Repeated models","Each instance offset retains its instancer-local meaning. Independent prototype placement participates once. A required unavailable inverse fails."],["Geographic scene results","Geographic queries retain longitude/latitude/height. Cartesian geometry and bounds use the datum's Earth-centred frame."]],"data":[["Native data associations","Declare the asset, field and coordinate domain. Preserve named dimensions and observation times."],["WKT string normalization","Normalize lexical spelling without losing represented information. Equal tokens establish serialized identity."],["Semantic CRS comparison","Different normalized texts can represent equivalent CRSs. Comparison names its criteria and domain."],["Dependency declaration","Profiles records complete publication coverage, including unloaded and retained variant content. Fixed v1 identities remain proposed."],["Baked coordinate context","Retain a Cartesian CRS and double-precision origin without an active source placement binding. Ordinary USD controls subsequent transforms."]]}</a:t>
+            </a:r>
+          </a:p>
+          <a:p xmlns:a="http://schemas.openxmlformats.org/drawingml/2006/main">
+            <a:r>
+              <a:t>[["Python and C++ readers","213,263 coordinate results per reader. Maximum measured difference 3.39e-08 m. Shared PROJ and decoding."],["Omniverse stage geometry","Reuses Python placement. Readback covers 177,872 vertices and 48 edit, failure and recovery checks across 44 jobs."],["Hydra / Storm","Two selected ordinary USD bakes reach native rendering using C++-resolved placements."],["Recorded tests","124 contract tests and 70 distinguishing controls pass. Separate diagnostics expose the reported prototype limits."],["Source preservation","Original inputs and 50 frozen execution files remain unchanged. The immutable receipt identifies exact executed content."],["Bake readbacks","11 selected exports checked. No general material/primvar, physics or continuous trajectory conformance is claimed."]]</a:t>
+            </a:r>
+          </a:p>
+          <a:p xmlns:a="http://schemas.openxmlformats.org/drawingml/2006/main">
+            <a:r>
+              <a:t>Proposal e51919927ced49b9c68bcd86160be468121f633d SHA-256 276ae17d60e9b4801947525528c98cfac58b25a7e6ac5999dc01ddb60a2e83b9</a:t>
+            </a:r>
+          </a:p>
+          <a:p xmlns:a="http://schemas.openxmlformats.org/drawingml/2006/main">
+            <a:r>
+              <a:t>README SHA-256 45d0fcc44e276a85c016d374e6b918459c016533b0cb63f0f87bce1ecda57c35</a:t>
+            </a:r>
+          </a:p>
+          <a:p xmlns:a="http://schemas.openxmlformats.org/drawingml/2006/main">
+            <a:r>
+              <a:t>Immutable receipt SHA-256 06cb0fd2cefe30543d04bb461497f3071d5027de6094175fdc52b969428bb975</a:t>
             </a:r>
           </a:p>
           <a:p xmlns:a="http://schemas.openxmlformats.org/drawingml/2006/main">
@@ -1155,7 +1528,7 @@
           </a:p>
           <a:p xmlns:a="http://schemas.openxmlformats.org/drawingml/2006/main">
             <a:r>
-              <a:t>Proposal clause: #### Authored properties at proposal/proposal-source.txt:1588</a:t>
+              <a:t>Proposal clause: #### Authored properties at proposal/proposal-source.txt:1607</a:t>
             </a:r>
           </a:p>
           <a:p xmlns:a="http://schemas.openxmlformats.org/drawingml/2006/main">
@@ -1170,17 +1543,17 @@
           </a:p>
           <a:p xmlns:a="http://schemas.openxmlformats.org/drawingml/2006/main">
             <a:r>
-              <a:t>Proposal da2f49aad42811fc5d660c7bcf9ff190599f2d74 SHA-256 2613649fd06516d77339d73b56432e84613dd1925e739761efea738f41b4f0a4</a:t>
-            </a:r>
-          </a:p>
-          <a:p xmlns:a="http://schemas.openxmlformats.org/drawingml/2006/main">
-            <a:r>
-              <a:t>README SHA-256 f97eb66b4642d85817c1bface96cc358cea536a8a8104a439f22a2715af103d5</a:t>
-            </a:r>
-          </a:p>
-          <a:p xmlns:a="http://schemas.openxmlformats.org/drawingml/2006/main">
-            <a:r>
-              <a:t>Immutable receipt SHA-256 ad59ead3c86c780b6d79a243a23032e492c14809f0c01f575397ae221939068f</a:t>
+              <a:t>Proposal e51919927ced49b9c68bcd86160be468121f633d SHA-256 276ae17d60e9b4801947525528c98cfac58b25a7e6ac5999dc01ddb60a2e83b9</a:t>
+            </a:r>
+          </a:p>
+          <a:p xmlns:a="http://schemas.openxmlformats.org/drawingml/2006/main">
+            <a:r>
+              <a:t>README SHA-256 45d0fcc44e276a85c016d374e6b918459c016533b0cb63f0f87bce1ecda57c35</a:t>
+            </a:r>
+          </a:p>
+          <a:p xmlns:a="http://schemas.openxmlformats.org/drawingml/2006/main">
+            <a:r>
+              <a:t>Immutable receipt SHA-256 06cb0fd2cefe30543d04bb461497f3071d5027de6094175fdc52b969428bb975</a:t>
             </a:r>
           </a:p>
           <a:p xmlns:a="http://schemas.openxmlformats.org/drawingml/2006/main">
@@ -1290,7 +1663,7 @@
           </a:p>
           <a:p xmlns:a="http://schemas.openxmlformats.org/drawingml/2006/main">
             <a:r>
-              <a:t>Proposal clause: ### Source placement evaluation and transform order at proposal/proposal-source.txt:1916</a:t>
+              <a:t>Proposal clause: ### Source placement evaluation and transform order at proposal/proposal-source.txt:1923</a:t>
             </a:r>
           </a:p>
           <a:p xmlns:a="http://schemas.openxmlformats.org/drawingml/2006/main">
@@ -1305,17 +1678,17 @@
           </a:p>
           <a:p xmlns:a="http://schemas.openxmlformats.org/drawingml/2006/main">
             <a:r>
-              <a:t>Proposal da2f49aad42811fc5d660c7bcf9ff190599f2d74 SHA-256 2613649fd06516d77339d73b56432e84613dd1925e739761efea738f41b4f0a4</a:t>
-            </a:r>
-          </a:p>
-          <a:p xmlns:a="http://schemas.openxmlformats.org/drawingml/2006/main">
-            <a:r>
-              <a:t>README SHA-256 f97eb66b4642d85817c1bface96cc358cea536a8a8104a439f22a2715af103d5</a:t>
-            </a:r>
-          </a:p>
-          <a:p xmlns:a="http://schemas.openxmlformats.org/drawingml/2006/main">
-            <a:r>
-              <a:t>Immutable receipt SHA-256 ad59ead3c86c780b6d79a243a23032e492c14809f0c01f575397ae221939068f</a:t>
+              <a:t>Proposal e51919927ced49b9c68bcd86160be468121f633d SHA-256 276ae17d60e9b4801947525528c98cfac58b25a7e6ac5999dc01ddb60a2e83b9</a:t>
+            </a:r>
+          </a:p>
+          <a:p xmlns:a="http://schemas.openxmlformats.org/drawingml/2006/main">
+            <a:r>
+              <a:t>README SHA-256 45d0fcc44e276a85c016d374e6b918459c016533b0cb63f0f87bce1ecda57c35</a:t>
+            </a:r>
+          </a:p>
+          <a:p xmlns:a="http://schemas.openxmlformats.org/drawingml/2006/main">
+            <a:r>
+              <a:t>Immutable receipt SHA-256 06cb0fd2cefe30543d04bb461497f3071d5027de6094175fdc52b969428bb975</a:t>
             </a:r>
           </a:p>
           <a:p xmlns:a="http://schemas.openxmlformats.org/drawingml/2006/main">
@@ -1425,7 +1798,7 @@
           </a:p>
           <a:p xmlns:a="http://schemas.openxmlformats.org/drawingml/2006/main">
             <a:r>
-              <a:t>Proposal clause: #### Evaluation at proposal/proposal-source.txt:2016</a:t>
+              <a:t>Proposal clause: #### Evaluation at proposal/proposal-source.txt:2023</a:t>
             </a:r>
           </a:p>
           <a:p xmlns:a="http://schemas.openxmlformats.org/drawingml/2006/main">
@@ -1440,17 +1813,17 @@
           </a:p>
           <a:p xmlns:a="http://schemas.openxmlformats.org/drawingml/2006/main">
             <a:r>
-              <a:t>Proposal da2f49aad42811fc5d660c7bcf9ff190599f2d74 SHA-256 2613649fd06516d77339d73b56432e84613dd1925e739761efea738f41b4f0a4</a:t>
-            </a:r>
-          </a:p>
-          <a:p xmlns:a="http://schemas.openxmlformats.org/drawingml/2006/main">
-            <a:r>
-              <a:t>README SHA-256 f97eb66b4642d85817c1bface96cc358cea536a8a8104a439f22a2715af103d5</a:t>
-            </a:r>
-          </a:p>
-          <a:p xmlns:a="http://schemas.openxmlformats.org/drawingml/2006/main">
-            <a:r>
-              <a:t>Immutable receipt SHA-256 ad59ead3c86c780b6d79a243a23032e492c14809f0c01f575397ae221939068f</a:t>
+              <a:t>Proposal e51919927ced49b9c68bcd86160be468121f633d SHA-256 276ae17d60e9b4801947525528c98cfac58b25a7e6ac5999dc01ddb60a2e83b9</a:t>
+            </a:r>
+          </a:p>
+          <a:p xmlns:a="http://schemas.openxmlformats.org/drawingml/2006/main">
+            <a:r>
+              <a:t>README SHA-256 45d0fcc44e276a85c016d374e6b918459c016533b0cb63f0f87bce1ecda57c35</a:t>
+            </a:r>
+          </a:p>
+          <a:p xmlns:a="http://schemas.openxmlformats.org/drawingml/2006/main">
+            <a:r>
+              <a:t>Immutable receipt SHA-256 06cb0fd2cefe30543d04bb461497f3071d5027de6094175fdc52b969428bb975</a:t>
             </a:r>
           </a:p>
           <a:p xmlns:a="http://schemas.openxmlformats.org/drawingml/2006/main">
@@ -1545,7 +1918,7 @@
           </a:p>
           <a:p xmlns:a="http://schemas.openxmlformats.org/drawingml/2006/main">
             <a:r>
-              <a:t>Observed result: The readers compare 213,243 coordinate results. The maximum measured physical difference is 3.39e-08 m.</a:t>
+              <a:t>Observed result: The readers compare 213,263 coordinate results. The maximum measured physical difference is 3.39e-08 m.</a:t>
             </a:r>
           </a:p>
           <a:p xmlns:a="http://schemas.openxmlformats.org/drawingml/2006/main">
@@ -1560,7 +1933,7 @@
           </a:p>
           <a:p xmlns:a="http://schemas.openxmlformats.org/drawingml/2006/main">
             <a:r>
-              <a:t>Proposal clause: ### Extent and result comparison at proposal/proposal-source.txt:2197</a:t>
+              <a:t>Proposal clause: ### Extent and result comparison at proposal/proposal-source.txt:2208</a:t>
             </a:r>
           </a:p>
           <a:p xmlns:a="http://schemas.openxmlformats.org/drawingml/2006/main">
@@ -1575,17 +1948,17 @@
           </a:p>
           <a:p xmlns:a="http://schemas.openxmlformats.org/drawingml/2006/main">
             <a:r>
-              <a:t>Proposal da2f49aad42811fc5d660c7bcf9ff190599f2d74 SHA-256 2613649fd06516d77339d73b56432e84613dd1925e739761efea738f41b4f0a4</a:t>
-            </a:r>
-          </a:p>
-          <a:p xmlns:a="http://schemas.openxmlformats.org/drawingml/2006/main">
-            <a:r>
-              <a:t>README SHA-256 f97eb66b4642d85817c1bface96cc358cea536a8a8104a439f22a2715af103d5</a:t>
-            </a:r>
-          </a:p>
-          <a:p xmlns:a="http://schemas.openxmlformats.org/drawingml/2006/main">
-            <a:r>
-              <a:t>Immutable receipt SHA-256 ad59ead3c86c780b6d79a243a23032e492c14809f0c01f575397ae221939068f</a:t>
+              <a:t>Proposal e51919927ced49b9c68bcd86160be468121f633d SHA-256 276ae17d60e9b4801947525528c98cfac58b25a7e6ac5999dc01ddb60a2e83b9</a:t>
+            </a:r>
+          </a:p>
+          <a:p xmlns:a="http://schemas.openxmlformats.org/drawingml/2006/main">
+            <a:r>
+              <a:t>README SHA-256 45d0fcc44e276a85c016d374e6b918459c016533b0cb63f0f87bce1ecda57c35</a:t>
+            </a:r>
+          </a:p>
+          <a:p xmlns:a="http://schemas.openxmlformats.org/drawingml/2006/main">
+            <a:r>
+              <a:t>Immutable receipt SHA-256 06cb0fd2cefe30543d04bb461497f3071d5027de6094175fdc52b969428bb975</a:t>
             </a:r>
           </a:p>
           <a:p xmlns:a="http://schemas.openxmlformats.org/drawingml/2006/main">
@@ -1695,7 +2068,7 @@
           </a:p>
           <a:p xmlns:a="http://schemas.openxmlformats.org/drawingml/2006/main">
             <a:r>
-              <a:t>Proposal clause: ### Explicit export and sampling at proposal/proposal-source.txt:2254</a:t>
+              <a:t>Proposal clause: ### Explicit export and sampling at proposal/proposal-source.txt:2269</a:t>
             </a:r>
           </a:p>
           <a:p xmlns:a="http://schemas.openxmlformats.org/drawingml/2006/main">
@@ -1710,17 +2083,17 @@
           </a:p>
           <a:p xmlns:a="http://schemas.openxmlformats.org/drawingml/2006/main">
             <a:r>
-              <a:t>Proposal da2f49aad42811fc5d660c7bcf9ff190599f2d74 SHA-256 2613649fd06516d77339d73b56432e84613dd1925e739761efea738f41b4f0a4</a:t>
-            </a:r>
-          </a:p>
-          <a:p xmlns:a="http://schemas.openxmlformats.org/drawingml/2006/main">
-            <a:r>
-              <a:t>README SHA-256 f97eb66b4642d85817c1bface96cc358cea536a8a8104a439f22a2715af103d5</a:t>
-            </a:r>
-          </a:p>
-          <a:p xmlns:a="http://schemas.openxmlformats.org/drawingml/2006/main">
-            <a:r>
-              <a:t>Immutable receipt SHA-256 ad59ead3c86c780b6d79a243a23032e492c14809f0c01f575397ae221939068f</a:t>
+              <a:t>Proposal e51919927ced49b9c68bcd86160be468121f633d SHA-256 276ae17d60e9b4801947525528c98cfac58b25a7e6ac5999dc01ddb60a2e83b9</a:t>
+            </a:r>
+          </a:p>
+          <a:p xmlns:a="http://schemas.openxmlformats.org/drawingml/2006/main">
+            <a:r>
+              <a:t>README SHA-256 45d0fcc44e276a85c016d374e6b918459c016533b0cb63f0f87bce1ecda57c35</a:t>
+            </a:r>
+          </a:p>
+          <a:p xmlns:a="http://schemas.openxmlformats.org/drawingml/2006/main">
+            <a:r>
+              <a:t>Immutable receipt SHA-256 06cb0fd2cefe30543d04bb461497f3071d5027de6094175fdc52b969428bb975</a:t>
             </a:r>
           </a:p>
           <a:p xmlns:a="http://schemas.openxmlformats.org/drawingml/2006/main">
@@ -1830,7 +2203,7 @@
           </a:p>
           <a:p xmlns:a="http://schemas.openxmlformats.org/drawingml/2006/main">
             <a:r>
-              <a:t>Proposal clause: ### External measurement association at proposal/proposal-source.txt:1689</a:t>
+              <a:t>Proposal clause: ### External measurement association at proposal/proposal-source.txt:1708</a:t>
             </a:r>
           </a:p>
           <a:p xmlns:a="http://schemas.openxmlformats.org/drawingml/2006/main">
@@ -1845,17 +2218,17 @@
           </a:p>
           <a:p xmlns:a="http://schemas.openxmlformats.org/drawingml/2006/main">
             <a:r>
-              <a:t>Proposal da2f49aad42811fc5d660c7bcf9ff190599f2d74 SHA-256 2613649fd06516d77339d73b56432e84613dd1925e739761efea738f41b4f0a4</a:t>
-            </a:r>
-          </a:p>
-          <a:p xmlns:a="http://schemas.openxmlformats.org/drawingml/2006/main">
-            <a:r>
-              <a:t>README SHA-256 f97eb66b4642d85817c1bface96cc358cea536a8a8104a439f22a2715af103d5</a:t>
-            </a:r>
-          </a:p>
-          <a:p xmlns:a="http://schemas.openxmlformats.org/drawingml/2006/main">
-            <a:r>
-              <a:t>Immutable receipt SHA-256 ad59ead3c86c780b6d79a243a23032e492c14809f0c01f575397ae221939068f</a:t>
+              <a:t>Proposal e51919927ced49b9c68bcd86160be468121f633d SHA-256 276ae17d60e9b4801947525528c98cfac58b25a7e6ac5999dc01ddb60a2e83b9</a:t>
+            </a:r>
+          </a:p>
+          <a:p xmlns:a="http://schemas.openxmlformats.org/drawingml/2006/main">
+            <a:r>
+              <a:t>README SHA-256 45d0fcc44e276a85c016d374e6b918459c016533b0cb63f0f87bce1ecda57c35</a:t>
+            </a:r>
+          </a:p>
+          <a:p xmlns:a="http://schemas.openxmlformats.org/drawingml/2006/main">
+            <a:r>
+              <a:t>Immutable receipt SHA-256 06cb0fd2cefe30543d04bb461497f3071d5027de6094175fdc52b969428bb975</a:t>
             </a:r>
           </a:p>
           <a:p xmlns:a="http://schemas.openxmlformats.org/drawingml/2006/main">
@@ -1935,27 +2308,62 @@
           <a:lstStyle xmlns:a="http://schemas.openxmlformats.org/drawingml/2006/main"/>
           <a:p xmlns:a="http://schemas.openxmlformats.org/drawingml/2006/main">
             <a:r>
-              <a:t>{"assessment":[["Data model and runtime rules","The draft separates authored inputs from computed results and defines placement, adjustment, query and bake behavior."],["Group alignment","Input and declaration rules have agreement. Detailed conventions and identities await review."],["Prototype limitations","Lighting directions lack an error bound. Rotation uncertainty is unquantified. A quoted CRS name causes false rejection."],["Verification coverage","Selected workflows and distinguishing controls support the rules. Broader composition and continuous space/time coverage remain unverified."]],"placement":[["Physical orientation","One heading/pitch/roll tuple describes physical attitude against local east, north and up. Projection effects stay computed."],["Project adjustments","The directly bound model's own xformOps adjust its placed result in a fixed project chart, including ordinary pivots."],["Child objects","Child transforms define model-local geometry. Their offsets follow model axes and the geospatial attitude."],["Repeated models","Each instance offset retains its instancer-local meaning. Independent prototype placement participates once. A required unavailable inverse fails."],["Geographic scene results","Geographic queries retain longitude/latitude/height. Cartesian geometry and bounds use the datum's Earth-centred frame."]],"data":[["Native data associations","Declare the asset, field and coordinate domain. Preserve named dimensions and observation times."],["WKT string normalization","Normalize lexical spelling without losing represented information. Equal tokens establish serialized identity."],["Semantic CRS comparison","Different normalized texts can represent equivalent CRSs. Comparison names its criteria and domain."],["Dependency declaration","Profiles records complete publication coverage, including unloaded and retained variant content. Fixed v1 identities remain proposed."],["Baked coordinate context","Retain a Cartesian CRS and double-precision origin without an active source placement binding. Ordinary USD controls subsequent transforms."]]}</a:t>
-            </a:r>
-          </a:p>
-          <a:p xmlns:a="http://schemas.openxmlformats.org/drawingml/2006/main">
-            <a:r>
-              <a:t>[["Normal transport","Confirmed prototype defect: one large projected face differs by 1.24 degrees across its domain. Centroid sampling has no justified domain/error bound. The source already requires a faithful derivative or covered approximation."],["Near-half-turn numerics","The proposed failure rule is clear. The prototype's 64-epsilon guard lacks a demonstrated rotational uncertainty bound and a quantified native diagnostic."],["WKT quoted text","Confirmed shared prototype defect: a valid CRS name containing COORDINATEMETADATA is mistaken for a deferred epoch wrapper. Capability detection must use WKT structure, not quoted text."],["Publisher coverage","Retained-variant and unloaded-payload controls pass, including detection of a stale empty claim. This is not a production validator for every composition or variant combination."],["Consumer coverage","Python and C++ share PROJ and external-data decoding. Omniverse reuses Python. General material/primvar baking, physics and nonlinear continuous space/time certificates remain unverified or visibly unsupported."]]</a:t>
-            </a:r>
-          </a:p>
-          <a:p xmlns:a="http://schemas.openxmlformats.org/drawingml/2006/main">
-            <a:r>
-              <a:t>Proposal da2f49aad42811fc5d660c7bcf9ff190599f2d74 SHA-256 2613649fd06516d77339d73b56432e84613dd1925e739761efea738f41b4f0a4</a:t>
-            </a:r>
-          </a:p>
-          <a:p xmlns:a="http://schemas.openxmlformats.org/drawingml/2006/main">
-            <a:r>
-              <a:t>README SHA-256 f97eb66b4642d85817c1bface96cc358cea536a8a8104a439f22a2715af103d5</a:t>
-            </a:r>
-          </a:p>
-          <a:p xmlns:a="http://schemas.openxmlformats.org/drawingml/2006/main">
-            <a:r>
-              <a:t>Immutable receipt SHA-256 ad59ead3c86c780b6d79a243a23032e492c14809f0c01f575397ae221939068f</a:t>
+              <a:t>Question: Can a consumer discover required geospatial processing while the content payload stays closed?</a:t>
+            </a:r>
+          </a:p>
+          <a:p xmlns:a="http://schemas.openxmlformats.org/drawingml/2006/main">
+            <a:r>
+              <a:t>Proposed rule: Publishers place conservative Profiles declarations outside payloads. Complete-positive, complete-empty and unknown coverage have distinct meanings.</a:t>
+            </a:r>
+          </a:p>
+          <a:p xmlns:a="http://schemas.openxmlformats.org/drawingml/2006/main">
+            <a:r>
+              <a:t>Expected behavior: A consumer detects a required dependency without loading content. Absence alone never proves that no processing is needed.</a:t>
+            </a:r>
+          </a:p>
+          <a:p xmlns:a="http://schemas.openxmlformats.org/drawingml/2006/main">
+            <a:r>
+              <a:t>Observed result: The three summary cases retain closed payloads during detection. A separate publisher check catches a stale empty claim that retains a georeferenced variant.</a:t>
+            </a:r>
+          </a:p>
+          <a:p xmlns:a="http://schemas.openxmlformats.org/drawingml/2006/main">
+            <a:r>
+              <a:t>What this says about the proposal: The declaration supports useful consumer decisions before content loading. Publishers remain responsible for truthful coverage through assembly and publication.</a:t>
+            </a:r>
+          </a:p>
+          <a:p xmlns:a="http://schemas.openxmlformats.org/drawingml/2006/main">
+            <a:r>
+              <a:t>Limit: Selected payload and retained-variant controls. Fixed v1 names and the standards approval owner still need group agreement.</a:t>
+            </a:r>
+          </a:p>
+          <a:p xmlns:a="http://schemas.openxmlformats.org/drawingml/2006/main">
+            <a:r>
+              <a:t>Proposal clause: ### Dependency declaration with Profiles at proposal/proposal-source.txt:1772</a:t>
+            </a:r>
+          </a:p>
+          <a:p xmlns:a="http://schemas.openxmlformats.org/drawingml/2006/main">
+            <a:r>
+              <a:t>Requirements: 5, 6, 7, 25, 27, 29</a:t>
+            </a:r>
+          </a:p>
+          <a:p xmlns:a="http://schemas.openxmlformats.org/drawingml/2006/main">
+            <a:r>
+              <a:t/>
+            </a:r>
+          </a:p>
+          <a:p xmlns:a="http://schemas.openxmlformats.org/drawingml/2006/main">
+            <a:r>
+              <a:t>Proposal e51919927ced49b9c68bcd86160be468121f633d SHA-256 276ae17d60e9b4801947525528c98cfac58b25a7e6ac5999dc01ddb60a2e83b9</a:t>
+            </a:r>
+          </a:p>
+          <a:p xmlns:a="http://schemas.openxmlformats.org/drawingml/2006/main">
+            <a:r>
+              <a:t>README SHA-256 45d0fcc44e276a85c016d374e6b918459c016533b0cb63f0f87bce1ecda57c35</a:t>
+            </a:r>
+          </a:p>
+          <a:p xmlns:a="http://schemas.openxmlformats.org/drawingml/2006/main">
+            <a:r>
+              <a:t>Immutable receipt SHA-256 06cb0fd2cefe30543d04bb461497f3071d5027de6094175fdc52b969428bb975</a:t>
             </a:r>
           </a:p>
           <a:p xmlns:a="http://schemas.openxmlformats.org/drawingml/2006/main">
@@ -2035,42 +2443,42 @@
           <a:lstStyle xmlns:a="http://schemas.openxmlformats.org/drawingml/2006/main"/>
           <a:p xmlns:a="http://schemas.openxmlformats.org/drawingml/2006/main">
             <a:r>
-              <a:t>Question: Can a project's local survey grid participate as a defined CRS?</a:t>
-            </a:r>
-          </a:p>
-          <a:p xmlns:a="http://schemas.openxmlformats.org/drawingml/2006/main">
-            <a:r>
-              <a:t>Proposed rule: The source WKT describes how a calibrated site grid relates to a broader CRS, including its units and height meaning.</a:t>
-            </a:r>
-          </a:p>
-          <a:p xmlns:a="http://schemas.openxmlformats.org/drawingml/2006/main">
-            <a:r>
-              <a:t>Expected behavior: Partner survey lines resolve into the site grid without redefining the model units or up direction.</a:t>
-            </a:r>
-          </a:p>
-          <a:p xmlns:a="http://schemas.openxmlformats.org/drawingml/2006/main">
-            <a:r>
-              <a:t>Observed result: The original LandXML survey breaklines resolve and reach an ordinary USD bake rendered by Storm.</a:t>
-            </a:r>
-          </a:p>
-          <a:p xmlns:a="http://schemas.openxmlformats.org/drawingml/2006/main">
-            <a:r>
-              <a:t>What this says about the proposal: The partner case exercises a site's calibrated CRS. Its WKT-carried calibration participates in resolution.</a:t>
-            </a:r>
-          </a:p>
-          <a:p xmlns:a="http://schemas.openxmlformats.org/drawingml/2006/main">
-            <a:r>
-              <a:t>Limit: The survey-line image does not establish independent survey accuracy or a continuous terrain-surface certificate.</a:t>
-            </a:r>
-          </a:p>
-          <a:p xmlns:a="http://schemas.openxmlformats.org/drawingml/2006/main">
-            <a:r>
-              <a:t>Proposal clause: #### Decision on question 7: site calibration at proposal/proposal-source.txt:1344</a:t>
-            </a:r>
-          </a:p>
-          <a:p xmlns:a="http://schemas.openxmlformats.org/drawingml/2006/main">
-            <a:r>
-              <a:t>Requirements: 4, 14, 15, 17</a:t>
+              <a:t>Question: Can different WKT spellings remain usable without losing coordinate meaning?</a:t>
+            </a:r>
+          </a:p>
+          <a:p xmlns:a="http://schemas.openxmlformats.org/drawingml/2006/main">
+            <a:r>
+              <a:t>Proposed rule: Writers emit lossless normal text. Readers accept supported valid non-normal WKT with a warning. Normalized text identity and semantic CRS equivalence remain separate.</a:t>
+            </a:r>
+          </a:p>
+          <a:p xmlns:a="http://schemas.openxmlformats.org/drawingml/2006/main">
+            <a:r>
+              <a:t>Expected behavior: Numeric spellings 1, 1.00 and 1E0 normalize to 1. Quoted names and exact decimal values remain represented.</a:t>
+            </a:r>
+          </a:p>
+          <a:p xmlns:a="http://schemas.openxmlformats.org/drawingml/2006/main">
+            <a:r>
+              <a:t>Observed result: Both placement readers resolve each spelling to the expected coordinates. The Omniverse stage writeback checks the same cases. A quoted keyword remains ordinary name text.</a:t>
+            </a:r>
+          </a:p>
+          <a:p xmlns:a="http://schemas.openxmlformats.org/drawingml/2006/main">
+            <a:r>
+              <a:t>What this says about the proposal: The draft specifies interoperable reader behavior without relaxing the writer convention or treating unequal text as unequal CRS meaning.</a:t>
+            </a:r>
+          </a:p>
+          <a:p xmlns:a="http://schemas.openxmlformats.org/drawingml/2006/main">
+            <a:r>
+              <a:t>Limit: This lexical profile remains proposed. Invalid syntax and unsupported coordinate meaning still fail. Coordinate epochs remain deferred.</a:t>
+            </a:r>
+          </a:p>
+          <a:p xmlns:a="http://schemas.openxmlformats.org/drawingml/2006/main">
+            <a:r>
+              <a:t>Proposal clause: ### WKT string normalization at proposal/proposal-source.txt:1830</a:t>
+            </a:r>
+          </a:p>
+          <a:p xmlns:a="http://schemas.openxmlformats.org/drawingml/2006/main">
+            <a:r>
+              <a:t>Requirements: 1, 2, 3, 21, 27, 28, 29, 31</a:t>
             </a:r>
           </a:p>
           <a:p xmlns:a="http://schemas.openxmlformats.org/drawingml/2006/main">
@@ -2080,17 +2488,17 @@
           </a:p>
           <a:p xmlns:a="http://schemas.openxmlformats.org/drawingml/2006/main">
             <a:r>
-              <a:t>Proposal da2f49aad42811fc5d660c7bcf9ff190599f2d74 SHA-256 2613649fd06516d77339d73b56432e84613dd1925e739761efea738f41b4f0a4</a:t>
-            </a:r>
-          </a:p>
-          <a:p xmlns:a="http://schemas.openxmlformats.org/drawingml/2006/main">
-            <a:r>
-              <a:t>README SHA-256 f97eb66b4642d85817c1bface96cc358cea536a8a8104a439f22a2715af103d5</a:t>
-            </a:r>
-          </a:p>
-          <a:p xmlns:a="http://schemas.openxmlformats.org/drawingml/2006/main">
-            <a:r>
-              <a:t>Immutable receipt SHA-256 ad59ead3c86c780b6d79a243a23032e492c14809f0c01f575397ae221939068f</a:t>
+              <a:t>Proposal e51919927ced49b9c68bcd86160be468121f633d SHA-256 276ae17d60e9b4801947525528c98cfac58b25a7e6ac5999dc01ddb60a2e83b9</a:t>
+            </a:r>
+          </a:p>
+          <a:p xmlns:a="http://schemas.openxmlformats.org/drawingml/2006/main">
+            <a:r>
+              <a:t>README SHA-256 45d0fcc44e276a85c016d374e6b918459c016533b0cb63f0f87bce1ecda57c35</a:t>
+            </a:r>
+          </a:p>
+          <a:p xmlns:a="http://schemas.openxmlformats.org/drawingml/2006/main">
+            <a:r>
+              <a:t>Immutable receipt SHA-256 06cb0fd2cefe30543d04bb461497f3071d5027de6094175fdc52b969428bb975</a:t>
             </a:r>
           </a:p>
           <a:p xmlns:a="http://schemas.openxmlformats.org/drawingml/2006/main">
@@ -2147,7 +2555,7 @@
           <p:cNvPr id="3" name="Title">
             <a:extLst xmlns:a="http://schemas.openxmlformats.org/drawingml/2006/main">
               <a:ext uri="{FF2B5EF4-FFF2-40B4-BE49-F238E27FC236}">
-                <a16:creationId xmlns:a16="http://schemas.microsoft.com/office/drawing/2014/main" id="{A50AC5D3-9C97-4890-A84B-63B6523E39BA}"/>
+                <a16:creationId xmlns:a16="http://schemas.microsoft.com/office/drawing/2014/main" id="{947E1390-9975-45F8-B4D7-445E42E10DEE}"/>
               </a:ext>
             </a:extLst>
           </p:cNvPr>
@@ -2304,7 +2712,7 @@
           <p:cNvPr id="2" name="Subtitle">
             <a:extLst xmlns:a="http://schemas.openxmlformats.org/drawingml/2006/main">
               <a:ext uri="{FF2B5EF4-FFF2-40B4-BE49-F238E27FC236}">
-                <a16:creationId xmlns:a16="http://schemas.microsoft.com/office/drawing/2014/main" id="{AE74225E-70BD-434B-93C7-6BE012BDE7C8}"/>
+                <a16:creationId xmlns:a16="http://schemas.microsoft.com/office/drawing/2014/main" id="{39A04E23-F584-4268-83A4-1190268F8F82}"/>
               </a:ext>
             </a:extLst>
           </p:cNvPr>
@@ -2478,7 +2886,7 @@
           <p:cNvPr id="2" name="Section title">
             <a:extLst xmlns:a="http://schemas.openxmlformats.org/drawingml/2006/main">
               <a:ext uri="{FF2B5EF4-FFF2-40B4-BE49-F238E27FC236}">
-                <a16:creationId xmlns:a16="http://schemas.microsoft.com/office/drawing/2014/main" id="{83815F44-81BC-40E4-A600-462971652472}"/>
+                <a16:creationId xmlns:a16="http://schemas.microsoft.com/office/drawing/2014/main" id="{4130C5C0-8B3B-4FF8-AFC1-CCA359F0C9BE}"/>
               </a:ext>
             </a:extLst>
           </p:cNvPr>
@@ -2652,7 +3060,7 @@
           <p:cNvPr id="3" name="Title">
             <a:extLst xmlns:a="http://schemas.openxmlformats.org/drawingml/2006/main">
               <a:ext uri="{FF2B5EF4-FFF2-40B4-BE49-F238E27FC236}">
-                <a16:creationId xmlns:a16="http://schemas.microsoft.com/office/drawing/2014/main" id="{3D05F309-2D97-49E7-B31C-0020415A5CC1}"/>
+                <a16:creationId xmlns:a16="http://schemas.microsoft.com/office/drawing/2014/main" id="{0D7E462E-EEEB-49A3-A917-27A3633E99C3}"/>
               </a:ext>
             </a:extLst>
           </p:cNvPr>
@@ -2809,7 +3217,7 @@
           <p:cNvPr id="2" name="Body">
             <a:extLst xmlns:a="http://schemas.openxmlformats.org/drawingml/2006/main">
               <a:ext uri="{FF2B5EF4-FFF2-40B4-BE49-F238E27FC236}">
-                <a16:creationId xmlns:a16="http://schemas.microsoft.com/office/drawing/2014/main" id="{2814E0B4-1840-4BF6-BFE2-1FBC9617EF05}"/>
+                <a16:creationId xmlns:a16="http://schemas.microsoft.com/office/drawing/2014/main" id="{1674BB7E-0B51-414F-ABF7-D47C634E83C1}"/>
               </a:ext>
             </a:extLst>
           </p:cNvPr>
@@ -2983,7 +3391,7 @@
           <p:cNvPr id="4" name="Title">
             <a:extLst xmlns:a="http://schemas.openxmlformats.org/drawingml/2006/main">
               <a:ext uri="{FF2B5EF4-FFF2-40B4-BE49-F238E27FC236}">
-                <a16:creationId xmlns:a16="http://schemas.microsoft.com/office/drawing/2014/main" id="{64B1183B-6FBC-472E-8520-708D0186B1C4}"/>
+                <a16:creationId xmlns:a16="http://schemas.microsoft.com/office/drawing/2014/main" id="{EBF5D12B-7A29-4E16-A018-5420D7B8CF6C}"/>
               </a:ext>
             </a:extLst>
           </p:cNvPr>
@@ -3140,7 +3548,7 @@
           <p:cNvPr id="2" name="Left column">
             <a:extLst xmlns:a="http://schemas.openxmlformats.org/drawingml/2006/main">
               <a:ext uri="{FF2B5EF4-FFF2-40B4-BE49-F238E27FC236}">
-                <a16:creationId xmlns:a16="http://schemas.microsoft.com/office/drawing/2014/main" id="{CB73622A-047C-497B-B5D2-497EB766C8FC}"/>
+                <a16:creationId xmlns:a16="http://schemas.microsoft.com/office/drawing/2014/main" id="{D95503E9-11D3-44FD-9423-8E4DD1855991}"/>
               </a:ext>
             </a:extLst>
           </p:cNvPr>
@@ -3297,7 +3705,7 @@
           <p:cNvPr id="3" name="Right column">
             <a:extLst xmlns:a="http://schemas.openxmlformats.org/drawingml/2006/main">
               <a:ext uri="{FF2B5EF4-FFF2-40B4-BE49-F238E27FC236}">
-                <a16:creationId xmlns:a16="http://schemas.microsoft.com/office/drawing/2014/main" id="{1F6CF98F-C49D-4E28-9F61-0811C2929619}"/>
+                <a16:creationId xmlns:a16="http://schemas.microsoft.com/office/drawing/2014/main" id="{AB80C572-EDDA-4711-AB45-88AE2ED15B2C}"/>
               </a:ext>
             </a:extLst>
           </p:cNvPr>
@@ -3471,7 +3879,7 @@
           <p:cNvPr id="3" name="Title">
             <a:extLst xmlns:a="http://schemas.openxmlformats.org/drawingml/2006/main">
               <a:ext uri="{FF2B5EF4-FFF2-40B4-BE49-F238E27FC236}">
-                <a16:creationId xmlns:a16="http://schemas.microsoft.com/office/drawing/2014/main" id="{943F2BE3-00F1-44DF-ACBC-ACD4B7BDF6F8}"/>
+                <a16:creationId xmlns:a16="http://schemas.microsoft.com/office/drawing/2014/main" id="{17A29816-C724-4F3D-86B9-07CC76D94C56}"/>
               </a:ext>
             </a:extLst>
           </p:cNvPr>
@@ -3628,7 +4036,7 @@
           <p:cNvPr id="2" name="Left column">
             <a:extLst xmlns:a="http://schemas.openxmlformats.org/drawingml/2006/main">
               <a:ext uri="{FF2B5EF4-FFF2-40B4-BE49-F238E27FC236}">
-                <a16:creationId xmlns:a16="http://schemas.microsoft.com/office/drawing/2014/main" id="{CD05DE4A-E378-407C-ABE3-25241FC32561}"/>
+                <a16:creationId xmlns:a16="http://schemas.microsoft.com/office/drawing/2014/main" id="{46004061-1375-45DB-A77A-1253D6386408}"/>
               </a:ext>
             </a:extLst>
           </p:cNvPr>
@@ -3823,12 +4231,12 @@
   </p:cSld>
   <p:clrMap bg1="lt1" tx1="dk1" bg2="lt2" tx2="dk2" accent1="accent1" accent2="accent2" accent3="accent3" accent4="accent4" accent5="accent5" accent6="accent6" hlink="hlink" folHlink="folHlink"/>
   <p:sldLayoutIdLst>
-    <p:sldLayoutId xmlns:r="http://schemas.openxmlformats.org/officeDocument/2006/relationships" id="2147483649" r:id="R87b7fd6dd1f94ff7"/>
-    <p:sldLayoutId xmlns:r="http://schemas.openxmlformats.org/officeDocument/2006/relationships" id="2147483650" r:id="Re7154fb901144cf8"/>
-    <p:sldLayoutId xmlns:r="http://schemas.openxmlformats.org/officeDocument/2006/relationships" id="2147483651" r:id="R0ae1a6e7c51b43e2"/>
-    <p:sldLayoutId xmlns:r="http://schemas.openxmlformats.org/officeDocument/2006/relationships" id="2147483652" r:id="Rad93a27509c34cd5"/>
-    <p:sldLayoutId xmlns:r="http://schemas.openxmlformats.org/officeDocument/2006/relationships" id="2147483653" r:id="R24ee76392df941e8"/>
-    <p:sldLayoutId xmlns:r="http://schemas.openxmlformats.org/officeDocument/2006/relationships" id="2147483654" r:id="R9d1b6cdbfcfc4d77"/>
+    <p:sldLayoutId xmlns:r="http://schemas.openxmlformats.org/officeDocument/2006/relationships" id="2147483649" r:id="Re4e4ccb97db943cb"/>
+    <p:sldLayoutId xmlns:r="http://schemas.openxmlformats.org/officeDocument/2006/relationships" id="2147483650" r:id="R4bd1fdfd9d7d4fc0"/>
+    <p:sldLayoutId xmlns:r="http://schemas.openxmlformats.org/officeDocument/2006/relationships" id="2147483651" r:id="R7cc6018abc5349a0"/>
+    <p:sldLayoutId xmlns:r="http://schemas.openxmlformats.org/officeDocument/2006/relationships" id="2147483652" r:id="R11bd9ffc529a4a89"/>
+    <p:sldLayoutId xmlns:r="http://schemas.openxmlformats.org/officeDocument/2006/relationships" id="2147483653" r:id="R1d954ca768b94db7"/>
+    <p:sldLayoutId xmlns:r="http://schemas.openxmlformats.org/officeDocument/2006/relationships" id="2147483654" r:id="R6e2fcc7166954c9c"/>
   </p:sldLayoutIdLst>
   <p:txStyles>
     <p:titleStyle>
@@ -4646,7 +5054,7 @@
           <p:cNvPr id="5" name="">
             <a:extLst xmlns:a="http://schemas.openxmlformats.org/drawingml/2006/main">
               <a:ext uri="{FF2B5EF4-FFF2-40B4-BE49-F238E27FC236}">
-                <a16:creationId xmlns:a16="http://schemas.microsoft.com/office/drawing/2014/main" id="{96F0D17F-808C-4451-B949-4BB06DFBDEDD}"/>
+                <a16:creationId xmlns:a16="http://schemas.microsoft.com/office/drawing/2014/main" id="{3C18B23D-0188-43C5-8BB8-FE06762909CE}"/>
               </a:ext>
             </a:extLst>
           </p:cNvPr>
@@ -4714,7 +5122,7 @@
           <p:cNvPr id="2" name="">
             <a:extLst xmlns:a="http://schemas.openxmlformats.org/drawingml/2006/main">
               <a:ext uri="{FF2B5EF4-FFF2-40B4-BE49-F238E27FC236}">
-                <a16:creationId xmlns:a16="http://schemas.microsoft.com/office/drawing/2014/main" id="{CF6014A7-A5E4-487C-B85B-193E7DF93C7D}"/>
+                <a16:creationId xmlns:a16="http://schemas.microsoft.com/office/drawing/2014/main" id="{AFCCC1C8-1167-47C7-87C5-CB3FB8871341}"/>
               </a:ext>
             </a:extLst>
           </p:cNvPr>
@@ -4782,7 +5190,7 @@
           <p:cNvPr id="3" name="">
             <a:extLst xmlns:a="http://schemas.openxmlformats.org/drawingml/2006/main">
               <a:ext uri="{FF2B5EF4-FFF2-40B4-BE49-F238E27FC236}">
-                <a16:creationId xmlns:a16="http://schemas.microsoft.com/office/drawing/2014/main" id="{4F4E33B8-6594-4AA9-8D2B-1BB4BC51C6A0}"/>
+                <a16:creationId xmlns:a16="http://schemas.microsoft.com/office/drawing/2014/main" id="{EF2DC2D7-EDCB-4BE7-8A31-8A2CAFD8AAFB}"/>
               </a:ext>
             </a:extLst>
           </p:cNvPr>
@@ -4850,7 +5258,7 @@
           <p:cNvPr id="4" name="">
             <a:extLst xmlns:a="http://schemas.openxmlformats.org/drawingml/2006/main">
               <a:ext uri="{FF2B5EF4-FFF2-40B4-BE49-F238E27FC236}">
-                <a16:creationId xmlns:a16="http://schemas.microsoft.com/office/drawing/2014/main" id="{FBD2666B-ED8F-4171-968B-F07346958D9E}"/>
+                <a16:creationId xmlns:a16="http://schemas.microsoft.com/office/drawing/2014/main" id="{14CF2AF7-61DB-48C5-83E7-1B9609279038}"/>
               </a:ext>
             </a:extLst>
           </p:cNvPr>
@@ -4908,7 +5316,7 @@
                 <a:ea typeface="Arial"/>
                 <a:cs typeface="Arial"/>
               </a:rPr>
-              <a:t>Selected demonstrations support the proposed behavior. Detailed conventions still need group review, and three prototype limitations remain. This evidence does not establish exhaustive completeness or independent geodetic accuracy.</a:t>
+              <a:t>Selected demonstrations support the proposed behavior. Detailed conventions still need group review, and two prototype limitations remain. This evidence does not establish exhaustive completeness or independent geodetic accuracy.</a:t>
             </a:r>
           </a:p>
         </p:txBody>
@@ -4916,7 +5324,7 @@
     </p:spTree>
     <p:extLst>
       <p:ext uri="{BB962C8B-B14F-4D97-AF65-F5344CB8AC3E}">
-        <p14:creationId xmlns:p14="http://schemas.microsoft.com/office/powerpoint/2010/main" val="2100642048"/>
+        <p14:creationId xmlns:p14="http://schemas.microsoft.com/office/powerpoint/2010/main" val="1644212932"/>
       </p:ext>
     </p:extLst>
   </p:cSld>
@@ -4947,7 +5355,7 @@
           <p:cNvPr id="9" name="">
             <a:extLst xmlns:a="http://schemas.openxmlformats.org/drawingml/2006/main">
               <a:ext uri="{FF2B5EF4-FFF2-40B4-BE49-F238E27FC236}">
-                <a16:creationId xmlns:a16="http://schemas.microsoft.com/office/drawing/2014/main" id="{21576D8E-A85E-4F52-AC53-923385F554C3}"/>
+                <a16:creationId xmlns:a16="http://schemas.microsoft.com/office/drawing/2014/main" id="{CDD66E41-8F29-4DD6-BD17-531D50CA8231}"/>
               </a:ext>
             </a:extLst>
           </p:cNvPr>
@@ -5005,7 +5413,7 @@
                 <a:ea typeface="Arial"/>
                 <a:cs typeface="Arial"/>
               </a:rPr>
-              <a:t>Appendix: Horizontal railway placement</a:t>
+              <a:t>Repeated models retain their placement</a:t>
             </a:r>
           </a:p>
         </p:txBody>
@@ -5015,7 +5423,7 @@
           <p:cNvPr id="2" name="">
             <a:extLst xmlns:a="http://schemas.openxmlformats.org/drawingml/2006/main">
               <a:ext uri="{FF2B5EF4-FFF2-40B4-BE49-F238E27FC236}">
-                <a16:creationId xmlns:a16="http://schemas.microsoft.com/office/drawing/2014/main" id="{955C9E3B-290C-4CA9-BC9D-D4A0A45A2F66}"/>
+                <a16:creationId xmlns:a16="http://schemas.microsoft.com/office/drawing/2014/main" id="{1F770974-1777-4FCB-8FFA-7658E2C1D722}"/>
               </a:ext>
             </a:extLst>
           </p:cNvPr>
@@ -5073,7 +5481,7 @@
                 <a:ea typeface="Arial"/>
                 <a:cs typeface="Arial"/>
               </a:rPr>
-              <a:t>Can incomplete source metadata still support a useful, explicitly horizontal workflow?</a:t>
+              <a:t>Does an independently georeferenced prototype receive an instance offset exactly once?</a:t>
             </a:r>
           </a:p>
         </p:txBody>
@@ -5083,7 +5491,7 @@
           <p:cNvPr id="3" name="">
             <a:extLst xmlns:a="http://schemas.openxmlformats.org/drawingml/2006/main">
               <a:ext uri="{FF2B5EF4-FFF2-40B4-BE49-F238E27FC236}">
-                <a16:creationId xmlns:a16="http://schemas.microsoft.com/office/drawing/2014/main" id="{CA313B4D-105C-4242-994C-09327999E7BE}"/>
+                <a16:creationId xmlns:a16="http://schemas.microsoft.com/office/drawing/2014/main" id="{4E96A719-9A1C-4870-92CA-3F4144A558A2}"/>
               </a:ext>
             </a:extLst>
           </p:cNvPr>
@@ -5093,13 +5501,13 @@
           <p:nvPr/>
         </p:nvPicPr>
         <p:blipFill>
-          <a:blip xmlns:r="http://schemas.openxmlformats.org/officeDocument/2006/relationships" xmlns:a="http://schemas.openxmlformats.org/drawingml/2006/main" r:embed="Rbb2905966eed44b9"/>
+          <a:blip xmlns:r="http://schemas.openxmlformats.org/officeDocument/2006/relationships" xmlns:a="http://schemas.openxmlformats.org/drawingml/2006/main" r:embed="Rc38fd71f72c44bb1"/>
           <a:stretch xmlns:a="http://schemas.openxmlformats.org/drawingml/2006/main"/>
         </p:blipFill>
         <p:spPr>
           <a:xfrm xmlns:a="http://schemas.openxmlformats.org/drawingml/2006/main">
-            <a:off x="609600" y="2558007"/>
-            <a:ext cx="7258050" cy="3732711"/>
+            <a:off x="833438" y="2381250"/>
+            <a:ext cx="6810375" cy="4086225"/>
           </a:xfrm>
           <a:prstGeom xmlns:a="http://schemas.openxmlformats.org/drawingml/2006/main" prst="rect">
             <a:avLst/>
@@ -5111,7 +5519,7 @@
           <p:cNvPr id="4" name="">
             <a:extLst xmlns:a="http://schemas.openxmlformats.org/drawingml/2006/main">
               <a:ext uri="{FF2B5EF4-FFF2-40B4-BE49-F238E27FC236}">
-                <a16:creationId xmlns:a16="http://schemas.microsoft.com/office/drawing/2014/main" id="{D70A8B49-0766-4D9D-9D09-CBFECEDB773C}"/>
+                <a16:creationId xmlns:a16="http://schemas.microsoft.com/office/drawing/2014/main" id="{0987031C-95EB-4A85-BF02-46462D81A5F5}"/>
               </a:ext>
             </a:extLst>
           </p:cNvPr>
@@ -5179,7 +5587,7 @@
           <p:cNvPr id="5" name="">
             <a:extLst xmlns:a="http://schemas.openxmlformats.org/drawingml/2006/main">
               <a:ext uri="{FF2B5EF4-FFF2-40B4-BE49-F238E27FC236}">
-                <a16:creationId xmlns:a16="http://schemas.microsoft.com/office/drawing/2014/main" id="{F64B633F-E476-4BD4-B266-688F5DC6A545}"/>
+                <a16:creationId xmlns:a16="http://schemas.microsoft.com/office/drawing/2014/main" id="{F6E3E709-BDB1-4C06-BD21-54A10AA96C12}"/>
               </a:ext>
             </a:extLst>
           </p:cNvPr>
@@ -5237,7 +5645,7 @@
                 <a:ea typeface="Arial"/>
                 <a:cs typeface="Arial"/>
               </a:rPr>
-              <a:t>The horizontal copy resolves 15,822 vertices across 2,386 parts. The plot uses offsets only for display.</a:t>
+              <a:t>Both readers return Earth-centred displacement [0, 10, 0] m for the two prototypes. Rotation and scale controls also distinguish the frame choices.</a:t>
             </a:r>
           </a:p>
         </p:txBody>
@@ -5247,7 +5655,7 @@
           <p:cNvPr id="6" name="">
             <a:extLst xmlns:a="http://schemas.openxmlformats.org/drawingml/2006/main">
               <a:ext uri="{FF2B5EF4-FFF2-40B4-BE49-F238E27FC236}">
-                <a16:creationId xmlns:a16="http://schemas.microsoft.com/office/drawing/2014/main" id="{B63A3976-653D-4106-9FDE-E4F147EF49B1}"/>
+                <a16:creationId xmlns:a16="http://schemas.microsoft.com/office/drawing/2014/main" id="{4E3083D4-DD42-4DC3-80BD-DA606BFCE667}"/>
               </a:ext>
             </a:extLst>
           </p:cNvPr>
@@ -5315,7 +5723,7 @@
           <p:cNvPr id="7" name="">
             <a:extLst xmlns:a="http://schemas.openxmlformats.org/drawingml/2006/main">
               <a:ext uri="{FF2B5EF4-FFF2-40B4-BE49-F238E27FC236}">
-                <a16:creationId xmlns:a16="http://schemas.microsoft.com/office/drawing/2014/main" id="{5885F3E6-9A6C-449E-A59F-AB0B2993D1B0}"/>
+                <a16:creationId xmlns:a16="http://schemas.microsoft.com/office/drawing/2014/main" id="{2EA93AA3-AD25-4F5C-81E1-C2F78D6143C0}"/>
               </a:ext>
             </a:extLst>
           </p:cNvPr>
@@ -5373,7 +5781,7 @@
                 <a:ea typeface="Arial"/>
                 <a:cs typeface="Arial"/>
               </a:rPr>
-              <a:t>The draft supports horizontal resolution without inventing a height reference. The original third components remain uninterpreted.</a:t>
+              <a:t>The selected controls test the occurrence contract rather than merely the prototype origin. An unavailable required inverse fails visibly.</a:t>
             </a:r>
           </a:p>
         </p:txBody>
@@ -5383,7 +5791,7 @@
           <p:cNvPr id="8" name="">
             <a:extLst xmlns:a="http://schemas.openxmlformats.org/drawingml/2006/main">
               <a:ext uri="{FF2B5EF4-FFF2-40B4-BE49-F238E27FC236}">
-                <a16:creationId xmlns:a16="http://schemas.microsoft.com/office/drawing/2014/main" id="{672233D1-9E15-41E8-8B0C-7786A3A2E2D0}"/>
+                <a16:creationId xmlns:a16="http://schemas.microsoft.com/office/drawing/2014/main" id="{FCFF8D3E-91DE-4C0B-9759-814CE98E308F}"/>
               </a:ext>
             </a:extLst>
           </p:cNvPr>
@@ -5441,7 +5849,7 @@
                 <a:ea typeface="Arial"/>
                 <a:cs typeface="Arial"/>
               </a:rPr>
-              <a:t>Plot of recorded resolved geometry. Limits in the notes and README.</a:t>
+              <a:t>Plot of recorded synthetic results. Limits in the notes and README.</a:t>
             </a:r>
           </a:p>
         </p:txBody>
@@ -5449,7 +5857,7 @@
     </p:spTree>
     <p:extLst>
       <p:ext uri="{BB962C8B-B14F-4D97-AF65-F5344CB8AC3E}">
-        <p14:creationId xmlns:p14="http://schemas.microsoft.com/office/powerpoint/2010/main" val="874142571"/>
+        <p14:creationId xmlns:p14="http://schemas.microsoft.com/office/powerpoint/2010/main" val="287696471"/>
       </p:ext>
     </p:extLst>
   </p:cSld>
@@ -5477,10 +5885,10 @@
       </p:grpSpPr>
       <p:sp>
         <p:nvSpPr>
-          <p:cNvPr id="8" name="">
+          <p:cNvPr id="5" name="">
             <a:extLst xmlns:a="http://schemas.openxmlformats.org/drawingml/2006/main">
               <a:ext uri="{FF2B5EF4-FFF2-40B4-BE49-F238E27FC236}">
-                <a16:creationId xmlns:a16="http://schemas.microsoft.com/office/drawing/2014/main" id="{DEDC4C2F-2E3B-452E-9D65-77DA5CC2CEC4}"/>
+                <a16:creationId xmlns:a16="http://schemas.microsoft.com/office/drawing/2014/main" id="{A10E8720-ED34-413B-AC8B-E07225E3BF01}"/>
               </a:ext>
             </a:extLst>
           </p:cNvPr>
@@ -5538,7 +5946,7 @@
                 <a:ea typeface="Arial"/>
                 <a:cs typeface="Arial"/>
               </a:rPr>
-              <a:t>Appendix: Animation evaluation order</a:t>
+              <a:t>Proposal quality and its limits</a:t>
             </a:r>
           </a:p>
         </p:txBody>
@@ -5548,7 +5956,7 @@
           <p:cNvPr id="2" name="">
             <a:extLst xmlns:a="http://schemas.openxmlformats.org/drawingml/2006/main">
               <a:ext uri="{FF2B5EF4-FFF2-40B4-BE49-F238E27FC236}">
-                <a16:creationId xmlns:a16="http://schemas.microsoft.com/office/drawing/2014/main" id="{CE8D26BD-BB78-4F80-8FE3-05DE9A2E21B8}"/>
+                <a16:creationId xmlns:a16="http://schemas.microsoft.com/office/drawing/2014/main" id="{22C49286-D917-46A1-ACF5-C967F7D33362}"/>
               </a:ext>
             </a:extLst>
           </p:cNvPr>
@@ -5559,8 +5967,8 @@
         </p:nvSpPr>
         <p:spPr>
           <a:xfrm xmlns:a="http://schemas.openxmlformats.org/drawingml/2006/main">
-            <a:off x="609600" y="1409700"/>
-            <a:ext cx="10972800" cy="771525"/>
+            <a:off x="609600" y="1381125"/>
+            <a:ext cx="10972800" cy="647700"/>
           </a:xfrm>
           <a:prstGeom xmlns:a="http://schemas.openxmlformats.org/drawingml/2006/main" prst="rect">
             <a:avLst/>
@@ -5576,9 +5984,9 @@
           </a:bodyPr>
           <a:lstStyle xmlns:a="http://schemas.openxmlformats.org/drawingml/2006/main">
             <a:defPPr>
-              <a:defRPr sz="2250" b="1">
-                <a:solidFill>
-                  <a:srgbClr val="157C87"/>
+              <a:defRPr sz="2250" b="0">
+                <a:solidFill>
+                  <a:srgbClr val="213744"/>
                 </a:solidFill>
                 <a:latin typeface="Arial"/>
                 <a:ea typeface="Arial"/>
@@ -5588,9 +5996,9 @@
           </a:lstStyle>
           <a:p xmlns:a="http://schemas.openxmlformats.org/drawingml/2006/main">
             <a:pPr>
-              <a:defRPr sz="2250" b="1">
-                <a:solidFill>
-                  <a:srgbClr val="157C87"/>
+              <a:defRPr sz="2250" b="0">
+                <a:solidFill>
+                  <a:srgbClr val="213744"/>
                 </a:solidFill>
                 <a:latin typeface="Arial"/>
                 <a:ea typeface="Arial"/>
@@ -5598,25 +6006,323 @@
               </a:defRPr>
             </a:pPr>
             <a:r>
-              <a:rPr sz="2250" b="1">
-                <a:solidFill>
-                  <a:srgbClr val="157C87"/>
+              <a:rPr sz="2250" b="0">
+                <a:solidFill>
+                  <a:srgbClr val="213744"/>
                 </a:solidFill>
                 <a:latin typeface="Arial"/>
                 <a:ea typeface="Arial"/>
                 <a:cs typeface="Arial"/>
               </a:rPr>
-              <a:t>Interpolate the authored source position first, then convert coordinates.</a:t>
+              <a:t>Selected demonstrations support the proposed behavior.</a:t>
             </a:r>
           </a:p>
         </p:txBody>
       </p:sp>
-      <p:sp>
-        <p:nvSpPr>
+      <p:graphicFrame>
+        <p:nvGraphicFramePr>
           <p:cNvPr id="3" name="">
             <a:extLst xmlns:a="http://schemas.openxmlformats.org/drawingml/2006/main">
               <a:ext uri="{FF2B5EF4-FFF2-40B4-BE49-F238E27FC236}">
-                <a16:creationId xmlns:a16="http://schemas.microsoft.com/office/drawing/2014/main" id="{74952E9E-7D84-4367-9C70-C271CB7E37B6}"/>
+                <a16:creationId xmlns:a16="http://schemas.microsoft.com/office/drawing/2014/main" id="{A9C05A52-8A97-4596-9C27-4875705B2875}"/>
+              </a:ext>
+            </a:extLst>
+          </p:cNvPr>
+          <p:cNvGraphicFramePr/>
+          <p:nvPr/>
+        </p:nvGraphicFramePr>
+        <p:xfrm>
+          <a:off xmlns:a="http://schemas.openxmlformats.org/drawingml/2006/main" x="609600" y="2200275"/>
+          <a:ext xmlns:a="http://schemas.openxmlformats.org/drawingml/2006/main" cx="10972800" cy="3524250"/>
+        </p:xfrm>
+        <a:graphic xmlns:a="http://schemas.openxmlformats.org/drawingml/2006/main">
+          <a:graphicData uri="http://schemas.openxmlformats.org/drawingml/2006/table">
+            <a:tbl>
+              <a:tblPr/>
+              <a:tblGrid>
+                <a:gridCol w="3143250"/>
+                <a:gridCol w="7829550"/>
+              </a:tblGrid>
+              <a:tr h="704850">
+                <a:tc>
+                  <a:txBody>
+                    <a:bodyPr>
+                      <a:noAutofit/>
+                    </a:bodyPr>
+                    <a:lstStyle/>
+                    <a:p>
+                      <a:r>
+                        <a:rPr sz="1800" b="1">
+                          <a:solidFill>
+                            <a:srgbClr val="FFFFFF"/>
+                          </a:solidFill>
+                          <a:latin typeface="Arial"/>
+                          <a:ea typeface="Arial"/>
+                          <a:cs typeface="Arial"/>
+                        </a:rPr>
+                        <a:t>Review dimension</a:t>
+                      </a:r>
+                    </a:p>
+                  </a:txBody>
+                  <a:tcPr marL="95250" marR="95250" marT="38100" marB="38100">
+                    <a:solidFill>
+                      <a:srgbClr val="213744"/>
+                    </a:solidFill>
+                  </a:tcPr>
+                </a:tc>
+                <a:tc>
+                  <a:txBody>
+                    <a:bodyPr>
+                      <a:noAutofit/>
+                    </a:bodyPr>
+                    <a:lstStyle/>
+                    <a:p>
+                      <a:r>
+                        <a:rPr sz="1800" b="1">
+                          <a:solidFill>
+                            <a:srgbClr val="FFFFFF"/>
+                          </a:solidFill>
+                          <a:latin typeface="Arial"/>
+                          <a:ea typeface="Arial"/>
+                          <a:cs typeface="Arial"/>
+                        </a:rPr>
+                        <a:t>Assessment</a:t>
+                      </a:r>
+                    </a:p>
+                  </a:txBody>
+                  <a:tcPr marL="95250" marR="95250" marT="38100" marB="38100">
+                    <a:solidFill>
+                      <a:srgbClr val="213744"/>
+                    </a:solidFill>
+                  </a:tcPr>
+                </a:tc>
+              </a:tr>
+              <a:tr h="704850">
+                <a:tc>
+                  <a:txBody>
+                    <a:bodyPr>
+                      <a:noAutofit/>
+                    </a:bodyPr>
+                    <a:lstStyle/>
+                    <a:p>
+                      <a:r>
+                        <a:rPr sz="1800" b="0">
+                          <a:solidFill>
+                            <a:srgbClr val="213744"/>
+                          </a:solidFill>
+                          <a:latin typeface="Arial"/>
+                          <a:ea typeface="Arial"/>
+                          <a:cs typeface="Arial"/>
+                        </a:rPr>
+                        <a:t>Data model and runtime rules</a:t>
+                      </a:r>
+                    </a:p>
+                  </a:txBody>
+                  <a:tcPr marL="95250" marR="95250" marT="38100" marB="38100">
+                    <a:solidFill>
+                      <a:srgbClr val="FFFFFF"/>
+                    </a:solidFill>
+                  </a:tcPr>
+                </a:tc>
+                <a:tc>
+                  <a:txBody>
+                    <a:bodyPr>
+                      <a:noAutofit/>
+                    </a:bodyPr>
+                    <a:lstStyle/>
+                    <a:p>
+                      <a:r>
+                        <a:rPr sz="1800" b="0">
+                          <a:solidFill>
+                            <a:srgbClr val="213744"/>
+                          </a:solidFill>
+                          <a:latin typeface="Arial"/>
+                          <a:ea typeface="Arial"/>
+                          <a:cs typeface="Arial"/>
+                        </a:rPr>
+                        <a:t>The draft separates authored inputs from computed results and defines placement, adjustment, query and bake behavior.</a:t>
+                      </a:r>
+                    </a:p>
+                  </a:txBody>
+                  <a:tcPr marL="95250" marR="95250" marT="38100" marB="38100">
+                    <a:solidFill>
+                      <a:srgbClr val="FFFFFF"/>
+                    </a:solidFill>
+                  </a:tcPr>
+                </a:tc>
+              </a:tr>
+              <a:tr h="704850">
+                <a:tc>
+                  <a:txBody>
+                    <a:bodyPr>
+                      <a:noAutofit/>
+                    </a:bodyPr>
+                    <a:lstStyle/>
+                    <a:p>
+                      <a:r>
+                        <a:rPr sz="1800" b="0">
+                          <a:solidFill>
+                            <a:srgbClr val="213744"/>
+                          </a:solidFill>
+                          <a:latin typeface="Arial"/>
+                          <a:ea typeface="Arial"/>
+                          <a:cs typeface="Arial"/>
+                        </a:rPr>
+                        <a:t>Group alignment</a:t>
+                      </a:r>
+                    </a:p>
+                  </a:txBody>
+                  <a:tcPr marL="95250" marR="95250" marT="38100" marB="38100">
+                    <a:solidFill>
+                      <a:srgbClr val="FFFFFF"/>
+                    </a:solidFill>
+                  </a:tcPr>
+                </a:tc>
+                <a:tc>
+                  <a:txBody>
+                    <a:bodyPr>
+                      <a:noAutofit/>
+                    </a:bodyPr>
+                    <a:lstStyle/>
+                    <a:p>
+                      <a:r>
+                        <a:rPr sz="1800" b="0">
+                          <a:solidFill>
+                            <a:srgbClr val="213744"/>
+                          </a:solidFill>
+                          <a:latin typeface="Arial"/>
+                          <a:ea typeface="Arial"/>
+                          <a:cs typeface="Arial"/>
+                        </a:rPr>
+                        <a:t>Input and declaration rules have agreement. Detailed conventions and identities await review.</a:t>
+                      </a:r>
+                    </a:p>
+                  </a:txBody>
+                  <a:tcPr marL="95250" marR="95250" marT="38100" marB="38100">
+                    <a:solidFill>
+                      <a:srgbClr val="FFFFFF"/>
+                    </a:solidFill>
+                  </a:tcPr>
+                </a:tc>
+              </a:tr>
+              <a:tr h="704850">
+                <a:tc>
+                  <a:txBody>
+                    <a:bodyPr>
+                      <a:noAutofit/>
+                    </a:bodyPr>
+                    <a:lstStyle/>
+                    <a:p>
+                      <a:r>
+                        <a:rPr sz="1800" b="0">
+                          <a:solidFill>
+                            <a:srgbClr val="213744"/>
+                          </a:solidFill>
+                          <a:latin typeface="Arial"/>
+                          <a:ea typeface="Arial"/>
+                          <a:cs typeface="Arial"/>
+                        </a:rPr>
+                        <a:t>Prototype limitations</a:t>
+                      </a:r>
+                    </a:p>
+                  </a:txBody>
+                  <a:tcPr marL="95250" marR="95250" marT="38100" marB="38100">
+                    <a:solidFill>
+                      <a:srgbClr val="FFFFFF"/>
+                    </a:solidFill>
+                  </a:tcPr>
+                </a:tc>
+                <a:tc>
+                  <a:txBody>
+                    <a:bodyPr>
+                      <a:noAutofit/>
+                    </a:bodyPr>
+                    <a:lstStyle/>
+                    <a:p>
+                      <a:r>
+                        <a:rPr sz="1800" b="0">
+                          <a:solidFill>
+                            <a:srgbClr val="213744"/>
+                          </a:solidFill>
+                          <a:latin typeface="Arial"/>
+                          <a:ea typeface="Arial"/>
+                          <a:cs typeface="Arial"/>
+                        </a:rPr>
+                        <a:t>Lighting directions lack an error bound. Rotation uncertainty is unquantified.</a:t>
+                      </a:r>
+                    </a:p>
+                  </a:txBody>
+                  <a:tcPr marL="95250" marR="95250" marT="38100" marB="38100">
+                    <a:solidFill>
+                      <a:srgbClr val="FFFFFF"/>
+                    </a:solidFill>
+                  </a:tcPr>
+                </a:tc>
+              </a:tr>
+              <a:tr h="704850">
+                <a:tc>
+                  <a:txBody>
+                    <a:bodyPr>
+                      <a:noAutofit/>
+                    </a:bodyPr>
+                    <a:lstStyle/>
+                    <a:p>
+                      <a:r>
+                        <a:rPr sz="1800" b="0">
+                          <a:solidFill>
+                            <a:srgbClr val="213744"/>
+                          </a:solidFill>
+                          <a:latin typeface="Arial"/>
+                          <a:ea typeface="Arial"/>
+                          <a:cs typeface="Arial"/>
+                        </a:rPr>
+                        <a:t>Verification coverage</a:t>
+                      </a:r>
+                    </a:p>
+                  </a:txBody>
+                  <a:tcPr marL="95250" marR="95250" marT="38100" marB="38100">
+                    <a:solidFill>
+                      <a:srgbClr val="FFFFFF"/>
+                    </a:solidFill>
+                  </a:tcPr>
+                </a:tc>
+                <a:tc>
+                  <a:txBody>
+                    <a:bodyPr>
+                      <a:noAutofit/>
+                    </a:bodyPr>
+                    <a:lstStyle/>
+                    <a:p>
+                      <a:r>
+                        <a:rPr sz="1800" b="0">
+                          <a:solidFill>
+                            <a:srgbClr val="213744"/>
+                          </a:solidFill>
+                          <a:latin typeface="Arial"/>
+                          <a:ea typeface="Arial"/>
+                          <a:cs typeface="Arial"/>
+                        </a:rPr>
+                        <a:t>Selected workflows and distinguishing controls support the rules. Broader composition and continuous space/time coverage remain unverified.</a:t>
+                      </a:r>
+                    </a:p>
+                  </a:txBody>
+                  <a:tcPr marL="95250" marR="95250" marT="38100" marB="38100">
+                    <a:solidFill>
+                      <a:srgbClr val="FFFFFF"/>
+                    </a:solidFill>
+                  </a:tcPr>
+                </a:tc>
+              </a:tr>
+            </a:tbl>
+          </a:graphicData>
+        </a:graphic>
+      </p:graphicFrame>
+      <p:sp>
+        <p:nvSpPr>
+          <p:cNvPr id="4" name="">
+            <a:extLst xmlns:a="http://schemas.openxmlformats.org/drawingml/2006/main">
+              <a:ext uri="{FF2B5EF4-FFF2-40B4-BE49-F238E27FC236}">
+                <a16:creationId xmlns:a16="http://schemas.microsoft.com/office/drawing/2014/main" id="{57C989A3-A445-404C-97FA-F68E2F9BE271}"/>
               </a:ext>
             </a:extLst>
           </p:cNvPr>
@@ -5627,8 +6333,8 @@
         </p:nvSpPr>
         <p:spPr>
           <a:xfrm xmlns:a="http://schemas.openxmlformats.org/drawingml/2006/main">
-            <a:off x="609600" y="2009775"/>
-            <a:ext cx="10972800" cy="485775"/>
+            <a:off x="609600" y="6048375"/>
+            <a:ext cx="10972800" cy="733425"/>
           </a:xfrm>
           <a:prstGeom xmlns:a="http://schemas.openxmlformats.org/drawingml/2006/main" prst="rect">
             <a:avLst/>
@@ -5644,9 +6350,9 @@
           </a:bodyPr>
           <a:lstStyle xmlns:a="http://schemas.openxmlformats.org/drawingml/2006/main">
             <a:defPPr>
-              <a:defRPr sz="1725" b="0">
-                <a:solidFill>
-                  <a:srgbClr val="526B79"/>
+              <a:defRPr sz="1950" b="0">
+                <a:solidFill>
+                  <a:srgbClr val="A25D20"/>
                 </a:solidFill>
                 <a:latin typeface="Arial"/>
                 <a:ea typeface="Arial"/>
@@ -5656,9 +6362,9 @@
           </a:lstStyle>
           <a:p xmlns:a="http://schemas.openxmlformats.org/drawingml/2006/main">
             <a:pPr>
-              <a:defRPr sz="1725" b="0">
-                <a:solidFill>
-                  <a:srgbClr val="526B79"/>
+              <a:defRPr sz="1950" b="0">
+                <a:solidFill>
+                  <a:srgbClr val="A25D20"/>
                 </a:solidFill>
                 <a:latin typeface="Arial"/>
                 <a:ea typeface="Arial"/>
@@ -5666,241 +6372,15 @@
               </a:defRPr>
             </a:pPr>
             <a:r>
-              <a:rPr sz="1725" b="0">
-                <a:solidFill>
-                  <a:srgbClr val="526B79"/>
+              <a:rPr sz="1950" b="0">
+                <a:solidFill>
+                  <a:srgbClr val="A25D20"/>
                 </a:solidFill>
                 <a:latin typeface="Arial"/>
                 <a:ea typeface="Arial"/>
                 <a:cs typeface="Arial"/>
               </a:rPr>
-              <a:t>Equatorial longitude changes from 0° to 2°. Interpolating converted endpoints misses the source-first midpoint by 971.421 m.</a:t>
-            </a:r>
-          </a:p>
-        </p:txBody>
-      </p:sp>
-      <p:graphicFrame>
-        <p:nvGraphicFramePr>
-          <p:cNvPr id="4" name="Chart">
-            <a:extLst xmlns:a="http://schemas.openxmlformats.org/drawingml/2006/main">
-              <a:ext uri="{FF2B5EF4-FFF2-40B4-BE49-F238E27FC236}">
-                <a16:creationId xmlns:a16="http://schemas.microsoft.com/office/drawing/2014/main" id="{4F0960DD-604D-4BBE-A6D6-612732239C26}"/>
-              </a:ext>
-            </a:extLst>
-          </p:cNvPr>
-          <p:cNvGraphicFramePr/>
-          <p:nvPr/>
-        </p:nvGraphicFramePr>
-        <p:xfrm>
-          <a:off xmlns:a="http://schemas.openxmlformats.org/drawingml/2006/main" x="428625" y="2524125"/>
-          <a:ext xmlns:a="http://schemas.openxmlformats.org/drawingml/2006/main" cx="7200900" cy="3886200"/>
-        </p:xfrm>
-        <a:graphic xmlns:a="http://schemas.openxmlformats.org/drawingml/2006/main">
-          <a:graphicData uri="http://schemas.openxmlformats.org/drawingml/2006/chart">
-            <c:chart xmlns:r="http://schemas.openxmlformats.org/officeDocument/2006/relationships" xmlns:c="http://schemas.openxmlformats.org/drawingml/2006/chart" r:id="R093850bba7d14aa5"/>
-          </a:graphicData>
-        </a:graphic>
-      </p:graphicFrame>
-      <p:sp>
-        <p:nvSpPr>
-          <p:cNvPr id="5" name="">
-            <a:extLst xmlns:a="http://schemas.openxmlformats.org/drawingml/2006/main">
-              <a:ext uri="{FF2B5EF4-FFF2-40B4-BE49-F238E27FC236}">
-                <a16:creationId xmlns:a16="http://schemas.microsoft.com/office/drawing/2014/main" id="{8DB78D98-B65F-4041-9BC9-06A2553B4E8F}"/>
-              </a:ext>
-            </a:extLst>
-          </p:cNvPr>
-          <p:cNvSpPr>
-            <a:spLocks xmlns:a="http://schemas.openxmlformats.org/drawingml/2006/main" noGrp="1"/>
-          </p:cNvSpPr>
-          <p:nvPr/>
-        </p:nvSpPr>
-        <p:spPr>
-          <a:xfrm xmlns:a="http://schemas.openxmlformats.org/drawingml/2006/main">
-            <a:off x="8096250" y="2581275"/>
-            <a:ext cx="3486150" cy="523875"/>
-          </a:xfrm>
-          <a:prstGeom xmlns:a="http://schemas.openxmlformats.org/drawingml/2006/main" prst="rect">
-            <a:avLst/>
-          </a:prstGeom>
-          <a:noFill xmlns:a="http://schemas.openxmlformats.org/drawingml/2006/main"/>
-          <a:ln xmlns:a="http://schemas.openxmlformats.org/drawingml/2006/main" w="0">
-            <a:noFill/>
-          </a:ln>
-        </p:spPr>
-        <p:txBody>
-          <a:bodyPr xmlns:a="http://schemas.openxmlformats.org/drawingml/2006/main" anchor="t">
-            <a:noAutofit/>
-          </a:bodyPr>
-          <a:lstStyle xmlns:a="http://schemas.openxmlformats.org/drawingml/2006/main">
-            <a:defPPr>
-              <a:defRPr sz="2250" b="1">
-                <a:solidFill>
-                  <a:srgbClr val="213744"/>
-                </a:solidFill>
-                <a:latin typeface="Arial"/>
-                <a:ea typeface="Arial"/>
-                <a:cs typeface="Arial"/>
-              </a:defRPr>
-            </a:defPPr>
-          </a:lstStyle>
-          <a:p xmlns:a="http://schemas.openxmlformats.org/drawingml/2006/main">
-            <a:pPr>
-              <a:defRPr sz="2250" b="1">
-                <a:solidFill>
-                  <a:srgbClr val="213744"/>
-                </a:solidFill>
-                <a:latin typeface="Arial"/>
-                <a:ea typeface="Arial"/>
-                <a:cs typeface="Arial"/>
-              </a:defRPr>
-            </a:pPr>
-            <a:r>
-              <a:rPr sz="2250" b="1">
-                <a:solidFill>
-                  <a:srgbClr val="213744"/>
-                </a:solidFill>
-                <a:latin typeface="Arial"/>
-                <a:ea typeface="Arial"/>
-                <a:cs typeface="Arial"/>
-              </a:rPr>
-              <a:t>Why the order matters</a:t>
-            </a:r>
-          </a:p>
-        </p:txBody>
-      </p:sp>
-      <p:sp>
-        <p:nvSpPr>
-          <p:cNvPr id="6" name="">
-            <a:extLst xmlns:a="http://schemas.openxmlformats.org/drawingml/2006/main">
-              <a:ext uri="{FF2B5EF4-FFF2-40B4-BE49-F238E27FC236}">
-                <a16:creationId xmlns:a16="http://schemas.microsoft.com/office/drawing/2014/main" id="{CA890856-B246-49D4-9D61-8E75D7359CAF}"/>
-              </a:ext>
-            </a:extLst>
-          </p:cNvPr>
-          <p:cNvSpPr>
-            <a:spLocks xmlns:a="http://schemas.openxmlformats.org/drawingml/2006/main" noGrp="1"/>
-          </p:cNvSpPr>
-          <p:nvPr/>
-        </p:nvSpPr>
-        <p:spPr>
-          <a:xfrm xmlns:a="http://schemas.openxmlformats.org/drawingml/2006/main">
-            <a:off x="8096250" y="3267075"/>
-            <a:ext cx="3486150" cy="1866900"/>
-          </a:xfrm>
-          <a:prstGeom xmlns:a="http://schemas.openxmlformats.org/drawingml/2006/main" prst="rect">
-            <a:avLst/>
-          </a:prstGeom>
-          <a:noFill xmlns:a="http://schemas.openxmlformats.org/drawingml/2006/main"/>
-          <a:ln xmlns:a="http://schemas.openxmlformats.org/drawingml/2006/main" w="0">
-            <a:noFill/>
-          </a:ln>
-        </p:spPr>
-        <p:txBody>
-          <a:bodyPr xmlns:a="http://schemas.openxmlformats.org/drawingml/2006/main" anchor="t">
-            <a:noAutofit/>
-          </a:bodyPr>
-          <a:lstStyle xmlns:a="http://schemas.openxmlformats.org/drawingml/2006/main">
-            <a:defPPr>
-              <a:defRPr sz="2025" b="0">
-                <a:solidFill>
-                  <a:srgbClr val="213744"/>
-                </a:solidFill>
-                <a:latin typeface="Arial"/>
-                <a:ea typeface="Arial"/>
-                <a:cs typeface="Arial"/>
-              </a:defRPr>
-            </a:defPPr>
-          </a:lstStyle>
-          <a:p xmlns:a="http://schemas.openxmlformats.org/drawingml/2006/main">
-            <a:pPr>
-              <a:defRPr sz="2025" b="0">
-                <a:solidFill>
-                  <a:srgbClr val="213744"/>
-                </a:solidFill>
-                <a:latin typeface="Arial"/>
-                <a:ea typeface="Arial"/>
-                <a:cs typeface="Arial"/>
-              </a:defRPr>
-            </a:pPr>
-            <a:r>
-              <a:rPr sz="2025" b="0">
-                <a:solidFill>
-                  <a:srgbClr val="213744"/>
-                </a:solidFill>
-                <a:latin typeface="Arial"/>
-                <a:ea typeface="Arial"/>
-                <a:cs typeface="Arial"/>
-              </a:rPr>
-              <a:t>The order is testable. Sample keys alone cannot certify the original trajectory between samples.</a:t>
-            </a:r>
-          </a:p>
-        </p:txBody>
-      </p:sp>
-      <p:sp>
-        <p:nvSpPr>
-          <p:cNvPr id="7" name="">
-            <a:extLst xmlns:a="http://schemas.openxmlformats.org/drawingml/2006/main">
-              <a:ext uri="{FF2B5EF4-FFF2-40B4-BE49-F238E27FC236}">
-                <a16:creationId xmlns:a16="http://schemas.microsoft.com/office/drawing/2014/main" id="{09CB1569-53D6-4087-B81B-B2E33DFF4915}"/>
-              </a:ext>
-            </a:extLst>
-          </p:cNvPr>
-          <p:cNvSpPr>
-            <a:spLocks xmlns:a="http://schemas.openxmlformats.org/drawingml/2006/main" noGrp="1"/>
-          </p:cNvSpPr>
-          <p:nvPr/>
-        </p:nvSpPr>
-        <p:spPr>
-          <a:xfrm xmlns:a="http://schemas.openxmlformats.org/drawingml/2006/main">
-            <a:off x="8096250" y="5343525"/>
-            <a:ext cx="3486150" cy="1304925"/>
-          </a:xfrm>
-          <a:prstGeom xmlns:a="http://schemas.openxmlformats.org/drawingml/2006/main" prst="rect">
-            <a:avLst/>
-          </a:prstGeom>
-          <a:noFill xmlns:a="http://schemas.openxmlformats.org/drawingml/2006/main"/>
-          <a:ln xmlns:a="http://schemas.openxmlformats.org/drawingml/2006/main" w="0">
-            <a:noFill/>
-          </a:ln>
-        </p:spPr>
-        <p:txBody>
-          <a:bodyPr xmlns:a="http://schemas.openxmlformats.org/drawingml/2006/main" anchor="t">
-            <a:noAutofit/>
-          </a:bodyPr>
-          <a:lstStyle xmlns:a="http://schemas.openxmlformats.org/drawingml/2006/main">
-            <a:defPPr>
-              <a:defRPr sz="1800" b="0">
-                <a:solidFill>
-                  <a:srgbClr val="526B79"/>
-                </a:solidFill>
-                <a:latin typeface="Arial"/>
-                <a:ea typeface="Arial"/>
-                <a:cs typeface="Arial"/>
-              </a:defRPr>
-            </a:defPPr>
-          </a:lstStyle>
-          <a:p xmlns:a="http://schemas.openxmlformats.org/drawingml/2006/main">
-            <a:pPr>
-              <a:defRPr sz="1800" b="0">
-                <a:solidFill>
-                  <a:srgbClr val="526B79"/>
-                </a:solidFill>
-                <a:latin typeface="Arial"/>
-                <a:ea typeface="Arial"/>
-                <a:cs typeface="Arial"/>
-              </a:defRPr>
-            </a:pPr>
-            <a:r>
-              <a:rPr sz="1800" b="0">
-                <a:solidFill>
-                  <a:srgbClr val="526B79"/>
-                </a:solidFill>
-                <a:latin typeface="Arial"/>
-                <a:ea typeface="Arial"/>
-                <a:cs typeface="Arial"/>
-              </a:rPr>
-              <a:t>The bake preserves time codes 0, 5 and 10 at 48 time codes per second. Continuous trajectory coverage remains unverified.</a:t>
+              <a:t>No additional undefined model rule was confirmed in the inspected paths. That is a bounded finding.</a:t>
             </a:r>
           </a:p>
         </p:txBody>
@@ -5908,7 +6388,7 @@
     </p:spTree>
     <p:extLst>
       <p:ext uri="{BB962C8B-B14F-4D97-AF65-F5344CB8AC3E}">
-        <p14:creationId xmlns:p14="http://schemas.microsoft.com/office/powerpoint/2010/main" val="1794705531"/>
+        <p14:creationId xmlns:p14="http://schemas.microsoft.com/office/powerpoint/2010/main" val="1412575191"/>
       </p:ext>
     </p:extLst>
   </p:cSld>
@@ -5936,10 +6416,10 @@
       </p:grpSpPr>
       <p:sp>
         <p:nvSpPr>
-          <p:cNvPr id="4" name="">
+          <p:cNvPr id="9" name="">
             <a:extLst xmlns:a="http://schemas.openxmlformats.org/drawingml/2006/main">
               <a:ext uri="{FF2B5EF4-FFF2-40B4-BE49-F238E27FC236}">
-                <a16:creationId xmlns:a16="http://schemas.microsoft.com/office/drawing/2014/main" id="{920241F1-1808-4A9A-909D-FEDD16F51114}"/>
+                <a16:creationId xmlns:a16="http://schemas.microsoft.com/office/drawing/2014/main" id="{23DF8BCD-1ED9-476A-8351-CA42D6883074}"/>
               </a:ext>
             </a:extLst>
           </p:cNvPr>
@@ -5997,6 +6477,1532 @@
                 <a:ea typeface="Arial"/>
                 <a:cs typeface="Arial"/>
               </a:rPr>
+              <a:t>Appendix: A construction site's own survey grid</a:t>
+            </a:r>
+          </a:p>
+        </p:txBody>
+      </p:sp>
+      <p:sp>
+        <p:nvSpPr>
+          <p:cNvPr id="2" name="">
+            <a:extLst xmlns:a="http://schemas.openxmlformats.org/drawingml/2006/main">
+              <a:ext uri="{FF2B5EF4-FFF2-40B4-BE49-F238E27FC236}">
+                <a16:creationId xmlns:a16="http://schemas.microsoft.com/office/drawing/2014/main" id="{A209728B-FFBE-4D2C-A7E2-F9BF13023A3A}"/>
+              </a:ext>
+            </a:extLst>
+          </p:cNvPr>
+          <p:cNvSpPr>
+            <a:spLocks xmlns:a="http://schemas.openxmlformats.org/drawingml/2006/main" noGrp="1"/>
+          </p:cNvSpPr>
+          <p:nvPr/>
+        </p:nvSpPr>
+        <p:spPr>
+          <a:xfrm xmlns:a="http://schemas.openxmlformats.org/drawingml/2006/main">
+            <a:off x="609600" y="1400175"/>
+            <a:ext cx="10972800" cy="771525"/>
+          </a:xfrm>
+          <a:prstGeom xmlns:a="http://schemas.openxmlformats.org/drawingml/2006/main" prst="rect">
+            <a:avLst/>
+          </a:prstGeom>
+          <a:noFill xmlns:a="http://schemas.openxmlformats.org/drawingml/2006/main"/>
+          <a:ln xmlns:a="http://schemas.openxmlformats.org/drawingml/2006/main" w="0">
+            <a:noFill/>
+          </a:ln>
+        </p:spPr>
+        <p:txBody>
+          <a:bodyPr xmlns:a="http://schemas.openxmlformats.org/drawingml/2006/main" anchor="t">
+            <a:noAutofit/>
+          </a:bodyPr>
+          <a:lstStyle xmlns:a="http://schemas.openxmlformats.org/drawingml/2006/main">
+            <a:defPPr>
+              <a:defRPr sz="2325" b="1">
+                <a:solidFill>
+                  <a:srgbClr val="157C87"/>
+                </a:solidFill>
+                <a:latin typeface="Arial"/>
+                <a:ea typeface="Arial"/>
+                <a:cs typeface="Arial"/>
+              </a:defRPr>
+            </a:defPPr>
+          </a:lstStyle>
+          <a:p xmlns:a="http://schemas.openxmlformats.org/drawingml/2006/main">
+            <a:pPr>
+              <a:defRPr sz="2325" b="1">
+                <a:solidFill>
+                  <a:srgbClr val="157C87"/>
+                </a:solidFill>
+                <a:latin typeface="Arial"/>
+                <a:ea typeface="Arial"/>
+                <a:cs typeface="Arial"/>
+              </a:defRPr>
+            </a:pPr>
+            <a:r>
+              <a:rPr sz="2325" b="1">
+                <a:solidFill>
+                  <a:srgbClr val="157C87"/>
+                </a:solidFill>
+                <a:latin typeface="Arial"/>
+                <a:ea typeface="Arial"/>
+                <a:cs typeface="Arial"/>
+              </a:rPr>
+              <a:t>Can a project's local survey grid participate as a defined CRS?</a:t>
+            </a:r>
+          </a:p>
+        </p:txBody>
+      </p:sp>
+      <p:pic>
+        <p:nvPicPr>
+          <p:cNvPr id="3" name="">
+            <a:extLst xmlns:a="http://schemas.openxmlformats.org/drawingml/2006/main">
+              <a:ext uri="{FF2B5EF4-FFF2-40B4-BE49-F238E27FC236}">
+                <a16:creationId xmlns:a16="http://schemas.microsoft.com/office/drawing/2014/main" id="{3D78E0A1-E905-4778-8442-99097C83BD5F}"/>
+              </a:ext>
+            </a:extLst>
+          </p:cNvPr>
+          <p:cNvPicPr>
+            <a:picLocks xmlns:a="http://schemas.openxmlformats.org/drawingml/2006/main" noChangeAspect="1"/>
+          </p:cNvPicPr>
+          <p:nvPr/>
+        </p:nvPicPr>
+        <p:blipFill>
+          <a:blip xmlns:r="http://schemas.openxmlformats.org/officeDocument/2006/relationships" xmlns:a="http://schemas.openxmlformats.org/drawingml/2006/main" r:embed="Rc797fab133a442bf"/>
+          <a:srcRect xmlns:a="http://schemas.openxmlformats.org/drawingml/2006/main" l="10000" t="38000" r="48000" b="13000"/>
+          <a:stretch xmlns:a="http://schemas.openxmlformats.org/drawingml/2006/main"/>
+        </p:blipFill>
+        <p:spPr>
+          <a:xfrm xmlns:a="http://schemas.openxmlformats.org/drawingml/2006/main">
+            <a:off x="609600" y="2381250"/>
+            <a:ext cx="7258050" cy="4086225"/>
+          </a:xfrm>
+          <a:prstGeom xmlns:a="http://schemas.openxmlformats.org/drawingml/2006/main" prst="rect">
+            <a:avLst/>
+          </a:prstGeom>
+        </p:spPr>
+      </p:pic>
+      <p:sp>
+        <p:nvSpPr>
+          <p:cNvPr id="4" name="">
+            <a:extLst xmlns:a="http://schemas.openxmlformats.org/drawingml/2006/main">
+              <a:ext uri="{FF2B5EF4-FFF2-40B4-BE49-F238E27FC236}">
+                <a16:creationId xmlns:a16="http://schemas.microsoft.com/office/drawing/2014/main" id="{4A2EA348-CD7A-4CED-A587-98942895F883}"/>
+              </a:ext>
+            </a:extLst>
+          </p:cNvPr>
+          <p:cNvSpPr>
+            <a:spLocks xmlns:a="http://schemas.openxmlformats.org/drawingml/2006/main" noGrp="1"/>
+          </p:cNvSpPr>
+          <p:nvPr/>
+        </p:nvSpPr>
+        <p:spPr>
+          <a:xfrm xmlns:a="http://schemas.openxmlformats.org/drawingml/2006/main">
+            <a:off x="8239125" y="2381250"/>
+            <a:ext cx="3343275" cy="304800"/>
+          </a:xfrm>
+          <a:prstGeom xmlns:a="http://schemas.openxmlformats.org/drawingml/2006/main" prst="rect">
+            <a:avLst/>
+          </a:prstGeom>
+          <a:noFill xmlns:a="http://schemas.openxmlformats.org/drawingml/2006/main"/>
+          <a:ln xmlns:a="http://schemas.openxmlformats.org/drawingml/2006/main" w="0">
+            <a:noFill/>
+          </a:ln>
+        </p:spPr>
+        <p:txBody>
+          <a:bodyPr xmlns:a="http://schemas.openxmlformats.org/drawingml/2006/main" anchor="t">
+            <a:noAutofit/>
+          </a:bodyPr>
+          <a:lstStyle xmlns:a="http://schemas.openxmlformats.org/drawingml/2006/main">
+            <a:defPPr>
+              <a:defRPr sz="1650" b="1">
+                <a:solidFill>
+                  <a:srgbClr val="157C87"/>
+                </a:solidFill>
+                <a:latin typeface="Arial"/>
+                <a:ea typeface="Arial"/>
+                <a:cs typeface="Arial"/>
+              </a:defRPr>
+            </a:defPPr>
+          </a:lstStyle>
+          <a:p xmlns:a="http://schemas.openxmlformats.org/drawingml/2006/main">
+            <a:pPr>
+              <a:defRPr sz="1650" b="1">
+                <a:solidFill>
+                  <a:srgbClr val="157C87"/>
+                </a:solidFill>
+                <a:latin typeface="Arial"/>
+                <a:ea typeface="Arial"/>
+                <a:cs typeface="Arial"/>
+              </a:defRPr>
+            </a:pPr>
+            <a:r>
+              <a:rPr sz="1650" b="1">
+                <a:solidFill>
+                  <a:srgbClr val="157C87"/>
+                </a:solidFill>
+                <a:latin typeface="Arial"/>
+                <a:ea typeface="Arial"/>
+                <a:cs typeface="Arial"/>
+              </a:rPr>
+              <a:t>Observed</a:t>
+            </a:r>
+          </a:p>
+        </p:txBody>
+      </p:sp>
+      <p:sp>
+        <p:nvSpPr>
+          <p:cNvPr id="5" name="">
+            <a:extLst xmlns:a="http://schemas.openxmlformats.org/drawingml/2006/main">
+              <a:ext uri="{FF2B5EF4-FFF2-40B4-BE49-F238E27FC236}">
+                <a16:creationId xmlns:a16="http://schemas.microsoft.com/office/drawing/2014/main" id="{66D446C9-9104-407C-A4E5-DFD8074CC778}"/>
+              </a:ext>
+            </a:extLst>
+          </p:cNvPr>
+          <p:cNvSpPr>
+            <a:spLocks xmlns:a="http://schemas.openxmlformats.org/drawingml/2006/main" noGrp="1"/>
+          </p:cNvSpPr>
+          <p:nvPr/>
+        </p:nvSpPr>
+        <p:spPr>
+          <a:xfrm xmlns:a="http://schemas.openxmlformats.org/drawingml/2006/main">
+            <a:off x="8239125" y="2733675"/>
+            <a:ext cx="3343275" cy="1600200"/>
+          </a:xfrm>
+          <a:prstGeom xmlns:a="http://schemas.openxmlformats.org/drawingml/2006/main" prst="rect">
+            <a:avLst/>
+          </a:prstGeom>
+          <a:noFill xmlns:a="http://schemas.openxmlformats.org/drawingml/2006/main"/>
+          <a:ln xmlns:a="http://schemas.openxmlformats.org/drawingml/2006/main" w="0">
+            <a:noFill/>
+          </a:ln>
+        </p:spPr>
+        <p:txBody>
+          <a:bodyPr xmlns:a="http://schemas.openxmlformats.org/drawingml/2006/main" anchor="t">
+            <a:noAutofit/>
+          </a:bodyPr>
+          <a:lstStyle xmlns:a="http://schemas.openxmlformats.org/drawingml/2006/main">
+            <a:defPPr>
+              <a:defRPr sz="1800" b="0">
+                <a:solidFill>
+                  <a:srgbClr val="213744"/>
+                </a:solidFill>
+                <a:latin typeface="Arial"/>
+                <a:ea typeface="Arial"/>
+                <a:cs typeface="Arial"/>
+              </a:defRPr>
+            </a:defPPr>
+          </a:lstStyle>
+          <a:p xmlns:a="http://schemas.openxmlformats.org/drawingml/2006/main">
+            <a:pPr>
+              <a:defRPr sz="1800" b="0">
+                <a:solidFill>
+                  <a:srgbClr val="213744"/>
+                </a:solidFill>
+                <a:latin typeface="Arial"/>
+                <a:ea typeface="Arial"/>
+                <a:cs typeface="Arial"/>
+              </a:defRPr>
+            </a:pPr>
+            <a:r>
+              <a:rPr sz="1800" b="0">
+                <a:solidFill>
+                  <a:srgbClr val="213744"/>
+                </a:solidFill>
+                <a:latin typeface="Arial"/>
+                <a:ea typeface="Arial"/>
+                <a:cs typeface="Arial"/>
+              </a:rPr>
+              <a:t>The original LandXML survey breaklines resolve and reach an ordinary USD bake rendered by Storm.</a:t>
+            </a:r>
+          </a:p>
+        </p:txBody>
+      </p:sp>
+      <p:sp>
+        <p:nvSpPr>
+          <p:cNvPr id="6" name="">
+            <a:extLst xmlns:a="http://schemas.openxmlformats.org/drawingml/2006/main">
+              <a:ext uri="{FF2B5EF4-FFF2-40B4-BE49-F238E27FC236}">
+                <a16:creationId xmlns:a16="http://schemas.microsoft.com/office/drawing/2014/main" id="{FDB8EF05-EE62-477B-93C3-E3D9D1071A42}"/>
+              </a:ext>
+            </a:extLst>
+          </p:cNvPr>
+          <p:cNvSpPr>
+            <a:spLocks xmlns:a="http://schemas.openxmlformats.org/drawingml/2006/main" noGrp="1"/>
+          </p:cNvSpPr>
+          <p:nvPr/>
+        </p:nvSpPr>
+        <p:spPr>
+          <a:xfrm xmlns:a="http://schemas.openxmlformats.org/drawingml/2006/main">
+            <a:off x="8239125" y="4429125"/>
+            <a:ext cx="3343275" cy="314325"/>
+          </a:xfrm>
+          <a:prstGeom xmlns:a="http://schemas.openxmlformats.org/drawingml/2006/main" prst="rect">
+            <a:avLst/>
+          </a:prstGeom>
+          <a:noFill xmlns:a="http://schemas.openxmlformats.org/drawingml/2006/main"/>
+          <a:ln xmlns:a="http://schemas.openxmlformats.org/drawingml/2006/main" w="0">
+            <a:noFill/>
+          </a:ln>
+        </p:spPr>
+        <p:txBody>
+          <a:bodyPr xmlns:a="http://schemas.openxmlformats.org/drawingml/2006/main" anchor="t">
+            <a:noAutofit/>
+          </a:bodyPr>
+          <a:lstStyle xmlns:a="http://schemas.openxmlformats.org/drawingml/2006/main">
+            <a:defPPr>
+              <a:defRPr sz="1650" b="1">
+                <a:solidFill>
+                  <a:srgbClr val="157C87"/>
+                </a:solidFill>
+                <a:latin typeface="Arial"/>
+                <a:ea typeface="Arial"/>
+                <a:cs typeface="Arial"/>
+              </a:defRPr>
+            </a:defPPr>
+          </a:lstStyle>
+          <a:p xmlns:a="http://schemas.openxmlformats.org/drawingml/2006/main">
+            <a:pPr>
+              <a:defRPr sz="1650" b="1">
+                <a:solidFill>
+                  <a:srgbClr val="157C87"/>
+                </a:solidFill>
+                <a:latin typeface="Arial"/>
+                <a:ea typeface="Arial"/>
+                <a:cs typeface="Arial"/>
+              </a:defRPr>
+            </a:pPr>
+            <a:r>
+              <a:rPr sz="1650" b="1">
+                <a:solidFill>
+                  <a:srgbClr val="157C87"/>
+                </a:solidFill>
+                <a:latin typeface="Arial"/>
+                <a:ea typeface="Arial"/>
+                <a:cs typeface="Arial"/>
+              </a:rPr>
+              <a:t>What it establishes</a:t>
+            </a:r>
+          </a:p>
+        </p:txBody>
+      </p:sp>
+      <p:sp>
+        <p:nvSpPr>
+          <p:cNvPr id="7" name="">
+            <a:extLst xmlns:a="http://schemas.openxmlformats.org/drawingml/2006/main">
+              <a:ext uri="{FF2B5EF4-FFF2-40B4-BE49-F238E27FC236}">
+                <a16:creationId xmlns:a16="http://schemas.microsoft.com/office/drawing/2014/main" id="{CA716E3D-C434-4516-8C78-89C0C8C61A56}"/>
+              </a:ext>
+            </a:extLst>
+          </p:cNvPr>
+          <p:cNvSpPr>
+            <a:spLocks xmlns:a="http://schemas.openxmlformats.org/drawingml/2006/main" noGrp="1"/>
+          </p:cNvSpPr>
+          <p:nvPr/>
+        </p:nvSpPr>
+        <p:spPr>
+          <a:xfrm xmlns:a="http://schemas.openxmlformats.org/drawingml/2006/main">
+            <a:off x="8239125" y="4791075"/>
+            <a:ext cx="3343275" cy="1800225"/>
+          </a:xfrm>
+          <a:prstGeom xmlns:a="http://schemas.openxmlformats.org/drawingml/2006/main" prst="rect">
+            <a:avLst/>
+          </a:prstGeom>
+          <a:noFill xmlns:a="http://schemas.openxmlformats.org/drawingml/2006/main"/>
+          <a:ln xmlns:a="http://schemas.openxmlformats.org/drawingml/2006/main" w="0">
+            <a:noFill/>
+          </a:ln>
+        </p:spPr>
+        <p:txBody>
+          <a:bodyPr xmlns:a="http://schemas.openxmlformats.org/drawingml/2006/main" anchor="t">
+            <a:noAutofit/>
+          </a:bodyPr>
+          <a:lstStyle xmlns:a="http://schemas.openxmlformats.org/drawingml/2006/main">
+            <a:defPPr>
+              <a:defRPr sz="1800" b="0">
+                <a:solidFill>
+                  <a:srgbClr val="213744"/>
+                </a:solidFill>
+                <a:latin typeface="Arial"/>
+                <a:ea typeface="Arial"/>
+                <a:cs typeface="Arial"/>
+              </a:defRPr>
+            </a:defPPr>
+          </a:lstStyle>
+          <a:p xmlns:a="http://schemas.openxmlformats.org/drawingml/2006/main">
+            <a:pPr>
+              <a:defRPr sz="1800" b="0">
+                <a:solidFill>
+                  <a:srgbClr val="213744"/>
+                </a:solidFill>
+                <a:latin typeface="Arial"/>
+                <a:ea typeface="Arial"/>
+                <a:cs typeface="Arial"/>
+              </a:defRPr>
+            </a:pPr>
+            <a:r>
+              <a:rPr sz="1800" b="0">
+                <a:solidFill>
+                  <a:srgbClr val="213744"/>
+                </a:solidFill>
+                <a:latin typeface="Arial"/>
+                <a:ea typeface="Arial"/>
+                <a:cs typeface="Arial"/>
+              </a:rPr>
+              <a:t>The partner case exercises a site's calibrated CRS. Its WKT-carried calibration participates in resolution.</a:t>
+            </a:r>
+          </a:p>
+        </p:txBody>
+      </p:sp>
+      <p:sp>
+        <p:nvSpPr>
+          <p:cNvPr id="8" name="">
+            <a:extLst xmlns:a="http://schemas.openxmlformats.org/drawingml/2006/main">
+              <a:ext uri="{FF2B5EF4-FFF2-40B4-BE49-F238E27FC236}">
+                <a16:creationId xmlns:a16="http://schemas.microsoft.com/office/drawing/2014/main" id="{9068A3EE-7DC3-400A-BB3E-0505CBF65892}"/>
+              </a:ext>
+            </a:extLst>
+          </p:cNvPr>
+          <p:cNvSpPr>
+            <a:spLocks xmlns:a="http://schemas.openxmlformats.org/drawingml/2006/main" noGrp="1"/>
+          </p:cNvSpPr>
+          <p:nvPr/>
+        </p:nvSpPr>
+        <p:spPr>
+          <a:xfrm xmlns:a="http://schemas.openxmlformats.org/drawingml/2006/main">
+            <a:off x="609600" y="6534150"/>
+            <a:ext cx="7258050" cy="238125"/>
+          </a:xfrm>
+          <a:prstGeom xmlns:a="http://schemas.openxmlformats.org/drawingml/2006/main" prst="rect">
+            <a:avLst/>
+          </a:prstGeom>
+          <a:noFill xmlns:a="http://schemas.openxmlformats.org/drawingml/2006/main"/>
+          <a:ln xmlns:a="http://schemas.openxmlformats.org/drawingml/2006/main" w="0">
+            <a:noFill/>
+          </a:ln>
+        </p:spPr>
+        <p:txBody>
+          <a:bodyPr xmlns:a="http://schemas.openxmlformats.org/drawingml/2006/main" anchor="t">
+            <a:noAutofit/>
+          </a:bodyPr>
+          <a:lstStyle xmlns:a="http://schemas.openxmlformats.org/drawingml/2006/main">
+            <a:defPPr>
+              <a:defRPr sz="1350" b="0">
+                <a:solidFill>
+                  <a:srgbClr val="526B79"/>
+                </a:solidFill>
+                <a:latin typeface="Arial"/>
+                <a:ea typeface="Arial"/>
+                <a:cs typeface="Arial"/>
+              </a:defRPr>
+            </a:defPPr>
+          </a:lstStyle>
+          <a:p xmlns:a="http://schemas.openxmlformats.org/drawingml/2006/main">
+            <a:pPr>
+              <a:defRPr sz="1350" b="0">
+                <a:solidFill>
+                  <a:srgbClr val="526B79"/>
+                </a:solidFill>
+                <a:latin typeface="Arial"/>
+                <a:ea typeface="Arial"/>
+                <a:cs typeface="Arial"/>
+              </a:defRPr>
+            </a:pPr>
+            <a:r>
+              <a:rPr sz="1350" b="0">
+                <a:solidFill>
+                  <a:srgbClr val="526B79"/>
+                </a:solidFill>
+                <a:latin typeface="Arial"/>
+                <a:ea typeface="Arial"/>
+                <a:cs typeface="Arial"/>
+              </a:rPr>
+              <a:t>Recorded native render. Limits in the notes and README.</a:t>
+            </a:r>
+          </a:p>
+        </p:txBody>
+      </p:sp>
+    </p:spTree>
+    <p:extLst>
+      <p:ext uri="{BB962C8B-B14F-4D97-AF65-F5344CB8AC3E}">
+        <p14:creationId xmlns:p14="http://schemas.microsoft.com/office/powerpoint/2010/main" val="538108105"/>
+      </p:ext>
+    </p:extLst>
+  </p:cSld>
+</p:sld>
+</file>
+
+<file path=ppt/slides/slide13.xml><?xml version="1.0" encoding="utf-8"?>
+<p:sld xmlns:p="http://schemas.openxmlformats.org/presentationml/2006/main">
+  <p:cSld>
+    <p:bg>
+      <p:bgPr>
+        <a:solidFill xmlns:a="http://schemas.openxmlformats.org/drawingml/2006/main">
+          <a:srgbClr val="FFFFFF"/>
+        </a:solidFill>
+      </p:bgPr>
+    </p:bg>
+    <p:spTree>
+      <p:nvGrpSpPr>
+        <p:cNvPr id="1" name=""/>
+        <p:cNvGrpSpPr/>
+        <p:nvPr/>
+      </p:nvGrpSpPr>
+      <p:grpSpPr>
+        <a:xfrm xmlns:a="http://schemas.openxmlformats.org/drawingml/2006/main"/>
+      </p:grpSpPr>
+      <p:sp>
+        <p:nvSpPr>
+          <p:cNvPr id="9" name="">
+            <a:extLst xmlns:a="http://schemas.openxmlformats.org/drawingml/2006/main">
+              <a:ext uri="{FF2B5EF4-FFF2-40B4-BE49-F238E27FC236}">
+                <a16:creationId xmlns:a16="http://schemas.microsoft.com/office/drawing/2014/main" id="{CBC1FE16-428D-4297-8F2B-807842C7D3FE}"/>
+              </a:ext>
+            </a:extLst>
+          </p:cNvPr>
+          <p:cNvSpPr>
+            <a:spLocks xmlns:a="http://schemas.openxmlformats.org/drawingml/2006/main" noGrp="1"/>
+          </p:cNvSpPr>
+          <p:nvPr/>
+        </p:nvSpPr>
+        <p:spPr>
+          <a:xfrm xmlns:a="http://schemas.openxmlformats.org/drawingml/2006/main">
+            <a:off x="609600" y="323850"/>
+            <a:ext cx="10972800" cy="990600"/>
+          </a:xfrm>
+          <a:prstGeom xmlns:a="http://schemas.openxmlformats.org/drawingml/2006/main" prst="rect">
+            <a:avLst/>
+          </a:prstGeom>
+          <a:noFill xmlns:a="http://schemas.openxmlformats.org/drawingml/2006/main"/>
+          <a:ln xmlns:a="http://schemas.openxmlformats.org/drawingml/2006/main" w="0">
+            <a:noFill/>
+          </a:ln>
+        </p:spPr>
+        <p:txBody>
+          <a:bodyPr xmlns:a="http://schemas.openxmlformats.org/drawingml/2006/main" anchor="t">
+            <a:noAutofit/>
+          </a:bodyPr>
+          <a:lstStyle xmlns:a="http://schemas.openxmlformats.org/drawingml/2006/main">
+            <a:defPPr>
+              <a:defRPr sz="3150" b="1">
+                <a:solidFill>
+                  <a:srgbClr val="213744"/>
+                </a:solidFill>
+                <a:latin typeface="Arial"/>
+                <a:ea typeface="Arial"/>
+                <a:cs typeface="Arial"/>
+              </a:defRPr>
+            </a:defPPr>
+          </a:lstStyle>
+          <a:p xmlns:a="http://schemas.openxmlformats.org/drawingml/2006/main">
+            <a:pPr>
+              <a:defRPr sz="3150" b="1">
+                <a:solidFill>
+                  <a:srgbClr val="213744"/>
+                </a:solidFill>
+                <a:latin typeface="Arial"/>
+                <a:ea typeface="Arial"/>
+                <a:cs typeface="Arial"/>
+              </a:defRPr>
+            </a:pPr>
+            <a:r>
+              <a:rPr sz="3150" b="1">
+                <a:solidFill>
+                  <a:srgbClr val="213744"/>
+                </a:solidFill>
+                <a:latin typeface="Arial"/>
+                <a:ea typeface="Arial"/>
+                <a:cs typeface="Arial"/>
+              </a:rPr>
+              <a:t>Appendix: Horizontal railway placement</a:t>
+            </a:r>
+          </a:p>
+        </p:txBody>
+      </p:sp>
+      <p:sp>
+        <p:nvSpPr>
+          <p:cNvPr id="2" name="">
+            <a:extLst xmlns:a="http://schemas.openxmlformats.org/drawingml/2006/main">
+              <a:ext uri="{FF2B5EF4-FFF2-40B4-BE49-F238E27FC236}">
+                <a16:creationId xmlns:a16="http://schemas.microsoft.com/office/drawing/2014/main" id="{C170BE18-3017-4BEB-A35A-5551C32E8167}"/>
+              </a:ext>
+            </a:extLst>
+          </p:cNvPr>
+          <p:cNvSpPr>
+            <a:spLocks xmlns:a="http://schemas.openxmlformats.org/drawingml/2006/main" noGrp="1"/>
+          </p:cNvSpPr>
+          <p:nvPr/>
+        </p:nvSpPr>
+        <p:spPr>
+          <a:xfrm xmlns:a="http://schemas.openxmlformats.org/drawingml/2006/main">
+            <a:off x="609600" y="1400175"/>
+            <a:ext cx="10972800" cy="771525"/>
+          </a:xfrm>
+          <a:prstGeom xmlns:a="http://schemas.openxmlformats.org/drawingml/2006/main" prst="rect">
+            <a:avLst/>
+          </a:prstGeom>
+          <a:noFill xmlns:a="http://schemas.openxmlformats.org/drawingml/2006/main"/>
+          <a:ln xmlns:a="http://schemas.openxmlformats.org/drawingml/2006/main" w="0">
+            <a:noFill/>
+          </a:ln>
+        </p:spPr>
+        <p:txBody>
+          <a:bodyPr xmlns:a="http://schemas.openxmlformats.org/drawingml/2006/main" anchor="t">
+            <a:noAutofit/>
+          </a:bodyPr>
+          <a:lstStyle xmlns:a="http://schemas.openxmlformats.org/drawingml/2006/main">
+            <a:defPPr>
+              <a:defRPr sz="2325" b="1">
+                <a:solidFill>
+                  <a:srgbClr val="157C87"/>
+                </a:solidFill>
+                <a:latin typeface="Arial"/>
+                <a:ea typeface="Arial"/>
+                <a:cs typeface="Arial"/>
+              </a:defRPr>
+            </a:defPPr>
+          </a:lstStyle>
+          <a:p xmlns:a="http://schemas.openxmlformats.org/drawingml/2006/main">
+            <a:pPr>
+              <a:defRPr sz="2325" b="1">
+                <a:solidFill>
+                  <a:srgbClr val="157C87"/>
+                </a:solidFill>
+                <a:latin typeface="Arial"/>
+                <a:ea typeface="Arial"/>
+                <a:cs typeface="Arial"/>
+              </a:defRPr>
+            </a:pPr>
+            <a:r>
+              <a:rPr sz="2325" b="1">
+                <a:solidFill>
+                  <a:srgbClr val="157C87"/>
+                </a:solidFill>
+                <a:latin typeface="Arial"/>
+                <a:ea typeface="Arial"/>
+                <a:cs typeface="Arial"/>
+              </a:rPr>
+              <a:t>Can incomplete source metadata still support a useful, explicitly horizontal workflow?</a:t>
+            </a:r>
+          </a:p>
+        </p:txBody>
+      </p:sp>
+      <p:pic>
+        <p:nvPicPr>
+          <p:cNvPr id="3" name="">
+            <a:extLst xmlns:a="http://schemas.openxmlformats.org/drawingml/2006/main">
+              <a:ext uri="{FF2B5EF4-FFF2-40B4-BE49-F238E27FC236}">
+                <a16:creationId xmlns:a16="http://schemas.microsoft.com/office/drawing/2014/main" id="{34A557FE-065B-49EE-B88E-BCC9CC4535DD}"/>
+              </a:ext>
+            </a:extLst>
+          </p:cNvPr>
+          <p:cNvPicPr>
+            <a:picLocks xmlns:a="http://schemas.openxmlformats.org/drawingml/2006/main" noChangeAspect="1"/>
+          </p:cNvPicPr>
+          <p:nvPr/>
+        </p:nvPicPr>
+        <p:blipFill>
+          <a:blip xmlns:r="http://schemas.openxmlformats.org/officeDocument/2006/relationships" xmlns:a="http://schemas.openxmlformats.org/drawingml/2006/main" r:embed="Rd4d8e8de17274f74"/>
+          <a:stretch xmlns:a="http://schemas.openxmlformats.org/drawingml/2006/main"/>
+        </p:blipFill>
+        <p:spPr>
+          <a:xfrm xmlns:a="http://schemas.openxmlformats.org/drawingml/2006/main">
+            <a:off x="609600" y="2558007"/>
+            <a:ext cx="7258050" cy="3732711"/>
+          </a:xfrm>
+          <a:prstGeom xmlns:a="http://schemas.openxmlformats.org/drawingml/2006/main" prst="rect">
+            <a:avLst/>
+          </a:prstGeom>
+        </p:spPr>
+      </p:pic>
+      <p:sp>
+        <p:nvSpPr>
+          <p:cNvPr id="4" name="">
+            <a:extLst xmlns:a="http://schemas.openxmlformats.org/drawingml/2006/main">
+              <a:ext uri="{FF2B5EF4-FFF2-40B4-BE49-F238E27FC236}">
+                <a16:creationId xmlns:a16="http://schemas.microsoft.com/office/drawing/2014/main" id="{74258514-FE61-49F6-A72C-B67E9E31C00F}"/>
+              </a:ext>
+            </a:extLst>
+          </p:cNvPr>
+          <p:cNvSpPr>
+            <a:spLocks xmlns:a="http://schemas.openxmlformats.org/drawingml/2006/main" noGrp="1"/>
+          </p:cNvSpPr>
+          <p:nvPr/>
+        </p:nvSpPr>
+        <p:spPr>
+          <a:xfrm xmlns:a="http://schemas.openxmlformats.org/drawingml/2006/main">
+            <a:off x="8239125" y="2381250"/>
+            <a:ext cx="3343275" cy="304800"/>
+          </a:xfrm>
+          <a:prstGeom xmlns:a="http://schemas.openxmlformats.org/drawingml/2006/main" prst="rect">
+            <a:avLst/>
+          </a:prstGeom>
+          <a:noFill xmlns:a="http://schemas.openxmlformats.org/drawingml/2006/main"/>
+          <a:ln xmlns:a="http://schemas.openxmlformats.org/drawingml/2006/main" w="0">
+            <a:noFill/>
+          </a:ln>
+        </p:spPr>
+        <p:txBody>
+          <a:bodyPr xmlns:a="http://schemas.openxmlformats.org/drawingml/2006/main" anchor="t">
+            <a:noAutofit/>
+          </a:bodyPr>
+          <a:lstStyle xmlns:a="http://schemas.openxmlformats.org/drawingml/2006/main">
+            <a:defPPr>
+              <a:defRPr sz="1650" b="1">
+                <a:solidFill>
+                  <a:srgbClr val="157C87"/>
+                </a:solidFill>
+                <a:latin typeface="Arial"/>
+                <a:ea typeface="Arial"/>
+                <a:cs typeface="Arial"/>
+              </a:defRPr>
+            </a:defPPr>
+          </a:lstStyle>
+          <a:p xmlns:a="http://schemas.openxmlformats.org/drawingml/2006/main">
+            <a:pPr>
+              <a:defRPr sz="1650" b="1">
+                <a:solidFill>
+                  <a:srgbClr val="157C87"/>
+                </a:solidFill>
+                <a:latin typeface="Arial"/>
+                <a:ea typeface="Arial"/>
+                <a:cs typeface="Arial"/>
+              </a:defRPr>
+            </a:pPr>
+            <a:r>
+              <a:rPr sz="1650" b="1">
+                <a:solidFill>
+                  <a:srgbClr val="157C87"/>
+                </a:solidFill>
+                <a:latin typeface="Arial"/>
+                <a:ea typeface="Arial"/>
+                <a:cs typeface="Arial"/>
+              </a:rPr>
+              <a:t>Observed</a:t>
+            </a:r>
+          </a:p>
+        </p:txBody>
+      </p:sp>
+      <p:sp>
+        <p:nvSpPr>
+          <p:cNvPr id="5" name="">
+            <a:extLst xmlns:a="http://schemas.openxmlformats.org/drawingml/2006/main">
+              <a:ext uri="{FF2B5EF4-FFF2-40B4-BE49-F238E27FC236}">
+                <a16:creationId xmlns:a16="http://schemas.microsoft.com/office/drawing/2014/main" id="{6A1521DE-4CF5-4866-BC7B-3FAEC1CBA26C}"/>
+              </a:ext>
+            </a:extLst>
+          </p:cNvPr>
+          <p:cNvSpPr>
+            <a:spLocks xmlns:a="http://schemas.openxmlformats.org/drawingml/2006/main" noGrp="1"/>
+          </p:cNvSpPr>
+          <p:nvPr/>
+        </p:nvSpPr>
+        <p:spPr>
+          <a:xfrm xmlns:a="http://schemas.openxmlformats.org/drawingml/2006/main">
+            <a:off x="8239125" y="2733675"/>
+            <a:ext cx="3343275" cy="1600200"/>
+          </a:xfrm>
+          <a:prstGeom xmlns:a="http://schemas.openxmlformats.org/drawingml/2006/main" prst="rect">
+            <a:avLst/>
+          </a:prstGeom>
+          <a:noFill xmlns:a="http://schemas.openxmlformats.org/drawingml/2006/main"/>
+          <a:ln xmlns:a="http://schemas.openxmlformats.org/drawingml/2006/main" w="0">
+            <a:noFill/>
+          </a:ln>
+        </p:spPr>
+        <p:txBody>
+          <a:bodyPr xmlns:a="http://schemas.openxmlformats.org/drawingml/2006/main" anchor="t">
+            <a:noAutofit/>
+          </a:bodyPr>
+          <a:lstStyle xmlns:a="http://schemas.openxmlformats.org/drawingml/2006/main">
+            <a:defPPr>
+              <a:defRPr sz="1800" b="0">
+                <a:solidFill>
+                  <a:srgbClr val="213744"/>
+                </a:solidFill>
+                <a:latin typeface="Arial"/>
+                <a:ea typeface="Arial"/>
+                <a:cs typeface="Arial"/>
+              </a:defRPr>
+            </a:defPPr>
+          </a:lstStyle>
+          <a:p xmlns:a="http://schemas.openxmlformats.org/drawingml/2006/main">
+            <a:pPr>
+              <a:defRPr sz="1800" b="0">
+                <a:solidFill>
+                  <a:srgbClr val="213744"/>
+                </a:solidFill>
+                <a:latin typeface="Arial"/>
+                <a:ea typeface="Arial"/>
+                <a:cs typeface="Arial"/>
+              </a:defRPr>
+            </a:pPr>
+            <a:r>
+              <a:rPr sz="1800" b="0">
+                <a:solidFill>
+                  <a:srgbClr val="213744"/>
+                </a:solidFill>
+                <a:latin typeface="Arial"/>
+                <a:ea typeface="Arial"/>
+                <a:cs typeface="Arial"/>
+              </a:rPr>
+              <a:t>The horizontal copy resolves 15,822 vertices across 2,386 parts. The plot uses offsets only for display.</a:t>
+            </a:r>
+          </a:p>
+        </p:txBody>
+      </p:sp>
+      <p:sp>
+        <p:nvSpPr>
+          <p:cNvPr id="6" name="">
+            <a:extLst xmlns:a="http://schemas.openxmlformats.org/drawingml/2006/main">
+              <a:ext uri="{FF2B5EF4-FFF2-40B4-BE49-F238E27FC236}">
+                <a16:creationId xmlns:a16="http://schemas.microsoft.com/office/drawing/2014/main" id="{0F8F6B26-7D1E-42E3-8E40-637BDA6BB7ED}"/>
+              </a:ext>
+            </a:extLst>
+          </p:cNvPr>
+          <p:cNvSpPr>
+            <a:spLocks xmlns:a="http://schemas.openxmlformats.org/drawingml/2006/main" noGrp="1"/>
+          </p:cNvSpPr>
+          <p:nvPr/>
+        </p:nvSpPr>
+        <p:spPr>
+          <a:xfrm xmlns:a="http://schemas.openxmlformats.org/drawingml/2006/main">
+            <a:off x="8239125" y="4429125"/>
+            <a:ext cx="3343275" cy="314325"/>
+          </a:xfrm>
+          <a:prstGeom xmlns:a="http://schemas.openxmlformats.org/drawingml/2006/main" prst="rect">
+            <a:avLst/>
+          </a:prstGeom>
+          <a:noFill xmlns:a="http://schemas.openxmlformats.org/drawingml/2006/main"/>
+          <a:ln xmlns:a="http://schemas.openxmlformats.org/drawingml/2006/main" w="0">
+            <a:noFill/>
+          </a:ln>
+        </p:spPr>
+        <p:txBody>
+          <a:bodyPr xmlns:a="http://schemas.openxmlformats.org/drawingml/2006/main" anchor="t">
+            <a:noAutofit/>
+          </a:bodyPr>
+          <a:lstStyle xmlns:a="http://schemas.openxmlformats.org/drawingml/2006/main">
+            <a:defPPr>
+              <a:defRPr sz="1650" b="1">
+                <a:solidFill>
+                  <a:srgbClr val="157C87"/>
+                </a:solidFill>
+                <a:latin typeface="Arial"/>
+                <a:ea typeface="Arial"/>
+                <a:cs typeface="Arial"/>
+              </a:defRPr>
+            </a:defPPr>
+          </a:lstStyle>
+          <a:p xmlns:a="http://schemas.openxmlformats.org/drawingml/2006/main">
+            <a:pPr>
+              <a:defRPr sz="1650" b="1">
+                <a:solidFill>
+                  <a:srgbClr val="157C87"/>
+                </a:solidFill>
+                <a:latin typeface="Arial"/>
+                <a:ea typeface="Arial"/>
+                <a:cs typeface="Arial"/>
+              </a:defRPr>
+            </a:pPr>
+            <a:r>
+              <a:rPr sz="1650" b="1">
+                <a:solidFill>
+                  <a:srgbClr val="157C87"/>
+                </a:solidFill>
+                <a:latin typeface="Arial"/>
+                <a:ea typeface="Arial"/>
+                <a:cs typeface="Arial"/>
+              </a:rPr>
+              <a:t>What it establishes</a:t>
+            </a:r>
+          </a:p>
+        </p:txBody>
+      </p:sp>
+      <p:sp>
+        <p:nvSpPr>
+          <p:cNvPr id="7" name="">
+            <a:extLst xmlns:a="http://schemas.openxmlformats.org/drawingml/2006/main">
+              <a:ext uri="{FF2B5EF4-FFF2-40B4-BE49-F238E27FC236}">
+                <a16:creationId xmlns:a16="http://schemas.microsoft.com/office/drawing/2014/main" id="{94C80F57-161D-4F0D-B1D8-56BF5F0AC7E2}"/>
+              </a:ext>
+            </a:extLst>
+          </p:cNvPr>
+          <p:cNvSpPr>
+            <a:spLocks xmlns:a="http://schemas.openxmlformats.org/drawingml/2006/main" noGrp="1"/>
+          </p:cNvSpPr>
+          <p:nvPr/>
+        </p:nvSpPr>
+        <p:spPr>
+          <a:xfrm xmlns:a="http://schemas.openxmlformats.org/drawingml/2006/main">
+            <a:off x="8239125" y="4791075"/>
+            <a:ext cx="3343275" cy="1800225"/>
+          </a:xfrm>
+          <a:prstGeom xmlns:a="http://schemas.openxmlformats.org/drawingml/2006/main" prst="rect">
+            <a:avLst/>
+          </a:prstGeom>
+          <a:noFill xmlns:a="http://schemas.openxmlformats.org/drawingml/2006/main"/>
+          <a:ln xmlns:a="http://schemas.openxmlformats.org/drawingml/2006/main" w="0">
+            <a:noFill/>
+          </a:ln>
+        </p:spPr>
+        <p:txBody>
+          <a:bodyPr xmlns:a="http://schemas.openxmlformats.org/drawingml/2006/main" anchor="t">
+            <a:noAutofit/>
+          </a:bodyPr>
+          <a:lstStyle xmlns:a="http://schemas.openxmlformats.org/drawingml/2006/main">
+            <a:defPPr>
+              <a:defRPr sz="1800" b="0">
+                <a:solidFill>
+                  <a:srgbClr val="213744"/>
+                </a:solidFill>
+                <a:latin typeface="Arial"/>
+                <a:ea typeface="Arial"/>
+                <a:cs typeface="Arial"/>
+              </a:defRPr>
+            </a:defPPr>
+          </a:lstStyle>
+          <a:p xmlns:a="http://schemas.openxmlformats.org/drawingml/2006/main">
+            <a:pPr>
+              <a:defRPr sz="1800" b="0">
+                <a:solidFill>
+                  <a:srgbClr val="213744"/>
+                </a:solidFill>
+                <a:latin typeface="Arial"/>
+                <a:ea typeface="Arial"/>
+                <a:cs typeface="Arial"/>
+              </a:defRPr>
+            </a:pPr>
+            <a:r>
+              <a:rPr sz="1800" b="0">
+                <a:solidFill>
+                  <a:srgbClr val="213744"/>
+                </a:solidFill>
+                <a:latin typeface="Arial"/>
+                <a:ea typeface="Arial"/>
+                <a:cs typeface="Arial"/>
+              </a:rPr>
+              <a:t>The draft supports horizontal resolution without inventing a height reference. The original third components remain uninterpreted.</a:t>
+            </a:r>
+          </a:p>
+        </p:txBody>
+      </p:sp>
+      <p:sp>
+        <p:nvSpPr>
+          <p:cNvPr id="8" name="">
+            <a:extLst xmlns:a="http://schemas.openxmlformats.org/drawingml/2006/main">
+              <a:ext uri="{FF2B5EF4-FFF2-40B4-BE49-F238E27FC236}">
+                <a16:creationId xmlns:a16="http://schemas.microsoft.com/office/drawing/2014/main" id="{C4A27A77-EA10-48EC-9BBB-6983FF1E48D7}"/>
+              </a:ext>
+            </a:extLst>
+          </p:cNvPr>
+          <p:cNvSpPr>
+            <a:spLocks xmlns:a="http://schemas.openxmlformats.org/drawingml/2006/main" noGrp="1"/>
+          </p:cNvSpPr>
+          <p:nvPr/>
+        </p:nvSpPr>
+        <p:spPr>
+          <a:xfrm xmlns:a="http://schemas.openxmlformats.org/drawingml/2006/main">
+            <a:off x="609600" y="6534150"/>
+            <a:ext cx="7258050" cy="238125"/>
+          </a:xfrm>
+          <a:prstGeom xmlns:a="http://schemas.openxmlformats.org/drawingml/2006/main" prst="rect">
+            <a:avLst/>
+          </a:prstGeom>
+          <a:noFill xmlns:a="http://schemas.openxmlformats.org/drawingml/2006/main"/>
+          <a:ln xmlns:a="http://schemas.openxmlformats.org/drawingml/2006/main" w="0">
+            <a:noFill/>
+          </a:ln>
+        </p:spPr>
+        <p:txBody>
+          <a:bodyPr xmlns:a="http://schemas.openxmlformats.org/drawingml/2006/main" anchor="t">
+            <a:noAutofit/>
+          </a:bodyPr>
+          <a:lstStyle xmlns:a="http://schemas.openxmlformats.org/drawingml/2006/main">
+            <a:defPPr>
+              <a:defRPr sz="1350" b="0">
+                <a:solidFill>
+                  <a:srgbClr val="526B79"/>
+                </a:solidFill>
+                <a:latin typeface="Arial"/>
+                <a:ea typeface="Arial"/>
+                <a:cs typeface="Arial"/>
+              </a:defRPr>
+            </a:defPPr>
+          </a:lstStyle>
+          <a:p xmlns:a="http://schemas.openxmlformats.org/drawingml/2006/main">
+            <a:pPr>
+              <a:defRPr sz="1350" b="0">
+                <a:solidFill>
+                  <a:srgbClr val="526B79"/>
+                </a:solidFill>
+                <a:latin typeface="Arial"/>
+                <a:ea typeface="Arial"/>
+                <a:cs typeface="Arial"/>
+              </a:defRPr>
+            </a:pPr>
+            <a:r>
+              <a:rPr sz="1350" b="0">
+                <a:solidFill>
+                  <a:srgbClr val="526B79"/>
+                </a:solidFill>
+                <a:latin typeface="Arial"/>
+                <a:ea typeface="Arial"/>
+                <a:cs typeface="Arial"/>
+              </a:rPr>
+              <a:t>Plot of recorded resolved geometry. Limits in the notes and README.</a:t>
+            </a:r>
+          </a:p>
+        </p:txBody>
+      </p:sp>
+    </p:spTree>
+    <p:extLst>
+      <p:ext uri="{BB962C8B-B14F-4D97-AF65-F5344CB8AC3E}">
+        <p14:creationId xmlns:p14="http://schemas.microsoft.com/office/powerpoint/2010/main" val="1206821735"/>
+      </p:ext>
+    </p:extLst>
+  </p:cSld>
+</p:sld>
+</file>
+
+<file path=ppt/slides/slide14.xml><?xml version="1.0" encoding="utf-8"?>
+<p:sld xmlns:p="http://schemas.openxmlformats.org/presentationml/2006/main">
+  <p:cSld>
+    <p:bg>
+      <p:bgPr>
+        <a:solidFill xmlns:a="http://schemas.openxmlformats.org/drawingml/2006/main">
+          <a:srgbClr val="FFFFFF"/>
+        </a:solidFill>
+      </p:bgPr>
+    </p:bg>
+    <p:spTree>
+      <p:nvGrpSpPr>
+        <p:cNvPr id="1" name=""/>
+        <p:cNvGrpSpPr/>
+        <p:nvPr/>
+      </p:nvGrpSpPr>
+      <p:grpSpPr>
+        <a:xfrm xmlns:a="http://schemas.openxmlformats.org/drawingml/2006/main"/>
+      </p:grpSpPr>
+      <p:sp>
+        <p:nvSpPr>
+          <p:cNvPr id="8" name="">
+            <a:extLst xmlns:a="http://schemas.openxmlformats.org/drawingml/2006/main">
+              <a:ext uri="{FF2B5EF4-FFF2-40B4-BE49-F238E27FC236}">
+                <a16:creationId xmlns:a16="http://schemas.microsoft.com/office/drawing/2014/main" id="{509050F6-FBD3-4F71-AAD0-FD89A92129CA}"/>
+              </a:ext>
+            </a:extLst>
+          </p:cNvPr>
+          <p:cNvSpPr>
+            <a:spLocks xmlns:a="http://schemas.openxmlformats.org/drawingml/2006/main" noGrp="1"/>
+          </p:cNvSpPr>
+          <p:nvPr/>
+        </p:nvSpPr>
+        <p:spPr>
+          <a:xfrm xmlns:a="http://schemas.openxmlformats.org/drawingml/2006/main">
+            <a:off x="609600" y="323850"/>
+            <a:ext cx="10972800" cy="990600"/>
+          </a:xfrm>
+          <a:prstGeom xmlns:a="http://schemas.openxmlformats.org/drawingml/2006/main" prst="rect">
+            <a:avLst/>
+          </a:prstGeom>
+          <a:noFill xmlns:a="http://schemas.openxmlformats.org/drawingml/2006/main"/>
+          <a:ln xmlns:a="http://schemas.openxmlformats.org/drawingml/2006/main" w="0">
+            <a:noFill/>
+          </a:ln>
+        </p:spPr>
+        <p:txBody>
+          <a:bodyPr xmlns:a="http://schemas.openxmlformats.org/drawingml/2006/main" anchor="t">
+            <a:noAutofit/>
+          </a:bodyPr>
+          <a:lstStyle xmlns:a="http://schemas.openxmlformats.org/drawingml/2006/main">
+            <a:defPPr>
+              <a:defRPr sz="3150" b="1">
+                <a:solidFill>
+                  <a:srgbClr val="213744"/>
+                </a:solidFill>
+                <a:latin typeface="Arial"/>
+                <a:ea typeface="Arial"/>
+                <a:cs typeface="Arial"/>
+              </a:defRPr>
+            </a:defPPr>
+          </a:lstStyle>
+          <a:p xmlns:a="http://schemas.openxmlformats.org/drawingml/2006/main">
+            <a:pPr>
+              <a:defRPr sz="3150" b="1">
+                <a:solidFill>
+                  <a:srgbClr val="213744"/>
+                </a:solidFill>
+                <a:latin typeface="Arial"/>
+                <a:ea typeface="Arial"/>
+                <a:cs typeface="Arial"/>
+              </a:defRPr>
+            </a:pPr>
+            <a:r>
+              <a:rPr sz="3150" b="1">
+                <a:solidFill>
+                  <a:srgbClr val="213744"/>
+                </a:solidFill>
+                <a:latin typeface="Arial"/>
+                <a:ea typeface="Arial"/>
+                <a:cs typeface="Arial"/>
+              </a:rPr>
+              <a:t>Appendix: Animation evaluation order</a:t>
+            </a:r>
+          </a:p>
+        </p:txBody>
+      </p:sp>
+      <p:sp>
+        <p:nvSpPr>
+          <p:cNvPr id="2" name="">
+            <a:extLst xmlns:a="http://schemas.openxmlformats.org/drawingml/2006/main">
+              <a:ext uri="{FF2B5EF4-FFF2-40B4-BE49-F238E27FC236}">
+                <a16:creationId xmlns:a16="http://schemas.microsoft.com/office/drawing/2014/main" id="{BE8CB0C5-E9ED-4D5F-BFCE-A86D5AF1FA8C}"/>
+              </a:ext>
+            </a:extLst>
+          </p:cNvPr>
+          <p:cNvSpPr>
+            <a:spLocks xmlns:a="http://schemas.openxmlformats.org/drawingml/2006/main" noGrp="1"/>
+          </p:cNvSpPr>
+          <p:nvPr/>
+        </p:nvSpPr>
+        <p:spPr>
+          <a:xfrm xmlns:a="http://schemas.openxmlformats.org/drawingml/2006/main">
+            <a:off x="609600" y="1409700"/>
+            <a:ext cx="10972800" cy="771525"/>
+          </a:xfrm>
+          <a:prstGeom xmlns:a="http://schemas.openxmlformats.org/drawingml/2006/main" prst="rect">
+            <a:avLst/>
+          </a:prstGeom>
+          <a:noFill xmlns:a="http://schemas.openxmlformats.org/drawingml/2006/main"/>
+          <a:ln xmlns:a="http://schemas.openxmlformats.org/drawingml/2006/main" w="0">
+            <a:noFill/>
+          </a:ln>
+        </p:spPr>
+        <p:txBody>
+          <a:bodyPr xmlns:a="http://schemas.openxmlformats.org/drawingml/2006/main" anchor="t">
+            <a:noAutofit/>
+          </a:bodyPr>
+          <a:lstStyle xmlns:a="http://schemas.openxmlformats.org/drawingml/2006/main">
+            <a:defPPr>
+              <a:defRPr sz="2250" b="1">
+                <a:solidFill>
+                  <a:srgbClr val="157C87"/>
+                </a:solidFill>
+                <a:latin typeface="Arial"/>
+                <a:ea typeface="Arial"/>
+                <a:cs typeface="Arial"/>
+              </a:defRPr>
+            </a:defPPr>
+          </a:lstStyle>
+          <a:p xmlns:a="http://schemas.openxmlformats.org/drawingml/2006/main">
+            <a:pPr>
+              <a:defRPr sz="2250" b="1">
+                <a:solidFill>
+                  <a:srgbClr val="157C87"/>
+                </a:solidFill>
+                <a:latin typeface="Arial"/>
+                <a:ea typeface="Arial"/>
+                <a:cs typeface="Arial"/>
+              </a:defRPr>
+            </a:pPr>
+            <a:r>
+              <a:rPr sz="2250" b="1">
+                <a:solidFill>
+                  <a:srgbClr val="157C87"/>
+                </a:solidFill>
+                <a:latin typeface="Arial"/>
+                <a:ea typeface="Arial"/>
+                <a:cs typeface="Arial"/>
+              </a:rPr>
+              <a:t>Interpolate the authored source position first, then convert coordinates.</a:t>
+            </a:r>
+          </a:p>
+        </p:txBody>
+      </p:sp>
+      <p:sp>
+        <p:nvSpPr>
+          <p:cNvPr id="3" name="">
+            <a:extLst xmlns:a="http://schemas.openxmlformats.org/drawingml/2006/main">
+              <a:ext uri="{FF2B5EF4-FFF2-40B4-BE49-F238E27FC236}">
+                <a16:creationId xmlns:a16="http://schemas.microsoft.com/office/drawing/2014/main" id="{6D2D690E-CB49-42F2-89E8-44869A6B154B}"/>
+              </a:ext>
+            </a:extLst>
+          </p:cNvPr>
+          <p:cNvSpPr>
+            <a:spLocks xmlns:a="http://schemas.openxmlformats.org/drawingml/2006/main" noGrp="1"/>
+          </p:cNvSpPr>
+          <p:nvPr/>
+        </p:nvSpPr>
+        <p:spPr>
+          <a:xfrm xmlns:a="http://schemas.openxmlformats.org/drawingml/2006/main">
+            <a:off x="609600" y="2009775"/>
+            <a:ext cx="10972800" cy="485775"/>
+          </a:xfrm>
+          <a:prstGeom xmlns:a="http://schemas.openxmlformats.org/drawingml/2006/main" prst="rect">
+            <a:avLst/>
+          </a:prstGeom>
+          <a:noFill xmlns:a="http://schemas.openxmlformats.org/drawingml/2006/main"/>
+          <a:ln xmlns:a="http://schemas.openxmlformats.org/drawingml/2006/main" w="0">
+            <a:noFill/>
+          </a:ln>
+        </p:spPr>
+        <p:txBody>
+          <a:bodyPr xmlns:a="http://schemas.openxmlformats.org/drawingml/2006/main" anchor="t">
+            <a:noAutofit/>
+          </a:bodyPr>
+          <a:lstStyle xmlns:a="http://schemas.openxmlformats.org/drawingml/2006/main">
+            <a:defPPr>
+              <a:defRPr sz="1725" b="0">
+                <a:solidFill>
+                  <a:srgbClr val="526B79"/>
+                </a:solidFill>
+                <a:latin typeface="Arial"/>
+                <a:ea typeface="Arial"/>
+                <a:cs typeface="Arial"/>
+              </a:defRPr>
+            </a:defPPr>
+          </a:lstStyle>
+          <a:p xmlns:a="http://schemas.openxmlformats.org/drawingml/2006/main">
+            <a:pPr>
+              <a:defRPr sz="1725" b="0">
+                <a:solidFill>
+                  <a:srgbClr val="526B79"/>
+                </a:solidFill>
+                <a:latin typeface="Arial"/>
+                <a:ea typeface="Arial"/>
+                <a:cs typeface="Arial"/>
+              </a:defRPr>
+            </a:pPr>
+            <a:r>
+              <a:rPr sz="1725" b="0">
+                <a:solidFill>
+                  <a:srgbClr val="526B79"/>
+                </a:solidFill>
+                <a:latin typeface="Arial"/>
+                <a:ea typeface="Arial"/>
+                <a:cs typeface="Arial"/>
+              </a:rPr>
+              <a:t>Equatorial longitude changes from 0° to 2°. Interpolating converted endpoints misses the source-first midpoint by 971.421 m.</a:t>
+            </a:r>
+          </a:p>
+        </p:txBody>
+      </p:sp>
+      <p:graphicFrame>
+        <p:nvGraphicFramePr>
+          <p:cNvPr id="4" name="Chart">
+            <a:extLst xmlns:a="http://schemas.openxmlformats.org/drawingml/2006/main">
+              <a:ext uri="{FF2B5EF4-FFF2-40B4-BE49-F238E27FC236}">
+                <a16:creationId xmlns:a16="http://schemas.microsoft.com/office/drawing/2014/main" id="{79858303-F39C-41D1-A5C5-2FF7FFC32C8B}"/>
+              </a:ext>
+            </a:extLst>
+          </p:cNvPr>
+          <p:cNvGraphicFramePr/>
+          <p:nvPr/>
+        </p:nvGraphicFramePr>
+        <p:xfrm>
+          <a:off xmlns:a="http://schemas.openxmlformats.org/drawingml/2006/main" x="428625" y="2524125"/>
+          <a:ext xmlns:a="http://schemas.openxmlformats.org/drawingml/2006/main" cx="7200900" cy="3886200"/>
+        </p:xfrm>
+        <a:graphic xmlns:a="http://schemas.openxmlformats.org/drawingml/2006/main">
+          <a:graphicData uri="http://schemas.openxmlformats.org/drawingml/2006/chart">
+            <c:chart xmlns:r="http://schemas.openxmlformats.org/officeDocument/2006/relationships" xmlns:c="http://schemas.openxmlformats.org/drawingml/2006/chart" r:id="R8dddc597949e4261"/>
+          </a:graphicData>
+        </a:graphic>
+      </p:graphicFrame>
+      <p:sp>
+        <p:nvSpPr>
+          <p:cNvPr id="5" name="">
+            <a:extLst xmlns:a="http://schemas.openxmlformats.org/drawingml/2006/main">
+              <a:ext uri="{FF2B5EF4-FFF2-40B4-BE49-F238E27FC236}">
+                <a16:creationId xmlns:a16="http://schemas.microsoft.com/office/drawing/2014/main" id="{C2EFD586-2146-4C23-8111-663FBC631393}"/>
+              </a:ext>
+            </a:extLst>
+          </p:cNvPr>
+          <p:cNvSpPr>
+            <a:spLocks xmlns:a="http://schemas.openxmlformats.org/drawingml/2006/main" noGrp="1"/>
+          </p:cNvSpPr>
+          <p:nvPr/>
+        </p:nvSpPr>
+        <p:spPr>
+          <a:xfrm xmlns:a="http://schemas.openxmlformats.org/drawingml/2006/main">
+            <a:off x="8096250" y="2581275"/>
+            <a:ext cx="3486150" cy="523875"/>
+          </a:xfrm>
+          <a:prstGeom xmlns:a="http://schemas.openxmlformats.org/drawingml/2006/main" prst="rect">
+            <a:avLst/>
+          </a:prstGeom>
+          <a:noFill xmlns:a="http://schemas.openxmlformats.org/drawingml/2006/main"/>
+          <a:ln xmlns:a="http://schemas.openxmlformats.org/drawingml/2006/main" w="0">
+            <a:noFill/>
+          </a:ln>
+        </p:spPr>
+        <p:txBody>
+          <a:bodyPr xmlns:a="http://schemas.openxmlformats.org/drawingml/2006/main" anchor="t">
+            <a:noAutofit/>
+          </a:bodyPr>
+          <a:lstStyle xmlns:a="http://schemas.openxmlformats.org/drawingml/2006/main">
+            <a:defPPr>
+              <a:defRPr sz="2250" b="1">
+                <a:solidFill>
+                  <a:srgbClr val="213744"/>
+                </a:solidFill>
+                <a:latin typeface="Arial"/>
+                <a:ea typeface="Arial"/>
+                <a:cs typeface="Arial"/>
+              </a:defRPr>
+            </a:defPPr>
+          </a:lstStyle>
+          <a:p xmlns:a="http://schemas.openxmlformats.org/drawingml/2006/main">
+            <a:pPr>
+              <a:defRPr sz="2250" b="1">
+                <a:solidFill>
+                  <a:srgbClr val="213744"/>
+                </a:solidFill>
+                <a:latin typeface="Arial"/>
+                <a:ea typeface="Arial"/>
+                <a:cs typeface="Arial"/>
+              </a:defRPr>
+            </a:pPr>
+            <a:r>
+              <a:rPr sz="2250" b="1">
+                <a:solidFill>
+                  <a:srgbClr val="213744"/>
+                </a:solidFill>
+                <a:latin typeface="Arial"/>
+                <a:ea typeface="Arial"/>
+                <a:cs typeface="Arial"/>
+              </a:rPr>
+              <a:t>Why the order matters</a:t>
+            </a:r>
+          </a:p>
+        </p:txBody>
+      </p:sp>
+      <p:sp>
+        <p:nvSpPr>
+          <p:cNvPr id="6" name="">
+            <a:extLst xmlns:a="http://schemas.openxmlformats.org/drawingml/2006/main">
+              <a:ext uri="{FF2B5EF4-FFF2-40B4-BE49-F238E27FC236}">
+                <a16:creationId xmlns:a16="http://schemas.microsoft.com/office/drawing/2014/main" id="{4D0ECA95-CA2A-46E9-9864-EDDB77CBA2F3}"/>
+              </a:ext>
+            </a:extLst>
+          </p:cNvPr>
+          <p:cNvSpPr>
+            <a:spLocks xmlns:a="http://schemas.openxmlformats.org/drawingml/2006/main" noGrp="1"/>
+          </p:cNvSpPr>
+          <p:nvPr/>
+        </p:nvSpPr>
+        <p:spPr>
+          <a:xfrm xmlns:a="http://schemas.openxmlformats.org/drawingml/2006/main">
+            <a:off x="8096250" y="3267075"/>
+            <a:ext cx="3486150" cy="1866900"/>
+          </a:xfrm>
+          <a:prstGeom xmlns:a="http://schemas.openxmlformats.org/drawingml/2006/main" prst="rect">
+            <a:avLst/>
+          </a:prstGeom>
+          <a:noFill xmlns:a="http://schemas.openxmlformats.org/drawingml/2006/main"/>
+          <a:ln xmlns:a="http://schemas.openxmlformats.org/drawingml/2006/main" w="0">
+            <a:noFill/>
+          </a:ln>
+        </p:spPr>
+        <p:txBody>
+          <a:bodyPr xmlns:a="http://schemas.openxmlformats.org/drawingml/2006/main" anchor="t">
+            <a:noAutofit/>
+          </a:bodyPr>
+          <a:lstStyle xmlns:a="http://schemas.openxmlformats.org/drawingml/2006/main">
+            <a:defPPr>
+              <a:defRPr sz="2025" b="0">
+                <a:solidFill>
+                  <a:srgbClr val="213744"/>
+                </a:solidFill>
+                <a:latin typeface="Arial"/>
+                <a:ea typeface="Arial"/>
+                <a:cs typeface="Arial"/>
+              </a:defRPr>
+            </a:defPPr>
+          </a:lstStyle>
+          <a:p xmlns:a="http://schemas.openxmlformats.org/drawingml/2006/main">
+            <a:pPr>
+              <a:defRPr sz="2025" b="0">
+                <a:solidFill>
+                  <a:srgbClr val="213744"/>
+                </a:solidFill>
+                <a:latin typeface="Arial"/>
+                <a:ea typeface="Arial"/>
+                <a:cs typeface="Arial"/>
+              </a:defRPr>
+            </a:pPr>
+            <a:r>
+              <a:rPr sz="2025" b="0">
+                <a:solidFill>
+                  <a:srgbClr val="213744"/>
+                </a:solidFill>
+                <a:latin typeface="Arial"/>
+                <a:ea typeface="Arial"/>
+                <a:cs typeface="Arial"/>
+              </a:rPr>
+              <a:t>The order is testable. Sample keys alone cannot certify the original trajectory between samples.</a:t>
+            </a:r>
+          </a:p>
+        </p:txBody>
+      </p:sp>
+      <p:sp>
+        <p:nvSpPr>
+          <p:cNvPr id="7" name="">
+            <a:extLst xmlns:a="http://schemas.openxmlformats.org/drawingml/2006/main">
+              <a:ext uri="{FF2B5EF4-FFF2-40B4-BE49-F238E27FC236}">
+                <a16:creationId xmlns:a16="http://schemas.microsoft.com/office/drawing/2014/main" id="{CB7D668A-89A2-4DF3-B7CA-813911A4549E}"/>
+              </a:ext>
+            </a:extLst>
+          </p:cNvPr>
+          <p:cNvSpPr>
+            <a:spLocks xmlns:a="http://schemas.openxmlformats.org/drawingml/2006/main" noGrp="1"/>
+          </p:cNvSpPr>
+          <p:nvPr/>
+        </p:nvSpPr>
+        <p:spPr>
+          <a:xfrm xmlns:a="http://schemas.openxmlformats.org/drawingml/2006/main">
+            <a:off x="8096250" y="5343525"/>
+            <a:ext cx="3486150" cy="1304925"/>
+          </a:xfrm>
+          <a:prstGeom xmlns:a="http://schemas.openxmlformats.org/drawingml/2006/main" prst="rect">
+            <a:avLst/>
+          </a:prstGeom>
+          <a:noFill xmlns:a="http://schemas.openxmlformats.org/drawingml/2006/main"/>
+          <a:ln xmlns:a="http://schemas.openxmlformats.org/drawingml/2006/main" w="0">
+            <a:noFill/>
+          </a:ln>
+        </p:spPr>
+        <p:txBody>
+          <a:bodyPr xmlns:a="http://schemas.openxmlformats.org/drawingml/2006/main" anchor="t">
+            <a:noAutofit/>
+          </a:bodyPr>
+          <a:lstStyle xmlns:a="http://schemas.openxmlformats.org/drawingml/2006/main">
+            <a:defPPr>
+              <a:defRPr sz="1800" b="0">
+                <a:solidFill>
+                  <a:srgbClr val="526B79"/>
+                </a:solidFill>
+                <a:latin typeface="Arial"/>
+                <a:ea typeface="Arial"/>
+                <a:cs typeface="Arial"/>
+              </a:defRPr>
+            </a:defPPr>
+          </a:lstStyle>
+          <a:p xmlns:a="http://schemas.openxmlformats.org/drawingml/2006/main">
+            <a:pPr>
+              <a:defRPr sz="1800" b="0">
+                <a:solidFill>
+                  <a:srgbClr val="526B79"/>
+                </a:solidFill>
+                <a:latin typeface="Arial"/>
+                <a:ea typeface="Arial"/>
+                <a:cs typeface="Arial"/>
+              </a:defRPr>
+            </a:pPr>
+            <a:r>
+              <a:rPr sz="1800" b="0">
+                <a:solidFill>
+                  <a:srgbClr val="526B79"/>
+                </a:solidFill>
+                <a:latin typeface="Arial"/>
+                <a:ea typeface="Arial"/>
+                <a:cs typeface="Arial"/>
+              </a:rPr>
+              <a:t>The bake preserves time codes 0, 5 and 10 at 48 time codes per second. Continuous trajectory coverage remains unverified.</a:t>
+            </a:r>
+          </a:p>
+        </p:txBody>
+      </p:sp>
+    </p:spTree>
+    <p:extLst>
+      <p:ext uri="{BB962C8B-B14F-4D97-AF65-F5344CB8AC3E}">
+        <p14:creationId xmlns:p14="http://schemas.microsoft.com/office/powerpoint/2010/main" val="1635625228"/>
+      </p:ext>
+    </p:extLst>
+  </p:cSld>
+</p:sld>
+</file>
+
+<file path=ppt/slides/slide15.xml><?xml version="1.0" encoding="utf-8"?>
+<p:sld xmlns:p="http://schemas.openxmlformats.org/presentationml/2006/main">
+  <p:cSld>
+    <p:bg>
+      <p:bgPr>
+        <a:solidFill xmlns:a="http://schemas.openxmlformats.org/drawingml/2006/main">
+          <a:srgbClr val="FFFFFF"/>
+        </a:solidFill>
+      </p:bgPr>
+    </p:bg>
+    <p:spTree>
+      <p:nvGrpSpPr>
+        <p:cNvPr id="1" name=""/>
+        <p:cNvGrpSpPr/>
+        <p:nvPr/>
+      </p:nvGrpSpPr>
+      <p:grpSpPr>
+        <a:xfrm xmlns:a="http://schemas.openxmlformats.org/drawingml/2006/main"/>
+      </p:grpSpPr>
+      <p:sp>
+        <p:nvSpPr>
+          <p:cNvPr id="4" name="">
+            <a:extLst xmlns:a="http://schemas.openxmlformats.org/drawingml/2006/main">
+              <a:ext uri="{FF2B5EF4-FFF2-40B4-BE49-F238E27FC236}">
+                <a16:creationId xmlns:a16="http://schemas.microsoft.com/office/drawing/2014/main" id="{3F7C62F9-1E57-453F-BA67-23621DE59F7A}"/>
+              </a:ext>
+            </a:extLst>
+          </p:cNvPr>
+          <p:cNvSpPr>
+            <a:spLocks xmlns:a="http://schemas.openxmlformats.org/drawingml/2006/main" noGrp="1"/>
+          </p:cNvSpPr>
+          <p:nvPr/>
+        </p:nvSpPr>
+        <p:spPr>
+          <a:xfrm xmlns:a="http://schemas.openxmlformats.org/drawingml/2006/main">
+            <a:off x="609600" y="323850"/>
+            <a:ext cx="10972800" cy="990600"/>
+          </a:xfrm>
+          <a:prstGeom xmlns:a="http://schemas.openxmlformats.org/drawingml/2006/main" prst="rect">
+            <a:avLst/>
+          </a:prstGeom>
+          <a:noFill xmlns:a="http://schemas.openxmlformats.org/drawingml/2006/main"/>
+          <a:ln xmlns:a="http://schemas.openxmlformats.org/drawingml/2006/main" w="0">
+            <a:noFill/>
+          </a:ln>
+        </p:spPr>
+        <p:txBody>
+          <a:bodyPr xmlns:a="http://schemas.openxmlformats.org/drawingml/2006/main" anchor="t">
+            <a:noAutofit/>
+          </a:bodyPr>
+          <a:lstStyle xmlns:a="http://schemas.openxmlformats.org/drawingml/2006/main">
+            <a:defPPr>
+              <a:defRPr sz="3150" b="1">
+                <a:solidFill>
+                  <a:srgbClr val="213744"/>
+                </a:solidFill>
+                <a:latin typeface="Arial"/>
+                <a:ea typeface="Arial"/>
+                <a:cs typeface="Arial"/>
+              </a:defRPr>
+            </a:defPPr>
+          </a:lstStyle>
+          <a:p xmlns:a="http://schemas.openxmlformats.org/drawingml/2006/main">
+            <a:pPr>
+              <a:defRPr sz="3150" b="1">
+                <a:solidFill>
+                  <a:srgbClr val="213744"/>
+                </a:solidFill>
+                <a:latin typeface="Arial"/>
+                <a:ea typeface="Arial"/>
+                <a:cs typeface="Arial"/>
+              </a:defRPr>
+            </a:pPr>
+            <a:r>
+              <a:rPr sz="3150" b="1">
+                <a:solidFill>
+                  <a:srgbClr val="213744"/>
+                </a:solidFill>
+                <a:latin typeface="Arial"/>
+                <a:ea typeface="Arial"/>
+                <a:cs typeface="Arial"/>
+              </a:rPr>
               <a:t>Appendix: Placement conventions</a:t>
             </a:r>
           </a:p>
@@ -6007,7 +8013,7 @@
           <p:cNvPr id="2" name="">
             <a:extLst xmlns:a="http://schemas.openxmlformats.org/drawingml/2006/main">
               <a:ext uri="{FF2B5EF4-FFF2-40B4-BE49-F238E27FC236}">
-                <a16:creationId xmlns:a16="http://schemas.microsoft.com/office/drawing/2014/main" id="{E3257B85-6B9F-4646-8FCB-54B149EBFA88}"/>
+                <a16:creationId xmlns:a16="http://schemas.microsoft.com/office/drawing/2014/main" id="{5F683000-D066-4F33-81EF-E0DBB996228A}"/>
               </a:ext>
             </a:extLst>
           </p:cNvPr>
@@ -6359,7 +8365,7 @@
           <p:cNvPr id="3" name="">
             <a:extLst xmlns:a="http://schemas.openxmlformats.org/drawingml/2006/main">
               <a:ext uri="{FF2B5EF4-FFF2-40B4-BE49-F238E27FC236}">
-                <a16:creationId xmlns:a16="http://schemas.microsoft.com/office/drawing/2014/main" id="{961DB3FB-20D6-4097-878C-33EC7ED294DE}"/>
+                <a16:creationId xmlns:a16="http://schemas.microsoft.com/office/drawing/2014/main" id="{5D56AE01-3FB4-4098-9CA9-52EA57A28853}"/>
               </a:ext>
             </a:extLst>
           </p:cNvPr>
@@ -6425,14 +8431,14 @@
     </p:spTree>
     <p:extLst>
       <p:ext uri="{BB962C8B-B14F-4D97-AF65-F5344CB8AC3E}">
-        <p14:creationId xmlns:p14="http://schemas.microsoft.com/office/powerpoint/2010/main" val="1815321188"/>
+        <p14:creationId xmlns:p14="http://schemas.microsoft.com/office/powerpoint/2010/main" val="1425133028"/>
       </p:ext>
     </p:extLst>
   </p:cSld>
 </p:sld>
 </file>
 
-<file path=ppt/slides/slide13.xml><?xml version="1.0" encoding="utf-8"?>
+<file path=ppt/slides/slide16.xml><?xml version="1.0" encoding="utf-8"?>
 <p:sld xmlns:p="http://schemas.openxmlformats.org/presentationml/2006/main">
   <p:cSld>
     <p:bg>
@@ -6456,7 +8462,7 @@
           <p:cNvPr id="4" name="">
             <a:extLst xmlns:a="http://schemas.openxmlformats.org/drawingml/2006/main">
               <a:ext uri="{FF2B5EF4-FFF2-40B4-BE49-F238E27FC236}">
-                <a16:creationId xmlns:a16="http://schemas.microsoft.com/office/drawing/2014/main" id="{312E37A7-7494-4BCD-A8DE-7F82A546F9FE}"/>
+                <a16:creationId xmlns:a16="http://schemas.microsoft.com/office/drawing/2014/main" id="{E9D3905D-B75E-4F12-815D-62747A06E187}"/>
               </a:ext>
             </a:extLst>
           </p:cNvPr>
@@ -6524,7 +8530,7 @@
           <p:cNvPr id="2" name="">
             <a:extLst xmlns:a="http://schemas.openxmlformats.org/drawingml/2006/main">
               <a:ext uri="{FF2B5EF4-FFF2-40B4-BE49-F238E27FC236}">
-                <a16:creationId xmlns:a16="http://schemas.microsoft.com/office/drawing/2014/main" id="{1A22BDAA-4BE9-4E03-A8C7-0B2479E39887}"/>
+                <a16:creationId xmlns:a16="http://schemas.microsoft.com/office/drawing/2014/main" id="{22D56A33-2001-49B4-AE03-BAE3284BD7DF}"/>
               </a:ext>
             </a:extLst>
           </p:cNvPr>
@@ -6876,7 +8882,7 @@
           <p:cNvPr id="3" name="">
             <a:extLst xmlns:a="http://schemas.openxmlformats.org/drawingml/2006/main">
               <a:ext uri="{FF2B5EF4-FFF2-40B4-BE49-F238E27FC236}">
-                <a16:creationId xmlns:a16="http://schemas.microsoft.com/office/drawing/2014/main" id="{31C5A975-ABB4-43A4-9A96-ECC204B30242}"/>
+                <a16:creationId xmlns:a16="http://schemas.microsoft.com/office/drawing/2014/main" id="{A116C76C-2596-451A-8E60-5D994FA40413}"/>
               </a:ext>
             </a:extLst>
           </p:cNvPr>
@@ -6942,14 +8948,14 @@
     </p:spTree>
     <p:extLst>
       <p:ext uri="{BB962C8B-B14F-4D97-AF65-F5344CB8AC3E}">
-        <p14:creationId xmlns:p14="http://schemas.microsoft.com/office/powerpoint/2010/main" val="1549565108"/>
+        <p14:creationId xmlns:p14="http://schemas.microsoft.com/office/powerpoint/2010/main" val="1329079916"/>
       </p:ext>
     </p:extLst>
   </p:cSld>
 </p:sld>
 </file>
 
-<file path=ppt/slides/slide14.xml><?xml version="1.0" encoding="utf-8"?>
+<file path=ppt/slides/slide17.xml><?xml version="1.0" encoding="utf-8"?>
 <p:sld xmlns:p="http://schemas.openxmlformats.org/presentationml/2006/main">
   <p:cSld>
     <p:bg>
@@ -6973,7 +8979,7 @@
           <p:cNvPr id="4" name="">
             <a:extLst xmlns:a="http://schemas.openxmlformats.org/drawingml/2006/main">
               <a:ext uri="{FF2B5EF4-FFF2-40B4-BE49-F238E27FC236}">
-                <a16:creationId xmlns:a16="http://schemas.microsoft.com/office/drawing/2014/main" id="{555D9875-C5AF-4193-916D-BB44F21F7B98}"/>
+                <a16:creationId xmlns:a16="http://schemas.microsoft.com/office/drawing/2014/main" id="{AA62312C-C61B-4C88-BEE4-1BC0D8548B2A}"/>
               </a:ext>
             </a:extLst>
           </p:cNvPr>
@@ -7041,7 +9047,7 @@
           <p:cNvPr id="2" name="">
             <a:extLst xmlns:a="http://schemas.openxmlformats.org/drawingml/2006/main">
               <a:ext uri="{FF2B5EF4-FFF2-40B4-BE49-F238E27FC236}">
-                <a16:creationId xmlns:a16="http://schemas.microsoft.com/office/drawing/2014/main" id="{12288FC7-72B0-4232-A16C-945EAD6C75E0}"/>
+                <a16:creationId xmlns:a16="http://schemas.microsoft.com/office/drawing/2014/main" id="{66DE074A-B917-46BC-8ED8-E9EECEFE0221}"/>
               </a:ext>
             </a:extLst>
           </p:cNvPr>
@@ -7157,7 +9163,7 @@
                           <a:ea typeface="Arial"/>
                           <a:cs typeface="Arial"/>
                         </a:rPr>
-                        <a:t>213,243 coordinate results per reader. Maximum measured difference 3.39e-08 m. Shared PROJ and decoding.</a:t>
+                        <a:t>213,263 coordinate results per reader. Maximum measured difference 3.39e-08 m. Shared PROJ and decoding.</a:t>
                       </a:r>
                     </a:p>
                   </a:txBody>
@@ -7211,7 +9217,7 @@
                           <a:ea typeface="Arial"/>
                           <a:cs typeface="Arial"/>
                         </a:rPr>
-                        <a:t>Reuses Python placement. Readback covers 177,872 vertices and 48 edit, failure and recovery checks across 39 jobs.</a:t>
+                        <a:t>Reuses Python placement. Readback covers 177,872 vertices and 48 edit, failure and recovery checks across 44 jobs.</a:t>
                       </a:r>
                     </a:p>
                   </a:txBody>
@@ -7319,7 +9325,7 @@
                           <a:ea typeface="Arial"/>
                           <a:cs typeface="Arial"/>
                         </a:rPr>
-                        <a:t>116 contract tests and 65 distinguishing controls pass. Separate diagnostics expose the reported prototype limits.</a:t>
+                        <a:t>124 contract tests and 70 distinguishing controls pass. Separate diagnostics expose the reported prototype limits.</a:t>
                       </a:r>
                     </a:p>
                   </a:txBody>
@@ -7373,7 +9379,7 @@
                           <a:ea typeface="Arial"/>
                           <a:cs typeface="Arial"/>
                         </a:rPr>
-                        <a:t>Original inputs and 48 frozen execution files remain unchanged. The immutable receipt identifies exact executed content.</a:t>
+                        <a:t>Original inputs and 50 frozen execution files remain unchanged. The immutable receipt identifies exact executed content.</a:t>
                       </a:r>
                     </a:p>
                   </a:txBody>
@@ -7447,7 +9453,7 @@
           <p:cNvPr id="3" name="">
             <a:extLst xmlns:a="http://schemas.openxmlformats.org/drawingml/2006/main">
               <a:ext uri="{FF2B5EF4-FFF2-40B4-BE49-F238E27FC236}">
-                <a16:creationId xmlns:a16="http://schemas.microsoft.com/office/drawing/2014/main" id="{4B4A559A-92E5-4D78-A00A-88CE65BFB08B}"/>
+                <a16:creationId xmlns:a16="http://schemas.microsoft.com/office/drawing/2014/main" id="{31DEC974-F307-4E6D-9D18-7A6C52F3779C}"/>
               </a:ext>
             </a:extLst>
           </p:cNvPr>
@@ -7513,7 +9519,7 @@
     </p:spTree>
     <p:extLst>
       <p:ext uri="{BB962C8B-B14F-4D97-AF65-F5344CB8AC3E}">
-        <p14:creationId xmlns:p14="http://schemas.microsoft.com/office/powerpoint/2010/main" val="1772005043"/>
+        <p14:creationId xmlns:p14="http://schemas.microsoft.com/office/powerpoint/2010/main" val="405676669"/>
       </p:ext>
     </p:extLst>
   </p:cSld>
@@ -7544,7 +9550,7 @@
           <p:cNvPr id="5" name="">
             <a:extLst xmlns:a="http://schemas.openxmlformats.org/drawingml/2006/main">
               <a:ext uri="{FF2B5EF4-FFF2-40B4-BE49-F238E27FC236}">
-                <a16:creationId xmlns:a16="http://schemas.microsoft.com/office/drawing/2014/main" id="{5BB62EBF-86D1-461E-845E-766AC9273C9D}"/>
+                <a16:creationId xmlns:a16="http://schemas.microsoft.com/office/drawing/2014/main" id="{643F8926-CC29-48A1-8920-01D89ABC60C3}"/>
               </a:ext>
             </a:extLst>
           </p:cNvPr>
@@ -7612,7 +9618,7 @@
           <p:cNvPr id="2" name="">
             <a:extLst xmlns:a="http://schemas.openxmlformats.org/drawingml/2006/main">
               <a:ext uri="{FF2B5EF4-FFF2-40B4-BE49-F238E27FC236}">
-                <a16:creationId xmlns:a16="http://schemas.microsoft.com/office/drawing/2014/main" id="{3B466CE3-F485-4981-9427-653B21AEDAFC}"/>
+                <a16:creationId xmlns:a16="http://schemas.microsoft.com/office/drawing/2014/main" id="{5F7FB3B8-BDAA-412C-B364-8FE8E22A1BC9}"/>
               </a:ext>
             </a:extLst>
           </p:cNvPr>
@@ -7680,7 +9686,7 @@
           <p:cNvPr id="3" name="">
             <a:extLst xmlns:a="http://schemas.openxmlformats.org/drawingml/2006/main">
               <a:ext uri="{FF2B5EF4-FFF2-40B4-BE49-F238E27FC236}">
-                <a16:creationId xmlns:a16="http://schemas.microsoft.com/office/drawing/2014/main" id="{8349BCFA-108D-4D3C-B92F-3A1D4F35676D}"/>
+                <a16:creationId xmlns:a16="http://schemas.microsoft.com/office/drawing/2014/main" id="{7E17F943-F8F2-4818-B7C4-308BA33FA954}"/>
               </a:ext>
             </a:extLst>
           </p:cNvPr>
@@ -7978,7 +9984,7 @@
           <p:cNvPr id="4" name="">
             <a:extLst xmlns:a="http://schemas.openxmlformats.org/drawingml/2006/main">
               <a:ext uri="{FF2B5EF4-FFF2-40B4-BE49-F238E27FC236}">
-                <a16:creationId xmlns:a16="http://schemas.microsoft.com/office/drawing/2014/main" id="{CAE02E76-AD85-475E-BE5A-0E9F7983BE90}"/>
+                <a16:creationId xmlns:a16="http://schemas.microsoft.com/office/drawing/2014/main" id="{69A44ED3-97EB-4C25-9883-7444E2E45E2B}"/>
               </a:ext>
             </a:extLst>
           </p:cNvPr>
@@ -8044,7 +10050,7 @@
     </p:spTree>
     <p:extLst>
       <p:ext uri="{BB962C8B-B14F-4D97-AF65-F5344CB8AC3E}">
-        <p14:creationId xmlns:p14="http://schemas.microsoft.com/office/powerpoint/2010/main" val="418793482"/>
+        <p14:creationId xmlns:p14="http://schemas.microsoft.com/office/powerpoint/2010/main" val="1189528481"/>
       </p:ext>
     </p:extLst>
   </p:cSld>
@@ -8075,7 +10081,7 @@
           <p:cNvPr id="9" name="">
             <a:extLst xmlns:a="http://schemas.openxmlformats.org/drawingml/2006/main">
               <a:ext uri="{FF2B5EF4-FFF2-40B4-BE49-F238E27FC236}">
-                <a16:creationId xmlns:a16="http://schemas.microsoft.com/office/drawing/2014/main" id="{E71A9758-A673-47E7-9054-AE43FA4A5C5C}"/>
+                <a16:creationId xmlns:a16="http://schemas.microsoft.com/office/drawing/2014/main" id="{0BC5CA88-0A18-45FA-A172-84BB64D845B0}"/>
               </a:ext>
             </a:extLst>
           </p:cNvPr>
@@ -8143,7 +10149,7 @@
           <p:cNvPr id="2" name="">
             <a:extLst xmlns:a="http://schemas.openxmlformats.org/drawingml/2006/main">
               <a:ext uri="{FF2B5EF4-FFF2-40B4-BE49-F238E27FC236}">
-                <a16:creationId xmlns:a16="http://schemas.microsoft.com/office/drawing/2014/main" id="{BD194932-34D2-4D3E-8E31-692EC3E7F47C}"/>
+                <a16:creationId xmlns:a16="http://schemas.microsoft.com/office/drawing/2014/main" id="{93DAF4C9-6059-4B5E-9755-E35CF572803A}"/>
               </a:ext>
             </a:extLst>
           </p:cNvPr>
@@ -8211,7 +10217,7 @@
           <p:cNvPr id="3" name="">
             <a:extLst xmlns:a="http://schemas.openxmlformats.org/drawingml/2006/main">
               <a:ext uri="{FF2B5EF4-FFF2-40B4-BE49-F238E27FC236}">
-                <a16:creationId xmlns:a16="http://schemas.microsoft.com/office/drawing/2014/main" id="{10FF5315-CE04-4EE0-9AB8-48A0D1FE9073}"/>
+                <a16:creationId xmlns:a16="http://schemas.microsoft.com/office/drawing/2014/main" id="{4E9F1290-98B3-49CF-B3C3-74A21B1F55B0}"/>
               </a:ext>
             </a:extLst>
           </p:cNvPr>
@@ -8221,7 +10227,7 @@
           <p:nvPr/>
         </p:nvPicPr>
         <p:blipFill>
-          <a:blip xmlns:r="http://schemas.openxmlformats.org/officeDocument/2006/relationships" xmlns:a="http://schemas.openxmlformats.org/drawingml/2006/main" r:embed="R5d40dfcef7ba4a49"/>
+          <a:blip xmlns:r="http://schemas.openxmlformats.org/officeDocument/2006/relationships" xmlns:a="http://schemas.openxmlformats.org/drawingml/2006/main" r:embed="Ra65fd7fc967448a3"/>
           <a:srcRect xmlns:a="http://schemas.openxmlformats.org/drawingml/2006/main" l="0" t="8974" r="0" b="33333"/>
           <a:stretch xmlns:a="http://schemas.openxmlformats.org/drawingml/2006/main"/>
         </p:blipFill>
@@ -8240,7 +10246,7 @@
           <p:cNvPr id="4" name="">
             <a:extLst xmlns:a="http://schemas.openxmlformats.org/drawingml/2006/main">
               <a:ext uri="{FF2B5EF4-FFF2-40B4-BE49-F238E27FC236}">
-                <a16:creationId xmlns:a16="http://schemas.microsoft.com/office/drawing/2014/main" id="{FFCFDC51-546D-41E5-95CD-1D76B84DD0E4}"/>
+                <a16:creationId xmlns:a16="http://schemas.microsoft.com/office/drawing/2014/main" id="{2100C314-BEFF-4D93-90EE-BE7E0DBB255A}"/>
               </a:ext>
             </a:extLst>
           </p:cNvPr>
@@ -8308,7 +10314,7 @@
           <p:cNvPr id="5" name="">
             <a:extLst xmlns:a="http://schemas.openxmlformats.org/drawingml/2006/main">
               <a:ext uri="{FF2B5EF4-FFF2-40B4-BE49-F238E27FC236}">
-                <a16:creationId xmlns:a16="http://schemas.microsoft.com/office/drawing/2014/main" id="{E8DBDD50-E9CD-4807-BCDD-107588235560}"/>
+                <a16:creationId xmlns:a16="http://schemas.microsoft.com/office/drawing/2014/main" id="{7F314AA7-A99A-4336-BDBF-020F7A660244}"/>
               </a:ext>
             </a:extLst>
           </p:cNvPr>
@@ -8376,7 +10382,7 @@
           <p:cNvPr id="6" name="">
             <a:extLst xmlns:a="http://schemas.openxmlformats.org/drawingml/2006/main">
               <a:ext uri="{FF2B5EF4-FFF2-40B4-BE49-F238E27FC236}">
-                <a16:creationId xmlns:a16="http://schemas.microsoft.com/office/drawing/2014/main" id="{7BD8DBE3-D7E6-45FA-8975-69B8C597FD9E}"/>
+                <a16:creationId xmlns:a16="http://schemas.microsoft.com/office/drawing/2014/main" id="{1CD4D460-3860-4323-943B-3C767D9A4238}"/>
               </a:ext>
             </a:extLst>
           </p:cNvPr>
@@ -8444,7 +10450,7 @@
           <p:cNvPr id="7" name="">
             <a:extLst xmlns:a="http://schemas.openxmlformats.org/drawingml/2006/main">
               <a:ext uri="{FF2B5EF4-FFF2-40B4-BE49-F238E27FC236}">
-                <a16:creationId xmlns:a16="http://schemas.microsoft.com/office/drawing/2014/main" id="{F8735F64-E0FF-4626-BC67-E66014305142}"/>
+                <a16:creationId xmlns:a16="http://schemas.microsoft.com/office/drawing/2014/main" id="{1C73F2E4-8E77-4F71-9F67-52C7150C4F21}"/>
               </a:ext>
             </a:extLst>
           </p:cNvPr>
@@ -8512,7 +10518,7 @@
           <p:cNvPr id="8" name="">
             <a:extLst xmlns:a="http://schemas.openxmlformats.org/drawingml/2006/main">
               <a:ext uri="{FF2B5EF4-FFF2-40B4-BE49-F238E27FC236}">
-                <a16:creationId xmlns:a16="http://schemas.microsoft.com/office/drawing/2014/main" id="{28DA9AA7-B881-4BD5-BFFB-63AC10D7F2F1}"/>
+                <a16:creationId xmlns:a16="http://schemas.microsoft.com/office/drawing/2014/main" id="{4196D71B-4817-40F3-98F0-4DF4207E93FE}"/>
               </a:ext>
             </a:extLst>
           </p:cNvPr>
@@ -8578,7 +10584,7 @@
     </p:spTree>
     <p:extLst>
       <p:ext uri="{BB962C8B-B14F-4D97-AF65-F5344CB8AC3E}">
-        <p14:creationId xmlns:p14="http://schemas.microsoft.com/office/powerpoint/2010/main" val="1437884512"/>
+        <p14:creationId xmlns:p14="http://schemas.microsoft.com/office/powerpoint/2010/main" val="620744703"/>
       </p:ext>
     </p:extLst>
   </p:cSld>
@@ -8609,7 +10615,7 @@
           <p:cNvPr id="9" name="">
             <a:extLst xmlns:a="http://schemas.openxmlformats.org/drawingml/2006/main">
               <a:ext uri="{FF2B5EF4-FFF2-40B4-BE49-F238E27FC236}">
-                <a16:creationId xmlns:a16="http://schemas.microsoft.com/office/drawing/2014/main" id="{ADBC29F6-6DAE-4CF9-8AEF-A65797364C68}"/>
+                <a16:creationId xmlns:a16="http://schemas.microsoft.com/office/drawing/2014/main" id="{BB0A4B33-939D-4307-831F-5825A768B421}"/>
               </a:ext>
             </a:extLst>
           </p:cNvPr>
@@ -8677,7 +10683,7 @@
           <p:cNvPr id="2" name="">
             <a:extLst xmlns:a="http://schemas.openxmlformats.org/drawingml/2006/main">
               <a:ext uri="{FF2B5EF4-FFF2-40B4-BE49-F238E27FC236}">
-                <a16:creationId xmlns:a16="http://schemas.microsoft.com/office/drawing/2014/main" id="{5001E4A8-1BC3-4991-8088-1785B32FAED7}"/>
+                <a16:creationId xmlns:a16="http://schemas.microsoft.com/office/drawing/2014/main" id="{A1B73FAD-F329-4EA5-A746-39D2F6A320FE}"/>
               </a:ext>
             </a:extLst>
           </p:cNvPr>
@@ -8745,7 +10751,7 @@
           <p:cNvPr id="3" name="">
             <a:extLst xmlns:a="http://schemas.openxmlformats.org/drawingml/2006/main">
               <a:ext uri="{FF2B5EF4-FFF2-40B4-BE49-F238E27FC236}">
-                <a16:creationId xmlns:a16="http://schemas.microsoft.com/office/drawing/2014/main" id="{1AE72C8F-C62D-4BBD-8A14-6579E6F16B66}"/>
+                <a16:creationId xmlns:a16="http://schemas.microsoft.com/office/drawing/2014/main" id="{1912CD92-C93E-4CC6-834C-B99D9054F99B}"/>
               </a:ext>
             </a:extLst>
           </p:cNvPr>
@@ -8755,7 +10761,7 @@
           <p:nvPr/>
         </p:nvPicPr>
         <p:blipFill>
-          <a:blip xmlns:r="http://schemas.openxmlformats.org/officeDocument/2006/relationships" xmlns:a="http://schemas.openxmlformats.org/drawingml/2006/main" r:embed="R06f13d1dff514f79"/>
+          <a:blip xmlns:r="http://schemas.openxmlformats.org/officeDocument/2006/relationships" xmlns:a="http://schemas.openxmlformats.org/drawingml/2006/main" r:embed="R9e314fb4b1da4c59"/>
           <a:srcRect xmlns:a="http://schemas.openxmlformats.org/drawingml/2006/main" l="0" t="8974" r="0" b="33333"/>
           <a:stretch xmlns:a="http://schemas.openxmlformats.org/drawingml/2006/main"/>
         </p:blipFill>
@@ -8774,7 +10780,7 @@
           <p:cNvPr id="4" name="">
             <a:extLst xmlns:a="http://schemas.openxmlformats.org/drawingml/2006/main">
               <a:ext uri="{FF2B5EF4-FFF2-40B4-BE49-F238E27FC236}">
-                <a16:creationId xmlns:a16="http://schemas.microsoft.com/office/drawing/2014/main" id="{DA825AA8-6511-4430-B817-A3E443D17E21}"/>
+                <a16:creationId xmlns:a16="http://schemas.microsoft.com/office/drawing/2014/main" id="{B81A5054-DCB1-4CF3-840D-854C8D397DE3}"/>
               </a:ext>
             </a:extLst>
           </p:cNvPr>
@@ -8842,7 +10848,7 @@
           <p:cNvPr id="5" name="">
             <a:extLst xmlns:a="http://schemas.openxmlformats.org/drawingml/2006/main">
               <a:ext uri="{FF2B5EF4-FFF2-40B4-BE49-F238E27FC236}">
-                <a16:creationId xmlns:a16="http://schemas.microsoft.com/office/drawing/2014/main" id="{4B8C664C-E461-4731-92E0-62370CF23F0F}"/>
+                <a16:creationId xmlns:a16="http://schemas.microsoft.com/office/drawing/2014/main" id="{6E789AA8-A9D7-4CC5-8116-AFCF3408697F}"/>
               </a:ext>
             </a:extLst>
           </p:cNvPr>
@@ -8910,7 +10916,7 @@
           <p:cNvPr id="6" name="">
             <a:extLst xmlns:a="http://schemas.openxmlformats.org/drawingml/2006/main">
               <a:ext uri="{FF2B5EF4-FFF2-40B4-BE49-F238E27FC236}">
-                <a16:creationId xmlns:a16="http://schemas.microsoft.com/office/drawing/2014/main" id="{F05EAB3B-2642-4440-B776-C5F5CC71F62E}"/>
+                <a16:creationId xmlns:a16="http://schemas.microsoft.com/office/drawing/2014/main" id="{453EFB1B-0CE9-4270-945D-E66180090F23}"/>
               </a:ext>
             </a:extLst>
           </p:cNvPr>
@@ -8978,7 +10984,7 @@
           <p:cNvPr id="7" name="">
             <a:extLst xmlns:a="http://schemas.openxmlformats.org/drawingml/2006/main">
               <a:ext uri="{FF2B5EF4-FFF2-40B4-BE49-F238E27FC236}">
-                <a16:creationId xmlns:a16="http://schemas.microsoft.com/office/drawing/2014/main" id="{9EF9DA61-5C26-4503-AFB9-543E9F729167}"/>
+                <a16:creationId xmlns:a16="http://schemas.microsoft.com/office/drawing/2014/main" id="{C10F2E4D-A7C8-4DA3-A5D3-86AECF222B00}"/>
               </a:ext>
             </a:extLst>
           </p:cNvPr>
@@ -9046,7 +11052,7 @@
           <p:cNvPr id="8" name="">
             <a:extLst xmlns:a="http://schemas.openxmlformats.org/drawingml/2006/main">
               <a:ext uri="{FF2B5EF4-FFF2-40B4-BE49-F238E27FC236}">
-                <a16:creationId xmlns:a16="http://schemas.microsoft.com/office/drawing/2014/main" id="{FE969F74-096C-4971-94F7-1D6B7F0FE25D}"/>
+                <a16:creationId xmlns:a16="http://schemas.microsoft.com/office/drawing/2014/main" id="{2DEBC192-5FE7-44AC-8472-7DFD8390272C}"/>
               </a:ext>
             </a:extLst>
           </p:cNvPr>
@@ -9112,7 +11118,7 @@
     </p:spTree>
     <p:extLst>
       <p:ext uri="{BB962C8B-B14F-4D97-AF65-F5344CB8AC3E}">
-        <p14:creationId xmlns:p14="http://schemas.microsoft.com/office/powerpoint/2010/main" val="252688260"/>
+        <p14:creationId xmlns:p14="http://schemas.microsoft.com/office/powerpoint/2010/main" val="1644376319"/>
       </p:ext>
     </p:extLst>
   </p:cSld>
@@ -9143,7 +11149,7 @@
           <p:cNvPr id="8" name="">
             <a:extLst xmlns:a="http://schemas.openxmlformats.org/drawingml/2006/main">
               <a:ext uri="{FF2B5EF4-FFF2-40B4-BE49-F238E27FC236}">
-                <a16:creationId xmlns:a16="http://schemas.microsoft.com/office/drawing/2014/main" id="{A31EF2DB-179A-4FB8-BF45-30B4468E39EA}"/>
+                <a16:creationId xmlns:a16="http://schemas.microsoft.com/office/drawing/2014/main" id="{5F7C1C68-2805-4D71-B199-CEB65CFA2E98}"/>
               </a:ext>
             </a:extLst>
           </p:cNvPr>
@@ -9211,7 +11217,7 @@
           <p:cNvPr id="2" name="">
             <a:extLst xmlns:a="http://schemas.openxmlformats.org/drawingml/2006/main">
               <a:ext uri="{FF2B5EF4-FFF2-40B4-BE49-F238E27FC236}">
-                <a16:creationId xmlns:a16="http://schemas.microsoft.com/office/drawing/2014/main" id="{8BFFB91F-0614-412F-967F-D7C27EDB57EE}"/>
+                <a16:creationId xmlns:a16="http://schemas.microsoft.com/office/drawing/2014/main" id="{A8EFE893-8206-46DF-8527-68CF9D2994E6}"/>
               </a:ext>
             </a:extLst>
           </p:cNvPr>
@@ -9279,7 +11285,7 @@
           <p:cNvPr id="3" name="">
             <a:extLst xmlns:a="http://schemas.openxmlformats.org/drawingml/2006/main">
               <a:ext uri="{FF2B5EF4-FFF2-40B4-BE49-F238E27FC236}">
-                <a16:creationId xmlns:a16="http://schemas.microsoft.com/office/drawing/2014/main" id="{86CF5164-009F-4392-8B3D-DECCBBCDD787}"/>
+                <a16:creationId xmlns:a16="http://schemas.microsoft.com/office/drawing/2014/main" id="{199DC517-8E55-4268-B71D-5E6B0C604E65}"/>
               </a:ext>
             </a:extLst>
           </p:cNvPr>
@@ -9347,7 +11353,7 @@
           <p:cNvPr id="4" name="">
             <a:extLst xmlns:a="http://schemas.openxmlformats.org/drawingml/2006/main">
               <a:ext uri="{FF2B5EF4-FFF2-40B4-BE49-F238E27FC236}">
-                <a16:creationId xmlns:a16="http://schemas.microsoft.com/office/drawing/2014/main" id="{099C4F64-843E-4DE2-A77D-69BDA46D82E5}"/>
+                <a16:creationId xmlns:a16="http://schemas.microsoft.com/office/drawing/2014/main" id="{4118CFB2-F40B-4136-A17D-09AF0C71512B}"/>
               </a:ext>
             </a:extLst>
           </p:cNvPr>
@@ -9696,7 +11702,7 @@
           <p:cNvPr id="5" name="">
             <a:extLst xmlns:a="http://schemas.openxmlformats.org/drawingml/2006/main">
               <a:ext uri="{FF2B5EF4-FFF2-40B4-BE49-F238E27FC236}">
-                <a16:creationId xmlns:a16="http://schemas.microsoft.com/office/drawing/2014/main" id="{AE311E57-A9D5-408D-8B35-9A868920DE4F}"/>
+                <a16:creationId xmlns:a16="http://schemas.microsoft.com/office/drawing/2014/main" id="{CA4D04AA-354F-4281-8CC8-4ED1F08D70E8}"/>
               </a:ext>
             </a:extLst>
           </p:cNvPr>
@@ -9764,7 +11770,7 @@
           <p:cNvPr id="6" name="">
             <a:extLst xmlns:a="http://schemas.openxmlformats.org/drawingml/2006/main">
               <a:ext uri="{FF2B5EF4-FFF2-40B4-BE49-F238E27FC236}">
-                <a16:creationId xmlns:a16="http://schemas.microsoft.com/office/drawing/2014/main" id="{E1408FA4-F2F2-47FD-860B-548B124721C5}"/>
+                <a16:creationId xmlns:a16="http://schemas.microsoft.com/office/drawing/2014/main" id="{959168AE-AC68-45AF-A519-54B11D31CC55}"/>
               </a:ext>
             </a:extLst>
           </p:cNvPr>
@@ -10113,7 +12119,7 @@
           <p:cNvPr id="7" name="">
             <a:extLst xmlns:a="http://schemas.openxmlformats.org/drawingml/2006/main">
               <a:ext uri="{FF2B5EF4-FFF2-40B4-BE49-F238E27FC236}">
-                <a16:creationId xmlns:a16="http://schemas.microsoft.com/office/drawing/2014/main" id="{9FD073C2-EDD9-4680-98D2-950597240A8A}"/>
+                <a16:creationId xmlns:a16="http://schemas.microsoft.com/office/drawing/2014/main" id="{6FDD4C1C-5240-4674-9D3E-2CB13C7C8CF3}"/>
               </a:ext>
             </a:extLst>
           </p:cNvPr>
@@ -10179,7 +12185,7 @@
     </p:spTree>
     <p:extLst>
       <p:ext uri="{BB962C8B-B14F-4D97-AF65-F5344CB8AC3E}">
-        <p14:creationId xmlns:p14="http://schemas.microsoft.com/office/powerpoint/2010/main" val="1569226765"/>
+        <p14:creationId xmlns:p14="http://schemas.microsoft.com/office/powerpoint/2010/main" val="1746279773"/>
       </p:ext>
     </p:extLst>
   </p:cSld>
@@ -10210,7 +12216,7 @@
           <p:cNvPr id="9" name="">
             <a:extLst xmlns:a="http://schemas.openxmlformats.org/drawingml/2006/main">
               <a:ext uri="{FF2B5EF4-FFF2-40B4-BE49-F238E27FC236}">
-                <a16:creationId xmlns:a16="http://schemas.microsoft.com/office/drawing/2014/main" id="{5F4C22E2-CFC5-4C08-A60E-3FC375186EF4}"/>
+                <a16:creationId xmlns:a16="http://schemas.microsoft.com/office/drawing/2014/main" id="{DA5BABC5-3119-40F6-B515-956E82061FFD}"/>
               </a:ext>
             </a:extLst>
           </p:cNvPr>
@@ -10278,7 +12284,7 @@
           <p:cNvPr id="2" name="">
             <a:extLst xmlns:a="http://schemas.openxmlformats.org/drawingml/2006/main">
               <a:ext uri="{FF2B5EF4-FFF2-40B4-BE49-F238E27FC236}">
-                <a16:creationId xmlns:a16="http://schemas.microsoft.com/office/drawing/2014/main" id="{28CFA4DB-C75F-4157-A0F6-84FBD362F5B7}"/>
+                <a16:creationId xmlns:a16="http://schemas.microsoft.com/office/drawing/2014/main" id="{EE3DA681-389E-4AFB-A928-C20AD3ED5DD3}"/>
               </a:ext>
             </a:extLst>
           </p:cNvPr>
@@ -10346,7 +12352,7 @@
           <p:cNvPr id="3" name="">
             <a:extLst xmlns:a="http://schemas.openxmlformats.org/drawingml/2006/main">
               <a:ext uri="{FF2B5EF4-FFF2-40B4-BE49-F238E27FC236}">
-                <a16:creationId xmlns:a16="http://schemas.microsoft.com/office/drawing/2014/main" id="{D81102AE-847E-4C6B-A02E-1ED454DEA753}"/>
+                <a16:creationId xmlns:a16="http://schemas.microsoft.com/office/drawing/2014/main" id="{A9AB43DF-2B42-4A6E-A61F-0BA345289227}"/>
               </a:ext>
             </a:extLst>
           </p:cNvPr>
@@ -10356,7 +12362,7 @@
           <p:nvPr/>
         </p:nvPicPr>
         <p:blipFill>
-          <a:blip xmlns:r="http://schemas.openxmlformats.org/officeDocument/2006/relationships" xmlns:a="http://schemas.openxmlformats.org/drawingml/2006/main" r:embed="R72e8dd37bfaa45d2"/>
+          <a:blip xmlns:r="http://schemas.openxmlformats.org/officeDocument/2006/relationships" xmlns:a="http://schemas.openxmlformats.org/drawingml/2006/main" r:embed="R3f24a78d4c4740e0"/>
           <a:stretch xmlns:a="http://schemas.openxmlformats.org/drawingml/2006/main"/>
         </p:blipFill>
         <p:spPr>
@@ -10374,7 +12380,7 @@
           <p:cNvPr id="4" name="">
             <a:extLst xmlns:a="http://schemas.openxmlformats.org/drawingml/2006/main">
               <a:ext uri="{FF2B5EF4-FFF2-40B4-BE49-F238E27FC236}">
-                <a16:creationId xmlns:a16="http://schemas.microsoft.com/office/drawing/2014/main" id="{3C0D9E11-50E2-4F2D-A4D2-3FFCAF48F453}"/>
+                <a16:creationId xmlns:a16="http://schemas.microsoft.com/office/drawing/2014/main" id="{B39B56E5-8B80-4AD3-BBEB-E0B7FAAD73E5}"/>
               </a:ext>
             </a:extLst>
           </p:cNvPr>
@@ -10442,7 +12448,7 @@
           <p:cNvPr id="5" name="">
             <a:extLst xmlns:a="http://schemas.openxmlformats.org/drawingml/2006/main">
               <a:ext uri="{FF2B5EF4-FFF2-40B4-BE49-F238E27FC236}">
-                <a16:creationId xmlns:a16="http://schemas.microsoft.com/office/drawing/2014/main" id="{E663510E-9496-4850-B6F6-F8886BD5F99E}"/>
+                <a16:creationId xmlns:a16="http://schemas.microsoft.com/office/drawing/2014/main" id="{6C0E3DBB-3D67-47BF-9363-65A91C93D785}"/>
               </a:ext>
             </a:extLst>
           </p:cNvPr>
@@ -10510,7 +12516,7 @@
           <p:cNvPr id="6" name="">
             <a:extLst xmlns:a="http://schemas.openxmlformats.org/drawingml/2006/main">
               <a:ext uri="{FF2B5EF4-FFF2-40B4-BE49-F238E27FC236}">
-                <a16:creationId xmlns:a16="http://schemas.microsoft.com/office/drawing/2014/main" id="{9841E020-9404-4562-ACA4-9FEEA9C3DDC1}"/>
+                <a16:creationId xmlns:a16="http://schemas.microsoft.com/office/drawing/2014/main" id="{0094C04D-5C3A-46A3-BBF4-CEF850C8D2F6}"/>
               </a:ext>
             </a:extLst>
           </p:cNvPr>
@@ -10578,7 +12584,7 @@
           <p:cNvPr id="7" name="">
             <a:extLst xmlns:a="http://schemas.openxmlformats.org/drawingml/2006/main">
               <a:ext uri="{FF2B5EF4-FFF2-40B4-BE49-F238E27FC236}">
-                <a16:creationId xmlns:a16="http://schemas.microsoft.com/office/drawing/2014/main" id="{4EDA09EA-D4B0-4331-9CA8-4277A7717510}"/>
+                <a16:creationId xmlns:a16="http://schemas.microsoft.com/office/drawing/2014/main" id="{C71396D7-D4B9-4B9C-810E-013F4A8947A1}"/>
               </a:ext>
             </a:extLst>
           </p:cNvPr>
@@ -10646,7 +12652,7 @@
           <p:cNvPr id="8" name="">
             <a:extLst xmlns:a="http://schemas.openxmlformats.org/drawingml/2006/main">
               <a:ext uri="{FF2B5EF4-FFF2-40B4-BE49-F238E27FC236}">
-                <a16:creationId xmlns:a16="http://schemas.microsoft.com/office/drawing/2014/main" id="{BFA7507B-B629-4ABA-949E-874A4D998825}"/>
+                <a16:creationId xmlns:a16="http://schemas.microsoft.com/office/drawing/2014/main" id="{0EA80DDB-517E-4CA3-92DD-219ED09EFEBA}"/>
               </a:ext>
             </a:extLst>
           </p:cNvPr>
@@ -10712,7 +12718,7 @@
     </p:spTree>
     <p:extLst>
       <p:ext uri="{BB962C8B-B14F-4D97-AF65-F5344CB8AC3E}">
-        <p14:creationId xmlns:p14="http://schemas.microsoft.com/office/powerpoint/2010/main" val="134240948"/>
+        <p14:creationId xmlns:p14="http://schemas.microsoft.com/office/powerpoint/2010/main" val="415528229"/>
       </p:ext>
     </p:extLst>
   </p:cSld>
@@ -10743,7 +12749,7 @@
           <p:cNvPr id="6" name="">
             <a:extLst xmlns:a="http://schemas.openxmlformats.org/drawingml/2006/main">
               <a:ext uri="{FF2B5EF4-FFF2-40B4-BE49-F238E27FC236}">
-                <a16:creationId xmlns:a16="http://schemas.microsoft.com/office/drawing/2014/main" id="{91F393C5-CF2A-43AC-879A-C346606FD68E}"/>
+                <a16:creationId xmlns:a16="http://schemas.microsoft.com/office/drawing/2014/main" id="{E5BE9E82-5B35-4B99-A970-A2B41DF4584B}"/>
               </a:ext>
             </a:extLst>
           </p:cNvPr>
@@ -10811,7 +12817,7 @@
           <p:cNvPr id="2" name="">
             <a:extLst xmlns:a="http://schemas.openxmlformats.org/drawingml/2006/main">
               <a:ext uri="{FF2B5EF4-FFF2-40B4-BE49-F238E27FC236}">
-                <a16:creationId xmlns:a16="http://schemas.microsoft.com/office/drawing/2014/main" id="{B3F21F8E-7D85-456E-B154-E922E0DC5AE0}"/>
+                <a16:creationId xmlns:a16="http://schemas.microsoft.com/office/drawing/2014/main" id="{FC042381-2CBC-4E7E-9D6F-1F6822F3A733}"/>
               </a:ext>
             </a:extLst>
           </p:cNvPr>
@@ -10879,7 +12885,7 @@
           <p:cNvPr id="3" name="">
             <a:extLst xmlns:a="http://schemas.openxmlformats.org/drawingml/2006/main">
               <a:ext uri="{FF2B5EF4-FFF2-40B4-BE49-F238E27FC236}">
-                <a16:creationId xmlns:a16="http://schemas.microsoft.com/office/drawing/2014/main" id="{BA7FC6C9-7247-4E3A-9E39-8B79A52E654C}"/>
+                <a16:creationId xmlns:a16="http://schemas.microsoft.com/office/drawing/2014/main" id="{CEB9FC22-CDAB-42FD-B75D-313ABD549F4A}"/>
               </a:ext>
             </a:extLst>
           </p:cNvPr>
@@ -10889,7 +12895,7 @@
           <p:nvPr/>
         </p:nvPicPr>
         <p:blipFill>
-          <a:blip xmlns:r="http://schemas.openxmlformats.org/officeDocument/2006/relationships" xmlns:a="http://schemas.openxmlformats.org/drawingml/2006/main" r:embed="Rce131b0a78ec4c5a"/>
+          <a:blip xmlns:r="http://schemas.openxmlformats.org/officeDocument/2006/relationships" xmlns:a="http://schemas.openxmlformats.org/drawingml/2006/main" r:embed="Rb54c95ee51844e35"/>
           <a:stretch xmlns:a="http://schemas.openxmlformats.org/drawingml/2006/main"/>
         </p:blipFill>
         <p:spPr>
@@ -10907,7 +12913,7 @@
           <p:cNvPr id="4" name="">
             <a:extLst xmlns:a="http://schemas.openxmlformats.org/drawingml/2006/main">
               <a:ext uri="{FF2B5EF4-FFF2-40B4-BE49-F238E27FC236}">
-                <a16:creationId xmlns:a16="http://schemas.microsoft.com/office/drawing/2014/main" id="{7C038111-B572-4E3B-BD84-9D8E1D0D1EF5}"/>
+                <a16:creationId xmlns:a16="http://schemas.microsoft.com/office/drawing/2014/main" id="{6533F1BC-E7DB-4F4A-9573-949F52A879A6}"/>
               </a:ext>
             </a:extLst>
           </p:cNvPr>
@@ -10975,7 +12981,7 @@
           <p:cNvPr id="5" name="">
             <a:extLst xmlns:a="http://schemas.openxmlformats.org/drawingml/2006/main">
               <a:ext uri="{FF2B5EF4-FFF2-40B4-BE49-F238E27FC236}">
-                <a16:creationId xmlns:a16="http://schemas.microsoft.com/office/drawing/2014/main" id="{59723578-CE4A-49DC-AD8D-A469E6DC5652}"/>
+                <a16:creationId xmlns:a16="http://schemas.microsoft.com/office/drawing/2014/main" id="{7E22769C-FCA4-4DB7-B6C0-C070D8CE50EC}"/>
               </a:ext>
             </a:extLst>
           </p:cNvPr>
@@ -11041,7 +13047,7 @@
     </p:spTree>
     <p:extLst>
       <p:ext uri="{BB962C8B-B14F-4D97-AF65-F5344CB8AC3E}">
-        <p14:creationId xmlns:p14="http://schemas.microsoft.com/office/powerpoint/2010/main" val="230914736"/>
+        <p14:creationId xmlns:p14="http://schemas.microsoft.com/office/powerpoint/2010/main" val="1829632058"/>
       </p:ext>
     </p:extLst>
   </p:cSld>
@@ -11069,10 +13075,10 @@
       </p:grpSpPr>
       <p:sp>
         <p:nvSpPr>
-          <p:cNvPr id="5" name="">
+          <p:cNvPr id="6" name="">
             <a:extLst xmlns:a="http://schemas.openxmlformats.org/drawingml/2006/main">
               <a:ext uri="{FF2B5EF4-FFF2-40B4-BE49-F238E27FC236}">
-                <a16:creationId xmlns:a16="http://schemas.microsoft.com/office/drawing/2014/main" id="{B92E377D-B5F5-4F34-86D5-7A2297E8CBEC}"/>
+                <a16:creationId xmlns:a16="http://schemas.microsoft.com/office/drawing/2014/main" id="{07222DF9-A541-4DE1-8B84-E5C981BE0B9F}"/>
               </a:ext>
             </a:extLst>
           </p:cNvPr>
@@ -11130,7 +13136,7 @@
                 <a:ea typeface="Arial"/>
                 <a:cs typeface="Arial"/>
               </a:rPr>
-              <a:t>Proposal quality and its limits</a:t>
+              <a:t>Processing requirements before loading content</a:t>
             </a:r>
           </a:p>
         </p:txBody>
@@ -11140,7 +13146,7 @@
           <p:cNvPr id="2" name="">
             <a:extLst xmlns:a="http://schemas.openxmlformats.org/drawingml/2006/main">
               <a:ext uri="{FF2B5EF4-FFF2-40B4-BE49-F238E27FC236}">
-                <a16:creationId xmlns:a16="http://schemas.microsoft.com/office/drawing/2014/main" id="{322DD70B-7863-4322-B4A7-22DDC8F00C63}"/>
+                <a16:creationId xmlns:a16="http://schemas.microsoft.com/office/drawing/2014/main" id="{61C1B97C-A42C-4E56-B67F-5704FD01CDFF}"/>
               </a:ext>
             </a:extLst>
           </p:cNvPr>
@@ -11152,7 +13158,7 @@
         <p:spPr>
           <a:xfrm xmlns:a="http://schemas.openxmlformats.org/drawingml/2006/main">
             <a:off x="609600" y="1381125"/>
-            <a:ext cx="10972800" cy="647700"/>
+            <a:ext cx="10972800" cy="790575"/>
           </a:xfrm>
           <a:prstGeom xmlns:a="http://schemas.openxmlformats.org/drawingml/2006/main" prst="rect">
             <a:avLst/>
@@ -11168,9 +13174,9 @@
           </a:bodyPr>
           <a:lstStyle xmlns:a="http://schemas.openxmlformats.org/drawingml/2006/main">
             <a:defPPr>
-              <a:defRPr sz="2250" b="0">
-                <a:solidFill>
-                  <a:srgbClr val="213744"/>
+              <a:defRPr sz="2325" b="1">
+                <a:solidFill>
+                  <a:srgbClr val="157C87"/>
                 </a:solidFill>
                 <a:latin typeface="Arial"/>
                 <a:ea typeface="Arial"/>
@@ -11180,9 +13186,9 @@
           </a:lstStyle>
           <a:p xmlns:a="http://schemas.openxmlformats.org/drawingml/2006/main">
             <a:pPr>
-              <a:defRPr sz="2250" b="0">
-                <a:solidFill>
-                  <a:srgbClr val="213744"/>
+              <a:defRPr sz="2325" b="1">
+                <a:solidFill>
+                  <a:srgbClr val="157C87"/>
                 </a:solidFill>
                 <a:latin typeface="Arial"/>
                 <a:ea typeface="Arial"/>
@@ -11190,15 +13196,15 @@
               </a:defRPr>
             </a:pPr>
             <a:r>
-              <a:rPr sz="2250" b="0">
-                <a:solidFill>
-                  <a:srgbClr val="213744"/>
+              <a:rPr sz="2325" b="1">
+                <a:solidFill>
+                  <a:srgbClr val="157C87"/>
                 </a:solidFill>
                 <a:latin typeface="Arial"/>
                 <a:ea typeface="Arial"/>
                 <a:cs typeface="Arial"/>
               </a:rPr>
-              <a:t>Selected demonstrations support the proposed behavior.</a:t>
+              <a:t>Can a consumer discover required geospatial processing while the content payload stays closed?</a:t>
             </a:r>
           </a:p>
         </p:txBody>
@@ -11208,7 +13214,7 @@
           <p:cNvPr id="3" name="">
             <a:extLst xmlns:a="http://schemas.openxmlformats.org/drawingml/2006/main">
               <a:ext uri="{FF2B5EF4-FFF2-40B4-BE49-F238E27FC236}">
-                <a16:creationId xmlns:a16="http://schemas.microsoft.com/office/drawing/2014/main" id="{05FD2639-337E-44B1-A2C6-9C2F5B1AA6B8}"/>
+                <a16:creationId xmlns:a16="http://schemas.microsoft.com/office/drawing/2014/main" id="{E4AABD03-92FB-4AD2-B770-46D07487B9D1}"/>
               </a:ext>
             </a:extLst>
           </p:cNvPr>
@@ -11216,18 +13222,18 @@
           <p:nvPr/>
         </p:nvGraphicFramePr>
         <p:xfrm>
-          <a:off xmlns:a="http://schemas.openxmlformats.org/drawingml/2006/main" x="609600" y="2200275"/>
-          <a:ext xmlns:a="http://schemas.openxmlformats.org/drawingml/2006/main" cx="10972800" cy="3524250"/>
+          <a:off xmlns:a="http://schemas.openxmlformats.org/drawingml/2006/main" x="609600" y="2381250"/>
+          <a:ext xmlns:a="http://schemas.openxmlformats.org/drawingml/2006/main" cx="10972800" cy="2190750"/>
         </p:xfrm>
         <a:graphic xmlns:a="http://schemas.openxmlformats.org/drawingml/2006/main">
           <a:graphicData uri="http://schemas.openxmlformats.org/drawingml/2006/table">
             <a:tbl>
               <a:tblPr/>
               <a:tblGrid>
-                <a:gridCol w="3143250"/>
-                <a:gridCol w="7829550"/>
+                <a:gridCol w="3429000"/>
+                <a:gridCol w="7543800"/>
               </a:tblGrid>
-              <a:tr h="704850">
+              <a:tr h="547688">
                 <a:tc>
                   <a:txBody>
                     <a:bodyPr>
@@ -11236,7 +13242,7 @@
                     <a:lstStyle/>
                     <a:p>
                       <a:r>
-                        <a:rPr sz="1800" b="1">
+                        <a:rPr sz="1950" b="1">
                           <a:solidFill>
                             <a:srgbClr val="FFFFFF"/>
                           </a:solidFill>
@@ -11244,7 +13250,7 @@
                           <a:ea typeface="Arial"/>
                           <a:cs typeface="Arial"/>
                         </a:rPr>
-                        <a:t>Review dimension</a:t>
+                        <a:t>Closed-payload summary</a:t>
                       </a:r>
                     </a:p>
                   </a:txBody>
@@ -11262,7 +13268,7 @@
                     <a:lstStyle/>
                     <a:p>
                       <a:r>
-                        <a:rPr sz="1800" b="1">
+                        <a:rPr sz="1950" b="1">
                           <a:solidFill>
                             <a:srgbClr val="FFFFFF"/>
                           </a:solidFill>
@@ -11270,7 +13276,7 @@
                           <a:ea typeface="Arial"/>
                           <a:cs typeface="Arial"/>
                         </a:rPr>
-                        <a:t>Assessment</a:t>
+                        <a:t>Consumer meaning</a:t>
                       </a:r>
                     </a:p>
                   </a:txBody>
@@ -11281,7 +13287,7 @@
                   </a:tcPr>
                 </a:tc>
               </a:tr>
-              <a:tr h="704850">
+              <a:tr h="547688">
                 <a:tc>
                   <a:txBody>
                     <a:bodyPr>
@@ -11290,7 +13296,7 @@
                     <a:lstStyle/>
                     <a:p>
                       <a:r>
-                        <a:rPr sz="1800" b="0">
+                        <a:rPr sz="1950" b="0">
                           <a:solidFill>
                             <a:srgbClr val="213744"/>
                           </a:solidFill>
@@ -11298,7 +13304,7 @@
                           <a:ea typeface="Arial"/>
                           <a:cs typeface="Arial"/>
                         </a:rPr>
-                        <a:t>Data model and runtime rules</a:t>
+                        <a:t>Complete-positive</a:t>
                       </a:r>
                     </a:p>
                   </a:txBody>
@@ -11316,7 +13322,7 @@
                     <a:lstStyle/>
                     <a:p>
                       <a:r>
-                        <a:rPr sz="1800" b="0">
+                        <a:rPr sz="1950" b="0">
                           <a:solidFill>
                             <a:srgbClr val="213744"/>
                           </a:solidFill>
@@ -11324,7 +13330,7 @@
                           <a:ea typeface="Arial"/>
                           <a:cs typeface="Arial"/>
                         </a:rPr>
-                        <a:t>The draft separates authored inputs from computed results and defines placement, adjustment, query and bake behavior.</a:t>
+                        <a:t>Declared hard dependency: geospatial processing required</a:t>
                       </a:r>
                     </a:p>
                   </a:txBody>
@@ -11335,7 +13341,7 @@
                   </a:tcPr>
                 </a:tc>
               </a:tr>
-              <a:tr h="704850">
+              <a:tr h="547688">
                 <a:tc>
                   <a:txBody>
                     <a:bodyPr>
@@ -11344,7 +13350,7 @@
                     <a:lstStyle/>
                     <a:p>
                       <a:r>
-                        <a:rPr sz="1800" b="0">
+                        <a:rPr sz="1950" b="0">
                           <a:solidFill>
                             <a:srgbClr val="213744"/>
                           </a:solidFill>
@@ -11352,7 +13358,7 @@
                           <a:ea typeface="Arial"/>
                           <a:cs typeface="Arial"/>
                         </a:rPr>
-                        <a:t>Group alignment</a:t>
+                        <a:t>Complete-empty</a:t>
                       </a:r>
                     </a:p>
                   </a:txBody>
@@ -11370,7 +13376,7 @@
                     <a:lstStyle/>
                     <a:p>
                       <a:r>
-                        <a:rPr sz="1800" b="0">
+                        <a:rPr sz="1950" b="0">
                           <a:solidFill>
                             <a:srgbClr val="213744"/>
                           </a:solidFill>
@@ -11378,7 +13384,7 @@
                           <a:ea typeface="Arial"/>
                           <a:cs typeface="Arial"/>
                         </a:rPr>
-                        <a:t>Input and declaration rules have agreement. Detailed conventions and identities await review.</a:t>
+                        <a:t>Publisher-qualified known-none: no retained geospatial use</a:t>
                       </a:r>
                     </a:p>
                   </a:txBody>
@@ -11389,7 +13395,7 @@
                   </a:tcPr>
                 </a:tc>
               </a:tr>
-              <a:tr h="704850">
+              <a:tr h="547688">
                 <a:tc>
                   <a:txBody>
                     <a:bodyPr>
@@ -11398,7 +13404,7 @@
                     <a:lstStyle/>
                     <a:p>
                       <a:r>
-                        <a:rPr sz="1800" b="0">
+                        <a:rPr sz="1950" b="0">
                           <a:solidFill>
                             <a:srgbClr val="213744"/>
                           </a:solidFill>
@@ -11406,7 +13412,7 @@
                           <a:ea typeface="Arial"/>
                           <a:cs typeface="Arial"/>
                         </a:rPr>
-                        <a:t>Prototype limitations</a:t>
+                        <a:t>Unknown</a:t>
                       </a:r>
                     </a:p>
                   </a:txBody>
@@ -11424,7 +13430,7 @@
                     <a:lstStyle/>
                     <a:p>
                       <a:r>
-                        <a:rPr sz="1800" b="0">
+                        <a:rPr sz="1950" b="0">
                           <a:solidFill>
                             <a:srgbClr val="213744"/>
                           </a:solidFill>
@@ -11432,61 +13438,7 @@
                           <a:ea typeface="Arial"/>
                           <a:cs typeface="Arial"/>
                         </a:rPr>
-                        <a:t>Lighting directions lack an error bound. Rotation uncertainty is unquantified. A quoted CRS name causes false rejection.</a:t>
-                      </a:r>
-                    </a:p>
-                  </a:txBody>
-                  <a:tcPr marL="95250" marR="95250" marT="38100" marB="38100">
-                    <a:solidFill>
-                      <a:srgbClr val="FFFFFF"/>
-                    </a:solidFill>
-                  </a:tcPr>
-                </a:tc>
-              </a:tr>
-              <a:tr h="704850">
-                <a:tc>
-                  <a:txBody>
-                    <a:bodyPr>
-                      <a:noAutofit/>
-                    </a:bodyPr>
-                    <a:lstStyle/>
-                    <a:p>
-                      <a:r>
-                        <a:rPr sz="1800" b="0">
-                          <a:solidFill>
-                            <a:srgbClr val="213744"/>
-                          </a:solidFill>
-                          <a:latin typeface="Arial"/>
-                          <a:ea typeface="Arial"/>
-                          <a:cs typeface="Arial"/>
-                        </a:rPr>
-                        <a:t>Verification coverage</a:t>
-                      </a:r>
-                    </a:p>
-                  </a:txBody>
-                  <a:tcPr marL="95250" marR="95250" marT="38100" marB="38100">
-                    <a:solidFill>
-                      <a:srgbClr val="FFFFFF"/>
-                    </a:solidFill>
-                  </a:tcPr>
-                </a:tc>
-                <a:tc>
-                  <a:txBody>
-                    <a:bodyPr>
-                      <a:noAutofit/>
-                    </a:bodyPr>
-                    <a:lstStyle/>
-                    <a:p>
-                      <a:r>
-                        <a:rPr sz="1800" b="0">
-                          <a:solidFill>
-                            <a:srgbClr val="213744"/>
-                          </a:solidFill>
-                          <a:latin typeface="Arial"/>
-                          <a:ea typeface="Arial"/>
-                          <a:cs typeface="Arial"/>
-                        </a:rPr>
-                        <a:t>Selected workflows and distinguishing controls support the rules. Broader composition and continuous space/time coverage remain unverified.</a:t>
+                        <a:t>Missing qualification supplies no proof of no dependency</a:t>
                       </a:r>
                     </a:p>
                   </a:txBody>
@@ -11506,7 +13458,7 @@
           <p:cNvPr id="4" name="">
             <a:extLst xmlns:a="http://schemas.openxmlformats.org/drawingml/2006/main">
               <a:ext uri="{FF2B5EF4-FFF2-40B4-BE49-F238E27FC236}">
-                <a16:creationId xmlns:a16="http://schemas.microsoft.com/office/drawing/2014/main" id="{6F04C8E4-72A0-4F69-8E12-0C8C341E9B40}"/>
+                <a16:creationId xmlns:a16="http://schemas.microsoft.com/office/drawing/2014/main" id="{DAC64F0E-80EC-4760-9AA0-95E793FD128E}"/>
               </a:ext>
             </a:extLst>
           </p:cNvPr>
@@ -11517,8 +13469,8 @@
         </p:nvSpPr>
         <p:spPr>
           <a:xfrm xmlns:a="http://schemas.openxmlformats.org/drawingml/2006/main">
-            <a:off x="609600" y="6048375"/>
-            <a:ext cx="10972800" cy="733425"/>
+            <a:off x="609600" y="4829175"/>
+            <a:ext cx="10972800" cy="1066800"/>
           </a:xfrm>
           <a:prstGeom xmlns:a="http://schemas.openxmlformats.org/drawingml/2006/main" prst="rect">
             <a:avLst/>
@@ -11534,9 +13486,9 @@
           </a:bodyPr>
           <a:lstStyle xmlns:a="http://schemas.openxmlformats.org/drawingml/2006/main">
             <a:defPPr>
-              <a:defRPr sz="1950" b="0">
-                <a:solidFill>
-                  <a:srgbClr val="A25D20"/>
+              <a:defRPr sz="2025" b="0">
+                <a:solidFill>
+                  <a:srgbClr val="213744"/>
                 </a:solidFill>
                 <a:latin typeface="Arial"/>
                 <a:ea typeface="Arial"/>
@@ -11546,9 +13498,9 @@
           </a:lstStyle>
           <a:p xmlns:a="http://schemas.openxmlformats.org/drawingml/2006/main">
             <a:pPr>
-              <a:defRPr sz="1950" b="0">
-                <a:solidFill>
-                  <a:srgbClr val="A25D20"/>
+              <a:defRPr sz="2025" b="0">
+                <a:solidFill>
+                  <a:srgbClr val="213744"/>
                 </a:solidFill>
                 <a:latin typeface="Arial"/>
                 <a:ea typeface="Arial"/>
@@ -11556,15 +13508,83 @@
               </a:defRPr>
             </a:pPr>
             <a:r>
-              <a:rPr sz="1950" b="0">
-                <a:solidFill>
-                  <a:srgbClr val="A25D20"/>
+              <a:rPr sz="2025" b="0">
+                <a:solidFill>
+                  <a:srgbClr val="213744"/>
                 </a:solidFill>
                 <a:latin typeface="Arial"/>
                 <a:ea typeface="Arial"/>
                 <a:cs typeface="Arial"/>
               </a:rPr>
-              <a:t>No additional undefined model rule was confirmed in the inspected paths. That is a bounded finding.</a:t>
+              <a:t>The three summary cases retain closed payloads during detection. A separate publisher check catches a stale empty claim that retains a georeferenced variant.</a:t>
+            </a:r>
+          </a:p>
+        </p:txBody>
+      </p:sp>
+      <p:sp>
+        <p:nvSpPr>
+          <p:cNvPr id="5" name="">
+            <a:extLst xmlns:a="http://schemas.openxmlformats.org/drawingml/2006/main">
+              <a:ext uri="{FF2B5EF4-FFF2-40B4-BE49-F238E27FC236}">
+                <a16:creationId xmlns:a16="http://schemas.microsoft.com/office/drawing/2014/main" id="{29922168-4621-49BC-B068-9D751E86934B}"/>
+              </a:ext>
+            </a:extLst>
+          </p:cNvPr>
+          <p:cNvSpPr>
+            <a:spLocks xmlns:a="http://schemas.openxmlformats.org/drawingml/2006/main" noGrp="1"/>
+          </p:cNvSpPr>
+          <p:nvPr/>
+        </p:nvSpPr>
+        <p:spPr>
+          <a:xfrm xmlns:a="http://schemas.openxmlformats.org/drawingml/2006/main">
+            <a:off x="609600" y="6086475"/>
+            <a:ext cx="10972800" cy="704850"/>
+          </a:xfrm>
+          <a:prstGeom xmlns:a="http://schemas.openxmlformats.org/drawingml/2006/main" prst="rect">
+            <a:avLst/>
+          </a:prstGeom>
+          <a:noFill xmlns:a="http://schemas.openxmlformats.org/drawingml/2006/main"/>
+          <a:ln xmlns:a="http://schemas.openxmlformats.org/drawingml/2006/main" w="0">
+            <a:noFill/>
+          </a:ln>
+        </p:spPr>
+        <p:txBody>
+          <a:bodyPr xmlns:a="http://schemas.openxmlformats.org/drawingml/2006/main" anchor="t">
+            <a:noAutofit/>
+          </a:bodyPr>
+          <a:lstStyle xmlns:a="http://schemas.openxmlformats.org/drawingml/2006/main">
+            <a:defPPr>
+              <a:defRPr sz="1725" b="0">
+                <a:solidFill>
+                  <a:srgbClr val="526B79"/>
+                </a:solidFill>
+                <a:latin typeface="Arial"/>
+                <a:ea typeface="Arial"/>
+                <a:cs typeface="Arial"/>
+              </a:defRPr>
+            </a:defPPr>
+          </a:lstStyle>
+          <a:p xmlns:a="http://schemas.openxmlformats.org/drawingml/2006/main">
+            <a:pPr>
+              <a:defRPr sz="1725" b="0">
+                <a:solidFill>
+                  <a:srgbClr val="526B79"/>
+                </a:solidFill>
+                <a:latin typeface="Arial"/>
+                <a:ea typeface="Arial"/>
+                <a:cs typeface="Arial"/>
+              </a:defRPr>
+            </a:pPr>
+            <a:r>
+              <a:rPr sz="1725" b="0">
+                <a:solidFill>
+                  <a:srgbClr val="526B79"/>
+                </a:solidFill>
+                <a:latin typeface="Arial"/>
+                <a:ea typeface="Arial"/>
+                <a:cs typeface="Arial"/>
+              </a:rPr>
+              <a:t>Selected payload and retained-variant controls. Fixed v1 names and the standards approval owner still need group agreement.</a:t>
             </a:r>
           </a:p>
         </p:txBody>
@@ -11572,7 +13592,7 @@
     </p:spTree>
     <p:extLst>
       <p:ext uri="{BB962C8B-B14F-4D97-AF65-F5344CB8AC3E}">
-        <p14:creationId xmlns:p14="http://schemas.microsoft.com/office/powerpoint/2010/main" val="1631378121"/>
+        <p14:creationId xmlns:p14="http://schemas.microsoft.com/office/powerpoint/2010/main" val="337478851"/>
       </p:ext>
     </p:extLst>
   </p:cSld>
@@ -11600,10 +13620,10 @@
       </p:grpSpPr>
       <p:sp>
         <p:nvSpPr>
-          <p:cNvPr id="9" name="">
+          <p:cNvPr id="7" name="">
             <a:extLst xmlns:a="http://schemas.openxmlformats.org/drawingml/2006/main">
               <a:ext uri="{FF2B5EF4-FFF2-40B4-BE49-F238E27FC236}">
-                <a16:creationId xmlns:a16="http://schemas.microsoft.com/office/drawing/2014/main" id="{73AA4BDE-39A7-4A7E-9F17-3BBDA3B31213}"/>
+                <a16:creationId xmlns:a16="http://schemas.microsoft.com/office/drawing/2014/main" id="{8D34D76F-C99A-499D-A9FA-CA3254536EBD}"/>
               </a:ext>
             </a:extLst>
           </p:cNvPr>
@@ -11661,7 +13681,7 @@
                 <a:ea typeface="Arial"/>
                 <a:cs typeface="Arial"/>
               </a:rPr>
-              <a:t>Appendix: A construction site's own survey grid</a:t>
+              <a:t>WKT writing, reading and comparison</a:t>
             </a:r>
           </a:p>
         </p:txBody>
@@ -11671,7 +13691,7 @@
           <p:cNvPr id="2" name="">
             <a:extLst xmlns:a="http://schemas.openxmlformats.org/drawingml/2006/main">
               <a:ext uri="{FF2B5EF4-FFF2-40B4-BE49-F238E27FC236}">
-                <a16:creationId xmlns:a16="http://schemas.microsoft.com/office/drawing/2014/main" id="{C65FD8E7-BC03-4305-9349-33F81188C92B}"/>
+                <a16:creationId xmlns:a16="http://schemas.microsoft.com/office/drawing/2014/main" id="{03727B87-552A-4654-9BF8-7F7325C0DC07}"/>
               </a:ext>
             </a:extLst>
           </p:cNvPr>
@@ -11682,8 +13702,8 @@
         </p:nvSpPr>
         <p:spPr>
           <a:xfrm xmlns:a="http://schemas.openxmlformats.org/drawingml/2006/main">
-            <a:off x="609600" y="1400175"/>
-            <a:ext cx="10972800" cy="771525"/>
+            <a:off x="609600" y="1381125"/>
+            <a:ext cx="10972800" cy="790575"/>
           </a:xfrm>
           <a:prstGeom xmlns:a="http://schemas.openxmlformats.org/drawingml/2006/main" prst="rect">
             <a:avLst/>
@@ -11729,45 +13749,17 @@
                 <a:ea typeface="Arial"/>
                 <a:cs typeface="Arial"/>
               </a:rPr>
-              <a:t>Can a project's local survey grid participate as a defined CRS?</a:t>
+              <a:t>Can different WKT spellings remain usable without losing coordinate meaning?</a:t>
             </a:r>
           </a:p>
         </p:txBody>
       </p:sp>
-      <p:pic>
-        <p:nvPicPr>
+      <p:sp>
+        <p:nvSpPr>
           <p:cNvPr id="3" name="">
             <a:extLst xmlns:a="http://schemas.openxmlformats.org/drawingml/2006/main">
               <a:ext uri="{FF2B5EF4-FFF2-40B4-BE49-F238E27FC236}">
-                <a16:creationId xmlns:a16="http://schemas.microsoft.com/office/drawing/2014/main" id="{144E53A4-771F-4D41-B9EC-EA9491CD877C}"/>
-              </a:ext>
-            </a:extLst>
-          </p:cNvPr>
-          <p:cNvPicPr>
-            <a:picLocks xmlns:a="http://schemas.openxmlformats.org/drawingml/2006/main" noChangeAspect="1"/>
-          </p:cNvPicPr>
-          <p:nvPr/>
-        </p:nvPicPr>
-        <p:blipFill>
-          <a:blip xmlns:r="http://schemas.openxmlformats.org/officeDocument/2006/relationships" xmlns:a="http://schemas.openxmlformats.org/drawingml/2006/main" r:embed="R696969b9b1d7439a"/>
-          <a:stretch xmlns:a="http://schemas.openxmlformats.org/drawingml/2006/main"/>
-        </p:blipFill>
-        <p:spPr>
-          <a:xfrm xmlns:a="http://schemas.openxmlformats.org/drawingml/2006/main">
-            <a:off x="609600" y="2383036"/>
-            <a:ext cx="7258050" cy="4082653"/>
-          </a:xfrm>
-          <a:prstGeom xmlns:a="http://schemas.openxmlformats.org/drawingml/2006/main" prst="rect">
-            <a:avLst/>
-          </a:prstGeom>
-        </p:spPr>
-      </p:pic>
-      <p:sp>
-        <p:nvSpPr>
-          <p:cNvPr id="4" name="">
-            <a:extLst xmlns:a="http://schemas.openxmlformats.org/drawingml/2006/main">
-              <a:ext uri="{FF2B5EF4-FFF2-40B4-BE49-F238E27FC236}">
-                <a16:creationId xmlns:a16="http://schemas.microsoft.com/office/drawing/2014/main" id="{E1C5D8F5-BA8E-4524-9FCC-5AF1E63A9CD0}"/>
+                <a16:creationId xmlns:a16="http://schemas.microsoft.com/office/drawing/2014/main" id="{676B6FC4-5938-45ED-AC19-D7AD8B3A3EAF}"/>
               </a:ext>
             </a:extLst>
           </p:cNvPr>
@@ -11778,8 +13770,8 @@
         </p:nvSpPr>
         <p:spPr>
           <a:xfrm xmlns:a="http://schemas.openxmlformats.org/drawingml/2006/main">
-            <a:off x="8239125" y="2381250"/>
-            <a:ext cx="3343275" cy="304800"/>
+            <a:off x="609600" y="2286000"/>
+            <a:ext cx="10972800" cy="666750"/>
           </a:xfrm>
           <a:prstGeom xmlns:a="http://schemas.openxmlformats.org/drawingml/2006/main" prst="rect">
             <a:avLst/>
@@ -11795,9 +13787,9 @@
           </a:bodyPr>
           <a:lstStyle xmlns:a="http://schemas.openxmlformats.org/drawingml/2006/main">
             <a:defPPr>
-              <a:defRPr sz="1650" b="1">
-                <a:solidFill>
-                  <a:srgbClr val="157C87"/>
+              <a:defRPr sz="2025" b="0">
+                <a:solidFill>
+                  <a:srgbClr val="213744"/>
                 </a:solidFill>
                 <a:latin typeface="Arial"/>
                 <a:ea typeface="Arial"/>
@@ -11807,9 +13799,9 @@
           </a:lstStyle>
           <a:p xmlns:a="http://schemas.openxmlformats.org/drawingml/2006/main">
             <a:pPr>
-              <a:defRPr sz="1650" b="1">
-                <a:solidFill>
-                  <a:srgbClr val="157C87"/>
+              <a:defRPr sz="2025" b="0">
+                <a:solidFill>
+                  <a:srgbClr val="213744"/>
                 </a:solidFill>
                 <a:latin typeface="Arial"/>
                 <a:ea typeface="Arial"/>
@@ -11817,25 +13809,269 @@
               </a:defRPr>
             </a:pPr>
             <a:r>
-              <a:rPr sz="1650" b="1">
-                <a:solidFill>
-                  <a:srgbClr val="157C87"/>
+              <a:rPr sz="2025" b="0">
+                <a:solidFill>
+                  <a:srgbClr val="213744"/>
                 </a:solidFill>
                 <a:latin typeface="Arial"/>
                 <a:ea typeface="Arial"/>
                 <a:cs typeface="Arial"/>
               </a:rPr>
-              <a:t>Observed</a:t>
+              <a:t>Writers emit lossless normal text. Readers accept supported valid non-normal WKT with a warning. Normalized text identity and semantic CRS equivalence remain separate.</a:t>
             </a:r>
           </a:p>
         </p:txBody>
       </p:sp>
+      <p:graphicFrame>
+        <p:nvGraphicFramePr>
+          <p:cNvPr id="4" name="">
+            <a:extLst xmlns:a="http://schemas.openxmlformats.org/drawingml/2006/main">
+              <a:ext uri="{FF2B5EF4-FFF2-40B4-BE49-F238E27FC236}">
+                <a16:creationId xmlns:a16="http://schemas.microsoft.com/office/drawing/2014/main" id="{2F5103F6-515B-401F-AD60-243FB4864161}"/>
+              </a:ext>
+            </a:extLst>
+          </p:cNvPr>
+          <p:cNvGraphicFramePr/>
+          <p:nvPr/>
+        </p:nvGraphicFramePr>
+        <p:xfrm>
+          <a:off xmlns:a="http://schemas.openxmlformats.org/drawingml/2006/main" x="609600" y="3124200"/>
+          <a:ext xmlns:a="http://schemas.openxmlformats.org/drawingml/2006/main" cx="10972800" cy="1676400"/>
+        </p:xfrm>
+        <a:graphic xmlns:a="http://schemas.openxmlformats.org/drawingml/2006/main">
+          <a:graphicData uri="http://schemas.openxmlformats.org/drawingml/2006/table">
+            <a:tbl>
+              <a:tblPr/>
+              <a:tblGrid>
+                <a:gridCol w="5486400"/>
+                <a:gridCol w="5486400"/>
+              </a:tblGrid>
+              <a:tr h="419100">
+                <a:tc>
+                  <a:txBody>
+                    <a:bodyPr>
+                      <a:noAutofit/>
+                    </a:bodyPr>
+                    <a:lstStyle/>
+                    <a:p>
+                      <a:r>
+                        <a:rPr sz="2025" b="1">
+                          <a:solidFill>
+                            <a:srgbClr val="FFFFFF"/>
+                          </a:solidFill>
+                          <a:latin typeface="Arial"/>
+                          <a:ea typeface="Arial"/>
+                          <a:cs typeface="Arial"/>
+                        </a:rPr>
+                        <a:t>Text before writing</a:t>
+                      </a:r>
+                    </a:p>
+                  </a:txBody>
+                  <a:tcPr marL="95250" marR="95250" marT="38100" marB="38100">
+                    <a:solidFill>
+                      <a:srgbClr val="213744"/>
+                    </a:solidFill>
+                  </a:tcPr>
+                </a:tc>
+                <a:tc>
+                  <a:txBody>
+                    <a:bodyPr>
+                      <a:noAutofit/>
+                    </a:bodyPr>
+                    <a:lstStyle/>
+                    <a:p>
+                      <a:r>
+                        <a:rPr sz="2025" b="1">
+                          <a:solidFill>
+                            <a:srgbClr val="FFFFFF"/>
+                          </a:solidFill>
+                          <a:latin typeface="Arial"/>
+                          <a:ea typeface="Arial"/>
+                          <a:cs typeface="Arial"/>
+                        </a:rPr>
+                        <a:t>Writer normal form</a:t>
+                      </a:r>
+                    </a:p>
+                  </a:txBody>
+                  <a:tcPr marL="95250" marR="95250" marT="38100" marB="38100">
+                    <a:solidFill>
+                      <a:srgbClr val="213744"/>
+                    </a:solidFill>
+                  </a:tcPr>
+                </a:tc>
+              </a:tr>
+              <a:tr h="419100">
+                <a:tc>
+                  <a:txBody>
+                    <a:bodyPr>
+                      <a:noAutofit/>
+                    </a:bodyPr>
+                    <a:lstStyle/>
+                    <a:p>
+                      <a:r>
+                        <a:rPr sz="2025" b="0">
+                          <a:solidFill>
+                            <a:srgbClr val="213744"/>
+                          </a:solidFill>
+                          <a:latin typeface="Arial"/>
+                          <a:ea typeface="Arial"/>
+                          <a:cs typeface="Arial"/>
+                        </a:rPr>
+                        <a:t>1.00</a:t>
+                      </a:r>
+                    </a:p>
+                  </a:txBody>
+                  <a:tcPr marL="95250" marR="95250" marT="38100" marB="38100">
+                    <a:solidFill>
+                      <a:srgbClr val="FFFFFF"/>
+                    </a:solidFill>
+                  </a:tcPr>
+                </a:tc>
+                <a:tc>
+                  <a:txBody>
+                    <a:bodyPr>
+                      <a:noAutofit/>
+                    </a:bodyPr>
+                    <a:lstStyle/>
+                    <a:p>
+                      <a:r>
+                        <a:rPr sz="2025" b="0">
+                          <a:solidFill>
+                            <a:srgbClr val="213744"/>
+                          </a:solidFill>
+                          <a:latin typeface="Arial"/>
+                          <a:ea typeface="Arial"/>
+                          <a:cs typeface="Arial"/>
+                        </a:rPr>
+                        <a:t>1</a:t>
+                      </a:r>
+                    </a:p>
+                  </a:txBody>
+                  <a:tcPr marL="95250" marR="95250" marT="38100" marB="38100">
+                    <a:solidFill>
+                      <a:srgbClr val="FFFFFF"/>
+                    </a:solidFill>
+                  </a:tcPr>
+                </a:tc>
+              </a:tr>
+              <a:tr h="419100">
+                <a:tc>
+                  <a:txBody>
+                    <a:bodyPr>
+                      <a:noAutofit/>
+                    </a:bodyPr>
+                    <a:lstStyle/>
+                    <a:p>
+                      <a:r>
+                        <a:rPr sz="2025" b="0">
+                          <a:solidFill>
+                            <a:srgbClr val="213744"/>
+                          </a:solidFill>
+                          <a:latin typeface="Arial"/>
+                          <a:ea typeface="Arial"/>
+                          <a:cs typeface="Arial"/>
+                        </a:rPr>
+                        <a:t>1E0</a:t>
+                      </a:r>
+                    </a:p>
+                  </a:txBody>
+                  <a:tcPr marL="95250" marR="95250" marT="38100" marB="38100">
+                    <a:solidFill>
+                      <a:srgbClr val="FFFFFF"/>
+                    </a:solidFill>
+                  </a:tcPr>
+                </a:tc>
+                <a:tc>
+                  <a:txBody>
+                    <a:bodyPr>
+                      <a:noAutofit/>
+                    </a:bodyPr>
+                    <a:lstStyle/>
+                    <a:p>
+                      <a:r>
+                        <a:rPr sz="2025" b="0">
+                          <a:solidFill>
+                            <a:srgbClr val="213744"/>
+                          </a:solidFill>
+                          <a:latin typeface="Arial"/>
+                          <a:ea typeface="Arial"/>
+                          <a:cs typeface="Arial"/>
+                        </a:rPr>
+                        <a:t>1</a:t>
+                      </a:r>
+                    </a:p>
+                  </a:txBody>
+                  <a:tcPr marL="95250" marR="95250" marT="38100" marB="38100">
+                    <a:solidFill>
+                      <a:srgbClr val="FFFFFF"/>
+                    </a:solidFill>
+                  </a:tcPr>
+                </a:tc>
+              </a:tr>
+              <a:tr h="419100">
+                <a:tc>
+                  <a:txBody>
+                    <a:bodyPr>
+                      <a:noAutofit/>
+                    </a:bodyPr>
+                    <a:lstStyle/>
+                    <a:p>
+                      <a:r>
+                        <a:rPr sz="2025" b="0">
+                          <a:solidFill>
+                            <a:srgbClr val="213744"/>
+                          </a:solidFill>
+                          <a:latin typeface="Arial"/>
+                          <a:ea typeface="Arial"/>
+                          <a:cs typeface="Arial"/>
+                        </a:rPr>
+                        <a:t>0.50</a:t>
+                      </a:r>
+                    </a:p>
+                  </a:txBody>
+                  <a:tcPr marL="95250" marR="95250" marT="38100" marB="38100">
+                    <a:solidFill>
+                      <a:srgbClr val="FFFFFF"/>
+                    </a:solidFill>
+                  </a:tcPr>
+                </a:tc>
+                <a:tc>
+                  <a:txBody>
+                    <a:bodyPr>
+                      <a:noAutofit/>
+                    </a:bodyPr>
+                    <a:lstStyle/>
+                    <a:p>
+                      <a:r>
+                        <a:rPr sz="2025" b="0">
+                          <a:solidFill>
+                            <a:srgbClr val="213744"/>
+                          </a:solidFill>
+                          <a:latin typeface="Arial"/>
+                          <a:ea typeface="Arial"/>
+                          <a:cs typeface="Arial"/>
+                        </a:rPr>
+                        <a:t>0.5</a:t>
+                      </a:r>
+                    </a:p>
+                  </a:txBody>
+                  <a:tcPr marL="95250" marR="95250" marT="38100" marB="38100">
+                    <a:solidFill>
+                      <a:srgbClr val="FFFFFF"/>
+                    </a:solidFill>
+                  </a:tcPr>
+                </a:tc>
+              </a:tr>
+            </a:tbl>
+          </a:graphicData>
+        </a:graphic>
+      </p:graphicFrame>
       <p:sp>
         <p:nvSpPr>
           <p:cNvPr id="5" name="">
             <a:extLst xmlns:a="http://schemas.openxmlformats.org/drawingml/2006/main">
               <a:ext uri="{FF2B5EF4-FFF2-40B4-BE49-F238E27FC236}">
-                <a16:creationId xmlns:a16="http://schemas.microsoft.com/office/drawing/2014/main" id="{EE86E619-5F16-4378-A1D8-48A5196A7DD4}"/>
+                <a16:creationId xmlns:a16="http://schemas.microsoft.com/office/drawing/2014/main" id="{60256391-B250-48D0-A4EA-7CA815AA10B3}"/>
               </a:ext>
             </a:extLst>
           </p:cNvPr>
@@ -11846,8 +14082,8 @@
         </p:nvSpPr>
         <p:spPr>
           <a:xfrm xmlns:a="http://schemas.openxmlformats.org/drawingml/2006/main">
-            <a:off x="8239125" y="2733675"/>
-            <a:ext cx="3343275" cy="1600200"/>
+            <a:off x="609600" y="5057775"/>
+            <a:ext cx="10972800" cy="1009650"/>
           </a:xfrm>
           <a:prstGeom xmlns:a="http://schemas.openxmlformats.org/drawingml/2006/main" prst="rect">
             <a:avLst/>
@@ -11863,7 +14099,7 @@
           </a:bodyPr>
           <a:lstStyle xmlns:a="http://schemas.openxmlformats.org/drawingml/2006/main">
             <a:defPPr>
-              <a:defRPr sz="1800" b="0">
+              <a:defRPr sz="2025" b="0">
                 <a:solidFill>
                   <a:srgbClr val="213744"/>
                 </a:solidFill>
@@ -11875,7 +14111,7 @@
           </a:lstStyle>
           <a:p xmlns:a="http://schemas.openxmlformats.org/drawingml/2006/main">
             <a:pPr>
-              <a:defRPr sz="1800" b="0">
+              <a:defRPr sz="2025" b="0">
                 <a:solidFill>
                   <a:srgbClr val="213744"/>
                 </a:solidFill>
@@ -11885,7 +14121,7 @@
               </a:defRPr>
             </a:pPr>
             <a:r>
-              <a:rPr sz="1800" b="0">
+              <a:rPr sz="2025" b="0">
                 <a:solidFill>
                   <a:srgbClr val="213744"/>
                 </a:solidFill>
@@ -11893,7 +14129,7 @@
                 <a:ea typeface="Arial"/>
                 <a:cs typeface="Arial"/>
               </a:rPr>
-              <a:t>The original LandXML survey breaklines resolve and reach an ordinary USD bake rendered by Storm.</a:t>
+              <a:t>Both placement readers resolve each spelling to the expected coordinates. The Omniverse stage writeback checks the same cases. A quoted keyword remains ordinary name text.</a:t>
             </a:r>
           </a:p>
         </p:txBody>
@@ -11903,7 +14139,7 @@
           <p:cNvPr id="6" name="">
             <a:extLst xmlns:a="http://schemas.openxmlformats.org/drawingml/2006/main">
               <a:ext uri="{FF2B5EF4-FFF2-40B4-BE49-F238E27FC236}">
-                <a16:creationId xmlns:a16="http://schemas.microsoft.com/office/drawing/2014/main" id="{74F651E1-1730-46EE-BF9E-74444D83C843}"/>
+                <a16:creationId xmlns:a16="http://schemas.microsoft.com/office/drawing/2014/main" id="{2EDE1DE6-2B15-4730-B9B1-6D25DB2D1145}"/>
               </a:ext>
             </a:extLst>
           </p:cNvPr>
@@ -11914,8 +14150,8 @@
         </p:nvSpPr>
         <p:spPr>
           <a:xfrm xmlns:a="http://schemas.openxmlformats.org/drawingml/2006/main">
-            <a:off x="8239125" y="4429125"/>
-            <a:ext cx="3343275" cy="314325"/>
+            <a:off x="609600" y="6238875"/>
+            <a:ext cx="10972800" cy="561975"/>
           </a:xfrm>
           <a:prstGeom xmlns:a="http://schemas.openxmlformats.org/drawingml/2006/main" prst="rect">
             <a:avLst/>
@@ -11931,9 +14167,9 @@
           </a:bodyPr>
           <a:lstStyle xmlns:a="http://schemas.openxmlformats.org/drawingml/2006/main">
             <a:defPPr>
-              <a:defRPr sz="1650" b="1">
-                <a:solidFill>
-                  <a:srgbClr val="157C87"/>
+              <a:defRPr sz="1650" b="0">
+                <a:solidFill>
+                  <a:srgbClr val="526B79"/>
                 </a:solidFill>
                 <a:latin typeface="Arial"/>
                 <a:ea typeface="Arial"/>
@@ -11943,9 +14179,9 @@
           </a:lstStyle>
           <a:p xmlns:a="http://schemas.openxmlformats.org/drawingml/2006/main">
             <a:pPr>
-              <a:defRPr sz="1650" b="1">
-                <a:solidFill>
-                  <a:srgbClr val="157C87"/>
+              <a:defRPr sz="1650" b="0">
+                <a:solidFill>
+                  <a:srgbClr val="526B79"/>
                 </a:solidFill>
                 <a:latin typeface="Arial"/>
                 <a:ea typeface="Arial"/>
@@ -11953,151 +14189,15 @@
               </a:defRPr>
             </a:pPr>
             <a:r>
-              <a:rPr sz="1650" b="1">
-                <a:solidFill>
-                  <a:srgbClr val="157C87"/>
+              <a:rPr sz="1650" b="0">
+                <a:solidFill>
+                  <a:srgbClr val="526B79"/>
                 </a:solidFill>
                 <a:latin typeface="Arial"/>
                 <a:ea typeface="Arial"/>
                 <a:cs typeface="Arial"/>
               </a:rPr>
-              <a:t>What it establishes</a:t>
-            </a:r>
-          </a:p>
-        </p:txBody>
-      </p:sp>
-      <p:sp>
-        <p:nvSpPr>
-          <p:cNvPr id="7" name="">
-            <a:extLst xmlns:a="http://schemas.openxmlformats.org/drawingml/2006/main">
-              <a:ext uri="{FF2B5EF4-FFF2-40B4-BE49-F238E27FC236}">
-                <a16:creationId xmlns:a16="http://schemas.microsoft.com/office/drawing/2014/main" id="{7FBDB236-C074-473E-A844-A4956030C283}"/>
-              </a:ext>
-            </a:extLst>
-          </p:cNvPr>
-          <p:cNvSpPr>
-            <a:spLocks xmlns:a="http://schemas.openxmlformats.org/drawingml/2006/main" noGrp="1"/>
-          </p:cNvSpPr>
-          <p:nvPr/>
-        </p:nvSpPr>
-        <p:spPr>
-          <a:xfrm xmlns:a="http://schemas.openxmlformats.org/drawingml/2006/main">
-            <a:off x="8239125" y="4791075"/>
-            <a:ext cx="3343275" cy="1800225"/>
-          </a:xfrm>
-          <a:prstGeom xmlns:a="http://schemas.openxmlformats.org/drawingml/2006/main" prst="rect">
-            <a:avLst/>
-          </a:prstGeom>
-          <a:noFill xmlns:a="http://schemas.openxmlformats.org/drawingml/2006/main"/>
-          <a:ln xmlns:a="http://schemas.openxmlformats.org/drawingml/2006/main" w="0">
-            <a:noFill/>
-          </a:ln>
-        </p:spPr>
-        <p:txBody>
-          <a:bodyPr xmlns:a="http://schemas.openxmlformats.org/drawingml/2006/main" anchor="t">
-            <a:noAutofit/>
-          </a:bodyPr>
-          <a:lstStyle xmlns:a="http://schemas.openxmlformats.org/drawingml/2006/main">
-            <a:defPPr>
-              <a:defRPr sz="1800" b="0">
-                <a:solidFill>
-                  <a:srgbClr val="213744"/>
-                </a:solidFill>
-                <a:latin typeface="Arial"/>
-                <a:ea typeface="Arial"/>
-                <a:cs typeface="Arial"/>
-              </a:defRPr>
-            </a:defPPr>
-          </a:lstStyle>
-          <a:p xmlns:a="http://schemas.openxmlformats.org/drawingml/2006/main">
-            <a:pPr>
-              <a:defRPr sz="1800" b="0">
-                <a:solidFill>
-                  <a:srgbClr val="213744"/>
-                </a:solidFill>
-                <a:latin typeface="Arial"/>
-                <a:ea typeface="Arial"/>
-                <a:cs typeface="Arial"/>
-              </a:defRPr>
-            </a:pPr>
-            <a:r>
-              <a:rPr sz="1800" b="0">
-                <a:solidFill>
-                  <a:srgbClr val="213744"/>
-                </a:solidFill>
-                <a:latin typeface="Arial"/>
-                <a:ea typeface="Arial"/>
-                <a:cs typeface="Arial"/>
-              </a:rPr>
-              <a:t>The partner case exercises a site's calibrated CRS. Its WKT-carried calibration participates in resolution.</a:t>
-            </a:r>
-          </a:p>
-        </p:txBody>
-      </p:sp>
-      <p:sp>
-        <p:nvSpPr>
-          <p:cNvPr id="8" name="">
-            <a:extLst xmlns:a="http://schemas.openxmlformats.org/drawingml/2006/main">
-              <a:ext uri="{FF2B5EF4-FFF2-40B4-BE49-F238E27FC236}">
-                <a16:creationId xmlns:a16="http://schemas.microsoft.com/office/drawing/2014/main" id="{71EB2CB4-DC18-4C4E-91CF-0DD6DF41E14A}"/>
-              </a:ext>
-            </a:extLst>
-          </p:cNvPr>
-          <p:cNvSpPr>
-            <a:spLocks xmlns:a="http://schemas.openxmlformats.org/drawingml/2006/main" noGrp="1"/>
-          </p:cNvSpPr>
-          <p:nvPr/>
-        </p:nvSpPr>
-        <p:spPr>
-          <a:xfrm xmlns:a="http://schemas.openxmlformats.org/drawingml/2006/main">
-            <a:off x="609600" y="6534150"/>
-            <a:ext cx="7258050" cy="238125"/>
-          </a:xfrm>
-          <a:prstGeom xmlns:a="http://schemas.openxmlformats.org/drawingml/2006/main" prst="rect">
-            <a:avLst/>
-          </a:prstGeom>
-          <a:noFill xmlns:a="http://schemas.openxmlformats.org/drawingml/2006/main"/>
-          <a:ln xmlns:a="http://schemas.openxmlformats.org/drawingml/2006/main" w="0">
-            <a:noFill/>
-          </a:ln>
-        </p:spPr>
-        <p:txBody>
-          <a:bodyPr xmlns:a="http://schemas.openxmlformats.org/drawingml/2006/main" anchor="t">
-            <a:noAutofit/>
-          </a:bodyPr>
-          <a:lstStyle xmlns:a="http://schemas.openxmlformats.org/drawingml/2006/main">
-            <a:defPPr>
-              <a:defRPr sz="1350" b="0">
-                <a:solidFill>
-                  <a:srgbClr val="526B79"/>
-                </a:solidFill>
-                <a:latin typeface="Arial"/>
-                <a:ea typeface="Arial"/>
-                <a:cs typeface="Arial"/>
-              </a:defRPr>
-            </a:defPPr>
-          </a:lstStyle>
-          <a:p xmlns:a="http://schemas.openxmlformats.org/drawingml/2006/main">
-            <a:pPr>
-              <a:defRPr sz="1350" b="0">
-                <a:solidFill>
-                  <a:srgbClr val="526B79"/>
-                </a:solidFill>
-                <a:latin typeface="Arial"/>
-                <a:ea typeface="Arial"/>
-                <a:cs typeface="Arial"/>
-              </a:defRPr>
-            </a:pPr>
-            <a:r>
-              <a:rPr sz="1350" b="0">
-                <a:solidFill>
-                  <a:srgbClr val="526B79"/>
-                </a:solidFill>
-                <a:latin typeface="Arial"/>
-                <a:ea typeface="Arial"/>
-                <a:cs typeface="Arial"/>
-              </a:rPr>
-              <a:t>Recorded native render. Limits in the notes and README.</a:t>
+              <a:t>This lexical profile remains proposed. Invalid syntax and unsupported coordinate meaning still fail. Coordinate epochs remain deferred.</a:t>
             </a:r>
           </a:p>
         </p:txBody>
@@ -12105,7 +14205,7 @@
     </p:spTree>
     <p:extLst>
       <p:ext uri="{BB962C8B-B14F-4D97-AF65-F5344CB8AC3E}">
-        <p14:creationId xmlns:p14="http://schemas.microsoft.com/office/powerpoint/2010/main" val="1661851679"/>
+        <p14:creationId xmlns:p14="http://schemas.microsoft.com/office/powerpoint/2010/main" val="784430767"/>
       </p:ext>
     </p:extLst>
   </p:cSld>
